--- a/docs/presentacion-defensa-final.pptx
+++ b/docs/presentacion-defensa-final.pptx
@@ -145,7 +145,7 @@
           <p:cNvPr id="2" name="Título 1">
             <a:extLst>
               <a:ext uri="{FF2B5EF4-FFF2-40B4-BE49-F238E27FC236}">
-                <a16:creationId xmlns:a16="http://schemas.microsoft.com/office/drawing/2014/main" id="{8A5EB480-DEC5-C3C4-FC91-56B94A297B09}"/>
+                <a16:creationId xmlns:a16="http://schemas.microsoft.com/office/drawing/2014/main" id="{14520BF6-50DF-2297-F823-27E9AF3C658B}"/>
               </a:ext>
             </a:extLst>
           </p:cNvPr>
@@ -182,7 +182,7 @@
           <p:cNvPr id="3" name="Subtítulo 2">
             <a:extLst>
               <a:ext uri="{FF2B5EF4-FFF2-40B4-BE49-F238E27FC236}">
-                <a16:creationId xmlns:a16="http://schemas.microsoft.com/office/drawing/2014/main" id="{55BB0717-386E-2BAE-689E-01483B08D561}"/>
+                <a16:creationId xmlns:a16="http://schemas.microsoft.com/office/drawing/2014/main" id="{98F46696-B39F-384D-0391-86DA3DD9D885}"/>
               </a:ext>
             </a:extLst>
           </p:cNvPr>
@@ -252,7 +252,7 @@
           <p:cNvPr id="4" name="Marcador de fecha 3">
             <a:extLst>
               <a:ext uri="{FF2B5EF4-FFF2-40B4-BE49-F238E27FC236}">
-                <a16:creationId xmlns:a16="http://schemas.microsoft.com/office/drawing/2014/main" id="{E66B6547-D969-3C7D-7C70-D8187A053A6E}"/>
+                <a16:creationId xmlns:a16="http://schemas.microsoft.com/office/drawing/2014/main" id="{F521A54D-03E2-E814-B8E3-052113C1EB98}"/>
               </a:ext>
             </a:extLst>
           </p:cNvPr>
@@ -268,9 +268,9 @@
           <a:bodyPr/>
           <a:lstStyle/>
           <a:p>
-            <a:fld id="{E9A21FD9-3D2E-4368-8C20-26695743AB37}" type="datetimeFigureOut">
+            <a:fld id="{4C2FCEDC-9044-4CE9-9B98-47C3FC2B7CBE}" type="datetimeFigureOut">
               <a:rPr lang="es-ES" smtClean="0"/>
-              <a:t>26/04/2026</a:t>
+              <a:t>03/05/2026</a:t>
             </a:fld>
             <a:endParaRPr lang="es-ES"/>
           </a:p>
@@ -281,7 +281,7 @@
           <p:cNvPr id="5" name="Marcador de pie de página 4">
             <a:extLst>
               <a:ext uri="{FF2B5EF4-FFF2-40B4-BE49-F238E27FC236}">
-                <a16:creationId xmlns:a16="http://schemas.microsoft.com/office/drawing/2014/main" id="{0AF08FB6-42D1-99BC-250A-5EF422A65A85}"/>
+                <a16:creationId xmlns:a16="http://schemas.microsoft.com/office/drawing/2014/main" id="{0E3FBE31-D78F-CF12-E520-A27FF1218135}"/>
               </a:ext>
             </a:extLst>
           </p:cNvPr>
@@ -306,7 +306,7 @@
           <p:cNvPr id="6" name="Marcador de número de diapositiva 5">
             <a:extLst>
               <a:ext uri="{FF2B5EF4-FFF2-40B4-BE49-F238E27FC236}">
-                <a16:creationId xmlns:a16="http://schemas.microsoft.com/office/drawing/2014/main" id="{BC1BAEDC-6C91-AC94-93DF-F9E045FF5A64}"/>
+                <a16:creationId xmlns:a16="http://schemas.microsoft.com/office/drawing/2014/main" id="{A3E30B18-D605-436F-D91E-DFDED3CBD08E}"/>
               </a:ext>
             </a:extLst>
           </p:cNvPr>
@@ -322,7 +322,7 @@
           <a:bodyPr/>
           <a:lstStyle/>
           <a:p>
-            <a:fld id="{8C9473E1-ACD5-4C35-8A08-9B6197486DC4}" type="slidenum">
+            <a:fld id="{FA455040-64EB-4938-BD0A-2F141374B058}" type="slidenum">
               <a:rPr lang="es-ES" smtClean="0"/>
               <a:t>‹Nº›</a:t>
             </a:fld>
@@ -333,7 +333,7 @@
     </p:spTree>
     <p:extLst>
       <p:ext uri="{BB962C8B-B14F-4D97-AF65-F5344CB8AC3E}">
-        <p14:creationId xmlns:p14="http://schemas.microsoft.com/office/powerpoint/2010/main" val="1571128345"/>
+        <p14:creationId xmlns:p14="http://schemas.microsoft.com/office/powerpoint/2010/main" val="67602867"/>
       </p:ext>
     </p:extLst>
   </p:cSld>
@@ -365,7 +365,7 @@
           <p:cNvPr id="2" name="Título 1">
             <a:extLst>
               <a:ext uri="{FF2B5EF4-FFF2-40B4-BE49-F238E27FC236}">
-                <a16:creationId xmlns:a16="http://schemas.microsoft.com/office/drawing/2014/main" id="{182ED962-0D8C-4A08-AAD8-558308B505CA}"/>
+                <a16:creationId xmlns:a16="http://schemas.microsoft.com/office/drawing/2014/main" id="{3AD5E6A8-1750-5EC9-A393-57EA8E7BBFDF}"/>
               </a:ext>
             </a:extLst>
           </p:cNvPr>
@@ -393,7 +393,7 @@
           <p:cNvPr id="3" name="Marcador de texto vertical 2">
             <a:extLst>
               <a:ext uri="{FF2B5EF4-FFF2-40B4-BE49-F238E27FC236}">
-                <a16:creationId xmlns:a16="http://schemas.microsoft.com/office/drawing/2014/main" id="{4EED9AED-962D-1346-2492-015940118D76}"/>
+                <a16:creationId xmlns:a16="http://schemas.microsoft.com/office/drawing/2014/main" id="{B921C21D-7B88-C5A2-240C-799ECF1059C5}"/>
               </a:ext>
             </a:extLst>
           </p:cNvPr>
@@ -450,7 +450,7 @@
           <p:cNvPr id="4" name="Marcador de fecha 3">
             <a:extLst>
               <a:ext uri="{FF2B5EF4-FFF2-40B4-BE49-F238E27FC236}">
-                <a16:creationId xmlns:a16="http://schemas.microsoft.com/office/drawing/2014/main" id="{4ADD12A7-907D-630B-72BC-375AFA392D10}"/>
+                <a16:creationId xmlns:a16="http://schemas.microsoft.com/office/drawing/2014/main" id="{D2CD7A92-37B5-140F-D025-ECA6E7B455AF}"/>
               </a:ext>
             </a:extLst>
           </p:cNvPr>
@@ -466,9 +466,9 @@
           <a:bodyPr/>
           <a:lstStyle/>
           <a:p>
-            <a:fld id="{E9A21FD9-3D2E-4368-8C20-26695743AB37}" type="datetimeFigureOut">
+            <a:fld id="{4C2FCEDC-9044-4CE9-9B98-47C3FC2B7CBE}" type="datetimeFigureOut">
               <a:rPr lang="es-ES" smtClean="0"/>
-              <a:t>26/04/2026</a:t>
+              <a:t>03/05/2026</a:t>
             </a:fld>
             <a:endParaRPr lang="es-ES"/>
           </a:p>
@@ -479,7 +479,7 @@
           <p:cNvPr id="5" name="Marcador de pie de página 4">
             <a:extLst>
               <a:ext uri="{FF2B5EF4-FFF2-40B4-BE49-F238E27FC236}">
-                <a16:creationId xmlns:a16="http://schemas.microsoft.com/office/drawing/2014/main" id="{99B2E9CE-0D6D-7EAE-C31C-20512F914E48}"/>
+                <a16:creationId xmlns:a16="http://schemas.microsoft.com/office/drawing/2014/main" id="{95A190D1-42A8-A1D8-D443-540E1F49DCF6}"/>
               </a:ext>
             </a:extLst>
           </p:cNvPr>
@@ -504,7 +504,7 @@
           <p:cNvPr id="6" name="Marcador de número de diapositiva 5">
             <a:extLst>
               <a:ext uri="{FF2B5EF4-FFF2-40B4-BE49-F238E27FC236}">
-                <a16:creationId xmlns:a16="http://schemas.microsoft.com/office/drawing/2014/main" id="{5EAF2095-AB5B-669E-9614-2B980E8D0849}"/>
+                <a16:creationId xmlns:a16="http://schemas.microsoft.com/office/drawing/2014/main" id="{A8B18A69-E5F2-DCFE-8ADB-41F850148898}"/>
               </a:ext>
             </a:extLst>
           </p:cNvPr>
@@ -520,7 +520,7 @@
           <a:bodyPr/>
           <a:lstStyle/>
           <a:p>
-            <a:fld id="{8C9473E1-ACD5-4C35-8A08-9B6197486DC4}" type="slidenum">
+            <a:fld id="{FA455040-64EB-4938-BD0A-2F141374B058}" type="slidenum">
               <a:rPr lang="es-ES" smtClean="0"/>
               <a:t>‹Nº›</a:t>
             </a:fld>
@@ -531,7 +531,7 @@
     </p:spTree>
     <p:extLst>
       <p:ext uri="{BB962C8B-B14F-4D97-AF65-F5344CB8AC3E}">
-        <p14:creationId xmlns:p14="http://schemas.microsoft.com/office/powerpoint/2010/main" val="3461546694"/>
+        <p14:creationId xmlns:p14="http://schemas.microsoft.com/office/powerpoint/2010/main" val="1609294027"/>
       </p:ext>
     </p:extLst>
   </p:cSld>
@@ -563,7 +563,7 @@
           <p:cNvPr id="2" name="Título vertical 1">
             <a:extLst>
               <a:ext uri="{FF2B5EF4-FFF2-40B4-BE49-F238E27FC236}">
-                <a16:creationId xmlns:a16="http://schemas.microsoft.com/office/drawing/2014/main" id="{17CD9183-9B69-979E-9BEA-391C0B5930BA}"/>
+                <a16:creationId xmlns:a16="http://schemas.microsoft.com/office/drawing/2014/main" id="{75840964-855F-D0FD-896B-8144F70EA365}"/>
               </a:ext>
             </a:extLst>
           </p:cNvPr>
@@ -596,7 +596,7 @@
           <p:cNvPr id="3" name="Marcador de texto vertical 2">
             <a:extLst>
               <a:ext uri="{FF2B5EF4-FFF2-40B4-BE49-F238E27FC236}">
-                <a16:creationId xmlns:a16="http://schemas.microsoft.com/office/drawing/2014/main" id="{5C82B82F-BD36-B175-8087-F741BF369F1A}"/>
+                <a16:creationId xmlns:a16="http://schemas.microsoft.com/office/drawing/2014/main" id="{A3AE056C-439C-855B-AF51-5A9F29CE6B93}"/>
               </a:ext>
             </a:extLst>
           </p:cNvPr>
@@ -658,7 +658,7 @@
           <p:cNvPr id="4" name="Marcador de fecha 3">
             <a:extLst>
               <a:ext uri="{FF2B5EF4-FFF2-40B4-BE49-F238E27FC236}">
-                <a16:creationId xmlns:a16="http://schemas.microsoft.com/office/drawing/2014/main" id="{0F245ACE-E50D-958D-D7A7-18430EC83477}"/>
+                <a16:creationId xmlns:a16="http://schemas.microsoft.com/office/drawing/2014/main" id="{36BF8A3D-7A2D-6648-D62C-25F6B46289A8}"/>
               </a:ext>
             </a:extLst>
           </p:cNvPr>
@@ -674,9 +674,9 @@
           <a:bodyPr/>
           <a:lstStyle/>
           <a:p>
-            <a:fld id="{E9A21FD9-3D2E-4368-8C20-26695743AB37}" type="datetimeFigureOut">
+            <a:fld id="{4C2FCEDC-9044-4CE9-9B98-47C3FC2B7CBE}" type="datetimeFigureOut">
               <a:rPr lang="es-ES" smtClean="0"/>
-              <a:t>26/04/2026</a:t>
+              <a:t>03/05/2026</a:t>
             </a:fld>
             <a:endParaRPr lang="es-ES"/>
           </a:p>
@@ -687,7 +687,7 @@
           <p:cNvPr id="5" name="Marcador de pie de página 4">
             <a:extLst>
               <a:ext uri="{FF2B5EF4-FFF2-40B4-BE49-F238E27FC236}">
-                <a16:creationId xmlns:a16="http://schemas.microsoft.com/office/drawing/2014/main" id="{9ADF135B-BA58-FB6A-B85D-A48D720D5E5C}"/>
+                <a16:creationId xmlns:a16="http://schemas.microsoft.com/office/drawing/2014/main" id="{DC70276C-43FB-88E4-2086-97342C35C152}"/>
               </a:ext>
             </a:extLst>
           </p:cNvPr>
@@ -712,7 +712,7 @@
           <p:cNvPr id="6" name="Marcador de número de diapositiva 5">
             <a:extLst>
               <a:ext uri="{FF2B5EF4-FFF2-40B4-BE49-F238E27FC236}">
-                <a16:creationId xmlns:a16="http://schemas.microsoft.com/office/drawing/2014/main" id="{5CA8D54A-43FF-EBF0-8AEF-DA38C61E591A}"/>
+                <a16:creationId xmlns:a16="http://schemas.microsoft.com/office/drawing/2014/main" id="{CA31B267-6F1B-18E6-467A-1A3941FF0653}"/>
               </a:ext>
             </a:extLst>
           </p:cNvPr>
@@ -728,7 +728,7 @@
           <a:bodyPr/>
           <a:lstStyle/>
           <a:p>
-            <a:fld id="{8C9473E1-ACD5-4C35-8A08-9B6197486DC4}" type="slidenum">
+            <a:fld id="{FA455040-64EB-4938-BD0A-2F141374B058}" type="slidenum">
               <a:rPr lang="es-ES" smtClean="0"/>
               <a:t>‹Nº›</a:t>
             </a:fld>
@@ -739,7 +739,7 @@
     </p:spTree>
     <p:extLst>
       <p:ext uri="{BB962C8B-B14F-4D97-AF65-F5344CB8AC3E}">
-        <p14:creationId xmlns:p14="http://schemas.microsoft.com/office/powerpoint/2010/main" val="3483083709"/>
+        <p14:creationId xmlns:p14="http://schemas.microsoft.com/office/powerpoint/2010/main" val="2247917887"/>
       </p:ext>
     </p:extLst>
   </p:cSld>
@@ -771,7 +771,7 @@
           <p:cNvPr id="2" name="Título 1">
             <a:extLst>
               <a:ext uri="{FF2B5EF4-FFF2-40B4-BE49-F238E27FC236}">
-                <a16:creationId xmlns:a16="http://schemas.microsoft.com/office/drawing/2014/main" id="{04FFDA04-2776-B5CC-85E3-80C7DD8714BD}"/>
+                <a16:creationId xmlns:a16="http://schemas.microsoft.com/office/drawing/2014/main" id="{CC7F7FB4-1229-D34A-77AF-BF3813789FD9}"/>
               </a:ext>
             </a:extLst>
           </p:cNvPr>
@@ -799,7 +799,7 @@
           <p:cNvPr id="3" name="Marcador de contenido 2">
             <a:extLst>
               <a:ext uri="{FF2B5EF4-FFF2-40B4-BE49-F238E27FC236}">
-                <a16:creationId xmlns:a16="http://schemas.microsoft.com/office/drawing/2014/main" id="{C26C8F6E-756C-AC40-2FC0-8D14D67968DC}"/>
+                <a16:creationId xmlns:a16="http://schemas.microsoft.com/office/drawing/2014/main" id="{863BA5A2-7A07-1376-15A5-6F42E11F6E53}"/>
               </a:ext>
             </a:extLst>
           </p:cNvPr>
@@ -856,7 +856,7 @@
           <p:cNvPr id="4" name="Marcador de fecha 3">
             <a:extLst>
               <a:ext uri="{FF2B5EF4-FFF2-40B4-BE49-F238E27FC236}">
-                <a16:creationId xmlns:a16="http://schemas.microsoft.com/office/drawing/2014/main" id="{3736CB90-7A87-B34E-96E0-ECDFAF56CC7A}"/>
+                <a16:creationId xmlns:a16="http://schemas.microsoft.com/office/drawing/2014/main" id="{C25829E9-04FF-9CE2-3482-CC194A8B1CDE}"/>
               </a:ext>
             </a:extLst>
           </p:cNvPr>
@@ -872,9 +872,9 @@
           <a:bodyPr/>
           <a:lstStyle/>
           <a:p>
-            <a:fld id="{E9A21FD9-3D2E-4368-8C20-26695743AB37}" type="datetimeFigureOut">
+            <a:fld id="{4C2FCEDC-9044-4CE9-9B98-47C3FC2B7CBE}" type="datetimeFigureOut">
               <a:rPr lang="es-ES" smtClean="0"/>
-              <a:t>26/04/2026</a:t>
+              <a:t>03/05/2026</a:t>
             </a:fld>
             <a:endParaRPr lang="es-ES"/>
           </a:p>
@@ -885,7 +885,7 @@
           <p:cNvPr id="5" name="Marcador de pie de página 4">
             <a:extLst>
               <a:ext uri="{FF2B5EF4-FFF2-40B4-BE49-F238E27FC236}">
-                <a16:creationId xmlns:a16="http://schemas.microsoft.com/office/drawing/2014/main" id="{808AD3EC-5443-A82A-0065-F7B72D0BBC26}"/>
+                <a16:creationId xmlns:a16="http://schemas.microsoft.com/office/drawing/2014/main" id="{159C5EA7-77E5-90A3-24E3-5C5FD17FE594}"/>
               </a:ext>
             </a:extLst>
           </p:cNvPr>
@@ -910,7 +910,7 @@
           <p:cNvPr id="6" name="Marcador de número de diapositiva 5">
             <a:extLst>
               <a:ext uri="{FF2B5EF4-FFF2-40B4-BE49-F238E27FC236}">
-                <a16:creationId xmlns:a16="http://schemas.microsoft.com/office/drawing/2014/main" id="{423D0EE1-C49F-F382-541A-12E879E483DC}"/>
+                <a16:creationId xmlns:a16="http://schemas.microsoft.com/office/drawing/2014/main" id="{7FDFEBC3-F147-ADAF-67F6-781A244D8083}"/>
               </a:ext>
             </a:extLst>
           </p:cNvPr>
@@ -926,7 +926,7 @@
           <a:bodyPr/>
           <a:lstStyle/>
           <a:p>
-            <a:fld id="{8C9473E1-ACD5-4C35-8A08-9B6197486DC4}" type="slidenum">
+            <a:fld id="{FA455040-64EB-4938-BD0A-2F141374B058}" type="slidenum">
               <a:rPr lang="es-ES" smtClean="0"/>
               <a:t>‹Nº›</a:t>
             </a:fld>
@@ -937,7 +937,7 @@
     </p:spTree>
     <p:extLst>
       <p:ext uri="{BB962C8B-B14F-4D97-AF65-F5344CB8AC3E}">
-        <p14:creationId xmlns:p14="http://schemas.microsoft.com/office/powerpoint/2010/main" val="1844142941"/>
+        <p14:creationId xmlns:p14="http://schemas.microsoft.com/office/powerpoint/2010/main" val="1386335863"/>
       </p:ext>
     </p:extLst>
   </p:cSld>
@@ -969,7 +969,7 @@
           <p:cNvPr id="2" name="Título 1">
             <a:extLst>
               <a:ext uri="{FF2B5EF4-FFF2-40B4-BE49-F238E27FC236}">
-                <a16:creationId xmlns:a16="http://schemas.microsoft.com/office/drawing/2014/main" id="{0997D86D-619D-25E3-B00A-DE41A85CF299}"/>
+                <a16:creationId xmlns:a16="http://schemas.microsoft.com/office/drawing/2014/main" id="{DE5414F1-2CF3-271D-507D-0CD25B56D05A}"/>
               </a:ext>
             </a:extLst>
           </p:cNvPr>
@@ -1006,7 +1006,7 @@
           <p:cNvPr id="3" name="Marcador de texto 2">
             <a:extLst>
               <a:ext uri="{FF2B5EF4-FFF2-40B4-BE49-F238E27FC236}">
-                <a16:creationId xmlns:a16="http://schemas.microsoft.com/office/drawing/2014/main" id="{C34E0891-BE16-CEB3-4DC2-B35A29BB3B86}"/>
+                <a16:creationId xmlns:a16="http://schemas.microsoft.com/office/drawing/2014/main" id="{46A8B74D-C2AD-1A1D-E067-0CEAE4B24D78}"/>
               </a:ext>
             </a:extLst>
           </p:cNvPr>
@@ -1131,7 +1131,7 @@
           <p:cNvPr id="4" name="Marcador de fecha 3">
             <a:extLst>
               <a:ext uri="{FF2B5EF4-FFF2-40B4-BE49-F238E27FC236}">
-                <a16:creationId xmlns:a16="http://schemas.microsoft.com/office/drawing/2014/main" id="{2F6EC919-9F49-1EEA-5867-7CE18DAB7834}"/>
+                <a16:creationId xmlns:a16="http://schemas.microsoft.com/office/drawing/2014/main" id="{4504D0B2-F503-CE55-82B7-4C0965C717D2}"/>
               </a:ext>
             </a:extLst>
           </p:cNvPr>
@@ -1147,9 +1147,9 @@
           <a:bodyPr/>
           <a:lstStyle/>
           <a:p>
-            <a:fld id="{E9A21FD9-3D2E-4368-8C20-26695743AB37}" type="datetimeFigureOut">
+            <a:fld id="{4C2FCEDC-9044-4CE9-9B98-47C3FC2B7CBE}" type="datetimeFigureOut">
               <a:rPr lang="es-ES" smtClean="0"/>
-              <a:t>26/04/2026</a:t>
+              <a:t>03/05/2026</a:t>
             </a:fld>
             <a:endParaRPr lang="es-ES"/>
           </a:p>
@@ -1160,7 +1160,7 @@
           <p:cNvPr id="5" name="Marcador de pie de página 4">
             <a:extLst>
               <a:ext uri="{FF2B5EF4-FFF2-40B4-BE49-F238E27FC236}">
-                <a16:creationId xmlns:a16="http://schemas.microsoft.com/office/drawing/2014/main" id="{0ED8D286-60E6-5B2C-130B-29EE9910C5D7}"/>
+                <a16:creationId xmlns:a16="http://schemas.microsoft.com/office/drawing/2014/main" id="{E53D71DB-C58C-48D1-0AB9-6B08DDB678BA}"/>
               </a:ext>
             </a:extLst>
           </p:cNvPr>
@@ -1185,7 +1185,7 @@
           <p:cNvPr id="6" name="Marcador de número de diapositiva 5">
             <a:extLst>
               <a:ext uri="{FF2B5EF4-FFF2-40B4-BE49-F238E27FC236}">
-                <a16:creationId xmlns:a16="http://schemas.microsoft.com/office/drawing/2014/main" id="{6FF1E479-BCB7-0C9F-66F5-EA0A16EA8C19}"/>
+                <a16:creationId xmlns:a16="http://schemas.microsoft.com/office/drawing/2014/main" id="{564B6DB3-904F-D11F-1501-C456D1A764BF}"/>
               </a:ext>
             </a:extLst>
           </p:cNvPr>
@@ -1201,7 +1201,7 @@
           <a:bodyPr/>
           <a:lstStyle/>
           <a:p>
-            <a:fld id="{8C9473E1-ACD5-4C35-8A08-9B6197486DC4}" type="slidenum">
+            <a:fld id="{FA455040-64EB-4938-BD0A-2F141374B058}" type="slidenum">
               <a:rPr lang="es-ES" smtClean="0"/>
               <a:t>‹Nº›</a:t>
             </a:fld>
@@ -1212,7 +1212,7 @@
     </p:spTree>
     <p:extLst>
       <p:ext uri="{BB962C8B-B14F-4D97-AF65-F5344CB8AC3E}">
-        <p14:creationId xmlns:p14="http://schemas.microsoft.com/office/powerpoint/2010/main" val="2329922855"/>
+        <p14:creationId xmlns:p14="http://schemas.microsoft.com/office/powerpoint/2010/main" val="1690316791"/>
       </p:ext>
     </p:extLst>
   </p:cSld>
@@ -1244,7 +1244,7 @@
           <p:cNvPr id="2" name="Título 1">
             <a:extLst>
               <a:ext uri="{FF2B5EF4-FFF2-40B4-BE49-F238E27FC236}">
-                <a16:creationId xmlns:a16="http://schemas.microsoft.com/office/drawing/2014/main" id="{AB997114-6B15-1EBB-E423-63656AC95A65}"/>
+                <a16:creationId xmlns:a16="http://schemas.microsoft.com/office/drawing/2014/main" id="{DBE663BC-5B9E-9C07-627C-337DADEF8BEB}"/>
               </a:ext>
             </a:extLst>
           </p:cNvPr>
@@ -1272,7 +1272,7 @@
           <p:cNvPr id="3" name="Marcador de contenido 2">
             <a:extLst>
               <a:ext uri="{FF2B5EF4-FFF2-40B4-BE49-F238E27FC236}">
-                <a16:creationId xmlns:a16="http://schemas.microsoft.com/office/drawing/2014/main" id="{05D041A0-997C-8C58-5C1B-FA2A62237AA1}"/>
+                <a16:creationId xmlns:a16="http://schemas.microsoft.com/office/drawing/2014/main" id="{D705ED80-D4D4-9750-E78C-80BFC9A5E5B6}"/>
               </a:ext>
             </a:extLst>
           </p:cNvPr>
@@ -1334,7 +1334,7 @@
           <p:cNvPr id="4" name="Marcador de contenido 3">
             <a:extLst>
               <a:ext uri="{FF2B5EF4-FFF2-40B4-BE49-F238E27FC236}">
-                <a16:creationId xmlns:a16="http://schemas.microsoft.com/office/drawing/2014/main" id="{63506DD0-4742-7C02-6C84-F9E6859FD616}"/>
+                <a16:creationId xmlns:a16="http://schemas.microsoft.com/office/drawing/2014/main" id="{8904686E-C7BC-9060-88D3-0CC035F727F2}"/>
               </a:ext>
             </a:extLst>
           </p:cNvPr>
@@ -1396,7 +1396,7 @@
           <p:cNvPr id="5" name="Marcador de fecha 4">
             <a:extLst>
               <a:ext uri="{FF2B5EF4-FFF2-40B4-BE49-F238E27FC236}">
-                <a16:creationId xmlns:a16="http://schemas.microsoft.com/office/drawing/2014/main" id="{012A0A34-3C7C-C6CC-6476-B47EE61E4AA7}"/>
+                <a16:creationId xmlns:a16="http://schemas.microsoft.com/office/drawing/2014/main" id="{BFC2EDC6-CF57-00CB-A202-1114FDC2D5AF}"/>
               </a:ext>
             </a:extLst>
           </p:cNvPr>
@@ -1412,9 +1412,9 @@
           <a:bodyPr/>
           <a:lstStyle/>
           <a:p>
-            <a:fld id="{E9A21FD9-3D2E-4368-8C20-26695743AB37}" type="datetimeFigureOut">
+            <a:fld id="{4C2FCEDC-9044-4CE9-9B98-47C3FC2B7CBE}" type="datetimeFigureOut">
               <a:rPr lang="es-ES" smtClean="0"/>
-              <a:t>26/04/2026</a:t>
+              <a:t>03/05/2026</a:t>
             </a:fld>
             <a:endParaRPr lang="es-ES"/>
           </a:p>
@@ -1425,7 +1425,7 @@
           <p:cNvPr id="6" name="Marcador de pie de página 5">
             <a:extLst>
               <a:ext uri="{FF2B5EF4-FFF2-40B4-BE49-F238E27FC236}">
-                <a16:creationId xmlns:a16="http://schemas.microsoft.com/office/drawing/2014/main" id="{8BCBE9DF-C08D-B4BE-C2BB-93842A22A14F}"/>
+                <a16:creationId xmlns:a16="http://schemas.microsoft.com/office/drawing/2014/main" id="{83CB32A1-EF88-7138-A04F-D0878B260890}"/>
               </a:ext>
             </a:extLst>
           </p:cNvPr>
@@ -1450,7 +1450,7 @@
           <p:cNvPr id="7" name="Marcador de número de diapositiva 6">
             <a:extLst>
               <a:ext uri="{FF2B5EF4-FFF2-40B4-BE49-F238E27FC236}">
-                <a16:creationId xmlns:a16="http://schemas.microsoft.com/office/drawing/2014/main" id="{5447A1D6-CD66-A9C6-77FF-D6083E1A3974}"/>
+                <a16:creationId xmlns:a16="http://schemas.microsoft.com/office/drawing/2014/main" id="{2999C9EC-4AA9-B1CB-EF06-AB35323EB721}"/>
               </a:ext>
             </a:extLst>
           </p:cNvPr>
@@ -1466,7 +1466,7 @@
           <a:bodyPr/>
           <a:lstStyle/>
           <a:p>
-            <a:fld id="{8C9473E1-ACD5-4C35-8A08-9B6197486DC4}" type="slidenum">
+            <a:fld id="{FA455040-64EB-4938-BD0A-2F141374B058}" type="slidenum">
               <a:rPr lang="es-ES" smtClean="0"/>
               <a:t>‹Nº›</a:t>
             </a:fld>
@@ -1477,7 +1477,7 @@
     </p:spTree>
     <p:extLst>
       <p:ext uri="{BB962C8B-B14F-4D97-AF65-F5344CB8AC3E}">
-        <p14:creationId xmlns:p14="http://schemas.microsoft.com/office/powerpoint/2010/main" val="817680457"/>
+        <p14:creationId xmlns:p14="http://schemas.microsoft.com/office/powerpoint/2010/main" val="3570076365"/>
       </p:ext>
     </p:extLst>
   </p:cSld>
@@ -1509,7 +1509,7 @@
           <p:cNvPr id="2" name="Título 1">
             <a:extLst>
               <a:ext uri="{FF2B5EF4-FFF2-40B4-BE49-F238E27FC236}">
-                <a16:creationId xmlns:a16="http://schemas.microsoft.com/office/drawing/2014/main" id="{F3B3FA77-43CC-FB96-9C32-E8B9552BA627}"/>
+                <a16:creationId xmlns:a16="http://schemas.microsoft.com/office/drawing/2014/main" id="{E03CC908-E5C1-CEF5-A879-93634D35393C}"/>
               </a:ext>
             </a:extLst>
           </p:cNvPr>
@@ -1542,7 +1542,7 @@
           <p:cNvPr id="3" name="Marcador de texto 2">
             <a:extLst>
               <a:ext uri="{FF2B5EF4-FFF2-40B4-BE49-F238E27FC236}">
-                <a16:creationId xmlns:a16="http://schemas.microsoft.com/office/drawing/2014/main" id="{EE73F12C-0345-A12A-4CBD-538D4340B533}"/>
+                <a16:creationId xmlns:a16="http://schemas.microsoft.com/office/drawing/2014/main" id="{B826B4F6-DB26-7919-9F13-3746D56F8077}"/>
               </a:ext>
             </a:extLst>
           </p:cNvPr>
@@ -1613,7 +1613,7 @@
           <p:cNvPr id="4" name="Marcador de contenido 3">
             <a:extLst>
               <a:ext uri="{FF2B5EF4-FFF2-40B4-BE49-F238E27FC236}">
-                <a16:creationId xmlns:a16="http://schemas.microsoft.com/office/drawing/2014/main" id="{29888DB4-B17B-DC89-4260-9C935D3EE52D}"/>
+                <a16:creationId xmlns:a16="http://schemas.microsoft.com/office/drawing/2014/main" id="{90B83327-6C33-B4F1-B3B2-6DC44117ECC3}"/>
               </a:ext>
             </a:extLst>
           </p:cNvPr>
@@ -1675,7 +1675,7 @@
           <p:cNvPr id="5" name="Marcador de texto 4">
             <a:extLst>
               <a:ext uri="{FF2B5EF4-FFF2-40B4-BE49-F238E27FC236}">
-                <a16:creationId xmlns:a16="http://schemas.microsoft.com/office/drawing/2014/main" id="{1F36DB20-2213-20BD-8D2B-0CFB60B03B0F}"/>
+                <a16:creationId xmlns:a16="http://schemas.microsoft.com/office/drawing/2014/main" id="{8AC3ADDE-805C-EE97-782B-07FB53D319D7}"/>
               </a:ext>
             </a:extLst>
           </p:cNvPr>
@@ -1746,7 +1746,7 @@
           <p:cNvPr id="6" name="Marcador de contenido 5">
             <a:extLst>
               <a:ext uri="{FF2B5EF4-FFF2-40B4-BE49-F238E27FC236}">
-                <a16:creationId xmlns:a16="http://schemas.microsoft.com/office/drawing/2014/main" id="{2BB80C80-5A3D-4BCC-3DC7-97E7F554F35E}"/>
+                <a16:creationId xmlns:a16="http://schemas.microsoft.com/office/drawing/2014/main" id="{CEB31B4A-A0A3-C5FB-7C4B-EEE5C4FEAD85}"/>
               </a:ext>
             </a:extLst>
           </p:cNvPr>
@@ -1808,7 +1808,7 @@
           <p:cNvPr id="7" name="Marcador de fecha 6">
             <a:extLst>
               <a:ext uri="{FF2B5EF4-FFF2-40B4-BE49-F238E27FC236}">
-                <a16:creationId xmlns:a16="http://schemas.microsoft.com/office/drawing/2014/main" id="{353EC15E-6989-29F4-C877-9963A86439F8}"/>
+                <a16:creationId xmlns:a16="http://schemas.microsoft.com/office/drawing/2014/main" id="{4408E452-08C9-4EE7-B468-49F265E99194}"/>
               </a:ext>
             </a:extLst>
           </p:cNvPr>
@@ -1824,9 +1824,9 @@
           <a:bodyPr/>
           <a:lstStyle/>
           <a:p>
-            <a:fld id="{E9A21FD9-3D2E-4368-8C20-26695743AB37}" type="datetimeFigureOut">
+            <a:fld id="{4C2FCEDC-9044-4CE9-9B98-47C3FC2B7CBE}" type="datetimeFigureOut">
               <a:rPr lang="es-ES" smtClean="0"/>
-              <a:t>26/04/2026</a:t>
+              <a:t>03/05/2026</a:t>
             </a:fld>
             <a:endParaRPr lang="es-ES"/>
           </a:p>
@@ -1837,7 +1837,7 @@
           <p:cNvPr id="8" name="Marcador de pie de página 7">
             <a:extLst>
               <a:ext uri="{FF2B5EF4-FFF2-40B4-BE49-F238E27FC236}">
-                <a16:creationId xmlns:a16="http://schemas.microsoft.com/office/drawing/2014/main" id="{68BCE858-5138-0BF9-2737-32BEC6554D6B}"/>
+                <a16:creationId xmlns:a16="http://schemas.microsoft.com/office/drawing/2014/main" id="{47A68166-41F9-CB59-BD97-57372E5CFBDB}"/>
               </a:ext>
             </a:extLst>
           </p:cNvPr>
@@ -1862,7 +1862,7 @@
           <p:cNvPr id="9" name="Marcador de número de diapositiva 8">
             <a:extLst>
               <a:ext uri="{FF2B5EF4-FFF2-40B4-BE49-F238E27FC236}">
-                <a16:creationId xmlns:a16="http://schemas.microsoft.com/office/drawing/2014/main" id="{152A129B-1B94-183F-5467-AA28581CB304}"/>
+                <a16:creationId xmlns:a16="http://schemas.microsoft.com/office/drawing/2014/main" id="{34D1EC27-8CDD-BA3D-A6AE-BE6AFD289E63}"/>
               </a:ext>
             </a:extLst>
           </p:cNvPr>
@@ -1878,7 +1878,7 @@
           <a:bodyPr/>
           <a:lstStyle/>
           <a:p>
-            <a:fld id="{8C9473E1-ACD5-4C35-8A08-9B6197486DC4}" type="slidenum">
+            <a:fld id="{FA455040-64EB-4938-BD0A-2F141374B058}" type="slidenum">
               <a:rPr lang="es-ES" smtClean="0"/>
               <a:t>‹Nº›</a:t>
             </a:fld>
@@ -1889,7 +1889,7 @@
     </p:spTree>
     <p:extLst>
       <p:ext uri="{BB962C8B-B14F-4D97-AF65-F5344CB8AC3E}">
-        <p14:creationId xmlns:p14="http://schemas.microsoft.com/office/powerpoint/2010/main" val="4279236031"/>
+        <p14:creationId xmlns:p14="http://schemas.microsoft.com/office/powerpoint/2010/main" val="350675883"/>
       </p:ext>
     </p:extLst>
   </p:cSld>
@@ -1921,7 +1921,7 @@
           <p:cNvPr id="2" name="Título 1">
             <a:extLst>
               <a:ext uri="{FF2B5EF4-FFF2-40B4-BE49-F238E27FC236}">
-                <a16:creationId xmlns:a16="http://schemas.microsoft.com/office/drawing/2014/main" id="{B2670B23-6655-4BDB-082D-AADE1FC6A924}"/>
+                <a16:creationId xmlns:a16="http://schemas.microsoft.com/office/drawing/2014/main" id="{C9E85820-A6F7-7243-B57B-7332B33C90CA}"/>
               </a:ext>
             </a:extLst>
           </p:cNvPr>
@@ -1949,7 +1949,7 @@
           <p:cNvPr id="3" name="Marcador de fecha 2">
             <a:extLst>
               <a:ext uri="{FF2B5EF4-FFF2-40B4-BE49-F238E27FC236}">
-                <a16:creationId xmlns:a16="http://schemas.microsoft.com/office/drawing/2014/main" id="{261962D4-D76F-9075-6177-ED404CA37F9C}"/>
+                <a16:creationId xmlns:a16="http://schemas.microsoft.com/office/drawing/2014/main" id="{7E0154A4-5BC7-6EB6-D6B1-527BD0398C34}"/>
               </a:ext>
             </a:extLst>
           </p:cNvPr>
@@ -1965,9 +1965,9 @@
           <a:bodyPr/>
           <a:lstStyle/>
           <a:p>
-            <a:fld id="{E9A21FD9-3D2E-4368-8C20-26695743AB37}" type="datetimeFigureOut">
+            <a:fld id="{4C2FCEDC-9044-4CE9-9B98-47C3FC2B7CBE}" type="datetimeFigureOut">
               <a:rPr lang="es-ES" smtClean="0"/>
-              <a:t>26/04/2026</a:t>
+              <a:t>03/05/2026</a:t>
             </a:fld>
             <a:endParaRPr lang="es-ES"/>
           </a:p>
@@ -1978,7 +1978,7 @@
           <p:cNvPr id="4" name="Marcador de pie de página 3">
             <a:extLst>
               <a:ext uri="{FF2B5EF4-FFF2-40B4-BE49-F238E27FC236}">
-                <a16:creationId xmlns:a16="http://schemas.microsoft.com/office/drawing/2014/main" id="{D429EF47-7C74-6D1C-FD59-AAB40BF146B7}"/>
+                <a16:creationId xmlns:a16="http://schemas.microsoft.com/office/drawing/2014/main" id="{7CB8E482-2611-E330-DE3B-302B164EAD00}"/>
               </a:ext>
             </a:extLst>
           </p:cNvPr>
@@ -2003,7 +2003,7 @@
           <p:cNvPr id="5" name="Marcador de número de diapositiva 4">
             <a:extLst>
               <a:ext uri="{FF2B5EF4-FFF2-40B4-BE49-F238E27FC236}">
-                <a16:creationId xmlns:a16="http://schemas.microsoft.com/office/drawing/2014/main" id="{236A5273-ADB8-8A1D-B65C-2C400A2098C2}"/>
+                <a16:creationId xmlns:a16="http://schemas.microsoft.com/office/drawing/2014/main" id="{15010C12-ABDF-64F8-9A2F-DB978E624999}"/>
               </a:ext>
             </a:extLst>
           </p:cNvPr>
@@ -2019,7 +2019,7 @@
           <a:bodyPr/>
           <a:lstStyle/>
           <a:p>
-            <a:fld id="{8C9473E1-ACD5-4C35-8A08-9B6197486DC4}" type="slidenum">
+            <a:fld id="{FA455040-64EB-4938-BD0A-2F141374B058}" type="slidenum">
               <a:rPr lang="es-ES" smtClean="0"/>
               <a:t>‹Nº›</a:t>
             </a:fld>
@@ -2030,7 +2030,7 @@
     </p:spTree>
     <p:extLst>
       <p:ext uri="{BB962C8B-B14F-4D97-AF65-F5344CB8AC3E}">
-        <p14:creationId xmlns:p14="http://schemas.microsoft.com/office/powerpoint/2010/main" val="2070411445"/>
+        <p14:creationId xmlns:p14="http://schemas.microsoft.com/office/powerpoint/2010/main" val="1224215804"/>
       </p:ext>
     </p:extLst>
   </p:cSld>
@@ -2062,7 +2062,7 @@
           <p:cNvPr id="2" name="Marcador de fecha 1">
             <a:extLst>
               <a:ext uri="{FF2B5EF4-FFF2-40B4-BE49-F238E27FC236}">
-                <a16:creationId xmlns:a16="http://schemas.microsoft.com/office/drawing/2014/main" id="{E3047F5C-54F4-A516-2859-8BC1A96613EB}"/>
+                <a16:creationId xmlns:a16="http://schemas.microsoft.com/office/drawing/2014/main" id="{3EACCB39-82B8-8C9F-06E2-22D517129A11}"/>
               </a:ext>
             </a:extLst>
           </p:cNvPr>
@@ -2078,9 +2078,9 @@
           <a:bodyPr/>
           <a:lstStyle/>
           <a:p>
-            <a:fld id="{E9A21FD9-3D2E-4368-8C20-26695743AB37}" type="datetimeFigureOut">
+            <a:fld id="{4C2FCEDC-9044-4CE9-9B98-47C3FC2B7CBE}" type="datetimeFigureOut">
               <a:rPr lang="es-ES" smtClean="0"/>
-              <a:t>26/04/2026</a:t>
+              <a:t>03/05/2026</a:t>
             </a:fld>
             <a:endParaRPr lang="es-ES"/>
           </a:p>
@@ -2091,7 +2091,7 @@
           <p:cNvPr id="3" name="Marcador de pie de página 2">
             <a:extLst>
               <a:ext uri="{FF2B5EF4-FFF2-40B4-BE49-F238E27FC236}">
-                <a16:creationId xmlns:a16="http://schemas.microsoft.com/office/drawing/2014/main" id="{668089C3-1A26-6AB3-A988-939B09B615C9}"/>
+                <a16:creationId xmlns:a16="http://schemas.microsoft.com/office/drawing/2014/main" id="{0D9201FD-ED74-2DBA-1AA8-C4A007550BCC}"/>
               </a:ext>
             </a:extLst>
           </p:cNvPr>
@@ -2116,7 +2116,7 @@
           <p:cNvPr id="4" name="Marcador de número de diapositiva 3">
             <a:extLst>
               <a:ext uri="{FF2B5EF4-FFF2-40B4-BE49-F238E27FC236}">
-                <a16:creationId xmlns:a16="http://schemas.microsoft.com/office/drawing/2014/main" id="{A8CDF64B-0F25-8B14-746B-15B4D1AD7C61}"/>
+                <a16:creationId xmlns:a16="http://schemas.microsoft.com/office/drawing/2014/main" id="{24D3BAC7-93A7-5672-D1C5-E3E71F032DCB}"/>
               </a:ext>
             </a:extLst>
           </p:cNvPr>
@@ -2132,7 +2132,7 @@
           <a:bodyPr/>
           <a:lstStyle/>
           <a:p>
-            <a:fld id="{8C9473E1-ACD5-4C35-8A08-9B6197486DC4}" type="slidenum">
+            <a:fld id="{FA455040-64EB-4938-BD0A-2F141374B058}" type="slidenum">
               <a:rPr lang="es-ES" smtClean="0"/>
               <a:t>‹Nº›</a:t>
             </a:fld>
@@ -2143,7 +2143,7 @@
     </p:spTree>
     <p:extLst>
       <p:ext uri="{BB962C8B-B14F-4D97-AF65-F5344CB8AC3E}">
-        <p14:creationId xmlns:p14="http://schemas.microsoft.com/office/powerpoint/2010/main" val="594007607"/>
+        <p14:creationId xmlns:p14="http://schemas.microsoft.com/office/powerpoint/2010/main" val="4054716001"/>
       </p:ext>
     </p:extLst>
   </p:cSld>
@@ -2175,7 +2175,7 @@
           <p:cNvPr id="2" name="Título 1">
             <a:extLst>
               <a:ext uri="{FF2B5EF4-FFF2-40B4-BE49-F238E27FC236}">
-                <a16:creationId xmlns:a16="http://schemas.microsoft.com/office/drawing/2014/main" id="{2067B5C6-2F3F-4B8F-1318-00895920FFD2}"/>
+                <a16:creationId xmlns:a16="http://schemas.microsoft.com/office/drawing/2014/main" id="{C0EDB4C5-3ECF-6920-7B36-DF068E9BD24F}"/>
               </a:ext>
             </a:extLst>
           </p:cNvPr>
@@ -2212,7 +2212,7 @@
           <p:cNvPr id="3" name="Marcador de contenido 2">
             <a:extLst>
               <a:ext uri="{FF2B5EF4-FFF2-40B4-BE49-F238E27FC236}">
-                <a16:creationId xmlns:a16="http://schemas.microsoft.com/office/drawing/2014/main" id="{DEFA258A-8838-D586-ECAB-040892484C84}"/>
+                <a16:creationId xmlns:a16="http://schemas.microsoft.com/office/drawing/2014/main" id="{572392A1-B3B9-720F-3DB6-14F60160E8EB}"/>
               </a:ext>
             </a:extLst>
           </p:cNvPr>
@@ -2302,7 +2302,7 @@
           <p:cNvPr id="4" name="Marcador de texto 3">
             <a:extLst>
               <a:ext uri="{FF2B5EF4-FFF2-40B4-BE49-F238E27FC236}">
-                <a16:creationId xmlns:a16="http://schemas.microsoft.com/office/drawing/2014/main" id="{ABC00231-3927-2760-A0E0-A17E70E3B15D}"/>
+                <a16:creationId xmlns:a16="http://schemas.microsoft.com/office/drawing/2014/main" id="{7734D3AD-E46F-6EC2-F46C-2FF7B30C6994}"/>
               </a:ext>
             </a:extLst>
           </p:cNvPr>
@@ -2373,7 +2373,7 @@
           <p:cNvPr id="5" name="Marcador de fecha 4">
             <a:extLst>
               <a:ext uri="{FF2B5EF4-FFF2-40B4-BE49-F238E27FC236}">
-                <a16:creationId xmlns:a16="http://schemas.microsoft.com/office/drawing/2014/main" id="{2860C513-F127-20CC-D608-D88B6EC53A35}"/>
+                <a16:creationId xmlns:a16="http://schemas.microsoft.com/office/drawing/2014/main" id="{FB14517E-B3BD-0D3C-6A94-3B90219143DF}"/>
               </a:ext>
             </a:extLst>
           </p:cNvPr>
@@ -2389,9 +2389,9 @@
           <a:bodyPr/>
           <a:lstStyle/>
           <a:p>
-            <a:fld id="{E9A21FD9-3D2E-4368-8C20-26695743AB37}" type="datetimeFigureOut">
+            <a:fld id="{4C2FCEDC-9044-4CE9-9B98-47C3FC2B7CBE}" type="datetimeFigureOut">
               <a:rPr lang="es-ES" smtClean="0"/>
-              <a:t>26/04/2026</a:t>
+              <a:t>03/05/2026</a:t>
             </a:fld>
             <a:endParaRPr lang="es-ES"/>
           </a:p>
@@ -2402,7 +2402,7 @@
           <p:cNvPr id="6" name="Marcador de pie de página 5">
             <a:extLst>
               <a:ext uri="{FF2B5EF4-FFF2-40B4-BE49-F238E27FC236}">
-                <a16:creationId xmlns:a16="http://schemas.microsoft.com/office/drawing/2014/main" id="{93CD3B2C-CEC7-0C65-AA1B-8E576AFB538C}"/>
+                <a16:creationId xmlns:a16="http://schemas.microsoft.com/office/drawing/2014/main" id="{DCEF152B-2711-C76A-7FF2-44C9674FE403}"/>
               </a:ext>
             </a:extLst>
           </p:cNvPr>
@@ -2427,7 +2427,7 @@
           <p:cNvPr id="7" name="Marcador de número de diapositiva 6">
             <a:extLst>
               <a:ext uri="{FF2B5EF4-FFF2-40B4-BE49-F238E27FC236}">
-                <a16:creationId xmlns:a16="http://schemas.microsoft.com/office/drawing/2014/main" id="{01165E22-7BD0-7019-3050-390FB9A4C195}"/>
+                <a16:creationId xmlns:a16="http://schemas.microsoft.com/office/drawing/2014/main" id="{D4FFDE10-204E-F3EF-2071-1B56E88BDE2A}"/>
               </a:ext>
             </a:extLst>
           </p:cNvPr>
@@ -2443,7 +2443,7 @@
           <a:bodyPr/>
           <a:lstStyle/>
           <a:p>
-            <a:fld id="{8C9473E1-ACD5-4C35-8A08-9B6197486DC4}" type="slidenum">
+            <a:fld id="{FA455040-64EB-4938-BD0A-2F141374B058}" type="slidenum">
               <a:rPr lang="es-ES" smtClean="0"/>
               <a:t>‹Nº›</a:t>
             </a:fld>
@@ -2454,7 +2454,7 @@
     </p:spTree>
     <p:extLst>
       <p:ext uri="{BB962C8B-B14F-4D97-AF65-F5344CB8AC3E}">
-        <p14:creationId xmlns:p14="http://schemas.microsoft.com/office/powerpoint/2010/main" val="1732418181"/>
+        <p14:creationId xmlns:p14="http://schemas.microsoft.com/office/powerpoint/2010/main" val="3998045903"/>
       </p:ext>
     </p:extLst>
   </p:cSld>
@@ -2486,7 +2486,7 @@
           <p:cNvPr id="2" name="Título 1">
             <a:extLst>
               <a:ext uri="{FF2B5EF4-FFF2-40B4-BE49-F238E27FC236}">
-                <a16:creationId xmlns:a16="http://schemas.microsoft.com/office/drawing/2014/main" id="{8E3F31E4-C35B-4424-11B1-ABB821BD60C3}"/>
+                <a16:creationId xmlns:a16="http://schemas.microsoft.com/office/drawing/2014/main" id="{3AA8CF42-36BB-9334-F14E-4D949FBAD8BC}"/>
               </a:ext>
             </a:extLst>
           </p:cNvPr>
@@ -2523,7 +2523,7 @@
           <p:cNvPr id="3" name="Marcador de posición de imagen 2">
             <a:extLst>
               <a:ext uri="{FF2B5EF4-FFF2-40B4-BE49-F238E27FC236}">
-                <a16:creationId xmlns:a16="http://schemas.microsoft.com/office/drawing/2014/main" id="{69F6A52B-66A3-3130-24E3-8762E98BE185}"/>
+                <a16:creationId xmlns:a16="http://schemas.microsoft.com/office/drawing/2014/main" id="{26BE6D79-08C1-93E5-B9DB-F06661E980F1}"/>
               </a:ext>
             </a:extLst>
           </p:cNvPr>
@@ -2590,7 +2590,7 @@
           <p:cNvPr id="4" name="Marcador de texto 3">
             <a:extLst>
               <a:ext uri="{FF2B5EF4-FFF2-40B4-BE49-F238E27FC236}">
-                <a16:creationId xmlns:a16="http://schemas.microsoft.com/office/drawing/2014/main" id="{0495D7D6-65C1-B59E-8BA3-F4170CAA0970}"/>
+                <a16:creationId xmlns:a16="http://schemas.microsoft.com/office/drawing/2014/main" id="{DF8E9D0B-0273-71E5-0CF8-EA4D093947AE}"/>
               </a:ext>
             </a:extLst>
           </p:cNvPr>
@@ -2661,7 +2661,7 @@
           <p:cNvPr id="5" name="Marcador de fecha 4">
             <a:extLst>
               <a:ext uri="{FF2B5EF4-FFF2-40B4-BE49-F238E27FC236}">
-                <a16:creationId xmlns:a16="http://schemas.microsoft.com/office/drawing/2014/main" id="{B19DB33F-B765-D7A9-3A73-45B3DBECAE14}"/>
+                <a16:creationId xmlns:a16="http://schemas.microsoft.com/office/drawing/2014/main" id="{4A3FEBCA-709F-400A-4481-04364F16A33F}"/>
               </a:ext>
             </a:extLst>
           </p:cNvPr>
@@ -2677,9 +2677,9 @@
           <a:bodyPr/>
           <a:lstStyle/>
           <a:p>
-            <a:fld id="{E9A21FD9-3D2E-4368-8C20-26695743AB37}" type="datetimeFigureOut">
+            <a:fld id="{4C2FCEDC-9044-4CE9-9B98-47C3FC2B7CBE}" type="datetimeFigureOut">
               <a:rPr lang="es-ES" smtClean="0"/>
-              <a:t>26/04/2026</a:t>
+              <a:t>03/05/2026</a:t>
             </a:fld>
             <a:endParaRPr lang="es-ES"/>
           </a:p>
@@ -2690,7 +2690,7 @@
           <p:cNvPr id="6" name="Marcador de pie de página 5">
             <a:extLst>
               <a:ext uri="{FF2B5EF4-FFF2-40B4-BE49-F238E27FC236}">
-                <a16:creationId xmlns:a16="http://schemas.microsoft.com/office/drawing/2014/main" id="{F40A8D8A-4006-3DB3-2762-C13B510FD02E}"/>
+                <a16:creationId xmlns:a16="http://schemas.microsoft.com/office/drawing/2014/main" id="{E5A5451B-237C-7B8C-5431-994A0E6E0587}"/>
               </a:ext>
             </a:extLst>
           </p:cNvPr>
@@ -2715,7 +2715,7 @@
           <p:cNvPr id="7" name="Marcador de número de diapositiva 6">
             <a:extLst>
               <a:ext uri="{FF2B5EF4-FFF2-40B4-BE49-F238E27FC236}">
-                <a16:creationId xmlns:a16="http://schemas.microsoft.com/office/drawing/2014/main" id="{63C68661-42AC-8B5A-B1C0-A1E855DEE207}"/>
+                <a16:creationId xmlns:a16="http://schemas.microsoft.com/office/drawing/2014/main" id="{D0919129-C80C-8DE9-692F-08D344413FF2}"/>
               </a:ext>
             </a:extLst>
           </p:cNvPr>
@@ -2731,7 +2731,7 @@
           <a:bodyPr/>
           <a:lstStyle/>
           <a:p>
-            <a:fld id="{8C9473E1-ACD5-4C35-8A08-9B6197486DC4}" type="slidenum">
+            <a:fld id="{FA455040-64EB-4938-BD0A-2F141374B058}" type="slidenum">
               <a:rPr lang="es-ES" smtClean="0"/>
               <a:t>‹Nº›</a:t>
             </a:fld>
@@ -2742,7 +2742,7 @@
     </p:spTree>
     <p:extLst>
       <p:ext uri="{BB962C8B-B14F-4D97-AF65-F5344CB8AC3E}">
-        <p14:creationId xmlns:p14="http://schemas.microsoft.com/office/powerpoint/2010/main" val="1342182854"/>
+        <p14:creationId xmlns:p14="http://schemas.microsoft.com/office/powerpoint/2010/main" val="1456792909"/>
       </p:ext>
     </p:extLst>
   </p:cSld>
@@ -2779,7 +2779,7 @@
           <p:cNvPr id="2" name="Marcador de título 1">
             <a:extLst>
               <a:ext uri="{FF2B5EF4-FFF2-40B4-BE49-F238E27FC236}">
-                <a16:creationId xmlns:a16="http://schemas.microsoft.com/office/drawing/2014/main" id="{CED63532-6A17-45F5-F584-67C03E1814F7}"/>
+                <a16:creationId xmlns:a16="http://schemas.microsoft.com/office/drawing/2014/main" id="{72BDA274-ABD2-45F1-8B59-5CBF2D7BC3DB}"/>
               </a:ext>
             </a:extLst>
           </p:cNvPr>
@@ -2817,7 +2817,7 @@
           <p:cNvPr id="3" name="Marcador de texto 2">
             <a:extLst>
               <a:ext uri="{FF2B5EF4-FFF2-40B4-BE49-F238E27FC236}">
-                <a16:creationId xmlns:a16="http://schemas.microsoft.com/office/drawing/2014/main" id="{ED8D958A-06FE-0E98-1692-31A0F14B1418}"/>
+                <a16:creationId xmlns:a16="http://schemas.microsoft.com/office/drawing/2014/main" id="{2CCDAE57-13BC-3791-6B16-B5FB925694F1}"/>
               </a:ext>
             </a:extLst>
           </p:cNvPr>
@@ -2884,7 +2884,7 @@
           <p:cNvPr id="4" name="Marcador de fecha 3">
             <a:extLst>
               <a:ext uri="{FF2B5EF4-FFF2-40B4-BE49-F238E27FC236}">
-                <a16:creationId xmlns:a16="http://schemas.microsoft.com/office/drawing/2014/main" id="{A41FD606-3ED4-26A3-C14D-B6CD736C95A6}"/>
+                <a16:creationId xmlns:a16="http://schemas.microsoft.com/office/drawing/2014/main" id="{2DB65BDD-59E9-3DFA-98D7-FB785E6E1A5C}"/>
               </a:ext>
             </a:extLst>
           </p:cNvPr>
@@ -2918,9 +2918,9 @@
             </a:lvl1pPr>
           </a:lstStyle>
           <a:p>
-            <a:fld id="{E9A21FD9-3D2E-4368-8C20-26695743AB37}" type="datetimeFigureOut">
+            <a:fld id="{4C2FCEDC-9044-4CE9-9B98-47C3FC2B7CBE}" type="datetimeFigureOut">
               <a:rPr lang="es-ES" smtClean="0"/>
-              <a:t>26/04/2026</a:t>
+              <a:t>03/05/2026</a:t>
             </a:fld>
             <a:endParaRPr lang="es-ES"/>
           </a:p>
@@ -2931,7 +2931,7 @@
           <p:cNvPr id="5" name="Marcador de pie de página 4">
             <a:extLst>
               <a:ext uri="{FF2B5EF4-FFF2-40B4-BE49-F238E27FC236}">
-                <a16:creationId xmlns:a16="http://schemas.microsoft.com/office/drawing/2014/main" id="{9D113F70-2101-941F-88A6-1970A8260413}"/>
+                <a16:creationId xmlns:a16="http://schemas.microsoft.com/office/drawing/2014/main" id="{48D1ECEF-F739-A79C-F532-FA358AEE6AB1}"/>
               </a:ext>
             </a:extLst>
           </p:cNvPr>
@@ -2974,7 +2974,7 @@
           <p:cNvPr id="6" name="Marcador de número de diapositiva 5">
             <a:extLst>
               <a:ext uri="{FF2B5EF4-FFF2-40B4-BE49-F238E27FC236}">
-                <a16:creationId xmlns:a16="http://schemas.microsoft.com/office/drawing/2014/main" id="{443CADB4-6D70-2096-09CC-61EEE22C3F4B}"/>
+                <a16:creationId xmlns:a16="http://schemas.microsoft.com/office/drawing/2014/main" id="{F426DB04-DF97-8610-4C8F-B8F9C581DA88}"/>
               </a:ext>
             </a:extLst>
           </p:cNvPr>
@@ -3008,7 +3008,7 @@
             </a:lvl1pPr>
           </a:lstStyle>
           <a:p>
-            <a:fld id="{8C9473E1-ACD5-4C35-8A08-9B6197486DC4}" type="slidenum">
+            <a:fld id="{FA455040-64EB-4938-BD0A-2F141374B058}" type="slidenum">
               <a:rPr lang="es-ES" smtClean="0"/>
               <a:t>‹Nº›</a:t>
             </a:fld>
@@ -3019,7 +3019,7 @@
     </p:spTree>
     <p:extLst>
       <p:ext uri="{BB962C8B-B14F-4D97-AF65-F5344CB8AC3E}">
-        <p14:creationId xmlns:p14="http://schemas.microsoft.com/office/powerpoint/2010/main" val="2370292710"/>
+        <p14:creationId xmlns:p14="http://schemas.microsoft.com/office/powerpoint/2010/main" val="1833905126"/>
       </p:ext>
     </p:extLst>
   </p:cSld>
@@ -3350,7 +3350,7 @@
           <p:cNvPr id="2" name="Rectángulo: esquinas redondeadas 1">
             <a:extLst>
               <a:ext uri="{FF2B5EF4-FFF2-40B4-BE49-F238E27FC236}">
-                <a16:creationId xmlns:a16="http://schemas.microsoft.com/office/drawing/2014/main" id="{DED4EA02-6BEA-A264-1DF2-EB4D8187DD0A}"/>
+                <a16:creationId xmlns:a16="http://schemas.microsoft.com/office/drawing/2014/main" id="{3A87E732-A74F-B6EB-E66F-824695ECDAD7}"/>
               </a:ext>
             </a:extLst>
           </p:cNvPr>
@@ -3404,7 +3404,7 @@
           <p:cNvPr id="3" name="CuadroTexto 2">
             <a:extLst>
               <a:ext uri="{FF2B5EF4-FFF2-40B4-BE49-F238E27FC236}">
-                <a16:creationId xmlns:a16="http://schemas.microsoft.com/office/drawing/2014/main" id="{8CCF2BD0-144C-34ED-5757-D0CBCF714DC3}"/>
+                <a16:creationId xmlns:a16="http://schemas.microsoft.com/office/drawing/2014/main" id="{8177A55E-A698-F1FC-7F42-C096EB1B4D0A}"/>
               </a:ext>
             </a:extLst>
           </p:cNvPr>
@@ -3444,7 +3444,7 @@
           <p:cNvPr id="4" name="CuadroTexto 3">
             <a:extLst>
               <a:ext uri="{FF2B5EF4-FFF2-40B4-BE49-F238E27FC236}">
-                <a16:creationId xmlns:a16="http://schemas.microsoft.com/office/drawing/2014/main" id="{7A79E0CE-666A-117E-88AC-5C25D203306A}"/>
+                <a16:creationId xmlns:a16="http://schemas.microsoft.com/office/drawing/2014/main" id="{1B049C5D-2CED-583F-FF27-E567D7CE3AF2}"/>
               </a:ext>
             </a:extLst>
           </p:cNvPr>
@@ -3484,7 +3484,7 @@
           <p:cNvPr id="5" name="CuadroTexto 4">
             <a:extLst>
               <a:ext uri="{FF2B5EF4-FFF2-40B4-BE49-F238E27FC236}">
-                <a16:creationId xmlns:a16="http://schemas.microsoft.com/office/drawing/2014/main" id="{D641F6C4-C337-D327-E55D-E4BD22755774}"/>
+                <a16:creationId xmlns:a16="http://schemas.microsoft.com/office/drawing/2014/main" id="{88CEB650-E9C2-7DA1-8A94-AA40324B5435}"/>
               </a:ext>
             </a:extLst>
           </p:cNvPr>
@@ -3524,7 +3524,7 @@
           <p:cNvPr id="6" name="CuadroTexto 5">
             <a:extLst>
               <a:ext uri="{FF2B5EF4-FFF2-40B4-BE49-F238E27FC236}">
-                <a16:creationId xmlns:a16="http://schemas.microsoft.com/office/drawing/2014/main" id="{133F218C-EF17-EF6A-5F8E-47618B995C56}"/>
+                <a16:creationId xmlns:a16="http://schemas.microsoft.com/office/drawing/2014/main" id="{F3235407-906C-72DB-F6B2-20A5A967C08D}"/>
               </a:ext>
             </a:extLst>
           </p:cNvPr>
@@ -3575,7 +3575,7 @@
           <p:cNvPr id="8" name="Imagen 7">
             <a:extLst>
               <a:ext uri="{FF2B5EF4-FFF2-40B4-BE49-F238E27FC236}">
-                <a16:creationId xmlns:a16="http://schemas.microsoft.com/office/drawing/2014/main" id="{7094F3C0-6DE7-42AA-F395-8BD6F5F50E48}"/>
+                <a16:creationId xmlns:a16="http://schemas.microsoft.com/office/drawing/2014/main" id="{0083AF39-753F-82C3-BB50-8A1FB5E262D5}"/>
               </a:ext>
             </a:extLst>
           </p:cNvPr>
@@ -3614,7 +3614,7 @@
     </p:spTree>
     <p:extLst>
       <p:ext uri="{BB962C8B-B14F-4D97-AF65-F5344CB8AC3E}">
-        <p14:creationId xmlns:p14="http://schemas.microsoft.com/office/powerpoint/2010/main" val="4126762379"/>
+        <p14:creationId xmlns:p14="http://schemas.microsoft.com/office/powerpoint/2010/main" val="323598477"/>
       </p:ext>
     </p:extLst>
   </p:cSld>
@@ -3654,7 +3654,7 @@
           <p:cNvPr id="2" name="CuadroTexto 1">
             <a:extLst>
               <a:ext uri="{FF2B5EF4-FFF2-40B4-BE49-F238E27FC236}">
-                <a16:creationId xmlns:a16="http://schemas.microsoft.com/office/drawing/2014/main" id="{C6E923DE-D116-8E40-FE2B-544382AE0460}"/>
+                <a16:creationId xmlns:a16="http://schemas.microsoft.com/office/drawing/2014/main" id="{EFF17161-752D-DFC6-8F7A-78AA8340249B}"/>
               </a:ext>
             </a:extLst>
           </p:cNvPr>
@@ -3694,7 +3694,7 @@
           <p:cNvPr id="3" name="CuadroTexto 2">
             <a:extLst>
               <a:ext uri="{FF2B5EF4-FFF2-40B4-BE49-F238E27FC236}">
-                <a16:creationId xmlns:a16="http://schemas.microsoft.com/office/drawing/2014/main" id="{F76CEF37-5696-1531-6109-25F8B6FD1134}"/>
+                <a16:creationId xmlns:a16="http://schemas.microsoft.com/office/drawing/2014/main" id="{7771ACBD-5214-CB0D-5CB8-19C5FE1BAC36}"/>
               </a:ext>
             </a:extLst>
           </p:cNvPr>
@@ -3734,7 +3734,7 @@
           <p:cNvPr id="4" name="CuadroTexto 3">
             <a:extLst>
               <a:ext uri="{FF2B5EF4-FFF2-40B4-BE49-F238E27FC236}">
-                <a16:creationId xmlns:a16="http://schemas.microsoft.com/office/drawing/2014/main" id="{14FEA111-3DE2-F4CE-8461-2D88FB66CEB3}"/>
+                <a16:creationId xmlns:a16="http://schemas.microsoft.com/office/drawing/2014/main" id="{54035EEF-CEBE-FB37-73ED-64053A4A976C}"/>
               </a:ext>
             </a:extLst>
           </p:cNvPr>
@@ -3774,7 +3774,7 @@
           <p:cNvPr id="5" name="Rectángulo: esquinas redondeadas 4">
             <a:extLst>
               <a:ext uri="{FF2B5EF4-FFF2-40B4-BE49-F238E27FC236}">
-                <a16:creationId xmlns:a16="http://schemas.microsoft.com/office/drawing/2014/main" id="{04D97DEE-7D6C-6366-01CA-17C91C7E1F3E}"/>
+                <a16:creationId xmlns:a16="http://schemas.microsoft.com/office/drawing/2014/main" id="{BE2C502C-DA3E-2EEF-1B69-8A6E497945A5}"/>
               </a:ext>
             </a:extLst>
           </p:cNvPr>
@@ -3835,7 +3835,7 @@
           <p:cNvPr id="6" name="CuadroTexto 5">
             <a:extLst>
               <a:ext uri="{FF2B5EF4-FFF2-40B4-BE49-F238E27FC236}">
-                <a16:creationId xmlns:a16="http://schemas.microsoft.com/office/drawing/2014/main" id="{6955EE78-F254-0C3E-9E60-D65CD3BDE80C}"/>
+                <a16:creationId xmlns:a16="http://schemas.microsoft.com/office/drawing/2014/main" id="{4B0F2D69-8F12-4284-DC0E-494CC9D83910}"/>
               </a:ext>
             </a:extLst>
           </p:cNvPr>
@@ -3886,7 +3886,7 @@
           <p:cNvPr id="7" name="CuadroTexto 6">
             <a:extLst>
               <a:ext uri="{FF2B5EF4-FFF2-40B4-BE49-F238E27FC236}">
-                <a16:creationId xmlns:a16="http://schemas.microsoft.com/office/drawing/2014/main" id="{9CDE44C5-002D-48AA-456B-05F10EB92F7A}"/>
+                <a16:creationId xmlns:a16="http://schemas.microsoft.com/office/drawing/2014/main" id="{817D8DAF-DF0A-E03D-2632-C856659B5A34}"/>
               </a:ext>
             </a:extLst>
           </p:cNvPr>
@@ -3926,7 +3926,7 @@
           <p:cNvPr id="8" name="CuadroTexto 7">
             <a:extLst>
               <a:ext uri="{FF2B5EF4-FFF2-40B4-BE49-F238E27FC236}">
-                <a16:creationId xmlns:a16="http://schemas.microsoft.com/office/drawing/2014/main" id="{7D853C4D-A8C1-7502-6598-18E7E78D93F9}"/>
+                <a16:creationId xmlns:a16="http://schemas.microsoft.com/office/drawing/2014/main" id="{1C10F4D8-3E03-D17D-D6CC-527AA1D32B96}"/>
               </a:ext>
             </a:extLst>
           </p:cNvPr>
@@ -4025,7 +4025,7 @@
     </p:spTree>
     <p:extLst>
       <p:ext uri="{BB962C8B-B14F-4D97-AF65-F5344CB8AC3E}">
-        <p14:creationId xmlns:p14="http://schemas.microsoft.com/office/powerpoint/2010/main" val="558313188"/>
+        <p14:creationId xmlns:p14="http://schemas.microsoft.com/office/powerpoint/2010/main" val="1589886555"/>
       </p:ext>
     </p:extLst>
   </p:cSld>
@@ -4065,7 +4065,7 @@
           <p:cNvPr id="2" name="CuadroTexto 1">
             <a:extLst>
               <a:ext uri="{FF2B5EF4-FFF2-40B4-BE49-F238E27FC236}">
-                <a16:creationId xmlns:a16="http://schemas.microsoft.com/office/drawing/2014/main" id="{924C088C-05DE-32BC-8F3D-22AC13974013}"/>
+                <a16:creationId xmlns:a16="http://schemas.microsoft.com/office/drawing/2014/main" id="{4573553B-DABF-2373-C4B1-2F06D96A4314}"/>
               </a:ext>
             </a:extLst>
           </p:cNvPr>
@@ -4105,7 +4105,7 @@
           <p:cNvPr id="3" name="CuadroTexto 2">
             <a:extLst>
               <a:ext uri="{FF2B5EF4-FFF2-40B4-BE49-F238E27FC236}">
-                <a16:creationId xmlns:a16="http://schemas.microsoft.com/office/drawing/2014/main" id="{EB131004-05A6-4D1B-AA9D-04474D15AA87}"/>
+                <a16:creationId xmlns:a16="http://schemas.microsoft.com/office/drawing/2014/main" id="{9AF28A3B-E6EC-4494-0840-9464369FA657}"/>
               </a:ext>
             </a:extLst>
           </p:cNvPr>
@@ -4145,7 +4145,7 @@
           <p:cNvPr id="4" name="CuadroTexto 3">
             <a:extLst>
               <a:ext uri="{FF2B5EF4-FFF2-40B4-BE49-F238E27FC236}">
-                <a16:creationId xmlns:a16="http://schemas.microsoft.com/office/drawing/2014/main" id="{CD192C9E-EA2C-19A8-58B8-B895678AEEFF}"/>
+                <a16:creationId xmlns:a16="http://schemas.microsoft.com/office/drawing/2014/main" id="{9687D3D1-A0B0-5F38-7837-D1E7B62534F6}"/>
               </a:ext>
             </a:extLst>
           </p:cNvPr>
@@ -4185,7 +4185,7 @@
           <p:cNvPr id="5" name="Rectángulo: esquinas redondeadas 4">
             <a:extLst>
               <a:ext uri="{FF2B5EF4-FFF2-40B4-BE49-F238E27FC236}">
-                <a16:creationId xmlns:a16="http://schemas.microsoft.com/office/drawing/2014/main" id="{2A7C52F6-E23D-2618-E2C5-E29A3DBDA4F1}"/>
+                <a16:creationId xmlns:a16="http://schemas.microsoft.com/office/drawing/2014/main" id="{FFEA8B83-3615-8230-D7CE-2634922F651D}"/>
               </a:ext>
             </a:extLst>
           </p:cNvPr>
@@ -4246,7 +4246,7 @@
           <p:cNvPr id="6" name="CuadroTexto 5">
             <a:extLst>
               <a:ext uri="{FF2B5EF4-FFF2-40B4-BE49-F238E27FC236}">
-                <a16:creationId xmlns:a16="http://schemas.microsoft.com/office/drawing/2014/main" id="{936F0955-DDCF-BC78-8863-E1668C897FA6}"/>
+                <a16:creationId xmlns:a16="http://schemas.microsoft.com/office/drawing/2014/main" id="{9C00006F-6CCE-8D7E-5115-DE6842B3E2F4}"/>
               </a:ext>
             </a:extLst>
           </p:cNvPr>
@@ -4294,7 +4294,7 @@
           <p:cNvPr id="7" name="CuadroTexto 6">
             <a:extLst>
               <a:ext uri="{FF2B5EF4-FFF2-40B4-BE49-F238E27FC236}">
-                <a16:creationId xmlns:a16="http://schemas.microsoft.com/office/drawing/2014/main" id="{6BCD15C8-3877-49A9-EB29-10E1FB0306F9}"/>
+                <a16:creationId xmlns:a16="http://schemas.microsoft.com/office/drawing/2014/main" id="{FF0FDDA5-30F4-230D-6563-3F4495A28F51}"/>
               </a:ext>
             </a:extLst>
           </p:cNvPr>
@@ -4334,7 +4334,7 @@
           <p:cNvPr id="8" name="CuadroTexto 7">
             <a:extLst>
               <a:ext uri="{FF2B5EF4-FFF2-40B4-BE49-F238E27FC236}">
-                <a16:creationId xmlns:a16="http://schemas.microsoft.com/office/drawing/2014/main" id="{A600925E-51DE-CF19-7258-F3520E8F4FCB}"/>
+                <a16:creationId xmlns:a16="http://schemas.microsoft.com/office/drawing/2014/main" id="{68F77224-2EDC-3ECF-2BC9-0DFA65E8A5DA}"/>
               </a:ext>
             </a:extLst>
           </p:cNvPr>
@@ -4433,7 +4433,7 @@
     </p:spTree>
     <p:extLst>
       <p:ext uri="{BB962C8B-B14F-4D97-AF65-F5344CB8AC3E}">
-        <p14:creationId xmlns:p14="http://schemas.microsoft.com/office/powerpoint/2010/main" val="2487272628"/>
+        <p14:creationId xmlns:p14="http://schemas.microsoft.com/office/powerpoint/2010/main" val="4206735405"/>
       </p:ext>
     </p:extLst>
   </p:cSld>
@@ -4473,7 +4473,7 @@
           <p:cNvPr id="2" name="CuadroTexto 1">
             <a:extLst>
               <a:ext uri="{FF2B5EF4-FFF2-40B4-BE49-F238E27FC236}">
-                <a16:creationId xmlns:a16="http://schemas.microsoft.com/office/drawing/2014/main" id="{97185A8C-1EC1-0BD9-7F9C-070080BA2E2C}"/>
+                <a16:creationId xmlns:a16="http://schemas.microsoft.com/office/drawing/2014/main" id="{797A3F06-C125-14CA-F808-DA81DE1F3910}"/>
               </a:ext>
             </a:extLst>
           </p:cNvPr>
@@ -4513,7 +4513,7 @@
           <p:cNvPr id="3" name="CuadroTexto 2">
             <a:extLst>
               <a:ext uri="{FF2B5EF4-FFF2-40B4-BE49-F238E27FC236}">
-                <a16:creationId xmlns:a16="http://schemas.microsoft.com/office/drawing/2014/main" id="{A9AA94AC-9D51-2E38-30B3-D31E6189795B}"/>
+                <a16:creationId xmlns:a16="http://schemas.microsoft.com/office/drawing/2014/main" id="{88228733-60FB-3A89-BB9F-9DC1E7825519}"/>
               </a:ext>
             </a:extLst>
           </p:cNvPr>
@@ -4553,7 +4553,7 @@
           <p:cNvPr id="4" name="CuadroTexto 3">
             <a:extLst>
               <a:ext uri="{FF2B5EF4-FFF2-40B4-BE49-F238E27FC236}">
-                <a16:creationId xmlns:a16="http://schemas.microsoft.com/office/drawing/2014/main" id="{8AE375A4-7841-20EE-4DBB-D796858703EC}"/>
+                <a16:creationId xmlns:a16="http://schemas.microsoft.com/office/drawing/2014/main" id="{A2F35359-1E67-EB0E-E9F0-D88BBB410D3B}"/>
               </a:ext>
             </a:extLst>
           </p:cNvPr>
@@ -4593,7 +4593,7 @@
           <p:cNvPr id="5" name="Rectángulo: esquinas redondeadas 4">
             <a:extLst>
               <a:ext uri="{FF2B5EF4-FFF2-40B4-BE49-F238E27FC236}">
-                <a16:creationId xmlns:a16="http://schemas.microsoft.com/office/drawing/2014/main" id="{4B028AC3-08E7-CD92-81DF-28D09737B51C}"/>
+                <a16:creationId xmlns:a16="http://schemas.microsoft.com/office/drawing/2014/main" id="{2ABA5F54-B668-33BB-A181-50BE0832C347}"/>
               </a:ext>
             </a:extLst>
           </p:cNvPr>
@@ -4654,7 +4654,7 @@
           <p:cNvPr id="6" name="CuadroTexto 5">
             <a:extLst>
               <a:ext uri="{FF2B5EF4-FFF2-40B4-BE49-F238E27FC236}">
-                <a16:creationId xmlns:a16="http://schemas.microsoft.com/office/drawing/2014/main" id="{60E5A7F9-59D4-F29F-31F8-3004D92C4420}"/>
+                <a16:creationId xmlns:a16="http://schemas.microsoft.com/office/drawing/2014/main" id="{1061B647-6399-0BF7-A438-5D7F80ECCFA6}"/>
               </a:ext>
             </a:extLst>
           </p:cNvPr>
@@ -4705,7 +4705,7 @@
           <p:cNvPr id="7" name="CuadroTexto 6">
             <a:extLst>
               <a:ext uri="{FF2B5EF4-FFF2-40B4-BE49-F238E27FC236}">
-                <a16:creationId xmlns:a16="http://schemas.microsoft.com/office/drawing/2014/main" id="{70C3CE94-8389-4300-7E2F-899E5B8DE5AB}"/>
+                <a16:creationId xmlns:a16="http://schemas.microsoft.com/office/drawing/2014/main" id="{4D6501EB-E31C-8F8F-D7AB-194E9BE3B6CC}"/>
               </a:ext>
             </a:extLst>
           </p:cNvPr>
@@ -4751,7 +4751,7 @@
           <p:cNvPr id="8" name="CuadroTexto 7">
             <a:extLst>
               <a:ext uri="{FF2B5EF4-FFF2-40B4-BE49-F238E27FC236}">
-                <a16:creationId xmlns:a16="http://schemas.microsoft.com/office/drawing/2014/main" id="{9A7DEAC4-B20F-46B3-C058-729A04D9FFA6}"/>
+                <a16:creationId xmlns:a16="http://schemas.microsoft.com/office/drawing/2014/main" id="{88F1B60E-4A0D-3142-F96B-77EB398FD58D}"/>
               </a:ext>
             </a:extLst>
           </p:cNvPr>
@@ -4850,7 +4850,7 @@
     </p:spTree>
     <p:extLst>
       <p:ext uri="{BB962C8B-B14F-4D97-AF65-F5344CB8AC3E}">
-        <p14:creationId xmlns:p14="http://schemas.microsoft.com/office/powerpoint/2010/main" val="888581515"/>
+        <p14:creationId xmlns:p14="http://schemas.microsoft.com/office/powerpoint/2010/main" val="665728788"/>
       </p:ext>
     </p:extLst>
   </p:cSld>
@@ -4890,7 +4890,7 @@
           <p:cNvPr id="2" name="CuadroTexto 1">
             <a:extLst>
               <a:ext uri="{FF2B5EF4-FFF2-40B4-BE49-F238E27FC236}">
-                <a16:creationId xmlns:a16="http://schemas.microsoft.com/office/drawing/2014/main" id="{734B25AB-4FF2-4928-911C-B7C57E0C5443}"/>
+                <a16:creationId xmlns:a16="http://schemas.microsoft.com/office/drawing/2014/main" id="{31F888FA-E479-36C2-3253-A40D180F6B9D}"/>
               </a:ext>
             </a:extLst>
           </p:cNvPr>
@@ -4930,7 +4930,7 @@
           <p:cNvPr id="3" name="CuadroTexto 2">
             <a:extLst>
               <a:ext uri="{FF2B5EF4-FFF2-40B4-BE49-F238E27FC236}">
-                <a16:creationId xmlns:a16="http://schemas.microsoft.com/office/drawing/2014/main" id="{94B854D2-17BD-3E1D-0F74-719E41E603EF}"/>
+                <a16:creationId xmlns:a16="http://schemas.microsoft.com/office/drawing/2014/main" id="{2043BC74-EA82-F301-6246-FDB8AF785F02}"/>
               </a:ext>
             </a:extLst>
           </p:cNvPr>
@@ -4970,7 +4970,7 @@
           <p:cNvPr id="4" name="CuadroTexto 3">
             <a:extLst>
               <a:ext uri="{FF2B5EF4-FFF2-40B4-BE49-F238E27FC236}">
-                <a16:creationId xmlns:a16="http://schemas.microsoft.com/office/drawing/2014/main" id="{72864871-2CB6-206F-2425-C9AF565C8CC1}"/>
+                <a16:creationId xmlns:a16="http://schemas.microsoft.com/office/drawing/2014/main" id="{358A8D91-CA74-64B4-F3C0-38CEC8759F63}"/>
               </a:ext>
             </a:extLst>
           </p:cNvPr>
@@ -5010,7 +5010,7 @@
           <p:cNvPr id="5" name="Rectángulo: esquinas redondeadas 4">
             <a:extLst>
               <a:ext uri="{FF2B5EF4-FFF2-40B4-BE49-F238E27FC236}">
-                <a16:creationId xmlns:a16="http://schemas.microsoft.com/office/drawing/2014/main" id="{37EA8DB2-FEC9-BF7D-5595-846AF61C3041}"/>
+                <a16:creationId xmlns:a16="http://schemas.microsoft.com/office/drawing/2014/main" id="{9E45E7FC-8E97-33E1-3540-D58933AAAF6D}"/>
               </a:ext>
             </a:extLst>
           </p:cNvPr>
@@ -5071,7 +5071,7 @@
           <p:cNvPr id="6" name="CuadroTexto 5">
             <a:extLst>
               <a:ext uri="{FF2B5EF4-FFF2-40B4-BE49-F238E27FC236}">
-                <a16:creationId xmlns:a16="http://schemas.microsoft.com/office/drawing/2014/main" id="{155D067B-8425-72D6-4973-B43E739254BD}"/>
+                <a16:creationId xmlns:a16="http://schemas.microsoft.com/office/drawing/2014/main" id="{9B4AFF21-AF6B-9C00-D92E-06E9EAE94C33}"/>
               </a:ext>
             </a:extLst>
           </p:cNvPr>
@@ -5118,7 +5118,7 @@
           <p:cNvPr id="7" name="CuadroTexto 6">
             <a:extLst>
               <a:ext uri="{FF2B5EF4-FFF2-40B4-BE49-F238E27FC236}">
-                <a16:creationId xmlns:a16="http://schemas.microsoft.com/office/drawing/2014/main" id="{3FE1C216-489E-FFDD-8A44-7E9763F59BCE}"/>
+                <a16:creationId xmlns:a16="http://schemas.microsoft.com/office/drawing/2014/main" id="{512B4B7A-5E28-C83D-7063-E13ED908CAE2}"/>
               </a:ext>
             </a:extLst>
           </p:cNvPr>
@@ -5158,7 +5158,7 @@
           <p:cNvPr id="8" name="CuadroTexto 7">
             <a:extLst>
               <a:ext uri="{FF2B5EF4-FFF2-40B4-BE49-F238E27FC236}">
-                <a16:creationId xmlns:a16="http://schemas.microsoft.com/office/drawing/2014/main" id="{67CB88EA-B58E-A1C2-3E7C-B18D05A9F2D0}"/>
+                <a16:creationId xmlns:a16="http://schemas.microsoft.com/office/drawing/2014/main" id="{F18A1F40-267C-F464-F5FA-48A8D9FA05F5}"/>
               </a:ext>
             </a:extLst>
           </p:cNvPr>
@@ -5257,7 +5257,7 @@
     </p:spTree>
     <p:extLst>
       <p:ext uri="{BB962C8B-B14F-4D97-AF65-F5344CB8AC3E}">
-        <p14:creationId xmlns:p14="http://schemas.microsoft.com/office/powerpoint/2010/main" val="1304558557"/>
+        <p14:creationId xmlns:p14="http://schemas.microsoft.com/office/powerpoint/2010/main" val="3818227780"/>
       </p:ext>
     </p:extLst>
   </p:cSld>
@@ -5297,7 +5297,7 @@
           <p:cNvPr id="2" name="CuadroTexto 1">
             <a:extLst>
               <a:ext uri="{FF2B5EF4-FFF2-40B4-BE49-F238E27FC236}">
-                <a16:creationId xmlns:a16="http://schemas.microsoft.com/office/drawing/2014/main" id="{1AD9DDF5-299C-1C9B-758F-5EC8AEC24D70}"/>
+                <a16:creationId xmlns:a16="http://schemas.microsoft.com/office/drawing/2014/main" id="{CD31769B-D50B-4D46-596E-824E05542689}"/>
               </a:ext>
             </a:extLst>
           </p:cNvPr>
@@ -5337,7 +5337,7 @@
           <p:cNvPr id="3" name="CuadroTexto 2">
             <a:extLst>
               <a:ext uri="{FF2B5EF4-FFF2-40B4-BE49-F238E27FC236}">
-                <a16:creationId xmlns:a16="http://schemas.microsoft.com/office/drawing/2014/main" id="{F0C3B06D-749F-BC1A-931F-3D83BDE5BD6B}"/>
+                <a16:creationId xmlns:a16="http://schemas.microsoft.com/office/drawing/2014/main" id="{CCD0648F-B027-269A-32DB-E6EF0D98BE2E}"/>
               </a:ext>
             </a:extLst>
           </p:cNvPr>
@@ -5377,7 +5377,7 @@
           <p:cNvPr id="4" name="Rectángulo: esquinas redondeadas 3">
             <a:extLst>
               <a:ext uri="{FF2B5EF4-FFF2-40B4-BE49-F238E27FC236}">
-                <a16:creationId xmlns:a16="http://schemas.microsoft.com/office/drawing/2014/main" id="{270C2D5B-D0D4-5425-8988-AB6EE52B5A98}"/>
+                <a16:creationId xmlns:a16="http://schemas.microsoft.com/office/drawing/2014/main" id="{05323D74-0809-F041-1991-F47D324AAE66}"/>
               </a:ext>
             </a:extLst>
           </p:cNvPr>
@@ -5431,7 +5431,7 @@
           <p:cNvPr id="5" name="CuadroTexto 4">
             <a:extLst>
               <a:ext uri="{FF2B5EF4-FFF2-40B4-BE49-F238E27FC236}">
-                <a16:creationId xmlns:a16="http://schemas.microsoft.com/office/drawing/2014/main" id="{6A2AFB7D-75C3-BBE0-A026-F39BE2105CA7}"/>
+                <a16:creationId xmlns:a16="http://schemas.microsoft.com/office/drawing/2014/main" id="{19FD36BB-8B0F-8260-F854-CE25B3BE151D}"/>
               </a:ext>
             </a:extLst>
           </p:cNvPr>
@@ -5471,7 +5471,7 @@
           <p:cNvPr id="6" name="CuadroTexto 5">
             <a:extLst>
               <a:ext uri="{FF2B5EF4-FFF2-40B4-BE49-F238E27FC236}">
-                <a16:creationId xmlns:a16="http://schemas.microsoft.com/office/drawing/2014/main" id="{2C7D97F0-0C38-69B5-E0BA-15553FF71E82}"/>
+                <a16:creationId xmlns:a16="http://schemas.microsoft.com/office/drawing/2014/main" id="{749F936C-8F52-D8B3-651A-2F50AC0E2CFE}"/>
               </a:ext>
             </a:extLst>
           </p:cNvPr>
@@ -5511,7 +5511,7 @@
           <p:cNvPr id="7" name="Rectángulo: esquinas redondeadas 6">
             <a:extLst>
               <a:ext uri="{FF2B5EF4-FFF2-40B4-BE49-F238E27FC236}">
-                <a16:creationId xmlns:a16="http://schemas.microsoft.com/office/drawing/2014/main" id="{79C9E807-2054-9127-9429-6A409660F897}"/>
+                <a16:creationId xmlns:a16="http://schemas.microsoft.com/office/drawing/2014/main" id="{2E662721-1E9D-0984-CE8B-8DC58443971E}"/>
               </a:ext>
             </a:extLst>
           </p:cNvPr>
@@ -5565,7 +5565,7 @@
           <p:cNvPr id="8" name="CuadroTexto 7">
             <a:extLst>
               <a:ext uri="{FF2B5EF4-FFF2-40B4-BE49-F238E27FC236}">
-                <a16:creationId xmlns:a16="http://schemas.microsoft.com/office/drawing/2014/main" id="{9D0ABFFB-CCEB-455A-F2B1-087C18C7B2A9}"/>
+                <a16:creationId xmlns:a16="http://schemas.microsoft.com/office/drawing/2014/main" id="{565C60D7-E94E-2709-BC4F-CA701626F5A7}"/>
               </a:ext>
             </a:extLst>
           </p:cNvPr>
@@ -5605,7 +5605,7 @@
           <p:cNvPr id="9" name="CuadroTexto 8">
             <a:extLst>
               <a:ext uri="{FF2B5EF4-FFF2-40B4-BE49-F238E27FC236}">
-                <a16:creationId xmlns:a16="http://schemas.microsoft.com/office/drawing/2014/main" id="{4CE1E8D2-908B-B924-4561-A58049C07588}"/>
+                <a16:creationId xmlns:a16="http://schemas.microsoft.com/office/drawing/2014/main" id="{46B65B74-4E32-132A-F7C2-9DF6FF7C9195}"/>
               </a:ext>
             </a:extLst>
           </p:cNvPr>
@@ -5645,7 +5645,7 @@
           <p:cNvPr id="10" name="Rectángulo: esquinas redondeadas 9">
             <a:extLst>
               <a:ext uri="{FF2B5EF4-FFF2-40B4-BE49-F238E27FC236}">
-                <a16:creationId xmlns:a16="http://schemas.microsoft.com/office/drawing/2014/main" id="{D414E786-40AA-D662-0B77-F572547661D0}"/>
+                <a16:creationId xmlns:a16="http://schemas.microsoft.com/office/drawing/2014/main" id="{AC38B38F-4B3F-2732-CA5C-D7CE72E85242}"/>
               </a:ext>
             </a:extLst>
           </p:cNvPr>
@@ -5699,7 +5699,7 @@
           <p:cNvPr id="11" name="CuadroTexto 10">
             <a:extLst>
               <a:ext uri="{FF2B5EF4-FFF2-40B4-BE49-F238E27FC236}">
-                <a16:creationId xmlns:a16="http://schemas.microsoft.com/office/drawing/2014/main" id="{1BCD2E6E-7FEE-9A40-9323-7FD475EB68BB}"/>
+                <a16:creationId xmlns:a16="http://schemas.microsoft.com/office/drawing/2014/main" id="{6CE4B240-3200-1EEC-2CCD-0BDFF263A3F4}"/>
               </a:ext>
             </a:extLst>
           </p:cNvPr>
@@ -5739,7 +5739,7 @@
           <p:cNvPr id="12" name="CuadroTexto 11">
             <a:extLst>
               <a:ext uri="{FF2B5EF4-FFF2-40B4-BE49-F238E27FC236}">
-                <a16:creationId xmlns:a16="http://schemas.microsoft.com/office/drawing/2014/main" id="{6D255B9C-B357-1798-C60F-572D7CD3538E}"/>
+                <a16:creationId xmlns:a16="http://schemas.microsoft.com/office/drawing/2014/main" id="{14B6F759-BFC5-BA11-6711-993345E8C3F5}"/>
               </a:ext>
             </a:extLst>
           </p:cNvPr>
@@ -5779,7 +5779,7 @@
           <p:cNvPr id="13" name="Rectángulo: esquinas redondeadas 12">
             <a:extLst>
               <a:ext uri="{FF2B5EF4-FFF2-40B4-BE49-F238E27FC236}">
-                <a16:creationId xmlns:a16="http://schemas.microsoft.com/office/drawing/2014/main" id="{0FED11A9-1E12-9168-F777-EC51BB9F3F37}"/>
+                <a16:creationId xmlns:a16="http://schemas.microsoft.com/office/drawing/2014/main" id="{257B8291-E5A6-D9FE-11E2-4B20000CB7BD}"/>
               </a:ext>
             </a:extLst>
           </p:cNvPr>
@@ -5833,7 +5833,7 @@
           <p:cNvPr id="14" name="CuadroTexto 13">
             <a:extLst>
               <a:ext uri="{FF2B5EF4-FFF2-40B4-BE49-F238E27FC236}">
-                <a16:creationId xmlns:a16="http://schemas.microsoft.com/office/drawing/2014/main" id="{183A1DAA-7D1C-F6EB-BE83-0FB8BFFAA23F}"/>
+                <a16:creationId xmlns:a16="http://schemas.microsoft.com/office/drawing/2014/main" id="{25AF199E-81BB-FB28-1F57-D67B331E9C36}"/>
               </a:ext>
             </a:extLst>
           </p:cNvPr>
@@ -5873,7 +5873,7 @@
           <p:cNvPr id="15" name="CuadroTexto 14">
             <a:extLst>
               <a:ext uri="{FF2B5EF4-FFF2-40B4-BE49-F238E27FC236}">
-                <a16:creationId xmlns:a16="http://schemas.microsoft.com/office/drawing/2014/main" id="{8812EE9E-4B00-1AB3-A5DD-A1394BB7A1F0}"/>
+                <a16:creationId xmlns:a16="http://schemas.microsoft.com/office/drawing/2014/main" id="{57D39FE6-519B-EF22-F752-AB318B1CE041}"/>
               </a:ext>
             </a:extLst>
           </p:cNvPr>
@@ -5913,7 +5913,7 @@
           <p:cNvPr id="16" name="CuadroTexto 15">
             <a:extLst>
               <a:ext uri="{FF2B5EF4-FFF2-40B4-BE49-F238E27FC236}">
-                <a16:creationId xmlns:a16="http://schemas.microsoft.com/office/drawing/2014/main" id="{EA17FC3F-07E6-E91A-3C1A-7C5016118CBC}"/>
+                <a16:creationId xmlns:a16="http://schemas.microsoft.com/office/drawing/2014/main" id="{62190035-646C-6478-68E4-A18655287021}"/>
               </a:ext>
             </a:extLst>
           </p:cNvPr>
@@ -5996,7 +5996,7 @@
           <p:cNvPr id="17" name="CuadroTexto 16">
             <a:extLst>
               <a:ext uri="{FF2B5EF4-FFF2-40B4-BE49-F238E27FC236}">
-                <a16:creationId xmlns:a16="http://schemas.microsoft.com/office/drawing/2014/main" id="{EA2211E6-0A5B-B7B5-5914-37FD30B6155B}"/>
+                <a16:creationId xmlns:a16="http://schemas.microsoft.com/office/drawing/2014/main" id="{1B32A1F7-1071-61D7-CF27-1042C0759C47}"/>
               </a:ext>
             </a:extLst>
           </p:cNvPr>
@@ -6034,7 +6034,7 @@
     </p:spTree>
     <p:extLst>
       <p:ext uri="{BB962C8B-B14F-4D97-AF65-F5344CB8AC3E}">
-        <p14:creationId xmlns:p14="http://schemas.microsoft.com/office/powerpoint/2010/main" val="2648277465"/>
+        <p14:creationId xmlns:p14="http://schemas.microsoft.com/office/powerpoint/2010/main" val="701091883"/>
       </p:ext>
     </p:extLst>
   </p:cSld>
@@ -6074,7 +6074,7 @@
           <p:cNvPr id="2" name="CuadroTexto 1">
             <a:extLst>
               <a:ext uri="{FF2B5EF4-FFF2-40B4-BE49-F238E27FC236}">
-                <a16:creationId xmlns:a16="http://schemas.microsoft.com/office/drawing/2014/main" id="{83BC56A0-6199-C19D-B500-7EF3395CBC77}"/>
+                <a16:creationId xmlns:a16="http://schemas.microsoft.com/office/drawing/2014/main" id="{A8EDEE22-43E9-E198-66BF-8002977B584A}"/>
               </a:ext>
             </a:extLst>
           </p:cNvPr>
@@ -6114,7 +6114,7 @@
           <p:cNvPr id="3" name="CuadroTexto 2">
             <a:extLst>
               <a:ext uri="{FF2B5EF4-FFF2-40B4-BE49-F238E27FC236}">
-                <a16:creationId xmlns:a16="http://schemas.microsoft.com/office/drawing/2014/main" id="{7E0D7E40-7583-3E61-2823-3EB085419767}"/>
+                <a16:creationId xmlns:a16="http://schemas.microsoft.com/office/drawing/2014/main" id="{11915613-87DA-92AD-06CC-7444AEF5F78F}"/>
               </a:ext>
             </a:extLst>
           </p:cNvPr>
@@ -6154,7 +6154,7 @@
           <p:cNvPr id="4" name="CuadroTexto 3">
             <a:extLst>
               <a:ext uri="{FF2B5EF4-FFF2-40B4-BE49-F238E27FC236}">
-                <a16:creationId xmlns:a16="http://schemas.microsoft.com/office/drawing/2014/main" id="{3AC3F5FB-FC13-3765-101C-9A41C302052D}"/>
+                <a16:creationId xmlns:a16="http://schemas.microsoft.com/office/drawing/2014/main" id="{611DF2B7-D5FC-B61C-4A49-849A9E4629DE}"/>
               </a:ext>
             </a:extLst>
           </p:cNvPr>
@@ -6194,7 +6194,7 @@
           <p:cNvPr id="5" name="Rectángulo: esquinas redondeadas 4">
             <a:extLst>
               <a:ext uri="{FF2B5EF4-FFF2-40B4-BE49-F238E27FC236}">
-                <a16:creationId xmlns:a16="http://schemas.microsoft.com/office/drawing/2014/main" id="{5D3D4F96-4348-744B-BC6B-39900F810CB6}"/>
+                <a16:creationId xmlns:a16="http://schemas.microsoft.com/office/drawing/2014/main" id="{F4C4393D-1784-C48B-DE96-8175E054650D}"/>
               </a:ext>
             </a:extLst>
           </p:cNvPr>
@@ -6248,7 +6248,7 @@
           <p:cNvPr id="6" name="CuadroTexto 5">
             <a:extLst>
               <a:ext uri="{FF2B5EF4-FFF2-40B4-BE49-F238E27FC236}">
-                <a16:creationId xmlns:a16="http://schemas.microsoft.com/office/drawing/2014/main" id="{89DDA9F9-08F7-1758-264E-B41935A6A6D6}"/>
+                <a16:creationId xmlns:a16="http://schemas.microsoft.com/office/drawing/2014/main" id="{C6B46110-8EE8-EFF1-88CB-3B1B54DF4A7E}"/>
               </a:ext>
             </a:extLst>
           </p:cNvPr>
@@ -6288,7 +6288,7 @@
           <p:cNvPr id="7" name="CuadroTexto 6">
             <a:extLst>
               <a:ext uri="{FF2B5EF4-FFF2-40B4-BE49-F238E27FC236}">
-                <a16:creationId xmlns:a16="http://schemas.microsoft.com/office/drawing/2014/main" id="{8E1C0560-176E-69A9-7BD8-5C1FA97D2DCA}"/>
+                <a16:creationId xmlns:a16="http://schemas.microsoft.com/office/drawing/2014/main" id="{FCFCC93C-65E7-0A9C-29FE-633D9707033F}"/>
               </a:ext>
             </a:extLst>
           </p:cNvPr>
@@ -6328,7 +6328,7 @@
           <p:cNvPr id="8" name="CuadroTexto 7">
             <a:extLst>
               <a:ext uri="{FF2B5EF4-FFF2-40B4-BE49-F238E27FC236}">
-                <a16:creationId xmlns:a16="http://schemas.microsoft.com/office/drawing/2014/main" id="{C914FAD8-3974-02AC-DBEE-B0E9438C83E8}"/>
+                <a16:creationId xmlns:a16="http://schemas.microsoft.com/office/drawing/2014/main" id="{963D4D41-69F1-3679-0F46-1DC6D4BB8609}"/>
               </a:ext>
             </a:extLst>
           </p:cNvPr>
@@ -6427,7 +6427,7 @@
     </p:spTree>
     <p:extLst>
       <p:ext uri="{BB962C8B-B14F-4D97-AF65-F5344CB8AC3E}">
-        <p14:creationId xmlns:p14="http://schemas.microsoft.com/office/powerpoint/2010/main" val="2249659752"/>
+        <p14:creationId xmlns:p14="http://schemas.microsoft.com/office/powerpoint/2010/main" val="2483162841"/>
       </p:ext>
     </p:extLst>
   </p:cSld>
@@ -6467,7 +6467,7 @@
           <p:cNvPr id="2" name="CuadroTexto 1">
             <a:extLst>
               <a:ext uri="{FF2B5EF4-FFF2-40B4-BE49-F238E27FC236}">
-                <a16:creationId xmlns:a16="http://schemas.microsoft.com/office/drawing/2014/main" id="{6A977C69-2B71-237A-5E81-77596293E329}"/>
+                <a16:creationId xmlns:a16="http://schemas.microsoft.com/office/drawing/2014/main" id="{3B01466F-135F-00F1-699E-2F6274383697}"/>
               </a:ext>
             </a:extLst>
           </p:cNvPr>
@@ -6507,7 +6507,7 @@
           <p:cNvPr id="3" name="CuadroTexto 2">
             <a:extLst>
               <a:ext uri="{FF2B5EF4-FFF2-40B4-BE49-F238E27FC236}">
-                <a16:creationId xmlns:a16="http://schemas.microsoft.com/office/drawing/2014/main" id="{4C83F2DD-7CAB-A2A4-28E4-C3796172BF92}"/>
+                <a16:creationId xmlns:a16="http://schemas.microsoft.com/office/drawing/2014/main" id="{90BC9E3E-5C25-C777-B1EA-CC20A5A5234C}"/>
               </a:ext>
             </a:extLst>
           </p:cNvPr>
@@ -6547,7 +6547,7 @@
           <p:cNvPr id="4" name="CuadroTexto 3">
             <a:extLst>
               <a:ext uri="{FF2B5EF4-FFF2-40B4-BE49-F238E27FC236}">
-                <a16:creationId xmlns:a16="http://schemas.microsoft.com/office/drawing/2014/main" id="{F64076DE-2100-F9AA-C059-A0165F46DC90}"/>
+                <a16:creationId xmlns:a16="http://schemas.microsoft.com/office/drawing/2014/main" id="{6B034E60-2FF6-7C58-1CAE-8F09999EE08D}"/>
               </a:ext>
             </a:extLst>
           </p:cNvPr>
@@ -6666,7 +6666,7 @@
           <p:cNvPr id="5" name="Rectángulo: esquinas redondeadas 4">
             <a:extLst>
               <a:ext uri="{FF2B5EF4-FFF2-40B4-BE49-F238E27FC236}">
-                <a16:creationId xmlns:a16="http://schemas.microsoft.com/office/drawing/2014/main" id="{65DDA8C8-8B2A-FD93-3F95-5153FF60765E}"/>
+                <a16:creationId xmlns:a16="http://schemas.microsoft.com/office/drawing/2014/main" id="{C962B3AA-44C4-8A3E-E185-66D2E6DA9D9A}"/>
               </a:ext>
             </a:extLst>
           </p:cNvPr>
@@ -6720,7 +6720,7 @@
           <p:cNvPr id="6" name="CuadroTexto 5">
             <a:extLst>
               <a:ext uri="{FF2B5EF4-FFF2-40B4-BE49-F238E27FC236}">
-                <a16:creationId xmlns:a16="http://schemas.microsoft.com/office/drawing/2014/main" id="{C38F232F-EF10-A3D3-CB75-E641EC0DA9D5}"/>
+                <a16:creationId xmlns:a16="http://schemas.microsoft.com/office/drawing/2014/main" id="{0E61F719-5B40-A228-90BC-A0F4809D4B2D}"/>
               </a:ext>
             </a:extLst>
           </p:cNvPr>
@@ -6760,7 +6760,7 @@
           <p:cNvPr id="7" name="CuadroTexto 6">
             <a:extLst>
               <a:ext uri="{FF2B5EF4-FFF2-40B4-BE49-F238E27FC236}">
-                <a16:creationId xmlns:a16="http://schemas.microsoft.com/office/drawing/2014/main" id="{6FFB2152-F8EA-0244-347D-2E194B38A89F}"/>
+                <a16:creationId xmlns:a16="http://schemas.microsoft.com/office/drawing/2014/main" id="{AEE36208-22C8-A255-5CDF-6E33285538B6}"/>
               </a:ext>
             </a:extLst>
           </p:cNvPr>
@@ -6798,7 +6798,7 @@
     </p:spTree>
     <p:extLst>
       <p:ext uri="{BB962C8B-B14F-4D97-AF65-F5344CB8AC3E}">
-        <p14:creationId xmlns:p14="http://schemas.microsoft.com/office/powerpoint/2010/main" val="87446812"/>
+        <p14:creationId xmlns:p14="http://schemas.microsoft.com/office/powerpoint/2010/main" val="3048276671"/>
       </p:ext>
     </p:extLst>
   </p:cSld>
@@ -6838,7 +6838,7 @@
           <p:cNvPr id="2" name="CuadroTexto 1">
             <a:extLst>
               <a:ext uri="{FF2B5EF4-FFF2-40B4-BE49-F238E27FC236}">
-                <a16:creationId xmlns:a16="http://schemas.microsoft.com/office/drawing/2014/main" id="{32FE5A12-90F8-7D38-1400-C037B7FC56C7}"/>
+                <a16:creationId xmlns:a16="http://schemas.microsoft.com/office/drawing/2014/main" id="{CAA47B8B-73CA-F7E8-AD7A-AF3746C5F085}"/>
               </a:ext>
             </a:extLst>
           </p:cNvPr>
@@ -6878,7 +6878,7 @@
           <p:cNvPr id="3" name="CuadroTexto 2">
             <a:extLst>
               <a:ext uri="{FF2B5EF4-FFF2-40B4-BE49-F238E27FC236}">
-                <a16:creationId xmlns:a16="http://schemas.microsoft.com/office/drawing/2014/main" id="{52E5DD95-61D5-0FCB-DB6B-F6D83A2D2EA3}"/>
+                <a16:creationId xmlns:a16="http://schemas.microsoft.com/office/drawing/2014/main" id="{21352095-37FF-7FAF-3B7B-07BDCD6102E9}"/>
               </a:ext>
             </a:extLst>
           </p:cNvPr>
@@ -6918,7 +6918,7 @@
           <p:cNvPr id="4" name="CuadroTexto 3">
             <a:extLst>
               <a:ext uri="{FF2B5EF4-FFF2-40B4-BE49-F238E27FC236}">
-                <a16:creationId xmlns:a16="http://schemas.microsoft.com/office/drawing/2014/main" id="{19CB6F29-63B2-5EFA-4962-F0E1BF095FFE}"/>
+                <a16:creationId xmlns:a16="http://schemas.microsoft.com/office/drawing/2014/main" id="{36D4E0D8-10B9-E8E1-32AD-0F896586F572}"/>
               </a:ext>
             </a:extLst>
           </p:cNvPr>
@@ -6958,7 +6958,7 @@
           <p:cNvPr id="5" name="CuadroTexto 4">
             <a:extLst>
               <a:ext uri="{FF2B5EF4-FFF2-40B4-BE49-F238E27FC236}">
-                <a16:creationId xmlns:a16="http://schemas.microsoft.com/office/drawing/2014/main" id="{7057661D-9905-2FF9-7F3A-59BEB93B9947}"/>
+                <a16:creationId xmlns:a16="http://schemas.microsoft.com/office/drawing/2014/main" id="{40E9AAA9-408A-C011-AA05-C0047807AA96}"/>
               </a:ext>
             </a:extLst>
           </p:cNvPr>
@@ -7041,7 +7041,7 @@
           <p:cNvPr id="6" name="CuadroTexto 5">
             <a:extLst>
               <a:ext uri="{FF2B5EF4-FFF2-40B4-BE49-F238E27FC236}">
-                <a16:creationId xmlns:a16="http://schemas.microsoft.com/office/drawing/2014/main" id="{D7F05108-CA1B-A8EB-66E3-7CFF258015C7}"/>
+                <a16:creationId xmlns:a16="http://schemas.microsoft.com/office/drawing/2014/main" id="{CDFC56CD-F488-C8A2-2F73-1E1C82428919}"/>
               </a:ext>
             </a:extLst>
           </p:cNvPr>
@@ -7079,7 +7079,7 @@
     </p:spTree>
     <p:extLst>
       <p:ext uri="{BB962C8B-B14F-4D97-AF65-F5344CB8AC3E}">
-        <p14:creationId xmlns:p14="http://schemas.microsoft.com/office/powerpoint/2010/main" val="2232254612"/>
+        <p14:creationId xmlns:p14="http://schemas.microsoft.com/office/powerpoint/2010/main" val="1348730599"/>
       </p:ext>
     </p:extLst>
   </p:cSld>
@@ -7119,7 +7119,7 @@
           <p:cNvPr id="2" name="CuadroTexto 1">
             <a:extLst>
               <a:ext uri="{FF2B5EF4-FFF2-40B4-BE49-F238E27FC236}">
-                <a16:creationId xmlns:a16="http://schemas.microsoft.com/office/drawing/2014/main" id="{F79F1282-CF39-0930-9A05-344BCA0A17CE}"/>
+                <a16:creationId xmlns:a16="http://schemas.microsoft.com/office/drawing/2014/main" id="{D66F771D-844A-8A8A-1619-F262A4D39AA6}"/>
               </a:ext>
             </a:extLst>
           </p:cNvPr>
@@ -7159,7 +7159,7 @@
           <p:cNvPr id="3" name="CuadroTexto 2">
             <a:extLst>
               <a:ext uri="{FF2B5EF4-FFF2-40B4-BE49-F238E27FC236}">
-                <a16:creationId xmlns:a16="http://schemas.microsoft.com/office/drawing/2014/main" id="{CFAB9BAC-003E-318D-5484-8F806E5C49A4}"/>
+                <a16:creationId xmlns:a16="http://schemas.microsoft.com/office/drawing/2014/main" id="{AA0E707B-611E-F1AC-59DD-8C8448C234F9}"/>
               </a:ext>
             </a:extLst>
           </p:cNvPr>
@@ -7199,7 +7199,7 @@
           <p:cNvPr id="4" name="CuadroTexto 3">
             <a:extLst>
               <a:ext uri="{FF2B5EF4-FFF2-40B4-BE49-F238E27FC236}">
-                <a16:creationId xmlns:a16="http://schemas.microsoft.com/office/drawing/2014/main" id="{1F1A325E-957E-8185-77DE-C31F65EE7742}"/>
+                <a16:creationId xmlns:a16="http://schemas.microsoft.com/office/drawing/2014/main" id="{B273184F-ED8D-917C-985D-945732CFBA6D}"/>
               </a:ext>
             </a:extLst>
           </p:cNvPr>
@@ -7239,7 +7239,7 @@
           <p:cNvPr id="5" name="CuadroTexto 4">
             <a:extLst>
               <a:ext uri="{FF2B5EF4-FFF2-40B4-BE49-F238E27FC236}">
-                <a16:creationId xmlns:a16="http://schemas.microsoft.com/office/drawing/2014/main" id="{D8459745-0D6D-1621-55F1-880FD5C08BDC}"/>
+                <a16:creationId xmlns:a16="http://schemas.microsoft.com/office/drawing/2014/main" id="{1915B90E-BCE6-2D2C-6A00-56E4BEF8136F}"/>
               </a:ext>
             </a:extLst>
           </p:cNvPr>
@@ -7340,7 +7340,7 @@
           <p:cNvPr id="6" name="Rectángulo: esquinas redondeadas 5">
             <a:extLst>
               <a:ext uri="{FF2B5EF4-FFF2-40B4-BE49-F238E27FC236}">
-                <a16:creationId xmlns:a16="http://schemas.microsoft.com/office/drawing/2014/main" id="{E56AB671-7EBE-D66D-8636-8E3648846053}"/>
+                <a16:creationId xmlns:a16="http://schemas.microsoft.com/office/drawing/2014/main" id="{E3A242DE-AEFC-85A9-F6C5-D682491C8B55}"/>
               </a:ext>
             </a:extLst>
           </p:cNvPr>
@@ -7394,7 +7394,7 @@
           <p:cNvPr id="7" name="CuadroTexto 6">
             <a:extLst>
               <a:ext uri="{FF2B5EF4-FFF2-40B4-BE49-F238E27FC236}">
-                <a16:creationId xmlns:a16="http://schemas.microsoft.com/office/drawing/2014/main" id="{AB5C10D5-5A1F-196F-C105-4CD38F89BDA9}"/>
+                <a16:creationId xmlns:a16="http://schemas.microsoft.com/office/drawing/2014/main" id="{527E0B3B-A3CA-87F8-63E9-9D3A94567C78}"/>
               </a:ext>
             </a:extLst>
           </p:cNvPr>
@@ -7434,7 +7434,7 @@
           <p:cNvPr id="8" name="CuadroTexto 7">
             <a:extLst>
               <a:ext uri="{FF2B5EF4-FFF2-40B4-BE49-F238E27FC236}">
-                <a16:creationId xmlns:a16="http://schemas.microsoft.com/office/drawing/2014/main" id="{E9006636-8EC1-3112-DA77-AFE0F0559BC9}"/>
+                <a16:creationId xmlns:a16="http://schemas.microsoft.com/office/drawing/2014/main" id="{3EFBDDF0-1C89-E748-AE70-101E2A8D77B7}"/>
               </a:ext>
             </a:extLst>
           </p:cNvPr>
@@ -7472,7 +7472,7 @@
     </p:spTree>
     <p:extLst>
       <p:ext uri="{BB962C8B-B14F-4D97-AF65-F5344CB8AC3E}">
-        <p14:creationId xmlns:p14="http://schemas.microsoft.com/office/powerpoint/2010/main" val="3430339781"/>
+        <p14:creationId xmlns:p14="http://schemas.microsoft.com/office/powerpoint/2010/main" val="3051785877"/>
       </p:ext>
     </p:extLst>
   </p:cSld>
@@ -7512,7 +7512,7 @@
           <p:cNvPr id="2" name="CuadroTexto 1">
             <a:extLst>
               <a:ext uri="{FF2B5EF4-FFF2-40B4-BE49-F238E27FC236}">
-                <a16:creationId xmlns:a16="http://schemas.microsoft.com/office/drawing/2014/main" id="{8102CF5D-A8B2-F602-544C-D0D07D409CBE}"/>
+                <a16:creationId xmlns:a16="http://schemas.microsoft.com/office/drawing/2014/main" id="{636B7FD3-1393-5D89-5B28-09F9F173D23E}"/>
               </a:ext>
             </a:extLst>
           </p:cNvPr>
@@ -7552,7 +7552,7 @@
           <p:cNvPr id="3" name="CuadroTexto 2">
             <a:extLst>
               <a:ext uri="{FF2B5EF4-FFF2-40B4-BE49-F238E27FC236}">
-                <a16:creationId xmlns:a16="http://schemas.microsoft.com/office/drawing/2014/main" id="{5377035A-ED9B-B6E7-DFCC-5191FC3F5121}"/>
+                <a16:creationId xmlns:a16="http://schemas.microsoft.com/office/drawing/2014/main" id="{53F41C42-779D-C24A-7748-50A142FE32C0}"/>
               </a:ext>
             </a:extLst>
           </p:cNvPr>
@@ -7592,7 +7592,7 @@
           <p:cNvPr id="4" name="Rectángulo: esquinas redondeadas 3">
             <a:extLst>
               <a:ext uri="{FF2B5EF4-FFF2-40B4-BE49-F238E27FC236}">
-                <a16:creationId xmlns:a16="http://schemas.microsoft.com/office/drawing/2014/main" id="{93C19167-55BB-FE32-F49A-008FA3056082}"/>
+                <a16:creationId xmlns:a16="http://schemas.microsoft.com/office/drawing/2014/main" id="{09A8808C-9454-C366-AE0D-FB3DD96BEE04}"/>
               </a:ext>
             </a:extLst>
           </p:cNvPr>
@@ -7646,7 +7646,7 @@
           <p:cNvPr id="5" name="CuadroTexto 4">
             <a:extLst>
               <a:ext uri="{FF2B5EF4-FFF2-40B4-BE49-F238E27FC236}">
-                <a16:creationId xmlns:a16="http://schemas.microsoft.com/office/drawing/2014/main" id="{DC08BC56-DA41-2C62-D237-6F623EA2FB60}"/>
+                <a16:creationId xmlns:a16="http://schemas.microsoft.com/office/drawing/2014/main" id="{E955CF94-8241-1786-EF6F-E855D247F4CC}"/>
               </a:ext>
             </a:extLst>
           </p:cNvPr>
@@ -7686,7 +7686,7 @@
           <p:cNvPr id="6" name="CuadroTexto 5">
             <a:extLst>
               <a:ext uri="{FF2B5EF4-FFF2-40B4-BE49-F238E27FC236}">
-                <a16:creationId xmlns:a16="http://schemas.microsoft.com/office/drawing/2014/main" id="{24BD4EF2-0FF2-CEB6-7035-B36C29E26061}"/>
+                <a16:creationId xmlns:a16="http://schemas.microsoft.com/office/drawing/2014/main" id="{225FD148-BF6E-CB4D-57D2-9E2214759528}"/>
               </a:ext>
             </a:extLst>
           </p:cNvPr>
@@ -7726,7 +7726,7 @@
           <p:cNvPr id="7" name="Rectángulo: esquinas redondeadas 6">
             <a:extLst>
               <a:ext uri="{FF2B5EF4-FFF2-40B4-BE49-F238E27FC236}">
-                <a16:creationId xmlns:a16="http://schemas.microsoft.com/office/drawing/2014/main" id="{F39DCFA7-327D-5C67-963F-CA96C9CDA483}"/>
+                <a16:creationId xmlns:a16="http://schemas.microsoft.com/office/drawing/2014/main" id="{93199024-54D7-0743-9E32-A3E116F97E72}"/>
               </a:ext>
             </a:extLst>
           </p:cNvPr>
@@ -7780,7 +7780,7 @@
           <p:cNvPr id="8" name="CuadroTexto 7">
             <a:extLst>
               <a:ext uri="{FF2B5EF4-FFF2-40B4-BE49-F238E27FC236}">
-                <a16:creationId xmlns:a16="http://schemas.microsoft.com/office/drawing/2014/main" id="{9C3EDE71-F7A1-70A2-2B83-B51AEE509A6D}"/>
+                <a16:creationId xmlns:a16="http://schemas.microsoft.com/office/drawing/2014/main" id="{951C0E31-4E5A-F800-7EBD-DAB5664930F2}"/>
               </a:ext>
             </a:extLst>
           </p:cNvPr>
@@ -7820,7 +7820,7 @@
           <p:cNvPr id="9" name="CuadroTexto 8">
             <a:extLst>
               <a:ext uri="{FF2B5EF4-FFF2-40B4-BE49-F238E27FC236}">
-                <a16:creationId xmlns:a16="http://schemas.microsoft.com/office/drawing/2014/main" id="{19E534A0-BF94-CB21-95FE-55905DA6AF47}"/>
+                <a16:creationId xmlns:a16="http://schemas.microsoft.com/office/drawing/2014/main" id="{EA031D46-0FAC-63CC-B25A-E58D125ADB95}"/>
               </a:ext>
             </a:extLst>
           </p:cNvPr>
@@ -7860,7 +7860,7 @@
           <p:cNvPr id="10" name="Rectángulo: esquinas redondeadas 9">
             <a:extLst>
               <a:ext uri="{FF2B5EF4-FFF2-40B4-BE49-F238E27FC236}">
-                <a16:creationId xmlns:a16="http://schemas.microsoft.com/office/drawing/2014/main" id="{AB46A34D-43C8-1F34-305D-9F344085BE16}"/>
+                <a16:creationId xmlns:a16="http://schemas.microsoft.com/office/drawing/2014/main" id="{B8981CA7-A9DA-FD1F-C526-13A952BE22D2}"/>
               </a:ext>
             </a:extLst>
           </p:cNvPr>
@@ -7914,7 +7914,7 @@
           <p:cNvPr id="11" name="CuadroTexto 10">
             <a:extLst>
               <a:ext uri="{FF2B5EF4-FFF2-40B4-BE49-F238E27FC236}">
-                <a16:creationId xmlns:a16="http://schemas.microsoft.com/office/drawing/2014/main" id="{0D24BB83-B771-BB35-1FEF-B1E61EA78524}"/>
+                <a16:creationId xmlns:a16="http://schemas.microsoft.com/office/drawing/2014/main" id="{FD029213-F952-0DDD-A7B1-58D1A75E1C35}"/>
               </a:ext>
             </a:extLst>
           </p:cNvPr>
@@ -7954,7 +7954,7 @@
           <p:cNvPr id="12" name="CuadroTexto 11">
             <a:extLst>
               <a:ext uri="{FF2B5EF4-FFF2-40B4-BE49-F238E27FC236}">
-                <a16:creationId xmlns:a16="http://schemas.microsoft.com/office/drawing/2014/main" id="{DE8B2ECC-91BD-8D8A-7FDC-C9D7C640EC42}"/>
+                <a16:creationId xmlns:a16="http://schemas.microsoft.com/office/drawing/2014/main" id="{637BC3FE-0C17-AD8F-C01A-229033F77416}"/>
               </a:ext>
             </a:extLst>
           </p:cNvPr>
@@ -7994,7 +7994,7 @@
           <p:cNvPr id="13" name="Rectángulo: esquinas redondeadas 12">
             <a:extLst>
               <a:ext uri="{FF2B5EF4-FFF2-40B4-BE49-F238E27FC236}">
-                <a16:creationId xmlns:a16="http://schemas.microsoft.com/office/drawing/2014/main" id="{F4BD3E8C-D8E9-CCD6-EAC4-A0A3C674087D}"/>
+                <a16:creationId xmlns:a16="http://schemas.microsoft.com/office/drawing/2014/main" id="{7DF30922-9107-776D-3018-6A86AA3D6E40}"/>
               </a:ext>
             </a:extLst>
           </p:cNvPr>
@@ -8048,7 +8048,7 @@
           <p:cNvPr id="14" name="CuadroTexto 13">
             <a:extLst>
               <a:ext uri="{FF2B5EF4-FFF2-40B4-BE49-F238E27FC236}">
-                <a16:creationId xmlns:a16="http://schemas.microsoft.com/office/drawing/2014/main" id="{61508E45-19E6-E543-7BEA-48F37415429D}"/>
+                <a16:creationId xmlns:a16="http://schemas.microsoft.com/office/drawing/2014/main" id="{5E3B5AC8-5916-8714-C52E-8C39DC8077EA}"/>
               </a:ext>
             </a:extLst>
           </p:cNvPr>
@@ -8088,7 +8088,7 @@
           <p:cNvPr id="15" name="CuadroTexto 14">
             <a:extLst>
               <a:ext uri="{FF2B5EF4-FFF2-40B4-BE49-F238E27FC236}">
-                <a16:creationId xmlns:a16="http://schemas.microsoft.com/office/drawing/2014/main" id="{A9712C04-C18D-5F91-AA09-B4F771A0F2AE}"/>
+                <a16:creationId xmlns:a16="http://schemas.microsoft.com/office/drawing/2014/main" id="{7D90F14A-D89D-B40D-7E84-52EABEF1A787}"/>
               </a:ext>
             </a:extLst>
           </p:cNvPr>
@@ -8126,7 +8126,7 @@
     </p:spTree>
     <p:extLst>
       <p:ext uri="{BB962C8B-B14F-4D97-AF65-F5344CB8AC3E}">
-        <p14:creationId xmlns:p14="http://schemas.microsoft.com/office/powerpoint/2010/main" val="1188991897"/>
+        <p14:creationId xmlns:p14="http://schemas.microsoft.com/office/powerpoint/2010/main" val="3508173636"/>
       </p:ext>
     </p:extLst>
   </p:cSld>
@@ -8166,7 +8166,7 @@
           <p:cNvPr id="2" name="CuadroTexto 1">
             <a:extLst>
               <a:ext uri="{FF2B5EF4-FFF2-40B4-BE49-F238E27FC236}">
-                <a16:creationId xmlns:a16="http://schemas.microsoft.com/office/drawing/2014/main" id="{D9F9E01F-987D-C557-46CE-5BFA55DE4926}"/>
+                <a16:creationId xmlns:a16="http://schemas.microsoft.com/office/drawing/2014/main" id="{3B53BFB5-E3E0-B286-B406-150DBBCC870F}"/>
               </a:ext>
             </a:extLst>
           </p:cNvPr>
@@ -8206,7 +8206,7 @@
           <p:cNvPr id="3" name="CuadroTexto 2">
             <a:extLst>
               <a:ext uri="{FF2B5EF4-FFF2-40B4-BE49-F238E27FC236}">
-                <a16:creationId xmlns:a16="http://schemas.microsoft.com/office/drawing/2014/main" id="{64760B98-9D19-6368-974F-2254126C9C13}"/>
+                <a16:creationId xmlns:a16="http://schemas.microsoft.com/office/drawing/2014/main" id="{4A18F661-8504-FF24-794C-DEB98DE8811E}"/>
               </a:ext>
             </a:extLst>
           </p:cNvPr>
@@ -8246,7 +8246,7 @@
           <p:cNvPr id="4" name="CuadroTexto 3">
             <a:extLst>
               <a:ext uri="{FF2B5EF4-FFF2-40B4-BE49-F238E27FC236}">
-                <a16:creationId xmlns:a16="http://schemas.microsoft.com/office/drawing/2014/main" id="{D7BB10BA-4D7A-E13E-B18F-EE7C55973A81}"/>
+                <a16:creationId xmlns:a16="http://schemas.microsoft.com/office/drawing/2014/main" id="{474815DA-F3A7-AB78-4388-EC3336FFFA42}"/>
               </a:ext>
             </a:extLst>
           </p:cNvPr>
@@ -8286,7 +8286,7 @@
           <p:cNvPr id="6" name="Imagen 5">
             <a:extLst>
               <a:ext uri="{FF2B5EF4-FFF2-40B4-BE49-F238E27FC236}">
-                <a16:creationId xmlns:a16="http://schemas.microsoft.com/office/drawing/2014/main" id="{6DCCBB1E-47E7-1DA6-E4D1-2AB1FAAC7016}"/>
+                <a16:creationId xmlns:a16="http://schemas.microsoft.com/office/drawing/2014/main" id="{17606F8B-DB37-5589-BE9B-56D891B9004E}"/>
               </a:ext>
             </a:extLst>
           </p:cNvPr>
@@ -8327,7 +8327,7 @@
           <p:cNvPr id="7" name="CuadroTexto 6">
             <a:extLst>
               <a:ext uri="{FF2B5EF4-FFF2-40B4-BE49-F238E27FC236}">
-                <a16:creationId xmlns:a16="http://schemas.microsoft.com/office/drawing/2014/main" id="{E7BA3F35-0CF1-365A-F279-30E9CDFF97DF}"/>
+                <a16:creationId xmlns:a16="http://schemas.microsoft.com/office/drawing/2014/main" id="{564781DF-542B-126E-AFFB-E71F3C2FEFF7}"/>
               </a:ext>
             </a:extLst>
           </p:cNvPr>
@@ -8444,7 +8444,7 @@
     </p:spTree>
     <p:extLst>
       <p:ext uri="{BB962C8B-B14F-4D97-AF65-F5344CB8AC3E}">
-        <p14:creationId xmlns:p14="http://schemas.microsoft.com/office/powerpoint/2010/main" val="1834935555"/>
+        <p14:creationId xmlns:p14="http://schemas.microsoft.com/office/powerpoint/2010/main" val="3250483006"/>
       </p:ext>
     </p:extLst>
   </p:cSld>
@@ -8484,7 +8484,7 @@
           <p:cNvPr id="2" name="CuadroTexto 1">
             <a:extLst>
               <a:ext uri="{FF2B5EF4-FFF2-40B4-BE49-F238E27FC236}">
-                <a16:creationId xmlns:a16="http://schemas.microsoft.com/office/drawing/2014/main" id="{4C0B66EA-084D-585F-B23B-A10967107D10}"/>
+                <a16:creationId xmlns:a16="http://schemas.microsoft.com/office/drawing/2014/main" id="{83A0BADC-A61B-8DCF-868B-4B0627F917C5}"/>
               </a:ext>
             </a:extLst>
           </p:cNvPr>
@@ -8524,7 +8524,7 @@
           <p:cNvPr id="3" name="CuadroTexto 2">
             <a:extLst>
               <a:ext uri="{FF2B5EF4-FFF2-40B4-BE49-F238E27FC236}">
-                <a16:creationId xmlns:a16="http://schemas.microsoft.com/office/drawing/2014/main" id="{20C858BA-3918-B1B7-5271-E5BEF67FCE8D}"/>
+                <a16:creationId xmlns:a16="http://schemas.microsoft.com/office/drawing/2014/main" id="{B77C57D6-4B7F-A8F4-C15A-BE6C5EEDE134}"/>
               </a:ext>
             </a:extLst>
           </p:cNvPr>
@@ -8564,7 +8564,7 @@
           <p:cNvPr id="5" name="Imagen 4">
             <a:extLst>
               <a:ext uri="{FF2B5EF4-FFF2-40B4-BE49-F238E27FC236}">
-                <a16:creationId xmlns:a16="http://schemas.microsoft.com/office/drawing/2014/main" id="{05A08FDD-5CD7-0E1E-05BF-116B1EA345E7}"/>
+                <a16:creationId xmlns:a16="http://schemas.microsoft.com/office/drawing/2014/main" id="{C278ECE0-4371-D756-05E7-2F4D5C7651A8}"/>
               </a:ext>
             </a:extLst>
           </p:cNvPr>
@@ -8605,7 +8605,7 @@
           <p:cNvPr id="6" name="CuadroTexto 5">
             <a:extLst>
               <a:ext uri="{FF2B5EF4-FFF2-40B4-BE49-F238E27FC236}">
-                <a16:creationId xmlns:a16="http://schemas.microsoft.com/office/drawing/2014/main" id="{8F3C56D3-0158-5879-CD7C-9DE53E89FBD8}"/>
+                <a16:creationId xmlns:a16="http://schemas.microsoft.com/office/drawing/2014/main" id="{03CD8241-1366-6491-F780-48534F0B21A4}"/>
               </a:ext>
             </a:extLst>
           </p:cNvPr>
@@ -8645,7 +8645,7 @@
           <p:cNvPr id="7" name="CuadroTexto 6">
             <a:extLst>
               <a:ext uri="{FF2B5EF4-FFF2-40B4-BE49-F238E27FC236}">
-                <a16:creationId xmlns:a16="http://schemas.microsoft.com/office/drawing/2014/main" id="{F5B700DD-EF8E-A18A-CC58-19279B8B9ADF}"/>
+                <a16:creationId xmlns:a16="http://schemas.microsoft.com/office/drawing/2014/main" id="{72A47E0A-4FF4-201D-6F6E-2CC8BB1FA1AE}"/>
               </a:ext>
             </a:extLst>
           </p:cNvPr>
@@ -8744,7 +8744,7 @@
     </p:spTree>
     <p:extLst>
       <p:ext uri="{BB962C8B-B14F-4D97-AF65-F5344CB8AC3E}">
-        <p14:creationId xmlns:p14="http://schemas.microsoft.com/office/powerpoint/2010/main" val="3172759158"/>
+        <p14:creationId xmlns:p14="http://schemas.microsoft.com/office/powerpoint/2010/main" val="3309798934"/>
       </p:ext>
     </p:extLst>
   </p:cSld>
@@ -8784,7 +8784,7 @@
           <p:cNvPr id="2" name="CuadroTexto 1">
             <a:extLst>
               <a:ext uri="{FF2B5EF4-FFF2-40B4-BE49-F238E27FC236}">
-                <a16:creationId xmlns:a16="http://schemas.microsoft.com/office/drawing/2014/main" id="{8095D627-0DED-D2F5-04A6-8B1A3C771A3E}"/>
+                <a16:creationId xmlns:a16="http://schemas.microsoft.com/office/drawing/2014/main" id="{DECB3CC9-B2AF-884D-2AB3-040BD637FF04}"/>
               </a:ext>
             </a:extLst>
           </p:cNvPr>
@@ -8824,7 +8824,7 @@
           <p:cNvPr id="3" name="CuadroTexto 2">
             <a:extLst>
               <a:ext uri="{FF2B5EF4-FFF2-40B4-BE49-F238E27FC236}">
-                <a16:creationId xmlns:a16="http://schemas.microsoft.com/office/drawing/2014/main" id="{BD5AACBD-EC6B-96A3-57FD-5B2984258722}"/>
+                <a16:creationId xmlns:a16="http://schemas.microsoft.com/office/drawing/2014/main" id="{E0ADE18F-5D82-9966-D525-D6A900E12156}"/>
               </a:ext>
             </a:extLst>
           </p:cNvPr>
@@ -8864,7 +8864,7 @@
           <p:cNvPr id="4" name="CuadroTexto 3">
             <a:extLst>
               <a:ext uri="{FF2B5EF4-FFF2-40B4-BE49-F238E27FC236}">
-                <a16:creationId xmlns:a16="http://schemas.microsoft.com/office/drawing/2014/main" id="{1851A165-9507-CF05-7AB0-0FAB3001E044}"/>
+                <a16:creationId xmlns:a16="http://schemas.microsoft.com/office/drawing/2014/main" id="{88AEFA1B-178F-870D-0317-45F8298E0A57}"/>
               </a:ext>
             </a:extLst>
           </p:cNvPr>
@@ -8904,7 +8904,7 @@
           <p:cNvPr id="6" name="Imagen 5">
             <a:extLst>
               <a:ext uri="{FF2B5EF4-FFF2-40B4-BE49-F238E27FC236}">
-                <a16:creationId xmlns:a16="http://schemas.microsoft.com/office/drawing/2014/main" id="{4AD6CE01-9208-4F88-E2BE-79C30F531AD6}"/>
+                <a16:creationId xmlns:a16="http://schemas.microsoft.com/office/drawing/2014/main" id="{5A73259E-6524-4B88-6FB4-673FDE73CBE3}"/>
               </a:ext>
             </a:extLst>
           </p:cNvPr>
@@ -8945,7 +8945,7 @@
           <p:cNvPr id="7" name="Rectángulo: esquinas redondeadas 6">
             <a:extLst>
               <a:ext uri="{FF2B5EF4-FFF2-40B4-BE49-F238E27FC236}">
-                <a16:creationId xmlns:a16="http://schemas.microsoft.com/office/drawing/2014/main" id="{558A14B5-28F9-D445-33A9-5222D6E09D28}"/>
+                <a16:creationId xmlns:a16="http://schemas.microsoft.com/office/drawing/2014/main" id="{5EC5033A-540D-3307-6171-549F21CA20A1}"/>
               </a:ext>
             </a:extLst>
           </p:cNvPr>
@@ -8999,7 +8999,7 @@
           <p:cNvPr id="8" name="CuadroTexto 7">
             <a:extLst>
               <a:ext uri="{FF2B5EF4-FFF2-40B4-BE49-F238E27FC236}">
-                <a16:creationId xmlns:a16="http://schemas.microsoft.com/office/drawing/2014/main" id="{DEC97CD0-A452-8DB1-FD4C-DE5C118181A9}"/>
+                <a16:creationId xmlns:a16="http://schemas.microsoft.com/office/drawing/2014/main" id="{21007BA7-9FFB-DCB4-1D97-C744AE45798E}"/>
               </a:ext>
             </a:extLst>
           </p:cNvPr>
@@ -9039,7 +9039,7 @@
           <p:cNvPr id="9" name="CuadroTexto 8">
             <a:extLst>
               <a:ext uri="{FF2B5EF4-FFF2-40B4-BE49-F238E27FC236}">
-                <a16:creationId xmlns:a16="http://schemas.microsoft.com/office/drawing/2014/main" id="{1E30FCFA-A334-B671-8BAC-2ACC755A66E5}"/>
+                <a16:creationId xmlns:a16="http://schemas.microsoft.com/office/drawing/2014/main" id="{A1DC66D2-1CB2-5133-3694-5E86CEAD394C}"/>
               </a:ext>
             </a:extLst>
           </p:cNvPr>
@@ -9079,7 +9079,7 @@
           <p:cNvPr id="10" name="Rectángulo: esquinas redondeadas 9">
             <a:extLst>
               <a:ext uri="{FF2B5EF4-FFF2-40B4-BE49-F238E27FC236}">
-                <a16:creationId xmlns:a16="http://schemas.microsoft.com/office/drawing/2014/main" id="{13B8CA52-724C-14CD-9D81-4874AEEF19CA}"/>
+                <a16:creationId xmlns:a16="http://schemas.microsoft.com/office/drawing/2014/main" id="{8FBF2FC0-F7F6-66F8-3FD5-89033FE35041}"/>
               </a:ext>
             </a:extLst>
           </p:cNvPr>
@@ -9133,7 +9133,7 @@
           <p:cNvPr id="11" name="CuadroTexto 10">
             <a:extLst>
               <a:ext uri="{FF2B5EF4-FFF2-40B4-BE49-F238E27FC236}">
-                <a16:creationId xmlns:a16="http://schemas.microsoft.com/office/drawing/2014/main" id="{BA96A11B-9419-E6FB-A43D-6D758208A627}"/>
+                <a16:creationId xmlns:a16="http://schemas.microsoft.com/office/drawing/2014/main" id="{FE4D34F5-1380-3F07-15C9-DC8E7A5A6E38}"/>
               </a:ext>
             </a:extLst>
           </p:cNvPr>
@@ -9173,7 +9173,7 @@
           <p:cNvPr id="12" name="CuadroTexto 11">
             <a:extLst>
               <a:ext uri="{FF2B5EF4-FFF2-40B4-BE49-F238E27FC236}">
-                <a16:creationId xmlns:a16="http://schemas.microsoft.com/office/drawing/2014/main" id="{1539EB69-7084-165D-C856-74EEBC0B351F}"/>
+                <a16:creationId xmlns:a16="http://schemas.microsoft.com/office/drawing/2014/main" id="{4A22DDC2-2FA9-86F2-D8A4-587D847AA58C}"/>
               </a:ext>
             </a:extLst>
           </p:cNvPr>
@@ -9213,7 +9213,7 @@
           <p:cNvPr id="13" name="Rectángulo: esquinas redondeadas 12">
             <a:extLst>
               <a:ext uri="{FF2B5EF4-FFF2-40B4-BE49-F238E27FC236}">
-                <a16:creationId xmlns:a16="http://schemas.microsoft.com/office/drawing/2014/main" id="{EB327542-0B26-7772-C0F4-ABA8079202AB}"/>
+                <a16:creationId xmlns:a16="http://schemas.microsoft.com/office/drawing/2014/main" id="{0230A069-2E64-05BB-7CD7-CC6D167E8205}"/>
               </a:ext>
             </a:extLst>
           </p:cNvPr>
@@ -9267,7 +9267,7 @@
           <p:cNvPr id="14" name="CuadroTexto 13">
             <a:extLst>
               <a:ext uri="{FF2B5EF4-FFF2-40B4-BE49-F238E27FC236}">
-                <a16:creationId xmlns:a16="http://schemas.microsoft.com/office/drawing/2014/main" id="{C760CE69-8E84-AA02-E372-1FA31F2D6E0A}"/>
+                <a16:creationId xmlns:a16="http://schemas.microsoft.com/office/drawing/2014/main" id="{B723A12F-CBDE-299B-6334-523292289C3B}"/>
               </a:ext>
             </a:extLst>
           </p:cNvPr>
@@ -9307,7 +9307,7 @@
           <p:cNvPr id="15" name="CuadroTexto 14">
             <a:extLst>
               <a:ext uri="{FF2B5EF4-FFF2-40B4-BE49-F238E27FC236}">
-                <a16:creationId xmlns:a16="http://schemas.microsoft.com/office/drawing/2014/main" id="{A41DA389-F831-0FB8-2195-73988D607916}"/>
+                <a16:creationId xmlns:a16="http://schemas.microsoft.com/office/drawing/2014/main" id="{60FF19A0-920B-49AB-F4C5-D29D6AE915CC}"/>
               </a:ext>
             </a:extLst>
           </p:cNvPr>
@@ -9345,7 +9345,7 @@
     </p:spTree>
     <p:extLst>
       <p:ext uri="{BB962C8B-B14F-4D97-AF65-F5344CB8AC3E}">
-        <p14:creationId xmlns:p14="http://schemas.microsoft.com/office/powerpoint/2010/main" val="552193992"/>
+        <p14:creationId xmlns:p14="http://schemas.microsoft.com/office/powerpoint/2010/main" val="2650554057"/>
       </p:ext>
     </p:extLst>
   </p:cSld>
@@ -9385,7 +9385,7 @@
           <p:cNvPr id="2" name="CuadroTexto 1">
             <a:extLst>
               <a:ext uri="{FF2B5EF4-FFF2-40B4-BE49-F238E27FC236}">
-                <a16:creationId xmlns:a16="http://schemas.microsoft.com/office/drawing/2014/main" id="{F6DC624F-570B-5514-29B2-4BD5452AA458}"/>
+                <a16:creationId xmlns:a16="http://schemas.microsoft.com/office/drawing/2014/main" id="{21222F39-FC80-9898-FA18-297D95C93417}"/>
               </a:ext>
             </a:extLst>
           </p:cNvPr>
@@ -9425,7 +9425,7 @@
           <p:cNvPr id="3" name="CuadroTexto 2">
             <a:extLst>
               <a:ext uri="{FF2B5EF4-FFF2-40B4-BE49-F238E27FC236}">
-                <a16:creationId xmlns:a16="http://schemas.microsoft.com/office/drawing/2014/main" id="{DBADECAD-845D-687E-ED29-95892FB36FFB}"/>
+                <a16:creationId xmlns:a16="http://schemas.microsoft.com/office/drawing/2014/main" id="{74E41328-CB24-DC7F-9329-F8F14BFA94F9}"/>
               </a:ext>
             </a:extLst>
           </p:cNvPr>
@@ -9465,7 +9465,7 @@
           <p:cNvPr id="5" name="Imagen 4">
             <a:extLst>
               <a:ext uri="{FF2B5EF4-FFF2-40B4-BE49-F238E27FC236}">
-                <a16:creationId xmlns:a16="http://schemas.microsoft.com/office/drawing/2014/main" id="{2AAA1BD7-8721-C4EE-98D7-59F31438D324}"/>
+                <a16:creationId xmlns:a16="http://schemas.microsoft.com/office/drawing/2014/main" id="{859D7CB8-323C-EF68-B400-3B8A93AE32AF}"/>
               </a:ext>
             </a:extLst>
           </p:cNvPr>
@@ -9488,8 +9488,8 @@
         </p:blipFill>
         <p:spPr>
           <a:xfrm>
-            <a:off x="1255362" y="1778000"/>
-            <a:ext cx="5502977" cy="4089400"/>
+            <a:off x="609600" y="1911747"/>
+            <a:ext cx="6794500" cy="3821906"/>
           </a:xfrm>
           <a:prstGeom prst="rect">
             <a:avLst/>
@@ -9506,7 +9506,7 @@
           <p:cNvPr id="6" name="CuadroTexto 5">
             <a:extLst>
               <a:ext uri="{FF2B5EF4-FFF2-40B4-BE49-F238E27FC236}">
-                <a16:creationId xmlns:a16="http://schemas.microsoft.com/office/drawing/2014/main" id="{A891BB2D-8A49-6C6C-B4C7-746AF0A5C7DA}"/>
+                <a16:creationId xmlns:a16="http://schemas.microsoft.com/office/drawing/2014/main" id="{5265ACBE-4637-D99D-5B00-E4FBEDC15BF3}"/>
               </a:ext>
             </a:extLst>
           </p:cNvPr>
@@ -9605,7 +9605,7 @@
     </p:spTree>
     <p:extLst>
       <p:ext uri="{BB962C8B-B14F-4D97-AF65-F5344CB8AC3E}">
-        <p14:creationId xmlns:p14="http://schemas.microsoft.com/office/powerpoint/2010/main" val="1551878589"/>
+        <p14:creationId xmlns:p14="http://schemas.microsoft.com/office/powerpoint/2010/main" val="1221587346"/>
       </p:ext>
     </p:extLst>
   </p:cSld>
@@ -9645,7 +9645,7 @@
           <p:cNvPr id="2" name="CuadroTexto 1">
             <a:extLst>
               <a:ext uri="{FF2B5EF4-FFF2-40B4-BE49-F238E27FC236}">
-                <a16:creationId xmlns:a16="http://schemas.microsoft.com/office/drawing/2014/main" id="{6AE3F5B9-FC61-F650-E736-1FBDA21C5A35}"/>
+                <a16:creationId xmlns:a16="http://schemas.microsoft.com/office/drawing/2014/main" id="{7EB3A68E-3279-060F-AECA-5DE13003702F}"/>
               </a:ext>
             </a:extLst>
           </p:cNvPr>
@@ -9685,7 +9685,7 @@
           <p:cNvPr id="3" name="CuadroTexto 2">
             <a:extLst>
               <a:ext uri="{FF2B5EF4-FFF2-40B4-BE49-F238E27FC236}">
-                <a16:creationId xmlns:a16="http://schemas.microsoft.com/office/drawing/2014/main" id="{51F36350-96B8-A6ED-A1D9-11FC69774523}"/>
+                <a16:creationId xmlns:a16="http://schemas.microsoft.com/office/drawing/2014/main" id="{DF4D926D-60E2-B416-864D-E04AB57B7ECD}"/>
               </a:ext>
             </a:extLst>
           </p:cNvPr>
@@ -9725,7 +9725,7 @@
           <p:cNvPr id="4" name="CuadroTexto 3">
             <a:extLst>
               <a:ext uri="{FF2B5EF4-FFF2-40B4-BE49-F238E27FC236}">
-                <a16:creationId xmlns:a16="http://schemas.microsoft.com/office/drawing/2014/main" id="{AE8D12A9-7D05-7900-79F3-827C8D8003A0}"/>
+                <a16:creationId xmlns:a16="http://schemas.microsoft.com/office/drawing/2014/main" id="{FB19245F-FFC7-BDAB-495E-0D7D17C72884}"/>
               </a:ext>
             </a:extLst>
           </p:cNvPr>
@@ -9765,7 +9765,7 @@
           <p:cNvPr id="6" name="Imagen 5">
             <a:extLst>
               <a:ext uri="{FF2B5EF4-FFF2-40B4-BE49-F238E27FC236}">
-                <a16:creationId xmlns:a16="http://schemas.microsoft.com/office/drawing/2014/main" id="{41534564-ACE1-B230-C5E1-0B8142A7CC76}"/>
+                <a16:creationId xmlns:a16="http://schemas.microsoft.com/office/drawing/2014/main" id="{1C30C189-9923-156D-3024-F088E9BE2611}"/>
               </a:ext>
             </a:extLst>
           </p:cNvPr>
@@ -9806,7 +9806,7 @@
           <p:cNvPr id="7" name="Rectángulo: esquinas redondeadas 6">
             <a:extLst>
               <a:ext uri="{FF2B5EF4-FFF2-40B4-BE49-F238E27FC236}">
-                <a16:creationId xmlns:a16="http://schemas.microsoft.com/office/drawing/2014/main" id="{9C61D247-B210-5407-C651-B8B328DCE8F0}"/>
+                <a16:creationId xmlns:a16="http://schemas.microsoft.com/office/drawing/2014/main" id="{E4D502B2-61E4-2133-B17C-16808FCB3E1D}"/>
               </a:ext>
             </a:extLst>
           </p:cNvPr>
@@ -9860,7 +9860,7 @@
           <p:cNvPr id="8" name="CuadroTexto 7">
             <a:extLst>
               <a:ext uri="{FF2B5EF4-FFF2-40B4-BE49-F238E27FC236}">
-                <a16:creationId xmlns:a16="http://schemas.microsoft.com/office/drawing/2014/main" id="{134E52FC-4AC6-F979-6870-634DB73985E6}"/>
+                <a16:creationId xmlns:a16="http://schemas.microsoft.com/office/drawing/2014/main" id="{348A6364-E459-498F-8A31-14E893D14003}"/>
               </a:ext>
             </a:extLst>
           </p:cNvPr>
@@ -9900,7 +9900,7 @@
           <p:cNvPr id="9" name="CuadroTexto 8">
             <a:extLst>
               <a:ext uri="{FF2B5EF4-FFF2-40B4-BE49-F238E27FC236}">
-                <a16:creationId xmlns:a16="http://schemas.microsoft.com/office/drawing/2014/main" id="{91CC3839-3DF0-0DFC-8C91-0B35A64D180F}"/>
+                <a16:creationId xmlns:a16="http://schemas.microsoft.com/office/drawing/2014/main" id="{E488D5A9-4B9D-A8F7-1245-94C48B29EE86}"/>
               </a:ext>
             </a:extLst>
           </p:cNvPr>
@@ -9938,7 +9938,7 @@
     </p:spTree>
     <p:extLst>
       <p:ext uri="{BB962C8B-B14F-4D97-AF65-F5344CB8AC3E}">
-        <p14:creationId xmlns:p14="http://schemas.microsoft.com/office/powerpoint/2010/main" val="2332594847"/>
+        <p14:creationId xmlns:p14="http://schemas.microsoft.com/office/powerpoint/2010/main" val="2867785587"/>
       </p:ext>
     </p:extLst>
   </p:cSld>
@@ -9978,7 +9978,7 @@
           <p:cNvPr id="2" name="CuadroTexto 1">
             <a:extLst>
               <a:ext uri="{FF2B5EF4-FFF2-40B4-BE49-F238E27FC236}">
-                <a16:creationId xmlns:a16="http://schemas.microsoft.com/office/drawing/2014/main" id="{4C9D0D19-0594-F6DD-C876-3630DC5FAED4}"/>
+                <a16:creationId xmlns:a16="http://schemas.microsoft.com/office/drawing/2014/main" id="{56D933A8-E66E-3E19-EEC8-5E6C2E671291}"/>
               </a:ext>
             </a:extLst>
           </p:cNvPr>
@@ -10018,7 +10018,7 @@
           <p:cNvPr id="3" name="CuadroTexto 2">
             <a:extLst>
               <a:ext uri="{FF2B5EF4-FFF2-40B4-BE49-F238E27FC236}">
-                <a16:creationId xmlns:a16="http://schemas.microsoft.com/office/drawing/2014/main" id="{DFF1DA6C-954E-DA96-051F-584C7A182051}"/>
+                <a16:creationId xmlns:a16="http://schemas.microsoft.com/office/drawing/2014/main" id="{AEA54564-7BAC-9E71-A8E6-75283E4B6DDF}"/>
               </a:ext>
             </a:extLst>
           </p:cNvPr>
@@ -10058,7 +10058,7 @@
           <p:cNvPr id="5" name="Imagen 4">
             <a:extLst>
               <a:ext uri="{FF2B5EF4-FFF2-40B4-BE49-F238E27FC236}">
-                <a16:creationId xmlns:a16="http://schemas.microsoft.com/office/drawing/2014/main" id="{CBFD4C94-ABB9-2AFF-A68C-57CE7FD58330}"/>
+                <a16:creationId xmlns:a16="http://schemas.microsoft.com/office/drawing/2014/main" id="{1AE85FD6-E094-AD69-5AE3-DF369205340A}"/>
               </a:ext>
             </a:extLst>
           </p:cNvPr>
@@ -10081,8 +10081,8 @@
         </p:blipFill>
         <p:spPr>
           <a:xfrm>
-            <a:off x="1637431" y="1841500"/>
-            <a:ext cx="2897338" cy="3810000"/>
+            <a:off x="609600" y="2353468"/>
+            <a:ext cx="4953000" cy="2786063"/>
           </a:xfrm>
           <a:prstGeom prst="rect">
             <a:avLst/>
@@ -10099,7 +10099,7 @@
           <p:cNvPr id="7" name="Imagen 6">
             <a:extLst>
               <a:ext uri="{FF2B5EF4-FFF2-40B4-BE49-F238E27FC236}">
-                <a16:creationId xmlns:a16="http://schemas.microsoft.com/office/drawing/2014/main" id="{EBAE5865-7838-FE08-B7A2-A33BB175A773}"/>
+                <a16:creationId xmlns:a16="http://schemas.microsoft.com/office/drawing/2014/main" id="{8CDA435B-5E63-87ED-264F-D4E406CB827B}"/>
               </a:ext>
             </a:extLst>
           </p:cNvPr>
@@ -10140,7 +10140,7 @@
           <p:cNvPr id="8" name="CuadroTexto 7">
             <a:extLst>
               <a:ext uri="{FF2B5EF4-FFF2-40B4-BE49-F238E27FC236}">
-                <a16:creationId xmlns:a16="http://schemas.microsoft.com/office/drawing/2014/main" id="{1540CCD0-9E66-E4BA-1492-28B6D68935A7}"/>
+                <a16:creationId xmlns:a16="http://schemas.microsoft.com/office/drawing/2014/main" id="{B9C0675F-533F-3706-087F-011B14C783C6}"/>
               </a:ext>
             </a:extLst>
           </p:cNvPr>
@@ -10180,7 +10180,7 @@
           <p:cNvPr id="9" name="CuadroTexto 8">
             <a:extLst>
               <a:ext uri="{FF2B5EF4-FFF2-40B4-BE49-F238E27FC236}">
-                <a16:creationId xmlns:a16="http://schemas.microsoft.com/office/drawing/2014/main" id="{2CE82424-98C6-89F0-7F68-F5D73E31D933}"/>
+                <a16:creationId xmlns:a16="http://schemas.microsoft.com/office/drawing/2014/main" id="{C37EE253-038B-C62D-1B13-B8E0DE08994E}"/>
               </a:ext>
             </a:extLst>
           </p:cNvPr>
@@ -10218,7 +10218,7 @@
     </p:spTree>
     <p:extLst>
       <p:ext uri="{BB962C8B-B14F-4D97-AF65-F5344CB8AC3E}">
-        <p14:creationId xmlns:p14="http://schemas.microsoft.com/office/powerpoint/2010/main" val="621463475"/>
+        <p14:creationId xmlns:p14="http://schemas.microsoft.com/office/powerpoint/2010/main" val="456950129"/>
       </p:ext>
     </p:extLst>
   </p:cSld>

--- a/docs/presentacion-defensa-final.pptx
+++ b/docs/presentacion-defensa-final.pptx
@@ -22,6 +22,7 @@
     <p:sldId id="270" r:id="rId16"/>
     <p:sldId id="271" r:id="rId17"/>
     <p:sldId id="272" r:id="rId18"/>
+    <p:sldId id="273" r:id="rId19"/>
   </p:sldIdLst>
   <p:sldSz cx="12192000" cy="6858000"/>
   <p:notesSz cx="6858000" cy="9144000"/>
@@ -145,7 +146,7 @@
           <p:cNvPr id="2" name="Título 1">
             <a:extLst>
               <a:ext uri="{FF2B5EF4-FFF2-40B4-BE49-F238E27FC236}">
-                <a16:creationId xmlns:a16="http://schemas.microsoft.com/office/drawing/2014/main" id="{14520BF6-50DF-2297-F823-27E9AF3C658B}"/>
+                <a16:creationId xmlns:a16="http://schemas.microsoft.com/office/drawing/2014/main" id="{A8E5A7B3-DB98-1D89-F899-AEC08AFD8477}"/>
               </a:ext>
             </a:extLst>
           </p:cNvPr>
@@ -182,7 +183,7 @@
           <p:cNvPr id="3" name="Subtítulo 2">
             <a:extLst>
               <a:ext uri="{FF2B5EF4-FFF2-40B4-BE49-F238E27FC236}">
-                <a16:creationId xmlns:a16="http://schemas.microsoft.com/office/drawing/2014/main" id="{98F46696-B39F-384D-0391-86DA3DD9D885}"/>
+                <a16:creationId xmlns:a16="http://schemas.microsoft.com/office/drawing/2014/main" id="{A3B5CC5E-E153-4CC1-0813-8C99F904C13C}"/>
               </a:ext>
             </a:extLst>
           </p:cNvPr>
@@ -252,7 +253,7 @@
           <p:cNvPr id="4" name="Marcador de fecha 3">
             <a:extLst>
               <a:ext uri="{FF2B5EF4-FFF2-40B4-BE49-F238E27FC236}">
-                <a16:creationId xmlns:a16="http://schemas.microsoft.com/office/drawing/2014/main" id="{F521A54D-03E2-E814-B8E3-052113C1EB98}"/>
+                <a16:creationId xmlns:a16="http://schemas.microsoft.com/office/drawing/2014/main" id="{008A4332-47F2-93D2-AB2C-A89BCEA66F02}"/>
               </a:ext>
             </a:extLst>
           </p:cNvPr>
@@ -268,9 +269,9 @@
           <a:bodyPr/>
           <a:lstStyle/>
           <a:p>
-            <a:fld id="{4C2FCEDC-9044-4CE9-9B98-47C3FC2B7CBE}" type="datetimeFigureOut">
+            <a:fld id="{1DDB0E9B-2144-47A1-BEC6-FBFA1BF47B9A}" type="datetimeFigureOut">
               <a:rPr lang="es-ES" smtClean="0"/>
-              <a:t>03/05/2026</a:t>
+              <a:t>18/05/2026</a:t>
             </a:fld>
             <a:endParaRPr lang="es-ES"/>
           </a:p>
@@ -281,7 +282,7 @@
           <p:cNvPr id="5" name="Marcador de pie de página 4">
             <a:extLst>
               <a:ext uri="{FF2B5EF4-FFF2-40B4-BE49-F238E27FC236}">
-                <a16:creationId xmlns:a16="http://schemas.microsoft.com/office/drawing/2014/main" id="{0E3FBE31-D78F-CF12-E520-A27FF1218135}"/>
+                <a16:creationId xmlns:a16="http://schemas.microsoft.com/office/drawing/2014/main" id="{12D96030-1D67-E65E-DB5F-CBD17F2EC1A2}"/>
               </a:ext>
             </a:extLst>
           </p:cNvPr>
@@ -306,7 +307,7 @@
           <p:cNvPr id="6" name="Marcador de número de diapositiva 5">
             <a:extLst>
               <a:ext uri="{FF2B5EF4-FFF2-40B4-BE49-F238E27FC236}">
-                <a16:creationId xmlns:a16="http://schemas.microsoft.com/office/drawing/2014/main" id="{A3E30B18-D605-436F-D91E-DFDED3CBD08E}"/>
+                <a16:creationId xmlns:a16="http://schemas.microsoft.com/office/drawing/2014/main" id="{30DA5BFA-B198-26BC-2677-BF1D00FE1712}"/>
               </a:ext>
             </a:extLst>
           </p:cNvPr>
@@ -322,7 +323,7 @@
           <a:bodyPr/>
           <a:lstStyle/>
           <a:p>
-            <a:fld id="{FA455040-64EB-4938-BD0A-2F141374B058}" type="slidenum">
+            <a:fld id="{C3804229-7FF9-4687-89EB-F65AD4937D3E}" type="slidenum">
               <a:rPr lang="es-ES" smtClean="0"/>
               <a:t>‹Nº›</a:t>
             </a:fld>
@@ -333,7 +334,7 @@
     </p:spTree>
     <p:extLst>
       <p:ext uri="{BB962C8B-B14F-4D97-AF65-F5344CB8AC3E}">
-        <p14:creationId xmlns:p14="http://schemas.microsoft.com/office/powerpoint/2010/main" val="67602867"/>
+        <p14:creationId xmlns:p14="http://schemas.microsoft.com/office/powerpoint/2010/main" val="1083882594"/>
       </p:ext>
     </p:extLst>
   </p:cSld>
@@ -365,7 +366,7 @@
           <p:cNvPr id="2" name="Título 1">
             <a:extLst>
               <a:ext uri="{FF2B5EF4-FFF2-40B4-BE49-F238E27FC236}">
-                <a16:creationId xmlns:a16="http://schemas.microsoft.com/office/drawing/2014/main" id="{3AD5E6A8-1750-5EC9-A393-57EA8E7BBFDF}"/>
+                <a16:creationId xmlns:a16="http://schemas.microsoft.com/office/drawing/2014/main" id="{82E8C88B-F2F7-DCC3-43AD-182093FB763F}"/>
               </a:ext>
             </a:extLst>
           </p:cNvPr>
@@ -393,7 +394,7 @@
           <p:cNvPr id="3" name="Marcador de texto vertical 2">
             <a:extLst>
               <a:ext uri="{FF2B5EF4-FFF2-40B4-BE49-F238E27FC236}">
-                <a16:creationId xmlns:a16="http://schemas.microsoft.com/office/drawing/2014/main" id="{B921C21D-7B88-C5A2-240C-799ECF1059C5}"/>
+                <a16:creationId xmlns:a16="http://schemas.microsoft.com/office/drawing/2014/main" id="{F6A99770-1608-2015-FCD2-10F0095BA86E}"/>
               </a:ext>
             </a:extLst>
           </p:cNvPr>
@@ -450,7 +451,7 @@
           <p:cNvPr id="4" name="Marcador de fecha 3">
             <a:extLst>
               <a:ext uri="{FF2B5EF4-FFF2-40B4-BE49-F238E27FC236}">
-                <a16:creationId xmlns:a16="http://schemas.microsoft.com/office/drawing/2014/main" id="{D2CD7A92-37B5-140F-D025-ECA6E7B455AF}"/>
+                <a16:creationId xmlns:a16="http://schemas.microsoft.com/office/drawing/2014/main" id="{9FEBF4A6-FF26-2B06-F6DF-EC0ECEF6A622}"/>
               </a:ext>
             </a:extLst>
           </p:cNvPr>
@@ -466,9 +467,9 @@
           <a:bodyPr/>
           <a:lstStyle/>
           <a:p>
-            <a:fld id="{4C2FCEDC-9044-4CE9-9B98-47C3FC2B7CBE}" type="datetimeFigureOut">
+            <a:fld id="{1DDB0E9B-2144-47A1-BEC6-FBFA1BF47B9A}" type="datetimeFigureOut">
               <a:rPr lang="es-ES" smtClean="0"/>
-              <a:t>03/05/2026</a:t>
+              <a:t>18/05/2026</a:t>
             </a:fld>
             <a:endParaRPr lang="es-ES"/>
           </a:p>
@@ -479,7 +480,7 @@
           <p:cNvPr id="5" name="Marcador de pie de página 4">
             <a:extLst>
               <a:ext uri="{FF2B5EF4-FFF2-40B4-BE49-F238E27FC236}">
-                <a16:creationId xmlns:a16="http://schemas.microsoft.com/office/drawing/2014/main" id="{95A190D1-42A8-A1D8-D443-540E1F49DCF6}"/>
+                <a16:creationId xmlns:a16="http://schemas.microsoft.com/office/drawing/2014/main" id="{496AC5AF-FE7B-7662-BB85-20692911A91F}"/>
               </a:ext>
             </a:extLst>
           </p:cNvPr>
@@ -504,7 +505,7 @@
           <p:cNvPr id="6" name="Marcador de número de diapositiva 5">
             <a:extLst>
               <a:ext uri="{FF2B5EF4-FFF2-40B4-BE49-F238E27FC236}">
-                <a16:creationId xmlns:a16="http://schemas.microsoft.com/office/drawing/2014/main" id="{A8B18A69-E5F2-DCFE-8ADB-41F850148898}"/>
+                <a16:creationId xmlns:a16="http://schemas.microsoft.com/office/drawing/2014/main" id="{3E231EBB-0FBA-13B3-A8AE-F84AC191D54D}"/>
               </a:ext>
             </a:extLst>
           </p:cNvPr>
@@ -520,7 +521,7 @@
           <a:bodyPr/>
           <a:lstStyle/>
           <a:p>
-            <a:fld id="{FA455040-64EB-4938-BD0A-2F141374B058}" type="slidenum">
+            <a:fld id="{C3804229-7FF9-4687-89EB-F65AD4937D3E}" type="slidenum">
               <a:rPr lang="es-ES" smtClean="0"/>
               <a:t>‹Nº›</a:t>
             </a:fld>
@@ -531,7 +532,7 @@
     </p:spTree>
     <p:extLst>
       <p:ext uri="{BB962C8B-B14F-4D97-AF65-F5344CB8AC3E}">
-        <p14:creationId xmlns:p14="http://schemas.microsoft.com/office/powerpoint/2010/main" val="1609294027"/>
+        <p14:creationId xmlns:p14="http://schemas.microsoft.com/office/powerpoint/2010/main" val="1963189776"/>
       </p:ext>
     </p:extLst>
   </p:cSld>
@@ -563,7 +564,7 @@
           <p:cNvPr id="2" name="Título vertical 1">
             <a:extLst>
               <a:ext uri="{FF2B5EF4-FFF2-40B4-BE49-F238E27FC236}">
-                <a16:creationId xmlns:a16="http://schemas.microsoft.com/office/drawing/2014/main" id="{75840964-855F-D0FD-896B-8144F70EA365}"/>
+                <a16:creationId xmlns:a16="http://schemas.microsoft.com/office/drawing/2014/main" id="{D6CCA69A-2F73-48F2-359C-114F96970F53}"/>
               </a:ext>
             </a:extLst>
           </p:cNvPr>
@@ -596,7 +597,7 @@
           <p:cNvPr id="3" name="Marcador de texto vertical 2">
             <a:extLst>
               <a:ext uri="{FF2B5EF4-FFF2-40B4-BE49-F238E27FC236}">
-                <a16:creationId xmlns:a16="http://schemas.microsoft.com/office/drawing/2014/main" id="{A3AE056C-439C-855B-AF51-5A9F29CE6B93}"/>
+                <a16:creationId xmlns:a16="http://schemas.microsoft.com/office/drawing/2014/main" id="{B8C87A4B-0718-0903-3B9D-D76B968B51EA}"/>
               </a:ext>
             </a:extLst>
           </p:cNvPr>
@@ -658,7 +659,7 @@
           <p:cNvPr id="4" name="Marcador de fecha 3">
             <a:extLst>
               <a:ext uri="{FF2B5EF4-FFF2-40B4-BE49-F238E27FC236}">
-                <a16:creationId xmlns:a16="http://schemas.microsoft.com/office/drawing/2014/main" id="{36BF8A3D-7A2D-6648-D62C-25F6B46289A8}"/>
+                <a16:creationId xmlns:a16="http://schemas.microsoft.com/office/drawing/2014/main" id="{FBD75856-D348-4226-A7DA-F4133464896F}"/>
               </a:ext>
             </a:extLst>
           </p:cNvPr>
@@ -674,9 +675,9 @@
           <a:bodyPr/>
           <a:lstStyle/>
           <a:p>
-            <a:fld id="{4C2FCEDC-9044-4CE9-9B98-47C3FC2B7CBE}" type="datetimeFigureOut">
+            <a:fld id="{1DDB0E9B-2144-47A1-BEC6-FBFA1BF47B9A}" type="datetimeFigureOut">
               <a:rPr lang="es-ES" smtClean="0"/>
-              <a:t>03/05/2026</a:t>
+              <a:t>18/05/2026</a:t>
             </a:fld>
             <a:endParaRPr lang="es-ES"/>
           </a:p>
@@ -687,7 +688,7 @@
           <p:cNvPr id="5" name="Marcador de pie de página 4">
             <a:extLst>
               <a:ext uri="{FF2B5EF4-FFF2-40B4-BE49-F238E27FC236}">
-                <a16:creationId xmlns:a16="http://schemas.microsoft.com/office/drawing/2014/main" id="{DC70276C-43FB-88E4-2086-97342C35C152}"/>
+                <a16:creationId xmlns:a16="http://schemas.microsoft.com/office/drawing/2014/main" id="{0412906B-0B33-CB15-7EB5-7D302BC4864C}"/>
               </a:ext>
             </a:extLst>
           </p:cNvPr>
@@ -712,7 +713,7 @@
           <p:cNvPr id="6" name="Marcador de número de diapositiva 5">
             <a:extLst>
               <a:ext uri="{FF2B5EF4-FFF2-40B4-BE49-F238E27FC236}">
-                <a16:creationId xmlns:a16="http://schemas.microsoft.com/office/drawing/2014/main" id="{CA31B267-6F1B-18E6-467A-1A3941FF0653}"/>
+                <a16:creationId xmlns:a16="http://schemas.microsoft.com/office/drawing/2014/main" id="{9F564A54-F270-B7FE-A36E-ABC6E2628DFC}"/>
               </a:ext>
             </a:extLst>
           </p:cNvPr>
@@ -728,7 +729,7 @@
           <a:bodyPr/>
           <a:lstStyle/>
           <a:p>
-            <a:fld id="{FA455040-64EB-4938-BD0A-2F141374B058}" type="slidenum">
+            <a:fld id="{C3804229-7FF9-4687-89EB-F65AD4937D3E}" type="slidenum">
               <a:rPr lang="es-ES" smtClean="0"/>
               <a:t>‹Nº›</a:t>
             </a:fld>
@@ -739,7 +740,7 @@
     </p:spTree>
     <p:extLst>
       <p:ext uri="{BB962C8B-B14F-4D97-AF65-F5344CB8AC3E}">
-        <p14:creationId xmlns:p14="http://schemas.microsoft.com/office/powerpoint/2010/main" val="2247917887"/>
+        <p14:creationId xmlns:p14="http://schemas.microsoft.com/office/powerpoint/2010/main" val="308810823"/>
       </p:ext>
     </p:extLst>
   </p:cSld>
@@ -771,7 +772,7 @@
           <p:cNvPr id="2" name="Título 1">
             <a:extLst>
               <a:ext uri="{FF2B5EF4-FFF2-40B4-BE49-F238E27FC236}">
-                <a16:creationId xmlns:a16="http://schemas.microsoft.com/office/drawing/2014/main" id="{CC7F7FB4-1229-D34A-77AF-BF3813789FD9}"/>
+                <a16:creationId xmlns:a16="http://schemas.microsoft.com/office/drawing/2014/main" id="{BA58301A-E34A-93A9-0EE8-5E6C6C335532}"/>
               </a:ext>
             </a:extLst>
           </p:cNvPr>
@@ -799,7 +800,7 @@
           <p:cNvPr id="3" name="Marcador de contenido 2">
             <a:extLst>
               <a:ext uri="{FF2B5EF4-FFF2-40B4-BE49-F238E27FC236}">
-                <a16:creationId xmlns:a16="http://schemas.microsoft.com/office/drawing/2014/main" id="{863BA5A2-7A07-1376-15A5-6F42E11F6E53}"/>
+                <a16:creationId xmlns:a16="http://schemas.microsoft.com/office/drawing/2014/main" id="{1F8593C7-26A1-78E2-69F6-BD574A29BC21}"/>
               </a:ext>
             </a:extLst>
           </p:cNvPr>
@@ -856,7 +857,7 @@
           <p:cNvPr id="4" name="Marcador de fecha 3">
             <a:extLst>
               <a:ext uri="{FF2B5EF4-FFF2-40B4-BE49-F238E27FC236}">
-                <a16:creationId xmlns:a16="http://schemas.microsoft.com/office/drawing/2014/main" id="{C25829E9-04FF-9CE2-3482-CC194A8B1CDE}"/>
+                <a16:creationId xmlns:a16="http://schemas.microsoft.com/office/drawing/2014/main" id="{3609F172-327B-CBF2-F971-57E7C15590D7}"/>
               </a:ext>
             </a:extLst>
           </p:cNvPr>
@@ -872,9 +873,9 @@
           <a:bodyPr/>
           <a:lstStyle/>
           <a:p>
-            <a:fld id="{4C2FCEDC-9044-4CE9-9B98-47C3FC2B7CBE}" type="datetimeFigureOut">
+            <a:fld id="{1DDB0E9B-2144-47A1-BEC6-FBFA1BF47B9A}" type="datetimeFigureOut">
               <a:rPr lang="es-ES" smtClean="0"/>
-              <a:t>03/05/2026</a:t>
+              <a:t>18/05/2026</a:t>
             </a:fld>
             <a:endParaRPr lang="es-ES"/>
           </a:p>
@@ -885,7 +886,7 @@
           <p:cNvPr id="5" name="Marcador de pie de página 4">
             <a:extLst>
               <a:ext uri="{FF2B5EF4-FFF2-40B4-BE49-F238E27FC236}">
-                <a16:creationId xmlns:a16="http://schemas.microsoft.com/office/drawing/2014/main" id="{159C5EA7-77E5-90A3-24E3-5C5FD17FE594}"/>
+                <a16:creationId xmlns:a16="http://schemas.microsoft.com/office/drawing/2014/main" id="{319C2CBD-DEAA-5EA7-C39D-4B230AB17DD1}"/>
               </a:ext>
             </a:extLst>
           </p:cNvPr>
@@ -910,7 +911,7 @@
           <p:cNvPr id="6" name="Marcador de número de diapositiva 5">
             <a:extLst>
               <a:ext uri="{FF2B5EF4-FFF2-40B4-BE49-F238E27FC236}">
-                <a16:creationId xmlns:a16="http://schemas.microsoft.com/office/drawing/2014/main" id="{7FDFEBC3-F147-ADAF-67F6-781A244D8083}"/>
+                <a16:creationId xmlns:a16="http://schemas.microsoft.com/office/drawing/2014/main" id="{5F4C82BB-CCC2-3BF9-5E6D-91C9698EE400}"/>
               </a:ext>
             </a:extLst>
           </p:cNvPr>
@@ -926,7 +927,7 @@
           <a:bodyPr/>
           <a:lstStyle/>
           <a:p>
-            <a:fld id="{FA455040-64EB-4938-BD0A-2F141374B058}" type="slidenum">
+            <a:fld id="{C3804229-7FF9-4687-89EB-F65AD4937D3E}" type="slidenum">
               <a:rPr lang="es-ES" smtClean="0"/>
               <a:t>‹Nº›</a:t>
             </a:fld>
@@ -937,7 +938,7 @@
     </p:spTree>
     <p:extLst>
       <p:ext uri="{BB962C8B-B14F-4D97-AF65-F5344CB8AC3E}">
-        <p14:creationId xmlns:p14="http://schemas.microsoft.com/office/powerpoint/2010/main" val="1386335863"/>
+        <p14:creationId xmlns:p14="http://schemas.microsoft.com/office/powerpoint/2010/main" val="271624322"/>
       </p:ext>
     </p:extLst>
   </p:cSld>
@@ -969,7 +970,7 @@
           <p:cNvPr id="2" name="Título 1">
             <a:extLst>
               <a:ext uri="{FF2B5EF4-FFF2-40B4-BE49-F238E27FC236}">
-                <a16:creationId xmlns:a16="http://schemas.microsoft.com/office/drawing/2014/main" id="{DE5414F1-2CF3-271D-507D-0CD25B56D05A}"/>
+                <a16:creationId xmlns:a16="http://schemas.microsoft.com/office/drawing/2014/main" id="{B0843CB4-4338-B537-F980-EA3217DF0E27}"/>
               </a:ext>
             </a:extLst>
           </p:cNvPr>
@@ -1006,7 +1007,7 @@
           <p:cNvPr id="3" name="Marcador de texto 2">
             <a:extLst>
               <a:ext uri="{FF2B5EF4-FFF2-40B4-BE49-F238E27FC236}">
-                <a16:creationId xmlns:a16="http://schemas.microsoft.com/office/drawing/2014/main" id="{46A8B74D-C2AD-1A1D-E067-0CEAE4B24D78}"/>
+                <a16:creationId xmlns:a16="http://schemas.microsoft.com/office/drawing/2014/main" id="{C610A105-7FAF-036D-185F-D6E29BB9582A}"/>
               </a:ext>
             </a:extLst>
           </p:cNvPr>
@@ -1131,7 +1132,7 @@
           <p:cNvPr id="4" name="Marcador de fecha 3">
             <a:extLst>
               <a:ext uri="{FF2B5EF4-FFF2-40B4-BE49-F238E27FC236}">
-                <a16:creationId xmlns:a16="http://schemas.microsoft.com/office/drawing/2014/main" id="{4504D0B2-F503-CE55-82B7-4C0965C717D2}"/>
+                <a16:creationId xmlns:a16="http://schemas.microsoft.com/office/drawing/2014/main" id="{0FB8FFD8-6642-3AAA-05D7-101DE947EADB}"/>
               </a:ext>
             </a:extLst>
           </p:cNvPr>
@@ -1147,9 +1148,9 @@
           <a:bodyPr/>
           <a:lstStyle/>
           <a:p>
-            <a:fld id="{4C2FCEDC-9044-4CE9-9B98-47C3FC2B7CBE}" type="datetimeFigureOut">
+            <a:fld id="{1DDB0E9B-2144-47A1-BEC6-FBFA1BF47B9A}" type="datetimeFigureOut">
               <a:rPr lang="es-ES" smtClean="0"/>
-              <a:t>03/05/2026</a:t>
+              <a:t>18/05/2026</a:t>
             </a:fld>
             <a:endParaRPr lang="es-ES"/>
           </a:p>
@@ -1160,7 +1161,7 @@
           <p:cNvPr id="5" name="Marcador de pie de página 4">
             <a:extLst>
               <a:ext uri="{FF2B5EF4-FFF2-40B4-BE49-F238E27FC236}">
-                <a16:creationId xmlns:a16="http://schemas.microsoft.com/office/drawing/2014/main" id="{E53D71DB-C58C-48D1-0AB9-6B08DDB678BA}"/>
+                <a16:creationId xmlns:a16="http://schemas.microsoft.com/office/drawing/2014/main" id="{F7383495-DBAC-C793-E0B1-2CA391BBB2DE}"/>
               </a:ext>
             </a:extLst>
           </p:cNvPr>
@@ -1185,7 +1186,7 @@
           <p:cNvPr id="6" name="Marcador de número de diapositiva 5">
             <a:extLst>
               <a:ext uri="{FF2B5EF4-FFF2-40B4-BE49-F238E27FC236}">
-                <a16:creationId xmlns:a16="http://schemas.microsoft.com/office/drawing/2014/main" id="{564B6DB3-904F-D11F-1501-C456D1A764BF}"/>
+                <a16:creationId xmlns:a16="http://schemas.microsoft.com/office/drawing/2014/main" id="{50B46BD9-82AB-168B-18ED-3666A11F17D2}"/>
               </a:ext>
             </a:extLst>
           </p:cNvPr>
@@ -1201,7 +1202,7 @@
           <a:bodyPr/>
           <a:lstStyle/>
           <a:p>
-            <a:fld id="{FA455040-64EB-4938-BD0A-2F141374B058}" type="slidenum">
+            <a:fld id="{C3804229-7FF9-4687-89EB-F65AD4937D3E}" type="slidenum">
               <a:rPr lang="es-ES" smtClean="0"/>
               <a:t>‹Nº›</a:t>
             </a:fld>
@@ -1212,7 +1213,7 @@
     </p:spTree>
     <p:extLst>
       <p:ext uri="{BB962C8B-B14F-4D97-AF65-F5344CB8AC3E}">
-        <p14:creationId xmlns:p14="http://schemas.microsoft.com/office/powerpoint/2010/main" val="1690316791"/>
+        <p14:creationId xmlns:p14="http://schemas.microsoft.com/office/powerpoint/2010/main" val="283459610"/>
       </p:ext>
     </p:extLst>
   </p:cSld>
@@ -1244,7 +1245,7 @@
           <p:cNvPr id="2" name="Título 1">
             <a:extLst>
               <a:ext uri="{FF2B5EF4-FFF2-40B4-BE49-F238E27FC236}">
-                <a16:creationId xmlns:a16="http://schemas.microsoft.com/office/drawing/2014/main" id="{DBE663BC-5B9E-9C07-627C-337DADEF8BEB}"/>
+                <a16:creationId xmlns:a16="http://schemas.microsoft.com/office/drawing/2014/main" id="{A6B6829B-26C7-40A3-0CD7-3B4A4213545C}"/>
               </a:ext>
             </a:extLst>
           </p:cNvPr>
@@ -1272,7 +1273,7 @@
           <p:cNvPr id="3" name="Marcador de contenido 2">
             <a:extLst>
               <a:ext uri="{FF2B5EF4-FFF2-40B4-BE49-F238E27FC236}">
-                <a16:creationId xmlns:a16="http://schemas.microsoft.com/office/drawing/2014/main" id="{D705ED80-D4D4-9750-E78C-80BFC9A5E5B6}"/>
+                <a16:creationId xmlns:a16="http://schemas.microsoft.com/office/drawing/2014/main" id="{C14E2ED6-9A55-433D-7730-CD0C8AB7A179}"/>
               </a:ext>
             </a:extLst>
           </p:cNvPr>
@@ -1334,7 +1335,7 @@
           <p:cNvPr id="4" name="Marcador de contenido 3">
             <a:extLst>
               <a:ext uri="{FF2B5EF4-FFF2-40B4-BE49-F238E27FC236}">
-                <a16:creationId xmlns:a16="http://schemas.microsoft.com/office/drawing/2014/main" id="{8904686E-C7BC-9060-88D3-0CC035F727F2}"/>
+                <a16:creationId xmlns:a16="http://schemas.microsoft.com/office/drawing/2014/main" id="{52351AF7-016A-52D6-1F8A-E87D7419ED37}"/>
               </a:ext>
             </a:extLst>
           </p:cNvPr>
@@ -1396,7 +1397,7 @@
           <p:cNvPr id="5" name="Marcador de fecha 4">
             <a:extLst>
               <a:ext uri="{FF2B5EF4-FFF2-40B4-BE49-F238E27FC236}">
-                <a16:creationId xmlns:a16="http://schemas.microsoft.com/office/drawing/2014/main" id="{BFC2EDC6-CF57-00CB-A202-1114FDC2D5AF}"/>
+                <a16:creationId xmlns:a16="http://schemas.microsoft.com/office/drawing/2014/main" id="{F1FDFD63-C6D8-D2A5-8CA3-38683E9E3FDB}"/>
               </a:ext>
             </a:extLst>
           </p:cNvPr>
@@ -1412,9 +1413,9 @@
           <a:bodyPr/>
           <a:lstStyle/>
           <a:p>
-            <a:fld id="{4C2FCEDC-9044-4CE9-9B98-47C3FC2B7CBE}" type="datetimeFigureOut">
+            <a:fld id="{1DDB0E9B-2144-47A1-BEC6-FBFA1BF47B9A}" type="datetimeFigureOut">
               <a:rPr lang="es-ES" smtClean="0"/>
-              <a:t>03/05/2026</a:t>
+              <a:t>18/05/2026</a:t>
             </a:fld>
             <a:endParaRPr lang="es-ES"/>
           </a:p>
@@ -1425,7 +1426,7 @@
           <p:cNvPr id="6" name="Marcador de pie de página 5">
             <a:extLst>
               <a:ext uri="{FF2B5EF4-FFF2-40B4-BE49-F238E27FC236}">
-                <a16:creationId xmlns:a16="http://schemas.microsoft.com/office/drawing/2014/main" id="{83CB32A1-EF88-7138-A04F-D0878B260890}"/>
+                <a16:creationId xmlns:a16="http://schemas.microsoft.com/office/drawing/2014/main" id="{846A1384-02F1-C06A-7E34-25130922EE4C}"/>
               </a:ext>
             </a:extLst>
           </p:cNvPr>
@@ -1450,7 +1451,7 @@
           <p:cNvPr id="7" name="Marcador de número de diapositiva 6">
             <a:extLst>
               <a:ext uri="{FF2B5EF4-FFF2-40B4-BE49-F238E27FC236}">
-                <a16:creationId xmlns:a16="http://schemas.microsoft.com/office/drawing/2014/main" id="{2999C9EC-4AA9-B1CB-EF06-AB35323EB721}"/>
+                <a16:creationId xmlns:a16="http://schemas.microsoft.com/office/drawing/2014/main" id="{D1C3B1EA-F757-9D55-1AC4-5FB6CBFDDBFE}"/>
               </a:ext>
             </a:extLst>
           </p:cNvPr>
@@ -1466,7 +1467,7 @@
           <a:bodyPr/>
           <a:lstStyle/>
           <a:p>
-            <a:fld id="{FA455040-64EB-4938-BD0A-2F141374B058}" type="slidenum">
+            <a:fld id="{C3804229-7FF9-4687-89EB-F65AD4937D3E}" type="slidenum">
               <a:rPr lang="es-ES" smtClean="0"/>
               <a:t>‹Nº›</a:t>
             </a:fld>
@@ -1477,7 +1478,7 @@
     </p:spTree>
     <p:extLst>
       <p:ext uri="{BB962C8B-B14F-4D97-AF65-F5344CB8AC3E}">
-        <p14:creationId xmlns:p14="http://schemas.microsoft.com/office/powerpoint/2010/main" val="3570076365"/>
+        <p14:creationId xmlns:p14="http://schemas.microsoft.com/office/powerpoint/2010/main" val="2447465894"/>
       </p:ext>
     </p:extLst>
   </p:cSld>
@@ -1509,7 +1510,7 @@
           <p:cNvPr id="2" name="Título 1">
             <a:extLst>
               <a:ext uri="{FF2B5EF4-FFF2-40B4-BE49-F238E27FC236}">
-                <a16:creationId xmlns:a16="http://schemas.microsoft.com/office/drawing/2014/main" id="{E03CC908-E5C1-CEF5-A879-93634D35393C}"/>
+                <a16:creationId xmlns:a16="http://schemas.microsoft.com/office/drawing/2014/main" id="{C56C8622-C583-E73F-E2FE-2AD78D859604}"/>
               </a:ext>
             </a:extLst>
           </p:cNvPr>
@@ -1542,7 +1543,7 @@
           <p:cNvPr id="3" name="Marcador de texto 2">
             <a:extLst>
               <a:ext uri="{FF2B5EF4-FFF2-40B4-BE49-F238E27FC236}">
-                <a16:creationId xmlns:a16="http://schemas.microsoft.com/office/drawing/2014/main" id="{B826B4F6-DB26-7919-9F13-3746D56F8077}"/>
+                <a16:creationId xmlns:a16="http://schemas.microsoft.com/office/drawing/2014/main" id="{6A49F940-56D2-8A35-A8C7-A62030CB846E}"/>
               </a:ext>
             </a:extLst>
           </p:cNvPr>
@@ -1613,7 +1614,7 @@
           <p:cNvPr id="4" name="Marcador de contenido 3">
             <a:extLst>
               <a:ext uri="{FF2B5EF4-FFF2-40B4-BE49-F238E27FC236}">
-                <a16:creationId xmlns:a16="http://schemas.microsoft.com/office/drawing/2014/main" id="{90B83327-6C33-B4F1-B3B2-6DC44117ECC3}"/>
+                <a16:creationId xmlns:a16="http://schemas.microsoft.com/office/drawing/2014/main" id="{C51D7EC0-74F4-2C5B-C59C-049BFFA275FB}"/>
               </a:ext>
             </a:extLst>
           </p:cNvPr>
@@ -1675,7 +1676,7 @@
           <p:cNvPr id="5" name="Marcador de texto 4">
             <a:extLst>
               <a:ext uri="{FF2B5EF4-FFF2-40B4-BE49-F238E27FC236}">
-                <a16:creationId xmlns:a16="http://schemas.microsoft.com/office/drawing/2014/main" id="{8AC3ADDE-805C-EE97-782B-07FB53D319D7}"/>
+                <a16:creationId xmlns:a16="http://schemas.microsoft.com/office/drawing/2014/main" id="{D870369B-DBB9-CB84-BFC9-D652F39756EB}"/>
               </a:ext>
             </a:extLst>
           </p:cNvPr>
@@ -1746,7 +1747,7 @@
           <p:cNvPr id="6" name="Marcador de contenido 5">
             <a:extLst>
               <a:ext uri="{FF2B5EF4-FFF2-40B4-BE49-F238E27FC236}">
-                <a16:creationId xmlns:a16="http://schemas.microsoft.com/office/drawing/2014/main" id="{CEB31B4A-A0A3-C5FB-7C4B-EEE5C4FEAD85}"/>
+                <a16:creationId xmlns:a16="http://schemas.microsoft.com/office/drawing/2014/main" id="{BE78608E-F504-CC1C-8217-8AECAB08255E}"/>
               </a:ext>
             </a:extLst>
           </p:cNvPr>
@@ -1808,7 +1809,7 @@
           <p:cNvPr id="7" name="Marcador de fecha 6">
             <a:extLst>
               <a:ext uri="{FF2B5EF4-FFF2-40B4-BE49-F238E27FC236}">
-                <a16:creationId xmlns:a16="http://schemas.microsoft.com/office/drawing/2014/main" id="{4408E452-08C9-4EE7-B468-49F265E99194}"/>
+                <a16:creationId xmlns:a16="http://schemas.microsoft.com/office/drawing/2014/main" id="{52B8B12D-2958-7A7E-6005-8AFBAA0B9FD8}"/>
               </a:ext>
             </a:extLst>
           </p:cNvPr>
@@ -1824,9 +1825,9 @@
           <a:bodyPr/>
           <a:lstStyle/>
           <a:p>
-            <a:fld id="{4C2FCEDC-9044-4CE9-9B98-47C3FC2B7CBE}" type="datetimeFigureOut">
+            <a:fld id="{1DDB0E9B-2144-47A1-BEC6-FBFA1BF47B9A}" type="datetimeFigureOut">
               <a:rPr lang="es-ES" smtClean="0"/>
-              <a:t>03/05/2026</a:t>
+              <a:t>18/05/2026</a:t>
             </a:fld>
             <a:endParaRPr lang="es-ES"/>
           </a:p>
@@ -1837,7 +1838,7 @@
           <p:cNvPr id="8" name="Marcador de pie de página 7">
             <a:extLst>
               <a:ext uri="{FF2B5EF4-FFF2-40B4-BE49-F238E27FC236}">
-                <a16:creationId xmlns:a16="http://schemas.microsoft.com/office/drawing/2014/main" id="{47A68166-41F9-CB59-BD97-57372E5CFBDB}"/>
+                <a16:creationId xmlns:a16="http://schemas.microsoft.com/office/drawing/2014/main" id="{552F9287-2740-9215-CB24-94B600180010}"/>
               </a:ext>
             </a:extLst>
           </p:cNvPr>
@@ -1862,7 +1863,7 @@
           <p:cNvPr id="9" name="Marcador de número de diapositiva 8">
             <a:extLst>
               <a:ext uri="{FF2B5EF4-FFF2-40B4-BE49-F238E27FC236}">
-                <a16:creationId xmlns:a16="http://schemas.microsoft.com/office/drawing/2014/main" id="{34D1EC27-8CDD-BA3D-A6AE-BE6AFD289E63}"/>
+                <a16:creationId xmlns:a16="http://schemas.microsoft.com/office/drawing/2014/main" id="{2B923351-39C6-10F8-E0C0-1DEB71FB247F}"/>
               </a:ext>
             </a:extLst>
           </p:cNvPr>
@@ -1878,7 +1879,7 @@
           <a:bodyPr/>
           <a:lstStyle/>
           <a:p>
-            <a:fld id="{FA455040-64EB-4938-BD0A-2F141374B058}" type="slidenum">
+            <a:fld id="{C3804229-7FF9-4687-89EB-F65AD4937D3E}" type="slidenum">
               <a:rPr lang="es-ES" smtClean="0"/>
               <a:t>‹Nº›</a:t>
             </a:fld>
@@ -1889,7 +1890,7 @@
     </p:spTree>
     <p:extLst>
       <p:ext uri="{BB962C8B-B14F-4D97-AF65-F5344CB8AC3E}">
-        <p14:creationId xmlns:p14="http://schemas.microsoft.com/office/powerpoint/2010/main" val="350675883"/>
+        <p14:creationId xmlns:p14="http://schemas.microsoft.com/office/powerpoint/2010/main" val="358784349"/>
       </p:ext>
     </p:extLst>
   </p:cSld>
@@ -1921,7 +1922,7 @@
           <p:cNvPr id="2" name="Título 1">
             <a:extLst>
               <a:ext uri="{FF2B5EF4-FFF2-40B4-BE49-F238E27FC236}">
-                <a16:creationId xmlns:a16="http://schemas.microsoft.com/office/drawing/2014/main" id="{C9E85820-A6F7-7243-B57B-7332B33C90CA}"/>
+                <a16:creationId xmlns:a16="http://schemas.microsoft.com/office/drawing/2014/main" id="{BAC254E7-7200-2664-1595-101278E1214E}"/>
               </a:ext>
             </a:extLst>
           </p:cNvPr>
@@ -1949,7 +1950,7 @@
           <p:cNvPr id="3" name="Marcador de fecha 2">
             <a:extLst>
               <a:ext uri="{FF2B5EF4-FFF2-40B4-BE49-F238E27FC236}">
-                <a16:creationId xmlns:a16="http://schemas.microsoft.com/office/drawing/2014/main" id="{7E0154A4-5BC7-6EB6-D6B1-527BD0398C34}"/>
+                <a16:creationId xmlns:a16="http://schemas.microsoft.com/office/drawing/2014/main" id="{9E82FA4E-DD4B-42C6-9BC3-0CD887AA87D7}"/>
               </a:ext>
             </a:extLst>
           </p:cNvPr>
@@ -1965,9 +1966,9 @@
           <a:bodyPr/>
           <a:lstStyle/>
           <a:p>
-            <a:fld id="{4C2FCEDC-9044-4CE9-9B98-47C3FC2B7CBE}" type="datetimeFigureOut">
+            <a:fld id="{1DDB0E9B-2144-47A1-BEC6-FBFA1BF47B9A}" type="datetimeFigureOut">
               <a:rPr lang="es-ES" smtClean="0"/>
-              <a:t>03/05/2026</a:t>
+              <a:t>18/05/2026</a:t>
             </a:fld>
             <a:endParaRPr lang="es-ES"/>
           </a:p>
@@ -1978,7 +1979,7 @@
           <p:cNvPr id="4" name="Marcador de pie de página 3">
             <a:extLst>
               <a:ext uri="{FF2B5EF4-FFF2-40B4-BE49-F238E27FC236}">
-                <a16:creationId xmlns:a16="http://schemas.microsoft.com/office/drawing/2014/main" id="{7CB8E482-2611-E330-DE3B-302B164EAD00}"/>
+                <a16:creationId xmlns:a16="http://schemas.microsoft.com/office/drawing/2014/main" id="{A4B9C0D3-5CF6-CA85-139A-B689AB85CAEB}"/>
               </a:ext>
             </a:extLst>
           </p:cNvPr>
@@ -2003,7 +2004,7 @@
           <p:cNvPr id="5" name="Marcador de número de diapositiva 4">
             <a:extLst>
               <a:ext uri="{FF2B5EF4-FFF2-40B4-BE49-F238E27FC236}">
-                <a16:creationId xmlns:a16="http://schemas.microsoft.com/office/drawing/2014/main" id="{15010C12-ABDF-64F8-9A2F-DB978E624999}"/>
+                <a16:creationId xmlns:a16="http://schemas.microsoft.com/office/drawing/2014/main" id="{2F1573AC-F3ED-7368-9D96-BA78EB9BF847}"/>
               </a:ext>
             </a:extLst>
           </p:cNvPr>
@@ -2019,7 +2020,7 @@
           <a:bodyPr/>
           <a:lstStyle/>
           <a:p>
-            <a:fld id="{FA455040-64EB-4938-BD0A-2F141374B058}" type="slidenum">
+            <a:fld id="{C3804229-7FF9-4687-89EB-F65AD4937D3E}" type="slidenum">
               <a:rPr lang="es-ES" smtClean="0"/>
               <a:t>‹Nº›</a:t>
             </a:fld>
@@ -2030,7 +2031,7 @@
     </p:spTree>
     <p:extLst>
       <p:ext uri="{BB962C8B-B14F-4D97-AF65-F5344CB8AC3E}">
-        <p14:creationId xmlns:p14="http://schemas.microsoft.com/office/powerpoint/2010/main" val="1224215804"/>
+        <p14:creationId xmlns:p14="http://schemas.microsoft.com/office/powerpoint/2010/main" val="494678653"/>
       </p:ext>
     </p:extLst>
   </p:cSld>
@@ -2062,7 +2063,7 @@
           <p:cNvPr id="2" name="Marcador de fecha 1">
             <a:extLst>
               <a:ext uri="{FF2B5EF4-FFF2-40B4-BE49-F238E27FC236}">
-                <a16:creationId xmlns:a16="http://schemas.microsoft.com/office/drawing/2014/main" id="{3EACCB39-82B8-8C9F-06E2-22D517129A11}"/>
+                <a16:creationId xmlns:a16="http://schemas.microsoft.com/office/drawing/2014/main" id="{A02D1CE3-AB36-74BD-BABB-158101B7E7F4}"/>
               </a:ext>
             </a:extLst>
           </p:cNvPr>
@@ -2078,9 +2079,9 @@
           <a:bodyPr/>
           <a:lstStyle/>
           <a:p>
-            <a:fld id="{4C2FCEDC-9044-4CE9-9B98-47C3FC2B7CBE}" type="datetimeFigureOut">
+            <a:fld id="{1DDB0E9B-2144-47A1-BEC6-FBFA1BF47B9A}" type="datetimeFigureOut">
               <a:rPr lang="es-ES" smtClean="0"/>
-              <a:t>03/05/2026</a:t>
+              <a:t>18/05/2026</a:t>
             </a:fld>
             <a:endParaRPr lang="es-ES"/>
           </a:p>
@@ -2091,7 +2092,7 @@
           <p:cNvPr id="3" name="Marcador de pie de página 2">
             <a:extLst>
               <a:ext uri="{FF2B5EF4-FFF2-40B4-BE49-F238E27FC236}">
-                <a16:creationId xmlns:a16="http://schemas.microsoft.com/office/drawing/2014/main" id="{0D9201FD-ED74-2DBA-1AA8-C4A007550BCC}"/>
+                <a16:creationId xmlns:a16="http://schemas.microsoft.com/office/drawing/2014/main" id="{047C11AF-D7ED-9035-5AE1-94989847E401}"/>
               </a:ext>
             </a:extLst>
           </p:cNvPr>
@@ -2116,7 +2117,7 @@
           <p:cNvPr id="4" name="Marcador de número de diapositiva 3">
             <a:extLst>
               <a:ext uri="{FF2B5EF4-FFF2-40B4-BE49-F238E27FC236}">
-                <a16:creationId xmlns:a16="http://schemas.microsoft.com/office/drawing/2014/main" id="{24D3BAC7-93A7-5672-D1C5-E3E71F032DCB}"/>
+                <a16:creationId xmlns:a16="http://schemas.microsoft.com/office/drawing/2014/main" id="{F9E9E6E0-BE16-582E-A665-8F31D3A08638}"/>
               </a:ext>
             </a:extLst>
           </p:cNvPr>
@@ -2132,7 +2133,7 @@
           <a:bodyPr/>
           <a:lstStyle/>
           <a:p>
-            <a:fld id="{FA455040-64EB-4938-BD0A-2F141374B058}" type="slidenum">
+            <a:fld id="{C3804229-7FF9-4687-89EB-F65AD4937D3E}" type="slidenum">
               <a:rPr lang="es-ES" smtClean="0"/>
               <a:t>‹Nº›</a:t>
             </a:fld>
@@ -2143,7 +2144,7 @@
     </p:spTree>
     <p:extLst>
       <p:ext uri="{BB962C8B-B14F-4D97-AF65-F5344CB8AC3E}">
-        <p14:creationId xmlns:p14="http://schemas.microsoft.com/office/powerpoint/2010/main" val="4054716001"/>
+        <p14:creationId xmlns:p14="http://schemas.microsoft.com/office/powerpoint/2010/main" val="134897583"/>
       </p:ext>
     </p:extLst>
   </p:cSld>
@@ -2175,7 +2176,7 @@
           <p:cNvPr id="2" name="Título 1">
             <a:extLst>
               <a:ext uri="{FF2B5EF4-FFF2-40B4-BE49-F238E27FC236}">
-                <a16:creationId xmlns:a16="http://schemas.microsoft.com/office/drawing/2014/main" id="{C0EDB4C5-3ECF-6920-7B36-DF068E9BD24F}"/>
+                <a16:creationId xmlns:a16="http://schemas.microsoft.com/office/drawing/2014/main" id="{235F02F0-C58E-B645-72A4-7FD442F7AA5D}"/>
               </a:ext>
             </a:extLst>
           </p:cNvPr>
@@ -2212,7 +2213,7 @@
           <p:cNvPr id="3" name="Marcador de contenido 2">
             <a:extLst>
               <a:ext uri="{FF2B5EF4-FFF2-40B4-BE49-F238E27FC236}">
-                <a16:creationId xmlns:a16="http://schemas.microsoft.com/office/drawing/2014/main" id="{572392A1-B3B9-720F-3DB6-14F60160E8EB}"/>
+                <a16:creationId xmlns:a16="http://schemas.microsoft.com/office/drawing/2014/main" id="{CBBB3B10-C757-B517-81D5-BC74A178B37C}"/>
               </a:ext>
             </a:extLst>
           </p:cNvPr>
@@ -2302,7 +2303,7 @@
           <p:cNvPr id="4" name="Marcador de texto 3">
             <a:extLst>
               <a:ext uri="{FF2B5EF4-FFF2-40B4-BE49-F238E27FC236}">
-                <a16:creationId xmlns:a16="http://schemas.microsoft.com/office/drawing/2014/main" id="{7734D3AD-E46F-6EC2-F46C-2FF7B30C6994}"/>
+                <a16:creationId xmlns:a16="http://schemas.microsoft.com/office/drawing/2014/main" id="{2E4CB9BB-404A-10D7-8AEE-2DA003001C8C}"/>
               </a:ext>
             </a:extLst>
           </p:cNvPr>
@@ -2373,7 +2374,7 @@
           <p:cNvPr id="5" name="Marcador de fecha 4">
             <a:extLst>
               <a:ext uri="{FF2B5EF4-FFF2-40B4-BE49-F238E27FC236}">
-                <a16:creationId xmlns:a16="http://schemas.microsoft.com/office/drawing/2014/main" id="{FB14517E-B3BD-0D3C-6A94-3B90219143DF}"/>
+                <a16:creationId xmlns:a16="http://schemas.microsoft.com/office/drawing/2014/main" id="{A5F47C2E-AE3D-F82E-2540-B84293B74058}"/>
               </a:ext>
             </a:extLst>
           </p:cNvPr>
@@ -2389,9 +2390,9 @@
           <a:bodyPr/>
           <a:lstStyle/>
           <a:p>
-            <a:fld id="{4C2FCEDC-9044-4CE9-9B98-47C3FC2B7CBE}" type="datetimeFigureOut">
+            <a:fld id="{1DDB0E9B-2144-47A1-BEC6-FBFA1BF47B9A}" type="datetimeFigureOut">
               <a:rPr lang="es-ES" smtClean="0"/>
-              <a:t>03/05/2026</a:t>
+              <a:t>18/05/2026</a:t>
             </a:fld>
             <a:endParaRPr lang="es-ES"/>
           </a:p>
@@ -2402,7 +2403,7 @@
           <p:cNvPr id="6" name="Marcador de pie de página 5">
             <a:extLst>
               <a:ext uri="{FF2B5EF4-FFF2-40B4-BE49-F238E27FC236}">
-                <a16:creationId xmlns:a16="http://schemas.microsoft.com/office/drawing/2014/main" id="{DCEF152B-2711-C76A-7FF2-44C9674FE403}"/>
+                <a16:creationId xmlns:a16="http://schemas.microsoft.com/office/drawing/2014/main" id="{CEE92FB6-0429-6B91-BBAF-7DABD52E3A7A}"/>
               </a:ext>
             </a:extLst>
           </p:cNvPr>
@@ -2427,7 +2428,7 @@
           <p:cNvPr id="7" name="Marcador de número de diapositiva 6">
             <a:extLst>
               <a:ext uri="{FF2B5EF4-FFF2-40B4-BE49-F238E27FC236}">
-                <a16:creationId xmlns:a16="http://schemas.microsoft.com/office/drawing/2014/main" id="{D4FFDE10-204E-F3EF-2071-1B56E88BDE2A}"/>
+                <a16:creationId xmlns:a16="http://schemas.microsoft.com/office/drawing/2014/main" id="{D819B694-261B-30E6-A277-B6BDA51BBBBA}"/>
               </a:ext>
             </a:extLst>
           </p:cNvPr>
@@ -2443,7 +2444,7 @@
           <a:bodyPr/>
           <a:lstStyle/>
           <a:p>
-            <a:fld id="{FA455040-64EB-4938-BD0A-2F141374B058}" type="slidenum">
+            <a:fld id="{C3804229-7FF9-4687-89EB-F65AD4937D3E}" type="slidenum">
               <a:rPr lang="es-ES" smtClean="0"/>
               <a:t>‹Nº›</a:t>
             </a:fld>
@@ -2454,7 +2455,7 @@
     </p:spTree>
     <p:extLst>
       <p:ext uri="{BB962C8B-B14F-4D97-AF65-F5344CB8AC3E}">
-        <p14:creationId xmlns:p14="http://schemas.microsoft.com/office/powerpoint/2010/main" val="3998045903"/>
+        <p14:creationId xmlns:p14="http://schemas.microsoft.com/office/powerpoint/2010/main" val="2037122793"/>
       </p:ext>
     </p:extLst>
   </p:cSld>
@@ -2486,7 +2487,7 @@
           <p:cNvPr id="2" name="Título 1">
             <a:extLst>
               <a:ext uri="{FF2B5EF4-FFF2-40B4-BE49-F238E27FC236}">
-                <a16:creationId xmlns:a16="http://schemas.microsoft.com/office/drawing/2014/main" id="{3AA8CF42-36BB-9334-F14E-4D949FBAD8BC}"/>
+                <a16:creationId xmlns:a16="http://schemas.microsoft.com/office/drawing/2014/main" id="{F435C9F3-F7AC-D4F7-4303-9BD416C222BD}"/>
               </a:ext>
             </a:extLst>
           </p:cNvPr>
@@ -2523,7 +2524,7 @@
           <p:cNvPr id="3" name="Marcador de posición de imagen 2">
             <a:extLst>
               <a:ext uri="{FF2B5EF4-FFF2-40B4-BE49-F238E27FC236}">
-                <a16:creationId xmlns:a16="http://schemas.microsoft.com/office/drawing/2014/main" id="{26BE6D79-08C1-93E5-B9DB-F06661E980F1}"/>
+                <a16:creationId xmlns:a16="http://schemas.microsoft.com/office/drawing/2014/main" id="{DA9A112E-451F-50DC-028D-C6F58F570E00}"/>
               </a:ext>
             </a:extLst>
           </p:cNvPr>
@@ -2590,7 +2591,7 @@
           <p:cNvPr id="4" name="Marcador de texto 3">
             <a:extLst>
               <a:ext uri="{FF2B5EF4-FFF2-40B4-BE49-F238E27FC236}">
-                <a16:creationId xmlns:a16="http://schemas.microsoft.com/office/drawing/2014/main" id="{DF8E9D0B-0273-71E5-0CF8-EA4D093947AE}"/>
+                <a16:creationId xmlns:a16="http://schemas.microsoft.com/office/drawing/2014/main" id="{3598B36F-615A-BAC7-C33E-7A99411A85D8}"/>
               </a:ext>
             </a:extLst>
           </p:cNvPr>
@@ -2661,7 +2662,7 @@
           <p:cNvPr id="5" name="Marcador de fecha 4">
             <a:extLst>
               <a:ext uri="{FF2B5EF4-FFF2-40B4-BE49-F238E27FC236}">
-                <a16:creationId xmlns:a16="http://schemas.microsoft.com/office/drawing/2014/main" id="{4A3FEBCA-709F-400A-4481-04364F16A33F}"/>
+                <a16:creationId xmlns:a16="http://schemas.microsoft.com/office/drawing/2014/main" id="{6723CA87-0035-81EC-0AB8-5A679616BE74}"/>
               </a:ext>
             </a:extLst>
           </p:cNvPr>
@@ -2677,9 +2678,9 @@
           <a:bodyPr/>
           <a:lstStyle/>
           <a:p>
-            <a:fld id="{4C2FCEDC-9044-4CE9-9B98-47C3FC2B7CBE}" type="datetimeFigureOut">
+            <a:fld id="{1DDB0E9B-2144-47A1-BEC6-FBFA1BF47B9A}" type="datetimeFigureOut">
               <a:rPr lang="es-ES" smtClean="0"/>
-              <a:t>03/05/2026</a:t>
+              <a:t>18/05/2026</a:t>
             </a:fld>
             <a:endParaRPr lang="es-ES"/>
           </a:p>
@@ -2690,7 +2691,7 @@
           <p:cNvPr id="6" name="Marcador de pie de página 5">
             <a:extLst>
               <a:ext uri="{FF2B5EF4-FFF2-40B4-BE49-F238E27FC236}">
-                <a16:creationId xmlns:a16="http://schemas.microsoft.com/office/drawing/2014/main" id="{E5A5451B-237C-7B8C-5431-994A0E6E0587}"/>
+                <a16:creationId xmlns:a16="http://schemas.microsoft.com/office/drawing/2014/main" id="{C6AE9DA7-03F8-4DBB-3A16-971CF6E63306}"/>
               </a:ext>
             </a:extLst>
           </p:cNvPr>
@@ -2715,7 +2716,7 @@
           <p:cNvPr id="7" name="Marcador de número de diapositiva 6">
             <a:extLst>
               <a:ext uri="{FF2B5EF4-FFF2-40B4-BE49-F238E27FC236}">
-                <a16:creationId xmlns:a16="http://schemas.microsoft.com/office/drawing/2014/main" id="{D0919129-C80C-8DE9-692F-08D344413FF2}"/>
+                <a16:creationId xmlns:a16="http://schemas.microsoft.com/office/drawing/2014/main" id="{BC24F64F-0D50-6B49-18CD-8815D633BE19}"/>
               </a:ext>
             </a:extLst>
           </p:cNvPr>
@@ -2731,7 +2732,7 @@
           <a:bodyPr/>
           <a:lstStyle/>
           <a:p>
-            <a:fld id="{FA455040-64EB-4938-BD0A-2F141374B058}" type="slidenum">
+            <a:fld id="{C3804229-7FF9-4687-89EB-F65AD4937D3E}" type="slidenum">
               <a:rPr lang="es-ES" smtClean="0"/>
               <a:t>‹Nº›</a:t>
             </a:fld>
@@ -2742,7 +2743,7 @@
     </p:spTree>
     <p:extLst>
       <p:ext uri="{BB962C8B-B14F-4D97-AF65-F5344CB8AC3E}">
-        <p14:creationId xmlns:p14="http://schemas.microsoft.com/office/powerpoint/2010/main" val="1456792909"/>
+        <p14:creationId xmlns:p14="http://schemas.microsoft.com/office/powerpoint/2010/main" val="4068038534"/>
       </p:ext>
     </p:extLst>
   </p:cSld>
@@ -2779,7 +2780,7 @@
           <p:cNvPr id="2" name="Marcador de título 1">
             <a:extLst>
               <a:ext uri="{FF2B5EF4-FFF2-40B4-BE49-F238E27FC236}">
-                <a16:creationId xmlns:a16="http://schemas.microsoft.com/office/drawing/2014/main" id="{72BDA274-ABD2-45F1-8B59-5CBF2D7BC3DB}"/>
+                <a16:creationId xmlns:a16="http://schemas.microsoft.com/office/drawing/2014/main" id="{D6291D40-7C43-5C14-7CF7-845E35E72FA2}"/>
               </a:ext>
             </a:extLst>
           </p:cNvPr>
@@ -2817,7 +2818,7 @@
           <p:cNvPr id="3" name="Marcador de texto 2">
             <a:extLst>
               <a:ext uri="{FF2B5EF4-FFF2-40B4-BE49-F238E27FC236}">
-                <a16:creationId xmlns:a16="http://schemas.microsoft.com/office/drawing/2014/main" id="{2CCDAE57-13BC-3791-6B16-B5FB925694F1}"/>
+                <a16:creationId xmlns:a16="http://schemas.microsoft.com/office/drawing/2014/main" id="{1984FB41-5CA9-FF2E-AE6F-0968E6F637E7}"/>
               </a:ext>
             </a:extLst>
           </p:cNvPr>
@@ -2884,7 +2885,7 @@
           <p:cNvPr id="4" name="Marcador de fecha 3">
             <a:extLst>
               <a:ext uri="{FF2B5EF4-FFF2-40B4-BE49-F238E27FC236}">
-                <a16:creationId xmlns:a16="http://schemas.microsoft.com/office/drawing/2014/main" id="{2DB65BDD-59E9-3DFA-98D7-FB785E6E1A5C}"/>
+                <a16:creationId xmlns:a16="http://schemas.microsoft.com/office/drawing/2014/main" id="{E9EB0A9A-7CC2-6295-0FF7-00B213ECEF1E}"/>
               </a:ext>
             </a:extLst>
           </p:cNvPr>
@@ -2918,9 +2919,9 @@
             </a:lvl1pPr>
           </a:lstStyle>
           <a:p>
-            <a:fld id="{4C2FCEDC-9044-4CE9-9B98-47C3FC2B7CBE}" type="datetimeFigureOut">
+            <a:fld id="{1DDB0E9B-2144-47A1-BEC6-FBFA1BF47B9A}" type="datetimeFigureOut">
               <a:rPr lang="es-ES" smtClean="0"/>
-              <a:t>03/05/2026</a:t>
+              <a:t>18/05/2026</a:t>
             </a:fld>
             <a:endParaRPr lang="es-ES"/>
           </a:p>
@@ -2931,7 +2932,7 @@
           <p:cNvPr id="5" name="Marcador de pie de página 4">
             <a:extLst>
               <a:ext uri="{FF2B5EF4-FFF2-40B4-BE49-F238E27FC236}">
-                <a16:creationId xmlns:a16="http://schemas.microsoft.com/office/drawing/2014/main" id="{48D1ECEF-F739-A79C-F532-FA358AEE6AB1}"/>
+                <a16:creationId xmlns:a16="http://schemas.microsoft.com/office/drawing/2014/main" id="{60213811-A5C7-C833-63EF-E36585B95687}"/>
               </a:ext>
             </a:extLst>
           </p:cNvPr>
@@ -2974,7 +2975,7 @@
           <p:cNvPr id="6" name="Marcador de número de diapositiva 5">
             <a:extLst>
               <a:ext uri="{FF2B5EF4-FFF2-40B4-BE49-F238E27FC236}">
-                <a16:creationId xmlns:a16="http://schemas.microsoft.com/office/drawing/2014/main" id="{F426DB04-DF97-8610-4C8F-B8F9C581DA88}"/>
+                <a16:creationId xmlns:a16="http://schemas.microsoft.com/office/drawing/2014/main" id="{6D9F55CE-0126-CDF4-D7BC-0DB15CBA64BE}"/>
               </a:ext>
             </a:extLst>
           </p:cNvPr>
@@ -3008,7 +3009,7 @@
             </a:lvl1pPr>
           </a:lstStyle>
           <a:p>
-            <a:fld id="{FA455040-64EB-4938-BD0A-2F141374B058}" type="slidenum">
+            <a:fld id="{C3804229-7FF9-4687-89EB-F65AD4937D3E}" type="slidenum">
               <a:rPr lang="es-ES" smtClean="0"/>
               <a:t>‹Nº›</a:t>
             </a:fld>
@@ -3019,7 +3020,7 @@
     </p:spTree>
     <p:extLst>
       <p:ext uri="{BB962C8B-B14F-4D97-AF65-F5344CB8AC3E}">
-        <p14:creationId xmlns:p14="http://schemas.microsoft.com/office/powerpoint/2010/main" val="1833905126"/>
+        <p14:creationId xmlns:p14="http://schemas.microsoft.com/office/powerpoint/2010/main" val="236746701"/>
       </p:ext>
     </p:extLst>
   </p:cSld>
@@ -3350,7 +3351,7 @@
           <p:cNvPr id="2" name="Rectángulo: esquinas redondeadas 1">
             <a:extLst>
               <a:ext uri="{FF2B5EF4-FFF2-40B4-BE49-F238E27FC236}">
-                <a16:creationId xmlns:a16="http://schemas.microsoft.com/office/drawing/2014/main" id="{3A87E732-A74F-B6EB-E66F-824695ECDAD7}"/>
+                <a16:creationId xmlns:a16="http://schemas.microsoft.com/office/drawing/2014/main" id="{A9B68B07-0E42-3D3A-59AB-75D314A35906}"/>
               </a:ext>
             </a:extLst>
           </p:cNvPr>
@@ -3404,7 +3405,7 @@
           <p:cNvPr id="3" name="CuadroTexto 2">
             <a:extLst>
               <a:ext uri="{FF2B5EF4-FFF2-40B4-BE49-F238E27FC236}">
-                <a16:creationId xmlns:a16="http://schemas.microsoft.com/office/drawing/2014/main" id="{8177A55E-A698-F1FC-7F42-C096EB1B4D0A}"/>
+                <a16:creationId xmlns:a16="http://schemas.microsoft.com/office/drawing/2014/main" id="{8DFB9613-F2EC-9F26-BEDE-17D320311A8E}"/>
               </a:ext>
             </a:extLst>
           </p:cNvPr>
@@ -3444,7 +3445,7 @@
           <p:cNvPr id="4" name="CuadroTexto 3">
             <a:extLst>
               <a:ext uri="{FF2B5EF4-FFF2-40B4-BE49-F238E27FC236}">
-                <a16:creationId xmlns:a16="http://schemas.microsoft.com/office/drawing/2014/main" id="{1B049C5D-2CED-583F-FF27-E567D7CE3AF2}"/>
+                <a16:creationId xmlns:a16="http://schemas.microsoft.com/office/drawing/2014/main" id="{9A48F141-1814-39FD-E775-DA62716C05B7}"/>
               </a:ext>
             </a:extLst>
           </p:cNvPr>
@@ -3484,7 +3485,7 @@
           <p:cNvPr id="5" name="CuadroTexto 4">
             <a:extLst>
               <a:ext uri="{FF2B5EF4-FFF2-40B4-BE49-F238E27FC236}">
-                <a16:creationId xmlns:a16="http://schemas.microsoft.com/office/drawing/2014/main" id="{88CEB650-E9C2-7DA1-8A94-AA40324B5435}"/>
+                <a16:creationId xmlns:a16="http://schemas.microsoft.com/office/drawing/2014/main" id="{866FFC5C-8565-D9F3-2B11-D36DA6658618}"/>
               </a:ext>
             </a:extLst>
           </p:cNvPr>
@@ -3524,7 +3525,7 @@
           <p:cNvPr id="6" name="CuadroTexto 5">
             <a:extLst>
               <a:ext uri="{FF2B5EF4-FFF2-40B4-BE49-F238E27FC236}">
-                <a16:creationId xmlns:a16="http://schemas.microsoft.com/office/drawing/2014/main" id="{F3235407-906C-72DB-F6B2-20A5A967C08D}"/>
+                <a16:creationId xmlns:a16="http://schemas.microsoft.com/office/drawing/2014/main" id="{D5176ACD-9518-7C4D-EC15-6D9A1C40E7B5}"/>
               </a:ext>
             </a:extLst>
           </p:cNvPr>
@@ -3575,7 +3576,7 @@
           <p:cNvPr id="8" name="Imagen 7">
             <a:extLst>
               <a:ext uri="{FF2B5EF4-FFF2-40B4-BE49-F238E27FC236}">
-                <a16:creationId xmlns:a16="http://schemas.microsoft.com/office/drawing/2014/main" id="{0083AF39-753F-82C3-BB50-8A1FB5E262D5}"/>
+                <a16:creationId xmlns:a16="http://schemas.microsoft.com/office/drawing/2014/main" id="{884051A0-4E18-9663-2F6E-4AD9BB297378}"/>
               </a:ext>
             </a:extLst>
           </p:cNvPr>
@@ -3614,7 +3615,7 @@
     </p:spTree>
     <p:extLst>
       <p:ext uri="{BB962C8B-B14F-4D97-AF65-F5344CB8AC3E}">
-        <p14:creationId xmlns:p14="http://schemas.microsoft.com/office/powerpoint/2010/main" val="323598477"/>
+        <p14:creationId xmlns:p14="http://schemas.microsoft.com/office/powerpoint/2010/main" val="1997840301"/>
       </p:ext>
     </p:extLst>
   </p:cSld>
@@ -3654,7 +3655,7 @@
           <p:cNvPr id="2" name="CuadroTexto 1">
             <a:extLst>
               <a:ext uri="{FF2B5EF4-FFF2-40B4-BE49-F238E27FC236}">
-                <a16:creationId xmlns:a16="http://schemas.microsoft.com/office/drawing/2014/main" id="{EFF17161-752D-DFC6-8F7A-78AA8340249B}"/>
+                <a16:creationId xmlns:a16="http://schemas.microsoft.com/office/drawing/2014/main" id="{BB3E3A21-700F-B328-1C85-49F91535B3B3}"/>
               </a:ext>
             </a:extLst>
           </p:cNvPr>
@@ -3684,7 +3685,7 @@
                 </a:solidFill>
                 <a:latin typeface="Segoe UI" panose="020B0502040204020203" pitchFamily="34" charset="0"/>
               </a:rPr>
-              <a:t>09 / CODIGO CLAVE</a:t>
+              <a:t>09 / CORREO Y RECHAZO</a:t>
             </a:r>
           </a:p>
         </p:txBody>
@@ -3694,7 +3695,7 @@
           <p:cNvPr id="3" name="CuadroTexto 2">
             <a:extLst>
               <a:ext uri="{FF2B5EF4-FFF2-40B4-BE49-F238E27FC236}">
-                <a16:creationId xmlns:a16="http://schemas.microsoft.com/office/drawing/2014/main" id="{7771ACBD-5214-CB0D-5CB8-19C5FE1BAC36}"/>
+                <a16:creationId xmlns:a16="http://schemas.microsoft.com/office/drawing/2014/main" id="{65C96FD9-FF04-FDF2-A4B6-8814B4AE257E}"/>
               </a:ext>
             </a:extLst>
           </p:cNvPr>
@@ -3724,7 +3725,7 @@
                 </a:solidFill>
                 <a:latin typeface="Segoe UI" panose="020B0502040204020203" pitchFamily="34" charset="0"/>
               </a:rPr>
-              <a:t>Registro externo con validacion y correo</a:t>
+              <a:t>Gestor de correos y comunicaciones transaccionales</a:t>
             </a:r>
           </a:p>
         </p:txBody>
@@ -3734,7 +3735,7 @@
           <p:cNvPr id="4" name="CuadroTexto 3">
             <a:extLst>
               <a:ext uri="{FF2B5EF4-FFF2-40B4-BE49-F238E27FC236}">
-                <a16:creationId xmlns:a16="http://schemas.microsoft.com/office/drawing/2014/main" id="{54035EEF-CEBE-FB37-73ED-64053A4A976C}"/>
+                <a16:creationId xmlns:a16="http://schemas.microsoft.com/office/drawing/2014/main" id="{6BDC3A2A-272F-7680-1053-39254C9434D6}"/>
               </a:ext>
             </a:extLst>
           </p:cNvPr>
@@ -3764,7 +3765,7 @@
                 </a:solidFill>
                 <a:latin typeface="Segoe UI" panose="020B0502040204020203" pitchFamily="34" charset="0"/>
               </a:rPr>
-              <a:t>Este fragmento une formulario publico, validacion backend, token y enlace de verificacion.</a:t>
+              <a:t>El proveedor configurado es Brevo y cubre tanto correo funcional como operaciones sensibles.</a:t>
             </a:r>
           </a:p>
         </p:txBody>
@@ -3774,7 +3775,7 @@
           <p:cNvPr id="5" name="Rectángulo: esquinas redondeadas 4">
             <a:extLst>
               <a:ext uri="{FF2B5EF4-FFF2-40B4-BE49-F238E27FC236}">
-                <a16:creationId xmlns:a16="http://schemas.microsoft.com/office/drawing/2014/main" id="{BE2C502C-DA3E-2EEF-1B69-8A6E497945A5}"/>
+                <a16:creationId xmlns:a16="http://schemas.microsoft.com/office/drawing/2014/main" id="{8FA6FB1C-07D4-3C91-2EBC-7BF26420A85D}"/>
               </a:ext>
             </a:extLst>
           </p:cNvPr>
@@ -3783,27 +3784,20 @@
         </p:nvSpPr>
         <p:spPr>
           <a:xfrm>
-            <a:off x="711200" y="1930400"/>
-            <a:ext cx="6832600" cy="3873500"/>
+            <a:off x="736600" y="2032000"/>
+            <a:ext cx="3175000" cy="2870200"/>
           </a:xfrm>
           <a:prstGeom prst="roundRect">
             <a:avLst/>
           </a:prstGeom>
           <a:solidFill>
-            <a:srgbClr val="080C12"/>
+            <a:srgbClr val="1D2430"/>
           </a:solidFill>
           <a:ln w="12700">
             <a:solidFill>
-              <a:srgbClr val="37495C"/>
+              <a:srgbClr val="424E60"/>
             </a:solidFill>
           </a:ln>
-          <a:effectLst>
-            <a:outerShdw blurRad="127000" dist="56796" dir="3806099" rotWithShape="0">
-              <a:srgbClr val="000000">
-                <a:alpha val="38000"/>
-              </a:srgbClr>
-            </a:outerShdw>
-          </a:effectLst>
         </p:spPr>
         <p:style>
           <a:lnRef idx="2">
@@ -3835,48 +3829,37 @@
           <p:cNvPr id="6" name="CuadroTexto 5">
             <a:extLst>
               <a:ext uri="{FF2B5EF4-FFF2-40B4-BE49-F238E27FC236}">
-                <a16:creationId xmlns:a16="http://schemas.microsoft.com/office/drawing/2014/main" id="{4B0F2D69-8F12-4284-DC0E-494CC9D83910}"/>
-              </a:ext>
-            </a:extLst>
-          </p:cNvPr>
-          <p:cNvSpPr txBox="1"/>
-          <p:nvPr/>
-        </p:nvSpPr>
-        <p:spPr>
-          <a:xfrm>
-            <a:off x="939800" y="2120900"/>
-            <a:ext cx="6375400" cy="369332"/>
-          </a:xfrm>
-          <a:prstGeom prst="rect">
-            <a:avLst/>
-          </a:prstGeom>
-          <a:noFill/>
-        </p:spPr>
-        <p:txBody>
-          <a:bodyPr vert="horz" wrap="square" lIns="0" tIns="0" rIns="0" bIns="0" rtlCol="0">
-            <a:noAutofit/>
-          </a:bodyPr>
-          <a:lstStyle/>
-          <a:p>
-            <a:r>
-              <a:rPr lang="es-ES" sz="1300">
-                <a:solidFill>
-                  <a:srgbClr val="E2E8F0"/>
-                </a:solidFill>
-                <a:latin typeface="Consolas" panose="020B0609020204030204" pitchFamily="49" charset="0"/>
-              </a:rPr>
-              <a:t>$constraints = new Assert\Collection([
-  'nombreEmpresa' =&gt; [new Assert\NotBlank()],
-  'contactoEmail' =&gt; [new Assert\NotBlank(), new Assert\Email()],
-]);
-$solicitud = (new EmpresaSolicitud())
-  -&gt;setNombreEmpresa($payload['nombreEmpresa'])
-  -&gt;setContactoEmail($payload['contactoEmail']);
-$verificationUrl = $this-&gt;urlGenerator-&gt;generate(
-  'registro_empresa_confirm',
-  ['token' =&gt; $solicitud-&gt;getToken()],
-  UrlGeneratorInterface::ABSOLUTE_URL
-);</a:t>
+                <a16:creationId xmlns:a16="http://schemas.microsoft.com/office/drawing/2014/main" id="{CAFA737E-7877-A656-D66A-1719E860F090}"/>
+              </a:ext>
+            </a:extLst>
+          </p:cNvPr>
+          <p:cNvSpPr txBox="1"/>
+          <p:nvPr/>
+        </p:nvSpPr>
+        <p:spPr>
+          <a:xfrm>
+            <a:off x="1168400" y="2438400"/>
+            <a:ext cx="2311400" cy="369332"/>
+          </a:xfrm>
+          <a:prstGeom prst="rect">
+            <a:avLst/>
+          </a:prstGeom>
+          <a:noFill/>
+        </p:spPr>
+        <p:txBody>
+          <a:bodyPr vert="horz" wrap="square" lIns="0" tIns="0" rIns="0" bIns="0" rtlCol="0">
+            <a:noAutofit/>
+          </a:bodyPr>
+          <a:lstStyle/>
+          <a:p>
+            <a:r>
+              <a:rPr lang="es-ES" sz="2800" b="1">
+                <a:solidFill>
+                  <a:srgbClr val="DBA14D"/>
+                </a:solidFill>
+                <a:latin typeface="Segoe UI" panose="020B0502040204020203" pitchFamily="34" charset="0"/>
+              </a:rPr>
+              <a:t>Brevo</a:t>
             </a:r>
           </a:p>
         </p:txBody>
@@ -3886,57 +3869,17 @@
           <p:cNvPr id="7" name="CuadroTexto 6">
             <a:extLst>
               <a:ext uri="{FF2B5EF4-FFF2-40B4-BE49-F238E27FC236}">
-                <a16:creationId xmlns:a16="http://schemas.microsoft.com/office/drawing/2014/main" id="{817D8DAF-DF0A-E03D-2632-C856659B5A34}"/>
-              </a:ext>
-            </a:extLst>
-          </p:cNvPr>
-          <p:cNvSpPr txBox="1"/>
-          <p:nvPr/>
-        </p:nvSpPr>
-        <p:spPr>
-          <a:xfrm>
-            <a:off x="939800" y="5410200"/>
-            <a:ext cx="6375400" cy="369332"/>
-          </a:xfrm>
-          <a:prstGeom prst="rect">
-            <a:avLst/>
-          </a:prstGeom>
-          <a:noFill/>
-        </p:spPr>
-        <p:txBody>
-          <a:bodyPr vert="horz" wrap="square" lIns="0" tIns="0" rIns="0" bIns="0" rtlCol="0">
-            <a:noAutofit/>
-          </a:bodyPr>
-          <a:lstStyle/>
-          <a:p>
-            <a:r>
-              <a:rPr lang="es-ES" sz="1000">
-                <a:solidFill>
-                  <a:srgbClr val="94A3B8"/>
-                </a:solidFill>
-                <a:latin typeface="Consolas" panose="020B0609020204030204" pitchFamily="49" charset="0"/>
-              </a:rPr>
-              <a:t>backend/src/Controller/RegistroEmpresaController.php</a:t>
-            </a:r>
-          </a:p>
-        </p:txBody>
-      </p:sp>
-      <p:sp>
-        <p:nvSpPr>
-          <p:cNvPr id="8" name="CuadroTexto 7">
-            <a:extLst>
-              <a:ext uri="{FF2B5EF4-FFF2-40B4-BE49-F238E27FC236}">
-                <a16:creationId xmlns:a16="http://schemas.microsoft.com/office/drawing/2014/main" id="{1C10F4D8-3E03-D17D-D6CC-527AA1D32B96}"/>
-              </a:ext>
-            </a:extLst>
-          </p:cNvPr>
-          <p:cNvSpPr txBox="1"/>
-          <p:nvPr/>
-        </p:nvSpPr>
-        <p:spPr>
-          <a:xfrm>
-            <a:off x="8128000" y="2209800"/>
-            <a:ext cx="3175000" cy="369332"/>
+                <a16:creationId xmlns:a16="http://schemas.microsoft.com/office/drawing/2014/main" id="{B8E2502A-9E45-73E5-4753-CCC2DCC164AA}"/>
+              </a:ext>
+            </a:extLst>
+          </p:cNvPr>
+          <p:cNvSpPr txBox="1"/>
+          <p:nvPr/>
+        </p:nvSpPr>
+        <p:spPr>
+          <a:xfrm>
+            <a:off x="1092200" y="3124200"/>
+            <a:ext cx="2413000" cy="369332"/>
           </a:xfrm>
           <a:prstGeom prst="rect">
             <a:avLst/>
@@ -3957,13 +3900,13 @@
               <a:buChar char="•"/>
             </a:pPr>
             <a:r>
-              <a:rPr lang="es-ES" sz="1700">
-                <a:solidFill>
-                  <a:srgbClr val="C2CBD8"/>
-                </a:solidFill>
-                <a:latin typeface="Segoe UI" panose="020B0502040204020203" pitchFamily="34" charset="0"/>
-              </a:rPr>
-              <a:t>Valida datos obligatorios antes de persistir.</a:t>
+              <a:rPr lang="es-ES" sz="1600">
+                <a:solidFill>
+                  <a:srgbClr val="F6F8FC"/>
+                </a:solidFill>
+                <a:latin typeface="Segoe UI" panose="020B0502040204020203" pitchFamily="34" charset="0"/>
+              </a:rPr>
+              <a:t>Verificacion de solicitud</a:t>
             </a:r>
           </a:p>
           <a:p>
@@ -3975,13 +3918,13 @@
               <a:buChar char="•"/>
             </a:pPr>
             <a:r>
-              <a:rPr lang="es-ES" sz="1700">
-                <a:solidFill>
-                  <a:srgbClr val="C2CBD8"/>
-                </a:solidFill>
-                <a:latin typeface="Segoe UI" panose="020B0502040204020203" pitchFamily="34" charset="0"/>
-              </a:rPr>
-              <a:t>Genera una solicitud con token propio.</a:t>
+              <a:rPr lang="es-ES" sz="1600">
+                <a:solidFill>
+                  <a:srgbClr val="F6F8FC"/>
+                </a:solidFill>
+                <a:latin typeface="Segoe UI" panose="020B0502040204020203" pitchFamily="34" charset="0"/>
+              </a:rPr>
+              <a:t>Activacion de cuenta</a:t>
             </a:r>
           </a:p>
           <a:p>
@@ -3993,13 +3936,13 @@
               <a:buChar char="•"/>
             </a:pPr>
             <a:r>
-              <a:rPr lang="es-ES" sz="1700">
-                <a:solidFill>
-                  <a:srgbClr val="C2CBD8"/>
-                </a:solidFill>
-                <a:latin typeface="Segoe UI" panose="020B0502040204020203" pitchFamily="34" charset="0"/>
-              </a:rPr>
-              <a:t>Crea una URL absoluta para confirmar el correo.</a:t>
+              <a:rPr lang="es-ES" sz="1600">
+                <a:solidFill>
+                  <a:srgbClr val="F6F8FC"/>
+                </a:solidFill>
+                <a:latin typeface="Segoe UI" panose="020B0502040204020203" pitchFamily="34" charset="0"/>
+              </a:rPr>
+              <a:t>Recuperacion de contrasena</a:t>
             </a:r>
           </a:p>
           <a:p>
@@ -4011,13 +3954,567 @@
               <a:buChar char="•"/>
             </a:pPr>
             <a:r>
-              <a:rPr lang="es-ES" sz="1700">
-                <a:solidFill>
-                  <a:srgbClr val="C2CBD8"/>
-                </a:solidFill>
-                <a:latin typeface="Segoe UI" panose="020B0502040204020203" pitchFamily="34" charset="0"/>
-              </a:rPr>
-              <a:t>Permite explicar por que la empresa no entra directamente al panel interno.</a:t>
+              <a:rPr lang="es-ES" sz="1600">
+                <a:solidFill>
+                  <a:srgbClr val="F6F8FC"/>
+                </a:solidFill>
+                <a:latin typeface="Segoe UI" panose="020B0502040204020203" pitchFamily="34" charset="0"/>
+              </a:rPr>
+              <a:t>MFA tecnico</a:t>
+            </a:r>
+          </a:p>
+          <a:p>
+            <a:pPr marL="342900" indent="-342900">
+              <a:spcAft>
+                <a:spcPts val="1000"/>
+              </a:spcAft>
+              <a:buFont typeface="+mj-lt"/>
+              <a:buChar char="•"/>
+            </a:pPr>
+            <a:r>
+              <a:rPr lang="es-ES" sz="1600">
+                <a:solidFill>
+                  <a:srgbClr val="F6F8FC"/>
+                </a:solidFill>
+                <a:latin typeface="Segoe UI" panose="020B0502040204020203" pitchFamily="34" charset="0"/>
+              </a:rPr>
+              <a:t>Aviso de rechazo</a:t>
+            </a:r>
+          </a:p>
+        </p:txBody>
+      </p:sp>
+      <p:sp>
+        <p:nvSpPr>
+          <p:cNvPr id="8" name="Rectángulo: esquinas redondeadas 7">
+            <a:extLst>
+              <a:ext uri="{FF2B5EF4-FFF2-40B4-BE49-F238E27FC236}">
+                <a16:creationId xmlns:a16="http://schemas.microsoft.com/office/drawing/2014/main" id="{1249BF07-C029-8215-F68E-C663267BFB44}"/>
+              </a:ext>
+            </a:extLst>
+          </p:cNvPr>
+          <p:cNvSpPr/>
+          <p:nvPr/>
+        </p:nvSpPr>
+        <p:spPr>
+          <a:xfrm>
+            <a:off x="4597400" y="2032000"/>
+            <a:ext cx="6477000" cy="685800"/>
+          </a:xfrm>
+          <a:prstGeom prst="roundRect">
+            <a:avLst/>
+          </a:prstGeom>
+          <a:solidFill>
+            <a:srgbClr val="F7FAFC"/>
+          </a:solidFill>
+          <a:ln w="12700">
+            <a:solidFill>
+              <a:srgbClr val="DDE5EE"/>
+            </a:solidFill>
+          </a:ln>
+        </p:spPr>
+        <p:style>
+          <a:lnRef idx="2">
+            <a:schemeClr val="accent1">
+              <a:shade val="15000"/>
+            </a:schemeClr>
+          </a:lnRef>
+          <a:fillRef idx="1">
+            <a:schemeClr val="accent1"/>
+          </a:fillRef>
+          <a:effectRef idx="0">
+            <a:schemeClr val="accent1"/>
+          </a:effectRef>
+          <a:fontRef idx="minor">
+            <a:schemeClr val="lt1"/>
+          </a:fontRef>
+        </p:style>
+        <p:txBody>
+          <a:bodyPr rtlCol="0" anchor="ctr"/>
+          <a:lstStyle/>
+          <a:p>
+            <a:pPr algn="ctr"/>
+            <a:endParaRPr lang="es-ES"/>
+          </a:p>
+        </p:txBody>
+      </p:sp>
+      <p:sp>
+        <p:nvSpPr>
+          <p:cNvPr id="9" name="CuadroTexto 8">
+            <a:extLst>
+              <a:ext uri="{FF2B5EF4-FFF2-40B4-BE49-F238E27FC236}">
+                <a16:creationId xmlns:a16="http://schemas.microsoft.com/office/drawing/2014/main" id="{76409B55-1FF9-05CA-E20C-E946527B6ECD}"/>
+              </a:ext>
+            </a:extLst>
+          </p:cNvPr>
+          <p:cNvSpPr txBox="1"/>
+          <p:nvPr/>
+        </p:nvSpPr>
+        <p:spPr>
+          <a:xfrm>
+            <a:off x="4876800" y="2159000"/>
+            <a:ext cx="1676400" cy="369332"/>
+          </a:xfrm>
+          <a:prstGeom prst="rect">
+            <a:avLst/>
+          </a:prstGeom>
+          <a:noFill/>
+        </p:spPr>
+        <p:txBody>
+          <a:bodyPr vert="horz" wrap="square" lIns="0" tIns="0" rIns="0" bIns="0" rtlCol="0">
+            <a:noAutofit/>
+          </a:bodyPr>
+          <a:lstStyle/>
+          <a:p>
+            <a:r>
+              <a:rPr lang="es-ES" sz="1600" b="1">
+                <a:solidFill>
+                  <a:srgbClr val="4975B0"/>
+                </a:solidFill>
+                <a:latin typeface="Segoe UI" panose="020B0502040204020203" pitchFamily="34" charset="0"/>
+              </a:rPr>
+              <a:t>1. Registro</a:t>
+            </a:r>
+          </a:p>
+        </p:txBody>
+      </p:sp>
+      <p:sp>
+        <p:nvSpPr>
+          <p:cNvPr id="10" name="CuadroTexto 9">
+            <a:extLst>
+              <a:ext uri="{FF2B5EF4-FFF2-40B4-BE49-F238E27FC236}">
+                <a16:creationId xmlns:a16="http://schemas.microsoft.com/office/drawing/2014/main" id="{4CA6F5FF-4D69-355C-34A2-CD3F5AF5358B}"/>
+              </a:ext>
+            </a:extLst>
+          </p:cNvPr>
+          <p:cNvSpPr txBox="1"/>
+          <p:nvPr/>
+        </p:nvSpPr>
+        <p:spPr>
+          <a:xfrm>
+            <a:off x="6604000" y="2159000"/>
+            <a:ext cx="4064000" cy="369332"/>
+          </a:xfrm>
+          <a:prstGeom prst="rect">
+            <a:avLst/>
+          </a:prstGeom>
+          <a:noFill/>
+        </p:spPr>
+        <p:txBody>
+          <a:bodyPr vert="horz" wrap="square" lIns="0" tIns="0" rIns="0" bIns="0" rtlCol="0">
+            <a:noAutofit/>
+          </a:bodyPr>
+          <a:lstStyle/>
+          <a:p>
+            <a:r>
+              <a:rPr lang="es-ES" sz="1400">
+                <a:solidFill>
+                  <a:srgbClr val="1F2937"/>
+                </a:solidFill>
+                <a:latin typeface="Segoe UI" panose="020B0502040204020203" pitchFamily="34" charset="0"/>
+              </a:rPr>
+              <a:t>La empresa envia la solicitud.</a:t>
+            </a:r>
+          </a:p>
+        </p:txBody>
+      </p:sp>
+      <p:sp>
+        <p:nvSpPr>
+          <p:cNvPr id="11" name="Rectángulo: esquinas redondeadas 10">
+            <a:extLst>
+              <a:ext uri="{FF2B5EF4-FFF2-40B4-BE49-F238E27FC236}">
+                <a16:creationId xmlns:a16="http://schemas.microsoft.com/office/drawing/2014/main" id="{8BFAF78B-1B2B-5291-293E-820940BCE32D}"/>
+              </a:ext>
+            </a:extLst>
+          </p:cNvPr>
+          <p:cNvSpPr/>
+          <p:nvPr/>
+        </p:nvSpPr>
+        <p:spPr>
+          <a:xfrm>
+            <a:off x="4597400" y="2895600"/>
+            <a:ext cx="6477000" cy="685800"/>
+          </a:xfrm>
+          <a:prstGeom prst="roundRect">
+            <a:avLst/>
+          </a:prstGeom>
+          <a:solidFill>
+            <a:srgbClr val="F7FAFC"/>
+          </a:solidFill>
+          <a:ln w="12700">
+            <a:solidFill>
+              <a:srgbClr val="DDE5EE"/>
+            </a:solidFill>
+          </a:ln>
+        </p:spPr>
+        <p:style>
+          <a:lnRef idx="2">
+            <a:schemeClr val="accent1">
+              <a:shade val="15000"/>
+            </a:schemeClr>
+          </a:lnRef>
+          <a:fillRef idx="1">
+            <a:schemeClr val="accent1"/>
+          </a:fillRef>
+          <a:effectRef idx="0">
+            <a:schemeClr val="accent1"/>
+          </a:effectRef>
+          <a:fontRef idx="minor">
+            <a:schemeClr val="lt1"/>
+          </a:fontRef>
+        </p:style>
+        <p:txBody>
+          <a:bodyPr rtlCol="0" anchor="ctr"/>
+          <a:lstStyle/>
+          <a:p>
+            <a:pPr algn="ctr"/>
+            <a:endParaRPr lang="es-ES"/>
+          </a:p>
+        </p:txBody>
+      </p:sp>
+      <p:sp>
+        <p:nvSpPr>
+          <p:cNvPr id="12" name="CuadroTexto 11">
+            <a:extLst>
+              <a:ext uri="{FF2B5EF4-FFF2-40B4-BE49-F238E27FC236}">
+                <a16:creationId xmlns:a16="http://schemas.microsoft.com/office/drawing/2014/main" id="{0F4FC968-FEC4-DA0E-E391-9B756368F5C9}"/>
+              </a:ext>
+            </a:extLst>
+          </p:cNvPr>
+          <p:cNvSpPr txBox="1"/>
+          <p:nvPr/>
+        </p:nvSpPr>
+        <p:spPr>
+          <a:xfrm>
+            <a:off x="4876800" y="3022600"/>
+            <a:ext cx="1676400" cy="369332"/>
+          </a:xfrm>
+          <a:prstGeom prst="rect">
+            <a:avLst/>
+          </a:prstGeom>
+          <a:noFill/>
+        </p:spPr>
+        <p:txBody>
+          <a:bodyPr vert="horz" wrap="square" lIns="0" tIns="0" rIns="0" bIns="0" rtlCol="0">
+            <a:noAutofit/>
+          </a:bodyPr>
+          <a:lstStyle/>
+          <a:p>
+            <a:r>
+              <a:rPr lang="es-ES" sz="1600" b="1">
+                <a:solidFill>
+                  <a:srgbClr val="4975B0"/>
+                </a:solidFill>
+                <a:latin typeface="Segoe UI" panose="020B0502040204020203" pitchFamily="34" charset="0"/>
+              </a:rPr>
+              <a:t>2. Verificacion</a:t>
+            </a:r>
+          </a:p>
+        </p:txBody>
+      </p:sp>
+      <p:sp>
+        <p:nvSpPr>
+          <p:cNvPr id="13" name="CuadroTexto 12">
+            <a:extLst>
+              <a:ext uri="{FF2B5EF4-FFF2-40B4-BE49-F238E27FC236}">
+                <a16:creationId xmlns:a16="http://schemas.microsoft.com/office/drawing/2014/main" id="{0EC0647C-77B4-AF71-3D0D-E54806027063}"/>
+              </a:ext>
+            </a:extLst>
+          </p:cNvPr>
+          <p:cNvSpPr txBox="1"/>
+          <p:nvPr/>
+        </p:nvSpPr>
+        <p:spPr>
+          <a:xfrm>
+            <a:off x="6604000" y="3022600"/>
+            <a:ext cx="4064000" cy="369332"/>
+          </a:xfrm>
+          <a:prstGeom prst="rect">
+            <a:avLst/>
+          </a:prstGeom>
+          <a:noFill/>
+        </p:spPr>
+        <p:txBody>
+          <a:bodyPr vert="horz" wrap="square" lIns="0" tIns="0" rIns="0" bIns="0" rtlCol="0">
+            <a:noAutofit/>
+          </a:bodyPr>
+          <a:lstStyle/>
+          <a:p>
+            <a:r>
+              <a:rPr lang="es-ES" sz="1400">
+                <a:solidFill>
+                  <a:srgbClr val="1F2937"/>
+                </a:solidFill>
+                <a:latin typeface="Segoe UI" panose="020B0502040204020203" pitchFamily="34" charset="0"/>
+              </a:rPr>
+              <a:t>Recibe enlace y confirma correo.</a:t>
+            </a:r>
+          </a:p>
+        </p:txBody>
+      </p:sp>
+      <p:sp>
+        <p:nvSpPr>
+          <p:cNvPr id="14" name="Rectángulo: esquinas redondeadas 13">
+            <a:extLst>
+              <a:ext uri="{FF2B5EF4-FFF2-40B4-BE49-F238E27FC236}">
+                <a16:creationId xmlns:a16="http://schemas.microsoft.com/office/drawing/2014/main" id="{5D4EC944-4691-ED16-8EC6-081AC36B8E33}"/>
+              </a:ext>
+            </a:extLst>
+          </p:cNvPr>
+          <p:cNvSpPr/>
+          <p:nvPr/>
+        </p:nvSpPr>
+        <p:spPr>
+          <a:xfrm>
+            <a:off x="4597400" y="3759200"/>
+            <a:ext cx="6477000" cy="685800"/>
+          </a:xfrm>
+          <a:prstGeom prst="roundRect">
+            <a:avLst/>
+          </a:prstGeom>
+          <a:solidFill>
+            <a:srgbClr val="F7FAFC"/>
+          </a:solidFill>
+          <a:ln w="12700">
+            <a:solidFill>
+              <a:srgbClr val="DDE5EE"/>
+            </a:solidFill>
+          </a:ln>
+        </p:spPr>
+        <p:style>
+          <a:lnRef idx="2">
+            <a:schemeClr val="accent1">
+              <a:shade val="15000"/>
+            </a:schemeClr>
+          </a:lnRef>
+          <a:fillRef idx="1">
+            <a:schemeClr val="accent1"/>
+          </a:fillRef>
+          <a:effectRef idx="0">
+            <a:schemeClr val="accent1"/>
+          </a:effectRef>
+          <a:fontRef idx="minor">
+            <a:schemeClr val="lt1"/>
+          </a:fontRef>
+        </p:style>
+        <p:txBody>
+          <a:bodyPr rtlCol="0" anchor="ctr"/>
+          <a:lstStyle/>
+          <a:p>
+            <a:pPr algn="ctr"/>
+            <a:endParaRPr lang="es-ES"/>
+          </a:p>
+        </p:txBody>
+      </p:sp>
+      <p:sp>
+        <p:nvSpPr>
+          <p:cNvPr id="15" name="CuadroTexto 14">
+            <a:extLst>
+              <a:ext uri="{FF2B5EF4-FFF2-40B4-BE49-F238E27FC236}">
+                <a16:creationId xmlns:a16="http://schemas.microsoft.com/office/drawing/2014/main" id="{3BAB85E2-4DE6-012A-94DB-3DD42C13458B}"/>
+              </a:ext>
+            </a:extLst>
+          </p:cNvPr>
+          <p:cNvSpPr txBox="1"/>
+          <p:nvPr/>
+        </p:nvSpPr>
+        <p:spPr>
+          <a:xfrm>
+            <a:off x="4876800" y="3886200"/>
+            <a:ext cx="1676400" cy="369332"/>
+          </a:xfrm>
+          <a:prstGeom prst="rect">
+            <a:avLst/>
+          </a:prstGeom>
+          <a:noFill/>
+        </p:spPr>
+        <p:txBody>
+          <a:bodyPr vert="horz" wrap="square" lIns="0" tIns="0" rIns="0" bIns="0" rtlCol="0">
+            <a:noAutofit/>
+          </a:bodyPr>
+          <a:lstStyle/>
+          <a:p>
+            <a:r>
+              <a:rPr lang="es-ES" sz="1600" b="1">
+                <a:solidFill>
+                  <a:srgbClr val="4975B0"/>
+                </a:solidFill>
+                <a:latin typeface="Segoe UI" panose="020B0502040204020203" pitchFamily="34" charset="0"/>
+              </a:rPr>
+              <a:t>3. Revision</a:t>
+            </a:r>
+          </a:p>
+        </p:txBody>
+      </p:sp>
+      <p:sp>
+        <p:nvSpPr>
+          <p:cNvPr id="16" name="CuadroTexto 15">
+            <a:extLst>
+              <a:ext uri="{FF2B5EF4-FFF2-40B4-BE49-F238E27FC236}">
+                <a16:creationId xmlns:a16="http://schemas.microsoft.com/office/drawing/2014/main" id="{89F92D73-D283-698B-4D77-606985933359}"/>
+              </a:ext>
+            </a:extLst>
+          </p:cNvPr>
+          <p:cNvSpPr txBox="1"/>
+          <p:nvPr/>
+        </p:nvSpPr>
+        <p:spPr>
+          <a:xfrm>
+            <a:off x="6604000" y="3886200"/>
+            <a:ext cx="4064000" cy="369332"/>
+          </a:xfrm>
+          <a:prstGeom prst="rect">
+            <a:avLst/>
+          </a:prstGeom>
+          <a:noFill/>
+        </p:spPr>
+        <p:txBody>
+          <a:bodyPr vert="horz" wrap="square" lIns="0" tIns="0" rIns="0" bIns="0" rtlCol="0">
+            <a:noAutofit/>
+          </a:bodyPr>
+          <a:lstStyle/>
+          <a:p>
+            <a:r>
+              <a:rPr lang="es-ES" sz="1400">
+                <a:solidFill>
+                  <a:srgbClr val="1F2937"/>
+                </a:solidFill>
+                <a:latin typeface="Segoe UI" panose="020B0502040204020203" pitchFamily="34" charset="0"/>
+              </a:rPr>
+              <a:t>El centro aprueba o rechaza.</a:t>
+            </a:r>
+          </a:p>
+        </p:txBody>
+      </p:sp>
+      <p:sp>
+        <p:nvSpPr>
+          <p:cNvPr id="17" name="Rectángulo: esquinas redondeadas 16">
+            <a:extLst>
+              <a:ext uri="{FF2B5EF4-FFF2-40B4-BE49-F238E27FC236}">
+                <a16:creationId xmlns:a16="http://schemas.microsoft.com/office/drawing/2014/main" id="{5D5B2AB5-87B9-B15C-018C-CEBB6F47100B}"/>
+              </a:ext>
+            </a:extLst>
+          </p:cNvPr>
+          <p:cNvSpPr/>
+          <p:nvPr/>
+        </p:nvSpPr>
+        <p:spPr>
+          <a:xfrm>
+            <a:off x="4597400" y="4622800"/>
+            <a:ext cx="6477000" cy="685800"/>
+          </a:xfrm>
+          <a:prstGeom prst="roundRect">
+            <a:avLst/>
+          </a:prstGeom>
+          <a:solidFill>
+            <a:srgbClr val="F7FAFC"/>
+          </a:solidFill>
+          <a:ln w="12700">
+            <a:solidFill>
+              <a:srgbClr val="DDE5EE"/>
+            </a:solidFill>
+          </a:ln>
+        </p:spPr>
+        <p:style>
+          <a:lnRef idx="2">
+            <a:schemeClr val="accent1">
+              <a:shade val="15000"/>
+            </a:schemeClr>
+          </a:lnRef>
+          <a:fillRef idx="1">
+            <a:schemeClr val="accent1"/>
+          </a:fillRef>
+          <a:effectRef idx="0">
+            <a:schemeClr val="accent1"/>
+          </a:effectRef>
+          <a:fontRef idx="minor">
+            <a:schemeClr val="lt1"/>
+          </a:fontRef>
+        </p:style>
+        <p:txBody>
+          <a:bodyPr rtlCol="0" anchor="ctr"/>
+          <a:lstStyle/>
+          <a:p>
+            <a:pPr algn="ctr"/>
+            <a:endParaRPr lang="es-ES"/>
+          </a:p>
+        </p:txBody>
+      </p:sp>
+      <p:sp>
+        <p:nvSpPr>
+          <p:cNvPr id="18" name="CuadroTexto 17">
+            <a:extLst>
+              <a:ext uri="{FF2B5EF4-FFF2-40B4-BE49-F238E27FC236}">
+                <a16:creationId xmlns:a16="http://schemas.microsoft.com/office/drawing/2014/main" id="{E9BC1837-93EF-D3CE-2CD8-8F3060F1A27B}"/>
+              </a:ext>
+            </a:extLst>
+          </p:cNvPr>
+          <p:cNvSpPr txBox="1"/>
+          <p:nvPr/>
+        </p:nvSpPr>
+        <p:spPr>
+          <a:xfrm>
+            <a:off x="4876800" y="4749800"/>
+            <a:ext cx="1676400" cy="369332"/>
+          </a:xfrm>
+          <a:prstGeom prst="rect">
+            <a:avLst/>
+          </a:prstGeom>
+          <a:noFill/>
+        </p:spPr>
+        <p:txBody>
+          <a:bodyPr vert="horz" wrap="square" lIns="0" tIns="0" rIns="0" bIns="0" rtlCol="0">
+            <a:noAutofit/>
+          </a:bodyPr>
+          <a:lstStyle/>
+          <a:p>
+            <a:r>
+              <a:rPr lang="es-ES" sz="1600" b="1">
+                <a:solidFill>
+                  <a:srgbClr val="4975B0"/>
+                </a:solidFill>
+                <a:latin typeface="Segoe UI" panose="020B0502040204020203" pitchFamily="34" charset="0"/>
+              </a:rPr>
+              <a:t>4. Resultado</a:t>
+            </a:r>
+          </a:p>
+        </p:txBody>
+      </p:sp>
+      <p:sp>
+        <p:nvSpPr>
+          <p:cNvPr id="19" name="CuadroTexto 18">
+            <a:extLst>
+              <a:ext uri="{FF2B5EF4-FFF2-40B4-BE49-F238E27FC236}">
+                <a16:creationId xmlns:a16="http://schemas.microsoft.com/office/drawing/2014/main" id="{A42F90E0-DE57-5568-4EDF-BABAE0AD47DA}"/>
+              </a:ext>
+            </a:extLst>
+          </p:cNvPr>
+          <p:cNvSpPr txBox="1"/>
+          <p:nvPr/>
+        </p:nvSpPr>
+        <p:spPr>
+          <a:xfrm>
+            <a:off x="6604000" y="4749800"/>
+            <a:ext cx="4064000" cy="369332"/>
+          </a:xfrm>
+          <a:prstGeom prst="rect">
+            <a:avLst/>
+          </a:prstGeom>
+          <a:noFill/>
+        </p:spPr>
+        <p:txBody>
+          <a:bodyPr vert="horz" wrap="square" lIns="0" tIns="0" rIns="0" bIns="0" rtlCol="0">
+            <a:noAutofit/>
+          </a:bodyPr>
+          <a:lstStyle/>
+          <a:p>
+            <a:r>
+              <a:rPr lang="es-ES" sz="1400">
+                <a:solidFill>
+                  <a:srgbClr val="1F2937"/>
+                </a:solidFill>
+                <a:latin typeface="Segoe UI" panose="020B0502040204020203" pitchFamily="34" charset="0"/>
+              </a:rPr>
+              <a:t>Si se rechaza llega correo y el estado sigue visible en el portal.</a:t>
             </a:r>
           </a:p>
         </p:txBody>
@@ -4025,7 +4522,7 @@
     </p:spTree>
     <p:extLst>
       <p:ext uri="{BB962C8B-B14F-4D97-AF65-F5344CB8AC3E}">
-        <p14:creationId xmlns:p14="http://schemas.microsoft.com/office/powerpoint/2010/main" val="1589886555"/>
+        <p14:creationId xmlns:p14="http://schemas.microsoft.com/office/powerpoint/2010/main" val="3532658494"/>
       </p:ext>
     </p:extLst>
   </p:cSld>
@@ -4065,7 +4562,7 @@
           <p:cNvPr id="2" name="CuadroTexto 1">
             <a:extLst>
               <a:ext uri="{FF2B5EF4-FFF2-40B4-BE49-F238E27FC236}">
-                <a16:creationId xmlns:a16="http://schemas.microsoft.com/office/drawing/2014/main" id="{4573553B-DABF-2373-C4B1-2F06D96A4314}"/>
+                <a16:creationId xmlns:a16="http://schemas.microsoft.com/office/drawing/2014/main" id="{EB6C318D-A379-813A-0988-B1A9761E04CA}"/>
               </a:ext>
             </a:extLst>
           </p:cNvPr>
@@ -4095,7 +4592,7 @@
                 </a:solidFill>
                 <a:latin typeface="Segoe UI" panose="020B0502040204020203" pitchFamily="34" charset="0"/>
               </a:rPr>
-              <a:t>10 / CODIGO CLAVE</a:t>
+              <a:t>10 / DOMINIO EXTERNO</a:t>
             </a:r>
           </a:p>
         </p:txBody>
@@ -4105,7 +4602,7 @@
           <p:cNvPr id="3" name="CuadroTexto 2">
             <a:extLst>
               <a:ext uri="{FF2B5EF4-FFF2-40B4-BE49-F238E27FC236}">
-                <a16:creationId xmlns:a16="http://schemas.microsoft.com/office/drawing/2014/main" id="{9AF28A3B-E6EC-4494-0840-9464369FA657}"/>
+                <a16:creationId xmlns:a16="http://schemas.microsoft.com/office/drawing/2014/main" id="{3B42BBBE-4372-3EB3-C9B1-28067BAE8AB7}"/>
               </a:ext>
             </a:extLst>
           </p:cNvPr>
@@ -4135,7 +4632,7 @@
                 </a:solidFill>
                 <a:latin typeface="Segoe UI" panose="020B0502040204020203" pitchFamily="34" charset="0"/>
               </a:rPr>
-              <a:t>Reglas de negocio en asignaciones</a:t>
+              <a:t>Como resuelvo el acceso publico y los enlaces de correo</a:t>
             </a:r>
           </a:p>
         </p:txBody>
@@ -4145,7 +4642,7 @@
           <p:cNvPr id="4" name="CuadroTexto 3">
             <a:extLst>
               <a:ext uri="{FF2B5EF4-FFF2-40B4-BE49-F238E27FC236}">
-                <a16:creationId xmlns:a16="http://schemas.microsoft.com/office/drawing/2014/main" id="{9687D3D1-A0B0-5F38-7837-D1E7B62534F6}"/>
+                <a16:creationId xmlns:a16="http://schemas.microsoft.com/office/drawing/2014/main" id="{01C176EB-D1AA-B5C4-7F31-C4594402B1B8}"/>
               </a:ext>
             </a:extLst>
           </p:cNvPr>
@@ -4175,7 +4672,7 @@
                 </a:solidFill>
                 <a:latin typeface="Segoe UI" panose="020B0502040204020203" pitchFamily="34" charset="0"/>
               </a:rPr>
-              <a:t>La aplicacion impide asignaciones incoherentes aunque alguien intente saltarse el formulario.</a:t>
+              <a:t>El problema ya no es una IP local incrustada: la plataforma publica una URL HTTPS estable sobre la VM cloud.</a:t>
             </a:r>
           </a:p>
         </p:txBody>
@@ -4185,7 +4682,7 @@
           <p:cNvPr id="5" name="Rectángulo: esquinas redondeadas 4">
             <a:extLst>
               <a:ext uri="{FF2B5EF4-FFF2-40B4-BE49-F238E27FC236}">
-                <a16:creationId xmlns:a16="http://schemas.microsoft.com/office/drawing/2014/main" id="{FFEA8B83-3615-8230-D7CE-2634922F651D}"/>
+                <a16:creationId xmlns:a16="http://schemas.microsoft.com/office/drawing/2014/main" id="{0C1FA7CE-AA04-AF8B-B1AE-513BA4BC5676}"/>
               </a:ext>
             </a:extLst>
           </p:cNvPr>
@@ -4194,27 +4691,20 @@
         </p:nvSpPr>
         <p:spPr>
           <a:xfrm>
-            <a:off x="711200" y="1930400"/>
-            <a:ext cx="6959600" cy="3873500"/>
+            <a:off x="914400" y="2463800"/>
+            <a:ext cx="2413000" cy="1168400"/>
           </a:xfrm>
           <a:prstGeom prst="roundRect">
             <a:avLst/>
           </a:prstGeom>
           <a:solidFill>
-            <a:srgbClr val="080C12"/>
+            <a:srgbClr val="F7FAFC"/>
           </a:solidFill>
           <a:ln w="12700">
             <a:solidFill>
-              <a:srgbClr val="37495C"/>
+              <a:srgbClr val="DDE5EE"/>
             </a:solidFill>
           </a:ln>
-          <a:effectLst>
-            <a:outerShdw blurRad="127000" dist="56796" dir="3806099" rotWithShape="0">
-              <a:srgbClr val="000000">
-                <a:alpha val="38000"/>
-              </a:srgbClr>
-            </a:outerShdw>
-          </a:effectLst>
         </p:spPr>
         <p:style>
           <a:lnRef idx="2">
@@ -4246,65 +4736,325 @@
           <p:cNvPr id="6" name="CuadroTexto 5">
             <a:extLst>
               <a:ext uri="{FF2B5EF4-FFF2-40B4-BE49-F238E27FC236}">
-                <a16:creationId xmlns:a16="http://schemas.microsoft.com/office/drawing/2014/main" id="{9C00006F-6CCE-8D7E-5115-DE6842B3E2F4}"/>
-              </a:ext>
-            </a:extLst>
-          </p:cNvPr>
-          <p:cNvSpPr txBox="1"/>
-          <p:nvPr/>
-        </p:nvSpPr>
-        <p:spPr>
-          <a:xfrm>
-            <a:off x="939800" y="2120900"/>
-            <a:ext cx="6502400" cy="369332"/>
-          </a:xfrm>
-          <a:prstGeom prst="rect">
-            <a:avLst/>
-          </a:prstGeom>
-          <a:noFill/>
-        </p:spPr>
-        <p:txBody>
-          <a:bodyPr vert="horz" wrap="square" lIns="0" tIns="0" rIns="0" bIns="0" rtlCol="0">
-            <a:noAutofit/>
-          </a:bodyPr>
-          <a:lstStyle/>
-          <a:p>
-            <a:r>
-              <a:rPr lang="es-ES" sz="1300">
-                <a:solidFill>
-                  <a:srgbClr val="E2E8F0"/>
+                <a16:creationId xmlns:a16="http://schemas.microsoft.com/office/drawing/2014/main" id="{ECF4DDCD-700B-10A4-0DBB-57683CF91507}"/>
+              </a:ext>
+            </a:extLst>
+          </p:cNvPr>
+          <p:cNvSpPr txBox="1"/>
+          <p:nvPr/>
+        </p:nvSpPr>
+        <p:spPr>
+          <a:xfrm>
+            <a:off x="1219200" y="2717800"/>
+            <a:ext cx="1905000" cy="369332"/>
+          </a:xfrm>
+          <a:prstGeom prst="rect">
+            <a:avLst/>
+          </a:prstGeom>
+          <a:noFill/>
+        </p:spPr>
+        <p:txBody>
+          <a:bodyPr vert="horz" wrap="square" lIns="0" tIns="0" rIns="0" bIns="0" rtlCol="0">
+            <a:noAutofit/>
+          </a:bodyPr>
+          <a:lstStyle/>
+          <a:p>
+            <a:r>
+              <a:rPr lang="es-ES" b="1">
+                <a:solidFill>
+                  <a:srgbClr val="4975B0"/>
+                </a:solidFill>
+                <a:latin typeface="Segoe UI" panose="020B0502040204020203" pitchFamily="34" charset="0"/>
+              </a:rPr>
+              <a:t>Infraestructura</a:t>
+            </a:r>
+          </a:p>
+        </p:txBody>
+      </p:sp>
+      <p:sp>
+        <p:nvSpPr>
+          <p:cNvPr id="7" name="CuadroTexto 6">
+            <a:extLst>
+              <a:ext uri="{FF2B5EF4-FFF2-40B4-BE49-F238E27FC236}">
+                <a16:creationId xmlns:a16="http://schemas.microsoft.com/office/drawing/2014/main" id="{0B84B0ED-17A7-78DE-80F4-34C88011AC41}"/>
+              </a:ext>
+            </a:extLst>
+          </p:cNvPr>
+          <p:cNvSpPr txBox="1"/>
+          <p:nvPr/>
+        </p:nvSpPr>
+        <p:spPr>
+          <a:xfrm>
+            <a:off x="1219200" y="3124200"/>
+            <a:ext cx="1905000" cy="369332"/>
+          </a:xfrm>
+          <a:prstGeom prst="rect">
+            <a:avLst/>
+          </a:prstGeom>
+          <a:noFill/>
+        </p:spPr>
+        <p:txBody>
+          <a:bodyPr vert="horz" wrap="square" lIns="0" tIns="0" rIns="0" bIns="0" rtlCol="0">
+            <a:noAutofit/>
+          </a:bodyPr>
+          <a:lstStyle/>
+          <a:p>
+            <a:r>
+              <a:rPr lang="es-ES" sz="1200">
+                <a:solidFill>
+                  <a:srgbClr val="1F2937"/>
                 </a:solidFill>
                 <a:latin typeface="Consolas" panose="020B0609020204030204" pitchFamily="49" charset="0"/>
               </a:rPr>
-              <a:t>private const ELIGIBLE_COMPANY_STATES = ['activa'];
-private const ELIGIBLE_CONVENIO_STATES = ['firmado', 'vigente', 'renovacion'];
-if ($empresa &amp;&amp; $convenio-&gt;getEmpresa()-&gt;getId() !== $empresa-&gt;getId()) {
-  return $this-&gt;json([
-    'message' =&gt; 'El convenio no pertenece a la empresa indicada.'
-  ], Response::HTTP_BAD_REQUEST);
-}
-$this-&gt;validateCompanyForAssignment($empresa);
-$this-&gt;validateConvenioForAssignment($convenio);</a:t>
-            </a:r>
-          </a:p>
-        </p:txBody>
-      </p:sp>
-      <p:sp>
-        <p:nvSpPr>
-          <p:cNvPr id="7" name="CuadroTexto 6">
-            <a:extLst>
-              <a:ext uri="{FF2B5EF4-FFF2-40B4-BE49-F238E27FC236}">
-                <a16:creationId xmlns:a16="http://schemas.microsoft.com/office/drawing/2014/main" id="{FF0FDDA5-30F4-230D-6563-3F4495A28F51}"/>
-              </a:ext>
-            </a:extLst>
-          </p:cNvPr>
-          <p:cNvSpPr txBox="1"/>
-          <p:nvPr/>
-        </p:nvSpPr>
-        <p:spPr>
-          <a:xfrm>
-            <a:off x="939800" y="5410200"/>
-            <a:ext cx="6502400" cy="369332"/>
+              <a:t>GCP + Docker Compose</a:t>
+            </a:r>
+          </a:p>
+        </p:txBody>
+      </p:sp>
+      <p:sp>
+        <p:nvSpPr>
+          <p:cNvPr id="8" name="Rectángulo: esquinas redondeadas 7">
+            <a:extLst>
+              <a:ext uri="{FF2B5EF4-FFF2-40B4-BE49-F238E27FC236}">
+                <a16:creationId xmlns:a16="http://schemas.microsoft.com/office/drawing/2014/main" id="{FBFBDBF3-96AF-ED49-4CB0-FE9650FF6A2C}"/>
+              </a:ext>
+            </a:extLst>
+          </p:cNvPr>
+          <p:cNvSpPr/>
+          <p:nvPr/>
+        </p:nvSpPr>
+        <p:spPr>
+          <a:xfrm>
+            <a:off x="4775200" y="2463800"/>
+            <a:ext cx="2413000" cy="1168400"/>
+          </a:xfrm>
+          <a:prstGeom prst="roundRect">
+            <a:avLst/>
+          </a:prstGeom>
+          <a:solidFill>
+            <a:srgbClr val="F7FAFC"/>
+          </a:solidFill>
+          <a:ln w="12700">
+            <a:solidFill>
+              <a:srgbClr val="DDE5EE"/>
+            </a:solidFill>
+          </a:ln>
+        </p:spPr>
+        <p:style>
+          <a:lnRef idx="2">
+            <a:schemeClr val="accent1">
+              <a:shade val="15000"/>
+            </a:schemeClr>
+          </a:lnRef>
+          <a:fillRef idx="1">
+            <a:schemeClr val="accent1"/>
+          </a:fillRef>
+          <a:effectRef idx="0">
+            <a:schemeClr val="accent1"/>
+          </a:effectRef>
+          <a:fontRef idx="minor">
+            <a:schemeClr val="lt1"/>
+          </a:fontRef>
+        </p:style>
+        <p:txBody>
+          <a:bodyPr rtlCol="0" anchor="ctr"/>
+          <a:lstStyle/>
+          <a:p>
+            <a:pPr algn="ctr"/>
+            <a:endParaRPr lang="es-ES"/>
+          </a:p>
+        </p:txBody>
+      </p:sp>
+      <p:sp>
+        <p:nvSpPr>
+          <p:cNvPr id="9" name="CuadroTexto 8">
+            <a:extLst>
+              <a:ext uri="{FF2B5EF4-FFF2-40B4-BE49-F238E27FC236}">
+                <a16:creationId xmlns:a16="http://schemas.microsoft.com/office/drawing/2014/main" id="{41887F25-D654-250B-E014-C7C2DCEBE80C}"/>
+              </a:ext>
+            </a:extLst>
+          </p:cNvPr>
+          <p:cNvSpPr txBox="1"/>
+          <p:nvPr/>
+        </p:nvSpPr>
+        <p:spPr>
+          <a:xfrm>
+            <a:off x="5130800" y="2717800"/>
+            <a:ext cx="1905000" cy="369332"/>
+          </a:xfrm>
+          <a:prstGeom prst="rect">
+            <a:avLst/>
+          </a:prstGeom>
+          <a:noFill/>
+        </p:spPr>
+        <p:txBody>
+          <a:bodyPr vert="horz" wrap="square" lIns="0" tIns="0" rIns="0" bIns="0" rtlCol="0">
+            <a:noAutofit/>
+          </a:bodyPr>
+          <a:lstStyle/>
+          <a:p>
+            <a:r>
+              <a:rPr lang="es-ES" b="1">
+                <a:solidFill>
+                  <a:srgbClr val="4975B0"/>
+                </a:solidFill>
+                <a:latin typeface="Segoe UI" panose="020B0502040204020203" pitchFamily="34" charset="0"/>
+              </a:rPr>
+              <a:t>Borde HTTPS</a:t>
+            </a:r>
+          </a:p>
+        </p:txBody>
+      </p:sp>
+      <p:sp>
+        <p:nvSpPr>
+          <p:cNvPr id="10" name="CuadroTexto 9">
+            <a:extLst>
+              <a:ext uri="{FF2B5EF4-FFF2-40B4-BE49-F238E27FC236}">
+                <a16:creationId xmlns:a16="http://schemas.microsoft.com/office/drawing/2014/main" id="{4D271785-A2ED-8972-3966-D833F2421BC8}"/>
+              </a:ext>
+            </a:extLst>
+          </p:cNvPr>
+          <p:cNvSpPr txBox="1"/>
+          <p:nvPr/>
+        </p:nvSpPr>
+        <p:spPr>
+          <a:xfrm>
+            <a:off x="5410200" y="3124200"/>
+            <a:ext cx="1143000" cy="369332"/>
+          </a:xfrm>
+          <a:prstGeom prst="rect">
+            <a:avLst/>
+          </a:prstGeom>
+          <a:noFill/>
+        </p:spPr>
+        <p:txBody>
+          <a:bodyPr vert="horz" wrap="square" lIns="0" tIns="0" rIns="0" bIns="0" rtlCol="0">
+            <a:noAutofit/>
+          </a:bodyPr>
+          <a:lstStyle/>
+          <a:p>
+            <a:r>
+              <a:rPr lang="es-ES" sz="1400">
+                <a:solidFill>
+                  <a:srgbClr val="1F2937"/>
+                </a:solidFill>
+                <a:latin typeface="Consolas" panose="020B0609020204030204" pitchFamily="49" charset="0"/>
+              </a:rPr>
+              <a:t>Caddy</a:t>
+            </a:r>
+          </a:p>
+        </p:txBody>
+      </p:sp>
+      <p:sp>
+        <p:nvSpPr>
+          <p:cNvPr id="11" name="Rectángulo: esquinas redondeadas 10">
+            <a:extLst>
+              <a:ext uri="{FF2B5EF4-FFF2-40B4-BE49-F238E27FC236}">
+                <a16:creationId xmlns:a16="http://schemas.microsoft.com/office/drawing/2014/main" id="{03CB2B5F-3C01-6895-DA2C-4CF6C14AC82C}"/>
+              </a:ext>
+            </a:extLst>
+          </p:cNvPr>
+          <p:cNvSpPr/>
+          <p:nvPr/>
+        </p:nvSpPr>
+        <p:spPr>
+          <a:xfrm>
+            <a:off x="8255000" y="2463800"/>
+            <a:ext cx="3073400" cy="1168400"/>
+          </a:xfrm>
+          <a:prstGeom prst="roundRect">
+            <a:avLst/>
+          </a:prstGeom>
+          <a:solidFill>
+            <a:srgbClr val="1D2430"/>
+          </a:solidFill>
+          <a:ln w="12700">
+            <a:solidFill>
+              <a:srgbClr val="424E60"/>
+            </a:solidFill>
+          </a:ln>
+        </p:spPr>
+        <p:style>
+          <a:lnRef idx="2">
+            <a:schemeClr val="accent1">
+              <a:shade val="15000"/>
+            </a:schemeClr>
+          </a:lnRef>
+          <a:fillRef idx="1">
+            <a:schemeClr val="accent1"/>
+          </a:fillRef>
+          <a:effectRef idx="0">
+            <a:schemeClr val="accent1"/>
+          </a:effectRef>
+          <a:fontRef idx="minor">
+            <a:schemeClr val="lt1"/>
+          </a:fontRef>
+        </p:style>
+        <p:txBody>
+          <a:bodyPr rtlCol="0" anchor="ctr"/>
+          <a:lstStyle/>
+          <a:p>
+            <a:pPr algn="ctr"/>
+            <a:endParaRPr lang="es-ES"/>
+          </a:p>
+        </p:txBody>
+      </p:sp>
+      <p:sp>
+        <p:nvSpPr>
+          <p:cNvPr id="12" name="CuadroTexto 11">
+            <a:extLst>
+              <a:ext uri="{FF2B5EF4-FFF2-40B4-BE49-F238E27FC236}">
+                <a16:creationId xmlns:a16="http://schemas.microsoft.com/office/drawing/2014/main" id="{C880637A-CB1B-5782-D079-ACC2BE9637C5}"/>
+              </a:ext>
+            </a:extLst>
+          </p:cNvPr>
+          <p:cNvSpPr txBox="1"/>
+          <p:nvPr/>
+        </p:nvSpPr>
+        <p:spPr>
+          <a:xfrm>
+            <a:off x="8559800" y="2717800"/>
+            <a:ext cx="2286000" cy="369332"/>
+          </a:xfrm>
+          <a:prstGeom prst="rect">
+            <a:avLst/>
+          </a:prstGeom>
+          <a:noFill/>
+        </p:spPr>
+        <p:txBody>
+          <a:bodyPr vert="horz" wrap="square" lIns="0" tIns="0" rIns="0" bIns="0" rtlCol="0">
+            <a:noAutofit/>
+          </a:bodyPr>
+          <a:lstStyle/>
+          <a:p>
+            <a:r>
+              <a:rPr lang="es-ES" b="1">
+                <a:solidFill>
+                  <a:srgbClr val="DBA14D"/>
+                </a:solidFill>
+                <a:latin typeface="Segoe UI" panose="020B0502040204020203" pitchFamily="34" charset="0"/>
+              </a:rPr>
+              <a:t>URL publica</a:t>
+            </a:r>
+          </a:p>
+        </p:txBody>
+      </p:sp>
+      <p:sp>
+        <p:nvSpPr>
+          <p:cNvPr id="13" name="CuadroTexto 12">
+            <a:extLst>
+              <a:ext uri="{FF2B5EF4-FFF2-40B4-BE49-F238E27FC236}">
+                <a16:creationId xmlns:a16="http://schemas.microsoft.com/office/drawing/2014/main" id="{D3DE608D-A0B7-5295-B3CD-640A62ED4713}"/>
+              </a:ext>
+            </a:extLst>
+          </p:cNvPr>
+          <p:cNvSpPr txBox="1"/>
+          <p:nvPr/>
+        </p:nvSpPr>
+        <p:spPr>
+          <a:xfrm>
+            <a:off x="8483600" y="3124200"/>
+            <a:ext cx="2641600" cy="369332"/>
           </a:xfrm>
           <a:prstGeom prst="rect">
             <a:avLst/>
@@ -4320,31 +5070,31 @@
             <a:r>
               <a:rPr lang="es-ES" sz="1000">
                 <a:solidFill>
-                  <a:srgbClr val="94A3B8"/>
+                  <a:srgbClr val="F6F8FC"/>
                 </a:solidFill>
                 <a:latin typeface="Consolas" panose="020B0609020204030204" pitchFamily="49" charset="0"/>
               </a:rPr>
-              <a:t>backend/src/Controller/Api/AsignacionController.php</a:t>
-            </a:r>
-          </a:p>
-        </p:txBody>
-      </p:sp>
-      <p:sp>
-        <p:nvSpPr>
-          <p:cNvPr id="8" name="CuadroTexto 7">
-            <a:extLst>
-              <a:ext uri="{FF2B5EF4-FFF2-40B4-BE49-F238E27FC236}">
-                <a16:creationId xmlns:a16="http://schemas.microsoft.com/office/drawing/2014/main" id="{68F77224-2EDC-3ECF-2BC9-0DFA65E8A5DA}"/>
-              </a:ext>
-            </a:extLst>
-          </p:cNvPr>
-          <p:cNvSpPr txBox="1"/>
-          <p:nvPr/>
-        </p:nvSpPr>
-        <p:spPr>
-          <a:xfrm>
-            <a:off x="8204200" y="2209800"/>
-            <a:ext cx="3111500" cy="369332"/>
+              <a:t>https://agora.34.175...</a:t>
+            </a:r>
+          </a:p>
+        </p:txBody>
+      </p:sp>
+      <p:sp>
+        <p:nvSpPr>
+          <p:cNvPr id="14" name="CuadroTexto 13">
+            <a:extLst>
+              <a:ext uri="{FF2B5EF4-FFF2-40B4-BE49-F238E27FC236}">
+                <a16:creationId xmlns:a16="http://schemas.microsoft.com/office/drawing/2014/main" id="{72EC6BCA-D704-E1FF-9E90-0AE17FAE0EBB}"/>
+              </a:ext>
+            </a:extLst>
+          </p:cNvPr>
+          <p:cNvSpPr txBox="1"/>
+          <p:nvPr/>
+        </p:nvSpPr>
+        <p:spPr>
+          <a:xfrm>
+            <a:off x="1168400" y="4216400"/>
+            <a:ext cx="9652000" cy="369332"/>
           </a:xfrm>
           <a:prstGeom prst="rect">
             <a:avLst/>
@@ -4371,7 +5121,7 @@
                 </a:solidFill>
                 <a:latin typeface="Segoe UI" panose="020B0502040204020203" pitchFamily="34" charset="0"/>
               </a:rPr>
-              <a:t>Solo empresas activas.</a:t>
+              <a:t>El portal externo y los correos usan ya el origen publico correcto de la VM.</a:t>
             </a:r>
           </a:p>
           <a:p>
@@ -4389,7 +5139,7 @@
                 </a:solidFill>
                 <a:latin typeface="Segoe UI" panose="020B0502040204020203" pitchFamily="34" charset="0"/>
               </a:rPr>
-              <a:t>Solo convenios firmados, vigentes o en renovacion.</a:t>
+              <a:t>APP_EXTERNAL_BASE_URL fija la URL canonica para enlaces y notificaciones.</a:t>
             </a:r>
           </a:p>
           <a:p>
@@ -4407,25 +5157,7 @@
                 </a:solidFill>
                 <a:latin typeface="Segoe UI" panose="020B0502040204020203" pitchFamily="34" charset="0"/>
               </a:rPr>
-              <a:t>El convenio debe pertenecer a la empresa elegida.</a:t>
-            </a:r>
-          </a:p>
-          <a:p>
-            <a:pPr marL="342900" indent="-342900">
-              <a:spcAft>
-                <a:spcPts val="1000"/>
-              </a:spcAft>
-              <a:buFont typeface="+mj-lt"/>
-              <a:buChar char="•"/>
-            </a:pPr>
-            <a:r>
-              <a:rPr lang="es-ES" sz="1700">
-                <a:solidFill>
-                  <a:srgbClr val="C2CBD8"/>
-                </a:solidFill>
-                <a:latin typeface="Segoe UI" panose="020B0502040204020203" pitchFamily="34" charset="0"/>
-              </a:rPr>
-              <a:t>La regla vive en backend y no depende solo de la UI.</a:t>
+              <a:t>El siguiente paso natural seria cambiar nip.io por dominio institucional propio.</a:t>
             </a:r>
           </a:p>
         </p:txBody>
@@ -4433,7 +5165,7 @@
     </p:spTree>
     <p:extLst>
       <p:ext uri="{BB962C8B-B14F-4D97-AF65-F5344CB8AC3E}">
-        <p14:creationId xmlns:p14="http://schemas.microsoft.com/office/powerpoint/2010/main" val="4206735405"/>
+        <p14:creationId xmlns:p14="http://schemas.microsoft.com/office/powerpoint/2010/main" val="3405836489"/>
       </p:ext>
     </p:extLst>
   </p:cSld>
@@ -4473,7 +5205,7 @@
           <p:cNvPr id="2" name="CuadroTexto 1">
             <a:extLst>
               <a:ext uri="{FF2B5EF4-FFF2-40B4-BE49-F238E27FC236}">
-                <a16:creationId xmlns:a16="http://schemas.microsoft.com/office/drawing/2014/main" id="{797A3F06-C125-14CA-F808-DA81DE1F3910}"/>
+                <a16:creationId xmlns:a16="http://schemas.microsoft.com/office/drawing/2014/main" id="{7B9B6B7E-C6B3-B223-1BFD-E8BEC0482E7E}"/>
               </a:ext>
             </a:extLst>
           </p:cNvPr>
@@ -4503,7 +5235,7 @@
                 </a:solidFill>
                 <a:latin typeface="Segoe UI" panose="020B0502040204020203" pitchFamily="34" charset="0"/>
               </a:rPr>
-              <a:t>11 / CODIGO CLAVE</a:t>
+              <a:t>11 / MENSAJERIA</a:t>
             </a:r>
           </a:p>
         </p:txBody>
@@ -4513,7 +5245,7 @@
           <p:cNvPr id="3" name="CuadroTexto 2">
             <a:extLst>
               <a:ext uri="{FF2B5EF4-FFF2-40B4-BE49-F238E27FC236}">
-                <a16:creationId xmlns:a16="http://schemas.microsoft.com/office/drawing/2014/main" id="{88228733-60FB-3A89-BB9F-9DC1E7825519}"/>
+                <a16:creationId xmlns:a16="http://schemas.microsoft.com/office/drawing/2014/main" id="{16DCD38B-33FD-0819-047A-A0BC19FA6012}"/>
               </a:ext>
             </a:extLst>
           </p:cNvPr>
@@ -4543,7 +5275,7 @@
                 </a:solidFill>
                 <a:latin typeface="Segoe UI" panose="020B0502040204020203" pitchFamily="34" charset="0"/>
               </a:rPr>
-              <a:t>Cliente API compartido por el panel interno</a:t>
+              <a:t>Bandeja y chat con actualizacion automatica</a:t>
             </a:r>
           </a:p>
         </p:txBody>
@@ -4553,7 +5285,7 @@
           <p:cNvPr id="4" name="CuadroTexto 3">
             <a:extLst>
               <a:ext uri="{FF2B5EF4-FFF2-40B4-BE49-F238E27FC236}">
-                <a16:creationId xmlns:a16="http://schemas.microsoft.com/office/drawing/2014/main" id="{A2F35359-1E67-EB0E-E9F0-D88BBB410D3B}"/>
+                <a16:creationId xmlns:a16="http://schemas.microsoft.com/office/drawing/2014/main" id="{D99D53E9-606E-E5A8-BEAB-4AAFA0BA4E3E}"/>
               </a:ext>
             </a:extLst>
           </p:cNvPr>
@@ -4583,17 +5315,58 @@
                 </a:solidFill>
                 <a:latin typeface="Segoe UI" panose="020B0502040204020203" pitchFamily="34" charset="0"/>
               </a:rPr>
-              <a:t>Centraliza credenciales, sesion, errores y llamadas al backend.</a:t>
-            </a:r>
-          </a:p>
-        </p:txBody>
-      </p:sp>
-      <p:sp>
-        <p:nvSpPr>
-          <p:cNvPr id="5" name="Rectángulo: esquinas redondeadas 4">
-            <a:extLst>
-              <a:ext uri="{FF2B5EF4-FFF2-40B4-BE49-F238E27FC236}">
-                <a16:creationId xmlns:a16="http://schemas.microsoft.com/office/drawing/2014/main" id="{2ABA5F54-B668-33BB-A181-50BE0832C347}"/>
+              <a:t>La comunicacion entre centro y empresa no depende ya de recargar la pagina a mano.</a:t>
+            </a:r>
+          </a:p>
+        </p:txBody>
+      </p:sp>
+      <p:pic>
+        <p:nvPicPr>
+          <p:cNvPr id="6" name="Imagen 5">
+            <a:extLst>
+              <a:ext uri="{FF2B5EF4-FFF2-40B4-BE49-F238E27FC236}">
+                <a16:creationId xmlns:a16="http://schemas.microsoft.com/office/drawing/2014/main" id="{2D78C6A8-502A-BF1F-7037-B92D921A1848}"/>
+              </a:ext>
+            </a:extLst>
+          </p:cNvPr>
+          <p:cNvPicPr>
+            <a:picLocks noChangeAspect="1"/>
+          </p:cNvPicPr>
+          <p:nvPr/>
+        </p:nvPicPr>
+        <p:blipFill>
+          <a:blip r:embed="rId2">
+            <a:extLst>
+              <a:ext uri="{28A0092B-C50C-407E-A947-70E740481C1C}">
+                <a14:useLocalDpi xmlns:a14="http://schemas.microsoft.com/office/drawing/2010/main" val="0"/>
+              </a:ext>
+            </a:extLst>
+          </a:blip>
+          <a:stretch>
+            <a:fillRect/>
+          </a:stretch>
+        </p:blipFill>
+        <p:spPr>
+          <a:xfrm>
+            <a:off x="635000" y="2028825"/>
+            <a:ext cx="6604000" cy="3714750"/>
+          </a:xfrm>
+          <a:prstGeom prst="rect">
+            <a:avLst/>
+          </a:prstGeom>
+          <a:ln w="12700">
+            <a:solidFill>
+              <a:schemeClr val="tx1"/>
+            </a:solidFill>
+          </a:ln>
+        </p:spPr>
+      </p:pic>
+      <p:sp>
+        <p:nvSpPr>
+          <p:cNvPr id="7" name="Rectángulo: esquinas redondeadas 6">
+            <a:extLst>
+              <a:ext uri="{FF2B5EF4-FFF2-40B4-BE49-F238E27FC236}">
+                <a16:creationId xmlns:a16="http://schemas.microsoft.com/office/drawing/2014/main" id="{4C3F84F1-C002-E42E-6F30-561370E14D4D}"/>
               </a:ext>
             </a:extLst>
           </p:cNvPr>
@@ -4602,27 +5375,20 @@
         </p:nvSpPr>
         <p:spPr>
           <a:xfrm>
-            <a:off x="711200" y="1930400"/>
-            <a:ext cx="6959600" cy="3873500"/>
+            <a:off x="7874000" y="2082800"/>
+            <a:ext cx="3175000" cy="1066800"/>
           </a:xfrm>
           <a:prstGeom prst="roundRect">
             <a:avLst/>
           </a:prstGeom>
           <a:solidFill>
-            <a:srgbClr val="080C12"/>
+            <a:srgbClr val="1D2430"/>
           </a:solidFill>
           <a:ln w="12700">
             <a:solidFill>
-              <a:srgbClr val="37495C"/>
+              <a:srgbClr val="424E60"/>
             </a:solidFill>
           </a:ln>
-          <a:effectLst>
-            <a:outerShdw blurRad="127000" dist="56796" dir="3806099" rotWithShape="0">
-              <a:srgbClr val="000000">
-                <a:alpha val="38000"/>
-              </a:srgbClr>
-            </a:outerShdw>
-          </a:effectLst>
         </p:spPr>
         <p:style>
           <a:lnRef idx="2">
@@ -4651,117 +5417,100 @@
       </p:sp>
       <p:sp>
         <p:nvSpPr>
-          <p:cNvPr id="6" name="CuadroTexto 5">
-            <a:extLst>
-              <a:ext uri="{FF2B5EF4-FFF2-40B4-BE49-F238E27FC236}">
-                <a16:creationId xmlns:a16="http://schemas.microsoft.com/office/drawing/2014/main" id="{1061B647-6399-0BF7-A438-5D7F80ECCFA6}"/>
-              </a:ext>
-            </a:extLst>
-          </p:cNvPr>
-          <p:cNvSpPr txBox="1"/>
-          <p:nvPr/>
-        </p:nvSpPr>
-        <p:spPr>
-          <a:xfrm>
-            <a:off x="939800" y="2120900"/>
-            <a:ext cx="6502400" cy="369332"/>
-          </a:xfrm>
-          <a:prstGeom prst="rect">
-            <a:avLst/>
-          </a:prstGeom>
-          <a:noFill/>
-        </p:spPr>
-        <p:txBody>
-          <a:bodyPr vert="horz" wrap="square" lIns="0" tIns="0" rIns="0" bIns="0" rtlCol="0">
-            <a:noAutofit/>
-          </a:bodyPr>
-          <a:lstStyle/>
-          <a:p>
-            <a:r>
-              <a:rPr lang="es-ES" sz="1300">
-                <a:solidFill>
-                  <a:srgbClr val="E2E8F0"/>
-                </a:solidFill>
-                <a:latin typeface="Consolas" panose="020B0609020204030204" pitchFamily="49" charset="0"/>
-              </a:rPr>
-              <a:t>async function apiRequest&lt;T&gt;(path: string, init: RequestInit = {}): Promise&lt;T&gt; {
-  const headers = new Headers(init.headers);
-  const authorizationHeader = getAuthorizationHeader();
-  if (authorizationHeader) headers.set('Authorization', authorizationHeader);
-  const response = await fetch(`${API_BASE_URL}${path}`, {
-    ...init,
-    headers,
-    credentials: 'include',
-  });
-  if (!response.ok) throw new Error(`Error ${response.status}`);
-  return response.status === 204 ? undefined as T : await response.json();
-}</a:t>
-            </a:r>
-          </a:p>
-        </p:txBody>
-      </p:sp>
-      <p:sp>
-        <p:nvSpPr>
-          <p:cNvPr id="7" name="CuadroTexto 6">
-            <a:extLst>
-              <a:ext uri="{FF2B5EF4-FFF2-40B4-BE49-F238E27FC236}">
-                <a16:creationId xmlns:a16="http://schemas.microsoft.com/office/drawing/2014/main" id="{4D6501EB-E31C-8F8F-D7AB-194E9BE3B6CC}"/>
-              </a:ext>
-            </a:extLst>
-          </p:cNvPr>
-          <p:cNvSpPr txBox="1"/>
-          <p:nvPr/>
-        </p:nvSpPr>
-        <p:spPr>
-          <a:xfrm>
-            <a:off x="939800" y="5410200"/>
-            <a:ext cx="6502400" cy="369332"/>
-          </a:xfrm>
-          <a:prstGeom prst="rect">
-            <a:avLst/>
-          </a:prstGeom>
-          <a:noFill/>
-        </p:spPr>
-        <p:txBody>
-          <a:bodyPr vert="horz" wrap="square" lIns="0" tIns="0" rIns="0" bIns="0" rtlCol="0">
-            <a:noAutofit/>
-          </a:bodyPr>
-          <a:lstStyle/>
-          <a:p>
-            <a:r>
-              <a:rPr lang="fr-FR" sz="1000">
-                <a:solidFill>
-                  <a:srgbClr val="94A3B8"/>
-                </a:solidFill>
-                <a:latin typeface="Consolas" panose="020B0609020204030204" pitchFamily="49" charset="0"/>
-              </a:rPr>
-              <a:t>frontend/app/src/services/api.ts</a:t>
-            </a:r>
-            <a:endParaRPr lang="es-ES" sz="1000">
-              <a:solidFill>
-                <a:srgbClr val="94A3B8"/>
-              </a:solidFill>
-              <a:latin typeface="Consolas" panose="020B0609020204030204" pitchFamily="49" charset="0"/>
-            </a:endParaRPr>
-          </a:p>
-        </p:txBody>
-      </p:sp>
-      <p:sp>
-        <p:nvSpPr>
           <p:cNvPr id="8" name="CuadroTexto 7">
             <a:extLst>
               <a:ext uri="{FF2B5EF4-FFF2-40B4-BE49-F238E27FC236}">
-                <a16:creationId xmlns:a16="http://schemas.microsoft.com/office/drawing/2014/main" id="{88F1B60E-4A0D-3142-F96B-77EB398FD58D}"/>
-              </a:ext>
-            </a:extLst>
-          </p:cNvPr>
-          <p:cNvSpPr txBox="1"/>
-          <p:nvPr/>
-        </p:nvSpPr>
-        <p:spPr>
-          <a:xfrm>
-            <a:off x="8204200" y="2209800"/>
-            <a:ext cx="3111500" cy="369332"/>
+                <a16:creationId xmlns:a16="http://schemas.microsoft.com/office/drawing/2014/main" id="{34169844-49DA-44AD-10C8-4E9CB91B3260}"/>
+              </a:ext>
+            </a:extLst>
+          </p:cNvPr>
+          <p:cNvSpPr txBox="1"/>
+          <p:nvPr/>
+        </p:nvSpPr>
+        <p:spPr>
+          <a:xfrm>
+            <a:off x="8255000" y="2336800"/>
+            <a:ext cx="2413000" cy="369332"/>
+          </a:xfrm>
+          <a:prstGeom prst="rect">
+            <a:avLst/>
+          </a:prstGeom>
+          <a:noFill/>
+        </p:spPr>
+        <p:txBody>
+          <a:bodyPr vert="horz" wrap="square" lIns="0" tIns="0" rIns="0" bIns="0" rtlCol="0">
+            <a:noAutofit/>
+          </a:bodyPr>
+          <a:lstStyle/>
+          <a:p>
+            <a:r>
+              <a:rPr lang="es-ES" sz="2000" b="1">
+                <a:solidFill>
+                  <a:srgbClr val="DBA14D"/>
+                </a:solidFill>
+                <a:latin typeface="Segoe UI" panose="020B0502040204020203" pitchFamily="34" charset="0"/>
+              </a:rPr>
+              <a:t>Actualizacion automatica</a:t>
+            </a:r>
+          </a:p>
+        </p:txBody>
+      </p:sp>
+      <p:sp>
+        <p:nvSpPr>
+          <p:cNvPr id="9" name="CuadroTexto 8">
+            <a:extLst>
+              <a:ext uri="{FF2B5EF4-FFF2-40B4-BE49-F238E27FC236}">
+                <a16:creationId xmlns:a16="http://schemas.microsoft.com/office/drawing/2014/main" id="{158AF3C4-FC08-AD3B-5C94-74A4CA19B02D}"/>
+              </a:ext>
+            </a:extLst>
+          </p:cNvPr>
+          <p:cNvSpPr txBox="1"/>
+          <p:nvPr/>
+        </p:nvSpPr>
+        <p:spPr>
+          <a:xfrm>
+            <a:off x="8813800" y="2717800"/>
+            <a:ext cx="1320800" cy="369332"/>
+          </a:xfrm>
+          <a:prstGeom prst="rect">
+            <a:avLst/>
+          </a:prstGeom>
+          <a:noFill/>
+        </p:spPr>
+        <p:txBody>
+          <a:bodyPr vert="horz" wrap="square" lIns="0" tIns="0" rIns="0" bIns="0" rtlCol="0">
+            <a:noAutofit/>
+          </a:bodyPr>
+          <a:lstStyle/>
+          <a:p>
+            <a:r>
+              <a:rPr lang="es-ES" sz="2600" b="1">
+                <a:solidFill>
+                  <a:srgbClr val="F6F8FC"/>
+                </a:solidFill>
+                <a:latin typeface="Segoe UI" panose="020B0502040204020203" pitchFamily="34" charset="0"/>
+              </a:rPr>
+              <a:t>5 s</a:t>
+            </a:r>
+          </a:p>
+        </p:txBody>
+      </p:sp>
+      <p:sp>
+        <p:nvSpPr>
+          <p:cNvPr id="10" name="CuadroTexto 9">
+            <a:extLst>
+              <a:ext uri="{FF2B5EF4-FFF2-40B4-BE49-F238E27FC236}">
+                <a16:creationId xmlns:a16="http://schemas.microsoft.com/office/drawing/2014/main" id="{5C1DB574-CDEA-B7AF-AB80-5B09A652AB85}"/>
+              </a:ext>
+            </a:extLst>
+          </p:cNvPr>
+          <p:cNvSpPr txBox="1"/>
+          <p:nvPr/>
+        </p:nvSpPr>
+        <p:spPr>
+          <a:xfrm>
+            <a:off x="7924800" y="3479800"/>
+            <a:ext cx="3175000" cy="369332"/>
           </a:xfrm>
           <a:prstGeom prst="rect">
             <a:avLst/>
@@ -4782,13 +5531,13 @@
               <a:buChar char="•"/>
             </a:pPr>
             <a:r>
-              <a:rPr lang="es-ES" sz="1700">
+              <a:rPr lang="es-ES" sz="1600">
                 <a:solidFill>
                   <a:srgbClr val="C2CBD8"/>
                 </a:solidFill>
                 <a:latin typeface="Segoe UI" panose="020B0502040204020203" pitchFamily="34" charset="0"/>
               </a:rPr>
-              <a:t>Todas las llamadas pasan por un unico punto.</a:t>
+              <a:t>Refresco periodico del chat y de la bandeja.</a:t>
             </a:r>
           </a:p>
           <a:p>
@@ -4800,13 +5549,13 @@
               <a:buChar char="•"/>
             </a:pPr>
             <a:r>
-              <a:rPr lang="es-ES" sz="1700">
+              <a:rPr lang="es-ES" sz="1600">
                 <a:solidFill>
                   <a:srgbClr val="C2CBD8"/>
                 </a:solidFill>
                 <a:latin typeface="Segoe UI" panose="020B0502040204020203" pitchFamily="34" charset="0"/>
               </a:rPr>
-              <a:t>Usa sesion de navegador y cabecera Authorization cuando procede.</a:t>
+              <a:t>Nueva carga cuando la ventana recupera el foco.</a:t>
             </a:r>
           </a:p>
           <a:p>
@@ -4818,13 +5567,13 @@
               <a:buChar char="•"/>
             </a:pPr>
             <a:r>
-              <a:rPr lang="es-ES" sz="1700">
+              <a:rPr lang="es-ES" sz="1600">
                 <a:solidFill>
                   <a:srgbClr val="C2CBD8"/>
                 </a:solidFill>
                 <a:latin typeface="Segoe UI" panose="020B0502040204020203" pitchFamily="34" charset="0"/>
               </a:rPr>
-              <a:t>Normaliza errores para mostrarlos en la interfaz.</a:t>
+              <a:t>La empresa tambien ve cambios en su panel externo.</a:t>
             </a:r>
           </a:p>
           <a:p>
@@ -4836,13 +5585,13 @@
               <a:buChar char="•"/>
             </a:pPr>
             <a:r>
-              <a:rPr lang="es-ES" sz="1700">
+              <a:rPr lang="es-ES" sz="1600">
                 <a:solidFill>
                   <a:srgbClr val="C2CBD8"/>
                 </a:solidFill>
                 <a:latin typeface="Segoe UI" panose="020B0502040204020203" pitchFamily="34" charset="0"/>
               </a:rPr>
-              <a:t>Facilita mantener el frontend sin duplicar fetch en cada pantalla.</a:t>
+              <a:t>El rechazo queda comunicado por correo y visible en estado.</a:t>
             </a:r>
           </a:p>
         </p:txBody>
@@ -4850,7 +5599,7 @@
     </p:spTree>
     <p:extLst>
       <p:ext uri="{BB962C8B-B14F-4D97-AF65-F5344CB8AC3E}">
-        <p14:creationId xmlns:p14="http://schemas.microsoft.com/office/powerpoint/2010/main" val="665728788"/>
+        <p14:creationId xmlns:p14="http://schemas.microsoft.com/office/powerpoint/2010/main" val="2210462987"/>
       </p:ext>
     </p:extLst>
   </p:cSld>
@@ -4890,7 +5639,7 @@
           <p:cNvPr id="2" name="CuadroTexto 1">
             <a:extLst>
               <a:ext uri="{FF2B5EF4-FFF2-40B4-BE49-F238E27FC236}">
-                <a16:creationId xmlns:a16="http://schemas.microsoft.com/office/drawing/2014/main" id="{31F888FA-E479-36C2-3253-A40D180F6B9D}"/>
+                <a16:creationId xmlns:a16="http://schemas.microsoft.com/office/drawing/2014/main" id="{42D3F0E6-C8A7-090D-EAF0-34D303DC63CB}"/>
               </a:ext>
             </a:extLst>
           </p:cNvPr>
@@ -4920,7 +5669,7 @@
                 </a:solidFill>
                 <a:latin typeface="Segoe UI" panose="020B0502040204020203" pitchFamily="34" charset="0"/>
               </a:rPr>
-              <a:t>12 / CODIGO CLAVE</a:t>
+              <a:t>12 / AGORA DESKTOP</a:t>
             </a:r>
           </a:p>
         </p:txBody>
@@ -4930,7 +5679,7 @@
           <p:cNvPr id="3" name="CuadroTexto 2">
             <a:extLst>
               <a:ext uri="{FF2B5EF4-FFF2-40B4-BE49-F238E27FC236}">
-                <a16:creationId xmlns:a16="http://schemas.microsoft.com/office/drawing/2014/main" id="{2043BC74-EA82-F301-6246-FDB8AF785F02}"/>
+                <a16:creationId xmlns:a16="http://schemas.microsoft.com/office/drawing/2014/main" id="{173FB023-723C-BFD4-D252-82974DA3A6C8}"/>
               </a:ext>
             </a:extLst>
           </p:cNvPr>
@@ -4960,7 +5709,7 @@
                 </a:solidFill>
                 <a:latin typeface="Segoe UI" panose="020B0502040204020203" pitchFamily="34" charset="0"/>
               </a:rPr>
-              <a:t>Pruebas E2E sobre flujos reales</a:t>
+              <a:t>Consola tecnica local y cloud</a:t>
             </a:r>
           </a:p>
         </p:txBody>
@@ -4970,7 +5719,7 @@
           <p:cNvPr id="4" name="CuadroTexto 3">
             <a:extLst>
               <a:ext uri="{FF2B5EF4-FFF2-40B4-BE49-F238E27FC236}">
-                <a16:creationId xmlns:a16="http://schemas.microsoft.com/office/drawing/2014/main" id="{358A8D91-CA74-64B4-F3C0-38CEC8759F63}"/>
+                <a16:creationId xmlns:a16="http://schemas.microsoft.com/office/drawing/2014/main" id="{8658B0A6-E10F-F98A-76F7-ED59C2343165}"/>
               </a:ext>
             </a:extLst>
           </p:cNvPr>
@@ -5000,175 +5749,68 @@
                 </a:solidFill>
                 <a:latin typeface="Segoe UI" panose="020B0502040204020203" pitchFamily="34" charset="0"/>
               </a:rPr>
-              <a:t>La defensa no se apoya solo en capturas: hay pruebas que navegan por la app.</a:t>
-            </a:r>
-          </a:p>
-        </p:txBody>
-      </p:sp>
-      <p:sp>
-        <p:nvSpPr>
-          <p:cNvPr id="5" name="Rectángulo: esquinas redondeadas 4">
-            <a:extLst>
-              <a:ext uri="{FF2B5EF4-FFF2-40B4-BE49-F238E27FC236}">
-                <a16:creationId xmlns:a16="http://schemas.microsoft.com/office/drawing/2014/main" id="{9E45E7FC-8E97-33E1-3540-D58933AAAF6D}"/>
-              </a:ext>
-            </a:extLst>
-          </p:cNvPr>
-          <p:cNvSpPr/>
-          <p:nvPr/>
-        </p:nvSpPr>
-        <p:spPr>
-          <a:xfrm>
-            <a:off x="711200" y="1930400"/>
-            <a:ext cx="6959600" cy="3873500"/>
-          </a:xfrm>
-          <a:prstGeom prst="roundRect">
-            <a:avLst/>
-          </a:prstGeom>
-          <a:solidFill>
-            <a:srgbClr val="080C12"/>
-          </a:solidFill>
+              <a:t>La parte tecnica ya no depende de varios terminales sueltos: queda centralizada en una sola app.</a:t>
+            </a:r>
+          </a:p>
+        </p:txBody>
+      </p:sp>
+      <p:pic>
+        <p:nvPicPr>
+          <p:cNvPr id="6" name="Imagen 5">
+            <a:extLst>
+              <a:ext uri="{FF2B5EF4-FFF2-40B4-BE49-F238E27FC236}">
+                <a16:creationId xmlns:a16="http://schemas.microsoft.com/office/drawing/2014/main" id="{95488A2C-AD32-68EC-13CD-150018457362}"/>
+              </a:ext>
+            </a:extLst>
+          </p:cNvPr>
+          <p:cNvPicPr>
+            <a:picLocks noChangeAspect="1"/>
+          </p:cNvPicPr>
+          <p:nvPr/>
+        </p:nvPicPr>
+        <p:blipFill>
+          <a:blip r:embed="rId2">
+            <a:extLst>
+              <a:ext uri="{28A0092B-C50C-407E-A947-70E740481C1C}">
+                <a14:useLocalDpi xmlns:a14="http://schemas.microsoft.com/office/drawing/2010/main" val="0"/>
+              </a:ext>
+            </a:extLst>
+          </a:blip>
+          <a:stretch>
+            <a:fillRect/>
+          </a:stretch>
+        </p:blipFill>
+        <p:spPr>
+          <a:xfrm>
+            <a:off x="635000" y="2305843"/>
+            <a:ext cx="5461000" cy="3071813"/>
+          </a:xfrm>
+          <a:prstGeom prst="rect">
+            <a:avLst/>
+          </a:prstGeom>
           <a:ln w="12700">
             <a:solidFill>
-              <a:srgbClr val="37495C"/>
+              <a:schemeClr val="tx1"/>
             </a:solidFill>
           </a:ln>
-          <a:effectLst>
-            <a:outerShdw blurRad="127000" dist="56796" dir="3806099" rotWithShape="0">
-              <a:srgbClr val="000000">
-                <a:alpha val="38000"/>
-              </a:srgbClr>
-            </a:outerShdw>
-          </a:effectLst>
-        </p:spPr>
-        <p:style>
-          <a:lnRef idx="2">
-            <a:schemeClr val="accent1">
-              <a:shade val="15000"/>
-            </a:schemeClr>
-          </a:lnRef>
-          <a:fillRef idx="1">
-            <a:schemeClr val="accent1"/>
-          </a:fillRef>
-          <a:effectRef idx="0">
-            <a:schemeClr val="accent1"/>
-          </a:effectRef>
-          <a:fontRef idx="minor">
-            <a:schemeClr val="lt1"/>
-          </a:fontRef>
-        </p:style>
-        <p:txBody>
-          <a:bodyPr rtlCol="0" anchor="ctr"/>
-          <a:lstStyle/>
-          <a:p>
-            <a:pPr algn="ctr"/>
-            <a:endParaRPr lang="es-ES"/>
-          </a:p>
-        </p:txBody>
-      </p:sp>
-      <p:sp>
-        <p:nvSpPr>
-          <p:cNvPr id="6" name="CuadroTexto 5">
-            <a:extLst>
-              <a:ext uri="{FF2B5EF4-FFF2-40B4-BE49-F238E27FC236}">
-                <a16:creationId xmlns:a16="http://schemas.microsoft.com/office/drawing/2014/main" id="{9B4AFF21-AF6B-9C00-D92E-06E9EAE94C33}"/>
-              </a:ext>
-            </a:extLst>
-          </p:cNvPr>
-          <p:cNvSpPr txBox="1"/>
-          <p:nvPr/>
-        </p:nvSpPr>
-        <p:spPr>
-          <a:xfrm>
-            <a:off x="939800" y="2120900"/>
-            <a:ext cx="6502400" cy="369332"/>
-          </a:xfrm>
-          <a:prstGeom prst="rect">
-            <a:avLst/>
-          </a:prstGeom>
-          <a:noFill/>
-        </p:spPr>
-        <p:txBody>
-          <a:bodyPr vert="horz" wrap="square" lIns="0" tIns="0" rIns="0" bIns="0" rtlCol="0">
-            <a:noAutofit/>
-          </a:bodyPr>
-          <a:lstStyle/>
-          <a:p>
-            <a:r>
-              <a:rPr lang="es-ES" sz="1300">
-                <a:solidFill>
-                  <a:srgbClr val="E2E8F0"/>
-                </a:solidFill>
-                <a:latin typeface="Consolas" panose="020B0609020204030204" pitchFamily="49" charset="0"/>
-              </a:rPr>
-              <a:t>test('external registration flow reaches mail step', async ({ page }) =&gt; {
-  await page.goto('/externo');
-  await page.getByLabel(/Nombre de la empresa/i).fill('Empresa E2E');
-  await page.getByLabel(/Email corporativo/i).fill('e2e@example.com');
-  await page.getByRole('button', { name: /Enviar solicitud/i }).click();
-  await expect(page).toHaveURL(/\/externo\/correo/);
-  await expect(page.locator('text=Verificacion por correo')).toBeVisible();
-});</a:t>
-            </a:r>
-          </a:p>
-        </p:txBody>
-      </p:sp>
+        </p:spPr>
+      </p:pic>
       <p:sp>
         <p:nvSpPr>
           <p:cNvPr id="7" name="CuadroTexto 6">
             <a:extLst>
               <a:ext uri="{FF2B5EF4-FFF2-40B4-BE49-F238E27FC236}">
-                <a16:creationId xmlns:a16="http://schemas.microsoft.com/office/drawing/2014/main" id="{512B4B7A-5E28-C83D-7063-E13ED908CAE2}"/>
-              </a:ext>
-            </a:extLst>
-          </p:cNvPr>
-          <p:cNvSpPr txBox="1"/>
-          <p:nvPr/>
-        </p:nvSpPr>
-        <p:spPr>
-          <a:xfrm>
-            <a:off x="939800" y="5410200"/>
-            <a:ext cx="6502400" cy="369332"/>
-          </a:xfrm>
-          <a:prstGeom prst="rect">
-            <a:avLst/>
-          </a:prstGeom>
-          <a:noFill/>
-        </p:spPr>
-        <p:txBody>
-          <a:bodyPr vert="horz" wrap="square" lIns="0" tIns="0" rIns="0" bIns="0" rtlCol="0">
-            <a:noAutofit/>
-          </a:bodyPr>
-          <a:lstStyle/>
-          <a:p>
-            <a:r>
-              <a:rPr lang="es-ES" sz="1000">
-                <a:solidFill>
-                  <a:srgbClr val="94A3B8"/>
-                </a:solidFill>
-                <a:latin typeface="Consolas" panose="020B0609020204030204" pitchFamily="49" charset="0"/>
-              </a:rPr>
-              <a:t>frontend/app/e2e/critical-flows.spec.ts</a:t>
-            </a:r>
-          </a:p>
-        </p:txBody>
-      </p:sp>
-      <p:sp>
-        <p:nvSpPr>
-          <p:cNvPr id="8" name="CuadroTexto 7">
-            <a:extLst>
-              <a:ext uri="{FF2B5EF4-FFF2-40B4-BE49-F238E27FC236}">
-                <a16:creationId xmlns:a16="http://schemas.microsoft.com/office/drawing/2014/main" id="{F18A1F40-267C-F464-F5FA-48A8D9FA05F5}"/>
-              </a:ext>
-            </a:extLst>
-          </p:cNvPr>
-          <p:cNvSpPr txBox="1"/>
-          <p:nvPr/>
-        </p:nvSpPr>
-        <p:spPr>
-          <a:xfrm>
-            <a:off x="8204200" y="2209800"/>
-            <a:ext cx="3111500" cy="369332"/>
+                <a16:creationId xmlns:a16="http://schemas.microsoft.com/office/drawing/2014/main" id="{C1933801-18FB-DD6E-590C-18C7B2D41FF3}"/>
+              </a:ext>
+            </a:extLst>
+          </p:cNvPr>
+          <p:cNvSpPr txBox="1"/>
+          <p:nvPr/>
+        </p:nvSpPr>
+        <p:spPr>
+          <a:xfrm>
+            <a:off x="6858000" y="2057400"/>
+            <a:ext cx="4064000" cy="369332"/>
           </a:xfrm>
           <a:prstGeom prst="rect">
             <a:avLst/>
@@ -5195,7 +5837,7 @@
                 </a:solidFill>
                 <a:latin typeface="Segoe UI" panose="020B0502040204020203" pitchFamily="34" charset="0"/>
               </a:rPr>
-              <a:t>Abre el portal externo como usuario real.</a:t>
+              <a:t>Modo local para backend, SQLite y demo offline.</a:t>
             </a:r>
           </a:p>
           <a:p>
@@ -5213,7 +5855,7 @@
                 </a:solidFill>
                 <a:latin typeface="Segoe UI" panose="020B0502040204020203" pitchFamily="34" charset="0"/>
               </a:rPr>
-              <a:t>Rellena el formulario de empresa.</a:t>
+              <a:t>Modo cloud para monitor, smoke, logs y reinicios remotos.</a:t>
             </a:r>
           </a:p>
           <a:p>
@@ -5231,7 +5873,7 @@
                 </a:solidFill>
                 <a:latin typeface="Segoe UI" panose="020B0502040204020203" pitchFamily="34" charset="0"/>
               </a:rPr>
-              <a:t>Comprueba que llega al paso de correo.</a:t>
+              <a:t>MFA en operaciones sensibles del flujo local.</a:t>
             </a:r>
           </a:p>
           <a:p>
@@ -5249,7 +5891,25 @@
                 </a:solidFill>
                 <a:latin typeface="Segoe UI" panose="020B0502040204020203" pitchFamily="34" charset="0"/>
               </a:rPr>
-              <a:t>Complementa los tests backend y unitarios.</a:t>
+              <a:t>Diagnostico, logs y backups desde una sola interfaz.</a:t>
+            </a:r>
+          </a:p>
+          <a:p>
+            <a:pPr marL="342900" indent="-342900">
+              <a:spcAft>
+                <a:spcPts val="1000"/>
+              </a:spcAft>
+              <a:buFont typeface="+mj-lt"/>
+              <a:buChar char="•"/>
+            </a:pPr>
+            <a:r>
+              <a:rPr lang="es-ES" sz="1700">
+                <a:solidFill>
+                  <a:srgbClr val="C2CBD8"/>
+                </a:solidFill>
+                <a:latin typeface="Segoe UI" panose="020B0502040204020203" pitchFamily="34" charset="0"/>
+              </a:rPr>
+              <a:t>Empaquetado Windows listo para la defensa.</a:t>
             </a:r>
           </a:p>
         </p:txBody>
@@ -5257,7 +5917,7 @@
     </p:spTree>
     <p:extLst>
       <p:ext uri="{BB962C8B-B14F-4D97-AF65-F5344CB8AC3E}">
-        <p14:creationId xmlns:p14="http://schemas.microsoft.com/office/powerpoint/2010/main" val="3818227780"/>
+        <p14:creationId xmlns:p14="http://schemas.microsoft.com/office/powerpoint/2010/main" val="198109559"/>
       </p:ext>
     </p:extLst>
   </p:cSld>
@@ -5297,7 +5957,7 @@
           <p:cNvPr id="2" name="CuadroTexto 1">
             <a:extLst>
               <a:ext uri="{FF2B5EF4-FFF2-40B4-BE49-F238E27FC236}">
-                <a16:creationId xmlns:a16="http://schemas.microsoft.com/office/drawing/2014/main" id="{CD31769B-D50B-4D46-596E-824E05542689}"/>
+                <a16:creationId xmlns:a16="http://schemas.microsoft.com/office/drawing/2014/main" id="{58A8D320-D3D9-D479-857F-592D2A98B6D5}"/>
               </a:ext>
             </a:extLst>
           </p:cNvPr>
@@ -5337,7 +5997,7 @@
           <p:cNvPr id="3" name="CuadroTexto 2">
             <a:extLst>
               <a:ext uri="{FF2B5EF4-FFF2-40B4-BE49-F238E27FC236}">
-                <a16:creationId xmlns:a16="http://schemas.microsoft.com/office/drawing/2014/main" id="{CCD0648F-B027-269A-32DB-E6EF0D98BE2E}"/>
+                <a16:creationId xmlns:a16="http://schemas.microsoft.com/office/drawing/2014/main" id="{45502EFF-453D-C37B-4866-D796ED1BF587}"/>
               </a:ext>
             </a:extLst>
           </p:cNvPr>
@@ -5367,7 +6027,7 @@
                 </a:solidFill>
                 <a:latin typeface="Segoe UI" panose="020B0502040204020203" pitchFamily="34" charset="0"/>
               </a:rPr>
-              <a:t>Comprobaciones realizadas antes de la defensa</a:t>
+              <a:t>Comprobaciones ejecutadas antes de la revision final</a:t>
             </a:r>
           </a:p>
         </p:txBody>
@@ -5377,7 +6037,7 @@
           <p:cNvPr id="4" name="Rectángulo: esquinas redondeadas 3">
             <a:extLst>
               <a:ext uri="{FF2B5EF4-FFF2-40B4-BE49-F238E27FC236}">
-                <a16:creationId xmlns:a16="http://schemas.microsoft.com/office/drawing/2014/main" id="{05323D74-0809-F041-1991-F47D324AAE66}"/>
+                <a16:creationId xmlns:a16="http://schemas.microsoft.com/office/drawing/2014/main" id="{0EB9F5AA-9213-DCCA-BFC2-9145D86110F3}"/>
               </a:ext>
             </a:extLst>
           </p:cNvPr>
@@ -5431,7 +6091,7 @@
           <p:cNvPr id="5" name="CuadroTexto 4">
             <a:extLst>
               <a:ext uri="{FF2B5EF4-FFF2-40B4-BE49-F238E27FC236}">
-                <a16:creationId xmlns:a16="http://schemas.microsoft.com/office/drawing/2014/main" id="{19FD36BB-8B0F-8260-F854-CE25B3BE151D}"/>
+                <a16:creationId xmlns:a16="http://schemas.microsoft.com/office/drawing/2014/main" id="{78F637CC-F7B3-7720-B1F3-148835C7B0A3}"/>
               </a:ext>
             </a:extLst>
           </p:cNvPr>
@@ -5461,7 +6121,7 @@
                 </a:solidFill>
                 <a:latin typeface="Segoe UI" panose="020B0502040204020203" pitchFamily="34" charset="0"/>
               </a:rPr>
-              <a:t>90</a:t>
+              <a:t>101</a:t>
             </a:r>
           </a:p>
         </p:txBody>
@@ -5471,7 +6131,7 @@
           <p:cNvPr id="6" name="CuadroTexto 5">
             <a:extLst>
               <a:ext uri="{FF2B5EF4-FFF2-40B4-BE49-F238E27FC236}">
-                <a16:creationId xmlns:a16="http://schemas.microsoft.com/office/drawing/2014/main" id="{749F936C-8F52-D8B3-651A-2F50AC0E2CFE}"/>
+                <a16:creationId xmlns:a16="http://schemas.microsoft.com/office/drawing/2014/main" id="{C3BF3B7F-00E6-45F1-1BBD-77C5C001A21B}"/>
               </a:ext>
             </a:extLst>
           </p:cNvPr>
@@ -5511,7 +6171,7 @@
           <p:cNvPr id="7" name="Rectángulo: esquinas redondeadas 6">
             <a:extLst>
               <a:ext uri="{FF2B5EF4-FFF2-40B4-BE49-F238E27FC236}">
-                <a16:creationId xmlns:a16="http://schemas.microsoft.com/office/drawing/2014/main" id="{2E662721-1E9D-0984-CE8B-8DC58443971E}"/>
+                <a16:creationId xmlns:a16="http://schemas.microsoft.com/office/drawing/2014/main" id="{75ABA86E-3F26-5381-6A09-2098F1B7A76F}"/>
               </a:ext>
             </a:extLst>
           </p:cNvPr>
@@ -5565,7 +6225,7 @@
           <p:cNvPr id="8" name="CuadroTexto 7">
             <a:extLst>
               <a:ext uri="{FF2B5EF4-FFF2-40B4-BE49-F238E27FC236}">
-                <a16:creationId xmlns:a16="http://schemas.microsoft.com/office/drawing/2014/main" id="{565C60D7-E94E-2709-BC4F-CA701626F5A7}"/>
+                <a16:creationId xmlns:a16="http://schemas.microsoft.com/office/drawing/2014/main" id="{01C63BFB-98C4-7ED5-773B-9E0E5B0F060A}"/>
               </a:ext>
             </a:extLst>
           </p:cNvPr>
@@ -5595,7 +6255,7 @@
                 </a:solidFill>
                 <a:latin typeface="Segoe UI" panose="020B0502040204020203" pitchFamily="34" charset="0"/>
               </a:rPr>
-              <a:t>522</a:t>
+              <a:t>567</a:t>
             </a:r>
           </a:p>
         </p:txBody>
@@ -5605,7 +6265,7 @@
           <p:cNvPr id="9" name="CuadroTexto 8">
             <a:extLst>
               <a:ext uri="{FF2B5EF4-FFF2-40B4-BE49-F238E27FC236}">
-                <a16:creationId xmlns:a16="http://schemas.microsoft.com/office/drawing/2014/main" id="{46B65B74-4E32-132A-F7C2-9DF6FF7C9195}"/>
+                <a16:creationId xmlns:a16="http://schemas.microsoft.com/office/drawing/2014/main" id="{B97B74B2-7776-1E59-2D39-45BF642969E4}"/>
               </a:ext>
             </a:extLst>
           </p:cNvPr>
@@ -5645,7 +6305,7 @@
           <p:cNvPr id="10" name="Rectángulo: esquinas redondeadas 9">
             <a:extLst>
               <a:ext uri="{FF2B5EF4-FFF2-40B4-BE49-F238E27FC236}">
-                <a16:creationId xmlns:a16="http://schemas.microsoft.com/office/drawing/2014/main" id="{AC38B38F-4B3F-2732-CA5C-D7CE72E85242}"/>
+                <a16:creationId xmlns:a16="http://schemas.microsoft.com/office/drawing/2014/main" id="{A1D25B25-7532-80F7-A1BC-B653824749E7}"/>
               </a:ext>
             </a:extLst>
           </p:cNvPr>
@@ -5699,7 +6359,7 @@
           <p:cNvPr id="11" name="CuadroTexto 10">
             <a:extLst>
               <a:ext uri="{FF2B5EF4-FFF2-40B4-BE49-F238E27FC236}">
-                <a16:creationId xmlns:a16="http://schemas.microsoft.com/office/drawing/2014/main" id="{6CE4B240-3200-1EEC-2CCD-0BDFF263A3F4}"/>
+                <a16:creationId xmlns:a16="http://schemas.microsoft.com/office/drawing/2014/main" id="{4BF23786-17DA-8D81-ACC7-DE506C18099A}"/>
               </a:ext>
             </a:extLst>
           </p:cNvPr>
@@ -5739,7 +6399,7 @@
           <p:cNvPr id="12" name="CuadroTexto 11">
             <a:extLst>
               <a:ext uri="{FF2B5EF4-FFF2-40B4-BE49-F238E27FC236}">
-                <a16:creationId xmlns:a16="http://schemas.microsoft.com/office/drawing/2014/main" id="{14B6F759-BFC5-BA11-6711-993345E8C3F5}"/>
+                <a16:creationId xmlns:a16="http://schemas.microsoft.com/office/drawing/2014/main" id="{0CCE4AB0-8957-E3DE-AA4F-1766A6C32A75}"/>
               </a:ext>
             </a:extLst>
           </p:cNvPr>
@@ -5779,7 +6439,7 @@
           <p:cNvPr id="13" name="Rectángulo: esquinas redondeadas 12">
             <a:extLst>
               <a:ext uri="{FF2B5EF4-FFF2-40B4-BE49-F238E27FC236}">
-                <a16:creationId xmlns:a16="http://schemas.microsoft.com/office/drawing/2014/main" id="{257B8291-E5A6-D9FE-11E2-4B20000CB7BD}"/>
+                <a16:creationId xmlns:a16="http://schemas.microsoft.com/office/drawing/2014/main" id="{2A2CF79F-7B26-6FF9-27BE-288884F83C81}"/>
               </a:ext>
             </a:extLst>
           </p:cNvPr>
@@ -5833,7 +6493,7 @@
           <p:cNvPr id="14" name="CuadroTexto 13">
             <a:extLst>
               <a:ext uri="{FF2B5EF4-FFF2-40B4-BE49-F238E27FC236}">
-                <a16:creationId xmlns:a16="http://schemas.microsoft.com/office/drawing/2014/main" id="{25AF199E-81BB-FB28-1F57-D67B331E9C36}"/>
+                <a16:creationId xmlns:a16="http://schemas.microsoft.com/office/drawing/2014/main" id="{D9E33C67-CB50-BC7D-9ABD-8F6AB00E83ED}"/>
               </a:ext>
             </a:extLst>
           </p:cNvPr>
@@ -5863,7 +6523,7 @@
                 </a:solidFill>
                 <a:latin typeface="Segoe UI" panose="020B0502040204020203" pitchFamily="34" charset="0"/>
               </a:rPr>
-              <a:t>3/3</a:t>
+              <a:t>6/6</a:t>
             </a:r>
           </a:p>
         </p:txBody>
@@ -5873,7 +6533,7 @@
           <p:cNvPr id="15" name="CuadroTexto 14">
             <a:extLst>
               <a:ext uri="{FF2B5EF4-FFF2-40B4-BE49-F238E27FC236}">
-                <a16:creationId xmlns:a16="http://schemas.microsoft.com/office/drawing/2014/main" id="{57D39FE6-519B-EF22-F752-AB318B1CE041}"/>
+                <a16:creationId xmlns:a16="http://schemas.microsoft.com/office/drawing/2014/main" id="{A7459030-4D23-0822-8CD0-1B97AE0B84BC}"/>
               </a:ext>
             </a:extLst>
           </p:cNvPr>
@@ -5913,7 +6573,7 @@
           <p:cNvPr id="16" name="CuadroTexto 15">
             <a:extLst>
               <a:ext uri="{FF2B5EF4-FFF2-40B4-BE49-F238E27FC236}">
-                <a16:creationId xmlns:a16="http://schemas.microsoft.com/office/drawing/2014/main" id="{62190035-646C-6478-68E4-A18655287021}"/>
+                <a16:creationId xmlns:a16="http://schemas.microsoft.com/office/drawing/2014/main" id="{458ACC12-BE56-02A8-3685-6CEB8BF8C5BB}"/>
               </a:ext>
             </a:extLst>
           </p:cNvPr>
@@ -5950,7 +6610,7 @@
                 </a:solidFill>
                 <a:latin typeface="Segoe UI" panose="020B0502040204020203" pitchFamily="34" charset="0"/>
               </a:rPr>
-              <a:t>Build integrada de los dos frontends publicada en Symfony.</a:t>
+              <a:t>Build integrada de /app y /externo publicada en Symfony.</a:t>
             </a:r>
           </a:p>
           <a:p>
@@ -5968,7 +6628,7 @@
                 </a:solidFill>
                 <a:latin typeface="Segoe UI" panose="020B0502040204020203" pitchFamily="34" charset="0"/>
               </a:rPr>
-              <a:t>Rutas /app, /externo, /documentacion y /monitor comprobadas con HTTP 200.</a:t>
+              <a:t>Verificados correo, rechazo, URLs publicas, chat, monitor legacy y app de escritorio.</a:t>
             </a:r>
           </a:p>
           <a:p>
@@ -5986,7 +6646,7 @@
                 </a:solidFill>
                 <a:latin typeface="Segoe UI" panose="020B0502040204020203" pitchFamily="34" charset="0"/>
               </a:rPr>
-              <a:t>Flujos criticos: login interno, monitor privado y registro externo hasta correo.</a:t>
+              <a:t>Tambien se ha validado el empaquetado Windows con PHP embebido y SQLite.</a:t>
             </a:r>
           </a:p>
         </p:txBody>
@@ -5996,16 +6656,16 @@
           <p:cNvPr id="17" name="CuadroTexto 16">
             <a:extLst>
               <a:ext uri="{FF2B5EF4-FFF2-40B4-BE49-F238E27FC236}">
-                <a16:creationId xmlns:a16="http://schemas.microsoft.com/office/drawing/2014/main" id="{1B32A1F7-1071-61D7-CF27-1042C0759C47}"/>
-              </a:ext>
-            </a:extLst>
-          </p:cNvPr>
-          <p:cNvSpPr txBox="1"/>
-          <p:nvPr/>
-        </p:nvSpPr>
-        <p:spPr>
-          <a:xfrm>
-            <a:off x="1193800" y="5588000"/>
+                <a16:creationId xmlns:a16="http://schemas.microsoft.com/office/drawing/2014/main" id="{865254E5-511B-D601-A467-89263CA473C4}"/>
+              </a:ext>
+            </a:extLst>
+          </p:cNvPr>
+          <p:cNvSpPr txBox="1"/>
+          <p:nvPr/>
+        </p:nvSpPr>
+        <p:spPr>
+          <a:xfrm>
+            <a:off x="1193800" y="5562600"/>
             <a:ext cx="9271000" cy="369332"/>
           </a:xfrm>
           <a:prstGeom prst="rect">
@@ -6026,7 +6686,7 @@
                 </a:solidFill>
                 <a:latin typeface="Segoe UI" panose="020B0502040204020203" pitchFamily="34" charset="0"/>
               </a:rPr>
-              <a:t>Queda una deprecacion tecnica de Doctrine/PHPUnit, no bloqueante para la demo ni para la funcionalidad.</a:t>
+              <a:t>Queda una deprecacion tecnica de PHPUnit, no bloqueante para la demo ni para la funcionalidad.</a:t>
             </a:r>
           </a:p>
         </p:txBody>
@@ -6034,7 +6694,7 @@
     </p:spTree>
     <p:extLst>
       <p:ext uri="{BB962C8B-B14F-4D97-AF65-F5344CB8AC3E}">
-        <p14:creationId xmlns:p14="http://schemas.microsoft.com/office/powerpoint/2010/main" val="701091883"/>
+        <p14:creationId xmlns:p14="http://schemas.microsoft.com/office/powerpoint/2010/main" val="4151966672"/>
       </p:ext>
     </p:extLst>
   </p:cSld>
@@ -6074,7 +6734,7 @@
           <p:cNvPr id="2" name="CuadroTexto 1">
             <a:extLst>
               <a:ext uri="{FF2B5EF4-FFF2-40B4-BE49-F238E27FC236}">
-                <a16:creationId xmlns:a16="http://schemas.microsoft.com/office/drawing/2014/main" id="{A8EDEE22-43E9-E198-66BF-8002977B584A}"/>
+                <a16:creationId xmlns:a16="http://schemas.microsoft.com/office/drawing/2014/main" id="{5196CABB-6C82-094D-72E5-EAA8E0A9070B}"/>
               </a:ext>
             </a:extLst>
           </p:cNvPr>
@@ -6114,7 +6774,7 @@
           <p:cNvPr id="3" name="CuadroTexto 2">
             <a:extLst>
               <a:ext uri="{FF2B5EF4-FFF2-40B4-BE49-F238E27FC236}">
-                <a16:creationId xmlns:a16="http://schemas.microsoft.com/office/drawing/2014/main" id="{11915613-87DA-92AD-06CC-7444AEF5F78F}"/>
+                <a16:creationId xmlns:a16="http://schemas.microsoft.com/office/drawing/2014/main" id="{7DA1A7FB-DDF9-4965-7F17-B1761287B81A}"/>
               </a:ext>
             </a:extLst>
           </p:cNvPr>
@@ -6144,7 +6804,7 @@
                 </a:solidFill>
                 <a:latin typeface="Segoe UI" panose="020B0502040204020203" pitchFamily="34" charset="0"/>
               </a:rPr>
-              <a:t>Como puede probarla la profesora</a:t>
+              <a:t>Como puede probarla la profesora desde fuera</a:t>
             </a:r>
           </a:p>
         </p:txBody>
@@ -6154,7 +6814,7 @@
           <p:cNvPr id="4" name="CuadroTexto 3">
             <a:extLst>
               <a:ext uri="{FF2B5EF4-FFF2-40B4-BE49-F238E27FC236}">
-                <a16:creationId xmlns:a16="http://schemas.microsoft.com/office/drawing/2014/main" id="{611DF2B7-D5FC-B61C-4A49-849A9E4629DE}"/>
+                <a16:creationId xmlns:a16="http://schemas.microsoft.com/office/drawing/2014/main" id="{724B5627-82BD-3649-F968-C05ED6EAC3EB}"/>
               </a:ext>
             </a:extLst>
           </p:cNvPr>
@@ -6184,7 +6844,7 @@
                 </a:solidFill>
                 <a:latin typeface="Segoe UI" panose="020B0502040204020203" pitchFamily="34" charset="0"/>
               </a:rPr>
-              <a:t>No necesita instalar dependencias si el entorno de demostracion esta levantado.</a:t>
+              <a:t>Con la VM levantada no necesita instalar dependencias en su equipo.</a:t>
             </a:r>
           </a:p>
         </p:txBody>
@@ -6194,7 +6854,7 @@
           <p:cNvPr id="5" name="Rectángulo: esquinas redondeadas 4">
             <a:extLst>
               <a:ext uri="{FF2B5EF4-FFF2-40B4-BE49-F238E27FC236}">
-                <a16:creationId xmlns:a16="http://schemas.microsoft.com/office/drawing/2014/main" id="{F4C4393D-1784-C48B-DE96-8175E054650D}"/>
+                <a16:creationId xmlns:a16="http://schemas.microsoft.com/office/drawing/2014/main" id="{2A49FF86-1A50-3660-9AB2-CC6B73910ACA}"/>
               </a:ext>
             </a:extLst>
           </p:cNvPr>
@@ -6203,8 +6863,8 @@
         </p:nvSpPr>
         <p:spPr>
           <a:xfrm>
-            <a:off x="889000" y="2032000"/>
-            <a:ext cx="10414000" cy="1651000"/>
+            <a:off x="863600" y="2006600"/>
+            <a:ext cx="10464800" cy="1168400"/>
           </a:xfrm>
           <a:prstGeom prst="roundRect">
             <a:avLst/>
@@ -6248,16 +6908,16 @@
           <p:cNvPr id="6" name="CuadroTexto 5">
             <a:extLst>
               <a:ext uri="{FF2B5EF4-FFF2-40B4-BE49-F238E27FC236}">
-                <a16:creationId xmlns:a16="http://schemas.microsoft.com/office/drawing/2014/main" id="{C6B46110-8EE8-EFF1-88CB-3B1B54DF4A7E}"/>
-              </a:ext>
-            </a:extLst>
-          </p:cNvPr>
-          <p:cNvSpPr txBox="1"/>
-          <p:nvPr/>
-        </p:nvSpPr>
-        <p:spPr>
-          <a:xfrm>
-            <a:off x="1244600" y="2336800"/>
+                <a16:creationId xmlns:a16="http://schemas.microsoft.com/office/drawing/2014/main" id="{38BB3FBC-878F-C284-3984-DE711FA9AA3B}"/>
+              </a:ext>
+            </a:extLst>
+          </p:cNvPr>
+          <p:cNvSpPr txBox="1"/>
+          <p:nvPr/>
+        </p:nvSpPr>
+        <p:spPr>
+          <a:xfrm>
+            <a:off x="1244600" y="2362200"/>
             <a:ext cx="9652000" cy="369332"/>
           </a:xfrm>
           <a:prstGeom prst="rect">
@@ -6272,13 +6932,13 @@
           <a:lstStyle/>
           <a:p>
             <a:r>
-              <a:rPr lang="es-ES" sz="3000" b="1">
+              <a:rPr lang="es-ES" sz="1300" b="1">
                 <a:solidFill>
                   <a:srgbClr val="4975B0"/>
                 </a:solidFill>
                 <a:latin typeface="Consolas" panose="020B0609020204030204" pitchFamily="49" charset="0"/>
               </a:rPr>
-              <a:t>https://...trycloudflare.com</a:t>
+              <a:t>https://agora.34.175.224.87.nip.io/app   |   https://agora.34.175.224.87.nip.io/externo</a:t>
             </a:r>
           </a:p>
         </p:txBody>
@@ -6288,16 +6948,16 @@
           <p:cNvPr id="7" name="CuadroTexto 6">
             <a:extLst>
               <a:ext uri="{FF2B5EF4-FFF2-40B4-BE49-F238E27FC236}">
-                <a16:creationId xmlns:a16="http://schemas.microsoft.com/office/drawing/2014/main" id="{FCFCC93C-65E7-0A9C-29FE-633D9707033F}"/>
-              </a:ext>
-            </a:extLst>
-          </p:cNvPr>
-          <p:cNvSpPr txBox="1"/>
-          <p:nvPr/>
-        </p:nvSpPr>
-        <p:spPr>
-          <a:xfrm>
-            <a:off x="1270000" y="2921000"/>
+                <a16:creationId xmlns:a16="http://schemas.microsoft.com/office/drawing/2014/main" id="{705339D7-AE6F-CF6D-6835-7E5D280AF18C}"/>
+              </a:ext>
+            </a:extLst>
+          </p:cNvPr>
+          <p:cNvSpPr txBox="1"/>
+          <p:nvPr/>
+        </p:nvSpPr>
+        <p:spPr>
+          <a:xfrm>
+            <a:off x="1295400" y="2794000"/>
             <a:ext cx="9652000" cy="369332"/>
           </a:xfrm>
           <a:prstGeom prst="rect">
@@ -6312,33 +6972,207 @@
           <a:lstStyle/>
           <a:p>
             <a:r>
-              <a:rPr lang="es-ES" sz="1500">
+              <a:rPr lang="es-ES" sz="1400">
                 <a:solidFill>
                   <a:srgbClr val="1F2937"/>
                 </a:solidFill>
                 <a:latin typeface="Segoe UI" panose="020B0502040204020203" pitchFamily="34" charset="0"/>
               </a:rPr>
-              <a:t>URL temporal generada con cloudflared mientras el equipo local y el backend estan activos.</a:t>
-            </a:r>
-          </a:p>
-        </p:txBody>
-      </p:sp>
-      <p:sp>
-        <p:nvSpPr>
-          <p:cNvPr id="8" name="CuadroTexto 7">
-            <a:extLst>
-              <a:ext uri="{FF2B5EF4-FFF2-40B4-BE49-F238E27FC236}">
-                <a16:creationId xmlns:a16="http://schemas.microsoft.com/office/drawing/2014/main" id="{963D4D41-69F1-3679-0F46-1DC6D4BB8609}"/>
-              </a:ext>
-            </a:extLst>
-          </p:cNvPr>
-          <p:cNvSpPr txBox="1"/>
-          <p:nvPr/>
-        </p:nvSpPr>
-        <p:spPr>
-          <a:xfrm>
-            <a:off x="1320800" y="4191000"/>
-            <a:ext cx="9398000" cy="369332"/>
+              <a:t>La misma base sirve panel interno, portal externo, documentacion y la shell legacy.</a:t>
+            </a:r>
+          </a:p>
+        </p:txBody>
+      </p:sp>
+      <p:sp>
+        <p:nvSpPr>
+          <p:cNvPr id="8" name="Rectángulo: esquinas redondeadas 7">
+            <a:extLst>
+              <a:ext uri="{FF2B5EF4-FFF2-40B4-BE49-F238E27FC236}">
+                <a16:creationId xmlns:a16="http://schemas.microsoft.com/office/drawing/2014/main" id="{8F0D1F64-5173-E6B0-2867-D732AF7FFA5F}"/>
+              </a:ext>
+            </a:extLst>
+          </p:cNvPr>
+          <p:cNvSpPr/>
+          <p:nvPr/>
+        </p:nvSpPr>
+        <p:spPr>
+          <a:xfrm>
+            <a:off x="1092200" y="3835400"/>
+            <a:ext cx="4064000" cy="1498600"/>
+          </a:xfrm>
+          <a:prstGeom prst="roundRect">
+            <a:avLst/>
+          </a:prstGeom>
+          <a:solidFill>
+            <a:srgbClr val="1D2430"/>
+          </a:solidFill>
+          <a:ln w="12700">
+            <a:solidFill>
+              <a:srgbClr val="424E60"/>
+            </a:solidFill>
+          </a:ln>
+        </p:spPr>
+        <p:style>
+          <a:lnRef idx="2">
+            <a:schemeClr val="accent1">
+              <a:shade val="15000"/>
+            </a:schemeClr>
+          </a:lnRef>
+          <a:fillRef idx="1">
+            <a:schemeClr val="accent1"/>
+          </a:fillRef>
+          <a:effectRef idx="0">
+            <a:schemeClr val="accent1"/>
+          </a:effectRef>
+          <a:fontRef idx="minor">
+            <a:schemeClr val="lt1"/>
+          </a:fontRef>
+        </p:style>
+        <p:txBody>
+          <a:bodyPr rtlCol="0" anchor="ctr"/>
+          <a:lstStyle/>
+          <a:p>
+            <a:pPr algn="ctr"/>
+            <a:endParaRPr lang="es-ES"/>
+          </a:p>
+        </p:txBody>
+      </p:sp>
+      <p:sp>
+        <p:nvSpPr>
+          <p:cNvPr id="9" name="CuadroTexto 8">
+            <a:extLst>
+              <a:ext uri="{FF2B5EF4-FFF2-40B4-BE49-F238E27FC236}">
+                <a16:creationId xmlns:a16="http://schemas.microsoft.com/office/drawing/2014/main" id="{4F197C26-BD49-5A86-7F1B-13A8F78E15EB}"/>
+              </a:ext>
+            </a:extLst>
+          </p:cNvPr>
+          <p:cNvSpPr txBox="1"/>
+          <p:nvPr/>
+        </p:nvSpPr>
+        <p:spPr>
+          <a:xfrm>
+            <a:off x="1498600" y="4165600"/>
+            <a:ext cx="3175000" cy="369332"/>
+          </a:xfrm>
+          <a:prstGeom prst="rect">
+            <a:avLst/>
+          </a:prstGeom>
+          <a:noFill/>
+        </p:spPr>
+        <p:txBody>
+          <a:bodyPr vert="horz" wrap="square" lIns="0" tIns="0" rIns="0" bIns="0" rtlCol="0">
+            <a:noAutofit/>
+          </a:bodyPr>
+          <a:lstStyle/>
+          <a:p>
+            <a:r>
+              <a:rPr lang="es-ES" sz="2000" b="1">
+                <a:solidFill>
+                  <a:srgbClr val="DBA14D"/>
+                </a:solidFill>
+                <a:latin typeface="Segoe UI" panose="020B0502040204020203" pitchFamily="34" charset="0"/>
+              </a:rPr>
+              <a:t>Usuario de prueba</a:t>
+            </a:r>
+          </a:p>
+        </p:txBody>
+      </p:sp>
+      <p:sp>
+        <p:nvSpPr>
+          <p:cNvPr id="10" name="CuadroTexto 9">
+            <a:extLst>
+              <a:ext uri="{FF2B5EF4-FFF2-40B4-BE49-F238E27FC236}">
+                <a16:creationId xmlns:a16="http://schemas.microsoft.com/office/drawing/2014/main" id="{2F541267-B2E0-D780-2E45-4F992941AE9E}"/>
+              </a:ext>
+            </a:extLst>
+          </p:cNvPr>
+          <p:cNvSpPr txBox="1"/>
+          <p:nvPr/>
+        </p:nvSpPr>
+        <p:spPr>
+          <a:xfrm>
+            <a:off x="1498600" y="4597400"/>
+            <a:ext cx="3175000" cy="369332"/>
+          </a:xfrm>
+          <a:prstGeom prst="rect">
+            <a:avLst/>
+          </a:prstGeom>
+          <a:noFill/>
+        </p:spPr>
+        <p:txBody>
+          <a:bodyPr vert="horz" wrap="square" lIns="0" tIns="0" rIns="0" bIns="0" rtlCol="0">
+            <a:noAutofit/>
+          </a:bodyPr>
+          <a:lstStyle/>
+          <a:p>
+            <a:r>
+              <a:rPr lang="es-ES" b="1">
+                <a:solidFill>
+                  <a:srgbClr val="F6F8FC"/>
+                </a:solidFill>
+                <a:latin typeface="Consolas" panose="020B0609020204030204" pitchFamily="49" charset="0"/>
+              </a:rPr>
+              <a:t>profesora / Abrete01</a:t>
+            </a:r>
+          </a:p>
+        </p:txBody>
+      </p:sp>
+      <p:sp>
+        <p:nvSpPr>
+          <p:cNvPr id="11" name="CuadroTexto 10">
+            <a:extLst>
+              <a:ext uri="{FF2B5EF4-FFF2-40B4-BE49-F238E27FC236}">
+                <a16:creationId xmlns:a16="http://schemas.microsoft.com/office/drawing/2014/main" id="{1DB4DA62-221D-CA65-54CA-4FD5B8E97F3A}"/>
+              </a:ext>
+            </a:extLst>
+          </p:cNvPr>
+          <p:cNvSpPr txBox="1"/>
+          <p:nvPr/>
+        </p:nvSpPr>
+        <p:spPr>
+          <a:xfrm>
+            <a:off x="1498600" y="4978400"/>
+            <a:ext cx="2794000" cy="369332"/>
+          </a:xfrm>
+          <a:prstGeom prst="rect">
+            <a:avLst/>
+          </a:prstGeom>
+          <a:noFill/>
+        </p:spPr>
+        <p:txBody>
+          <a:bodyPr vert="horz" wrap="square" lIns="0" tIns="0" rIns="0" bIns="0" rtlCol="0">
+            <a:noAutofit/>
+          </a:bodyPr>
+          <a:lstStyle/>
+          <a:p>
+            <a:r>
+              <a:rPr lang="es-ES" sz="1400">
+                <a:solidFill>
+                  <a:srgbClr val="C2CBD8"/>
+                </a:solidFill>
+                <a:latin typeface="Segoe UI" panose="020B0502040204020203" pitchFamily="34" charset="0"/>
+              </a:rPr>
+              <a:t>Rol: coordinacion</a:t>
+            </a:r>
+          </a:p>
+        </p:txBody>
+      </p:sp>
+      <p:sp>
+        <p:nvSpPr>
+          <p:cNvPr id="12" name="CuadroTexto 11">
+            <a:extLst>
+              <a:ext uri="{FF2B5EF4-FFF2-40B4-BE49-F238E27FC236}">
+                <a16:creationId xmlns:a16="http://schemas.microsoft.com/office/drawing/2014/main" id="{502AC56E-84CB-EED9-95FE-6AB1C6B812B7}"/>
+              </a:ext>
+            </a:extLst>
+          </p:cNvPr>
+          <p:cNvSpPr txBox="1"/>
+          <p:nvPr/>
+        </p:nvSpPr>
+        <p:spPr>
+          <a:xfrm>
+            <a:off x="5969000" y="3886200"/>
+            <a:ext cx="4572000" cy="369332"/>
           </a:xfrm>
           <a:prstGeom prst="rect">
             <a:avLst/>
@@ -6359,13 +7193,13 @@
               <a:buChar char="•"/>
             </a:pPr>
             <a:r>
-              <a:rPr lang="es-ES">
+              <a:rPr lang="es-ES" sz="1700">
                 <a:solidFill>
                   <a:srgbClr val="C2CBD8"/>
                 </a:solidFill>
                 <a:latin typeface="Segoe UI" panose="020B0502040204020203" pitchFamily="34" charset="0"/>
               </a:rPr>
-              <a:t>URL/app: panel interno.</a:t>
+              <a:t>Puede revisar solicitudes, convenios, asignaciones y mensajes.</a:t>
             </a:r>
           </a:p>
           <a:p>
@@ -6377,13 +7211,13 @@
               <a:buChar char="•"/>
             </a:pPr>
             <a:r>
-              <a:rPr lang="es-ES">
+              <a:rPr lang="es-ES" sz="1700">
                 <a:solidFill>
                   <a:srgbClr val="C2CBD8"/>
                 </a:solidFill>
                 <a:latin typeface="Segoe UI" panose="020B0502040204020203" pitchFamily="34" charset="0"/>
               </a:rPr>
-              <a:t>URL/externo: portal de empresa.</a:t>
+              <a:t>La empresa prueba el recorrido por /externo.</a:t>
             </a:r>
           </a:p>
           <a:p>
@@ -6395,31 +7229,13 @@
               <a:buChar char="•"/>
             </a:pPr>
             <a:r>
-              <a:rPr lang="es-ES">
+              <a:rPr lang="es-ES" sz="1700">
                 <a:solidFill>
                   <a:srgbClr val="C2CBD8"/>
                 </a:solidFill>
                 <a:latin typeface="Segoe UI" panose="020B0502040204020203" pitchFamily="34" charset="0"/>
               </a:rPr>
-              <a:t>URL/documentacion: guia funcional.</a:t>
-            </a:r>
-          </a:p>
-          <a:p>
-            <a:pPr marL="342900" indent="-342900">
-              <a:spcAft>
-                <a:spcPts val="1000"/>
-              </a:spcAft>
-              <a:buFont typeface="+mj-lt"/>
-              <a:buChar char="•"/>
-            </a:pPr>
-            <a:r>
-              <a:rPr lang="es-ES">
-                <a:solidFill>
-                  <a:srgbClr val="C2CBD8"/>
-                </a:solidFill>
-                <a:latin typeface="Segoe UI" panose="020B0502040204020203" pitchFamily="34" charset="0"/>
-              </a:rPr>
-              <a:t>URL/monitor: supervision tecnica protegida.</a:t>
+              <a:t>El acceso remoto depende de que la VM siga activa.</a:t>
             </a:r>
           </a:p>
         </p:txBody>
@@ -6427,7 +7243,7 @@
     </p:spTree>
     <p:extLst>
       <p:ext uri="{BB962C8B-B14F-4D97-AF65-F5344CB8AC3E}">
-        <p14:creationId xmlns:p14="http://schemas.microsoft.com/office/powerpoint/2010/main" val="2483162841"/>
+        <p14:creationId xmlns:p14="http://schemas.microsoft.com/office/powerpoint/2010/main" val="262939549"/>
       </p:ext>
     </p:extLst>
   </p:cSld>
@@ -6467,7 +7283,7 @@
           <p:cNvPr id="2" name="CuadroTexto 1">
             <a:extLst>
               <a:ext uri="{FF2B5EF4-FFF2-40B4-BE49-F238E27FC236}">
-                <a16:creationId xmlns:a16="http://schemas.microsoft.com/office/drawing/2014/main" id="{3B01466F-135F-00F1-699E-2F6274383697}"/>
+                <a16:creationId xmlns:a16="http://schemas.microsoft.com/office/drawing/2014/main" id="{7F633AEB-C8E3-38F3-865A-AEFD904A6358}"/>
               </a:ext>
             </a:extLst>
           </p:cNvPr>
@@ -6497,7 +7313,7 @@
                 </a:solidFill>
                 <a:latin typeface="Segoe UI" panose="020B0502040204020203" pitchFamily="34" charset="0"/>
               </a:rPr>
-              <a:t>15 / LIMITACIONES</a:t>
+              <a:t>15 / MEJORAS FUTURAS</a:t>
             </a:r>
           </a:p>
         </p:txBody>
@@ -6507,7 +7323,7 @@
           <p:cNvPr id="3" name="CuadroTexto 2">
             <a:extLst>
               <a:ext uri="{FF2B5EF4-FFF2-40B4-BE49-F238E27FC236}">
-                <a16:creationId xmlns:a16="http://schemas.microsoft.com/office/drawing/2014/main" id="{90BC9E3E-5C25-C777-B1EA-CC20A5A5234C}"/>
+                <a16:creationId xmlns:a16="http://schemas.microsoft.com/office/drawing/2014/main" id="{777637BC-466E-38C8-DFF9-62CA4B5DFA28}"/>
               </a:ext>
             </a:extLst>
           </p:cNvPr>
@@ -6537,7 +7353,7 @@
                 </a:solidFill>
                 <a:latin typeface="Segoe UI" panose="020B0502040204020203" pitchFamily="34" charset="0"/>
               </a:rPr>
-              <a:t>Que queda fuera de esta entrega</a:t>
+              <a:t>Que endureceria despues de esta entrega</a:t>
             </a:r>
           </a:p>
         </p:txBody>
@@ -6547,116 +7363,37 @@
           <p:cNvPr id="4" name="CuadroTexto 3">
             <a:extLst>
               <a:ext uri="{FF2B5EF4-FFF2-40B4-BE49-F238E27FC236}">
-                <a16:creationId xmlns:a16="http://schemas.microsoft.com/office/drawing/2014/main" id="{6B034E60-2FF6-7C58-1CAE-8F09999EE08D}"/>
-              </a:ext>
-            </a:extLst>
-          </p:cNvPr>
-          <p:cNvSpPr txBox="1"/>
-          <p:nvPr/>
-        </p:nvSpPr>
-        <p:spPr>
-          <a:xfrm>
-            <a:off x="990600" y="2032000"/>
-            <a:ext cx="4572000" cy="369332"/>
-          </a:xfrm>
-          <a:prstGeom prst="rect">
-            <a:avLst/>
-          </a:prstGeom>
-          <a:noFill/>
-        </p:spPr>
-        <p:txBody>
-          <a:bodyPr vert="horz" wrap="square" lIns="0" tIns="0" rIns="0" bIns="0" rtlCol="0">
-            <a:noAutofit/>
-          </a:bodyPr>
-          <a:lstStyle/>
-          <a:p>
-            <a:pPr marL="457200" indent="-457200">
-              <a:spcAft>
-                <a:spcPts val="1000"/>
-              </a:spcAft>
-              <a:buFont typeface="+mj-lt"/>
-              <a:buChar char="•"/>
-            </a:pPr>
-            <a:r>
-              <a:rPr lang="es-ES" sz="1900">
+                <a16:creationId xmlns:a16="http://schemas.microsoft.com/office/drawing/2014/main" id="{985A282E-F38E-563B-C79A-5CA90EB7D04B}"/>
+              </a:ext>
+            </a:extLst>
+          </p:cNvPr>
+          <p:cNvSpPr txBox="1"/>
+          <p:nvPr/>
+        </p:nvSpPr>
+        <p:spPr>
+          <a:xfrm>
+            <a:off x="558800" y="1422400"/>
+            <a:ext cx="9144000" cy="369332"/>
+          </a:xfrm>
+          <a:prstGeom prst="rect">
+            <a:avLst/>
+          </a:prstGeom>
+          <a:noFill/>
+        </p:spPr>
+        <p:txBody>
+          <a:bodyPr vert="horz" wrap="square" lIns="0" tIns="0" rIns="0" bIns="0" rtlCol="0">
+            <a:noAutofit/>
+          </a:bodyPr>
+          <a:lstStyle/>
+          <a:p>
+            <a:r>
+              <a:rPr lang="es-ES" sz="1500">
                 <a:solidFill>
                   <a:srgbClr val="C2CBD8"/>
                 </a:solidFill>
                 <a:latin typeface="Segoe UI" panose="020B0502040204020203" pitchFamily="34" charset="0"/>
               </a:rPr>
-              <a:t>Despliegue permanente en infraestructura dedicada.</a:t>
-            </a:r>
-          </a:p>
-          <a:p>
-            <a:pPr marL="457200" indent="-457200">
-              <a:spcAft>
-                <a:spcPts val="1000"/>
-              </a:spcAft>
-              <a:buFont typeface="+mj-lt"/>
-              <a:buChar char="•"/>
-            </a:pPr>
-            <a:r>
-              <a:rPr lang="es-ES" sz="1900">
-                <a:solidFill>
-                  <a:srgbClr val="C2CBD8"/>
-                </a:solidFill>
-                <a:latin typeface="Segoe UI" panose="020B0502040204020203" pitchFamily="34" charset="0"/>
-              </a:rPr>
-              <a:t>Integracion con SSO o identidad corporativa.</a:t>
-            </a:r>
-          </a:p>
-          <a:p>
-            <a:pPr marL="457200" indent="-457200">
-              <a:spcAft>
-                <a:spcPts val="1000"/>
-              </a:spcAft>
-              <a:buFont typeface="+mj-lt"/>
-              <a:buChar char="•"/>
-            </a:pPr>
-            <a:r>
-              <a:rPr lang="es-ES" sz="1900">
-                <a:solidFill>
-                  <a:srgbClr val="C2CBD8"/>
-                </a:solidFill>
-                <a:latin typeface="Segoe UI" panose="020B0502040204020203" pitchFamily="34" charset="0"/>
-              </a:rPr>
-              <a:t>Firma electronica avanzada.</a:t>
-            </a:r>
-          </a:p>
-          <a:p>
-            <a:pPr marL="457200" indent="-457200">
-              <a:spcAft>
-                <a:spcPts val="1000"/>
-              </a:spcAft>
-              <a:buFont typeface="+mj-lt"/>
-              <a:buChar char="•"/>
-            </a:pPr>
-            <a:r>
-              <a:rPr lang="es-ES" sz="1900">
-                <a:solidFill>
-                  <a:srgbClr val="C2CBD8"/>
-                </a:solidFill>
-                <a:latin typeface="Segoe UI" panose="020B0502040204020203" pitchFamily="34" charset="0"/>
-              </a:rPr>
-              <a:t>Almacenamiento documental en nube gestionada.</a:t>
-            </a:r>
-          </a:p>
-          <a:p>
-            <a:pPr marL="457200" indent="-457200">
-              <a:spcAft>
-                <a:spcPts val="1000"/>
-              </a:spcAft>
-              <a:buFont typeface="+mj-lt"/>
-              <a:buChar char="•"/>
-            </a:pPr>
-            <a:r>
-              <a:rPr lang="es-ES" sz="1900">
-                <a:solidFill>
-                  <a:srgbClr val="C2CBD8"/>
-                </a:solidFill>
-                <a:latin typeface="Segoe UI" panose="020B0502040204020203" pitchFamily="34" charset="0"/>
-              </a:rPr>
-              <a:t>Perfilado profundo de rendimiento en produccion.</a:t>
+              <a:t>El nucleo ya esta cerrado; lo siguiente ya no es supervivencia de la demo, sino evolucion del producto.</a:t>
             </a:r>
           </a:p>
         </p:txBody>
@@ -6666,7 +7403,7 @@
           <p:cNvPr id="5" name="Rectángulo: esquinas redondeadas 4">
             <a:extLst>
               <a:ext uri="{FF2B5EF4-FFF2-40B4-BE49-F238E27FC236}">
-                <a16:creationId xmlns:a16="http://schemas.microsoft.com/office/drawing/2014/main" id="{C962B3AA-44C4-8A3E-E185-66D2E6DA9D9A}"/>
+                <a16:creationId xmlns:a16="http://schemas.microsoft.com/office/drawing/2014/main" id="{332F11A3-16C4-FC00-5D74-A8A2B3FFA522}"/>
               </a:ext>
             </a:extLst>
           </p:cNvPr>
@@ -6675,18 +7412,18 @@
         </p:nvSpPr>
         <p:spPr>
           <a:xfrm>
-            <a:off x="6807200" y="2057400"/>
-            <a:ext cx="4064000" cy="2667000"/>
+            <a:off x="711200" y="2235200"/>
+            <a:ext cx="3200400" cy="2235200"/>
           </a:xfrm>
           <a:prstGeom prst="roundRect">
             <a:avLst/>
           </a:prstGeom>
           <a:solidFill>
-            <a:srgbClr val="1D2430"/>
+            <a:srgbClr val="F7FAFC"/>
           </a:solidFill>
           <a:ln w="12700">
             <a:solidFill>
-              <a:srgbClr val="424E60"/>
+              <a:srgbClr val="DDE5EE"/>
             </a:solidFill>
           </a:ln>
         </p:spPr>
@@ -6720,77 +7457,410 @@
           <p:cNvPr id="6" name="CuadroTexto 5">
             <a:extLst>
               <a:ext uri="{FF2B5EF4-FFF2-40B4-BE49-F238E27FC236}">
-                <a16:creationId xmlns:a16="http://schemas.microsoft.com/office/drawing/2014/main" id="{0E61F719-5B40-A228-90BC-A0F4809D4B2D}"/>
-              </a:ext>
-            </a:extLst>
-          </p:cNvPr>
-          <p:cNvSpPr txBox="1"/>
-          <p:nvPr/>
-        </p:nvSpPr>
-        <p:spPr>
-          <a:xfrm>
-            <a:off x="7213600" y="2438400"/>
-            <a:ext cx="3302000" cy="369332"/>
-          </a:xfrm>
-          <a:prstGeom prst="rect">
-            <a:avLst/>
-          </a:prstGeom>
-          <a:noFill/>
-        </p:spPr>
-        <p:txBody>
-          <a:bodyPr vert="horz" wrap="square" lIns="0" tIns="0" rIns="0" bIns="0" rtlCol="0">
-            <a:noAutofit/>
-          </a:bodyPr>
-          <a:lstStyle/>
-          <a:p>
-            <a:r>
-              <a:rPr lang="es-ES" sz="2000" b="1">
+                <a16:creationId xmlns:a16="http://schemas.microsoft.com/office/drawing/2014/main" id="{571884CA-A07F-3CAE-ACA6-985260681AFC}"/>
+              </a:ext>
+            </a:extLst>
+          </p:cNvPr>
+          <p:cNvSpPr txBox="1"/>
+          <p:nvPr/>
+        </p:nvSpPr>
+        <p:spPr>
+          <a:xfrm>
+            <a:off x="965200" y="2489200"/>
+            <a:ext cx="2413000" cy="369332"/>
+          </a:xfrm>
+          <a:prstGeom prst="rect">
+            <a:avLst/>
+          </a:prstGeom>
+          <a:noFill/>
+        </p:spPr>
+        <p:txBody>
+          <a:bodyPr vert="horz" wrap="square" lIns="0" tIns="0" rIns="0" bIns="0" rtlCol="0">
+            <a:noAutofit/>
+          </a:bodyPr>
+          <a:lstStyle/>
+          <a:p>
+            <a:r>
+              <a:rPr lang="es-ES" sz="2100" b="1">
+                <a:solidFill>
+                  <a:srgbClr val="41A772"/>
+                </a:solidFill>
+                <a:latin typeface="Segoe UI" panose="020B0502040204020203" pitchFamily="34" charset="0"/>
+              </a:rPr>
+              <a:t>Dominio propio</a:t>
+            </a:r>
+          </a:p>
+        </p:txBody>
+      </p:sp>
+      <p:sp>
+        <p:nvSpPr>
+          <p:cNvPr id="7" name="CuadroTexto 6">
+            <a:extLst>
+              <a:ext uri="{FF2B5EF4-FFF2-40B4-BE49-F238E27FC236}">
+                <a16:creationId xmlns:a16="http://schemas.microsoft.com/office/drawing/2014/main" id="{5BE67DF1-0FED-E550-864E-0EE8E8C01831}"/>
+              </a:ext>
+            </a:extLst>
+          </p:cNvPr>
+          <p:cNvSpPr txBox="1"/>
+          <p:nvPr/>
+        </p:nvSpPr>
+        <p:spPr>
+          <a:xfrm>
+            <a:off x="965200" y="2997200"/>
+            <a:ext cx="2667000" cy="369332"/>
+          </a:xfrm>
+          <a:prstGeom prst="rect">
+            <a:avLst/>
+          </a:prstGeom>
+          <a:noFill/>
+        </p:spPr>
+        <p:txBody>
+          <a:bodyPr vert="horz" wrap="square" lIns="0" tIns="0" rIns="0" bIns="0" rtlCol="0">
+            <a:noAutofit/>
+          </a:bodyPr>
+          <a:lstStyle/>
+          <a:p>
+            <a:r>
+              <a:rPr lang="es-ES" sz="1400">
+                <a:solidFill>
+                  <a:srgbClr val="1F2937"/>
+                </a:solidFill>
+                <a:latin typeface="Segoe UI" panose="020B0502040204020203" pitchFamily="34" charset="0"/>
+              </a:rPr>
+              <a:t>Sustituir nip.io por dominio institucional y reforzar politicas TLS.</a:t>
+            </a:r>
+          </a:p>
+        </p:txBody>
+      </p:sp>
+      <p:sp>
+        <p:nvSpPr>
+          <p:cNvPr id="8" name="Rectángulo: esquinas redondeadas 7">
+            <a:extLst>
+              <a:ext uri="{FF2B5EF4-FFF2-40B4-BE49-F238E27FC236}">
+                <a16:creationId xmlns:a16="http://schemas.microsoft.com/office/drawing/2014/main" id="{0811625C-B8C8-7299-3317-0B357D650119}"/>
+              </a:ext>
+            </a:extLst>
+          </p:cNvPr>
+          <p:cNvSpPr/>
+          <p:nvPr/>
+        </p:nvSpPr>
+        <p:spPr>
+          <a:xfrm>
+            <a:off x="4495800" y="2235200"/>
+            <a:ext cx="3200400" cy="2235200"/>
+          </a:xfrm>
+          <a:prstGeom prst="roundRect">
+            <a:avLst/>
+          </a:prstGeom>
+          <a:solidFill>
+            <a:srgbClr val="F7FAFC"/>
+          </a:solidFill>
+          <a:ln w="12700">
+            <a:solidFill>
+              <a:srgbClr val="DDE5EE"/>
+            </a:solidFill>
+          </a:ln>
+        </p:spPr>
+        <p:style>
+          <a:lnRef idx="2">
+            <a:schemeClr val="accent1">
+              <a:shade val="15000"/>
+            </a:schemeClr>
+          </a:lnRef>
+          <a:fillRef idx="1">
+            <a:schemeClr val="accent1"/>
+          </a:fillRef>
+          <a:effectRef idx="0">
+            <a:schemeClr val="accent1"/>
+          </a:effectRef>
+          <a:fontRef idx="minor">
+            <a:schemeClr val="lt1"/>
+          </a:fontRef>
+        </p:style>
+        <p:txBody>
+          <a:bodyPr rtlCol="0" anchor="ctr"/>
+          <a:lstStyle/>
+          <a:p>
+            <a:pPr algn="ctr"/>
+            <a:endParaRPr lang="es-ES"/>
+          </a:p>
+        </p:txBody>
+      </p:sp>
+      <p:sp>
+        <p:nvSpPr>
+          <p:cNvPr id="9" name="CuadroTexto 8">
+            <a:extLst>
+              <a:ext uri="{FF2B5EF4-FFF2-40B4-BE49-F238E27FC236}">
+                <a16:creationId xmlns:a16="http://schemas.microsoft.com/office/drawing/2014/main" id="{856F0306-06DF-7A7F-C7BA-F37512E5D503}"/>
+              </a:ext>
+            </a:extLst>
+          </p:cNvPr>
+          <p:cNvSpPr txBox="1"/>
+          <p:nvPr/>
+        </p:nvSpPr>
+        <p:spPr>
+          <a:xfrm>
+            <a:off x="4749800" y="2489200"/>
+            <a:ext cx="2413000" cy="369332"/>
+          </a:xfrm>
+          <a:prstGeom prst="rect">
+            <a:avLst/>
+          </a:prstGeom>
+          <a:noFill/>
+        </p:spPr>
+        <p:txBody>
+          <a:bodyPr vert="horz" wrap="square" lIns="0" tIns="0" rIns="0" bIns="0" rtlCol="0">
+            <a:noAutofit/>
+          </a:bodyPr>
+          <a:lstStyle/>
+          <a:p>
+            <a:r>
+              <a:rPr lang="es-ES" sz="2100" b="1">
+                <a:solidFill>
+                  <a:srgbClr val="49B1D2"/>
+                </a:solidFill>
+                <a:latin typeface="Segoe UI" panose="020B0502040204020203" pitchFamily="34" charset="0"/>
+              </a:rPr>
+              <a:t>Servicios gestionados</a:t>
+            </a:r>
+          </a:p>
+        </p:txBody>
+      </p:sp>
+      <p:sp>
+        <p:nvSpPr>
+          <p:cNvPr id="10" name="CuadroTexto 9">
+            <a:extLst>
+              <a:ext uri="{FF2B5EF4-FFF2-40B4-BE49-F238E27FC236}">
+                <a16:creationId xmlns:a16="http://schemas.microsoft.com/office/drawing/2014/main" id="{4103D061-5808-835F-DCB8-6E26A9B76CEF}"/>
+              </a:ext>
+            </a:extLst>
+          </p:cNvPr>
+          <p:cNvSpPr txBox="1"/>
+          <p:nvPr/>
+        </p:nvSpPr>
+        <p:spPr>
+          <a:xfrm>
+            <a:off x="4749800" y="2997200"/>
+            <a:ext cx="2667000" cy="369332"/>
+          </a:xfrm>
+          <a:prstGeom prst="rect">
+            <a:avLst/>
+          </a:prstGeom>
+          <a:noFill/>
+        </p:spPr>
+        <p:txBody>
+          <a:bodyPr vert="horz" wrap="square" lIns="0" tIns="0" rIns="0" bIns="0" rtlCol="0">
+            <a:noAutofit/>
+          </a:bodyPr>
+          <a:lstStyle/>
+          <a:p>
+            <a:r>
+              <a:rPr lang="es-ES" sz="1400">
+                <a:solidFill>
+                  <a:srgbClr val="1F2937"/>
+                </a:solidFill>
+                <a:latin typeface="Segoe UI" panose="020B0502040204020203" pitchFamily="34" charset="0"/>
+              </a:rPr>
+              <a:t>Mover documentos, backups y observabilidad a piezas gestionadas.</a:t>
+            </a:r>
+          </a:p>
+        </p:txBody>
+      </p:sp>
+      <p:sp>
+        <p:nvSpPr>
+          <p:cNvPr id="11" name="Rectángulo: esquinas redondeadas 10">
+            <a:extLst>
+              <a:ext uri="{FF2B5EF4-FFF2-40B4-BE49-F238E27FC236}">
+                <a16:creationId xmlns:a16="http://schemas.microsoft.com/office/drawing/2014/main" id="{A7B72B3E-DC33-B561-CC44-0AD373119C10}"/>
+              </a:ext>
+            </a:extLst>
+          </p:cNvPr>
+          <p:cNvSpPr/>
+          <p:nvPr/>
+        </p:nvSpPr>
+        <p:spPr>
+          <a:xfrm>
+            <a:off x="8280400" y="2235200"/>
+            <a:ext cx="3200400" cy="2235200"/>
+          </a:xfrm>
+          <a:prstGeom prst="roundRect">
+            <a:avLst/>
+          </a:prstGeom>
+          <a:solidFill>
+            <a:srgbClr val="F7FAFC"/>
+          </a:solidFill>
+          <a:ln w="12700">
+            <a:solidFill>
+              <a:srgbClr val="DDE5EE"/>
+            </a:solidFill>
+          </a:ln>
+        </p:spPr>
+        <p:style>
+          <a:lnRef idx="2">
+            <a:schemeClr val="accent1">
+              <a:shade val="15000"/>
+            </a:schemeClr>
+          </a:lnRef>
+          <a:fillRef idx="1">
+            <a:schemeClr val="accent1"/>
+          </a:fillRef>
+          <a:effectRef idx="0">
+            <a:schemeClr val="accent1"/>
+          </a:effectRef>
+          <a:fontRef idx="minor">
+            <a:schemeClr val="lt1"/>
+          </a:fontRef>
+        </p:style>
+        <p:txBody>
+          <a:bodyPr rtlCol="0" anchor="ctr"/>
+          <a:lstStyle/>
+          <a:p>
+            <a:pPr algn="ctr"/>
+            <a:endParaRPr lang="es-ES"/>
+          </a:p>
+        </p:txBody>
+      </p:sp>
+      <p:sp>
+        <p:nvSpPr>
+          <p:cNvPr id="12" name="CuadroTexto 11">
+            <a:extLst>
+              <a:ext uri="{FF2B5EF4-FFF2-40B4-BE49-F238E27FC236}">
+                <a16:creationId xmlns:a16="http://schemas.microsoft.com/office/drawing/2014/main" id="{C7A4A240-D87D-25B5-5C1C-1CD3AF2FF11C}"/>
+              </a:ext>
+            </a:extLst>
+          </p:cNvPr>
+          <p:cNvSpPr txBox="1"/>
+          <p:nvPr/>
+        </p:nvSpPr>
+        <p:spPr>
+          <a:xfrm>
+            <a:off x="8534400" y="2489200"/>
+            <a:ext cx="2413000" cy="369332"/>
+          </a:xfrm>
+          <a:prstGeom prst="rect">
+            <a:avLst/>
+          </a:prstGeom>
+          <a:noFill/>
+        </p:spPr>
+        <p:txBody>
+          <a:bodyPr vert="horz" wrap="square" lIns="0" tIns="0" rIns="0" bIns="0" rtlCol="0">
+            <a:noAutofit/>
+          </a:bodyPr>
+          <a:lstStyle/>
+          <a:p>
+            <a:r>
+              <a:rPr lang="es-ES" sz="2100" b="1">
                 <a:solidFill>
                   <a:srgbClr val="DBA14D"/>
                 </a:solidFill>
                 <a:latin typeface="Segoe UI" panose="020B0502040204020203" pitchFamily="34" charset="0"/>
               </a:rPr>
-              <a:t>Siguiente iteracion</a:t>
-            </a:r>
-          </a:p>
-        </p:txBody>
-      </p:sp>
-      <p:sp>
-        <p:nvSpPr>
-          <p:cNvPr id="7" name="CuadroTexto 6">
-            <a:extLst>
-              <a:ext uri="{FF2B5EF4-FFF2-40B4-BE49-F238E27FC236}">
-                <a16:creationId xmlns:a16="http://schemas.microsoft.com/office/drawing/2014/main" id="{AEE36208-22C8-A255-5CDF-6E33285538B6}"/>
-              </a:ext>
-            </a:extLst>
-          </p:cNvPr>
-          <p:cNvSpPr txBox="1"/>
-          <p:nvPr/>
-        </p:nvSpPr>
-        <p:spPr>
-          <a:xfrm>
-            <a:off x="7213600" y="3098800"/>
-            <a:ext cx="3111500" cy="369332"/>
-          </a:xfrm>
-          <a:prstGeom prst="rect">
-            <a:avLst/>
-          </a:prstGeom>
-          <a:noFill/>
-        </p:spPr>
-        <p:txBody>
-          <a:bodyPr vert="horz" wrap="square" lIns="0" tIns="0" rIns="0" bIns="0" rtlCol="0">
-            <a:noAutofit/>
-          </a:bodyPr>
-          <a:lstStyle/>
-          <a:p>
-            <a:r>
-              <a:rPr lang="es-ES" sz="2300" b="1">
-                <a:solidFill>
-                  <a:srgbClr val="F6F8FC"/>
-                </a:solidFill>
-                <a:latin typeface="Segoe UI" panose="020B0502040204020203" pitchFamily="34" charset="0"/>
-              </a:rPr>
-              <a:t>Endurecer seguridad, desplegar en infraestructura estable y ampliar automatizacion E2E.</a:t>
+              <a:t>Cliente tecnico</a:t>
+            </a:r>
+          </a:p>
+        </p:txBody>
+      </p:sp>
+      <p:sp>
+        <p:nvSpPr>
+          <p:cNvPr id="13" name="CuadroTexto 12">
+            <a:extLst>
+              <a:ext uri="{FF2B5EF4-FFF2-40B4-BE49-F238E27FC236}">
+                <a16:creationId xmlns:a16="http://schemas.microsoft.com/office/drawing/2014/main" id="{3B5F7562-D71C-C0FA-2EFC-422D1BB96241}"/>
+              </a:ext>
+            </a:extLst>
+          </p:cNvPr>
+          <p:cNvSpPr txBox="1"/>
+          <p:nvPr/>
+        </p:nvSpPr>
+        <p:spPr>
+          <a:xfrm>
+            <a:off x="8534400" y="2997200"/>
+            <a:ext cx="2667000" cy="369332"/>
+          </a:xfrm>
+          <a:prstGeom prst="rect">
+            <a:avLst/>
+          </a:prstGeom>
+          <a:noFill/>
+        </p:spPr>
+        <p:txBody>
+          <a:bodyPr vert="horz" wrap="square" lIns="0" tIns="0" rIns="0" bIns="0" rtlCol="0">
+            <a:noAutofit/>
+          </a:bodyPr>
+          <a:lstStyle/>
+          <a:p>
+            <a:r>
+              <a:rPr lang="es-ES" sz="1400">
+                <a:solidFill>
+                  <a:srgbClr val="1F2937"/>
+                </a:solidFill>
+                <a:latin typeface="Segoe UI" panose="020B0502040204020203" pitchFamily="34" charset="0"/>
+              </a:rPr>
+              <a:t>Decidir si Agora Desktop absorbe por completo la shell web legacy.</a:t>
+            </a:r>
+          </a:p>
+        </p:txBody>
+      </p:sp>
+      <p:sp>
+        <p:nvSpPr>
+          <p:cNvPr id="14" name="CuadroTexto 13">
+            <a:extLst>
+              <a:ext uri="{FF2B5EF4-FFF2-40B4-BE49-F238E27FC236}">
+                <a16:creationId xmlns:a16="http://schemas.microsoft.com/office/drawing/2014/main" id="{5AB1583C-3074-97A2-1A5B-18B6057525B1}"/>
+              </a:ext>
+            </a:extLst>
+          </p:cNvPr>
+          <p:cNvSpPr txBox="1"/>
+          <p:nvPr/>
+        </p:nvSpPr>
+        <p:spPr>
+          <a:xfrm>
+            <a:off x="1117600" y="4978400"/>
+            <a:ext cx="9652000" cy="369332"/>
+          </a:xfrm>
+          <a:prstGeom prst="rect">
+            <a:avLst/>
+          </a:prstGeom>
+          <a:noFill/>
+        </p:spPr>
+        <p:txBody>
+          <a:bodyPr vert="horz" wrap="square" lIns="0" tIns="0" rIns="0" bIns="0" rtlCol="0">
+            <a:noAutofit/>
+          </a:bodyPr>
+          <a:lstStyle/>
+          <a:p>
+            <a:pPr marL="342900" indent="-342900">
+              <a:spcAft>
+                <a:spcPts val="1000"/>
+              </a:spcAft>
+              <a:buFont typeface="+mj-lt"/>
+              <a:buChar char="•"/>
+            </a:pPr>
+            <a:r>
+              <a:rPr lang="es-ES">
+                <a:solidFill>
+                  <a:srgbClr val="C2CBD8"/>
+                </a:solidFill>
+                <a:latin typeface="Segoe UI" panose="020B0502040204020203" pitchFamily="34" charset="0"/>
+              </a:rPr>
+              <a:t>Mantendria PostgreSQL en servidor y endureceria automatizacion, dominio y observabilidad.</a:t>
+            </a:r>
+          </a:p>
+          <a:p>
+            <a:pPr marL="342900" indent="-342900">
+              <a:spcAft>
+                <a:spcPts val="1000"/>
+              </a:spcAft>
+              <a:buFont typeface="+mj-lt"/>
+              <a:buChar char="•"/>
+            </a:pPr>
+            <a:r>
+              <a:rPr lang="es-ES">
+                <a:solidFill>
+                  <a:srgbClr val="C2CBD8"/>
+                </a:solidFill>
+                <a:latin typeface="Segoe UI" panose="020B0502040204020203" pitchFamily="34" charset="0"/>
+              </a:rPr>
+              <a:t>No meteria nuevas funciones secundarias sin cerrar antes seguridad, pruebas y operacion.</a:t>
             </a:r>
           </a:p>
         </p:txBody>
@@ -6798,7 +7868,7 @@
     </p:spTree>
     <p:extLst>
       <p:ext uri="{BB962C8B-B14F-4D97-AF65-F5344CB8AC3E}">
-        <p14:creationId xmlns:p14="http://schemas.microsoft.com/office/powerpoint/2010/main" val="3048276671"/>
+        <p14:creationId xmlns:p14="http://schemas.microsoft.com/office/powerpoint/2010/main" val="2899166005"/>
       </p:ext>
     </p:extLst>
   </p:cSld>
@@ -6838,7 +7908,7 @@
           <p:cNvPr id="2" name="CuadroTexto 1">
             <a:extLst>
               <a:ext uri="{FF2B5EF4-FFF2-40B4-BE49-F238E27FC236}">
-                <a16:creationId xmlns:a16="http://schemas.microsoft.com/office/drawing/2014/main" id="{CAA47B8B-73CA-F7E8-AD7A-AF3746C5F085}"/>
+                <a16:creationId xmlns:a16="http://schemas.microsoft.com/office/drawing/2014/main" id="{CF61135F-580E-C819-0791-91AF2067E3C1}"/>
               </a:ext>
             </a:extLst>
           </p:cNvPr>
@@ -6868,7 +7938,7 @@
                 </a:solidFill>
                 <a:latin typeface="Segoe UI" panose="020B0502040204020203" pitchFamily="34" charset="0"/>
               </a:rPr>
-              <a:t>16 / CIERRE</a:t>
+              <a:t>16 / LIMITACIONES</a:t>
             </a:r>
           </a:p>
         </p:txBody>
@@ -6878,7 +7948,7 @@
           <p:cNvPr id="3" name="CuadroTexto 2">
             <a:extLst>
               <a:ext uri="{FF2B5EF4-FFF2-40B4-BE49-F238E27FC236}">
-                <a16:creationId xmlns:a16="http://schemas.microsoft.com/office/drawing/2014/main" id="{21352095-37FF-7FAF-3B7B-07BDCD6102E9}"/>
+                <a16:creationId xmlns:a16="http://schemas.microsoft.com/office/drawing/2014/main" id="{7CC7C245-2FAB-4F31-20FE-9FE749563D57}"/>
               </a:ext>
             </a:extLst>
           </p:cNvPr>
@@ -6908,7 +7978,7 @@
                 </a:solidFill>
                 <a:latin typeface="Segoe UI" panose="020B0502040204020203" pitchFamily="34" charset="0"/>
               </a:rPr>
-              <a:t>Resultado defendible</a:t>
+              <a:t>Que queda fuera de esta entrega</a:t>
             </a:r>
           </a:p>
         </p:txBody>
@@ -6918,57 +7988,17 @@
           <p:cNvPr id="4" name="CuadroTexto 3">
             <a:extLst>
               <a:ext uri="{FF2B5EF4-FFF2-40B4-BE49-F238E27FC236}">
-                <a16:creationId xmlns:a16="http://schemas.microsoft.com/office/drawing/2014/main" id="{36D4E0D8-10B9-E8E1-32AD-0F896586F572}"/>
-              </a:ext>
-            </a:extLst>
-          </p:cNvPr>
-          <p:cNvSpPr txBox="1"/>
-          <p:nvPr/>
-        </p:nvSpPr>
-        <p:spPr>
-          <a:xfrm>
-            <a:off x="1168400" y="2006600"/>
-            <a:ext cx="9652000" cy="369332"/>
-          </a:xfrm>
-          <a:prstGeom prst="rect">
-            <a:avLst/>
-          </a:prstGeom>
-          <a:noFill/>
-        </p:spPr>
-        <p:txBody>
-          <a:bodyPr vert="horz" wrap="square" lIns="0" tIns="0" rIns="0" bIns="0" rtlCol="0">
-            <a:noAutofit/>
-          </a:bodyPr>
-          <a:lstStyle/>
-          <a:p>
-            <a:r>
-              <a:rPr lang="es-ES" sz="3000" b="1">
-                <a:solidFill>
-                  <a:srgbClr val="F6F8FC"/>
-                </a:solidFill>
-                <a:latin typeface="Segoe UI" panose="020B0502040204020203" pitchFamily="34" charset="0"/>
-              </a:rPr>
-              <a:t>El proyecto transforma una gestion dispersa en una plataforma web funcional, trazable y documentada para empresas colaboradoras y practicas de FP Dual.</a:t>
-            </a:r>
-          </a:p>
-        </p:txBody>
-      </p:sp>
-      <p:sp>
-        <p:nvSpPr>
-          <p:cNvPr id="5" name="CuadroTexto 4">
-            <a:extLst>
-              <a:ext uri="{FF2B5EF4-FFF2-40B4-BE49-F238E27FC236}">
-                <a16:creationId xmlns:a16="http://schemas.microsoft.com/office/drawing/2014/main" id="{40E9AAA9-408A-C011-AA05-C0047807AA96}"/>
-              </a:ext>
-            </a:extLst>
-          </p:cNvPr>
-          <p:cNvSpPr txBox="1"/>
-          <p:nvPr/>
-        </p:nvSpPr>
-        <p:spPr>
-          <a:xfrm>
-            <a:off x="1625600" y="4089400"/>
-            <a:ext cx="8763000" cy="369332"/>
+                <a16:creationId xmlns:a16="http://schemas.microsoft.com/office/drawing/2014/main" id="{357ABC16-AB0D-EE8A-14EF-37E39CD730EF}"/>
+              </a:ext>
+            </a:extLst>
+          </p:cNvPr>
+          <p:cNvSpPr txBox="1"/>
+          <p:nvPr/>
+        </p:nvSpPr>
+        <p:spPr>
+          <a:xfrm>
+            <a:off x="990600" y="2032000"/>
+            <a:ext cx="4572000" cy="369332"/>
           </a:xfrm>
           <a:prstGeom prst="rect">
             <a:avLst/>
@@ -6995,7 +8025,7 @@
                 </a:solidFill>
                 <a:latin typeface="Segoe UI" panose="020B0502040204020203" pitchFamily="34" charset="0"/>
               </a:rPr>
-              <a:t>Problema real del centro.</a:t>
+              <a:t>Despliegue permanente completamente automatizado.</a:t>
             </a:r>
           </a:p>
           <a:p>
@@ -7013,7 +8043,7 @@
                 </a:solidFill>
                 <a:latin typeface="Segoe UI" panose="020B0502040204020203" pitchFamily="34" charset="0"/>
               </a:rPr>
-              <a:t>Arquitectura completa con backend, dos frontends, documentacion y monitor.</a:t>
+              <a:t>Integracion con SSO o identidad corporativa.</a:t>
             </a:r>
           </a:p>
           <a:p>
@@ -7031,8 +8061,98 @@
                 </a:solidFill>
                 <a:latin typeface="Segoe UI" panose="020B0502040204020203" pitchFamily="34" charset="0"/>
               </a:rPr>
-              <a:t>Validacion tecnica y material de demo preparados.</a:t>
-            </a:r>
+              <a:t>Firma electronica avanzada.</a:t>
+            </a:r>
+          </a:p>
+          <a:p>
+            <a:pPr marL="457200" indent="-457200">
+              <a:spcAft>
+                <a:spcPts val="1000"/>
+              </a:spcAft>
+              <a:buFont typeface="+mj-lt"/>
+              <a:buChar char="•"/>
+            </a:pPr>
+            <a:r>
+              <a:rPr lang="es-ES" sz="1900">
+                <a:solidFill>
+                  <a:srgbClr val="C2CBD8"/>
+                </a:solidFill>
+                <a:latin typeface="Segoe UI" panose="020B0502040204020203" pitchFamily="34" charset="0"/>
+              </a:rPr>
+              <a:t>Almacenamiento documental en nube gestionada.</a:t>
+            </a:r>
+          </a:p>
+          <a:p>
+            <a:pPr marL="457200" indent="-457200">
+              <a:spcAft>
+                <a:spcPts val="1000"/>
+              </a:spcAft>
+              <a:buFont typeface="+mj-lt"/>
+              <a:buChar char="•"/>
+            </a:pPr>
+            <a:r>
+              <a:rPr lang="es-ES" sz="1900">
+                <a:solidFill>
+                  <a:srgbClr val="C2CBD8"/>
+                </a:solidFill>
+                <a:latin typeface="Segoe UI" panose="020B0502040204020203" pitchFamily="34" charset="0"/>
+              </a:rPr>
+              <a:t>Perfilado profundo de rendimiento en produccion.</a:t>
+            </a:r>
+          </a:p>
+        </p:txBody>
+      </p:sp>
+      <p:sp>
+        <p:nvSpPr>
+          <p:cNvPr id="5" name="Rectángulo: esquinas redondeadas 4">
+            <a:extLst>
+              <a:ext uri="{FF2B5EF4-FFF2-40B4-BE49-F238E27FC236}">
+                <a16:creationId xmlns:a16="http://schemas.microsoft.com/office/drawing/2014/main" id="{39999316-951B-5CAB-36C3-24D49FFCF643}"/>
+              </a:ext>
+            </a:extLst>
+          </p:cNvPr>
+          <p:cNvSpPr/>
+          <p:nvPr/>
+        </p:nvSpPr>
+        <p:spPr>
+          <a:xfrm>
+            <a:off x="6807200" y="2057400"/>
+            <a:ext cx="4064000" cy="2667000"/>
+          </a:xfrm>
+          <a:prstGeom prst="roundRect">
+            <a:avLst/>
+          </a:prstGeom>
+          <a:solidFill>
+            <a:srgbClr val="1D2430"/>
+          </a:solidFill>
+          <a:ln w="12700">
+            <a:solidFill>
+              <a:srgbClr val="424E60"/>
+            </a:solidFill>
+          </a:ln>
+        </p:spPr>
+        <p:style>
+          <a:lnRef idx="2">
+            <a:schemeClr val="accent1">
+              <a:shade val="15000"/>
+            </a:schemeClr>
+          </a:lnRef>
+          <a:fillRef idx="1">
+            <a:schemeClr val="accent1"/>
+          </a:fillRef>
+          <a:effectRef idx="0">
+            <a:schemeClr val="accent1"/>
+          </a:effectRef>
+          <a:fontRef idx="minor">
+            <a:schemeClr val="lt1"/>
+          </a:fontRef>
+        </p:style>
+        <p:txBody>
+          <a:bodyPr rtlCol="0" anchor="ctr"/>
+          <a:lstStyle/>
+          <a:p>
+            <a:pPr algn="ctr"/>
+            <a:endParaRPr lang="es-ES"/>
           </a:p>
         </p:txBody>
       </p:sp>
@@ -7041,37 +8161,77 @@
           <p:cNvPr id="6" name="CuadroTexto 5">
             <a:extLst>
               <a:ext uri="{FF2B5EF4-FFF2-40B4-BE49-F238E27FC236}">
-                <a16:creationId xmlns:a16="http://schemas.microsoft.com/office/drawing/2014/main" id="{CDFC56CD-F488-C8A2-2F73-1E1C82428919}"/>
-              </a:ext>
-            </a:extLst>
-          </p:cNvPr>
-          <p:cNvSpPr txBox="1"/>
-          <p:nvPr/>
-        </p:nvSpPr>
-        <p:spPr>
-          <a:xfrm>
-            <a:off x="4191000" y="5943600"/>
-            <a:ext cx="3810000" cy="369332"/>
-          </a:xfrm>
-          <a:prstGeom prst="rect">
-            <a:avLst/>
-          </a:prstGeom>
-          <a:noFill/>
-        </p:spPr>
-        <p:txBody>
-          <a:bodyPr vert="horz" wrap="square" lIns="0" tIns="0" rIns="0" bIns="0" rtlCol="0">
-            <a:noAutofit/>
-          </a:bodyPr>
-          <a:lstStyle/>
-          <a:p>
-            <a:r>
-              <a:rPr lang="es-ES" sz="2200" b="1">
+                <a16:creationId xmlns:a16="http://schemas.microsoft.com/office/drawing/2014/main" id="{612F9E92-CDB7-87E4-9D52-9B136F4C6443}"/>
+              </a:ext>
+            </a:extLst>
+          </p:cNvPr>
+          <p:cNvSpPr txBox="1"/>
+          <p:nvPr/>
+        </p:nvSpPr>
+        <p:spPr>
+          <a:xfrm>
+            <a:off x="7213600" y="2438400"/>
+            <a:ext cx="3302000" cy="369332"/>
+          </a:xfrm>
+          <a:prstGeom prst="rect">
+            <a:avLst/>
+          </a:prstGeom>
+          <a:noFill/>
+        </p:spPr>
+        <p:txBody>
+          <a:bodyPr vert="horz" wrap="square" lIns="0" tIns="0" rIns="0" bIns="0" rtlCol="0">
+            <a:noAutofit/>
+          </a:bodyPr>
+          <a:lstStyle/>
+          <a:p>
+            <a:r>
+              <a:rPr lang="es-ES" sz="2000" b="1">
                 <a:solidFill>
                   <a:srgbClr val="DBA14D"/>
                 </a:solidFill>
                 <a:latin typeface="Segoe UI" panose="020B0502040204020203" pitchFamily="34" charset="0"/>
               </a:rPr>
-              <a:t>Demo y preguntas</a:t>
+              <a:t>Siguiente iteracion</a:t>
+            </a:r>
+          </a:p>
+        </p:txBody>
+      </p:sp>
+      <p:sp>
+        <p:nvSpPr>
+          <p:cNvPr id="7" name="CuadroTexto 6">
+            <a:extLst>
+              <a:ext uri="{FF2B5EF4-FFF2-40B4-BE49-F238E27FC236}">
+                <a16:creationId xmlns:a16="http://schemas.microsoft.com/office/drawing/2014/main" id="{1D8153D6-86E3-766B-D147-F91159556FE8}"/>
+              </a:ext>
+            </a:extLst>
+          </p:cNvPr>
+          <p:cNvSpPr txBox="1"/>
+          <p:nvPr/>
+        </p:nvSpPr>
+        <p:spPr>
+          <a:xfrm>
+            <a:off x="7213600" y="3098800"/>
+            <a:ext cx="3111500" cy="369332"/>
+          </a:xfrm>
+          <a:prstGeom prst="rect">
+            <a:avLst/>
+          </a:prstGeom>
+          <a:noFill/>
+        </p:spPr>
+        <p:txBody>
+          <a:bodyPr vert="horz" wrap="square" lIns="0" tIns="0" rIns="0" bIns="0" rtlCol="0">
+            <a:noAutofit/>
+          </a:bodyPr>
+          <a:lstStyle/>
+          <a:p>
+            <a:r>
+              <a:rPr lang="es-ES" sz="2300" b="1">
+                <a:solidFill>
+                  <a:srgbClr val="F6F8FC"/>
+                </a:solidFill>
+                <a:latin typeface="Segoe UI" panose="020B0502040204020203" pitchFamily="34" charset="0"/>
+              </a:rPr>
+              <a:t>Despliegue estable, dominio propio, base de datos de servidor y seguridad endurecida.</a:t>
             </a:r>
           </a:p>
         </p:txBody>
@@ -7079,7 +8239,288 @@
     </p:spTree>
     <p:extLst>
       <p:ext uri="{BB962C8B-B14F-4D97-AF65-F5344CB8AC3E}">
-        <p14:creationId xmlns:p14="http://schemas.microsoft.com/office/powerpoint/2010/main" val="1348730599"/>
+        <p14:creationId xmlns:p14="http://schemas.microsoft.com/office/powerpoint/2010/main" val="1501258835"/>
+      </p:ext>
+    </p:extLst>
+  </p:cSld>
+  <p:clrMapOvr>
+    <a:masterClrMapping/>
+  </p:clrMapOvr>
+</p:sld>
+</file>
+
+<file path=ppt/slides/slide18.xml><?xml version="1.0" encoding="utf-8"?>
+<p:sld xmlns:a="http://schemas.openxmlformats.org/drawingml/2006/main" xmlns:r="http://schemas.openxmlformats.org/officeDocument/2006/relationships" xmlns:p="http://schemas.openxmlformats.org/presentationml/2006/main">
+  <p:cSld>
+    <p:bg>
+      <p:bgPr>
+        <a:solidFill>
+          <a:srgbClr val="0F1218"/>
+        </a:solidFill>
+        <a:effectLst/>
+      </p:bgPr>
+    </p:bg>
+    <p:spTree>
+      <p:nvGrpSpPr>
+        <p:cNvPr id="1" name=""/>
+        <p:cNvGrpSpPr/>
+        <p:nvPr/>
+      </p:nvGrpSpPr>
+      <p:grpSpPr>
+        <a:xfrm>
+          <a:off x="0" y="0"/>
+          <a:ext cx="0" cy="0"/>
+          <a:chOff x="0" y="0"/>
+          <a:chExt cx="0" cy="0"/>
+        </a:xfrm>
+      </p:grpSpPr>
+      <p:sp>
+        <p:nvSpPr>
+          <p:cNvPr id="2" name="CuadroTexto 1">
+            <a:extLst>
+              <a:ext uri="{FF2B5EF4-FFF2-40B4-BE49-F238E27FC236}">
+                <a16:creationId xmlns:a16="http://schemas.microsoft.com/office/drawing/2014/main" id="{0751393D-4816-16A5-E38D-53548AC7220C}"/>
+              </a:ext>
+            </a:extLst>
+          </p:cNvPr>
+          <p:cNvSpPr txBox="1"/>
+          <p:nvPr/>
+        </p:nvSpPr>
+        <p:spPr>
+          <a:xfrm>
+            <a:off x="558800" y="330200"/>
+            <a:ext cx="10414000" cy="369332"/>
+          </a:xfrm>
+          <a:prstGeom prst="rect">
+            <a:avLst/>
+          </a:prstGeom>
+          <a:noFill/>
+        </p:spPr>
+        <p:txBody>
+          <a:bodyPr vert="horz" wrap="square" lIns="0" tIns="0" rIns="0" bIns="0" rtlCol="0">
+            <a:noAutofit/>
+          </a:bodyPr>
+          <a:lstStyle/>
+          <a:p>
+            <a:r>
+              <a:rPr lang="es-ES" sz="1200" b="1">
+                <a:solidFill>
+                  <a:srgbClr val="DBA14D"/>
+                </a:solidFill>
+                <a:latin typeface="Segoe UI" panose="020B0502040204020203" pitchFamily="34" charset="0"/>
+              </a:rPr>
+              <a:t>17 / CIERRE</a:t>
+            </a:r>
+          </a:p>
+        </p:txBody>
+      </p:sp>
+      <p:sp>
+        <p:nvSpPr>
+          <p:cNvPr id="3" name="CuadroTexto 2">
+            <a:extLst>
+              <a:ext uri="{FF2B5EF4-FFF2-40B4-BE49-F238E27FC236}">
+                <a16:creationId xmlns:a16="http://schemas.microsoft.com/office/drawing/2014/main" id="{850BEDA8-F92B-B057-F39D-ADF6E9E10AB3}"/>
+              </a:ext>
+            </a:extLst>
+          </p:cNvPr>
+          <p:cNvSpPr txBox="1"/>
+          <p:nvPr/>
+        </p:nvSpPr>
+        <p:spPr>
+          <a:xfrm>
+            <a:off x="558800" y="685800"/>
+            <a:ext cx="9906000" cy="369332"/>
+          </a:xfrm>
+          <a:prstGeom prst="rect">
+            <a:avLst/>
+          </a:prstGeom>
+          <a:noFill/>
+        </p:spPr>
+        <p:txBody>
+          <a:bodyPr vert="horz" wrap="square" lIns="0" tIns="0" rIns="0" bIns="0" rtlCol="0">
+            <a:noAutofit/>
+          </a:bodyPr>
+          <a:lstStyle/>
+          <a:p>
+            <a:r>
+              <a:rPr lang="es-ES" sz="3000" b="1">
+                <a:solidFill>
+                  <a:srgbClr val="F6F8FC"/>
+                </a:solidFill>
+                <a:latin typeface="Segoe UI" panose="020B0502040204020203" pitchFamily="34" charset="0"/>
+              </a:rPr>
+              <a:t>Resultado defendible</a:t>
+            </a:r>
+          </a:p>
+        </p:txBody>
+      </p:sp>
+      <p:sp>
+        <p:nvSpPr>
+          <p:cNvPr id="4" name="CuadroTexto 3">
+            <a:extLst>
+              <a:ext uri="{FF2B5EF4-FFF2-40B4-BE49-F238E27FC236}">
+                <a16:creationId xmlns:a16="http://schemas.microsoft.com/office/drawing/2014/main" id="{193BA8D5-7A9E-BAE3-A221-878D8AF96B9C}"/>
+              </a:ext>
+            </a:extLst>
+          </p:cNvPr>
+          <p:cNvSpPr txBox="1"/>
+          <p:nvPr/>
+        </p:nvSpPr>
+        <p:spPr>
+          <a:xfrm>
+            <a:off x="1168400" y="2006600"/>
+            <a:ext cx="9652000" cy="369332"/>
+          </a:xfrm>
+          <a:prstGeom prst="rect">
+            <a:avLst/>
+          </a:prstGeom>
+          <a:noFill/>
+        </p:spPr>
+        <p:txBody>
+          <a:bodyPr vert="horz" wrap="square" lIns="0" tIns="0" rIns="0" bIns="0" rtlCol="0">
+            <a:noAutofit/>
+          </a:bodyPr>
+          <a:lstStyle/>
+          <a:p>
+            <a:r>
+              <a:rPr lang="es-ES" sz="3000" b="1">
+                <a:solidFill>
+                  <a:srgbClr val="F6F8FC"/>
+                </a:solidFill>
+                <a:latin typeface="Segoe UI" panose="020B0502040204020203" pitchFamily="34" charset="0"/>
+              </a:rPr>
+              <a:t>El proyecto transforma una gestion dispersa en una plataforma web funcional, trazable y documentada para empresas colaboradoras y practicas de FP Dual.</a:t>
+            </a:r>
+          </a:p>
+        </p:txBody>
+      </p:sp>
+      <p:sp>
+        <p:nvSpPr>
+          <p:cNvPr id="5" name="CuadroTexto 4">
+            <a:extLst>
+              <a:ext uri="{FF2B5EF4-FFF2-40B4-BE49-F238E27FC236}">
+                <a16:creationId xmlns:a16="http://schemas.microsoft.com/office/drawing/2014/main" id="{35F15734-46C2-69C6-5023-A197B05A5019}"/>
+              </a:ext>
+            </a:extLst>
+          </p:cNvPr>
+          <p:cNvSpPr txBox="1"/>
+          <p:nvPr/>
+        </p:nvSpPr>
+        <p:spPr>
+          <a:xfrm>
+            <a:off x="1625600" y="4089400"/>
+            <a:ext cx="8763000" cy="369332"/>
+          </a:xfrm>
+          <a:prstGeom prst="rect">
+            <a:avLst/>
+          </a:prstGeom>
+          <a:noFill/>
+        </p:spPr>
+        <p:txBody>
+          <a:bodyPr vert="horz" wrap="square" lIns="0" tIns="0" rIns="0" bIns="0" rtlCol="0">
+            <a:noAutofit/>
+          </a:bodyPr>
+          <a:lstStyle/>
+          <a:p>
+            <a:pPr marL="457200" indent="-457200">
+              <a:spcAft>
+                <a:spcPts val="1000"/>
+              </a:spcAft>
+              <a:buFont typeface="+mj-lt"/>
+              <a:buChar char="•"/>
+            </a:pPr>
+            <a:r>
+              <a:rPr lang="es-ES" sz="1900">
+                <a:solidFill>
+                  <a:srgbClr val="C2CBD8"/>
+                </a:solidFill>
+                <a:latin typeface="Segoe UI" panose="020B0502040204020203" pitchFamily="34" charset="0"/>
+              </a:rPr>
+              <a:t>Problema real del centro.</a:t>
+            </a:r>
+          </a:p>
+          <a:p>
+            <a:pPr marL="457200" indent="-457200">
+              <a:spcAft>
+                <a:spcPts val="1000"/>
+              </a:spcAft>
+              <a:buFont typeface="+mj-lt"/>
+              <a:buChar char="•"/>
+            </a:pPr>
+            <a:r>
+              <a:rPr lang="es-ES" sz="1900">
+                <a:solidFill>
+                  <a:srgbClr val="C2CBD8"/>
+                </a:solidFill>
+                <a:latin typeface="Segoe UI" panose="020B0502040204020203" pitchFamily="34" charset="0"/>
+              </a:rPr>
+              <a:t>Arquitectura completa con backend, dos frontends y operacion local.</a:t>
+            </a:r>
+          </a:p>
+          <a:p>
+            <a:pPr marL="457200" indent="-457200">
+              <a:spcAft>
+                <a:spcPts val="1000"/>
+              </a:spcAft>
+              <a:buFont typeface="+mj-lt"/>
+              <a:buChar char="•"/>
+            </a:pPr>
+            <a:r>
+              <a:rPr lang="es-ES" sz="1900">
+                <a:solidFill>
+                  <a:srgbClr val="C2CBD8"/>
+                </a:solidFill>
+                <a:latin typeface="Segoe UI" panose="020B0502040204020203" pitchFamily="34" charset="0"/>
+              </a:rPr>
+              <a:t>Validacion tecnica, empaquetado y demo preparados.</a:t>
+            </a:r>
+          </a:p>
+        </p:txBody>
+      </p:sp>
+      <p:sp>
+        <p:nvSpPr>
+          <p:cNvPr id="6" name="CuadroTexto 5">
+            <a:extLst>
+              <a:ext uri="{FF2B5EF4-FFF2-40B4-BE49-F238E27FC236}">
+                <a16:creationId xmlns:a16="http://schemas.microsoft.com/office/drawing/2014/main" id="{2104C127-2FD0-AE74-977D-4AD83BE56564}"/>
+              </a:ext>
+            </a:extLst>
+          </p:cNvPr>
+          <p:cNvSpPr txBox="1"/>
+          <p:nvPr/>
+        </p:nvSpPr>
+        <p:spPr>
+          <a:xfrm>
+            <a:off x="4191000" y="5943600"/>
+            <a:ext cx="3810000" cy="369332"/>
+          </a:xfrm>
+          <a:prstGeom prst="rect">
+            <a:avLst/>
+          </a:prstGeom>
+          <a:noFill/>
+        </p:spPr>
+        <p:txBody>
+          <a:bodyPr vert="horz" wrap="square" lIns="0" tIns="0" rIns="0" bIns="0" rtlCol="0">
+            <a:noAutofit/>
+          </a:bodyPr>
+          <a:lstStyle/>
+          <a:p>
+            <a:r>
+              <a:rPr lang="es-ES" sz="2200" b="1">
+                <a:solidFill>
+                  <a:srgbClr val="DBA14D"/>
+                </a:solidFill>
+                <a:latin typeface="Segoe UI" panose="020B0502040204020203" pitchFamily="34" charset="0"/>
+              </a:rPr>
+              <a:t>Demo y preguntas</a:t>
+            </a:r>
+          </a:p>
+        </p:txBody>
+      </p:sp>
+    </p:spTree>
+    <p:extLst>
+      <p:ext uri="{BB962C8B-B14F-4D97-AF65-F5344CB8AC3E}">
+        <p14:creationId xmlns:p14="http://schemas.microsoft.com/office/powerpoint/2010/main" val="799824649"/>
       </p:ext>
     </p:extLst>
   </p:cSld>
@@ -7119,7 +8560,7 @@
           <p:cNvPr id="2" name="CuadroTexto 1">
             <a:extLst>
               <a:ext uri="{FF2B5EF4-FFF2-40B4-BE49-F238E27FC236}">
-                <a16:creationId xmlns:a16="http://schemas.microsoft.com/office/drawing/2014/main" id="{D66F771D-844A-8A8A-1619-F262A4D39AA6}"/>
+                <a16:creationId xmlns:a16="http://schemas.microsoft.com/office/drawing/2014/main" id="{7BC4A996-C0DC-0661-E17E-8ED31D136F34}"/>
               </a:ext>
             </a:extLst>
           </p:cNvPr>
@@ -7159,7 +8600,7 @@
           <p:cNvPr id="3" name="CuadroTexto 2">
             <a:extLst>
               <a:ext uri="{FF2B5EF4-FFF2-40B4-BE49-F238E27FC236}">
-                <a16:creationId xmlns:a16="http://schemas.microsoft.com/office/drawing/2014/main" id="{AA0E707B-611E-F1AC-59DD-8C8448C234F9}"/>
+                <a16:creationId xmlns:a16="http://schemas.microsoft.com/office/drawing/2014/main" id="{53D14285-670D-8745-1CD0-505DD2D0BC25}"/>
               </a:ext>
             </a:extLst>
           </p:cNvPr>
@@ -7199,7 +8640,7 @@
           <p:cNvPr id="4" name="CuadroTexto 3">
             <a:extLst>
               <a:ext uri="{FF2B5EF4-FFF2-40B4-BE49-F238E27FC236}">
-                <a16:creationId xmlns:a16="http://schemas.microsoft.com/office/drawing/2014/main" id="{B273184F-ED8D-917C-985D-945732CFBA6D}"/>
+                <a16:creationId xmlns:a16="http://schemas.microsoft.com/office/drawing/2014/main" id="{3F327E35-6509-576A-0D37-8F7EA77DB923}"/>
               </a:ext>
             </a:extLst>
           </p:cNvPr>
@@ -7239,7 +8680,7 @@
           <p:cNvPr id="5" name="CuadroTexto 4">
             <a:extLst>
               <a:ext uri="{FF2B5EF4-FFF2-40B4-BE49-F238E27FC236}">
-                <a16:creationId xmlns:a16="http://schemas.microsoft.com/office/drawing/2014/main" id="{1915B90E-BCE6-2D2C-6A00-56E4BEF8136F}"/>
+                <a16:creationId xmlns:a16="http://schemas.microsoft.com/office/drawing/2014/main" id="{F303F56F-1DE5-334F-E711-665F5FA30246}"/>
               </a:ext>
             </a:extLst>
           </p:cNvPr>
@@ -7340,7 +8781,7 @@
           <p:cNvPr id="6" name="Rectángulo: esquinas redondeadas 5">
             <a:extLst>
               <a:ext uri="{FF2B5EF4-FFF2-40B4-BE49-F238E27FC236}">
-                <a16:creationId xmlns:a16="http://schemas.microsoft.com/office/drawing/2014/main" id="{E3A242DE-AEFC-85A9-F6C5-D682491C8B55}"/>
+                <a16:creationId xmlns:a16="http://schemas.microsoft.com/office/drawing/2014/main" id="{17543611-9206-78E5-230B-C3BC42460A5C}"/>
               </a:ext>
             </a:extLst>
           </p:cNvPr>
@@ -7394,7 +8835,7 @@
           <p:cNvPr id="7" name="CuadroTexto 6">
             <a:extLst>
               <a:ext uri="{FF2B5EF4-FFF2-40B4-BE49-F238E27FC236}">
-                <a16:creationId xmlns:a16="http://schemas.microsoft.com/office/drawing/2014/main" id="{527E0B3B-A3CA-87F8-63E9-9D3A94567C78}"/>
+                <a16:creationId xmlns:a16="http://schemas.microsoft.com/office/drawing/2014/main" id="{F939EC5F-EB7F-DD90-6838-8B99D7D26098}"/>
               </a:ext>
             </a:extLst>
           </p:cNvPr>
@@ -7434,7 +8875,7 @@
           <p:cNvPr id="8" name="CuadroTexto 7">
             <a:extLst>
               <a:ext uri="{FF2B5EF4-FFF2-40B4-BE49-F238E27FC236}">
-                <a16:creationId xmlns:a16="http://schemas.microsoft.com/office/drawing/2014/main" id="{3EFBDDF0-1C89-E748-AE70-101E2A8D77B7}"/>
+                <a16:creationId xmlns:a16="http://schemas.microsoft.com/office/drawing/2014/main" id="{2140C953-3759-A7F5-DAA6-AB2EE8DFC2B6}"/>
               </a:ext>
             </a:extLst>
           </p:cNvPr>
@@ -7472,7 +8913,7 @@
     </p:spTree>
     <p:extLst>
       <p:ext uri="{BB962C8B-B14F-4D97-AF65-F5344CB8AC3E}">
-        <p14:creationId xmlns:p14="http://schemas.microsoft.com/office/powerpoint/2010/main" val="3051785877"/>
+        <p14:creationId xmlns:p14="http://schemas.microsoft.com/office/powerpoint/2010/main" val="2782718717"/>
       </p:ext>
     </p:extLst>
   </p:cSld>
@@ -7512,7 +8953,7 @@
           <p:cNvPr id="2" name="CuadroTexto 1">
             <a:extLst>
               <a:ext uri="{FF2B5EF4-FFF2-40B4-BE49-F238E27FC236}">
-                <a16:creationId xmlns:a16="http://schemas.microsoft.com/office/drawing/2014/main" id="{636B7FD3-1393-5D89-5B28-09F9F173D23E}"/>
+                <a16:creationId xmlns:a16="http://schemas.microsoft.com/office/drawing/2014/main" id="{6D860636-5B88-65EB-66C8-525E9B1C5029}"/>
               </a:ext>
             </a:extLst>
           </p:cNvPr>
@@ -7552,7 +8993,7 @@
           <p:cNvPr id="3" name="CuadroTexto 2">
             <a:extLst>
               <a:ext uri="{FF2B5EF4-FFF2-40B4-BE49-F238E27FC236}">
-                <a16:creationId xmlns:a16="http://schemas.microsoft.com/office/drawing/2014/main" id="{53F41C42-779D-C24A-7748-50A142FE32C0}"/>
+                <a16:creationId xmlns:a16="http://schemas.microsoft.com/office/drawing/2014/main" id="{E73E6A14-075B-6C57-E09D-688C309193E6}"/>
               </a:ext>
             </a:extLst>
           </p:cNvPr>
@@ -7592,7 +9033,7 @@
           <p:cNvPr id="4" name="Rectángulo: esquinas redondeadas 3">
             <a:extLst>
               <a:ext uri="{FF2B5EF4-FFF2-40B4-BE49-F238E27FC236}">
-                <a16:creationId xmlns:a16="http://schemas.microsoft.com/office/drawing/2014/main" id="{09A8808C-9454-C366-AE0D-FB3DD96BEE04}"/>
+                <a16:creationId xmlns:a16="http://schemas.microsoft.com/office/drawing/2014/main" id="{07AF75E8-38D7-18EA-3A3F-1E7C53957F73}"/>
               </a:ext>
             </a:extLst>
           </p:cNvPr>
@@ -7646,7 +9087,7 @@
           <p:cNvPr id="5" name="CuadroTexto 4">
             <a:extLst>
               <a:ext uri="{FF2B5EF4-FFF2-40B4-BE49-F238E27FC236}">
-                <a16:creationId xmlns:a16="http://schemas.microsoft.com/office/drawing/2014/main" id="{E955CF94-8241-1786-EF6F-E855D247F4CC}"/>
+                <a16:creationId xmlns:a16="http://schemas.microsoft.com/office/drawing/2014/main" id="{F952830A-94B6-5754-B734-F9BBA633C170}"/>
               </a:ext>
             </a:extLst>
           </p:cNvPr>
@@ -7686,7 +9127,7 @@
           <p:cNvPr id="6" name="CuadroTexto 5">
             <a:extLst>
               <a:ext uri="{FF2B5EF4-FFF2-40B4-BE49-F238E27FC236}">
-                <a16:creationId xmlns:a16="http://schemas.microsoft.com/office/drawing/2014/main" id="{225FD148-BF6E-CB4D-57D2-9E2214759528}"/>
+                <a16:creationId xmlns:a16="http://schemas.microsoft.com/office/drawing/2014/main" id="{4352CCE7-B113-CDC9-3A6B-DB1FC63637ED}"/>
               </a:ext>
             </a:extLst>
           </p:cNvPr>
@@ -7726,7 +9167,7 @@
           <p:cNvPr id="7" name="Rectángulo: esquinas redondeadas 6">
             <a:extLst>
               <a:ext uri="{FF2B5EF4-FFF2-40B4-BE49-F238E27FC236}">
-                <a16:creationId xmlns:a16="http://schemas.microsoft.com/office/drawing/2014/main" id="{93199024-54D7-0743-9E32-A3E116F97E72}"/>
+                <a16:creationId xmlns:a16="http://schemas.microsoft.com/office/drawing/2014/main" id="{EBFD86C3-8FE0-F47C-76BF-F5F3DA212EC3}"/>
               </a:ext>
             </a:extLst>
           </p:cNvPr>
@@ -7780,7 +9221,7 @@
           <p:cNvPr id="8" name="CuadroTexto 7">
             <a:extLst>
               <a:ext uri="{FF2B5EF4-FFF2-40B4-BE49-F238E27FC236}">
-                <a16:creationId xmlns:a16="http://schemas.microsoft.com/office/drawing/2014/main" id="{951C0E31-4E5A-F800-7EBD-DAB5664930F2}"/>
+                <a16:creationId xmlns:a16="http://schemas.microsoft.com/office/drawing/2014/main" id="{6DA1BC90-8ADD-C160-177E-BDFDF9BF41D7}"/>
               </a:ext>
             </a:extLst>
           </p:cNvPr>
@@ -7820,7 +9261,7 @@
           <p:cNvPr id="9" name="CuadroTexto 8">
             <a:extLst>
               <a:ext uri="{FF2B5EF4-FFF2-40B4-BE49-F238E27FC236}">
-                <a16:creationId xmlns:a16="http://schemas.microsoft.com/office/drawing/2014/main" id="{EA031D46-0FAC-63CC-B25A-E58D125ADB95}"/>
+                <a16:creationId xmlns:a16="http://schemas.microsoft.com/office/drawing/2014/main" id="{CF218EFD-8AC8-6D5D-514C-DDFA96414C7B}"/>
               </a:ext>
             </a:extLst>
           </p:cNvPr>
@@ -7860,7 +9301,7 @@
           <p:cNvPr id="10" name="Rectángulo: esquinas redondeadas 9">
             <a:extLst>
               <a:ext uri="{FF2B5EF4-FFF2-40B4-BE49-F238E27FC236}">
-                <a16:creationId xmlns:a16="http://schemas.microsoft.com/office/drawing/2014/main" id="{B8981CA7-A9DA-FD1F-C526-13A952BE22D2}"/>
+                <a16:creationId xmlns:a16="http://schemas.microsoft.com/office/drawing/2014/main" id="{67EC4629-F2E7-0F54-0CF6-7300799CA813}"/>
               </a:ext>
             </a:extLst>
           </p:cNvPr>
@@ -7914,7 +9355,7 @@
           <p:cNvPr id="11" name="CuadroTexto 10">
             <a:extLst>
               <a:ext uri="{FF2B5EF4-FFF2-40B4-BE49-F238E27FC236}">
-                <a16:creationId xmlns:a16="http://schemas.microsoft.com/office/drawing/2014/main" id="{FD029213-F952-0DDD-A7B1-58D1A75E1C35}"/>
+                <a16:creationId xmlns:a16="http://schemas.microsoft.com/office/drawing/2014/main" id="{46F8E751-6AB2-7BE2-E9EF-0168332DF2AC}"/>
               </a:ext>
             </a:extLst>
           </p:cNvPr>
@@ -7954,7 +9395,7 @@
           <p:cNvPr id="12" name="CuadroTexto 11">
             <a:extLst>
               <a:ext uri="{FF2B5EF4-FFF2-40B4-BE49-F238E27FC236}">
-                <a16:creationId xmlns:a16="http://schemas.microsoft.com/office/drawing/2014/main" id="{637BC3FE-0C17-AD8F-C01A-229033F77416}"/>
+                <a16:creationId xmlns:a16="http://schemas.microsoft.com/office/drawing/2014/main" id="{D234A87B-E86D-5B5C-9A5A-B4AC9EC2DA71}"/>
               </a:ext>
             </a:extLst>
           </p:cNvPr>
@@ -7994,7 +9435,7 @@
           <p:cNvPr id="13" name="Rectángulo: esquinas redondeadas 12">
             <a:extLst>
               <a:ext uri="{FF2B5EF4-FFF2-40B4-BE49-F238E27FC236}">
-                <a16:creationId xmlns:a16="http://schemas.microsoft.com/office/drawing/2014/main" id="{7DF30922-9107-776D-3018-6A86AA3D6E40}"/>
+                <a16:creationId xmlns:a16="http://schemas.microsoft.com/office/drawing/2014/main" id="{D42F7469-EE53-A828-98A4-3CF2E1277762}"/>
               </a:ext>
             </a:extLst>
           </p:cNvPr>
@@ -8048,7 +9489,7 @@
           <p:cNvPr id="14" name="CuadroTexto 13">
             <a:extLst>
               <a:ext uri="{FF2B5EF4-FFF2-40B4-BE49-F238E27FC236}">
-                <a16:creationId xmlns:a16="http://schemas.microsoft.com/office/drawing/2014/main" id="{5E3B5AC8-5916-8714-C52E-8C39DC8077EA}"/>
+                <a16:creationId xmlns:a16="http://schemas.microsoft.com/office/drawing/2014/main" id="{F60BBF21-3D4D-94FA-3519-4D64AAC54A71}"/>
               </a:ext>
             </a:extLst>
           </p:cNvPr>
@@ -8088,7 +9529,7 @@
           <p:cNvPr id="15" name="CuadroTexto 14">
             <a:extLst>
               <a:ext uri="{FF2B5EF4-FFF2-40B4-BE49-F238E27FC236}">
-                <a16:creationId xmlns:a16="http://schemas.microsoft.com/office/drawing/2014/main" id="{7D90F14A-D89D-B40D-7E84-52EABEF1A787}"/>
+                <a16:creationId xmlns:a16="http://schemas.microsoft.com/office/drawing/2014/main" id="{4D56B5AF-74E7-D2F9-212A-B052B5521A6F}"/>
               </a:ext>
             </a:extLst>
           </p:cNvPr>
@@ -8126,7 +9567,7 @@
     </p:spTree>
     <p:extLst>
       <p:ext uri="{BB962C8B-B14F-4D97-AF65-F5344CB8AC3E}">
-        <p14:creationId xmlns:p14="http://schemas.microsoft.com/office/powerpoint/2010/main" val="3508173636"/>
+        <p14:creationId xmlns:p14="http://schemas.microsoft.com/office/powerpoint/2010/main" val="2920862296"/>
       </p:ext>
     </p:extLst>
   </p:cSld>
@@ -8166,7 +9607,7 @@
           <p:cNvPr id="2" name="CuadroTexto 1">
             <a:extLst>
               <a:ext uri="{FF2B5EF4-FFF2-40B4-BE49-F238E27FC236}">
-                <a16:creationId xmlns:a16="http://schemas.microsoft.com/office/drawing/2014/main" id="{3B53BFB5-E3E0-B286-B406-150DBBCC870F}"/>
+                <a16:creationId xmlns:a16="http://schemas.microsoft.com/office/drawing/2014/main" id="{928A9E5C-1A80-0CAB-CDFE-C6322207A13A}"/>
               </a:ext>
             </a:extLst>
           </p:cNvPr>
@@ -8206,7 +9647,7 @@
           <p:cNvPr id="3" name="CuadroTexto 2">
             <a:extLst>
               <a:ext uri="{FF2B5EF4-FFF2-40B4-BE49-F238E27FC236}">
-                <a16:creationId xmlns:a16="http://schemas.microsoft.com/office/drawing/2014/main" id="{4A18F661-8504-FF24-794C-DEB98DE8811E}"/>
+                <a16:creationId xmlns:a16="http://schemas.microsoft.com/office/drawing/2014/main" id="{796BA637-4BC9-9863-06B2-643CF9089114}"/>
               </a:ext>
             </a:extLst>
           </p:cNvPr>
@@ -8236,7 +9677,7 @@
                 </a:solidFill>
                 <a:latin typeface="Segoe UI" panose="020B0502040204020203" pitchFamily="34" charset="0"/>
               </a:rPr>
-              <a:t>Separacion por responsabilidades</a:t>
+              <a:t>Topologia operativa y de despliegue</a:t>
             </a:r>
           </a:p>
         </p:txBody>
@@ -8246,7 +9687,7 @@
           <p:cNvPr id="4" name="CuadroTexto 3">
             <a:extLst>
               <a:ext uri="{FF2B5EF4-FFF2-40B4-BE49-F238E27FC236}">
-                <a16:creationId xmlns:a16="http://schemas.microsoft.com/office/drawing/2014/main" id="{474815DA-F3A7-AB78-4388-EC3336FFFA42}"/>
+                <a16:creationId xmlns:a16="http://schemas.microsoft.com/office/drawing/2014/main" id="{F3E28275-3FDB-C476-1898-8C59DA2BEAD2}"/>
               </a:ext>
             </a:extLst>
           </p:cNvPr>
@@ -8276,7 +9717,7 @@
                 </a:solidFill>
                 <a:latin typeface="Segoe UI" panose="020B0502040204020203" pitchFamily="34" charset="0"/>
               </a:rPr>
-              <a:t>Un unico nucleo de datos y negocio, con interfaces distintas para cada tipo de usuario.</a:t>
+              <a:t>La misma URL publica sirve los dos portales, la documentacion y el monitor legacy, mientras el escritorio opera por API y SSH.</a:t>
             </a:r>
           </a:p>
         </p:txBody>
@@ -8286,7 +9727,7 @@
           <p:cNvPr id="6" name="Imagen 5">
             <a:extLst>
               <a:ext uri="{FF2B5EF4-FFF2-40B4-BE49-F238E27FC236}">
-                <a16:creationId xmlns:a16="http://schemas.microsoft.com/office/drawing/2014/main" id="{17606F8B-DB37-5589-BE9B-56D891B9004E}"/>
+                <a16:creationId xmlns:a16="http://schemas.microsoft.com/office/drawing/2014/main" id="{CC39E8F7-737C-9985-4F61-E7041E46D350}"/>
               </a:ext>
             </a:extLst>
           </p:cNvPr>
@@ -8309,8 +9750,8 @@
         </p:blipFill>
         <p:spPr>
           <a:xfrm>
-            <a:off x="1073150" y="2006600"/>
-            <a:ext cx="5905500" cy="3937000"/>
+            <a:off x="812022" y="2006600"/>
+            <a:ext cx="6427756" cy="3937000"/>
           </a:xfrm>
           <a:prstGeom prst="rect">
             <a:avLst/>
@@ -8327,7 +9768,7 @@
           <p:cNvPr id="7" name="CuadroTexto 6">
             <a:extLst>
               <a:ext uri="{FF2B5EF4-FFF2-40B4-BE49-F238E27FC236}">
-                <a16:creationId xmlns:a16="http://schemas.microsoft.com/office/drawing/2014/main" id="{564781DF-542B-126E-AFFB-E71F3C2FEFF7}"/>
+                <a16:creationId xmlns:a16="http://schemas.microsoft.com/office/drawing/2014/main" id="{912DDBBC-7C3C-A465-43FB-7E293FA4767D}"/>
               </a:ext>
             </a:extLst>
           </p:cNvPr>
@@ -8364,7 +9805,7 @@
                 </a:solidFill>
                 <a:latin typeface="Segoe UI" panose="020B0502040204020203" pitchFamily="34" charset="0"/>
               </a:rPr>
-              <a:t>API REST Symfony como centro de negocio.</a:t>
+              <a:t>Caddy expone HTTPS y enruta a la aplicacion.</a:t>
             </a:r>
           </a:p>
           <a:p>
@@ -8382,7 +9823,7 @@
                 </a:solidFill>
                 <a:latin typeface="Segoe UI" panose="020B0502040204020203" pitchFamily="34" charset="0"/>
               </a:rPr>
-              <a:t>Panel interno React para coordinacion.</a:t>
+              <a:t>Symfony concentra seguridad, negocio y APIs.</a:t>
             </a:r>
           </a:p>
           <a:p>
@@ -8400,7 +9841,7 @@
                 </a:solidFill>
                 <a:latin typeface="Segoe UI" panose="020B0502040204020203" pitchFamily="34" charset="0"/>
               </a:rPr>
-              <a:t>Portal externo React para empresas.</a:t>
+              <a:t>PostgreSQL y documentos persisten fuera del contenedor.</a:t>
             </a:r>
           </a:p>
           <a:p>
@@ -8418,7 +9859,7 @@
                 </a:solidFill>
                 <a:latin typeface="Segoe UI" panose="020B0502040204020203" pitchFamily="34" charset="0"/>
               </a:rPr>
-              <a:t>Documentacion y monitor separados del flujo operativo.</a:t>
+              <a:t>Agora Desktop trabaja en local o en cloud.</a:t>
             </a:r>
           </a:p>
           <a:p>
@@ -8436,7 +9877,7 @@
                 </a:solidFill>
                 <a:latin typeface="Segoe UI" panose="020B0502040204020203" pitchFamily="34" charset="0"/>
               </a:rPr>
-              <a:t>Modo integrado bajo una unica URL.</a:t>
+              <a:t>La shell web de monitor queda en legacy.</a:t>
             </a:r>
           </a:p>
         </p:txBody>
@@ -8444,7 +9885,7 @@
     </p:spTree>
     <p:extLst>
       <p:ext uri="{BB962C8B-B14F-4D97-AF65-F5344CB8AC3E}">
-        <p14:creationId xmlns:p14="http://schemas.microsoft.com/office/powerpoint/2010/main" val="3250483006"/>
+        <p14:creationId xmlns:p14="http://schemas.microsoft.com/office/powerpoint/2010/main" val="1820082989"/>
       </p:ext>
     </p:extLst>
   </p:cSld>
@@ -8484,7 +9925,7 @@
           <p:cNvPr id="2" name="CuadroTexto 1">
             <a:extLst>
               <a:ext uri="{FF2B5EF4-FFF2-40B4-BE49-F238E27FC236}">
-                <a16:creationId xmlns:a16="http://schemas.microsoft.com/office/drawing/2014/main" id="{83A0BADC-A61B-8DCF-868B-4B0627F917C5}"/>
+                <a16:creationId xmlns:a16="http://schemas.microsoft.com/office/drawing/2014/main" id="{7FEB5C7E-1CD1-8EAE-8422-6816165B0386}"/>
               </a:ext>
             </a:extLst>
           </p:cNvPr>
@@ -8524,7 +9965,7 @@
           <p:cNvPr id="3" name="CuadroTexto 2">
             <a:extLst>
               <a:ext uri="{FF2B5EF4-FFF2-40B4-BE49-F238E27FC236}">
-                <a16:creationId xmlns:a16="http://schemas.microsoft.com/office/drawing/2014/main" id="{B77C57D6-4B7F-A8F4-C15A-BE6C5EEDE134}"/>
+                <a16:creationId xmlns:a16="http://schemas.microsoft.com/office/drawing/2014/main" id="{2A721D04-6A57-D719-681A-DB43A374A36C}"/>
               </a:ext>
             </a:extLst>
           </p:cNvPr>
@@ -8554,7 +9995,7 @@
                 </a:solidFill>
                 <a:latin typeface="Segoe UI" panose="020B0502040204020203" pitchFamily="34" charset="0"/>
               </a:rPr>
-              <a:t>Del alta de empresa a la asignacion</a:t>
+              <a:t>De la cuenta de empresa a la asignacion</a:t>
             </a:r>
           </a:p>
         </p:txBody>
@@ -8564,7 +10005,7 @@
           <p:cNvPr id="5" name="Imagen 4">
             <a:extLst>
               <a:ext uri="{FF2B5EF4-FFF2-40B4-BE49-F238E27FC236}">
-                <a16:creationId xmlns:a16="http://schemas.microsoft.com/office/drawing/2014/main" id="{C278ECE0-4371-D756-05E7-2F4D5C7651A8}"/>
+                <a16:creationId xmlns:a16="http://schemas.microsoft.com/office/drawing/2014/main" id="{5249F826-C292-4ED7-2FEF-1A71CFC9B977}"/>
               </a:ext>
             </a:extLst>
           </p:cNvPr>
@@ -8587,8 +10028,8 @@
         </p:blipFill>
         <p:spPr>
           <a:xfrm>
-            <a:off x="584200" y="1980890"/>
-            <a:ext cx="5969000" cy="3785220"/>
+            <a:off x="584200" y="2016478"/>
+            <a:ext cx="5969000" cy="3714044"/>
           </a:xfrm>
           <a:prstGeom prst="rect">
             <a:avLst/>
@@ -8605,7 +10046,7 @@
           <p:cNvPr id="6" name="CuadroTexto 5">
             <a:extLst>
               <a:ext uri="{FF2B5EF4-FFF2-40B4-BE49-F238E27FC236}">
-                <a16:creationId xmlns:a16="http://schemas.microsoft.com/office/drawing/2014/main" id="{03CD8241-1366-6491-F780-48534F0B21A4}"/>
+                <a16:creationId xmlns:a16="http://schemas.microsoft.com/office/drawing/2014/main" id="{16D37AAB-DA47-E103-DC95-339465F7F373}"/>
               </a:ext>
             </a:extLst>
           </p:cNvPr>
@@ -8645,7 +10086,7 @@
           <p:cNvPr id="7" name="CuadroTexto 6">
             <a:extLst>
               <a:ext uri="{FF2B5EF4-FFF2-40B4-BE49-F238E27FC236}">
-                <a16:creationId xmlns:a16="http://schemas.microsoft.com/office/drawing/2014/main" id="{72A47E0A-4FF4-201D-6F6E-2CC8BB1FA1AE}"/>
+                <a16:creationId xmlns:a16="http://schemas.microsoft.com/office/drawing/2014/main" id="{1EB8936E-9522-D541-2858-EEF4AFA6CBBB}"/>
               </a:ext>
             </a:extLst>
           </p:cNvPr>
@@ -8682,7 +10123,7 @@
                 </a:solidFill>
                 <a:latin typeface="Segoe UI" panose="020B0502040204020203" pitchFamily="34" charset="0"/>
               </a:rPr>
-              <a:t>Primero se revisa o activa la empresa.</a:t>
+              <a:t>La cuenta portal sobrevive al preregistro inicial.</a:t>
             </a:r>
           </a:p>
           <a:p>
@@ -8700,7 +10141,7 @@
                 </a:solidFill>
                 <a:latin typeface="Segoe UI" panose="020B0502040204020203" pitchFamily="34" charset="0"/>
               </a:rPr>
-              <a:t>Despues se formaliza el convenio.</a:t>
+              <a:t>La solicitud concentra verificacion, estado y mensajes.</a:t>
             </a:r>
           </a:p>
           <a:p>
@@ -8718,7 +10159,7 @@
                 </a:solidFill>
                 <a:latin typeface="Segoe UI" panose="020B0502040204020203" pitchFamily="34" charset="0"/>
               </a:rPr>
-              <a:t>Solo con convenio operativo se planifica la asignacion.</a:t>
+              <a:t>La empresa aprobada hereda convenios, documentos y tutores.</a:t>
             </a:r>
           </a:p>
           <a:p>
@@ -8736,7 +10177,7 @@
                 </a:solidFill>
                 <a:latin typeface="Segoe UI" panose="020B0502040204020203" pitchFamily="34" charset="0"/>
               </a:rPr>
-              <a:t>Seguimientos, evidencias y evaluacion cierran el ciclo.</a:t>
+              <a:t>Asignacion, seguimiento y evaluacion cierran el ciclo.</a:t>
             </a:r>
           </a:p>
         </p:txBody>
@@ -8744,7 +10185,7 @@
     </p:spTree>
     <p:extLst>
       <p:ext uri="{BB962C8B-B14F-4D97-AF65-F5344CB8AC3E}">
-        <p14:creationId xmlns:p14="http://schemas.microsoft.com/office/powerpoint/2010/main" val="3309798934"/>
+        <p14:creationId xmlns:p14="http://schemas.microsoft.com/office/powerpoint/2010/main" val="1695852921"/>
       </p:ext>
     </p:extLst>
   </p:cSld>
@@ -8784,7 +10225,7 @@
           <p:cNvPr id="2" name="CuadroTexto 1">
             <a:extLst>
               <a:ext uri="{FF2B5EF4-FFF2-40B4-BE49-F238E27FC236}">
-                <a16:creationId xmlns:a16="http://schemas.microsoft.com/office/drawing/2014/main" id="{DECB3CC9-B2AF-884D-2AB3-040BD637FF04}"/>
+                <a16:creationId xmlns:a16="http://schemas.microsoft.com/office/drawing/2014/main" id="{1A9E1F0B-BDF1-4C18-FA1E-DBB85328D07A}"/>
               </a:ext>
             </a:extLst>
           </p:cNvPr>
@@ -8824,7 +10265,7 @@
           <p:cNvPr id="3" name="CuadroTexto 2">
             <a:extLst>
               <a:ext uri="{FF2B5EF4-FFF2-40B4-BE49-F238E27FC236}">
-                <a16:creationId xmlns:a16="http://schemas.microsoft.com/office/drawing/2014/main" id="{E0ADE18F-5D82-9966-D525-D6A900E12156}"/>
+                <a16:creationId xmlns:a16="http://schemas.microsoft.com/office/drawing/2014/main" id="{39928138-6B23-8A2C-7358-B7535E8F0854}"/>
               </a:ext>
             </a:extLst>
           </p:cNvPr>
@@ -8864,7 +10305,7 @@
           <p:cNvPr id="4" name="CuadroTexto 3">
             <a:extLst>
               <a:ext uri="{FF2B5EF4-FFF2-40B4-BE49-F238E27FC236}">
-                <a16:creationId xmlns:a16="http://schemas.microsoft.com/office/drawing/2014/main" id="{88AEFA1B-178F-870D-0317-45F8298E0A57}"/>
+                <a16:creationId xmlns:a16="http://schemas.microsoft.com/office/drawing/2014/main" id="{7AABE39B-449B-8D65-C4D7-25CEE13E48F6}"/>
               </a:ext>
             </a:extLst>
           </p:cNvPr>
@@ -8904,7 +10345,7 @@
           <p:cNvPr id="6" name="Imagen 5">
             <a:extLst>
               <a:ext uri="{FF2B5EF4-FFF2-40B4-BE49-F238E27FC236}">
-                <a16:creationId xmlns:a16="http://schemas.microsoft.com/office/drawing/2014/main" id="{5A73259E-6524-4B88-6FB4-673FDE73CBE3}"/>
+                <a16:creationId xmlns:a16="http://schemas.microsoft.com/office/drawing/2014/main" id="{8C45D29C-D2B7-5774-D729-E54533DB20B2}"/>
               </a:ext>
             </a:extLst>
           </p:cNvPr>
@@ -8945,7 +10386,7 @@
           <p:cNvPr id="7" name="Rectángulo: esquinas redondeadas 6">
             <a:extLst>
               <a:ext uri="{FF2B5EF4-FFF2-40B4-BE49-F238E27FC236}">
-                <a16:creationId xmlns:a16="http://schemas.microsoft.com/office/drawing/2014/main" id="{5EC5033A-540D-3307-6171-549F21CA20A1}"/>
+                <a16:creationId xmlns:a16="http://schemas.microsoft.com/office/drawing/2014/main" id="{36C118CA-7706-AA24-4B94-3CA0DAFB12A2}"/>
               </a:ext>
             </a:extLst>
           </p:cNvPr>
@@ -8999,7 +10440,7 @@
           <p:cNvPr id="8" name="CuadroTexto 7">
             <a:extLst>
               <a:ext uri="{FF2B5EF4-FFF2-40B4-BE49-F238E27FC236}">
-                <a16:creationId xmlns:a16="http://schemas.microsoft.com/office/drawing/2014/main" id="{21007BA7-9FFB-DCB4-1D97-C744AE45798E}"/>
+                <a16:creationId xmlns:a16="http://schemas.microsoft.com/office/drawing/2014/main" id="{A0FF7F01-F678-7332-D01A-A4E9C34AFC55}"/>
               </a:ext>
             </a:extLst>
           </p:cNvPr>
@@ -9039,7 +10480,7 @@
           <p:cNvPr id="9" name="CuadroTexto 8">
             <a:extLst>
               <a:ext uri="{FF2B5EF4-FFF2-40B4-BE49-F238E27FC236}">
-                <a16:creationId xmlns:a16="http://schemas.microsoft.com/office/drawing/2014/main" id="{A1DC66D2-1CB2-5133-3694-5E86CEAD394C}"/>
+                <a16:creationId xmlns:a16="http://schemas.microsoft.com/office/drawing/2014/main" id="{E281DD0F-E1B5-A30A-6FEE-E6609C36C48F}"/>
               </a:ext>
             </a:extLst>
           </p:cNvPr>
@@ -9079,7 +10520,7 @@
           <p:cNvPr id="10" name="Rectángulo: esquinas redondeadas 9">
             <a:extLst>
               <a:ext uri="{FF2B5EF4-FFF2-40B4-BE49-F238E27FC236}">
-                <a16:creationId xmlns:a16="http://schemas.microsoft.com/office/drawing/2014/main" id="{8FBF2FC0-F7F6-66F8-3FD5-89033FE35041}"/>
+                <a16:creationId xmlns:a16="http://schemas.microsoft.com/office/drawing/2014/main" id="{592470D7-DB12-70A1-8C2C-634DFFF87A3D}"/>
               </a:ext>
             </a:extLst>
           </p:cNvPr>
@@ -9133,7 +10574,7 @@
           <p:cNvPr id="11" name="CuadroTexto 10">
             <a:extLst>
               <a:ext uri="{FF2B5EF4-FFF2-40B4-BE49-F238E27FC236}">
-                <a16:creationId xmlns:a16="http://schemas.microsoft.com/office/drawing/2014/main" id="{FE4D34F5-1380-3F07-15C9-DC8E7A5A6E38}"/>
+                <a16:creationId xmlns:a16="http://schemas.microsoft.com/office/drawing/2014/main" id="{BB9A8C2D-2C15-65D6-34F4-EFF35D086C9D}"/>
               </a:ext>
             </a:extLst>
           </p:cNvPr>
@@ -9173,7 +10614,7 @@
           <p:cNvPr id="12" name="CuadroTexto 11">
             <a:extLst>
               <a:ext uri="{FF2B5EF4-FFF2-40B4-BE49-F238E27FC236}">
-                <a16:creationId xmlns:a16="http://schemas.microsoft.com/office/drawing/2014/main" id="{4A22DDC2-2FA9-86F2-D8A4-587D847AA58C}"/>
+                <a16:creationId xmlns:a16="http://schemas.microsoft.com/office/drawing/2014/main" id="{8BCEFA69-B51E-6BDA-ADD9-96914115396A}"/>
               </a:ext>
             </a:extLst>
           </p:cNvPr>
@@ -9213,7 +10654,7 @@
           <p:cNvPr id="13" name="Rectángulo: esquinas redondeadas 12">
             <a:extLst>
               <a:ext uri="{FF2B5EF4-FFF2-40B4-BE49-F238E27FC236}">
-                <a16:creationId xmlns:a16="http://schemas.microsoft.com/office/drawing/2014/main" id="{0230A069-2E64-05BB-7CD7-CC6D167E8205}"/>
+                <a16:creationId xmlns:a16="http://schemas.microsoft.com/office/drawing/2014/main" id="{CDECFDD1-B17D-1525-32F1-FB7E618F070B}"/>
               </a:ext>
             </a:extLst>
           </p:cNvPr>
@@ -9267,7 +10708,7 @@
           <p:cNvPr id="14" name="CuadroTexto 13">
             <a:extLst>
               <a:ext uri="{FF2B5EF4-FFF2-40B4-BE49-F238E27FC236}">
-                <a16:creationId xmlns:a16="http://schemas.microsoft.com/office/drawing/2014/main" id="{B723A12F-CBDE-299B-6334-523292289C3B}"/>
+                <a16:creationId xmlns:a16="http://schemas.microsoft.com/office/drawing/2014/main" id="{342B069A-FED2-C970-BDFF-4266530C47B1}"/>
               </a:ext>
             </a:extLst>
           </p:cNvPr>
@@ -9307,7 +10748,7 @@
           <p:cNvPr id="15" name="CuadroTexto 14">
             <a:extLst>
               <a:ext uri="{FF2B5EF4-FFF2-40B4-BE49-F238E27FC236}">
-                <a16:creationId xmlns:a16="http://schemas.microsoft.com/office/drawing/2014/main" id="{60FF19A0-920B-49AB-F4C5-D29D6AE915CC}"/>
+                <a16:creationId xmlns:a16="http://schemas.microsoft.com/office/drawing/2014/main" id="{0344A2AC-07E9-1E86-FAE7-94698EE3F95A}"/>
               </a:ext>
             </a:extLst>
           </p:cNvPr>
@@ -9345,7 +10786,7 @@
     </p:spTree>
     <p:extLst>
       <p:ext uri="{BB962C8B-B14F-4D97-AF65-F5344CB8AC3E}">
-        <p14:creationId xmlns:p14="http://schemas.microsoft.com/office/powerpoint/2010/main" val="2650554057"/>
+        <p14:creationId xmlns:p14="http://schemas.microsoft.com/office/powerpoint/2010/main" val="444641734"/>
       </p:ext>
     </p:extLst>
   </p:cSld>
@@ -9385,7 +10826,7 @@
           <p:cNvPr id="2" name="CuadroTexto 1">
             <a:extLst>
               <a:ext uri="{FF2B5EF4-FFF2-40B4-BE49-F238E27FC236}">
-                <a16:creationId xmlns:a16="http://schemas.microsoft.com/office/drawing/2014/main" id="{21222F39-FC80-9898-FA18-297D95C93417}"/>
+                <a16:creationId xmlns:a16="http://schemas.microsoft.com/office/drawing/2014/main" id="{6CE89E96-8080-E632-7DF5-66335AFC344D}"/>
               </a:ext>
             </a:extLst>
           </p:cNvPr>
@@ -9425,7 +10866,7 @@
           <p:cNvPr id="3" name="CuadroTexto 2">
             <a:extLst>
               <a:ext uri="{FF2B5EF4-FFF2-40B4-BE49-F238E27FC236}">
-                <a16:creationId xmlns:a16="http://schemas.microsoft.com/office/drawing/2014/main" id="{74E41328-CB24-DC7F-9329-F8F14BFA94F9}"/>
+                <a16:creationId xmlns:a16="http://schemas.microsoft.com/office/drawing/2014/main" id="{73E058A5-6A40-A02A-622D-78A676D3D767}"/>
               </a:ext>
             </a:extLst>
           </p:cNvPr>
@@ -9465,7 +10906,7 @@
           <p:cNvPr id="5" name="Imagen 4">
             <a:extLst>
               <a:ext uri="{FF2B5EF4-FFF2-40B4-BE49-F238E27FC236}">
-                <a16:creationId xmlns:a16="http://schemas.microsoft.com/office/drawing/2014/main" id="{859D7CB8-323C-EF68-B400-3B8A93AE32AF}"/>
+                <a16:creationId xmlns:a16="http://schemas.microsoft.com/office/drawing/2014/main" id="{63C7D728-633E-1564-7E9C-6BAEC3FE609E}"/>
               </a:ext>
             </a:extLst>
           </p:cNvPr>
@@ -9506,7 +10947,7 @@
           <p:cNvPr id="6" name="CuadroTexto 5">
             <a:extLst>
               <a:ext uri="{FF2B5EF4-FFF2-40B4-BE49-F238E27FC236}">
-                <a16:creationId xmlns:a16="http://schemas.microsoft.com/office/drawing/2014/main" id="{5265ACBE-4637-D99D-5B00-E4FBEDC15BF3}"/>
+                <a16:creationId xmlns:a16="http://schemas.microsoft.com/office/drawing/2014/main" id="{5715EE4E-A1C6-1C3D-CE17-162C1B0133F9}"/>
               </a:ext>
             </a:extLst>
           </p:cNvPr>
@@ -9605,7 +11046,7 @@
     </p:spTree>
     <p:extLst>
       <p:ext uri="{BB962C8B-B14F-4D97-AF65-F5344CB8AC3E}">
-        <p14:creationId xmlns:p14="http://schemas.microsoft.com/office/powerpoint/2010/main" val="1221587346"/>
+        <p14:creationId xmlns:p14="http://schemas.microsoft.com/office/powerpoint/2010/main" val="1844937628"/>
       </p:ext>
     </p:extLst>
   </p:cSld>
@@ -9645,7 +11086,7 @@
           <p:cNvPr id="2" name="CuadroTexto 1">
             <a:extLst>
               <a:ext uri="{FF2B5EF4-FFF2-40B4-BE49-F238E27FC236}">
-                <a16:creationId xmlns:a16="http://schemas.microsoft.com/office/drawing/2014/main" id="{7EB3A68E-3279-060F-AECA-5DE13003702F}"/>
+                <a16:creationId xmlns:a16="http://schemas.microsoft.com/office/drawing/2014/main" id="{4D154D3C-0CC9-334A-8C60-D074F7E3F248}"/>
               </a:ext>
             </a:extLst>
           </p:cNvPr>
@@ -9685,7 +11126,7 @@
           <p:cNvPr id="3" name="CuadroTexto 2">
             <a:extLst>
               <a:ext uri="{FF2B5EF4-FFF2-40B4-BE49-F238E27FC236}">
-                <a16:creationId xmlns:a16="http://schemas.microsoft.com/office/drawing/2014/main" id="{DF4D926D-60E2-B416-864D-E04AB57B7ECD}"/>
+                <a16:creationId xmlns:a16="http://schemas.microsoft.com/office/drawing/2014/main" id="{057691EC-32BD-3270-563E-C99F26EC5CDB}"/>
               </a:ext>
             </a:extLst>
           </p:cNvPr>
@@ -9725,7 +11166,7 @@
           <p:cNvPr id="4" name="CuadroTexto 3">
             <a:extLst>
               <a:ext uri="{FF2B5EF4-FFF2-40B4-BE49-F238E27FC236}">
-                <a16:creationId xmlns:a16="http://schemas.microsoft.com/office/drawing/2014/main" id="{FB19245F-FFC7-BDAB-495E-0D7D17C72884}"/>
+                <a16:creationId xmlns:a16="http://schemas.microsoft.com/office/drawing/2014/main" id="{B2B226B4-6E16-EF50-554E-5E2D3FEC44DD}"/>
               </a:ext>
             </a:extLst>
           </p:cNvPr>
@@ -9765,7 +11206,7 @@
           <p:cNvPr id="6" name="Imagen 5">
             <a:extLst>
               <a:ext uri="{FF2B5EF4-FFF2-40B4-BE49-F238E27FC236}">
-                <a16:creationId xmlns:a16="http://schemas.microsoft.com/office/drawing/2014/main" id="{1C30C189-9923-156D-3024-F088E9BE2611}"/>
+                <a16:creationId xmlns:a16="http://schemas.microsoft.com/office/drawing/2014/main" id="{098F6E69-6ADB-CD03-7C1D-43010B0BB91E}"/>
               </a:ext>
             </a:extLst>
           </p:cNvPr>
@@ -9806,7 +11247,7 @@
           <p:cNvPr id="7" name="Rectángulo: esquinas redondeadas 6">
             <a:extLst>
               <a:ext uri="{FF2B5EF4-FFF2-40B4-BE49-F238E27FC236}">
-                <a16:creationId xmlns:a16="http://schemas.microsoft.com/office/drawing/2014/main" id="{E4D502B2-61E4-2133-B17C-16808FCB3E1D}"/>
+                <a16:creationId xmlns:a16="http://schemas.microsoft.com/office/drawing/2014/main" id="{570AADC6-9A6A-D148-5E95-7C44264CAD7C}"/>
               </a:ext>
             </a:extLst>
           </p:cNvPr>
@@ -9860,7 +11301,7 @@
           <p:cNvPr id="8" name="CuadroTexto 7">
             <a:extLst>
               <a:ext uri="{FF2B5EF4-FFF2-40B4-BE49-F238E27FC236}">
-                <a16:creationId xmlns:a16="http://schemas.microsoft.com/office/drawing/2014/main" id="{348A6364-E459-498F-8A31-14E893D14003}"/>
+                <a16:creationId xmlns:a16="http://schemas.microsoft.com/office/drawing/2014/main" id="{923DD8F0-9855-49F5-BE46-AC1BFDD9BF08}"/>
               </a:ext>
             </a:extLst>
           </p:cNvPr>
@@ -9900,7 +11341,7 @@
           <p:cNvPr id="9" name="CuadroTexto 8">
             <a:extLst>
               <a:ext uri="{FF2B5EF4-FFF2-40B4-BE49-F238E27FC236}">
-                <a16:creationId xmlns:a16="http://schemas.microsoft.com/office/drawing/2014/main" id="{E488D5A9-4B9D-A8F7-1245-94C48B29EE86}"/>
+                <a16:creationId xmlns:a16="http://schemas.microsoft.com/office/drawing/2014/main" id="{48AA1450-6C4C-3BBC-C570-3F75D447FE05}"/>
               </a:ext>
             </a:extLst>
           </p:cNvPr>
@@ -9938,7 +11379,7 @@
     </p:spTree>
     <p:extLst>
       <p:ext uri="{BB962C8B-B14F-4D97-AF65-F5344CB8AC3E}">
-        <p14:creationId xmlns:p14="http://schemas.microsoft.com/office/powerpoint/2010/main" val="2867785587"/>
+        <p14:creationId xmlns:p14="http://schemas.microsoft.com/office/powerpoint/2010/main" val="1123479016"/>
       </p:ext>
     </p:extLst>
   </p:cSld>
@@ -9978,7 +11419,7 @@
           <p:cNvPr id="2" name="CuadroTexto 1">
             <a:extLst>
               <a:ext uri="{FF2B5EF4-FFF2-40B4-BE49-F238E27FC236}">
-                <a16:creationId xmlns:a16="http://schemas.microsoft.com/office/drawing/2014/main" id="{56D933A8-E66E-3E19-EEC8-5E6C2E671291}"/>
+                <a16:creationId xmlns:a16="http://schemas.microsoft.com/office/drawing/2014/main" id="{64968A2A-D52D-6028-C97A-6F360F1AA37B}"/>
               </a:ext>
             </a:extLst>
           </p:cNvPr>
@@ -10008,7 +11449,7 @@
                 </a:solidFill>
                 <a:latin typeface="Segoe UI" panose="020B0502040204020203" pitchFamily="34" charset="0"/>
               </a:rPr>
-              <a:t>08 / OPERACION Y DOCUMENTACION</a:t>
+              <a:t>08 / DESARROLLO</a:t>
             </a:r>
           </a:p>
         </p:txBody>
@@ -10018,7 +11459,7 @@
           <p:cNvPr id="3" name="CuadroTexto 2">
             <a:extLst>
               <a:ext uri="{FF2B5EF4-FFF2-40B4-BE49-F238E27FC236}">
-                <a16:creationId xmlns:a16="http://schemas.microsoft.com/office/drawing/2014/main" id="{AEA54564-7BAC-9E71-A8E6-75283E4B6DDF}"/>
+                <a16:creationId xmlns:a16="http://schemas.microsoft.com/office/drawing/2014/main" id="{1EE95117-2191-150D-CEAB-AD181B5215E5}"/>
               </a:ext>
             </a:extLst>
           </p:cNvPr>
@@ -10048,130 +11489,236 @@
                 </a:solidFill>
                 <a:latin typeface="Segoe UI" panose="020B0502040204020203" pitchFamily="34" charset="0"/>
               </a:rPr>
-              <a:t>No solo es una app: tambien se puede mantener y explicar</a:t>
-            </a:r>
-          </a:p>
-        </p:txBody>
-      </p:sp>
-      <p:pic>
-        <p:nvPicPr>
-          <p:cNvPr id="5" name="Imagen 4">
-            <a:extLst>
-              <a:ext uri="{FF2B5EF4-FFF2-40B4-BE49-F238E27FC236}">
-                <a16:creationId xmlns:a16="http://schemas.microsoft.com/office/drawing/2014/main" id="{1AE85FD6-E094-AD69-5AE3-DF369205340A}"/>
-              </a:ext>
-            </a:extLst>
-          </p:cNvPr>
-          <p:cNvPicPr>
-            <a:picLocks noChangeAspect="1"/>
-          </p:cNvPicPr>
-          <p:nvPr/>
-        </p:nvPicPr>
-        <p:blipFill>
-          <a:blip r:embed="rId2">
-            <a:extLst>
-              <a:ext uri="{28A0092B-C50C-407E-A947-70E740481C1C}">
-                <a14:useLocalDpi xmlns:a14="http://schemas.microsoft.com/office/drawing/2010/main" val="0"/>
-              </a:ext>
-            </a:extLst>
-          </a:blip>
-          <a:stretch>
-            <a:fillRect/>
-          </a:stretch>
-        </p:blipFill>
-        <p:spPr>
-          <a:xfrm>
-            <a:off x="609600" y="2353468"/>
-            <a:ext cx="4953000" cy="2786063"/>
-          </a:xfrm>
-          <a:prstGeom prst="rect">
-            <a:avLst/>
-          </a:prstGeom>
+              <a:t>Como lo he desarrollado y que partes tiene</a:t>
+            </a:r>
+          </a:p>
+        </p:txBody>
+      </p:sp>
+      <p:sp>
+        <p:nvSpPr>
+          <p:cNvPr id="4" name="CuadroTexto 3">
+            <a:extLst>
+              <a:ext uri="{FF2B5EF4-FFF2-40B4-BE49-F238E27FC236}">
+                <a16:creationId xmlns:a16="http://schemas.microsoft.com/office/drawing/2014/main" id="{5C1F3077-79E0-9100-D8E6-B1A7602DE670}"/>
+              </a:ext>
+            </a:extLst>
+          </p:cNvPr>
+          <p:cNvSpPr txBox="1"/>
+          <p:nvPr/>
+        </p:nvSpPr>
+        <p:spPr>
+          <a:xfrm>
+            <a:off x="558800" y="1422400"/>
+            <a:ext cx="9144000" cy="369332"/>
+          </a:xfrm>
+          <a:prstGeom prst="rect">
+            <a:avLst/>
+          </a:prstGeom>
+          <a:noFill/>
+        </p:spPr>
+        <p:txBody>
+          <a:bodyPr vert="horz" wrap="square" lIns="0" tIns="0" rIns="0" bIns="0" rtlCol="0">
+            <a:noAutofit/>
+          </a:bodyPr>
+          <a:lstStyle/>
+          <a:p>
+            <a:r>
+              <a:rPr lang="es-ES" sz="1500">
+                <a:solidFill>
+                  <a:srgbClr val="C2CBD8"/>
+                </a:solidFill>
+                <a:latin typeface="Segoe UI" panose="020B0502040204020203" pitchFamily="34" charset="0"/>
+              </a:rPr>
+              <a:t>La presentacion se apoya en bloques funcionales y decisiones de arquitectura, no en fragmentos de codigo.</a:t>
+            </a:r>
+          </a:p>
+        </p:txBody>
+      </p:sp>
+      <p:sp>
+        <p:nvSpPr>
+          <p:cNvPr id="5" name="Rectángulo: esquinas redondeadas 4">
+            <a:extLst>
+              <a:ext uri="{FF2B5EF4-FFF2-40B4-BE49-F238E27FC236}">
+                <a16:creationId xmlns:a16="http://schemas.microsoft.com/office/drawing/2014/main" id="{A9C28EFF-5544-FF9F-1F73-40ED012101D8}"/>
+              </a:ext>
+            </a:extLst>
+          </p:cNvPr>
+          <p:cNvSpPr/>
+          <p:nvPr/>
+        </p:nvSpPr>
+        <p:spPr>
+          <a:xfrm>
+            <a:off x="762000" y="1955800"/>
+            <a:ext cx="4572000" cy="1041400"/>
+          </a:xfrm>
+          <a:prstGeom prst="roundRect">
+            <a:avLst/>
+          </a:prstGeom>
+          <a:solidFill>
+            <a:srgbClr val="F7FAFC"/>
+          </a:solidFill>
           <a:ln w="12700">
             <a:solidFill>
-              <a:schemeClr val="tx1"/>
+              <a:srgbClr val="DDE5EE"/>
             </a:solidFill>
           </a:ln>
         </p:spPr>
-      </p:pic>
-      <p:pic>
-        <p:nvPicPr>
-          <p:cNvPr id="7" name="Imagen 6">
-            <a:extLst>
-              <a:ext uri="{FF2B5EF4-FFF2-40B4-BE49-F238E27FC236}">
-                <a16:creationId xmlns:a16="http://schemas.microsoft.com/office/drawing/2014/main" id="{8CDA435B-5E63-87ED-264F-D4E406CB827B}"/>
-              </a:ext>
-            </a:extLst>
-          </p:cNvPr>
-          <p:cNvPicPr>
-            <a:picLocks noChangeAspect="1"/>
-          </p:cNvPicPr>
-          <p:nvPr/>
-        </p:nvPicPr>
-        <p:blipFill>
-          <a:blip r:embed="rId3">
-            <a:extLst>
-              <a:ext uri="{28A0092B-C50C-407E-A947-70E740481C1C}">
-                <a14:useLocalDpi xmlns:a14="http://schemas.microsoft.com/office/drawing/2010/main" val="0"/>
-              </a:ext>
-            </a:extLst>
-          </a:blip>
-          <a:stretch>
-            <a:fillRect/>
-          </a:stretch>
-        </p:blipFill>
-        <p:spPr>
-          <a:xfrm>
-            <a:off x="6350000" y="2353468"/>
-            <a:ext cx="4953000" cy="2786063"/>
-          </a:xfrm>
-          <a:prstGeom prst="rect">
-            <a:avLst/>
-          </a:prstGeom>
+        <p:style>
+          <a:lnRef idx="2">
+            <a:schemeClr val="accent1">
+              <a:shade val="15000"/>
+            </a:schemeClr>
+          </a:lnRef>
+          <a:fillRef idx="1">
+            <a:schemeClr val="accent1"/>
+          </a:fillRef>
+          <a:effectRef idx="0">
+            <a:schemeClr val="accent1"/>
+          </a:effectRef>
+          <a:fontRef idx="minor">
+            <a:schemeClr val="lt1"/>
+          </a:fontRef>
+        </p:style>
+        <p:txBody>
+          <a:bodyPr rtlCol="0" anchor="ctr"/>
+          <a:lstStyle/>
+          <a:p>
+            <a:pPr algn="ctr"/>
+            <a:endParaRPr lang="es-ES"/>
+          </a:p>
+        </p:txBody>
+      </p:sp>
+      <p:sp>
+        <p:nvSpPr>
+          <p:cNvPr id="6" name="CuadroTexto 5">
+            <a:extLst>
+              <a:ext uri="{FF2B5EF4-FFF2-40B4-BE49-F238E27FC236}">
+                <a16:creationId xmlns:a16="http://schemas.microsoft.com/office/drawing/2014/main" id="{AE59955A-D259-8761-3DD0-BA61871AA08D}"/>
+              </a:ext>
+            </a:extLst>
+          </p:cNvPr>
+          <p:cNvSpPr txBox="1"/>
+          <p:nvPr/>
+        </p:nvSpPr>
+        <p:spPr>
+          <a:xfrm>
+            <a:off x="990600" y="2133600"/>
+            <a:ext cx="3810000" cy="369332"/>
+          </a:xfrm>
+          <a:prstGeom prst="rect">
+            <a:avLst/>
+          </a:prstGeom>
+          <a:noFill/>
+        </p:spPr>
+        <p:txBody>
+          <a:bodyPr vert="horz" wrap="square" lIns="0" tIns="0" rIns="0" bIns="0" rtlCol="0">
+            <a:noAutofit/>
+          </a:bodyPr>
+          <a:lstStyle/>
+          <a:p>
+            <a:r>
+              <a:rPr lang="es-ES" b="1">
+                <a:solidFill>
+                  <a:srgbClr val="4975B0"/>
+                </a:solidFill>
+                <a:latin typeface="Segoe UI" panose="020B0502040204020203" pitchFamily="34" charset="0"/>
+              </a:rPr>
+              <a:t>Analisis del problema</a:t>
+            </a:r>
+          </a:p>
+        </p:txBody>
+      </p:sp>
+      <p:sp>
+        <p:nvSpPr>
+          <p:cNvPr id="7" name="CuadroTexto 6">
+            <a:extLst>
+              <a:ext uri="{FF2B5EF4-FFF2-40B4-BE49-F238E27FC236}">
+                <a16:creationId xmlns:a16="http://schemas.microsoft.com/office/drawing/2014/main" id="{9C22FA5F-E4D3-5F6D-D8FB-AE53312B5CEE}"/>
+              </a:ext>
+            </a:extLst>
+          </p:cNvPr>
+          <p:cNvSpPr txBox="1"/>
+          <p:nvPr/>
+        </p:nvSpPr>
+        <p:spPr>
+          <a:xfrm>
+            <a:off x="990600" y="2489200"/>
+            <a:ext cx="4064000" cy="369332"/>
+          </a:xfrm>
+          <a:prstGeom prst="rect">
+            <a:avLst/>
+          </a:prstGeom>
+          <a:noFill/>
+        </p:spPr>
+        <p:txBody>
+          <a:bodyPr vert="horz" wrap="square" lIns="0" tIns="0" rIns="0" bIns="0" rtlCol="0">
+            <a:noAutofit/>
+          </a:bodyPr>
+          <a:lstStyle/>
+          <a:p>
+            <a:r>
+              <a:rPr lang="es-ES" sz="1300">
+                <a:solidFill>
+                  <a:srgbClr val="1F2937"/>
+                </a:solidFill>
+                <a:latin typeface="Segoe UI" panose="020B0502040204020203" pitchFamily="34" charset="0"/>
+              </a:rPr>
+              <a:t>Necesidad real del centro y alcance viable para el TFG.</a:t>
+            </a:r>
+          </a:p>
+        </p:txBody>
+      </p:sp>
+      <p:sp>
+        <p:nvSpPr>
+          <p:cNvPr id="8" name="Rectángulo: esquinas redondeadas 7">
+            <a:extLst>
+              <a:ext uri="{FF2B5EF4-FFF2-40B4-BE49-F238E27FC236}">
+                <a16:creationId xmlns:a16="http://schemas.microsoft.com/office/drawing/2014/main" id="{272A3DE5-BCF8-196E-7B96-8600265D8F7C}"/>
+              </a:ext>
+            </a:extLst>
+          </p:cNvPr>
+          <p:cNvSpPr/>
+          <p:nvPr/>
+        </p:nvSpPr>
+        <p:spPr>
+          <a:xfrm>
+            <a:off x="6096000" y="1955800"/>
+            <a:ext cx="4572000" cy="1041400"/>
+          </a:xfrm>
+          <a:prstGeom prst="roundRect">
+            <a:avLst/>
+          </a:prstGeom>
+          <a:solidFill>
+            <a:srgbClr val="F7FAFC"/>
+          </a:solidFill>
           <a:ln w="12700">
             <a:solidFill>
-              <a:schemeClr val="tx1"/>
+              <a:srgbClr val="DDE5EE"/>
             </a:solidFill>
           </a:ln>
         </p:spPr>
-      </p:pic>
-      <p:sp>
-        <p:nvSpPr>
-          <p:cNvPr id="8" name="CuadroTexto 7">
-            <a:extLst>
-              <a:ext uri="{FF2B5EF4-FFF2-40B4-BE49-F238E27FC236}">
-                <a16:creationId xmlns:a16="http://schemas.microsoft.com/office/drawing/2014/main" id="{B9C0675F-533F-3706-087F-011B14C783C6}"/>
-              </a:ext>
-            </a:extLst>
-          </p:cNvPr>
-          <p:cNvSpPr txBox="1"/>
-          <p:nvPr/>
-        </p:nvSpPr>
-        <p:spPr>
-          <a:xfrm>
-            <a:off x="914400" y="5867400"/>
-            <a:ext cx="4318000" cy="369332"/>
-          </a:xfrm>
-          <a:prstGeom prst="rect">
-            <a:avLst/>
-          </a:prstGeom>
-          <a:noFill/>
-        </p:spPr>
-        <p:txBody>
-          <a:bodyPr vert="horz" wrap="square" lIns="0" tIns="0" rIns="0" bIns="0" rtlCol="0">
-            <a:noAutofit/>
-          </a:bodyPr>
-          <a:lstStyle/>
-          <a:p>
-            <a:r>
-              <a:rPr lang="es-ES" sz="1500">
-                <a:solidFill>
-                  <a:srgbClr val="C2CBD8"/>
-                </a:solidFill>
-                <a:latin typeface="Segoe UI" panose="020B0502040204020203" pitchFamily="34" charset="0"/>
-              </a:rPr>
-              <a:t>Guia funcional publica</a:t>
-            </a:r>
+        <p:style>
+          <a:lnRef idx="2">
+            <a:schemeClr val="accent1">
+              <a:shade val="15000"/>
+            </a:schemeClr>
+          </a:lnRef>
+          <a:fillRef idx="1">
+            <a:schemeClr val="accent1"/>
+          </a:fillRef>
+          <a:effectRef idx="0">
+            <a:schemeClr val="accent1"/>
+          </a:effectRef>
+          <a:fontRef idx="minor">
+            <a:schemeClr val="lt1"/>
+          </a:fontRef>
+        </p:style>
+        <p:txBody>
+          <a:bodyPr rtlCol="0" anchor="ctr"/>
+          <a:lstStyle/>
+          <a:p>
+            <a:pPr algn="ctr"/>
+            <a:endParaRPr lang="es-ES"/>
           </a:p>
         </p:txBody>
       </p:sp>
@@ -10180,37 +11727,613 @@
           <p:cNvPr id="9" name="CuadroTexto 8">
             <a:extLst>
               <a:ext uri="{FF2B5EF4-FFF2-40B4-BE49-F238E27FC236}">
-                <a16:creationId xmlns:a16="http://schemas.microsoft.com/office/drawing/2014/main" id="{C37EE253-038B-C62D-1B13-B8E0DE08994E}"/>
-              </a:ext>
-            </a:extLst>
-          </p:cNvPr>
-          <p:cNvSpPr txBox="1"/>
-          <p:nvPr/>
-        </p:nvSpPr>
-        <p:spPr>
-          <a:xfrm>
-            <a:off x="6629400" y="5867400"/>
-            <a:ext cx="4318000" cy="369332"/>
-          </a:xfrm>
-          <a:prstGeom prst="rect">
-            <a:avLst/>
-          </a:prstGeom>
-          <a:noFill/>
-        </p:spPr>
-        <p:txBody>
-          <a:bodyPr vert="horz" wrap="square" lIns="0" tIns="0" rIns="0" bIns="0" rtlCol="0">
-            <a:noAutofit/>
-          </a:bodyPr>
-          <a:lstStyle/>
-          <a:p>
-            <a:r>
-              <a:rPr lang="es-ES" sz="1500">
-                <a:solidFill>
-                  <a:srgbClr val="C2CBD8"/>
-                </a:solidFill>
-                <a:latin typeface="Segoe UI" panose="020B0502040204020203" pitchFamily="34" charset="0"/>
-              </a:rPr>
-              <a:t>Monitor privado con MFA y estado tecnico</a:t>
+                <a16:creationId xmlns:a16="http://schemas.microsoft.com/office/drawing/2014/main" id="{CF66ECF2-AABE-B148-59ED-90F7BB781B9A}"/>
+              </a:ext>
+            </a:extLst>
+          </p:cNvPr>
+          <p:cNvSpPr txBox="1"/>
+          <p:nvPr/>
+        </p:nvSpPr>
+        <p:spPr>
+          <a:xfrm>
+            <a:off x="6324600" y="2133600"/>
+            <a:ext cx="3810000" cy="369332"/>
+          </a:xfrm>
+          <a:prstGeom prst="rect">
+            <a:avLst/>
+          </a:prstGeom>
+          <a:noFill/>
+        </p:spPr>
+        <p:txBody>
+          <a:bodyPr vert="horz" wrap="square" lIns="0" tIns="0" rIns="0" bIns="0" rtlCol="0">
+            <a:noAutofit/>
+          </a:bodyPr>
+          <a:lstStyle/>
+          <a:p>
+            <a:r>
+              <a:rPr lang="es-ES" b="1">
+                <a:solidFill>
+                  <a:srgbClr val="4975B0"/>
+                </a:solidFill>
+                <a:latin typeface="Segoe UI" panose="020B0502040204020203" pitchFamily="34" charset="0"/>
+              </a:rPr>
+              <a:t>Modelo y reglas</a:t>
+            </a:r>
+          </a:p>
+        </p:txBody>
+      </p:sp>
+      <p:sp>
+        <p:nvSpPr>
+          <p:cNvPr id="10" name="CuadroTexto 9">
+            <a:extLst>
+              <a:ext uri="{FF2B5EF4-FFF2-40B4-BE49-F238E27FC236}">
+                <a16:creationId xmlns:a16="http://schemas.microsoft.com/office/drawing/2014/main" id="{161EF2D3-A939-0A2B-2126-EE03D1BB6432}"/>
+              </a:ext>
+            </a:extLst>
+          </p:cNvPr>
+          <p:cNvSpPr txBox="1"/>
+          <p:nvPr/>
+        </p:nvSpPr>
+        <p:spPr>
+          <a:xfrm>
+            <a:off x="6324600" y="2489200"/>
+            <a:ext cx="4064000" cy="369332"/>
+          </a:xfrm>
+          <a:prstGeom prst="rect">
+            <a:avLst/>
+          </a:prstGeom>
+          <a:noFill/>
+        </p:spPr>
+        <p:txBody>
+          <a:bodyPr vert="horz" wrap="square" lIns="0" tIns="0" rIns="0" bIns="0" rtlCol="0">
+            <a:noAutofit/>
+          </a:bodyPr>
+          <a:lstStyle/>
+          <a:p>
+            <a:r>
+              <a:rPr lang="es-ES" sz="1300">
+                <a:solidFill>
+                  <a:srgbClr val="1F2937"/>
+                </a:solidFill>
+                <a:latin typeface="Segoe UI" panose="020B0502040204020203" pitchFamily="34" charset="0"/>
+              </a:rPr>
+              <a:t>Empresa, convenio, asignacion, seguimiento y evaluacion.</a:t>
+            </a:r>
+          </a:p>
+        </p:txBody>
+      </p:sp>
+      <p:sp>
+        <p:nvSpPr>
+          <p:cNvPr id="11" name="Rectángulo: esquinas redondeadas 10">
+            <a:extLst>
+              <a:ext uri="{FF2B5EF4-FFF2-40B4-BE49-F238E27FC236}">
+                <a16:creationId xmlns:a16="http://schemas.microsoft.com/office/drawing/2014/main" id="{D14D23F2-88B8-7160-AB9F-31DC093D925A}"/>
+              </a:ext>
+            </a:extLst>
+          </p:cNvPr>
+          <p:cNvSpPr/>
+          <p:nvPr/>
+        </p:nvSpPr>
+        <p:spPr>
+          <a:xfrm>
+            <a:off x="762000" y="3276600"/>
+            <a:ext cx="4572000" cy="1041400"/>
+          </a:xfrm>
+          <a:prstGeom prst="roundRect">
+            <a:avLst/>
+          </a:prstGeom>
+          <a:solidFill>
+            <a:srgbClr val="F7FAFC"/>
+          </a:solidFill>
+          <a:ln w="12700">
+            <a:solidFill>
+              <a:srgbClr val="DDE5EE"/>
+            </a:solidFill>
+          </a:ln>
+        </p:spPr>
+        <p:style>
+          <a:lnRef idx="2">
+            <a:schemeClr val="accent1">
+              <a:shade val="15000"/>
+            </a:schemeClr>
+          </a:lnRef>
+          <a:fillRef idx="1">
+            <a:schemeClr val="accent1"/>
+          </a:fillRef>
+          <a:effectRef idx="0">
+            <a:schemeClr val="accent1"/>
+          </a:effectRef>
+          <a:fontRef idx="minor">
+            <a:schemeClr val="lt1"/>
+          </a:fontRef>
+        </p:style>
+        <p:txBody>
+          <a:bodyPr rtlCol="0" anchor="ctr"/>
+          <a:lstStyle/>
+          <a:p>
+            <a:pPr algn="ctr"/>
+            <a:endParaRPr lang="es-ES"/>
+          </a:p>
+        </p:txBody>
+      </p:sp>
+      <p:sp>
+        <p:nvSpPr>
+          <p:cNvPr id="12" name="CuadroTexto 11">
+            <a:extLst>
+              <a:ext uri="{FF2B5EF4-FFF2-40B4-BE49-F238E27FC236}">
+                <a16:creationId xmlns:a16="http://schemas.microsoft.com/office/drawing/2014/main" id="{82D69466-A8D3-7070-D0EA-4F23BE7919F8}"/>
+              </a:ext>
+            </a:extLst>
+          </p:cNvPr>
+          <p:cNvSpPr txBox="1"/>
+          <p:nvPr/>
+        </p:nvSpPr>
+        <p:spPr>
+          <a:xfrm>
+            <a:off x="990600" y="3454400"/>
+            <a:ext cx="3810000" cy="369332"/>
+          </a:xfrm>
+          <a:prstGeom prst="rect">
+            <a:avLst/>
+          </a:prstGeom>
+          <a:noFill/>
+        </p:spPr>
+        <p:txBody>
+          <a:bodyPr vert="horz" wrap="square" lIns="0" tIns="0" rIns="0" bIns="0" rtlCol="0">
+            <a:noAutofit/>
+          </a:bodyPr>
+          <a:lstStyle/>
+          <a:p>
+            <a:r>
+              <a:rPr lang="es-ES" b="1">
+                <a:solidFill>
+                  <a:srgbClr val="4975B0"/>
+                </a:solidFill>
+                <a:latin typeface="Segoe UI" panose="020B0502040204020203" pitchFamily="34" charset="0"/>
+              </a:rPr>
+              <a:t>Backend Symfony</a:t>
+            </a:r>
+          </a:p>
+        </p:txBody>
+      </p:sp>
+      <p:sp>
+        <p:nvSpPr>
+          <p:cNvPr id="13" name="CuadroTexto 12">
+            <a:extLst>
+              <a:ext uri="{FF2B5EF4-FFF2-40B4-BE49-F238E27FC236}">
+                <a16:creationId xmlns:a16="http://schemas.microsoft.com/office/drawing/2014/main" id="{49F2ECC3-24B4-3134-3946-D3E3424D7892}"/>
+              </a:ext>
+            </a:extLst>
+          </p:cNvPr>
+          <p:cNvSpPr txBox="1"/>
+          <p:nvPr/>
+        </p:nvSpPr>
+        <p:spPr>
+          <a:xfrm>
+            <a:off x="990600" y="3810000"/>
+            <a:ext cx="4064000" cy="369332"/>
+          </a:xfrm>
+          <a:prstGeom prst="rect">
+            <a:avLst/>
+          </a:prstGeom>
+          <a:noFill/>
+        </p:spPr>
+        <p:txBody>
+          <a:bodyPr vert="horz" wrap="square" lIns="0" tIns="0" rIns="0" bIns="0" rtlCol="0">
+            <a:noAutofit/>
+          </a:bodyPr>
+          <a:lstStyle/>
+          <a:p>
+            <a:r>
+              <a:rPr lang="es-ES" sz="1300">
+                <a:solidFill>
+                  <a:srgbClr val="1F2937"/>
+                </a:solidFill>
+                <a:latin typeface="Segoe UI" panose="020B0502040204020203" pitchFamily="34" charset="0"/>
+              </a:rPr>
+              <a:t>API, seguridad, correo, tokens, auditoria y persistencia.</a:t>
+            </a:r>
+          </a:p>
+        </p:txBody>
+      </p:sp>
+      <p:sp>
+        <p:nvSpPr>
+          <p:cNvPr id="14" name="Rectángulo: esquinas redondeadas 13">
+            <a:extLst>
+              <a:ext uri="{FF2B5EF4-FFF2-40B4-BE49-F238E27FC236}">
+                <a16:creationId xmlns:a16="http://schemas.microsoft.com/office/drawing/2014/main" id="{860C01C8-C1AD-5CCE-801A-743786CC699D}"/>
+              </a:ext>
+            </a:extLst>
+          </p:cNvPr>
+          <p:cNvSpPr/>
+          <p:nvPr/>
+        </p:nvSpPr>
+        <p:spPr>
+          <a:xfrm>
+            <a:off x="6096000" y="3276600"/>
+            <a:ext cx="4572000" cy="1041400"/>
+          </a:xfrm>
+          <a:prstGeom prst="roundRect">
+            <a:avLst/>
+          </a:prstGeom>
+          <a:solidFill>
+            <a:srgbClr val="F7FAFC"/>
+          </a:solidFill>
+          <a:ln w="12700">
+            <a:solidFill>
+              <a:srgbClr val="DDE5EE"/>
+            </a:solidFill>
+          </a:ln>
+        </p:spPr>
+        <p:style>
+          <a:lnRef idx="2">
+            <a:schemeClr val="accent1">
+              <a:shade val="15000"/>
+            </a:schemeClr>
+          </a:lnRef>
+          <a:fillRef idx="1">
+            <a:schemeClr val="accent1"/>
+          </a:fillRef>
+          <a:effectRef idx="0">
+            <a:schemeClr val="accent1"/>
+          </a:effectRef>
+          <a:fontRef idx="minor">
+            <a:schemeClr val="lt1"/>
+          </a:fontRef>
+        </p:style>
+        <p:txBody>
+          <a:bodyPr rtlCol="0" anchor="ctr"/>
+          <a:lstStyle/>
+          <a:p>
+            <a:pPr algn="ctr"/>
+            <a:endParaRPr lang="es-ES"/>
+          </a:p>
+        </p:txBody>
+      </p:sp>
+      <p:sp>
+        <p:nvSpPr>
+          <p:cNvPr id="15" name="CuadroTexto 14">
+            <a:extLst>
+              <a:ext uri="{FF2B5EF4-FFF2-40B4-BE49-F238E27FC236}">
+                <a16:creationId xmlns:a16="http://schemas.microsoft.com/office/drawing/2014/main" id="{2533663A-B044-598C-EBB1-1BA5E26D4737}"/>
+              </a:ext>
+            </a:extLst>
+          </p:cNvPr>
+          <p:cNvSpPr txBox="1"/>
+          <p:nvPr/>
+        </p:nvSpPr>
+        <p:spPr>
+          <a:xfrm>
+            <a:off x="6324600" y="3454400"/>
+            <a:ext cx="3810000" cy="369332"/>
+          </a:xfrm>
+          <a:prstGeom prst="rect">
+            <a:avLst/>
+          </a:prstGeom>
+          <a:noFill/>
+        </p:spPr>
+        <p:txBody>
+          <a:bodyPr vert="horz" wrap="square" lIns="0" tIns="0" rIns="0" bIns="0" rtlCol="0">
+            <a:noAutofit/>
+          </a:bodyPr>
+          <a:lstStyle/>
+          <a:p>
+            <a:r>
+              <a:rPr lang="es-ES" b="1">
+                <a:solidFill>
+                  <a:srgbClr val="4975B0"/>
+                </a:solidFill>
+                <a:latin typeface="Segoe UI" panose="020B0502040204020203" pitchFamily="34" charset="0"/>
+              </a:rPr>
+              <a:t>Portal interno</a:t>
+            </a:r>
+          </a:p>
+        </p:txBody>
+      </p:sp>
+      <p:sp>
+        <p:nvSpPr>
+          <p:cNvPr id="16" name="CuadroTexto 15">
+            <a:extLst>
+              <a:ext uri="{FF2B5EF4-FFF2-40B4-BE49-F238E27FC236}">
+                <a16:creationId xmlns:a16="http://schemas.microsoft.com/office/drawing/2014/main" id="{D5978AA5-938B-6A0D-B27B-170DF9BDE389}"/>
+              </a:ext>
+            </a:extLst>
+          </p:cNvPr>
+          <p:cNvSpPr txBox="1"/>
+          <p:nvPr/>
+        </p:nvSpPr>
+        <p:spPr>
+          <a:xfrm>
+            <a:off x="6324600" y="3810000"/>
+            <a:ext cx="4064000" cy="369332"/>
+          </a:xfrm>
+          <a:prstGeom prst="rect">
+            <a:avLst/>
+          </a:prstGeom>
+          <a:noFill/>
+        </p:spPr>
+        <p:txBody>
+          <a:bodyPr vert="horz" wrap="square" lIns="0" tIns="0" rIns="0" bIns="0" rtlCol="0">
+            <a:noAutofit/>
+          </a:bodyPr>
+          <a:lstStyle/>
+          <a:p>
+            <a:r>
+              <a:rPr lang="es-ES" sz="1300">
+                <a:solidFill>
+                  <a:srgbClr val="1F2937"/>
+                </a:solidFill>
+                <a:latin typeface="Segoe UI" panose="020B0502040204020203" pitchFamily="34" charset="0"/>
+              </a:rPr>
+              <a:t>Gestion academica, bandeja, documentos y exportacion CSV.</a:t>
+            </a:r>
+          </a:p>
+        </p:txBody>
+      </p:sp>
+      <p:sp>
+        <p:nvSpPr>
+          <p:cNvPr id="17" name="Rectángulo: esquinas redondeadas 16">
+            <a:extLst>
+              <a:ext uri="{FF2B5EF4-FFF2-40B4-BE49-F238E27FC236}">
+                <a16:creationId xmlns:a16="http://schemas.microsoft.com/office/drawing/2014/main" id="{A18D4FCF-962D-604B-58E3-5E8BD78D3EE6}"/>
+              </a:ext>
+            </a:extLst>
+          </p:cNvPr>
+          <p:cNvSpPr/>
+          <p:nvPr/>
+        </p:nvSpPr>
+        <p:spPr>
+          <a:xfrm>
+            <a:off x="762000" y="4597400"/>
+            <a:ext cx="4572000" cy="1041400"/>
+          </a:xfrm>
+          <a:prstGeom prst="roundRect">
+            <a:avLst/>
+          </a:prstGeom>
+          <a:solidFill>
+            <a:srgbClr val="F7FAFC"/>
+          </a:solidFill>
+          <a:ln w="12700">
+            <a:solidFill>
+              <a:srgbClr val="DDE5EE"/>
+            </a:solidFill>
+          </a:ln>
+        </p:spPr>
+        <p:style>
+          <a:lnRef idx="2">
+            <a:schemeClr val="accent1">
+              <a:shade val="15000"/>
+            </a:schemeClr>
+          </a:lnRef>
+          <a:fillRef idx="1">
+            <a:schemeClr val="accent1"/>
+          </a:fillRef>
+          <a:effectRef idx="0">
+            <a:schemeClr val="accent1"/>
+          </a:effectRef>
+          <a:fontRef idx="minor">
+            <a:schemeClr val="lt1"/>
+          </a:fontRef>
+        </p:style>
+        <p:txBody>
+          <a:bodyPr rtlCol="0" anchor="ctr"/>
+          <a:lstStyle/>
+          <a:p>
+            <a:pPr algn="ctr"/>
+            <a:endParaRPr lang="es-ES"/>
+          </a:p>
+        </p:txBody>
+      </p:sp>
+      <p:sp>
+        <p:nvSpPr>
+          <p:cNvPr id="18" name="CuadroTexto 17">
+            <a:extLst>
+              <a:ext uri="{FF2B5EF4-FFF2-40B4-BE49-F238E27FC236}">
+                <a16:creationId xmlns:a16="http://schemas.microsoft.com/office/drawing/2014/main" id="{B422D8D1-1F94-B9D7-2452-5A8F751785C2}"/>
+              </a:ext>
+            </a:extLst>
+          </p:cNvPr>
+          <p:cNvSpPr txBox="1"/>
+          <p:nvPr/>
+        </p:nvSpPr>
+        <p:spPr>
+          <a:xfrm>
+            <a:off x="990600" y="4775200"/>
+            <a:ext cx="3810000" cy="369332"/>
+          </a:xfrm>
+          <a:prstGeom prst="rect">
+            <a:avLst/>
+          </a:prstGeom>
+          <a:noFill/>
+        </p:spPr>
+        <p:txBody>
+          <a:bodyPr vert="horz" wrap="square" lIns="0" tIns="0" rIns="0" bIns="0" rtlCol="0">
+            <a:noAutofit/>
+          </a:bodyPr>
+          <a:lstStyle/>
+          <a:p>
+            <a:r>
+              <a:rPr lang="es-ES" b="1">
+                <a:solidFill>
+                  <a:srgbClr val="4975B0"/>
+                </a:solidFill>
+                <a:latin typeface="Segoe UI" panose="020B0502040204020203" pitchFamily="34" charset="0"/>
+              </a:rPr>
+              <a:t>Portal externo</a:t>
+            </a:r>
+          </a:p>
+        </p:txBody>
+      </p:sp>
+      <p:sp>
+        <p:nvSpPr>
+          <p:cNvPr id="19" name="CuadroTexto 18">
+            <a:extLst>
+              <a:ext uri="{FF2B5EF4-FFF2-40B4-BE49-F238E27FC236}">
+                <a16:creationId xmlns:a16="http://schemas.microsoft.com/office/drawing/2014/main" id="{B42A556D-F0D2-84CA-9CC4-11D4CBD4F6DE}"/>
+              </a:ext>
+            </a:extLst>
+          </p:cNvPr>
+          <p:cNvSpPr txBox="1"/>
+          <p:nvPr/>
+        </p:nvSpPr>
+        <p:spPr>
+          <a:xfrm>
+            <a:off x="990600" y="5130800"/>
+            <a:ext cx="4064000" cy="369332"/>
+          </a:xfrm>
+          <a:prstGeom prst="rect">
+            <a:avLst/>
+          </a:prstGeom>
+          <a:noFill/>
+        </p:spPr>
+        <p:txBody>
+          <a:bodyPr vert="horz" wrap="square" lIns="0" tIns="0" rIns="0" bIns="0" rtlCol="0">
+            <a:noAutofit/>
+          </a:bodyPr>
+          <a:lstStyle/>
+          <a:p>
+            <a:r>
+              <a:rPr lang="es-ES" sz="1300">
+                <a:solidFill>
+                  <a:srgbClr val="1F2937"/>
+                </a:solidFill>
+                <a:latin typeface="Segoe UI" panose="020B0502040204020203" pitchFamily="34" charset="0"/>
+              </a:rPr>
+              <a:t>Registro, verificacion, estado, acceso empresa y chat.</a:t>
+            </a:r>
+          </a:p>
+        </p:txBody>
+      </p:sp>
+      <p:sp>
+        <p:nvSpPr>
+          <p:cNvPr id="20" name="Rectángulo: esquinas redondeadas 19">
+            <a:extLst>
+              <a:ext uri="{FF2B5EF4-FFF2-40B4-BE49-F238E27FC236}">
+                <a16:creationId xmlns:a16="http://schemas.microsoft.com/office/drawing/2014/main" id="{D398D3A8-CBC7-258D-3BF8-AA6D1DB0B1CA}"/>
+              </a:ext>
+            </a:extLst>
+          </p:cNvPr>
+          <p:cNvSpPr/>
+          <p:nvPr/>
+        </p:nvSpPr>
+        <p:spPr>
+          <a:xfrm>
+            <a:off x="6096000" y="4597400"/>
+            <a:ext cx="4572000" cy="1041400"/>
+          </a:xfrm>
+          <a:prstGeom prst="roundRect">
+            <a:avLst/>
+          </a:prstGeom>
+          <a:solidFill>
+            <a:srgbClr val="F7FAFC"/>
+          </a:solidFill>
+          <a:ln w="12700">
+            <a:solidFill>
+              <a:srgbClr val="DDE5EE"/>
+            </a:solidFill>
+          </a:ln>
+        </p:spPr>
+        <p:style>
+          <a:lnRef idx="2">
+            <a:schemeClr val="accent1">
+              <a:shade val="15000"/>
+            </a:schemeClr>
+          </a:lnRef>
+          <a:fillRef idx="1">
+            <a:schemeClr val="accent1"/>
+          </a:fillRef>
+          <a:effectRef idx="0">
+            <a:schemeClr val="accent1"/>
+          </a:effectRef>
+          <a:fontRef idx="minor">
+            <a:schemeClr val="lt1"/>
+          </a:fontRef>
+        </p:style>
+        <p:txBody>
+          <a:bodyPr rtlCol="0" anchor="ctr"/>
+          <a:lstStyle/>
+          <a:p>
+            <a:pPr algn="ctr"/>
+            <a:endParaRPr lang="es-ES"/>
+          </a:p>
+        </p:txBody>
+      </p:sp>
+      <p:sp>
+        <p:nvSpPr>
+          <p:cNvPr id="21" name="CuadroTexto 20">
+            <a:extLst>
+              <a:ext uri="{FF2B5EF4-FFF2-40B4-BE49-F238E27FC236}">
+                <a16:creationId xmlns:a16="http://schemas.microsoft.com/office/drawing/2014/main" id="{6C7F5FD2-A784-AD4C-F9B7-C056966DA94B}"/>
+              </a:ext>
+            </a:extLst>
+          </p:cNvPr>
+          <p:cNvSpPr txBox="1"/>
+          <p:nvPr/>
+        </p:nvSpPr>
+        <p:spPr>
+          <a:xfrm>
+            <a:off x="6324600" y="4775200"/>
+            <a:ext cx="3810000" cy="369332"/>
+          </a:xfrm>
+          <a:prstGeom prst="rect">
+            <a:avLst/>
+          </a:prstGeom>
+          <a:noFill/>
+        </p:spPr>
+        <p:txBody>
+          <a:bodyPr vert="horz" wrap="square" lIns="0" tIns="0" rIns="0" bIns="0" rtlCol="0">
+            <a:noAutofit/>
+          </a:bodyPr>
+          <a:lstStyle/>
+          <a:p>
+            <a:r>
+              <a:rPr lang="es-ES" b="1">
+                <a:solidFill>
+                  <a:srgbClr val="4975B0"/>
+                </a:solidFill>
+                <a:latin typeface="Segoe UI" panose="020B0502040204020203" pitchFamily="34" charset="0"/>
+              </a:rPr>
+              <a:t>Operacion final</a:t>
+            </a:r>
+          </a:p>
+        </p:txBody>
+      </p:sp>
+      <p:sp>
+        <p:nvSpPr>
+          <p:cNvPr id="22" name="CuadroTexto 21">
+            <a:extLst>
+              <a:ext uri="{FF2B5EF4-FFF2-40B4-BE49-F238E27FC236}">
+                <a16:creationId xmlns:a16="http://schemas.microsoft.com/office/drawing/2014/main" id="{35D94D5F-0FFF-3914-5A04-39DCD1679264}"/>
+              </a:ext>
+            </a:extLst>
+          </p:cNvPr>
+          <p:cNvSpPr txBox="1"/>
+          <p:nvPr/>
+        </p:nvSpPr>
+        <p:spPr>
+          <a:xfrm>
+            <a:off x="6324600" y="5130800"/>
+            <a:ext cx="4064000" cy="369332"/>
+          </a:xfrm>
+          <a:prstGeom prst="rect">
+            <a:avLst/>
+          </a:prstGeom>
+          <a:noFill/>
+        </p:spPr>
+        <p:txBody>
+          <a:bodyPr vert="horz" wrap="square" lIns="0" tIns="0" rIns="0" bIns="0" rtlCol="0">
+            <a:noAutofit/>
+          </a:bodyPr>
+          <a:lstStyle/>
+          <a:p>
+            <a:r>
+              <a:rPr lang="es-ES" sz="1300">
+                <a:solidFill>
+                  <a:srgbClr val="1F2937"/>
+                </a:solidFill>
+                <a:latin typeface="Segoe UI" panose="020B0502040204020203" pitchFamily="34" charset="0"/>
+              </a:rPr>
+              <a:t>App de escritorio, pruebas, logs, backups y empaquetado.</a:t>
             </a:r>
           </a:p>
         </p:txBody>
@@ -10218,7 +12341,7 @@
     </p:spTree>
     <p:extLst>
       <p:ext uri="{BB962C8B-B14F-4D97-AF65-F5344CB8AC3E}">
-        <p14:creationId xmlns:p14="http://schemas.microsoft.com/office/powerpoint/2010/main" val="456950129"/>
+        <p14:creationId xmlns:p14="http://schemas.microsoft.com/office/powerpoint/2010/main" val="2432627001"/>
       </p:ext>
     </p:extLst>
   </p:cSld>

--- a/docs/presentacion-defensa-final.pptx
+++ b/docs/presentacion-defensa-final.pptx
@@ -146,7 +146,7 @@
           <p:cNvPr id="2" name="Título 1">
             <a:extLst>
               <a:ext uri="{FF2B5EF4-FFF2-40B4-BE49-F238E27FC236}">
-                <a16:creationId xmlns:a16="http://schemas.microsoft.com/office/drawing/2014/main" id="{A8E5A7B3-DB98-1D89-F899-AEC08AFD8477}"/>
+                <a16:creationId xmlns:a16="http://schemas.microsoft.com/office/drawing/2014/main" id="{DEC54974-BA2D-DEDD-C4EA-D896F5C0B032}"/>
               </a:ext>
             </a:extLst>
           </p:cNvPr>
@@ -183,7 +183,7 @@
           <p:cNvPr id="3" name="Subtítulo 2">
             <a:extLst>
               <a:ext uri="{FF2B5EF4-FFF2-40B4-BE49-F238E27FC236}">
-                <a16:creationId xmlns:a16="http://schemas.microsoft.com/office/drawing/2014/main" id="{A3B5CC5E-E153-4CC1-0813-8C99F904C13C}"/>
+                <a16:creationId xmlns:a16="http://schemas.microsoft.com/office/drawing/2014/main" id="{8A47899D-3FD5-4A89-FA44-5DBCD877ADF0}"/>
               </a:ext>
             </a:extLst>
           </p:cNvPr>
@@ -253,7 +253,7 @@
           <p:cNvPr id="4" name="Marcador de fecha 3">
             <a:extLst>
               <a:ext uri="{FF2B5EF4-FFF2-40B4-BE49-F238E27FC236}">
-                <a16:creationId xmlns:a16="http://schemas.microsoft.com/office/drawing/2014/main" id="{008A4332-47F2-93D2-AB2C-A89BCEA66F02}"/>
+                <a16:creationId xmlns:a16="http://schemas.microsoft.com/office/drawing/2014/main" id="{7A60B31B-B9C0-C336-2A57-A6E6BBB4C264}"/>
               </a:ext>
             </a:extLst>
           </p:cNvPr>
@@ -269,9 +269,9 @@
           <a:bodyPr/>
           <a:lstStyle/>
           <a:p>
-            <a:fld id="{1DDB0E9B-2144-47A1-BEC6-FBFA1BF47B9A}" type="datetimeFigureOut">
+            <a:fld id="{AB9C1A0A-BF9E-48A0-991D-0EB02B84C89C}" type="datetimeFigureOut">
               <a:rPr lang="es-ES" smtClean="0"/>
-              <a:t>18/05/2026</a:t>
+              <a:t>19/05/2026</a:t>
             </a:fld>
             <a:endParaRPr lang="es-ES"/>
           </a:p>
@@ -282,7 +282,7 @@
           <p:cNvPr id="5" name="Marcador de pie de página 4">
             <a:extLst>
               <a:ext uri="{FF2B5EF4-FFF2-40B4-BE49-F238E27FC236}">
-                <a16:creationId xmlns:a16="http://schemas.microsoft.com/office/drawing/2014/main" id="{12D96030-1D67-E65E-DB5F-CBD17F2EC1A2}"/>
+                <a16:creationId xmlns:a16="http://schemas.microsoft.com/office/drawing/2014/main" id="{C9CF83EF-85BC-63EA-D2FA-C6A3E8F94D70}"/>
               </a:ext>
             </a:extLst>
           </p:cNvPr>
@@ -307,7 +307,7 @@
           <p:cNvPr id="6" name="Marcador de número de diapositiva 5">
             <a:extLst>
               <a:ext uri="{FF2B5EF4-FFF2-40B4-BE49-F238E27FC236}">
-                <a16:creationId xmlns:a16="http://schemas.microsoft.com/office/drawing/2014/main" id="{30DA5BFA-B198-26BC-2677-BF1D00FE1712}"/>
+                <a16:creationId xmlns:a16="http://schemas.microsoft.com/office/drawing/2014/main" id="{D7DCD0F0-F06F-9ADD-8E63-6562F65952C3}"/>
               </a:ext>
             </a:extLst>
           </p:cNvPr>
@@ -323,7 +323,7 @@
           <a:bodyPr/>
           <a:lstStyle/>
           <a:p>
-            <a:fld id="{C3804229-7FF9-4687-89EB-F65AD4937D3E}" type="slidenum">
+            <a:fld id="{B3465923-C01A-429D-BF48-FE1C1E8CA486}" type="slidenum">
               <a:rPr lang="es-ES" smtClean="0"/>
               <a:t>‹Nº›</a:t>
             </a:fld>
@@ -334,7 +334,7 @@
     </p:spTree>
     <p:extLst>
       <p:ext uri="{BB962C8B-B14F-4D97-AF65-F5344CB8AC3E}">
-        <p14:creationId xmlns:p14="http://schemas.microsoft.com/office/powerpoint/2010/main" val="1083882594"/>
+        <p14:creationId xmlns:p14="http://schemas.microsoft.com/office/powerpoint/2010/main" val="962639868"/>
       </p:ext>
     </p:extLst>
   </p:cSld>
@@ -366,7 +366,7 @@
           <p:cNvPr id="2" name="Título 1">
             <a:extLst>
               <a:ext uri="{FF2B5EF4-FFF2-40B4-BE49-F238E27FC236}">
-                <a16:creationId xmlns:a16="http://schemas.microsoft.com/office/drawing/2014/main" id="{82E8C88B-F2F7-DCC3-43AD-182093FB763F}"/>
+                <a16:creationId xmlns:a16="http://schemas.microsoft.com/office/drawing/2014/main" id="{AFE84534-547B-71A0-B679-9C0F624EB5AA}"/>
               </a:ext>
             </a:extLst>
           </p:cNvPr>
@@ -394,7 +394,7 @@
           <p:cNvPr id="3" name="Marcador de texto vertical 2">
             <a:extLst>
               <a:ext uri="{FF2B5EF4-FFF2-40B4-BE49-F238E27FC236}">
-                <a16:creationId xmlns:a16="http://schemas.microsoft.com/office/drawing/2014/main" id="{F6A99770-1608-2015-FCD2-10F0095BA86E}"/>
+                <a16:creationId xmlns:a16="http://schemas.microsoft.com/office/drawing/2014/main" id="{43EAF322-BC57-4BEE-65E7-C16B7C6AC12A}"/>
               </a:ext>
             </a:extLst>
           </p:cNvPr>
@@ -451,7 +451,7 @@
           <p:cNvPr id="4" name="Marcador de fecha 3">
             <a:extLst>
               <a:ext uri="{FF2B5EF4-FFF2-40B4-BE49-F238E27FC236}">
-                <a16:creationId xmlns:a16="http://schemas.microsoft.com/office/drawing/2014/main" id="{9FEBF4A6-FF26-2B06-F6DF-EC0ECEF6A622}"/>
+                <a16:creationId xmlns:a16="http://schemas.microsoft.com/office/drawing/2014/main" id="{66F5F553-D299-15A6-CA75-45D65513160F}"/>
               </a:ext>
             </a:extLst>
           </p:cNvPr>
@@ -467,9 +467,9 @@
           <a:bodyPr/>
           <a:lstStyle/>
           <a:p>
-            <a:fld id="{1DDB0E9B-2144-47A1-BEC6-FBFA1BF47B9A}" type="datetimeFigureOut">
+            <a:fld id="{AB9C1A0A-BF9E-48A0-991D-0EB02B84C89C}" type="datetimeFigureOut">
               <a:rPr lang="es-ES" smtClean="0"/>
-              <a:t>18/05/2026</a:t>
+              <a:t>19/05/2026</a:t>
             </a:fld>
             <a:endParaRPr lang="es-ES"/>
           </a:p>
@@ -480,7 +480,7 @@
           <p:cNvPr id="5" name="Marcador de pie de página 4">
             <a:extLst>
               <a:ext uri="{FF2B5EF4-FFF2-40B4-BE49-F238E27FC236}">
-                <a16:creationId xmlns:a16="http://schemas.microsoft.com/office/drawing/2014/main" id="{496AC5AF-FE7B-7662-BB85-20692911A91F}"/>
+                <a16:creationId xmlns:a16="http://schemas.microsoft.com/office/drawing/2014/main" id="{B75CDBA8-0711-42FF-A9DE-0C266E33842F}"/>
               </a:ext>
             </a:extLst>
           </p:cNvPr>
@@ -505,7 +505,7 @@
           <p:cNvPr id="6" name="Marcador de número de diapositiva 5">
             <a:extLst>
               <a:ext uri="{FF2B5EF4-FFF2-40B4-BE49-F238E27FC236}">
-                <a16:creationId xmlns:a16="http://schemas.microsoft.com/office/drawing/2014/main" id="{3E231EBB-0FBA-13B3-A8AE-F84AC191D54D}"/>
+                <a16:creationId xmlns:a16="http://schemas.microsoft.com/office/drawing/2014/main" id="{790520F7-6A37-AAFB-22CF-3F8D5458DFC6}"/>
               </a:ext>
             </a:extLst>
           </p:cNvPr>
@@ -521,7 +521,7 @@
           <a:bodyPr/>
           <a:lstStyle/>
           <a:p>
-            <a:fld id="{C3804229-7FF9-4687-89EB-F65AD4937D3E}" type="slidenum">
+            <a:fld id="{B3465923-C01A-429D-BF48-FE1C1E8CA486}" type="slidenum">
               <a:rPr lang="es-ES" smtClean="0"/>
               <a:t>‹Nº›</a:t>
             </a:fld>
@@ -532,7 +532,7 @@
     </p:spTree>
     <p:extLst>
       <p:ext uri="{BB962C8B-B14F-4D97-AF65-F5344CB8AC3E}">
-        <p14:creationId xmlns:p14="http://schemas.microsoft.com/office/powerpoint/2010/main" val="1963189776"/>
+        <p14:creationId xmlns:p14="http://schemas.microsoft.com/office/powerpoint/2010/main" val="4038845907"/>
       </p:ext>
     </p:extLst>
   </p:cSld>
@@ -564,7 +564,7 @@
           <p:cNvPr id="2" name="Título vertical 1">
             <a:extLst>
               <a:ext uri="{FF2B5EF4-FFF2-40B4-BE49-F238E27FC236}">
-                <a16:creationId xmlns:a16="http://schemas.microsoft.com/office/drawing/2014/main" id="{D6CCA69A-2F73-48F2-359C-114F96970F53}"/>
+                <a16:creationId xmlns:a16="http://schemas.microsoft.com/office/drawing/2014/main" id="{DE4D055C-5670-F16A-6CC3-B33FD87A646E}"/>
               </a:ext>
             </a:extLst>
           </p:cNvPr>
@@ -597,7 +597,7 @@
           <p:cNvPr id="3" name="Marcador de texto vertical 2">
             <a:extLst>
               <a:ext uri="{FF2B5EF4-FFF2-40B4-BE49-F238E27FC236}">
-                <a16:creationId xmlns:a16="http://schemas.microsoft.com/office/drawing/2014/main" id="{B8C87A4B-0718-0903-3B9D-D76B968B51EA}"/>
+                <a16:creationId xmlns:a16="http://schemas.microsoft.com/office/drawing/2014/main" id="{370278FE-F21E-EF15-4C2C-1A5678C55A93}"/>
               </a:ext>
             </a:extLst>
           </p:cNvPr>
@@ -659,7 +659,7 @@
           <p:cNvPr id="4" name="Marcador de fecha 3">
             <a:extLst>
               <a:ext uri="{FF2B5EF4-FFF2-40B4-BE49-F238E27FC236}">
-                <a16:creationId xmlns:a16="http://schemas.microsoft.com/office/drawing/2014/main" id="{FBD75856-D348-4226-A7DA-F4133464896F}"/>
+                <a16:creationId xmlns:a16="http://schemas.microsoft.com/office/drawing/2014/main" id="{1CAC1D2A-64B6-78B0-815C-FE8E11F2E04D}"/>
               </a:ext>
             </a:extLst>
           </p:cNvPr>
@@ -675,9 +675,9 @@
           <a:bodyPr/>
           <a:lstStyle/>
           <a:p>
-            <a:fld id="{1DDB0E9B-2144-47A1-BEC6-FBFA1BF47B9A}" type="datetimeFigureOut">
+            <a:fld id="{AB9C1A0A-BF9E-48A0-991D-0EB02B84C89C}" type="datetimeFigureOut">
               <a:rPr lang="es-ES" smtClean="0"/>
-              <a:t>18/05/2026</a:t>
+              <a:t>19/05/2026</a:t>
             </a:fld>
             <a:endParaRPr lang="es-ES"/>
           </a:p>
@@ -688,7 +688,7 @@
           <p:cNvPr id="5" name="Marcador de pie de página 4">
             <a:extLst>
               <a:ext uri="{FF2B5EF4-FFF2-40B4-BE49-F238E27FC236}">
-                <a16:creationId xmlns:a16="http://schemas.microsoft.com/office/drawing/2014/main" id="{0412906B-0B33-CB15-7EB5-7D302BC4864C}"/>
+                <a16:creationId xmlns:a16="http://schemas.microsoft.com/office/drawing/2014/main" id="{8D64ABB7-CEE7-B824-3FC7-57ACF3EDBEF1}"/>
               </a:ext>
             </a:extLst>
           </p:cNvPr>
@@ -713,7 +713,7 @@
           <p:cNvPr id="6" name="Marcador de número de diapositiva 5">
             <a:extLst>
               <a:ext uri="{FF2B5EF4-FFF2-40B4-BE49-F238E27FC236}">
-                <a16:creationId xmlns:a16="http://schemas.microsoft.com/office/drawing/2014/main" id="{9F564A54-F270-B7FE-A36E-ABC6E2628DFC}"/>
+                <a16:creationId xmlns:a16="http://schemas.microsoft.com/office/drawing/2014/main" id="{89A95BCA-06D3-E659-4D09-2D2373482A8E}"/>
               </a:ext>
             </a:extLst>
           </p:cNvPr>
@@ -729,7 +729,7 @@
           <a:bodyPr/>
           <a:lstStyle/>
           <a:p>
-            <a:fld id="{C3804229-7FF9-4687-89EB-F65AD4937D3E}" type="slidenum">
+            <a:fld id="{B3465923-C01A-429D-BF48-FE1C1E8CA486}" type="slidenum">
               <a:rPr lang="es-ES" smtClean="0"/>
               <a:t>‹Nº›</a:t>
             </a:fld>
@@ -740,7 +740,7 @@
     </p:spTree>
     <p:extLst>
       <p:ext uri="{BB962C8B-B14F-4D97-AF65-F5344CB8AC3E}">
-        <p14:creationId xmlns:p14="http://schemas.microsoft.com/office/powerpoint/2010/main" val="308810823"/>
+        <p14:creationId xmlns:p14="http://schemas.microsoft.com/office/powerpoint/2010/main" val="1352709287"/>
       </p:ext>
     </p:extLst>
   </p:cSld>
@@ -772,7 +772,7 @@
           <p:cNvPr id="2" name="Título 1">
             <a:extLst>
               <a:ext uri="{FF2B5EF4-FFF2-40B4-BE49-F238E27FC236}">
-                <a16:creationId xmlns:a16="http://schemas.microsoft.com/office/drawing/2014/main" id="{BA58301A-E34A-93A9-0EE8-5E6C6C335532}"/>
+                <a16:creationId xmlns:a16="http://schemas.microsoft.com/office/drawing/2014/main" id="{92B77EEA-82FC-9F37-0FD4-F2BDEFAAAC8D}"/>
               </a:ext>
             </a:extLst>
           </p:cNvPr>
@@ -800,7 +800,7 @@
           <p:cNvPr id="3" name="Marcador de contenido 2">
             <a:extLst>
               <a:ext uri="{FF2B5EF4-FFF2-40B4-BE49-F238E27FC236}">
-                <a16:creationId xmlns:a16="http://schemas.microsoft.com/office/drawing/2014/main" id="{1F8593C7-26A1-78E2-69F6-BD574A29BC21}"/>
+                <a16:creationId xmlns:a16="http://schemas.microsoft.com/office/drawing/2014/main" id="{B4C850AE-C979-AACE-243F-5CB284D2CC96}"/>
               </a:ext>
             </a:extLst>
           </p:cNvPr>
@@ -857,7 +857,7 @@
           <p:cNvPr id="4" name="Marcador de fecha 3">
             <a:extLst>
               <a:ext uri="{FF2B5EF4-FFF2-40B4-BE49-F238E27FC236}">
-                <a16:creationId xmlns:a16="http://schemas.microsoft.com/office/drawing/2014/main" id="{3609F172-327B-CBF2-F971-57E7C15590D7}"/>
+                <a16:creationId xmlns:a16="http://schemas.microsoft.com/office/drawing/2014/main" id="{0F4129A5-5E8A-92C4-9C72-FBED8CB35704}"/>
               </a:ext>
             </a:extLst>
           </p:cNvPr>
@@ -873,9 +873,9 @@
           <a:bodyPr/>
           <a:lstStyle/>
           <a:p>
-            <a:fld id="{1DDB0E9B-2144-47A1-BEC6-FBFA1BF47B9A}" type="datetimeFigureOut">
+            <a:fld id="{AB9C1A0A-BF9E-48A0-991D-0EB02B84C89C}" type="datetimeFigureOut">
               <a:rPr lang="es-ES" smtClean="0"/>
-              <a:t>18/05/2026</a:t>
+              <a:t>19/05/2026</a:t>
             </a:fld>
             <a:endParaRPr lang="es-ES"/>
           </a:p>
@@ -886,7 +886,7 @@
           <p:cNvPr id="5" name="Marcador de pie de página 4">
             <a:extLst>
               <a:ext uri="{FF2B5EF4-FFF2-40B4-BE49-F238E27FC236}">
-                <a16:creationId xmlns:a16="http://schemas.microsoft.com/office/drawing/2014/main" id="{319C2CBD-DEAA-5EA7-C39D-4B230AB17DD1}"/>
+                <a16:creationId xmlns:a16="http://schemas.microsoft.com/office/drawing/2014/main" id="{B37C3BFC-1B17-7AD1-80C7-9515311EBF1F}"/>
               </a:ext>
             </a:extLst>
           </p:cNvPr>
@@ -911,7 +911,7 @@
           <p:cNvPr id="6" name="Marcador de número de diapositiva 5">
             <a:extLst>
               <a:ext uri="{FF2B5EF4-FFF2-40B4-BE49-F238E27FC236}">
-                <a16:creationId xmlns:a16="http://schemas.microsoft.com/office/drawing/2014/main" id="{5F4C82BB-CCC2-3BF9-5E6D-91C9698EE400}"/>
+                <a16:creationId xmlns:a16="http://schemas.microsoft.com/office/drawing/2014/main" id="{7A5567DB-4CDF-7698-7AA0-C554F337E4CE}"/>
               </a:ext>
             </a:extLst>
           </p:cNvPr>
@@ -927,7 +927,7 @@
           <a:bodyPr/>
           <a:lstStyle/>
           <a:p>
-            <a:fld id="{C3804229-7FF9-4687-89EB-F65AD4937D3E}" type="slidenum">
+            <a:fld id="{B3465923-C01A-429D-BF48-FE1C1E8CA486}" type="slidenum">
               <a:rPr lang="es-ES" smtClean="0"/>
               <a:t>‹Nº›</a:t>
             </a:fld>
@@ -938,7 +938,7 @@
     </p:spTree>
     <p:extLst>
       <p:ext uri="{BB962C8B-B14F-4D97-AF65-F5344CB8AC3E}">
-        <p14:creationId xmlns:p14="http://schemas.microsoft.com/office/powerpoint/2010/main" val="271624322"/>
+        <p14:creationId xmlns:p14="http://schemas.microsoft.com/office/powerpoint/2010/main" val="741971230"/>
       </p:ext>
     </p:extLst>
   </p:cSld>
@@ -970,7 +970,7 @@
           <p:cNvPr id="2" name="Título 1">
             <a:extLst>
               <a:ext uri="{FF2B5EF4-FFF2-40B4-BE49-F238E27FC236}">
-                <a16:creationId xmlns:a16="http://schemas.microsoft.com/office/drawing/2014/main" id="{B0843CB4-4338-B537-F980-EA3217DF0E27}"/>
+                <a16:creationId xmlns:a16="http://schemas.microsoft.com/office/drawing/2014/main" id="{7BC3F6F4-D80B-C1BB-227F-C03E5E048E6E}"/>
               </a:ext>
             </a:extLst>
           </p:cNvPr>
@@ -1007,7 +1007,7 @@
           <p:cNvPr id="3" name="Marcador de texto 2">
             <a:extLst>
               <a:ext uri="{FF2B5EF4-FFF2-40B4-BE49-F238E27FC236}">
-                <a16:creationId xmlns:a16="http://schemas.microsoft.com/office/drawing/2014/main" id="{C610A105-7FAF-036D-185F-D6E29BB9582A}"/>
+                <a16:creationId xmlns:a16="http://schemas.microsoft.com/office/drawing/2014/main" id="{87B172BB-7E5F-A4E2-217D-2B059083E554}"/>
               </a:ext>
             </a:extLst>
           </p:cNvPr>
@@ -1132,7 +1132,7 @@
           <p:cNvPr id="4" name="Marcador de fecha 3">
             <a:extLst>
               <a:ext uri="{FF2B5EF4-FFF2-40B4-BE49-F238E27FC236}">
-                <a16:creationId xmlns:a16="http://schemas.microsoft.com/office/drawing/2014/main" id="{0FB8FFD8-6642-3AAA-05D7-101DE947EADB}"/>
+                <a16:creationId xmlns:a16="http://schemas.microsoft.com/office/drawing/2014/main" id="{E907FA87-7F86-8183-E1EF-2A9AF0EA92CA}"/>
               </a:ext>
             </a:extLst>
           </p:cNvPr>
@@ -1148,9 +1148,9 @@
           <a:bodyPr/>
           <a:lstStyle/>
           <a:p>
-            <a:fld id="{1DDB0E9B-2144-47A1-BEC6-FBFA1BF47B9A}" type="datetimeFigureOut">
+            <a:fld id="{AB9C1A0A-BF9E-48A0-991D-0EB02B84C89C}" type="datetimeFigureOut">
               <a:rPr lang="es-ES" smtClean="0"/>
-              <a:t>18/05/2026</a:t>
+              <a:t>19/05/2026</a:t>
             </a:fld>
             <a:endParaRPr lang="es-ES"/>
           </a:p>
@@ -1161,7 +1161,7 @@
           <p:cNvPr id="5" name="Marcador de pie de página 4">
             <a:extLst>
               <a:ext uri="{FF2B5EF4-FFF2-40B4-BE49-F238E27FC236}">
-                <a16:creationId xmlns:a16="http://schemas.microsoft.com/office/drawing/2014/main" id="{F7383495-DBAC-C793-E0B1-2CA391BBB2DE}"/>
+                <a16:creationId xmlns:a16="http://schemas.microsoft.com/office/drawing/2014/main" id="{071A7589-02BA-C1C3-69B5-29607B14D7B6}"/>
               </a:ext>
             </a:extLst>
           </p:cNvPr>
@@ -1186,7 +1186,7 @@
           <p:cNvPr id="6" name="Marcador de número de diapositiva 5">
             <a:extLst>
               <a:ext uri="{FF2B5EF4-FFF2-40B4-BE49-F238E27FC236}">
-                <a16:creationId xmlns:a16="http://schemas.microsoft.com/office/drawing/2014/main" id="{50B46BD9-82AB-168B-18ED-3666A11F17D2}"/>
+                <a16:creationId xmlns:a16="http://schemas.microsoft.com/office/drawing/2014/main" id="{F522CDD7-3053-0DFD-CBA5-11D5E492DD83}"/>
               </a:ext>
             </a:extLst>
           </p:cNvPr>
@@ -1202,7 +1202,7 @@
           <a:bodyPr/>
           <a:lstStyle/>
           <a:p>
-            <a:fld id="{C3804229-7FF9-4687-89EB-F65AD4937D3E}" type="slidenum">
+            <a:fld id="{B3465923-C01A-429D-BF48-FE1C1E8CA486}" type="slidenum">
               <a:rPr lang="es-ES" smtClean="0"/>
               <a:t>‹Nº›</a:t>
             </a:fld>
@@ -1213,7 +1213,7 @@
     </p:spTree>
     <p:extLst>
       <p:ext uri="{BB962C8B-B14F-4D97-AF65-F5344CB8AC3E}">
-        <p14:creationId xmlns:p14="http://schemas.microsoft.com/office/powerpoint/2010/main" val="283459610"/>
+        <p14:creationId xmlns:p14="http://schemas.microsoft.com/office/powerpoint/2010/main" val="970898443"/>
       </p:ext>
     </p:extLst>
   </p:cSld>
@@ -1245,7 +1245,7 @@
           <p:cNvPr id="2" name="Título 1">
             <a:extLst>
               <a:ext uri="{FF2B5EF4-FFF2-40B4-BE49-F238E27FC236}">
-                <a16:creationId xmlns:a16="http://schemas.microsoft.com/office/drawing/2014/main" id="{A6B6829B-26C7-40A3-0CD7-3B4A4213545C}"/>
+                <a16:creationId xmlns:a16="http://schemas.microsoft.com/office/drawing/2014/main" id="{84E1C9FE-8E6C-6103-9CD2-6BFB8A35C03C}"/>
               </a:ext>
             </a:extLst>
           </p:cNvPr>
@@ -1273,7 +1273,7 @@
           <p:cNvPr id="3" name="Marcador de contenido 2">
             <a:extLst>
               <a:ext uri="{FF2B5EF4-FFF2-40B4-BE49-F238E27FC236}">
-                <a16:creationId xmlns:a16="http://schemas.microsoft.com/office/drawing/2014/main" id="{C14E2ED6-9A55-433D-7730-CD0C8AB7A179}"/>
+                <a16:creationId xmlns:a16="http://schemas.microsoft.com/office/drawing/2014/main" id="{40BE22F8-F11E-2617-8DDE-BC25BF2E1586}"/>
               </a:ext>
             </a:extLst>
           </p:cNvPr>
@@ -1335,7 +1335,7 @@
           <p:cNvPr id="4" name="Marcador de contenido 3">
             <a:extLst>
               <a:ext uri="{FF2B5EF4-FFF2-40B4-BE49-F238E27FC236}">
-                <a16:creationId xmlns:a16="http://schemas.microsoft.com/office/drawing/2014/main" id="{52351AF7-016A-52D6-1F8A-E87D7419ED37}"/>
+                <a16:creationId xmlns:a16="http://schemas.microsoft.com/office/drawing/2014/main" id="{059EDAFD-C4AA-A7DA-0144-0B0957FC354C}"/>
               </a:ext>
             </a:extLst>
           </p:cNvPr>
@@ -1397,7 +1397,7 @@
           <p:cNvPr id="5" name="Marcador de fecha 4">
             <a:extLst>
               <a:ext uri="{FF2B5EF4-FFF2-40B4-BE49-F238E27FC236}">
-                <a16:creationId xmlns:a16="http://schemas.microsoft.com/office/drawing/2014/main" id="{F1FDFD63-C6D8-D2A5-8CA3-38683E9E3FDB}"/>
+                <a16:creationId xmlns:a16="http://schemas.microsoft.com/office/drawing/2014/main" id="{1E15B96B-28C3-475D-E3D7-9F4B7C10726C}"/>
               </a:ext>
             </a:extLst>
           </p:cNvPr>
@@ -1413,9 +1413,9 @@
           <a:bodyPr/>
           <a:lstStyle/>
           <a:p>
-            <a:fld id="{1DDB0E9B-2144-47A1-BEC6-FBFA1BF47B9A}" type="datetimeFigureOut">
+            <a:fld id="{AB9C1A0A-BF9E-48A0-991D-0EB02B84C89C}" type="datetimeFigureOut">
               <a:rPr lang="es-ES" smtClean="0"/>
-              <a:t>18/05/2026</a:t>
+              <a:t>19/05/2026</a:t>
             </a:fld>
             <a:endParaRPr lang="es-ES"/>
           </a:p>
@@ -1426,7 +1426,7 @@
           <p:cNvPr id="6" name="Marcador de pie de página 5">
             <a:extLst>
               <a:ext uri="{FF2B5EF4-FFF2-40B4-BE49-F238E27FC236}">
-                <a16:creationId xmlns:a16="http://schemas.microsoft.com/office/drawing/2014/main" id="{846A1384-02F1-C06A-7E34-25130922EE4C}"/>
+                <a16:creationId xmlns:a16="http://schemas.microsoft.com/office/drawing/2014/main" id="{8F648C4D-4C4E-BF09-1C47-79A8CD5B17AA}"/>
               </a:ext>
             </a:extLst>
           </p:cNvPr>
@@ -1451,7 +1451,7 @@
           <p:cNvPr id="7" name="Marcador de número de diapositiva 6">
             <a:extLst>
               <a:ext uri="{FF2B5EF4-FFF2-40B4-BE49-F238E27FC236}">
-                <a16:creationId xmlns:a16="http://schemas.microsoft.com/office/drawing/2014/main" id="{D1C3B1EA-F757-9D55-1AC4-5FB6CBFDDBFE}"/>
+                <a16:creationId xmlns:a16="http://schemas.microsoft.com/office/drawing/2014/main" id="{E80DF2E6-58DE-5F43-20DB-5D39F5BBBABB}"/>
               </a:ext>
             </a:extLst>
           </p:cNvPr>
@@ -1467,7 +1467,7 @@
           <a:bodyPr/>
           <a:lstStyle/>
           <a:p>
-            <a:fld id="{C3804229-7FF9-4687-89EB-F65AD4937D3E}" type="slidenum">
+            <a:fld id="{B3465923-C01A-429D-BF48-FE1C1E8CA486}" type="slidenum">
               <a:rPr lang="es-ES" smtClean="0"/>
               <a:t>‹Nº›</a:t>
             </a:fld>
@@ -1478,7 +1478,7 @@
     </p:spTree>
     <p:extLst>
       <p:ext uri="{BB962C8B-B14F-4D97-AF65-F5344CB8AC3E}">
-        <p14:creationId xmlns:p14="http://schemas.microsoft.com/office/powerpoint/2010/main" val="2447465894"/>
+        <p14:creationId xmlns:p14="http://schemas.microsoft.com/office/powerpoint/2010/main" val="1473574331"/>
       </p:ext>
     </p:extLst>
   </p:cSld>
@@ -1510,7 +1510,7 @@
           <p:cNvPr id="2" name="Título 1">
             <a:extLst>
               <a:ext uri="{FF2B5EF4-FFF2-40B4-BE49-F238E27FC236}">
-                <a16:creationId xmlns:a16="http://schemas.microsoft.com/office/drawing/2014/main" id="{C56C8622-C583-E73F-E2FE-2AD78D859604}"/>
+                <a16:creationId xmlns:a16="http://schemas.microsoft.com/office/drawing/2014/main" id="{E92AB916-AE9D-26D9-28F7-EEAE8FF8B053}"/>
               </a:ext>
             </a:extLst>
           </p:cNvPr>
@@ -1543,7 +1543,7 @@
           <p:cNvPr id="3" name="Marcador de texto 2">
             <a:extLst>
               <a:ext uri="{FF2B5EF4-FFF2-40B4-BE49-F238E27FC236}">
-                <a16:creationId xmlns:a16="http://schemas.microsoft.com/office/drawing/2014/main" id="{6A49F940-56D2-8A35-A8C7-A62030CB846E}"/>
+                <a16:creationId xmlns:a16="http://schemas.microsoft.com/office/drawing/2014/main" id="{BC66CB01-328B-4D7B-2A2A-901DDF0FDAA3}"/>
               </a:ext>
             </a:extLst>
           </p:cNvPr>
@@ -1614,7 +1614,7 @@
           <p:cNvPr id="4" name="Marcador de contenido 3">
             <a:extLst>
               <a:ext uri="{FF2B5EF4-FFF2-40B4-BE49-F238E27FC236}">
-                <a16:creationId xmlns:a16="http://schemas.microsoft.com/office/drawing/2014/main" id="{C51D7EC0-74F4-2C5B-C59C-049BFFA275FB}"/>
+                <a16:creationId xmlns:a16="http://schemas.microsoft.com/office/drawing/2014/main" id="{CA1AD0B3-48E2-FC6C-9471-725BB47630A8}"/>
               </a:ext>
             </a:extLst>
           </p:cNvPr>
@@ -1676,7 +1676,7 @@
           <p:cNvPr id="5" name="Marcador de texto 4">
             <a:extLst>
               <a:ext uri="{FF2B5EF4-FFF2-40B4-BE49-F238E27FC236}">
-                <a16:creationId xmlns:a16="http://schemas.microsoft.com/office/drawing/2014/main" id="{D870369B-DBB9-CB84-BFC9-D652F39756EB}"/>
+                <a16:creationId xmlns:a16="http://schemas.microsoft.com/office/drawing/2014/main" id="{F28D16E9-BEDB-A73C-EBD5-0F9712E94690}"/>
               </a:ext>
             </a:extLst>
           </p:cNvPr>
@@ -1747,7 +1747,7 @@
           <p:cNvPr id="6" name="Marcador de contenido 5">
             <a:extLst>
               <a:ext uri="{FF2B5EF4-FFF2-40B4-BE49-F238E27FC236}">
-                <a16:creationId xmlns:a16="http://schemas.microsoft.com/office/drawing/2014/main" id="{BE78608E-F504-CC1C-8217-8AECAB08255E}"/>
+                <a16:creationId xmlns:a16="http://schemas.microsoft.com/office/drawing/2014/main" id="{907545AB-BEF7-3457-90A3-BE2C72551632}"/>
               </a:ext>
             </a:extLst>
           </p:cNvPr>
@@ -1809,7 +1809,7 @@
           <p:cNvPr id="7" name="Marcador de fecha 6">
             <a:extLst>
               <a:ext uri="{FF2B5EF4-FFF2-40B4-BE49-F238E27FC236}">
-                <a16:creationId xmlns:a16="http://schemas.microsoft.com/office/drawing/2014/main" id="{52B8B12D-2958-7A7E-6005-8AFBAA0B9FD8}"/>
+                <a16:creationId xmlns:a16="http://schemas.microsoft.com/office/drawing/2014/main" id="{65EED2F8-B104-278A-D121-8B6BA5C29BF3}"/>
               </a:ext>
             </a:extLst>
           </p:cNvPr>
@@ -1825,9 +1825,9 @@
           <a:bodyPr/>
           <a:lstStyle/>
           <a:p>
-            <a:fld id="{1DDB0E9B-2144-47A1-BEC6-FBFA1BF47B9A}" type="datetimeFigureOut">
+            <a:fld id="{AB9C1A0A-BF9E-48A0-991D-0EB02B84C89C}" type="datetimeFigureOut">
               <a:rPr lang="es-ES" smtClean="0"/>
-              <a:t>18/05/2026</a:t>
+              <a:t>19/05/2026</a:t>
             </a:fld>
             <a:endParaRPr lang="es-ES"/>
           </a:p>
@@ -1838,7 +1838,7 @@
           <p:cNvPr id="8" name="Marcador de pie de página 7">
             <a:extLst>
               <a:ext uri="{FF2B5EF4-FFF2-40B4-BE49-F238E27FC236}">
-                <a16:creationId xmlns:a16="http://schemas.microsoft.com/office/drawing/2014/main" id="{552F9287-2740-9215-CB24-94B600180010}"/>
+                <a16:creationId xmlns:a16="http://schemas.microsoft.com/office/drawing/2014/main" id="{88AF0901-8B10-FD68-79A6-2E732472EE66}"/>
               </a:ext>
             </a:extLst>
           </p:cNvPr>
@@ -1863,7 +1863,7 @@
           <p:cNvPr id="9" name="Marcador de número de diapositiva 8">
             <a:extLst>
               <a:ext uri="{FF2B5EF4-FFF2-40B4-BE49-F238E27FC236}">
-                <a16:creationId xmlns:a16="http://schemas.microsoft.com/office/drawing/2014/main" id="{2B923351-39C6-10F8-E0C0-1DEB71FB247F}"/>
+                <a16:creationId xmlns:a16="http://schemas.microsoft.com/office/drawing/2014/main" id="{DDFA98F8-B109-C8D4-B883-DF8CD2E5DE92}"/>
               </a:ext>
             </a:extLst>
           </p:cNvPr>
@@ -1879,7 +1879,7 @@
           <a:bodyPr/>
           <a:lstStyle/>
           <a:p>
-            <a:fld id="{C3804229-7FF9-4687-89EB-F65AD4937D3E}" type="slidenum">
+            <a:fld id="{B3465923-C01A-429D-BF48-FE1C1E8CA486}" type="slidenum">
               <a:rPr lang="es-ES" smtClean="0"/>
               <a:t>‹Nº›</a:t>
             </a:fld>
@@ -1890,7 +1890,7 @@
     </p:spTree>
     <p:extLst>
       <p:ext uri="{BB962C8B-B14F-4D97-AF65-F5344CB8AC3E}">
-        <p14:creationId xmlns:p14="http://schemas.microsoft.com/office/powerpoint/2010/main" val="358784349"/>
+        <p14:creationId xmlns:p14="http://schemas.microsoft.com/office/powerpoint/2010/main" val="3846948294"/>
       </p:ext>
     </p:extLst>
   </p:cSld>
@@ -1922,7 +1922,7 @@
           <p:cNvPr id="2" name="Título 1">
             <a:extLst>
               <a:ext uri="{FF2B5EF4-FFF2-40B4-BE49-F238E27FC236}">
-                <a16:creationId xmlns:a16="http://schemas.microsoft.com/office/drawing/2014/main" id="{BAC254E7-7200-2664-1595-101278E1214E}"/>
+                <a16:creationId xmlns:a16="http://schemas.microsoft.com/office/drawing/2014/main" id="{074145F3-8199-D652-0EA9-25539AAC56AA}"/>
               </a:ext>
             </a:extLst>
           </p:cNvPr>
@@ -1950,7 +1950,7 @@
           <p:cNvPr id="3" name="Marcador de fecha 2">
             <a:extLst>
               <a:ext uri="{FF2B5EF4-FFF2-40B4-BE49-F238E27FC236}">
-                <a16:creationId xmlns:a16="http://schemas.microsoft.com/office/drawing/2014/main" id="{9E82FA4E-DD4B-42C6-9BC3-0CD887AA87D7}"/>
+                <a16:creationId xmlns:a16="http://schemas.microsoft.com/office/drawing/2014/main" id="{4457EB84-2E78-A4B6-D3D2-C4FB4D1B5346}"/>
               </a:ext>
             </a:extLst>
           </p:cNvPr>
@@ -1966,9 +1966,9 @@
           <a:bodyPr/>
           <a:lstStyle/>
           <a:p>
-            <a:fld id="{1DDB0E9B-2144-47A1-BEC6-FBFA1BF47B9A}" type="datetimeFigureOut">
+            <a:fld id="{AB9C1A0A-BF9E-48A0-991D-0EB02B84C89C}" type="datetimeFigureOut">
               <a:rPr lang="es-ES" smtClean="0"/>
-              <a:t>18/05/2026</a:t>
+              <a:t>19/05/2026</a:t>
             </a:fld>
             <a:endParaRPr lang="es-ES"/>
           </a:p>
@@ -1979,7 +1979,7 @@
           <p:cNvPr id="4" name="Marcador de pie de página 3">
             <a:extLst>
               <a:ext uri="{FF2B5EF4-FFF2-40B4-BE49-F238E27FC236}">
-                <a16:creationId xmlns:a16="http://schemas.microsoft.com/office/drawing/2014/main" id="{A4B9C0D3-5CF6-CA85-139A-B689AB85CAEB}"/>
+                <a16:creationId xmlns:a16="http://schemas.microsoft.com/office/drawing/2014/main" id="{D97D25ED-0BC3-CF86-49E8-64B39358EBE8}"/>
               </a:ext>
             </a:extLst>
           </p:cNvPr>
@@ -2004,7 +2004,7 @@
           <p:cNvPr id="5" name="Marcador de número de diapositiva 4">
             <a:extLst>
               <a:ext uri="{FF2B5EF4-FFF2-40B4-BE49-F238E27FC236}">
-                <a16:creationId xmlns:a16="http://schemas.microsoft.com/office/drawing/2014/main" id="{2F1573AC-F3ED-7368-9D96-BA78EB9BF847}"/>
+                <a16:creationId xmlns:a16="http://schemas.microsoft.com/office/drawing/2014/main" id="{1B127638-D7CA-147F-C3F0-4BEC62CCD5DD}"/>
               </a:ext>
             </a:extLst>
           </p:cNvPr>
@@ -2020,7 +2020,7 @@
           <a:bodyPr/>
           <a:lstStyle/>
           <a:p>
-            <a:fld id="{C3804229-7FF9-4687-89EB-F65AD4937D3E}" type="slidenum">
+            <a:fld id="{B3465923-C01A-429D-BF48-FE1C1E8CA486}" type="slidenum">
               <a:rPr lang="es-ES" smtClean="0"/>
               <a:t>‹Nº›</a:t>
             </a:fld>
@@ -2031,7 +2031,7 @@
     </p:spTree>
     <p:extLst>
       <p:ext uri="{BB962C8B-B14F-4D97-AF65-F5344CB8AC3E}">
-        <p14:creationId xmlns:p14="http://schemas.microsoft.com/office/powerpoint/2010/main" val="494678653"/>
+        <p14:creationId xmlns:p14="http://schemas.microsoft.com/office/powerpoint/2010/main" val="266854122"/>
       </p:ext>
     </p:extLst>
   </p:cSld>
@@ -2063,7 +2063,7 @@
           <p:cNvPr id="2" name="Marcador de fecha 1">
             <a:extLst>
               <a:ext uri="{FF2B5EF4-FFF2-40B4-BE49-F238E27FC236}">
-                <a16:creationId xmlns:a16="http://schemas.microsoft.com/office/drawing/2014/main" id="{A02D1CE3-AB36-74BD-BABB-158101B7E7F4}"/>
+                <a16:creationId xmlns:a16="http://schemas.microsoft.com/office/drawing/2014/main" id="{277768E8-3F42-6276-86AF-68715D8E9A8D}"/>
               </a:ext>
             </a:extLst>
           </p:cNvPr>
@@ -2079,9 +2079,9 @@
           <a:bodyPr/>
           <a:lstStyle/>
           <a:p>
-            <a:fld id="{1DDB0E9B-2144-47A1-BEC6-FBFA1BF47B9A}" type="datetimeFigureOut">
+            <a:fld id="{AB9C1A0A-BF9E-48A0-991D-0EB02B84C89C}" type="datetimeFigureOut">
               <a:rPr lang="es-ES" smtClean="0"/>
-              <a:t>18/05/2026</a:t>
+              <a:t>19/05/2026</a:t>
             </a:fld>
             <a:endParaRPr lang="es-ES"/>
           </a:p>
@@ -2092,7 +2092,7 @@
           <p:cNvPr id="3" name="Marcador de pie de página 2">
             <a:extLst>
               <a:ext uri="{FF2B5EF4-FFF2-40B4-BE49-F238E27FC236}">
-                <a16:creationId xmlns:a16="http://schemas.microsoft.com/office/drawing/2014/main" id="{047C11AF-D7ED-9035-5AE1-94989847E401}"/>
+                <a16:creationId xmlns:a16="http://schemas.microsoft.com/office/drawing/2014/main" id="{AFC22073-20C1-8832-0253-F179A0226F60}"/>
               </a:ext>
             </a:extLst>
           </p:cNvPr>
@@ -2117,7 +2117,7 @@
           <p:cNvPr id="4" name="Marcador de número de diapositiva 3">
             <a:extLst>
               <a:ext uri="{FF2B5EF4-FFF2-40B4-BE49-F238E27FC236}">
-                <a16:creationId xmlns:a16="http://schemas.microsoft.com/office/drawing/2014/main" id="{F9E9E6E0-BE16-582E-A665-8F31D3A08638}"/>
+                <a16:creationId xmlns:a16="http://schemas.microsoft.com/office/drawing/2014/main" id="{A0702840-060A-E60B-D143-1F1FDA271F8A}"/>
               </a:ext>
             </a:extLst>
           </p:cNvPr>
@@ -2133,7 +2133,7 @@
           <a:bodyPr/>
           <a:lstStyle/>
           <a:p>
-            <a:fld id="{C3804229-7FF9-4687-89EB-F65AD4937D3E}" type="slidenum">
+            <a:fld id="{B3465923-C01A-429D-BF48-FE1C1E8CA486}" type="slidenum">
               <a:rPr lang="es-ES" smtClean="0"/>
               <a:t>‹Nº›</a:t>
             </a:fld>
@@ -2144,7 +2144,7 @@
     </p:spTree>
     <p:extLst>
       <p:ext uri="{BB962C8B-B14F-4D97-AF65-F5344CB8AC3E}">
-        <p14:creationId xmlns:p14="http://schemas.microsoft.com/office/powerpoint/2010/main" val="134897583"/>
+        <p14:creationId xmlns:p14="http://schemas.microsoft.com/office/powerpoint/2010/main" val="1294746670"/>
       </p:ext>
     </p:extLst>
   </p:cSld>
@@ -2176,7 +2176,7 @@
           <p:cNvPr id="2" name="Título 1">
             <a:extLst>
               <a:ext uri="{FF2B5EF4-FFF2-40B4-BE49-F238E27FC236}">
-                <a16:creationId xmlns:a16="http://schemas.microsoft.com/office/drawing/2014/main" id="{235F02F0-C58E-B645-72A4-7FD442F7AA5D}"/>
+                <a16:creationId xmlns:a16="http://schemas.microsoft.com/office/drawing/2014/main" id="{254CCFB2-E81E-F719-766D-D55382D7FD3A}"/>
               </a:ext>
             </a:extLst>
           </p:cNvPr>
@@ -2213,7 +2213,7 @@
           <p:cNvPr id="3" name="Marcador de contenido 2">
             <a:extLst>
               <a:ext uri="{FF2B5EF4-FFF2-40B4-BE49-F238E27FC236}">
-                <a16:creationId xmlns:a16="http://schemas.microsoft.com/office/drawing/2014/main" id="{CBBB3B10-C757-B517-81D5-BC74A178B37C}"/>
+                <a16:creationId xmlns:a16="http://schemas.microsoft.com/office/drawing/2014/main" id="{952FC578-50BC-9A1A-9F42-60BDC233E2A7}"/>
               </a:ext>
             </a:extLst>
           </p:cNvPr>
@@ -2303,7 +2303,7 @@
           <p:cNvPr id="4" name="Marcador de texto 3">
             <a:extLst>
               <a:ext uri="{FF2B5EF4-FFF2-40B4-BE49-F238E27FC236}">
-                <a16:creationId xmlns:a16="http://schemas.microsoft.com/office/drawing/2014/main" id="{2E4CB9BB-404A-10D7-8AEE-2DA003001C8C}"/>
+                <a16:creationId xmlns:a16="http://schemas.microsoft.com/office/drawing/2014/main" id="{FA6805FF-578A-B13E-9A1C-74EB8A8CBF86}"/>
               </a:ext>
             </a:extLst>
           </p:cNvPr>
@@ -2374,7 +2374,7 @@
           <p:cNvPr id="5" name="Marcador de fecha 4">
             <a:extLst>
               <a:ext uri="{FF2B5EF4-FFF2-40B4-BE49-F238E27FC236}">
-                <a16:creationId xmlns:a16="http://schemas.microsoft.com/office/drawing/2014/main" id="{A5F47C2E-AE3D-F82E-2540-B84293B74058}"/>
+                <a16:creationId xmlns:a16="http://schemas.microsoft.com/office/drawing/2014/main" id="{6038623A-9E5A-3228-0571-79279CCE6023}"/>
               </a:ext>
             </a:extLst>
           </p:cNvPr>
@@ -2390,9 +2390,9 @@
           <a:bodyPr/>
           <a:lstStyle/>
           <a:p>
-            <a:fld id="{1DDB0E9B-2144-47A1-BEC6-FBFA1BF47B9A}" type="datetimeFigureOut">
+            <a:fld id="{AB9C1A0A-BF9E-48A0-991D-0EB02B84C89C}" type="datetimeFigureOut">
               <a:rPr lang="es-ES" smtClean="0"/>
-              <a:t>18/05/2026</a:t>
+              <a:t>19/05/2026</a:t>
             </a:fld>
             <a:endParaRPr lang="es-ES"/>
           </a:p>
@@ -2403,7 +2403,7 @@
           <p:cNvPr id="6" name="Marcador de pie de página 5">
             <a:extLst>
               <a:ext uri="{FF2B5EF4-FFF2-40B4-BE49-F238E27FC236}">
-                <a16:creationId xmlns:a16="http://schemas.microsoft.com/office/drawing/2014/main" id="{CEE92FB6-0429-6B91-BBAF-7DABD52E3A7A}"/>
+                <a16:creationId xmlns:a16="http://schemas.microsoft.com/office/drawing/2014/main" id="{E1793859-5ABA-672E-9504-362653336615}"/>
               </a:ext>
             </a:extLst>
           </p:cNvPr>
@@ -2428,7 +2428,7 @@
           <p:cNvPr id="7" name="Marcador de número de diapositiva 6">
             <a:extLst>
               <a:ext uri="{FF2B5EF4-FFF2-40B4-BE49-F238E27FC236}">
-                <a16:creationId xmlns:a16="http://schemas.microsoft.com/office/drawing/2014/main" id="{D819B694-261B-30E6-A277-B6BDA51BBBBA}"/>
+                <a16:creationId xmlns:a16="http://schemas.microsoft.com/office/drawing/2014/main" id="{BC603FE4-4FC9-6622-C43B-7AD3545EAB0D}"/>
               </a:ext>
             </a:extLst>
           </p:cNvPr>
@@ -2444,7 +2444,7 @@
           <a:bodyPr/>
           <a:lstStyle/>
           <a:p>
-            <a:fld id="{C3804229-7FF9-4687-89EB-F65AD4937D3E}" type="slidenum">
+            <a:fld id="{B3465923-C01A-429D-BF48-FE1C1E8CA486}" type="slidenum">
               <a:rPr lang="es-ES" smtClean="0"/>
               <a:t>‹Nº›</a:t>
             </a:fld>
@@ -2455,7 +2455,7 @@
     </p:spTree>
     <p:extLst>
       <p:ext uri="{BB962C8B-B14F-4D97-AF65-F5344CB8AC3E}">
-        <p14:creationId xmlns:p14="http://schemas.microsoft.com/office/powerpoint/2010/main" val="2037122793"/>
+        <p14:creationId xmlns:p14="http://schemas.microsoft.com/office/powerpoint/2010/main" val="4121965106"/>
       </p:ext>
     </p:extLst>
   </p:cSld>
@@ -2487,7 +2487,7 @@
           <p:cNvPr id="2" name="Título 1">
             <a:extLst>
               <a:ext uri="{FF2B5EF4-FFF2-40B4-BE49-F238E27FC236}">
-                <a16:creationId xmlns:a16="http://schemas.microsoft.com/office/drawing/2014/main" id="{F435C9F3-F7AC-D4F7-4303-9BD416C222BD}"/>
+                <a16:creationId xmlns:a16="http://schemas.microsoft.com/office/drawing/2014/main" id="{D27F6048-BB77-75B2-E0F5-556AA73FBDDE}"/>
               </a:ext>
             </a:extLst>
           </p:cNvPr>
@@ -2524,7 +2524,7 @@
           <p:cNvPr id="3" name="Marcador de posición de imagen 2">
             <a:extLst>
               <a:ext uri="{FF2B5EF4-FFF2-40B4-BE49-F238E27FC236}">
-                <a16:creationId xmlns:a16="http://schemas.microsoft.com/office/drawing/2014/main" id="{DA9A112E-451F-50DC-028D-C6F58F570E00}"/>
+                <a16:creationId xmlns:a16="http://schemas.microsoft.com/office/drawing/2014/main" id="{3B4CB789-4CC6-7027-7FB7-32FEDDD1081C}"/>
               </a:ext>
             </a:extLst>
           </p:cNvPr>
@@ -2591,7 +2591,7 @@
           <p:cNvPr id="4" name="Marcador de texto 3">
             <a:extLst>
               <a:ext uri="{FF2B5EF4-FFF2-40B4-BE49-F238E27FC236}">
-                <a16:creationId xmlns:a16="http://schemas.microsoft.com/office/drawing/2014/main" id="{3598B36F-615A-BAC7-C33E-7A99411A85D8}"/>
+                <a16:creationId xmlns:a16="http://schemas.microsoft.com/office/drawing/2014/main" id="{41E7A35C-702C-1D8B-E13C-D710823ABC57}"/>
               </a:ext>
             </a:extLst>
           </p:cNvPr>
@@ -2662,7 +2662,7 @@
           <p:cNvPr id="5" name="Marcador de fecha 4">
             <a:extLst>
               <a:ext uri="{FF2B5EF4-FFF2-40B4-BE49-F238E27FC236}">
-                <a16:creationId xmlns:a16="http://schemas.microsoft.com/office/drawing/2014/main" id="{6723CA87-0035-81EC-0AB8-5A679616BE74}"/>
+                <a16:creationId xmlns:a16="http://schemas.microsoft.com/office/drawing/2014/main" id="{36632614-54E4-2380-00E4-802994933CF2}"/>
               </a:ext>
             </a:extLst>
           </p:cNvPr>
@@ -2678,9 +2678,9 @@
           <a:bodyPr/>
           <a:lstStyle/>
           <a:p>
-            <a:fld id="{1DDB0E9B-2144-47A1-BEC6-FBFA1BF47B9A}" type="datetimeFigureOut">
+            <a:fld id="{AB9C1A0A-BF9E-48A0-991D-0EB02B84C89C}" type="datetimeFigureOut">
               <a:rPr lang="es-ES" smtClean="0"/>
-              <a:t>18/05/2026</a:t>
+              <a:t>19/05/2026</a:t>
             </a:fld>
             <a:endParaRPr lang="es-ES"/>
           </a:p>
@@ -2691,7 +2691,7 @@
           <p:cNvPr id="6" name="Marcador de pie de página 5">
             <a:extLst>
               <a:ext uri="{FF2B5EF4-FFF2-40B4-BE49-F238E27FC236}">
-                <a16:creationId xmlns:a16="http://schemas.microsoft.com/office/drawing/2014/main" id="{C6AE9DA7-03F8-4DBB-3A16-971CF6E63306}"/>
+                <a16:creationId xmlns:a16="http://schemas.microsoft.com/office/drawing/2014/main" id="{E8EA630A-5FCE-62C7-BBCC-041308A8D028}"/>
               </a:ext>
             </a:extLst>
           </p:cNvPr>
@@ -2716,7 +2716,7 @@
           <p:cNvPr id="7" name="Marcador de número de diapositiva 6">
             <a:extLst>
               <a:ext uri="{FF2B5EF4-FFF2-40B4-BE49-F238E27FC236}">
-                <a16:creationId xmlns:a16="http://schemas.microsoft.com/office/drawing/2014/main" id="{BC24F64F-0D50-6B49-18CD-8815D633BE19}"/>
+                <a16:creationId xmlns:a16="http://schemas.microsoft.com/office/drawing/2014/main" id="{F7B00146-435A-13A2-94AE-52EA686AA928}"/>
               </a:ext>
             </a:extLst>
           </p:cNvPr>
@@ -2732,7 +2732,7 @@
           <a:bodyPr/>
           <a:lstStyle/>
           <a:p>
-            <a:fld id="{C3804229-7FF9-4687-89EB-F65AD4937D3E}" type="slidenum">
+            <a:fld id="{B3465923-C01A-429D-BF48-FE1C1E8CA486}" type="slidenum">
               <a:rPr lang="es-ES" smtClean="0"/>
               <a:t>‹Nº›</a:t>
             </a:fld>
@@ -2743,7 +2743,7 @@
     </p:spTree>
     <p:extLst>
       <p:ext uri="{BB962C8B-B14F-4D97-AF65-F5344CB8AC3E}">
-        <p14:creationId xmlns:p14="http://schemas.microsoft.com/office/powerpoint/2010/main" val="4068038534"/>
+        <p14:creationId xmlns:p14="http://schemas.microsoft.com/office/powerpoint/2010/main" val="948003218"/>
       </p:ext>
     </p:extLst>
   </p:cSld>
@@ -2780,7 +2780,7 @@
           <p:cNvPr id="2" name="Marcador de título 1">
             <a:extLst>
               <a:ext uri="{FF2B5EF4-FFF2-40B4-BE49-F238E27FC236}">
-                <a16:creationId xmlns:a16="http://schemas.microsoft.com/office/drawing/2014/main" id="{D6291D40-7C43-5C14-7CF7-845E35E72FA2}"/>
+                <a16:creationId xmlns:a16="http://schemas.microsoft.com/office/drawing/2014/main" id="{73E795E7-988F-6D5A-2223-AFB25A944D0D}"/>
               </a:ext>
             </a:extLst>
           </p:cNvPr>
@@ -2818,7 +2818,7 @@
           <p:cNvPr id="3" name="Marcador de texto 2">
             <a:extLst>
               <a:ext uri="{FF2B5EF4-FFF2-40B4-BE49-F238E27FC236}">
-                <a16:creationId xmlns:a16="http://schemas.microsoft.com/office/drawing/2014/main" id="{1984FB41-5CA9-FF2E-AE6F-0968E6F637E7}"/>
+                <a16:creationId xmlns:a16="http://schemas.microsoft.com/office/drawing/2014/main" id="{3176D17D-F500-CAF0-EB2E-9DD9DFBEFBE3}"/>
               </a:ext>
             </a:extLst>
           </p:cNvPr>
@@ -2885,7 +2885,7 @@
           <p:cNvPr id="4" name="Marcador de fecha 3">
             <a:extLst>
               <a:ext uri="{FF2B5EF4-FFF2-40B4-BE49-F238E27FC236}">
-                <a16:creationId xmlns:a16="http://schemas.microsoft.com/office/drawing/2014/main" id="{E9EB0A9A-7CC2-6295-0FF7-00B213ECEF1E}"/>
+                <a16:creationId xmlns:a16="http://schemas.microsoft.com/office/drawing/2014/main" id="{C8D3EAFA-06BC-8492-B4AD-7465FE9219D9}"/>
               </a:ext>
             </a:extLst>
           </p:cNvPr>
@@ -2919,9 +2919,9 @@
             </a:lvl1pPr>
           </a:lstStyle>
           <a:p>
-            <a:fld id="{1DDB0E9B-2144-47A1-BEC6-FBFA1BF47B9A}" type="datetimeFigureOut">
+            <a:fld id="{AB9C1A0A-BF9E-48A0-991D-0EB02B84C89C}" type="datetimeFigureOut">
               <a:rPr lang="es-ES" smtClean="0"/>
-              <a:t>18/05/2026</a:t>
+              <a:t>19/05/2026</a:t>
             </a:fld>
             <a:endParaRPr lang="es-ES"/>
           </a:p>
@@ -2932,7 +2932,7 @@
           <p:cNvPr id="5" name="Marcador de pie de página 4">
             <a:extLst>
               <a:ext uri="{FF2B5EF4-FFF2-40B4-BE49-F238E27FC236}">
-                <a16:creationId xmlns:a16="http://schemas.microsoft.com/office/drawing/2014/main" id="{60213811-A5C7-C833-63EF-E36585B95687}"/>
+                <a16:creationId xmlns:a16="http://schemas.microsoft.com/office/drawing/2014/main" id="{6A64E50F-701B-BD30-C2B7-F8BB0DFF3D0F}"/>
               </a:ext>
             </a:extLst>
           </p:cNvPr>
@@ -2975,7 +2975,7 @@
           <p:cNvPr id="6" name="Marcador de número de diapositiva 5">
             <a:extLst>
               <a:ext uri="{FF2B5EF4-FFF2-40B4-BE49-F238E27FC236}">
-                <a16:creationId xmlns:a16="http://schemas.microsoft.com/office/drawing/2014/main" id="{6D9F55CE-0126-CDF4-D7BC-0DB15CBA64BE}"/>
+                <a16:creationId xmlns:a16="http://schemas.microsoft.com/office/drawing/2014/main" id="{8911B98D-8394-836F-1E49-B6D987852199}"/>
               </a:ext>
             </a:extLst>
           </p:cNvPr>
@@ -3009,7 +3009,7 @@
             </a:lvl1pPr>
           </a:lstStyle>
           <a:p>
-            <a:fld id="{C3804229-7FF9-4687-89EB-F65AD4937D3E}" type="slidenum">
+            <a:fld id="{B3465923-C01A-429D-BF48-FE1C1E8CA486}" type="slidenum">
               <a:rPr lang="es-ES" smtClean="0"/>
               <a:t>‹Nº›</a:t>
             </a:fld>
@@ -3020,7 +3020,7 @@
     </p:spTree>
     <p:extLst>
       <p:ext uri="{BB962C8B-B14F-4D97-AF65-F5344CB8AC3E}">
-        <p14:creationId xmlns:p14="http://schemas.microsoft.com/office/powerpoint/2010/main" val="236746701"/>
+        <p14:creationId xmlns:p14="http://schemas.microsoft.com/office/powerpoint/2010/main" val="3424308497"/>
       </p:ext>
     </p:extLst>
   </p:cSld>
@@ -3351,7 +3351,7 @@
           <p:cNvPr id="2" name="Rectángulo: esquinas redondeadas 1">
             <a:extLst>
               <a:ext uri="{FF2B5EF4-FFF2-40B4-BE49-F238E27FC236}">
-                <a16:creationId xmlns:a16="http://schemas.microsoft.com/office/drawing/2014/main" id="{A9B68B07-0E42-3D3A-59AB-75D314A35906}"/>
+                <a16:creationId xmlns:a16="http://schemas.microsoft.com/office/drawing/2014/main" id="{8D26A0E0-FB4C-849C-CDCB-FE3596B00D95}"/>
               </a:ext>
             </a:extLst>
           </p:cNvPr>
@@ -3405,7 +3405,7 @@
           <p:cNvPr id="3" name="CuadroTexto 2">
             <a:extLst>
               <a:ext uri="{FF2B5EF4-FFF2-40B4-BE49-F238E27FC236}">
-                <a16:creationId xmlns:a16="http://schemas.microsoft.com/office/drawing/2014/main" id="{8DFB9613-F2EC-9F26-BEDE-17D320311A8E}"/>
+                <a16:creationId xmlns:a16="http://schemas.microsoft.com/office/drawing/2014/main" id="{0C0ABDE1-768B-4E8F-4DF2-1182CD15BFB9}"/>
               </a:ext>
             </a:extLst>
           </p:cNvPr>
@@ -3445,7 +3445,7 @@
           <p:cNvPr id="4" name="CuadroTexto 3">
             <a:extLst>
               <a:ext uri="{FF2B5EF4-FFF2-40B4-BE49-F238E27FC236}">
-                <a16:creationId xmlns:a16="http://schemas.microsoft.com/office/drawing/2014/main" id="{9A48F141-1814-39FD-E775-DA62716C05B7}"/>
+                <a16:creationId xmlns:a16="http://schemas.microsoft.com/office/drawing/2014/main" id="{E9513875-C1AF-3123-1236-18C82A862A02}"/>
               </a:ext>
             </a:extLst>
           </p:cNvPr>
@@ -3485,7 +3485,7 @@
           <p:cNvPr id="5" name="CuadroTexto 4">
             <a:extLst>
               <a:ext uri="{FF2B5EF4-FFF2-40B4-BE49-F238E27FC236}">
-                <a16:creationId xmlns:a16="http://schemas.microsoft.com/office/drawing/2014/main" id="{866FFC5C-8565-D9F3-2B11-D36DA6658618}"/>
+                <a16:creationId xmlns:a16="http://schemas.microsoft.com/office/drawing/2014/main" id="{78CE9AC4-3231-5E43-571C-63C921B839FE}"/>
               </a:ext>
             </a:extLst>
           </p:cNvPr>
@@ -3525,7 +3525,7 @@
           <p:cNvPr id="6" name="CuadroTexto 5">
             <a:extLst>
               <a:ext uri="{FF2B5EF4-FFF2-40B4-BE49-F238E27FC236}">
-                <a16:creationId xmlns:a16="http://schemas.microsoft.com/office/drawing/2014/main" id="{D5176ACD-9518-7C4D-EC15-6D9A1C40E7B5}"/>
+                <a16:creationId xmlns:a16="http://schemas.microsoft.com/office/drawing/2014/main" id="{C269820E-5F1A-E35A-BF32-5F29D2355FF6}"/>
               </a:ext>
             </a:extLst>
           </p:cNvPr>
@@ -3576,7 +3576,7 @@
           <p:cNvPr id="8" name="Imagen 7">
             <a:extLst>
               <a:ext uri="{FF2B5EF4-FFF2-40B4-BE49-F238E27FC236}">
-                <a16:creationId xmlns:a16="http://schemas.microsoft.com/office/drawing/2014/main" id="{884051A0-4E18-9663-2F6E-4AD9BB297378}"/>
+                <a16:creationId xmlns:a16="http://schemas.microsoft.com/office/drawing/2014/main" id="{FEBD596F-2F18-6433-8D13-E18EBF7F6B0C}"/>
               </a:ext>
             </a:extLst>
           </p:cNvPr>
@@ -3615,7 +3615,7 @@
     </p:spTree>
     <p:extLst>
       <p:ext uri="{BB962C8B-B14F-4D97-AF65-F5344CB8AC3E}">
-        <p14:creationId xmlns:p14="http://schemas.microsoft.com/office/powerpoint/2010/main" val="1997840301"/>
+        <p14:creationId xmlns:p14="http://schemas.microsoft.com/office/powerpoint/2010/main" val="2070698356"/>
       </p:ext>
     </p:extLst>
   </p:cSld>
@@ -3655,7 +3655,7 @@
           <p:cNvPr id="2" name="CuadroTexto 1">
             <a:extLst>
               <a:ext uri="{FF2B5EF4-FFF2-40B4-BE49-F238E27FC236}">
-                <a16:creationId xmlns:a16="http://schemas.microsoft.com/office/drawing/2014/main" id="{BB3E3A21-700F-B328-1C85-49F91535B3B3}"/>
+                <a16:creationId xmlns:a16="http://schemas.microsoft.com/office/drawing/2014/main" id="{B53EF905-F911-2F31-FAD0-191A0ABDC738}"/>
               </a:ext>
             </a:extLst>
           </p:cNvPr>
@@ -3695,7 +3695,7 @@
           <p:cNvPr id="3" name="CuadroTexto 2">
             <a:extLst>
               <a:ext uri="{FF2B5EF4-FFF2-40B4-BE49-F238E27FC236}">
-                <a16:creationId xmlns:a16="http://schemas.microsoft.com/office/drawing/2014/main" id="{65C96FD9-FF04-FDF2-A4B6-8814B4AE257E}"/>
+                <a16:creationId xmlns:a16="http://schemas.microsoft.com/office/drawing/2014/main" id="{EAC5B46A-73DC-C0DA-A717-F918A125DF90}"/>
               </a:ext>
             </a:extLst>
           </p:cNvPr>
@@ -3735,7 +3735,7 @@
           <p:cNvPr id="4" name="CuadroTexto 3">
             <a:extLst>
               <a:ext uri="{FF2B5EF4-FFF2-40B4-BE49-F238E27FC236}">
-                <a16:creationId xmlns:a16="http://schemas.microsoft.com/office/drawing/2014/main" id="{6BDC3A2A-272F-7680-1053-39254C9434D6}"/>
+                <a16:creationId xmlns:a16="http://schemas.microsoft.com/office/drawing/2014/main" id="{DD9A8A3D-6BE3-DF76-621E-68EC907B1E31}"/>
               </a:ext>
             </a:extLst>
           </p:cNvPr>
@@ -3775,7 +3775,7 @@
           <p:cNvPr id="5" name="Rectángulo: esquinas redondeadas 4">
             <a:extLst>
               <a:ext uri="{FF2B5EF4-FFF2-40B4-BE49-F238E27FC236}">
-                <a16:creationId xmlns:a16="http://schemas.microsoft.com/office/drawing/2014/main" id="{8FA6FB1C-07D4-3C91-2EBC-7BF26420A85D}"/>
+                <a16:creationId xmlns:a16="http://schemas.microsoft.com/office/drawing/2014/main" id="{10267645-03DD-3F9E-8A5C-ACC0A038705F}"/>
               </a:ext>
             </a:extLst>
           </p:cNvPr>
@@ -3829,7 +3829,7 @@
           <p:cNvPr id="6" name="CuadroTexto 5">
             <a:extLst>
               <a:ext uri="{FF2B5EF4-FFF2-40B4-BE49-F238E27FC236}">
-                <a16:creationId xmlns:a16="http://schemas.microsoft.com/office/drawing/2014/main" id="{CAFA737E-7877-A656-D66A-1719E860F090}"/>
+                <a16:creationId xmlns:a16="http://schemas.microsoft.com/office/drawing/2014/main" id="{D3574122-3348-8DEC-8605-5777C07B6B77}"/>
               </a:ext>
             </a:extLst>
           </p:cNvPr>
@@ -3869,7 +3869,7 @@
           <p:cNvPr id="7" name="CuadroTexto 6">
             <a:extLst>
               <a:ext uri="{FF2B5EF4-FFF2-40B4-BE49-F238E27FC236}">
-                <a16:creationId xmlns:a16="http://schemas.microsoft.com/office/drawing/2014/main" id="{B8E2502A-9E45-73E5-4753-CCC2DCC164AA}"/>
+                <a16:creationId xmlns:a16="http://schemas.microsoft.com/office/drawing/2014/main" id="{DECE2E86-538E-E01B-C1A1-43D459DEDF96}"/>
               </a:ext>
             </a:extLst>
           </p:cNvPr>
@@ -3988,7 +3988,7 @@
           <p:cNvPr id="8" name="Rectángulo: esquinas redondeadas 7">
             <a:extLst>
               <a:ext uri="{FF2B5EF4-FFF2-40B4-BE49-F238E27FC236}">
-                <a16:creationId xmlns:a16="http://schemas.microsoft.com/office/drawing/2014/main" id="{1249BF07-C029-8215-F68E-C663267BFB44}"/>
+                <a16:creationId xmlns:a16="http://schemas.microsoft.com/office/drawing/2014/main" id="{FE4AC941-C4EB-6AA4-CFEF-367570CD132C}"/>
               </a:ext>
             </a:extLst>
           </p:cNvPr>
@@ -4042,7 +4042,7 @@
           <p:cNvPr id="9" name="CuadroTexto 8">
             <a:extLst>
               <a:ext uri="{FF2B5EF4-FFF2-40B4-BE49-F238E27FC236}">
-                <a16:creationId xmlns:a16="http://schemas.microsoft.com/office/drawing/2014/main" id="{76409B55-1FF9-05CA-E20C-E946527B6ECD}"/>
+                <a16:creationId xmlns:a16="http://schemas.microsoft.com/office/drawing/2014/main" id="{DA230D46-A039-48F1-6951-B3907F354812}"/>
               </a:ext>
             </a:extLst>
           </p:cNvPr>
@@ -4082,7 +4082,7 @@
           <p:cNvPr id="10" name="CuadroTexto 9">
             <a:extLst>
               <a:ext uri="{FF2B5EF4-FFF2-40B4-BE49-F238E27FC236}">
-                <a16:creationId xmlns:a16="http://schemas.microsoft.com/office/drawing/2014/main" id="{4CA6F5FF-4D69-355C-34A2-CD3F5AF5358B}"/>
+                <a16:creationId xmlns:a16="http://schemas.microsoft.com/office/drawing/2014/main" id="{F9D1DCA1-02C2-37EC-F365-BF7A1591B8A5}"/>
               </a:ext>
             </a:extLst>
           </p:cNvPr>
@@ -4122,7 +4122,7 @@
           <p:cNvPr id="11" name="Rectángulo: esquinas redondeadas 10">
             <a:extLst>
               <a:ext uri="{FF2B5EF4-FFF2-40B4-BE49-F238E27FC236}">
-                <a16:creationId xmlns:a16="http://schemas.microsoft.com/office/drawing/2014/main" id="{8BFAF78B-1B2B-5291-293E-820940BCE32D}"/>
+                <a16:creationId xmlns:a16="http://schemas.microsoft.com/office/drawing/2014/main" id="{E39B7F81-D49F-313C-4427-E8F19D10EEAC}"/>
               </a:ext>
             </a:extLst>
           </p:cNvPr>
@@ -4176,7 +4176,7 @@
           <p:cNvPr id="12" name="CuadroTexto 11">
             <a:extLst>
               <a:ext uri="{FF2B5EF4-FFF2-40B4-BE49-F238E27FC236}">
-                <a16:creationId xmlns:a16="http://schemas.microsoft.com/office/drawing/2014/main" id="{0F4FC968-FEC4-DA0E-E391-9B756368F5C9}"/>
+                <a16:creationId xmlns:a16="http://schemas.microsoft.com/office/drawing/2014/main" id="{6A87F822-D891-FF4A-0F02-3A44124C393C}"/>
               </a:ext>
             </a:extLst>
           </p:cNvPr>
@@ -4216,7 +4216,7 @@
           <p:cNvPr id="13" name="CuadroTexto 12">
             <a:extLst>
               <a:ext uri="{FF2B5EF4-FFF2-40B4-BE49-F238E27FC236}">
-                <a16:creationId xmlns:a16="http://schemas.microsoft.com/office/drawing/2014/main" id="{0EC0647C-77B4-AF71-3D0D-E54806027063}"/>
+                <a16:creationId xmlns:a16="http://schemas.microsoft.com/office/drawing/2014/main" id="{CBD15F83-4415-9C0B-7155-65874520B084}"/>
               </a:ext>
             </a:extLst>
           </p:cNvPr>
@@ -4256,7 +4256,7 @@
           <p:cNvPr id="14" name="Rectángulo: esquinas redondeadas 13">
             <a:extLst>
               <a:ext uri="{FF2B5EF4-FFF2-40B4-BE49-F238E27FC236}">
-                <a16:creationId xmlns:a16="http://schemas.microsoft.com/office/drawing/2014/main" id="{5D4EC944-4691-ED16-8EC6-081AC36B8E33}"/>
+                <a16:creationId xmlns:a16="http://schemas.microsoft.com/office/drawing/2014/main" id="{E6277D89-DBAA-2D26-1F05-0DDA9C48350B}"/>
               </a:ext>
             </a:extLst>
           </p:cNvPr>
@@ -4310,7 +4310,7 @@
           <p:cNvPr id="15" name="CuadroTexto 14">
             <a:extLst>
               <a:ext uri="{FF2B5EF4-FFF2-40B4-BE49-F238E27FC236}">
-                <a16:creationId xmlns:a16="http://schemas.microsoft.com/office/drawing/2014/main" id="{3BAB85E2-4DE6-012A-94DB-3DD42C13458B}"/>
+                <a16:creationId xmlns:a16="http://schemas.microsoft.com/office/drawing/2014/main" id="{AFBCEB81-C9E4-117B-6E0E-691521121747}"/>
               </a:ext>
             </a:extLst>
           </p:cNvPr>
@@ -4350,7 +4350,7 @@
           <p:cNvPr id="16" name="CuadroTexto 15">
             <a:extLst>
               <a:ext uri="{FF2B5EF4-FFF2-40B4-BE49-F238E27FC236}">
-                <a16:creationId xmlns:a16="http://schemas.microsoft.com/office/drawing/2014/main" id="{89F92D73-D283-698B-4D77-606985933359}"/>
+                <a16:creationId xmlns:a16="http://schemas.microsoft.com/office/drawing/2014/main" id="{6CBE7796-47DA-A9C1-28C3-B31118239767}"/>
               </a:ext>
             </a:extLst>
           </p:cNvPr>
@@ -4390,7 +4390,7 @@
           <p:cNvPr id="17" name="Rectángulo: esquinas redondeadas 16">
             <a:extLst>
               <a:ext uri="{FF2B5EF4-FFF2-40B4-BE49-F238E27FC236}">
-                <a16:creationId xmlns:a16="http://schemas.microsoft.com/office/drawing/2014/main" id="{5D5B2AB5-87B9-B15C-018C-CEBB6F47100B}"/>
+                <a16:creationId xmlns:a16="http://schemas.microsoft.com/office/drawing/2014/main" id="{E412FF78-0457-639A-95B9-F5A764DC1F2E}"/>
               </a:ext>
             </a:extLst>
           </p:cNvPr>
@@ -4444,7 +4444,7 @@
           <p:cNvPr id="18" name="CuadroTexto 17">
             <a:extLst>
               <a:ext uri="{FF2B5EF4-FFF2-40B4-BE49-F238E27FC236}">
-                <a16:creationId xmlns:a16="http://schemas.microsoft.com/office/drawing/2014/main" id="{E9BC1837-93EF-D3CE-2CD8-8F3060F1A27B}"/>
+                <a16:creationId xmlns:a16="http://schemas.microsoft.com/office/drawing/2014/main" id="{101D4939-99A3-2E12-1723-E851F1822DD1}"/>
               </a:ext>
             </a:extLst>
           </p:cNvPr>
@@ -4484,7 +4484,7 @@
           <p:cNvPr id="19" name="CuadroTexto 18">
             <a:extLst>
               <a:ext uri="{FF2B5EF4-FFF2-40B4-BE49-F238E27FC236}">
-                <a16:creationId xmlns:a16="http://schemas.microsoft.com/office/drawing/2014/main" id="{A42F90E0-DE57-5568-4EDF-BABAE0AD47DA}"/>
+                <a16:creationId xmlns:a16="http://schemas.microsoft.com/office/drawing/2014/main" id="{930D73CA-612E-113F-E469-7345AC7385B8}"/>
               </a:ext>
             </a:extLst>
           </p:cNvPr>
@@ -4522,7 +4522,7 @@
     </p:spTree>
     <p:extLst>
       <p:ext uri="{BB962C8B-B14F-4D97-AF65-F5344CB8AC3E}">
-        <p14:creationId xmlns:p14="http://schemas.microsoft.com/office/powerpoint/2010/main" val="3532658494"/>
+        <p14:creationId xmlns:p14="http://schemas.microsoft.com/office/powerpoint/2010/main" val="1085261756"/>
       </p:ext>
     </p:extLst>
   </p:cSld>
@@ -4562,7 +4562,7 @@
           <p:cNvPr id="2" name="CuadroTexto 1">
             <a:extLst>
               <a:ext uri="{FF2B5EF4-FFF2-40B4-BE49-F238E27FC236}">
-                <a16:creationId xmlns:a16="http://schemas.microsoft.com/office/drawing/2014/main" id="{EB6C318D-A379-813A-0988-B1A9761E04CA}"/>
+                <a16:creationId xmlns:a16="http://schemas.microsoft.com/office/drawing/2014/main" id="{39CE2496-B627-360A-0DE6-E28B88385026}"/>
               </a:ext>
             </a:extLst>
           </p:cNvPr>
@@ -4602,7 +4602,7 @@
           <p:cNvPr id="3" name="CuadroTexto 2">
             <a:extLst>
               <a:ext uri="{FF2B5EF4-FFF2-40B4-BE49-F238E27FC236}">
-                <a16:creationId xmlns:a16="http://schemas.microsoft.com/office/drawing/2014/main" id="{3B42BBBE-4372-3EB3-C9B1-28067BAE8AB7}"/>
+                <a16:creationId xmlns:a16="http://schemas.microsoft.com/office/drawing/2014/main" id="{BEAAC5C9-558C-9D42-5BE1-5C7307F83F09}"/>
               </a:ext>
             </a:extLst>
           </p:cNvPr>
@@ -4642,7 +4642,7 @@
           <p:cNvPr id="4" name="CuadroTexto 3">
             <a:extLst>
               <a:ext uri="{FF2B5EF4-FFF2-40B4-BE49-F238E27FC236}">
-                <a16:creationId xmlns:a16="http://schemas.microsoft.com/office/drawing/2014/main" id="{01C176EB-D1AA-B5C4-7F31-C4594402B1B8}"/>
+                <a16:creationId xmlns:a16="http://schemas.microsoft.com/office/drawing/2014/main" id="{B69B89BD-8C1F-4180-61AA-830F085D55A4}"/>
               </a:ext>
             </a:extLst>
           </p:cNvPr>
@@ -4682,7 +4682,7 @@
           <p:cNvPr id="5" name="Rectángulo: esquinas redondeadas 4">
             <a:extLst>
               <a:ext uri="{FF2B5EF4-FFF2-40B4-BE49-F238E27FC236}">
-                <a16:creationId xmlns:a16="http://schemas.microsoft.com/office/drawing/2014/main" id="{0C1FA7CE-AA04-AF8B-B1AE-513BA4BC5676}"/>
+                <a16:creationId xmlns:a16="http://schemas.microsoft.com/office/drawing/2014/main" id="{A18BF32F-543C-4B07-53B5-071EF1D619EA}"/>
               </a:ext>
             </a:extLst>
           </p:cNvPr>
@@ -4736,7 +4736,7 @@
           <p:cNvPr id="6" name="CuadroTexto 5">
             <a:extLst>
               <a:ext uri="{FF2B5EF4-FFF2-40B4-BE49-F238E27FC236}">
-                <a16:creationId xmlns:a16="http://schemas.microsoft.com/office/drawing/2014/main" id="{ECF4DDCD-700B-10A4-0DBB-57683CF91507}"/>
+                <a16:creationId xmlns:a16="http://schemas.microsoft.com/office/drawing/2014/main" id="{7F47EC61-8F1D-2851-871F-131752F80F3C}"/>
               </a:ext>
             </a:extLst>
           </p:cNvPr>
@@ -4776,7 +4776,7 @@
           <p:cNvPr id="7" name="CuadroTexto 6">
             <a:extLst>
               <a:ext uri="{FF2B5EF4-FFF2-40B4-BE49-F238E27FC236}">
-                <a16:creationId xmlns:a16="http://schemas.microsoft.com/office/drawing/2014/main" id="{0B84B0ED-17A7-78DE-80F4-34C88011AC41}"/>
+                <a16:creationId xmlns:a16="http://schemas.microsoft.com/office/drawing/2014/main" id="{EDC65C6E-A3AC-7652-FC0C-195AF025C4A3}"/>
               </a:ext>
             </a:extLst>
           </p:cNvPr>
@@ -4816,7 +4816,7 @@
           <p:cNvPr id="8" name="Rectángulo: esquinas redondeadas 7">
             <a:extLst>
               <a:ext uri="{FF2B5EF4-FFF2-40B4-BE49-F238E27FC236}">
-                <a16:creationId xmlns:a16="http://schemas.microsoft.com/office/drawing/2014/main" id="{FBFBDBF3-96AF-ED49-4CB0-FE9650FF6A2C}"/>
+                <a16:creationId xmlns:a16="http://schemas.microsoft.com/office/drawing/2014/main" id="{E665AABE-9481-7904-707B-8B83BD57F6EE}"/>
               </a:ext>
             </a:extLst>
           </p:cNvPr>
@@ -4870,7 +4870,7 @@
           <p:cNvPr id="9" name="CuadroTexto 8">
             <a:extLst>
               <a:ext uri="{FF2B5EF4-FFF2-40B4-BE49-F238E27FC236}">
-                <a16:creationId xmlns:a16="http://schemas.microsoft.com/office/drawing/2014/main" id="{41887F25-D654-250B-E014-C7C2DCEBE80C}"/>
+                <a16:creationId xmlns:a16="http://schemas.microsoft.com/office/drawing/2014/main" id="{DFE73C81-E429-D3D9-830A-6DB641563943}"/>
               </a:ext>
             </a:extLst>
           </p:cNvPr>
@@ -4910,7 +4910,7 @@
           <p:cNvPr id="10" name="CuadroTexto 9">
             <a:extLst>
               <a:ext uri="{FF2B5EF4-FFF2-40B4-BE49-F238E27FC236}">
-                <a16:creationId xmlns:a16="http://schemas.microsoft.com/office/drawing/2014/main" id="{4D271785-A2ED-8972-3966-D833F2421BC8}"/>
+                <a16:creationId xmlns:a16="http://schemas.microsoft.com/office/drawing/2014/main" id="{B280473F-2B7C-326A-5B51-55325D52D43C}"/>
               </a:ext>
             </a:extLst>
           </p:cNvPr>
@@ -4950,7 +4950,7 @@
           <p:cNvPr id="11" name="Rectángulo: esquinas redondeadas 10">
             <a:extLst>
               <a:ext uri="{FF2B5EF4-FFF2-40B4-BE49-F238E27FC236}">
-                <a16:creationId xmlns:a16="http://schemas.microsoft.com/office/drawing/2014/main" id="{03CB2B5F-3C01-6895-DA2C-4CF6C14AC82C}"/>
+                <a16:creationId xmlns:a16="http://schemas.microsoft.com/office/drawing/2014/main" id="{6C36FDC8-533A-55F0-E957-C6CB5C8B24A9}"/>
               </a:ext>
             </a:extLst>
           </p:cNvPr>
@@ -5004,7 +5004,7 @@
           <p:cNvPr id="12" name="CuadroTexto 11">
             <a:extLst>
               <a:ext uri="{FF2B5EF4-FFF2-40B4-BE49-F238E27FC236}">
-                <a16:creationId xmlns:a16="http://schemas.microsoft.com/office/drawing/2014/main" id="{C880637A-CB1B-5782-D079-ACC2BE9637C5}"/>
+                <a16:creationId xmlns:a16="http://schemas.microsoft.com/office/drawing/2014/main" id="{3A22A1A6-B1CF-A65E-0681-A3C7634201C6}"/>
               </a:ext>
             </a:extLst>
           </p:cNvPr>
@@ -5044,7 +5044,7 @@
           <p:cNvPr id="13" name="CuadroTexto 12">
             <a:extLst>
               <a:ext uri="{FF2B5EF4-FFF2-40B4-BE49-F238E27FC236}">
-                <a16:creationId xmlns:a16="http://schemas.microsoft.com/office/drawing/2014/main" id="{D3DE608D-A0B7-5295-B3CD-640A62ED4713}"/>
+                <a16:creationId xmlns:a16="http://schemas.microsoft.com/office/drawing/2014/main" id="{7495F043-46E0-F646-7CC0-812ADC68107C}"/>
               </a:ext>
             </a:extLst>
           </p:cNvPr>
@@ -5084,7 +5084,7 @@
           <p:cNvPr id="14" name="CuadroTexto 13">
             <a:extLst>
               <a:ext uri="{FF2B5EF4-FFF2-40B4-BE49-F238E27FC236}">
-                <a16:creationId xmlns:a16="http://schemas.microsoft.com/office/drawing/2014/main" id="{72EC6BCA-D704-E1FF-9E90-0AE17FAE0EBB}"/>
+                <a16:creationId xmlns:a16="http://schemas.microsoft.com/office/drawing/2014/main" id="{AABD840C-177C-F59E-E464-A85BC72E47D1}"/>
               </a:ext>
             </a:extLst>
           </p:cNvPr>
@@ -5165,7 +5165,7 @@
     </p:spTree>
     <p:extLst>
       <p:ext uri="{BB962C8B-B14F-4D97-AF65-F5344CB8AC3E}">
-        <p14:creationId xmlns:p14="http://schemas.microsoft.com/office/powerpoint/2010/main" val="3405836489"/>
+        <p14:creationId xmlns:p14="http://schemas.microsoft.com/office/powerpoint/2010/main" val="2291224648"/>
       </p:ext>
     </p:extLst>
   </p:cSld>
@@ -5205,7 +5205,7 @@
           <p:cNvPr id="2" name="CuadroTexto 1">
             <a:extLst>
               <a:ext uri="{FF2B5EF4-FFF2-40B4-BE49-F238E27FC236}">
-                <a16:creationId xmlns:a16="http://schemas.microsoft.com/office/drawing/2014/main" id="{7B9B6B7E-C6B3-B223-1BFD-E8BEC0482E7E}"/>
+                <a16:creationId xmlns:a16="http://schemas.microsoft.com/office/drawing/2014/main" id="{5EB2B62B-0F5C-9FAE-3695-0B8096FE97A4}"/>
               </a:ext>
             </a:extLst>
           </p:cNvPr>
@@ -5245,7 +5245,7 @@
           <p:cNvPr id="3" name="CuadroTexto 2">
             <a:extLst>
               <a:ext uri="{FF2B5EF4-FFF2-40B4-BE49-F238E27FC236}">
-                <a16:creationId xmlns:a16="http://schemas.microsoft.com/office/drawing/2014/main" id="{16DCD38B-33FD-0819-047A-A0BC19FA6012}"/>
+                <a16:creationId xmlns:a16="http://schemas.microsoft.com/office/drawing/2014/main" id="{37CA2F4B-0533-C986-3A02-48FACB2697C0}"/>
               </a:ext>
             </a:extLst>
           </p:cNvPr>
@@ -5285,7 +5285,7 @@
           <p:cNvPr id="4" name="CuadroTexto 3">
             <a:extLst>
               <a:ext uri="{FF2B5EF4-FFF2-40B4-BE49-F238E27FC236}">
-                <a16:creationId xmlns:a16="http://schemas.microsoft.com/office/drawing/2014/main" id="{D99D53E9-606E-E5A8-BEAB-4AAFA0BA4E3E}"/>
+                <a16:creationId xmlns:a16="http://schemas.microsoft.com/office/drawing/2014/main" id="{124CAE04-6D4D-6E66-B65C-2AA45DF48920}"/>
               </a:ext>
             </a:extLst>
           </p:cNvPr>
@@ -5325,7 +5325,7 @@
           <p:cNvPr id="6" name="Imagen 5">
             <a:extLst>
               <a:ext uri="{FF2B5EF4-FFF2-40B4-BE49-F238E27FC236}">
-                <a16:creationId xmlns:a16="http://schemas.microsoft.com/office/drawing/2014/main" id="{2D78C6A8-502A-BF1F-7037-B92D921A1848}"/>
+                <a16:creationId xmlns:a16="http://schemas.microsoft.com/office/drawing/2014/main" id="{A54370F0-A0E6-C709-1CCD-B076CA92098A}"/>
               </a:ext>
             </a:extLst>
           </p:cNvPr>
@@ -5366,7 +5366,7 @@
           <p:cNvPr id="7" name="Rectángulo: esquinas redondeadas 6">
             <a:extLst>
               <a:ext uri="{FF2B5EF4-FFF2-40B4-BE49-F238E27FC236}">
-                <a16:creationId xmlns:a16="http://schemas.microsoft.com/office/drawing/2014/main" id="{4C3F84F1-C002-E42E-6F30-561370E14D4D}"/>
+                <a16:creationId xmlns:a16="http://schemas.microsoft.com/office/drawing/2014/main" id="{0CE70DC4-CFBF-C5FF-EC49-BEC5D22BDA9B}"/>
               </a:ext>
             </a:extLst>
           </p:cNvPr>
@@ -5420,7 +5420,7 @@
           <p:cNvPr id="8" name="CuadroTexto 7">
             <a:extLst>
               <a:ext uri="{FF2B5EF4-FFF2-40B4-BE49-F238E27FC236}">
-                <a16:creationId xmlns:a16="http://schemas.microsoft.com/office/drawing/2014/main" id="{34169844-49DA-44AD-10C8-4E9CB91B3260}"/>
+                <a16:creationId xmlns:a16="http://schemas.microsoft.com/office/drawing/2014/main" id="{7049EA37-A184-7DF4-182D-376712C62E7D}"/>
               </a:ext>
             </a:extLst>
           </p:cNvPr>
@@ -5460,7 +5460,7 @@
           <p:cNvPr id="9" name="CuadroTexto 8">
             <a:extLst>
               <a:ext uri="{FF2B5EF4-FFF2-40B4-BE49-F238E27FC236}">
-                <a16:creationId xmlns:a16="http://schemas.microsoft.com/office/drawing/2014/main" id="{158AF3C4-FC08-AD3B-5C94-74A4CA19B02D}"/>
+                <a16:creationId xmlns:a16="http://schemas.microsoft.com/office/drawing/2014/main" id="{71A22A06-4C0C-1CFA-3D77-69EBA41A267D}"/>
               </a:ext>
             </a:extLst>
           </p:cNvPr>
@@ -5500,7 +5500,7 @@
           <p:cNvPr id="10" name="CuadroTexto 9">
             <a:extLst>
               <a:ext uri="{FF2B5EF4-FFF2-40B4-BE49-F238E27FC236}">
-                <a16:creationId xmlns:a16="http://schemas.microsoft.com/office/drawing/2014/main" id="{5C1DB574-CDEA-B7AF-AB80-5B09A652AB85}"/>
+                <a16:creationId xmlns:a16="http://schemas.microsoft.com/office/drawing/2014/main" id="{89EDC992-F8C1-2C41-EA34-875E1A86BEBC}"/>
               </a:ext>
             </a:extLst>
           </p:cNvPr>
@@ -5599,7 +5599,7 @@
     </p:spTree>
     <p:extLst>
       <p:ext uri="{BB962C8B-B14F-4D97-AF65-F5344CB8AC3E}">
-        <p14:creationId xmlns:p14="http://schemas.microsoft.com/office/powerpoint/2010/main" val="2210462987"/>
+        <p14:creationId xmlns:p14="http://schemas.microsoft.com/office/powerpoint/2010/main" val="3498344873"/>
       </p:ext>
     </p:extLst>
   </p:cSld>
@@ -5639,7 +5639,7 @@
           <p:cNvPr id="2" name="CuadroTexto 1">
             <a:extLst>
               <a:ext uri="{FF2B5EF4-FFF2-40B4-BE49-F238E27FC236}">
-                <a16:creationId xmlns:a16="http://schemas.microsoft.com/office/drawing/2014/main" id="{42D3F0E6-C8A7-090D-EAF0-34D303DC63CB}"/>
+                <a16:creationId xmlns:a16="http://schemas.microsoft.com/office/drawing/2014/main" id="{AADF5E54-0B47-2896-54E3-FE6E770510EF}"/>
               </a:ext>
             </a:extLst>
           </p:cNvPr>
@@ -5679,7 +5679,7 @@
           <p:cNvPr id="3" name="CuadroTexto 2">
             <a:extLst>
               <a:ext uri="{FF2B5EF4-FFF2-40B4-BE49-F238E27FC236}">
-                <a16:creationId xmlns:a16="http://schemas.microsoft.com/office/drawing/2014/main" id="{173FB023-723C-BFD4-D252-82974DA3A6C8}"/>
+                <a16:creationId xmlns:a16="http://schemas.microsoft.com/office/drawing/2014/main" id="{891576B8-16A1-4495-17BF-3AC78195030B}"/>
               </a:ext>
             </a:extLst>
           </p:cNvPr>
@@ -5719,7 +5719,7 @@
           <p:cNvPr id="4" name="CuadroTexto 3">
             <a:extLst>
               <a:ext uri="{FF2B5EF4-FFF2-40B4-BE49-F238E27FC236}">
-                <a16:creationId xmlns:a16="http://schemas.microsoft.com/office/drawing/2014/main" id="{8658B0A6-E10F-F98A-76F7-ED59C2343165}"/>
+                <a16:creationId xmlns:a16="http://schemas.microsoft.com/office/drawing/2014/main" id="{0FD1BC3C-47BB-01C6-455A-6F6A671E45B6}"/>
               </a:ext>
             </a:extLst>
           </p:cNvPr>
@@ -5749,7 +5749,7 @@
                 </a:solidFill>
                 <a:latin typeface="Segoe UI" panose="020B0502040204020203" pitchFamily="34" charset="0"/>
               </a:rPr>
-              <a:t>La parte tecnica ya no depende de varios terminales sueltos: queda centralizada en una sola app.</a:t>
+              <a:t>La parte tecnica ya no depende de varios terminales sueltos ni de una pagina web separada: queda centralizada en una sola app.</a:t>
             </a:r>
           </a:p>
         </p:txBody>
@@ -5759,7 +5759,7 @@
           <p:cNvPr id="6" name="Imagen 5">
             <a:extLst>
               <a:ext uri="{FF2B5EF4-FFF2-40B4-BE49-F238E27FC236}">
-                <a16:creationId xmlns:a16="http://schemas.microsoft.com/office/drawing/2014/main" id="{95488A2C-AD32-68EC-13CD-150018457362}"/>
+                <a16:creationId xmlns:a16="http://schemas.microsoft.com/office/drawing/2014/main" id="{367917A3-75A8-786E-F069-61A34019FAE3}"/>
               </a:ext>
             </a:extLst>
           </p:cNvPr>
@@ -5782,8 +5782,8 @@
         </p:blipFill>
         <p:spPr>
           <a:xfrm>
-            <a:off x="635000" y="2305843"/>
-            <a:ext cx="5461000" cy="3071813"/>
+            <a:off x="635000" y="2342377"/>
+            <a:ext cx="5461000" cy="2998746"/>
           </a:xfrm>
           <a:prstGeom prst="rect">
             <a:avLst/>
@@ -5800,7 +5800,7 @@
           <p:cNvPr id="7" name="CuadroTexto 6">
             <a:extLst>
               <a:ext uri="{FF2B5EF4-FFF2-40B4-BE49-F238E27FC236}">
-                <a16:creationId xmlns:a16="http://schemas.microsoft.com/office/drawing/2014/main" id="{C1933801-18FB-DD6E-590C-18C7B2D41FF3}"/>
+                <a16:creationId xmlns:a16="http://schemas.microsoft.com/office/drawing/2014/main" id="{373B96C4-CCAA-90A8-2D8D-513A151039E8}"/>
               </a:ext>
             </a:extLst>
           </p:cNvPr>
@@ -5855,7 +5855,7 @@
                 </a:solidFill>
                 <a:latin typeface="Segoe UI" panose="020B0502040204020203" pitchFamily="34" charset="0"/>
               </a:rPr>
-              <a:t>Modo cloud para monitor, smoke, logs y reinicios remotos.</a:t>
+              <a:t>Modo cloud para estado, smoke, logs y reinicios remotos.</a:t>
             </a:r>
           </a:p>
           <a:p>
@@ -5917,7 +5917,7 @@
     </p:spTree>
     <p:extLst>
       <p:ext uri="{BB962C8B-B14F-4D97-AF65-F5344CB8AC3E}">
-        <p14:creationId xmlns:p14="http://schemas.microsoft.com/office/powerpoint/2010/main" val="198109559"/>
+        <p14:creationId xmlns:p14="http://schemas.microsoft.com/office/powerpoint/2010/main" val="1503816519"/>
       </p:ext>
     </p:extLst>
   </p:cSld>
@@ -5957,7 +5957,7 @@
           <p:cNvPr id="2" name="CuadroTexto 1">
             <a:extLst>
               <a:ext uri="{FF2B5EF4-FFF2-40B4-BE49-F238E27FC236}">
-                <a16:creationId xmlns:a16="http://schemas.microsoft.com/office/drawing/2014/main" id="{58A8D320-D3D9-D479-857F-592D2A98B6D5}"/>
+                <a16:creationId xmlns:a16="http://schemas.microsoft.com/office/drawing/2014/main" id="{F3430133-8CE9-88BB-A591-7BC0AE2A0DDD}"/>
               </a:ext>
             </a:extLst>
           </p:cNvPr>
@@ -5997,7 +5997,7 @@
           <p:cNvPr id="3" name="CuadroTexto 2">
             <a:extLst>
               <a:ext uri="{FF2B5EF4-FFF2-40B4-BE49-F238E27FC236}">
-                <a16:creationId xmlns:a16="http://schemas.microsoft.com/office/drawing/2014/main" id="{45502EFF-453D-C37B-4866-D796ED1BF587}"/>
+                <a16:creationId xmlns:a16="http://schemas.microsoft.com/office/drawing/2014/main" id="{AEA9BB5A-9ABC-1992-B21F-7371FD34CBB4}"/>
               </a:ext>
             </a:extLst>
           </p:cNvPr>
@@ -6037,7 +6037,7 @@
           <p:cNvPr id="4" name="Rectángulo: esquinas redondeadas 3">
             <a:extLst>
               <a:ext uri="{FF2B5EF4-FFF2-40B4-BE49-F238E27FC236}">
-                <a16:creationId xmlns:a16="http://schemas.microsoft.com/office/drawing/2014/main" id="{0EB9F5AA-9213-DCCA-BFC2-9145D86110F3}"/>
+                <a16:creationId xmlns:a16="http://schemas.microsoft.com/office/drawing/2014/main" id="{50330CCE-5524-BE3B-45F1-DEDCF3A76619}"/>
               </a:ext>
             </a:extLst>
           </p:cNvPr>
@@ -6091,7 +6091,7 @@
           <p:cNvPr id="5" name="CuadroTexto 4">
             <a:extLst>
               <a:ext uri="{FF2B5EF4-FFF2-40B4-BE49-F238E27FC236}">
-                <a16:creationId xmlns:a16="http://schemas.microsoft.com/office/drawing/2014/main" id="{78F637CC-F7B3-7720-B1F3-148835C7B0A3}"/>
+                <a16:creationId xmlns:a16="http://schemas.microsoft.com/office/drawing/2014/main" id="{1D2A64B2-6905-97C5-511E-73058293DD54}"/>
               </a:ext>
             </a:extLst>
           </p:cNvPr>
@@ -6131,7 +6131,7 @@
           <p:cNvPr id="6" name="CuadroTexto 5">
             <a:extLst>
               <a:ext uri="{FF2B5EF4-FFF2-40B4-BE49-F238E27FC236}">
-                <a16:creationId xmlns:a16="http://schemas.microsoft.com/office/drawing/2014/main" id="{C3BF3B7F-00E6-45F1-1BBD-77C5C001A21B}"/>
+                <a16:creationId xmlns:a16="http://schemas.microsoft.com/office/drawing/2014/main" id="{1392E5AB-DD85-70A4-DE0F-CB2EC849E5A2}"/>
               </a:ext>
             </a:extLst>
           </p:cNvPr>
@@ -6171,7 +6171,7 @@
           <p:cNvPr id="7" name="Rectángulo: esquinas redondeadas 6">
             <a:extLst>
               <a:ext uri="{FF2B5EF4-FFF2-40B4-BE49-F238E27FC236}">
-                <a16:creationId xmlns:a16="http://schemas.microsoft.com/office/drawing/2014/main" id="{75ABA86E-3F26-5381-6A09-2098F1B7A76F}"/>
+                <a16:creationId xmlns:a16="http://schemas.microsoft.com/office/drawing/2014/main" id="{ABB172E4-595B-4818-63FB-64A0B92E2278}"/>
               </a:ext>
             </a:extLst>
           </p:cNvPr>
@@ -6225,7 +6225,7 @@
           <p:cNvPr id="8" name="CuadroTexto 7">
             <a:extLst>
               <a:ext uri="{FF2B5EF4-FFF2-40B4-BE49-F238E27FC236}">
-                <a16:creationId xmlns:a16="http://schemas.microsoft.com/office/drawing/2014/main" id="{01C63BFB-98C4-7ED5-773B-9E0E5B0F060A}"/>
+                <a16:creationId xmlns:a16="http://schemas.microsoft.com/office/drawing/2014/main" id="{9166C8F3-81C6-8EEC-CF1A-30A9D05A8D2A}"/>
               </a:ext>
             </a:extLst>
           </p:cNvPr>
@@ -6265,7 +6265,7 @@
           <p:cNvPr id="9" name="CuadroTexto 8">
             <a:extLst>
               <a:ext uri="{FF2B5EF4-FFF2-40B4-BE49-F238E27FC236}">
-                <a16:creationId xmlns:a16="http://schemas.microsoft.com/office/drawing/2014/main" id="{B97B74B2-7776-1E59-2D39-45BF642969E4}"/>
+                <a16:creationId xmlns:a16="http://schemas.microsoft.com/office/drawing/2014/main" id="{CE499E91-418B-4215-3ADE-DEA04F0C1D15}"/>
               </a:ext>
             </a:extLst>
           </p:cNvPr>
@@ -6305,7 +6305,7 @@
           <p:cNvPr id="10" name="Rectángulo: esquinas redondeadas 9">
             <a:extLst>
               <a:ext uri="{FF2B5EF4-FFF2-40B4-BE49-F238E27FC236}">
-                <a16:creationId xmlns:a16="http://schemas.microsoft.com/office/drawing/2014/main" id="{A1D25B25-7532-80F7-A1BC-B653824749E7}"/>
+                <a16:creationId xmlns:a16="http://schemas.microsoft.com/office/drawing/2014/main" id="{853A2DBA-0CA8-E3D3-DDAA-6D31ECEC1F06}"/>
               </a:ext>
             </a:extLst>
           </p:cNvPr>
@@ -6359,7 +6359,7 @@
           <p:cNvPr id="11" name="CuadroTexto 10">
             <a:extLst>
               <a:ext uri="{FF2B5EF4-FFF2-40B4-BE49-F238E27FC236}">
-                <a16:creationId xmlns:a16="http://schemas.microsoft.com/office/drawing/2014/main" id="{4BF23786-17DA-8D81-ACC7-DE506C18099A}"/>
+                <a16:creationId xmlns:a16="http://schemas.microsoft.com/office/drawing/2014/main" id="{29D7216D-962D-40B3-A00F-974B4DE9EC8E}"/>
               </a:ext>
             </a:extLst>
           </p:cNvPr>
@@ -6399,7 +6399,7 @@
           <p:cNvPr id="12" name="CuadroTexto 11">
             <a:extLst>
               <a:ext uri="{FF2B5EF4-FFF2-40B4-BE49-F238E27FC236}">
-                <a16:creationId xmlns:a16="http://schemas.microsoft.com/office/drawing/2014/main" id="{0CCE4AB0-8957-E3DE-AA4F-1766A6C32A75}"/>
+                <a16:creationId xmlns:a16="http://schemas.microsoft.com/office/drawing/2014/main" id="{454119C0-8814-A475-8953-AE96D966C455}"/>
               </a:ext>
             </a:extLst>
           </p:cNvPr>
@@ -6439,7 +6439,7 @@
           <p:cNvPr id="13" name="Rectángulo: esquinas redondeadas 12">
             <a:extLst>
               <a:ext uri="{FF2B5EF4-FFF2-40B4-BE49-F238E27FC236}">
-                <a16:creationId xmlns:a16="http://schemas.microsoft.com/office/drawing/2014/main" id="{2A2CF79F-7B26-6FF9-27BE-288884F83C81}"/>
+                <a16:creationId xmlns:a16="http://schemas.microsoft.com/office/drawing/2014/main" id="{B47F82F8-76A3-7CF0-F92E-2D0310069701}"/>
               </a:ext>
             </a:extLst>
           </p:cNvPr>
@@ -6493,7 +6493,7 @@
           <p:cNvPr id="14" name="CuadroTexto 13">
             <a:extLst>
               <a:ext uri="{FF2B5EF4-FFF2-40B4-BE49-F238E27FC236}">
-                <a16:creationId xmlns:a16="http://schemas.microsoft.com/office/drawing/2014/main" id="{D9E33C67-CB50-BC7D-9ABD-8F6AB00E83ED}"/>
+                <a16:creationId xmlns:a16="http://schemas.microsoft.com/office/drawing/2014/main" id="{ED02E93D-7A42-BD7A-43B8-420A5927D2DE}"/>
               </a:ext>
             </a:extLst>
           </p:cNvPr>
@@ -6533,7 +6533,7 @@
           <p:cNvPr id="15" name="CuadroTexto 14">
             <a:extLst>
               <a:ext uri="{FF2B5EF4-FFF2-40B4-BE49-F238E27FC236}">
-                <a16:creationId xmlns:a16="http://schemas.microsoft.com/office/drawing/2014/main" id="{A7459030-4D23-0822-8CD0-1B97AE0B84BC}"/>
+                <a16:creationId xmlns:a16="http://schemas.microsoft.com/office/drawing/2014/main" id="{81D2B069-110C-FD48-F253-00EF4E48E793}"/>
               </a:ext>
             </a:extLst>
           </p:cNvPr>
@@ -6573,7 +6573,7 @@
           <p:cNvPr id="16" name="CuadroTexto 15">
             <a:extLst>
               <a:ext uri="{FF2B5EF4-FFF2-40B4-BE49-F238E27FC236}">
-                <a16:creationId xmlns:a16="http://schemas.microsoft.com/office/drawing/2014/main" id="{458ACC12-BE56-02A8-3685-6CEB8BF8C5BB}"/>
+                <a16:creationId xmlns:a16="http://schemas.microsoft.com/office/drawing/2014/main" id="{12158504-D060-9EA0-221B-41A981AF51C2}"/>
               </a:ext>
             </a:extLst>
           </p:cNvPr>
@@ -6628,7 +6628,7 @@
                 </a:solidFill>
                 <a:latin typeface="Segoe UI" panose="020B0502040204020203" pitchFamily="34" charset="0"/>
               </a:rPr>
-              <a:t>Verificados correo, rechazo, URLs publicas, chat, monitor legacy y app de escritorio.</a:t>
+              <a:t>Verificados correo, rechazo, URLs publicas, chat y consola tecnica de escritorio.</a:t>
             </a:r>
           </a:p>
           <a:p>
@@ -6656,7 +6656,7 @@
           <p:cNvPr id="17" name="CuadroTexto 16">
             <a:extLst>
               <a:ext uri="{FF2B5EF4-FFF2-40B4-BE49-F238E27FC236}">
-                <a16:creationId xmlns:a16="http://schemas.microsoft.com/office/drawing/2014/main" id="{865254E5-511B-D601-A467-89263CA473C4}"/>
+                <a16:creationId xmlns:a16="http://schemas.microsoft.com/office/drawing/2014/main" id="{1510BF8C-088D-0F57-AC6A-E090829EA2CB}"/>
               </a:ext>
             </a:extLst>
           </p:cNvPr>
@@ -6694,7 +6694,7 @@
     </p:spTree>
     <p:extLst>
       <p:ext uri="{BB962C8B-B14F-4D97-AF65-F5344CB8AC3E}">
-        <p14:creationId xmlns:p14="http://schemas.microsoft.com/office/powerpoint/2010/main" val="4151966672"/>
+        <p14:creationId xmlns:p14="http://schemas.microsoft.com/office/powerpoint/2010/main" val="2217278504"/>
       </p:ext>
     </p:extLst>
   </p:cSld>
@@ -6734,7 +6734,7 @@
           <p:cNvPr id="2" name="CuadroTexto 1">
             <a:extLst>
               <a:ext uri="{FF2B5EF4-FFF2-40B4-BE49-F238E27FC236}">
-                <a16:creationId xmlns:a16="http://schemas.microsoft.com/office/drawing/2014/main" id="{5196CABB-6C82-094D-72E5-EAA8E0A9070B}"/>
+                <a16:creationId xmlns:a16="http://schemas.microsoft.com/office/drawing/2014/main" id="{AE97D073-59E3-5409-CF6C-C97B6296295A}"/>
               </a:ext>
             </a:extLst>
           </p:cNvPr>
@@ -6774,7 +6774,7 @@
           <p:cNvPr id="3" name="CuadroTexto 2">
             <a:extLst>
               <a:ext uri="{FF2B5EF4-FFF2-40B4-BE49-F238E27FC236}">
-                <a16:creationId xmlns:a16="http://schemas.microsoft.com/office/drawing/2014/main" id="{7DA1A7FB-DDF9-4965-7F17-B1761287B81A}"/>
+                <a16:creationId xmlns:a16="http://schemas.microsoft.com/office/drawing/2014/main" id="{B9C7F614-5499-76E6-C427-B77D4FC82F1B}"/>
               </a:ext>
             </a:extLst>
           </p:cNvPr>
@@ -6814,7 +6814,7 @@
           <p:cNvPr id="4" name="CuadroTexto 3">
             <a:extLst>
               <a:ext uri="{FF2B5EF4-FFF2-40B4-BE49-F238E27FC236}">
-                <a16:creationId xmlns:a16="http://schemas.microsoft.com/office/drawing/2014/main" id="{724B5627-82BD-3649-F968-C05ED6EAC3EB}"/>
+                <a16:creationId xmlns:a16="http://schemas.microsoft.com/office/drawing/2014/main" id="{37568BDC-19A1-B02B-11CC-CCD27F9083CE}"/>
               </a:ext>
             </a:extLst>
           </p:cNvPr>
@@ -6854,7 +6854,7 @@
           <p:cNvPr id="5" name="Rectángulo: esquinas redondeadas 4">
             <a:extLst>
               <a:ext uri="{FF2B5EF4-FFF2-40B4-BE49-F238E27FC236}">
-                <a16:creationId xmlns:a16="http://schemas.microsoft.com/office/drawing/2014/main" id="{2A49FF86-1A50-3660-9AB2-CC6B73910ACA}"/>
+                <a16:creationId xmlns:a16="http://schemas.microsoft.com/office/drawing/2014/main" id="{58FA41B2-903B-E960-4D4C-7649F102C072}"/>
               </a:ext>
             </a:extLst>
           </p:cNvPr>
@@ -6908,7 +6908,7 @@
           <p:cNvPr id="6" name="CuadroTexto 5">
             <a:extLst>
               <a:ext uri="{FF2B5EF4-FFF2-40B4-BE49-F238E27FC236}">
-                <a16:creationId xmlns:a16="http://schemas.microsoft.com/office/drawing/2014/main" id="{38BB3FBC-878F-C284-3984-DE711FA9AA3B}"/>
+                <a16:creationId xmlns:a16="http://schemas.microsoft.com/office/drawing/2014/main" id="{1D07C734-D680-766C-EEDF-F6D166A0306A}"/>
               </a:ext>
             </a:extLst>
           </p:cNvPr>
@@ -6948,7 +6948,7 @@
           <p:cNvPr id="7" name="CuadroTexto 6">
             <a:extLst>
               <a:ext uri="{FF2B5EF4-FFF2-40B4-BE49-F238E27FC236}">
-                <a16:creationId xmlns:a16="http://schemas.microsoft.com/office/drawing/2014/main" id="{705339D7-AE6F-CF6D-6835-7E5D280AF18C}"/>
+                <a16:creationId xmlns:a16="http://schemas.microsoft.com/office/drawing/2014/main" id="{BA9B237C-E4F3-61B4-E479-E549D931655B}"/>
               </a:ext>
             </a:extLst>
           </p:cNvPr>
@@ -6978,7 +6978,7 @@
                 </a:solidFill>
                 <a:latin typeface="Segoe UI" panose="020B0502040204020203" pitchFamily="34" charset="0"/>
               </a:rPr>
-              <a:t>La misma base sirve panel interno, portal externo, documentacion y la shell legacy.</a:t>
+              <a:t>La misma base sirve panel interno, portal externo y documentacion; la operacion tecnica se hace desde Agora Desktop.</a:t>
             </a:r>
           </a:p>
         </p:txBody>
@@ -6988,7 +6988,7 @@
           <p:cNvPr id="8" name="Rectángulo: esquinas redondeadas 7">
             <a:extLst>
               <a:ext uri="{FF2B5EF4-FFF2-40B4-BE49-F238E27FC236}">
-                <a16:creationId xmlns:a16="http://schemas.microsoft.com/office/drawing/2014/main" id="{8F0D1F64-5173-E6B0-2867-D732AF7FFA5F}"/>
+                <a16:creationId xmlns:a16="http://schemas.microsoft.com/office/drawing/2014/main" id="{DD42DE42-5955-D968-3FEC-2E1E9579A8C8}"/>
               </a:ext>
             </a:extLst>
           </p:cNvPr>
@@ -7042,7 +7042,7 @@
           <p:cNvPr id="9" name="CuadroTexto 8">
             <a:extLst>
               <a:ext uri="{FF2B5EF4-FFF2-40B4-BE49-F238E27FC236}">
-                <a16:creationId xmlns:a16="http://schemas.microsoft.com/office/drawing/2014/main" id="{4F197C26-BD49-5A86-7F1B-13A8F78E15EB}"/>
+                <a16:creationId xmlns:a16="http://schemas.microsoft.com/office/drawing/2014/main" id="{468B4253-FCBE-C837-4133-F7E478500FFB}"/>
               </a:ext>
             </a:extLst>
           </p:cNvPr>
@@ -7082,7 +7082,7 @@
           <p:cNvPr id="10" name="CuadroTexto 9">
             <a:extLst>
               <a:ext uri="{FF2B5EF4-FFF2-40B4-BE49-F238E27FC236}">
-                <a16:creationId xmlns:a16="http://schemas.microsoft.com/office/drawing/2014/main" id="{2F541267-B2E0-D780-2E45-4F992941AE9E}"/>
+                <a16:creationId xmlns:a16="http://schemas.microsoft.com/office/drawing/2014/main" id="{077F98AF-71D3-B7AA-A7BE-7F6AAB5DF75D}"/>
               </a:ext>
             </a:extLst>
           </p:cNvPr>
@@ -7122,7 +7122,7 @@
           <p:cNvPr id="11" name="CuadroTexto 10">
             <a:extLst>
               <a:ext uri="{FF2B5EF4-FFF2-40B4-BE49-F238E27FC236}">
-                <a16:creationId xmlns:a16="http://schemas.microsoft.com/office/drawing/2014/main" id="{1DB4DA62-221D-CA65-54CA-4FD5B8E97F3A}"/>
+                <a16:creationId xmlns:a16="http://schemas.microsoft.com/office/drawing/2014/main" id="{C1E5AB4E-15F6-D17F-8080-4724F36ADDC3}"/>
               </a:ext>
             </a:extLst>
           </p:cNvPr>
@@ -7162,7 +7162,7 @@
           <p:cNvPr id="12" name="CuadroTexto 11">
             <a:extLst>
               <a:ext uri="{FF2B5EF4-FFF2-40B4-BE49-F238E27FC236}">
-                <a16:creationId xmlns:a16="http://schemas.microsoft.com/office/drawing/2014/main" id="{502AC56E-84CB-EED9-95FE-6AB1C6B812B7}"/>
+                <a16:creationId xmlns:a16="http://schemas.microsoft.com/office/drawing/2014/main" id="{780F215D-46DF-AAAC-31BC-41213A603EF7}"/>
               </a:ext>
             </a:extLst>
           </p:cNvPr>
@@ -7243,7 +7243,7 @@
     </p:spTree>
     <p:extLst>
       <p:ext uri="{BB962C8B-B14F-4D97-AF65-F5344CB8AC3E}">
-        <p14:creationId xmlns:p14="http://schemas.microsoft.com/office/powerpoint/2010/main" val="262939549"/>
+        <p14:creationId xmlns:p14="http://schemas.microsoft.com/office/powerpoint/2010/main" val="3246461230"/>
       </p:ext>
     </p:extLst>
   </p:cSld>
@@ -7283,7 +7283,7 @@
           <p:cNvPr id="2" name="CuadroTexto 1">
             <a:extLst>
               <a:ext uri="{FF2B5EF4-FFF2-40B4-BE49-F238E27FC236}">
-                <a16:creationId xmlns:a16="http://schemas.microsoft.com/office/drawing/2014/main" id="{7F633AEB-C8E3-38F3-865A-AEFD904A6358}"/>
+                <a16:creationId xmlns:a16="http://schemas.microsoft.com/office/drawing/2014/main" id="{A4D3AD77-828F-E3E7-87B2-01EBE2689D0E}"/>
               </a:ext>
             </a:extLst>
           </p:cNvPr>
@@ -7323,7 +7323,7 @@
           <p:cNvPr id="3" name="CuadroTexto 2">
             <a:extLst>
               <a:ext uri="{FF2B5EF4-FFF2-40B4-BE49-F238E27FC236}">
-                <a16:creationId xmlns:a16="http://schemas.microsoft.com/office/drawing/2014/main" id="{777637BC-466E-38C8-DFF9-62CA4B5DFA28}"/>
+                <a16:creationId xmlns:a16="http://schemas.microsoft.com/office/drawing/2014/main" id="{99FAC8C5-54BD-E621-AF51-DB21D5D6637F}"/>
               </a:ext>
             </a:extLst>
           </p:cNvPr>
@@ -7363,7 +7363,7 @@
           <p:cNvPr id="4" name="CuadroTexto 3">
             <a:extLst>
               <a:ext uri="{FF2B5EF4-FFF2-40B4-BE49-F238E27FC236}">
-                <a16:creationId xmlns:a16="http://schemas.microsoft.com/office/drawing/2014/main" id="{985A282E-F38E-563B-C79A-5CA90EB7D04B}"/>
+                <a16:creationId xmlns:a16="http://schemas.microsoft.com/office/drawing/2014/main" id="{CC040CF0-AD7D-80D0-B96D-A615BCB8C1AD}"/>
               </a:ext>
             </a:extLst>
           </p:cNvPr>
@@ -7403,7 +7403,7 @@
           <p:cNvPr id="5" name="Rectángulo: esquinas redondeadas 4">
             <a:extLst>
               <a:ext uri="{FF2B5EF4-FFF2-40B4-BE49-F238E27FC236}">
-                <a16:creationId xmlns:a16="http://schemas.microsoft.com/office/drawing/2014/main" id="{332F11A3-16C4-FC00-5D74-A8A2B3FFA522}"/>
+                <a16:creationId xmlns:a16="http://schemas.microsoft.com/office/drawing/2014/main" id="{1F2CF240-B952-37B3-8E06-AA83F789C3B2}"/>
               </a:ext>
             </a:extLst>
           </p:cNvPr>
@@ -7457,7 +7457,7 @@
           <p:cNvPr id="6" name="CuadroTexto 5">
             <a:extLst>
               <a:ext uri="{FF2B5EF4-FFF2-40B4-BE49-F238E27FC236}">
-                <a16:creationId xmlns:a16="http://schemas.microsoft.com/office/drawing/2014/main" id="{571884CA-A07F-3CAE-ACA6-985260681AFC}"/>
+                <a16:creationId xmlns:a16="http://schemas.microsoft.com/office/drawing/2014/main" id="{FDD5E688-21C6-A61A-38ED-F2084F038141}"/>
               </a:ext>
             </a:extLst>
           </p:cNvPr>
@@ -7497,7 +7497,7 @@
           <p:cNvPr id="7" name="CuadroTexto 6">
             <a:extLst>
               <a:ext uri="{FF2B5EF4-FFF2-40B4-BE49-F238E27FC236}">
-                <a16:creationId xmlns:a16="http://schemas.microsoft.com/office/drawing/2014/main" id="{5BE67DF1-0FED-E550-864E-0EE8E8C01831}"/>
+                <a16:creationId xmlns:a16="http://schemas.microsoft.com/office/drawing/2014/main" id="{8EC20374-7D60-B373-5141-2B0E4B57A84A}"/>
               </a:ext>
             </a:extLst>
           </p:cNvPr>
@@ -7537,7 +7537,7 @@
           <p:cNvPr id="8" name="Rectángulo: esquinas redondeadas 7">
             <a:extLst>
               <a:ext uri="{FF2B5EF4-FFF2-40B4-BE49-F238E27FC236}">
-                <a16:creationId xmlns:a16="http://schemas.microsoft.com/office/drawing/2014/main" id="{0811625C-B8C8-7299-3317-0B357D650119}"/>
+                <a16:creationId xmlns:a16="http://schemas.microsoft.com/office/drawing/2014/main" id="{84089369-9A7A-35A8-0D6C-894B25FF9795}"/>
               </a:ext>
             </a:extLst>
           </p:cNvPr>
@@ -7591,7 +7591,7 @@
           <p:cNvPr id="9" name="CuadroTexto 8">
             <a:extLst>
               <a:ext uri="{FF2B5EF4-FFF2-40B4-BE49-F238E27FC236}">
-                <a16:creationId xmlns:a16="http://schemas.microsoft.com/office/drawing/2014/main" id="{856F0306-06DF-7A7F-C7BA-F37512E5D503}"/>
+                <a16:creationId xmlns:a16="http://schemas.microsoft.com/office/drawing/2014/main" id="{EEEC2744-B96F-CF63-628C-0EDA09C77340}"/>
               </a:ext>
             </a:extLst>
           </p:cNvPr>
@@ -7631,7 +7631,7 @@
           <p:cNvPr id="10" name="CuadroTexto 9">
             <a:extLst>
               <a:ext uri="{FF2B5EF4-FFF2-40B4-BE49-F238E27FC236}">
-                <a16:creationId xmlns:a16="http://schemas.microsoft.com/office/drawing/2014/main" id="{4103D061-5808-835F-DCB8-6E26A9B76CEF}"/>
+                <a16:creationId xmlns:a16="http://schemas.microsoft.com/office/drawing/2014/main" id="{81B5DCFA-D205-FAE9-F06F-EE173C4DD4F6}"/>
               </a:ext>
             </a:extLst>
           </p:cNvPr>
@@ -7671,7 +7671,7 @@
           <p:cNvPr id="11" name="Rectángulo: esquinas redondeadas 10">
             <a:extLst>
               <a:ext uri="{FF2B5EF4-FFF2-40B4-BE49-F238E27FC236}">
-                <a16:creationId xmlns:a16="http://schemas.microsoft.com/office/drawing/2014/main" id="{A7B72B3E-DC33-B561-CC44-0AD373119C10}"/>
+                <a16:creationId xmlns:a16="http://schemas.microsoft.com/office/drawing/2014/main" id="{1EA7C88D-9F11-A261-C173-0FE8F14772A8}"/>
               </a:ext>
             </a:extLst>
           </p:cNvPr>
@@ -7725,7 +7725,7 @@
           <p:cNvPr id="12" name="CuadroTexto 11">
             <a:extLst>
               <a:ext uri="{FF2B5EF4-FFF2-40B4-BE49-F238E27FC236}">
-                <a16:creationId xmlns:a16="http://schemas.microsoft.com/office/drawing/2014/main" id="{C7A4A240-D87D-25B5-5C1C-1CD3AF2FF11C}"/>
+                <a16:creationId xmlns:a16="http://schemas.microsoft.com/office/drawing/2014/main" id="{6A9BE991-68D7-7A46-3DAD-348D38562250}"/>
               </a:ext>
             </a:extLst>
           </p:cNvPr>
@@ -7765,7 +7765,7 @@
           <p:cNvPr id="13" name="CuadroTexto 12">
             <a:extLst>
               <a:ext uri="{FF2B5EF4-FFF2-40B4-BE49-F238E27FC236}">
-                <a16:creationId xmlns:a16="http://schemas.microsoft.com/office/drawing/2014/main" id="{3B5F7562-D71C-C0FA-2EFC-422D1BB96241}"/>
+                <a16:creationId xmlns:a16="http://schemas.microsoft.com/office/drawing/2014/main" id="{D336450E-CBEE-21AE-587B-B48FB2B794E0}"/>
               </a:ext>
             </a:extLst>
           </p:cNvPr>
@@ -7795,7 +7795,7 @@
                 </a:solidFill>
                 <a:latin typeface="Segoe UI" panose="020B0502040204020203" pitchFamily="34" charset="0"/>
               </a:rPr>
-              <a:t>Decidir si Agora Desktop absorbe por completo la shell web legacy.</a:t>
+              <a:t>Ampliar Agora Desktop con mas automatizacion y soporte operativo sin mezclarlo con negocio.</a:t>
             </a:r>
           </a:p>
         </p:txBody>
@@ -7805,7 +7805,7 @@
           <p:cNvPr id="14" name="CuadroTexto 13">
             <a:extLst>
               <a:ext uri="{FF2B5EF4-FFF2-40B4-BE49-F238E27FC236}">
-                <a16:creationId xmlns:a16="http://schemas.microsoft.com/office/drawing/2014/main" id="{5AB1583C-3074-97A2-1A5B-18B6057525B1}"/>
+                <a16:creationId xmlns:a16="http://schemas.microsoft.com/office/drawing/2014/main" id="{20BEA9F2-2AD8-C4B1-3F63-38965E41D1ED}"/>
               </a:ext>
             </a:extLst>
           </p:cNvPr>
@@ -7868,7 +7868,7 @@
     </p:spTree>
     <p:extLst>
       <p:ext uri="{BB962C8B-B14F-4D97-AF65-F5344CB8AC3E}">
-        <p14:creationId xmlns:p14="http://schemas.microsoft.com/office/powerpoint/2010/main" val="2899166005"/>
+        <p14:creationId xmlns:p14="http://schemas.microsoft.com/office/powerpoint/2010/main" val="3725548532"/>
       </p:ext>
     </p:extLst>
   </p:cSld>
@@ -7908,7 +7908,7 @@
           <p:cNvPr id="2" name="CuadroTexto 1">
             <a:extLst>
               <a:ext uri="{FF2B5EF4-FFF2-40B4-BE49-F238E27FC236}">
-                <a16:creationId xmlns:a16="http://schemas.microsoft.com/office/drawing/2014/main" id="{CF61135F-580E-C819-0791-91AF2067E3C1}"/>
+                <a16:creationId xmlns:a16="http://schemas.microsoft.com/office/drawing/2014/main" id="{C3DC3612-2058-06AC-93C9-ED0D67262948}"/>
               </a:ext>
             </a:extLst>
           </p:cNvPr>
@@ -7948,7 +7948,7 @@
           <p:cNvPr id="3" name="CuadroTexto 2">
             <a:extLst>
               <a:ext uri="{FF2B5EF4-FFF2-40B4-BE49-F238E27FC236}">
-                <a16:creationId xmlns:a16="http://schemas.microsoft.com/office/drawing/2014/main" id="{7CC7C245-2FAB-4F31-20FE-9FE749563D57}"/>
+                <a16:creationId xmlns:a16="http://schemas.microsoft.com/office/drawing/2014/main" id="{28C40224-81C6-4E36-7D5B-9F21B4FEE17C}"/>
               </a:ext>
             </a:extLst>
           </p:cNvPr>
@@ -7988,7 +7988,7 @@
           <p:cNvPr id="4" name="CuadroTexto 3">
             <a:extLst>
               <a:ext uri="{FF2B5EF4-FFF2-40B4-BE49-F238E27FC236}">
-                <a16:creationId xmlns:a16="http://schemas.microsoft.com/office/drawing/2014/main" id="{357ABC16-AB0D-EE8A-14EF-37E39CD730EF}"/>
+                <a16:creationId xmlns:a16="http://schemas.microsoft.com/office/drawing/2014/main" id="{9B5B60DC-A75D-45BE-804F-BC885F6F4CC1}"/>
               </a:ext>
             </a:extLst>
           </p:cNvPr>
@@ -8107,7 +8107,7 @@
           <p:cNvPr id="5" name="Rectángulo: esquinas redondeadas 4">
             <a:extLst>
               <a:ext uri="{FF2B5EF4-FFF2-40B4-BE49-F238E27FC236}">
-                <a16:creationId xmlns:a16="http://schemas.microsoft.com/office/drawing/2014/main" id="{39999316-951B-5CAB-36C3-24D49FFCF643}"/>
+                <a16:creationId xmlns:a16="http://schemas.microsoft.com/office/drawing/2014/main" id="{648C1DE9-6BD5-EBD7-9950-DAE8920F1FF1}"/>
               </a:ext>
             </a:extLst>
           </p:cNvPr>
@@ -8161,7 +8161,7 @@
           <p:cNvPr id="6" name="CuadroTexto 5">
             <a:extLst>
               <a:ext uri="{FF2B5EF4-FFF2-40B4-BE49-F238E27FC236}">
-                <a16:creationId xmlns:a16="http://schemas.microsoft.com/office/drawing/2014/main" id="{612F9E92-CDB7-87E4-9D52-9B136F4C6443}"/>
+                <a16:creationId xmlns:a16="http://schemas.microsoft.com/office/drawing/2014/main" id="{D36B12BC-610E-1351-D73C-368B4B1AC1CD}"/>
               </a:ext>
             </a:extLst>
           </p:cNvPr>
@@ -8201,7 +8201,7 @@
           <p:cNvPr id="7" name="CuadroTexto 6">
             <a:extLst>
               <a:ext uri="{FF2B5EF4-FFF2-40B4-BE49-F238E27FC236}">
-                <a16:creationId xmlns:a16="http://schemas.microsoft.com/office/drawing/2014/main" id="{1D8153D6-86E3-766B-D147-F91159556FE8}"/>
+                <a16:creationId xmlns:a16="http://schemas.microsoft.com/office/drawing/2014/main" id="{CB1052AB-829B-F3AE-5AE2-1F6026116D3D}"/>
               </a:ext>
             </a:extLst>
           </p:cNvPr>
@@ -8239,7 +8239,7 @@
     </p:spTree>
     <p:extLst>
       <p:ext uri="{BB962C8B-B14F-4D97-AF65-F5344CB8AC3E}">
-        <p14:creationId xmlns:p14="http://schemas.microsoft.com/office/powerpoint/2010/main" val="1501258835"/>
+        <p14:creationId xmlns:p14="http://schemas.microsoft.com/office/powerpoint/2010/main" val="1362884170"/>
       </p:ext>
     </p:extLst>
   </p:cSld>
@@ -8279,7 +8279,7 @@
           <p:cNvPr id="2" name="CuadroTexto 1">
             <a:extLst>
               <a:ext uri="{FF2B5EF4-FFF2-40B4-BE49-F238E27FC236}">
-                <a16:creationId xmlns:a16="http://schemas.microsoft.com/office/drawing/2014/main" id="{0751393D-4816-16A5-E38D-53548AC7220C}"/>
+                <a16:creationId xmlns:a16="http://schemas.microsoft.com/office/drawing/2014/main" id="{BA0FAC90-46C1-F43B-6044-79E44BD0FB48}"/>
               </a:ext>
             </a:extLst>
           </p:cNvPr>
@@ -8319,7 +8319,7 @@
           <p:cNvPr id="3" name="CuadroTexto 2">
             <a:extLst>
               <a:ext uri="{FF2B5EF4-FFF2-40B4-BE49-F238E27FC236}">
-                <a16:creationId xmlns:a16="http://schemas.microsoft.com/office/drawing/2014/main" id="{850BEDA8-F92B-B057-F39D-ADF6E9E10AB3}"/>
+                <a16:creationId xmlns:a16="http://schemas.microsoft.com/office/drawing/2014/main" id="{FBFEF832-13B0-1285-9F0B-8C1528AD7B98}"/>
               </a:ext>
             </a:extLst>
           </p:cNvPr>
@@ -8359,7 +8359,7 @@
           <p:cNvPr id="4" name="CuadroTexto 3">
             <a:extLst>
               <a:ext uri="{FF2B5EF4-FFF2-40B4-BE49-F238E27FC236}">
-                <a16:creationId xmlns:a16="http://schemas.microsoft.com/office/drawing/2014/main" id="{193BA8D5-7A9E-BAE3-A221-878D8AF96B9C}"/>
+                <a16:creationId xmlns:a16="http://schemas.microsoft.com/office/drawing/2014/main" id="{A975764C-8698-FBD2-A0AF-D6D4D70C13B7}"/>
               </a:ext>
             </a:extLst>
           </p:cNvPr>
@@ -8399,7 +8399,7 @@
           <p:cNvPr id="5" name="CuadroTexto 4">
             <a:extLst>
               <a:ext uri="{FF2B5EF4-FFF2-40B4-BE49-F238E27FC236}">
-                <a16:creationId xmlns:a16="http://schemas.microsoft.com/office/drawing/2014/main" id="{35F15734-46C2-69C6-5023-A197B05A5019}"/>
+                <a16:creationId xmlns:a16="http://schemas.microsoft.com/office/drawing/2014/main" id="{A51DC6F8-9DAE-639A-2D06-7950D96433A1}"/>
               </a:ext>
             </a:extLst>
           </p:cNvPr>
@@ -8482,7 +8482,7 @@
           <p:cNvPr id="6" name="CuadroTexto 5">
             <a:extLst>
               <a:ext uri="{FF2B5EF4-FFF2-40B4-BE49-F238E27FC236}">
-                <a16:creationId xmlns:a16="http://schemas.microsoft.com/office/drawing/2014/main" id="{2104C127-2FD0-AE74-977D-4AD83BE56564}"/>
+                <a16:creationId xmlns:a16="http://schemas.microsoft.com/office/drawing/2014/main" id="{D89D9B40-7C2B-6D34-46BD-BA660C281D6C}"/>
               </a:ext>
             </a:extLst>
           </p:cNvPr>
@@ -8520,7 +8520,7 @@
     </p:spTree>
     <p:extLst>
       <p:ext uri="{BB962C8B-B14F-4D97-AF65-F5344CB8AC3E}">
-        <p14:creationId xmlns:p14="http://schemas.microsoft.com/office/powerpoint/2010/main" val="799824649"/>
+        <p14:creationId xmlns:p14="http://schemas.microsoft.com/office/powerpoint/2010/main" val="4157162791"/>
       </p:ext>
     </p:extLst>
   </p:cSld>
@@ -8560,7 +8560,7 @@
           <p:cNvPr id="2" name="CuadroTexto 1">
             <a:extLst>
               <a:ext uri="{FF2B5EF4-FFF2-40B4-BE49-F238E27FC236}">
-                <a16:creationId xmlns:a16="http://schemas.microsoft.com/office/drawing/2014/main" id="{7BC4A996-C0DC-0661-E17E-8ED31D136F34}"/>
+                <a16:creationId xmlns:a16="http://schemas.microsoft.com/office/drawing/2014/main" id="{DDF56AC7-7911-E2BF-6CC8-50571390860A}"/>
               </a:ext>
             </a:extLst>
           </p:cNvPr>
@@ -8600,7 +8600,7 @@
           <p:cNvPr id="3" name="CuadroTexto 2">
             <a:extLst>
               <a:ext uri="{FF2B5EF4-FFF2-40B4-BE49-F238E27FC236}">
-                <a16:creationId xmlns:a16="http://schemas.microsoft.com/office/drawing/2014/main" id="{53D14285-670D-8745-1CD0-505DD2D0BC25}"/>
+                <a16:creationId xmlns:a16="http://schemas.microsoft.com/office/drawing/2014/main" id="{4DACE98E-D820-9E94-C264-77DF6C4CC2D0}"/>
               </a:ext>
             </a:extLst>
           </p:cNvPr>
@@ -8640,7 +8640,7 @@
           <p:cNvPr id="4" name="CuadroTexto 3">
             <a:extLst>
               <a:ext uri="{FF2B5EF4-FFF2-40B4-BE49-F238E27FC236}">
-                <a16:creationId xmlns:a16="http://schemas.microsoft.com/office/drawing/2014/main" id="{3F327E35-6509-576A-0D37-8F7EA77DB923}"/>
+                <a16:creationId xmlns:a16="http://schemas.microsoft.com/office/drawing/2014/main" id="{0E355E7C-61B8-B4B6-062F-AEE7AA8F3A2E}"/>
               </a:ext>
             </a:extLst>
           </p:cNvPr>
@@ -8680,7 +8680,7 @@
           <p:cNvPr id="5" name="CuadroTexto 4">
             <a:extLst>
               <a:ext uri="{FF2B5EF4-FFF2-40B4-BE49-F238E27FC236}">
-                <a16:creationId xmlns:a16="http://schemas.microsoft.com/office/drawing/2014/main" id="{F303F56F-1DE5-334F-E711-665F5FA30246}"/>
+                <a16:creationId xmlns:a16="http://schemas.microsoft.com/office/drawing/2014/main" id="{0C6AFCC8-F7F9-CD3D-7C00-AE222E696E86}"/>
               </a:ext>
             </a:extLst>
           </p:cNvPr>
@@ -8781,7 +8781,7 @@
           <p:cNvPr id="6" name="Rectángulo: esquinas redondeadas 5">
             <a:extLst>
               <a:ext uri="{FF2B5EF4-FFF2-40B4-BE49-F238E27FC236}">
-                <a16:creationId xmlns:a16="http://schemas.microsoft.com/office/drawing/2014/main" id="{17543611-9206-78E5-230B-C3BC42460A5C}"/>
+                <a16:creationId xmlns:a16="http://schemas.microsoft.com/office/drawing/2014/main" id="{36B6F8E0-E615-808A-AE2B-459EA13B7754}"/>
               </a:ext>
             </a:extLst>
           </p:cNvPr>
@@ -8835,7 +8835,7 @@
           <p:cNvPr id="7" name="CuadroTexto 6">
             <a:extLst>
               <a:ext uri="{FF2B5EF4-FFF2-40B4-BE49-F238E27FC236}">
-                <a16:creationId xmlns:a16="http://schemas.microsoft.com/office/drawing/2014/main" id="{F939EC5F-EB7F-DD90-6838-8B99D7D26098}"/>
+                <a16:creationId xmlns:a16="http://schemas.microsoft.com/office/drawing/2014/main" id="{A8189235-ECAA-6164-31A7-4E28D358B8AD}"/>
               </a:ext>
             </a:extLst>
           </p:cNvPr>
@@ -8875,7 +8875,7 @@
           <p:cNvPr id="8" name="CuadroTexto 7">
             <a:extLst>
               <a:ext uri="{FF2B5EF4-FFF2-40B4-BE49-F238E27FC236}">
-                <a16:creationId xmlns:a16="http://schemas.microsoft.com/office/drawing/2014/main" id="{2140C953-3759-A7F5-DAA6-AB2EE8DFC2B6}"/>
+                <a16:creationId xmlns:a16="http://schemas.microsoft.com/office/drawing/2014/main" id="{DDB71B71-AA2A-A750-F9FF-835945CF0CC0}"/>
               </a:ext>
             </a:extLst>
           </p:cNvPr>
@@ -8913,7 +8913,7 @@
     </p:spTree>
     <p:extLst>
       <p:ext uri="{BB962C8B-B14F-4D97-AF65-F5344CB8AC3E}">
-        <p14:creationId xmlns:p14="http://schemas.microsoft.com/office/powerpoint/2010/main" val="2782718717"/>
+        <p14:creationId xmlns:p14="http://schemas.microsoft.com/office/powerpoint/2010/main" val="3731850306"/>
       </p:ext>
     </p:extLst>
   </p:cSld>
@@ -8953,7 +8953,7 @@
           <p:cNvPr id="2" name="CuadroTexto 1">
             <a:extLst>
               <a:ext uri="{FF2B5EF4-FFF2-40B4-BE49-F238E27FC236}">
-                <a16:creationId xmlns:a16="http://schemas.microsoft.com/office/drawing/2014/main" id="{6D860636-5B88-65EB-66C8-525E9B1C5029}"/>
+                <a16:creationId xmlns:a16="http://schemas.microsoft.com/office/drawing/2014/main" id="{6AAB2597-D46F-DC71-2F5D-8B25AD7F5E96}"/>
               </a:ext>
             </a:extLst>
           </p:cNvPr>
@@ -8993,7 +8993,7 @@
           <p:cNvPr id="3" name="CuadroTexto 2">
             <a:extLst>
               <a:ext uri="{FF2B5EF4-FFF2-40B4-BE49-F238E27FC236}">
-                <a16:creationId xmlns:a16="http://schemas.microsoft.com/office/drawing/2014/main" id="{E73E6A14-075B-6C57-E09D-688C309193E6}"/>
+                <a16:creationId xmlns:a16="http://schemas.microsoft.com/office/drawing/2014/main" id="{5B0BFD7C-8183-3CF0-551B-72C4115A75D0}"/>
               </a:ext>
             </a:extLst>
           </p:cNvPr>
@@ -9033,7 +9033,7 @@
           <p:cNvPr id="4" name="Rectángulo: esquinas redondeadas 3">
             <a:extLst>
               <a:ext uri="{FF2B5EF4-FFF2-40B4-BE49-F238E27FC236}">
-                <a16:creationId xmlns:a16="http://schemas.microsoft.com/office/drawing/2014/main" id="{07AF75E8-38D7-18EA-3A3F-1E7C53957F73}"/>
+                <a16:creationId xmlns:a16="http://schemas.microsoft.com/office/drawing/2014/main" id="{5ACFF23C-810F-5790-7D24-C53279CEBFB7}"/>
               </a:ext>
             </a:extLst>
           </p:cNvPr>
@@ -9087,7 +9087,7 @@
           <p:cNvPr id="5" name="CuadroTexto 4">
             <a:extLst>
               <a:ext uri="{FF2B5EF4-FFF2-40B4-BE49-F238E27FC236}">
-                <a16:creationId xmlns:a16="http://schemas.microsoft.com/office/drawing/2014/main" id="{F952830A-94B6-5754-B734-F9BBA633C170}"/>
+                <a16:creationId xmlns:a16="http://schemas.microsoft.com/office/drawing/2014/main" id="{5FB3D499-5187-1BDF-4588-99C5D6332F04}"/>
               </a:ext>
             </a:extLst>
           </p:cNvPr>
@@ -9127,7 +9127,7 @@
           <p:cNvPr id="6" name="CuadroTexto 5">
             <a:extLst>
               <a:ext uri="{FF2B5EF4-FFF2-40B4-BE49-F238E27FC236}">
-                <a16:creationId xmlns:a16="http://schemas.microsoft.com/office/drawing/2014/main" id="{4352CCE7-B113-CDC9-3A6B-DB1FC63637ED}"/>
+                <a16:creationId xmlns:a16="http://schemas.microsoft.com/office/drawing/2014/main" id="{A90DAC83-A0C8-BD46-CF8F-8FCE3D48137D}"/>
               </a:ext>
             </a:extLst>
           </p:cNvPr>
@@ -9167,7 +9167,7 @@
           <p:cNvPr id="7" name="Rectángulo: esquinas redondeadas 6">
             <a:extLst>
               <a:ext uri="{FF2B5EF4-FFF2-40B4-BE49-F238E27FC236}">
-                <a16:creationId xmlns:a16="http://schemas.microsoft.com/office/drawing/2014/main" id="{EBFD86C3-8FE0-F47C-76BF-F5F3DA212EC3}"/>
+                <a16:creationId xmlns:a16="http://schemas.microsoft.com/office/drawing/2014/main" id="{91CAEE8A-4BB9-F904-5B9C-2A8358F24A0C}"/>
               </a:ext>
             </a:extLst>
           </p:cNvPr>
@@ -9221,7 +9221,7 @@
           <p:cNvPr id="8" name="CuadroTexto 7">
             <a:extLst>
               <a:ext uri="{FF2B5EF4-FFF2-40B4-BE49-F238E27FC236}">
-                <a16:creationId xmlns:a16="http://schemas.microsoft.com/office/drawing/2014/main" id="{6DA1BC90-8ADD-C160-177E-BDFDF9BF41D7}"/>
+                <a16:creationId xmlns:a16="http://schemas.microsoft.com/office/drawing/2014/main" id="{989F4701-DED3-63D5-604F-BD99DA9C461F}"/>
               </a:ext>
             </a:extLst>
           </p:cNvPr>
@@ -9261,7 +9261,7 @@
           <p:cNvPr id="9" name="CuadroTexto 8">
             <a:extLst>
               <a:ext uri="{FF2B5EF4-FFF2-40B4-BE49-F238E27FC236}">
-                <a16:creationId xmlns:a16="http://schemas.microsoft.com/office/drawing/2014/main" id="{CF218EFD-8AC8-6D5D-514C-DDFA96414C7B}"/>
+                <a16:creationId xmlns:a16="http://schemas.microsoft.com/office/drawing/2014/main" id="{59E830CB-5452-93D8-1B37-4A6C6438CD90}"/>
               </a:ext>
             </a:extLst>
           </p:cNvPr>
@@ -9301,7 +9301,7 @@
           <p:cNvPr id="10" name="Rectángulo: esquinas redondeadas 9">
             <a:extLst>
               <a:ext uri="{FF2B5EF4-FFF2-40B4-BE49-F238E27FC236}">
-                <a16:creationId xmlns:a16="http://schemas.microsoft.com/office/drawing/2014/main" id="{67EC4629-F2E7-0F54-0CF6-7300799CA813}"/>
+                <a16:creationId xmlns:a16="http://schemas.microsoft.com/office/drawing/2014/main" id="{2D6F1CA5-94D8-2603-631E-BD4AC7C7EBD1}"/>
               </a:ext>
             </a:extLst>
           </p:cNvPr>
@@ -9355,7 +9355,7 @@
           <p:cNvPr id="11" name="CuadroTexto 10">
             <a:extLst>
               <a:ext uri="{FF2B5EF4-FFF2-40B4-BE49-F238E27FC236}">
-                <a16:creationId xmlns:a16="http://schemas.microsoft.com/office/drawing/2014/main" id="{46F8E751-6AB2-7BE2-E9EF-0168332DF2AC}"/>
+                <a16:creationId xmlns:a16="http://schemas.microsoft.com/office/drawing/2014/main" id="{3A663033-27A2-3610-6B2D-7F359410D3C7}"/>
               </a:ext>
             </a:extLst>
           </p:cNvPr>
@@ -9395,7 +9395,7 @@
           <p:cNvPr id="12" name="CuadroTexto 11">
             <a:extLst>
               <a:ext uri="{FF2B5EF4-FFF2-40B4-BE49-F238E27FC236}">
-                <a16:creationId xmlns:a16="http://schemas.microsoft.com/office/drawing/2014/main" id="{D234A87B-E86D-5B5C-9A5A-B4AC9EC2DA71}"/>
+                <a16:creationId xmlns:a16="http://schemas.microsoft.com/office/drawing/2014/main" id="{5CC91123-17E1-FCBA-E28D-24E2E13D265D}"/>
               </a:ext>
             </a:extLst>
           </p:cNvPr>
@@ -9435,7 +9435,7 @@
           <p:cNvPr id="13" name="Rectángulo: esquinas redondeadas 12">
             <a:extLst>
               <a:ext uri="{FF2B5EF4-FFF2-40B4-BE49-F238E27FC236}">
-                <a16:creationId xmlns:a16="http://schemas.microsoft.com/office/drawing/2014/main" id="{D42F7469-EE53-A828-98A4-3CF2E1277762}"/>
+                <a16:creationId xmlns:a16="http://schemas.microsoft.com/office/drawing/2014/main" id="{B5DB876D-AC76-BBF4-BA80-FB66462E361B}"/>
               </a:ext>
             </a:extLst>
           </p:cNvPr>
@@ -9489,7 +9489,7 @@
           <p:cNvPr id="14" name="CuadroTexto 13">
             <a:extLst>
               <a:ext uri="{FF2B5EF4-FFF2-40B4-BE49-F238E27FC236}">
-                <a16:creationId xmlns:a16="http://schemas.microsoft.com/office/drawing/2014/main" id="{F60BBF21-3D4D-94FA-3519-4D64AAC54A71}"/>
+                <a16:creationId xmlns:a16="http://schemas.microsoft.com/office/drawing/2014/main" id="{7F44A214-6240-E986-C66F-ECF824B30C93}"/>
               </a:ext>
             </a:extLst>
           </p:cNvPr>
@@ -9529,7 +9529,7 @@
           <p:cNvPr id="15" name="CuadroTexto 14">
             <a:extLst>
               <a:ext uri="{FF2B5EF4-FFF2-40B4-BE49-F238E27FC236}">
-                <a16:creationId xmlns:a16="http://schemas.microsoft.com/office/drawing/2014/main" id="{4D56B5AF-74E7-D2F9-212A-B052B5521A6F}"/>
+                <a16:creationId xmlns:a16="http://schemas.microsoft.com/office/drawing/2014/main" id="{610B48E6-11A1-611D-CE0A-7C67FBD0FDAF}"/>
               </a:ext>
             </a:extLst>
           </p:cNvPr>
@@ -9567,7 +9567,7 @@
     </p:spTree>
     <p:extLst>
       <p:ext uri="{BB962C8B-B14F-4D97-AF65-F5344CB8AC3E}">
-        <p14:creationId xmlns:p14="http://schemas.microsoft.com/office/powerpoint/2010/main" val="2920862296"/>
+        <p14:creationId xmlns:p14="http://schemas.microsoft.com/office/powerpoint/2010/main" val="2054924816"/>
       </p:ext>
     </p:extLst>
   </p:cSld>
@@ -9607,7 +9607,7 @@
           <p:cNvPr id="2" name="CuadroTexto 1">
             <a:extLst>
               <a:ext uri="{FF2B5EF4-FFF2-40B4-BE49-F238E27FC236}">
-                <a16:creationId xmlns:a16="http://schemas.microsoft.com/office/drawing/2014/main" id="{928A9E5C-1A80-0CAB-CDFE-C6322207A13A}"/>
+                <a16:creationId xmlns:a16="http://schemas.microsoft.com/office/drawing/2014/main" id="{B00CF1E5-9882-84D1-A36B-F9975948F1C6}"/>
               </a:ext>
             </a:extLst>
           </p:cNvPr>
@@ -9647,7 +9647,7 @@
           <p:cNvPr id="3" name="CuadroTexto 2">
             <a:extLst>
               <a:ext uri="{FF2B5EF4-FFF2-40B4-BE49-F238E27FC236}">
-                <a16:creationId xmlns:a16="http://schemas.microsoft.com/office/drawing/2014/main" id="{796BA637-4BC9-9863-06B2-643CF9089114}"/>
+                <a16:creationId xmlns:a16="http://schemas.microsoft.com/office/drawing/2014/main" id="{1B084417-75B2-1CA6-8C4F-EDF1A9BF7DBA}"/>
               </a:ext>
             </a:extLst>
           </p:cNvPr>
@@ -9687,7 +9687,7 @@
           <p:cNvPr id="4" name="CuadroTexto 3">
             <a:extLst>
               <a:ext uri="{FF2B5EF4-FFF2-40B4-BE49-F238E27FC236}">
-                <a16:creationId xmlns:a16="http://schemas.microsoft.com/office/drawing/2014/main" id="{F3E28275-3FDB-C476-1898-8C59DA2BEAD2}"/>
+                <a16:creationId xmlns:a16="http://schemas.microsoft.com/office/drawing/2014/main" id="{2314A682-2146-998E-587D-E8B92A72BFEC}"/>
               </a:ext>
             </a:extLst>
           </p:cNvPr>
@@ -9727,7 +9727,7 @@
           <p:cNvPr id="6" name="Imagen 5">
             <a:extLst>
               <a:ext uri="{FF2B5EF4-FFF2-40B4-BE49-F238E27FC236}">
-                <a16:creationId xmlns:a16="http://schemas.microsoft.com/office/drawing/2014/main" id="{CC39E8F7-737C-9985-4F61-E7041E46D350}"/>
+                <a16:creationId xmlns:a16="http://schemas.microsoft.com/office/drawing/2014/main" id="{3C9AB106-711F-8883-918A-0B752336D248}"/>
               </a:ext>
             </a:extLst>
           </p:cNvPr>
@@ -9750,8 +9750,8 @@
         </p:blipFill>
         <p:spPr>
           <a:xfrm>
-            <a:off x="812022" y="2006600"/>
-            <a:ext cx="6427756" cy="3937000"/>
+            <a:off x="787400" y="2196774"/>
+            <a:ext cx="6477000" cy="3556652"/>
           </a:xfrm>
           <a:prstGeom prst="rect">
             <a:avLst/>
@@ -9768,7 +9768,7 @@
           <p:cNvPr id="7" name="CuadroTexto 6">
             <a:extLst>
               <a:ext uri="{FF2B5EF4-FFF2-40B4-BE49-F238E27FC236}">
-                <a16:creationId xmlns:a16="http://schemas.microsoft.com/office/drawing/2014/main" id="{912DDBBC-7C3C-A465-43FB-7E293FA4767D}"/>
+                <a16:creationId xmlns:a16="http://schemas.microsoft.com/office/drawing/2014/main" id="{BFF87F8D-632E-0E66-12F6-BCED179951DD}"/>
               </a:ext>
             </a:extLst>
           </p:cNvPr>
@@ -9885,7 +9885,7 @@
     </p:spTree>
     <p:extLst>
       <p:ext uri="{BB962C8B-B14F-4D97-AF65-F5344CB8AC3E}">
-        <p14:creationId xmlns:p14="http://schemas.microsoft.com/office/powerpoint/2010/main" val="1820082989"/>
+        <p14:creationId xmlns:p14="http://schemas.microsoft.com/office/powerpoint/2010/main" val="1561485036"/>
       </p:ext>
     </p:extLst>
   </p:cSld>
@@ -9925,7 +9925,7 @@
           <p:cNvPr id="2" name="CuadroTexto 1">
             <a:extLst>
               <a:ext uri="{FF2B5EF4-FFF2-40B4-BE49-F238E27FC236}">
-                <a16:creationId xmlns:a16="http://schemas.microsoft.com/office/drawing/2014/main" id="{7FEB5C7E-1CD1-8EAE-8422-6816165B0386}"/>
+                <a16:creationId xmlns:a16="http://schemas.microsoft.com/office/drawing/2014/main" id="{73CF5C9E-9ECB-3DD5-6D4F-A407C7C0ED49}"/>
               </a:ext>
             </a:extLst>
           </p:cNvPr>
@@ -9965,7 +9965,7 @@
           <p:cNvPr id="3" name="CuadroTexto 2">
             <a:extLst>
               <a:ext uri="{FF2B5EF4-FFF2-40B4-BE49-F238E27FC236}">
-                <a16:creationId xmlns:a16="http://schemas.microsoft.com/office/drawing/2014/main" id="{2A721D04-6A57-D719-681A-DB43A374A36C}"/>
+                <a16:creationId xmlns:a16="http://schemas.microsoft.com/office/drawing/2014/main" id="{0491214E-0C65-5F9E-16EE-1A317A0FB4E8}"/>
               </a:ext>
             </a:extLst>
           </p:cNvPr>
@@ -10005,7 +10005,7 @@
           <p:cNvPr id="5" name="Imagen 4">
             <a:extLst>
               <a:ext uri="{FF2B5EF4-FFF2-40B4-BE49-F238E27FC236}">
-                <a16:creationId xmlns:a16="http://schemas.microsoft.com/office/drawing/2014/main" id="{5249F826-C292-4ED7-2FEF-1A71CFC9B977}"/>
+                <a16:creationId xmlns:a16="http://schemas.microsoft.com/office/drawing/2014/main" id="{DAE1B80D-AE78-6905-6235-AB2486E053B4}"/>
               </a:ext>
             </a:extLst>
           </p:cNvPr>
@@ -10046,7 +10046,7 @@
           <p:cNvPr id="6" name="CuadroTexto 5">
             <a:extLst>
               <a:ext uri="{FF2B5EF4-FFF2-40B4-BE49-F238E27FC236}">
-                <a16:creationId xmlns:a16="http://schemas.microsoft.com/office/drawing/2014/main" id="{16D37AAB-DA47-E103-DC95-339465F7F373}"/>
+                <a16:creationId xmlns:a16="http://schemas.microsoft.com/office/drawing/2014/main" id="{FE454F16-1D60-5900-7AD6-BD4EEB8BB38D}"/>
               </a:ext>
             </a:extLst>
           </p:cNvPr>
@@ -10086,7 +10086,7 @@
           <p:cNvPr id="7" name="CuadroTexto 6">
             <a:extLst>
               <a:ext uri="{FF2B5EF4-FFF2-40B4-BE49-F238E27FC236}">
-                <a16:creationId xmlns:a16="http://schemas.microsoft.com/office/drawing/2014/main" id="{1EB8936E-9522-D541-2858-EEF4AFA6CBBB}"/>
+                <a16:creationId xmlns:a16="http://schemas.microsoft.com/office/drawing/2014/main" id="{93694235-5164-8076-25CE-63B5F4A19767}"/>
               </a:ext>
             </a:extLst>
           </p:cNvPr>
@@ -10185,7 +10185,7 @@
     </p:spTree>
     <p:extLst>
       <p:ext uri="{BB962C8B-B14F-4D97-AF65-F5344CB8AC3E}">
-        <p14:creationId xmlns:p14="http://schemas.microsoft.com/office/powerpoint/2010/main" val="1695852921"/>
+        <p14:creationId xmlns:p14="http://schemas.microsoft.com/office/powerpoint/2010/main" val="2548476343"/>
       </p:ext>
     </p:extLst>
   </p:cSld>
@@ -10225,7 +10225,7 @@
           <p:cNvPr id="2" name="CuadroTexto 1">
             <a:extLst>
               <a:ext uri="{FF2B5EF4-FFF2-40B4-BE49-F238E27FC236}">
-                <a16:creationId xmlns:a16="http://schemas.microsoft.com/office/drawing/2014/main" id="{1A9E1F0B-BDF1-4C18-FA1E-DBB85328D07A}"/>
+                <a16:creationId xmlns:a16="http://schemas.microsoft.com/office/drawing/2014/main" id="{4CCBF99B-D613-FA12-9C8A-6D8075887DF4}"/>
               </a:ext>
             </a:extLst>
           </p:cNvPr>
@@ -10265,7 +10265,7 @@
           <p:cNvPr id="3" name="CuadroTexto 2">
             <a:extLst>
               <a:ext uri="{FF2B5EF4-FFF2-40B4-BE49-F238E27FC236}">
-                <a16:creationId xmlns:a16="http://schemas.microsoft.com/office/drawing/2014/main" id="{39928138-6B23-8A2C-7358-B7535E8F0854}"/>
+                <a16:creationId xmlns:a16="http://schemas.microsoft.com/office/drawing/2014/main" id="{243A3967-F235-BEB6-A9A9-0C204031D56C}"/>
               </a:ext>
             </a:extLst>
           </p:cNvPr>
@@ -10305,7 +10305,7 @@
           <p:cNvPr id="4" name="CuadroTexto 3">
             <a:extLst>
               <a:ext uri="{FF2B5EF4-FFF2-40B4-BE49-F238E27FC236}">
-                <a16:creationId xmlns:a16="http://schemas.microsoft.com/office/drawing/2014/main" id="{7AABE39B-449B-8D65-C4D7-25CEE13E48F6}"/>
+                <a16:creationId xmlns:a16="http://schemas.microsoft.com/office/drawing/2014/main" id="{75B1EF6C-E4F6-9647-687F-3CA25CCEDA32}"/>
               </a:ext>
             </a:extLst>
           </p:cNvPr>
@@ -10345,7 +10345,7 @@
           <p:cNvPr id="6" name="Imagen 5">
             <a:extLst>
               <a:ext uri="{FF2B5EF4-FFF2-40B4-BE49-F238E27FC236}">
-                <a16:creationId xmlns:a16="http://schemas.microsoft.com/office/drawing/2014/main" id="{8C45D29C-D2B7-5774-D729-E54533DB20B2}"/>
+                <a16:creationId xmlns:a16="http://schemas.microsoft.com/office/drawing/2014/main" id="{0C4C337B-4936-585C-0416-47FA306F1B16}"/>
               </a:ext>
             </a:extLst>
           </p:cNvPr>
@@ -10386,7 +10386,7 @@
           <p:cNvPr id="7" name="Rectángulo: esquinas redondeadas 6">
             <a:extLst>
               <a:ext uri="{FF2B5EF4-FFF2-40B4-BE49-F238E27FC236}">
-                <a16:creationId xmlns:a16="http://schemas.microsoft.com/office/drawing/2014/main" id="{36C118CA-7706-AA24-4B94-3CA0DAFB12A2}"/>
+                <a16:creationId xmlns:a16="http://schemas.microsoft.com/office/drawing/2014/main" id="{95311EDC-1A2C-CDBE-CECF-C96DC6623FE5}"/>
               </a:ext>
             </a:extLst>
           </p:cNvPr>
@@ -10440,7 +10440,7 @@
           <p:cNvPr id="8" name="CuadroTexto 7">
             <a:extLst>
               <a:ext uri="{FF2B5EF4-FFF2-40B4-BE49-F238E27FC236}">
-                <a16:creationId xmlns:a16="http://schemas.microsoft.com/office/drawing/2014/main" id="{A0FF7F01-F678-7332-D01A-A4E9C34AFC55}"/>
+                <a16:creationId xmlns:a16="http://schemas.microsoft.com/office/drawing/2014/main" id="{8DD254F0-0569-7FA3-77EB-BAA24FF8113D}"/>
               </a:ext>
             </a:extLst>
           </p:cNvPr>
@@ -10480,7 +10480,7 @@
           <p:cNvPr id="9" name="CuadroTexto 8">
             <a:extLst>
               <a:ext uri="{FF2B5EF4-FFF2-40B4-BE49-F238E27FC236}">
-                <a16:creationId xmlns:a16="http://schemas.microsoft.com/office/drawing/2014/main" id="{E281DD0F-E1B5-A30A-6FEE-E6609C36C48F}"/>
+                <a16:creationId xmlns:a16="http://schemas.microsoft.com/office/drawing/2014/main" id="{634E3904-911B-D57D-4B7B-A09895F73D32}"/>
               </a:ext>
             </a:extLst>
           </p:cNvPr>
@@ -10520,7 +10520,7 @@
           <p:cNvPr id="10" name="Rectángulo: esquinas redondeadas 9">
             <a:extLst>
               <a:ext uri="{FF2B5EF4-FFF2-40B4-BE49-F238E27FC236}">
-                <a16:creationId xmlns:a16="http://schemas.microsoft.com/office/drawing/2014/main" id="{592470D7-DB12-70A1-8C2C-634DFFF87A3D}"/>
+                <a16:creationId xmlns:a16="http://schemas.microsoft.com/office/drawing/2014/main" id="{8AE624A3-0614-02E0-0F30-1AE23EB98776}"/>
               </a:ext>
             </a:extLst>
           </p:cNvPr>
@@ -10574,7 +10574,7 @@
           <p:cNvPr id="11" name="CuadroTexto 10">
             <a:extLst>
               <a:ext uri="{FF2B5EF4-FFF2-40B4-BE49-F238E27FC236}">
-                <a16:creationId xmlns:a16="http://schemas.microsoft.com/office/drawing/2014/main" id="{BB9A8C2D-2C15-65D6-34F4-EFF35D086C9D}"/>
+                <a16:creationId xmlns:a16="http://schemas.microsoft.com/office/drawing/2014/main" id="{93DBD568-99F4-558D-B372-3422623ED7F5}"/>
               </a:ext>
             </a:extLst>
           </p:cNvPr>
@@ -10614,7 +10614,7 @@
           <p:cNvPr id="12" name="CuadroTexto 11">
             <a:extLst>
               <a:ext uri="{FF2B5EF4-FFF2-40B4-BE49-F238E27FC236}">
-                <a16:creationId xmlns:a16="http://schemas.microsoft.com/office/drawing/2014/main" id="{8BCEFA69-B51E-6BDA-ADD9-96914115396A}"/>
+                <a16:creationId xmlns:a16="http://schemas.microsoft.com/office/drawing/2014/main" id="{B9792F97-BD91-8F4B-B7E6-2A7A2B088498}"/>
               </a:ext>
             </a:extLst>
           </p:cNvPr>
@@ -10654,7 +10654,7 @@
           <p:cNvPr id="13" name="Rectángulo: esquinas redondeadas 12">
             <a:extLst>
               <a:ext uri="{FF2B5EF4-FFF2-40B4-BE49-F238E27FC236}">
-                <a16:creationId xmlns:a16="http://schemas.microsoft.com/office/drawing/2014/main" id="{CDECFDD1-B17D-1525-32F1-FB7E618F070B}"/>
+                <a16:creationId xmlns:a16="http://schemas.microsoft.com/office/drawing/2014/main" id="{A96305F9-22DA-CECB-E7E2-F1D4752C8E88}"/>
               </a:ext>
             </a:extLst>
           </p:cNvPr>
@@ -10708,7 +10708,7 @@
           <p:cNvPr id="14" name="CuadroTexto 13">
             <a:extLst>
               <a:ext uri="{FF2B5EF4-FFF2-40B4-BE49-F238E27FC236}">
-                <a16:creationId xmlns:a16="http://schemas.microsoft.com/office/drawing/2014/main" id="{342B069A-FED2-C970-BDFF-4266530C47B1}"/>
+                <a16:creationId xmlns:a16="http://schemas.microsoft.com/office/drawing/2014/main" id="{A3036D62-8AF8-71F6-7714-3D71EF962E77}"/>
               </a:ext>
             </a:extLst>
           </p:cNvPr>
@@ -10748,7 +10748,7 @@
           <p:cNvPr id="15" name="CuadroTexto 14">
             <a:extLst>
               <a:ext uri="{FF2B5EF4-FFF2-40B4-BE49-F238E27FC236}">
-                <a16:creationId xmlns:a16="http://schemas.microsoft.com/office/drawing/2014/main" id="{0344A2AC-07E9-1E86-FAE7-94698EE3F95A}"/>
+                <a16:creationId xmlns:a16="http://schemas.microsoft.com/office/drawing/2014/main" id="{FE26A294-69A6-3EA2-CDFC-AEDCBFB4FE72}"/>
               </a:ext>
             </a:extLst>
           </p:cNvPr>
@@ -10786,7 +10786,7 @@
     </p:spTree>
     <p:extLst>
       <p:ext uri="{BB962C8B-B14F-4D97-AF65-F5344CB8AC3E}">
-        <p14:creationId xmlns:p14="http://schemas.microsoft.com/office/powerpoint/2010/main" val="444641734"/>
+        <p14:creationId xmlns:p14="http://schemas.microsoft.com/office/powerpoint/2010/main" val="682710152"/>
       </p:ext>
     </p:extLst>
   </p:cSld>
@@ -10826,7 +10826,7 @@
           <p:cNvPr id="2" name="CuadroTexto 1">
             <a:extLst>
               <a:ext uri="{FF2B5EF4-FFF2-40B4-BE49-F238E27FC236}">
-                <a16:creationId xmlns:a16="http://schemas.microsoft.com/office/drawing/2014/main" id="{6CE89E96-8080-E632-7DF5-66335AFC344D}"/>
+                <a16:creationId xmlns:a16="http://schemas.microsoft.com/office/drawing/2014/main" id="{C8526C7C-7F36-1F36-B098-CEBCE3916988}"/>
               </a:ext>
             </a:extLst>
           </p:cNvPr>
@@ -10866,7 +10866,7 @@
           <p:cNvPr id="3" name="CuadroTexto 2">
             <a:extLst>
               <a:ext uri="{FF2B5EF4-FFF2-40B4-BE49-F238E27FC236}">
-                <a16:creationId xmlns:a16="http://schemas.microsoft.com/office/drawing/2014/main" id="{73E058A5-6A40-A02A-622D-78A676D3D767}"/>
+                <a16:creationId xmlns:a16="http://schemas.microsoft.com/office/drawing/2014/main" id="{1BF120A3-159A-D241-747C-B27F5AF2C4F7}"/>
               </a:ext>
             </a:extLst>
           </p:cNvPr>
@@ -10906,7 +10906,7 @@
           <p:cNvPr id="5" name="Imagen 4">
             <a:extLst>
               <a:ext uri="{FF2B5EF4-FFF2-40B4-BE49-F238E27FC236}">
-                <a16:creationId xmlns:a16="http://schemas.microsoft.com/office/drawing/2014/main" id="{63C7D728-633E-1564-7E9C-6BAEC3FE609E}"/>
+                <a16:creationId xmlns:a16="http://schemas.microsoft.com/office/drawing/2014/main" id="{BF10EABB-4CE5-12E1-2136-83BB85DEC781}"/>
               </a:ext>
             </a:extLst>
           </p:cNvPr>
@@ -10947,7 +10947,7 @@
           <p:cNvPr id="6" name="CuadroTexto 5">
             <a:extLst>
               <a:ext uri="{FF2B5EF4-FFF2-40B4-BE49-F238E27FC236}">
-                <a16:creationId xmlns:a16="http://schemas.microsoft.com/office/drawing/2014/main" id="{5715EE4E-A1C6-1C3D-CE17-162C1B0133F9}"/>
+                <a16:creationId xmlns:a16="http://schemas.microsoft.com/office/drawing/2014/main" id="{CD1F0883-D8B9-2E22-202D-0A67982F9561}"/>
               </a:ext>
             </a:extLst>
           </p:cNvPr>
@@ -11046,7 +11046,7 @@
     </p:spTree>
     <p:extLst>
       <p:ext uri="{BB962C8B-B14F-4D97-AF65-F5344CB8AC3E}">
-        <p14:creationId xmlns:p14="http://schemas.microsoft.com/office/powerpoint/2010/main" val="1844937628"/>
+        <p14:creationId xmlns:p14="http://schemas.microsoft.com/office/powerpoint/2010/main" val="2840323761"/>
       </p:ext>
     </p:extLst>
   </p:cSld>
@@ -11086,7 +11086,7 @@
           <p:cNvPr id="2" name="CuadroTexto 1">
             <a:extLst>
               <a:ext uri="{FF2B5EF4-FFF2-40B4-BE49-F238E27FC236}">
-                <a16:creationId xmlns:a16="http://schemas.microsoft.com/office/drawing/2014/main" id="{4D154D3C-0CC9-334A-8C60-D074F7E3F248}"/>
+                <a16:creationId xmlns:a16="http://schemas.microsoft.com/office/drawing/2014/main" id="{D90B48C7-75E2-7233-F8AA-29C8EEBDAEB1}"/>
               </a:ext>
             </a:extLst>
           </p:cNvPr>
@@ -11126,7 +11126,7 @@
           <p:cNvPr id="3" name="CuadroTexto 2">
             <a:extLst>
               <a:ext uri="{FF2B5EF4-FFF2-40B4-BE49-F238E27FC236}">
-                <a16:creationId xmlns:a16="http://schemas.microsoft.com/office/drawing/2014/main" id="{057691EC-32BD-3270-563E-C99F26EC5CDB}"/>
+                <a16:creationId xmlns:a16="http://schemas.microsoft.com/office/drawing/2014/main" id="{1A9766DC-1F20-1D12-E634-CE6B986FF7BB}"/>
               </a:ext>
             </a:extLst>
           </p:cNvPr>
@@ -11166,7 +11166,7 @@
           <p:cNvPr id="4" name="CuadroTexto 3">
             <a:extLst>
               <a:ext uri="{FF2B5EF4-FFF2-40B4-BE49-F238E27FC236}">
-                <a16:creationId xmlns:a16="http://schemas.microsoft.com/office/drawing/2014/main" id="{B2B226B4-6E16-EF50-554E-5E2D3FEC44DD}"/>
+                <a16:creationId xmlns:a16="http://schemas.microsoft.com/office/drawing/2014/main" id="{86B4A59F-FEE4-F93D-75F8-DF07877C923E}"/>
               </a:ext>
             </a:extLst>
           </p:cNvPr>
@@ -11206,7 +11206,7 @@
           <p:cNvPr id="6" name="Imagen 5">
             <a:extLst>
               <a:ext uri="{FF2B5EF4-FFF2-40B4-BE49-F238E27FC236}">
-                <a16:creationId xmlns:a16="http://schemas.microsoft.com/office/drawing/2014/main" id="{098F6E69-6ADB-CD03-7C1D-43010B0BB91E}"/>
+                <a16:creationId xmlns:a16="http://schemas.microsoft.com/office/drawing/2014/main" id="{255106AF-20D9-DF0B-FDD5-2C136CBA7427}"/>
               </a:ext>
             </a:extLst>
           </p:cNvPr>
@@ -11247,7 +11247,7 @@
           <p:cNvPr id="7" name="Rectángulo: esquinas redondeadas 6">
             <a:extLst>
               <a:ext uri="{FF2B5EF4-FFF2-40B4-BE49-F238E27FC236}">
-                <a16:creationId xmlns:a16="http://schemas.microsoft.com/office/drawing/2014/main" id="{570AADC6-9A6A-D148-5E95-7C44264CAD7C}"/>
+                <a16:creationId xmlns:a16="http://schemas.microsoft.com/office/drawing/2014/main" id="{5202FD18-0355-7146-3EBE-A846FBAC2C23}"/>
               </a:ext>
             </a:extLst>
           </p:cNvPr>
@@ -11301,7 +11301,7 @@
           <p:cNvPr id="8" name="CuadroTexto 7">
             <a:extLst>
               <a:ext uri="{FF2B5EF4-FFF2-40B4-BE49-F238E27FC236}">
-                <a16:creationId xmlns:a16="http://schemas.microsoft.com/office/drawing/2014/main" id="{923DD8F0-9855-49F5-BE46-AC1BFDD9BF08}"/>
+                <a16:creationId xmlns:a16="http://schemas.microsoft.com/office/drawing/2014/main" id="{C96D24EC-4409-1E20-190F-4FC7BDC4705F}"/>
               </a:ext>
             </a:extLst>
           </p:cNvPr>
@@ -11341,7 +11341,7 @@
           <p:cNvPr id="9" name="CuadroTexto 8">
             <a:extLst>
               <a:ext uri="{FF2B5EF4-FFF2-40B4-BE49-F238E27FC236}">
-                <a16:creationId xmlns:a16="http://schemas.microsoft.com/office/drawing/2014/main" id="{48AA1450-6C4C-3BBC-C570-3F75D447FE05}"/>
+                <a16:creationId xmlns:a16="http://schemas.microsoft.com/office/drawing/2014/main" id="{1D793C89-ECDB-35EC-F819-FEB290F7A142}"/>
               </a:ext>
             </a:extLst>
           </p:cNvPr>
@@ -11379,7 +11379,7 @@
     </p:spTree>
     <p:extLst>
       <p:ext uri="{BB962C8B-B14F-4D97-AF65-F5344CB8AC3E}">
-        <p14:creationId xmlns:p14="http://schemas.microsoft.com/office/powerpoint/2010/main" val="1123479016"/>
+        <p14:creationId xmlns:p14="http://schemas.microsoft.com/office/powerpoint/2010/main" val="236568225"/>
       </p:ext>
     </p:extLst>
   </p:cSld>
@@ -11419,7 +11419,7 @@
           <p:cNvPr id="2" name="CuadroTexto 1">
             <a:extLst>
               <a:ext uri="{FF2B5EF4-FFF2-40B4-BE49-F238E27FC236}">
-                <a16:creationId xmlns:a16="http://schemas.microsoft.com/office/drawing/2014/main" id="{64968A2A-D52D-6028-C97A-6F360F1AA37B}"/>
+                <a16:creationId xmlns:a16="http://schemas.microsoft.com/office/drawing/2014/main" id="{8E8FE010-8AAF-D77A-6FE3-A432594F744F}"/>
               </a:ext>
             </a:extLst>
           </p:cNvPr>
@@ -11459,7 +11459,7 @@
           <p:cNvPr id="3" name="CuadroTexto 2">
             <a:extLst>
               <a:ext uri="{FF2B5EF4-FFF2-40B4-BE49-F238E27FC236}">
-                <a16:creationId xmlns:a16="http://schemas.microsoft.com/office/drawing/2014/main" id="{1EE95117-2191-150D-CEAB-AD181B5215E5}"/>
+                <a16:creationId xmlns:a16="http://schemas.microsoft.com/office/drawing/2014/main" id="{85DD18C2-C5F8-BD47-72A7-CE0CB63325F1}"/>
               </a:ext>
             </a:extLst>
           </p:cNvPr>
@@ -11499,7 +11499,7 @@
           <p:cNvPr id="4" name="CuadroTexto 3">
             <a:extLst>
               <a:ext uri="{FF2B5EF4-FFF2-40B4-BE49-F238E27FC236}">
-                <a16:creationId xmlns:a16="http://schemas.microsoft.com/office/drawing/2014/main" id="{5C1F3077-79E0-9100-D8E6-B1A7602DE670}"/>
+                <a16:creationId xmlns:a16="http://schemas.microsoft.com/office/drawing/2014/main" id="{EDB07F75-413F-95A5-9FAF-BE68D811BCC1}"/>
               </a:ext>
             </a:extLst>
           </p:cNvPr>
@@ -11539,7 +11539,7 @@
           <p:cNvPr id="5" name="Rectángulo: esquinas redondeadas 4">
             <a:extLst>
               <a:ext uri="{FF2B5EF4-FFF2-40B4-BE49-F238E27FC236}">
-                <a16:creationId xmlns:a16="http://schemas.microsoft.com/office/drawing/2014/main" id="{A9C28EFF-5544-FF9F-1F73-40ED012101D8}"/>
+                <a16:creationId xmlns:a16="http://schemas.microsoft.com/office/drawing/2014/main" id="{17C06495-A4E4-1550-2896-9DA0D0108873}"/>
               </a:ext>
             </a:extLst>
           </p:cNvPr>
@@ -11593,7 +11593,7 @@
           <p:cNvPr id="6" name="CuadroTexto 5">
             <a:extLst>
               <a:ext uri="{FF2B5EF4-FFF2-40B4-BE49-F238E27FC236}">
-                <a16:creationId xmlns:a16="http://schemas.microsoft.com/office/drawing/2014/main" id="{AE59955A-D259-8761-3DD0-BA61871AA08D}"/>
+                <a16:creationId xmlns:a16="http://schemas.microsoft.com/office/drawing/2014/main" id="{42EFF471-8EFC-84EC-BCB5-3096366249FD}"/>
               </a:ext>
             </a:extLst>
           </p:cNvPr>
@@ -11633,7 +11633,7 @@
           <p:cNvPr id="7" name="CuadroTexto 6">
             <a:extLst>
               <a:ext uri="{FF2B5EF4-FFF2-40B4-BE49-F238E27FC236}">
-                <a16:creationId xmlns:a16="http://schemas.microsoft.com/office/drawing/2014/main" id="{9C22FA5F-E4D3-5F6D-D8FB-AE53312B5CEE}"/>
+                <a16:creationId xmlns:a16="http://schemas.microsoft.com/office/drawing/2014/main" id="{36DAEDEA-D504-B0E3-6717-DC1BDC86404A}"/>
               </a:ext>
             </a:extLst>
           </p:cNvPr>
@@ -11673,7 +11673,7 @@
           <p:cNvPr id="8" name="Rectángulo: esquinas redondeadas 7">
             <a:extLst>
               <a:ext uri="{FF2B5EF4-FFF2-40B4-BE49-F238E27FC236}">
-                <a16:creationId xmlns:a16="http://schemas.microsoft.com/office/drawing/2014/main" id="{272A3DE5-BCF8-196E-7B96-8600265D8F7C}"/>
+                <a16:creationId xmlns:a16="http://schemas.microsoft.com/office/drawing/2014/main" id="{1BA7AAAC-B458-3E5B-461A-2FD52BE81980}"/>
               </a:ext>
             </a:extLst>
           </p:cNvPr>
@@ -11727,7 +11727,7 @@
           <p:cNvPr id="9" name="CuadroTexto 8">
             <a:extLst>
               <a:ext uri="{FF2B5EF4-FFF2-40B4-BE49-F238E27FC236}">
-                <a16:creationId xmlns:a16="http://schemas.microsoft.com/office/drawing/2014/main" id="{CF66ECF2-AABE-B148-59ED-90F7BB781B9A}"/>
+                <a16:creationId xmlns:a16="http://schemas.microsoft.com/office/drawing/2014/main" id="{2743EDE1-291D-83D0-5EC5-20CBC69A6DA4}"/>
               </a:ext>
             </a:extLst>
           </p:cNvPr>
@@ -11767,7 +11767,7 @@
           <p:cNvPr id="10" name="CuadroTexto 9">
             <a:extLst>
               <a:ext uri="{FF2B5EF4-FFF2-40B4-BE49-F238E27FC236}">
-                <a16:creationId xmlns:a16="http://schemas.microsoft.com/office/drawing/2014/main" id="{161EF2D3-A939-0A2B-2126-EE03D1BB6432}"/>
+                <a16:creationId xmlns:a16="http://schemas.microsoft.com/office/drawing/2014/main" id="{F4240100-1FDE-723F-3EEE-A537BB373D6F}"/>
               </a:ext>
             </a:extLst>
           </p:cNvPr>
@@ -11807,7 +11807,7 @@
           <p:cNvPr id="11" name="Rectángulo: esquinas redondeadas 10">
             <a:extLst>
               <a:ext uri="{FF2B5EF4-FFF2-40B4-BE49-F238E27FC236}">
-                <a16:creationId xmlns:a16="http://schemas.microsoft.com/office/drawing/2014/main" id="{D14D23F2-88B8-7160-AB9F-31DC093D925A}"/>
+                <a16:creationId xmlns:a16="http://schemas.microsoft.com/office/drawing/2014/main" id="{D802EDA8-4287-0BAC-408C-2404BCC2D9EF}"/>
               </a:ext>
             </a:extLst>
           </p:cNvPr>
@@ -11861,7 +11861,7 @@
           <p:cNvPr id="12" name="CuadroTexto 11">
             <a:extLst>
               <a:ext uri="{FF2B5EF4-FFF2-40B4-BE49-F238E27FC236}">
-                <a16:creationId xmlns:a16="http://schemas.microsoft.com/office/drawing/2014/main" id="{82D69466-A8D3-7070-D0EA-4F23BE7919F8}"/>
+                <a16:creationId xmlns:a16="http://schemas.microsoft.com/office/drawing/2014/main" id="{010E48B9-43AA-1CDE-BD8D-A06072EB02FF}"/>
               </a:ext>
             </a:extLst>
           </p:cNvPr>
@@ -11901,7 +11901,7 @@
           <p:cNvPr id="13" name="CuadroTexto 12">
             <a:extLst>
               <a:ext uri="{FF2B5EF4-FFF2-40B4-BE49-F238E27FC236}">
-                <a16:creationId xmlns:a16="http://schemas.microsoft.com/office/drawing/2014/main" id="{49F2ECC3-24B4-3134-3946-D3E3424D7892}"/>
+                <a16:creationId xmlns:a16="http://schemas.microsoft.com/office/drawing/2014/main" id="{C33D04DF-D4DB-920E-8E59-9BA968219784}"/>
               </a:ext>
             </a:extLst>
           </p:cNvPr>
@@ -11941,7 +11941,7 @@
           <p:cNvPr id="14" name="Rectángulo: esquinas redondeadas 13">
             <a:extLst>
               <a:ext uri="{FF2B5EF4-FFF2-40B4-BE49-F238E27FC236}">
-                <a16:creationId xmlns:a16="http://schemas.microsoft.com/office/drawing/2014/main" id="{860C01C8-C1AD-5CCE-801A-743786CC699D}"/>
+                <a16:creationId xmlns:a16="http://schemas.microsoft.com/office/drawing/2014/main" id="{A0AA643C-F3E5-D18C-91F2-2DAA1A4FA014}"/>
               </a:ext>
             </a:extLst>
           </p:cNvPr>
@@ -11995,7 +11995,7 @@
           <p:cNvPr id="15" name="CuadroTexto 14">
             <a:extLst>
               <a:ext uri="{FF2B5EF4-FFF2-40B4-BE49-F238E27FC236}">
-                <a16:creationId xmlns:a16="http://schemas.microsoft.com/office/drawing/2014/main" id="{2533663A-B044-598C-EBB1-1BA5E26D4737}"/>
+                <a16:creationId xmlns:a16="http://schemas.microsoft.com/office/drawing/2014/main" id="{0080C4FD-0FBC-6437-20BE-F5B8B213E917}"/>
               </a:ext>
             </a:extLst>
           </p:cNvPr>
@@ -12035,7 +12035,7 @@
           <p:cNvPr id="16" name="CuadroTexto 15">
             <a:extLst>
               <a:ext uri="{FF2B5EF4-FFF2-40B4-BE49-F238E27FC236}">
-                <a16:creationId xmlns:a16="http://schemas.microsoft.com/office/drawing/2014/main" id="{D5978AA5-938B-6A0D-B27B-170DF9BDE389}"/>
+                <a16:creationId xmlns:a16="http://schemas.microsoft.com/office/drawing/2014/main" id="{9C6CAE58-62EF-43B8-DD30-6B325291064C}"/>
               </a:ext>
             </a:extLst>
           </p:cNvPr>
@@ -12075,7 +12075,7 @@
           <p:cNvPr id="17" name="Rectángulo: esquinas redondeadas 16">
             <a:extLst>
               <a:ext uri="{FF2B5EF4-FFF2-40B4-BE49-F238E27FC236}">
-                <a16:creationId xmlns:a16="http://schemas.microsoft.com/office/drawing/2014/main" id="{A18D4FCF-962D-604B-58E3-5E8BD78D3EE6}"/>
+                <a16:creationId xmlns:a16="http://schemas.microsoft.com/office/drawing/2014/main" id="{6731DF98-6AED-5524-51E0-924ECE61238F}"/>
               </a:ext>
             </a:extLst>
           </p:cNvPr>
@@ -12129,7 +12129,7 @@
           <p:cNvPr id="18" name="CuadroTexto 17">
             <a:extLst>
               <a:ext uri="{FF2B5EF4-FFF2-40B4-BE49-F238E27FC236}">
-                <a16:creationId xmlns:a16="http://schemas.microsoft.com/office/drawing/2014/main" id="{B422D8D1-1F94-B9D7-2452-5A8F751785C2}"/>
+                <a16:creationId xmlns:a16="http://schemas.microsoft.com/office/drawing/2014/main" id="{39EF097E-AF1A-0F6F-554C-A59448AD9CCF}"/>
               </a:ext>
             </a:extLst>
           </p:cNvPr>
@@ -12169,7 +12169,7 @@
           <p:cNvPr id="19" name="CuadroTexto 18">
             <a:extLst>
               <a:ext uri="{FF2B5EF4-FFF2-40B4-BE49-F238E27FC236}">
-                <a16:creationId xmlns:a16="http://schemas.microsoft.com/office/drawing/2014/main" id="{B42A556D-F0D2-84CA-9CC4-11D4CBD4F6DE}"/>
+                <a16:creationId xmlns:a16="http://schemas.microsoft.com/office/drawing/2014/main" id="{19DF365D-C7F0-598F-EC66-AC5AAB5B0A7F}"/>
               </a:ext>
             </a:extLst>
           </p:cNvPr>
@@ -12209,7 +12209,7 @@
           <p:cNvPr id="20" name="Rectángulo: esquinas redondeadas 19">
             <a:extLst>
               <a:ext uri="{FF2B5EF4-FFF2-40B4-BE49-F238E27FC236}">
-                <a16:creationId xmlns:a16="http://schemas.microsoft.com/office/drawing/2014/main" id="{D398D3A8-CBC7-258D-3BF8-AA6D1DB0B1CA}"/>
+                <a16:creationId xmlns:a16="http://schemas.microsoft.com/office/drawing/2014/main" id="{669B39C3-1217-FE7E-C31D-618BC248FBEA}"/>
               </a:ext>
             </a:extLst>
           </p:cNvPr>
@@ -12263,7 +12263,7 @@
           <p:cNvPr id="21" name="CuadroTexto 20">
             <a:extLst>
               <a:ext uri="{FF2B5EF4-FFF2-40B4-BE49-F238E27FC236}">
-                <a16:creationId xmlns:a16="http://schemas.microsoft.com/office/drawing/2014/main" id="{6C7F5FD2-A784-AD4C-F9B7-C056966DA94B}"/>
+                <a16:creationId xmlns:a16="http://schemas.microsoft.com/office/drawing/2014/main" id="{AF0D5959-5B01-4D0B-3964-25ADBEB33461}"/>
               </a:ext>
             </a:extLst>
           </p:cNvPr>
@@ -12303,7 +12303,7 @@
           <p:cNvPr id="22" name="CuadroTexto 21">
             <a:extLst>
               <a:ext uri="{FF2B5EF4-FFF2-40B4-BE49-F238E27FC236}">
-                <a16:creationId xmlns:a16="http://schemas.microsoft.com/office/drawing/2014/main" id="{35D94D5F-0FFF-3914-5A04-39DCD1679264}"/>
+                <a16:creationId xmlns:a16="http://schemas.microsoft.com/office/drawing/2014/main" id="{CA8B7B50-67E3-B823-CBBD-B7BDA19192B7}"/>
               </a:ext>
             </a:extLst>
           </p:cNvPr>
@@ -12341,7 +12341,7 @@
     </p:spTree>
     <p:extLst>
       <p:ext uri="{BB962C8B-B14F-4D97-AF65-F5344CB8AC3E}">
-        <p14:creationId xmlns:p14="http://schemas.microsoft.com/office/powerpoint/2010/main" val="2432627001"/>
+        <p14:creationId xmlns:p14="http://schemas.microsoft.com/office/powerpoint/2010/main" val="922881415"/>
       </p:ext>
     </p:extLst>
   </p:cSld>

--- a/docs/presentacion-defensa-final.pptx
+++ b/docs/presentacion-defensa-final.pptx
@@ -146,7 +146,7 @@
           <p:cNvPr id="2" name="Título 1">
             <a:extLst>
               <a:ext uri="{FF2B5EF4-FFF2-40B4-BE49-F238E27FC236}">
-                <a16:creationId xmlns:a16="http://schemas.microsoft.com/office/drawing/2014/main" id="{DEC54974-BA2D-DEDD-C4EA-D896F5C0B032}"/>
+                <a16:creationId xmlns:a16="http://schemas.microsoft.com/office/drawing/2014/main" id="{8A6B0814-BF45-E573-A6DD-089C6E430088}"/>
               </a:ext>
             </a:extLst>
           </p:cNvPr>
@@ -183,7 +183,7 @@
           <p:cNvPr id="3" name="Subtítulo 2">
             <a:extLst>
               <a:ext uri="{FF2B5EF4-FFF2-40B4-BE49-F238E27FC236}">
-                <a16:creationId xmlns:a16="http://schemas.microsoft.com/office/drawing/2014/main" id="{8A47899D-3FD5-4A89-FA44-5DBCD877ADF0}"/>
+                <a16:creationId xmlns:a16="http://schemas.microsoft.com/office/drawing/2014/main" id="{59A3F60D-381D-A44B-0A93-8C52096248EC}"/>
               </a:ext>
             </a:extLst>
           </p:cNvPr>
@@ -253,7 +253,7 @@
           <p:cNvPr id="4" name="Marcador de fecha 3">
             <a:extLst>
               <a:ext uri="{FF2B5EF4-FFF2-40B4-BE49-F238E27FC236}">
-                <a16:creationId xmlns:a16="http://schemas.microsoft.com/office/drawing/2014/main" id="{7A60B31B-B9C0-C336-2A57-A6E6BBB4C264}"/>
+                <a16:creationId xmlns:a16="http://schemas.microsoft.com/office/drawing/2014/main" id="{89A48920-AADB-D026-B9B2-9DA509FB0A60}"/>
               </a:ext>
             </a:extLst>
           </p:cNvPr>
@@ -269,7 +269,7 @@
           <a:bodyPr/>
           <a:lstStyle/>
           <a:p>
-            <a:fld id="{AB9C1A0A-BF9E-48A0-991D-0EB02B84C89C}" type="datetimeFigureOut">
+            <a:fld id="{5EA62A27-1D85-48AD-90C3-37B244257CF0}" type="datetimeFigureOut">
               <a:rPr lang="es-ES" smtClean="0"/>
               <a:t>19/05/2026</a:t>
             </a:fld>
@@ -282,7 +282,7 @@
           <p:cNvPr id="5" name="Marcador de pie de página 4">
             <a:extLst>
               <a:ext uri="{FF2B5EF4-FFF2-40B4-BE49-F238E27FC236}">
-                <a16:creationId xmlns:a16="http://schemas.microsoft.com/office/drawing/2014/main" id="{C9CF83EF-85BC-63EA-D2FA-C6A3E8F94D70}"/>
+                <a16:creationId xmlns:a16="http://schemas.microsoft.com/office/drawing/2014/main" id="{58A59491-3B6A-48C9-5EEB-7EB818871F5B}"/>
               </a:ext>
             </a:extLst>
           </p:cNvPr>
@@ -307,7 +307,7 @@
           <p:cNvPr id="6" name="Marcador de número de diapositiva 5">
             <a:extLst>
               <a:ext uri="{FF2B5EF4-FFF2-40B4-BE49-F238E27FC236}">
-                <a16:creationId xmlns:a16="http://schemas.microsoft.com/office/drawing/2014/main" id="{D7DCD0F0-F06F-9ADD-8E63-6562F65952C3}"/>
+                <a16:creationId xmlns:a16="http://schemas.microsoft.com/office/drawing/2014/main" id="{DD81804F-C69B-B021-BB20-0F4660F398D0}"/>
               </a:ext>
             </a:extLst>
           </p:cNvPr>
@@ -323,7 +323,7 @@
           <a:bodyPr/>
           <a:lstStyle/>
           <a:p>
-            <a:fld id="{B3465923-C01A-429D-BF48-FE1C1E8CA486}" type="slidenum">
+            <a:fld id="{357192D4-5BD9-41C8-9EE5-942CB5B156C9}" type="slidenum">
               <a:rPr lang="es-ES" smtClean="0"/>
               <a:t>‹Nº›</a:t>
             </a:fld>
@@ -334,7 +334,7 @@
     </p:spTree>
     <p:extLst>
       <p:ext uri="{BB962C8B-B14F-4D97-AF65-F5344CB8AC3E}">
-        <p14:creationId xmlns:p14="http://schemas.microsoft.com/office/powerpoint/2010/main" val="962639868"/>
+        <p14:creationId xmlns:p14="http://schemas.microsoft.com/office/powerpoint/2010/main" val="1680099888"/>
       </p:ext>
     </p:extLst>
   </p:cSld>
@@ -366,7 +366,7 @@
           <p:cNvPr id="2" name="Título 1">
             <a:extLst>
               <a:ext uri="{FF2B5EF4-FFF2-40B4-BE49-F238E27FC236}">
-                <a16:creationId xmlns:a16="http://schemas.microsoft.com/office/drawing/2014/main" id="{AFE84534-547B-71A0-B679-9C0F624EB5AA}"/>
+                <a16:creationId xmlns:a16="http://schemas.microsoft.com/office/drawing/2014/main" id="{FDABD5DC-78B2-1D43-6817-084E7D311BE4}"/>
               </a:ext>
             </a:extLst>
           </p:cNvPr>
@@ -394,7 +394,7 @@
           <p:cNvPr id="3" name="Marcador de texto vertical 2">
             <a:extLst>
               <a:ext uri="{FF2B5EF4-FFF2-40B4-BE49-F238E27FC236}">
-                <a16:creationId xmlns:a16="http://schemas.microsoft.com/office/drawing/2014/main" id="{43EAF322-BC57-4BEE-65E7-C16B7C6AC12A}"/>
+                <a16:creationId xmlns:a16="http://schemas.microsoft.com/office/drawing/2014/main" id="{683029C5-5484-68D1-9988-6F026988B4D3}"/>
               </a:ext>
             </a:extLst>
           </p:cNvPr>
@@ -451,7 +451,7 @@
           <p:cNvPr id="4" name="Marcador de fecha 3">
             <a:extLst>
               <a:ext uri="{FF2B5EF4-FFF2-40B4-BE49-F238E27FC236}">
-                <a16:creationId xmlns:a16="http://schemas.microsoft.com/office/drawing/2014/main" id="{66F5F553-D299-15A6-CA75-45D65513160F}"/>
+                <a16:creationId xmlns:a16="http://schemas.microsoft.com/office/drawing/2014/main" id="{D40ACC64-DF2E-FB98-BEE2-33C18881B76B}"/>
               </a:ext>
             </a:extLst>
           </p:cNvPr>
@@ -467,7 +467,7 @@
           <a:bodyPr/>
           <a:lstStyle/>
           <a:p>
-            <a:fld id="{AB9C1A0A-BF9E-48A0-991D-0EB02B84C89C}" type="datetimeFigureOut">
+            <a:fld id="{5EA62A27-1D85-48AD-90C3-37B244257CF0}" type="datetimeFigureOut">
               <a:rPr lang="es-ES" smtClean="0"/>
               <a:t>19/05/2026</a:t>
             </a:fld>
@@ -480,7 +480,7 @@
           <p:cNvPr id="5" name="Marcador de pie de página 4">
             <a:extLst>
               <a:ext uri="{FF2B5EF4-FFF2-40B4-BE49-F238E27FC236}">
-                <a16:creationId xmlns:a16="http://schemas.microsoft.com/office/drawing/2014/main" id="{B75CDBA8-0711-42FF-A9DE-0C266E33842F}"/>
+                <a16:creationId xmlns:a16="http://schemas.microsoft.com/office/drawing/2014/main" id="{00E13036-6346-F20B-D4DD-22038DD9C5DB}"/>
               </a:ext>
             </a:extLst>
           </p:cNvPr>
@@ -505,7 +505,7 @@
           <p:cNvPr id="6" name="Marcador de número de diapositiva 5">
             <a:extLst>
               <a:ext uri="{FF2B5EF4-FFF2-40B4-BE49-F238E27FC236}">
-                <a16:creationId xmlns:a16="http://schemas.microsoft.com/office/drawing/2014/main" id="{790520F7-6A37-AAFB-22CF-3F8D5458DFC6}"/>
+                <a16:creationId xmlns:a16="http://schemas.microsoft.com/office/drawing/2014/main" id="{7B602EB5-B081-CE0E-966B-C70200BEEF97}"/>
               </a:ext>
             </a:extLst>
           </p:cNvPr>
@@ -521,7 +521,7 @@
           <a:bodyPr/>
           <a:lstStyle/>
           <a:p>
-            <a:fld id="{B3465923-C01A-429D-BF48-FE1C1E8CA486}" type="slidenum">
+            <a:fld id="{357192D4-5BD9-41C8-9EE5-942CB5B156C9}" type="slidenum">
               <a:rPr lang="es-ES" smtClean="0"/>
               <a:t>‹Nº›</a:t>
             </a:fld>
@@ -532,7 +532,7 @@
     </p:spTree>
     <p:extLst>
       <p:ext uri="{BB962C8B-B14F-4D97-AF65-F5344CB8AC3E}">
-        <p14:creationId xmlns:p14="http://schemas.microsoft.com/office/powerpoint/2010/main" val="4038845907"/>
+        <p14:creationId xmlns:p14="http://schemas.microsoft.com/office/powerpoint/2010/main" val="2447015768"/>
       </p:ext>
     </p:extLst>
   </p:cSld>
@@ -564,7 +564,7 @@
           <p:cNvPr id="2" name="Título vertical 1">
             <a:extLst>
               <a:ext uri="{FF2B5EF4-FFF2-40B4-BE49-F238E27FC236}">
-                <a16:creationId xmlns:a16="http://schemas.microsoft.com/office/drawing/2014/main" id="{DE4D055C-5670-F16A-6CC3-B33FD87A646E}"/>
+                <a16:creationId xmlns:a16="http://schemas.microsoft.com/office/drawing/2014/main" id="{D4A42644-ABFA-58B7-9710-0C222F7690F7}"/>
               </a:ext>
             </a:extLst>
           </p:cNvPr>
@@ -597,7 +597,7 @@
           <p:cNvPr id="3" name="Marcador de texto vertical 2">
             <a:extLst>
               <a:ext uri="{FF2B5EF4-FFF2-40B4-BE49-F238E27FC236}">
-                <a16:creationId xmlns:a16="http://schemas.microsoft.com/office/drawing/2014/main" id="{370278FE-F21E-EF15-4C2C-1A5678C55A93}"/>
+                <a16:creationId xmlns:a16="http://schemas.microsoft.com/office/drawing/2014/main" id="{602D70CA-E9E5-7B05-1516-9406222EE311}"/>
               </a:ext>
             </a:extLst>
           </p:cNvPr>
@@ -659,7 +659,7 @@
           <p:cNvPr id="4" name="Marcador de fecha 3">
             <a:extLst>
               <a:ext uri="{FF2B5EF4-FFF2-40B4-BE49-F238E27FC236}">
-                <a16:creationId xmlns:a16="http://schemas.microsoft.com/office/drawing/2014/main" id="{1CAC1D2A-64B6-78B0-815C-FE8E11F2E04D}"/>
+                <a16:creationId xmlns:a16="http://schemas.microsoft.com/office/drawing/2014/main" id="{9232D4B7-CBA2-CC7D-E399-72CB728BBE05}"/>
               </a:ext>
             </a:extLst>
           </p:cNvPr>
@@ -675,7 +675,7 @@
           <a:bodyPr/>
           <a:lstStyle/>
           <a:p>
-            <a:fld id="{AB9C1A0A-BF9E-48A0-991D-0EB02B84C89C}" type="datetimeFigureOut">
+            <a:fld id="{5EA62A27-1D85-48AD-90C3-37B244257CF0}" type="datetimeFigureOut">
               <a:rPr lang="es-ES" smtClean="0"/>
               <a:t>19/05/2026</a:t>
             </a:fld>
@@ -688,7 +688,7 @@
           <p:cNvPr id="5" name="Marcador de pie de página 4">
             <a:extLst>
               <a:ext uri="{FF2B5EF4-FFF2-40B4-BE49-F238E27FC236}">
-                <a16:creationId xmlns:a16="http://schemas.microsoft.com/office/drawing/2014/main" id="{8D64ABB7-CEE7-B824-3FC7-57ACF3EDBEF1}"/>
+                <a16:creationId xmlns:a16="http://schemas.microsoft.com/office/drawing/2014/main" id="{323BAB20-BD10-B4FA-2237-2D47800633F3}"/>
               </a:ext>
             </a:extLst>
           </p:cNvPr>
@@ -713,7 +713,7 @@
           <p:cNvPr id="6" name="Marcador de número de diapositiva 5">
             <a:extLst>
               <a:ext uri="{FF2B5EF4-FFF2-40B4-BE49-F238E27FC236}">
-                <a16:creationId xmlns:a16="http://schemas.microsoft.com/office/drawing/2014/main" id="{89A95BCA-06D3-E659-4D09-2D2373482A8E}"/>
+                <a16:creationId xmlns:a16="http://schemas.microsoft.com/office/drawing/2014/main" id="{F3F63C59-FBCF-9096-30B2-872FBE51DFA4}"/>
               </a:ext>
             </a:extLst>
           </p:cNvPr>
@@ -729,7 +729,7 @@
           <a:bodyPr/>
           <a:lstStyle/>
           <a:p>
-            <a:fld id="{B3465923-C01A-429D-BF48-FE1C1E8CA486}" type="slidenum">
+            <a:fld id="{357192D4-5BD9-41C8-9EE5-942CB5B156C9}" type="slidenum">
               <a:rPr lang="es-ES" smtClean="0"/>
               <a:t>‹Nº›</a:t>
             </a:fld>
@@ -740,7 +740,7 @@
     </p:spTree>
     <p:extLst>
       <p:ext uri="{BB962C8B-B14F-4D97-AF65-F5344CB8AC3E}">
-        <p14:creationId xmlns:p14="http://schemas.microsoft.com/office/powerpoint/2010/main" val="1352709287"/>
+        <p14:creationId xmlns:p14="http://schemas.microsoft.com/office/powerpoint/2010/main" val="406580436"/>
       </p:ext>
     </p:extLst>
   </p:cSld>
@@ -772,7 +772,7 @@
           <p:cNvPr id="2" name="Título 1">
             <a:extLst>
               <a:ext uri="{FF2B5EF4-FFF2-40B4-BE49-F238E27FC236}">
-                <a16:creationId xmlns:a16="http://schemas.microsoft.com/office/drawing/2014/main" id="{92B77EEA-82FC-9F37-0FD4-F2BDEFAAAC8D}"/>
+                <a16:creationId xmlns:a16="http://schemas.microsoft.com/office/drawing/2014/main" id="{9EA4115C-5D06-4D7C-B8EC-F9D77664F195}"/>
               </a:ext>
             </a:extLst>
           </p:cNvPr>
@@ -800,7 +800,7 @@
           <p:cNvPr id="3" name="Marcador de contenido 2">
             <a:extLst>
               <a:ext uri="{FF2B5EF4-FFF2-40B4-BE49-F238E27FC236}">
-                <a16:creationId xmlns:a16="http://schemas.microsoft.com/office/drawing/2014/main" id="{B4C850AE-C979-AACE-243F-5CB284D2CC96}"/>
+                <a16:creationId xmlns:a16="http://schemas.microsoft.com/office/drawing/2014/main" id="{C78EC942-61D9-112C-287C-90292BD32500}"/>
               </a:ext>
             </a:extLst>
           </p:cNvPr>
@@ -857,7 +857,7 @@
           <p:cNvPr id="4" name="Marcador de fecha 3">
             <a:extLst>
               <a:ext uri="{FF2B5EF4-FFF2-40B4-BE49-F238E27FC236}">
-                <a16:creationId xmlns:a16="http://schemas.microsoft.com/office/drawing/2014/main" id="{0F4129A5-5E8A-92C4-9C72-FBED8CB35704}"/>
+                <a16:creationId xmlns:a16="http://schemas.microsoft.com/office/drawing/2014/main" id="{25ED1F93-2489-6D68-93DB-F2D5E5952375}"/>
               </a:ext>
             </a:extLst>
           </p:cNvPr>
@@ -873,7 +873,7 @@
           <a:bodyPr/>
           <a:lstStyle/>
           <a:p>
-            <a:fld id="{AB9C1A0A-BF9E-48A0-991D-0EB02B84C89C}" type="datetimeFigureOut">
+            <a:fld id="{5EA62A27-1D85-48AD-90C3-37B244257CF0}" type="datetimeFigureOut">
               <a:rPr lang="es-ES" smtClean="0"/>
               <a:t>19/05/2026</a:t>
             </a:fld>
@@ -886,7 +886,7 @@
           <p:cNvPr id="5" name="Marcador de pie de página 4">
             <a:extLst>
               <a:ext uri="{FF2B5EF4-FFF2-40B4-BE49-F238E27FC236}">
-                <a16:creationId xmlns:a16="http://schemas.microsoft.com/office/drawing/2014/main" id="{B37C3BFC-1B17-7AD1-80C7-9515311EBF1F}"/>
+                <a16:creationId xmlns:a16="http://schemas.microsoft.com/office/drawing/2014/main" id="{17CE7D42-E5A1-356C-3F58-B627C49AA99F}"/>
               </a:ext>
             </a:extLst>
           </p:cNvPr>
@@ -911,7 +911,7 @@
           <p:cNvPr id="6" name="Marcador de número de diapositiva 5">
             <a:extLst>
               <a:ext uri="{FF2B5EF4-FFF2-40B4-BE49-F238E27FC236}">
-                <a16:creationId xmlns:a16="http://schemas.microsoft.com/office/drawing/2014/main" id="{7A5567DB-4CDF-7698-7AA0-C554F337E4CE}"/>
+                <a16:creationId xmlns:a16="http://schemas.microsoft.com/office/drawing/2014/main" id="{0FEFE665-0B92-8F3C-FF33-3B8D22EB1153}"/>
               </a:ext>
             </a:extLst>
           </p:cNvPr>
@@ -927,7 +927,7 @@
           <a:bodyPr/>
           <a:lstStyle/>
           <a:p>
-            <a:fld id="{B3465923-C01A-429D-BF48-FE1C1E8CA486}" type="slidenum">
+            <a:fld id="{357192D4-5BD9-41C8-9EE5-942CB5B156C9}" type="slidenum">
               <a:rPr lang="es-ES" smtClean="0"/>
               <a:t>‹Nº›</a:t>
             </a:fld>
@@ -938,7 +938,7 @@
     </p:spTree>
     <p:extLst>
       <p:ext uri="{BB962C8B-B14F-4D97-AF65-F5344CB8AC3E}">
-        <p14:creationId xmlns:p14="http://schemas.microsoft.com/office/powerpoint/2010/main" val="741971230"/>
+        <p14:creationId xmlns:p14="http://schemas.microsoft.com/office/powerpoint/2010/main" val="1104774924"/>
       </p:ext>
     </p:extLst>
   </p:cSld>
@@ -970,7 +970,7 @@
           <p:cNvPr id="2" name="Título 1">
             <a:extLst>
               <a:ext uri="{FF2B5EF4-FFF2-40B4-BE49-F238E27FC236}">
-                <a16:creationId xmlns:a16="http://schemas.microsoft.com/office/drawing/2014/main" id="{7BC3F6F4-D80B-C1BB-227F-C03E5E048E6E}"/>
+                <a16:creationId xmlns:a16="http://schemas.microsoft.com/office/drawing/2014/main" id="{028D4A99-9A29-200B-6DD7-FACD52DCDD13}"/>
               </a:ext>
             </a:extLst>
           </p:cNvPr>
@@ -1007,7 +1007,7 @@
           <p:cNvPr id="3" name="Marcador de texto 2">
             <a:extLst>
               <a:ext uri="{FF2B5EF4-FFF2-40B4-BE49-F238E27FC236}">
-                <a16:creationId xmlns:a16="http://schemas.microsoft.com/office/drawing/2014/main" id="{87B172BB-7E5F-A4E2-217D-2B059083E554}"/>
+                <a16:creationId xmlns:a16="http://schemas.microsoft.com/office/drawing/2014/main" id="{993EBD5B-4058-DD2F-D0AB-1FD2A62C2E46}"/>
               </a:ext>
             </a:extLst>
           </p:cNvPr>
@@ -1132,7 +1132,7 @@
           <p:cNvPr id="4" name="Marcador de fecha 3">
             <a:extLst>
               <a:ext uri="{FF2B5EF4-FFF2-40B4-BE49-F238E27FC236}">
-                <a16:creationId xmlns:a16="http://schemas.microsoft.com/office/drawing/2014/main" id="{E907FA87-7F86-8183-E1EF-2A9AF0EA92CA}"/>
+                <a16:creationId xmlns:a16="http://schemas.microsoft.com/office/drawing/2014/main" id="{6C9DC1F3-D5E5-CCDC-9020-669CCE68476D}"/>
               </a:ext>
             </a:extLst>
           </p:cNvPr>
@@ -1148,7 +1148,7 @@
           <a:bodyPr/>
           <a:lstStyle/>
           <a:p>
-            <a:fld id="{AB9C1A0A-BF9E-48A0-991D-0EB02B84C89C}" type="datetimeFigureOut">
+            <a:fld id="{5EA62A27-1D85-48AD-90C3-37B244257CF0}" type="datetimeFigureOut">
               <a:rPr lang="es-ES" smtClean="0"/>
               <a:t>19/05/2026</a:t>
             </a:fld>
@@ -1161,7 +1161,7 @@
           <p:cNvPr id="5" name="Marcador de pie de página 4">
             <a:extLst>
               <a:ext uri="{FF2B5EF4-FFF2-40B4-BE49-F238E27FC236}">
-                <a16:creationId xmlns:a16="http://schemas.microsoft.com/office/drawing/2014/main" id="{071A7589-02BA-C1C3-69B5-29607B14D7B6}"/>
+                <a16:creationId xmlns:a16="http://schemas.microsoft.com/office/drawing/2014/main" id="{EB357624-B5DB-F2A1-7FA2-7C221A5F314B}"/>
               </a:ext>
             </a:extLst>
           </p:cNvPr>
@@ -1186,7 +1186,7 @@
           <p:cNvPr id="6" name="Marcador de número de diapositiva 5">
             <a:extLst>
               <a:ext uri="{FF2B5EF4-FFF2-40B4-BE49-F238E27FC236}">
-                <a16:creationId xmlns:a16="http://schemas.microsoft.com/office/drawing/2014/main" id="{F522CDD7-3053-0DFD-CBA5-11D5E492DD83}"/>
+                <a16:creationId xmlns:a16="http://schemas.microsoft.com/office/drawing/2014/main" id="{750C7AE2-5B81-9A50-05AC-1B614CC70971}"/>
               </a:ext>
             </a:extLst>
           </p:cNvPr>
@@ -1202,7 +1202,7 @@
           <a:bodyPr/>
           <a:lstStyle/>
           <a:p>
-            <a:fld id="{B3465923-C01A-429D-BF48-FE1C1E8CA486}" type="slidenum">
+            <a:fld id="{357192D4-5BD9-41C8-9EE5-942CB5B156C9}" type="slidenum">
               <a:rPr lang="es-ES" smtClean="0"/>
               <a:t>‹Nº›</a:t>
             </a:fld>
@@ -1213,7 +1213,7 @@
     </p:spTree>
     <p:extLst>
       <p:ext uri="{BB962C8B-B14F-4D97-AF65-F5344CB8AC3E}">
-        <p14:creationId xmlns:p14="http://schemas.microsoft.com/office/powerpoint/2010/main" val="970898443"/>
+        <p14:creationId xmlns:p14="http://schemas.microsoft.com/office/powerpoint/2010/main" val="4052687921"/>
       </p:ext>
     </p:extLst>
   </p:cSld>
@@ -1245,7 +1245,7 @@
           <p:cNvPr id="2" name="Título 1">
             <a:extLst>
               <a:ext uri="{FF2B5EF4-FFF2-40B4-BE49-F238E27FC236}">
-                <a16:creationId xmlns:a16="http://schemas.microsoft.com/office/drawing/2014/main" id="{84E1C9FE-8E6C-6103-9CD2-6BFB8A35C03C}"/>
+                <a16:creationId xmlns:a16="http://schemas.microsoft.com/office/drawing/2014/main" id="{1A68C001-776F-00A0-A9A3-C5FC6137A0A3}"/>
               </a:ext>
             </a:extLst>
           </p:cNvPr>
@@ -1273,7 +1273,7 @@
           <p:cNvPr id="3" name="Marcador de contenido 2">
             <a:extLst>
               <a:ext uri="{FF2B5EF4-FFF2-40B4-BE49-F238E27FC236}">
-                <a16:creationId xmlns:a16="http://schemas.microsoft.com/office/drawing/2014/main" id="{40BE22F8-F11E-2617-8DDE-BC25BF2E1586}"/>
+                <a16:creationId xmlns:a16="http://schemas.microsoft.com/office/drawing/2014/main" id="{00E2DC49-A2BE-ECC8-0798-6178D2DC12B9}"/>
               </a:ext>
             </a:extLst>
           </p:cNvPr>
@@ -1335,7 +1335,7 @@
           <p:cNvPr id="4" name="Marcador de contenido 3">
             <a:extLst>
               <a:ext uri="{FF2B5EF4-FFF2-40B4-BE49-F238E27FC236}">
-                <a16:creationId xmlns:a16="http://schemas.microsoft.com/office/drawing/2014/main" id="{059EDAFD-C4AA-A7DA-0144-0B0957FC354C}"/>
+                <a16:creationId xmlns:a16="http://schemas.microsoft.com/office/drawing/2014/main" id="{9659D0DA-D6BE-FBD5-4AAA-FDDE91CC4908}"/>
               </a:ext>
             </a:extLst>
           </p:cNvPr>
@@ -1397,7 +1397,7 @@
           <p:cNvPr id="5" name="Marcador de fecha 4">
             <a:extLst>
               <a:ext uri="{FF2B5EF4-FFF2-40B4-BE49-F238E27FC236}">
-                <a16:creationId xmlns:a16="http://schemas.microsoft.com/office/drawing/2014/main" id="{1E15B96B-28C3-475D-E3D7-9F4B7C10726C}"/>
+                <a16:creationId xmlns:a16="http://schemas.microsoft.com/office/drawing/2014/main" id="{F2A06CC8-F91D-7586-85D6-F5C5668B2226}"/>
               </a:ext>
             </a:extLst>
           </p:cNvPr>
@@ -1413,7 +1413,7 @@
           <a:bodyPr/>
           <a:lstStyle/>
           <a:p>
-            <a:fld id="{AB9C1A0A-BF9E-48A0-991D-0EB02B84C89C}" type="datetimeFigureOut">
+            <a:fld id="{5EA62A27-1D85-48AD-90C3-37B244257CF0}" type="datetimeFigureOut">
               <a:rPr lang="es-ES" smtClean="0"/>
               <a:t>19/05/2026</a:t>
             </a:fld>
@@ -1426,7 +1426,7 @@
           <p:cNvPr id="6" name="Marcador de pie de página 5">
             <a:extLst>
               <a:ext uri="{FF2B5EF4-FFF2-40B4-BE49-F238E27FC236}">
-                <a16:creationId xmlns:a16="http://schemas.microsoft.com/office/drawing/2014/main" id="{8F648C4D-4C4E-BF09-1C47-79A8CD5B17AA}"/>
+                <a16:creationId xmlns:a16="http://schemas.microsoft.com/office/drawing/2014/main" id="{0A1CA324-ED71-21AE-613B-F8A58D66EDC9}"/>
               </a:ext>
             </a:extLst>
           </p:cNvPr>
@@ -1451,7 +1451,7 @@
           <p:cNvPr id="7" name="Marcador de número de diapositiva 6">
             <a:extLst>
               <a:ext uri="{FF2B5EF4-FFF2-40B4-BE49-F238E27FC236}">
-                <a16:creationId xmlns:a16="http://schemas.microsoft.com/office/drawing/2014/main" id="{E80DF2E6-58DE-5F43-20DB-5D39F5BBBABB}"/>
+                <a16:creationId xmlns:a16="http://schemas.microsoft.com/office/drawing/2014/main" id="{826749BC-6AAC-7FA0-BBB3-6F22C2074C11}"/>
               </a:ext>
             </a:extLst>
           </p:cNvPr>
@@ -1467,7 +1467,7 @@
           <a:bodyPr/>
           <a:lstStyle/>
           <a:p>
-            <a:fld id="{B3465923-C01A-429D-BF48-FE1C1E8CA486}" type="slidenum">
+            <a:fld id="{357192D4-5BD9-41C8-9EE5-942CB5B156C9}" type="slidenum">
               <a:rPr lang="es-ES" smtClean="0"/>
               <a:t>‹Nº›</a:t>
             </a:fld>
@@ -1478,7 +1478,7 @@
     </p:spTree>
     <p:extLst>
       <p:ext uri="{BB962C8B-B14F-4D97-AF65-F5344CB8AC3E}">
-        <p14:creationId xmlns:p14="http://schemas.microsoft.com/office/powerpoint/2010/main" val="1473574331"/>
+        <p14:creationId xmlns:p14="http://schemas.microsoft.com/office/powerpoint/2010/main" val="3573210095"/>
       </p:ext>
     </p:extLst>
   </p:cSld>
@@ -1510,7 +1510,7 @@
           <p:cNvPr id="2" name="Título 1">
             <a:extLst>
               <a:ext uri="{FF2B5EF4-FFF2-40B4-BE49-F238E27FC236}">
-                <a16:creationId xmlns:a16="http://schemas.microsoft.com/office/drawing/2014/main" id="{E92AB916-AE9D-26D9-28F7-EEAE8FF8B053}"/>
+                <a16:creationId xmlns:a16="http://schemas.microsoft.com/office/drawing/2014/main" id="{A5E95328-B4B6-9ACB-B687-8EA3D3874DB6}"/>
               </a:ext>
             </a:extLst>
           </p:cNvPr>
@@ -1543,7 +1543,7 @@
           <p:cNvPr id="3" name="Marcador de texto 2">
             <a:extLst>
               <a:ext uri="{FF2B5EF4-FFF2-40B4-BE49-F238E27FC236}">
-                <a16:creationId xmlns:a16="http://schemas.microsoft.com/office/drawing/2014/main" id="{BC66CB01-328B-4D7B-2A2A-901DDF0FDAA3}"/>
+                <a16:creationId xmlns:a16="http://schemas.microsoft.com/office/drawing/2014/main" id="{381CAD59-CAA5-D3D0-5485-F0368B6E46AE}"/>
               </a:ext>
             </a:extLst>
           </p:cNvPr>
@@ -1614,7 +1614,7 @@
           <p:cNvPr id="4" name="Marcador de contenido 3">
             <a:extLst>
               <a:ext uri="{FF2B5EF4-FFF2-40B4-BE49-F238E27FC236}">
-                <a16:creationId xmlns:a16="http://schemas.microsoft.com/office/drawing/2014/main" id="{CA1AD0B3-48E2-FC6C-9471-725BB47630A8}"/>
+                <a16:creationId xmlns:a16="http://schemas.microsoft.com/office/drawing/2014/main" id="{82B8E0C2-AAE9-83BD-B746-56796B3B9C21}"/>
               </a:ext>
             </a:extLst>
           </p:cNvPr>
@@ -1676,7 +1676,7 @@
           <p:cNvPr id="5" name="Marcador de texto 4">
             <a:extLst>
               <a:ext uri="{FF2B5EF4-FFF2-40B4-BE49-F238E27FC236}">
-                <a16:creationId xmlns:a16="http://schemas.microsoft.com/office/drawing/2014/main" id="{F28D16E9-BEDB-A73C-EBD5-0F9712E94690}"/>
+                <a16:creationId xmlns:a16="http://schemas.microsoft.com/office/drawing/2014/main" id="{E55150E5-F565-FA62-3459-87167636DD3F}"/>
               </a:ext>
             </a:extLst>
           </p:cNvPr>
@@ -1747,7 +1747,7 @@
           <p:cNvPr id="6" name="Marcador de contenido 5">
             <a:extLst>
               <a:ext uri="{FF2B5EF4-FFF2-40B4-BE49-F238E27FC236}">
-                <a16:creationId xmlns:a16="http://schemas.microsoft.com/office/drawing/2014/main" id="{907545AB-BEF7-3457-90A3-BE2C72551632}"/>
+                <a16:creationId xmlns:a16="http://schemas.microsoft.com/office/drawing/2014/main" id="{947F2CB0-A358-148D-6C1F-7CF84C0B2AA6}"/>
               </a:ext>
             </a:extLst>
           </p:cNvPr>
@@ -1809,7 +1809,7 @@
           <p:cNvPr id="7" name="Marcador de fecha 6">
             <a:extLst>
               <a:ext uri="{FF2B5EF4-FFF2-40B4-BE49-F238E27FC236}">
-                <a16:creationId xmlns:a16="http://schemas.microsoft.com/office/drawing/2014/main" id="{65EED2F8-B104-278A-D121-8B6BA5C29BF3}"/>
+                <a16:creationId xmlns:a16="http://schemas.microsoft.com/office/drawing/2014/main" id="{8057AC04-7560-E3A7-A831-FB4DFF69F072}"/>
               </a:ext>
             </a:extLst>
           </p:cNvPr>
@@ -1825,7 +1825,7 @@
           <a:bodyPr/>
           <a:lstStyle/>
           <a:p>
-            <a:fld id="{AB9C1A0A-BF9E-48A0-991D-0EB02B84C89C}" type="datetimeFigureOut">
+            <a:fld id="{5EA62A27-1D85-48AD-90C3-37B244257CF0}" type="datetimeFigureOut">
               <a:rPr lang="es-ES" smtClean="0"/>
               <a:t>19/05/2026</a:t>
             </a:fld>
@@ -1838,7 +1838,7 @@
           <p:cNvPr id="8" name="Marcador de pie de página 7">
             <a:extLst>
               <a:ext uri="{FF2B5EF4-FFF2-40B4-BE49-F238E27FC236}">
-                <a16:creationId xmlns:a16="http://schemas.microsoft.com/office/drawing/2014/main" id="{88AF0901-8B10-FD68-79A6-2E732472EE66}"/>
+                <a16:creationId xmlns:a16="http://schemas.microsoft.com/office/drawing/2014/main" id="{EA59DA2E-8572-9B68-793C-55E5FD9AB535}"/>
               </a:ext>
             </a:extLst>
           </p:cNvPr>
@@ -1863,7 +1863,7 @@
           <p:cNvPr id="9" name="Marcador de número de diapositiva 8">
             <a:extLst>
               <a:ext uri="{FF2B5EF4-FFF2-40B4-BE49-F238E27FC236}">
-                <a16:creationId xmlns:a16="http://schemas.microsoft.com/office/drawing/2014/main" id="{DDFA98F8-B109-C8D4-B883-DF8CD2E5DE92}"/>
+                <a16:creationId xmlns:a16="http://schemas.microsoft.com/office/drawing/2014/main" id="{E85E1E7C-FB27-5478-B7CC-B2D9E4DC9CFC}"/>
               </a:ext>
             </a:extLst>
           </p:cNvPr>
@@ -1879,7 +1879,7 @@
           <a:bodyPr/>
           <a:lstStyle/>
           <a:p>
-            <a:fld id="{B3465923-C01A-429D-BF48-FE1C1E8CA486}" type="slidenum">
+            <a:fld id="{357192D4-5BD9-41C8-9EE5-942CB5B156C9}" type="slidenum">
               <a:rPr lang="es-ES" smtClean="0"/>
               <a:t>‹Nº›</a:t>
             </a:fld>
@@ -1890,7 +1890,7 @@
     </p:spTree>
     <p:extLst>
       <p:ext uri="{BB962C8B-B14F-4D97-AF65-F5344CB8AC3E}">
-        <p14:creationId xmlns:p14="http://schemas.microsoft.com/office/powerpoint/2010/main" val="3846948294"/>
+        <p14:creationId xmlns:p14="http://schemas.microsoft.com/office/powerpoint/2010/main" val="1082468512"/>
       </p:ext>
     </p:extLst>
   </p:cSld>
@@ -1922,7 +1922,7 @@
           <p:cNvPr id="2" name="Título 1">
             <a:extLst>
               <a:ext uri="{FF2B5EF4-FFF2-40B4-BE49-F238E27FC236}">
-                <a16:creationId xmlns:a16="http://schemas.microsoft.com/office/drawing/2014/main" id="{074145F3-8199-D652-0EA9-25539AAC56AA}"/>
+                <a16:creationId xmlns:a16="http://schemas.microsoft.com/office/drawing/2014/main" id="{1DCF473E-51F7-D4A4-404E-56FC61F961C2}"/>
               </a:ext>
             </a:extLst>
           </p:cNvPr>
@@ -1950,7 +1950,7 @@
           <p:cNvPr id="3" name="Marcador de fecha 2">
             <a:extLst>
               <a:ext uri="{FF2B5EF4-FFF2-40B4-BE49-F238E27FC236}">
-                <a16:creationId xmlns:a16="http://schemas.microsoft.com/office/drawing/2014/main" id="{4457EB84-2E78-A4B6-D3D2-C4FB4D1B5346}"/>
+                <a16:creationId xmlns:a16="http://schemas.microsoft.com/office/drawing/2014/main" id="{DC2BF4BF-32DA-9453-FCF1-4E82CF0476F8}"/>
               </a:ext>
             </a:extLst>
           </p:cNvPr>
@@ -1966,7 +1966,7 @@
           <a:bodyPr/>
           <a:lstStyle/>
           <a:p>
-            <a:fld id="{AB9C1A0A-BF9E-48A0-991D-0EB02B84C89C}" type="datetimeFigureOut">
+            <a:fld id="{5EA62A27-1D85-48AD-90C3-37B244257CF0}" type="datetimeFigureOut">
               <a:rPr lang="es-ES" smtClean="0"/>
               <a:t>19/05/2026</a:t>
             </a:fld>
@@ -1979,7 +1979,7 @@
           <p:cNvPr id="4" name="Marcador de pie de página 3">
             <a:extLst>
               <a:ext uri="{FF2B5EF4-FFF2-40B4-BE49-F238E27FC236}">
-                <a16:creationId xmlns:a16="http://schemas.microsoft.com/office/drawing/2014/main" id="{D97D25ED-0BC3-CF86-49E8-64B39358EBE8}"/>
+                <a16:creationId xmlns:a16="http://schemas.microsoft.com/office/drawing/2014/main" id="{13F41BD4-0A83-52D5-8B71-1E1B3DC8C9BD}"/>
               </a:ext>
             </a:extLst>
           </p:cNvPr>
@@ -2004,7 +2004,7 @@
           <p:cNvPr id="5" name="Marcador de número de diapositiva 4">
             <a:extLst>
               <a:ext uri="{FF2B5EF4-FFF2-40B4-BE49-F238E27FC236}">
-                <a16:creationId xmlns:a16="http://schemas.microsoft.com/office/drawing/2014/main" id="{1B127638-D7CA-147F-C3F0-4BEC62CCD5DD}"/>
+                <a16:creationId xmlns:a16="http://schemas.microsoft.com/office/drawing/2014/main" id="{12BB15A4-C317-4292-367F-A35A34F7E9E0}"/>
               </a:ext>
             </a:extLst>
           </p:cNvPr>
@@ -2020,7 +2020,7 @@
           <a:bodyPr/>
           <a:lstStyle/>
           <a:p>
-            <a:fld id="{B3465923-C01A-429D-BF48-FE1C1E8CA486}" type="slidenum">
+            <a:fld id="{357192D4-5BD9-41C8-9EE5-942CB5B156C9}" type="slidenum">
               <a:rPr lang="es-ES" smtClean="0"/>
               <a:t>‹Nº›</a:t>
             </a:fld>
@@ -2031,7 +2031,7 @@
     </p:spTree>
     <p:extLst>
       <p:ext uri="{BB962C8B-B14F-4D97-AF65-F5344CB8AC3E}">
-        <p14:creationId xmlns:p14="http://schemas.microsoft.com/office/powerpoint/2010/main" val="266854122"/>
+        <p14:creationId xmlns:p14="http://schemas.microsoft.com/office/powerpoint/2010/main" val="843809289"/>
       </p:ext>
     </p:extLst>
   </p:cSld>
@@ -2063,7 +2063,7 @@
           <p:cNvPr id="2" name="Marcador de fecha 1">
             <a:extLst>
               <a:ext uri="{FF2B5EF4-FFF2-40B4-BE49-F238E27FC236}">
-                <a16:creationId xmlns:a16="http://schemas.microsoft.com/office/drawing/2014/main" id="{277768E8-3F42-6276-86AF-68715D8E9A8D}"/>
+                <a16:creationId xmlns:a16="http://schemas.microsoft.com/office/drawing/2014/main" id="{BB770DBA-80A6-D082-CE82-4104E8F6A619}"/>
               </a:ext>
             </a:extLst>
           </p:cNvPr>
@@ -2079,7 +2079,7 @@
           <a:bodyPr/>
           <a:lstStyle/>
           <a:p>
-            <a:fld id="{AB9C1A0A-BF9E-48A0-991D-0EB02B84C89C}" type="datetimeFigureOut">
+            <a:fld id="{5EA62A27-1D85-48AD-90C3-37B244257CF0}" type="datetimeFigureOut">
               <a:rPr lang="es-ES" smtClean="0"/>
               <a:t>19/05/2026</a:t>
             </a:fld>
@@ -2092,7 +2092,7 @@
           <p:cNvPr id="3" name="Marcador de pie de página 2">
             <a:extLst>
               <a:ext uri="{FF2B5EF4-FFF2-40B4-BE49-F238E27FC236}">
-                <a16:creationId xmlns:a16="http://schemas.microsoft.com/office/drawing/2014/main" id="{AFC22073-20C1-8832-0253-F179A0226F60}"/>
+                <a16:creationId xmlns:a16="http://schemas.microsoft.com/office/drawing/2014/main" id="{ED8222E9-DDE3-B1D4-E6BA-2BBE6D5CAABC}"/>
               </a:ext>
             </a:extLst>
           </p:cNvPr>
@@ -2117,7 +2117,7 @@
           <p:cNvPr id="4" name="Marcador de número de diapositiva 3">
             <a:extLst>
               <a:ext uri="{FF2B5EF4-FFF2-40B4-BE49-F238E27FC236}">
-                <a16:creationId xmlns:a16="http://schemas.microsoft.com/office/drawing/2014/main" id="{A0702840-060A-E60B-D143-1F1FDA271F8A}"/>
+                <a16:creationId xmlns:a16="http://schemas.microsoft.com/office/drawing/2014/main" id="{5B05FE56-9D48-9873-839E-6DA6555E7DCD}"/>
               </a:ext>
             </a:extLst>
           </p:cNvPr>
@@ -2133,7 +2133,7 @@
           <a:bodyPr/>
           <a:lstStyle/>
           <a:p>
-            <a:fld id="{B3465923-C01A-429D-BF48-FE1C1E8CA486}" type="slidenum">
+            <a:fld id="{357192D4-5BD9-41C8-9EE5-942CB5B156C9}" type="slidenum">
               <a:rPr lang="es-ES" smtClean="0"/>
               <a:t>‹Nº›</a:t>
             </a:fld>
@@ -2144,7 +2144,7 @@
     </p:spTree>
     <p:extLst>
       <p:ext uri="{BB962C8B-B14F-4D97-AF65-F5344CB8AC3E}">
-        <p14:creationId xmlns:p14="http://schemas.microsoft.com/office/powerpoint/2010/main" val="1294746670"/>
+        <p14:creationId xmlns:p14="http://schemas.microsoft.com/office/powerpoint/2010/main" val="2185951776"/>
       </p:ext>
     </p:extLst>
   </p:cSld>
@@ -2176,7 +2176,7 @@
           <p:cNvPr id="2" name="Título 1">
             <a:extLst>
               <a:ext uri="{FF2B5EF4-FFF2-40B4-BE49-F238E27FC236}">
-                <a16:creationId xmlns:a16="http://schemas.microsoft.com/office/drawing/2014/main" id="{254CCFB2-E81E-F719-766D-D55382D7FD3A}"/>
+                <a16:creationId xmlns:a16="http://schemas.microsoft.com/office/drawing/2014/main" id="{4BE62A58-AF8A-3FB8-EA0A-1ABF9C4B8B69}"/>
               </a:ext>
             </a:extLst>
           </p:cNvPr>
@@ -2213,7 +2213,7 @@
           <p:cNvPr id="3" name="Marcador de contenido 2">
             <a:extLst>
               <a:ext uri="{FF2B5EF4-FFF2-40B4-BE49-F238E27FC236}">
-                <a16:creationId xmlns:a16="http://schemas.microsoft.com/office/drawing/2014/main" id="{952FC578-50BC-9A1A-9F42-60BDC233E2A7}"/>
+                <a16:creationId xmlns:a16="http://schemas.microsoft.com/office/drawing/2014/main" id="{1A83C48F-EE56-D384-1B9C-B1E1C5E07EF4}"/>
               </a:ext>
             </a:extLst>
           </p:cNvPr>
@@ -2303,7 +2303,7 @@
           <p:cNvPr id="4" name="Marcador de texto 3">
             <a:extLst>
               <a:ext uri="{FF2B5EF4-FFF2-40B4-BE49-F238E27FC236}">
-                <a16:creationId xmlns:a16="http://schemas.microsoft.com/office/drawing/2014/main" id="{FA6805FF-578A-B13E-9A1C-74EB8A8CBF86}"/>
+                <a16:creationId xmlns:a16="http://schemas.microsoft.com/office/drawing/2014/main" id="{062B874F-BC36-715D-D132-8FD325459989}"/>
               </a:ext>
             </a:extLst>
           </p:cNvPr>
@@ -2374,7 +2374,7 @@
           <p:cNvPr id="5" name="Marcador de fecha 4">
             <a:extLst>
               <a:ext uri="{FF2B5EF4-FFF2-40B4-BE49-F238E27FC236}">
-                <a16:creationId xmlns:a16="http://schemas.microsoft.com/office/drawing/2014/main" id="{6038623A-9E5A-3228-0571-79279CCE6023}"/>
+                <a16:creationId xmlns:a16="http://schemas.microsoft.com/office/drawing/2014/main" id="{E80A516C-DDEA-C052-9308-F388DDF0178F}"/>
               </a:ext>
             </a:extLst>
           </p:cNvPr>
@@ -2390,7 +2390,7 @@
           <a:bodyPr/>
           <a:lstStyle/>
           <a:p>
-            <a:fld id="{AB9C1A0A-BF9E-48A0-991D-0EB02B84C89C}" type="datetimeFigureOut">
+            <a:fld id="{5EA62A27-1D85-48AD-90C3-37B244257CF0}" type="datetimeFigureOut">
               <a:rPr lang="es-ES" smtClean="0"/>
               <a:t>19/05/2026</a:t>
             </a:fld>
@@ -2403,7 +2403,7 @@
           <p:cNvPr id="6" name="Marcador de pie de página 5">
             <a:extLst>
               <a:ext uri="{FF2B5EF4-FFF2-40B4-BE49-F238E27FC236}">
-                <a16:creationId xmlns:a16="http://schemas.microsoft.com/office/drawing/2014/main" id="{E1793859-5ABA-672E-9504-362653336615}"/>
+                <a16:creationId xmlns:a16="http://schemas.microsoft.com/office/drawing/2014/main" id="{2957D22E-3E4E-3BA1-E165-39275168A942}"/>
               </a:ext>
             </a:extLst>
           </p:cNvPr>
@@ -2428,7 +2428,7 @@
           <p:cNvPr id="7" name="Marcador de número de diapositiva 6">
             <a:extLst>
               <a:ext uri="{FF2B5EF4-FFF2-40B4-BE49-F238E27FC236}">
-                <a16:creationId xmlns:a16="http://schemas.microsoft.com/office/drawing/2014/main" id="{BC603FE4-4FC9-6622-C43B-7AD3545EAB0D}"/>
+                <a16:creationId xmlns:a16="http://schemas.microsoft.com/office/drawing/2014/main" id="{E9CD3F2A-5D76-4B7C-3D0E-CC8CE2B8C370}"/>
               </a:ext>
             </a:extLst>
           </p:cNvPr>
@@ -2444,7 +2444,7 @@
           <a:bodyPr/>
           <a:lstStyle/>
           <a:p>
-            <a:fld id="{B3465923-C01A-429D-BF48-FE1C1E8CA486}" type="slidenum">
+            <a:fld id="{357192D4-5BD9-41C8-9EE5-942CB5B156C9}" type="slidenum">
               <a:rPr lang="es-ES" smtClean="0"/>
               <a:t>‹Nº›</a:t>
             </a:fld>
@@ -2455,7 +2455,7 @@
     </p:spTree>
     <p:extLst>
       <p:ext uri="{BB962C8B-B14F-4D97-AF65-F5344CB8AC3E}">
-        <p14:creationId xmlns:p14="http://schemas.microsoft.com/office/powerpoint/2010/main" val="4121965106"/>
+        <p14:creationId xmlns:p14="http://schemas.microsoft.com/office/powerpoint/2010/main" val="2092824997"/>
       </p:ext>
     </p:extLst>
   </p:cSld>
@@ -2487,7 +2487,7 @@
           <p:cNvPr id="2" name="Título 1">
             <a:extLst>
               <a:ext uri="{FF2B5EF4-FFF2-40B4-BE49-F238E27FC236}">
-                <a16:creationId xmlns:a16="http://schemas.microsoft.com/office/drawing/2014/main" id="{D27F6048-BB77-75B2-E0F5-556AA73FBDDE}"/>
+                <a16:creationId xmlns:a16="http://schemas.microsoft.com/office/drawing/2014/main" id="{B4EA0205-E1B1-D315-A143-01A9D00CFD7A}"/>
               </a:ext>
             </a:extLst>
           </p:cNvPr>
@@ -2524,7 +2524,7 @@
           <p:cNvPr id="3" name="Marcador de posición de imagen 2">
             <a:extLst>
               <a:ext uri="{FF2B5EF4-FFF2-40B4-BE49-F238E27FC236}">
-                <a16:creationId xmlns:a16="http://schemas.microsoft.com/office/drawing/2014/main" id="{3B4CB789-4CC6-7027-7FB7-32FEDDD1081C}"/>
+                <a16:creationId xmlns:a16="http://schemas.microsoft.com/office/drawing/2014/main" id="{5BADC2F0-6160-7416-B388-A10C87991244}"/>
               </a:ext>
             </a:extLst>
           </p:cNvPr>
@@ -2591,7 +2591,7 @@
           <p:cNvPr id="4" name="Marcador de texto 3">
             <a:extLst>
               <a:ext uri="{FF2B5EF4-FFF2-40B4-BE49-F238E27FC236}">
-                <a16:creationId xmlns:a16="http://schemas.microsoft.com/office/drawing/2014/main" id="{41E7A35C-702C-1D8B-E13C-D710823ABC57}"/>
+                <a16:creationId xmlns:a16="http://schemas.microsoft.com/office/drawing/2014/main" id="{3FC8B46F-1A24-D909-BB46-D0EA7E06A1A4}"/>
               </a:ext>
             </a:extLst>
           </p:cNvPr>
@@ -2662,7 +2662,7 @@
           <p:cNvPr id="5" name="Marcador de fecha 4">
             <a:extLst>
               <a:ext uri="{FF2B5EF4-FFF2-40B4-BE49-F238E27FC236}">
-                <a16:creationId xmlns:a16="http://schemas.microsoft.com/office/drawing/2014/main" id="{36632614-54E4-2380-00E4-802994933CF2}"/>
+                <a16:creationId xmlns:a16="http://schemas.microsoft.com/office/drawing/2014/main" id="{0247D9DE-E2CE-52AC-CCDB-87BE83C4EAE6}"/>
               </a:ext>
             </a:extLst>
           </p:cNvPr>
@@ -2678,7 +2678,7 @@
           <a:bodyPr/>
           <a:lstStyle/>
           <a:p>
-            <a:fld id="{AB9C1A0A-BF9E-48A0-991D-0EB02B84C89C}" type="datetimeFigureOut">
+            <a:fld id="{5EA62A27-1D85-48AD-90C3-37B244257CF0}" type="datetimeFigureOut">
               <a:rPr lang="es-ES" smtClean="0"/>
               <a:t>19/05/2026</a:t>
             </a:fld>
@@ -2691,7 +2691,7 @@
           <p:cNvPr id="6" name="Marcador de pie de página 5">
             <a:extLst>
               <a:ext uri="{FF2B5EF4-FFF2-40B4-BE49-F238E27FC236}">
-                <a16:creationId xmlns:a16="http://schemas.microsoft.com/office/drawing/2014/main" id="{E8EA630A-5FCE-62C7-BBCC-041308A8D028}"/>
+                <a16:creationId xmlns:a16="http://schemas.microsoft.com/office/drawing/2014/main" id="{10FEF411-C3D2-F204-D11D-12BEC439EB07}"/>
               </a:ext>
             </a:extLst>
           </p:cNvPr>
@@ -2716,7 +2716,7 @@
           <p:cNvPr id="7" name="Marcador de número de diapositiva 6">
             <a:extLst>
               <a:ext uri="{FF2B5EF4-FFF2-40B4-BE49-F238E27FC236}">
-                <a16:creationId xmlns:a16="http://schemas.microsoft.com/office/drawing/2014/main" id="{F7B00146-435A-13A2-94AE-52EA686AA928}"/>
+                <a16:creationId xmlns:a16="http://schemas.microsoft.com/office/drawing/2014/main" id="{504D838E-8580-34E0-3EB7-1118DCC31235}"/>
               </a:ext>
             </a:extLst>
           </p:cNvPr>
@@ -2732,7 +2732,7 @@
           <a:bodyPr/>
           <a:lstStyle/>
           <a:p>
-            <a:fld id="{B3465923-C01A-429D-BF48-FE1C1E8CA486}" type="slidenum">
+            <a:fld id="{357192D4-5BD9-41C8-9EE5-942CB5B156C9}" type="slidenum">
               <a:rPr lang="es-ES" smtClean="0"/>
               <a:t>‹Nº›</a:t>
             </a:fld>
@@ -2743,7 +2743,7 @@
     </p:spTree>
     <p:extLst>
       <p:ext uri="{BB962C8B-B14F-4D97-AF65-F5344CB8AC3E}">
-        <p14:creationId xmlns:p14="http://schemas.microsoft.com/office/powerpoint/2010/main" val="948003218"/>
+        <p14:creationId xmlns:p14="http://schemas.microsoft.com/office/powerpoint/2010/main" val="1370303788"/>
       </p:ext>
     </p:extLst>
   </p:cSld>
@@ -2780,7 +2780,7 @@
           <p:cNvPr id="2" name="Marcador de título 1">
             <a:extLst>
               <a:ext uri="{FF2B5EF4-FFF2-40B4-BE49-F238E27FC236}">
-                <a16:creationId xmlns:a16="http://schemas.microsoft.com/office/drawing/2014/main" id="{73E795E7-988F-6D5A-2223-AFB25A944D0D}"/>
+                <a16:creationId xmlns:a16="http://schemas.microsoft.com/office/drawing/2014/main" id="{72786C14-7D58-E4B6-34F2-327E67DD1DA7}"/>
               </a:ext>
             </a:extLst>
           </p:cNvPr>
@@ -2818,7 +2818,7 @@
           <p:cNvPr id="3" name="Marcador de texto 2">
             <a:extLst>
               <a:ext uri="{FF2B5EF4-FFF2-40B4-BE49-F238E27FC236}">
-                <a16:creationId xmlns:a16="http://schemas.microsoft.com/office/drawing/2014/main" id="{3176D17D-F500-CAF0-EB2E-9DD9DFBEFBE3}"/>
+                <a16:creationId xmlns:a16="http://schemas.microsoft.com/office/drawing/2014/main" id="{97AEFCDE-9BDE-1271-E379-25AE01116B23}"/>
               </a:ext>
             </a:extLst>
           </p:cNvPr>
@@ -2885,7 +2885,7 @@
           <p:cNvPr id="4" name="Marcador de fecha 3">
             <a:extLst>
               <a:ext uri="{FF2B5EF4-FFF2-40B4-BE49-F238E27FC236}">
-                <a16:creationId xmlns:a16="http://schemas.microsoft.com/office/drawing/2014/main" id="{C8D3EAFA-06BC-8492-B4AD-7465FE9219D9}"/>
+                <a16:creationId xmlns:a16="http://schemas.microsoft.com/office/drawing/2014/main" id="{2C386A11-5809-CF73-C86F-4A15E6AD7B55}"/>
               </a:ext>
             </a:extLst>
           </p:cNvPr>
@@ -2919,7 +2919,7 @@
             </a:lvl1pPr>
           </a:lstStyle>
           <a:p>
-            <a:fld id="{AB9C1A0A-BF9E-48A0-991D-0EB02B84C89C}" type="datetimeFigureOut">
+            <a:fld id="{5EA62A27-1D85-48AD-90C3-37B244257CF0}" type="datetimeFigureOut">
               <a:rPr lang="es-ES" smtClean="0"/>
               <a:t>19/05/2026</a:t>
             </a:fld>
@@ -2932,7 +2932,7 @@
           <p:cNvPr id="5" name="Marcador de pie de página 4">
             <a:extLst>
               <a:ext uri="{FF2B5EF4-FFF2-40B4-BE49-F238E27FC236}">
-                <a16:creationId xmlns:a16="http://schemas.microsoft.com/office/drawing/2014/main" id="{6A64E50F-701B-BD30-C2B7-F8BB0DFF3D0F}"/>
+                <a16:creationId xmlns:a16="http://schemas.microsoft.com/office/drawing/2014/main" id="{0FCD38D0-3C3E-52AC-389B-35B51C2CE478}"/>
               </a:ext>
             </a:extLst>
           </p:cNvPr>
@@ -2975,7 +2975,7 @@
           <p:cNvPr id="6" name="Marcador de número de diapositiva 5">
             <a:extLst>
               <a:ext uri="{FF2B5EF4-FFF2-40B4-BE49-F238E27FC236}">
-                <a16:creationId xmlns:a16="http://schemas.microsoft.com/office/drawing/2014/main" id="{8911B98D-8394-836F-1E49-B6D987852199}"/>
+                <a16:creationId xmlns:a16="http://schemas.microsoft.com/office/drawing/2014/main" id="{E52B3E20-F6CA-0C98-43CD-121A885307B9}"/>
               </a:ext>
             </a:extLst>
           </p:cNvPr>
@@ -3009,7 +3009,7 @@
             </a:lvl1pPr>
           </a:lstStyle>
           <a:p>
-            <a:fld id="{B3465923-C01A-429D-BF48-FE1C1E8CA486}" type="slidenum">
+            <a:fld id="{357192D4-5BD9-41C8-9EE5-942CB5B156C9}" type="slidenum">
               <a:rPr lang="es-ES" smtClean="0"/>
               <a:t>‹Nº›</a:t>
             </a:fld>
@@ -3020,7 +3020,7 @@
     </p:spTree>
     <p:extLst>
       <p:ext uri="{BB962C8B-B14F-4D97-AF65-F5344CB8AC3E}">
-        <p14:creationId xmlns:p14="http://schemas.microsoft.com/office/powerpoint/2010/main" val="3424308497"/>
+        <p14:creationId xmlns:p14="http://schemas.microsoft.com/office/powerpoint/2010/main" val="3537115536"/>
       </p:ext>
     </p:extLst>
   </p:cSld>
@@ -3351,7 +3351,7 @@
           <p:cNvPr id="2" name="Rectángulo: esquinas redondeadas 1">
             <a:extLst>
               <a:ext uri="{FF2B5EF4-FFF2-40B4-BE49-F238E27FC236}">
-                <a16:creationId xmlns:a16="http://schemas.microsoft.com/office/drawing/2014/main" id="{8D26A0E0-FB4C-849C-CDCB-FE3596B00D95}"/>
+                <a16:creationId xmlns:a16="http://schemas.microsoft.com/office/drawing/2014/main" id="{D205D9E9-2B2A-8449-3280-81D4BA71935C}"/>
               </a:ext>
             </a:extLst>
           </p:cNvPr>
@@ -3405,7 +3405,7 @@
           <p:cNvPr id="3" name="CuadroTexto 2">
             <a:extLst>
               <a:ext uri="{FF2B5EF4-FFF2-40B4-BE49-F238E27FC236}">
-                <a16:creationId xmlns:a16="http://schemas.microsoft.com/office/drawing/2014/main" id="{0C0ABDE1-768B-4E8F-4DF2-1182CD15BFB9}"/>
+                <a16:creationId xmlns:a16="http://schemas.microsoft.com/office/drawing/2014/main" id="{8CD26C4F-EB69-6F68-D6A8-EFDFAAB9A2EE}"/>
               </a:ext>
             </a:extLst>
           </p:cNvPr>
@@ -3445,7 +3445,7 @@
           <p:cNvPr id="4" name="CuadroTexto 3">
             <a:extLst>
               <a:ext uri="{FF2B5EF4-FFF2-40B4-BE49-F238E27FC236}">
-                <a16:creationId xmlns:a16="http://schemas.microsoft.com/office/drawing/2014/main" id="{E9513875-C1AF-3123-1236-18C82A862A02}"/>
+                <a16:creationId xmlns:a16="http://schemas.microsoft.com/office/drawing/2014/main" id="{6594C209-D7CD-32E9-0092-BEEDDDE630D1}"/>
               </a:ext>
             </a:extLst>
           </p:cNvPr>
@@ -3485,7 +3485,7 @@
           <p:cNvPr id="5" name="CuadroTexto 4">
             <a:extLst>
               <a:ext uri="{FF2B5EF4-FFF2-40B4-BE49-F238E27FC236}">
-                <a16:creationId xmlns:a16="http://schemas.microsoft.com/office/drawing/2014/main" id="{78CE9AC4-3231-5E43-571C-63C921B839FE}"/>
+                <a16:creationId xmlns:a16="http://schemas.microsoft.com/office/drawing/2014/main" id="{0010246E-364B-3BEC-B71E-FE18CDB86658}"/>
               </a:ext>
             </a:extLst>
           </p:cNvPr>
@@ -3525,7 +3525,7 @@
           <p:cNvPr id="6" name="CuadroTexto 5">
             <a:extLst>
               <a:ext uri="{FF2B5EF4-FFF2-40B4-BE49-F238E27FC236}">
-                <a16:creationId xmlns:a16="http://schemas.microsoft.com/office/drawing/2014/main" id="{C269820E-5F1A-E35A-BF32-5F29D2355FF6}"/>
+                <a16:creationId xmlns:a16="http://schemas.microsoft.com/office/drawing/2014/main" id="{2C422221-3442-CE74-2513-F43623CAB150}"/>
               </a:ext>
             </a:extLst>
           </p:cNvPr>
@@ -3576,7 +3576,7 @@
           <p:cNvPr id="8" name="Imagen 7">
             <a:extLst>
               <a:ext uri="{FF2B5EF4-FFF2-40B4-BE49-F238E27FC236}">
-                <a16:creationId xmlns:a16="http://schemas.microsoft.com/office/drawing/2014/main" id="{FEBD596F-2F18-6433-8D13-E18EBF7F6B0C}"/>
+                <a16:creationId xmlns:a16="http://schemas.microsoft.com/office/drawing/2014/main" id="{7A6C684F-BE85-6DFF-BFD5-BD4E0258C0E8}"/>
               </a:ext>
             </a:extLst>
           </p:cNvPr>
@@ -3615,7 +3615,7 @@
     </p:spTree>
     <p:extLst>
       <p:ext uri="{BB962C8B-B14F-4D97-AF65-F5344CB8AC3E}">
-        <p14:creationId xmlns:p14="http://schemas.microsoft.com/office/powerpoint/2010/main" val="2070698356"/>
+        <p14:creationId xmlns:p14="http://schemas.microsoft.com/office/powerpoint/2010/main" val="1724773751"/>
       </p:ext>
     </p:extLst>
   </p:cSld>
@@ -3655,7 +3655,7 @@
           <p:cNvPr id="2" name="CuadroTexto 1">
             <a:extLst>
               <a:ext uri="{FF2B5EF4-FFF2-40B4-BE49-F238E27FC236}">
-                <a16:creationId xmlns:a16="http://schemas.microsoft.com/office/drawing/2014/main" id="{B53EF905-F911-2F31-FAD0-191A0ABDC738}"/>
+                <a16:creationId xmlns:a16="http://schemas.microsoft.com/office/drawing/2014/main" id="{98AAE408-EF69-259D-BAA6-33ED04A04C57}"/>
               </a:ext>
             </a:extLst>
           </p:cNvPr>
@@ -3695,7 +3695,7 @@
           <p:cNvPr id="3" name="CuadroTexto 2">
             <a:extLst>
               <a:ext uri="{FF2B5EF4-FFF2-40B4-BE49-F238E27FC236}">
-                <a16:creationId xmlns:a16="http://schemas.microsoft.com/office/drawing/2014/main" id="{EAC5B46A-73DC-C0DA-A717-F918A125DF90}"/>
+                <a16:creationId xmlns:a16="http://schemas.microsoft.com/office/drawing/2014/main" id="{D086D1C7-C914-B072-1836-0199861C2628}"/>
               </a:ext>
             </a:extLst>
           </p:cNvPr>
@@ -3735,7 +3735,7 @@
           <p:cNvPr id="4" name="CuadroTexto 3">
             <a:extLst>
               <a:ext uri="{FF2B5EF4-FFF2-40B4-BE49-F238E27FC236}">
-                <a16:creationId xmlns:a16="http://schemas.microsoft.com/office/drawing/2014/main" id="{DD9A8A3D-6BE3-DF76-621E-68EC907B1E31}"/>
+                <a16:creationId xmlns:a16="http://schemas.microsoft.com/office/drawing/2014/main" id="{CDF96AA8-6440-8183-2342-0628F8D93C1A}"/>
               </a:ext>
             </a:extLst>
           </p:cNvPr>
@@ -3775,7 +3775,7 @@
           <p:cNvPr id="5" name="Rectángulo: esquinas redondeadas 4">
             <a:extLst>
               <a:ext uri="{FF2B5EF4-FFF2-40B4-BE49-F238E27FC236}">
-                <a16:creationId xmlns:a16="http://schemas.microsoft.com/office/drawing/2014/main" id="{10267645-03DD-3F9E-8A5C-ACC0A038705F}"/>
+                <a16:creationId xmlns:a16="http://schemas.microsoft.com/office/drawing/2014/main" id="{72C7F4DA-D661-40BE-C733-D0CFC5C5D4DF}"/>
               </a:ext>
             </a:extLst>
           </p:cNvPr>
@@ -3829,7 +3829,7 @@
           <p:cNvPr id="6" name="CuadroTexto 5">
             <a:extLst>
               <a:ext uri="{FF2B5EF4-FFF2-40B4-BE49-F238E27FC236}">
-                <a16:creationId xmlns:a16="http://schemas.microsoft.com/office/drawing/2014/main" id="{D3574122-3348-8DEC-8605-5777C07B6B77}"/>
+                <a16:creationId xmlns:a16="http://schemas.microsoft.com/office/drawing/2014/main" id="{8DBAA4C0-2D71-CAC0-B5DE-D0FBDD24023B}"/>
               </a:ext>
             </a:extLst>
           </p:cNvPr>
@@ -3869,7 +3869,7 @@
           <p:cNvPr id="7" name="CuadroTexto 6">
             <a:extLst>
               <a:ext uri="{FF2B5EF4-FFF2-40B4-BE49-F238E27FC236}">
-                <a16:creationId xmlns:a16="http://schemas.microsoft.com/office/drawing/2014/main" id="{DECE2E86-538E-E01B-C1A1-43D459DEDF96}"/>
+                <a16:creationId xmlns:a16="http://schemas.microsoft.com/office/drawing/2014/main" id="{2F5E01B1-602E-9AAB-E81C-2CD851951762}"/>
               </a:ext>
             </a:extLst>
           </p:cNvPr>
@@ -3988,7 +3988,7 @@
           <p:cNvPr id="8" name="Rectángulo: esquinas redondeadas 7">
             <a:extLst>
               <a:ext uri="{FF2B5EF4-FFF2-40B4-BE49-F238E27FC236}">
-                <a16:creationId xmlns:a16="http://schemas.microsoft.com/office/drawing/2014/main" id="{FE4AC941-C4EB-6AA4-CFEF-367570CD132C}"/>
+                <a16:creationId xmlns:a16="http://schemas.microsoft.com/office/drawing/2014/main" id="{B951AA5D-2568-173E-3564-B6188845BFAB}"/>
               </a:ext>
             </a:extLst>
           </p:cNvPr>
@@ -4042,7 +4042,7 @@
           <p:cNvPr id="9" name="CuadroTexto 8">
             <a:extLst>
               <a:ext uri="{FF2B5EF4-FFF2-40B4-BE49-F238E27FC236}">
-                <a16:creationId xmlns:a16="http://schemas.microsoft.com/office/drawing/2014/main" id="{DA230D46-A039-48F1-6951-B3907F354812}"/>
+                <a16:creationId xmlns:a16="http://schemas.microsoft.com/office/drawing/2014/main" id="{A718BDB6-8A2A-59D7-94D9-1ABB0C32B839}"/>
               </a:ext>
             </a:extLst>
           </p:cNvPr>
@@ -4082,7 +4082,7 @@
           <p:cNvPr id="10" name="CuadroTexto 9">
             <a:extLst>
               <a:ext uri="{FF2B5EF4-FFF2-40B4-BE49-F238E27FC236}">
-                <a16:creationId xmlns:a16="http://schemas.microsoft.com/office/drawing/2014/main" id="{F9D1DCA1-02C2-37EC-F365-BF7A1591B8A5}"/>
+                <a16:creationId xmlns:a16="http://schemas.microsoft.com/office/drawing/2014/main" id="{C3202201-B8E7-16DA-060E-49AFEAAA9BBA}"/>
               </a:ext>
             </a:extLst>
           </p:cNvPr>
@@ -4122,7 +4122,7 @@
           <p:cNvPr id="11" name="Rectángulo: esquinas redondeadas 10">
             <a:extLst>
               <a:ext uri="{FF2B5EF4-FFF2-40B4-BE49-F238E27FC236}">
-                <a16:creationId xmlns:a16="http://schemas.microsoft.com/office/drawing/2014/main" id="{E39B7F81-D49F-313C-4427-E8F19D10EEAC}"/>
+                <a16:creationId xmlns:a16="http://schemas.microsoft.com/office/drawing/2014/main" id="{19370CEA-D01B-E710-52C7-F1754B5DF4BD}"/>
               </a:ext>
             </a:extLst>
           </p:cNvPr>
@@ -4176,7 +4176,7 @@
           <p:cNvPr id="12" name="CuadroTexto 11">
             <a:extLst>
               <a:ext uri="{FF2B5EF4-FFF2-40B4-BE49-F238E27FC236}">
-                <a16:creationId xmlns:a16="http://schemas.microsoft.com/office/drawing/2014/main" id="{6A87F822-D891-FF4A-0F02-3A44124C393C}"/>
+                <a16:creationId xmlns:a16="http://schemas.microsoft.com/office/drawing/2014/main" id="{F9ED67AE-12C2-53C7-385C-8F3B9E9C1C06}"/>
               </a:ext>
             </a:extLst>
           </p:cNvPr>
@@ -4216,7 +4216,7 @@
           <p:cNvPr id="13" name="CuadroTexto 12">
             <a:extLst>
               <a:ext uri="{FF2B5EF4-FFF2-40B4-BE49-F238E27FC236}">
-                <a16:creationId xmlns:a16="http://schemas.microsoft.com/office/drawing/2014/main" id="{CBD15F83-4415-9C0B-7155-65874520B084}"/>
+                <a16:creationId xmlns:a16="http://schemas.microsoft.com/office/drawing/2014/main" id="{938D04B1-01AA-9D2C-F15B-DFF6B72BEBF0}"/>
               </a:ext>
             </a:extLst>
           </p:cNvPr>
@@ -4256,7 +4256,7 @@
           <p:cNvPr id="14" name="Rectángulo: esquinas redondeadas 13">
             <a:extLst>
               <a:ext uri="{FF2B5EF4-FFF2-40B4-BE49-F238E27FC236}">
-                <a16:creationId xmlns:a16="http://schemas.microsoft.com/office/drawing/2014/main" id="{E6277D89-DBAA-2D26-1F05-0DDA9C48350B}"/>
+                <a16:creationId xmlns:a16="http://schemas.microsoft.com/office/drawing/2014/main" id="{61A4F89D-7193-1ED4-7F96-DE96ED033F1D}"/>
               </a:ext>
             </a:extLst>
           </p:cNvPr>
@@ -4310,7 +4310,7 @@
           <p:cNvPr id="15" name="CuadroTexto 14">
             <a:extLst>
               <a:ext uri="{FF2B5EF4-FFF2-40B4-BE49-F238E27FC236}">
-                <a16:creationId xmlns:a16="http://schemas.microsoft.com/office/drawing/2014/main" id="{AFBCEB81-C9E4-117B-6E0E-691521121747}"/>
+                <a16:creationId xmlns:a16="http://schemas.microsoft.com/office/drawing/2014/main" id="{364A9D98-FAC5-DD14-0376-22899E9C74B4}"/>
               </a:ext>
             </a:extLst>
           </p:cNvPr>
@@ -4350,7 +4350,7 @@
           <p:cNvPr id="16" name="CuadroTexto 15">
             <a:extLst>
               <a:ext uri="{FF2B5EF4-FFF2-40B4-BE49-F238E27FC236}">
-                <a16:creationId xmlns:a16="http://schemas.microsoft.com/office/drawing/2014/main" id="{6CBE7796-47DA-A9C1-28C3-B31118239767}"/>
+                <a16:creationId xmlns:a16="http://schemas.microsoft.com/office/drawing/2014/main" id="{5A4CDBA9-9DAC-8B1F-16A9-301C5313FD4B}"/>
               </a:ext>
             </a:extLst>
           </p:cNvPr>
@@ -4390,7 +4390,7 @@
           <p:cNvPr id="17" name="Rectángulo: esquinas redondeadas 16">
             <a:extLst>
               <a:ext uri="{FF2B5EF4-FFF2-40B4-BE49-F238E27FC236}">
-                <a16:creationId xmlns:a16="http://schemas.microsoft.com/office/drawing/2014/main" id="{E412FF78-0457-639A-95B9-F5A764DC1F2E}"/>
+                <a16:creationId xmlns:a16="http://schemas.microsoft.com/office/drawing/2014/main" id="{658C09E8-6A59-E416-E38F-35F2C3BE7A31}"/>
               </a:ext>
             </a:extLst>
           </p:cNvPr>
@@ -4444,7 +4444,7 @@
           <p:cNvPr id="18" name="CuadroTexto 17">
             <a:extLst>
               <a:ext uri="{FF2B5EF4-FFF2-40B4-BE49-F238E27FC236}">
-                <a16:creationId xmlns:a16="http://schemas.microsoft.com/office/drawing/2014/main" id="{101D4939-99A3-2E12-1723-E851F1822DD1}"/>
+                <a16:creationId xmlns:a16="http://schemas.microsoft.com/office/drawing/2014/main" id="{4E03C3C2-56D3-8B47-CBB2-B8C6BB906DE5}"/>
               </a:ext>
             </a:extLst>
           </p:cNvPr>
@@ -4484,7 +4484,7 @@
           <p:cNvPr id="19" name="CuadroTexto 18">
             <a:extLst>
               <a:ext uri="{FF2B5EF4-FFF2-40B4-BE49-F238E27FC236}">
-                <a16:creationId xmlns:a16="http://schemas.microsoft.com/office/drawing/2014/main" id="{930D73CA-612E-113F-E469-7345AC7385B8}"/>
+                <a16:creationId xmlns:a16="http://schemas.microsoft.com/office/drawing/2014/main" id="{BA8A35CA-E482-34AF-FE89-1AF1BABFD828}"/>
               </a:ext>
             </a:extLst>
           </p:cNvPr>
@@ -4522,7 +4522,7 @@
     </p:spTree>
     <p:extLst>
       <p:ext uri="{BB962C8B-B14F-4D97-AF65-F5344CB8AC3E}">
-        <p14:creationId xmlns:p14="http://schemas.microsoft.com/office/powerpoint/2010/main" val="1085261756"/>
+        <p14:creationId xmlns:p14="http://schemas.microsoft.com/office/powerpoint/2010/main" val="239697957"/>
       </p:ext>
     </p:extLst>
   </p:cSld>
@@ -4562,7 +4562,7 @@
           <p:cNvPr id="2" name="CuadroTexto 1">
             <a:extLst>
               <a:ext uri="{FF2B5EF4-FFF2-40B4-BE49-F238E27FC236}">
-                <a16:creationId xmlns:a16="http://schemas.microsoft.com/office/drawing/2014/main" id="{39CE2496-B627-360A-0DE6-E28B88385026}"/>
+                <a16:creationId xmlns:a16="http://schemas.microsoft.com/office/drawing/2014/main" id="{6F1E9EC0-F667-4B56-359D-972CD20039E1}"/>
               </a:ext>
             </a:extLst>
           </p:cNvPr>
@@ -4602,7 +4602,7 @@
           <p:cNvPr id="3" name="CuadroTexto 2">
             <a:extLst>
               <a:ext uri="{FF2B5EF4-FFF2-40B4-BE49-F238E27FC236}">
-                <a16:creationId xmlns:a16="http://schemas.microsoft.com/office/drawing/2014/main" id="{BEAAC5C9-558C-9D42-5BE1-5C7307F83F09}"/>
+                <a16:creationId xmlns:a16="http://schemas.microsoft.com/office/drawing/2014/main" id="{15DCCC73-4BD4-AE87-0667-46774F68DE5A}"/>
               </a:ext>
             </a:extLst>
           </p:cNvPr>
@@ -4642,7 +4642,7 @@
           <p:cNvPr id="4" name="CuadroTexto 3">
             <a:extLst>
               <a:ext uri="{FF2B5EF4-FFF2-40B4-BE49-F238E27FC236}">
-                <a16:creationId xmlns:a16="http://schemas.microsoft.com/office/drawing/2014/main" id="{B69B89BD-8C1F-4180-61AA-830F085D55A4}"/>
+                <a16:creationId xmlns:a16="http://schemas.microsoft.com/office/drawing/2014/main" id="{21A5879C-26AE-E6A0-295B-83A024344107}"/>
               </a:ext>
             </a:extLst>
           </p:cNvPr>
@@ -4682,7 +4682,7 @@
           <p:cNvPr id="5" name="Rectángulo: esquinas redondeadas 4">
             <a:extLst>
               <a:ext uri="{FF2B5EF4-FFF2-40B4-BE49-F238E27FC236}">
-                <a16:creationId xmlns:a16="http://schemas.microsoft.com/office/drawing/2014/main" id="{A18BF32F-543C-4B07-53B5-071EF1D619EA}"/>
+                <a16:creationId xmlns:a16="http://schemas.microsoft.com/office/drawing/2014/main" id="{A2FED42F-BB72-4BBF-D508-E0FD37612B99}"/>
               </a:ext>
             </a:extLst>
           </p:cNvPr>
@@ -4736,7 +4736,7 @@
           <p:cNvPr id="6" name="CuadroTexto 5">
             <a:extLst>
               <a:ext uri="{FF2B5EF4-FFF2-40B4-BE49-F238E27FC236}">
-                <a16:creationId xmlns:a16="http://schemas.microsoft.com/office/drawing/2014/main" id="{7F47EC61-8F1D-2851-871F-131752F80F3C}"/>
+                <a16:creationId xmlns:a16="http://schemas.microsoft.com/office/drawing/2014/main" id="{52F9094C-B5EA-4D0E-AFCF-A07B6E20E5C6}"/>
               </a:ext>
             </a:extLst>
           </p:cNvPr>
@@ -4776,7 +4776,7 @@
           <p:cNvPr id="7" name="CuadroTexto 6">
             <a:extLst>
               <a:ext uri="{FF2B5EF4-FFF2-40B4-BE49-F238E27FC236}">
-                <a16:creationId xmlns:a16="http://schemas.microsoft.com/office/drawing/2014/main" id="{EDC65C6E-A3AC-7652-FC0C-195AF025C4A3}"/>
+                <a16:creationId xmlns:a16="http://schemas.microsoft.com/office/drawing/2014/main" id="{2EBD63C4-9FE0-B826-1C14-DFD65B38CCF5}"/>
               </a:ext>
             </a:extLst>
           </p:cNvPr>
@@ -4816,7 +4816,7 @@
           <p:cNvPr id="8" name="Rectángulo: esquinas redondeadas 7">
             <a:extLst>
               <a:ext uri="{FF2B5EF4-FFF2-40B4-BE49-F238E27FC236}">
-                <a16:creationId xmlns:a16="http://schemas.microsoft.com/office/drawing/2014/main" id="{E665AABE-9481-7904-707B-8B83BD57F6EE}"/>
+                <a16:creationId xmlns:a16="http://schemas.microsoft.com/office/drawing/2014/main" id="{91A17B97-0060-DCF1-D36A-4D61DA7C94FE}"/>
               </a:ext>
             </a:extLst>
           </p:cNvPr>
@@ -4870,7 +4870,7 @@
           <p:cNvPr id="9" name="CuadroTexto 8">
             <a:extLst>
               <a:ext uri="{FF2B5EF4-FFF2-40B4-BE49-F238E27FC236}">
-                <a16:creationId xmlns:a16="http://schemas.microsoft.com/office/drawing/2014/main" id="{DFE73C81-E429-D3D9-830A-6DB641563943}"/>
+                <a16:creationId xmlns:a16="http://schemas.microsoft.com/office/drawing/2014/main" id="{1BCAE38A-E9B9-C367-4FB0-9D291BB46725}"/>
               </a:ext>
             </a:extLst>
           </p:cNvPr>
@@ -4910,7 +4910,7 @@
           <p:cNvPr id="10" name="CuadroTexto 9">
             <a:extLst>
               <a:ext uri="{FF2B5EF4-FFF2-40B4-BE49-F238E27FC236}">
-                <a16:creationId xmlns:a16="http://schemas.microsoft.com/office/drawing/2014/main" id="{B280473F-2B7C-326A-5B51-55325D52D43C}"/>
+                <a16:creationId xmlns:a16="http://schemas.microsoft.com/office/drawing/2014/main" id="{9D4FE66D-3B12-E967-6482-E6D8B4D660CA}"/>
               </a:ext>
             </a:extLst>
           </p:cNvPr>
@@ -4950,7 +4950,7 @@
           <p:cNvPr id="11" name="Rectángulo: esquinas redondeadas 10">
             <a:extLst>
               <a:ext uri="{FF2B5EF4-FFF2-40B4-BE49-F238E27FC236}">
-                <a16:creationId xmlns:a16="http://schemas.microsoft.com/office/drawing/2014/main" id="{6C36FDC8-533A-55F0-E957-C6CB5C8B24A9}"/>
+                <a16:creationId xmlns:a16="http://schemas.microsoft.com/office/drawing/2014/main" id="{8F23661F-2B82-5F38-1D07-61D5D3F3D5C8}"/>
               </a:ext>
             </a:extLst>
           </p:cNvPr>
@@ -5004,7 +5004,7 @@
           <p:cNvPr id="12" name="CuadroTexto 11">
             <a:extLst>
               <a:ext uri="{FF2B5EF4-FFF2-40B4-BE49-F238E27FC236}">
-                <a16:creationId xmlns:a16="http://schemas.microsoft.com/office/drawing/2014/main" id="{3A22A1A6-B1CF-A65E-0681-A3C7634201C6}"/>
+                <a16:creationId xmlns:a16="http://schemas.microsoft.com/office/drawing/2014/main" id="{997A0180-7500-75A2-C478-5D938FDD5E26}"/>
               </a:ext>
             </a:extLst>
           </p:cNvPr>
@@ -5044,7 +5044,7 @@
           <p:cNvPr id="13" name="CuadroTexto 12">
             <a:extLst>
               <a:ext uri="{FF2B5EF4-FFF2-40B4-BE49-F238E27FC236}">
-                <a16:creationId xmlns:a16="http://schemas.microsoft.com/office/drawing/2014/main" id="{7495F043-46E0-F646-7CC0-812ADC68107C}"/>
+                <a16:creationId xmlns:a16="http://schemas.microsoft.com/office/drawing/2014/main" id="{274E05EA-CCC9-48DA-6D32-AB0A437C2C5F}"/>
               </a:ext>
             </a:extLst>
           </p:cNvPr>
@@ -5084,7 +5084,7 @@
           <p:cNvPr id="14" name="CuadroTexto 13">
             <a:extLst>
               <a:ext uri="{FF2B5EF4-FFF2-40B4-BE49-F238E27FC236}">
-                <a16:creationId xmlns:a16="http://schemas.microsoft.com/office/drawing/2014/main" id="{AABD840C-177C-F59E-E464-A85BC72E47D1}"/>
+                <a16:creationId xmlns:a16="http://schemas.microsoft.com/office/drawing/2014/main" id="{F6B10B3E-18A4-45B7-ABE4-6A2D870E6727}"/>
               </a:ext>
             </a:extLst>
           </p:cNvPr>
@@ -5165,7 +5165,7 @@
     </p:spTree>
     <p:extLst>
       <p:ext uri="{BB962C8B-B14F-4D97-AF65-F5344CB8AC3E}">
-        <p14:creationId xmlns:p14="http://schemas.microsoft.com/office/powerpoint/2010/main" val="2291224648"/>
+        <p14:creationId xmlns:p14="http://schemas.microsoft.com/office/powerpoint/2010/main" val="2479140049"/>
       </p:ext>
     </p:extLst>
   </p:cSld>
@@ -5205,7 +5205,7 @@
           <p:cNvPr id="2" name="CuadroTexto 1">
             <a:extLst>
               <a:ext uri="{FF2B5EF4-FFF2-40B4-BE49-F238E27FC236}">
-                <a16:creationId xmlns:a16="http://schemas.microsoft.com/office/drawing/2014/main" id="{5EB2B62B-0F5C-9FAE-3695-0B8096FE97A4}"/>
+                <a16:creationId xmlns:a16="http://schemas.microsoft.com/office/drawing/2014/main" id="{03DB7E78-8B3E-11AC-2762-22C0BCF78BAD}"/>
               </a:ext>
             </a:extLst>
           </p:cNvPr>
@@ -5245,7 +5245,7 @@
           <p:cNvPr id="3" name="CuadroTexto 2">
             <a:extLst>
               <a:ext uri="{FF2B5EF4-FFF2-40B4-BE49-F238E27FC236}">
-                <a16:creationId xmlns:a16="http://schemas.microsoft.com/office/drawing/2014/main" id="{37CA2F4B-0533-C986-3A02-48FACB2697C0}"/>
+                <a16:creationId xmlns:a16="http://schemas.microsoft.com/office/drawing/2014/main" id="{E09E744C-5809-A687-BBE4-A99858670EF8}"/>
               </a:ext>
             </a:extLst>
           </p:cNvPr>
@@ -5285,7 +5285,7 @@
           <p:cNvPr id="4" name="CuadroTexto 3">
             <a:extLst>
               <a:ext uri="{FF2B5EF4-FFF2-40B4-BE49-F238E27FC236}">
-                <a16:creationId xmlns:a16="http://schemas.microsoft.com/office/drawing/2014/main" id="{124CAE04-6D4D-6E66-B65C-2AA45DF48920}"/>
+                <a16:creationId xmlns:a16="http://schemas.microsoft.com/office/drawing/2014/main" id="{0EDE0FD2-2286-1920-8DC6-28BF35E55E70}"/>
               </a:ext>
             </a:extLst>
           </p:cNvPr>
@@ -5325,7 +5325,7 @@
           <p:cNvPr id="6" name="Imagen 5">
             <a:extLst>
               <a:ext uri="{FF2B5EF4-FFF2-40B4-BE49-F238E27FC236}">
-                <a16:creationId xmlns:a16="http://schemas.microsoft.com/office/drawing/2014/main" id="{A54370F0-A0E6-C709-1CCD-B076CA92098A}"/>
+                <a16:creationId xmlns:a16="http://schemas.microsoft.com/office/drawing/2014/main" id="{7D235ABE-6CE1-ED99-5A52-2C162FF8ACB3}"/>
               </a:ext>
             </a:extLst>
           </p:cNvPr>
@@ -5366,7 +5366,7 @@
           <p:cNvPr id="7" name="Rectángulo: esquinas redondeadas 6">
             <a:extLst>
               <a:ext uri="{FF2B5EF4-FFF2-40B4-BE49-F238E27FC236}">
-                <a16:creationId xmlns:a16="http://schemas.microsoft.com/office/drawing/2014/main" id="{0CE70DC4-CFBF-C5FF-EC49-BEC5D22BDA9B}"/>
+                <a16:creationId xmlns:a16="http://schemas.microsoft.com/office/drawing/2014/main" id="{78BC451A-3875-5BF9-9443-0E4BFD8AE8B6}"/>
               </a:ext>
             </a:extLst>
           </p:cNvPr>
@@ -5420,7 +5420,7 @@
           <p:cNvPr id="8" name="CuadroTexto 7">
             <a:extLst>
               <a:ext uri="{FF2B5EF4-FFF2-40B4-BE49-F238E27FC236}">
-                <a16:creationId xmlns:a16="http://schemas.microsoft.com/office/drawing/2014/main" id="{7049EA37-A184-7DF4-182D-376712C62E7D}"/>
+                <a16:creationId xmlns:a16="http://schemas.microsoft.com/office/drawing/2014/main" id="{CC57963F-9EC0-4099-7B7B-4EB80102A431}"/>
               </a:ext>
             </a:extLst>
           </p:cNvPr>
@@ -5460,7 +5460,7 @@
           <p:cNvPr id="9" name="CuadroTexto 8">
             <a:extLst>
               <a:ext uri="{FF2B5EF4-FFF2-40B4-BE49-F238E27FC236}">
-                <a16:creationId xmlns:a16="http://schemas.microsoft.com/office/drawing/2014/main" id="{71A22A06-4C0C-1CFA-3D77-69EBA41A267D}"/>
+                <a16:creationId xmlns:a16="http://schemas.microsoft.com/office/drawing/2014/main" id="{3E5C9C25-024E-58A9-F6C5-CDD9E7C0AB05}"/>
               </a:ext>
             </a:extLst>
           </p:cNvPr>
@@ -5500,7 +5500,7 @@
           <p:cNvPr id="10" name="CuadroTexto 9">
             <a:extLst>
               <a:ext uri="{FF2B5EF4-FFF2-40B4-BE49-F238E27FC236}">
-                <a16:creationId xmlns:a16="http://schemas.microsoft.com/office/drawing/2014/main" id="{89EDC992-F8C1-2C41-EA34-875E1A86BEBC}"/>
+                <a16:creationId xmlns:a16="http://schemas.microsoft.com/office/drawing/2014/main" id="{93C8ED2A-C773-D0D2-D196-68E99818FABC}"/>
               </a:ext>
             </a:extLst>
           </p:cNvPr>
@@ -5599,7 +5599,7 @@
     </p:spTree>
     <p:extLst>
       <p:ext uri="{BB962C8B-B14F-4D97-AF65-F5344CB8AC3E}">
-        <p14:creationId xmlns:p14="http://schemas.microsoft.com/office/powerpoint/2010/main" val="3498344873"/>
+        <p14:creationId xmlns:p14="http://schemas.microsoft.com/office/powerpoint/2010/main" val="660871041"/>
       </p:ext>
     </p:extLst>
   </p:cSld>
@@ -5639,7 +5639,7 @@
           <p:cNvPr id="2" name="CuadroTexto 1">
             <a:extLst>
               <a:ext uri="{FF2B5EF4-FFF2-40B4-BE49-F238E27FC236}">
-                <a16:creationId xmlns:a16="http://schemas.microsoft.com/office/drawing/2014/main" id="{AADF5E54-0B47-2896-54E3-FE6E770510EF}"/>
+                <a16:creationId xmlns:a16="http://schemas.microsoft.com/office/drawing/2014/main" id="{7CEBF6AB-5197-355B-1FA4-C2D234A4110F}"/>
               </a:ext>
             </a:extLst>
           </p:cNvPr>
@@ -5679,7 +5679,7 @@
           <p:cNvPr id="3" name="CuadroTexto 2">
             <a:extLst>
               <a:ext uri="{FF2B5EF4-FFF2-40B4-BE49-F238E27FC236}">
-                <a16:creationId xmlns:a16="http://schemas.microsoft.com/office/drawing/2014/main" id="{891576B8-16A1-4495-17BF-3AC78195030B}"/>
+                <a16:creationId xmlns:a16="http://schemas.microsoft.com/office/drawing/2014/main" id="{7A32CA94-D527-C72B-8325-6DCAEB806FD0}"/>
               </a:ext>
             </a:extLst>
           </p:cNvPr>
@@ -5719,7 +5719,7 @@
           <p:cNvPr id="4" name="CuadroTexto 3">
             <a:extLst>
               <a:ext uri="{FF2B5EF4-FFF2-40B4-BE49-F238E27FC236}">
-                <a16:creationId xmlns:a16="http://schemas.microsoft.com/office/drawing/2014/main" id="{0FD1BC3C-47BB-01C6-455A-6F6A671E45B6}"/>
+                <a16:creationId xmlns:a16="http://schemas.microsoft.com/office/drawing/2014/main" id="{F2235965-61F5-523C-968F-6345D6A076C2}"/>
               </a:ext>
             </a:extLst>
           </p:cNvPr>
@@ -5759,7 +5759,7 @@
           <p:cNvPr id="6" name="Imagen 5">
             <a:extLst>
               <a:ext uri="{FF2B5EF4-FFF2-40B4-BE49-F238E27FC236}">
-                <a16:creationId xmlns:a16="http://schemas.microsoft.com/office/drawing/2014/main" id="{367917A3-75A8-786E-F069-61A34019FAE3}"/>
+                <a16:creationId xmlns:a16="http://schemas.microsoft.com/office/drawing/2014/main" id="{3458D1CA-BD6B-4DEE-EC2D-DBAC79354BF9}"/>
               </a:ext>
             </a:extLst>
           </p:cNvPr>
@@ -5800,7 +5800,7 @@
           <p:cNvPr id="7" name="CuadroTexto 6">
             <a:extLst>
               <a:ext uri="{FF2B5EF4-FFF2-40B4-BE49-F238E27FC236}">
-                <a16:creationId xmlns:a16="http://schemas.microsoft.com/office/drawing/2014/main" id="{373B96C4-CCAA-90A8-2D8D-513A151039E8}"/>
+                <a16:creationId xmlns:a16="http://schemas.microsoft.com/office/drawing/2014/main" id="{DFB509E2-596F-AAC5-7A2E-4DE33DB60014}"/>
               </a:ext>
             </a:extLst>
           </p:cNvPr>
@@ -5917,7 +5917,7 @@
     </p:spTree>
     <p:extLst>
       <p:ext uri="{BB962C8B-B14F-4D97-AF65-F5344CB8AC3E}">
-        <p14:creationId xmlns:p14="http://schemas.microsoft.com/office/powerpoint/2010/main" val="1503816519"/>
+        <p14:creationId xmlns:p14="http://schemas.microsoft.com/office/powerpoint/2010/main" val="311254604"/>
       </p:ext>
     </p:extLst>
   </p:cSld>
@@ -5957,7 +5957,7 @@
           <p:cNvPr id="2" name="CuadroTexto 1">
             <a:extLst>
               <a:ext uri="{FF2B5EF4-FFF2-40B4-BE49-F238E27FC236}">
-                <a16:creationId xmlns:a16="http://schemas.microsoft.com/office/drawing/2014/main" id="{F3430133-8CE9-88BB-A591-7BC0AE2A0DDD}"/>
+                <a16:creationId xmlns:a16="http://schemas.microsoft.com/office/drawing/2014/main" id="{28FD96AE-D367-0414-763C-D30FE2713BBF}"/>
               </a:ext>
             </a:extLst>
           </p:cNvPr>
@@ -5997,7 +5997,7 @@
           <p:cNvPr id="3" name="CuadroTexto 2">
             <a:extLst>
               <a:ext uri="{FF2B5EF4-FFF2-40B4-BE49-F238E27FC236}">
-                <a16:creationId xmlns:a16="http://schemas.microsoft.com/office/drawing/2014/main" id="{AEA9BB5A-9ABC-1992-B21F-7371FD34CBB4}"/>
+                <a16:creationId xmlns:a16="http://schemas.microsoft.com/office/drawing/2014/main" id="{9CACD615-673E-68DD-6605-F0C87DC5F3BC}"/>
               </a:ext>
             </a:extLst>
           </p:cNvPr>
@@ -6037,7 +6037,7 @@
           <p:cNvPr id="4" name="Rectángulo: esquinas redondeadas 3">
             <a:extLst>
               <a:ext uri="{FF2B5EF4-FFF2-40B4-BE49-F238E27FC236}">
-                <a16:creationId xmlns:a16="http://schemas.microsoft.com/office/drawing/2014/main" id="{50330CCE-5524-BE3B-45F1-DEDCF3A76619}"/>
+                <a16:creationId xmlns:a16="http://schemas.microsoft.com/office/drawing/2014/main" id="{8E0C63F5-D5D9-6EC9-1D0F-97E31CC5C01F}"/>
               </a:ext>
             </a:extLst>
           </p:cNvPr>
@@ -6091,7 +6091,7 @@
           <p:cNvPr id="5" name="CuadroTexto 4">
             <a:extLst>
               <a:ext uri="{FF2B5EF4-FFF2-40B4-BE49-F238E27FC236}">
-                <a16:creationId xmlns:a16="http://schemas.microsoft.com/office/drawing/2014/main" id="{1D2A64B2-6905-97C5-511E-73058293DD54}"/>
+                <a16:creationId xmlns:a16="http://schemas.microsoft.com/office/drawing/2014/main" id="{8E3DDE59-0A1C-2DF0-F70F-323A93ED1DCF}"/>
               </a:ext>
             </a:extLst>
           </p:cNvPr>
@@ -6131,7 +6131,7 @@
           <p:cNvPr id="6" name="CuadroTexto 5">
             <a:extLst>
               <a:ext uri="{FF2B5EF4-FFF2-40B4-BE49-F238E27FC236}">
-                <a16:creationId xmlns:a16="http://schemas.microsoft.com/office/drawing/2014/main" id="{1392E5AB-DD85-70A4-DE0F-CB2EC849E5A2}"/>
+                <a16:creationId xmlns:a16="http://schemas.microsoft.com/office/drawing/2014/main" id="{EE378B01-6BA6-86A4-4F17-E9FEA64A95E6}"/>
               </a:ext>
             </a:extLst>
           </p:cNvPr>
@@ -6171,7 +6171,7 @@
           <p:cNvPr id="7" name="Rectángulo: esquinas redondeadas 6">
             <a:extLst>
               <a:ext uri="{FF2B5EF4-FFF2-40B4-BE49-F238E27FC236}">
-                <a16:creationId xmlns:a16="http://schemas.microsoft.com/office/drawing/2014/main" id="{ABB172E4-595B-4818-63FB-64A0B92E2278}"/>
+                <a16:creationId xmlns:a16="http://schemas.microsoft.com/office/drawing/2014/main" id="{8EE1CCE0-2338-4500-C634-21A04B3AF65A}"/>
               </a:ext>
             </a:extLst>
           </p:cNvPr>
@@ -6225,7 +6225,7 @@
           <p:cNvPr id="8" name="CuadroTexto 7">
             <a:extLst>
               <a:ext uri="{FF2B5EF4-FFF2-40B4-BE49-F238E27FC236}">
-                <a16:creationId xmlns:a16="http://schemas.microsoft.com/office/drawing/2014/main" id="{9166C8F3-81C6-8EEC-CF1A-30A9D05A8D2A}"/>
+                <a16:creationId xmlns:a16="http://schemas.microsoft.com/office/drawing/2014/main" id="{4F23986E-CC36-D0E2-A5CB-48C70AC53935}"/>
               </a:ext>
             </a:extLst>
           </p:cNvPr>
@@ -6265,7 +6265,7 @@
           <p:cNvPr id="9" name="CuadroTexto 8">
             <a:extLst>
               <a:ext uri="{FF2B5EF4-FFF2-40B4-BE49-F238E27FC236}">
-                <a16:creationId xmlns:a16="http://schemas.microsoft.com/office/drawing/2014/main" id="{CE499E91-418B-4215-3ADE-DEA04F0C1D15}"/>
+                <a16:creationId xmlns:a16="http://schemas.microsoft.com/office/drawing/2014/main" id="{6ECC1234-7648-5BF2-17C8-CFA69A67254D}"/>
               </a:ext>
             </a:extLst>
           </p:cNvPr>
@@ -6305,7 +6305,7 @@
           <p:cNvPr id="10" name="Rectángulo: esquinas redondeadas 9">
             <a:extLst>
               <a:ext uri="{FF2B5EF4-FFF2-40B4-BE49-F238E27FC236}">
-                <a16:creationId xmlns:a16="http://schemas.microsoft.com/office/drawing/2014/main" id="{853A2DBA-0CA8-E3D3-DDAA-6D31ECEC1F06}"/>
+                <a16:creationId xmlns:a16="http://schemas.microsoft.com/office/drawing/2014/main" id="{3AB075FD-EADE-71FA-8BC1-E0A3D54430C3}"/>
               </a:ext>
             </a:extLst>
           </p:cNvPr>
@@ -6359,7 +6359,7 @@
           <p:cNvPr id="11" name="CuadroTexto 10">
             <a:extLst>
               <a:ext uri="{FF2B5EF4-FFF2-40B4-BE49-F238E27FC236}">
-                <a16:creationId xmlns:a16="http://schemas.microsoft.com/office/drawing/2014/main" id="{29D7216D-962D-40B3-A00F-974B4DE9EC8E}"/>
+                <a16:creationId xmlns:a16="http://schemas.microsoft.com/office/drawing/2014/main" id="{539C3D89-7AF7-DA66-C54C-10F62C7AA264}"/>
               </a:ext>
             </a:extLst>
           </p:cNvPr>
@@ -6399,7 +6399,7 @@
           <p:cNvPr id="12" name="CuadroTexto 11">
             <a:extLst>
               <a:ext uri="{FF2B5EF4-FFF2-40B4-BE49-F238E27FC236}">
-                <a16:creationId xmlns:a16="http://schemas.microsoft.com/office/drawing/2014/main" id="{454119C0-8814-A475-8953-AE96D966C455}"/>
+                <a16:creationId xmlns:a16="http://schemas.microsoft.com/office/drawing/2014/main" id="{AC7C1ADE-DAA9-F727-DA5D-FB4A5DBDBE8F}"/>
               </a:ext>
             </a:extLst>
           </p:cNvPr>
@@ -6439,7 +6439,7 @@
           <p:cNvPr id="13" name="Rectángulo: esquinas redondeadas 12">
             <a:extLst>
               <a:ext uri="{FF2B5EF4-FFF2-40B4-BE49-F238E27FC236}">
-                <a16:creationId xmlns:a16="http://schemas.microsoft.com/office/drawing/2014/main" id="{B47F82F8-76A3-7CF0-F92E-2D0310069701}"/>
+                <a16:creationId xmlns:a16="http://schemas.microsoft.com/office/drawing/2014/main" id="{024337F6-C3C6-F30A-6583-BFFAD9BCD1D7}"/>
               </a:ext>
             </a:extLst>
           </p:cNvPr>
@@ -6493,7 +6493,7 @@
           <p:cNvPr id="14" name="CuadroTexto 13">
             <a:extLst>
               <a:ext uri="{FF2B5EF4-FFF2-40B4-BE49-F238E27FC236}">
-                <a16:creationId xmlns:a16="http://schemas.microsoft.com/office/drawing/2014/main" id="{ED02E93D-7A42-BD7A-43B8-420A5927D2DE}"/>
+                <a16:creationId xmlns:a16="http://schemas.microsoft.com/office/drawing/2014/main" id="{ACCF68A8-F6F2-70CC-5887-C54A1EAEAE18}"/>
               </a:ext>
             </a:extLst>
           </p:cNvPr>
@@ -6533,7 +6533,7 @@
           <p:cNvPr id="15" name="CuadroTexto 14">
             <a:extLst>
               <a:ext uri="{FF2B5EF4-FFF2-40B4-BE49-F238E27FC236}">
-                <a16:creationId xmlns:a16="http://schemas.microsoft.com/office/drawing/2014/main" id="{81D2B069-110C-FD48-F253-00EF4E48E793}"/>
+                <a16:creationId xmlns:a16="http://schemas.microsoft.com/office/drawing/2014/main" id="{D832274A-EBF8-9206-36A4-2913CDE82274}"/>
               </a:ext>
             </a:extLst>
           </p:cNvPr>
@@ -6573,7 +6573,7 @@
           <p:cNvPr id="16" name="CuadroTexto 15">
             <a:extLst>
               <a:ext uri="{FF2B5EF4-FFF2-40B4-BE49-F238E27FC236}">
-                <a16:creationId xmlns:a16="http://schemas.microsoft.com/office/drawing/2014/main" id="{12158504-D060-9EA0-221B-41A981AF51C2}"/>
+                <a16:creationId xmlns:a16="http://schemas.microsoft.com/office/drawing/2014/main" id="{C79D19F7-80E7-224C-A8F0-5FA014DB7486}"/>
               </a:ext>
             </a:extLst>
           </p:cNvPr>
@@ -6656,7 +6656,7 @@
           <p:cNvPr id="17" name="CuadroTexto 16">
             <a:extLst>
               <a:ext uri="{FF2B5EF4-FFF2-40B4-BE49-F238E27FC236}">
-                <a16:creationId xmlns:a16="http://schemas.microsoft.com/office/drawing/2014/main" id="{1510BF8C-088D-0F57-AC6A-E090829EA2CB}"/>
+                <a16:creationId xmlns:a16="http://schemas.microsoft.com/office/drawing/2014/main" id="{8E3042E1-1D68-59B5-C091-3A18487C2D4F}"/>
               </a:ext>
             </a:extLst>
           </p:cNvPr>
@@ -6694,7 +6694,7 @@
     </p:spTree>
     <p:extLst>
       <p:ext uri="{BB962C8B-B14F-4D97-AF65-F5344CB8AC3E}">
-        <p14:creationId xmlns:p14="http://schemas.microsoft.com/office/powerpoint/2010/main" val="2217278504"/>
+        <p14:creationId xmlns:p14="http://schemas.microsoft.com/office/powerpoint/2010/main" val="2401975934"/>
       </p:ext>
     </p:extLst>
   </p:cSld>
@@ -6734,7 +6734,7 @@
           <p:cNvPr id="2" name="CuadroTexto 1">
             <a:extLst>
               <a:ext uri="{FF2B5EF4-FFF2-40B4-BE49-F238E27FC236}">
-                <a16:creationId xmlns:a16="http://schemas.microsoft.com/office/drawing/2014/main" id="{AE97D073-59E3-5409-CF6C-C97B6296295A}"/>
+                <a16:creationId xmlns:a16="http://schemas.microsoft.com/office/drawing/2014/main" id="{C38F03E6-8663-E337-8584-3E34D8AF0123}"/>
               </a:ext>
             </a:extLst>
           </p:cNvPr>
@@ -6774,7 +6774,7 @@
           <p:cNvPr id="3" name="CuadroTexto 2">
             <a:extLst>
               <a:ext uri="{FF2B5EF4-FFF2-40B4-BE49-F238E27FC236}">
-                <a16:creationId xmlns:a16="http://schemas.microsoft.com/office/drawing/2014/main" id="{B9C7F614-5499-76E6-C427-B77D4FC82F1B}"/>
+                <a16:creationId xmlns:a16="http://schemas.microsoft.com/office/drawing/2014/main" id="{D7669304-2C55-A4E6-F092-CCF7B482F334}"/>
               </a:ext>
             </a:extLst>
           </p:cNvPr>
@@ -6814,7 +6814,7 @@
           <p:cNvPr id="4" name="CuadroTexto 3">
             <a:extLst>
               <a:ext uri="{FF2B5EF4-FFF2-40B4-BE49-F238E27FC236}">
-                <a16:creationId xmlns:a16="http://schemas.microsoft.com/office/drawing/2014/main" id="{37568BDC-19A1-B02B-11CC-CCD27F9083CE}"/>
+                <a16:creationId xmlns:a16="http://schemas.microsoft.com/office/drawing/2014/main" id="{9FFB00EA-D6CD-F919-F770-4771792CD503}"/>
               </a:ext>
             </a:extLst>
           </p:cNvPr>
@@ -6854,7 +6854,7 @@
           <p:cNvPr id="5" name="Rectángulo: esquinas redondeadas 4">
             <a:extLst>
               <a:ext uri="{FF2B5EF4-FFF2-40B4-BE49-F238E27FC236}">
-                <a16:creationId xmlns:a16="http://schemas.microsoft.com/office/drawing/2014/main" id="{58FA41B2-903B-E960-4D4C-7649F102C072}"/>
+                <a16:creationId xmlns:a16="http://schemas.microsoft.com/office/drawing/2014/main" id="{775C0131-DC1E-0995-3E0A-AF28EEBD93FF}"/>
               </a:ext>
             </a:extLst>
           </p:cNvPr>
@@ -6908,7 +6908,7 @@
           <p:cNvPr id="6" name="CuadroTexto 5">
             <a:extLst>
               <a:ext uri="{FF2B5EF4-FFF2-40B4-BE49-F238E27FC236}">
-                <a16:creationId xmlns:a16="http://schemas.microsoft.com/office/drawing/2014/main" id="{1D07C734-D680-766C-EEDF-F6D166A0306A}"/>
+                <a16:creationId xmlns:a16="http://schemas.microsoft.com/office/drawing/2014/main" id="{131B2301-D864-05E7-D62E-A28673A18ACB}"/>
               </a:ext>
             </a:extLst>
           </p:cNvPr>
@@ -6948,7 +6948,7 @@
           <p:cNvPr id="7" name="CuadroTexto 6">
             <a:extLst>
               <a:ext uri="{FF2B5EF4-FFF2-40B4-BE49-F238E27FC236}">
-                <a16:creationId xmlns:a16="http://schemas.microsoft.com/office/drawing/2014/main" id="{BA9B237C-E4F3-61B4-E479-E549D931655B}"/>
+                <a16:creationId xmlns:a16="http://schemas.microsoft.com/office/drawing/2014/main" id="{09A2E840-415C-A105-E2E4-F36E50BEC8C1}"/>
               </a:ext>
             </a:extLst>
           </p:cNvPr>
@@ -6988,7 +6988,7 @@
           <p:cNvPr id="8" name="Rectángulo: esquinas redondeadas 7">
             <a:extLst>
               <a:ext uri="{FF2B5EF4-FFF2-40B4-BE49-F238E27FC236}">
-                <a16:creationId xmlns:a16="http://schemas.microsoft.com/office/drawing/2014/main" id="{DD42DE42-5955-D968-3FEC-2E1E9579A8C8}"/>
+                <a16:creationId xmlns:a16="http://schemas.microsoft.com/office/drawing/2014/main" id="{B96C461D-0C13-B400-DE65-C8C17E1EDAEF}"/>
               </a:ext>
             </a:extLst>
           </p:cNvPr>
@@ -7042,7 +7042,7 @@
           <p:cNvPr id="9" name="CuadroTexto 8">
             <a:extLst>
               <a:ext uri="{FF2B5EF4-FFF2-40B4-BE49-F238E27FC236}">
-                <a16:creationId xmlns:a16="http://schemas.microsoft.com/office/drawing/2014/main" id="{468B4253-FCBE-C837-4133-F7E478500FFB}"/>
+                <a16:creationId xmlns:a16="http://schemas.microsoft.com/office/drawing/2014/main" id="{61C24002-41E3-D09E-6180-F7D4F214AD45}"/>
               </a:ext>
             </a:extLst>
           </p:cNvPr>
@@ -7082,7 +7082,7 @@
           <p:cNvPr id="10" name="CuadroTexto 9">
             <a:extLst>
               <a:ext uri="{FF2B5EF4-FFF2-40B4-BE49-F238E27FC236}">
-                <a16:creationId xmlns:a16="http://schemas.microsoft.com/office/drawing/2014/main" id="{077F98AF-71D3-B7AA-A7BE-7F6AAB5DF75D}"/>
+                <a16:creationId xmlns:a16="http://schemas.microsoft.com/office/drawing/2014/main" id="{F52D2E50-3C75-1DDF-25F3-8D7CB733BCCD}"/>
               </a:ext>
             </a:extLst>
           </p:cNvPr>
@@ -7122,7 +7122,7 @@
           <p:cNvPr id="11" name="CuadroTexto 10">
             <a:extLst>
               <a:ext uri="{FF2B5EF4-FFF2-40B4-BE49-F238E27FC236}">
-                <a16:creationId xmlns:a16="http://schemas.microsoft.com/office/drawing/2014/main" id="{C1E5AB4E-15F6-D17F-8080-4724F36ADDC3}"/>
+                <a16:creationId xmlns:a16="http://schemas.microsoft.com/office/drawing/2014/main" id="{9ECD6467-C862-5541-7997-A449E19DE802}"/>
               </a:ext>
             </a:extLst>
           </p:cNvPr>
@@ -7162,7 +7162,7 @@
           <p:cNvPr id="12" name="CuadroTexto 11">
             <a:extLst>
               <a:ext uri="{FF2B5EF4-FFF2-40B4-BE49-F238E27FC236}">
-                <a16:creationId xmlns:a16="http://schemas.microsoft.com/office/drawing/2014/main" id="{780F215D-46DF-AAAC-31BC-41213A603EF7}"/>
+                <a16:creationId xmlns:a16="http://schemas.microsoft.com/office/drawing/2014/main" id="{F4EAA11C-71BC-04F4-33B8-98949E8CD521}"/>
               </a:ext>
             </a:extLst>
           </p:cNvPr>
@@ -7243,7 +7243,7 @@
     </p:spTree>
     <p:extLst>
       <p:ext uri="{BB962C8B-B14F-4D97-AF65-F5344CB8AC3E}">
-        <p14:creationId xmlns:p14="http://schemas.microsoft.com/office/powerpoint/2010/main" val="3246461230"/>
+        <p14:creationId xmlns:p14="http://schemas.microsoft.com/office/powerpoint/2010/main" val="3749847170"/>
       </p:ext>
     </p:extLst>
   </p:cSld>
@@ -7283,7 +7283,7 @@
           <p:cNvPr id="2" name="CuadroTexto 1">
             <a:extLst>
               <a:ext uri="{FF2B5EF4-FFF2-40B4-BE49-F238E27FC236}">
-                <a16:creationId xmlns:a16="http://schemas.microsoft.com/office/drawing/2014/main" id="{A4D3AD77-828F-E3E7-87B2-01EBE2689D0E}"/>
+                <a16:creationId xmlns:a16="http://schemas.microsoft.com/office/drawing/2014/main" id="{20508CD6-6468-D198-6001-C125F543EE51}"/>
               </a:ext>
             </a:extLst>
           </p:cNvPr>
@@ -7323,7 +7323,7 @@
           <p:cNvPr id="3" name="CuadroTexto 2">
             <a:extLst>
               <a:ext uri="{FF2B5EF4-FFF2-40B4-BE49-F238E27FC236}">
-                <a16:creationId xmlns:a16="http://schemas.microsoft.com/office/drawing/2014/main" id="{99FAC8C5-54BD-E621-AF51-DB21D5D6637F}"/>
+                <a16:creationId xmlns:a16="http://schemas.microsoft.com/office/drawing/2014/main" id="{53A3F14B-A356-0585-8C75-B8A0FD06430D}"/>
               </a:ext>
             </a:extLst>
           </p:cNvPr>
@@ -7363,7 +7363,7 @@
           <p:cNvPr id="4" name="CuadroTexto 3">
             <a:extLst>
               <a:ext uri="{FF2B5EF4-FFF2-40B4-BE49-F238E27FC236}">
-                <a16:creationId xmlns:a16="http://schemas.microsoft.com/office/drawing/2014/main" id="{CC040CF0-AD7D-80D0-B96D-A615BCB8C1AD}"/>
+                <a16:creationId xmlns:a16="http://schemas.microsoft.com/office/drawing/2014/main" id="{6E49CF37-C0F0-5094-6378-3E4859EACAB8}"/>
               </a:ext>
             </a:extLst>
           </p:cNvPr>
@@ -7403,7 +7403,7 @@
           <p:cNvPr id="5" name="Rectángulo: esquinas redondeadas 4">
             <a:extLst>
               <a:ext uri="{FF2B5EF4-FFF2-40B4-BE49-F238E27FC236}">
-                <a16:creationId xmlns:a16="http://schemas.microsoft.com/office/drawing/2014/main" id="{1F2CF240-B952-37B3-8E06-AA83F789C3B2}"/>
+                <a16:creationId xmlns:a16="http://schemas.microsoft.com/office/drawing/2014/main" id="{0A731536-B4DF-AFA1-DA9C-FC63CF39A62B}"/>
               </a:ext>
             </a:extLst>
           </p:cNvPr>
@@ -7457,7 +7457,7 @@
           <p:cNvPr id="6" name="CuadroTexto 5">
             <a:extLst>
               <a:ext uri="{FF2B5EF4-FFF2-40B4-BE49-F238E27FC236}">
-                <a16:creationId xmlns:a16="http://schemas.microsoft.com/office/drawing/2014/main" id="{FDD5E688-21C6-A61A-38ED-F2084F038141}"/>
+                <a16:creationId xmlns:a16="http://schemas.microsoft.com/office/drawing/2014/main" id="{99C73E3B-28FC-3EEF-8394-3690362BFA4C}"/>
               </a:ext>
             </a:extLst>
           </p:cNvPr>
@@ -7497,7 +7497,7 @@
           <p:cNvPr id="7" name="CuadroTexto 6">
             <a:extLst>
               <a:ext uri="{FF2B5EF4-FFF2-40B4-BE49-F238E27FC236}">
-                <a16:creationId xmlns:a16="http://schemas.microsoft.com/office/drawing/2014/main" id="{8EC20374-7D60-B373-5141-2B0E4B57A84A}"/>
+                <a16:creationId xmlns:a16="http://schemas.microsoft.com/office/drawing/2014/main" id="{05BB407F-34E6-33CE-ECE6-E7917496A74D}"/>
               </a:ext>
             </a:extLst>
           </p:cNvPr>
@@ -7537,7 +7537,7 @@
           <p:cNvPr id="8" name="Rectángulo: esquinas redondeadas 7">
             <a:extLst>
               <a:ext uri="{FF2B5EF4-FFF2-40B4-BE49-F238E27FC236}">
-                <a16:creationId xmlns:a16="http://schemas.microsoft.com/office/drawing/2014/main" id="{84089369-9A7A-35A8-0D6C-894B25FF9795}"/>
+                <a16:creationId xmlns:a16="http://schemas.microsoft.com/office/drawing/2014/main" id="{DB83EC71-8DCE-6D32-C673-B47194A22729}"/>
               </a:ext>
             </a:extLst>
           </p:cNvPr>
@@ -7591,7 +7591,7 @@
           <p:cNvPr id="9" name="CuadroTexto 8">
             <a:extLst>
               <a:ext uri="{FF2B5EF4-FFF2-40B4-BE49-F238E27FC236}">
-                <a16:creationId xmlns:a16="http://schemas.microsoft.com/office/drawing/2014/main" id="{EEEC2744-B96F-CF63-628C-0EDA09C77340}"/>
+                <a16:creationId xmlns:a16="http://schemas.microsoft.com/office/drawing/2014/main" id="{E08A1FC8-58B3-9590-68E1-40717831FB84}"/>
               </a:ext>
             </a:extLst>
           </p:cNvPr>
@@ -7631,7 +7631,7 @@
           <p:cNvPr id="10" name="CuadroTexto 9">
             <a:extLst>
               <a:ext uri="{FF2B5EF4-FFF2-40B4-BE49-F238E27FC236}">
-                <a16:creationId xmlns:a16="http://schemas.microsoft.com/office/drawing/2014/main" id="{81B5DCFA-D205-FAE9-F06F-EE173C4DD4F6}"/>
+                <a16:creationId xmlns:a16="http://schemas.microsoft.com/office/drawing/2014/main" id="{085BA0E7-B0B5-2E7A-A585-03D27E5375DF}"/>
               </a:ext>
             </a:extLst>
           </p:cNvPr>
@@ -7671,7 +7671,7 @@
           <p:cNvPr id="11" name="Rectángulo: esquinas redondeadas 10">
             <a:extLst>
               <a:ext uri="{FF2B5EF4-FFF2-40B4-BE49-F238E27FC236}">
-                <a16:creationId xmlns:a16="http://schemas.microsoft.com/office/drawing/2014/main" id="{1EA7C88D-9F11-A261-C173-0FE8F14772A8}"/>
+                <a16:creationId xmlns:a16="http://schemas.microsoft.com/office/drawing/2014/main" id="{6031C002-AC0B-8471-4EDA-05DB9C42AAB3}"/>
               </a:ext>
             </a:extLst>
           </p:cNvPr>
@@ -7725,7 +7725,7 @@
           <p:cNvPr id="12" name="CuadroTexto 11">
             <a:extLst>
               <a:ext uri="{FF2B5EF4-FFF2-40B4-BE49-F238E27FC236}">
-                <a16:creationId xmlns:a16="http://schemas.microsoft.com/office/drawing/2014/main" id="{6A9BE991-68D7-7A46-3DAD-348D38562250}"/>
+                <a16:creationId xmlns:a16="http://schemas.microsoft.com/office/drawing/2014/main" id="{BEF38A84-BC89-66DB-3F38-42F3AC9B73D4}"/>
               </a:ext>
             </a:extLst>
           </p:cNvPr>
@@ -7765,7 +7765,7 @@
           <p:cNvPr id="13" name="CuadroTexto 12">
             <a:extLst>
               <a:ext uri="{FF2B5EF4-FFF2-40B4-BE49-F238E27FC236}">
-                <a16:creationId xmlns:a16="http://schemas.microsoft.com/office/drawing/2014/main" id="{D336450E-CBEE-21AE-587B-B48FB2B794E0}"/>
+                <a16:creationId xmlns:a16="http://schemas.microsoft.com/office/drawing/2014/main" id="{45FD6878-A574-ECCD-F34F-68126FF04248}"/>
               </a:ext>
             </a:extLst>
           </p:cNvPr>
@@ -7805,7 +7805,7 @@
           <p:cNvPr id="14" name="CuadroTexto 13">
             <a:extLst>
               <a:ext uri="{FF2B5EF4-FFF2-40B4-BE49-F238E27FC236}">
-                <a16:creationId xmlns:a16="http://schemas.microsoft.com/office/drawing/2014/main" id="{20BEA9F2-2AD8-C4B1-3F63-38965E41D1ED}"/>
+                <a16:creationId xmlns:a16="http://schemas.microsoft.com/office/drawing/2014/main" id="{05788005-402F-E948-3B31-51A2E3F487E4}"/>
               </a:ext>
             </a:extLst>
           </p:cNvPr>
@@ -7868,7 +7868,7 @@
     </p:spTree>
     <p:extLst>
       <p:ext uri="{BB962C8B-B14F-4D97-AF65-F5344CB8AC3E}">
-        <p14:creationId xmlns:p14="http://schemas.microsoft.com/office/powerpoint/2010/main" val="3725548532"/>
+        <p14:creationId xmlns:p14="http://schemas.microsoft.com/office/powerpoint/2010/main" val="1748892430"/>
       </p:ext>
     </p:extLst>
   </p:cSld>
@@ -7908,7 +7908,7 @@
           <p:cNvPr id="2" name="CuadroTexto 1">
             <a:extLst>
               <a:ext uri="{FF2B5EF4-FFF2-40B4-BE49-F238E27FC236}">
-                <a16:creationId xmlns:a16="http://schemas.microsoft.com/office/drawing/2014/main" id="{C3DC3612-2058-06AC-93C9-ED0D67262948}"/>
+                <a16:creationId xmlns:a16="http://schemas.microsoft.com/office/drawing/2014/main" id="{43215732-2E6D-AB1D-FFB4-12A7886A87E4}"/>
               </a:ext>
             </a:extLst>
           </p:cNvPr>
@@ -7948,7 +7948,7 @@
           <p:cNvPr id="3" name="CuadroTexto 2">
             <a:extLst>
               <a:ext uri="{FF2B5EF4-FFF2-40B4-BE49-F238E27FC236}">
-                <a16:creationId xmlns:a16="http://schemas.microsoft.com/office/drawing/2014/main" id="{28C40224-81C6-4E36-7D5B-9F21B4FEE17C}"/>
+                <a16:creationId xmlns:a16="http://schemas.microsoft.com/office/drawing/2014/main" id="{5D98BB5E-EC7D-5564-5D12-236DDDD63197}"/>
               </a:ext>
             </a:extLst>
           </p:cNvPr>
@@ -7988,7 +7988,7 @@
           <p:cNvPr id="4" name="CuadroTexto 3">
             <a:extLst>
               <a:ext uri="{FF2B5EF4-FFF2-40B4-BE49-F238E27FC236}">
-                <a16:creationId xmlns:a16="http://schemas.microsoft.com/office/drawing/2014/main" id="{9B5B60DC-A75D-45BE-804F-BC885F6F4CC1}"/>
+                <a16:creationId xmlns:a16="http://schemas.microsoft.com/office/drawing/2014/main" id="{7D676BF3-C9F4-2AB6-082C-716A5D2638F2}"/>
               </a:ext>
             </a:extLst>
           </p:cNvPr>
@@ -8107,7 +8107,7 @@
           <p:cNvPr id="5" name="Rectángulo: esquinas redondeadas 4">
             <a:extLst>
               <a:ext uri="{FF2B5EF4-FFF2-40B4-BE49-F238E27FC236}">
-                <a16:creationId xmlns:a16="http://schemas.microsoft.com/office/drawing/2014/main" id="{648C1DE9-6BD5-EBD7-9950-DAE8920F1FF1}"/>
+                <a16:creationId xmlns:a16="http://schemas.microsoft.com/office/drawing/2014/main" id="{8F097D6B-2939-4359-E9E7-729A7B3B29F4}"/>
               </a:ext>
             </a:extLst>
           </p:cNvPr>
@@ -8161,7 +8161,7 @@
           <p:cNvPr id="6" name="CuadroTexto 5">
             <a:extLst>
               <a:ext uri="{FF2B5EF4-FFF2-40B4-BE49-F238E27FC236}">
-                <a16:creationId xmlns:a16="http://schemas.microsoft.com/office/drawing/2014/main" id="{D36B12BC-610E-1351-D73C-368B4B1AC1CD}"/>
+                <a16:creationId xmlns:a16="http://schemas.microsoft.com/office/drawing/2014/main" id="{1AD83F5D-CFDF-120C-0FDD-91EDA33F66D7}"/>
               </a:ext>
             </a:extLst>
           </p:cNvPr>
@@ -8201,7 +8201,7 @@
           <p:cNvPr id="7" name="CuadroTexto 6">
             <a:extLst>
               <a:ext uri="{FF2B5EF4-FFF2-40B4-BE49-F238E27FC236}">
-                <a16:creationId xmlns:a16="http://schemas.microsoft.com/office/drawing/2014/main" id="{CB1052AB-829B-F3AE-5AE2-1F6026116D3D}"/>
+                <a16:creationId xmlns:a16="http://schemas.microsoft.com/office/drawing/2014/main" id="{463B6C04-9057-138B-9F0D-B95AEC196576}"/>
               </a:ext>
             </a:extLst>
           </p:cNvPr>
@@ -8239,7 +8239,7 @@
     </p:spTree>
     <p:extLst>
       <p:ext uri="{BB962C8B-B14F-4D97-AF65-F5344CB8AC3E}">
-        <p14:creationId xmlns:p14="http://schemas.microsoft.com/office/powerpoint/2010/main" val="1362884170"/>
+        <p14:creationId xmlns:p14="http://schemas.microsoft.com/office/powerpoint/2010/main" val="2899676087"/>
       </p:ext>
     </p:extLst>
   </p:cSld>
@@ -8279,7 +8279,7 @@
           <p:cNvPr id="2" name="CuadroTexto 1">
             <a:extLst>
               <a:ext uri="{FF2B5EF4-FFF2-40B4-BE49-F238E27FC236}">
-                <a16:creationId xmlns:a16="http://schemas.microsoft.com/office/drawing/2014/main" id="{BA0FAC90-46C1-F43B-6044-79E44BD0FB48}"/>
+                <a16:creationId xmlns:a16="http://schemas.microsoft.com/office/drawing/2014/main" id="{4A8EE9DF-5270-70E8-C162-AE5DD01AB92F}"/>
               </a:ext>
             </a:extLst>
           </p:cNvPr>
@@ -8319,7 +8319,7 @@
           <p:cNvPr id="3" name="CuadroTexto 2">
             <a:extLst>
               <a:ext uri="{FF2B5EF4-FFF2-40B4-BE49-F238E27FC236}">
-                <a16:creationId xmlns:a16="http://schemas.microsoft.com/office/drawing/2014/main" id="{FBFEF832-13B0-1285-9F0B-8C1528AD7B98}"/>
+                <a16:creationId xmlns:a16="http://schemas.microsoft.com/office/drawing/2014/main" id="{9D13068E-19B9-EDD4-657E-7276DAF3F2F6}"/>
               </a:ext>
             </a:extLst>
           </p:cNvPr>
@@ -8359,7 +8359,7 @@
           <p:cNvPr id="4" name="CuadroTexto 3">
             <a:extLst>
               <a:ext uri="{FF2B5EF4-FFF2-40B4-BE49-F238E27FC236}">
-                <a16:creationId xmlns:a16="http://schemas.microsoft.com/office/drawing/2014/main" id="{A975764C-8698-FBD2-A0AF-D6D4D70C13B7}"/>
+                <a16:creationId xmlns:a16="http://schemas.microsoft.com/office/drawing/2014/main" id="{BB66D7E4-32FB-EDB8-A063-5BC70E531AEF}"/>
               </a:ext>
             </a:extLst>
           </p:cNvPr>
@@ -8399,7 +8399,7 @@
           <p:cNvPr id="5" name="CuadroTexto 4">
             <a:extLst>
               <a:ext uri="{FF2B5EF4-FFF2-40B4-BE49-F238E27FC236}">
-                <a16:creationId xmlns:a16="http://schemas.microsoft.com/office/drawing/2014/main" id="{A51DC6F8-9DAE-639A-2D06-7950D96433A1}"/>
+                <a16:creationId xmlns:a16="http://schemas.microsoft.com/office/drawing/2014/main" id="{F3C64D0F-89E4-FEB1-086C-F4917583C4F2}"/>
               </a:ext>
             </a:extLst>
           </p:cNvPr>
@@ -8482,7 +8482,7 @@
           <p:cNvPr id="6" name="CuadroTexto 5">
             <a:extLst>
               <a:ext uri="{FF2B5EF4-FFF2-40B4-BE49-F238E27FC236}">
-                <a16:creationId xmlns:a16="http://schemas.microsoft.com/office/drawing/2014/main" id="{D89D9B40-7C2B-6D34-46BD-BA660C281D6C}"/>
+                <a16:creationId xmlns:a16="http://schemas.microsoft.com/office/drawing/2014/main" id="{5E9AC572-B987-9EA5-C85B-687DEA4EEBE1}"/>
               </a:ext>
             </a:extLst>
           </p:cNvPr>
@@ -8520,7 +8520,7 @@
     </p:spTree>
     <p:extLst>
       <p:ext uri="{BB962C8B-B14F-4D97-AF65-F5344CB8AC3E}">
-        <p14:creationId xmlns:p14="http://schemas.microsoft.com/office/powerpoint/2010/main" val="4157162791"/>
+        <p14:creationId xmlns:p14="http://schemas.microsoft.com/office/powerpoint/2010/main" val="3000088455"/>
       </p:ext>
     </p:extLst>
   </p:cSld>
@@ -8560,7 +8560,7 @@
           <p:cNvPr id="2" name="CuadroTexto 1">
             <a:extLst>
               <a:ext uri="{FF2B5EF4-FFF2-40B4-BE49-F238E27FC236}">
-                <a16:creationId xmlns:a16="http://schemas.microsoft.com/office/drawing/2014/main" id="{DDF56AC7-7911-E2BF-6CC8-50571390860A}"/>
+                <a16:creationId xmlns:a16="http://schemas.microsoft.com/office/drawing/2014/main" id="{97A99495-7698-35C9-F519-3509243DF9B7}"/>
               </a:ext>
             </a:extLst>
           </p:cNvPr>
@@ -8600,7 +8600,7 @@
           <p:cNvPr id="3" name="CuadroTexto 2">
             <a:extLst>
               <a:ext uri="{FF2B5EF4-FFF2-40B4-BE49-F238E27FC236}">
-                <a16:creationId xmlns:a16="http://schemas.microsoft.com/office/drawing/2014/main" id="{4DACE98E-D820-9E94-C264-77DF6C4CC2D0}"/>
+                <a16:creationId xmlns:a16="http://schemas.microsoft.com/office/drawing/2014/main" id="{6473AEC7-F891-C8CF-F621-F8AB92A8A3AA}"/>
               </a:ext>
             </a:extLst>
           </p:cNvPr>
@@ -8640,7 +8640,7 @@
           <p:cNvPr id="4" name="CuadroTexto 3">
             <a:extLst>
               <a:ext uri="{FF2B5EF4-FFF2-40B4-BE49-F238E27FC236}">
-                <a16:creationId xmlns:a16="http://schemas.microsoft.com/office/drawing/2014/main" id="{0E355E7C-61B8-B4B6-062F-AEE7AA8F3A2E}"/>
+                <a16:creationId xmlns:a16="http://schemas.microsoft.com/office/drawing/2014/main" id="{CBC3D1CE-C197-78B9-9A60-0A88E3B8E328}"/>
               </a:ext>
             </a:extLst>
           </p:cNvPr>
@@ -8680,7 +8680,7 @@
           <p:cNvPr id="5" name="CuadroTexto 4">
             <a:extLst>
               <a:ext uri="{FF2B5EF4-FFF2-40B4-BE49-F238E27FC236}">
-                <a16:creationId xmlns:a16="http://schemas.microsoft.com/office/drawing/2014/main" id="{0C6AFCC8-F7F9-CD3D-7C00-AE222E696E86}"/>
+                <a16:creationId xmlns:a16="http://schemas.microsoft.com/office/drawing/2014/main" id="{E0FB9D0D-9935-C4CD-A639-878E061C4E37}"/>
               </a:ext>
             </a:extLst>
           </p:cNvPr>
@@ -8781,7 +8781,7 @@
           <p:cNvPr id="6" name="Rectángulo: esquinas redondeadas 5">
             <a:extLst>
               <a:ext uri="{FF2B5EF4-FFF2-40B4-BE49-F238E27FC236}">
-                <a16:creationId xmlns:a16="http://schemas.microsoft.com/office/drawing/2014/main" id="{36B6F8E0-E615-808A-AE2B-459EA13B7754}"/>
+                <a16:creationId xmlns:a16="http://schemas.microsoft.com/office/drawing/2014/main" id="{2379AFE7-7192-0690-5CFC-6D21DABC384B}"/>
               </a:ext>
             </a:extLst>
           </p:cNvPr>
@@ -8835,7 +8835,7 @@
           <p:cNvPr id="7" name="CuadroTexto 6">
             <a:extLst>
               <a:ext uri="{FF2B5EF4-FFF2-40B4-BE49-F238E27FC236}">
-                <a16:creationId xmlns:a16="http://schemas.microsoft.com/office/drawing/2014/main" id="{A8189235-ECAA-6164-31A7-4E28D358B8AD}"/>
+                <a16:creationId xmlns:a16="http://schemas.microsoft.com/office/drawing/2014/main" id="{4CDFD10E-68AA-CD60-D127-C2BDC01E1210}"/>
               </a:ext>
             </a:extLst>
           </p:cNvPr>
@@ -8875,7 +8875,7 @@
           <p:cNvPr id="8" name="CuadroTexto 7">
             <a:extLst>
               <a:ext uri="{FF2B5EF4-FFF2-40B4-BE49-F238E27FC236}">
-                <a16:creationId xmlns:a16="http://schemas.microsoft.com/office/drawing/2014/main" id="{DDB71B71-AA2A-A750-F9FF-835945CF0CC0}"/>
+                <a16:creationId xmlns:a16="http://schemas.microsoft.com/office/drawing/2014/main" id="{F0B2DE3F-31A5-C76F-97EE-CF45D9539F16}"/>
               </a:ext>
             </a:extLst>
           </p:cNvPr>
@@ -8913,7 +8913,7 @@
     </p:spTree>
     <p:extLst>
       <p:ext uri="{BB962C8B-B14F-4D97-AF65-F5344CB8AC3E}">
-        <p14:creationId xmlns:p14="http://schemas.microsoft.com/office/powerpoint/2010/main" val="3731850306"/>
+        <p14:creationId xmlns:p14="http://schemas.microsoft.com/office/powerpoint/2010/main" val="1700853319"/>
       </p:ext>
     </p:extLst>
   </p:cSld>
@@ -8953,7 +8953,7 @@
           <p:cNvPr id="2" name="CuadroTexto 1">
             <a:extLst>
               <a:ext uri="{FF2B5EF4-FFF2-40B4-BE49-F238E27FC236}">
-                <a16:creationId xmlns:a16="http://schemas.microsoft.com/office/drawing/2014/main" id="{6AAB2597-D46F-DC71-2F5D-8B25AD7F5E96}"/>
+                <a16:creationId xmlns:a16="http://schemas.microsoft.com/office/drawing/2014/main" id="{F47EE030-9113-F839-0500-8CD8FF63BCF0}"/>
               </a:ext>
             </a:extLst>
           </p:cNvPr>
@@ -8993,7 +8993,7 @@
           <p:cNvPr id="3" name="CuadroTexto 2">
             <a:extLst>
               <a:ext uri="{FF2B5EF4-FFF2-40B4-BE49-F238E27FC236}">
-                <a16:creationId xmlns:a16="http://schemas.microsoft.com/office/drawing/2014/main" id="{5B0BFD7C-8183-3CF0-551B-72C4115A75D0}"/>
+                <a16:creationId xmlns:a16="http://schemas.microsoft.com/office/drawing/2014/main" id="{E8C524AC-4C67-81BF-7CCF-69FF8BD63A89}"/>
               </a:ext>
             </a:extLst>
           </p:cNvPr>
@@ -9033,7 +9033,7 @@
           <p:cNvPr id="4" name="Rectángulo: esquinas redondeadas 3">
             <a:extLst>
               <a:ext uri="{FF2B5EF4-FFF2-40B4-BE49-F238E27FC236}">
-                <a16:creationId xmlns:a16="http://schemas.microsoft.com/office/drawing/2014/main" id="{5ACFF23C-810F-5790-7D24-C53279CEBFB7}"/>
+                <a16:creationId xmlns:a16="http://schemas.microsoft.com/office/drawing/2014/main" id="{183502EE-D18B-B6A8-0611-2FB4423E8FD7}"/>
               </a:ext>
             </a:extLst>
           </p:cNvPr>
@@ -9087,7 +9087,7 @@
           <p:cNvPr id="5" name="CuadroTexto 4">
             <a:extLst>
               <a:ext uri="{FF2B5EF4-FFF2-40B4-BE49-F238E27FC236}">
-                <a16:creationId xmlns:a16="http://schemas.microsoft.com/office/drawing/2014/main" id="{5FB3D499-5187-1BDF-4588-99C5D6332F04}"/>
+                <a16:creationId xmlns:a16="http://schemas.microsoft.com/office/drawing/2014/main" id="{4F6B2FD9-691B-2B4F-0E7E-1E1921951509}"/>
               </a:ext>
             </a:extLst>
           </p:cNvPr>
@@ -9127,7 +9127,7 @@
           <p:cNvPr id="6" name="CuadroTexto 5">
             <a:extLst>
               <a:ext uri="{FF2B5EF4-FFF2-40B4-BE49-F238E27FC236}">
-                <a16:creationId xmlns:a16="http://schemas.microsoft.com/office/drawing/2014/main" id="{A90DAC83-A0C8-BD46-CF8F-8FCE3D48137D}"/>
+                <a16:creationId xmlns:a16="http://schemas.microsoft.com/office/drawing/2014/main" id="{378FE75E-5B02-6B68-D4F4-DD7679DC86A6}"/>
               </a:ext>
             </a:extLst>
           </p:cNvPr>
@@ -9167,7 +9167,7 @@
           <p:cNvPr id="7" name="Rectángulo: esquinas redondeadas 6">
             <a:extLst>
               <a:ext uri="{FF2B5EF4-FFF2-40B4-BE49-F238E27FC236}">
-                <a16:creationId xmlns:a16="http://schemas.microsoft.com/office/drawing/2014/main" id="{91CAEE8A-4BB9-F904-5B9C-2A8358F24A0C}"/>
+                <a16:creationId xmlns:a16="http://schemas.microsoft.com/office/drawing/2014/main" id="{F70DB089-39D2-93F2-93E1-36918E2B0A52}"/>
               </a:ext>
             </a:extLst>
           </p:cNvPr>
@@ -9221,7 +9221,7 @@
           <p:cNvPr id="8" name="CuadroTexto 7">
             <a:extLst>
               <a:ext uri="{FF2B5EF4-FFF2-40B4-BE49-F238E27FC236}">
-                <a16:creationId xmlns:a16="http://schemas.microsoft.com/office/drawing/2014/main" id="{989F4701-DED3-63D5-604F-BD99DA9C461F}"/>
+                <a16:creationId xmlns:a16="http://schemas.microsoft.com/office/drawing/2014/main" id="{6896B342-D52E-797F-C4D1-8C77FA9387B7}"/>
               </a:ext>
             </a:extLst>
           </p:cNvPr>
@@ -9261,7 +9261,7 @@
           <p:cNvPr id="9" name="CuadroTexto 8">
             <a:extLst>
               <a:ext uri="{FF2B5EF4-FFF2-40B4-BE49-F238E27FC236}">
-                <a16:creationId xmlns:a16="http://schemas.microsoft.com/office/drawing/2014/main" id="{59E830CB-5452-93D8-1B37-4A6C6438CD90}"/>
+                <a16:creationId xmlns:a16="http://schemas.microsoft.com/office/drawing/2014/main" id="{98602FF3-714F-AA57-D40E-86781CE18B46}"/>
               </a:ext>
             </a:extLst>
           </p:cNvPr>
@@ -9301,7 +9301,7 @@
           <p:cNvPr id="10" name="Rectángulo: esquinas redondeadas 9">
             <a:extLst>
               <a:ext uri="{FF2B5EF4-FFF2-40B4-BE49-F238E27FC236}">
-                <a16:creationId xmlns:a16="http://schemas.microsoft.com/office/drawing/2014/main" id="{2D6F1CA5-94D8-2603-631E-BD4AC7C7EBD1}"/>
+                <a16:creationId xmlns:a16="http://schemas.microsoft.com/office/drawing/2014/main" id="{2018F7BD-80CB-AE7F-1AD1-5F348FD4E479}"/>
               </a:ext>
             </a:extLst>
           </p:cNvPr>
@@ -9355,7 +9355,7 @@
           <p:cNvPr id="11" name="CuadroTexto 10">
             <a:extLst>
               <a:ext uri="{FF2B5EF4-FFF2-40B4-BE49-F238E27FC236}">
-                <a16:creationId xmlns:a16="http://schemas.microsoft.com/office/drawing/2014/main" id="{3A663033-27A2-3610-6B2D-7F359410D3C7}"/>
+                <a16:creationId xmlns:a16="http://schemas.microsoft.com/office/drawing/2014/main" id="{241ECDB7-FDE8-B2B7-EF09-E3AF19A6F71C}"/>
               </a:ext>
             </a:extLst>
           </p:cNvPr>
@@ -9395,7 +9395,7 @@
           <p:cNvPr id="12" name="CuadroTexto 11">
             <a:extLst>
               <a:ext uri="{FF2B5EF4-FFF2-40B4-BE49-F238E27FC236}">
-                <a16:creationId xmlns:a16="http://schemas.microsoft.com/office/drawing/2014/main" id="{5CC91123-17E1-FCBA-E28D-24E2E13D265D}"/>
+                <a16:creationId xmlns:a16="http://schemas.microsoft.com/office/drawing/2014/main" id="{AAC34014-78F3-3DA1-D8BE-B59827995065}"/>
               </a:ext>
             </a:extLst>
           </p:cNvPr>
@@ -9435,7 +9435,7 @@
           <p:cNvPr id="13" name="Rectángulo: esquinas redondeadas 12">
             <a:extLst>
               <a:ext uri="{FF2B5EF4-FFF2-40B4-BE49-F238E27FC236}">
-                <a16:creationId xmlns:a16="http://schemas.microsoft.com/office/drawing/2014/main" id="{B5DB876D-AC76-BBF4-BA80-FB66462E361B}"/>
+                <a16:creationId xmlns:a16="http://schemas.microsoft.com/office/drawing/2014/main" id="{211940CC-D8B5-390B-5A36-C4840E35938B}"/>
               </a:ext>
             </a:extLst>
           </p:cNvPr>
@@ -9489,7 +9489,7 @@
           <p:cNvPr id="14" name="CuadroTexto 13">
             <a:extLst>
               <a:ext uri="{FF2B5EF4-FFF2-40B4-BE49-F238E27FC236}">
-                <a16:creationId xmlns:a16="http://schemas.microsoft.com/office/drawing/2014/main" id="{7F44A214-6240-E986-C66F-ECF824B30C93}"/>
+                <a16:creationId xmlns:a16="http://schemas.microsoft.com/office/drawing/2014/main" id="{B7289F20-C8BB-3595-F15B-4E2880ED0960}"/>
               </a:ext>
             </a:extLst>
           </p:cNvPr>
@@ -9529,7 +9529,7 @@
           <p:cNvPr id="15" name="CuadroTexto 14">
             <a:extLst>
               <a:ext uri="{FF2B5EF4-FFF2-40B4-BE49-F238E27FC236}">
-                <a16:creationId xmlns:a16="http://schemas.microsoft.com/office/drawing/2014/main" id="{610B48E6-11A1-611D-CE0A-7C67FBD0FDAF}"/>
+                <a16:creationId xmlns:a16="http://schemas.microsoft.com/office/drawing/2014/main" id="{AD5FDCD2-CF71-63AC-BF34-7A984AFA6773}"/>
               </a:ext>
             </a:extLst>
           </p:cNvPr>
@@ -9567,7 +9567,7 @@
     </p:spTree>
     <p:extLst>
       <p:ext uri="{BB962C8B-B14F-4D97-AF65-F5344CB8AC3E}">
-        <p14:creationId xmlns:p14="http://schemas.microsoft.com/office/powerpoint/2010/main" val="2054924816"/>
+        <p14:creationId xmlns:p14="http://schemas.microsoft.com/office/powerpoint/2010/main" val="532801573"/>
       </p:ext>
     </p:extLst>
   </p:cSld>
@@ -9607,7 +9607,7 @@
           <p:cNvPr id="2" name="CuadroTexto 1">
             <a:extLst>
               <a:ext uri="{FF2B5EF4-FFF2-40B4-BE49-F238E27FC236}">
-                <a16:creationId xmlns:a16="http://schemas.microsoft.com/office/drawing/2014/main" id="{B00CF1E5-9882-84D1-A36B-F9975948F1C6}"/>
+                <a16:creationId xmlns:a16="http://schemas.microsoft.com/office/drawing/2014/main" id="{02C763EB-133E-A78A-1CB0-1107BA8FDB07}"/>
               </a:ext>
             </a:extLst>
           </p:cNvPr>
@@ -9647,7 +9647,7 @@
           <p:cNvPr id="3" name="CuadroTexto 2">
             <a:extLst>
               <a:ext uri="{FF2B5EF4-FFF2-40B4-BE49-F238E27FC236}">
-                <a16:creationId xmlns:a16="http://schemas.microsoft.com/office/drawing/2014/main" id="{1B084417-75B2-1CA6-8C4F-EDF1A9BF7DBA}"/>
+                <a16:creationId xmlns:a16="http://schemas.microsoft.com/office/drawing/2014/main" id="{4DDA0427-728B-B593-D27C-E87F5A662BB1}"/>
               </a:ext>
             </a:extLst>
           </p:cNvPr>
@@ -9687,7 +9687,7 @@
           <p:cNvPr id="4" name="CuadroTexto 3">
             <a:extLst>
               <a:ext uri="{FF2B5EF4-FFF2-40B4-BE49-F238E27FC236}">
-                <a16:creationId xmlns:a16="http://schemas.microsoft.com/office/drawing/2014/main" id="{2314A682-2146-998E-587D-E8B92A72BFEC}"/>
+                <a16:creationId xmlns:a16="http://schemas.microsoft.com/office/drawing/2014/main" id="{4117148E-9BE1-AD74-94C9-056B7A8F40BA}"/>
               </a:ext>
             </a:extLst>
           </p:cNvPr>
@@ -9727,7 +9727,7 @@
           <p:cNvPr id="6" name="Imagen 5">
             <a:extLst>
               <a:ext uri="{FF2B5EF4-FFF2-40B4-BE49-F238E27FC236}">
-                <a16:creationId xmlns:a16="http://schemas.microsoft.com/office/drawing/2014/main" id="{3C9AB106-711F-8883-918A-0B752336D248}"/>
+                <a16:creationId xmlns:a16="http://schemas.microsoft.com/office/drawing/2014/main" id="{B4278C2D-D007-0FAB-0454-E696414CB426}"/>
               </a:ext>
             </a:extLst>
           </p:cNvPr>
@@ -9768,7 +9768,7 @@
           <p:cNvPr id="7" name="CuadroTexto 6">
             <a:extLst>
               <a:ext uri="{FF2B5EF4-FFF2-40B4-BE49-F238E27FC236}">
-                <a16:creationId xmlns:a16="http://schemas.microsoft.com/office/drawing/2014/main" id="{BFF87F8D-632E-0E66-12F6-BCED179951DD}"/>
+                <a16:creationId xmlns:a16="http://schemas.microsoft.com/office/drawing/2014/main" id="{F6E86348-1442-E11C-BF6E-F3E0C27223E0}"/>
               </a:ext>
             </a:extLst>
           </p:cNvPr>
@@ -9885,7 +9885,7 @@
     </p:spTree>
     <p:extLst>
       <p:ext uri="{BB962C8B-B14F-4D97-AF65-F5344CB8AC3E}">
-        <p14:creationId xmlns:p14="http://schemas.microsoft.com/office/powerpoint/2010/main" val="1561485036"/>
+        <p14:creationId xmlns:p14="http://schemas.microsoft.com/office/powerpoint/2010/main" val="3055323459"/>
       </p:ext>
     </p:extLst>
   </p:cSld>
@@ -9925,7 +9925,7 @@
           <p:cNvPr id="2" name="CuadroTexto 1">
             <a:extLst>
               <a:ext uri="{FF2B5EF4-FFF2-40B4-BE49-F238E27FC236}">
-                <a16:creationId xmlns:a16="http://schemas.microsoft.com/office/drawing/2014/main" id="{73CF5C9E-9ECB-3DD5-6D4F-A407C7C0ED49}"/>
+                <a16:creationId xmlns:a16="http://schemas.microsoft.com/office/drawing/2014/main" id="{6A55F792-719B-4933-0A82-79DA36A75C66}"/>
               </a:ext>
             </a:extLst>
           </p:cNvPr>
@@ -9965,7 +9965,7 @@
           <p:cNvPr id="3" name="CuadroTexto 2">
             <a:extLst>
               <a:ext uri="{FF2B5EF4-FFF2-40B4-BE49-F238E27FC236}">
-                <a16:creationId xmlns:a16="http://schemas.microsoft.com/office/drawing/2014/main" id="{0491214E-0C65-5F9E-16EE-1A317A0FB4E8}"/>
+                <a16:creationId xmlns:a16="http://schemas.microsoft.com/office/drawing/2014/main" id="{2E49A66F-CB1D-8525-2172-BAF6AB440E2B}"/>
               </a:ext>
             </a:extLst>
           </p:cNvPr>
@@ -10005,7 +10005,7 @@
           <p:cNvPr id="5" name="Imagen 4">
             <a:extLst>
               <a:ext uri="{FF2B5EF4-FFF2-40B4-BE49-F238E27FC236}">
-                <a16:creationId xmlns:a16="http://schemas.microsoft.com/office/drawing/2014/main" id="{DAE1B80D-AE78-6905-6235-AB2486E053B4}"/>
+                <a16:creationId xmlns:a16="http://schemas.microsoft.com/office/drawing/2014/main" id="{CF1E2096-6DE4-2AA4-BC44-C2719EB4F519}"/>
               </a:ext>
             </a:extLst>
           </p:cNvPr>
@@ -10046,7 +10046,7 @@
           <p:cNvPr id="6" name="CuadroTexto 5">
             <a:extLst>
               <a:ext uri="{FF2B5EF4-FFF2-40B4-BE49-F238E27FC236}">
-                <a16:creationId xmlns:a16="http://schemas.microsoft.com/office/drawing/2014/main" id="{FE454F16-1D60-5900-7AD6-BD4EEB8BB38D}"/>
+                <a16:creationId xmlns:a16="http://schemas.microsoft.com/office/drawing/2014/main" id="{2D2B4C86-D810-64D8-4A85-90CC19F2C751}"/>
               </a:ext>
             </a:extLst>
           </p:cNvPr>
@@ -10086,7 +10086,7 @@
           <p:cNvPr id="7" name="CuadroTexto 6">
             <a:extLst>
               <a:ext uri="{FF2B5EF4-FFF2-40B4-BE49-F238E27FC236}">
-                <a16:creationId xmlns:a16="http://schemas.microsoft.com/office/drawing/2014/main" id="{93694235-5164-8076-25CE-63B5F4A19767}"/>
+                <a16:creationId xmlns:a16="http://schemas.microsoft.com/office/drawing/2014/main" id="{2685FCED-4FC2-BF16-CB15-0DD8D2E263EB}"/>
               </a:ext>
             </a:extLst>
           </p:cNvPr>
@@ -10185,7 +10185,7 @@
     </p:spTree>
     <p:extLst>
       <p:ext uri="{BB962C8B-B14F-4D97-AF65-F5344CB8AC3E}">
-        <p14:creationId xmlns:p14="http://schemas.microsoft.com/office/powerpoint/2010/main" val="2548476343"/>
+        <p14:creationId xmlns:p14="http://schemas.microsoft.com/office/powerpoint/2010/main" val="2739586334"/>
       </p:ext>
     </p:extLst>
   </p:cSld>
@@ -10225,7 +10225,7 @@
           <p:cNvPr id="2" name="CuadroTexto 1">
             <a:extLst>
               <a:ext uri="{FF2B5EF4-FFF2-40B4-BE49-F238E27FC236}">
-                <a16:creationId xmlns:a16="http://schemas.microsoft.com/office/drawing/2014/main" id="{4CCBF99B-D613-FA12-9C8A-6D8075887DF4}"/>
+                <a16:creationId xmlns:a16="http://schemas.microsoft.com/office/drawing/2014/main" id="{CE2F9C66-1DF0-AA26-FDED-651C2EB88C0A}"/>
               </a:ext>
             </a:extLst>
           </p:cNvPr>
@@ -10265,7 +10265,7 @@
           <p:cNvPr id="3" name="CuadroTexto 2">
             <a:extLst>
               <a:ext uri="{FF2B5EF4-FFF2-40B4-BE49-F238E27FC236}">
-                <a16:creationId xmlns:a16="http://schemas.microsoft.com/office/drawing/2014/main" id="{243A3967-F235-BEB6-A9A9-0C204031D56C}"/>
+                <a16:creationId xmlns:a16="http://schemas.microsoft.com/office/drawing/2014/main" id="{BB4629B6-4913-02FD-22C5-F6B0C32BD709}"/>
               </a:ext>
             </a:extLst>
           </p:cNvPr>
@@ -10305,7 +10305,7 @@
           <p:cNvPr id="4" name="CuadroTexto 3">
             <a:extLst>
               <a:ext uri="{FF2B5EF4-FFF2-40B4-BE49-F238E27FC236}">
-                <a16:creationId xmlns:a16="http://schemas.microsoft.com/office/drawing/2014/main" id="{75B1EF6C-E4F6-9647-687F-3CA25CCEDA32}"/>
+                <a16:creationId xmlns:a16="http://schemas.microsoft.com/office/drawing/2014/main" id="{89B0F4DE-C0A7-A7EE-1CA2-F3A03BCD4C50}"/>
               </a:ext>
             </a:extLst>
           </p:cNvPr>
@@ -10345,7 +10345,7 @@
           <p:cNvPr id="6" name="Imagen 5">
             <a:extLst>
               <a:ext uri="{FF2B5EF4-FFF2-40B4-BE49-F238E27FC236}">
-                <a16:creationId xmlns:a16="http://schemas.microsoft.com/office/drawing/2014/main" id="{0C4C337B-4936-585C-0416-47FA306F1B16}"/>
+                <a16:creationId xmlns:a16="http://schemas.microsoft.com/office/drawing/2014/main" id="{56A3FCBC-E07E-66C5-C566-583C15F6E59B}"/>
               </a:ext>
             </a:extLst>
           </p:cNvPr>
@@ -10386,7 +10386,7 @@
           <p:cNvPr id="7" name="Rectángulo: esquinas redondeadas 6">
             <a:extLst>
               <a:ext uri="{FF2B5EF4-FFF2-40B4-BE49-F238E27FC236}">
-                <a16:creationId xmlns:a16="http://schemas.microsoft.com/office/drawing/2014/main" id="{95311EDC-1A2C-CDBE-CECF-C96DC6623FE5}"/>
+                <a16:creationId xmlns:a16="http://schemas.microsoft.com/office/drawing/2014/main" id="{AE163F4D-D493-53CB-D135-CCB3C639FD66}"/>
               </a:ext>
             </a:extLst>
           </p:cNvPr>
@@ -10440,7 +10440,7 @@
           <p:cNvPr id="8" name="CuadroTexto 7">
             <a:extLst>
               <a:ext uri="{FF2B5EF4-FFF2-40B4-BE49-F238E27FC236}">
-                <a16:creationId xmlns:a16="http://schemas.microsoft.com/office/drawing/2014/main" id="{8DD254F0-0569-7FA3-77EB-BAA24FF8113D}"/>
+                <a16:creationId xmlns:a16="http://schemas.microsoft.com/office/drawing/2014/main" id="{5E2B6364-4DB1-AE6A-0D78-80A02A8AA6BD}"/>
               </a:ext>
             </a:extLst>
           </p:cNvPr>
@@ -10480,7 +10480,7 @@
           <p:cNvPr id="9" name="CuadroTexto 8">
             <a:extLst>
               <a:ext uri="{FF2B5EF4-FFF2-40B4-BE49-F238E27FC236}">
-                <a16:creationId xmlns:a16="http://schemas.microsoft.com/office/drawing/2014/main" id="{634E3904-911B-D57D-4B7B-A09895F73D32}"/>
+                <a16:creationId xmlns:a16="http://schemas.microsoft.com/office/drawing/2014/main" id="{1A64EE55-B20E-4844-D32D-4F73259ACA22}"/>
               </a:ext>
             </a:extLst>
           </p:cNvPr>
@@ -10520,7 +10520,7 @@
           <p:cNvPr id="10" name="Rectángulo: esquinas redondeadas 9">
             <a:extLst>
               <a:ext uri="{FF2B5EF4-FFF2-40B4-BE49-F238E27FC236}">
-                <a16:creationId xmlns:a16="http://schemas.microsoft.com/office/drawing/2014/main" id="{8AE624A3-0614-02E0-0F30-1AE23EB98776}"/>
+                <a16:creationId xmlns:a16="http://schemas.microsoft.com/office/drawing/2014/main" id="{231982D3-0988-2594-A592-4D0C6D87671F}"/>
               </a:ext>
             </a:extLst>
           </p:cNvPr>
@@ -10574,7 +10574,7 @@
           <p:cNvPr id="11" name="CuadroTexto 10">
             <a:extLst>
               <a:ext uri="{FF2B5EF4-FFF2-40B4-BE49-F238E27FC236}">
-                <a16:creationId xmlns:a16="http://schemas.microsoft.com/office/drawing/2014/main" id="{93DBD568-99F4-558D-B372-3422623ED7F5}"/>
+                <a16:creationId xmlns:a16="http://schemas.microsoft.com/office/drawing/2014/main" id="{3925F191-B401-B60F-B76D-5E7E042AA08A}"/>
               </a:ext>
             </a:extLst>
           </p:cNvPr>
@@ -10614,7 +10614,7 @@
           <p:cNvPr id="12" name="CuadroTexto 11">
             <a:extLst>
               <a:ext uri="{FF2B5EF4-FFF2-40B4-BE49-F238E27FC236}">
-                <a16:creationId xmlns:a16="http://schemas.microsoft.com/office/drawing/2014/main" id="{B9792F97-BD91-8F4B-B7E6-2A7A2B088498}"/>
+                <a16:creationId xmlns:a16="http://schemas.microsoft.com/office/drawing/2014/main" id="{17504DA1-D9C3-AF90-A7A9-F274FCD16B03}"/>
               </a:ext>
             </a:extLst>
           </p:cNvPr>
@@ -10654,7 +10654,7 @@
           <p:cNvPr id="13" name="Rectángulo: esquinas redondeadas 12">
             <a:extLst>
               <a:ext uri="{FF2B5EF4-FFF2-40B4-BE49-F238E27FC236}">
-                <a16:creationId xmlns:a16="http://schemas.microsoft.com/office/drawing/2014/main" id="{A96305F9-22DA-CECB-E7E2-F1D4752C8E88}"/>
+                <a16:creationId xmlns:a16="http://schemas.microsoft.com/office/drawing/2014/main" id="{1C302DFF-C064-5ED9-A3A6-5955EFF7003E}"/>
               </a:ext>
             </a:extLst>
           </p:cNvPr>
@@ -10708,7 +10708,7 @@
           <p:cNvPr id="14" name="CuadroTexto 13">
             <a:extLst>
               <a:ext uri="{FF2B5EF4-FFF2-40B4-BE49-F238E27FC236}">
-                <a16:creationId xmlns:a16="http://schemas.microsoft.com/office/drawing/2014/main" id="{A3036D62-8AF8-71F6-7714-3D71EF962E77}"/>
+                <a16:creationId xmlns:a16="http://schemas.microsoft.com/office/drawing/2014/main" id="{4208011F-4DB1-E672-7A4D-4B7B41415603}"/>
               </a:ext>
             </a:extLst>
           </p:cNvPr>
@@ -10748,7 +10748,7 @@
           <p:cNvPr id="15" name="CuadroTexto 14">
             <a:extLst>
               <a:ext uri="{FF2B5EF4-FFF2-40B4-BE49-F238E27FC236}">
-                <a16:creationId xmlns:a16="http://schemas.microsoft.com/office/drawing/2014/main" id="{FE26A294-69A6-3EA2-CDFC-AEDCBFB4FE72}"/>
+                <a16:creationId xmlns:a16="http://schemas.microsoft.com/office/drawing/2014/main" id="{706D95B7-07CF-B39A-C8EB-290DAADF0404}"/>
               </a:ext>
             </a:extLst>
           </p:cNvPr>
@@ -10786,7 +10786,7 @@
     </p:spTree>
     <p:extLst>
       <p:ext uri="{BB962C8B-B14F-4D97-AF65-F5344CB8AC3E}">
-        <p14:creationId xmlns:p14="http://schemas.microsoft.com/office/powerpoint/2010/main" val="682710152"/>
+        <p14:creationId xmlns:p14="http://schemas.microsoft.com/office/powerpoint/2010/main" val="537032938"/>
       </p:ext>
     </p:extLst>
   </p:cSld>
@@ -10826,7 +10826,7 @@
           <p:cNvPr id="2" name="CuadroTexto 1">
             <a:extLst>
               <a:ext uri="{FF2B5EF4-FFF2-40B4-BE49-F238E27FC236}">
-                <a16:creationId xmlns:a16="http://schemas.microsoft.com/office/drawing/2014/main" id="{C8526C7C-7F36-1F36-B098-CEBCE3916988}"/>
+                <a16:creationId xmlns:a16="http://schemas.microsoft.com/office/drawing/2014/main" id="{0D271AAC-A832-5E08-C88A-93FF0DEC3547}"/>
               </a:ext>
             </a:extLst>
           </p:cNvPr>
@@ -10866,7 +10866,7 @@
           <p:cNvPr id="3" name="CuadroTexto 2">
             <a:extLst>
               <a:ext uri="{FF2B5EF4-FFF2-40B4-BE49-F238E27FC236}">
-                <a16:creationId xmlns:a16="http://schemas.microsoft.com/office/drawing/2014/main" id="{1BF120A3-159A-D241-747C-B27F5AF2C4F7}"/>
+                <a16:creationId xmlns:a16="http://schemas.microsoft.com/office/drawing/2014/main" id="{AD9944CF-079F-0D18-83A8-3B08688E2314}"/>
               </a:ext>
             </a:extLst>
           </p:cNvPr>
@@ -10906,7 +10906,7 @@
           <p:cNvPr id="5" name="Imagen 4">
             <a:extLst>
               <a:ext uri="{FF2B5EF4-FFF2-40B4-BE49-F238E27FC236}">
-                <a16:creationId xmlns:a16="http://schemas.microsoft.com/office/drawing/2014/main" id="{BF10EABB-4CE5-12E1-2136-83BB85DEC781}"/>
+                <a16:creationId xmlns:a16="http://schemas.microsoft.com/office/drawing/2014/main" id="{5C2C4B73-58CA-A5C3-34D3-2BBBA5E9B5D4}"/>
               </a:ext>
             </a:extLst>
           </p:cNvPr>
@@ -10947,7 +10947,7 @@
           <p:cNvPr id="6" name="CuadroTexto 5">
             <a:extLst>
               <a:ext uri="{FF2B5EF4-FFF2-40B4-BE49-F238E27FC236}">
-                <a16:creationId xmlns:a16="http://schemas.microsoft.com/office/drawing/2014/main" id="{CD1F0883-D8B9-2E22-202D-0A67982F9561}"/>
+                <a16:creationId xmlns:a16="http://schemas.microsoft.com/office/drawing/2014/main" id="{1F1B8C47-7AA5-402F-9DE9-2E84691C3AC7}"/>
               </a:ext>
             </a:extLst>
           </p:cNvPr>
@@ -11046,7 +11046,7 @@
     </p:spTree>
     <p:extLst>
       <p:ext uri="{BB962C8B-B14F-4D97-AF65-F5344CB8AC3E}">
-        <p14:creationId xmlns:p14="http://schemas.microsoft.com/office/powerpoint/2010/main" val="2840323761"/>
+        <p14:creationId xmlns:p14="http://schemas.microsoft.com/office/powerpoint/2010/main" val="47247134"/>
       </p:ext>
     </p:extLst>
   </p:cSld>
@@ -11086,7 +11086,7 @@
           <p:cNvPr id="2" name="CuadroTexto 1">
             <a:extLst>
               <a:ext uri="{FF2B5EF4-FFF2-40B4-BE49-F238E27FC236}">
-                <a16:creationId xmlns:a16="http://schemas.microsoft.com/office/drawing/2014/main" id="{D90B48C7-75E2-7233-F8AA-29C8EEBDAEB1}"/>
+                <a16:creationId xmlns:a16="http://schemas.microsoft.com/office/drawing/2014/main" id="{42D22E14-F2E0-12FB-23AD-8C06856A5CEC}"/>
               </a:ext>
             </a:extLst>
           </p:cNvPr>
@@ -11126,7 +11126,7 @@
           <p:cNvPr id="3" name="CuadroTexto 2">
             <a:extLst>
               <a:ext uri="{FF2B5EF4-FFF2-40B4-BE49-F238E27FC236}">
-                <a16:creationId xmlns:a16="http://schemas.microsoft.com/office/drawing/2014/main" id="{1A9766DC-1F20-1D12-E634-CE6B986FF7BB}"/>
+                <a16:creationId xmlns:a16="http://schemas.microsoft.com/office/drawing/2014/main" id="{FA9CFA21-8403-29AD-04BC-F190C18F9982}"/>
               </a:ext>
             </a:extLst>
           </p:cNvPr>
@@ -11166,7 +11166,7 @@
           <p:cNvPr id="4" name="CuadroTexto 3">
             <a:extLst>
               <a:ext uri="{FF2B5EF4-FFF2-40B4-BE49-F238E27FC236}">
-                <a16:creationId xmlns:a16="http://schemas.microsoft.com/office/drawing/2014/main" id="{86B4A59F-FEE4-F93D-75F8-DF07877C923E}"/>
+                <a16:creationId xmlns:a16="http://schemas.microsoft.com/office/drawing/2014/main" id="{EA134C0F-CB10-D821-49F7-39624C8868CA}"/>
               </a:ext>
             </a:extLst>
           </p:cNvPr>
@@ -11206,7 +11206,7 @@
           <p:cNvPr id="6" name="Imagen 5">
             <a:extLst>
               <a:ext uri="{FF2B5EF4-FFF2-40B4-BE49-F238E27FC236}">
-                <a16:creationId xmlns:a16="http://schemas.microsoft.com/office/drawing/2014/main" id="{255106AF-20D9-DF0B-FDD5-2C136CBA7427}"/>
+                <a16:creationId xmlns:a16="http://schemas.microsoft.com/office/drawing/2014/main" id="{9CB5DA02-DAA9-B8B0-2EF1-31F9B92ED5B2}"/>
               </a:ext>
             </a:extLst>
           </p:cNvPr>
@@ -11247,7 +11247,7 @@
           <p:cNvPr id="7" name="Rectángulo: esquinas redondeadas 6">
             <a:extLst>
               <a:ext uri="{FF2B5EF4-FFF2-40B4-BE49-F238E27FC236}">
-                <a16:creationId xmlns:a16="http://schemas.microsoft.com/office/drawing/2014/main" id="{5202FD18-0355-7146-3EBE-A846FBAC2C23}"/>
+                <a16:creationId xmlns:a16="http://schemas.microsoft.com/office/drawing/2014/main" id="{62987D9B-3E4E-70FC-9478-5CB4BD439987}"/>
               </a:ext>
             </a:extLst>
           </p:cNvPr>
@@ -11301,7 +11301,7 @@
           <p:cNvPr id="8" name="CuadroTexto 7">
             <a:extLst>
               <a:ext uri="{FF2B5EF4-FFF2-40B4-BE49-F238E27FC236}">
-                <a16:creationId xmlns:a16="http://schemas.microsoft.com/office/drawing/2014/main" id="{C96D24EC-4409-1E20-190F-4FC7BDC4705F}"/>
+                <a16:creationId xmlns:a16="http://schemas.microsoft.com/office/drawing/2014/main" id="{E68A74AC-0594-A8D8-4023-EEE74A3322B7}"/>
               </a:ext>
             </a:extLst>
           </p:cNvPr>
@@ -11341,7 +11341,7 @@
           <p:cNvPr id="9" name="CuadroTexto 8">
             <a:extLst>
               <a:ext uri="{FF2B5EF4-FFF2-40B4-BE49-F238E27FC236}">
-                <a16:creationId xmlns:a16="http://schemas.microsoft.com/office/drawing/2014/main" id="{1D793C89-ECDB-35EC-F819-FEB290F7A142}"/>
+                <a16:creationId xmlns:a16="http://schemas.microsoft.com/office/drawing/2014/main" id="{50FEE87D-4813-369E-CDF0-D3B7AE81E5BB}"/>
               </a:ext>
             </a:extLst>
           </p:cNvPr>
@@ -11379,7 +11379,7 @@
     </p:spTree>
     <p:extLst>
       <p:ext uri="{BB962C8B-B14F-4D97-AF65-F5344CB8AC3E}">
-        <p14:creationId xmlns:p14="http://schemas.microsoft.com/office/powerpoint/2010/main" val="236568225"/>
+        <p14:creationId xmlns:p14="http://schemas.microsoft.com/office/powerpoint/2010/main" val="1678548499"/>
       </p:ext>
     </p:extLst>
   </p:cSld>
@@ -11419,7 +11419,7 @@
           <p:cNvPr id="2" name="CuadroTexto 1">
             <a:extLst>
               <a:ext uri="{FF2B5EF4-FFF2-40B4-BE49-F238E27FC236}">
-                <a16:creationId xmlns:a16="http://schemas.microsoft.com/office/drawing/2014/main" id="{8E8FE010-8AAF-D77A-6FE3-A432594F744F}"/>
+                <a16:creationId xmlns:a16="http://schemas.microsoft.com/office/drawing/2014/main" id="{88CDCCD6-2EF4-0F24-586E-5203F93C424A}"/>
               </a:ext>
             </a:extLst>
           </p:cNvPr>
@@ -11459,7 +11459,7 @@
           <p:cNvPr id="3" name="CuadroTexto 2">
             <a:extLst>
               <a:ext uri="{FF2B5EF4-FFF2-40B4-BE49-F238E27FC236}">
-                <a16:creationId xmlns:a16="http://schemas.microsoft.com/office/drawing/2014/main" id="{85DD18C2-C5F8-BD47-72A7-CE0CB63325F1}"/>
+                <a16:creationId xmlns:a16="http://schemas.microsoft.com/office/drawing/2014/main" id="{F798B586-C962-DBEA-4D8E-83B718B7CBA1}"/>
               </a:ext>
             </a:extLst>
           </p:cNvPr>
@@ -11499,7 +11499,7 @@
           <p:cNvPr id="4" name="CuadroTexto 3">
             <a:extLst>
               <a:ext uri="{FF2B5EF4-FFF2-40B4-BE49-F238E27FC236}">
-                <a16:creationId xmlns:a16="http://schemas.microsoft.com/office/drawing/2014/main" id="{EDB07F75-413F-95A5-9FAF-BE68D811BCC1}"/>
+                <a16:creationId xmlns:a16="http://schemas.microsoft.com/office/drawing/2014/main" id="{BBD29CD5-2995-DEEE-7EB2-5087A0CA9DE9}"/>
               </a:ext>
             </a:extLst>
           </p:cNvPr>
@@ -11539,7 +11539,7 @@
           <p:cNvPr id="5" name="Rectángulo: esquinas redondeadas 4">
             <a:extLst>
               <a:ext uri="{FF2B5EF4-FFF2-40B4-BE49-F238E27FC236}">
-                <a16:creationId xmlns:a16="http://schemas.microsoft.com/office/drawing/2014/main" id="{17C06495-A4E4-1550-2896-9DA0D0108873}"/>
+                <a16:creationId xmlns:a16="http://schemas.microsoft.com/office/drawing/2014/main" id="{17CEA027-1CF4-64D0-C7A3-4234DEF651E7}"/>
               </a:ext>
             </a:extLst>
           </p:cNvPr>
@@ -11593,7 +11593,7 @@
           <p:cNvPr id="6" name="CuadroTexto 5">
             <a:extLst>
               <a:ext uri="{FF2B5EF4-FFF2-40B4-BE49-F238E27FC236}">
-                <a16:creationId xmlns:a16="http://schemas.microsoft.com/office/drawing/2014/main" id="{42EFF471-8EFC-84EC-BCB5-3096366249FD}"/>
+                <a16:creationId xmlns:a16="http://schemas.microsoft.com/office/drawing/2014/main" id="{CC1888A3-3A4F-1D68-A197-FDF057B2C713}"/>
               </a:ext>
             </a:extLst>
           </p:cNvPr>
@@ -11633,7 +11633,7 @@
           <p:cNvPr id="7" name="CuadroTexto 6">
             <a:extLst>
               <a:ext uri="{FF2B5EF4-FFF2-40B4-BE49-F238E27FC236}">
-                <a16:creationId xmlns:a16="http://schemas.microsoft.com/office/drawing/2014/main" id="{36DAEDEA-D504-B0E3-6717-DC1BDC86404A}"/>
+                <a16:creationId xmlns:a16="http://schemas.microsoft.com/office/drawing/2014/main" id="{1793028D-CA88-DB07-AD8E-8D4F835B7B10}"/>
               </a:ext>
             </a:extLst>
           </p:cNvPr>
@@ -11673,7 +11673,7 @@
           <p:cNvPr id="8" name="Rectángulo: esquinas redondeadas 7">
             <a:extLst>
               <a:ext uri="{FF2B5EF4-FFF2-40B4-BE49-F238E27FC236}">
-                <a16:creationId xmlns:a16="http://schemas.microsoft.com/office/drawing/2014/main" id="{1BA7AAAC-B458-3E5B-461A-2FD52BE81980}"/>
+                <a16:creationId xmlns:a16="http://schemas.microsoft.com/office/drawing/2014/main" id="{4A558677-C866-62A1-1E71-993B4D95E4F2}"/>
               </a:ext>
             </a:extLst>
           </p:cNvPr>
@@ -11727,7 +11727,7 @@
           <p:cNvPr id="9" name="CuadroTexto 8">
             <a:extLst>
               <a:ext uri="{FF2B5EF4-FFF2-40B4-BE49-F238E27FC236}">
-                <a16:creationId xmlns:a16="http://schemas.microsoft.com/office/drawing/2014/main" id="{2743EDE1-291D-83D0-5EC5-20CBC69A6DA4}"/>
+                <a16:creationId xmlns:a16="http://schemas.microsoft.com/office/drawing/2014/main" id="{9C67C9A2-9611-E597-A0F4-5F4AF9F0CC03}"/>
               </a:ext>
             </a:extLst>
           </p:cNvPr>
@@ -11767,7 +11767,7 @@
           <p:cNvPr id="10" name="CuadroTexto 9">
             <a:extLst>
               <a:ext uri="{FF2B5EF4-FFF2-40B4-BE49-F238E27FC236}">
-                <a16:creationId xmlns:a16="http://schemas.microsoft.com/office/drawing/2014/main" id="{F4240100-1FDE-723F-3EEE-A537BB373D6F}"/>
+                <a16:creationId xmlns:a16="http://schemas.microsoft.com/office/drawing/2014/main" id="{C138F767-6F11-A4C3-0626-D4CC43D28120}"/>
               </a:ext>
             </a:extLst>
           </p:cNvPr>
@@ -11807,7 +11807,7 @@
           <p:cNvPr id="11" name="Rectángulo: esquinas redondeadas 10">
             <a:extLst>
               <a:ext uri="{FF2B5EF4-FFF2-40B4-BE49-F238E27FC236}">
-                <a16:creationId xmlns:a16="http://schemas.microsoft.com/office/drawing/2014/main" id="{D802EDA8-4287-0BAC-408C-2404BCC2D9EF}"/>
+                <a16:creationId xmlns:a16="http://schemas.microsoft.com/office/drawing/2014/main" id="{BCAD6787-FAA2-14F0-8B25-0946EB1A5B29}"/>
               </a:ext>
             </a:extLst>
           </p:cNvPr>
@@ -11861,7 +11861,7 @@
           <p:cNvPr id="12" name="CuadroTexto 11">
             <a:extLst>
               <a:ext uri="{FF2B5EF4-FFF2-40B4-BE49-F238E27FC236}">
-                <a16:creationId xmlns:a16="http://schemas.microsoft.com/office/drawing/2014/main" id="{010E48B9-43AA-1CDE-BD8D-A06072EB02FF}"/>
+                <a16:creationId xmlns:a16="http://schemas.microsoft.com/office/drawing/2014/main" id="{0AA20422-DC77-CC23-8DC0-1D6A3F3CFA2C}"/>
               </a:ext>
             </a:extLst>
           </p:cNvPr>
@@ -11901,7 +11901,7 @@
           <p:cNvPr id="13" name="CuadroTexto 12">
             <a:extLst>
               <a:ext uri="{FF2B5EF4-FFF2-40B4-BE49-F238E27FC236}">
-                <a16:creationId xmlns:a16="http://schemas.microsoft.com/office/drawing/2014/main" id="{C33D04DF-D4DB-920E-8E59-9BA968219784}"/>
+                <a16:creationId xmlns:a16="http://schemas.microsoft.com/office/drawing/2014/main" id="{3E5312E2-4CD1-2151-1BA8-B07624168BB7}"/>
               </a:ext>
             </a:extLst>
           </p:cNvPr>
@@ -11941,7 +11941,7 @@
           <p:cNvPr id="14" name="Rectángulo: esquinas redondeadas 13">
             <a:extLst>
               <a:ext uri="{FF2B5EF4-FFF2-40B4-BE49-F238E27FC236}">
-                <a16:creationId xmlns:a16="http://schemas.microsoft.com/office/drawing/2014/main" id="{A0AA643C-F3E5-D18C-91F2-2DAA1A4FA014}"/>
+                <a16:creationId xmlns:a16="http://schemas.microsoft.com/office/drawing/2014/main" id="{E81C0679-D03A-6A0D-332A-86A1B1AEC437}"/>
               </a:ext>
             </a:extLst>
           </p:cNvPr>
@@ -11995,7 +11995,7 @@
           <p:cNvPr id="15" name="CuadroTexto 14">
             <a:extLst>
               <a:ext uri="{FF2B5EF4-FFF2-40B4-BE49-F238E27FC236}">
-                <a16:creationId xmlns:a16="http://schemas.microsoft.com/office/drawing/2014/main" id="{0080C4FD-0FBC-6437-20BE-F5B8B213E917}"/>
+                <a16:creationId xmlns:a16="http://schemas.microsoft.com/office/drawing/2014/main" id="{439ED77F-300D-7747-038C-C7235A53130F}"/>
               </a:ext>
             </a:extLst>
           </p:cNvPr>
@@ -12035,7 +12035,7 @@
           <p:cNvPr id="16" name="CuadroTexto 15">
             <a:extLst>
               <a:ext uri="{FF2B5EF4-FFF2-40B4-BE49-F238E27FC236}">
-                <a16:creationId xmlns:a16="http://schemas.microsoft.com/office/drawing/2014/main" id="{9C6CAE58-62EF-43B8-DD30-6B325291064C}"/>
+                <a16:creationId xmlns:a16="http://schemas.microsoft.com/office/drawing/2014/main" id="{38DF6048-8027-8105-AB0D-6A129451598C}"/>
               </a:ext>
             </a:extLst>
           </p:cNvPr>
@@ -12075,7 +12075,7 @@
           <p:cNvPr id="17" name="Rectángulo: esquinas redondeadas 16">
             <a:extLst>
               <a:ext uri="{FF2B5EF4-FFF2-40B4-BE49-F238E27FC236}">
-                <a16:creationId xmlns:a16="http://schemas.microsoft.com/office/drawing/2014/main" id="{6731DF98-6AED-5524-51E0-924ECE61238F}"/>
+                <a16:creationId xmlns:a16="http://schemas.microsoft.com/office/drawing/2014/main" id="{48D4A248-2DAC-2D2D-40DA-A0C272FB9D70}"/>
               </a:ext>
             </a:extLst>
           </p:cNvPr>
@@ -12129,7 +12129,7 @@
           <p:cNvPr id="18" name="CuadroTexto 17">
             <a:extLst>
               <a:ext uri="{FF2B5EF4-FFF2-40B4-BE49-F238E27FC236}">
-                <a16:creationId xmlns:a16="http://schemas.microsoft.com/office/drawing/2014/main" id="{39EF097E-AF1A-0F6F-554C-A59448AD9CCF}"/>
+                <a16:creationId xmlns:a16="http://schemas.microsoft.com/office/drawing/2014/main" id="{2CAEF4FC-B0DA-6EF8-C78D-8022D75BDCAD}"/>
               </a:ext>
             </a:extLst>
           </p:cNvPr>
@@ -12169,7 +12169,7 @@
           <p:cNvPr id="19" name="CuadroTexto 18">
             <a:extLst>
               <a:ext uri="{FF2B5EF4-FFF2-40B4-BE49-F238E27FC236}">
-                <a16:creationId xmlns:a16="http://schemas.microsoft.com/office/drawing/2014/main" id="{19DF365D-C7F0-598F-EC66-AC5AAB5B0A7F}"/>
+                <a16:creationId xmlns:a16="http://schemas.microsoft.com/office/drawing/2014/main" id="{380BBCD7-8522-81A5-53E1-E99DCD41D98F}"/>
               </a:ext>
             </a:extLst>
           </p:cNvPr>
@@ -12209,7 +12209,7 @@
           <p:cNvPr id="20" name="Rectángulo: esquinas redondeadas 19">
             <a:extLst>
               <a:ext uri="{FF2B5EF4-FFF2-40B4-BE49-F238E27FC236}">
-                <a16:creationId xmlns:a16="http://schemas.microsoft.com/office/drawing/2014/main" id="{669B39C3-1217-FE7E-C31D-618BC248FBEA}"/>
+                <a16:creationId xmlns:a16="http://schemas.microsoft.com/office/drawing/2014/main" id="{7FC02C4D-DBFF-D14A-7FC5-DF3BBB26A494}"/>
               </a:ext>
             </a:extLst>
           </p:cNvPr>
@@ -12263,7 +12263,7 @@
           <p:cNvPr id="21" name="CuadroTexto 20">
             <a:extLst>
               <a:ext uri="{FF2B5EF4-FFF2-40B4-BE49-F238E27FC236}">
-                <a16:creationId xmlns:a16="http://schemas.microsoft.com/office/drawing/2014/main" id="{AF0D5959-5B01-4D0B-3964-25ADBEB33461}"/>
+                <a16:creationId xmlns:a16="http://schemas.microsoft.com/office/drawing/2014/main" id="{81735565-1B92-5540-5026-4E57A8C43268}"/>
               </a:ext>
             </a:extLst>
           </p:cNvPr>
@@ -12303,7 +12303,7 @@
           <p:cNvPr id="22" name="CuadroTexto 21">
             <a:extLst>
               <a:ext uri="{FF2B5EF4-FFF2-40B4-BE49-F238E27FC236}">
-                <a16:creationId xmlns:a16="http://schemas.microsoft.com/office/drawing/2014/main" id="{CA8B7B50-67E3-B823-CBBD-B7BDA19192B7}"/>
+                <a16:creationId xmlns:a16="http://schemas.microsoft.com/office/drawing/2014/main" id="{772E63E3-B570-3617-DDA5-F26E392E9721}"/>
               </a:ext>
             </a:extLst>
           </p:cNvPr>
@@ -12341,7 +12341,7 @@
     </p:spTree>
     <p:extLst>
       <p:ext uri="{BB962C8B-B14F-4D97-AF65-F5344CB8AC3E}">
-        <p14:creationId xmlns:p14="http://schemas.microsoft.com/office/powerpoint/2010/main" val="922881415"/>
+        <p14:creationId xmlns:p14="http://schemas.microsoft.com/office/powerpoint/2010/main" val="1093037199"/>
       </p:ext>
     </p:extLst>
   </p:cSld>

--- a/docs/presentacion-defensa-final.pptx
+++ b/docs/presentacion-defensa-final.pptx
@@ -146,7 +146,7 @@
           <p:cNvPr id="2" name="Título 1">
             <a:extLst>
               <a:ext uri="{FF2B5EF4-FFF2-40B4-BE49-F238E27FC236}">
-                <a16:creationId xmlns:a16="http://schemas.microsoft.com/office/drawing/2014/main" id="{8A6B0814-BF45-E573-A6DD-089C6E430088}"/>
+                <a16:creationId xmlns:a16="http://schemas.microsoft.com/office/drawing/2014/main" id="{42059031-D005-033F-527C-2532EAFDFE18}"/>
               </a:ext>
             </a:extLst>
           </p:cNvPr>
@@ -183,7 +183,7 @@
           <p:cNvPr id="3" name="Subtítulo 2">
             <a:extLst>
               <a:ext uri="{FF2B5EF4-FFF2-40B4-BE49-F238E27FC236}">
-                <a16:creationId xmlns:a16="http://schemas.microsoft.com/office/drawing/2014/main" id="{59A3F60D-381D-A44B-0A93-8C52096248EC}"/>
+                <a16:creationId xmlns:a16="http://schemas.microsoft.com/office/drawing/2014/main" id="{7151C16C-7DD0-8D00-A6C2-83E337E6DC55}"/>
               </a:ext>
             </a:extLst>
           </p:cNvPr>
@@ -253,7 +253,7 @@
           <p:cNvPr id="4" name="Marcador de fecha 3">
             <a:extLst>
               <a:ext uri="{FF2B5EF4-FFF2-40B4-BE49-F238E27FC236}">
-                <a16:creationId xmlns:a16="http://schemas.microsoft.com/office/drawing/2014/main" id="{89A48920-AADB-D026-B9B2-9DA509FB0A60}"/>
+                <a16:creationId xmlns:a16="http://schemas.microsoft.com/office/drawing/2014/main" id="{FE6FB086-1FAA-53BE-9924-178890CA8D97}"/>
               </a:ext>
             </a:extLst>
           </p:cNvPr>
@@ -269,9 +269,9 @@
           <a:bodyPr/>
           <a:lstStyle/>
           <a:p>
-            <a:fld id="{5EA62A27-1D85-48AD-90C3-37B244257CF0}" type="datetimeFigureOut">
+            <a:fld id="{9835FBA3-5475-4EC2-B841-90BC3B1D7D90}" type="datetimeFigureOut">
               <a:rPr lang="es-ES" smtClean="0"/>
-              <a:t>19/05/2026</a:t>
+              <a:t>22/05/2026</a:t>
             </a:fld>
             <a:endParaRPr lang="es-ES"/>
           </a:p>
@@ -282,7 +282,7 @@
           <p:cNvPr id="5" name="Marcador de pie de página 4">
             <a:extLst>
               <a:ext uri="{FF2B5EF4-FFF2-40B4-BE49-F238E27FC236}">
-                <a16:creationId xmlns:a16="http://schemas.microsoft.com/office/drawing/2014/main" id="{58A59491-3B6A-48C9-5EEB-7EB818871F5B}"/>
+                <a16:creationId xmlns:a16="http://schemas.microsoft.com/office/drawing/2014/main" id="{883E1A23-60DF-8CF4-4D5A-FE5F192807DC}"/>
               </a:ext>
             </a:extLst>
           </p:cNvPr>
@@ -307,7 +307,7 @@
           <p:cNvPr id="6" name="Marcador de número de diapositiva 5">
             <a:extLst>
               <a:ext uri="{FF2B5EF4-FFF2-40B4-BE49-F238E27FC236}">
-                <a16:creationId xmlns:a16="http://schemas.microsoft.com/office/drawing/2014/main" id="{DD81804F-C69B-B021-BB20-0F4660F398D0}"/>
+                <a16:creationId xmlns:a16="http://schemas.microsoft.com/office/drawing/2014/main" id="{5FC06098-BE92-3166-B3FF-BB3D6B629F1B}"/>
               </a:ext>
             </a:extLst>
           </p:cNvPr>
@@ -323,7 +323,7 @@
           <a:bodyPr/>
           <a:lstStyle/>
           <a:p>
-            <a:fld id="{357192D4-5BD9-41C8-9EE5-942CB5B156C9}" type="slidenum">
+            <a:fld id="{96B8D56F-A2A2-43A0-8CA7-B1F0D0BAB8F0}" type="slidenum">
               <a:rPr lang="es-ES" smtClean="0"/>
               <a:t>‹Nº›</a:t>
             </a:fld>
@@ -334,7 +334,7 @@
     </p:spTree>
     <p:extLst>
       <p:ext uri="{BB962C8B-B14F-4D97-AF65-F5344CB8AC3E}">
-        <p14:creationId xmlns:p14="http://schemas.microsoft.com/office/powerpoint/2010/main" val="1680099888"/>
+        <p14:creationId xmlns:p14="http://schemas.microsoft.com/office/powerpoint/2010/main" val="1496105625"/>
       </p:ext>
     </p:extLst>
   </p:cSld>
@@ -366,7 +366,7 @@
           <p:cNvPr id="2" name="Título 1">
             <a:extLst>
               <a:ext uri="{FF2B5EF4-FFF2-40B4-BE49-F238E27FC236}">
-                <a16:creationId xmlns:a16="http://schemas.microsoft.com/office/drawing/2014/main" id="{FDABD5DC-78B2-1D43-6817-084E7D311BE4}"/>
+                <a16:creationId xmlns:a16="http://schemas.microsoft.com/office/drawing/2014/main" id="{BD306D51-8173-C58C-B3E7-ABF0DFCA1D23}"/>
               </a:ext>
             </a:extLst>
           </p:cNvPr>
@@ -394,7 +394,7 @@
           <p:cNvPr id="3" name="Marcador de texto vertical 2">
             <a:extLst>
               <a:ext uri="{FF2B5EF4-FFF2-40B4-BE49-F238E27FC236}">
-                <a16:creationId xmlns:a16="http://schemas.microsoft.com/office/drawing/2014/main" id="{683029C5-5484-68D1-9988-6F026988B4D3}"/>
+                <a16:creationId xmlns:a16="http://schemas.microsoft.com/office/drawing/2014/main" id="{62D32270-BCDC-E7C3-8E2C-768709CDED75}"/>
               </a:ext>
             </a:extLst>
           </p:cNvPr>
@@ -451,7 +451,7 @@
           <p:cNvPr id="4" name="Marcador de fecha 3">
             <a:extLst>
               <a:ext uri="{FF2B5EF4-FFF2-40B4-BE49-F238E27FC236}">
-                <a16:creationId xmlns:a16="http://schemas.microsoft.com/office/drawing/2014/main" id="{D40ACC64-DF2E-FB98-BEE2-33C18881B76B}"/>
+                <a16:creationId xmlns:a16="http://schemas.microsoft.com/office/drawing/2014/main" id="{6E3FA4E6-A1B5-50BD-5294-F37E568BE673}"/>
               </a:ext>
             </a:extLst>
           </p:cNvPr>
@@ -467,9 +467,9 @@
           <a:bodyPr/>
           <a:lstStyle/>
           <a:p>
-            <a:fld id="{5EA62A27-1D85-48AD-90C3-37B244257CF0}" type="datetimeFigureOut">
+            <a:fld id="{9835FBA3-5475-4EC2-B841-90BC3B1D7D90}" type="datetimeFigureOut">
               <a:rPr lang="es-ES" smtClean="0"/>
-              <a:t>19/05/2026</a:t>
+              <a:t>22/05/2026</a:t>
             </a:fld>
             <a:endParaRPr lang="es-ES"/>
           </a:p>
@@ -480,7 +480,7 @@
           <p:cNvPr id="5" name="Marcador de pie de página 4">
             <a:extLst>
               <a:ext uri="{FF2B5EF4-FFF2-40B4-BE49-F238E27FC236}">
-                <a16:creationId xmlns:a16="http://schemas.microsoft.com/office/drawing/2014/main" id="{00E13036-6346-F20B-D4DD-22038DD9C5DB}"/>
+                <a16:creationId xmlns:a16="http://schemas.microsoft.com/office/drawing/2014/main" id="{768C7386-B9E3-2184-B862-9C5190870FFC}"/>
               </a:ext>
             </a:extLst>
           </p:cNvPr>
@@ -505,7 +505,7 @@
           <p:cNvPr id="6" name="Marcador de número de diapositiva 5">
             <a:extLst>
               <a:ext uri="{FF2B5EF4-FFF2-40B4-BE49-F238E27FC236}">
-                <a16:creationId xmlns:a16="http://schemas.microsoft.com/office/drawing/2014/main" id="{7B602EB5-B081-CE0E-966B-C70200BEEF97}"/>
+                <a16:creationId xmlns:a16="http://schemas.microsoft.com/office/drawing/2014/main" id="{D8DFF596-B1AB-1310-787F-3A0960306EA0}"/>
               </a:ext>
             </a:extLst>
           </p:cNvPr>
@@ -521,7 +521,7 @@
           <a:bodyPr/>
           <a:lstStyle/>
           <a:p>
-            <a:fld id="{357192D4-5BD9-41C8-9EE5-942CB5B156C9}" type="slidenum">
+            <a:fld id="{96B8D56F-A2A2-43A0-8CA7-B1F0D0BAB8F0}" type="slidenum">
               <a:rPr lang="es-ES" smtClean="0"/>
               <a:t>‹Nº›</a:t>
             </a:fld>
@@ -532,7 +532,7 @@
     </p:spTree>
     <p:extLst>
       <p:ext uri="{BB962C8B-B14F-4D97-AF65-F5344CB8AC3E}">
-        <p14:creationId xmlns:p14="http://schemas.microsoft.com/office/powerpoint/2010/main" val="2447015768"/>
+        <p14:creationId xmlns:p14="http://schemas.microsoft.com/office/powerpoint/2010/main" val="3173428753"/>
       </p:ext>
     </p:extLst>
   </p:cSld>
@@ -564,7 +564,7 @@
           <p:cNvPr id="2" name="Título vertical 1">
             <a:extLst>
               <a:ext uri="{FF2B5EF4-FFF2-40B4-BE49-F238E27FC236}">
-                <a16:creationId xmlns:a16="http://schemas.microsoft.com/office/drawing/2014/main" id="{D4A42644-ABFA-58B7-9710-0C222F7690F7}"/>
+                <a16:creationId xmlns:a16="http://schemas.microsoft.com/office/drawing/2014/main" id="{668F0699-4FB4-04B4-D93F-03A917E8398C}"/>
               </a:ext>
             </a:extLst>
           </p:cNvPr>
@@ -597,7 +597,7 @@
           <p:cNvPr id="3" name="Marcador de texto vertical 2">
             <a:extLst>
               <a:ext uri="{FF2B5EF4-FFF2-40B4-BE49-F238E27FC236}">
-                <a16:creationId xmlns:a16="http://schemas.microsoft.com/office/drawing/2014/main" id="{602D70CA-E9E5-7B05-1516-9406222EE311}"/>
+                <a16:creationId xmlns:a16="http://schemas.microsoft.com/office/drawing/2014/main" id="{6D784313-848C-71FB-5349-2423CBF41DCB}"/>
               </a:ext>
             </a:extLst>
           </p:cNvPr>
@@ -659,7 +659,7 @@
           <p:cNvPr id="4" name="Marcador de fecha 3">
             <a:extLst>
               <a:ext uri="{FF2B5EF4-FFF2-40B4-BE49-F238E27FC236}">
-                <a16:creationId xmlns:a16="http://schemas.microsoft.com/office/drawing/2014/main" id="{9232D4B7-CBA2-CC7D-E399-72CB728BBE05}"/>
+                <a16:creationId xmlns:a16="http://schemas.microsoft.com/office/drawing/2014/main" id="{BC8121BE-A98A-F3AA-B5AA-600E444987A5}"/>
               </a:ext>
             </a:extLst>
           </p:cNvPr>
@@ -675,9 +675,9 @@
           <a:bodyPr/>
           <a:lstStyle/>
           <a:p>
-            <a:fld id="{5EA62A27-1D85-48AD-90C3-37B244257CF0}" type="datetimeFigureOut">
+            <a:fld id="{9835FBA3-5475-4EC2-B841-90BC3B1D7D90}" type="datetimeFigureOut">
               <a:rPr lang="es-ES" smtClean="0"/>
-              <a:t>19/05/2026</a:t>
+              <a:t>22/05/2026</a:t>
             </a:fld>
             <a:endParaRPr lang="es-ES"/>
           </a:p>
@@ -688,7 +688,7 @@
           <p:cNvPr id="5" name="Marcador de pie de página 4">
             <a:extLst>
               <a:ext uri="{FF2B5EF4-FFF2-40B4-BE49-F238E27FC236}">
-                <a16:creationId xmlns:a16="http://schemas.microsoft.com/office/drawing/2014/main" id="{323BAB20-BD10-B4FA-2237-2D47800633F3}"/>
+                <a16:creationId xmlns:a16="http://schemas.microsoft.com/office/drawing/2014/main" id="{FB3D6D49-535B-3B15-0DAC-F06C08FECDC4}"/>
               </a:ext>
             </a:extLst>
           </p:cNvPr>
@@ -713,7 +713,7 @@
           <p:cNvPr id="6" name="Marcador de número de diapositiva 5">
             <a:extLst>
               <a:ext uri="{FF2B5EF4-FFF2-40B4-BE49-F238E27FC236}">
-                <a16:creationId xmlns:a16="http://schemas.microsoft.com/office/drawing/2014/main" id="{F3F63C59-FBCF-9096-30B2-872FBE51DFA4}"/>
+                <a16:creationId xmlns:a16="http://schemas.microsoft.com/office/drawing/2014/main" id="{FE43E37E-E97A-9F12-B131-28CC09EB01A9}"/>
               </a:ext>
             </a:extLst>
           </p:cNvPr>
@@ -729,7 +729,7 @@
           <a:bodyPr/>
           <a:lstStyle/>
           <a:p>
-            <a:fld id="{357192D4-5BD9-41C8-9EE5-942CB5B156C9}" type="slidenum">
+            <a:fld id="{96B8D56F-A2A2-43A0-8CA7-B1F0D0BAB8F0}" type="slidenum">
               <a:rPr lang="es-ES" smtClean="0"/>
               <a:t>‹Nº›</a:t>
             </a:fld>
@@ -740,7 +740,7 @@
     </p:spTree>
     <p:extLst>
       <p:ext uri="{BB962C8B-B14F-4D97-AF65-F5344CB8AC3E}">
-        <p14:creationId xmlns:p14="http://schemas.microsoft.com/office/powerpoint/2010/main" val="406580436"/>
+        <p14:creationId xmlns:p14="http://schemas.microsoft.com/office/powerpoint/2010/main" val="764455321"/>
       </p:ext>
     </p:extLst>
   </p:cSld>
@@ -772,7 +772,7 @@
           <p:cNvPr id="2" name="Título 1">
             <a:extLst>
               <a:ext uri="{FF2B5EF4-FFF2-40B4-BE49-F238E27FC236}">
-                <a16:creationId xmlns:a16="http://schemas.microsoft.com/office/drawing/2014/main" id="{9EA4115C-5D06-4D7C-B8EC-F9D77664F195}"/>
+                <a16:creationId xmlns:a16="http://schemas.microsoft.com/office/drawing/2014/main" id="{52D8F515-57CD-7DBC-3D4C-239575297B07}"/>
               </a:ext>
             </a:extLst>
           </p:cNvPr>
@@ -800,7 +800,7 @@
           <p:cNvPr id="3" name="Marcador de contenido 2">
             <a:extLst>
               <a:ext uri="{FF2B5EF4-FFF2-40B4-BE49-F238E27FC236}">
-                <a16:creationId xmlns:a16="http://schemas.microsoft.com/office/drawing/2014/main" id="{C78EC942-61D9-112C-287C-90292BD32500}"/>
+                <a16:creationId xmlns:a16="http://schemas.microsoft.com/office/drawing/2014/main" id="{8350FE39-63BD-D9B8-1666-A34EA3767007}"/>
               </a:ext>
             </a:extLst>
           </p:cNvPr>
@@ -857,7 +857,7 @@
           <p:cNvPr id="4" name="Marcador de fecha 3">
             <a:extLst>
               <a:ext uri="{FF2B5EF4-FFF2-40B4-BE49-F238E27FC236}">
-                <a16:creationId xmlns:a16="http://schemas.microsoft.com/office/drawing/2014/main" id="{25ED1F93-2489-6D68-93DB-F2D5E5952375}"/>
+                <a16:creationId xmlns:a16="http://schemas.microsoft.com/office/drawing/2014/main" id="{7AEE7F05-89E6-9588-62F7-49D45E1C6BD7}"/>
               </a:ext>
             </a:extLst>
           </p:cNvPr>
@@ -873,9 +873,9 @@
           <a:bodyPr/>
           <a:lstStyle/>
           <a:p>
-            <a:fld id="{5EA62A27-1D85-48AD-90C3-37B244257CF0}" type="datetimeFigureOut">
+            <a:fld id="{9835FBA3-5475-4EC2-B841-90BC3B1D7D90}" type="datetimeFigureOut">
               <a:rPr lang="es-ES" smtClean="0"/>
-              <a:t>19/05/2026</a:t>
+              <a:t>22/05/2026</a:t>
             </a:fld>
             <a:endParaRPr lang="es-ES"/>
           </a:p>
@@ -886,7 +886,7 @@
           <p:cNvPr id="5" name="Marcador de pie de página 4">
             <a:extLst>
               <a:ext uri="{FF2B5EF4-FFF2-40B4-BE49-F238E27FC236}">
-                <a16:creationId xmlns:a16="http://schemas.microsoft.com/office/drawing/2014/main" id="{17CE7D42-E5A1-356C-3F58-B627C49AA99F}"/>
+                <a16:creationId xmlns:a16="http://schemas.microsoft.com/office/drawing/2014/main" id="{CD0D6C44-66D1-D0F3-A664-59E365E86072}"/>
               </a:ext>
             </a:extLst>
           </p:cNvPr>
@@ -911,7 +911,7 @@
           <p:cNvPr id="6" name="Marcador de número de diapositiva 5">
             <a:extLst>
               <a:ext uri="{FF2B5EF4-FFF2-40B4-BE49-F238E27FC236}">
-                <a16:creationId xmlns:a16="http://schemas.microsoft.com/office/drawing/2014/main" id="{0FEFE665-0B92-8F3C-FF33-3B8D22EB1153}"/>
+                <a16:creationId xmlns:a16="http://schemas.microsoft.com/office/drawing/2014/main" id="{D6562176-8E15-94A2-29E4-2DA37DAD83BC}"/>
               </a:ext>
             </a:extLst>
           </p:cNvPr>
@@ -927,7 +927,7 @@
           <a:bodyPr/>
           <a:lstStyle/>
           <a:p>
-            <a:fld id="{357192D4-5BD9-41C8-9EE5-942CB5B156C9}" type="slidenum">
+            <a:fld id="{96B8D56F-A2A2-43A0-8CA7-B1F0D0BAB8F0}" type="slidenum">
               <a:rPr lang="es-ES" smtClean="0"/>
               <a:t>‹Nº›</a:t>
             </a:fld>
@@ -938,7 +938,7 @@
     </p:spTree>
     <p:extLst>
       <p:ext uri="{BB962C8B-B14F-4D97-AF65-F5344CB8AC3E}">
-        <p14:creationId xmlns:p14="http://schemas.microsoft.com/office/powerpoint/2010/main" val="1104774924"/>
+        <p14:creationId xmlns:p14="http://schemas.microsoft.com/office/powerpoint/2010/main" val="87129758"/>
       </p:ext>
     </p:extLst>
   </p:cSld>
@@ -970,7 +970,7 @@
           <p:cNvPr id="2" name="Título 1">
             <a:extLst>
               <a:ext uri="{FF2B5EF4-FFF2-40B4-BE49-F238E27FC236}">
-                <a16:creationId xmlns:a16="http://schemas.microsoft.com/office/drawing/2014/main" id="{028D4A99-9A29-200B-6DD7-FACD52DCDD13}"/>
+                <a16:creationId xmlns:a16="http://schemas.microsoft.com/office/drawing/2014/main" id="{89CAF63F-9D1A-D067-ADA4-3D4FD9ABC134}"/>
               </a:ext>
             </a:extLst>
           </p:cNvPr>
@@ -1007,7 +1007,7 @@
           <p:cNvPr id="3" name="Marcador de texto 2">
             <a:extLst>
               <a:ext uri="{FF2B5EF4-FFF2-40B4-BE49-F238E27FC236}">
-                <a16:creationId xmlns:a16="http://schemas.microsoft.com/office/drawing/2014/main" id="{993EBD5B-4058-DD2F-D0AB-1FD2A62C2E46}"/>
+                <a16:creationId xmlns:a16="http://schemas.microsoft.com/office/drawing/2014/main" id="{8C293125-11DB-977A-26FC-657AEE91324B}"/>
               </a:ext>
             </a:extLst>
           </p:cNvPr>
@@ -1032,7 +1032,7 @@
               <a:defRPr sz="2400">
                 <a:solidFill>
                   <a:schemeClr val="tx1">
-                    <a:tint val="82000"/>
+                    <a:tint val="75000"/>
                   </a:schemeClr>
                 </a:solidFill>
               </a:defRPr>
@@ -1042,7 +1042,7 @@
               <a:defRPr sz="2000">
                 <a:solidFill>
                   <a:schemeClr val="tx1">
-                    <a:tint val="82000"/>
+                    <a:tint val="75000"/>
                   </a:schemeClr>
                 </a:solidFill>
               </a:defRPr>
@@ -1052,7 +1052,7 @@
               <a:defRPr sz="1800">
                 <a:solidFill>
                   <a:schemeClr val="tx1">
-                    <a:tint val="82000"/>
+                    <a:tint val="75000"/>
                   </a:schemeClr>
                 </a:solidFill>
               </a:defRPr>
@@ -1062,7 +1062,7 @@
               <a:defRPr sz="1600">
                 <a:solidFill>
                   <a:schemeClr val="tx1">
-                    <a:tint val="82000"/>
+                    <a:tint val="75000"/>
                   </a:schemeClr>
                 </a:solidFill>
               </a:defRPr>
@@ -1072,7 +1072,7 @@
               <a:defRPr sz="1600">
                 <a:solidFill>
                   <a:schemeClr val="tx1">
-                    <a:tint val="82000"/>
+                    <a:tint val="75000"/>
                   </a:schemeClr>
                 </a:solidFill>
               </a:defRPr>
@@ -1082,7 +1082,7 @@
               <a:defRPr sz="1600">
                 <a:solidFill>
                   <a:schemeClr val="tx1">
-                    <a:tint val="82000"/>
+                    <a:tint val="75000"/>
                   </a:schemeClr>
                 </a:solidFill>
               </a:defRPr>
@@ -1092,7 +1092,7 @@
               <a:defRPr sz="1600">
                 <a:solidFill>
                   <a:schemeClr val="tx1">
-                    <a:tint val="82000"/>
+                    <a:tint val="75000"/>
                   </a:schemeClr>
                 </a:solidFill>
               </a:defRPr>
@@ -1102,7 +1102,7 @@
               <a:defRPr sz="1600">
                 <a:solidFill>
                   <a:schemeClr val="tx1">
-                    <a:tint val="82000"/>
+                    <a:tint val="75000"/>
                   </a:schemeClr>
                 </a:solidFill>
               </a:defRPr>
@@ -1112,7 +1112,7 @@
               <a:defRPr sz="1600">
                 <a:solidFill>
                   <a:schemeClr val="tx1">
-                    <a:tint val="82000"/>
+                    <a:tint val="75000"/>
                   </a:schemeClr>
                 </a:solidFill>
               </a:defRPr>
@@ -1132,7 +1132,7 @@
           <p:cNvPr id="4" name="Marcador de fecha 3">
             <a:extLst>
               <a:ext uri="{FF2B5EF4-FFF2-40B4-BE49-F238E27FC236}">
-                <a16:creationId xmlns:a16="http://schemas.microsoft.com/office/drawing/2014/main" id="{6C9DC1F3-D5E5-CCDC-9020-669CCE68476D}"/>
+                <a16:creationId xmlns:a16="http://schemas.microsoft.com/office/drawing/2014/main" id="{FE6765E1-76E4-3BD3-54A5-6945A371A7C2}"/>
               </a:ext>
             </a:extLst>
           </p:cNvPr>
@@ -1148,9 +1148,9 @@
           <a:bodyPr/>
           <a:lstStyle/>
           <a:p>
-            <a:fld id="{5EA62A27-1D85-48AD-90C3-37B244257CF0}" type="datetimeFigureOut">
+            <a:fld id="{9835FBA3-5475-4EC2-B841-90BC3B1D7D90}" type="datetimeFigureOut">
               <a:rPr lang="es-ES" smtClean="0"/>
-              <a:t>19/05/2026</a:t>
+              <a:t>22/05/2026</a:t>
             </a:fld>
             <a:endParaRPr lang="es-ES"/>
           </a:p>
@@ -1161,7 +1161,7 @@
           <p:cNvPr id="5" name="Marcador de pie de página 4">
             <a:extLst>
               <a:ext uri="{FF2B5EF4-FFF2-40B4-BE49-F238E27FC236}">
-                <a16:creationId xmlns:a16="http://schemas.microsoft.com/office/drawing/2014/main" id="{EB357624-B5DB-F2A1-7FA2-7C221A5F314B}"/>
+                <a16:creationId xmlns:a16="http://schemas.microsoft.com/office/drawing/2014/main" id="{41CD489E-74B7-9355-AED2-98A117A8FA8C}"/>
               </a:ext>
             </a:extLst>
           </p:cNvPr>
@@ -1186,7 +1186,7 @@
           <p:cNvPr id="6" name="Marcador de número de diapositiva 5">
             <a:extLst>
               <a:ext uri="{FF2B5EF4-FFF2-40B4-BE49-F238E27FC236}">
-                <a16:creationId xmlns:a16="http://schemas.microsoft.com/office/drawing/2014/main" id="{750C7AE2-5B81-9A50-05AC-1B614CC70971}"/>
+                <a16:creationId xmlns:a16="http://schemas.microsoft.com/office/drawing/2014/main" id="{C579FC5E-83F4-9070-F1AD-CABEC30003C5}"/>
               </a:ext>
             </a:extLst>
           </p:cNvPr>
@@ -1202,7 +1202,7 @@
           <a:bodyPr/>
           <a:lstStyle/>
           <a:p>
-            <a:fld id="{357192D4-5BD9-41C8-9EE5-942CB5B156C9}" type="slidenum">
+            <a:fld id="{96B8D56F-A2A2-43A0-8CA7-B1F0D0BAB8F0}" type="slidenum">
               <a:rPr lang="es-ES" smtClean="0"/>
               <a:t>‹Nº›</a:t>
             </a:fld>
@@ -1213,7 +1213,7 @@
     </p:spTree>
     <p:extLst>
       <p:ext uri="{BB962C8B-B14F-4D97-AF65-F5344CB8AC3E}">
-        <p14:creationId xmlns:p14="http://schemas.microsoft.com/office/powerpoint/2010/main" val="4052687921"/>
+        <p14:creationId xmlns:p14="http://schemas.microsoft.com/office/powerpoint/2010/main" val="3470828759"/>
       </p:ext>
     </p:extLst>
   </p:cSld>
@@ -1245,7 +1245,7 @@
           <p:cNvPr id="2" name="Título 1">
             <a:extLst>
               <a:ext uri="{FF2B5EF4-FFF2-40B4-BE49-F238E27FC236}">
-                <a16:creationId xmlns:a16="http://schemas.microsoft.com/office/drawing/2014/main" id="{1A68C001-776F-00A0-A9A3-C5FC6137A0A3}"/>
+                <a16:creationId xmlns:a16="http://schemas.microsoft.com/office/drawing/2014/main" id="{0723E889-42FE-AAE2-FD9B-D46615EC2921}"/>
               </a:ext>
             </a:extLst>
           </p:cNvPr>
@@ -1273,7 +1273,7 @@
           <p:cNvPr id="3" name="Marcador de contenido 2">
             <a:extLst>
               <a:ext uri="{FF2B5EF4-FFF2-40B4-BE49-F238E27FC236}">
-                <a16:creationId xmlns:a16="http://schemas.microsoft.com/office/drawing/2014/main" id="{00E2DC49-A2BE-ECC8-0798-6178D2DC12B9}"/>
+                <a16:creationId xmlns:a16="http://schemas.microsoft.com/office/drawing/2014/main" id="{29DC9890-8552-BC1F-A811-E8447EBA79B1}"/>
               </a:ext>
             </a:extLst>
           </p:cNvPr>
@@ -1335,7 +1335,7 @@
           <p:cNvPr id="4" name="Marcador de contenido 3">
             <a:extLst>
               <a:ext uri="{FF2B5EF4-FFF2-40B4-BE49-F238E27FC236}">
-                <a16:creationId xmlns:a16="http://schemas.microsoft.com/office/drawing/2014/main" id="{9659D0DA-D6BE-FBD5-4AAA-FDDE91CC4908}"/>
+                <a16:creationId xmlns:a16="http://schemas.microsoft.com/office/drawing/2014/main" id="{ADC1DE10-CBFE-A5B5-E50D-5F4A032A97A7}"/>
               </a:ext>
             </a:extLst>
           </p:cNvPr>
@@ -1397,7 +1397,7 @@
           <p:cNvPr id="5" name="Marcador de fecha 4">
             <a:extLst>
               <a:ext uri="{FF2B5EF4-FFF2-40B4-BE49-F238E27FC236}">
-                <a16:creationId xmlns:a16="http://schemas.microsoft.com/office/drawing/2014/main" id="{F2A06CC8-F91D-7586-85D6-F5C5668B2226}"/>
+                <a16:creationId xmlns:a16="http://schemas.microsoft.com/office/drawing/2014/main" id="{8572ABA5-0A0C-5646-43BD-F215AC9EBFCD}"/>
               </a:ext>
             </a:extLst>
           </p:cNvPr>
@@ -1413,9 +1413,9 @@
           <a:bodyPr/>
           <a:lstStyle/>
           <a:p>
-            <a:fld id="{5EA62A27-1D85-48AD-90C3-37B244257CF0}" type="datetimeFigureOut">
+            <a:fld id="{9835FBA3-5475-4EC2-B841-90BC3B1D7D90}" type="datetimeFigureOut">
               <a:rPr lang="es-ES" smtClean="0"/>
-              <a:t>19/05/2026</a:t>
+              <a:t>22/05/2026</a:t>
             </a:fld>
             <a:endParaRPr lang="es-ES"/>
           </a:p>
@@ -1426,7 +1426,7 @@
           <p:cNvPr id="6" name="Marcador de pie de página 5">
             <a:extLst>
               <a:ext uri="{FF2B5EF4-FFF2-40B4-BE49-F238E27FC236}">
-                <a16:creationId xmlns:a16="http://schemas.microsoft.com/office/drawing/2014/main" id="{0A1CA324-ED71-21AE-613B-F8A58D66EDC9}"/>
+                <a16:creationId xmlns:a16="http://schemas.microsoft.com/office/drawing/2014/main" id="{4902B53A-25F7-4386-F7F2-8D668F480001}"/>
               </a:ext>
             </a:extLst>
           </p:cNvPr>
@@ -1451,7 +1451,7 @@
           <p:cNvPr id="7" name="Marcador de número de diapositiva 6">
             <a:extLst>
               <a:ext uri="{FF2B5EF4-FFF2-40B4-BE49-F238E27FC236}">
-                <a16:creationId xmlns:a16="http://schemas.microsoft.com/office/drawing/2014/main" id="{826749BC-6AAC-7FA0-BBB3-6F22C2074C11}"/>
+                <a16:creationId xmlns:a16="http://schemas.microsoft.com/office/drawing/2014/main" id="{B7C05165-9A70-E739-43B0-ABCC852AF1D2}"/>
               </a:ext>
             </a:extLst>
           </p:cNvPr>
@@ -1467,7 +1467,7 @@
           <a:bodyPr/>
           <a:lstStyle/>
           <a:p>
-            <a:fld id="{357192D4-5BD9-41C8-9EE5-942CB5B156C9}" type="slidenum">
+            <a:fld id="{96B8D56F-A2A2-43A0-8CA7-B1F0D0BAB8F0}" type="slidenum">
               <a:rPr lang="es-ES" smtClean="0"/>
               <a:t>‹Nº›</a:t>
             </a:fld>
@@ -1478,7 +1478,7 @@
     </p:spTree>
     <p:extLst>
       <p:ext uri="{BB962C8B-B14F-4D97-AF65-F5344CB8AC3E}">
-        <p14:creationId xmlns:p14="http://schemas.microsoft.com/office/powerpoint/2010/main" val="3573210095"/>
+        <p14:creationId xmlns:p14="http://schemas.microsoft.com/office/powerpoint/2010/main" val="795092294"/>
       </p:ext>
     </p:extLst>
   </p:cSld>
@@ -1510,7 +1510,7 @@
           <p:cNvPr id="2" name="Título 1">
             <a:extLst>
               <a:ext uri="{FF2B5EF4-FFF2-40B4-BE49-F238E27FC236}">
-                <a16:creationId xmlns:a16="http://schemas.microsoft.com/office/drawing/2014/main" id="{A5E95328-B4B6-9ACB-B687-8EA3D3874DB6}"/>
+                <a16:creationId xmlns:a16="http://schemas.microsoft.com/office/drawing/2014/main" id="{C96C73B9-025C-53EA-AC30-0915BB284A60}"/>
               </a:ext>
             </a:extLst>
           </p:cNvPr>
@@ -1543,7 +1543,7 @@
           <p:cNvPr id="3" name="Marcador de texto 2">
             <a:extLst>
               <a:ext uri="{FF2B5EF4-FFF2-40B4-BE49-F238E27FC236}">
-                <a16:creationId xmlns:a16="http://schemas.microsoft.com/office/drawing/2014/main" id="{381CAD59-CAA5-D3D0-5485-F0368B6E46AE}"/>
+                <a16:creationId xmlns:a16="http://schemas.microsoft.com/office/drawing/2014/main" id="{B9948733-248B-D7B4-47BC-C180F0B0D8AC}"/>
               </a:ext>
             </a:extLst>
           </p:cNvPr>
@@ -1614,7 +1614,7 @@
           <p:cNvPr id="4" name="Marcador de contenido 3">
             <a:extLst>
               <a:ext uri="{FF2B5EF4-FFF2-40B4-BE49-F238E27FC236}">
-                <a16:creationId xmlns:a16="http://schemas.microsoft.com/office/drawing/2014/main" id="{82B8E0C2-AAE9-83BD-B746-56796B3B9C21}"/>
+                <a16:creationId xmlns:a16="http://schemas.microsoft.com/office/drawing/2014/main" id="{95CD6CCE-6DCF-F78A-40FF-40D0A74D8547}"/>
               </a:ext>
             </a:extLst>
           </p:cNvPr>
@@ -1676,7 +1676,7 @@
           <p:cNvPr id="5" name="Marcador de texto 4">
             <a:extLst>
               <a:ext uri="{FF2B5EF4-FFF2-40B4-BE49-F238E27FC236}">
-                <a16:creationId xmlns:a16="http://schemas.microsoft.com/office/drawing/2014/main" id="{E55150E5-F565-FA62-3459-87167636DD3F}"/>
+                <a16:creationId xmlns:a16="http://schemas.microsoft.com/office/drawing/2014/main" id="{07764DD9-26E9-2D25-FDE9-E9BF7098D8DE}"/>
               </a:ext>
             </a:extLst>
           </p:cNvPr>
@@ -1747,7 +1747,7 @@
           <p:cNvPr id="6" name="Marcador de contenido 5">
             <a:extLst>
               <a:ext uri="{FF2B5EF4-FFF2-40B4-BE49-F238E27FC236}">
-                <a16:creationId xmlns:a16="http://schemas.microsoft.com/office/drawing/2014/main" id="{947F2CB0-A358-148D-6C1F-7CF84C0B2AA6}"/>
+                <a16:creationId xmlns:a16="http://schemas.microsoft.com/office/drawing/2014/main" id="{C01CD537-2D04-6254-7654-5BE03193D978}"/>
               </a:ext>
             </a:extLst>
           </p:cNvPr>
@@ -1809,7 +1809,7 @@
           <p:cNvPr id="7" name="Marcador de fecha 6">
             <a:extLst>
               <a:ext uri="{FF2B5EF4-FFF2-40B4-BE49-F238E27FC236}">
-                <a16:creationId xmlns:a16="http://schemas.microsoft.com/office/drawing/2014/main" id="{8057AC04-7560-E3A7-A831-FB4DFF69F072}"/>
+                <a16:creationId xmlns:a16="http://schemas.microsoft.com/office/drawing/2014/main" id="{0CEDF0AE-0300-3394-5CD6-5226575D730B}"/>
               </a:ext>
             </a:extLst>
           </p:cNvPr>
@@ -1825,9 +1825,9 @@
           <a:bodyPr/>
           <a:lstStyle/>
           <a:p>
-            <a:fld id="{5EA62A27-1D85-48AD-90C3-37B244257CF0}" type="datetimeFigureOut">
+            <a:fld id="{9835FBA3-5475-4EC2-B841-90BC3B1D7D90}" type="datetimeFigureOut">
               <a:rPr lang="es-ES" smtClean="0"/>
-              <a:t>19/05/2026</a:t>
+              <a:t>22/05/2026</a:t>
             </a:fld>
             <a:endParaRPr lang="es-ES"/>
           </a:p>
@@ -1838,7 +1838,7 @@
           <p:cNvPr id="8" name="Marcador de pie de página 7">
             <a:extLst>
               <a:ext uri="{FF2B5EF4-FFF2-40B4-BE49-F238E27FC236}">
-                <a16:creationId xmlns:a16="http://schemas.microsoft.com/office/drawing/2014/main" id="{EA59DA2E-8572-9B68-793C-55E5FD9AB535}"/>
+                <a16:creationId xmlns:a16="http://schemas.microsoft.com/office/drawing/2014/main" id="{2BCB35A2-E749-9AFA-8214-08569E13580C}"/>
               </a:ext>
             </a:extLst>
           </p:cNvPr>
@@ -1863,7 +1863,7 @@
           <p:cNvPr id="9" name="Marcador de número de diapositiva 8">
             <a:extLst>
               <a:ext uri="{FF2B5EF4-FFF2-40B4-BE49-F238E27FC236}">
-                <a16:creationId xmlns:a16="http://schemas.microsoft.com/office/drawing/2014/main" id="{E85E1E7C-FB27-5478-B7CC-B2D9E4DC9CFC}"/>
+                <a16:creationId xmlns:a16="http://schemas.microsoft.com/office/drawing/2014/main" id="{2D836A66-1100-864F-4759-0AE448374357}"/>
               </a:ext>
             </a:extLst>
           </p:cNvPr>
@@ -1879,7 +1879,7 @@
           <a:bodyPr/>
           <a:lstStyle/>
           <a:p>
-            <a:fld id="{357192D4-5BD9-41C8-9EE5-942CB5B156C9}" type="slidenum">
+            <a:fld id="{96B8D56F-A2A2-43A0-8CA7-B1F0D0BAB8F0}" type="slidenum">
               <a:rPr lang="es-ES" smtClean="0"/>
               <a:t>‹Nº›</a:t>
             </a:fld>
@@ -1890,7 +1890,7 @@
     </p:spTree>
     <p:extLst>
       <p:ext uri="{BB962C8B-B14F-4D97-AF65-F5344CB8AC3E}">
-        <p14:creationId xmlns:p14="http://schemas.microsoft.com/office/powerpoint/2010/main" val="1082468512"/>
+        <p14:creationId xmlns:p14="http://schemas.microsoft.com/office/powerpoint/2010/main" val="1275045235"/>
       </p:ext>
     </p:extLst>
   </p:cSld>
@@ -1922,7 +1922,7 @@
           <p:cNvPr id="2" name="Título 1">
             <a:extLst>
               <a:ext uri="{FF2B5EF4-FFF2-40B4-BE49-F238E27FC236}">
-                <a16:creationId xmlns:a16="http://schemas.microsoft.com/office/drawing/2014/main" id="{1DCF473E-51F7-D4A4-404E-56FC61F961C2}"/>
+                <a16:creationId xmlns:a16="http://schemas.microsoft.com/office/drawing/2014/main" id="{27C4182B-C525-0ECF-9468-3CF5D2D79442}"/>
               </a:ext>
             </a:extLst>
           </p:cNvPr>
@@ -1950,7 +1950,7 @@
           <p:cNvPr id="3" name="Marcador de fecha 2">
             <a:extLst>
               <a:ext uri="{FF2B5EF4-FFF2-40B4-BE49-F238E27FC236}">
-                <a16:creationId xmlns:a16="http://schemas.microsoft.com/office/drawing/2014/main" id="{DC2BF4BF-32DA-9453-FCF1-4E82CF0476F8}"/>
+                <a16:creationId xmlns:a16="http://schemas.microsoft.com/office/drawing/2014/main" id="{ED6E5E95-C57A-8E5A-D875-6901DB0553D1}"/>
               </a:ext>
             </a:extLst>
           </p:cNvPr>
@@ -1966,9 +1966,9 @@
           <a:bodyPr/>
           <a:lstStyle/>
           <a:p>
-            <a:fld id="{5EA62A27-1D85-48AD-90C3-37B244257CF0}" type="datetimeFigureOut">
+            <a:fld id="{9835FBA3-5475-4EC2-B841-90BC3B1D7D90}" type="datetimeFigureOut">
               <a:rPr lang="es-ES" smtClean="0"/>
-              <a:t>19/05/2026</a:t>
+              <a:t>22/05/2026</a:t>
             </a:fld>
             <a:endParaRPr lang="es-ES"/>
           </a:p>
@@ -1979,7 +1979,7 @@
           <p:cNvPr id="4" name="Marcador de pie de página 3">
             <a:extLst>
               <a:ext uri="{FF2B5EF4-FFF2-40B4-BE49-F238E27FC236}">
-                <a16:creationId xmlns:a16="http://schemas.microsoft.com/office/drawing/2014/main" id="{13F41BD4-0A83-52D5-8B71-1E1B3DC8C9BD}"/>
+                <a16:creationId xmlns:a16="http://schemas.microsoft.com/office/drawing/2014/main" id="{3D2D9EAB-FC7D-A384-F3AD-52D6CABF777D}"/>
               </a:ext>
             </a:extLst>
           </p:cNvPr>
@@ -2004,7 +2004,7 @@
           <p:cNvPr id="5" name="Marcador de número de diapositiva 4">
             <a:extLst>
               <a:ext uri="{FF2B5EF4-FFF2-40B4-BE49-F238E27FC236}">
-                <a16:creationId xmlns:a16="http://schemas.microsoft.com/office/drawing/2014/main" id="{12BB15A4-C317-4292-367F-A35A34F7E9E0}"/>
+                <a16:creationId xmlns:a16="http://schemas.microsoft.com/office/drawing/2014/main" id="{0C4F2829-150F-B0E0-F6C7-73E414895259}"/>
               </a:ext>
             </a:extLst>
           </p:cNvPr>
@@ -2020,7 +2020,7 @@
           <a:bodyPr/>
           <a:lstStyle/>
           <a:p>
-            <a:fld id="{357192D4-5BD9-41C8-9EE5-942CB5B156C9}" type="slidenum">
+            <a:fld id="{96B8D56F-A2A2-43A0-8CA7-B1F0D0BAB8F0}" type="slidenum">
               <a:rPr lang="es-ES" smtClean="0"/>
               <a:t>‹Nº›</a:t>
             </a:fld>
@@ -2031,7 +2031,7 @@
     </p:spTree>
     <p:extLst>
       <p:ext uri="{BB962C8B-B14F-4D97-AF65-F5344CB8AC3E}">
-        <p14:creationId xmlns:p14="http://schemas.microsoft.com/office/powerpoint/2010/main" val="843809289"/>
+        <p14:creationId xmlns:p14="http://schemas.microsoft.com/office/powerpoint/2010/main" val="2710967507"/>
       </p:ext>
     </p:extLst>
   </p:cSld>
@@ -2063,7 +2063,7 @@
           <p:cNvPr id="2" name="Marcador de fecha 1">
             <a:extLst>
               <a:ext uri="{FF2B5EF4-FFF2-40B4-BE49-F238E27FC236}">
-                <a16:creationId xmlns:a16="http://schemas.microsoft.com/office/drawing/2014/main" id="{BB770DBA-80A6-D082-CE82-4104E8F6A619}"/>
+                <a16:creationId xmlns:a16="http://schemas.microsoft.com/office/drawing/2014/main" id="{2DD91837-7567-4939-7FEA-FC09C5EAA023}"/>
               </a:ext>
             </a:extLst>
           </p:cNvPr>
@@ -2079,9 +2079,9 @@
           <a:bodyPr/>
           <a:lstStyle/>
           <a:p>
-            <a:fld id="{5EA62A27-1D85-48AD-90C3-37B244257CF0}" type="datetimeFigureOut">
+            <a:fld id="{9835FBA3-5475-4EC2-B841-90BC3B1D7D90}" type="datetimeFigureOut">
               <a:rPr lang="es-ES" smtClean="0"/>
-              <a:t>19/05/2026</a:t>
+              <a:t>22/05/2026</a:t>
             </a:fld>
             <a:endParaRPr lang="es-ES"/>
           </a:p>
@@ -2092,7 +2092,7 @@
           <p:cNvPr id="3" name="Marcador de pie de página 2">
             <a:extLst>
               <a:ext uri="{FF2B5EF4-FFF2-40B4-BE49-F238E27FC236}">
-                <a16:creationId xmlns:a16="http://schemas.microsoft.com/office/drawing/2014/main" id="{ED8222E9-DDE3-B1D4-E6BA-2BBE6D5CAABC}"/>
+                <a16:creationId xmlns:a16="http://schemas.microsoft.com/office/drawing/2014/main" id="{FCFD4570-8133-CD03-C0EC-9A24EAE0F65B}"/>
               </a:ext>
             </a:extLst>
           </p:cNvPr>
@@ -2117,7 +2117,7 @@
           <p:cNvPr id="4" name="Marcador de número de diapositiva 3">
             <a:extLst>
               <a:ext uri="{FF2B5EF4-FFF2-40B4-BE49-F238E27FC236}">
-                <a16:creationId xmlns:a16="http://schemas.microsoft.com/office/drawing/2014/main" id="{5B05FE56-9D48-9873-839E-6DA6555E7DCD}"/>
+                <a16:creationId xmlns:a16="http://schemas.microsoft.com/office/drawing/2014/main" id="{8527FAC1-FAB6-6815-FB0D-D15FCC738F45}"/>
               </a:ext>
             </a:extLst>
           </p:cNvPr>
@@ -2133,7 +2133,7 @@
           <a:bodyPr/>
           <a:lstStyle/>
           <a:p>
-            <a:fld id="{357192D4-5BD9-41C8-9EE5-942CB5B156C9}" type="slidenum">
+            <a:fld id="{96B8D56F-A2A2-43A0-8CA7-B1F0D0BAB8F0}" type="slidenum">
               <a:rPr lang="es-ES" smtClean="0"/>
               <a:t>‹Nº›</a:t>
             </a:fld>
@@ -2144,7 +2144,7 @@
     </p:spTree>
     <p:extLst>
       <p:ext uri="{BB962C8B-B14F-4D97-AF65-F5344CB8AC3E}">
-        <p14:creationId xmlns:p14="http://schemas.microsoft.com/office/powerpoint/2010/main" val="2185951776"/>
+        <p14:creationId xmlns:p14="http://schemas.microsoft.com/office/powerpoint/2010/main" val="1816769203"/>
       </p:ext>
     </p:extLst>
   </p:cSld>
@@ -2176,7 +2176,7 @@
           <p:cNvPr id="2" name="Título 1">
             <a:extLst>
               <a:ext uri="{FF2B5EF4-FFF2-40B4-BE49-F238E27FC236}">
-                <a16:creationId xmlns:a16="http://schemas.microsoft.com/office/drawing/2014/main" id="{4BE62A58-AF8A-3FB8-EA0A-1ABF9C4B8B69}"/>
+                <a16:creationId xmlns:a16="http://schemas.microsoft.com/office/drawing/2014/main" id="{A44F0AE0-8905-F645-6E6E-FCD033F6F627}"/>
               </a:ext>
             </a:extLst>
           </p:cNvPr>
@@ -2213,7 +2213,7 @@
           <p:cNvPr id="3" name="Marcador de contenido 2">
             <a:extLst>
               <a:ext uri="{FF2B5EF4-FFF2-40B4-BE49-F238E27FC236}">
-                <a16:creationId xmlns:a16="http://schemas.microsoft.com/office/drawing/2014/main" id="{1A83C48F-EE56-D384-1B9C-B1E1C5E07EF4}"/>
+                <a16:creationId xmlns:a16="http://schemas.microsoft.com/office/drawing/2014/main" id="{57BFF8D5-C89A-F933-4530-5ADAB9F742A9}"/>
               </a:ext>
             </a:extLst>
           </p:cNvPr>
@@ -2303,7 +2303,7 @@
           <p:cNvPr id="4" name="Marcador de texto 3">
             <a:extLst>
               <a:ext uri="{FF2B5EF4-FFF2-40B4-BE49-F238E27FC236}">
-                <a16:creationId xmlns:a16="http://schemas.microsoft.com/office/drawing/2014/main" id="{062B874F-BC36-715D-D132-8FD325459989}"/>
+                <a16:creationId xmlns:a16="http://schemas.microsoft.com/office/drawing/2014/main" id="{4BCA8D70-883A-D5E4-2B4B-1810DB39E673}"/>
               </a:ext>
             </a:extLst>
           </p:cNvPr>
@@ -2374,7 +2374,7 @@
           <p:cNvPr id="5" name="Marcador de fecha 4">
             <a:extLst>
               <a:ext uri="{FF2B5EF4-FFF2-40B4-BE49-F238E27FC236}">
-                <a16:creationId xmlns:a16="http://schemas.microsoft.com/office/drawing/2014/main" id="{E80A516C-DDEA-C052-9308-F388DDF0178F}"/>
+                <a16:creationId xmlns:a16="http://schemas.microsoft.com/office/drawing/2014/main" id="{4B680A9D-2C64-1081-0D49-51EC41D594C2}"/>
               </a:ext>
             </a:extLst>
           </p:cNvPr>
@@ -2390,9 +2390,9 @@
           <a:bodyPr/>
           <a:lstStyle/>
           <a:p>
-            <a:fld id="{5EA62A27-1D85-48AD-90C3-37B244257CF0}" type="datetimeFigureOut">
+            <a:fld id="{9835FBA3-5475-4EC2-B841-90BC3B1D7D90}" type="datetimeFigureOut">
               <a:rPr lang="es-ES" smtClean="0"/>
-              <a:t>19/05/2026</a:t>
+              <a:t>22/05/2026</a:t>
             </a:fld>
             <a:endParaRPr lang="es-ES"/>
           </a:p>
@@ -2403,7 +2403,7 @@
           <p:cNvPr id="6" name="Marcador de pie de página 5">
             <a:extLst>
               <a:ext uri="{FF2B5EF4-FFF2-40B4-BE49-F238E27FC236}">
-                <a16:creationId xmlns:a16="http://schemas.microsoft.com/office/drawing/2014/main" id="{2957D22E-3E4E-3BA1-E165-39275168A942}"/>
+                <a16:creationId xmlns:a16="http://schemas.microsoft.com/office/drawing/2014/main" id="{F2B5EFD7-9DED-D583-9B50-BEA7D34D042A}"/>
               </a:ext>
             </a:extLst>
           </p:cNvPr>
@@ -2428,7 +2428,7 @@
           <p:cNvPr id="7" name="Marcador de número de diapositiva 6">
             <a:extLst>
               <a:ext uri="{FF2B5EF4-FFF2-40B4-BE49-F238E27FC236}">
-                <a16:creationId xmlns:a16="http://schemas.microsoft.com/office/drawing/2014/main" id="{E9CD3F2A-5D76-4B7C-3D0E-CC8CE2B8C370}"/>
+                <a16:creationId xmlns:a16="http://schemas.microsoft.com/office/drawing/2014/main" id="{637B4225-39A8-868E-FDB2-0A5EEF744E22}"/>
               </a:ext>
             </a:extLst>
           </p:cNvPr>
@@ -2444,7 +2444,7 @@
           <a:bodyPr/>
           <a:lstStyle/>
           <a:p>
-            <a:fld id="{357192D4-5BD9-41C8-9EE5-942CB5B156C9}" type="slidenum">
+            <a:fld id="{96B8D56F-A2A2-43A0-8CA7-B1F0D0BAB8F0}" type="slidenum">
               <a:rPr lang="es-ES" smtClean="0"/>
               <a:t>‹Nº›</a:t>
             </a:fld>
@@ -2455,7 +2455,7 @@
     </p:spTree>
     <p:extLst>
       <p:ext uri="{BB962C8B-B14F-4D97-AF65-F5344CB8AC3E}">
-        <p14:creationId xmlns:p14="http://schemas.microsoft.com/office/powerpoint/2010/main" val="2092824997"/>
+        <p14:creationId xmlns:p14="http://schemas.microsoft.com/office/powerpoint/2010/main" val="3365838627"/>
       </p:ext>
     </p:extLst>
   </p:cSld>
@@ -2487,7 +2487,7 @@
           <p:cNvPr id="2" name="Título 1">
             <a:extLst>
               <a:ext uri="{FF2B5EF4-FFF2-40B4-BE49-F238E27FC236}">
-                <a16:creationId xmlns:a16="http://schemas.microsoft.com/office/drawing/2014/main" id="{B4EA0205-E1B1-D315-A143-01A9D00CFD7A}"/>
+                <a16:creationId xmlns:a16="http://schemas.microsoft.com/office/drawing/2014/main" id="{5D364949-16BE-E78B-82D2-3C2315B3F1B5}"/>
               </a:ext>
             </a:extLst>
           </p:cNvPr>
@@ -2524,7 +2524,7 @@
           <p:cNvPr id="3" name="Marcador de posición de imagen 2">
             <a:extLst>
               <a:ext uri="{FF2B5EF4-FFF2-40B4-BE49-F238E27FC236}">
-                <a16:creationId xmlns:a16="http://schemas.microsoft.com/office/drawing/2014/main" id="{5BADC2F0-6160-7416-B388-A10C87991244}"/>
+                <a16:creationId xmlns:a16="http://schemas.microsoft.com/office/drawing/2014/main" id="{7B02907C-1396-B908-FAA2-098E7C14FB8C}"/>
               </a:ext>
             </a:extLst>
           </p:cNvPr>
@@ -2591,7 +2591,7 @@
           <p:cNvPr id="4" name="Marcador de texto 3">
             <a:extLst>
               <a:ext uri="{FF2B5EF4-FFF2-40B4-BE49-F238E27FC236}">
-                <a16:creationId xmlns:a16="http://schemas.microsoft.com/office/drawing/2014/main" id="{3FC8B46F-1A24-D909-BB46-D0EA7E06A1A4}"/>
+                <a16:creationId xmlns:a16="http://schemas.microsoft.com/office/drawing/2014/main" id="{202D4E07-4280-8163-7063-884D2EB9971D}"/>
               </a:ext>
             </a:extLst>
           </p:cNvPr>
@@ -2662,7 +2662,7 @@
           <p:cNvPr id="5" name="Marcador de fecha 4">
             <a:extLst>
               <a:ext uri="{FF2B5EF4-FFF2-40B4-BE49-F238E27FC236}">
-                <a16:creationId xmlns:a16="http://schemas.microsoft.com/office/drawing/2014/main" id="{0247D9DE-E2CE-52AC-CCDB-87BE83C4EAE6}"/>
+                <a16:creationId xmlns:a16="http://schemas.microsoft.com/office/drawing/2014/main" id="{33950C08-5F43-D53F-61D2-7B45976E8487}"/>
               </a:ext>
             </a:extLst>
           </p:cNvPr>
@@ -2678,9 +2678,9 @@
           <a:bodyPr/>
           <a:lstStyle/>
           <a:p>
-            <a:fld id="{5EA62A27-1D85-48AD-90C3-37B244257CF0}" type="datetimeFigureOut">
+            <a:fld id="{9835FBA3-5475-4EC2-B841-90BC3B1D7D90}" type="datetimeFigureOut">
               <a:rPr lang="es-ES" smtClean="0"/>
-              <a:t>19/05/2026</a:t>
+              <a:t>22/05/2026</a:t>
             </a:fld>
             <a:endParaRPr lang="es-ES"/>
           </a:p>
@@ -2691,7 +2691,7 @@
           <p:cNvPr id="6" name="Marcador de pie de página 5">
             <a:extLst>
               <a:ext uri="{FF2B5EF4-FFF2-40B4-BE49-F238E27FC236}">
-                <a16:creationId xmlns:a16="http://schemas.microsoft.com/office/drawing/2014/main" id="{10FEF411-C3D2-F204-D11D-12BEC439EB07}"/>
+                <a16:creationId xmlns:a16="http://schemas.microsoft.com/office/drawing/2014/main" id="{E05AC3F4-2958-63F6-B084-4216A2F411A0}"/>
               </a:ext>
             </a:extLst>
           </p:cNvPr>
@@ -2716,7 +2716,7 @@
           <p:cNvPr id="7" name="Marcador de número de diapositiva 6">
             <a:extLst>
               <a:ext uri="{FF2B5EF4-FFF2-40B4-BE49-F238E27FC236}">
-                <a16:creationId xmlns:a16="http://schemas.microsoft.com/office/drawing/2014/main" id="{504D838E-8580-34E0-3EB7-1118DCC31235}"/>
+                <a16:creationId xmlns:a16="http://schemas.microsoft.com/office/drawing/2014/main" id="{EF6B1B05-4540-9367-33A0-D11C94E2699D}"/>
               </a:ext>
             </a:extLst>
           </p:cNvPr>
@@ -2732,7 +2732,7 @@
           <a:bodyPr/>
           <a:lstStyle/>
           <a:p>
-            <a:fld id="{357192D4-5BD9-41C8-9EE5-942CB5B156C9}" type="slidenum">
+            <a:fld id="{96B8D56F-A2A2-43A0-8CA7-B1F0D0BAB8F0}" type="slidenum">
               <a:rPr lang="es-ES" smtClean="0"/>
               <a:t>‹Nº›</a:t>
             </a:fld>
@@ -2743,7 +2743,7 @@
     </p:spTree>
     <p:extLst>
       <p:ext uri="{BB962C8B-B14F-4D97-AF65-F5344CB8AC3E}">
-        <p14:creationId xmlns:p14="http://schemas.microsoft.com/office/powerpoint/2010/main" val="1370303788"/>
+        <p14:creationId xmlns:p14="http://schemas.microsoft.com/office/powerpoint/2010/main" val="4142256132"/>
       </p:ext>
     </p:extLst>
   </p:cSld>
@@ -2780,7 +2780,7 @@
           <p:cNvPr id="2" name="Marcador de título 1">
             <a:extLst>
               <a:ext uri="{FF2B5EF4-FFF2-40B4-BE49-F238E27FC236}">
-                <a16:creationId xmlns:a16="http://schemas.microsoft.com/office/drawing/2014/main" id="{72786C14-7D58-E4B6-34F2-327E67DD1DA7}"/>
+                <a16:creationId xmlns:a16="http://schemas.microsoft.com/office/drawing/2014/main" id="{35D39D35-3453-AC02-5303-ADD3F6B54AED}"/>
               </a:ext>
             </a:extLst>
           </p:cNvPr>
@@ -2818,7 +2818,7 @@
           <p:cNvPr id="3" name="Marcador de texto 2">
             <a:extLst>
               <a:ext uri="{FF2B5EF4-FFF2-40B4-BE49-F238E27FC236}">
-                <a16:creationId xmlns:a16="http://schemas.microsoft.com/office/drawing/2014/main" id="{97AEFCDE-9BDE-1271-E379-25AE01116B23}"/>
+                <a16:creationId xmlns:a16="http://schemas.microsoft.com/office/drawing/2014/main" id="{63420041-04F8-C26A-0991-3AD4B3DAFD54}"/>
               </a:ext>
             </a:extLst>
           </p:cNvPr>
@@ -2885,7 +2885,7 @@
           <p:cNvPr id="4" name="Marcador de fecha 3">
             <a:extLst>
               <a:ext uri="{FF2B5EF4-FFF2-40B4-BE49-F238E27FC236}">
-                <a16:creationId xmlns:a16="http://schemas.microsoft.com/office/drawing/2014/main" id="{2C386A11-5809-CF73-C86F-4A15E6AD7B55}"/>
+                <a16:creationId xmlns:a16="http://schemas.microsoft.com/office/drawing/2014/main" id="{04166FF0-A09C-78EE-3785-892DA5DB1317}"/>
               </a:ext>
             </a:extLst>
           </p:cNvPr>
@@ -2912,16 +2912,16 @@
               <a:defRPr sz="1200">
                 <a:solidFill>
                   <a:schemeClr val="tx1">
-                    <a:tint val="82000"/>
+                    <a:tint val="75000"/>
                   </a:schemeClr>
                 </a:solidFill>
               </a:defRPr>
             </a:lvl1pPr>
           </a:lstStyle>
           <a:p>
-            <a:fld id="{5EA62A27-1D85-48AD-90C3-37B244257CF0}" type="datetimeFigureOut">
+            <a:fld id="{9835FBA3-5475-4EC2-B841-90BC3B1D7D90}" type="datetimeFigureOut">
               <a:rPr lang="es-ES" smtClean="0"/>
-              <a:t>19/05/2026</a:t>
+              <a:t>22/05/2026</a:t>
             </a:fld>
             <a:endParaRPr lang="es-ES"/>
           </a:p>
@@ -2932,7 +2932,7 @@
           <p:cNvPr id="5" name="Marcador de pie de página 4">
             <a:extLst>
               <a:ext uri="{FF2B5EF4-FFF2-40B4-BE49-F238E27FC236}">
-                <a16:creationId xmlns:a16="http://schemas.microsoft.com/office/drawing/2014/main" id="{0FCD38D0-3C3E-52AC-389B-35B51C2CE478}"/>
+                <a16:creationId xmlns:a16="http://schemas.microsoft.com/office/drawing/2014/main" id="{95A76A51-3BB4-56F2-A015-086631DA7069}"/>
               </a:ext>
             </a:extLst>
           </p:cNvPr>
@@ -2959,7 +2959,7 @@
               <a:defRPr sz="1200">
                 <a:solidFill>
                   <a:schemeClr val="tx1">
-                    <a:tint val="82000"/>
+                    <a:tint val="75000"/>
                   </a:schemeClr>
                 </a:solidFill>
               </a:defRPr>
@@ -2975,7 +2975,7 @@
           <p:cNvPr id="6" name="Marcador de número de diapositiva 5">
             <a:extLst>
               <a:ext uri="{FF2B5EF4-FFF2-40B4-BE49-F238E27FC236}">
-                <a16:creationId xmlns:a16="http://schemas.microsoft.com/office/drawing/2014/main" id="{E52B3E20-F6CA-0C98-43CD-121A885307B9}"/>
+                <a16:creationId xmlns:a16="http://schemas.microsoft.com/office/drawing/2014/main" id="{67FBF8BC-5BAE-1E68-ED65-7CE445BB80D2}"/>
               </a:ext>
             </a:extLst>
           </p:cNvPr>
@@ -3002,14 +3002,14 @@
               <a:defRPr sz="1200">
                 <a:solidFill>
                   <a:schemeClr val="tx1">
-                    <a:tint val="82000"/>
+                    <a:tint val="75000"/>
                   </a:schemeClr>
                 </a:solidFill>
               </a:defRPr>
             </a:lvl1pPr>
           </a:lstStyle>
           <a:p>
-            <a:fld id="{357192D4-5BD9-41C8-9EE5-942CB5B156C9}" type="slidenum">
+            <a:fld id="{96B8D56F-A2A2-43A0-8CA7-B1F0D0BAB8F0}" type="slidenum">
               <a:rPr lang="es-ES" smtClean="0"/>
               <a:t>‹Nº›</a:t>
             </a:fld>
@@ -3020,7 +3020,7 @@
     </p:spTree>
     <p:extLst>
       <p:ext uri="{BB962C8B-B14F-4D97-AF65-F5344CB8AC3E}">
-        <p14:creationId xmlns:p14="http://schemas.microsoft.com/office/powerpoint/2010/main" val="3537115536"/>
+        <p14:creationId xmlns:p14="http://schemas.microsoft.com/office/powerpoint/2010/main" val="3254596532"/>
       </p:ext>
     </p:extLst>
   </p:cSld>
@@ -3351,7 +3351,7 @@
           <p:cNvPr id="2" name="Rectángulo: esquinas redondeadas 1">
             <a:extLst>
               <a:ext uri="{FF2B5EF4-FFF2-40B4-BE49-F238E27FC236}">
-                <a16:creationId xmlns:a16="http://schemas.microsoft.com/office/drawing/2014/main" id="{D205D9E9-2B2A-8449-3280-81D4BA71935C}"/>
+                <a16:creationId xmlns:a16="http://schemas.microsoft.com/office/drawing/2014/main" id="{CA12C00C-31B8-57BA-AE1B-7F0B6DDD5033}"/>
               </a:ext>
             </a:extLst>
           </p:cNvPr>
@@ -3405,7 +3405,7 @@
           <p:cNvPr id="3" name="CuadroTexto 2">
             <a:extLst>
               <a:ext uri="{FF2B5EF4-FFF2-40B4-BE49-F238E27FC236}">
-                <a16:creationId xmlns:a16="http://schemas.microsoft.com/office/drawing/2014/main" id="{8CD26C4F-EB69-6F68-D6A8-EFDFAAB9A2EE}"/>
+                <a16:creationId xmlns:a16="http://schemas.microsoft.com/office/drawing/2014/main" id="{38694A69-AED5-9D5A-6CAF-BEA870CD3C25}"/>
               </a:ext>
             </a:extLst>
           </p:cNvPr>
@@ -3445,7 +3445,7 @@
           <p:cNvPr id="4" name="CuadroTexto 3">
             <a:extLst>
               <a:ext uri="{FF2B5EF4-FFF2-40B4-BE49-F238E27FC236}">
-                <a16:creationId xmlns:a16="http://schemas.microsoft.com/office/drawing/2014/main" id="{6594C209-D7CD-32E9-0092-BEEDDDE630D1}"/>
+                <a16:creationId xmlns:a16="http://schemas.microsoft.com/office/drawing/2014/main" id="{4E2A4B0B-DFF1-F818-1C09-6E54098339A1}"/>
               </a:ext>
             </a:extLst>
           </p:cNvPr>
@@ -3485,7 +3485,7 @@
           <p:cNvPr id="5" name="CuadroTexto 4">
             <a:extLst>
               <a:ext uri="{FF2B5EF4-FFF2-40B4-BE49-F238E27FC236}">
-                <a16:creationId xmlns:a16="http://schemas.microsoft.com/office/drawing/2014/main" id="{0010246E-364B-3BEC-B71E-FE18CDB86658}"/>
+                <a16:creationId xmlns:a16="http://schemas.microsoft.com/office/drawing/2014/main" id="{A54BA1BA-F4BA-9AE1-5D5D-9053E0635E3B}"/>
               </a:ext>
             </a:extLst>
           </p:cNvPr>
@@ -3525,7 +3525,7 @@
           <p:cNvPr id="6" name="CuadroTexto 5">
             <a:extLst>
               <a:ext uri="{FF2B5EF4-FFF2-40B4-BE49-F238E27FC236}">
-                <a16:creationId xmlns:a16="http://schemas.microsoft.com/office/drawing/2014/main" id="{2C422221-3442-CE74-2513-F43623CAB150}"/>
+                <a16:creationId xmlns:a16="http://schemas.microsoft.com/office/drawing/2014/main" id="{38C02F9F-A59F-E971-B686-AB6159C2730C}"/>
               </a:ext>
             </a:extLst>
           </p:cNvPr>
@@ -3576,7 +3576,7 @@
           <p:cNvPr id="8" name="Imagen 7">
             <a:extLst>
               <a:ext uri="{FF2B5EF4-FFF2-40B4-BE49-F238E27FC236}">
-                <a16:creationId xmlns:a16="http://schemas.microsoft.com/office/drawing/2014/main" id="{7A6C684F-BE85-6DFF-BFD5-BD4E0258C0E8}"/>
+                <a16:creationId xmlns:a16="http://schemas.microsoft.com/office/drawing/2014/main" id="{4DE0169B-C9B0-5450-F4DA-2530A2097BB1}"/>
               </a:ext>
             </a:extLst>
           </p:cNvPr>
@@ -3615,7 +3615,7 @@
     </p:spTree>
     <p:extLst>
       <p:ext uri="{BB962C8B-B14F-4D97-AF65-F5344CB8AC3E}">
-        <p14:creationId xmlns:p14="http://schemas.microsoft.com/office/powerpoint/2010/main" val="1724773751"/>
+        <p14:creationId xmlns:p14="http://schemas.microsoft.com/office/powerpoint/2010/main" val="1507221563"/>
       </p:ext>
     </p:extLst>
   </p:cSld>
@@ -3655,7 +3655,7 @@
           <p:cNvPr id="2" name="CuadroTexto 1">
             <a:extLst>
               <a:ext uri="{FF2B5EF4-FFF2-40B4-BE49-F238E27FC236}">
-                <a16:creationId xmlns:a16="http://schemas.microsoft.com/office/drawing/2014/main" id="{98AAE408-EF69-259D-BAA6-33ED04A04C57}"/>
+                <a16:creationId xmlns:a16="http://schemas.microsoft.com/office/drawing/2014/main" id="{6401F12A-9BD6-9813-B0F8-BFA0D273FA7E}"/>
               </a:ext>
             </a:extLst>
           </p:cNvPr>
@@ -3695,7 +3695,7 @@
           <p:cNvPr id="3" name="CuadroTexto 2">
             <a:extLst>
               <a:ext uri="{FF2B5EF4-FFF2-40B4-BE49-F238E27FC236}">
-                <a16:creationId xmlns:a16="http://schemas.microsoft.com/office/drawing/2014/main" id="{D086D1C7-C914-B072-1836-0199861C2628}"/>
+                <a16:creationId xmlns:a16="http://schemas.microsoft.com/office/drawing/2014/main" id="{A44A9632-27FC-CA47-4923-739611D3D20C}"/>
               </a:ext>
             </a:extLst>
           </p:cNvPr>
@@ -3735,7 +3735,7 @@
           <p:cNvPr id="4" name="CuadroTexto 3">
             <a:extLst>
               <a:ext uri="{FF2B5EF4-FFF2-40B4-BE49-F238E27FC236}">
-                <a16:creationId xmlns:a16="http://schemas.microsoft.com/office/drawing/2014/main" id="{CDF96AA8-6440-8183-2342-0628F8D93C1A}"/>
+                <a16:creationId xmlns:a16="http://schemas.microsoft.com/office/drawing/2014/main" id="{219469AF-74E0-545A-7EE2-3321F726B710}"/>
               </a:ext>
             </a:extLst>
           </p:cNvPr>
@@ -3775,7 +3775,7 @@
           <p:cNvPr id="5" name="Rectángulo: esquinas redondeadas 4">
             <a:extLst>
               <a:ext uri="{FF2B5EF4-FFF2-40B4-BE49-F238E27FC236}">
-                <a16:creationId xmlns:a16="http://schemas.microsoft.com/office/drawing/2014/main" id="{72C7F4DA-D661-40BE-C733-D0CFC5C5D4DF}"/>
+                <a16:creationId xmlns:a16="http://schemas.microsoft.com/office/drawing/2014/main" id="{1711DDAD-F082-BCA4-9ED1-837EFA9EB665}"/>
               </a:ext>
             </a:extLst>
           </p:cNvPr>
@@ -3829,7 +3829,7 @@
           <p:cNvPr id="6" name="CuadroTexto 5">
             <a:extLst>
               <a:ext uri="{FF2B5EF4-FFF2-40B4-BE49-F238E27FC236}">
-                <a16:creationId xmlns:a16="http://schemas.microsoft.com/office/drawing/2014/main" id="{8DBAA4C0-2D71-CAC0-B5DE-D0FBDD24023B}"/>
+                <a16:creationId xmlns:a16="http://schemas.microsoft.com/office/drawing/2014/main" id="{76A13E2F-B7DB-09AE-0DEA-611461763BA0}"/>
               </a:ext>
             </a:extLst>
           </p:cNvPr>
@@ -3869,7 +3869,7 @@
           <p:cNvPr id="7" name="CuadroTexto 6">
             <a:extLst>
               <a:ext uri="{FF2B5EF4-FFF2-40B4-BE49-F238E27FC236}">
-                <a16:creationId xmlns:a16="http://schemas.microsoft.com/office/drawing/2014/main" id="{2F5E01B1-602E-9AAB-E81C-2CD851951762}"/>
+                <a16:creationId xmlns:a16="http://schemas.microsoft.com/office/drawing/2014/main" id="{57C53391-5E60-7DB8-BF96-2A8BD44BB41B}"/>
               </a:ext>
             </a:extLst>
           </p:cNvPr>
@@ -3988,7 +3988,7 @@
           <p:cNvPr id="8" name="Rectángulo: esquinas redondeadas 7">
             <a:extLst>
               <a:ext uri="{FF2B5EF4-FFF2-40B4-BE49-F238E27FC236}">
-                <a16:creationId xmlns:a16="http://schemas.microsoft.com/office/drawing/2014/main" id="{B951AA5D-2568-173E-3564-B6188845BFAB}"/>
+                <a16:creationId xmlns:a16="http://schemas.microsoft.com/office/drawing/2014/main" id="{F3EA4F40-A00D-4014-B74E-E0942500B6D5}"/>
               </a:ext>
             </a:extLst>
           </p:cNvPr>
@@ -4042,7 +4042,7 @@
           <p:cNvPr id="9" name="CuadroTexto 8">
             <a:extLst>
               <a:ext uri="{FF2B5EF4-FFF2-40B4-BE49-F238E27FC236}">
-                <a16:creationId xmlns:a16="http://schemas.microsoft.com/office/drawing/2014/main" id="{A718BDB6-8A2A-59D7-94D9-1ABB0C32B839}"/>
+                <a16:creationId xmlns:a16="http://schemas.microsoft.com/office/drawing/2014/main" id="{105FA132-06B5-98AA-2252-642A93FC30F0}"/>
               </a:ext>
             </a:extLst>
           </p:cNvPr>
@@ -4082,7 +4082,7 @@
           <p:cNvPr id="10" name="CuadroTexto 9">
             <a:extLst>
               <a:ext uri="{FF2B5EF4-FFF2-40B4-BE49-F238E27FC236}">
-                <a16:creationId xmlns:a16="http://schemas.microsoft.com/office/drawing/2014/main" id="{C3202201-B8E7-16DA-060E-49AFEAAA9BBA}"/>
+                <a16:creationId xmlns:a16="http://schemas.microsoft.com/office/drawing/2014/main" id="{F6DF0045-A309-75DB-E583-BC19BE3DBE6F}"/>
               </a:ext>
             </a:extLst>
           </p:cNvPr>
@@ -4122,7 +4122,7 @@
           <p:cNvPr id="11" name="Rectángulo: esquinas redondeadas 10">
             <a:extLst>
               <a:ext uri="{FF2B5EF4-FFF2-40B4-BE49-F238E27FC236}">
-                <a16:creationId xmlns:a16="http://schemas.microsoft.com/office/drawing/2014/main" id="{19370CEA-D01B-E710-52C7-F1754B5DF4BD}"/>
+                <a16:creationId xmlns:a16="http://schemas.microsoft.com/office/drawing/2014/main" id="{9D2E0A56-6D22-4A0F-E246-95645F83C1B2}"/>
               </a:ext>
             </a:extLst>
           </p:cNvPr>
@@ -4176,7 +4176,7 @@
           <p:cNvPr id="12" name="CuadroTexto 11">
             <a:extLst>
               <a:ext uri="{FF2B5EF4-FFF2-40B4-BE49-F238E27FC236}">
-                <a16:creationId xmlns:a16="http://schemas.microsoft.com/office/drawing/2014/main" id="{F9ED67AE-12C2-53C7-385C-8F3B9E9C1C06}"/>
+                <a16:creationId xmlns:a16="http://schemas.microsoft.com/office/drawing/2014/main" id="{9508AFE7-8CFD-0FF6-B5D8-6A1F1ABFF0B8}"/>
               </a:ext>
             </a:extLst>
           </p:cNvPr>
@@ -4216,7 +4216,7 @@
           <p:cNvPr id="13" name="CuadroTexto 12">
             <a:extLst>
               <a:ext uri="{FF2B5EF4-FFF2-40B4-BE49-F238E27FC236}">
-                <a16:creationId xmlns:a16="http://schemas.microsoft.com/office/drawing/2014/main" id="{938D04B1-01AA-9D2C-F15B-DFF6B72BEBF0}"/>
+                <a16:creationId xmlns:a16="http://schemas.microsoft.com/office/drawing/2014/main" id="{B30D510A-3075-BACE-8938-17866590C4C0}"/>
               </a:ext>
             </a:extLst>
           </p:cNvPr>
@@ -4256,7 +4256,7 @@
           <p:cNvPr id="14" name="Rectángulo: esquinas redondeadas 13">
             <a:extLst>
               <a:ext uri="{FF2B5EF4-FFF2-40B4-BE49-F238E27FC236}">
-                <a16:creationId xmlns:a16="http://schemas.microsoft.com/office/drawing/2014/main" id="{61A4F89D-7193-1ED4-7F96-DE96ED033F1D}"/>
+                <a16:creationId xmlns:a16="http://schemas.microsoft.com/office/drawing/2014/main" id="{DDB74B9A-DC97-8FB9-3B55-1CE9D0431FC9}"/>
               </a:ext>
             </a:extLst>
           </p:cNvPr>
@@ -4310,7 +4310,7 @@
           <p:cNvPr id="15" name="CuadroTexto 14">
             <a:extLst>
               <a:ext uri="{FF2B5EF4-FFF2-40B4-BE49-F238E27FC236}">
-                <a16:creationId xmlns:a16="http://schemas.microsoft.com/office/drawing/2014/main" id="{364A9D98-FAC5-DD14-0376-22899E9C74B4}"/>
+                <a16:creationId xmlns:a16="http://schemas.microsoft.com/office/drawing/2014/main" id="{5C09EDE9-1D72-935B-4F1D-208CB3808437}"/>
               </a:ext>
             </a:extLst>
           </p:cNvPr>
@@ -4350,7 +4350,7 @@
           <p:cNvPr id="16" name="CuadroTexto 15">
             <a:extLst>
               <a:ext uri="{FF2B5EF4-FFF2-40B4-BE49-F238E27FC236}">
-                <a16:creationId xmlns:a16="http://schemas.microsoft.com/office/drawing/2014/main" id="{5A4CDBA9-9DAC-8B1F-16A9-301C5313FD4B}"/>
+                <a16:creationId xmlns:a16="http://schemas.microsoft.com/office/drawing/2014/main" id="{5504C2AB-32D7-51B0-8D8D-63B622801529}"/>
               </a:ext>
             </a:extLst>
           </p:cNvPr>
@@ -4390,7 +4390,7 @@
           <p:cNvPr id="17" name="Rectángulo: esquinas redondeadas 16">
             <a:extLst>
               <a:ext uri="{FF2B5EF4-FFF2-40B4-BE49-F238E27FC236}">
-                <a16:creationId xmlns:a16="http://schemas.microsoft.com/office/drawing/2014/main" id="{658C09E8-6A59-E416-E38F-35F2C3BE7A31}"/>
+                <a16:creationId xmlns:a16="http://schemas.microsoft.com/office/drawing/2014/main" id="{4B58F593-AD63-B552-0688-7DB6DAF48C2E}"/>
               </a:ext>
             </a:extLst>
           </p:cNvPr>
@@ -4444,7 +4444,7 @@
           <p:cNvPr id="18" name="CuadroTexto 17">
             <a:extLst>
               <a:ext uri="{FF2B5EF4-FFF2-40B4-BE49-F238E27FC236}">
-                <a16:creationId xmlns:a16="http://schemas.microsoft.com/office/drawing/2014/main" id="{4E03C3C2-56D3-8B47-CBB2-B8C6BB906DE5}"/>
+                <a16:creationId xmlns:a16="http://schemas.microsoft.com/office/drawing/2014/main" id="{307EEDE5-3F42-E0C3-85B0-EEEEDBBE1196}"/>
               </a:ext>
             </a:extLst>
           </p:cNvPr>
@@ -4484,7 +4484,7 @@
           <p:cNvPr id="19" name="CuadroTexto 18">
             <a:extLst>
               <a:ext uri="{FF2B5EF4-FFF2-40B4-BE49-F238E27FC236}">
-                <a16:creationId xmlns:a16="http://schemas.microsoft.com/office/drawing/2014/main" id="{BA8A35CA-E482-34AF-FE89-1AF1BABFD828}"/>
+                <a16:creationId xmlns:a16="http://schemas.microsoft.com/office/drawing/2014/main" id="{9C9DC3D6-AFBF-D787-D231-DD172FA254D4}"/>
               </a:ext>
             </a:extLst>
           </p:cNvPr>
@@ -4522,7 +4522,7 @@
     </p:spTree>
     <p:extLst>
       <p:ext uri="{BB962C8B-B14F-4D97-AF65-F5344CB8AC3E}">
-        <p14:creationId xmlns:p14="http://schemas.microsoft.com/office/powerpoint/2010/main" val="239697957"/>
+        <p14:creationId xmlns:p14="http://schemas.microsoft.com/office/powerpoint/2010/main" val="3163905367"/>
       </p:ext>
     </p:extLst>
   </p:cSld>
@@ -4562,7 +4562,7 @@
           <p:cNvPr id="2" name="CuadroTexto 1">
             <a:extLst>
               <a:ext uri="{FF2B5EF4-FFF2-40B4-BE49-F238E27FC236}">
-                <a16:creationId xmlns:a16="http://schemas.microsoft.com/office/drawing/2014/main" id="{6F1E9EC0-F667-4B56-359D-972CD20039E1}"/>
+                <a16:creationId xmlns:a16="http://schemas.microsoft.com/office/drawing/2014/main" id="{335F3ACD-6D7E-558F-DCCC-3153F82008B0}"/>
               </a:ext>
             </a:extLst>
           </p:cNvPr>
@@ -4602,7 +4602,7 @@
           <p:cNvPr id="3" name="CuadroTexto 2">
             <a:extLst>
               <a:ext uri="{FF2B5EF4-FFF2-40B4-BE49-F238E27FC236}">
-                <a16:creationId xmlns:a16="http://schemas.microsoft.com/office/drawing/2014/main" id="{15DCCC73-4BD4-AE87-0667-46774F68DE5A}"/>
+                <a16:creationId xmlns:a16="http://schemas.microsoft.com/office/drawing/2014/main" id="{69B93B46-68C3-01DA-F96E-996FF02A0DDC}"/>
               </a:ext>
             </a:extLst>
           </p:cNvPr>
@@ -4642,7 +4642,7 @@
           <p:cNvPr id="4" name="CuadroTexto 3">
             <a:extLst>
               <a:ext uri="{FF2B5EF4-FFF2-40B4-BE49-F238E27FC236}">
-                <a16:creationId xmlns:a16="http://schemas.microsoft.com/office/drawing/2014/main" id="{21A5879C-26AE-E6A0-295B-83A024344107}"/>
+                <a16:creationId xmlns:a16="http://schemas.microsoft.com/office/drawing/2014/main" id="{409939A8-2448-44CA-16EA-FE600681691A}"/>
               </a:ext>
             </a:extLst>
           </p:cNvPr>
@@ -4682,7 +4682,7 @@
           <p:cNvPr id="5" name="Rectángulo: esquinas redondeadas 4">
             <a:extLst>
               <a:ext uri="{FF2B5EF4-FFF2-40B4-BE49-F238E27FC236}">
-                <a16:creationId xmlns:a16="http://schemas.microsoft.com/office/drawing/2014/main" id="{A2FED42F-BB72-4BBF-D508-E0FD37612B99}"/>
+                <a16:creationId xmlns:a16="http://schemas.microsoft.com/office/drawing/2014/main" id="{FE36CB12-3F6B-8C73-109F-8925106B4365}"/>
               </a:ext>
             </a:extLst>
           </p:cNvPr>
@@ -4736,7 +4736,7 @@
           <p:cNvPr id="6" name="CuadroTexto 5">
             <a:extLst>
               <a:ext uri="{FF2B5EF4-FFF2-40B4-BE49-F238E27FC236}">
-                <a16:creationId xmlns:a16="http://schemas.microsoft.com/office/drawing/2014/main" id="{52F9094C-B5EA-4D0E-AFCF-A07B6E20E5C6}"/>
+                <a16:creationId xmlns:a16="http://schemas.microsoft.com/office/drawing/2014/main" id="{8064C8B6-4FC8-72DF-DB7D-38C0B54EEB90}"/>
               </a:ext>
             </a:extLst>
           </p:cNvPr>
@@ -4776,7 +4776,7 @@
           <p:cNvPr id="7" name="CuadroTexto 6">
             <a:extLst>
               <a:ext uri="{FF2B5EF4-FFF2-40B4-BE49-F238E27FC236}">
-                <a16:creationId xmlns:a16="http://schemas.microsoft.com/office/drawing/2014/main" id="{2EBD63C4-9FE0-B826-1C14-DFD65B38CCF5}"/>
+                <a16:creationId xmlns:a16="http://schemas.microsoft.com/office/drawing/2014/main" id="{34FBAB40-7507-AABA-BD78-3A210EDF719B}"/>
               </a:ext>
             </a:extLst>
           </p:cNvPr>
@@ -4816,7 +4816,7 @@
           <p:cNvPr id="8" name="Rectángulo: esquinas redondeadas 7">
             <a:extLst>
               <a:ext uri="{FF2B5EF4-FFF2-40B4-BE49-F238E27FC236}">
-                <a16:creationId xmlns:a16="http://schemas.microsoft.com/office/drawing/2014/main" id="{91A17B97-0060-DCF1-D36A-4D61DA7C94FE}"/>
+                <a16:creationId xmlns:a16="http://schemas.microsoft.com/office/drawing/2014/main" id="{5066D45E-EB66-0063-7ABA-758AC6A4EC3A}"/>
               </a:ext>
             </a:extLst>
           </p:cNvPr>
@@ -4870,7 +4870,7 @@
           <p:cNvPr id="9" name="CuadroTexto 8">
             <a:extLst>
               <a:ext uri="{FF2B5EF4-FFF2-40B4-BE49-F238E27FC236}">
-                <a16:creationId xmlns:a16="http://schemas.microsoft.com/office/drawing/2014/main" id="{1BCAE38A-E9B9-C367-4FB0-9D291BB46725}"/>
+                <a16:creationId xmlns:a16="http://schemas.microsoft.com/office/drawing/2014/main" id="{CEA7E78D-7589-43E1-79CE-8B4EA40E8A4A}"/>
               </a:ext>
             </a:extLst>
           </p:cNvPr>
@@ -4910,7 +4910,7 @@
           <p:cNvPr id="10" name="CuadroTexto 9">
             <a:extLst>
               <a:ext uri="{FF2B5EF4-FFF2-40B4-BE49-F238E27FC236}">
-                <a16:creationId xmlns:a16="http://schemas.microsoft.com/office/drawing/2014/main" id="{9D4FE66D-3B12-E967-6482-E6D8B4D660CA}"/>
+                <a16:creationId xmlns:a16="http://schemas.microsoft.com/office/drawing/2014/main" id="{92F702A2-5CEB-7576-A787-8A61EFA2127E}"/>
               </a:ext>
             </a:extLst>
           </p:cNvPr>
@@ -4950,7 +4950,7 @@
           <p:cNvPr id="11" name="Rectángulo: esquinas redondeadas 10">
             <a:extLst>
               <a:ext uri="{FF2B5EF4-FFF2-40B4-BE49-F238E27FC236}">
-                <a16:creationId xmlns:a16="http://schemas.microsoft.com/office/drawing/2014/main" id="{8F23661F-2B82-5F38-1D07-61D5D3F3D5C8}"/>
+                <a16:creationId xmlns:a16="http://schemas.microsoft.com/office/drawing/2014/main" id="{0F3E7393-FB97-F29D-F9BB-FBBFB5EDC115}"/>
               </a:ext>
             </a:extLst>
           </p:cNvPr>
@@ -5004,7 +5004,7 @@
           <p:cNvPr id="12" name="CuadroTexto 11">
             <a:extLst>
               <a:ext uri="{FF2B5EF4-FFF2-40B4-BE49-F238E27FC236}">
-                <a16:creationId xmlns:a16="http://schemas.microsoft.com/office/drawing/2014/main" id="{997A0180-7500-75A2-C478-5D938FDD5E26}"/>
+                <a16:creationId xmlns:a16="http://schemas.microsoft.com/office/drawing/2014/main" id="{D1DF95A3-3B8C-BBCB-440D-FF242319D753}"/>
               </a:ext>
             </a:extLst>
           </p:cNvPr>
@@ -5044,7 +5044,7 @@
           <p:cNvPr id="13" name="CuadroTexto 12">
             <a:extLst>
               <a:ext uri="{FF2B5EF4-FFF2-40B4-BE49-F238E27FC236}">
-                <a16:creationId xmlns:a16="http://schemas.microsoft.com/office/drawing/2014/main" id="{274E05EA-CCC9-48DA-6D32-AB0A437C2C5F}"/>
+                <a16:creationId xmlns:a16="http://schemas.microsoft.com/office/drawing/2014/main" id="{E96EBE17-31C8-2466-B02D-8F17579092DD}"/>
               </a:ext>
             </a:extLst>
           </p:cNvPr>
@@ -5068,13 +5068,13 @@
           <a:lstStyle/>
           <a:p>
             <a:r>
-              <a:rPr lang="es-ES" sz="1000">
+              <a:rPr lang="es-ES" sz="900">
                 <a:solidFill>
                   <a:srgbClr val="F6F8FC"/>
                 </a:solidFill>
                 <a:latin typeface="Consolas" panose="020B0609020204030204" pitchFamily="49" charset="0"/>
               </a:rPr>
-              <a:t>https://agora.34.175...</a:t>
+              <a:t>https://agora.34.175.225.98...</a:t>
             </a:r>
           </a:p>
         </p:txBody>
@@ -5084,7 +5084,7 @@
           <p:cNvPr id="14" name="CuadroTexto 13">
             <a:extLst>
               <a:ext uri="{FF2B5EF4-FFF2-40B4-BE49-F238E27FC236}">
-                <a16:creationId xmlns:a16="http://schemas.microsoft.com/office/drawing/2014/main" id="{F6B10B3E-18A4-45B7-ABE4-6A2D870E6727}"/>
+                <a16:creationId xmlns:a16="http://schemas.microsoft.com/office/drawing/2014/main" id="{618D0947-2F0A-2FE3-C043-548405AC1F5D}"/>
               </a:ext>
             </a:extLst>
           </p:cNvPr>
@@ -5165,7 +5165,7 @@
     </p:spTree>
     <p:extLst>
       <p:ext uri="{BB962C8B-B14F-4D97-AF65-F5344CB8AC3E}">
-        <p14:creationId xmlns:p14="http://schemas.microsoft.com/office/powerpoint/2010/main" val="2479140049"/>
+        <p14:creationId xmlns:p14="http://schemas.microsoft.com/office/powerpoint/2010/main" val="1478726641"/>
       </p:ext>
     </p:extLst>
   </p:cSld>
@@ -5205,7 +5205,7 @@
           <p:cNvPr id="2" name="CuadroTexto 1">
             <a:extLst>
               <a:ext uri="{FF2B5EF4-FFF2-40B4-BE49-F238E27FC236}">
-                <a16:creationId xmlns:a16="http://schemas.microsoft.com/office/drawing/2014/main" id="{03DB7E78-8B3E-11AC-2762-22C0BCF78BAD}"/>
+                <a16:creationId xmlns:a16="http://schemas.microsoft.com/office/drawing/2014/main" id="{ED226011-882C-5D32-E9F7-E07A5A18B3EE}"/>
               </a:ext>
             </a:extLst>
           </p:cNvPr>
@@ -5245,7 +5245,7 @@
           <p:cNvPr id="3" name="CuadroTexto 2">
             <a:extLst>
               <a:ext uri="{FF2B5EF4-FFF2-40B4-BE49-F238E27FC236}">
-                <a16:creationId xmlns:a16="http://schemas.microsoft.com/office/drawing/2014/main" id="{E09E744C-5809-A687-BBE4-A99858670EF8}"/>
+                <a16:creationId xmlns:a16="http://schemas.microsoft.com/office/drawing/2014/main" id="{6EBBE66B-C209-06AB-7B21-134AF129D97E}"/>
               </a:ext>
             </a:extLst>
           </p:cNvPr>
@@ -5285,7 +5285,7 @@
           <p:cNvPr id="4" name="CuadroTexto 3">
             <a:extLst>
               <a:ext uri="{FF2B5EF4-FFF2-40B4-BE49-F238E27FC236}">
-                <a16:creationId xmlns:a16="http://schemas.microsoft.com/office/drawing/2014/main" id="{0EDE0FD2-2286-1920-8DC6-28BF35E55E70}"/>
+                <a16:creationId xmlns:a16="http://schemas.microsoft.com/office/drawing/2014/main" id="{9B7CD03D-62F3-7881-498F-DFEEF490B40D}"/>
               </a:ext>
             </a:extLst>
           </p:cNvPr>
@@ -5325,7 +5325,7 @@
           <p:cNvPr id="6" name="Imagen 5">
             <a:extLst>
               <a:ext uri="{FF2B5EF4-FFF2-40B4-BE49-F238E27FC236}">
-                <a16:creationId xmlns:a16="http://schemas.microsoft.com/office/drawing/2014/main" id="{7D235ABE-6CE1-ED99-5A52-2C162FF8ACB3}"/>
+                <a16:creationId xmlns:a16="http://schemas.microsoft.com/office/drawing/2014/main" id="{6FD68646-2437-6E7B-BC5A-E81618CDDD5C}"/>
               </a:ext>
             </a:extLst>
           </p:cNvPr>
@@ -5366,7 +5366,7 @@
           <p:cNvPr id="7" name="Rectángulo: esquinas redondeadas 6">
             <a:extLst>
               <a:ext uri="{FF2B5EF4-FFF2-40B4-BE49-F238E27FC236}">
-                <a16:creationId xmlns:a16="http://schemas.microsoft.com/office/drawing/2014/main" id="{78BC451A-3875-5BF9-9443-0E4BFD8AE8B6}"/>
+                <a16:creationId xmlns:a16="http://schemas.microsoft.com/office/drawing/2014/main" id="{DBFDBCC1-E1EF-D77B-8FE3-CE19CEAE6F0F}"/>
               </a:ext>
             </a:extLst>
           </p:cNvPr>
@@ -5420,7 +5420,7 @@
           <p:cNvPr id="8" name="CuadroTexto 7">
             <a:extLst>
               <a:ext uri="{FF2B5EF4-FFF2-40B4-BE49-F238E27FC236}">
-                <a16:creationId xmlns:a16="http://schemas.microsoft.com/office/drawing/2014/main" id="{CC57963F-9EC0-4099-7B7B-4EB80102A431}"/>
+                <a16:creationId xmlns:a16="http://schemas.microsoft.com/office/drawing/2014/main" id="{70ACC945-01BD-D4E7-6294-F7EF4B534FDF}"/>
               </a:ext>
             </a:extLst>
           </p:cNvPr>
@@ -5460,7 +5460,7 @@
           <p:cNvPr id="9" name="CuadroTexto 8">
             <a:extLst>
               <a:ext uri="{FF2B5EF4-FFF2-40B4-BE49-F238E27FC236}">
-                <a16:creationId xmlns:a16="http://schemas.microsoft.com/office/drawing/2014/main" id="{3E5C9C25-024E-58A9-F6C5-CDD9E7C0AB05}"/>
+                <a16:creationId xmlns:a16="http://schemas.microsoft.com/office/drawing/2014/main" id="{F7AC6533-69F5-F6BB-1B20-2EADCB7D8E47}"/>
               </a:ext>
             </a:extLst>
           </p:cNvPr>
@@ -5500,7 +5500,7 @@
           <p:cNvPr id="10" name="CuadroTexto 9">
             <a:extLst>
               <a:ext uri="{FF2B5EF4-FFF2-40B4-BE49-F238E27FC236}">
-                <a16:creationId xmlns:a16="http://schemas.microsoft.com/office/drawing/2014/main" id="{93C8ED2A-C773-D0D2-D196-68E99818FABC}"/>
+                <a16:creationId xmlns:a16="http://schemas.microsoft.com/office/drawing/2014/main" id="{20213126-36BE-9D61-BB6F-48D2DAA61D48}"/>
               </a:ext>
             </a:extLst>
           </p:cNvPr>
@@ -5599,7 +5599,7 @@
     </p:spTree>
     <p:extLst>
       <p:ext uri="{BB962C8B-B14F-4D97-AF65-F5344CB8AC3E}">
-        <p14:creationId xmlns:p14="http://schemas.microsoft.com/office/powerpoint/2010/main" val="660871041"/>
+        <p14:creationId xmlns:p14="http://schemas.microsoft.com/office/powerpoint/2010/main" val="1591126200"/>
       </p:ext>
     </p:extLst>
   </p:cSld>
@@ -5639,7 +5639,7 @@
           <p:cNvPr id="2" name="CuadroTexto 1">
             <a:extLst>
               <a:ext uri="{FF2B5EF4-FFF2-40B4-BE49-F238E27FC236}">
-                <a16:creationId xmlns:a16="http://schemas.microsoft.com/office/drawing/2014/main" id="{7CEBF6AB-5197-355B-1FA4-C2D234A4110F}"/>
+                <a16:creationId xmlns:a16="http://schemas.microsoft.com/office/drawing/2014/main" id="{F0FEA101-1787-D34F-EBCE-81821753563A}"/>
               </a:ext>
             </a:extLst>
           </p:cNvPr>
@@ -5679,7 +5679,7 @@
           <p:cNvPr id="3" name="CuadroTexto 2">
             <a:extLst>
               <a:ext uri="{FF2B5EF4-FFF2-40B4-BE49-F238E27FC236}">
-                <a16:creationId xmlns:a16="http://schemas.microsoft.com/office/drawing/2014/main" id="{7A32CA94-D527-C72B-8325-6DCAEB806FD0}"/>
+                <a16:creationId xmlns:a16="http://schemas.microsoft.com/office/drawing/2014/main" id="{0BE57B89-4ECA-778F-091E-780B6A53E81A}"/>
               </a:ext>
             </a:extLst>
           </p:cNvPr>
@@ -5719,7 +5719,7 @@
           <p:cNvPr id="4" name="CuadroTexto 3">
             <a:extLst>
               <a:ext uri="{FF2B5EF4-FFF2-40B4-BE49-F238E27FC236}">
-                <a16:creationId xmlns:a16="http://schemas.microsoft.com/office/drawing/2014/main" id="{F2235965-61F5-523C-968F-6345D6A076C2}"/>
+                <a16:creationId xmlns:a16="http://schemas.microsoft.com/office/drawing/2014/main" id="{D8359D4C-15E0-EF2F-320C-1AECD8A8143D}"/>
               </a:ext>
             </a:extLst>
           </p:cNvPr>
@@ -5759,7 +5759,7 @@
           <p:cNvPr id="6" name="Imagen 5">
             <a:extLst>
               <a:ext uri="{FF2B5EF4-FFF2-40B4-BE49-F238E27FC236}">
-                <a16:creationId xmlns:a16="http://schemas.microsoft.com/office/drawing/2014/main" id="{3458D1CA-BD6B-4DEE-EC2D-DBAC79354BF9}"/>
+                <a16:creationId xmlns:a16="http://schemas.microsoft.com/office/drawing/2014/main" id="{E368E9F4-87A0-5B38-0FA9-F674CD3CCE24}"/>
               </a:ext>
             </a:extLst>
           </p:cNvPr>
@@ -5782,8 +5782,8 @@
         </p:blipFill>
         <p:spPr>
           <a:xfrm>
-            <a:off x="635000" y="2342377"/>
-            <a:ext cx="5461000" cy="2998746"/>
+            <a:off x="538560" y="1879600"/>
+            <a:ext cx="5679281" cy="4038600"/>
           </a:xfrm>
           <a:prstGeom prst="rect">
             <a:avLst/>
@@ -5800,7 +5800,7 @@
           <p:cNvPr id="7" name="CuadroTexto 6">
             <a:extLst>
               <a:ext uri="{FF2B5EF4-FFF2-40B4-BE49-F238E27FC236}">
-                <a16:creationId xmlns:a16="http://schemas.microsoft.com/office/drawing/2014/main" id="{DFB509E2-596F-AAC5-7A2E-4DE33DB60014}"/>
+                <a16:creationId xmlns:a16="http://schemas.microsoft.com/office/drawing/2014/main" id="{D8ED3307-E8D5-7A56-34A1-97FA5618ED28}"/>
               </a:ext>
             </a:extLst>
           </p:cNvPr>
@@ -5917,7 +5917,7 @@
     </p:spTree>
     <p:extLst>
       <p:ext uri="{BB962C8B-B14F-4D97-AF65-F5344CB8AC3E}">
-        <p14:creationId xmlns:p14="http://schemas.microsoft.com/office/powerpoint/2010/main" val="311254604"/>
+        <p14:creationId xmlns:p14="http://schemas.microsoft.com/office/powerpoint/2010/main" val="4092572609"/>
       </p:ext>
     </p:extLst>
   </p:cSld>
@@ -5957,7 +5957,7 @@
           <p:cNvPr id="2" name="CuadroTexto 1">
             <a:extLst>
               <a:ext uri="{FF2B5EF4-FFF2-40B4-BE49-F238E27FC236}">
-                <a16:creationId xmlns:a16="http://schemas.microsoft.com/office/drawing/2014/main" id="{28FD96AE-D367-0414-763C-D30FE2713BBF}"/>
+                <a16:creationId xmlns:a16="http://schemas.microsoft.com/office/drawing/2014/main" id="{EC079CF6-847E-B171-8FC9-EE51868AA9FC}"/>
               </a:ext>
             </a:extLst>
           </p:cNvPr>
@@ -5997,7 +5997,7 @@
           <p:cNvPr id="3" name="CuadroTexto 2">
             <a:extLst>
               <a:ext uri="{FF2B5EF4-FFF2-40B4-BE49-F238E27FC236}">
-                <a16:creationId xmlns:a16="http://schemas.microsoft.com/office/drawing/2014/main" id="{9CACD615-673E-68DD-6605-F0C87DC5F3BC}"/>
+                <a16:creationId xmlns:a16="http://schemas.microsoft.com/office/drawing/2014/main" id="{C313C642-87F1-721E-4386-6FE868113DC6}"/>
               </a:ext>
             </a:extLst>
           </p:cNvPr>
@@ -6037,7 +6037,7 @@
           <p:cNvPr id="4" name="Rectángulo: esquinas redondeadas 3">
             <a:extLst>
               <a:ext uri="{FF2B5EF4-FFF2-40B4-BE49-F238E27FC236}">
-                <a16:creationId xmlns:a16="http://schemas.microsoft.com/office/drawing/2014/main" id="{8E0C63F5-D5D9-6EC9-1D0F-97E31CC5C01F}"/>
+                <a16:creationId xmlns:a16="http://schemas.microsoft.com/office/drawing/2014/main" id="{85BECDB7-B362-8231-9619-F2E5D58A1005}"/>
               </a:ext>
             </a:extLst>
           </p:cNvPr>
@@ -6091,7 +6091,7 @@
           <p:cNvPr id="5" name="CuadroTexto 4">
             <a:extLst>
               <a:ext uri="{FF2B5EF4-FFF2-40B4-BE49-F238E27FC236}">
-                <a16:creationId xmlns:a16="http://schemas.microsoft.com/office/drawing/2014/main" id="{8E3DDE59-0A1C-2DF0-F70F-323A93ED1DCF}"/>
+                <a16:creationId xmlns:a16="http://schemas.microsoft.com/office/drawing/2014/main" id="{3E29C3F1-5EA6-5F0B-438B-8715970D4802}"/>
               </a:ext>
             </a:extLst>
           </p:cNvPr>
@@ -6121,7 +6121,7 @@
                 </a:solidFill>
                 <a:latin typeface="Segoe UI" panose="020B0502040204020203" pitchFamily="34" charset="0"/>
               </a:rPr>
-              <a:t>101</a:t>
+              <a:t>110</a:t>
             </a:r>
           </a:p>
         </p:txBody>
@@ -6131,7 +6131,7 @@
           <p:cNvPr id="6" name="CuadroTexto 5">
             <a:extLst>
               <a:ext uri="{FF2B5EF4-FFF2-40B4-BE49-F238E27FC236}">
-                <a16:creationId xmlns:a16="http://schemas.microsoft.com/office/drawing/2014/main" id="{EE378B01-6BA6-86A4-4F17-E9FEA64A95E6}"/>
+                <a16:creationId xmlns:a16="http://schemas.microsoft.com/office/drawing/2014/main" id="{7D0116EA-CA58-8658-8A63-448B22684393}"/>
               </a:ext>
             </a:extLst>
           </p:cNvPr>
@@ -6171,7 +6171,7 @@
           <p:cNvPr id="7" name="Rectángulo: esquinas redondeadas 6">
             <a:extLst>
               <a:ext uri="{FF2B5EF4-FFF2-40B4-BE49-F238E27FC236}">
-                <a16:creationId xmlns:a16="http://schemas.microsoft.com/office/drawing/2014/main" id="{8EE1CCE0-2338-4500-C634-21A04B3AF65A}"/>
+                <a16:creationId xmlns:a16="http://schemas.microsoft.com/office/drawing/2014/main" id="{FE84D8D8-90E1-8533-7204-D3D2A4BF27ED}"/>
               </a:ext>
             </a:extLst>
           </p:cNvPr>
@@ -6225,7 +6225,7 @@
           <p:cNvPr id="8" name="CuadroTexto 7">
             <a:extLst>
               <a:ext uri="{FF2B5EF4-FFF2-40B4-BE49-F238E27FC236}">
-                <a16:creationId xmlns:a16="http://schemas.microsoft.com/office/drawing/2014/main" id="{4F23986E-CC36-D0E2-A5CB-48C70AC53935}"/>
+                <a16:creationId xmlns:a16="http://schemas.microsoft.com/office/drawing/2014/main" id="{E87F0B20-E7AC-6505-CF65-3BA1DF35B8D6}"/>
               </a:ext>
             </a:extLst>
           </p:cNvPr>
@@ -6255,7 +6255,7 @@
                 </a:solidFill>
                 <a:latin typeface="Segoe UI" panose="020B0502040204020203" pitchFamily="34" charset="0"/>
               </a:rPr>
-              <a:t>567</a:t>
+              <a:t>628</a:t>
             </a:r>
           </a:p>
         </p:txBody>
@@ -6265,7 +6265,7 @@
           <p:cNvPr id="9" name="CuadroTexto 8">
             <a:extLst>
               <a:ext uri="{FF2B5EF4-FFF2-40B4-BE49-F238E27FC236}">
-                <a16:creationId xmlns:a16="http://schemas.microsoft.com/office/drawing/2014/main" id="{6ECC1234-7648-5BF2-17C8-CFA69A67254D}"/>
+                <a16:creationId xmlns:a16="http://schemas.microsoft.com/office/drawing/2014/main" id="{2C214E30-597D-FEC0-05E2-F3AC74E7DEB8}"/>
               </a:ext>
             </a:extLst>
           </p:cNvPr>
@@ -6305,7 +6305,7 @@
           <p:cNvPr id="10" name="Rectángulo: esquinas redondeadas 9">
             <a:extLst>
               <a:ext uri="{FF2B5EF4-FFF2-40B4-BE49-F238E27FC236}">
-                <a16:creationId xmlns:a16="http://schemas.microsoft.com/office/drawing/2014/main" id="{3AB075FD-EADE-71FA-8BC1-E0A3D54430C3}"/>
+                <a16:creationId xmlns:a16="http://schemas.microsoft.com/office/drawing/2014/main" id="{98FCAEE6-CF8C-4E2F-0F19-93531F6094D9}"/>
               </a:ext>
             </a:extLst>
           </p:cNvPr>
@@ -6359,7 +6359,7 @@
           <p:cNvPr id="11" name="CuadroTexto 10">
             <a:extLst>
               <a:ext uri="{FF2B5EF4-FFF2-40B4-BE49-F238E27FC236}">
-                <a16:creationId xmlns:a16="http://schemas.microsoft.com/office/drawing/2014/main" id="{539C3D89-7AF7-DA66-C54C-10F62C7AA264}"/>
+                <a16:creationId xmlns:a16="http://schemas.microsoft.com/office/drawing/2014/main" id="{C9DD5221-CB77-3946-945B-ED03C56B4F18}"/>
               </a:ext>
             </a:extLst>
           </p:cNvPr>
@@ -6399,7 +6399,7 @@
           <p:cNvPr id="12" name="CuadroTexto 11">
             <a:extLst>
               <a:ext uri="{FF2B5EF4-FFF2-40B4-BE49-F238E27FC236}">
-                <a16:creationId xmlns:a16="http://schemas.microsoft.com/office/drawing/2014/main" id="{AC7C1ADE-DAA9-F727-DA5D-FB4A5DBDBE8F}"/>
+                <a16:creationId xmlns:a16="http://schemas.microsoft.com/office/drawing/2014/main" id="{56A59FD6-B3A1-CD70-9DE0-3E8780A7FAA4}"/>
               </a:ext>
             </a:extLst>
           </p:cNvPr>
@@ -6439,7 +6439,7 @@
           <p:cNvPr id="13" name="Rectángulo: esquinas redondeadas 12">
             <a:extLst>
               <a:ext uri="{FF2B5EF4-FFF2-40B4-BE49-F238E27FC236}">
-                <a16:creationId xmlns:a16="http://schemas.microsoft.com/office/drawing/2014/main" id="{024337F6-C3C6-F30A-6583-BFFAD9BCD1D7}"/>
+                <a16:creationId xmlns:a16="http://schemas.microsoft.com/office/drawing/2014/main" id="{0B1F8AD1-7F45-EF05-0EFE-43C74B89FCF5}"/>
               </a:ext>
             </a:extLst>
           </p:cNvPr>
@@ -6493,7 +6493,7 @@
           <p:cNvPr id="14" name="CuadroTexto 13">
             <a:extLst>
               <a:ext uri="{FF2B5EF4-FFF2-40B4-BE49-F238E27FC236}">
-                <a16:creationId xmlns:a16="http://schemas.microsoft.com/office/drawing/2014/main" id="{ACCF68A8-F6F2-70CC-5887-C54A1EAEAE18}"/>
+                <a16:creationId xmlns:a16="http://schemas.microsoft.com/office/drawing/2014/main" id="{3F364583-14F5-A4A3-5040-F37EDCE902B2}"/>
               </a:ext>
             </a:extLst>
           </p:cNvPr>
@@ -6533,7 +6533,7 @@
           <p:cNvPr id="15" name="CuadroTexto 14">
             <a:extLst>
               <a:ext uri="{FF2B5EF4-FFF2-40B4-BE49-F238E27FC236}">
-                <a16:creationId xmlns:a16="http://schemas.microsoft.com/office/drawing/2014/main" id="{D832274A-EBF8-9206-36A4-2913CDE82274}"/>
+                <a16:creationId xmlns:a16="http://schemas.microsoft.com/office/drawing/2014/main" id="{CF160FCF-4064-F354-0757-E15C94A23CEA}"/>
               </a:ext>
             </a:extLst>
           </p:cNvPr>
@@ -6573,7 +6573,7 @@
           <p:cNvPr id="16" name="CuadroTexto 15">
             <a:extLst>
               <a:ext uri="{FF2B5EF4-FFF2-40B4-BE49-F238E27FC236}">
-                <a16:creationId xmlns:a16="http://schemas.microsoft.com/office/drawing/2014/main" id="{C79D19F7-80E7-224C-A8F0-5FA014DB7486}"/>
+                <a16:creationId xmlns:a16="http://schemas.microsoft.com/office/drawing/2014/main" id="{F42B4C6B-081C-983E-4721-C578D827C133}"/>
               </a:ext>
             </a:extLst>
           </p:cNvPr>
@@ -6656,7 +6656,7 @@
           <p:cNvPr id="17" name="CuadroTexto 16">
             <a:extLst>
               <a:ext uri="{FF2B5EF4-FFF2-40B4-BE49-F238E27FC236}">
-                <a16:creationId xmlns:a16="http://schemas.microsoft.com/office/drawing/2014/main" id="{8E3042E1-1D68-59B5-C091-3A18487C2D4F}"/>
+                <a16:creationId xmlns:a16="http://schemas.microsoft.com/office/drawing/2014/main" id="{DDAC2496-CB21-BB79-6A8F-1736264AA6EB}"/>
               </a:ext>
             </a:extLst>
           </p:cNvPr>
@@ -6694,7 +6694,7 @@
     </p:spTree>
     <p:extLst>
       <p:ext uri="{BB962C8B-B14F-4D97-AF65-F5344CB8AC3E}">
-        <p14:creationId xmlns:p14="http://schemas.microsoft.com/office/powerpoint/2010/main" val="2401975934"/>
+        <p14:creationId xmlns:p14="http://schemas.microsoft.com/office/powerpoint/2010/main" val="759711986"/>
       </p:ext>
     </p:extLst>
   </p:cSld>
@@ -6734,7 +6734,7 @@
           <p:cNvPr id="2" name="CuadroTexto 1">
             <a:extLst>
               <a:ext uri="{FF2B5EF4-FFF2-40B4-BE49-F238E27FC236}">
-                <a16:creationId xmlns:a16="http://schemas.microsoft.com/office/drawing/2014/main" id="{C38F03E6-8663-E337-8584-3E34D8AF0123}"/>
+                <a16:creationId xmlns:a16="http://schemas.microsoft.com/office/drawing/2014/main" id="{5F0FB4CF-CD89-070F-975D-674DF1115C7B}"/>
               </a:ext>
             </a:extLst>
           </p:cNvPr>
@@ -6774,7 +6774,7 @@
           <p:cNvPr id="3" name="CuadroTexto 2">
             <a:extLst>
               <a:ext uri="{FF2B5EF4-FFF2-40B4-BE49-F238E27FC236}">
-                <a16:creationId xmlns:a16="http://schemas.microsoft.com/office/drawing/2014/main" id="{D7669304-2C55-A4E6-F092-CCF7B482F334}"/>
+                <a16:creationId xmlns:a16="http://schemas.microsoft.com/office/drawing/2014/main" id="{5C7F7206-889E-083C-0320-557B21F7B36B}"/>
               </a:ext>
             </a:extLst>
           </p:cNvPr>
@@ -6814,7 +6814,7 @@
           <p:cNvPr id="4" name="CuadroTexto 3">
             <a:extLst>
               <a:ext uri="{FF2B5EF4-FFF2-40B4-BE49-F238E27FC236}">
-                <a16:creationId xmlns:a16="http://schemas.microsoft.com/office/drawing/2014/main" id="{9FFB00EA-D6CD-F919-F770-4771792CD503}"/>
+                <a16:creationId xmlns:a16="http://schemas.microsoft.com/office/drawing/2014/main" id="{B1BC3496-DE1B-F1DC-BE3A-CA6209C02ADB}"/>
               </a:ext>
             </a:extLst>
           </p:cNvPr>
@@ -6854,7 +6854,7 @@
           <p:cNvPr id="5" name="Rectángulo: esquinas redondeadas 4">
             <a:extLst>
               <a:ext uri="{FF2B5EF4-FFF2-40B4-BE49-F238E27FC236}">
-                <a16:creationId xmlns:a16="http://schemas.microsoft.com/office/drawing/2014/main" id="{775C0131-DC1E-0995-3E0A-AF28EEBD93FF}"/>
+                <a16:creationId xmlns:a16="http://schemas.microsoft.com/office/drawing/2014/main" id="{63E13D95-BD0D-3E84-2634-A940742D71A5}"/>
               </a:ext>
             </a:extLst>
           </p:cNvPr>
@@ -6908,7 +6908,7 @@
           <p:cNvPr id="6" name="CuadroTexto 5">
             <a:extLst>
               <a:ext uri="{FF2B5EF4-FFF2-40B4-BE49-F238E27FC236}">
-                <a16:creationId xmlns:a16="http://schemas.microsoft.com/office/drawing/2014/main" id="{131B2301-D864-05E7-D62E-A28673A18ACB}"/>
+                <a16:creationId xmlns:a16="http://schemas.microsoft.com/office/drawing/2014/main" id="{4E7E188B-4D9F-3058-AD3A-65F08844F2E9}"/>
               </a:ext>
             </a:extLst>
           </p:cNvPr>
@@ -6938,7 +6938,7 @@
                 </a:solidFill>
                 <a:latin typeface="Consolas" panose="020B0609020204030204" pitchFamily="49" charset="0"/>
               </a:rPr>
-              <a:t>https://agora.34.175.224.87.nip.io/app   |   https://agora.34.175.224.87.nip.io/externo</a:t>
+              <a:t>\https://agora.34.175.225.98.nip.io/app   |   https://agora.34.175.225.98.nip.io/externo\</a:t>
             </a:r>
           </a:p>
         </p:txBody>
@@ -6948,7 +6948,7 @@
           <p:cNvPr id="7" name="CuadroTexto 6">
             <a:extLst>
               <a:ext uri="{FF2B5EF4-FFF2-40B4-BE49-F238E27FC236}">
-                <a16:creationId xmlns:a16="http://schemas.microsoft.com/office/drawing/2014/main" id="{09A2E840-415C-A105-E2E4-F36E50BEC8C1}"/>
+                <a16:creationId xmlns:a16="http://schemas.microsoft.com/office/drawing/2014/main" id="{BF17D35A-B719-4E36-CAF5-9BF82D8F1071}"/>
               </a:ext>
             </a:extLst>
           </p:cNvPr>
@@ -6988,7 +6988,7 @@
           <p:cNvPr id="8" name="Rectángulo: esquinas redondeadas 7">
             <a:extLst>
               <a:ext uri="{FF2B5EF4-FFF2-40B4-BE49-F238E27FC236}">
-                <a16:creationId xmlns:a16="http://schemas.microsoft.com/office/drawing/2014/main" id="{B96C461D-0C13-B400-DE65-C8C17E1EDAEF}"/>
+                <a16:creationId xmlns:a16="http://schemas.microsoft.com/office/drawing/2014/main" id="{777739E0-3CDD-0B09-60EB-C69716BC7E69}"/>
               </a:ext>
             </a:extLst>
           </p:cNvPr>
@@ -7042,7 +7042,7 @@
           <p:cNvPr id="9" name="CuadroTexto 8">
             <a:extLst>
               <a:ext uri="{FF2B5EF4-FFF2-40B4-BE49-F238E27FC236}">
-                <a16:creationId xmlns:a16="http://schemas.microsoft.com/office/drawing/2014/main" id="{61C24002-41E3-D09E-6180-F7D4F214AD45}"/>
+                <a16:creationId xmlns:a16="http://schemas.microsoft.com/office/drawing/2014/main" id="{7051E15C-4CDE-E078-CF5F-A8410C9D6F57}"/>
               </a:ext>
             </a:extLst>
           </p:cNvPr>
@@ -7082,7 +7082,7 @@
           <p:cNvPr id="10" name="CuadroTexto 9">
             <a:extLst>
               <a:ext uri="{FF2B5EF4-FFF2-40B4-BE49-F238E27FC236}">
-                <a16:creationId xmlns:a16="http://schemas.microsoft.com/office/drawing/2014/main" id="{F52D2E50-3C75-1DDF-25F3-8D7CB733BCCD}"/>
+                <a16:creationId xmlns:a16="http://schemas.microsoft.com/office/drawing/2014/main" id="{1B9FCC05-FE2F-3DDE-EB22-D8A363E94EDD}"/>
               </a:ext>
             </a:extLst>
           </p:cNvPr>
@@ -7122,7 +7122,7 @@
           <p:cNvPr id="11" name="CuadroTexto 10">
             <a:extLst>
               <a:ext uri="{FF2B5EF4-FFF2-40B4-BE49-F238E27FC236}">
-                <a16:creationId xmlns:a16="http://schemas.microsoft.com/office/drawing/2014/main" id="{9ECD6467-C862-5541-7997-A449E19DE802}"/>
+                <a16:creationId xmlns:a16="http://schemas.microsoft.com/office/drawing/2014/main" id="{089B4889-BC9D-173C-5933-8C4A572F9949}"/>
               </a:ext>
             </a:extLst>
           </p:cNvPr>
@@ -7162,7 +7162,7 @@
           <p:cNvPr id="12" name="CuadroTexto 11">
             <a:extLst>
               <a:ext uri="{FF2B5EF4-FFF2-40B4-BE49-F238E27FC236}">
-                <a16:creationId xmlns:a16="http://schemas.microsoft.com/office/drawing/2014/main" id="{F4EAA11C-71BC-04F4-33B8-98949E8CD521}"/>
+                <a16:creationId xmlns:a16="http://schemas.microsoft.com/office/drawing/2014/main" id="{2F05B17B-A3B5-A69E-0981-D3466A3B8E1B}"/>
               </a:ext>
             </a:extLst>
           </p:cNvPr>
@@ -7243,7 +7243,7 @@
     </p:spTree>
     <p:extLst>
       <p:ext uri="{BB962C8B-B14F-4D97-AF65-F5344CB8AC3E}">
-        <p14:creationId xmlns:p14="http://schemas.microsoft.com/office/powerpoint/2010/main" val="3749847170"/>
+        <p14:creationId xmlns:p14="http://schemas.microsoft.com/office/powerpoint/2010/main" val="3028307808"/>
       </p:ext>
     </p:extLst>
   </p:cSld>
@@ -7283,7 +7283,7 @@
           <p:cNvPr id="2" name="CuadroTexto 1">
             <a:extLst>
               <a:ext uri="{FF2B5EF4-FFF2-40B4-BE49-F238E27FC236}">
-                <a16:creationId xmlns:a16="http://schemas.microsoft.com/office/drawing/2014/main" id="{20508CD6-6468-D198-6001-C125F543EE51}"/>
+                <a16:creationId xmlns:a16="http://schemas.microsoft.com/office/drawing/2014/main" id="{8E51F231-1E7D-E7AD-827B-E4C65A6DCF35}"/>
               </a:ext>
             </a:extLst>
           </p:cNvPr>
@@ -7313,7 +7313,7 @@
                 </a:solidFill>
                 <a:latin typeface="Segoe UI" panose="020B0502040204020203" pitchFamily="34" charset="0"/>
               </a:rPr>
-              <a:t>15 / MEJORAS FUTURAS</a:t>
+              <a:t>15 / ALCANCE Y FUTURO</a:t>
             </a:r>
           </a:p>
         </p:txBody>
@@ -7323,7 +7323,7 @@
           <p:cNvPr id="3" name="CuadroTexto 2">
             <a:extLst>
               <a:ext uri="{FF2B5EF4-FFF2-40B4-BE49-F238E27FC236}">
-                <a16:creationId xmlns:a16="http://schemas.microsoft.com/office/drawing/2014/main" id="{53A3F14B-A356-0585-8C75-B8A0FD06430D}"/>
+                <a16:creationId xmlns:a16="http://schemas.microsoft.com/office/drawing/2014/main" id="{D6A07F55-8824-6286-A146-199FCAA61FFB}"/>
               </a:ext>
             </a:extLst>
           </p:cNvPr>
@@ -7353,7 +7353,7 @@
                 </a:solidFill>
                 <a:latin typeface="Segoe UI" panose="020B0502040204020203" pitchFamily="34" charset="0"/>
               </a:rPr>
-              <a:t>Que endureceria despues de esta entrega</a:t>
+              <a:t>Que queda cerrado y que se deja para despues</a:t>
             </a:r>
           </a:p>
         </p:txBody>
@@ -7363,7 +7363,7 @@
           <p:cNvPr id="4" name="CuadroTexto 3">
             <a:extLst>
               <a:ext uri="{FF2B5EF4-FFF2-40B4-BE49-F238E27FC236}">
-                <a16:creationId xmlns:a16="http://schemas.microsoft.com/office/drawing/2014/main" id="{6E49CF37-C0F0-5094-6378-3E4859EACAB8}"/>
+                <a16:creationId xmlns:a16="http://schemas.microsoft.com/office/drawing/2014/main" id="{078925B0-E651-5AE9-EFB4-EA603AB409C8}"/>
               </a:ext>
             </a:extLst>
           </p:cNvPr>
@@ -7393,7 +7393,7 @@
                 </a:solidFill>
                 <a:latin typeface="Segoe UI" panose="020B0502040204020203" pitchFamily="34" charset="0"/>
               </a:rPr>
-              <a:t>El nucleo ya esta cerrado; lo siguiente ya no es supervivencia de la demo, sino evolucion del producto.</a:t>
+              <a:t>El nucleo funcional y tecnico ya esta entregado; las mejoras futuras endurecen o amplian, pero no bloquean la defensa.</a:t>
             </a:r>
           </a:p>
         </p:txBody>
@@ -7403,7 +7403,7 @@
           <p:cNvPr id="5" name="Rectángulo: esquinas redondeadas 4">
             <a:extLst>
               <a:ext uri="{FF2B5EF4-FFF2-40B4-BE49-F238E27FC236}">
-                <a16:creationId xmlns:a16="http://schemas.microsoft.com/office/drawing/2014/main" id="{0A731536-B4DF-AFA1-DA9C-FC63CF39A62B}"/>
+                <a16:creationId xmlns:a16="http://schemas.microsoft.com/office/drawing/2014/main" id="{AA852CD0-3EE1-5723-C376-C21446197A0A}"/>
               </a:ext>
             </a:extLst>
           </p:cNvPr>
@@ -7412,18 +7412,18 @@
         </p:nvSpPr>
         <p:spPr>
           <a:xfrm>
-            <a:off x="711200" y="2235200"/>
-            <a:ext cx="3200400" cy="2235200"/>
+            <a:off x="711200" y="2159000"/>
+            <a:ext cx="3429000" cy="2717800"/>
           </a:xfrm>
           <a:prstGeom prst="roundRect">
             <a:avLst/>
           </a:prstGeom>
           <a:solidFill>
-            <a:srgbClr val="F7FAFC"/>
+            <a:srgbClr val="1D2430"/>
           </a:solidFill>
           <a:ln w="12700">
             <a:solidFill>
-              <a:srgbClr val="DDE5EE"/>
+              <a:srgbClr val="424E60"/>
             </a:solidFill>
           </a:ln>
         </p:spPr>
@@ -7457,37 +7457,37 @@
           <p:cNvPr id="6" name="CuadroTexto 5">
             <a:extLst>
               <a:ext uri="{FF2B5EF4-FFF2-40B4-BE49-F238E27FC236}">
-                <a16:creationId xmlns:a16="http://schemas.microsoft.com/office/drawing/2014/main" id="{99C73E3B-28FC-3EEF-8394-3690362BFA4C}"/>
-              </a:ext>
-            </a:extLst>
-          </p:cNvPr>
-          <p:cNvSpPr txBox="1"/>
-          <p:nvPr/>
-        </p:nvSpPr>
-        <p:spPr>
-          <a:xfrm>
-            <a:off x="965200" y="2489200"/>
-            <a:ext cx="2413000" cy="369332"/>
-          </a:xfrm>
-          <a:prstGeom prst="rect">
-            <a:avLst/>
-          </a:prstGeom>
-          <a:noFill/>
-        </p:spPr>
-        <p:txBody>
-          <a:bodyPr vert="horz" wrap="square" lIns="0" tIns="0" rIns="0" bIns="0" rtlCol="0">
-            <a:noAutofit/>
-          </a:bodyPr>
-          <a:lstStyle/>
-          <a:p>
-            <a:r>
-              <a:rPr lang="es-ES" sz="2100" b="1">
-                <a:solidFill>
-                  <a:srgbClr val="41A772"/>
-                </a:solidFill>
-                <a:latin typeface="Segoe UI" panose="020B0502040204020203" pitchFamily="34" charset="0"/>
-              </a:rPr>
-              <a:t>Dominio propio</a:t>
+                <a16:creationId xmlns:a16="http://schemas.microsoft.com/office/drawing/2014/main" id="{2DE079E2-AE49-42F3-66A0-AAA119027BDB}"/>
+              </a:ext>
+            </a:extLst>
+          </p:cNvPr>
+          <p:cNvSpPr txBox="1"/>
+          <p:nvPr/>
+        </p:nvSpPr>
+        <p:spPr>
+          <a:xfrm>
+            <a:off x="1016000" y="2438400"/>
+            <a:ext cx="2667000" cy="369332"/>
+          </a:xfrm>
+          <a:prstGeom prst="rect">
+            <a:avLst/>
+          </a:prstGeom>
+          <a:noFill/>
+        </p:spPr>
+        <p:txBody>
+          <a:bodyPr vert="horz" wrap="square" lIns="0" tIns="0" rIns="0" bIns="0" rtlCol="0">
+            <a:noAutofit/>
+          </a:bodyPr>
+          <a:lstStyle/>
+          <a:p>
+            <a:r>
+              <a:rPr lang="es-ES" sz="2000" b="1">
+                <a:solidFill>
+                  <a:srgbClr val="DBA14D"/>
+                </a:solidFill>
+                <a:latin typeface="Segoe UI" panose="020B0502040204020203" pitchFamily="34" charset="0"/>
+              </a:rPr>
+              <a:t>Cerrado en esta entrega</a:t>
             </a:r>
           </a:p>
         </p:txBody>
@@ -7497,37 +7497,98 @@
           <p:cNvPr id="7" name="CuadroTexto 6">
             <a:extLst>
               <a:ext uri="{FF2B5EF4-FFF2-40B4-BE49-F238E27FC236}">
-                <a16:creationId xmlns:a16="http://schemas.microsoft.com/office/drawing/2014/main" id="{05BB407F-34E6-33CE-ECE6-E7917496A74D}"/>
-              </a:ext>
-            </a:extLst>
-          </p:cNvPr>
-          <p:cNvSpPr txBox="1"/>
-          <p:nvPr/>
-        </p:nvSpPr>
-        <p:spPr>
-          <a:xfrm>
-            <a:off x="965200" y="2997200"/>
-            <a:ext cx="2667000" cy="369332"/>
-          </a:xfrm>
-          <a:prstGeom prst="rect">
-            <a:avLst/>
-          </a:prstGeom>
-          <a:noFill/>
-        </p:spPr>
-        <p:txBody>
-          <a:bodyPr vert="horz" wrap="square" lIns="0" tIns="0" rIns="0" bIns="0" rtlCol="0">
-            <a:noAutofit/>
-          </a:bodyPr>
-          <a:lstStyle/>
-          <a:p>
+                <a16:creationId xmlns:a16="http://schemas.microsoft.com/office/drawing/2014/main" id="{36F98B91-B093-46C9-3661-843B002CF8BB}"/>
+              </a:ext>
+            </a:extLst>
+          </p:cNvPr>
+          <p:cNvSpPr txBox="1"/>
+          <p:nvPr/>
+        </p:nvSpPr>
+        <p:spPr>
+          <a:xfrm>
+            <a:off x="1041400" y="2946400"/>
+            <a:ext cx="2692400" cy="369332"/>
+          </a:xfrm>
+          <a:prstGeom prst="rect">
+            <a:avLst/>
+          </a:prstGeom>
+          <a:noFill/>
+        </p:spPr>
+        <p:txBody>
+          <a:bodyPr vert="horz" wrap="square" lIns="0" tIns="0" rIns="0" bIns="0" rtlCol="0">
+            <a:noAutofit/>
+          </a:bodyPr>
+          <a:lstStyle/>
+          <a:p>
+            <a:pPr marL="342900" indent="-342900">
+              <a:spcAft>
+                <a:spcPts val="1000"/>
+              </a:spcAft>
+              <a:buFont typeface="+mj-lt"/>
+              <a:buChar char="•"/>
+            </a:pPr>
             <a:r>
               <a:rPr lang="es-ES" sz="1400">
                 <a:solidFill>
-                  <a:srgbClr val="1F2937"/>
-                </a:solidFill>
-                <a:latin typeface="Segoe UI" panose="020B0502040204020203" pitchFamily="34" charset="0"/>
-              </a:rPr>
-              <a:t>Sustituir nip.io por dominio institucional y reforzar politicas TLS.</a:t>
+                  <a:srgbClr val="F6F8FC"/>
+                </a:solidFill>
+                <a:latin typeface="Segoe UI" panose="020B0502040204020203" pitchFamily="34" charset="0"/>
+              </a:rPr>
+              <a:t>Portales /app y /externo bajo HTTPS.</a:t>
+            </a:r>
+          </a:p>
+          <a:p>
+            <a:pPr marL="342900" indent="-342900">
+              <a:spcAft>
+                <a:spcPts val="1000"/>
+              </a:spcAft>
+              <a:buFont typeface="+mj-lt"/>
+              <a:buChar char="•"/>
+            </a:pPr>
+            <a:r>
+              <a:rPr lang="es-ES" sz="1400">
+                <a:solidFill>
+                  <a:srgbClr val="F6F8FC"/>
+                </a:solidFill>
+                <a:latin typeface="Segoe UI" panose="020B0502040204020203" pitchFamily="34" charset="0"/>
+              </a:rPr>
+              <a:t>Correo real, documentos, chat y exportacion.</a:t>
+            </a:r>
+          </a:p>
+          <a:p>
+            <a:pPr marL="342900" indent="-342900">
+              <a:spcAft>
+                <a:spcPts val="1000"/>
+              </a:spcAft>
+              <a:buFont typeface="+mj-lt"/>
+              <a:buChar char="•"/>
+            </a:pPr>
+            <a:r>
+              <a:rPr lang="es-ES" sz="1400">
+                <a:solidFill>
+                  <a:srgbClr val="F6F8FC"/>
+                </a:solidFill>
+                <a:latin typeface="Segoe UI" panose="020B0502040204020203" pitchFamily="34" charset="0"/>
+              </a:rPr>
+              <a:t>Agora Desktop local/cloud como consola tecnica.</a:t>
+            </a:r>
+          </a:p>
+          <a:p>
+            <a:pPr marL="342900" indent="-342900">
+              <a:spcAft>
+                <a:spcPts val="1000"/>
+              </a:spcAft>
+              <a:buFont typeface="+mj-lt"/>
+              <a:buChar char="•"/>
+            </a:pPr>
+            <a:r>
+              <a:rPr lang="es-ES" sz="1400">
+                <a:solidFill>
+                  <a:srgbClr val="F6F8FC"/>
+                </a:solidFill>
+                <a:latin typeface="Segoe UI" panose="020B0502040204020203" pitchFamily="34" charset="0"/>
+              </a:rPr>
+              <a:t>VM publica con arranque automatico y URL efectiva visible.</a:t>
             </a:r>
           </a:p>
         </p:txBody>
@@ -7537,7 +7598,7 @@
           <p:cNvPr id="8" name="Rectángulo: esquinas redondeadas 7">
             <a:extLst>
               <a:ext uri="{FF2B5EF4-FFF2-40B4-BE49-F238E27FC236}">
-                <a16:creationId xmlns:a16="http://schemas.microsoft.com/office/drawing/2014/main" id="{DB83EC71-8DCE-6D32-C673-B47194A22729}"/>
+                <a16:creationId xmlns:a16="http://schemas.microsoft.com/office/drawing/2014/main" id="{74C16484-179F-948D-1235-7EF55B1AC959}"/>
               </a:ext>
             </a:extLst>
           </p:cNvPr>
@@ -7546,8 +7607,8 @@
         </p:nvSpPr>
         <p:spPr>
           <a:xfrm>
-            <a:off x="4495800" y="2235200"/>
-            <a:ext cx="3200400" cy="2235200"/>
+            <a:off x="4521200" y="2235200"/>
+            <a:ext cx="3098800" cy="1219200"/>
           </a:xfrm>
           <a:prstGeom prst="roundRect">
             <a:avLst/>
@@ -7591,37 +7652,37 @@
           <p:cNvPr id="9" name="CuadroTexto 8">
             <a:extLst>
               <a:ext uri="{FF2B5EF4-FFF2-40B4-BE49-F238E27FC236}">
-                <a16:creationId xmlns:a16="http://schemas.microsoft.com/office/drawing/2014/main" id="{E08A1FC8-58B3-9590-68E1-40717831FB84}"/>
-              </a:ext>
-            </a:extLst>
-          </p:cNvPr>
-          <p:cNvSpPr txBox="1"/>
-          <p:nvPr/>
-        </p:nvSpPr>
-        <p:spPr>
-          <a:xfrm>
-            <a:off x="4749800" y="2489200"/>
-            <a:ext cx="2413000" cy="369332"/>
-          </a:xfrm>
-          <a:prstGeom prst="rect">
-            <a:avLst/>
-          </a:prstGeom>
-          <a:noFill/>
-        </p:spPr>
-        <p:txBody>
-          <a:bodyPr vert="horz" wrap="square" lIns="0" tIns="0" rIns="0" bIns="0" rtlCol="0">
-            <a:noAutofit/>
-          </a:bodyPr>
-          <a:lstStyle/>
-          <a:p>
-            <a:r>
-              <a:rPr lang="es-ES" sz="2100" b="1">
-                <a:solidFill>
-                  <a:srgbClr val="49B1D2"/>
-                </a:solidFill>
-                <a:latin typeface="Segoe UI" panose="020B0502040204020203" pitchFamily="34" charset="0"/>
-              </a:rPr>
-              <a:t>Servicios gestionados</a:t>
+                <a16:creationId xmlns:a16="http://schemas.microsoft.com/office/drawing/2014/main" id="{851C70E0-2004-1722-7EA1-48395F4ABB40}"/>
+              </a:ext>
+            </a:extLst>
+          </p:cNvPr>
+          <p:cNvSpPr txBox="1"/>
+          <p:nvPr/>
+        </p:nvSpPr>
+        <p:spPr>
+          <a:xfrm>
+            <a:off x="4749800" y="2413000"/>
+            <a:ext cx="2387600" cy="369332"/>
+          </a:xfrm>
+          <a:prstGeom prst="rect">
+            <a:avLst/>
+          </a:prstGeom>
+          <a:noFill/>
+        </p:spPr>
+        <p:txBody>
+          <a:bodyPr vert="horz" wrap="square" lIns="0" tIns="0" rIns="0" bIns="0" rtlCol="0">
+            <a:noAutofit/>
+          </a:bodyPr>
+          <a:lstStyle/>
+          <a:p>
+            <a:r>
+              <a:rPr lang="es-ES" b="1">
+                <a:solidFill>
+                  <a:srgbClr val="41A772"/>
+                </a:solidFill>
+                <a:latin typeface="Segoe UI" panose="020B0502040204020203" pitchFamily="34" charset="0"/>
+              </a:rPr>
+              <a:t>Dominio propio</a:t>
             </a:r>
           </a:p>
         </p:txBody>
@@ -7631,37 +7692,37 @@
           <p:cNvPr id="10" name="CuadroTexto 9">
             <a:extLst>
               <a:ext uri="{FF2B5EF4-FFF2-40B4-BE49-F238E27FC236}">
-                <a16:creationId xmlns:a16="http://schemas.microsoft.com/office/drawing/2014/main" id="{085BA0E7-B0B5-2E7A-A585-03D27E5375DF}"/>
-              </a:ext>
-            </a:extLst>
-          </p:cNvPr>
-          <p:cNvSpPr txBox="1"/>
-          <p:nvPr/>
-        </p:nvSpPr>
-        <p:spPr>
-          <a:xfrm>
-            <a:off x="4749800" y="2997200"/>
-            <a:ext cx="2667000" cy="369332"/>
-          </a:xfrm>
-          <a:prstGeom prst="rect">
-            <a:avLst/>
-          </a:prstGeom>
-          <a:noFill/>
-        </p:spPr>
-        <p:txBody>
-          <a:bodyPr vert="horz" wrap="square" lIns="0" tIns="0" rIns="0" bIns="0" rtlCol="0">
-            <a:noAutofit/>
-          </a:bodyPr>
-          <a:lstStyle/>
-          <a:p>
-            <a:r>
-              <a:rPr lang="es-ES" sz="1400">
+                <a16:creationId xmlns:a16="http://schemas.microsoft.com/office/drawing/2014/main" id="{945528F9-0721-F0D3-0105-E496A9E7C058}"/>
+              </a:ext>
+            </a:extLst>
+          </p:cNvPr>
+          <p:cNvSpPr txBox="1"/>
+          <p:nvPr/>
+        </p:nvSpPr>
+        <p:spPr>
+          <a:xfrm>
+            <a:off x="4749800" y="2768600"/>
+            <a:ext cx="2540000" cy="369332"/>
+          </a:xfrm>
+          <a:prstGeom prst="rect">
+            <a:avLst/>
+          </a:prstGeom>
+          <a:noFill/>
+        </p:spPr>
+        <p:txBody>
+          <a:bodyPr vert="horz" wrap="square" lIns="0" tIns="0" rIns="0" bIns="0" rtlCol="0">
+            <a:noAutofit/>
+          </a:bodyPr>
+          <a:lstStyle/>
+          <a:p>
+            <a:r>
+              <a:rPr lang="es-ES" sz="1300">
                 <a:solidFill>
                   <a:srgbClr val="1F2937"/>
                 </a:solidFill>
                 <a:latin typeface="Segoe UI" panose="020B0502040204020203" pitchFamily="34" charset="0"/>
               </a:rPr>
-              <a:t>Mover documentos, backups y observabilidad a piezas gestionadas.</a:t>
+              <a:t>Sustituir nip.io por dominio institucional y reforzar TLS.</a:t>
             </a:r>
           </a:p>
         </p:txBody>
@@ -7671,7 +7732,7 @@
           <p:cNvPr id="11" name="Rectángulo: esquinas redondeadas 10">
             <a:extLst>
               <a:ext uri="{FF2B5EF4-FFF2-40B4-BE49-F238E27FC236}">
-                <a16:creationId xmlns:a16="http://schemas.microsoft.com/office/drawing/2014/main" id="{6031C002-AC0B-8471-4EDA-05DB9C42AAB3}"/>
+                <a16:creationId xmlns:a16="http://schemas.microsoft.com/office/drawing/2014/main" id="{B550BF39-F121-99FE-187D-A38C3EC382E5}"/>
               </a:ext>
             </a:extLst>
           </p:cNvPr>
@@ -7680,8 +7741,8 @@
         </p:nvSpPr>
         <p:spPr>
           <a:xfrm>
-            <a:off x="8280400" y="2235200"/>
-            <a:ext cx="3200400" cy="2235200"/>
+            <a:off x="7975600" y="2235200"/>
+            <a:ext cx="3098800" cy="1219200"/>
           </a:xfrm>
           <a:prstGeom prst="roundRect">
             <a:avLst/>
@@ -7725,31 +7786,165 @@
           <p:cNvPr id="12" name="CuadroTexto 11">
             <a:extLst>
               <a:ext uri="{FF2B5EF4-FFF2-40B4-BE49-F238E27FC236}">
-                <a16:creationId xmlns:a16="http://schemas.microsoft.com/office/drawing/2014/main" id="{BEF38A84-BC89-66DB-3F38-42F3AC9B73D4}"/>
-              </a:ext>
-            </a:extLst>
-          </p:cNvPr>
-          <p:cNvSpPr txBox="1"/>
-          <p:nvPr/>
-        </p:nvSpPr>
-        <p:spPr>
-          <a:xfrm>
-            <a:off x="8534400" y="2489200"/>
-            <a:ext cx="2413000" cy="369332"/>
-          </a:xfrm>
-          <a:prstGeom prst="rect">
-            <a:avLst/>
-          </a:prstGeom>
-          <a:noFill/>
-        </p:spPr>
-        <p:txBody>
-          <a:bodyPr vert="horz" wrap="square" lIns="0" tIns="0" rIns="0" bIns="0" rtlCol="0">
-            <a:noAutofit/>
-          </a:bodyPr>
-          <a:lstStyle/>
-          <a:p>
-            <a:r>
-              <a:rPr lang="es-ES" sz="2100" b="1">
+                <a16:creationId xmlns:a16="http://schemas.microsoft.com/office/drawing/2014/main" id="{CACB2135-DC71-12CE-5D2E-A01E7101CA06}"/>
+              </a:ext>
+            </a:extLst>
+          </p:cNvPr>
+          <p:cNvSpPr txBox="1"/>
+          <p:nvPr/>
+        </p:nvSpPr>
+        <p:spPr>
+          <a:xfrm>
+            <a:off x="8204200" y="2413000"/>
+            <a:ext cx="2387600" cy="369332"/>
+          </a:xfrm>
+          <a:prstGeom prst="rect">
+            <a:avLst/>
+          </a:prstGeom>
+          <a:noFill/>
+        </p:spPr>
+        <p:txBody>
+          <a:bodyPr vert="horz" wrap="square" lIns="0" tIns="0" rIns="0" bIns="0" rtlCol="0">
+            <a:noAutofit/>
+          </a:bodyPr>
+          <a:lstStyle/>
+          <a:p>
+            <a:r>
+              <a:rPr lang="es-ES" b="1">
+                <a:solidFill>
+                  <a:srgbClr val="49B1D2"/>
+                </a:solidFill>
+                <a:latin typeface="Segoe UI" panose="020B0502040204020203" pitchFamily="34" charset="0"/>
+              </a:rPr>
+              <a:t>Servicios gestionados</a:t>
+            </a:r>
+          </a:p>
+        </p:txBody>
+      </p:sp>
+      <p:sp>
+        <p:nvSpPr>
+          <p:cNvPr id="13" name="CuadroTexto 12">
+            <a:extLst>
+              <a:ext uri="{FF2B5EF4-FFF2-40B4-BE49-F238E27FC236}">
+                <a16:creationId xmlns:a16="http://schemas.microsoft.com/office/drawing/2014/main" id="{E7E33394-9BF3-B256-128E-9B844C9D4A76}"/>
+              </a:ext>
+            </a:extLst>
+          </p:cNvPr>
+          <p:cNvSpPr txBox="1"/>
+          <p:nvPr/>
+        </p:nvSpPr>
+        <p:spPr>
+          <a:xfrm>
+            <a:off x="8204200" y="2768600"/>
+            <a:ext cx="2540000" cy="369332"/>
+          </a:xfrm>
+          <a:prstGeom prst="rect">
+            <a:avLst/>
+          </a:prstGeom>
+          <a:noFill/>
+        </p:spPr>
+        <p:txBody>
+          <a:bodyPr vert="horz" wrap="square" lIns="0" tIns="0" rIns="0" bIns="0" rtlCol="0">
+            <a:noAutofit/>
+          </a:bodyPr>
+          <a:lstStyle/>
+          <a:p>
+            <a:r>
+              <a:rPr lang="es-ES" sz="1300">
+                <a:solidFill>
+                  <a:srgbClr val="1F2937"/>
+                </a:solidFill>
+                <a:latin typeface="Segoe UI" panose="020B0502040204020203" pitchFamily="34" charset="0"/>
+              </a:rPr>
+              <a:t>Mover documentos, backups y observabilidad a piezas gestionadas.</a:t>
+            </a:r>
+          </a:p>
+        </p:txBody>
+      </p:sp>
+      <p:sp>
+        <p:nvSpPr>
+          <p:cNvPr id="14" name="Rectángulo: esquinas redondeadas 13">
+            <a:extLst>
+              <a:ext uri="{FF2B5EF4-FFF2-40B4-BE49-F238E27FC236}">
+                <a16:creationId xmlns:a16="http://schemas.microsoft.com/office/drawing/2014/main" id="{74F87670-A0B0-8C8D-8B45-F97D1FF83B13}"/>
+              </a:ext>
+            </a:extLst>
+          </p:cNvPr>
+          <p:cNvSpPr/>
+          <p:nvPr/>
+        </p:nvSpPr>
+        <p:spPr>
+          <a:xfrm>
+            <a:off x="4521200" y="3733800"/>
+            <a:ext cx="3098800" cy="1219200"/>
+          </a:xfrm>
+          <a:prstGeom prst="roundRect">
+            <a:avLst/>
+          </a:prstGeom>
+          <a:solidFill>
+            <a:srgbClr val="F7FAFC"/>
+          </a:solidFill>
+          <a:ln w="12700">
+            <a:solidFill>
+              <a:srgbClr val="DDE5EE"/>
+            </a:solidFill>
+          </a:ln>
+        </p:spPr>
+        <p:style>
+          <a:lnRef idx="2">
+            <a:schemeClr val="accent1">
+              <a:shade val="15000"/>
+            </a:schemeClr>
+          </a:lnRef>
+          <a:fillRef idx="1">
+            <a:schemeClr val="accent1"/>
+          </a:fillRef>
+          <a:effectRef idx="0">
+            <a:schemeClr val="accent1"/>
+          </a:effectRef>
+          <a:fontRef idx="minor">
+            <a:schemeClr val="lt1"/>
+          </a:fontRef>
+        </p:style>
+        <p:txBody>
+          <a:bodyPr rtlCol="0" anchor="ctr"/>
+          <a:lstStyle/>
+          <a:p>
+            <a:pPr algn="ctr"/>
+            <a:endParaRPr lang="es-ES"/>
+          </a:p>
+        </p:txBody>
+      </p:sp>
+      <p:sp>
+        <p:nvSpPr>
+          <p:cNvPr id="15" name="CuadroTexto 14">
+            <a:extLst>
+              <a:ext uri="{FF2B5EF4-FFF2-40B4-BE49-F238E27FC236}">
+                <a16:creationId xmlns:a16="http://schemas.microsoft.com/office/drawing/2014/main" id="{FF959876-15DF-D6F2-74ED-3C3464558EF5}"/>
+              </a:ext>
+            </a:extLst>
+          </p:cNvPr>
+          <p:cNvSpPr txBox="1"/>
+          <p:nvPr/>
+        </p:nvSpPr>
+        <p:spPr>
+          <a:xfrm>
+            <a:off x="4749800" y="3911600"/>
+            <a:ext cx="2387600" cy="369332"/>
+          </a:xfrm>
+          <a:prstGeom prst="rect">
+            <a:avLst/>
+          </a:prstGeom>
+          <a:noFill/>
+        </p:spPr>
+        <p:txBody>
+          <a:bodyPr vert="horz" wrap="square" lIns="0" tIns="0" rIns="0" bIns="0" rtlCol="0">
+            <a:noAutofit/>
+          </a:bodyPr>
+          <a:lstStyle/>
+          <a:p>
+            <a:r>
+              <a:rPr lang="es-ES" b="1">
                 <a:solidFill>
                   <a:srgbClr val="DBA14D"/>
                 </a:solidFill>
@@ -7762,59 +7957,59 @@
       </p:sp>
       <p:sp>
         <p:nvSpPr>
-          <p:cNvPr id="13" name="CuadroTexto 12">
-            <a:extLst>
-              <a:ext uri="{FF2B5EF4-FFF2-40B4-BE49-F238E27FC236}">
-                <a16:creationId xmlns:a16="http://schemas.microsoft.com/office/drawing/2014/main" id="{45FD6878-A574-ECCD-F34F-68126FF04248}"/>
-              </a:ext>
-            </a:extLst>
-          </p:cNvPr>
-          <p:cNvSpPr txBox="1"/>
-          <p:nvPr/>
-        </p:nvSpPr>
-        <p:spPr>
-          <a:xfrm>
-            <a:off x="8534400" y="2997200"/>
-            <a:ext cx="2667000" cy="369332"/>
-          </a:xfrm>
-          <a:prstGeom prst="rect">
-            <a:avLst/>
-          </a:prstGeom>
-          <a:noFill/>
-        </p:spPr>
-        <p:txBody>
-          <a:bodyPr vert="horz" wrap="square" lIns="0" tIns="0" rIns="0" bIns="0" rtlCol="0">
-            <a:noAutofit/>
-          </a:bodyPr>
-          <a:lstStyle/>
-          <a:p>
-            <a:r>
-              <a:rPr lang="es-ES" sz="1400">
+          <p:cNvPr id="16" name="CuadroTexto 15">
+            <a:extLst>
+              <a:ext uri="{FF2B5EF4-FFF2-40B4-BE49-F238E27FC236}">
+                <a16:creationId xmlns:a16="http://schemas.microsoft.com/office/drawing/2014/main" id="{D0E17913-F8FB-67D2-AE0E-5139B0B29B4D}"/>
+              </a:ext>
+            </a:extLst>
+          </p:cNvPr>
+          <p:cNvSpPr txBox="1"/>
+          <p:nvPr/>
+        </p:nvSpPr>
+        <p:spPr>
+          <a:xfrm>
+            <a:off x="4749800" y="4267200"/>
+            <a:ext cx="2540000" cy="369332"/>
+          </a:xfrm>
+          <a:prstGeom prst="rect">
+            <a:avLst/>
+          </a:prstGeom>
+          <a:noFill/>
+        </p:spPr>
+        <p:txBody>
+          <a:bodyPr vert="horz" wrap="square" lIns="0" tIns="0" rIns="0" bIns="0" rtlCol="0">
+            <a:noAutofit/>
+          </a:bodyPr>
+          <a:lstStyle/>
+          <a:p>
+            <a:r>
+              <a:rPr lang="es-ES" sz="1300">
                 <a:solidFill>
                   <a:srgbClr val="1F2937"/>
                 </a:solidFill>
                 <a:latin typeface="Segoe UI" panose="020B0502040204020203" pitchFamily="34" charset="0"/>
               </a:rPr>
-              <a:t>Ampliar Agora Desktop con mas automatizacion y soporte operativo sin mezclarlo con negocio.</a:t>
-            </a:r>
-          </a:p>
-        </p:txBody>
-      </p:sp>
-      <p:sp>
-        <p:nvSpPr>
-          <p:cNvPr id="14" name="CuadroTexto 13">
-            <a:extLst>
-              <a:ext uri="{FF2B5EF4-FFF2-40B4-BE49-F238E27FC236}">
-                <a16:creationId xmlns:a16="http://schemas.microsoft.com/office/drawing/2014/main" id="{05788005-402F-E948-3B31-51A2E3F487E4}"/>
-              </a:ext>
-            </a:extLst>
-          </p:cNvPr>
-          <p:cNvSpPr txBox="1"/>
-          <p:nvPr/>
-        </p:nvSpPr>
-        <p:spPr>
-          <a:xfrm>
-            <a:off x="1117600" y="4978400"/>
+              <a:t>Ampliar Agora Desktop sin mezclar soporte con negocio.</a:t>
+            </a:r>
+          </a:p>
+        </p:txBody>
+      </p:sp>
+      <p:sp>
+        <p:nvSpPr>
+          <p:cNvPr id="17" name="CuadroTexto 16">
+            <a:extLst>
+              <a:ext uri="{FF2B5EF4-FFF2-40B4-BE49-F238E27FC236}">
+                <a16:creationId xmlns:a16="http://schemas.microsoft.com/office/drawing/2014/main" id="{B378EAFC-3006-CD25-E501-646865FCD7EF}"/>
+              </a:ext>
+            </a:extLst>
+          </p:cNvPr>
+          <p:cNvSpPr txBox="1"/>
+          <p:nvPr/>
+        </p:nvSpPr>
+        <p:spPr>
+          <a:xfrm>
+            <a:off x="1016000" y="5257800"/>
             <a:ext cx="9652000" cy="369332"/>
           </a:xfrm>
           <a:prstGeom prst="rect">
@@ -7842,7 +8037,7 @@
                 </a:solidFill>
                 <a:latin typeface="Segoe UI" panose="020B0502040204020203" pitchFamily="34" charset="0"/>
               </a:rPr>
-              <a:t>Mantendria PostgreSQL en servidor y endureceria automatizacion, dominio y observabilidad.</a:t>
+              <a:t>La prioridad futura no es anadir modulos sin control, sino endurecer despliegue, seguridad y soporte.</a:t>
             </a:r>
           </a:p>
           <a:p>
@@ -7860,7 +8055,7 @@
                 </a:solidFill>
                 <a:latin typeface="Segoe UI" panose="020B0502040204020203" pitchFamily="34" charset="0"/>
               </a:rPr>
-              <a:t>No meteria nuevas funciones secundarias sin cerrar antes seguridad, pruebas y operacion.</a:t>
+              <a:t>Las funciones secundarias quedan identificadas para justificar con claridad el recorte de alcance.</a:t>
             </a:r>
           </a:p>
         </p:txBody>
@@ -7868,7 +8063,7 @@
     </p:spTree>
     <p:extLst>
       <p:ext uri="{BB962C8B-B14F-4D97-AF65-F5344CB8AC3E}">
-        <p14:creationId xmlns:p14="http://schemas.microsoft.com/office/powerpoint/2010/main" val="1748892430"/>
+        <p14:creationId xmlns:p14="http://schemas.microsoft.com/office/powerpoint/2010/main" val="1522264340"/>
       </p:ext>
     </p:extLst>
   </p:cSld>
@@ -7908,7 +8103,7 @@
           <p:cNvPr id="2" name="CuadroTexto 1">
             <a:extLst>
               <a:ext uri="{FF2B5EF4-FFF2-40B4-BE49-F238E27FC236}">
-                <a16:creationId xmlns:a16="http://schemas.microsoft.com/office/drawing/2014/main" id="{43215732-2E6D-AB1D-FFB4-12A7886A87E4}"/>
+                <a16:creationId xmlns:a16="http://schemas.microsoft.com/office/drawing/2014/main" id="{8069A607-44EF-AE13-4F64-E9B2D84C16DE}"/>
               </a:ext>
             </a:extLst>
           </p:cNvPr>
@@ -7948,7 +8143,7 @@
           <p:cNvPr id="3" name="CuadroTexto 2">
             <a:extLst>
               <a:ext uri="{FF2B5EF4-FFF2-40B4-BE49-F238E27FC236}">
-                <a16:creationId xmlns:a16="http://schemas.microsoft.com/office/drawing/2014/main" id="{5D98BB5E-EC7D-5564-5D12-236DDDD63197}"/>
+                <a16:creationId xmlns:a16="http://schemas.microsoft.com/office/drawing/2014/main" id="{99A40C62-02FE-C640-BD1E-90404F80B611}"/>
               </a:ext>
             </a:extLst>
           </p:cNvPr>
@@ -7988,7 +8183,7 @@
           <p:cNvPr id="4" name="CuadroTexto 3">
             <a:extLst>
               <a:ext uri="{FF2B5EF4-FFF2-40B4-BE49-F238E27FC236}">
-                <a16:creationId xmlns:a16="http://schemas.microsoft.com/office/drawing/2014/main" id="{7D676BF3-C9F4-2AB6-082C-716A5D2638F2}"/>
+                <a16:creationId xmlns:a16="http://schemas.microsoft.com/office/drawing/2014/main" id="{601787B8-5160-C0C1-1826-57FA5A07D3FB}"/>
               </a:ext>
             </a:extLst>
           </p:cNvPr>
@@ -8107,7 +8302,7 @@
           <p:cNvPr id="5" name="Rectángulo: esquinas redondeadas 4">
             <a:extLst>
               <a:ext uri="{FF2B5EF4-FFF2-40B4-BE49-F238E27FC236}">
-                <a16:creationId xmlns:a16="http://schemas.microsoft.com/office/drawing/2014/main" id="{8F097D6B-2939-4359-E9E7-729A7B3B29F4}"/>
+                <a16:creationId xmlns:a16="http://schemas.microsoft.com/office/drawing/2014/main" id="{4F55DC18-479C-7B46-E29B-BFFB7497920C}"/>
               </a:ext>
             </a:extLst>
           </p:cNvPr>
@@ -8161,7 +8356,7 @@
           <p:cNvPr id="6" name="CuadroTexto 5">
             <a:extLst>
               <a:ext uri="{FF2B5EF4-FFF2-40B4-BE49-F238E27FC236}">
-                <a16:creationId xmlns:a16="http://schemas.microsoft.com/office/drawing/2014/main" id="{1AD83F5D-CFDF-120C-0FDD-91EDA33F66D7}"/>
+                <a16:creationId xmlns:a16="http://schemas.microsoft.com/office/drawing/2014/main" id="{634E4C24-1246-CA54-8DEA-08216E760F0A}"/>
               </a:ext>
             </a:extLst>
           </p:cNvPr>
@@ -8201,7 +8396,7 @@
           <p:cNvPr id="7" name="CuadroTexto 6">
             <a:extLst>
               <a:ext uri="{FF2B5EF4-FFF2-40B4-BE49-F238E27FC236}">
-                <a16:creationId xmlns:a16="http://schemas.microsoft.com/office/drawing/2014/main" id="{463B6C04-9057-138B-9F0D-B95AEC196576}"/>
+                <a16:creationId xmlns:a16="http://schemas.microsoft.com/office/drawing/2014/main" id="{439A1E91-491A-279E-8A09-581774AD200B}"/>
               </a:ext>
             </a:extLst>
           </p:cNvPr>
@@ -8239,7 +8434,7 @@
     </p:spTree>
     <p:extLst>
       <p:ext uri="{BB962C8B-B14F-4D97-AF65-F5344CB8AC3E}">
-        <p14:creationId xmlns:p14="http://schemas.microsoft.com/office/powerpoint/2010/main" val="2899676087"/>
+        <p14:creationId xmlns:p14="http://schemas.microsoft.com/office/powerpoint/2010/main" val="4160943323"/>
       </p:ext>
     </p:extLst>
   </p:cSld>
@@ -8279,7 +8474,7 @@
           <p:cNvPr id="2" name="CuadroTexto 1">
             <a:extLst>
               <a:ext uri="{FF2B5EF4-FFF2-40B4-BE49-F238E27FC236}">
-                <a16:creationId xmlns:a16="http://schemas.microsoft.com/office/drawing/2014/main" id="{4A8EE9DF-5270-70E8-C162-AE5DD01AB92F}"/>
+                <a16:creationId xmlns:a16="http://schemas.microsoft.com/office/drawing/2014/main" id="{5B170C3C-125F-D818-9099-2A01248F5CD8}"/>
               </a:ext>
             </a:extLst>
           </p:cNvPr>
@@ -8319,7 +8514,7 @@
           <p:cNvPr id="3" name="CuadroTexto 2">
             <a:extLst>
               <a:ext uri="{FF2B5EF4-FFF2-40B4-BE49-F238E27FC236}">
-                <a16:creationId xmlns:a16="http://schemas.microsoft.com/office/drawing/2014/main" id="{9D13068E-19B9-EDD4-657E-7276DAF3F2F6}"/>
+                <a16:creationId xmlns:a16="http://schemas.microsoft.com/office/drawing/2014/main" id="{C6462AC4-4513-67D4-328B-184046AC558C}"/>
               </a:ext>
             </a:extLst>
           </p:cNvPr>
@@ -8359,7 +8554,7 @@
           <p:cNvPr id="4" name="CuadroTexto 3">
             <a:extLst>
               <a:ext uri="{FF2B5EF4-FFF2-40B4-BE49-F238E27FC236}">
-                <a16:creationId xmlns:a16="http://schemas.microsoft.com/office/drawing/2014/main" id="{BB66D7E4-32FB-EDB8-A063-5BC70E531AEF}"/>
+                <a16:creationId xmlns:a16="http://schemas.microsoft.com/office/drawing/2014/main" id="{B2DCA2D6-AEFB-3994-FA2E-D9BA73A9A5DF}"/>
               </a:ext>
             </a:extLst>
           </p:cNvPr>
@@ -8399,7 +8594,7 @@
           <p:cNvPr id="5" name="CuadroTexto 4">
             <a:extLst>
               <a:ext uri="{FF2B5EF4-FFF2-40B4-BE49-F238E27FC236}">
-                <a16:creationId xmlns:a16="http://schemas.microsoft.com/office/drawing/2014/main" id="{F3C64D0F-89E4-FEB1-086C-F4917583C4F2}"/>
+                <a16:creationId xmlns:a16="http://schemas.microsoft.com/office/drawing/2014/main" id="{9ECA0BE7-DC2E-2E0E-C7D7-53526AC36FF1}"/>
               </a:ext>
             </a:extLst>
           </p:cNvPr>
@@ -8482,7 +8677,7 @@
           <p:cNvPr id="6" name="CuadroTexto 5">
             <a:extLst>
               <a:ext uri="{FF2B5EF4-FFF2-40B4-BE49-F238E27FC236}">
-                <a16:creationId xmlns:a16="http://schemas.microsoft.com/office/drawing/2014/main" id="{5E9AC572-B987-9EA5-C85B-687DEA4EEBE1}"/>
+                <a16:creationId xmlns:a16="http://schemas.microsoft.com/office/drawing/2014/main" id="{8E5B1483-6593-DFB2-7D9A-8932703E00E6}"/>
               </a:ext>
             </a:extLst>
           </p:cNvPr>
@@ -8520,7 +8715,7 @@
     </p:spTree>
     <p:extLst>
       <p:ext uri="{BB962C8B-B14F-4D97-AF65-F5344CB8AC3E}">
-        <p14:creationId xmlns:p14="http://schemas.microsoft.com/office/powerpoint/2010/main" val="3000088455"/>
+        <p14:creationId xmlns:p14="http://schemas.microsoft.com/office/powerpoint/2010/main" val="3551999054"/>
       </p:ext>
     </p:extLst>
   </p:cSld>
@@ -8560,7 +8755,7 @@
           <p:cNvPr id="2" name="CuadroTexto 1">
             <a:extLst>
               <a:ext uri="{FF2B5EF4-FFF2-40B4-BE49-F238E27FC236}">
-                <a16:creationId xmlns:a16="http://schemas.microsoft.com/office/drawing/2014/main" id="{97A99495-7698-35C9-F519-3509243DF9B7}"/>
+                <a16:creationId xmlns:a16="http://schemas.microsoft.com/office/drawing/2014/main" id="{96B59D31-B9DC-D760-A623-8B14531379E7}"/>
               </a:ext>
             </a:extLst>
           </p:cNvPr>
@@ -8600,7 +8795,7 @@
           <p:cNvPr id="3" name="CuadroTexto 2">
             <a:extLst>
               <a:ext uri="{FF2B5EF4-FFF2-40B4-BE49-F238E27FC236}">
-                <a16:creationId xmlns:a16="http://schemas.microsoft.com/office/drawing/2014/main" id="{6473AEC7-F891-C8CF-F621-F8AB92A8A3AA}"/>
+                <a16:creationId xmlns:a16="http://schemas.microsoft.com/office/drawing/2014/main" id="{B252884E-54A6-C4A4-C9AA-79C2474013B4}"/>
               </a:ext>
             </a:extLst>
           </p:cNvPr>
@@ -8640,7 +8835,7 @@
           <p:cNvPr id="4" name="CuadroTexto 3">
             <a:extLst>
               <a:ext uri="{FF2B5EF4-FFF2-40B4-BE49-F238E27FC236}">
-                <a16:creationId xmlns:a16="http://schemas.microsoft.com/office/drawing/2014/main" id="{CBC3D1CE-C197-78B9-9A60-0A88E3B8E328}"/>
+                <a16:creationId xmlns:a16="http://schemas.microsoft.com/office/drawing/2014/main" id="{F383C05F-D800-EA0C-FD31-D2B4376E4045}"/>
               </a:ext>
             </a:extLst>
           </p:cNvPr>
@@ -8680,7 +8875,7 @@
           <p:cNvPr id="5" name="CuadroTexto 4">
             <a:extLst>
               <a:ext uri="{FF2B5EF4-FFF2-40B4-BE49-F238E27FC236}">
-                <a16:creationId xmlns:a16="http://schemas.microsoft.com/office/drawing/2014/main" id="{E0FB9D0D-9935-C4CD-A639-878E061C4E37}"/>
+                <a16:creationId xmlns:a16="http://schemas.microsoft.com/office/drawing/2014/main" id="{8D7DC599-150E-F713-3725-C263E8FEE87A}"/>
               </a:ext>
             </a:extLst>
           </p:cNvPr>
@@ -8781,7 +8976,7 @@
           <p:cNvPr id="6" name="Rectángulo: esquinas redondeadas 5">
             <a:extLst>
               <a:ext uri="{FF2B5EF4-FFF2-40B4-BE49-F238E27FC236}">
-                <a16:creationId xmlns:a16="http://schemas.microsoft.com/office/drawing/2014/main" id="{2379AFE7-7192-0690-5CFC-6D21DABC384B}"/>
+                <a16:creationId xmlns:a16="http://schemas.microsoft.com/office/drawing/2014/main" id="{E507C1D7-4307-CC2D-472B-B68D55694694}"/>
               </a:ext>
             </a:extLst>
           </p:cNvPr>
@@ -8835,7 +9030,7 @@
           <p:cNvPr id="7" name="CuadroTexto 6">
             <a:extLst>
               <a:ext uri="{FF2B5EF4-FFF2-40B4-BE49-F238E27FC236}">
-                <a16:creationId xmlns:a16="http://schemas.microsoft.com/office/drawing/2014/main" id="{4CDFD10E-68AA-CD60-D127-C2BDC01E1210}"/>
+                <a16:creationId xmlns:a16="http://schemas.microsoft.com/office/drawing/2014/main" id="{86F03797-4F39-A9A2-7DD6-11568179228C}"/>
               </a:ext>
             </a:extLst>
           </p:cNvPr>
@@ -8875,7 +9070,7 @@
           <p:cNvPr id="8" name="CuadroTexto 7">
             <a:extLst>
               <a:ext uri="{FF2B5EF4-FFF2-40B4-BE49-F238E27FC236}">
-                <a16:creationId xmlns:a16="http://schemas.microsoft.com/office/drawing/2014/main" id="{F0B2DE3F-31A5-C76F-97EE-CF45D9539F16}"/>
+                <a16:creationId xmlns:a16="http://schemas.microsoft.com/office/drawing/2014/main" id="{A5FC4BE5-DFE4-7689-BE27-E9882E191B66}"/>
               </a:ext>
             </a:extLst>
           </p:cNvPr>
@@ -8913,7 +9108,7 @@
     </p:spTree>
     <p:extLst>
       <p:ext uri="{BB962C8B-B14F-4D97-AF65-F5344CB8AC3E}">
-        <p14:creationId xmlns:p14="http://schemas.microsoft.com/office/powerpoint/2010/main" val="1700853319"/>
+        <p14:creationId xmlns:p14="http://schemas.microsoft.com/office/powerpoint/2010/main" val="534607492"/>
       </p:ext>
     </p:extLst>
   </p:cSld>
@@ -8953,7 +9148,7 @@
           <p:cNvPr id="2" name="CuadroTexto 1">
             <a:extLst>
               <a:ext uri="{FF2B5EF4-FFF2-40B4-BE49-F238E27FC236}">
-                <a16:creationId xmlns:a16="http://schemas.microsoft.com/office/drawing/2014/main" id="{F47EE030-9113-F839-0500-8CD8FF63BCF0}"/>
+                <a16:creationId xmlns:a16="http://schemas.microsoft.com/office/drawing/2014/main" id="{B241425E-B117-BD72-C001-C78EACF704A6}"/>
               </a:ext>
             </a:extLst>
           </p:cNvPr>
@@ -8993,7 +9188,7 @@
           <p:cNvPr id="3" name="CuadroTexto 2">
             <a:extLst>
               <a:ext uri="{FF2B5EF4-FFF2-40B4-BE49-F238E27FC236}">
-                <a16:creationId xmlns:a16="http://schemas.microsoft.com/office/drawing/2014/main" id="{E8C524AC-4C67-81BF-7CCF-69FF8BD63A89}"/>
+                <a16:creationId xmlns:a16="http://schemas.microsoft.com/office/drawing/2014/main" id="{4F66F0AF-F511-E88E-DC69-E191BC124F50}"/>
               </a:ext>
             </a:extLst>
           </p:cNvPr>
@@ -9033,7 +9228,7 @@
           <p:cNvPr id="4" name="Rectángulo: esquinas redondeadas 3">
             <a:extLst>
               <a:ext uri="{FF2B5EF4-FFF2-40B4-BE49-F238E27FC236}">
-                <a16:creationId xmlns:a16="http://schemas.microsoft.com/office/drawing/2014/main" id="{183502EE-D18B-B6A8-0611-2FB4423E8FD7}"/>
+                <a16:creationId xmlns:a16="http://schemas.microsoft.com/office/drawing/2014/main" id="{DF6727A9-78DB-0557-20DD-B8EB7AF51AA6}"/>
               </a:ext>
             </a:extLst>
           </p:cNvPr>
@@ -9087,7 +9282,7 @@
           <p:cNvPr id="5" name="CuadroTexto 4">
             <a:extLst>
               <a:ext uri="{FF2B5EF4-FFF2-40B4-BE49-F238E27FC236}">
-                <a16:creationId xmlns:a16="http://schemas.microsoft.com/office/drawing/2014/main" id="{4F6B2FD9-691B-2B4F-0E7E-1E1921951509}"/>
+                <a16:creationId xmlns:a16="http://schemas.microsoft.com/office/drawing/2014/main" id="{D2FE1F28-F6C0-E5FA-79B4-B95CF15496BE}"/>
               </a:ext>
             </a:extLst>
           </p:cNvPr>
@@ -9127,7 +9322,7 @@
           <p:cNvPr id="6" name="CuadroTexto 5">
             <a:extLst>
               <a:ext uri="{FF2B5EF4-FFF2-40B4-BE49-F238E27FC236}">
-                <a16:creationId xmlns:a16="http://schemas.microsoft.com/office/drawing/2014/main" id="{378FE75E-5B02-6B68-D4F4-DD7679DC86A6}"/>
+                <a16:creationId xmlns:a16="http://schemas.microsoft.com/office/drawing/2014/main" id="{7E44E7F3-F077-3094-A294-5BD32C8BB583}"/>
               </a:ext>
             </a:extLst>
           </p:cNvPr>
@@ -9167,7 +9362,7 @@
           <p:cNvPr id="7" name="Rectángulo: esquinas redondeadas 6">
             <a:extLst>
               <a:ext uri="{FF2B5EF4-FFF2-40B4-BE49-F238E27FC236}">
-                <a16:creationId xmlns:a16="http://schemas.microsoft.com/office/drawing/2014/main" id="{F70DB089-39D2-93F2-93E1-36918E2B0A52}"/>
+                <a16:creationId xmlns:a16="http://schemas.microsoft.com/office/drawing/2014/main" id="{5D920454-09FC-2587-F0DE-D0A7DF7EA35E}"/>
               </a:ext>
             </a:extLst>
           </p:cNvPr>
@@ -9221,7 +9416,7 @@
           <p:cNvPr id="8" name="CuadroTexto 7">
             <a:extLst>
               <a:ext uri="{FF2B5EF4-FFF2-40B4-BE49-F238E27FC236}">
-                <a16:creationId xmlns:a16="http://schemas.microsoft.com/office/drawing/2014/main" id="{6896B342-D52E-797F-C4D1-8C77FA9387B7}"/>
+                <a16:creationId xmlns:a16="http://schemas.microsoft.com/office/drawing/2014/main" id="{9E21D43D-16AD-F5F6-BDFB-84B3AA0B59D1}"/>
               </a:ext>
             </a:extLst>
           </p:cNvPr>
@@ -9261,7 +9456,7 @@
           <p:cNvPr id="9" name="CuadroTexto 8">
             <a:extLst>
               <a:ext uri="{FF2B5EF4-FFF2-40B4-BE49-F238E27FC236}">
-                <a16:creationId xmlns:a16="http://schemas.microsoft.com/office/drawing/2014/main" id="{98602FF3-714F-AA57-D40E-86781CE18B46}"/>
+                <a16:creationId xmlns:a16="http://schemas.microsoft.com/office/drawing/2014/main" id="{2122C4B1-94B8-A693-9DA5-AB18AA191273}"/>
               </a:ext>
             </a:extLst>
           </p:cNvPr>
@@ -9301,7 +9496,7 @@
           <p:cNvPr id="10" name="Rectángulo: esquinas redondeadas 9">
             <a:extLst>
               <a:ext uri="{FF2B5EF4-FFF2-40B4-BE49-F238E27FC236}">
-                <a16:creationId xmlns:a16="http://schemas.microsoft.com/office/drawing/2014/main" id="{2018F7BD-80CB-AE7F-1AD1-5F348FD4E479}"/>
+                <a16:creationId xmlns:a16="http://schemas.microsoft.com/office/drawing/2014/main" id="{7B9BC611-C26C-96E2-D235-63F14F631CC1}"/>
               </a:ext>
             </a:extLst>
           </p:cNvPr>
@@ -9355,7 +9550,7 @@
           <p:cNvPr id="11" name="CuadroTexto 10">
             <a:extLst>
               <a:ext uri="{FF2B5EF4-FFF2-40B4-BE49-F238E27FC236}">
-                <a16:creationId xmlns:a16="http://schemas.microsoft.com/office/drawing/2014/main" id="{241ECDB7-FDE8-B2B7-EF09-E3AF19A6F71C}"/>
+                <a16:creationId xmlns:a16="http://schemas.microsoft.com/office/drawing/2014/main" id="{1C30CB73-ABC6-44CC-565E-93634F9E011C}"/>
               </a:ext>
             </a:extLst>
           </p:cNvPr>
@@ -9395,7 +9590,7 @@
           <p:cNvPr id="12" name="CuadroTexto 11">
             <a:extLst>
               <a:ext uri="{FF2B5EF4-FFF2-40B4-BE49-F238E27FC236}">
-                <a16:creationId xmlns:a16="http://schemas.microsoft.com/office/drawing/2014/main" id="{AAC34014-78F3-3DA1-D8BE-B59827995065}"/>
+                <a16:creationId xmlns:a16="http://schemas.microsoft.com/office/drawing/2014/main" id="{917968D9-A624-0ACE-9308-6E8A18865E52}"/>
               </a:ext>
             </a:extLst>
           </p:cNvPr>
@@ -9435,7 +9630,7 @@
           <p:cNvPr id="13" name="Rectángulo: esquinas redondeadas 12">
             <a:extLst>
               <a:ext uri="{FF2B5EF4-FFF2-40B4-BE49-F238E27FC236}">
-                <a16:creationId xmlns:a16="http://schemas.microsoft.com/office/drawing/2014/main" id="{211940CC-D8B5-390B-5A36-C4840E35938B}"/>
+                <a16:creationId xmlns:a16="http://schemas.microsoft.com/office/drawing/2014/main" id="{6257EB0C-D9D0-C184-6E5B-8BC484D52FC8}"/>
               </a:ext>
             </a:extLst>
           </p:cNvPr>
@@ -9489,7 +9684,7 @@
           <p:cNvPr id="14" name="CuadroTexto 13">
             <a:extLst>
               <a:ext uri="{FF2B5EF4-FFF2-40B4-BE49-F238E27FC236}">
-                <a16:creationId xmlns:a16="http://schemas.microsoft.com/office/drawing/2014/main" id="{B7289F20-C8BB-3595-F15B-4E2880ED0960}"/>
+                <a16:creationId xmlns:a16="http://schemas.microsoft.com/office/drawing/2014/main" id="{700A1AEA-3EC4-5724-0CEF-FA2ECD0BC3A8}"/>
               </a:ext>
             </a:extLst>
           </p:cNvPr>
@@ -9529,7 +9724,7 @@
           <p:cNvPr id="15" name="CuadroTexto 14">
             <a:extLst>
               <a:ext uri="{FF2B5EF4-FFF2-40B4-BE49-F238E27FC236}">
-                <a16:creationId xmlns:a16="http://schemas.microsoft.com/office/drawing/2014/main" id="{AD5FDCD2-CF71-63AC-BF34-7A984AFA6773}"/>
+                <a16:creationId xmlns:a16="http://schemas.microsoft.com/office/drawing/2014/main" id="{4D9E5A2C-6A0C-B66E-456E-3AEC7D0D06FD}"/>
               </a:ext>
             </a:extLst>
           </p:cNvPr>
@@ -9567,7 +9762,7 @@
     </p:spTree>
     <p:extLst>
       <p:ext uri="{BB962C8B-B14F-4D97-AF65-F5344CB8AC3E}">
-        <p14:creationId xmlns:p14="http://schemas.microsoft.com/office/powerpoint/2010/main" val="532801573"/>
+        <p14:creationId xmlns:p14="http://schemas.microsoft.com/office/powerpoint/2010/main" val="58776312"/>
       </p:ext>
     </p:extLst>
   </p:cSld>
@@ -9607,7 +9802,7 @@
           <p:cNvPr id="2" name="CuadroTexto 1">
             <a:extLst>
               <a:ext uri="{FF2B5EF4-FFF2-40B4-BE49-F238E27FC236}">
-                <a16:creationId xmlns:a16="http://schemas.microsoft.com/office/drawing/2014/main" id="{02C763EB-133E-A78A-1CB0-1107BA8FDB07}"/>
+                <a16:creationId xmlns:a16="http://schemas.microsoft.com/office/drawing/2014/main" id="{CD6894B9-7A09-9B95-3443-33E8638F14FF}"/>
               </a:ext>
             </a:extLst>
           </p:cNvPr>
@@ -9647,7 +9842,7 @@
           <p:cNvPr id="3" name="CuadroTexto 2">
             <a:extLst>
               <a:ext uri="{FF2B5EF4-FFF2-40B4-BE49-F238E27FC236}">
-                <a16:creationId xmlns:a16="http://schemas.microsoft.com/office/drawing/2014/main" id="{4DDA0427-728B-B593-D27C-E87F5A662BB1}"/>
+                <a16:creationId xmlns:a16="http://schemas.microsoft.com/office/drawing/2014/main" id="{724071AC-9EBD-DC2D-76A6-0CFCFD103EBA}"/>
               </a:ext>
             </a:extLst>
           </p:cNvPr>
@@ -9687,7 +9882,7 @@
           <p:cNvPr id="4" name="CuadroTexto 3">
             <a:extLst>
               <a:ext uri="{FF2B5EF4-FFF2-40B4-BE49-F238E27FC236}">
-                <a16:creationId xmlns:a16="http://schemas.microsoft.com/office/drawing/2014/main" id="{4117148E-9BE1-AD74-94C9-056B7A8F40BA}"/>
+                <a16:creationId xmlns:a16="http://schemas.microsoft.com/office/drawing/2014/main" id="{956B5DDA-6B1D-C10D-D5B4-82EB3A0A89FB}"/>
               </a:ext>
             </a:extLst>
           </p:cNvPr>
@@ -9717,7 +9912,7 @@
                 </a:solidFill>
                 <a:latin typeface="Segoe UI" panose="020B0502040204020203" pitchFamily="34" charset="0"/>
               </a:rPr>
-              <a:t>La misma URL publica sirve los dos portales, la documentacion y el monitor legacy, mientras el escritorio opera por API y SSH.</a:t>
+              <a:t>La URL publica termina en una VM con HTTPS, persistencia real y una consola tecnica de escritorio separada del flujo funcional.</a:t>
             </a:r>
           </a:p>
         </p:txBody>
@@ -9727,7 +9922,7 @@
           <p:cNvPr id="6" name="Imagen 5">
             <a:extLst>
               <a:ext uri="{FF2B5EF4-FFF2-40B4-BE49-F238E27FC236}">
-                <a16:creationId xmlns:a16="http://schemas.microsoft.com/office/drawing/2014/main" id="{B4278C2D-D007-0FAB-0454-E696414CB426}"/>
+                <a16:creationId xmlns:a16="http://schemas.microsoft.com/office/drawing/2014/main" id="{A96BE8CE-6DD6-ED45-A0AD-47E5EFE33617}"/>
               </a:ext>
             </a:extLst>
           </p:cNvPr>
@@ -9750,8 +9945,8 @@
         </p:blipFill>
         <p:spPr>
           <a:xfrm>
-            <a:off x="787400" y="2196774"/>
-            <a:ext cx="6477000" cy="3556652"/>
+            <a:off x="1023078" y="1854200"/>
+            <a:ext cx="6183443" cy="4191000"/>
           </a:xfrm>
           <a:prstGeom prst="rect">
             <a:avLst/>
@@ -9768,7 +9963,7 @@
           <p:cNvPr id="7" name="CuadroTexto 6">
             <a:extLst>
               <a:ext uri="{FF2B5EF4-FFF2-40B4-BE49-F238E27FC236}">
-                <a16:creationId xmlns:a16="http://schemas.microsoft.com/office/drawing/2014/main" id="{F6E86348-1442-E11C-BF6E-F3E0C27223E0}"/>
+                <a16:creationId xmlns:a16="http://schemas.microsoft.com/office/drawing/2014/main" id="{6B58FB45-5211-D9EC-048A-E18C9E3845B2}"/>
               </a:ext>
             </a:extLst>
           </p:cNvPr>
@@ -9877,7 +10072,7 @@
                 </a:solidFill>
                 <a:latin typeface="Segoe UI" panose="020B0502040204020203" pitchFamily="34" charset="0"/>
               </a:rPr>
-              <a:t>La shell web de monitor queda en legacy.</a:t>
+              <a:t>La operacion tecnica queda fuera del flujo web principal.</a:t>
             </a:r>
           </a:p>
         </p:txBody>
@@ -9885,7 +10080,7 @@
     </p:spTree>
     <p:extLst>
       <p:ext uri="{BB962C8B-B14F-4D97-AF65-F5344CB8AC3E}">
-        <p14:creationId xmlns:p14="http://schemas.microsoft.com/office/powerpoint/2010/main" val="3055323459"/>
+        <p14:creationId xmlns:p14="http://schemas.microsoft.com/office/powerpoint/2010/main" val="1522771249"/>
       </p:ext>
     </p:extLst>
   </p:cSld>
@@ -9925,7 +10120,7 @@
           <p:cNvPr id="2" name="CuadroTexto 1">
             <a:extLst>
               <a:ext uri="{FF2B5EF4-FFF2-40B4-BE49-F238E27FC236}">
-                <a16:creationId xmlns:a16="http://schemas.microsoft.com/office/drawing/2014/main" id="{6A55F792-719B-4933-0A82-79DA36A75C66}"/>
+                <a16:creationId xmlns:a16="http://schemas.microsoft.com/office/drawing/2014/main" id="{6B937256-65C2-D3F4-12CB-5C1F28970552}"/>
               </a:ext>
             </a:extLst>
           </p:cNvPr>
@@ -9965,7 +10160,7 @@
           <p:cNvPr id="3" name="CuadroTexto 2">
             <a:extLst>
               <a:ext uri="{FF2B5EF4-FFF2-40B4-BE49-F238E27FC236}">
-                <a16:creationId xmlns:a16="http://schemas.microsoft.com/office/drawing/2014/main" id="{2E49A66F-CB1D-8525-2172-BAF6AB440E2B}"/>
+                <a16:creationId xmlns:a16="http://schemas.microsoft.com/office/drawing/2014/main" id="{3D1DA558-0C53-9A96-0172-9248F5125B1A}"/>
               </a:ext>
             </a:extLst>
           </p:cNvPr>
@@ -10005,7 +10200,7 @@
           <p:cNvPr id="5" name="Imagen 4">
             <a:extLst>
               <a:ext uri="{FF2B5EF4-FFF2-40B4-BE49-F238E27FC236}">
-                <a16:creationId xmlns:a16="http://schemas.microsoft.com/office/drawing/2014/main" id="{CF1E2096-6DE4-2AA4-BC44-C2719EB4F519}"/>
+                <a16:creationId xmlns:a16="http://schemas.microsoft.com/office/drawing/2014/main" id="{B08FC2B9-DF8B-C8FD-E903-70C4CCAE42D0}"/>
               </a:ext>
             </a:extLst>
           </p:cNvPr>
@@ -10028,8 +10223,8 @@
         </p:blipFill>
         <p:spPr>
           <a:xfrm>
-            <a:off x="584200" y="2016478"/>
-            <a:ext cx="5969000" cy="3714044"/>
+            <a:off x="584200" y="1784350"/>
+            <a:ext cx="5969000" cy="4178300"/>
           </a:xfrm>
           <a:prstGeom prst="rect">
             <a:avLst/>
@@ -10046,7 +10241,7 @@
           <p:cNvPr id="6" name="CuadroTexto 5">
             <a:extLst>
               <a:ext uri="{FF2B5EF4-FFF2-40B4-BE49-F238E27FC236}">
-                <a16:creationId xmlns:a16="http://schemas.microsoft.com/office/drawing/2014/main" id="{2D2B4C86-D810-64D8-4A85-90CC19F2C751}"/>
+                <a16:creationId xmlns:a16="http://schemas.microsoft.com/office/drawing/2014/main" id="{77C21CA9-0A5D-01A1-051D-CB7C862EF4EA}"/>
               </a:ext>
             </a:extLst>
           </p:cNvPr>
@@ -10086,7 +10281,7 @@
           <p:cNvPr id="7" name="CuadroTexto 6">
             <a:extLst>
               <a:ext uri="{FF2B5EF4-FFF2-40B4-BE49-F238E27FC236}">
-                <a16:creationId xmlns:a16="http://schemas.microsoft.com/office/drawing/2014/main" id="{2685FCED-4FC2-BF16-CB15-0DD8D2E263EB}"/>
+                <a16:creationId xmlns:a16="http://schemas.microsoft.com/office/drawing/2014/main" id="{22A5F55E-01D6-0AF1-E583-370E61672D15}"/>
               </a:ext>
             </a:extLst>
           </p:cNvPr>
@@ -10185,7 +10380,7 @@
     </p:spTree>
     <p:extLst>
       <p:ext uri="{BB962C8B-B14F-4D97-AF65-F5344CB8AC3E}">
-        <p14:creationId xmlns:p14="http://schemas.microsoft.com/office/powerpoint/2010/main" val="2739586334"/>
+        <p14:creationId xmlns:p14="http://schemas.microsoft.com/office/powerpoint/2010/main" val="2474189906"/>
       </p:ext>
     </p:extLst>
   </p:cSld>
@@ -10225,7 +10420,7 @@
           <p:cNvPr id="2" name="CuadroTexto 1">
             <a:extLst>
               <a:ext uri="{FF2B5EF4-FFF2-40B4-BE49-F238E27FC236}">
-                <a16:creationId xmlns:a16="http://schemas.microsoft.com/office/drawing/2014/main" id="{CE2F9C66-1DF0-AA26-FDED-651C2EB88C0A}"/>
+                <a16:creationId xmlns:a16="http://schemas.microsoft.com/office/drawing/2014/main" id="{DE924B84-F47B-DC01-D66B-8597F0544946}"/>
               </a:ext>
             </a:extLst>
           </p:cNvPr>
@@ -10265,7 +10460,7 @@
           <p:cNvPr id="3" name="CuadroTexto 2">
             <a:extLst>
               <a:ext uri="{FF2B5EF4-FFF2-40B4-BE49-F238E27FC236}">
-                <a16:creationId xmlns:a16="http://schemas.microsoft.com/office/drawing/2014/main" id="{BB4629B6-4913-02FD-22C5-F6B0C32BD709}"/>
+                <a16:creationId xmlns:a16="http://schemas.microsoft.com/office/drawing/2014/main" id="{5CCD5A62-B1D5-86D1-E2E2-6856DBFD033A}"/>
               </a:ext>
             </a:extLst>
           </p:cNvPr>
@@ -10305,7 +10500,7 @@
           <p:cNvPr id="4" name="CuadroTexto 3">
             <a:extLst>
               <a:ext uri="{FF2B5EF4-FFF2-40B4-BE49-F238E27FC236}">
-                <a16:creationId xmlns:a16="http://schemas.microsoft.com/office/drawing/2014/main" id="{89B0F4DE-C0A7-A7EE-1CA2-F3A03BCD4C50}"/>
+                <a16:creationId xmlns:a16="http://schemas.microsoft.com/office/drawing/2014/main" id="{6237BC69-FB99-BB6B-A6CF-E358ACAB9EE2}"/>
               </a:ext>
             </a:extLst>
           </p:cNvPr>
@@ -10345,7 +10540,7 @@
           <p:cNvPr id="6" name="Imagen 5">
             <a:extLst>
               <a:ext uri="{FF2B5EF4-FFF2-40B4-BE49-F238E27FC236}">
-                <a16:creationId xmlns:a16="http://schemas.microsoft.com/office/drawing/2014/main" id="{56A3FCBC-E07E-66C5-C566-583C15F6E59B}"/>
+                <a16:creationId xmlns:a16="http://schemas.microsoft.com/office/drawing/2014/main" id="{0C211F6E-0CB9-616B-D161-7A43066C0FE4}"/>
               </a:ext>
             </a:extLst>
           </p:cNvPr>
@@ -10386,7 +10581,7 @@
           <p:cNvPr id="7" name="Rectángulo: esquinas redondeadas 6">
             <a:extLst>
               <a:ext uri="{FF2B5EF4-FFF2-40B4-BE49-F238E27FC236}">
-                <a16:creationId xmlns:a16="http://schemas.microsoft.com/office/drawing/2014/main" id="{AE163F4D-D493-53CB-D135-CCB3C639FD66}"/>
+                <a16:creationId xmlns:a16="http://schemas.microsoft.com/office/drawing/2014/main" id="{1D4C2ECB-527E-C92D-2CF7-C4A0507F42D2}"/>
               </a:ext>
             </a:extLst>
           </p:cNvPr>
@@ -10440,7 +10635,7 @@
           <p:cNvPr id="8" name="CuadroTexto 7">
             <a:extLst>
               <a:ext uri="{FF2B5EF4-FFF2-40B4-BE49-F238E27FC236}">
-                <a16:creationId xmlns:a16="http://schemas.microsoft.com/office/drawing/2014/main" id="{5E2B6364-4DB1-AE6A-0D78-80A02A8AA6BD}"/>
+                <a16:creationId xmlns:a16="http://schemas.microsoft.com/office/drawing/2014/main" id="{0B705E7E-0D0B-D236-87BF-F998B6142B05}"/>
               </a:ext>
             </a:extLst>
           </p:cNvPr>
@@ -10480,7 +10675,7 @@
           <p:cNvPr id="9" name="CuadroTexto 8">
             <a:extLst>
               <a:ext uri="{FF2B5EF4-FFF2-40B4-BE49-F238E27FC236}">
-                <a16:creationId xmlns:a16="http://schemas.microsoft.com/office/drawing/2014/main" id="{1A64EE55-B20E-4844-D32D-4F73259ACA22}"/>
+                <a16:creationId xmlns:a16="http://schemas.microsoft.com/office/drawing/2014/main" id="{19ED82ED-2EFC-6CC0-F648-303E0681C4C1}"/>
               </a:ext>
             </a:extLst>
           </p:cNvPr>
@@ -10520,7 +10715,7 @@
           <p:cNvPr id="10" name="Rectángulo: esquinas redondeadas 9">
             <a:extLst>
               <a:ext uri="{FF2B5EF4-FFF2-40B4-BE49-F238E27FC236}">
-                <a16:creationId xmlns:a16="http://schemas.microsoft.com/office/drawing/2014/main" id="{231982D3-0988-2594-A592-4D0C6D87671F}"/>
+                <a16:creationId xmlns:a16="http://schemas.microsoft.com/office/drawing/2014/main" id="{1DE4E781-9C1B-E4B5-FD86-D174387B19A1}"/>
               </a:ext>
             </a:extLst>
           </p:cNvPr>
@@ -10574,7 +10769,7 @@
           <p:cNvPr id="11" name="CuadroTexto 10">
             <a:extLst>
               <a:ext uri="{FF2B5EF4-FFF2-40B4-BE49-F238E27FC236}">
-                <a16:creationId xmlns:a16="http://schemas.microsoft.com/office/drawing/2014/main" id="{3925F191-B401-B60F-B76D-5E7E042AA08A}"/>
+                <a16:creationId xmlns:a16="http://schemas.microsoft.com/office/drawing/2014/main" id="{F03CE05D-E38E-6F32-0775-3951BDF6BF85}"/>
               </a:ext>
             </a:extLst>
           </p:cNvPr>
@@ -10614,7 +10809,7 @@
           <p:cNvPr id="12" name="CuadroTexto 11">
             <a:extLst>
               <a:ext uri="{FF2B5EF4-FFF2-40B4-BE49-F238E27FC236}">
-                <a16:creationId xmlns:a16="http://schemas.microsoft.com/office/drawing/2014/main" id="{17504DA1-D9C3-AF90-A7A9-F274FCD16B03}"/>
+                <a16:creationId xmlns:a16="http://schemas.microsoft.com/office/drawing/2014/main" id="{0CAFEFC4-6D7F-6657-1D86-B897FCC65027}"/>
               </a:ext>
             </a:extLst>
           </p:cNvPr>
@@ -10654,7 +10849,7 @@
           <p:cNvPr id="13" name="Rectángulo: esquinas redondeadas 12">
             <a:extLst>
               <a:ext uri="{FF2B5EF4-FFF2-40B4-BE49-F238E27FC236}">
-                <a16:creationId xmlns:a16="http://schemas.microsoft.com/office/drawing/2014/main" id="{1C302DFF-C064-5ED9-A3A6-5955EFF7003E}"/>
+                <a16:creationId xmlns:a16="http://schemas.microsoft.com/office/drawing/2014/main" id="{C0694DD7-D23F-964D-BDC0-D9661DFF88CB}"/>
               </a:ext>
             </a:extLst>
           </p:cNvPr>
@@ -10708,7 +10903,7 @@
           <p:cNvPr id="14" name="CuadroTexto 13">
             <a:extLst>
               <a:ext uri="{FF2B5EF4-FFF2-40B4-BE49-F238E27FC236}">
-                <a16:creationId xmlns:a16="http://schemas.microsoft.com/office/drawing/2014/main" id="{4208011F-4DB1-E672-7A4D-4B7B41415603}"/>
+                <a16:creationId xmlns:a16="http://schemas.microsoft.com/office/drawing/2014/main" id="{4F53BB6E-3CE6-BE1D-D40F-FBBE7A1F69DA}"/>
               </a:ext>
             </a:extLst>
           </p:cNvPr>
@@ -10748,7 +10943,7 @@
           <p:cNvPr id="15" name="CuadroTexto 14">
             <a:extLst>
               <a:ext uri="{FF2B5EF4-FFF2-40B4-BE49-F238E27FC236}">
-                <a16:creationId xmlns:a16="http://schemas.microsoft.com/office/drawing/2014/main" id="{706D95B7-07CF-B39A-C8EB-290DAADF0404}"/>
+                <a16:creationId xmlns:a16="http://schemas.microsoft.com/office/drawing/2014/main" id="{7647B05A-A1B2-4D0D-33A7-57439AFD4287}"/>
               </a:ext>
             </a:extLst>
           </p:cNvPr>
@@ -10786,7 +10981,7 @@
     </p:spTree>
     <p:extLst>
       <p:ext uri="{BB962C8B-B14F-4D97-AF65-F5344CB8AC3E}">
-        <p14:creationId xmlns:p14="http://schemas.microsoft.com/office/powerpoint/2010/main" val="537032938"/>
+        <p14:creationId xmlns:p14="http://schemas.microsoft.com/office/powerpoint/2010/main" val="415349331"/>
       </p:ext>
     </p:extLst>
   </p:cSld>
@@ -10826,7 +11021,7 @@
           <p:cNvPr id="2" name="CuadroTexto 1">
             <a:extLst>
               <a:ext uri="{FF2B5EF4-FFF2-40B4-BE49-F238E27FC236}">
-                <a16:creationId xmlns:a16="http://schemas.microsoft.com/office/drawing/2014/main" id="{0D271AAC-A832-5E08-C88A-93FF0DEC3547}"/>
+                <a16:creationId xmlns:a16="http://schemas.microsoft.com/office/drawing/2014/main" id="{033B6185-2DF4-B3B1-8E9A-F2D4F92F2A18}"/>
               </a:ext>
             </a:extLst>
           </p:cNvPr>
@@ -10866,7 +11061,7 @@
           <p:cNvPr id="3" name="CuadroTexto 2">
             <a:extLst>
               <a:ext uri="{FF2B5EF4-FFF2-40B4-BE49-F238E27FC236}">
-                <a16:creationId xmlns:a16="http://schemas.microsoft.com/office/drawing/2014/main" id="{AD9944CF-079F-0D18-83A8-3B08688E2314}"/>
+                <a16:creationId xmlns:a16="http://schemas.microsoft.com/office/drawing/2014/main" id="{43215777-F41E-4C87-F27F-5ED5F66E3244}"/>
               </a:ext>
             </a:extLst>
           </p:cNvPr>
@@ -10906,7 +11101,7 @@
           <p:cNvPr id="5" name="Imagen 4">
             <a:extLst>
               <a:ext uri="{FF2B5EF4-FFF2-40B4-BE49-F238E27FC236}">
-                <a16:creationId xmlns:a16="http://schemas.microsoft.com/office/drawing/2014/main" id="{5C2C4B73-58CA-A5C3-34D3-2BBBA5E9B5D4}"/>
+                <a16:creationId xmlns:a16="http://schemas.microsoft.com/office/drawing/2014/main" id="{EB9A3945-4CA6-082C-858F-D90AA64C8AEC}"/>
               </a:ext>
             </a:extLst>
           </p:cNvPr>
@@ -10947,7 +11142,7 @@
           <p:cNvPr id="6" name="CuadroTexto 5">
             <a:extLst>
               <a:ext uri="{FF2B5EF4-FFF2-40B4-BE49-F238E27FC236}">
-                <a16:creationId xmlns:a16="http://schemas.microsoft.com/office/drawing/2014/main" id="{1F1B8C47-7AA5-402F-9DE9-2E84691C3AC7}"/>
+                <a16:creationId xmlns:a16="http://schemas.microsoft.com/office/drawing/2014/main" id="{A48C1D83-A83C-BF1F-70C9-21016D01D0C7}"/>
               </a:ext>
             </a:extLst>
           </p:cNvPr>
@@ -11046,7 +11241,7 @@
     </p:spTree>
     <p:extLst>
       <p:ext uri="{BB962C8B-B14F-4D97-AF65-F5344CB8AC3E}">
-        <p14:creationId xmlns:p14="http://schemas.microsoft.com/office/powerpoint/2010/main" val="47247134"/>
+        <p14:creationId xmlns:p14="http://schemas.microsoft.com/office/powerpoint/2010/main" val="3417312891"/>
       </p:ext>
     </p:extLst>
   </p:cSld>
@@ -11086,7 +11281,7 @@
           <p:cNvPr id="2" name="CuadroTexto 1">
             <a:extLst>
               <a:ext uri="{FF2B5EF4-FFF2-40B4-BE49-F238E27FC236}">
-                <a16:creationId xmlns:a16="http://schemas.microsoft.com/office/drawing/2014/main" id="{42D22E14-F2E0-12FB-23AD-8C06856A5CEC}"/>
+                <a16:creationId xmlns:a16="http://schemas.microsoft.com/office/drawing/2014/main" id="{2F0FD4DE-A572-69EC-1608-A148201CE7E2}"/>
               </a:ext>
             </a:extLst>
           </p:cNvPr>
@@ -11126,7 +11321,7 @@
           <p:cNvPr id="3" name="CuadroTexto 2">
             <a:extLst>
               <a:ext uri="{FF2B5EF4-FFF2-40B4-BE49-F238E27FC236}">
-                <a16:creationId xmlns:a16="http://schemas.microsoft.com/office/drawing/2014/main" id="{FA9CFA21-8403-29AD-04BC-F190C18F9982}"/>
+                <a16:creationId xmlns:a16="http://schemas.microsoft.com/office/drawing/2014/main" id="{54C9808F-684E-9BD9-488C-77D40B2CD85F}"/>
               </a:ext>
             </a:extLst>
           </p:cNvPr>
@@ -11166,7 +11361,7 @@
           <p:cNvPr id="4" name="CuadroTexto 3">
             <a:extLst>
               <a:ext uri="{FF2B5EF4-FFF2-40B4-BE49-F238E27FC236}">
-                <a16:creationId xmlns:a16="http://schemas.microsoft.com/office/drawing/2014/main" id="{EA134C0F-CB10-D821-49F7-39624C8868CA}"/>
+                <a16:creationId xmlns:a16="http://schemas.microsoft.com/office/drawing/2014/main" id="{628DD375-7F2F-94BA-46C2-EF4033BBC827}"/>
               </a:ext>
             </a:extLst>
           </p:cNvPr>
@@ -11206,7 +11401,7 @@
           <p:cNvPr id="6" name="Imagen 5">
             <a:extLst>
               <a:ext uri="{FF2B5EF4-FFF2-40B4-BE49-F238E27FC236}">
-                <a16:creationId xmlns:a16="http://schemas.microsoft.com/office/drawing/2014/main" id="{9CB5DA02-DAA9-B8B0-2EF1-31F9B92ED5B2}"/>
+                <a16:creationId xmlns:a16="http://schemas.microsoft.com/office/drawing/2014/main" id="{95C57F26-8802-0313-AE41-98E1383A3C8F}"/>
               </a:ext>
             </a:extLst>
           </p:cNvPr>
@@ -11247,7 +11442,7 @@
           <p:cNvPr id="7" name="Rectángulo: esquinas redondeadas 6">
             <a:extLst>
               <a:ext uri="{FF2B5EF4-FFF2-40B4-BE49-F238E27FC236}">
-                <a16:creationId xmlns:a16="http://schemas.microsoft.com/office/drawing/2014/main" id="{62987D9B-3E4E-70FC-9478-5CB4BD439987}"/>
+                <a16:creationId xmlns:a16="http://schemas.microsoft.com/office/drawing/2014/main" id="{A0B5CC5D-89EF-79C9-4AF4-E897D2E70ACB}"/>
               </a:ext>
             </a:extLst>
           </p:cNvPr>
@@ -11301,7 +11496,7 @@
           <p:cNvPr id="8" name="CuadroTexto 7">
             <a:extLst>
               <a:ext uri="{FF2B5EF4-FFF2-40B4-BE49-F238E27FC236}">
-                <a16:creationId xmlns:a16="http://schemas.microsoft.com/office/drawing/2014/main" id="{E68A74AC-0594-A8D8-4023-EEE74A3322B7}"/>
+                <a16:creationId xmlns:a16="http://schemas.microsoft.com/office/drawing/2014/main" id="{DB8DFE88-AC85-6507-44A3-331D75BCEE55}"/>
               </a:ext>
             </a:extLst>
           </p:cNvPr>
@@ -11341,7 +11536,7 @@
           <p:cNvPr id="9" name="CuadroTexto 8">
             <a:extLst>
               <a:ext uri="{FF2B5EF4-FFF2-40B4-BE49-F238E27FC236}">
-                <a16:creationId xmlns:a16="http://schemas.microsoft.com/office/drawing/2014/main" id="{50FEE87D-4813-369E-CDF0-D3B7AE81E5BB}"/>
+                <a16:creationId xmlns:a16="http://schemas.microsoft.com/office/drawing/2014/main" id="{8D288753-8414-2AC0-F936-58787869B2F6}"/>
               </a:ext>
             </a:extLst>
           </p:cNvPr>
@@ -11379,7 +11574,7 @@
     </p:spTree>
     <p:extLst>
       <p:ext uri="{BB962C8B-B14F-4D97-AF65-F5344CB8AC3E}">
-        <p14:creationId xmlns:p14="http://schemas.microsoft.com/office/powerpoint/2010/main" val="1678548499"/>
+        <p14:creationId xmlns:p14="http://schemas.microsoft.com/office/powerpoint/2010/main" val="1965659088"/>
       </p:ext>
     </p:extLst>
   </p:cSld>
@@ -11419,7 +11614,7 @@
           <p:cNvPr id="2" name="CuadroTexto 1">
             <a:extLst>
               <a:ext uri="{FF2B5EF4-FFF2-40B4-BE49-F238E27FC236}">
-                <a16:creationId xmlns:a16="http://schemas.microsoft.com/office/drawing/2014/main" id="{88CDCCD6-2EF4-0F24-586E-5203F93C424A}"/>
+                <a16:creationId xmlns:a16="http://schemas.microsoft.com/office/drawing/2014/main" id="{180B07DD-CC23-8706-3431-86AD8212814B}"/>
               </a:ext>
             </a:extLst>
           </p:cNvPr>
@@ -11459,7 +11654,7 @@
           <p:cNvPr id="3" name="CuadroTexto 2">
             <a:extLst>
               <a:ext uri="{FF2B5EF4-FFF2-40B4-BE49-F238E27FC236}">
-                <a16:creationId xmlns:a16="http://schemas.microsoft.com/office/drawing/2014/main" id="{F798B586-C962-DBEA-4D8E-83B718B7CBA1}"/>
+                <a16:creationId xmlns:a16="http://schemas.microsoft.com/office/drawing/2014/main" id="{728EEFA2-265D-AC07-5F82-F0037E3AC657}"/>
               </a:ext>
             </a:extLst>
           </p:cNvPr>
@@ -11499,7 +11694,7 @@
           <p:cNvPr id="4" name="CuadroTexto 3">
             <a:extLst>
               <a:ext uri="{FF2B5EF4-FFF2-40B4-BE49-F238E27FC236}">
-                <a16:creationId xmlns:a16="http://schemas.microsoft.com/office/drawing/2014/main" id="{BBD29CD5-2995-DEEE-7EB2-5087A0CA9DE9}"/>
+                <a16:creationId xmlns:a16="http://schemas.microsoft.com/office/drawing/2014/main" id="{BA9C0075-714F-CC23-DC53-DBA99F67999C}"/>
               </a:ext>
             </a:extLst>
           </p:cNvPr>
@@ -11539,7 +11734,7 @@
           <p:cNvPr id="5" name="Rectángulo: esquinas redondeadas 4">
             <a:extLst>
               <a:ext uri="{FF2B5EF4-FFF2-40B4-BE49-F238E27FC236}">
-                <a16:creationId xmlns:a16="http://schemas.microsoft.com/office/drawing/2014/main" id="{17CEA027-1CF4-64D0-C7A3-4234DEF651E7}"/>
+                <a16:creationId xmlns:a16="http://schemas.microsoft.com/office/drawing/2014/main" id="{60C19EB6-6556-325A-BC62-46F8CCBB7F3D}"/>
               </a:ext>
             </a:extLst>
           </p:cNvPr>
@@ -11593,7 +11788,7 @@
           <p:cNvPr id="6" name="CuadroTexto 5">
             <a:extLst>
               <a:ext uri="{FF2B5EF4-FFF2-40B4-BE49-F238E27FC236}">
-                <a16:creationId xmlns:a16="http://schemas.microsoft.com/office/drawing/2014/main" id="{CC1888A3-3A4F-1D68-A197-FDF057B2C713}"/>
+                <a16:creationId xmlns:a16="http://schemas.microsoft.com/office/drawing/2014/main" id="{CC6FC31A-C276-07A6-83B1-ECA11B3FD75E}"/>
               </a:ext>
             </a:extLst>
           </p:cNvPr>
@@ -11633,7 +11828,7 @@
           <p:cNvPr id="7" name="CuadroTexto 6">
             <a:extLst>
               <a:ext uri="{FF2B5EF4-FFF2-40B4-BE49-F238E27FC236}">
-                <a16:creationId xmlns:a16="http://schemas.microsoft.com/office/drawing/2014/main" id="{1793028D-CA88-DB07-AD8E-8D4F835B7B10}"/>
+                <a16:creationId xmlns:a16="http://schemas.microsoft.com/office/drawing/2014/main" id="{6B54BA2B-08B6-BE01-F079-60061C08C708}"/>
               </a:ext>
             </a:extLst>
           </p:cNvPr>
@@ -11673,7 +11868,7 @@
           <p:cNvPr id="8" name="Rectángulo: esquinas redondeadas 7">
             <a:extLst>
               <a:ext uri="{FF2B5EF4-FFF2-40B4-BE49-F238E27FC236}">
-                <a16:creationId xmlns:a16="http://schemas.microsoft.com/office/drawing/2014/main" id="{4A558677-C866-62A1-1E71-993B4D95E4F2}"/>
+                <a16:creationId xmlns:a16="http://schemas.microsoft.com/office/drawing/2014/main" id="{DEBF0AD2-CDF2-F01F-70D1-E91CD7A7DD7B}"/>
               </a:ext>
             </a:extLst>
           </p:cNvPr>
@@ -11727,7 +11922,7 @@
           <p:cNvPr id="9" name="CuadroTexto 8">
             <a:extLst>
               <a:ext uri="{FF2B5EF4-FFF2-40B4-BE49-F238E27FC236}">
-                <a16:creationId xmlns:a16="http://schemas.microsoft.com/office/drawing/2014/main" id="{9C67C9A2-9611-E597-A0F4-5F4AF9F0CC03}"/>
+                <a16:creationId xmlns:a16="http://schemas.microsoft.com/office/drawing/2014/main" id="{68967BEB-B7E1-E56D-8A03-786CB7503607}"/>
               </a:ext>
             </a:extLst>
           </p:cNvPr>
@@ -11767,7 +11962,7 @@
           <p:cNvPr id="10" name="CuadroTexto 9">
             <a:extLst>
               <a:ext uri="{FF2B5EF4-FFF2-40B4-BE49-F238E27FC236}">
-                <a16:creationId xmlns:a16="http://schemas.microsoft.com/office/drawing/2014/main" id="{C138F767-6F11-A4C3-0626-D4CC43D28120}"/>
+                <a16:creationId xmlns:a16="http://schemas.microsoft.com/office/drawing/2014/main" id="{8E3F8F6D-FD23-7789-E9ED-1063D1A95BCD}"/>
               </a:ext>
             </a:extLst>
           </p:cNvPr>
@@ -11807,7 +12002,7 @@
           <p:cNvPr id="11" name="Rectángulo: esquinas redondeadas 10">
             <a:extLst>
               <a:ext uri="{FF2B5EF4-FFF2-40B4-BE49-F238E27FC236}">
-                <a16:creationId xmlns:a16="http://schemas.microsoft.com/office/drawing/2014/main" id="{BCAD6787-FAA2-14F0-8B25-0946EB1A5B29}"/>
+                <a16:creationId xmlns:a16="http://schemas.microsoft.com/office/drawing/2014/main" id="{3333A217-60C6-F9DA-7DE5-3273F9DFAE2B}"/>
               </a:ext>
             </a:extLst>
           </p:cNvPr>
@@ -11861,7 +12056,7 @@
           <p:cNvPr id="12" name="CuadroTexto 11">
             <a:extLst>
               <a:ext uri="{FF2B5EF4-FFF2-40B4-BE49-F238E27FC236}">
-                <a16:creationId xmlns:a16="http://schemas.microsoft.com/office/drawing/2014/main" id="{0AA20422-DC77-CC23-8DC0-1D6A3F3CFA2C}"/>
+                <a16:creationId xmlns:a16="http://schemas.microsoft.com/office/drawing/2014/main" id="{1ED88DF8-8179-2C5F-A0A9-73DBD73DCDE0}"/>
               </a:ext>
             </a:extLst>
           </p:cNvPr>
@@ -11901,7 +12096,7 @@
           <p:cNvPr id="13" name="CuadroTexto 12">
             <a:extLst>
               <a:ext uri="{FF2B5EF4-FFF2-40B4-BE49-F238E27FC236}">
-                <a16:creationId xmlns:a16="http://schemas.microsoft.com/office/drawing/2014/main" id="{3E5312E2-4CD1-2151-1BA8-B07624168BB7}"/>
+                <a16:creationId xmlns:a16="http://schemas.microsoft.com/office/drawing/2014/main" id="{3B112D6E-CB2E-0EFB-19C3-9726970F7664}"/>
               </a:ext>
             </a:extLst>
           </p:cNvPr>
@@ -11941,7 +12136,7 @@
           <p:cNvPr id="14" name="Rectángulo: esquinas redondeadas 13">
             <a:extLst>
               <a:ext uri="{FF2B5EF4-FFF2-40B4-BE49-F238E27FC236}">
-                <a16:creationId xmlns:a16="http://schemas.microsoft.com/office/drawing/2014/main" id="{E81C0679-D03A-6A0D-332A-86A1B1AEC437}"/>
+                <a16:creationId xmlns:a16="http://schemas.microsoft.com/office/drawing/2014/main" id="{D842ED75-80EE-6CE7-5FA0-6BC71FE444A2}"/>
               </a:ext>
             </a:extLst>
           </p:cNvPr>
@@ -11995,7 +12190,7 @@
           <p:cNvPr id="15" name="CuadroTexto 14">
             <a:extLst>
               <a:ext uri="{FF2B5EF4-FFF2-40B4-BE49-F238E27FC236}">
-                <a16:creationId xmlns:a16="http://schemas.microsoft.com/office/drawing/2014/main" id="{439ED77F-300D-7747-038C-C7235A53130F}"/>
+                <a16:creationId xmlns:a16="http://schemas.microsoft.com/office/drawing/2014/main" id="{314AF3F0-407F-5076-6C71-0534F90D1895}"/>
               </a:ext>
             </a:extLst>
           </p:cNvPr>
@@ -12035,7 +12230,7 @@
           <p:cNvPr id="16" name="CuadroTexto 15">
             <a:extLst>
               <a:ext uri="{FF2B5EF4-FFF2-40B4-BE49-F238E27FC236}">
-                <a16:creationId xmlns:a16="http://schemas.microsoft.com/office/drawing/2014/main" id="{38DF6048-8027-8105-AB0D-6A129451598C}"/>
+                <a16:creationId xmlns:a16="http://schemas.microsoft.com/office/drawing/2014/main" id="{C0BA1C4D-F3EC-3959-933A-B3D1DADBB214}"/>
               </a:ext>
             </a:extLst>
           </p:cNvPr>
@@ -12075,7 +12270,7 @@
           <p:cNvPr id="17" name="Rectángulo: esquinas redondeadas 16">
             <a:extLst>
               <a:ext uri="{FF2B5EF4-FFF2-40B4-BE49-F238E27FC236}">
-                <a16:creationId xmlns:a16="http://schemas.microsoft.com/office/drawing/2014/main" id="{48D4A248-2DAC-2D2D-40DA-A0C272FB9D70}"/>
+                <a16:creationId xmlns:a16="http://schemas.microsoft.com/office/drawing/2014/main" id="{BE43186C-06C5-4633-B185-1519E17A5942}"/>
               </a:ext>
             </a:extLst>
           </p:cNvPr>
@@ -12129,7 +12324,7 @@
           <p:cNvPr id="18" name="CuadroTexto 17">
             <a:extLst>
               <a:ext uri="{FF2B5EF4-FFF2-40B4-BE49-F238E27FC236}">
-                <a16:creationId xmlns:a16="http://schemas.microsoft.com/office/drawing/2014/main" id="{2CAEF4FC-B0DA-6EF8-C78D-8022D75BDCAD}"/>
+                <a16:creationId xmlns:a16="http://schemas.microsoft.com/office/drawing/2014/main" id="{348EC1A2-FF8F-191C-74D6-0CA65E360857}"/>
               </a:ext>
             </a:extLst>
           </p:cNvPr>
@@ -12169,7 +12364,7 @@
           <p:cNvPr id="19" name="CuadroTexto 18">
             <a:extLst>
               <a:ext uri="{FF2B5EF4-FFF2-40B4-BE49-F238E27FC236}">
-                <a16:creationId xmlns:a16="http://schemas.microsoft.com/office/drawing/2014/main" id="{380BBCD7-8522-81A5-53E1-E99DCD41D98F}"/>
+                <a16:creationId xmlns:a16="http://schemas.microsoft.com/office/drawing/2014/main" id="{347B51CF-EB24-88AC-F4AC-00F45C4C5859}"/>
               </a:ext>
             </a:extLst>
           </p:cNvPr>
@@ -12209,7 +12404,7 @@
           <p:cNvPr id="20" name="Rectángulo: esquinas redondeadas 19">
             <a:extLst>
               <a:ext uri="{FF2B5EF4-FFF2-40B4-BE49-F238E27FC236}">
-                <a16:creationId xmlns:a16="http://schemas.microsoft.com/office/drawing/2014/main" id="{7FC02C4D-DBFF-D14A-7FC5-DF3BBB26A494}"/>
+                <a16:creationId xmlns:a16="http://schemas.microsoft.com/office/drawing/2014/main" id="{4F3917CC-2989-10E3-5A63-461C4CADE5B8}"/>
               </a:ext>
             </a:extLst>
           </p:cNvPr>
@@ -12263,7 +12458,7 @@
           <p:cNvPr id="21" name="CuadroTexto 20">
             <a:extLst>
               <a:ext uri="{FF2B5EF4-FFF2-40B4-BE49-F238E27FC236}">
-                <a16:creationId xmlns:a16="http://schemas.microsoft.com/office/drawing/2014/main" id="{81735565-1B92-5540-5026-4E57A8C43268}"/>
+                <a16:creationId xmlns:a16="http://schemas.microsoft.com/office/drawing/2014/main" id="{3AF1EBAA-28C0-396A-C89C-E8851E4224F6}"/>
               </a:ext>
             </a:extLst>
           </p:cNvPr>
@@ -12303,7 +12498,7 @@
           <p:cNvPr id="22" name="CuadroTexto 21">
             <a:extLst>
               <a:ext uri="{FF2B5EF4-FFF2-40B4-BE49-F238E27FC236}">
-                <a16:creationId xmlns:a16="http://schemas.microsoft.com/office/drawing/2014/main" id="{772E63E3-B570-3617-DDA5-F26E392E9721}"/>
+                <a16:creationId xmlns:a16="http://schemas.microsoft.com/office/drawing/2014/main" id="{CC5F6D84-BE3E-CD72-653E-18210851BA33}"/>
               </a:ext>
             </a:extLst>
           </p:cNvPr>
@@ -12341,7 +12536,7 @@
     </p:spTree>
     <p:extLst>
       <p:ext uri="{BB962C8B-B14F-4D97-AF65-F5344CB8AC3E}">
-        <p14:creationId xmlns:p14="http://schemas.microsoft.com/office/powerpoint/2010/main" val="1093037199"/>
+        <p14:creationId xmlns:p14="http://schemas.microsoft.com/office/powerpoint/2010/main" val="2556743298"/>
       </p:ext>
     </p:extLst>
   </p:cSld>
@@ -12362,39 +12557,39 @@
         <a:sysClr val="window" lastClr="FFFFFF"/>
       </a:lt1>
       <a:dk2>
-        <a:srgbClr val="0E2841"/>
+        <a:srgbClr val="44546A"/>
       </a:dk2>
       <a:lt2>
-        <a:srgbClr val="E8E8E8"/>
+        <a:srgbClr val="E7E6E6"/>
       </a:lt2>
       <a:accent1>
-        <a:srgbClr val="156082"/>
+        <a:srgbClr val="4472C4"/>
       </a:accent1>
       <a:accent2>
-        <a:srgbClr val="E97132"/>
+        <a:srgbClr val="ED7D31"/>
       </a:accent2>
       <a:accent3>
-        <a:srgbClr val="196B24"/>
+        <a:srgbClr val="A5A5A5"/>
       </a:accent3>
       <a:accent4>
-        <a:srgbClr val="0F9ED5"/>
+        <a:srgbClr val="FFC000"/>
       </a:accent4>
       <a:accent5>
-        <a:srgbClr val="A02B93"/>
+        <a:srgbClr val="5B9BD5"/>
       </a:accent5>
       <a:accent6>
-        <a:srgbClr val="4EA72E"/>
+        <a:srgbClr val="70AD47"/>
       </a:accent6>
       <a:hlink>
-        <a:srgbClr val="467886"/>
+        <a:srgbClr val="0563C1"/>
       </a:hlink>
       <a:folHlink>
-        <a:srgbClr val="96607D"/>
+        <a:srgbClr val="954F72"/>
       </a:folHlink>
     </a:clrScheme>
     <a:fontScheme name="Office">
       <a:majorFont>
-        <a:latin typeface="Aptos Display" panose="02110004020202020204"/>
+        <a:latin typeface="Calibri Light" panose="020F0302020204030204"/>
         <a:ea typeface=""/>
         <a:cs typeface=""/>
         <a:font script="Jpan" typeface="游ゴシック Light"/>
@@ -12446,7 +12641,7 @@
         <a:font script="Tfng" typeface="Ebrima"/>
       </a:majorFont>
       <a:minorFont>
-        <a:latin typeface="Aptos" panose="02110004020202020204"/>
+        <a:latin typeface="Calibri" panose="020F0502020204030204"/>
         <a:ea typeface=""/>
         <a:cs typeface=""/>
         <a:font script="Jpan" typeface="游ゴシック"/>
@@ -12557,6 +12752,13 @@
         </a:gradFill>
       </a:fillStyleLst>
       <a:lnStyleLst>
+        <a:ln w="6350" cap="flat" cmpd="sng" algn="ctr">
+          <a:solidFill>
+            <a:schemeClr val="phClr"/>
+          </a:solidFill>
+          <a:prstDash val="solid"/>
+          <a:miter lim="800000"/>
+        </a:ln>
         <a:ln w="12700" cap="flat" cmpd="sng" algn="ctr">
           <a:solidFill>
             <a:schemeClr val="phClr"/>
@@ -12565,13 +12767,6 @@
           <a:miter lim="800000"/>
         </a:ln>
         <a:ln w="19050" cap="flat" cmpd="sng" algn="ctr">
-          <a:solidFill>
-            <a:schemeClr val="phClr"/>
-          </a:solidFill>
-          <a:prstDash val="solid"/>
-          <a:miter lim="800000"/>
-        </a:ln>
-        <a:ln w="25400" cap="flat" cmpd="sng" algn="ctr">
           <a:solidFill>
             <a:schemeClr val="phClr"/>
           </a:solidFill>
@@ -12636,31 +12831,11 @@
       </a:bgFillStyleLst>
     </a:fmtScheme>
   </a:themeElements>
-  <a:objectDefaults>
-    <a:lnDef>
-      <a:spPr/>
-      <a:bodyPr/>
-      <a:lstStyle/>
-      <a:style>
-        <a:lnRef idx="2">
-          <a:schemeClr val="accent1"/>
-        </a:lnRef>
-        <a:fillRef idx="0">
-          <a:schemeClr val="accent1"/>
-        </a:fillRef>
-        <a:effectRef idx="1">
-          <a:schemeClr val="accent1"/>
-        </a:effectRef>
-        <a:fontRef idx="minor">
-          <a:schemeClr val="tx1"/>
-        </a:fontRef>
-      </a:style>
-    </a:lnDef>
-  </a:objectDefaults>
+  <a:objectDefaults/>
   <a:extraClrSchemeLst/>
   <a:extLst>
     <a:ext uri="{05A4C25C-085E-4340-85A3-A5531E510DB2}">
-      <thm15:themeFamily xmlns:thm15="http://schemas.microsoft.com/office/thememl/2012/main" name="Office Theme" id="{2E142A2C-CD16-42D6-873A-C26D2A0506FA}" vid="{1BDDFF52-6CD6-40A5-AB3C-68EB2F1E4D0A}"/>
+      <thm15:themeFamily xmlns:thm15="http://schemas.microsoft.com/office/thememl/2012/main" name="Office Theme" id="{62F939B6-93AF-4DB8-9C6B-D6C7DFDC589F}" vid="{4A3C46E8-61CC-4603-A589-7422A47A8E4A}"/>
     </a:ext>
   </a:extLst>
 </a:theme>

--- a/docs/presentacion-defensa-final.pptx
+++ b/docs/presentacion-defensa-final.pptx
@@ -146,7 +146,7 @@
           <p:cNvPr id="2" name="Título 1">
             <a:extLst>
               <a:ext uri="{FF2B5EF4-FFF2-40B4-BE49-F238E27FC236}">
-                <a16:creationId xmlns:a16="http://schemas.microsoft.com/office/drawing/2014/main" id="{42059031-D005-033F-527C-2532EAFDFE18}"/>
+                <a16:creationId xmlns:a16="http://schemas.microsoft.com/office/drawing/2014/main" id="{F747E9A5-A69C-AF31-D358-E9AF2C95B4F2}"/>
               </a:ext>
             </a:extLst>
           </p:cNvPr>
@@ -183,7 +183,7 @@
           <p:cNvPr id="3" name="Subtítulo 2">
             <a:extLst>
               <a:ext uri="{FF2B5EF4-FFF2-40B4-BE49-F238E27FC236}">
-                <a16:creationId xmlns:a16="http://schemas.microsoft.com/office/drawing/2014/main" id="{7151C16C-7DD0-8D00-A6C2-83E337E6DC55}"/>
+                <a16:creationId xmlns:a16="http://schemas.microsoft.com/office/drawing/2014/main" id="{9611385A-0F7B-2109-1713-B5B2D2EDC792}"/>
               </a:ext>
             </a:extLst>
           </p:cNvPr>
@@ -253,7 +253,7 @@
           <p:cNvPr id="4" name="Marcador de fecha 3">
             <a:extLst>
               <a:ext uri="{FF2B5EF4-FFF2-40B4-BE49-F238E27FC236}">
-                <a16:creationId xmlns:a16="http://schemas.microsoft.com/office/drawing/2014/main" id="{FE6FB086-1FAA-53BE-9924-178890CA8D97}"/>
+                <a16:creationId xmlns:a16="http://schemas.microsoft.com/office/drawing/2014/main" id="{C52BBF9F-F302-7E77-541C-38E060120F29}"/>
               </a:ext>
             </a:extLst>
           </p:cNvPr>
@@ -269,9 +269,9 @@
           <a:bodyPr/>
           <a:lstStyle/>
           <a:p>
-            <a:fld id="{9835FBA3-5475-4EC2-B841-90BC3B1D7D90}" type="datetimeFigureOut">
+            <a:fld id="{7DF9D857-2BC1-4ECA-A48E-C0419EF44063}" type="datetimeFigureOut">
               <a:rPr lang="es-ES" smtClean="0"/>
-              <a:t>22/05/2026</a:t>
+              <a:t>27/05/2026</a:t>
             </a:fld>
             <a:endParaRPr lang="es-ES"/>
           </a:p>
@@ -282,7 +282,7 @@
           <p:cNvPr id="5" name="Marcador de pie de página 4">
             <a:extLst>
               <a:ext uri="{FF2B5EF4-FFF2-40B4-BE49-F238E27FC236}">
-                <a16:creationId xmlns:a16="http://schemas.microsoft.com/office/drawing/2014/main" id="{883E1A23-60DF-8CF4-4D5A-FE5F192807DC}"/>
+                <a16:creationId xmlns:a16="http://schemas.microsoft.com/office/drawing/2014/main" id="{93E919BF-FBDE-8D86-3269-B333EDF00920}"/>
               </a:ext>
             </a:extLst>
           </p:cNvPr>
@@ -307,7 +307,7 @@
           <p:cNvPr id="6" name="Marcador de número de diapositiva 5">
             <a:extLst>
               <a:ext uri="{FF2B5EF4-FFF2-40B4-BE49-F238E27FC236}">
-                <a16:creationId xmlns:a16="http://schemas.microsoft.com/office/drawing/2014/main" id="{5FC06098-BE92-3166-B3FF-BB3D6B629F1B}"/>
+                <a16:creationId xmlns:a16="http://schemas.microsoft.com/office/drawing/2014/main" id="{8A557309-3833-7F7A-228A-CF7BFD6250BE}"/>
               </a:ext>
             </a:extLst>
           </p:cNvPr>
@@ -323,7 +323,7 @@
           <a:bodyPr/>
           <a:lstStyle/>
           <a:p>
-            <a:fld id="{96B8D56F-A2A2-43A0-8CA7-B1F0D0BAB8F0}" type="slidenum">
+            <a:fld id="{AA515A41-34E0-4B8A-BFF5-025DE5A27467}" type="slidenum">
               <a:rPr lang="es-ES" smtClean="0"/>
               <a:t>‹Nº›</a:t>
             </a:fld>
@@ -334,7 +334,7 @@
     </p:spTree>
     <p:extLst>
       <p:ext uri="{BB962C8B-B14F-4D97-AF65-F5344CB8AC3E}">
-        <p14:creationId xmlns:p14="http://schemas.microsoft.com/office/powerpoint/2010/main" val="1496105625"/>
+        <p14:creationId xmlns:p14="http://schemas.microsoft.com/office/powerpoint/2010/main" val="1096258657"/>
       </p:ext>
     </p:extLst>
   </p:cSld>
@@ -366,7 +366,7 @@
           <p:cNvPr id="2" name="Título 1">
             <a:extLst>
               <a:ext uri="{FF2B5EF4-FFF2-40B4-BE49-F238E27FC236}">
-                <a16:creationId xmlns:a16="http://schemas.microsoft.com/office/drawing/2014/main" id="{BD306D51-8173-C58C-B3E7-ABF0DFCA1D23}"/>
+                <a16:creationId xmlns:a16="http://schemas.microsoft.com/office/drawing/2014/main" id="{54E1A38A-0F12-FD41-A2C0-70604426A558}"/>
               </a:ext>
             </a:extLst>
           </p:cNvPr>
@@ -394,7 +394,7 @@
           <p:cNvPr id="3" name="Marcador de texto vertical 2">
             <a:extLst>
               <a:ext uri="{FF2B5EF4-FFF2-40B4-BE49-F238E27FC236}">
-                <a16:creationId xmlns:a16="http://schemas.microsoft.com/office/drawing/2014/main" id="{62D32270-BCDC-E7C3-8E2C-768709CDED75}"/>
+                <a16:creationId xmlns:a16="http://schemas.microsoft.com/office/drawing/2014/main" id="{DBE13BC4-A7FA-7D61-9FFB-D416C20899A3}"/>
               </a:ext>
             </a:extLst>
           </p:cNvPr>
@@ -451,7 +451,7 @@
           <p:cNvPr id="4" name="Marcador de fecha 3">
             <a:extLst>
               <a:ext uri="{FF2B5EF4-FFF2-40B4-BE49-F238E27FC236}">
-                <a16:creationId xmlns:a16="http://schemas.microsoft.com/office/drawing/2014/main" id="{6E3FA4E6-A1B5-50BD-5294-F37E568BE673}"/>
+                <a16:creationId xmlns:a16="http://schemas.microsoft.com/office/drawing/2014/main" id="{70B0F91E-D46E-5A6F-E9C1-DDC7DA6F64B7}"/>
               </a:ext>
             </a:extLst>
           </p:cNvPr>
@@ -467,9 +467,9 @@
           <a:bodyPr/>
           <a:lstStyle/>
           <a:p>
-            <a:fld id="{9835FBA3-5475-4EC2-B841-90BC3B1D7D90}" type="datetimeFigureOut">
+            <a:fld id="{7DF9D857-2BC1-4ECA-A48E-C0419EF44063}" type="datetimeFigureOut">
               <a:rPr lang="es-ES" smtClean="0"/>
-              <a:t>22/05/2026</a:t>
+              <a:t>27/05/2026</a:t>
             </a:fld>
             <a:endParaRPr lang="es-ES"/>
           </a:p>
@@ -480,7 +480,7 @@
           <p:cNvPr id="5" name="Marcador de pie de página 4">
             <a:extLst>
               <a:ext uri="{FF2B5EF4-FFF2-40B4-BE49-F238E27FC236}">
-                <a16:creationId xmlns:a16="http://schemas.microsoft.com/office/drawing/2014/main" id="{768C7386-B9E3-2184-B862-9C5190870FFC}"/>
+                <a16:creationId xmlns:a16="http://schemas.microsoft.com/office/drawing/2014/main" id="{E4906C85-F32C-8D4E-692B-EA7A9BE8DB65}"/>
               </a:ext>
             </a:extLst>
           </p:cNvPr>
@@ -505,7 +505,7 @@
           <p:cNvPr id="6" name="Marcador de número de diapositiva 5">
             <a:extLst>
               <a:ext uri="{FF2B5EF4-FFF2-40B4-BE49-F238E27FC236}">
-                <a16:creationId xmlns:a16="http://schemas.microsoft.com/office/drawing/2014/main" id="{D8DFF596-B1AB-1310-787F-3A0960306EA0}"/>
+                <a16:creationId xmlns:a16="http://schemas.microsoft.com/office/drawing/2014/main" id="{F9B679B1-8A4E-00F6-E432-D501D8B369C0}"/>
               </a:ext>
             </a:extLst>
           </p:cNvPr>
@@ -521,7 +521,7 @@
           <a:bodyPr/>
           <a:lstStyle/>
           <a:p>
-            <a:fld id="{96B8D56F-A2A2-43A0-8CA7-B1F0D0BAB8F0}" type="slidenum">
+            <a:fld id="{AA515A41-34E0-4B8A-BFF5-025DE5A27467}" type="slidenum">
               <a:rPr lang="es-ES" smtClean="0"/>
               <a:t>‹Nº›</a:t>
             </a:fld>
@@ -532,7 +532,7 @@
     </p:spTree>
     <p:extLst>
       <p:ext uri="{BB962C8B-B14F-4D97-AF65-F5344CB8AC3E}">
-        <p14:creationId xmlns:p14="http://schemas.microsoft.com/office/powerpoint/2010/main" val="3173428753"/>
+        <p14:creationId xmlns:p14="http://schemas.microsoft.com/office/powerpoint/2010/main" val="3866775877"/>
       </p:ext>
     </p:extLst>
   </p:cSld>
@@ -564,7 +564,7 @@
           <p:cNvPr id="2" name="Título vertical 1">
             <a:extLst>
               <a:ext uri="{FF2B5EF4-FFF2-40B4-BE49-F238E27FC236}">
-                <a16:creationId xmlns:a16="http://schemas.microsoft.com/office/drawing/2014/main" id="{668F0699-4FB4-04B4-D93F-03A917E8398C}"/>
+                <a16:creationId xmlns:a16="http://schemas.microsoft.com/office/drawing/2014/main" id="{3969AAB8-257F-573C-1745-C77C65247482}"/>
               </a:ext>
             </a:extLst>
           </p:cNvPr>
@@ -597,7 +597,7 @@
           <p:cNvPr id="3" name="Marcador de texto vertical 2">
             <a:extLst>
               <a:ext uri="{FF2B5EF4-FFF2-40B4-BE49-F238E27FC236}">
-                <a16:creationId xmlns:a16="http://schemas.microsoft.com/office/drawing/2014/main" id="{6D784313-848C-71FB-5349-2423CBF41DCB}"/>
+                <a16:creationId xmlns:a16="http://schemas.microsoft.com/office/drawing/2014/main" id="{CDC5E29F-8D9E-0979-F474-63AF8DA8314D}"/>
               </a:ext>
             </a:extLst>
           </p:cNvPr>
@@ -659,7 +659,7 @@
           <p:cNvPr id="4" name="Marcador de fecha 3">
             <a:extLst>
               <a:ext uri="{FF2B5EF4-FFF2-40B4-BE49-F238E27FC236}">
-                <a16:creationId xmlns:a16="http://schemas.microsoft.com/office/drawing/2014/main" id="{BC8121BE-A98A-F3AA-B5AA-600E444987A5}"/>
+                <a16:creationId xmlns:a16="http://schemas.microsoft.com/office/drawing/2014/main" id="{82311995-F201-2E73-7F41-F18FC3BC97B8}"/>
               </a:ext>
             </a:extLst>
           </p:cNvPr>
@@ -675,9 +675,9 @@
           <a:bodyPr/>
           <a:lstStyle/>
           <a:p>
-            <a:fld id="{9835FBA3-5475-4EC2-B841-90BC3B1D7D90}" type="datetimeFigureOut">
+            <a:fld id="{7DF9D857-2BC1-4ECA-A48E-C0419EF44063}" type="datetimeFigureOut">
               <a:rPr lang="es-ES" smtClean="0"/>
-              <a:t>22/05/2026</a:t>
+              <a:t>27/05/2026</a:t>
             </a:fld>
             <a:endParaRPr lang="es-ES"/>
           </a:p>
@@ -688,7 +688,7 @@
           <p:cNvPr id="5" name="Marcador de pie de página 4">
             <a:extLst>
               <a:ext uri="{FF2B5EF4-FFF2-40B4-BE49-F238E27FC236}">
-                <a16:creationId xmlns:a16="http://schemas.microsoft.com/office/drawing/2014/main" id="{FB3D6D49-535B-3B15-0DAC-F06C08FECDC4}"/>
+                <a16:creationId xmlns:a16="http://schemas.microsoft.com/office/drawing/2014/main" id="{5BE549F1-05B4-D110-36F4-2856D96123C9}"/>
               </a:ext>
             </a:extLst>
           </p:cNvPr>
@@ -713,7 +713,7 @@
           <p:cNvPr id="6" name="Marcador de número de diapositiva 5">
             <a:extLst>
               <a:ext uri="{FF2B5EF4-FFF2-40B4-BE49-F238E27FC236}">
-                <a16:creationId xmlns:a16="http://schemas.microsoft.com/office/drawing/2014/main" id="{FE43E37E-E97A-9F12-B131-28CC09EB01A9}"/>
+                <a16:creationId xmlns:a16="http://schemas.microsoft.com/office/drawing/2014/main" id="{0119D8FD-3460-7AB5-D3B2-D050CDEFF9B8}"/>
               </a:ext>
             </a:extLst>
           </p:cNvPr>
@@ -729,7 +729,7 @@
           <a:bodyPr/>
           <a:lstStyle/>
           <a:p>
-            <a:fld id="{96B8D56F-A2A2-43A0-8CA7-B1F0D0BAB8F0}" type="slidenum">
+            <a:fld id="{AA515A41-34E0-4B8A-BFF5-025DE5A27467}" type="slidenum">
               <a:rPr lang="es-ES" smtClean="0"/>
               <a:t>‹Nº›</a:t>
             </a:fld>
@@ -740,7 +740,7 @@
     </p:spTree>
     <p:extLst>
       <p:ext uri="{BB962C8B-B14F-4D97-AF65-F5344CB8AC3E}">
-        <p14:creationId xmlns:p14="http://schemas.microsoft.com/office/powerpoint/2010/main" val="764455321"/>
+        <p14:creationId xmlns:p14="http://schemas.microsoft.com/office/powerpoint/2010/main" val="2594176324"/>
       </p:ext>
     </p:extLst>
   </p:cSld>
@@ -772,7 +772,7 @@
           <p:cNvPr id="2" name="Título 1">
             <a:extLst>
               <a:ext uri="{FF2B5EF4-FFF2-40B4-BE49-F238E27FC236}">
-                <a16:creationId xmlns:a16="http://schemas.microsoft.com/office/drawing/2014/main" id="{52D8F515-57CD-7DBC-3D4C-239575297B07}"/>
+                <a16:creationId xmlns:a16="http://schemas.microsoft.com/office/drawing/2014/main" id="{A657B3D1-9F17-9857-C23E-0FF9659FD909}"/>
               </a:ext>
             </a:extLst>
           </p:cNvPr>
@@ -800,7 +800,7 @@
           <p:cNvPr id="3" name="Marcador de contenido 2">
             <a:extLst>
               <a:ext uri="{FF2B5EF4-FFF2-40B4-BE49-F238E27FC236}">
-                <a16:creationId xmlns:a16="http://schemas.microsoft.com/office/drawing/2014/main" id="{8350FE39-63BD-D9B8-1666-A34EA3767007}"/>
+                <a16:creationId xmlns:a16="http://schemas.microsoft.com/office/drawing/2014/main" id="{CCC8DB27-0B8D-3DFD-F444-147E77A62E3F}"/>
               </a:ext>
             </a:extLst>
           </p:cNvPr>
@@ -857,7 +857,7 @@
           <p:cNvPr id="4" name="Marcador de fecha 3">
             <a:extLst>
               <a:ext uri="{FF2B5EF4-FFF2-40B4-BE49-F238E27FC236}">
-                <a16:creationId xmlns:a16="http://schemas.microsoft.com/office/drawing/2014/main" id="{7AEE7F05-89E6-9588-62F7-49D45E1C6BD7}"/>
+                <a16:creationId xmlns:a16="http://schemas.microsoft.com/office/drawing/2014/main" id="{3F9DB092-AE36-B1AA-99F0-4ECC974B29D3}"/>
               </a:ext>
             </a:extLst>
           </p:cNvPr>
@@ -873,9 +873,9 @@
           <a:bodyPr/>
           <a:lstStyle/>
           <a:p>
-            <a:fld id="{9835FBA3-5475-4EC2-B841-90BC3B1D7D90}" type="datetimeFigureOut">
+            <a:fld id="{7DF9D857-2BC1-4ECA-A48E-C0419EF44063}" type="datetimeFigureOut">
               <a:rPr lang="es-ES" smtClean="0"/>
-              <a:t>22/05/2026</a:t>
+              <a:t>27/05/2026</a:t>
             </a:fld>
             <a:endParaRPr lang="es-ES"/>
           </a:p>
@@ -886,7 +886,7 @@
           <p:cNvPr id="5" name="Marcador de pie de página 4">
             <a:extLst>
               <a:ext uri="{FF2B5EF4-FFF2-40B4-BE49-F238E27FC236}">
-                <a16:creationId xmlns:a16="http://schemas.microsoft.com/office/drawing/2014/main" id="{CD0D6C44-66D1-D0F3-A664-59E365E86072}"/>
+                <a16:creationId xmlns:a16="http://schemas.microsoft.com/office/drawing/2014/main" id="{48D9DE15-B473-06DB-601C-09CE6D7B00A2}"/>
               </a:ext>
             </a:extLst>
           </p:cNvPr>
@@ -911,7 +911,7 @@
           <p:cNvPr id="6" name="Marcador de número de diapositiva 5">
             <a:extLst>
               <a:ext uri="{FF2B5EF4-FFF2-40B4-BE49-F238E27FC236}">
-                <a16:creationId xmlns:a16="http://schemas.microsoft.com/office/drawing/2014/main" id="{D6562176-8E15-94A2-29E4-2DA37DAD83BC}"/>
+                <a16:creationId xmlns:a16="http://schemas.microsoft.com/office/drawing/2014/main" id="{811C6BA2-83FB-199D-78F2-AC5FCF809BFB}"/>
               </a:ext>
             </a:extLst>
           </p:cNvPr>
@@ -927,7 +927,7 @@
           <a:bodyPr/>
           <a:lstStyle/>
           <a:p>
-            <a:fld id="{96B8D56F-A2A2-43A0-8CA7-B1F0D0BAB8F0}" type="slidenum">
+            <a:fld id="{AA515A41-34E0-4B8A-BFF5-025DE5A27467}" type="slidenum">
               <a:rPr lang="es-ES" smtClean="0"/>
               <a:t>‹Nº›</a:t>
             </a:fld>
@@ -938,7 +938,7 @@
     </p:spTree>
     <p:extLst>
       <p:ext uri="{BB962C8B-B14F-4D97-AF65-F5344CB8AC3E}">
-        <p14:creationId xmlns:p14="http://schemas.microsoft.com/office/powerpoint/2010/main" val="87129758"/>
+        <p14:creationId xmlns:p14="http://schemas.microsoft.com/office/powerpoint/2010/main" val="174078382"/>
       </p:ext>
     </p:extLst>
   </p:cSld>
@@ -970,7 +970,7 @@
           <p:cNvPr id="2" name="Título 1">
             <a:extLst>
               <a:ext uri="{FF2B5EF4-FFF2-40B4-BE49-F238E27FC236}">
-                <a16:creationId xmlns:a16="http://schemas.microsoft.com/office/drawing/2014/main" id="{89CAF63F-9D1A-D067-ADA4-3D4FD9ABC134}"/>
+                <a16:creationId xmlns:a16="http://schemas.microsoft.com/office/drawing/2014/main" id="{9FEE0E53-739A-5E14-2265-63E08A962888}"/>
               </a:ext>
             </a:extLst>
           </p:cNvPr>
@@ -1007,7 +1007,7 @@
           <p:cNvPr id="3" name="Marcador de texto 2">
             <a:extLst>
               <a:ext uri="{FF2B5EF4-FFF2-40B4-BE49-F238E27FC236}">
-                <a16:creationId xmlns:a16="http://schemas.microsoft.com/office/drawing/2014/main" id="{8C293125-11DB-977A-26FC-657AEE91324B}"/>
+                <a16:creationId xmlns:a16="http://schemas.microsoft.com/office/drawing/2014/main" id="{3CF09E20-BB42-9D1C-9A16-C9727455D13D}"/>
               </a:ext>
             </a:extLst>
           </p:cNvPr>
@@ -1132,7 +1132,7 @@
           <p:cNvPr id="4" name="Marcador de fecha 3">
             <a:extLst>
               <a:ext uri="{FF2B5EF4-FFF2-40B4-BE49-F238E27FC236}">
-                <a16:creationId xmlns:a16="http://schemas.microsoft.com/office/drawing/2014/main" id="{FE6765E1-76E4-3BD3-54A5-6945A371A7C2}"/>
+                <a16:creationId xmlns:a16="http://schemas.microsoft.com/office/drawing/2014/main" id="{6D43DD57-7FE4-C155-4E7A-0401C12069F9}"/>
               </a:ext>
             </a:extLst>
           </p:cNvPr>
@@ -1148,9 +1148,9 @@
           <a:bodyPr/>
           <a:lstStyle/>
           <a:p>
-            <a:fld id="{9835FBA3-5475-4EC2-B841-90BC3B1D7D90}" type="datetimeFigureOut">
+            <a:fld id="{7DF9D857-2BC1-4ECA-A48E-C0419EF44063}" type="datetimeFigureOut">
               <a:rPr lang="es-ES" smtClean="0"/>
-              <a:t>22/05/2026</a:t>
+              <a:t>27/05/2026</a:t>
             </a:fld>
             <a:endParaRPr lang="es-ES"/>
           </a:p>
@@ -1161,7 +1161,7 @@
           <p:cNvPr id="5" name="Marcador de pie de página 4">
             <a:extLst>
               <a:ext uri="{FF2B5EF4-FFF2-40B4-BE49-F238E27FC236}">
-                <a16:creationId xmlns:a16="http://schemas.microsoft.com/office/drawing/2014/main" id="{41CD489E-74B7-9355-AED2-98A117A8FA8C}"/>
+                <a16:creationId xmlns:a16="http://schemas.microsoft.com/office/drawing/2014/main" id="{2DCB3593-8C1B-01A6-64F0-1F8662C0C058}"/>
               </a:ext>
             </a:extLst>
           </p:cNvPr>
@@ -1186,7 +1186,7 @@
           <p:cNvPr id="6" name="Marcador de número de diapositiva 5">
             <a:extLst>
               <a:ext uri="{FF2B5EF4-FFF2-40B4-BE49-F238E27FC236}">
-                <a16:creationId xmlns:a16="http://schemas.microsoft.com/office/drawing/2014/main" id="{C579FC5E-83F4-9070-F1AD-CABEC30003C5}"/>
+                <a16:creationId xmlns:a16="http://schemas.microsoft.com/office/drawing/2014/main" id="{E396AEC0-2558-3D0F-B016-A6852FB7E0A8}"/>
               </a:ext>
             </a:extLst>
           </p:cNvPr>
@@ -1202,7 +1202,7 @@
           <a:bodyPr/>
           <a:lstStyle/>
           <a:p>
-            <a:fld id="{96B8D56F-A2A2-43A0-8CA7-B1F0D0BAB8F0}" type="slidenum">
+            <a:fld id="{AA515A41-34E0-4B8A-BFF5-025DE5A27467}" type="slidenum">
               <a:rPr lang="es-ES" smtClean="0"/>
               <a:t>‹Nº›</a:t>
             </a:fld>
@@ -1213,7 +1213,7 @@
     </p:spTree>
     <p:extLst>
       <p:ext uri="{BB962C8B-B14F-4D97-AF65-F5344CB8AC3E}">
-        <p14:creationId xmlns:p14="http://schemas.microsoft.com/office/powerpoint/2010/main" val="3470828759"/>
+        <p14:creationId xmlns:p14="http://schemas.microsoft.com/office/powerpoint/2010/main" val="3538564462"/>
       </p:ext>
     </p:extLst>
   </p:cSld>
@@ -1245,7 +1245,7 @@
           <p:cNvPr id="2" name="Título 1">
             <a:extLst>
               <a:ext uri="{FF2B5EF4-FFF2-40B4-BE49-F238E27FC236}">
-                <a16:creationId xmlns:a16="http://schemas.microsoft.com/office/drawing/2014/main" id="{0723E889-42FE-AAE2-FD9B-D46615EC2921}"/>
+                <a16:creationId xmlns:a16="http://schemas.microsoft.com/office/drawing/2014/main" id="{0386B269-1F9B-096D-4156-1A9A9FDDC953}"/>
               </a:ext>
             </a:extLst>
           </p:cNvPr>
@@ -1273,7 +1273,7 @@
           <p:cNvPr id="3" name="Marcador de contenido 2">
             <a:extLst>
               <a:ext uri="{FF2B5EF4-FFF2-40B4-BE49-F238E27FC236}">
-                <a16:creationId xmlns:a16="http://schemas.microsoft.com/office/drawing/2014/main" id="{29DC9890-8552-BC1F-A811-E8447EBA79B1}"/>
+                <a16:creationId xmlns:a16="http://schemas.microsoft.com/office/drawing/2014/main" id="{3691497C-0160-D7CC-5A2C-37BA9EFFA3D7}"/>
               </a:ext>
             </a:extLst>
           </p:cNvPr>
@@ -1335,7 +1335,7 @@
           <p:cNvPr id="4" name="Marcador de contenido 3">
             <a:extLst>
               <a:ext uri="{FF2B5EF4-FFF2-40B4-BE49-F238E27FC236}">
-                <a16:creationId xmlns:a16="http://schemas.microsoft.com/office/drawing/2014/main" id="{ADC1DE10-CBFE-A5B5-E50D-5F4A032A97A7}"/>
+                <a16:creationId xmlns:a16="http://schemas.microsoft.com/office/drawing/2014/main" id="{F7CE6F9C-0984-7B61-D31C-4FC486CBDBFD}"/>
               </a:ext>
             </a:extLst>
           </p:cNvPr>
@@ -1397,7 +1397,7 @@
           <p:cNvPr id="5" name="Marcador de fecha 4">
             <a:extLst>
               <a:ext uri="{FF2B5EF4-FFF2-40B4-BE49-F238E27FC236}">
-                <a16:creationId xmlns:a16="http://schemas.microsoft.com/office/drawing/2014/main" id="{8572ABA5-0A0C-5646-43BD-F215AC9EBFCD}"/>
+                <a16:creationId xmlns:a16="http://schemas.microsoft.com/office/drawing/2014/main" id="{D587CFF8-9155-5D3D-5C77-4353055CC059}"/>
               </a:ext>
             </a:extLst>
           </p:cNvPr>
@@ -1413,9 +1413,9 @@
           <a:bodyPr/>
           <a:lstStyle/>
           <a:p>
-            <a:fld id="{9835FBA3-5475-4EC2-B841-90BC3B1D7D90}" type="datetimeFigureOut">
+            <a:fld id="{7DF9D857-2BC1-4ECA-A48E-C0419EF44063}" type="datetimeFigureOut">
               <a:rPr lang="es-ES" smtClean="0"/>
-              <a:t>22/05/2026</a:t>
+              <a:t>27/05/2026</a:t>
             </a:fld>
             <a:endParaRPr lang="es-ES"/>
           </a:p>
@@ -1426,7 +1426,7 @@
           <p:cNvPr id="6" name="Marcador de pie de página 5">
             <a:extLst>
               <a:ext uri="{FF2B5EF4-FFF2-40B4-BE49-F238E27FC236}">
-                <a16:creationId xmlns:a16="http://schemas.microsoft.com/office/drawing/2014/main" id="{4902B53A-25F7-4386-F7F2-8D668F480001}"/>
+                <a16:creationId xmlns:a16="http://schemas.microsoft.com/office/drawing/2014/main" id="{02A4965C-5C15-5E1C-997E-BE1FE0D87CCA}"/>
               </a:ext>
             </a:extLst>
           </p:cNvPr>
@@ -1451,7 +1451,7 @@
           <p:cNvPr id="7" name="Marcador de número de diapositiva 6">
             <a:extLst>
               <a:ext uri="{FF2B5EF4-FFF2-40B4-BE49-F238E27FC236}">
-                <a16:creationId xmlns:a16="http://schemas.microsoft.com/office/drawing/2014/main" id="{B7C05165-9A70-E739-43B0-ABCC852AF1D2}"/>
+                <a16:creationId xmlns:a16="http://schemas.microsoft.com/office/drawing/2014/main" id="{678C03CE-F840-8305-FCDB-505111302E04}"/>
               </a:ext>
             </a:extLst>
           </p:cNvPr>
@@ -1467,7 +1467,7 @@
           <a:bodyPr/>
           <a:lstStyle/>
           <a:p>
-            <a:fld id="{96B8D56F-A2A2-43A0-8CA7-B1F0D0BAB8F0}" type="slidenum">
+            <a:fld id="{AA515A41-34E0-4B8A-BFF5-025DE5A27467}" type="slidenum">
               <a:rPr lang="es-ES" smtClean="0"/>
               <a:t>‹Nº›</a:t>
             </a:fld>
@@ -1478,7 +1478,7 @@
     </p:spTree>
     <p:extLst>
       <p:ext uri="{BB962C8B-B14F-4D97-AF65-F5344CB8AC3E}">
-        <p14:creationId xmlns:p14="http://schemas.microsoft.com/office/powerpoint/2010/main" val="795092294"/>
+        <p14:creationId xmlns:p14="http://schemas.microsoft.com/office/powerpoint/2010/main" val="1591076314"/>
       </p:ext>
     </p:extLst>
   </p:cSld>
@@ -1510,7 +1510,7 @@
           <p:cNvPr id="2" name="Título 1">
             <a:extLst>
               <a:ext uri="{FF2B5EF4-FFF2-40B4-BE49-F238E27FC236}">
-                <a16:creationId xmlns:a16="http://schemas.microsoft.com/office/drawing/2014/main" id="{C96C73B9-025C-53EA-AC30-0915BB284A60}"/>
+                <a16:creationId xmlns:a16="http://schemas.microsoft.com/office/drawing/2014/main" id="{C95FE9DA-633C-A7A3-4DF1-9E0CE4AD708E}"/>
               </a:ext>
             </a:extLst>
           </p:cNvPr>
@@ -1543,7 +1543,7 @@
           <p:cNvPr id="3" name="Marcador de texto 2">
             <a:extLst>
               <a:ext uri="{FF2B5EF4-FFF2-40B4-BE49-F238E27FC236}">
-                <a16:creationId xmlns:a16="http://schemas.microsoft.com/office/drawing/2014/main" id="{B9948733-248B-D7B4-47BC-C180F0B0D8AC}"/>
+                <a16:creationId xmlns:a16="http://schemas.microsoft.com/office/drawing/2014/main" id="{A9C3C829-0D26-0D9D-61AB-5F9AE070EB70}"/>
               </a:ext>
             </a:extLst>
           </p:cNvPr>
@@ -1614,7 +1614,7 @@
           <p:cNvPr id="4" name="Marcador de contenido 3">
             <a:extLst>
               <a:ext uri="{FF2B5EF4-FFF2-40B4-BE49-F238E27FC236}">
-                <a16:creationId xmlns:a16="http://schemas.microsoft.com/office/drawing/2014/main" id="{95CD6CCE-6DCF-F78A-40FF-40D0A74D8547}"/>
+                <a16:creationId xmlns:a16="http://schemas.microsoft.com/office/drawing/2014/main" id="{ECC82072-9276-3394-D5C3-5CAAC1625396}"/>
               </a:ext>
             </a:extLst>
           </p:cNvPr>
@@ -1676,7 +1676,7 @@
           <p:cNvPr id="5" name="Marcador de texto 4">
             <a:extLst>
               <a:ext uri="{FF2B5EF4-FFF2-40B4-BE49-F238E27FC236}">
-                <a16:creationId xmlns:a16="http://schemas.microsoft.com/office/drawing/2014/main" id="{07764DD9-26E9-2D25-FDE9-E9BF7098D8DE}"/>
+                <a16:creationId xmlns:a16="http://schemas.microsoft.com/office/drawing/2014/main" id="{9B68160E-CD31-5543-6D4B-9AB56CEFC07B}"/>
               </a:ext>
             </a:extLst>
           </p:cNvPr>
@@ -1747,7 +1747,7 @@
           <p:cNvPr id="6" name="Marcador de contenido 5">
             <a:extLst>
               <a:ext uri="{FF2B5EF4-FFF2-40B4-BE49-F238E27FC236}">
-                <a16:creationId xmlns:a16="http://schemas.microsoft.com/office/drawing/2014/main" id="{C01CD537-2D04-6254-7654-5BE03193D978}"/>
+                <a16:creationId xmlns:a16="http://schemas.microsoft.com/office/drawing/2014/main" id="{F8B5504F-2A8D-DF35-1794-1632E2A34FE8}"/>
               </a:ext>
             </a:extLst>
           </p:cNvPr>
@@ -1809,7 +1809,7 @@
           <p:cNvPr id="7" name="Marcador de fecha 6">
             <a:extLst>
               <a:ext uri="{FF2B5EF4-FFF2-40B4-BE49-F238E27FC236}">
-                <a16:creationId xmlns:a16="http://schemas.microsoft.com/office/drawing/2014/main" id="{0CEDF0AE-0300-3394-5CD6-5226575D730B}"/>
+                <a16:creationId xmlns:a16="http://schemas.microsoft.com/office/drawing/2014/main" id="{FD8E17A6-0FA9-0BBD-E0F3-37EE6389BCE7}"/>
               </a:ext>
             </a:extLst>
           </p:cNvPr>
@@ -1825,9 +1825,9 @@
           <a:bodyPr/>
           <a:lstStyle/>
           <a:p>
-            <a:fld id="{9835FBA3-5475-4EC2-B841-90BC3B1D7D90}" type="datetimeFigureOut">
+            <a:fld id="{7DF9D857-2BC1-4ECA-A48E-C0419EF44063}" type="datetimeFigureOut">
               <a:rPr lang="es-ES" smtClean="0"/>
-              <a:t>22/05/2026</a:t>
+              <a:t>27/05/2026</a:t>
             </a:fld>
             <a:endParaRPr lang="es-ES"/>
           </a:p>
@@ -1838,7 +1838,7 @@
           <p:cNvPr id="8" name="Marcador de pie de página 7">
             <a:extLst>
               <a:ext uri="{FF2B5EF4-FFF2-40B4-BE49-F238E27FC236}">
-                <a16:creationId xmlns:a16="http://schemas.microsoft.com/office/drawing/2014/main" id="{2BCB35A2-E749-9AFA-8214-08569E13580C}"/>
+                <a16:creationId xmlns:a16="http://schemas.microsoft.com/office/drawing/2014/main" id="{D099D6E1-9F08-46D6-96E0-6556CA612323}"/>
               </a:ext>
             </a:extLst>
           </p:cNvPr>
@@ -1863,7 +1863,7 @@
           <p:cNvPr id="9" name="Marcador de número de diapositiva 8">
             <a:extLst>
               <a:ext uri="{FF2B5EF4-FFF2-40B4-BE49-F238E27FC236}">
-                <a16:creationId xmlns:a16="http://schemas.microsoft.com/office/drawing/2014/main" id="{2D836A66-1100-864F-4759-0AE448374357}"/>
+                <a16:creationId xmlns:a16="http://schemas.microsoft.com/office/drawing/2014/main" id="{CDDD4F92-CAEB-BB19-55E3-6ED1365B570E}"/>
               </a:ext>
             </a:extLst>
           </p:cNvPr>
@@ -1879,7 +1879,7 @@
           <a:bodyPr/>
           <a:lstStyle/>
           <a:p>
-            <a:fld id="{96B8D56F-A2A2-43A0-8CA7-B1F0D0BAB8F0}" type="slidenum">
+            <a:fld id="{AA515A41-34E0-4B8A-BFF5-025DE5A27467}" type="slidenum">
               <a:rPr lang="es-ES" smtClean="0"/>
               <a:t>‹Nº›</a:t>
             </a:fld>
@@ -1890,7 +1890,7 @@
     </p:spTree>
     <p:extLst>
       <p:ext uri="{BB962C8B-B14F-4D97-AF65-F5344CB8AC3E}">
-        <p14:creationId xmlns:p14="http://schemas.microsoft.com/office/powerpoint/2010/main" val="1275045235"/>
+        <p14:creationId xmlns:p14="http://schemas.microsoft.com/office/powerpoint/2010/main" val="4236326680"/>
       </p:ext>
     </p:extLst>
   </p:cSld>
@@ -1922,7 +1922,7 @@
           <p:cNvPr id="2" name="Título 1">
             <a:extLst>
               <a:ext uri="{FF2B5EF4-FFF2-40B4-BE49-F238E27FC236}">
-                <a16:creationId xmlns:a16="http://schemas.microsoft.com/office/drawing/2014/main" id="{27C4182B-C525-0ECF-9468-3CF5D2D79442}"/>
+                <a16:creationId xmlns:a16="http://schemas.microsoft.com/office/drawing/2014/main" id="{884F9C25-1F3D-22F8-B89F-96D23B7D2CD0}"/>
               </a:ext>
             </a:extLst>
           </p:cNvPr>
@@ -1950,7 +1950,7 @@
           <p:cNvPr id="3" name="Marcador de fecha 2">
             <a:extLst>
               <a:ext uri="{FF2B5EF4-FFF2-40B4-BE49-F238E27FC236}">
-                <a16:creationId xmlns:a16="http://schemas.microsoft.com/office/drawing/2014/main" id="{ED6E5E95-C57A-8E5A-D875-6901DB0553D1}"/>
+                <a16:creationId xmlns:a16="http://schemas.microsoft.com/office/drawing/2014/main" id="{B2711B9A-4C75-FF47-7BB5-1B3C8E570852}"/>
               </a:ext>
             </a:extLst>
           </p:cNvPr>
@@ -1966,9 +1966,9 @@
           <a:bodyPr/>
           <a:lstStyle/>
           <a:p>
-            <a:fld id="{9835FBA3-5475-4EC2-B841-90BC3B1D7D90}" type="datetimeFigureOut">
+            <a:fld id="{7DF9D857-2BC1-4ECA-A48E-C0419EF44063}" type="datetimeFigureOut">
               <a:rPr lang="es-ES" smtClean="0"/>
-              <a:t>22/05/2026</a:t>
+              <a:t>27/05/2026</a:t>
             </a:fld>
             <a:endParaRPr lang="es-ES"/>
           </a:p>
@@ -1979,7 +1979,7 @@
           <p:cNvPr id="4" name="Marcador de pie de página 3">
             <a:extLst>
               <a:ext uri="{FF2B5EF4-FFF2-40B4-BE49-F238E27FC236}">
-                <a16:creationId xmlns:a16="http://schemas.microsoft.com/office/drawing/2014/main" id="{3D2D9EAB-FC7D-A384-F3AD-52D6CABF777D}"/>
+                <a16:creationId xmlns:a16="http://schemas.microsoft.com/office/drawing/2014/main" id="{2F47A31C-E4CB-E1DD-F41C-1BED88159EE5}"/>
               </a:ext>
             </a:extLst>
           </p:cNvPr>
@@ -2004,7 +2004,7 @@
           <p:cNvPr id="5" name="Marcador de número de diapositiva 4">
             <a:extLst>
               <a:ext uri="{FF2B5EF4-FFF2-40B4-BE49-F238E27FC236}">
-                <a16:creationId xmlns:a16="http://schemas.microsoft.com/office/drawing/2014/main" id="{0C4F2829-150F-B0E0-F6C7-73E414895259}"/>
+                <a16:creationId xmlns:a16="http://schemas.microsoft.com/office/drawing/2014/main" id="{16B7C687-FEF9-3605-F982-EC5CAED7B379}"/>
               </a:ext>
             </a:extLst>
           </p:cNvPr>
@@ -2020,7 +2020,7 @@
           <a:bodyPr/>
           <a:lstStyle/>
           <a:p>
-            <a:fld id="{96B8D56F-A2A2-43A0-8CA7-B1F0D0BAB8F0}" type="slidenum">
+            <a:fld id="{AA515A41-34E0-4B8A-BFF5-025DE5A27467}" type="slidenum">
               <a:rPr lang="es-ES" smtClean="0"/>
               <a:t>‹Nº›</a:t>
             </a:fld>
@@ -2031,7 +2031,7 @@
     </p:spTree>
     <p:extLst>
       <p:ext uri="{BB962C8B-B14F-4D97-AF65-F5344CB8AC3E}">
-        <p14:creationId xmlns:p14="http://schemas.microsoft.com/office/powerpoint/2010/main" val="2710967507"/>
+        <p14:creationId xmlns:p14="http://schemas.microsoft.com/office/powerpoint/2010/main" val="3260201284"/>
       </p:ext>
     </p:extLst>
   </p:cSld>
@@ -2063,7 +2063,7 @@
           <p:cNvPr id="2" name="Marcador de fecha 1">
             <a:extLst>
               <a:ext uri="{FF2B5EF4-FFF2-40B4-BE49-F238E27FC236}">
-                <a16:creationId xmlns:a16="http://schemas.microsoft.com/office/drawing/2014/main" id="{2DD91837-7567-4939-7FEA-FC09C5EAA023}"/>
+                <a16:creationId xmlns:a16="http://schemas.microsoft.com/office/drawing/2014/main" id="{DB0FDAD9-4A92-C1D0-A3D0-ACA1C4661747}"/>
               </a:ext>
             </a:extLst>
           </p:cNvPr>
@@ -2079,9 +2079,9 @@
           <a:bodyPr/>
           <a:lstStyle/>
           <a:p>
-            <a:fld id="{9835FBA3-5475-4EC2-B841-90BC3B1D7D90}" type="datetimeFigureOut">
+            <a:fld id="{7DF9D857-2BC1-4ECA-A48E-C0419EF44063}" type="datetimeFigureOut">
               <a:rPr lang="es-ES" smtClean="0"/>
-              <a:t>22/05/2026</a:t>
+              <a:t>27/05/2026</a:t>
             </a:fld>
             <a:endParaRPr lang="es-ES"/>
           </a:p>
@@ -2092,7 +2092,7 @@
           <p:cNvPr id="3" name="Marcador de pie de página 2">
             <a:extLst>
               <a:ext uri="{FF2B5EF4-FFF2-40B4-BE49-F238E27FC236}">
-                <a16:creationId xmlns:a16="http://schemas.microsoft.com/office/drawing/2014/main" id="{FCFD4570-8133-CD03-C0EC-9A24EAE0F65B}"/>
+                <a16:creationId xmlns:a16="http://schemas.microsoft.com/office/drawing/2014/main" id="{78DAC3A3-A540-E223-C38E-27A344B554DD}"/>
               </a:ext>
             </a:extLst>
           </p:cNvPr>
@@ -2117,7 +2117,7 @@
           <p:cNvPr id="4" name="Marcador de número de diapositiva 3">
             <a:extLst>
               <a:ext uri="{FF2B5EF4-FFF2-40B4-BE49-F238E27FC236}">
-                <a16:creationId xmlns:a16="http://schemas.microsoft.com/office/drawing/2014/main" id="{8527FAC1-FAB6-6815-FB0D-D15FCC738F45}"/>
+                <a16:creationId xmlns:a16="http://schemas.microsoft.com/office/drawing/2014/main" id="{1CD94074-9280-3579-4C1D-855C59DC39FA}"/>
               </a:ext>
             </a:extLst>
           </p:cNvPr>
@@ -2133,7 +2133,7 @@
           <a:bodyPr/>
           <a:lstStyle/>
           <a:p>
-            <a:fld id="{96B8D56F-A2A2-43A0-8CA7-B1F0D0BAB8F0}" type="slidenum">
+            <a:fld id="{AA515A41-34E0-4B8A-BFF5-025DE5A27467}" type="slidenum">
               <a:rPr lang="es-ES" smtClean="0"/>
               <a:t>‹Nº›</a:t>
             </a:fld>
@@ -2144,7 +2144,7 @@
     </p:spTree>
     <p:extLst>
       <p:ext uri="{BB962C8B-B14F-4D97-AF65-F5344CB8AC3E}">
-        <p14:creationId xmlns:p14="http://schemas.microsoft.com/office/powerpoint/2010/main" val="1816769203"/>
+        <p14:creationId xmlns:p14="http://schemas.microsoft.com/office/powerpoint/2010/main" val="1212894350"/>
       </p:ext>
     </p:extLst>
   </p:cSld>
@@ -2176,7 +2176,7 @@
           <p:cNvPr id="2" name="Título 1">
             <a:extLst>
               <a:ext uri="{FF2B5EF4-FFF2-40B4-BE49-F238E27FC236}">
-                <a16:creationId xmlns:a16="http://schemas.microsoft.com/office/drawing/2014/main" id="{A44F0AE0-8905-F645-6E6E-FCD033F6F627}"/>
+                <a16:creationId xmlns:a16="http://schemas.microsoft.com/office/drawing/2014/main" id="{D58CEA0C-21DD-F6F8-8819-BE70E8156DD5}"/>
               </a:ext>
             </a:extLst>
           </p:cNvPr>
@@ -2213,7 +2213,7 @@
           <p:cNvPr id="3" name="Marcador de contenido 2">
             <a:extLst>
               <a:ext uri="{FF2B5EF4-FFF2-40B4-BE49-F238E27FC236}">
-                <a16:creationId xmlns:a16="http://schemas.microsoft.com/office/drawing/2014/main" id="{57BFF8D5-C89A-F933-4530-5ADAB9F742A9}"/>
+                <a16:creationId xmlns:a16="http://schemas.microsoft.com/office/drawing/2014/main" id="{975D4CDC-5E20-6184-0817-E4D1431B23DC}"/>
               </a:ext>
             </a:extLst>
           </p:cNvPr>
@@ -2303,7 +2303,7 @@
           <p:cNvPr id="4" name="Marcador de texto 3">
             <a:extLst>
               <a:ext uri="{FF2B5EF4-FFF2-40B4-BE49-F238E27FC236}">
-                <a16:creationId xmlns:a16="http://schemas.microsoft.com/office/drawing/2014/main" id="{4BCA8D70-883A-D5E4-2B4B-1810DB39E673}"/>
+                <a16:creationId xmlns:a16="http://schemas.microsoft.com/office/drawing/2014/main" id="{9026DAA0-0D63-F341-DAB4-1363FC8700DD}"/>
               </a:ext>
             </a:extLst>
           </p:cNvPr>
@@ -2374,7 +2374,7 @@
           <p:cNvPr id="5" name="Marcador de fecha 4">
             <a:extLst>
               <a:ext uri="{FF2B5EF4-FFF2-40B4-BE49-F238E27FC236}">
-                <a16:creationId xmlns:a16="http://schemas.microsoft.com/office/drawing/2014/main" id="{4B680A9D-2C64-1081-0D49-51EC41D594C2}"/>
+                <a16:creationId xmlns:a16="http://schemas.microsoft.com/office/drawing/2014/main" id="{85516AEC-CDDC-1B47-9445-739BD483DD5A}"/>
               </a:ext>
             </a:extLst>
           </p:cNvPr>
@@ -2390,9 +2390,9 @@
           <a:bodyPr/>
           <a:lstStyle/>
           <a:p>
-            <a:fld id="{9835FBA3-5475-4EC2-B841-90BC3B1D7D90}" type="datetimeFigureOut">
+            <a:fld id="{7DF9D857-2BC1-4ECA-A48E-C0419EF44063}" type="datetimeFigureOut">
               <a:rPr lang="es-ES" smtClean="0"/>
-              <a:t>22/05/2026</a:t>
+              <a:t>27/05/2026</a:t>
             </a:fld>
             <a:endParaRPr lang="es-ES"/>
           </a:p>
@@ -2403,7 +2403,7 @@
           <p:cNvPr id="6" name="Marcador de pie de página 5">
             <a:extLst>
               <a:ext uri="{FF2B5EF4-FFF2-40B4-BE49-F238E27FC236}">
-                <a16:creationId xmlns:a16="http://schemas.microsoft.com/office/drawing/2014/main" id="{F2B5EFD7-9DED-D583-9B50-BEA7D34D042A}"/>
+                <a16:creationId xmlns:a16="http://schemas.microsoft.com/office/drawing/2014/main" id="{0F08CD5C-5F2F-DC4C-A211-1DC6C7EBEC23}"/>
               </a:ext>
             </a:extLst>
           </p:cNvPr>
@@ -2428,7 +2428,7 @@
           <p:cNvPr id="7" name="Marcador de número de diapositiva 6">
             <a:extLst>
               <a:ext uri="{FF2B5EF4-FFF2-40B4-BE49-F238E27FC236}">
-                <a16:creationId xmlns:a16="http://schemas.microsoft.com/office/drawing/2014/main" id="{637B4225-39A8-868E-FDB2-0A5EEF744E22}"/>
+                <a16:creationId xmlns:a16="http://schemas.microsoft.com/office/drawing/2014/main" id="{A63278E3-E554-B691-9150-EBD0E07AAEB0}"/>
               </a:ext>
             </a:extLst>
           </p:cNvPr>
@@ -2444,7 +2444,7 @@
           <a:bodyPr/>
           <a:lstStyle/>
           <a:p>
-            <a:fld id="{96B8D56F-A2A2-43A0-8CA7-B1F0D0BAB8F0}" type="slidenum">
+            <a:fld id="{AA515A41-34E0-4B8A-BFF5-025DE5A27467}" type="slidenum">
               <a:rPr lang="es-ES" smtClean="0"/>
               <a:t>‹Nº›</a:t>
             </a:fld>
@@ -2455,7 +2455,7 @@
     </p:spTree>
     <p:extLst>
       <p:ext uri="{BB962C8B-B14F-4D97-AF65-F5344CB8AC3E}">
-        <p14:creationId xmlns:p14="http://schemas.microsoft.com/office/powerpoint/2010/main" val="3365838627"/>
+        <p14:creationId xmlns:p14="http://schemas.microsoft.com/office/powerpoint/2010/main" val="1711597664"/>
       </p:ext>
     </p:extLst>
   </p:cSld>
@@ -2487,7 +2487,7 @@
           <p:cNvPr id="2" name="Título 1">
             <a:extLst>
               <a:ext uri="{FF2B5EF4-FFF2-40B4-BE49-F238E27FC236}">
-                <a16:creationId xmlns:a16="http://schemas.microsoft.com/office/drawing/2014/main" id="{5D364949-16BE-E78B-82D2-3C2315B3F1B5}"/>
+                <a16:creationId xmlns:a16="http://schemas.microsoft.com/office/drawing/2014/main" id="{5173EBA9-B5DD-C451-9DAC-E0671C51718C}"/>
               </a:ext>
             </a:extLst>
           </p:cNvPr>
@@ -2524,7 +2524,7 @@
           <p:cNvPr id="3" name="Marcador de posición de imagen 2">
             <a:extLst>
               <a:ext uri="{FF2B5EF4-FFF2-40B4-BE49-F238E27FC236}">
-                <a16:creationId xmlns:a16="http://schemas.microsoft.com/office/drawing/2014/main" id="{7B02907C-1396-B908-FAA2-098E7C14FB8C}"/>
+                <a16:creationId xmlns:a16="http://schemas.microsoft.com/office/drawing/2014/main" id="{075FE7A7-3579-29CB-6626-32B86D7CD458}"/>
               </a:ext>
             </a:extLst>
           </p:cNvPr>
@@ -2591,7 +2591,7 @@
           <p:cNvPr id="4" name="Marcador de texto 3">
             <a:extLst>
               <a:ext uri="{FF2B5EF4-FFF2-40B4-BE49-F238E27FC236}">
-                <a16:creationId xmlns:a16="http://schemas.microsoft.com/office/drawing/2014/main" id="{202D4E07-4280-8163-7063-884D2EB9971D}"/>
+                <a16:creationId xmlns:a16="http://schemas.microsoft.com/office/drawing/2014/main" id="{FFDC52D3-3B9E-D021-B186-A7D215CF68BC}"/>
               </a:ext>
             </a:extLst>
           </p:cNvPr>
@@ -2662,7 +2662,7 @@
           <p:cNvPr id="5" name="Marcador de fecha 4">
             <a:extLst>
               <a:ext uri="{FF2B5EF4-FFF2-40B4-BE49-F238E27FC236}">
-                <a16:creationId xmlns:a16="http://schemas.microsoft.com/office/drawing/2014/main" id="{33950C08-5F43-D53F-61D2-7B45976E8487}"/>
+                <a16:creationId xmlns:a16="http://schemas.microsoft.com/office/drawing/2014/main" id="{7ADF918E-3472-BC36-6C7A-61CD37CA4365}"/>
               </a:ext>
             </a:extLst>
           </p:cNvPr>
@@ -2678,9 +2678,9 @@
           <a:bodyPr/>
           <a:lstStyle/>
           <a:p>
-            <a:fld id="{9835FBA3-5475-4EC2-B841-90BC3B1D7D90}" type="datetimeFigureOut">
+            <a:fld id="{7DF9D857-2BC1-4ECA-A48E-C0419EF44063}" type="datetimeFigureOut">
               <a:rPr lang="es-ES" smtClean="0"/>
-              <a:t>22/05/2026</a:t>
+              <a:t>27/05/2026</a:t>
             </a:fld>
             <a:endParaRPr lang="es-ES"/>
           </a:p>
@@ -2691,7 +2691,7 @@
           <p:cNvPr id="6" name="Marcador de pie de página 5">
             <a:extLst>
               <a:ext uri="{FF2B5EF4-FFF2-40B4-BE49-F238E27FC236}">
-                <a16:creationId xmlns:a16="http://schemas.microsoft.com/office/drawing/2014/main" id="{E05AC3F4-2958-63F6-B084-4216A2F411A0}"/>
+                <a16:creationId xmlns:a16="http://schemas.microsoft.com/office/drawing/2014/main" id="{F4D56AFF-FE8D-2F54-334E-0D5B0BE2285D}"/>
               </a:ext>
             </a:extLst>
           </p:cNvPr>
@@ -2716,7 +2716,7 @@
           <p:cNvPr id="7" name="Marcador de número de diapositiva 6">
             <a:extLst>
               <a:ext uri="{FF2B5EF4-FFF2-40B4-BE49-F238E27FC236}">
-                <a16:creationId xmlns:a16="http://schemas.microsoft.com/office/drawing/2014/main" id="{EF6B1B05-4540-9367-33A0-D11C94E2699D}"/>
+                <a16:creationId xmlns:a16="http://schemas.microsoft.com/office/drawing/2014/main" id="{FF2B3460-EE14-4FAE-4406-AE566619A3C8}"/>
               </a:ext>
             </a:extLst>
           </p:cNvPr>
@@ -2732,7 +2732,7 @@
           <a:bodyPr/>
           <a:lstStyle/>
           <a:p>
-            <a:fld id="{96B8D56F-A2A2-43A0-8CA7-B1F0D0BAB8F0}" type="slidenum">
+            <a:fld id="{AA515A41-34E0-4B8A-BFF5-025DE5A27467}" type="slidenum">
               <a:rPr lang="es-ES" smtClean="0"/>
               <a:t>‹Nº›</a:t>
             </a:fld>
@@ -2743,7 +2743,7 @@
     </p:spTree>
     <p:extLst>
       <p:ext uri="{BB962C8B-B14F-4D97-AF65-F5344CB8AC3E}">
-        <p14:creationId xmlns:p14="http://schemas.microsoft.com/office/powerpoint/2010/main" val="4142256132"/>
+        <p14:creationId xmlns:p14="http://schemas.microsoft.com/office/powerpoint/2010/main" val="1685687157"/>
       </p:ext>
     </p:extLst>
   </p:cSld>
@@ -2780,7 +2780,7 @@
           <p:cNvPr id="2" name="Marcador de título 1">
             <a:extLst>
               <a:ext uri="{FF2B5EF4-FFF2-40B4-BE49-F238E27FC236}">
-                <a16:creationId xmlns:a16="http://schemas.microsoft.com/office/drawing/2014/main" id="{35D39D35-3453-AC02-5303-ADD3F6B54AED}"/>
+                <a16:creationId xmlns:a16="http://schemas.microsoft.com/office/drawing/2014/main" id="{1F4A310F-44E4-321F-FA92-1D7F528B3A33}"/>
               </a:ext>
             </a:extLst>
           </p:cNvPr>
@@ -2818,7 +2818,7 @@
           <p:cNvPr id="3" name="Marcador de texto 2">
             <a:extLst>
               <a:ext uri="{FF2B5EF4-FFF2-40B4-BE49-F238E27FC236}">
-                <a16:creationId xmlns:a16="http://schemas.microsoft.com/office/drawing/2014/main" id="{63420041-04F8-C26A-0991-3AD4B3DAFD54}"/>
+                <a16:creationId xmlns:a16="http://schemas.microsoft.com/office/drawing/2014/main" id="{44C6DACB-4F5D-7A99-4C6D-90BEAD91EF84}"/>
               </a:ext>
             </a:extLst>
           </p:cNvPr>
@@ -2885,7 +2885,7 @@
           <p:cNvPr id="4" name="Marcador de fecha 3">
             <a:extLst>
               <a:ext uri="{FF2B5EF4-FFF2-40B4-BE49-F238E27FC236}">
-                <a16:creationId xmlns:a16="http://schemas.microsoft.com/office/drawing/2014/main" id="{04166FF0-A09C-78EE-3785-892DA5DB1317}"/>
+                <a16:creationId xmlns:a16="http://schemas.microsoft.com/office/drawing/2014/main" id="{1EE25504-6BDA-1385-EAB0-0848FA6168AE}"/>
               </a:ext>
             </a:extLst>
           </p:cNvPr>
@@ -2919,9 +2919,9 @@
             </a:lvl1pPr>
           </a:lstStyle>
           <a:p>
-            <a:fld id="{9835FBA3-5475-4EC2-B841-90BC3B1D7D90}" type="datetimeFigureOut">
+            <a:fld id="{7DF9D857-2BC1-4ECA-A48E-C0419EF44063}" type="datetimeFigureOut">
               <a:rPr lang="es-ES" smtClean="0"/>
-              <a:t>22/05/2026</a:t>
+              <a:t>27/05/2026</a:t>
             </a:fld>
             <a:endParaRPr lang="es-ES"/>
           </a:p>
@@ -2932,7 +2932,7 @@
           <p:cNvPr id="5" name="Marcador de pie de página 4">
             <a:extLst>
               <a:ext uri="{FF2B5EF4-FFF2-40B4-BE49-F238E27FC236}">
-                <a16:creationId xmlns:a16="http://schemas.microsoft.com/office/drawing/2014/main" id="{95A76A51-3BB4-56F2-A015-086631DA7069}"/>
+                <a16:creationId xmlns:a16="http://schemas.microsoft.com/office/drawing/2014/main" id="{AF456258-1A26-2EB6-2580-AEFB2B83FC43}"/>
               </a:ext>
             </a:extLst>
           </p:cNvPr>
@@ -2975,7 +2975,7 @@
           <p:cNvPr id="6" name="Marcador de número de diapositiva 5">
             <a:extLst>
               <a:ext uri="{FF2B5EF4-FFF2-40B4-BE49-F238E27FC236}">
-                <a16:creationId xmlns:a16="http://schemas.microsoft.com/office/drawing/2014/main" id="{67FBF8BC-5BAE-1E68-ED65-7CE445BB80D2}"/>
+                <a16:creationId xmlns:a16="http://schemas.microsoft.com/office/drawing/2014/main" id="{5AB82232-6D7E-9E91-8165-3E10466B2909}"/>
               </a:ext>
             </a:extLst>
           </p:cNvPr>
@@ -3009,7 +3009,7 @@
             </a:lvl1pPr>
           </a:lstStyle>
           <a:p>
-            <a:fld id="{96B8D56F-A2A2-43A0-8CA7-B1F0D0BAB8F0}" type="slidenum">
+            <a:fld id="{AA515A41-34E0-4B8A-BFF5-025DE5A27467}" type="slidenum">
               <a:rPr lang="es-ES" smtClean="0"/>
               <a:t>‹Nº›</a:t>
             </a:fld>
@@ -3020,7 +3020,7 @@
     </p:spTree>
     <p:extLst>
       <p:ext uri="{BB962C8B-B14F-4D97-AF65-F5344CB8AC3E}">
-        <p14:creationId xmlns:p14="http://schemas.microsoft.com/office/powerpoint/2010/main" val="3254596532"/>
+        <p14:creationId xmlns:p14="http://schemas.microsoft.com/office/powerpoint/2010/main" val="534919433"/>
       </p:ext>
     </p:extLst>
   </p:cSld>
@@ -3351,7 +3351,7 @@
           <p:cNvPr id="2" name="Rectángulo: esquinas redondeadas 1">
             <a:extLst>
               <a:ext uri="{FF2B5EF4-FFF2-40B4-BE49-F238E27FC236}">
-                <a16:creationId xmlns:a16="http://schemas.microsoft.com/office/drawing/2014/main" id="{CA12C00C-31B8-57BA-AE1B-7F0B6DDD5033}"/>
+                <a16:creationId xmlns:a16="http://schemas.microsoft.com/office/drawing/2014/main" id="{5C21021A-731D-BD7C-8102-3890FC965641}"/>
               </a:ext>
             </a:extLst>
           </p:cNvPr>
@@ -3405,7 +3405,7 @@
           <p:cNvPr id="3" name="CuadroTexto 2">
             <a:extLst>
               <a:ext uri="{FF2B5EF4-FFF2-40B4-BE49-F238E27FC236}">
-                <a16:creationId xmlns:a16="http://schemas.microsoft.com/office/drawing/2014/main" id="{38694A69-AED5-9D5A-6CAF-BEA870CD3C25}"/>
+                <a16:creationId xmlns:a16="http://schemas.microsoft.com/office/drawing/2014/main" id="{B53EB162-B404-27F8-366A-9668BE3F0E0B}"/>
               </a:ext>
             </a:extLst>
           </p:cNvPr>
@@ -3445,7 +3445,7 @@
           <p:cNvPr id="4" name="CuadroTexto 3">
             <a:extLst>
               <a:ext uri="{FF2B5EF4-FFF2-40B4-BE49-F238E27FC236}">
-                <a16:creationId xmlns:a16="http://schemas.microsoft.com/office/drawing/2014/main" id="{4E2A4B0B-DFF1-F818-1C09-6E54098339A1}"/>
+                <a16:creationId xmlns:a16="http://schemas.microsoft.com/office/drawing/2014/main" id="{39048014-6286-8C34-EB02-8F37C4F05425}"/>
               </a:ext>
             </a:extLst>
           </p:cNvPr>
@@ -3485,7 +3485,7 @@
           <p:cNvPr id="5" name="CuadroTexto 4">
             <a:extLst>
               <a:ext uri="{FF2B5EF4-FFF2-40B4-BE49-F238E27FC236}">
-                <a16:creationId xmlns:a16="http://schemas.microsoft.com/office/drawing/2014/main" id="{A54BA1BA-F4BA-9AE1-5D5D-9053E0635E3B}"/>
+                <a16:creationId xmlns:a16="http://schemas.microsoft.com/office/drawing/2014/main" id="{EA0EFDAC-DB66-0A51-CCDA-ABD4BB8BBA11}"/>
               </a:ext>
             </a:extLst>
           </p:cNvPr>
@@ -3525,7 +3525,7 @@
           <p:cNvPr id="6" name="CuadroTexto 5">
             <a:extLst>
               <a:ext uri="{FF2B5EF4-FFF2-40B4-BE49-F238E27FC236}">
-                <a16:creationId xmlns:a16="http://schemas.microsoft.com/office/drawing/2014/main" id="{38C02F9F-A59F-E971-B686-AB6159C2730C}"/>
+                <a16:creationId xmlns:a16="http://schemas.microsoft.com/office/drawing/2014/main" id="{6DF1A827-FF03-4481-F1DD-A3D36674FD4B}"/>
               </a:ext>
             </a:extLst>
           </p:cNvPr>
@@ -3576,7 +3576,7 @@
           <p:cNvPr id="8" name="Imagen 7">
             <a:extLst>
               <a:ext uri="{FF2B5EF4-FFF2-40B4-BE49-F238E27FC236}">
-                <a16:creationId xmlns:a16="http://schemas.microsoft.com/office/drawing/2014/main" id="{4DE0169B-C9B0-5450-F4DA-2530A2097BB1}"/>
+                <a16:creationId xmlns:a16="http://schemas.microsoft.com/office/drawing/2014/main" id="{CCDA0E7A-E6D7-1D80-8DFB-CC867396DDB2}"/>
               </a:ext>
             </a:extLst>
           </p:cNvPr>
@@ -3615,7 +3615,7 @@
     </p:spTree>
     <p:extLst>
       <p:ext uri="{BB962C8B-B14F-4D97-AF65-F5344CB8AC3E}">
-        <p14:creationId xmlns:p14="http://schemas.microsoft.com/office/powerpoint/2010/main" val="1507221563"/>
+        <p14:creationId xmlns:p14="http://schemas.microsoft.com/office/powerpoint/2010/main" val="2577456464"/>
       </p:ext>
     </p:extLst>
   </p:cSld>
@@ -3655,7 +3655,7 @@
           <p:cNvPr id="2" name="CuadroTexto 1">
             <a:extLst>
               <a:ext uri="{FF2B5EF4-FFF2-40B4-BE49-F238E27FC236}">
-                <a16:creationId xmlns:a16="http://schemas.microsoft.com/office/drawing/2014/main" id="{6401F12A-9BD6-9813-B0F8-BFA0D273FA7E}"/>
+                <a16:creationId xmlns:a16="http://schemas.microsoft.com/office/drawing/2014/main" id="{2DAFACFB-80D7-5FD8-2363-C08A84230F60}"/>
               </a:ext>
             </a:extLst>
           </p:cNvPr>
@@ -3695,7 +3695,7 @@
           <p:cNvPr id="3" name="CuadroTexto 2">
             <a:extLst>
               <a:ext uri="{FF2B5EF4-FFF2-40B4-BE49-F238E27FC236}">
-                <a16:creationId xmlns:a16="http://schemas.microsoft.com/office/drawing/2014/main" id="{A44A9632-27FC-CA47-4923-739611D3D20C}"/>
+                <a16:creationId xmlns:a16="http://schemas.microsoft.com/office/drawing/2014/main" id="{2BE4E9F7-7ADD-BB4E-C2CF-68611E371028}"/>
               </a:ext>
             </a:extLst>
           </p:cNvPr>
@@ -3735,7 +3735,7 @@
           <p:cNvPr id="4" name="CuadroTexto 3">
             <a:extLst>
               <a:ext uri="{FF2B5EF4-FFF2-40B4-BE49-F238E27FC236}">
-                <a16:creationId xmlns:a16="http://schemas.microsoft.com/office/drawing/2014/main" id="{219469AF-74E0-545A-7EE2-3321F726B710}"/>
+                <a16:creationId xmlns:a16="http://schemas.microsoft.com/office/drawing/2014/main" id="{ADECF87B-9681-5FC8-B46E-90823A3D70E6}"/>
               </a:ext>
             </a:extLst>
           </p:cNvPr>
@@ -3775,7 +3775,7 @@
           <p:cNvPr id="5" name="Rectángulo: esquinas redondeadas 4">
             <a:extLst>
               <a:ext uri="{FF2B5EF4-FFF2-40B4-BE49-F238E27FC236}">
-                <a16:creationId xmlns:a16="http://schemas.microsoft.com/office/drawing/2014/main" id="{1711DDAD-F082-BCA4-9ED1-837EFA9EB665}"/>
+                <a16:creationId xmlns:a16="http://schemas.microsoft.com/office/drawing/2014/main" id="{6D1AEA64-2F0E-FD31-1E48-81AA0EE5224C}"/>
               </a:ext>
             </a:extLst>
           </p:cNvPr>
@@ -3829,7 +3829,7 @@
           <p:cNvPr id="6" name="CuadroTexto 5">
             <a:extLst>
               <a:ext uri="{FF2B5EF4-FFF2-40B4-BE49-F238E27FC236}">
-                <a16:creationId xmlns:a16="http://schemas.microsoft.com/office/drawing/2014/main" id="{76A13E2F-B7DB-09AE-0DEA-611461763BA0}"/>
+                <a16:creationId xmlns:a16="http://schemas.microsoft.com/office/drawing/2014/main" id="{CF410CEA-58BF-683F-FA42-462212E14AAD}"/>
               </a:ext>
             </a:extLst>
           </p:cNvPr>
@@ -3869,7 +3869,7 @@
           <p:cNvPr id="7" name="CuadroTexto 6">
             <a:extLst>
               <a:ext uri="{FF2B5EF4-FFF2-40B4-BE49-F238E27FC236}">
-                <a16:creationId xmlns:a16="http://schemas.microsoft.com/office/drawing/2014/main" id="{57C53391-5E60-7DB8-BF96-2A8BD44BB41B}"/>
+                <a16:creationId xmlns:a16="http://schemas.microsoft.com/office/drawing/2014/main" id="{58372610-7914-4758-2055-CF56C828BEEE}"/>
               </a:ext>
             </a:extLst>
           </p:cNvPr>
@@ -3988,7 +3988,7 @@
           <p:cNvPr id="8" name="Rectángulo: esquinas redondeadas 7">
             <a:extLst>
               <a:ext uri="{FF2B5EF4-FFF2-40B4-BE49-F238E27FC236}">
-                <a16:creationId xmlns:a16="http://schemas.microsoft.com/office/drawing/2014/main" id="{F3EA4F40-A00D-4014-B74E-E0942500B6D5}"/>
+                <a16:creationId xmlns:a16="http://schemas.microsoft.com/office/drawing/2014/main" id="{5833D4F6-6461-6404-5CC8-A8AF549C4DF2}"/>
               </a:ext>
             </a:extLst>
           </p:cNvPr>
@@ -4042,7 +4042,7 @@
           <p:cNvPr id="9" name="CuadroTexto 8">
             <a:extLst>
               <a:ext uri="{FF2B5EF4-FFF2-40B4-BE49-F238E27FC236}">
-                <a16:creationId xmlns:a16="http://schemas.microsoft.com/office/drawing/2014/main" id="{105FA132-06B5-98AA-2252-642A93FC30F0}"/>
+                <a16:creationId xmlns:a16="http://schemas.microsoft.com/office/drawing/2014/main" id="{B86E8B70-9A97-A59B-3BF2-43F7B273C367}"/>
               </a:ext>
             </a:extLst>
           </p:cNvPr>
@@ -4082,7 +4082,7 @@
           <p:cNvPr id="10" name="CuadroTexto 9">
             <a:extLst>
               <a:ext uri="{FF2B5EF4-FFF2-40B4-BE49-F238E27FC236}">
-                <a16:creationId xmlns:a16="http://schemas.microsoft.com/office/drawing/2014/main" id="{F6DF0045-A309-75DB-E583-BC19BE3DBE6F}"/>
+                <a16:creationId xmlns:a16="http://schemas.microsoft.com/office/drawing/2014/main" id="{836AD5C9-DA30-BD9E-D349-51EFD08D301A}"/>
               </a:ext>
             </a:extLst>
           </p:cNvPr>
@@ -4122,7 +4122,7 @@
           <p:cNvPr id="11" name="Rectángulo: esquinas redondeadas 10">
             <a:extLst>
               <a:ext uri="{FF2B5EF4-FFF2-40B4-BE49-F238E27FC236}">
-                <a16:creationId xmlns:a16="http://schemas.microsoft.com/office/drawing/2014/main" id="{9D2E0A56-6D22-4A0F-E246-95645F83C1B2}"/>
+                <a16:creationId xmlns:a16="http://schemas.microsoft.com/office/drawing/2014/main" id="{B6486B53-C0B3-3CEC-50CD-AD6DFDCD8DB7}"/>
               </a:ext>
             </a:extLst>
           </p:cNvPr>
@@ -4176,7 +4176,7 @@
           <p:cNvPr id="12" name="CuadroTexto 11">
             <a:extLst>
               <a:ext uri="{FF2B5EF4-FFF2-40B4-BE49-F238E27FC236}">
-                <a16:creationId xmlns:a16="http://schemas.microsoft.com/office/drawing/2014/main" id="{9508AFE7-8CFD-0FF6-B5D8-6A1F1ABFF0B8}"/>
+                <a16:creationId xmlns:a16="http://schemas.microsoft.com/office/drawing/2014/main" id="{B9E83C5C-D7AA-0B77-A468-718A426FADC8}"/>
               </a:ext>
             </a:extLst>
           </p:cNvPr>
@@ -4216,7 +4216,7 @@
           <p:cNvPr id="13" name="CuadroTexto 12">
             <a:extLst>
               <a:ext uri="{FF2B5EF4-FFF2-40B4-BE49-F238E27FC236}">
-                <a16:creationId xmlns:a16="http://schemas.microsoft.com/office/drawing/2014/main" id="{B30D510A-3075-BACE-8938-17866590C4C0}"/>
+                <a16:creationId xmlns:a16="http://schemas.microsoft.com/office/drawing/2014/main" id="{1330EEA6-2376-81FB-AE65-3B8744BB9603}"/>
               </a:ext>
             </a:extLst>
           </p:cNvPr>
@@ -4256,7 +4256,7 @@
           <p:cNvPr id="14" name="Rectángulo: esquinas redondeadas 13">
             <a:extLst>
               <a:ext uri="{FF2B5EF4-FFF2-40B4-BE49-F238E27FC236}">
-                <a16:creationId xmlns:a16="http://schemas.microsoft.com/office/drawing/2014/main" id="{DDB74B9A-DC97-8FB9-3B55-1CE9D0431FC9}"/>
+                <a16:creationId xmlns:a16="http://schemas.microsoft.com/office/drawing/2014/main" id="{1FDF2267-131A-C751-687C-166852FF3B52}"/>
               </a:ext>
             </a:extLst>
           </p:cNvPr>
@@ -4310,7 +4310,7 @@
           <p:cNvPr id="15" name="CuadroTexto 14">
             <a:extLst>
               <a:ext uri="{FF2B5EF4-FFF2-40B4-BE49-F238E27FC236}">
-                <a16:creationId xmlns:a16="http://schemas.microsoft.com/office/drawing/2014/main" id="{5C09EDE9-1D72-935B-4F1D-208CB3808437}"/>
+                <a16:creationId xmlns:a16="http://schemas.microsoft.com/office/drawing/2014/main" id="{CCB386C5-F39C-3FC0-0F45-51A2612BCF1B}"/>
               </a:ext>
             </a:extLst>
           </p:cNvPr>
@@ -4350,7 +4350,7 @@
           <p:cNvPr id="16" name="CuadroTexto 15">
             <a:extLst>
               <a:ext uri="{FF2B5EF4-FFF2-40B4-BE49-F238E27FC236}">
-                <a16:creationId xmlns:a16="http://schemas.microsoft.com/office/drawing/2014/main" id="{5504C2AB-32D7-51B0-8D8D-63B622801529}"/>
+                <a16:creationId xmlns:a16="http://schemas.microsoft.com/office/drawing/2014/main" id="{72DDCB08-4518-EB21-7ACD-F5FDF90651E0}"/>
               </a:ext>
             </a:extLst>
           </p:cNvPr>
@@ -4390,7 +4390,7 @@
           <p:cNvPr id="17" name="Rectángulo: esquinas redondeadas 16">
             <a:extLst>
               <a:ext uri="{FF2B5EF4-FFF2-40B4-BE49-F238E27FC236}">
-                <a16:creationId xmlns:a16="http://schemas.microsoft.com/office/drawing/2014/main" id="{4B58F593-AD63-B552-0688-7DB6DAF48C2E}"/>
+                <a16:creationId xmlns:a16="http://schemas.microsoft.com/office/drawing/2014/main" id="{A320F2B7-174C-1027-38D7-ECFF71D80656}"/>
               </a:ext>
             </a:extLst>
           </p:cNvPr>
@@ -4444,7 +4444,7 @@
           <p:cNvPr id="18" name="CuadroTexto 17">
             <a:extLst>
               <a:ext uri="{FF2B5EF4-FFF2-40B4-BE49-F238E27FC236}">
-                <a16:creationId xmlns:a16="http://schemas.microsoft.com/office/drawing/2014/main" id="{307EEDE5-3F42-E0C3-85B0-EEEEDBBE1196}"/>
+                <a16:creationId xmlns:a16="http://schemas.microsoft.com/office/drawing/2014/main" id="{FB53001C-A200-2209-3614-1259FBB90E1D}"/>
               </a:ext>
             </a:extLst>
           </p:cNvPr>
@@ -4484,7 +4484,7 @@
           <p:cNvPr id="19" name="CuadroTexto 18">
             <a:extLst>
               <a:ext uri="{FF2B5EF4-FFF2-40B4-BE49-F238E27FC236}">
-                <a16:creationId xmlns:a16="http://schemas.microsoft.com/office/drawing/2014/main" id="{9C9DC3D6-AFBF-D787-D231-DD172FA254D4}"/>
+                <a16:creationId xmlns:a16="http://schemas.microsoft.com/office/drawing/2014/main" id="{B71A4644-3886-B7F2-8B3F-ADB935E517C2}"/>
               </a:ext>
             </a:extLst>
           </p:cNvPr>
@@ -4522,7 +4522,7 @@
     </p:spTree>
     <p:extLst>
       <p:ext uri="{BB962C8B-B14F-4D97-AF65-F5344CB8AC3E}">
-        <p14:creationId xmlns:p14="http://schemas.microsoft.com/office/powerpoint/2010/main" val="3163905367"/>
+        <p14:creationId xmlns:p14="http://schemas.microsoft.com/office/powerpoint/2010/main" val="3510644319"/>
       </p:ext>
     </p:extLst>
   </p:cSld>
@@ -4562,7 +4562,7 @@
           <p:cNvPr id="2" name="CuadroTexto 1">
             <a:extLst>
               <a:ext uri="{FF2B5EF4-FFF2-40B4-BE49-F238E27FC236}">
-                <a16:creationId xmlns:a16="http://schemas.microsoft.com/office/drawing/2014/main" id="{335F3ACD-6D7E-558F-DCCC-3153F82008B0}"/>
+                <a16:creationId xmlns:a16="http://schemas.microsoft.com/office/drawing/2014/main" id="{7CEEDE5F-50BB-0917-399B-C8FB6165E00C}"/>
               </a:ext>
             </a:extLst>
           </p:cNvPr>
@@ -4602,7 +4602,7 @@
           <p:cNvPr id="3" name="CuadroTexto 2">
             <a:extLst>
               <a:ext uri="{FF2B5EF4-FFF2-40B4-BE49-F238E27FC236}">
-                <a16:creationId xmlns:a16="http://schemas.microsoft.com/office/drawing/2014/main" id="{69B93B46-68C3-01DA-F96E-996FF02A0DDC}"/>
+                <a16:creationId xmlns:a16="http://schemas.microsoft.com/office/drawing/2014/main" id="{23804E9C-6A0D-07F4-AB1E-A3F992B98FA4}"/>
               </a:ext>
             </a:extLst>
           </p:cNvPr>
@@ -4642,7 +4642,7 @@
           <p:cNvPr id="4" name="CuadroTexto 3">
             <a:extLst>
               <a:ext uri="{FF2B5EF4-FFF2-40B4-BE49-F238E27FC236}">
-                <a16:creationId xmlns:a16="http://schemas.microsoft.com/office/drawing/2014/main" id="{409939A8-2448-44CA-16EA-FE600681691A}"/>
+                <a16:creationId xmlns:a16="http://schemas.microsoft.com/office/drawing/2014/main" id="{E9394BCA-BA92-1008-BE68-D26ED27277C6}"/>
               </a:ext>
             </a:extLst>
           </p:cNvPr>
@@ -4682,7 +4682,7 @@
           <p:cNvPr id="5" name="Rectángulo: esquinas redondeadas 4">
             <a:extLst>
               <a:ext uri="{FF2B5EF4-FFF2-40B4-BE49-F238E27FC236}">
-                <a16:creationId xmlns:a16="http://schemas.microsoft.com/office/drawing/2014/main" id="{FE36CB12-3F6B-8C73-109F-8925106B4365}"/>
+                <a16:creationId xmlns:a16="http://schemas.microsoft.com/office/drawing/2014/main" id="{0A08D243-A7CA-D48E-592D-D1455304947E}"/>
               </a:ext>
             </a:extLst>
           </p:cNvPr>
@@ -4736,7 +4736,7 @@
           <p:cNvPr id="6" name="CuadroTexto 5">
             <a:extLst>
               <a:ext uri="{FF2B5EF4-FFF2-40B4-BE49-F238E27FC236}">
-                <a16:creationId xmlns:a16="http://schemas.microsoft.com/office/drawing/2014/main" id="{8064C8B6-4FC8-72DF-DB7D-38C0B54EEB90}"/>
+                <a16:creationId xmlns:a16="http://schemas.microsoft.com/office/drawing/2014/main" id="{5FC70503-32F7-AB23-6077-DB168DA4F5EE}"/>
               </a:ext>
             </a:extLst>
           </p:cNvPr>
@@ -4776,7 +4776,7 @@
           <p:cNvPr id="7" name="CuadroTexto 6">
             <a:extLst>
               <a:ext uri="{FF2B5EF4-FFF2-40B4-BE49-F238E27FC236}">
-                <a16:creationId xmlns:a16="http://schemas.microsoft.com/office/drawing/2014/main" id="{34FBAB40-7507-AABA-BD78-3A210EDF719B}"/>
+                <a16:creationId xmlns:a16="http://schemas.microsoft.com/office/drawing/2014/main" id="{0A6A47F9-1C47-765B-E66E-F0E29EB720CC}"/>
               </a:ext>
             </a:extLst>
           </p:cNvPr>
@@ -4816,7 +4816,7 @@
           <p:cNvPr id="8" name="Rectángulo: esquinas redondeadas 7">
             <a:extLst>
               <a:ext uri="{FF2B5EF4-FFF2-40B4-BE49-F238E27FC236}">
-                <a16:creationId xmlns:a16="http://schemas.microsoft.com/office/drawing/2014/main" id="{5066D45E-EB66-0063-7ABA-758AC6A4EC3A}"/>
+                <a16:creationId xmlns:a16="http://schemas.microsoft.com/office/drawing/2014/main" id="{4E3EC0F7-D648-EAAB-3301-1960AE2E2FA6}"/>
               </a:ext>
             </a:extLst>
           </p:cNvPr>
@@ -4870,7 +4870,7 @@
           <p:cNvPr id="9" name="CuadroTexto 8">
             <a:extLst>
               <a:ext uri="{FF2B5EF4-FFF2-40B4-BE49-F238E27FC236}">
-                <a16:creationId xmlns:a16="http://schemas.microsoft.com/office/drawing/2014/main" id="{CEA7E78D-7589-43E1-79CE-8B4EA40E8A4A}"/>
+                <a16:creationId xmlns:a16="http://schemas.microsoft.com/office/drawing/2014/main" id="{C8BF4BF4-695A-D88E-1F0F-1EB784C5D477}"/>
               </a:ext>
             </a:extLst>
           </p:cNvPr>
@@ -4910,7 +4910,7 @@
           <p:cNvPr id="10" name="CuadroTexto 9">
             <a:extLst>
               <a:ext uri="{FF2B5EF4-FFF2-40B4-BE49-F238E27FC236}">
-                <a16:creationId xmlns:a16="http://schemas.microsoft.com/office/drawing/2014/main" id="{92F702A2-5CEB-7576-A787-8A61EFA2127E}"/>
+                <a16:creationId xmlns:a16="http://schemas.microsoft.com/office/drawing/2014/main" id="{8F00DB8B-7F11-3273-5889-9453992EA05C}"/>
               </a:ext>
             </a:extLst>
           </p:cNvPr>
@@ -4950,7 +4950,7 @@
           <p:cNvPr id="11" name="Rectángulo: esquinas redondeadas 10">
             <a:extLst>
               <a:ext uri="{FF2B5EF4-FFF2-40B4-BE49-F238E27FC236}">
-                <a16:creationId xmlns:a16="http://schemas.microsoft.com/office/drawing/2014/main" id="{0F3E7393-FB97-F29D-F9BB-FBBFB5EDC115}"/>
+                <a16:creationId xmlns:a16="http://schemas.microsoft.com/office/drawing/2014/main" id="{4711F600-0351-B6A8-7F18-D27788BD4C54}"/>
               </a:ext>
             </a:extLst>
           </p:cNvPr>
@@ -5004,7 +5004,7 @@
           <p:cNvPr id="12" name="CuadroTexto 11">
             <a:extLst>
               <a:ext uri="{FF2B5EF4-FFF2-40B4-BE49-F238E27FC236}">
-                <a16:creationId xmlns:a16="http://schemas.microsoft.com/office/drawing/2014/main" id="{D1DF95A3-3B8C-BBCB-440D-FF242319D753}"/>
+                <a16:creationId xmlns:a16="http://schemas.microsoft.com/office/drawing/2014/main" id="{A6138A3E-6C95-0782-580B-B7ED3EDDCC21}"/>
               </a:ext>
             </a:extLst>
           </p:cNvPr>
@@ -5044,7 +5044,7 @@
           <p:cNvPr id="13" name="CuadroTexto 12">
             <a:extLst>
               <a:ext uri="{FF2B5EF4-FFF2-40B4-BE49-F238E27FC236}">
-                <a16:creationId xmlns:a16="http://schemas.microsoft.com/office/drawing/2014/main" id="{E96EBE17-31C8-2466-B02D-8F17579092DD}"/>
+                <a16:creationId xmlns:a16="http://schemas.microsoft.com/office/drawing/2014/main" id="{5C48DFCA-94A5-8E0A-C947-1CDD1AB1A164}"/>
               </a:ext>
             </a:extLst>
           </p:cNvPr>
@@ -5084,7 +5084,7 @@
           <p:cNvPr id="14" name="CuadroTexto 13">
             <a:extLst>
               <a:ext uri="{FF2B5EF4-FFF2-40B4-BE49-F238E27FC236}">
-                <a16:creationId xmlns:a16="http://schemas.microsoft.com/office/drawing/2014/main" id="{618D0947-2F0A-2FE3-C043-548405AC1F5D}"/>
+                <a16:creationId xmlns:a16="http://schemas.microsoft.com/office/drawing/2014/main" id="{EE5CC75F-F5EF-31C9-EC42-68947BF0DFDB}"/>
               </a:ext>
             </a:extLst>
           </p:cNvPr>
@@ -5165,7 +5165,7 @@
     </p:spTree>
     <p:extLst>
       <p:ext uri="{BB962C8B-B14F-4D97-AF65-F5344CB8AC3E}">
-        <p14:creationId xmlns:p14="http://schemas.microsoft.com/office/powerpoint/2010/main" val="1478726641"/>
+        <p14:creationId xmlns:p14="http://schemas.microsoft.com/office/powerpoint/2010/main" val="2469724980"/>
       </p:ext>
     </p:extLst>
   </p:cSld>
@@ -5205,7 +5205,7 @@
           <p:cNvPr id="2" name="CuadroTexto 1">
             <a:extLst>
               <a:ext uri="{FF2B5EF4-FFF2-40B4-BE49-F238E27FC236}">
-                <a16:creationId xmlns:a16="http://schemas.microsoft.com/office/drawing/2014/main" id="{ED226011-882C-5D32-E9F7-E07A5A18B3EE}"/>
+                <a16:creationId xmlns:a16="http://schemas.microsoft.com/office/drawing/2014/main" id="{7B7D82D7-B708-D180-EFB4-6C21EF8B331C}"/>
               </a:ext>
             </a:extLst>
           </p:cNvPr>
@@ -5245,7 +5245,7 @@
           <p:cNvPr id="3" name="CuadroTexto 2">
             <a:extLst>
               <a:ext uri="{FF2B5EF4-FFF2-40B4-BE49-F238E27FC236}">
-                <a16:creationId xmlns:a16="http://schemas.microsoft.com/office/drawing/2014/main" id="{6EBBE66B-C209-06AB-7B21-134AF129D97E}"/>
+                <a16:creationId xmlns:a16="http://schemas.microsoft.com/office/drawing/2014/main" id="{6FADF928-4261-2380-B043-AEF1226E6AF9}"/>
               </a:ext>
             </a:extLst>
           </p:cNvPr>
@@ -5285,7 +5285,7 @@
           <p:cNvPr id="4" name="CuadroTexto 3">
             <a:extLst>
               <a:ext uri="{FF2B5EF4-FFF2-40B4-BE49-F238E27FC236}">
-                <a16:creationId xmlns:a16="http://schemas.microsoft.com/office/drawing/2014/main" id="{9B7CD03D-62F3-7881-498F-DFEEF490B40D}"/>
+                <a16:creationId xmlns:a16="http://schemas.microsoft.com/office/drawing/2014/main" id="{C0E91017-F843-F648-311B-F90979922D69}"/>
               </a:ext>
             </a:extLst>
           </p:cNvPr>
@@ -5325,7 +5325,7 @@
           <p:cNvPr id="6" name="Imagen 5">
             <a:extLst>
               <a:ext uri="{FF2B5EF4-FFF2-40B4-BE49-F238E27FC236}">
-                <a16:creationId xmlns:a16="http://schemas.microsoft.com/office/drawing/2014/main" id="{6FD68646-2437-6E7B-BC5A-E81618CDDD5C}"/>
+                <a16:creationId xmlns:a16="http://schemas.microsoft.com/office/drawing/2014/main" id="{EFCDCC7E-691C-B01A-77BD-D8B6B8C710B0}"/>
               </a:ext>
             </a:extLst>
           </p:cNvPr>
@@ -5366,7 +5366,7 @@
           <p:cNvPr id="7" name="Rectángulo: esquinas redondeadas 6">
             <a:extLst>
               <a:ext uri="{FF2B5EF4-FFF2-40B4-BE49-F238E27FC236}">
-                <a16:creationId xmlns:a16="http://schemas.microsoft.com/office/drawing/2014/main" id="{DBFDBCC1-E1EF-D77B-8FE3-CE19CEAE6F0F}"/>
+                <a16:creationId xmlns:a16="http://schemas.microsoft.com/office/drawing/2014/main" id="{353A1019-86EF-FDFC-F858-663ED918FAF0}"/>
               </a:ext>
             </a:extLst>
           </p:cNvPr>
@@ -5420,7 +5420,7 @@
           <p:cNvPr id="8" name="CuadroTexto 7">
             <a:extLst>
               <a:ext uri="{FF2B5EF4-FFF2-40B4-BE49-F238E27FC236}">
-                <a16:creationId xmlns:a16="http://schemas.microsoft.com/office/drawing/2014/main" id="{70ACC945-01BD-D4E7-6294-F7EF4B534FDF}"/>
+                <a16:creationId xmlns:a16="http://schemas.microsoft.com/office/drawing/2014/main" id="{6CE17BF1-6AD2-F32C-9450-44ACDA473674}"/>
               </a:ext>
             </a:extLst>
           </p:cNvPr>
@@ -5460,7 +5460,7 @@
           <p:cNvPr id="9" name="CuadroTexto 8">
             <a:extLst>
               <a:ext uri="{FF2B5EF4-FFF2-40B4-BE49-F238E27FC236}">
-                <a16:creationId xmlns:a16="http://schemas.microsoft.com/office/drawing/2014/main" id="{F7AC6533-69F5-F6BB-1B20-2EADCB7D8E47}"/>
+                <a16:creationId xmlns:a16="http://schemas.microsoft.com/office/drawing/2014/main" id="{BA4A0975-109E-4A3F-4B54-EFDA114C070B}"/>
               </a:ext>
             </a:extLst>
           </p:cNvPr>
@@ -5500,7 +5500,7 @@
           <p:cNvPr id="10" name="CuadroTexto 9">
             <a:extLst>
               <a:ext uri="{FF2B5EF4-FFF2-40B4-BE49-F238E27FC236}">
-                <a16:creationId xmlns:a16="http://schemas.microsoft.com/office/drawing/2014/main" id="{20213126-36BE-9D61-BB6F-48D2DAA61D48}"/>
+                <a16:creationId xmlns:a16="http://schemas.microsoft.com/office/drawing/2014/main" id="{5ABF088D-72A3-3D27-051A-1B4A038ED58F}"/>
               </a:ext>
             </a:extLst>
           </p:cNvPr>
@@ -5599,7 +5599,7 @@
     </p:spTree>
     <p:extLst>
       <p:ext uri="{BB962C8B-B14F-4D97-AF65-F5344CB8AC3E}">
-        <p14:creationId xmlns:p14="http://schemas.microsoft.com/office/powerpoint/2010/main" val="1591126200"/>
+        <p14:creationId xmlns:p14="http://schemas.microsoft.com/office/powerpoint/2010/main" val="3632644678"/>
       </p:ext>
     </p:extLst>
   </p:cSld>
@@ -5639,7 +5639,7 @@
           <p:cNvPr id="2" name="CuadroTexto 1">
             <a:extLst>
               <a:ext uri="{FF2B5EF4-FFF2-40B4-BE49-F238E27FC236}">
-                <a16:creationId xmlns:a16="http://schemas.microsoft.com/office/drawing/2014/main" id="{F0FEA101-1787-D34F-EBCE-81821753563A}"/>
+                <a16:creationId xmlns:a16="http://schemas.microsoft.com/office/drawing/2014/main" id="{F6A78540-E163-B045-AC3A-A21791E4B814}"/>
               </a:ext>
             </a:extLst>
           </p:cNvPr>
@@ -5679,7 +5679,7 @@
           <p:cNvPr id="3" name="CuadroTexto 2">
             <a:extLst>
               <a:ext uri="{FF2B5EF4-FFF2-40B4-BE49-F238E27FC236}">
-                <a16:creationId xmlns:a16="http://schemas.microsoft.com/office/drawing/2014/main" id="{0BE57B89-4ECA-778F-091E-780B6A53E81A}"/>
+                <a16:creationId xmlns:a16="http://schemas.microsoft.com/office/drawing/2014/main" id="{B24BB97B-08C7-2FD3-87D1-4D571DA1EB59}"/>
               </a:ext>
             </a:extLst>
           </p:cNvPr>
@@ -5719,7 +5719,7 @@
           <p:cNvPr id="4" name="CuadroTexto 3">
             <a:extLst>
               <a:ext uri="{FF2B5EF4-FFF2-40B4-BE49-F238E27FC236}">
-                <a16:creationId xmlns:a16="http://schemas.microsoft.com/office/drawing/2014/main" id="{D8359D4C-15E0-EF2F-320C-1AECD8A8143D}"/>
+                <a16:creationId xmlns:a16="http://schemas.microsoft.com/office/drawing/2014/main" id="{5515BA48-9782-B0B0-ABA3-86A36CC8BA90}"/>
               </a:ext>
             </a:extLst>
           </p:cNvPr>
@@ -5759,7 +5759,7 @@
           <p:cNvPr id="6" name="Imagen 5">
             <a:extLst>
               <a:ext uri="{FF2B5EF4-FFF2-40B4-BE49-F238E27FC236}">
-                <a16:creationId xmlns:a16="http://schemas.microsoft.com/office/drawing/2014/main" id="{E368E9F4-87A0-5B38-0FA9-F674CD3CCE24}"/>
+                <a16:creationId xmlns:a16="http://schemas.microsoft.com/office/drawing/2014/main" id="{B1D285CA-55C4-F977-7CF5-70DB4D2C5CA7}"/>
               </a:ext>
             </a:extLst>
           </p:cNvPr>
@@ -5782,8 +5782,8 @@
         </p:blipFill>
         <p:spPr>
           <a:xfrm>
-            <a:off x="538560" y="1879600"/>
-            <a:ext cx="5679281" cy="4038600"/>
+            <a:off x="1387471" y="1879600"/>
+            <a:ext cx="3981459" cy="4038600"/>
           </a:xfrm>
           <a:prstGeom prst="rect">
             <a:avLst/>
@@ -5800,7 +5800,7 @@
           <p:cNvPr id="7" name="CuadroTexto 6">
             <a:extLst>
               <a:ext uri="{FF2B5EF4-FFF2-40B4-BE49-F238E27FC236}">
-                <a16:creationId xmlns:a16="http://schemas.microsoft.com/office/drawing/2014/main" id="{D8ED3307-E8D5-7A56-34A1-97FA5618ED28}"/>
+                <a16:creationId xmlns:a16="http://schemas.microsoft.com/office/drawing/2014/main" id="{31E57BAD-3F1E-06EE-E8B0-E17A430D6065}"/>
               </a:ext>
             </a:extLst>
           </p:cNvPr>
@@ -5917,7 +5917,7 @@
     </p:spTree>
     <p:extLst>
       <p:ext uri="{BB962C8B-B14F-4D97-AF65-F5344CB8AC3E}">
-        <p14:creationId xmlns:p14="http://schemas.microsoft.com/office/powerpoint/2010/main" val="4092572609"/>
+        <p14:creationId xmlns:p14="http://schemas.microsoft.com/office/powerpoint/2010/main" val="3572334078"/>
       </p:ext>
     </p:extLst>
   </p:cSld>
@@ -5957,7 +5957,7 @@
           <p:cNvPr id="2" name="CuadroTexto 1">
             <a:extLst>
               <a:ext uri="{FF2B5EF4-FFF2-40B4-BE49-F238E27FC236}">
-                <a16:creationId xmlns:a16="http://schemas.microsoft.com/office/drawing/2014/main" id="{EC079CF6-847E-B171-8FC9-EE51868AA9FC}"/>
+                <a16:creationId xmlns:a16="http://schemas.microsoft.com/office/drawing/2014/main" id="{15AE60CF-E363-2B77-E838-C415AFE35984}"/>
               </a:ext>
             </a:extLst>
           </p:cNvPr>
@@ -5997,7 +5997,7 @@
           <p:cNvPr id="3" name="CuadroTexto 2">
             <a:extLst>
               <a:ext uri="{FF2B5EF4-FFF2-40B4-BE49-F238E27FC236}">
-                <a16:creationId xmlns:a16="http://schemas.microsoft.com/office/drawing/2014/main" id="{C313C642-87F1-721E-4386-6FE868113DC6}"/>
+                <a16:creationId xmlns:a16="http://schemas.microsoft.com/office/drawing/2014/main" id="{6345F1B8-1C3A-3B10-C5A6-DE1CB265F91C}"/>
               </a:ext>
             </a:extLst>
           </p:cNvPr>
@@ -6037,7 +6037,7 @@
           <p:cNvPr id="4" name="Rectángulo: esquinas redondeadas 3">
             <a:extLst>
               <a:ext uri="{FF2B5EF4-FFF2-40B4-BE49-F238E27FC236}">
-                <a16:creationId xmlns:a16="http://schemas.microsoft.com/office/drawing/2014/main" id="{85BECDB7-B362-8231-9619-F2E5D58A1005}"/>
+                <a16:creationId xmlns:a16="http://schemas.microsoft.com/office/drawing/2014/main" id="{D0A90649-836B-F320-C443-410EE1435B1E}"/>
               </a:ext>
             </a:extLst>
           </p:cNvPr>
@@ -6091,7 +6091,7 @@
           <p:cNvPr id="5" name="CuadroTexto 4">
             <a:extLst>
               <a:ext uri="{FF2B5EF4-FFF2-40B4-BE49-F238E27FC236}">
-                <a16:creationId xmlns:a16="http://schemas.microsoft.com/office/drawing/2014/main" id="{3E29C3F1-5EA6-5F0B-438B-8715970D4802}"/>
+                <a16:creationId xmlns:a16="http://schemas.microsoft.com/office/drawing/2014/main" id="{8A32F3C5-F477-675B-904F-367B449B30C3}"/>
               </a:ext>
             </a:extLst>
           </p:cNvPr>
@@ -6131,7 +6131,7 @@
           <p:cNvPr id="6" name="CuadroTexto 5">
             <a:extLst>
               <a:ext uri="{FF2B5EF4-FFF2-40B4-BE49-F238E27FC236}">
-                <a16:creationId xmlns:a16="http://schemas.microsoft.com/office/drawing/2014/main" id="{7D0116EA-CA58-8658-8A63-448B22684393}"/>
+                <a16:creationId xmlns:a16="http://schemas.microsoft.com/office/drawing/2014/main" id="{E04E598E-D48E-B088-0D0B-9388D2FC5F4A}"/>
               </a:ext>
             </a:extLst>
           </p:cNvPr>
@@ -6171,7 +6171,7 @@
           <p:cNvPr id="7" name="Rectángulo: esquinas redondeadas 6">
             <a:extLst>
               <a:ext uri="{FF2B5EF4-FFF2-40B4-BE49-F238E27FC236}">
-                <a16:creationId xmlns:a16="http://schemas.microsoft.com/office/drawing/2014/main" id="{FE84D8D8-90E1-8533-7204-D3D2A4BF27ED}"/>
+                <a16:creationId xmlns:a16="http://schemas.microsoft.com/office/drawing/2014/main" id="{BE6487A0-3224-A6D8-B359-0197FDA6444F}"/>
               </a:ext>
             </a:extLst>
           </p:cNvPr>
@@ -6225,7 +6225,7 @@
           <p:cNvPr id="8" name="CuadroTexto 7">
             <a:extLst>
               <a:ext uri="{FF2B5EF4-FFF2-40B4-BE49-F238E27FC236}">
-                <a16:creationId xmlns:a16="http://schemas.microsoft.com/office/drawing/2014/main" id="{E87F0B20-E7AC-6505-CF65-3BA1DF35B8D6}"/>
+                <a16:creationId xmlns:a16="http://schemas.microsoft.com/office/drawing/2014/main" id="{05614C6C-273F-16ED-15D0-483983C97A65}"/>
               </a:ext>
             </a:extLst>
           </p:cNvPr>
@@ -6265,7 +6265,7 @@
           <p:cNvPr id="9" name="CuadroTexto 8">
             <a:extLst>
               <a:ext uri="{FF2B5EF4-FFF2-40B4-BE49-F238E27FC236}">
-                <a16:creationId xmlns:a16="http://schemas.microsoft.com/office/drawing/2014/main" id="{2C214E30-597D-FEC0-05E2-F3AC74E7DEB8}"/>
+                <a16:creationId xmlns:a16="http://schemas.microsoft.com/office/drawing/2014/main" id="{68077E7A-068F-2D77-2B1B-E8861C37ADB6}"/>
               </a:ext>
             </a:extLst>
           </p:cNvPr>
@@ -6305,7 +6305,7 @@
           <p:cNvPr id="10" name="Rectángulo: esquinas redondeadas 9">
             <a:extLst>
               <a:ext uri="{FF2B5EF4-FFF2-40B4-BE49-F238E27FC236}">
-                <a16:creationId xmlns:a16="http://schemas.microsoft.com/office/drawing/2014/main" id="{98FCAEE6-CF8C-4E2F-0F19-93531F6094D9}"/>
+                <a16:creationId xmlns:a16="http://schemas.microsoft.com/office/drawing/2014/main" id="{305A896B-439F-8186-6897-B359BC044784}"/>
               </a:ext>
             </a:extLst>
           </p:cNvPr>
@@ -6359,7 +6359,7 @@
           <p:cNvPr id="11" name="CuadroTexto 10">
             <a:extLst>
               <a:ext uri="{FF2B5EF4-FFF2-40B4-BE49-F238E27FC236}">
-                <a16:creationId xmlns:a16="http://schemas.microsoft.com/office/drawing/2014/main" id="{C9DD5221-CB77-3946-945B-ED03C56B4F18}"/>
+                <a16:creationId xmlns:a16="http://schemas.microsoft.com/office/drawing/2014/main" id="{FADC988E-5836-9656-712D-3215B31FE7BF}"/>
               </a:ext>
             </a:extLst>
           </p:cNvPr>
@@ -6399,7 +6399,7 @@
           <p:cNvPr id="12" name="CuadroTexto 11">
             <a:extLst>
               <a:ext uri="{FF2B5EF4-FFF2-40B4-BE49-F238E27FC236}">
-                <a16:creationId xmlns:a16="http://schemas.microsoft.com/office/drawing/2014/main" id="{56A59FD6-B3A1-CD70-9DE0-3E8780A7FAA4}"/>
+                <a16:creationId xmlns:a16="http://schemas.microsoft.com/office/drawing/2014/main" id="{D21C7DB2-EE2A-0A1F-4162-D417B0F42D11}"/>
               </a:ext>
             </a:extLst>
           </p:cNvPr>
@@ -6439,7 +6439,7 @@
           <p:cNvPr id="13" name="Rectángulo: esquinas redondeadas 12">
             <a:extLst>
               <a:ext uri="{FF2B5EF4-FFF2-40B4-BE49-F238E27FC236}">
-                <a16:creationId xmlns:a16="http://schemas.microsoft.com/office/drawing/2014/main" id="{0B1F8AD1-7F45-EF05-0EFE-43C74B89FCF5}"/>
+                <a16:creationId xmlns:a16="http://schemas.microsoft.com/office/drawing/2014/main" id="{6B5B5511-EA4D-2EE1-1213-81E93F30634A}"/>
               </a:ext>
             </a:extLst>
           </p:cNvPr>
@@ -6493,7 +6493,7 @@
           <p:cNvPr id="14" name="CuadroTexto 13">
             <a:extLst>
               <a:ext uri="{FF2B5EF4-FFF2-40B4-BE49-F238E27FC236}">
-                <a16:creationId xmlns:a16="http://schemas.microsoft.com/office/drawing/2014/main" id="{3F364583-14F5-A4A3-5040-F37EDCE902B2}"/>
+                <a16:creationId xmlns:a16="http://schemas.microsoft.com/office/drawing/2014/main" id="{DEA772EB-F063-0849-8BFF-693972605AC4}"/>
               </a:ext>
             </a:extLst>
           </p:cNvPr>
@@ -6533,7 +6533,7 @@
           <p:cNvPr id="15" name="CuadroTexto 14">
             <a:extLst>
               <a:ext uri="{FF2B5EF4-FFF2-40B4-BE49-F238E27FC236}">
-                <a16:creationId xmlns:a16="http://schemas.microsoft.com/office/drawing/2014/main" id="{CF160FCF-4064-F354-0757-E15C94A23CEA}"/>
+                <a16:creationId xmlns:a16="http://schemas.microsoft.com/office/drawing/2014/main" id="{2A8E837A-F4C8-C811-0E70-980D4A2F5CEF}"/>
               </a:ext>
             </a:extLst>
           </p:cNvPr>
@@ -6573,7 +6573,7 @@
           <p:cNvPr id="16" name="CuadroTexto 15">
             <a:extLst>
               <a:ext uri="{FF2B5EF4-FFF2-40B4-BE49-F238E27FC236}">
-                <a16:creationId xmlns:a16="http://schemas.microsoft.com/office/drawing/2014/main" id="{F42B4C6B-081C-983E-4721-C578D827C133}"/>
+                <a16:creationId xmlns:a16="http://schemas.microsoft.com/office/drawing/2014/main" id="{FEB59DB2-FCAD-9268-E5F8-4DF8C6FC3CFA}"/>
               </a:ext>
             </a:extLst>
           </p:cNvPr>
@@ -6656,7 +6656,7 @@
           <p:cNvPr id="17" name="CuadroTexto 16">
             <a:extLst>
               <a:ext uri="{FF2B5EF4-FFF2-40B4-BE49-F238E27FC236}">
-                <a16:creationId xmlns:a16="http://schemas.microsoft.com/office/drawing/2014/main" id="{DDAC2496-CB21-BB79-6A8F-1736264AA6EB}"/>
+                <a16:creationId xmlns:a16="http://schemas.microsoft.com/office/drawing/2014/main" id="{E23E7F99-4563-27D9-DD28-122A6E1B635A}"/>
               </a:ext>
             </a:extLst>
           </p:cNvPr>
@@ -6694,7 +6694,7 @@
     </p:spTree>
     <p:extLst>
       <p:ext uri="{BB962C8B-B14F-4D97-AF65-F5344CB8AC3E}">
-        <p14:creationId xmlns:p14="http://schemas.microsoft.com/office/powerpoint/2010/main" val="759711986"/>
+        <p14:creationId xmlns:p14="http://schemas.microsoft.com/office/powerpoint/2010/main" val="1833900103"/>
       </p:ext>
     </p:extLst>
   </p:cSld>
@@ -6734,7 +6734,7 @@
           <p:cNvPr id="2" name="CuadroTexto 1">
             <a:extLst>
               <a:ext uri="{FF2B5EF4-FFF2-40B4-BE49-F238E27FC236}">
-                <a16:creationId xmlns:a16="http://schemas.microsoft.com/office/drawing/2014/main" id="{5F0FB4CF-CD89-070F-975D-674DF1115C7B}"/>
+                <a16:creationId xmlns:a16="http://schemas.microsoft.com/office/drawing/2014/main" id="{B3F4C206-8459-F939-248A-3FB31B3C47E2}"/>
               </a:ext>
             </a:extLst>
           </p:cNvPr>
@@ -6774,7 +6774,7 @@
           <p:cNvPr id="3" name="CuadroTexto 2">
             <a:extLst>
               <a:ext uri="{FF2B5EF4-FFF2-40B4-BE49-F238E27FC236}">
-                <a16:creationId xmlns:a16="http://schemas.microsoft.com/office/drawing/2014/main" id="{5C7F7206-889E-083C-0320-557B21F7B36B}"/>
+                <a16:creationId xmlns:a16="http://schemas.microsoft.com/office/drawing/2014/main" id="{3536A14B-98AD-330D-E3A2-5F9C5FECCDBE}"/>
               </a:ext>
             </a:extLst>
           </p:cNvPr>
@@ -6814,7 +6814,7 @@
           <p:cNvPr id="4" name="CuadroTexto 3">
             <a:extLst>
               <a:ext uri="{FF2B5EF4-FFF2-40B4-BE49-F238E27FC236}">
-                <a16:creationId xmlns:a16="http://schemas.microsoft.com/office/drawing/2014/main" id="{B1BC3496-DE1B-F1DC-BE3A-CA6209C02ADB}"/>
+                <a16:creationId xmlns:a16="http://schemas.microsoft.com/office/drawing/2014/main" id="{123D2F72-8993-A09C-30B6-5CF217848F11}"/>
               </a:ext>
             </a:extLst>
           </p:cNvPr>
@@ -6854,7 +6854,7 @@
           <p:cNvPr id="5" name="Rectángulo: esquinas redondeadas 4">
             <a:extLst>
               <a:ext uri="{FF2B5EF4-FFF2-40B4-BE49-F238E27FC236}">
-                <a16:creationId xmlns:a16="http://schemas.microsoft.com/office/drawing/2014/main" id="{63E13D95-BD0D-3E84-2634-A940742D71A5}"/>
+                <a16:creationId xmlns:a16="http://schemas.microsoft.com/office/drawing/2014/main" id="{A16CFE9C-F638-2584-7F3C-213C43EF5B70}"/>
               </a:ext>
             </a:extLst>
           </p:cNvPr>
@@ -6908,7 +6908,7 @@
           <p:cNvPr id="6" name="CuadroTexto 5">
             <a:extLst>
               <a:ext uri="{FF2B5EF4-FFF2-40B4-BE49-F238E27FC236}">
-                <a16:creationId xmlns:a16="http://schemas.microsoft.com/office/drawing/2014/main" id="{4E7E188B-4D9F-3058-AD3A-65F08844F2E9}"/>
+                <a16:creationId xmlns:a16="http://schemas.microsoft.com/office/drawing/2014/main" id="{7854F5D6-9D86-50AB-E2B3-EB4E442655C9}"/>
               </a:ext>
             </a:extLst>
           </p:cNvPr>
@@ -6948,7 +6948,7 @@
           <p:cNvPr id="7" name="CuadroTexto 6">
             <a:extLst>
               <a:ext uri="{FF2B5EF4-FFF2-40B4-BE49-F238E27FC236}">
-                <a16:creationId xmlns:a16="http://schemas.microsoft.com/office/drawing/2014/main" id="{BF17D35A-B719-4E36-CAF5-9BF82D8F1071}"/>
+                <a16:creationId xmlns:a16="http://schemas.microsoft.com/office/drawing/2014/main" id="{E19AF8D8-CD8A-01CD-7F41-07B8C580CB33}"/>
               </a:ext>
             </a:extLst>
           </p:cNvPr>
@@ -6988,7 +6988,7 @@
           <p:cNvPr id="8" name="Rectángulo: esquinas redondeadas 7">
             <a:extLst>
               <a:ext uri="{FF2B5EF4-FFF2-40B4-BE49-F238E27FC236}">
-                <a16:creationId xmlns:a16="http://schemas.microsoft.com/office/drawing/2014/main" id="{777739E0-3CDD-0B09-60EB-C69716BC7E69}"/>
+                <a16:creationId xmlns:a16="http://schemas.microsoft.com/office/drawing/2014/main" id="{2A074F37-BF29-B61B-C7A0-718A5DEC485C}"/>
               </a:ext>
             </a:extLst>
           </p:cNvPr>
@@ -7042,7 +7042,7 @@
           <p:cNvPr id="9" name="CuadroTexto 8">
             <a:extLst>
               <a:ext uri="{FF2B5EF4-FFF2-40B4-BE49-F238E27FC236}">
-                <a16:creationId xmlns:a16="http://schemas.microsoft.com/office/drawing/2014/main" id="{7051E15C-4CDE-E078-CF5F-A8410C9D6F57}"/>
+                <a16:creationId xmlns:a16="http://schemas.microsoft.com/office/drawing/2014/main" id="{B2AC185B-6514-73F1-A3E5-E984F68B9902}"/>
               </a:ext>
             </a:extLst>
           </p:cNvPr>
@@ -7082,7 +7082,7 @@
           <p:cNvPr id="10" name="CuadroTexto 9">
             <a:extLst>
               <a:ext uri="{FF2B5EF4-FFF2-40B4-BE49-F238E27FC236}">
-                <a16:creationId xmlns:a16="http://schemas.microsoft.com/office/drawing/2014/main" id="{1B9FCC05-FE2F-3DDE-EB22-D8A363E94EDD}"/>
+                <a16:creationId xmlns:a16="http://schemas.microsoft.com/office/drawing/2014/main" id="{D8D14FB8-A2EC-B48D-803C-8DCBB99BEF42}"/>
               </a:ext>
             </a:extLst>
           </p:cNvPr>
@@ -7122,7 +7122,7 @@
           <p:cNvPr id="11" name="CuadroTexto 10">
             <a:extLst>
               <a:ext uri="{FF2B5EF4-FFF2-40B4-BE49-F238E27FC236}">
-                <a16:creationId xmlns:a16="http://schemas.microsoft.com/office/drawing/2014/main" id="{089B4889-BC9D-173C-5933-8C4A572F9949}"/>
+                <a16:creationId xmlns:a16="http://schemas.microsoft.com/office/drawing/2014/main" id="{64F3486F-329C-AFD2-5979-CCFAC7EA8CAE}"/>
               </a:ext>
             </a:extLst>
           </p:cNvPr>
@@ -7162,7 +7162,7 @@
           <p:cNvPr id="12" name="CuadroTexto 11">
             <a:extLst>
               <a:ext uri="{FF2B5EF4-FFF2-40B4-BE49-F238E27FC236}">
-                <a16:creationId xmlns:a16="http://schemas.microsoft.com/office/drawing/2014/main" id="{2F05B17B-A3B5-A69E-0981-D3466A3B8E1B}"/>
+                <a16:creationId xmlns:a16="http://schemas.microsoft.com/office/drawing/2014/main" id="{8D511053-1A70-2E09-E182-03F420080343}"/>
               </a:ext>
             </a:extLst>
           </p:cNvPr>
@@ -7243,7 +7243,7 @@
     </p:spTree>
     <p:extLst>
       <p:ext uri="{BB962C8B-B14F-4D97-AF65-F5344CB8AC3E}">
-        <p14:creationId xmlns:p14="http://schemas.microsoft.com/office/powerpoint/2010/main" val="3028307808"/>
+        <p14:creationId xmlns:p14="http://schemas.microsoft.com/office/powerpoint/2010/main" val="4148631519"/>
       </p:ext>
     </p:extLst>
   </p:cSld>
@@ -7283,7 +7283,7 @@
           <p:cNvPr id="2" name="CuadroTexto 1">
             <a:extLst>
               <a:ext uri="{FF2B5EF4-FFF2-40B4-BE49-F238E27FC236}">
-                <a16:creationId xmlns:a16="http://schemas.microsoft.com/office/drawing/2014/main" id="{8E51F231-1E7D-E7AD-827B-E4C65A6DCF35}"/>
+                <a16:creationId xmlns:a16="http://schemas.microsoft.com/office/drawing/2014/main" id="{0B5CBCEC-03B0-5983-7141-BA1810FA18B9}"/>
               </a:ext>
             </a:extLst>
           </p:cNvPr>
@@ -7323,7 +7323,7 @@
           <p:cNvPr id="3" name="CuadroTexto 2">
             <a:extLst>
               <a:ext uri="{FF2B5EF4-FFF2-40B4-BE49-F238E27FC236}">
-                <a16:creationId xmlns:a16="http://schemas.microsoft.com/office/drawing/2014/main" id="{D6A07F55-8824-6286-A146-199FCAA61FFB}"/>
+                <a16:creationId xmlns:a16="http://schemas.microsoft.com/office/drawing/2014/main" id="{A776B045-5ED7-50C1-623F-C7BB99EA0949}"/>
               </a:ext>
             </a:extLst>
           </p:cNvPr>
@@ -7363,7 +7363,7 @@
           <p:cNvPr id="4" name="CuadroTexto 3">
             <a:extLst>
               <a:ext uri="{FF2B5EF4-FFF2-40B4-BE49-F238E27FC236}">
-                <a16:creationId xmlns:a16="http://schemas.microsoft.com/office/drawing/2014/main" id="{078925B0-E651-5AE9-EFB4-EA603AB409C8}"/>
+                <a16:creationId xmlns:a16="http://schemas.microsoft.com/office/drawing/2014/main" id="{1B2033FE-0561-28AC-FCA8-AB0CBF99D9A4}"/>
               </a:ext>
             </a:extLst>
           </p:cNvPr>
@@ -7403,7 +7403,7 @@
           <p:cNvPr id="5" name="Rectángulo: esquinas redondeadas 4">
             <a:extLst>
               <a:ext uri="{FF2B5EF4-FFF2-40B4-BE49-F238E27FC236}">
-                <a16:creationId xmlns:a16="http://schemas.microsoft.com/office/drawing/2014/main" id="{AA852CD0-3EE1-5723-C376-C21446197A0A}"/>
+                <a16:creationId xmlns:a16="http://schemas.microsoft.com/office/drawing/2014/main" id="{B28BC6F7-336F-F92E-29E5-C7676A1C0506}"/>
               </a:ext>
             </a:extLst>
           </p:cNvPr>
@@ -7457,7 +7457,7 @@
           <p:cNvPr id="6" name="CuadroTexto 5">
             <a:extLst>
               <a:ext uri="{FF2B5EF4-FFF2-40B4-BE49-F238E27FC236}">
-                <a16:creationId xmlns:a16="http://schemas.microsoft.com/office/drawing/2014/main" id="{2DE079E2-AE49-42F3-66A0-AAA119027BDB}"/>
+                <a16:creationId xmlns:a16="http://schemas.microsoft.com/office/drawing/2014/main" id="{B616075B-EBFC-AF2A-D441-CA625A64DB9E}"/>
               </a:ext>
             </a:extLst>
           </p:cNvPr>
@@ -7497,7 +7497,7 @@
           <p:cNvPr id="7" name="CuadroTexto 6">
             <a:extLst>
               <a:ext uri="{FF2B5EF4-FFF2-40B4-BE49-F238E27FC236}">
-                <a16:creationId xmlns:a16="http://schemas.microsoft.com/office/drawing/2014/main" id="{36F98B91-B093-46C9-3661-843B002CF8BB}"/>
+                <a16:creationId xmlns:a16="http://schemas.microsoft.com/office/drawing/2014/main" id="{B33A05D1-2367-AE95-42A7-15FE4AFB453E}"/>
               </a:ext>
             </a:extLst>
           </p:cNvPr>
@@ -7598,7 +7598,7 @@
           <p:cNvPr id="8" name="Rectángulo: esquinas redondeadas 7">
             <a:extLst>
               <a:ext uri="{FF2B5EF4-FFF2-40B4-BE49-F238E27FC236}">
-                <a16:creationId xmlns:a16="http://schemas.microsoft.com/office/drawing/2014/main" id="{74C16484-179F-948D-1235-7EF55B1AC959}"/>
+                <a16:creationId xmlns:a16="http://schemas.microsoft.com/office/drawing/2014/main" id="{85120959-4246-3FE9-1B92-CE3BC5DEB55A}"/>
               </a:ext>
             </a:extLst>
           </p:cNvPr>
@@ -7652,7 +7652,7 @@
           <p:cNvPr id="9" name="CuadroTexto 8">
             <a:extLst>
               <a:ext uri="{FF2B5EF4-FFF2-40B4-BE49-F238E27FC236}">
-                <a16:creationId xmlns:a16="http://schemas.microsoft.com/office/drawing/2014/main" id="{851C70E0-2004-1722-7EA1-48395F4ABB40}"/>
+                <a16:creationId xmlns:a16="http://schemas.microsoft.com/office/drawing/2014/main" id="{D5E495AE-6705-AF48-3376-84A0E6C5C1E5}"/>
               </a:ext>
             </a:extLst>
           </p:cNvPr>
@@ -7692,7 +7692,7 @@
           <p:cNvPr id="10" name="CuadroTexto 9">
             <a:extLst>
               <a:ext uri="{FF2B5EF4-FFF2-40B4-BE49-F238E27FC236}">
-                <a16:creationId xmlns:a16="http://schemas.microsoft.com/office/drawing/2014/main" id="{945528F9-0721-F0D3-0105-E496A9E7C058}"/>
+                <a16:creationId xmlns:a16="http://schemas.microsoft.com/office/drawing/2014/main" id="{6693FBB9-0DB6-D935-E315-EF7815C19D0D}"/>
               </a:ext>
             </a:extLst>
           </p:cNvPr>
@@ -7732,7 +7732,7 @@
           <p:cNvPr id="11" name="Rectángulo: esquinas redondeadas 10">
             <a:extLst>
               <a:ext uri="{FF2B5EF4-FFF2-40B4-BE49-F238E27FC236}">
-                <a16:creationId xmlns:a16="http://schemas.microsoft.com/office/drawing/2014/main" id="{B550BF39-F121-99FE-187D-A38C3EC382E5}"/>
+                <a16:creationId xmlns:a16="http://schemas.microsoft.com/office/drawing/2014/main" id="{26EF31EE-7914-1FBB-C311-57DDB8C76FA7}"/>
               </a:ext>
             </a:extLst>
           </p:cNvPr>
@@ -7786,7 +7786,7 @@
           <p:cNvPr id="12" name="CuadroTexto 11">
             <a:extLst>
               <a:ext uri="{FF2B5EF4-FFF2-40B4-BE49-F238E27FC236}">
-                <a16:creationId xmlns:a16="http://schemas.microsoft.com/office/drawing/2014/main" id="{CACB2135-DC71-12CE-5D2E-A01E7101CA06}"/>
+                <a16:creationId xmlns:a16="http://schemas.microsoft.com/office/drawing/2014/main" id="{69B47D44-C6F5-7496-9F88-919F244828B7}"/>
               </a:ext>
             </a:extLst>
           </p:cNvPr>
@@ -7826,7 +7826,7 @@
           <p:cNvPr id="13" name="CuadroTexto 12">
             <a:extLst>
               <a:ext uri="{FF2B5EF4-FFF2-40B4-BE49-F238E27FC236}">
-                <a16:creationId xmlns:a16="http://schemas.microsoft.com/office/drawing/2014/main" id="{E7E33394-9BF3-B256-128E-9B844C9D4A76}"/>
+                <a16:creationId xmlns:a16="http://schemas.microsoft.com/office/drawing/2014/main" id="{D1AE0AD6-88DE-6861-29B6-748240F58BB0}"/>
               </a:ext>
             </a:extLst>
           </p:cNvPr>
@@ -7866,7 +7866,7 @@
           <p:cNvPr id="14" name="Rectángulo: esquinas redondeadas 13">
             <a:extLst>
               <a:ext uri="{FF2B5EF4-FFF2-40B4-BE49-F238E27FC236}">
-                <a16:creationId xmlns:a16="http://schemas.microsoft.com/office/drawing/2014/main" id="{74F87670-A0B0-8C8D-8B45-F97D1FF83B13}"/>
+                <a16:creationId xmlns:a16="http://schemas.microsoft.com/office/drawing/2014/main" id="{CFA353E8-3014-76E1-58B0-D739ED35FBF6}"/>
               </a:ext>
             </a:extLst>
           </p:cNvPr>
@@ -7920,7 +7920,7 @@
           <p:cNvPr id="15" name="CuadroTexto 14">
             <a:extLst>
               <a:ext uri="{FF2B5EF4-FFF2-40B4-BE49-F238E27FC236}">
-                <a16:creationId xmlns:a16="http://schemas.microsoft.com/office/drawing/2014/main" id="{FF959876-15DF-D6F2-74ED-3C3464558EF5}"/>
+                <a16:creationId xmlns:a16="http://schemas.microsoft.com/office/drawing/2014/main" id="{84183F15-1129-087E-1A27-21B234E62411}"/>
               </a:ext>
             </a:extLst>
           </p:cNvPr>
@@ -7960,7 +7960,7 @@
           <p:cNvPr id="16" name="CuadroTexto 15">
             <a:extLst>
               <a:ext uri="{FF2B5EF4-FFF2-40B4-BE49-F238E27FC236}">
-                <a16:creationId xmlns:a16="http://schemas.microsoft.com/office/drawing/2014/main" id="{D0E17913-F8FB-67D2-AE0E-5139B0B29B4D}"/>
+                <a16:creationId xmlns:a16="http://schemas.microsoft.com/office/drawing/2014/main" id="{1BBB3881-FAA5-224E-B2A1-C0CE0CB227F4}"/>
               </a:ext>
             </a:extLst>
           </p:cNvPr>
@@ -8000,7 +8000,7 @@
           <p:cNvPr id="17" name="CuadroTexto 16">
             <a:extLst>
               <a:ext uri="{FF2B5EF4-FFF2-40B4-BE49-F238E27FC236}">
-                <a16:creationId xmlns:a16="http://schemas.microsoft.com/office/drawing/2014/main" id="{B378EAFC-3006-CD25-E501-646865FCD7EF}"/>
+                <a16:creationId xmlns:a16="http://schemas.microsoft.com/office/drawing/2014/main" id="{433E648D-304F-1E51-8C24-192548D7542B}"/>
               </a:ext>
             </a:extLst>
           </p:cNvPr>
@@ -8063,7 +8063,7 @@
     </p:spTree>
     <p:extLst>
       <p:ext uri="{BB962C8B-B14F-4D97-AF65-F5344CB8AC3E}">
-        <p14:creationId xmlns:p14="http://schemas.microsoft.com/office/powerpoint/2010/main" val="1522264340"/>
+        <p14:creationId xmlns:p14="http://schemas.microsoft.com/office/powerpoint/2010/main" val="4288348950"/>
       </p:ext>
     </p:extLst>
   </p:cSld>
@@ -8103,7 +8103,7 @@
           <p:cNvPr id="2" name="CuadroTexto 1">
             <a:extLst>
               <a:ext uri="{FF2B5EF4-FFF2-40B4-BE49-F238E27FC236}">
-                <a16:creationId xmlns:a16="http://schemas.microsoft.com/office/drawing/2014/main" id="{8069A607-44EF-AE13-4F64-E9B2D84C16DE}"/>
+                <a16:creationId xmlns:a16="http://schemas.microsoft.com/office/drawing/2014/main" id="{D3A5D2F9-AF48-EBB4-7F27-9300C0C11E38}"/>
               </a:ext>
             </a:extLst>
           </p:cNvPr>
@@ -8143,7 +8143,7 @@
           <p:cNvPr id="3" name="CuadroTexto 2">
             <a:extLst>
               <a:ext uri="{FF2B5EF4-FFF2-40B4-BE49-F238E27FC236}">
-                <a16:creationId xmlns:a16="http://schemas.microsoft.com/office/drawing/2014/main" id="{99A40C62-02FE-C640-BD1E-90404F80B611}"/>
+                <a16:creationId xmlns:a16="http://schemas.microsoft.com/office/drawing/2014/main" id="{205E0E42-9ED7-0158-57C0-58EFCAD1EE35}"/>
               </a:ext>
             </a:extLst>
           </p:cNvPr>
@@ -8183,7 +8183,7 @@
           <p:cNvPr id="4" name="CuadroTexto 3">
             <a:extLst>
               <a:ext uri="{FF2B5EF4-FFF2-40B4-BE49-F238E27FC236}">
-                <a16:creationId xmlns:a16="http://schemas.microsoft.com/office/drawing/2014/main" id="{601787B8-5160-C0C1-1826-57FA5A07D3FB}"/>
+                <a16:creationId xmlns:a16="http://schemas.microsoft.com/office/drawing/2014/main" id="{FB0A7C40-A46C-523E-8A41-1419EA7C2BD7}"/>
               </a:ext>
             </a:extLst>
           </p:cNvPr>
@@ -8302,7 +8302,7 @@
           <p:cNvPr id="5" name="Rectángulo: esquinas redondeadas 4">
             <a:extLst>
               <a:ext uri="{FF2B5EF4-FFF2-40B4-BE49-F238E27FC236}">
-                <a16:creationId xmlns:a16="http://schemas.microsoft.com/office/drawing/2014/main" id="{4F55DC18-479C-7B46-E29B-BFFB7497920C}"/>
+                <a16:creationId xmlns:a16="http://schemas.microsoft.com/office/drawing/2014/main" id="{CCFF1FD8-4B20-AF2A-7061-A654004E9755}"/>
               </a:ext>
             </a:extLst>
           </p:cNvPr>
@@ -8356,7 +8356,7 @@
           <p:cNvPr id="6" name="CuadroTexto 5">
             <a:extLst>
               <a:ext uri="{FF2B5EF4-FFF2-40B4-BE49-F238E27FC236}">
-                <a16:creationId xmlns:a16="http://schemas.microsoft.com/office/drawing/2014/main" id="{634E4C24-1246-CA54-8DEA-08216E760F0A}"/>
+                <a16:creationId xmlns:a16="http://schemas.microsoft.com/office/drawing/2014/main" id="{7014CB03-D51D-37C3-75A1-85002D142207}"/>
               </a:ext>
             </a:extLst>
           </p:cNvPr>
@@ -8396,7 +8396,7 @@
           <p:cNvPr id="7" name="CuadroTexto 6">
             <a:extLst>
               <a:ext uri="{FF2B5EF4-FFF2-40B4-BE49-F238E27FC236}">
-                <a16:creationId xmlns:a16="http://schemas.microsoft.com/office/drawing/2014/main" id="{439A1E91-491A-279E-8A09-581774AD200B}"/>
+                <a16:creationId xmlns:a16="http://schemas.microsoft.com/office/drawing/2014/main" id="{006BCA0E-8AB9-A855-0D30-3D091A3A4418}"/>
               </a:ext>
             </a:extLst>
           </p:cNvPr>
@@ -8434,7 +8434,7 @@
     </p:spTree>
     <p:extLst>
       <p:ext uri="{BB962C8B-B14F-4D97-AF65-F5344CB8AC3E}">
-        <p14:creationId xmlns:p14="http://schemas.microsoft.com/office/powerpoint/2010/main" val="4160943323"/>
+        <p14:creationId xmlns:p14="http://schemas.microsoft.com/office/powerpoint/2010/main" val="990444058"/>
       </p:ext>
     </p:extLst>
   </p:cSld>
@@ -8474,7 +8474,7 @@
           <p:cNvPr id="2" name="CuadroTexto 1">
             <a:extLst>
               <a:ext uri="{FF2B5EF4-FFF2-40B4-BE49-F238E27FC236}">
-                <a16:creationId xmlns:a16="http://schemas.microsoft.com/office/drawing/2014/main" id="{5B170C3C-125F-D818-9099-2A01248F5CD8}"/>
+                <a16:creationId xmlns:a16="http://schemas.microsoft.com/office/drawing/2014/main" id="{036CED16-AF6D-6F19-B5C9-667A760854D0}"/>
               </a:ext>
             </a:extLst>
           </p:cNvPr>
@@ -8514,7 +8514,7 @@
           <p:cNvPr id="3" name="CuadroTexto 2">
             <a:extLst>
               <a:ext uri="{FF2B5EF4-FFF2-40B4-BE49-F238E27FC236}">
-                <a16:creationId xmlns:a16="http://schemas.microsoft.com/office/drawing/2014/main" id="{C6462AC4-4513-67D4-328B-184046AC558C}"/>
+                <a16:creationId xmlns:a16="http://schemas.microsoft.com/office/drawing/2014/main" id="{DFBF3C10-C8F8-D4EA-C929-9C9E13152A42}"/>
               </a:ext>
             </a:extLst>
           </p:cNvPr>
@@ -8554,7 +8554,7 @@
           <p:cNvPr id="4" name="CuadroTexto 3">
             <a:extLst>
               <a:ext uri="{FF2B5EF4-FFF2-40B4-BE49-F238E27FC236}">
-                <a16:creationId xmlns:a16="http://schemas.microsoft.com/office/drawing/2014/main" id="{B2DCA2D6-AEFB-3994-FA2E-D9BA73A9A5DF}"/>
+                <a16:creationId xmlns:a16="http://schemas.microsoft.com/office/drawing/2014/main" id="{7EB16D0E-93DC-A5D4-428C-CB7F5AF93E7B}"/>
               </a:ext>
             </a:extLst>
           </p:cNvPr>
@@ -8594,7 +8594,7 @@
           <p:cNvPr id="5" name="CuadroTexto 4">
             <a:extLst>
               <a:ext uri="{FF2B5EF4-FFF2-40B4-BE49-F238E27FC236}">
-                <a16:creationId xmlns:a16="http://schemas.microsoft.com/office/drawing/2014/main" id="{9ECA0BE7-DC2E-2E0E-C7D7-53526AC36FF1}"/>
+                <a16:creationId xmlns:a16="http://schemas.microsoft.com/office/drawing/2014/main" id="{33F4D4A8-FAE3-468C-B4E0-177E55140173}"/>
               </a:ext>
             </a:extLst>
           </p:cNvPr>
@@ -8677,7 +8677,7 @@
           <p:cNvPr id="6" name="CuadroTexto 5">
             <a:extLst>
               <a:ext uri="{FF2B5EF4-FFF2-40B4-BE49-F238E27FC236}">
-                <a16:creationId xmlns:a16="http://schemas.microsoft.com/office/drawing/2014/main" id="{8E5B1483-6593-DFB2-7D9A-8932703E00E6}"/>
+                <a16:creationId xmlns:a16="http://schemas.microsoft.com/office/drawing/2014/main" id="{C80A97D4-C6A7-C8B0-B201-F15B6F610839}"/>
               </a:ext>
             </a:extLst>
           </p:cNvPr>
@@ -8715,7 +8715,7 @@
     </p:spTree>
     <p:extLst>
       <p:ext uri="{BB962C8B-B14F-4D97-AF65-F5344CB8AC3E}">
-        <p14:creationId xmlns:p14="http://schemas.microsoft.com/office/powerpoint/2010/main" val="3551999054"/>
+        <p14:creationId xmlns:p14="http://schemas.microsoft.com/office/powerpoint/2010/main" val="589655953"/>
       </p:ext>
     </p:extLst>
   </p:cSld>
@@ -8755,7 +8755,7 @@
           <p:cNvPr id="2" name="CuadroTexto 1">
             <a:extLst>
               <a:ext uri="{FF2B5EF4-FFF2-40B4-BE49-F238E27FC236}">
-                <a16:creationId xmlns:a16="http://schemas.microsoft.com/office/drawing/2014/main" id="{96B59D31-B9DC-D760-A623-8B14531379E7}"/>
+                <a16:creationId xmlns:a16="http://schemas.microsoft.com/office/drawing/2014/main" id="{6FBC9830-1087-3B6C-1D91-84C5028059E5}"/>
               </a:ext>
             </a:extLst>
           </p:cNvPr>
@@ -8795,7 +8795,7 @@
           <p:cNvPr id="3" name="CuadroTexto 2">
             <a:extLst>
               <a:ext uri="{FF2B5EF4-FFF2-40B4-BE49-F238E27FC236}">
-                <a16:creationId xmlns:a16="http://schemas.microsoft.com/office/drawing/2014/main" id="{B252884E-54A6-C4A4-C9AA-79C2474013B4}"/>
+                <a16:creationId xmlns:a16="http://schemas.microsoft.com/office/drawing/2014/main" id="{6E9AD559-58E0-8320-53FE-5B82434953C6}"/>
               </a:ext>
             </a:extLst>
           </p:cNvPr>
@@ -8835,7 +8835,7 @@
           <p:cNvPr id="4" name="CuadroTexto 3">
             <a:extLst>
               <a:ext uri="{FF2B5EF4-FFF2-40B4-BE49-F238E27FC236}">
-                <a16:creationId xmlns:a16="http://schemas.microsoft.com/office/drawing/2014/main" id="{F383C05F-D800-EA0C-FD31-D2B4376E4045}"/>
+                <a16:creationId xmlns:a16="http://schemas.microsoft.com/office/drawing/2014/main" id="{3DC3118D-8EA7-9B0F-6B6C-E26B25E6EDEF}"/>
               </a:ext>
             </a:extLst>
           </p:cNvPr>
@@ -8875,7 +8875,7 @@
           <p:cNvPr id="5" name="CuadroTexto 4">
             <a:extLst>
               <a:ext uri="{FF2B5EF4-FFF2-40B4-BE49-F238E27FC236}">
-                <a16:creationId xmlns:a16="http://schemas.microsoft.com/office/drawing/2014/main" id="{8D7DC599-150E-F713-3725-C263E8FEE87A}"/>
+                <a16:creationId xmlns:a16="http://schemas.microsoft.com/office/drawing/2014/main" id="{06A3EF4E-5A23-0B2D-C056-0F90E3CCF8E7}"/>
               </a:ext>
             </a:extLst>
           </p:cNvPr>
@@ -8976,7 +8976,7 @@
           <p:cNvPr id="6" name="Rectángulo: esquinas redondeadas 5">
             <a:extLst>
               <a:ext uri="{FF2B5EF4-FFF2-40B4-BE49-F238E27FC236}">
-                <a16:creationId xmlns:a16="http://schemas.microsoft.com/office/drawing/2014/main" id="{E507C1D7-4307-CC2D-472B-B68D55694694}"/>
+                <a16:creationId xmlns:a16="http://schemas.microsoft.com/office/drawing/2014/main" id="{CA25E428-EEB2-3BA5-A89E-427C511F04C2}"/>
               </a:ext>
             </a:extLst>
           </p:cNvPr>
@@ -9030,7 +9030,7 @@
           <p:cNvPr id="7" name="CuadroTexto 6">
             <a:extLst>
               <a:ext uri="{FF2B5EF4-FFF2-40B4-BE49-F238E27FC236}">
-                <a16:creationId xmlns:a16="http://schemas.microsoft.com/office/drawing/2014/main" id="{86F03797-4F39-A9A2-7DD6-11568179228C}"/>
+                <a16:creationId xmlns:a16="http://schemas.microsoft.com/office/drawing/2014/main" id="{E3893FC0-9260-2BE5-6897-EBCF6E90A79A}"/>
               </a:ext>
             </a:extLst>
           </p:cNvPr>
@@ -9070,7 +9070,7 @@
           <p:cNvPr id="8" name="CuadroTexto 7">
             <a:extLst>
               <a:ext uri="{FF2B5EF4-FFF2-40B4-BE49-F238E27FC236}">
-                <a16:creationId xmlns:a16="http://schemas.microsoft.com/office/drawing/2014/main" id="{A5FC4BE5-DFE4-7689-BE27-E9882E191B66}"/>
+                <a16:creationId xmlns:a16="http://schemas.microsoft.com/office/drawing/2014/main" id="{3D0CC411-B7A5-03FF-536B-94D0CC3F3DF7}"/>
               </a:ext>
             </a:extLst>
           </p:cNvPr>
@@ -9108,7 +9108,7 @@
     </p:spTree>
     <p:extLst>
       <p:ext uri="{BB962C8B-B14F-4D97-AF65-F5344CB8AC3E}">
-        <p14:creationId xmlns:p14="http://schemas.microsoft.com/office/powerpoint/2010/main" val="534607492"/>
+        <p14:creationId xmlns:p14="http://schemas.microsoft.com/office/powerpoint/2010/main" val="1139008739"/>
       </p:ext>
     </p:extLst>
   </p:cSld>
@@ -9148,7 +9148,7 @@
           <p:cNvPr id="2" name="CuadroTexto 1">
             <a:extLst>
               <a:ext uri="{FF2B5EF4-FFF2-40B4-BE49-F238E27FC236}">
-                <a16:creationId xmlns:a16="http://schemas.microsoft.com/office/drawing/2014/main" id="{B241425E-B117-BD72-C001-C78EACF704A6}"/>
+                <a16:creationId xmlns:a16="http://schemas.microsoft.com/office/drawing/2014/main" id="{EB282940-06AF-EACF-B9EF-98EAC4F1730A}"/>
               </a:ext>
             </a:extLst>
           </p:cNvPr>
@@ -9188,7 +9188,7 @@
           <p:cNvPr id="3" name="CuadroTexto 2">
             <a:extLst>
               <a:ext uri="{FF2B5EF4-FFF2-40B4-BE49-F238E27FC236}">
-                <a16:creationId xmlns:a16="http://schemas.microsoft.com/office/drawing/2014/main" id="{4F66F0AF-F511-E88E-DC69-E191BC124F50}"/>
+                <a16:creationId xmlns:a16="http://schemas.microsoft.com/office/drawing/2014/main" id="{15F9AF63-03C5-94BF-46A3-CCE367DA3DF8}"/>
               </a:ext>
             </a:extLst>
           </p:cNvPr>
@@ -9228,7 +9228,7 @@
           <p:cNvPr id="4" name="Rectángulo: esquinas redondeadas 3">
             <a:extLst>
               <a:ext uri="{FF2B5EF4-FFF2-40B4-BE49-F238E27FC236}">
-                <a16:creationId xmlns:a16="http://schemas.microsoft.com/office/drawing/2014/main" id="{DF6727A9-78DB-0557-20DD-B8EB7AF51AA6}"/>
+                <a16:creationId xmlns:a16="http://schemas.microsoft.com/office/drawing/2014/main" id="{9C5A765E-77D2-39CA-9FE8-5236C5063869}"/>
               </a:ext>
             </a:extLst>
           </p:cNvPr>
@@ -9282,7 +9282,7 @@
           <p:cNvPr id="5" name="CuadroTexto 4">
             <a:extLst>
               <a:ext uri="{FF2B5EF4-FFF2-40B4-BE49-F238E27FC236}">
-                <a16:creationId xmlns:a16="http://schemas.microsoft.com/office/drawing/2014/main" id="{D2FE1F28-F6C0-E5FA-79B4-B95CF15496BE}"/>
+                <a16:creationId xmlns:a16="http://schemas.microsoft.com/office/drawing/2014/main" id="{C64D6F7B-282D-42E2-323D-242932C9CF2E}"/>
               </a:ext>
             </a:extLst>
           </p:cNvPr>
@@ -9322,7 +9322,7 @@
           <p:cNvPr id="6" name="CuadroTexto 5">
             <a:extLst>
               <a:ext uri="{FF2B5EF4-FFF2-40B4-BE49-F238E27FC236}">
-                <a16:creationId xmlns:a16="http://schemas.microsoft.com/office/drawing/2014/main" id="{7E44E7F3-F077-3094-A294-5BD32C8BB583}"/>
+                <a16:creationId xmlns:a16="http://schemas.microsoft.com/office/drawing/2014/main" id="{C4A6B74D-5BB0-5B05-A7A4-594010C75DF8}"/>
               </a:ext>
             </a:extLst>
           </p:cNvPr>
@@ -9362,7 +9362,7 @@
           <p:cNvPr id="7" name="Rectángulo: esquinas redondeadas 6">
             <a:extLst>
               <a:ext uri="{FF2B5EF4-FFF2-40B4-BE49-F238E27FC236}">
-                <a16:creationId xmlns:a16="http://schemas.microsoft.com/office/drawing/2014/main" id="{5D920454-09FC-2587-F0DE-D0A7DF7EA35E}"/>
+                <a16:creationId xmlns:a16="http://schemas.microsoft.com/office/drawing/2014/main" id="{A0695082-FAC9-CB18-C611-34ECF60D6DC8}"/>
               </a:ext>
             </a:extLst>
           </p:cNvPr>
@@ -9416,7 +9416,7 @@
           <p:cNvPr id="8" name="CuadroTexto 7">
             <a:extLst>
               <a:ext uri="{FF2B5EF4-FFF2-40B4-BE49-F238E27FC236}">
-                <a16:creationId xmlns:a16="http://schemas.microsoft.com/office/drawing/2014/main" id="{9E21D43D-16AD-F5F6-BDFB-84B3AA0B59D1}"/>
+                <a16:creationId xmlns:a16="http://schemas.microsoft.com/office/drawing/2014/main" id="{F0A03756-DD0A-5590-9EF0-14269100A1B2}"/>
               </a:ext>
             </a:extLst>
           </p:cNvPr>
@@ -9456,7 +9456,7 @@
           <p:cNvPr id="9" name="CuadroTexto 8">
             <a:extLst>
               <a:ext uri="{FF2B5EF4-FFF2-40B4-BE49-F238E27FC236}">
-                <a16:creationId xmlns:a16="http://schemas.microsoft.com/office/drawing/2014/main" id="{2122C4B1-94B8-A693-9DA5-AB18AA191273}"/>
+                <a16:creationId xmlns:a16="http://schemas.microsoft.com/office/drawing/2014/main" id="{FED5F627-064E-D6AE-7EEB-66C69F38AA9B}"/>
               </a:ext>
             </a:extLst>
           </p:cNvPr>
@@ -9496,7 +9496,7 @@
           <p:cNvPr id="10" name="Rectángulo: esquinas redondeadas 9">
             <a:extLst>
               <a:ext uri="{FF2B5EF4-FFF2-40B4-BE49-F238E27FC236}">
-                <a16:creationId xmlns:a16="http://schemas.microsoft.com/office/drawing/2014/main" id="{7B9BC611-C26C-96E2-D235-63F14F631CC1}"/>
+                <a16:creationId xmlns:a16="http://schemas.microsoft.com/office/drawing/2014/main" id="{2E7C599C-C567-24F9-0489-3F12FF1E0B13}"/>
               </a:ext>
             </a:extLst>
           </p:cNvPr>
@@ -9550,7 +9550,7 @@
           <p:cNvPr id="11" name="CuadroTexto 10">
             <a:extLst>
               <a:ext uri="{FF2B5EF4-FFF2-40B4-BE49-F238E27FC236}">
-                <a16:creationId xmlns:a16="http://schemas.microsoft.com/office/drawing/2014/main" id="{1C30CB73-ABC6-44CC-565E-93634F9E011C}"/>
+                <a16:creationId xmlns:a16="http://schemas.microsoft.com/office/drawing/2014/main" id="{9EFB9998-EF49-2DAD-5FF2-22B24B32D283}"/>
               </a:ext>
             </a:extLst>
           </p:cNvPr>
@@ -9590,7 +9590,7 @@
           <p:cNvPr id="12" name="CuadroTexto 11">
             <a:extLst>
               <a:ext uri="{FF2B5EF4-FFF2-40B4-BE49-F238E27FC236}">
-                <a16:creationId xmlns:a16="http://schemas.microsoft.com/office/drawing/2014/main" id="{917968D9-A624-0ACE-9308-6E8A18865E52}"/>
+                <a16:creationId xmlns:a16="http://schemas.microsoft.com/office/drawing/2014/main" id="{4064AAC2-204A-7895-580F-3031DB56C64B}"/>
               </a:ext>
             </a:extLst>
           </p:cNvPr>
@@ -9630,7 +9630,7 @@
           <p:cNvPr id="13" name="Rectángulo: esquinas redondeadas 12">
             <a:extLst>
               <a:ext uri="{FF2B5EF4-FFF2-40B4-BE49-F238E27FC236}">
-                <a16:creationId xmlns:a16="http://schemas.microsoft.com/office/drawing/2014/main" id="{6257EB0C-D9D0-C184-6E5B-8BC484D52FC8}"/>
+                <a16:creationId xmlns:a16="http://schemas.microsoft.com/office/drawing/2014/main" id="{AB38D09A-E356-2F15-46F3-C30A5EF8A291}"/>
               </a:ext>
             </a:extLst>
           </p:cNvPr>
@@ -9684,7 +9684,7 @@
           <p:cNvPr id="14" name="CuadroTexto 13">
             <a:extLst>
               <a:ext uri="{FF2B5EF4-FFF2-40B4-BE49-F238E27FC236}">
-                <a16:creationId xmlns:a16="http://schemas.microsoft.com/office/drawing/2014/main" id="{700A1AEA-3EC4-5724-0CEF-FA2ECD0BC3A8}"/>
+                <a16:creationId xmlns:a16="http://schemas.microsoft.com/office/drawing/2014/main" id="{CFAD3839-418F-29A8-1F51-C8C4180EE654}"/>
               </a:ext>
             </a:extLst>
           </p:cNvPr>
@@ -9724,7 +9724,7 @@
           <p:cNvPr id="15" name="CuadroTexto 14">
             <a:extLst>
               <a:ext uri="{FF2B5EF4-FFF2-40B4-BE49-F238E27FC236}">
-                <a16:creationId xmlns:a16="http://schemas.microsoft.com/office/drawing/2014/main" id="{4D9E5A2C-6A0C-B66E-456E-3AEC7D0D06FD}"/>
+                <a16:creationId xmlns:a16="http://schemas.microsoft.com/office/drawing/2014/main" id="{00AF941E-CE6A-35BA-0296-B0F61132C0ED}"/>
               </a:ext>
             </a:extLst>
           </p:cNvPr>
@@ -9762,7 +9762,7 @@
     </p:spTree>
     <p:extLst>
       <p:ext uri="{BB962C8B-B14F-4D97-AF65-F5344CB8AC3E}">
-        <p14:creationId xmlns:p14="http://schemas.microsoft.com/office/powerpoint/2010/main" val="58776312"/>
+        <p14:creationId xmlns:p14="http://schemas.microsoft.com/office/powerpoint/2010/main" val="3969965129"/>
       </p:ext>
     </p:extLst>
   </p:cSld>
@@ -9802,7 +9802,7 @@
           <p:cNvPr id="2" name="CuadroTexto 1">
             <a:extLst>
               <a:ext uri="{FF2B5EF4-FFF2-40B4-BE49-F238E27FC236}">
-                <a16:creationId xmlns:a16="http://schemas.microsoft.com/office/drawing/2014/main" id="{CD6894B9-7A09-9B95-3443-33E8638F14FF}"/>
+                <a16:creationId xmlns:a16="http://schemas.microsoft.com/office/drawing/2014/main" id="{89A44499-82FA-AD4A-8749-E056379C85C7}"/>
               </a:ext>
             </a:extLst>
           </p:cNvPr>
@@ -9842,7 +9842,7 @@
           <p:cNvPr id="3" name="CuadroTexto 2">
             <a:extLst>
               <a:ext uri="{FF2B5EF4-FFF2-40B4-BE49-F238E27FC236}">
-                <a16:creationId xmlns:a16="http://schemas.microsoft.com/office/drawing/2014/main" id="{724071AC-9EBD-DC2D-76A6-0CFCFD103EBA}"/>
+                <a16:creationId xmlns:a16="http://schemas.microsoft.com/office/drawing/2014/main" id="{01816A9D-F8FB-05A1-3843-06425420EA73}"/>
               </a:ext>
             </a:extLst>
           </p:cNvPr>
@@ -9882,7 +9882,7 @@
           <p:cNvPr id="4" name="CuadroTexto 3">
             <a:extLst>
               <a:ext uri="{FF2B5EF4-FFF2-40B4-BE49-F238E27FC236}">
-                <a16:creationId xmlns:a16="http://schemas.microsoft.com/office/drawing/2014/main" id="{956B5DDA-6B1D-C10D-D5B4-82EB3A0A89FB}"/>
+                <a16:creationId xmlns:a16="http://schemas.microsoft.com/office/drawing/2014/main" id="{0D18DDB0-6236-98AA-7A9D-AF510D6F084F}"/>
               </a:ext>
             </a:extLst>
           </p:cNvPr>
@@ -9922,7 +9922,7 @@
           <p:cNvPr id="6" name="Imagen 5">
             <a:extLst>
               <a:ext uri="{FF2B5EF4-FFF2-40B4-BE49-F238E27FC236}">
-                <a16:creationId xmlns:a16="http://schemas.microsoft.com/office/drawing/2014/main" id="{A96BE8CE-6DD6-ED45-A0AD-47E5EFE33617}"/>
+                <a16:creationId xmlns:a16="http://schemas.microsoft.com/office/drawing/2014/main" id="{2CA841F4-0C11-F86B-BD84-3949EC6B9A82}"/>
               </a:ext>
             </a:extLst>
           </p:cNvPr>
@@ -9963,7 +9963,7 @@
           <p:cNvPr id="7" name="CuadroTexto 6">
             <a:extLst>
               <a:ext uri="{FF2B5EF4-FFF2-40B4-BE49-F238E27FC236}">
-                <a16:creationId xmlns:a16="http://schemas.microsoft.com/office/drawing/2014/main" id="{6B58FB45-5211-D9EC-048A-E18C9E3845B2}"/>
+                <a16:creationId xmlns:a16="http://schemas.microsoft.com/office/drawing/2014/main" id="{4A4A7ECA-E196-B9FD-12A9-8A4BDB89A408}"/>
               </a:ext>
             </a:extLst>
           </p:cNvPr>
@@ -10080,7 +10080,7 @@
     </p:spTree>
     <p:extLst>
       <p:ext uri="{BB962C8B-B14F-4D97-AF65-F5344CB8AC3E}">
-        <p14:creationId xmlns:p14="http://schemas.microsoft.com/office/powerpoint/2010/main" val="1522771249"/>
+        <p14:creationId xmlns:p14="http://schemas.microsoft.com/office/powerpoint/2010/main" val="2886672413"/>
       </p:ext>
     </p:extLst>
   </p:cSld>
@@ -10120,7 +10120,7 @@
           <p:cNvPr id="2" name="CuadroTexto 1">
             <a:extLst>
               <a:ext uri="{FF2B5EF4-FFF2-40B4-BE49-F238E27FC236}">
-                <a16:creationId xmlns:a16="http://schemas.microsoft.com/office/drawing/2014/main" id="{6B937256-65C2-D3F4-12CB-5C1F28970552}"/>
+                <a16:creationId xmlns:a16="http://schemas.microsoft.com/office/drawing/2014/main" id="{9E6DC61B-22FB-E1A2-867F-2CD288BC8FBD}"/>
               </a:ext>
             </a:extLst>
           </p:cNvPr>
@@ -10160,7 +10160,7 @@
           <p:cNvPr id="3" name="CuadroTexto 2">
             <a:extLst>
               <a:ext uri="{FF2B5EF4-FFF2-40B4-BE49-F238E27FC236}">
-                <a16:creationId xmlns:a16="http://schemas.microsoft.com/office/drawing/2014/main" id="{3D1DA558-0C53-9A96-0172-9248F5125B1A}"/>
+                <a16:creationId xmlns:a16="http://schemas.microsoft.com/office/drawing/2014/main" id="{01FE1F73-538C-6D2B-85BA-01E5B4A1B367}"/>
               </a:ext>
             </a:extLst>
           </p:cNvPr>
@@ -10200,7 +10200,7 @@
           <p:cNvPr id="5" name="Imagen 4">
             <a:extLst>
               <a:ext uri="{FF2B5EF4-FFF2-40B4-BE49-F238E27FC236}">
-                <a16:creationId xmlns:a16="http://schemas.microsoft.com/office/drawing/2014/main" id="{B08FC2B9-DF8B-C8FD-E903-70C4CCAE42D0}"/>
+                <a16:creationId xmlns:a16="http://schemas.microsoft.com/office/drawing/2014/main" id="{DFD935C8-1B76-0A55-9A90-29C598D66E32}"/>
               </a:ext>
             </a:extLst>
           </p:cNvPr>
@@ -10241,7 +10241,7 @@
           <p:cNvPr id="6" name="CuadroTexto 5">
             <a:extLst>
               <a:ext uri="{FF2B5EF4-FFF2-40B4-BE49-F238E27FC236}">
-                <a16:creationId xmlns:a16="http://schemas.microsoft.com/office/drawing/2014/main" id="{77C21CA9-0A5D-01A1-051D-CB7C862EF4EA}"/>
+                <a16:creationId xmlns:a16="http://schemas.microsoft.com/office/drawing/2014/main" id="{900F6E40-7E9D-FA0E-85A4-DCF195F305C5}"/>
               </a:ext>
             </a:extLst>
           </p:cNvPr>
@@ -10281,7 +10281,7 @@
           <p:cNvPr id="7" name="CuadroTexto 6">
             <a:extLst>
               <a:ext uri="{FF2B5EF4-FFF2-40B4-BE49-F238E27FC236}">
-                <a16:creationId xmlns:a16="http://schemas.microsoft.com/office/drawing/2014/main" id="{22A5F55E-01D6-0AF1-E583-370E61672D15}"/>
+                <a16:creationId xmlns:a16="http://schemas.microsoft.com/office/drawing/2014/main" id="{D17C8830-9864-5F88-2B81-164A5855DA5F}"/>
               </a:ext>
             </a:extLst>
           </p:cNvPr>
@@ -10380,7 +10380,7 @@
     </p:spTree>
     <p:extLst>
       <p:ext uri="{BB962C8B-B14F-4D97-AF65-F5344CB8AC3E}">
-        <p14:creationId xmlns:p14="http://schemas.microsoft.com/office/powerpoint/2010/main" val="2474189906"/>
+        <p14:creationId xmlns:p14="http://schemas.microsoft.com/office/powerpoint/2010/main" val="197158713"/>
       </p:ext>
     </p:extLst>
   </p:cSld>
@@ -10420,7 +10420,7 @@
           <p:cNvPr id="2" name="CuadroTexto 1">
             <a:extLst>
               <a:ext uri="{FF2B5EF4-FFF2-40B4-BE49-F238E27FC236}">
-                <a16:creationId xmlns:a16="http://schemas.microsoft.com/office/drawing/2014/main" id="{DE924B84-F47B-DC01-D66B-8597F0544946}"/>
+                <a16:creationId xmlns:a16="http://schemas.microsoft.com/office/drawing/2014/main" id="{A4B90C54-59B9-29C1-FAB1-6D06BEC83C67}"/>
               </a:ext>
             </a:extLst>
           </p:cNvPr>
@@ -10460,7 +10460,7 @@
           <p:cNvPr id="3" name="CuadroTexto 2">
             <a:extLst>
               <a:ext uri="{FF2B5EF4-FFF2-40B4-BE49-F238E27FC236}">
-                <a16:creationId xmlns:a16="http://schemas.microsoft.com/office/drawing/2014/main" id="{5CCD5A62-B1D5-86D1-E2E2-6856DBFD033A}"/>
+                <a16:creationId xmlns:a16="http://schemas.microsoft.com/office/drawing/2014/main" id="{B4201F9F-E495-1A34-E813-7CEB643A52E1}"/>
               </a:ext>
             </a:extLst>
           </p:cNvPr>
@@ -10500,7 +10500,7 @@
           <p:cNvPr id="4" name="CuadroTexto 3">
             <a:extLst>
               <a:ext uri="{FF2B5EF4-FFF2-40B4-BE49-F238E27FC236}">
-                <a16:creationId xmlns:a16="http://schemas.microsoft.com/office/drawing/2014/main" id="{6237BC69-FB99-BB6B-A6CF-E358ACAB9EE2}"/>
+                <a16:creationId xmlns:a16="http://schemas.microsoft.com/office/drawing/2014/main" id="{94FC1F65-6350-4E16-6CA9-97F7559A79B2}"/>
               </a:ext>
             </a:extLst>
           </p:cNvPr>
@@ -10540,7 +10540,7 @@
           <p:cNvPr id="6" name="Imagen 5">
             <a:extLst>
               <a:ext uri="{FF2B5EF4-FFF2-40B4-BE49-F238E27FC236}">
-                <a16:creationId xmlns:a16="http://schemas.microsoft.com/office/drawing/2014/main" id="{0C211F6E-0CB9-616B-D161-7A43066C0FE4}"/>
+                <a16:creationId xmlns:a16="http://schemas.microsoft.com/office/drawing/2014/main" id="{18EF20F3-E98B-C65B-5E7B-11E87999C950}"/>
               </a:ext>
             </a:extLst>
           </p:cNvPr>
@@ -10581,7 +10581,7 @@
           <p:cNvPr id="7" name="Rectángulo: esquinas redondeadas 6">
             <a:extLst>
               <a:ext uri="{FF2B5EF4-FFF2-40B4-BE49-F238E27FC236}">
-                <a16:creationId xmlns:a16="http://schemas.microsoft.com/office/drawing/2014/main" id="{1D4C2ECB-527E-C92D-2CF7-C4A0507F42D2}"/>
+                <a16:creationId xmlns:a16="http://schemas.microsoft.com/office/drawing/2014/main" id="{90921B6D-BF60-4A96-32E7-556ABB908AAB}"/>
               </a:ext>
             </a:extLst>
           </p:cNvPr>
@@ -10635,7 +10635,7 @@
           <p:cNvPr id="8" name="CuadroTexto 7">
             <a:extLst>
               <a:ext uri="{FF2B5EF4-FFF2-40B4-BE49-F238E27FC236}">
-                <a16:creationId xmlns:a16="http://schemas.microsoft.com/office/drawing/2014/main" id="{0B705E7E-0D0B-D236-87BF-F998B6142B05}"/>
+                <a16:creationId xmlns:a16="http://schemas.microsoft.com/office/drawing/2014/main" id="{C1D36378-35A6-CE30-0376-63404731523E}"/>
               </a:ext>
             </a:extLst>
           </p:cNvPr>
@@ -10665,7 +10665,7 @@
                 </a:solidFill>
                 <a:latin typeface="Segoe UI" panose="020B0502040204020203" pitchFamily="34" charset="0"/>
               </a:rPr>
-              <a:t>20</a:t>
+              <a:t>3</a:t>
             </a:r>
           </a:p>
         </p:txBody>
@@ -10675,7 +10675,7 @@
           <p:cNvPr id="9" name="CuadroTexto 8">
             <a:extLst>
               <a:ext uri="{FF2B5EF4-FFF2-40B4-BE49-F238E27FC236}">
-                <a16:creationId xmlns:a16="http://schemas.microsoft.com/office/drawing/2014/main" id="{19ED82ED-2EFC-6CC0-F648-303E0681C4C1}"/>
+                <a16:creationId xmlns:a16="http://schemas.microsoft.com/office/drawing/2014/main" id="{29563791-87A4-F2A8-21E7-A2B85BEEDA13}"/>
               </a:ext>
             </a:extLst>
           </p:cNvPr>
@@ -10715,7 +10715,7 @@
           <p:cNvPr id="10" name="Rectángulo: esquinas redondeadas 9">
             <a:extLst>
               <a:ext uri="{FF2B5EF4-FFF2-40B4-BE49-F238E27FC236}">
-                <a16:creationId xmlns:a16="http://schemas.microsoft.com/office/drawing/2014/main" id="{1DE4E781-9C1B-E4B5-FD86-D174387B19A1}"/>
+                <a16:creationId xmlns:a16="http://schemas.microsoft.com/office/drawing/2014/main" id="{A7B22E91-588B-FC7C-0E00-7B1C1C793752}"/>
               </a:ext>
             </a:extLst>
           </p:cNvPr>
@@ -10769,7 +10769,7 @@
           <p:cNvPr id="11" name="CuadroTexto 10">
             <a:extLst>
               <a:ext uri="{FF2B5EF4-FFF2-40B4-BE49-F238E27FC236}">
-                <a16:creationId xmlns:a16="http://schemas.microsoft.com/office/drawing/2014/main" id="{F03CE05D-E38E-6F32-0775-3951BDF6BF85}"/>
+                <a16:creationId xmlns:a16="http://schemas.microsoft.com/office/drawing/2014/main" id="{8196D7ED-BA84-4FF1-2EA1-86A31C7DCA9C}"/>
               </a:ext>
             </a:extLst>
           </p:cNvPr>
@@ -10799,7 +10799,7 @@
                 </a:solidFill>
                 <a:latin typeface="Segoe UI" panose="020B0502040204020203" pitchFamily="34" charset="0"/>
               </a:rPr>
-              <a:t>4</a:t>
+              <a:t>3</a:t>
             </a:r>
           </a:p>
         </p:txBody>
@@ -10809,7 +10809,7 @@
           <p:cNvPr id="12" name="CuadroTexto 11">
             <a:extLst>
               <a:ext uri="{FF2B5EF4-FFF2-40B4-BE49-F238E27FC236}">
-                <a16:creationId xmlns:a16="http://schemas.microsoft.com/office/drawing/2014/main" id="{0CAFEFC4-6D7F-6657-1D86-B897FCC65027}"/>
+                <a16:creationId xmlns:a16="http://schemas.microsoft.com/office/drawing/2014/main" id="{C42F4661-0F9E-E635-545C-CF94776D7859}"/>
               </a:ext>
             </a:extLst>
           </p:cNvPr>
@@ -10849,7 +10849,7 @@
           <p:cNvPr id="13" name="Rectángulo: esquinas redondeadas 12">
             <a:extLst>
               <a:ext uri="{FF2B5EF4-FFF2-40B4-BE49-F238E27FC236}">
-                <a16:creationId xmlns:a16="http://schemas.microsoft.com/office/drawing/2014/main" id="{C0694DD7-D23F-964D-BDC0-D9661DFF88CB}"/>
+                <a16:creationId xmlns:a16="http://schemas.microsoft.com/office/drawing/2014/main" id="{F35086C4-5C5A-A103-567B-81B3845CC0F9}"/>
               </a:ext>
             </a:extLst>
           </p:cNvPr>
@@ -10903,7 +10903,7 @@
           <p:cNvPr id="14" name="CuadroTexto 13">
             <a:extLst>
               <a:ext uri="{FF2B5EF4-FFF2-40B4-BE49-F238E27FC236}">
-                <a16:creationId xmlns:a16="http://schemas.microsoft.com/office/drawing/2014/main" id="{4F53BB6E-3CE6-BE1D-D40F-FBBE7A1F69DA}"/>
+                <a16:creationId xmlns:a16="http://schemas.microsoft.com/office/drawing/2014/main" id="{A624BE0A-6486-09A5-D1F6-BC4DA4479ABB}"/>
               </a:ext>
             </a:extLst>
           </p:cNvPr>
@@ -10943,7 +10943,7 @@
           <p:cNvPr id="15" name="CuadroTexto 14">
             <a:extLst>
               <a:ext uri="{FF2B5EF4-FFF2-40B4-BE49-F238E27FC236}">
-                <a16:creationId xmlns:a16="http://schemas.microsoft.com/office/drawing/2014/main" id="{7647B05A-A1B2-4D0D-33A7-57439AFD4287}"/>
+                <a16:creationId xmlns:a16="http://schemas.microsoft.com/office/drawing/2014/main" id="{464CC48B-2885-0574-D2A6-FD83124CF8D7}"/>
               </a:ext>
             </a:extLst>
           </p:cNvPr>
@@ -10981,7 +10981,7 @@
     </p:spTree>
     <p:extLst>
       <p:ext uri="{BB962C8B-B14F-4D97-AF65-F5344CB8AC3E}">
-        <p14:creationId xmlns:p14="http://schemas.microsoft.com/office/powerpoint/2010/main" val="415349331"/>
+        <p14:creationId xmlns:p14="http://schemas.microsoft.com/office/powerpoint/2010/main" val="1870687457"/>
       </p:ext>
     </p:extLst>
   </p:cSld>
@@ -11021,7 +11021,7 @@
           <p:cNvPr id="2" name="CuadroTexto 1">
             <a:extLst>
               <a:ext uri="{FF2B5EF4-FFF2-40B4-BE49-F238E27FC236}">
-                <a16:creationId xmlns:a16="http://schemas.microsoft.com/office/drawing/2014/main" id="{033B6185-2DF4-B3B1-8E9A-F2D4F92F2A18}"/>
+                <a16:creationId xmlns:a16="http://schemas.microsoft.com/office/drawing/2014/main" id="{DDA2E44B-4012-D66E-6975-B2B82BC52A62}"/>
               </a:ext>
             </a:extLst>
           </p:cNvPr>
@@ -11061,7 +11061,7 @@
           <p:cNvPr id="3" name="CuadroTexto 2">
             <a:extLst>
               <a:ext uri="{FF2B5EF4-FFF2-40B4-BE49-F238E27FC236}">
-                <a16:creationId xmlns:a16="http://schemas.microsoft.com/office/drawing/2014/main" id="{43215777-F41E-4C87-F27F-5ED5F66E3244}"/>
+                <a16:creationId xmlns:a16="http://schemas.microsoft.com/office/drawing/2014/main" id="{93D4E4D9-0C09-D458-F63D-CE83E122ABA4}"/>
               </a:ext>
             </a:extLst>
           </p:cNvPr>
@@ -11101,7 +11101,7 @@
           <p:cNvPr id="5" name="Imagen 4">
             <a:extLst>
               <a:ext uri="{FF2B5EF4-FFF2-40B4-BE49-F238E27FC236}">
-                <a16:creationId xmlns:a16="http://schemas.microsoft.com/office/drawing/2014/main" id="{EB9A3945-4CA6-082C-858F-D90AA64C8AEC}"/>
+                <a16:creationId xmlns:a16="http://schemas.microsoft.com/office/drawing/2014/main" id="{18BEFF83-73E1-6C40-6A3C-93391239A02B}"/>
               </a:ext>
             </a:extLst>
           </p:cNvPr>
@@ -11142,7 +11142,7 @@
           <p:cNvPr id="6" name="CuadroTexto 5">
             <a:extLst>
               <a:ext uri="{FF2B5EF4-FFF2-40B4-BE49-F238E27FC236}">
-                <a16:creationId xmlns:a16="http://schemas.microsoft.com/office/drawing/2014/main" id="{A48C1D83-A83C-BF1F-70C9-21016D01D0C7}"/>
+                <a16:creationId xmlns:a16="http://schemas.microsoft.com/office/drawing/2014/main" id="{6DC0D98C-C30B-C13D-83C8-7ACD64420E8C}"/>
               </a:ext>
             </a:extLst>
           </p:cNvPr>
@@ -11241,7 +11241,7 @@
     </p:spTree>
     <p:extLst>
       <p:ext uri="{BB962C8B-B14F-4D97-AF65-F5344CB8AC3E}">
-        <p14:creationId xmlns:p14="http://schemas.microsoft.com/office/powerpoint/2010/main" val="3417312891"/>
+        <p14:creationId xmlns:p14="http://schemas.microsoft.com/office/powerpoint/2010/main" val="2218698971"/>
       </p:ext>
     </p:extLst>
   </p:cSld>
@@ -11281,7 +11281,7 @@
           <p:cNvPr id="2" name="CuadroTexto 1">
             <a:extLst>
               <a:ext uri="{FF2B5EF4-FFF2-40B4-BE49-F238E27FC236}">
-                <a16:creationId xmlns:a16="http://schemas.microsoft.com/office/drawing/2014/main" id="{2F0FD4DE-A572-69EC-1608-A148201CE7E2}"/>
+                <a16:creationId xmlns:a16="http://schemas.microsoft.com/office/drawing/2014/main" id="{B1C050A0-6921-B6D2-E5BC-322E6A06C535}"/>
               </a:ext>
             </a:extLst>
           </p:cNvPr>
@@ -11321,7 +11321,7 @@
           <p:cNvPr id="3" name="CuadroTexto 2">
             <a:extLst>
               <a:ext uri="{FF2B5EF4-FFF2-40B4-BE49-F238E27FC236}">
-                <a16:creationId xmlns:a16="http://schemas.microsoft.com/office/drawing/2014/main" id="{54C9808F-684E-9BD9-488C-77D40B2CD85F}"/>
+                <a16:creationId xmlns:a16="http://schemas.microsoft.com/office/drawing/2014/main" id="{D1F9578E-E5F3-F489-7A6C-0F09A15693A0}"/>
               </a:ext>
             </a:extLst>
           </p:cNvPr>
@@ -11361,7 +11361,7 @@
           <p:cNvPr id="4" name="CuadroTexto 3">
             <a:extLst>
               <a:ext uri="{FF2B5EF4-FFF2-40B4-BE49-F238E27FC236}">
-                <a16:creationId xmlns:a16="http://schemas.microsoft.com/office/drawing/2014/main" id="{628DD375-7F2F-94BA-46C2-EF4033BBC827}"/>
+                <a16:creationId xmlns:a16="http://schemas.microsoft.com/office/drawing/2014/main" id="{990C8A9D-CD87-1FFD-5E15-65B60B1DBB25}"/>
               </a:ext>
             </a:extLst>
           </p:cNvPr>
@@ -11401,7 +11401,7 @@
           <p:cNvPr id="6" name="Imagen 5">
             <a:extLst>
               <a:ext uri="{FF2B5EF4-FFF2-40B4-BE49-F238E27FC236}">
-                <a16:creationId xmlns:a16="http://schemas.microsoft.com/office/drawing/2014/main" id="{95C57F26-8802-0313-AE41-98E1383A3C8F}"/>
+                <a16:creationId xmlns:a16="http://schemas.microsoft.com/office/drawing/2014/main" id="{F69E3CA6-3A0C-BE56-5837-2AB59D2E3372}"/>
               </a:ext>
             </a:extLst>
           </p:cNvPr>
@@ -11442,7 +11442,7 @@
           <p:cNvPr id="7" name="Rectángulo: esquinas redondeadas 6">
             <a:extLst>
               <a:ext uri="{FF2B5EF4-FFF2-40B4-BE49-F238E27FC236}">
-                <a16:creationId xmlns:a16="http://schemas.microsoft.com/office/drawing/2014/main" id="{A0B5CC5D-89EF-79C9-4AF4-E897D2E70ACB}"/>
+                <a16:creationId xmlns:a16="http://schemas.microsoft.com/office/drawing/2014/main" id="{12E779A8-11E5-B8DE-D05C-84B751D5CE51}"/>
               </a:ext>
             </a:extLst>
           </p:cNvPr>
@@ -11496,7 +11496,7 @@
           <p:cNvPr id="8" name="CuadroTexto 7">
             <a:extLst>
               <a:ext uri="{FF2B5EF4-FFF2-40B4-BE49-F238E27FC236}">
-                <a16:creationId xmlns:a16="http://schemas.microsoft.com/office/drawing/2014/main" id="{DB8DFE88-AC85-6507-44A3-331D75BCEE55}"/>
+                <a16:creationId xmlns:a16="http://schemas.microsoft.com/office/drawing/2014/main" id="{B7F5F231-6468-A042-3C34-FAD44DBFA31F}"/>
               </a:ext>
             </a:extLst>
           </p:cNvPr>
@@ -11536,7 +11536,7 @@
           <p:cNvPr id="9" name="CuadroTexto 8">
             <a:extLst>
               <a:ext uri="{FF2B5EF4-FFF2-40B4-BE49-F238E27FC236}">
-                <a16:creationId xmlns:a16="http://schemas.microsoft.com/office/drawing/2014/main" id="{8D288753-8414-2AC0-F936-58787869B2F6}"/>
+                <a16:creationId xmlns:a16="http://schemas.microsoft.com/office/drawing/2014/main" id="{D84EEE23-CEDA-1DAE-11AC-C5FD47E0FA98}"/>
               </a:ext>
             </a:extLst>
           </p:cNvPr>
@@ -11574,7 +11574,7 @@
     </p:spTree>
     <p:extLst>
       <p:ext uri="{BB962C8B-B14F-4D97-AF65-F5344CB8AC3E}">
-        <p14:creationId xmlns:p14="http://schemas.microsoft.com/office/powerpoint/2010/main" val="1965659088"/>
+        <p14:creationId xmlns:p14="http://schemas.microsoft.com/office/powerpoint/2010/main" val="3688929477"/>
       </p:ext>
     </p:extLst>
   </p:cSld>
@@ -11614,7 +11614,7 @@
           <p:cNvPr id="2" name="CuadroTexto 1">
             <a:extLst>
               <a:ext uri="{FF2B5EF4-FFF2-40B4-BE49-F238E27FC236}">
-                <a16:creationId xmlns:a16="http://schemas.microsoft.com/office/drawing/2014/main" id="{180B07DD-CC23-8706-3431-86AD8212814B}"/>
+                <a16:creationId xmlns:a16="http://schemas.microsoft.com/office/drawing/2014/main" id="{49C87107-47D5-FE8D-53D3-4804744F9A18}"/>
               </a:ext>
             </a:extLst>
           </p:cNvPr>
@@ -11654,7 +11654,7 @@
           <p:cNvPr id="3" name="CuadroTexto 2">
             <a:extLst>
               <a:ext uri="{FF2B5EF4-FFF2-40B4-BE49-F238E27FC236}">
-                <a16:creationId xmlns:a16="http://schemas.microsoft.com/office/drawing/2014/main" id="{728EEFA2-265D-AC07-5F82-F0037E3AC657}"/>
+                <a16:creationId xmlns:a16="http://schemas.microsoft.com/office/drawing/2014/main" id="{A8838B2B-EE8B-4F9D-3A7D-F40AE960843F}"/>
               </a:ext>
             </a:extLst>
           </p:cNvPr>
@@ -11694,7 +11694,7 @@
           <p:cNvPr id="4" name="CuadroTexto 3">
             <a:extLst>
               <a:ext uri="{FF2B5EF4-FFF2-40B4-BE49-F238E27FC236}">
-                <a16:creationId xmlns:a16="http://schemas.microsoft.com/office/drawing/2014/main" id="{BA9C0075-714F-CC23-DC53-DBA99F67999C}"/>
+                <a16:creationId xmlns:a16="http://schemas.microsoft.com/office/drawing/2014/main" id="{5020C065-38A9-66E8-A3E3-560223338CC8}"/>
               </a:ext>
             </a:extLst>
           </p:cNvPr>
@@ -11734,7 +11734,7 @@
           <p:cNvPr id="5" name="Rectángulo: esquinas redondeadas 4">
             <a:extLst>
               <a:ext uri="{FF2B5EF4-FFF2-40B4-BE49-F238E27FC236}">
-                <a16:creationId xmlns:a16="http://schemas.microsoft.com/office/drawing/2014/main" id="{60C19EB6-6556-325A-BC62-46F8CCBB7F3D}"/>
+                <a16:creationId xmlns:a16="http://schemas.microsoft.com/office/drawing/2014/main" id="{CA005563-89EA-808E-66D0-B732EA8AB31E}"/>
               </a:ext>
             </a:extLst>
           </p:cNvPr>
@@ -11788,7 +11788,7 @@
           <p:cNvPr id="6" name="CuadroTexto 5">
             <a:extLst>
               <a:ext uri="{FF2B5EF4-FFF2-40B4-BE49-F238E27FC236}">
-                <a16:creationId xmlns:a16="http://schemas.microsoft.com/office/drawing/2014/main" id="{CC6FC31A-C276-07A6-83B1-ECA11B3FD75E}"/>
+                <a16:creationId xmlns:a16="http://schemas.microsoft.com/office/drawing/2014/main" id="{F3C41619-89A7-4796-5D5B-A388B8F27FDF}"/>
               </a:ext>
             </a:extLst>
           </p:cNvPr>
@@ -11828,7 +11828,7 @@
           <p:cNvPr id="7" name="CuadroTexto 6">
             <a:extLst>
               <a:ext uri="{FF2B5EF4-FFF2-40B4-BE49-F238E27FC236}">
-                <a16:creationId xmlns:a16="http://schemas.microsoft.com/office/drawing/2014/main" id="{6B54BA2B-08B6-BE01-F079-60061C08C708}"/>
+                <a16:creationId xmlns:a16="http://schemas.microsoft.com/office/drawing/2014/main" id="{8751DD6A-2E23-0880-F2B8-F6A50A3459AD}"/>
               </a:ext>
             </a:extLst>
           </p:cNvPr>
@@ -11868,7 +11868,7 @@
           <p:cNvPr id="8" name="Rectángulo: esquinas redondeadas 7">
             <a:extLst>
               <a:ext uri="{FF2B5EF4-FFF2-40B4-BE49-F238E27FC236}">
-                <a16:creationId xmlns:a16="http://schemas.microsoft.com/office/drawing/2014/main" id="{DEBF0AD2-CDF2-F01F-70D1-E91CD7A7DD7B}"/>
+                <a16:creationId xmlns:a16="http://schemas.microsoft.com/office/drawing/2014/main" id="{578B8247-503E-4F06-3EDD-AE07D2D3EB52}"/>
               </a:ext>
             </a:extLst>
           </p:cNvPr>
@@ -11922,7 +11922,7 @@
           <p:cNvPr id="9" name="CuadroTexto 8">
             <a:extLst>
               <a:ext uri="{FF2B5EF4-FFF2-40B4-BE49-F238E27FC236}">
-                <a16:creationId xmlns:a16="http://schemas.microsoft.com/office/drawing/2014/main" id="{68967BEB-B7E1-E56D-8A03-786CB7503607}"/>
+                <a16:creationId xmlns:a16="http://schemas.microsoft.com/office/drawing/2014/main" id="{1232DF11-5F2E-8CA0-850C-E8C964B528F1}"/>
               </a:ext>
             </a:extLst>
           </p:cNvPr>
@@ -11962,7 +11962,7 @@
           <p:cNvPr id="10" name="CuadroTexto 9">
             <a:extLst>
               <a:ext uri="{FF2B5EF4-FFF2-40B4-BE49-F238E27FC236}">
-                <a16:creationId xmlns:a16="http://schemas.microsoft.com/office/drawing/2014/main" id="{8E3F8F6D-FD23-7789-E9ED-1063D1A95BCD}"/>
+                <a16:creationId xmlns:a16="http://schemas.microsoft.com/office/drawing/2014/main" id="{3ACD2940-8FD0-C488-D977-677F9130B1EB}"/>
               </a:ext>
             </a:extLst>
           </p:cNvPr>
@@ -12002,7 +12002,7 @@
           <p:cNvPr id="11" name="Rectángulo: esquinas redondeadas 10">
             <a:extLst>
               <a:ext uri="{FF2B5EF4-FFF2-40B4-BE49-F238E27FC236}">
-                <a16:creationId xmlns:a16="http://schemas.microsoft.com/office/drawing/2014/main" id="{3333A217-60C6-F9DA-7DE5-3273F9DFAE2B}"/>
+                <a16:creationId xmlns:a16="http://schemas.microsoft.com/office/drawing/2014/main" id="{15CBE82E-1E6B-A600-D53B-93CFF6F37C14}"/>
               </a:ext>
             </a:extLst>
           </p:cNvPr>
@@ -12056,7 +12056,7 @@
           <p:cNvPr id="12" name="CuadroTexto 11">
             <a:extLst>
               <a:ext uri="{FF2B5EF4-FFF2-40B4-BE49-F238E27FC236}">
-                <a16:creationId xmlns:a16="http://schemas.microsoft.com/office/drawing/2014/main" id="{1ED88DF8-8179-2C5F-A0A9-73DBD73DCDE0}"/>
+                <a16:creationId xmlns:a16="http://schemas.microsoft.com/office/drawing/2014/main" id="{86DBF4D4-AF3C-1CAE-AAE3-7BC33D03EEB5}"/>
               </a:ext>
             </a:extLst>
           </p:cNvPr>
@@ -12096,7 +12096,7 @@
           <p:cNvPr id="13" name="CuadroTexto 12">
             <a:extLst>
               <a:ext uri="{FF2B5EF4-FFF2-40B4-BE49-F238E27FC236}">
-                <a16:creationId xmlns:a16="http://schemas.microsoft.com/office/drawing/2014/main" id="{3B112D6E-CB2E-0EFB-19C3-9726970F7664}"/>
+                <a16:creationId xmlns:a16="http://schemas.microsoft.com/office/drawing/2014/main" id="{30321472-DAB2-7B8C-BB47-82C42B9E4A11}"/>
               </a:ext>
             </a:extLst>
           </p:cNvPr>
@@ -12136,7 +12136,7 @@
           <p:cNvPr id="14" name="Rectángulo: esquinas redondeadas 13">
             <a:extLst>
               <a:ext uri="{FF2B5EF4-FFF2-40B4-BE49-F238E27FC236}">
-                <a16:creationId xmlns:a16="http://schemas.microsoft.com/office/drawing/2014/main" id="{D842ED75-80EE-6CE7-5FA0-6BC71FE444A2}"/>
+                <a16:creationId xmlns:a16="http://schemas.microsoft.com/office/drawing/2014/main" id="{2AD96489-76F8-B559-03A5-362580CF8A66}"/>
               </a:ext>
             </a:extLst>
           </p:cNvPr>
@@ -12190,7 +12190,7 @@
           <p:cNvPr id="15" name="CuadroTexto 14">
             <a:extLst>
               <a:ext uri="{FF2B5EF4-FFF2-40B4-BE49-F238E27FC236}">
-                <a16:creationId xmlns:a16="http://schemas.microsoft.com/office/drawing/2014/main" id="{314AF3F0-407F-5076-6C71-0534F90D1895}"/>
+                <a16:creationId xmlns:a16="http://schemas.microsoft.com/office/drawing/2014/main" id="{1642DD86-CB6A-421C-E05C-4E3CEC17DC81}"/>
               </a:ext>
             </a:extLst>
           </p:cNvPr>
@@ -12230,7 +12230,7 @@
           <p:cNvPr id="16" name="CuadroTexto 15">
             <a:extLst>
               <a:ext uri="{FF2B5EF4-FFF2-40B4-BE49-F238E27FC236}">
-                <a16:creationId xmlns:a16="http://schemas.microsoft.com/office/drawing/2014/main" id="{C0BA1C4D-F3EC-3959-933A-B3D1DADBB214}"/>
+                <a16:creationId xmlns:a16="http://schemas.microsoft.com/office/drawing/2014/main" id="{F6845773-DC4E-F31C-1C48-67C044F73A55}"/>
               </a:ext>
             </a:extLst>
           </p:cNvPr>
@@ -12270,7 +12270,7 @@
           <p:cNvPr id="17" name="Rectángulo: esquinas redondeadas 16">
             <a:extLst>
               <a:ext uri="{FF2B5EF4-FFF2-40B4-BE49-F238E27FC236}">
-                <a16:creationId xmlns:a16="http://schemas.microsoft.com/office/drawing/2014/main" id="{BE43186C-06C5-4633-B185-1519E17A5942}"/>
+                <a16:creationId xmlns:a16="http://schemas.microsoft.com/office/drawing/2014/main" id="{84B96BE3-B71E-71C8-C5CB-0FDA0651AFB8}"/>
               </a:ext>
             </a:extLst>
           </p:cNvPr>
@@ -12324,7 +12324,7 @@
           <p:cNvPr id="18" name="CuadroTexto 17">
             <a:extLst>
               <a:ext uri="{FF2B5EF4-FFF2-40B4-BE49-F238E27FC236}">
-                <a16:creationId xmlns:a16="http://schemas.microsoft.com/office/drawing/2014/main" id="{348EC1A2-FF8F-191C-74D6-0CA65E360857}"/>
+                <a16:creationId xmlns:a16="http://schemas.microsoft.com/office/drawing/2014/main" id="{7856000A-BCF8-C231-784A-B191622AB285}"/>
               </a:ext>
             </a:extLst>
           </p:cNvPr>
@@ -12364,7 +12364,7 @@
           <p:cNvPr id="19" name="CuadroTexto 18">
             <a:extLst>
               <a:ext uri="{FF2B5EF4-FFF2-40B4-BE49-F238E27FC236}">
-                <a16:creationId xmlns:a16="http://schemas.microsoft.com/office/drawing/2014/main" id="{347B51CF-EB24-88AC-F4AC-00F45C4C5859}"/>
+                <a16:creationId xmlns:a16="http://schemas.microsoft.com/office/drawing/2014/main" id="{8C446BC0-B203-434D-5198-E611C650F74F}"/>
               </a:ext>
             </a:extLst>
           </p:cNvPr>
@@ -12404,7 +12404,7 @@
           <p:cNvPr id="20" name="Rectángulo: esquinas redondeadas 19">
             <a:extLst>
               <a:ext uri="{FF2B5EF4-FFF2-40B4-BE49-F238E27FC236}">
-                <a16:creationId xmlns:a16="http://schemas.microsoft.com/office/drawing/2014/main" id="{4F3917CC-2989-10E3-5A63-461C4CADE5B8}"/>
+                <a16:creationId xmlns:a16="http://schemas.microsoft.com/office/drawing/2014/main" id="{8DF8A7DA-98AC-FCEF-AECF-F42CEBA93481}"/>
               </a:ext>
             </a:extLst>
           </p:cNvPr>
@@ -12458,7 +12458,7 @@
           <p:cNvPr id="21" name="CuadroTexto 20">
             <a:extLst>
               <a:ext uri="{FF2B5EF4-FFF2-40B4-BE49-F238E27FC236}">
-                <a16:creationId xmlns:a16="http://schemas.microsoft.com/office/drawing/2014/main" id="{3AF1EBAA-28C0-396A-C89C-E8851E4224F6}"/>
+                <a16:creationId xmlns:a16="http://schemas.microsoft.com/office/drawing/2014/main" id="{85D7ED3A-36CF-256D-0106-2D9E605346B9}"/>
               </a:ext>
             </a:extLst>
           </p:cNvPr>
@@ -12498,7 +12498,7 @@
           <p:cNvPr id="22" name="CuadroTexto 21">
             <a:extLst>
               <a:ext uri="{FF2B5EF4-FFF2-40B4-BE49-F238E27FC236}">
-                <a16:creationId xmlns:a16="http://schemas.microsoft.com/office/drawing/2014/main" id="{CC5F6D84-BE3E-CD72-653E-18210851BA33}"/>
+                <a16:creationId xmlns:a16="http://schemas.microsoft.com/office/drawing/2014/main" id="{E45EC501-4E58-10A6-A758-C90D025FB9ED}"/>
               </a:ext>
             </a:extLst>
           </p:cNvPr>
@@ -12536,7 +12536,7 @@
     </p:spTree>
     <p:extLst>
       <p:ext uri="{BB962C8B-B14F-4D97-AF65-F5344CB8AC3E}">
-        <p14:creationId xmlns:p14="http://schemas.microsoft.com/office/powerpoint/2010/main" val="2556743298"/>
+        <p14:creationId xmlns:p14="http://schemas.microsoft.com/office/powerpoint/2010/main" val="3281172835"/>
       </p:ext>
     </p:extLst>
   </p:cSld>

--- a/docs/presentacion-defensa-final.pptx
+++ b/docs/presentacion-defensa-final.pptx
@@ -146,7 +146,7 @@
           <p:cNvPr id="2" name="Título 1">
             <a:extLst>
               <a:ext uri="{FF2B5EF4-FFF2-40B4-BE49-F238E27FC236}">
-                <a16:creationId xmlns:a16="http://schemas.microsoft.com/office/drawing/2014/main" id="{F747E9A5-A69C-AF31-D358-E9AF2C95B4F2}"/>
+                <a16:creationId xmlns:a16="http://schemas.microsoft.com/office/drawing/2014/main" id="{AA1424A8-F5C0-2E5A-7814-8D5A788F2C41}"/>
               </a:ext>
             </a:extLst>
           </p:cNvPr>
@@ -183,7 +183,7 @@
           <p:cNvPr id="3" name="Subtítulo 2">
             <a:extLst>
               <a:ext uri="{FF2B5EF4-FFF2-40B4-BE49-F238E27FC236}">
-                <a16:creationId xmlns:a16="http://schemas.microsoft.com/office/drawing/2014/main" id="{9611385A-0F7B-2109-1713-B5B2D2EDC792}"/>
+                <a16:creationId xmlns:a16="http://schemas.microsoft.com/office/drawing/2014/main" id="{0DC4E564-14D9-30EF-F5A4-D8BE222FAF82}"/>
               </a:ext>
             </a:extLst>
           </p:cNvPr>
@@ -253,7 +253,7 @@
           <p:cNvPr id="4" name="Marcador de fecha 3">
             <a:extLst>
               <a:ext uri="{FF2B5EF4-FFF2-40B4-BE49-F238E27FC236}">
-                <a16:creationId xmlns:a16="http://schemas.microsoft.com/office/drawing/2014/main" id="{C52BBF9F-F302-7E77-541C-38E060120F29}"/>
+                <a16:creationId xmlns:a16="http://schemas.microsoft.com/office/drawing/2014/main" id="{DE26D437-9BD3-D275-C312-7EFE00BC0C02}"/>
               </a:ext>
             </a:extLst>
           </p:cNvPr>
@@ -269,9 +269,9 @@
           <a:bodyPr/>
           <a:lstStyle/>
           <a:p>
-            <a:fld id="{7DF9D857-2BC1-4ECA-A48E-C0419EF44063}" type="datetimeFigureOut">
+            <a:fld id="{3594F67B-593D-4384-8F95-2FBEEBEEB27A}" type="datetimeFigureOut">
               <a:rPr lang="es-ES" smtClean="0"/>
-              <a:t>27/05/2026</a:t>
+              <a:t>01/06/2026</a:t>
             </a:fld>
             <a:endParaRPr lang="es-ES"/>
           </a:p>
@@ -282,7 +282,7 @@
           <p:cNvPr id="5" name="Marcador de pie de página 4">
             <a:extLst>
               <a:ext uri="{FF2B5EF4-FFF2-40B4-BE49-F238E27FC236}">
-                <a16:creationId xmlns:a16="http://schemas.microsoft.com/office/drawing/2014/main" id="{93E919BF-FBDE-8D86-3269-B333EDF00920}"/>
+                <a16:creationId xmlns:a16="http://schemas.microsoft.com/office/drawing/2014/main" id="{5A8AD1E9-22FA-53E1-4A6E-34128EB13376}"/>
               </a:ext>
             </a:extLst>
           </p:cNvPr>
@@ -307,7 +307,7 @@
           <p:cNvPr id="6" name="Marcador de número de diapositiva 5">
             <a:extLst>
               <a:ext uri="{FF2B5EF4-FFF2-40B4-BE49-F238E27FC236}">
-                <a16:creationId xmlns:a16="http://schemas.microsoft.com/office/drawing/2014/main" id="{8A557309-3833-7F7A-228A-CF7BFD6250BE}"/>
+                <a16:creationId xmlns:a16="http://schemas.microsoft.com/office/drawing/2014/main" id="{B8FADB54-69CA-37C3-9538-2AC92ED7D55D}"/>
               </a:ext>
             </a:extLst>
           </p:cNvPr>
@@ -323,7 +323,7 @@
           <a:bodyPr/>
           <a:lstStyle/>
           <a:p>
-            <a:fld id="{AA515A41-34E0-4B8A-BFF5-025DE5A27467}" type="slidenum">
+            <a:fld id="{3E216418-6303-4DF4-80EB-715B8707D44E}" type="slidenum">
               <a:rPr lang="es-ES" smtClean="0"/>
               <a:t>‹Nº›</a:t>
             </a:fld>
@@ -334,7 +334,7 @@
     </p:spTree>
     <p:extLst>
       <p:ext uri="{BB962C8B-B14F-4D97-AF65-F5344CB8AC3E}">
-        <p14:creationId xmlns:p14="http://schemas.microsoft.com/office/powerpoint/2010/main" val="1096258657"/>
+        <p14:creationId xmlns:p14="http://schemas.microsoft.com/office/powerpoint/2010/main" val="2455286512"/>
       </p:ext>
     </p:extLst>
   </p:cSld>
@@ -366,7 +366,7 @@
           <p:cNvPr id="2" name="Título 1">
             <a:extLst>
               <a:ext uri="{FF2B5EF4-FFF2-40B4-BE49-F238E27FC236}">
-                <a16:creationId xmlns:a16="http://schemas.microsoft.com/office/drawing/2014/main" id="{54E1A38A-0F12-FD41-A2C0-70604426A558}"/>
+                <a16:creationId xmlns:a16="http://schemas.microsoft.com/office/drawing/2014/main" id="{57C83AF2-7E6C-0F9E-3C1D-65AA33168D3D}"/>
               </a:ext>
             </a:extLst>
           </p:cNvPr>
@@ -394,7 +394,7 @@
           <p:cNvPr id="3" name="Marcador de texto vertical 2">
             <a:extLst>
               <a:ext uri="{FF2B5EF4-FFF2-40B4-BE49-F238E27FC236}">
-                <a16:creationId xmlns:a16="http://schemas.microsoft.com/office/drawing/2014/main" id="{DBE13BC4-A7FA-7D61-9FFB-D416C20899A3}"/>
+                <a16:creationId xmlns:a16="http://schemas.microsoft.com/office/drawing/2014/main" id="{24546AAA-CAA5-A831-F197-F57E1E3EBDBB}"/>
               </a:ext>
             </a:extLst>
           </p:cNvPr>
@@ -451,7 +451,7 @@
           <p:cNvPr id="4" name="Marcador de fecha 3">
             <a:extLst>
               <a:ext uri="{FF2B5EF4-FFF2-40B4-BE49-F238E27FC236}">
-                <a16:creationId xmlns:a16="http://schemas.microsoft.com/office/drawing/2014/main" id="{70B0F91E-D46E-5A6F-E9C1-DDC7DA6F64B7}"/>
+                <a16:creationId xmlns:a16="http://schemas.microsoft.com/office/drawing/2014/main" id="{93A01D50-6F6A-F01F-DFFE-49C0E92DD415}"/>
               </a:ext>
             </a:extLst>
           </p:cNvPr>
@@ -467,9 +467,9 @@
           <a:bodyPr/>
           <a:lstStyle/>
           <a:p>
-            <a:fld id="{7DF9D857-2BC1-4ECA-A48E-C0419EF44063}" type="datetimeFigureOut">
+            <a:fld id="{3594F67B-593D-4384-8F95-2FBEEBEEB27A}" type="datetimeFigureOut">
               <a:rPr lang="es-ES" smtClean="0"/>
-              <a:t>27/05/2026</a:t>
+              <a:t>01/06/2026</a:t>
             </a:fld>
             <a:endParaRPr lang="es-ES"/>
           </a:p>
@@ -480,7 +480,7 @@
           <p:cNvPr id="5" name="Marcador de pie de página 4">
             <a:extLst>
               <a:ext uri="{FF2B5EF4-FFF2-40B4-BE49-F238E27FC236}">
-                <a16:creationId xmlns:a16="http://schemas.microsoft.com/office/drawing/2014/main" id="{E4906C85-F32C-8D4E-692B-EA7A9BE8DB65}"/>
+                <a16:creationId xmlns:a16="http://schemas.microsoft.com/office/drawing/2014/main" id="{C4CAB07D-DE00-00AA-5692-CB27E034EC36}"/>
               </a:ext>
             </a:extLst>
           </p:cNvPr>
@@ -505,7 +505,7 @@
           <p:cNvPr id="6" name="Marcador de número de diapositiva 5">
             <a:extLst>
               <a:ext uri="{FF2B5EF4-FFF2-40B4-BE49-F238E27FC236}">
-                <a16:creationId xmlns:a16="http://schemas.microsoft.com/office/drawing/2014/main" id="{F9B679B1-8A4E-00F6-E432-D501D8B369C0}"/>
+                <a16:creationId xmlns:a16="http://schemas.microsoft.com/office/drawing/2014/main" id="{AE6F0C28-EA5A-89CE-04EC-17135B274084}"/>
               </a:ext>
             </a:extLst>
           </p:cNvPr>
@@ -521,7 +521,7 @@
           <a:bodyPr/>
           <a:lstStyle/>
           <a:p>
-            <a:fld id="{AA515A41-34E0-4B8A-BFF5-025DE5A27467}" type="slidenum">
+            <a:fld id="{3E216418-6303-4DF4-80EB-715B8707D44E}" type="slidenum">
               <a:rPr lang="es-ES" smtClean="0"/>
               <a:t>‹Nº›</a:t>
             </a:fld>
@@ -532,7 +532,7 @@
     </p:spTree>
     <p:extLst>
       <p:ext uri="{BB962C8B-B14F-4D97-AF65-F5344CB8AC3E}">
-        <p14:creationId xmlns:p14="http://schemas.microsoft.com/office/powerpoint/2010/main" val="3866775877"/>
+        <p14:creationId xmlns:p14="http://schemas.microsoft.com/office/powerpoint/2010/main" val="2549378577"/>
       </p:ext>
     </p:extLst>
   </p:cSld>
@@ -564,7 +564,7 @@
           <p:cNvPr id="2" name="Título vertical 1">
             <a:extLst>
               <a:ext uri="{FF2B5EF4-FFF2-40B4-BE49-F238E27FC236}">
-                <a16:creationId xmlns:a16="http://schemas.microsoft.com/office/drawing/2014/main" id="{3969AAB8-257F-573C-1745-C77C65247482}"/>
+                <a16:creationId xmlns:a16="http://schemas.microsoft.com/office/drawing/2014/main" id="{46AB338E-FEFD-A8AF-18DE-56185C24091F}"/>
               </a:ext>
             </a:extLst>
           </p:cNvPr>
@@ -597,7 +597,7 @@
           <p:cNvPr id="3" name="Marcador de texto vertical 2">
             <a:extLst>
               <a:ext uri="{FF2B5EF4-FFF2-40B4-BE49-F238E27FC236}">
-                <a16:creationId xmlns:a16="http://schemas.microsoft.com/office/drawing/2014/main" id="{CDC5E29F-8D9E-0979-F474-63AF8DA8314D}"/>
+                <a16:creationId xmlns:a16="http://schemas.microsoft.com/office/drawing/2014/main" id="{6088E667-B029-3E92-F0EE-0F45EDC6AEA4}"/>
               </a:ext>
             </a:extLst>
           </p:cNvPr>
@@ -659,7 +659,7 @@
           <p:cNvPr id="4" name="Marcador de fecha 3">
             <a:extLst>
               <a:ext uri="{FF2B5EF4-FFF2-40B4-BE49-F238E27FC236}">
-                <a16:creationId xmlns:a16="http://schemas.microsoft.com/office/drawing/2014/main" id="{82311995-F201-2E73-7F41-F18FC3BC97B8}"/>
+                <a16:creationId xmlns:a16="http://schemas.microsoft.com/office/drawing/2014/main" id="{08F641FF-0C49-5058-E882-C1C66745FFA5}"/>
               </a:ext>
             </a:extLst>
           </p:cNvPr>
@@ -675,9 +675,9 @@
           <a:bodyPr/>
           <a:lstStyle/>
           <a:p>
-            <a:fld id="{7DF9D857-2BC1-4ECA-A48E-C0419EF44063}" type="datetimeFigureOut">
+            <a:fld id="{3594F67B-593D-4384-8F95-2FBEEBEEB27A}" type="datetimeFigureOut">
               <a:rPr lang="es-ES" smtClean="0"/>
-              <a:t>27/05/2026</a:t>
+              <a:t>01/06/2026</a:t>
             </a:fld>
             <a:endParaRPr lang="es-ES"/>
           </a:p>
@@ -688,7 +688,7 @@
           <p:cNvPr id="5" name="Marcador de pie de página 4">
             <a:extLst>
               <a:ext uri="{FF2B5EF4-FFF2-40B4-BE49-F238E27FC236}">
-                <a16:creationId xmlns:a16="http://schemas.microsoft.com/office/drawing/2014/main" id="{5BE549F1-05B4-D110-36F4-2856D96123C9}"/>
+                <a16:creationId xmlns:a16="http://schemas.microsoft.com/office/drawing/2014/main" id="{94E36D7E-FACE-12B9-9203-D1613FBB1191}"/>
               </a:ext>
             </a:extLst>
           </p:cNvPr>
@@ -713,7 +713,7 @@
           <p:cNvPr id="6" name="Marcador de número de diapositiva 5">
             <a:extLst>
               <a:ext uri="{FF2B5EF4-FFF2-40B4-BE49-F238E27FC236}">
-                <a16:creationId xmlns:a16="http://schemas.microsoft.com/office/drawing/2014/main" id="{0119D8FD-3460-7AB5-D3B2-D050CDEFF9B8}"/>
+                <a16:creationId xmlns:a16="http://schemas.microsoft.com/office/drawing/2014/main" id="{E4EEE139-E64A-3F7C-E8BF-6754CBA6B333}"/>
               </a:ext>
             </a:extLst>
           </p:cNvPr>
@@ -729,7 +729,7 @@
           <a:bodyPr/>
           <a:lstStyle/>
           <a:p>
-            <a:fld id="{AA515A41-34E0-4B8A-BFF5-025DE5A27467}" type="slidenum">
+            <a:fld id="{3E216418-6303-4DF4-80EB-715B8707D44E}" type="slidenum">
               <a:rPr lang="es-ES" smtClean="0"/>
               <a:t>‹Nº›</a:t>
             </a:fld>
@@ -740,7 +740,7 @@
     </p:spTree>
     <p:extLst>
       <p:ext uri="{BB962C8B-B14F-4D97-AF65-F5344CB8AC3E}">
-        <p14:creationId xmlns:p14="http://schemas.microsoft.com/office/powerpoint/2010/main" val="2594176324"/>
+        <p14:creationId xmlns:p14="http://schemas.microsoft.com/office/powerpoint/2010/main" val="1238850085"/>
       </p:ext>
     </p:extLst>
   </p:cSld>
@@ -772,7 +772,7 @@
           <p:cNvPr id="2" name="Título 1">
             <a:extLst>
               <a:ext uri="{FF2B5EF4-FFF2-40B4-BE49-F238E27FC236}">
-                <a16:creationId xmlns:a16="http://schemas.microsoft.com/office/drawing/2014/main" id="{A657B3D1-9F17-9857-C23E-0FF9659FD909}"/>
+                <a16:creationId xmlns:a16="http://schemas.microsoft.com/office/drawing/2014/main" id="{E78901D5-99B4-D2C9-591A-7945BF3139AA}"/>
               </a:ext>
             </a:extLst>
           </p:cNvPr>
@@ -800,7 +800,7 @@
           <p:cNvPr id="3" name="Marcador de contenido 2">
             <a:extLst>
               <a:ext uri="{FF2B5EF4-FFF2-40B4-BE49-F238E27FC236}">
-                <a16:creationId xmlns:a16="http://schemas.microsoft.com/office/drawing/2014/main" id="{CCC8DB27-0B8D-3DFD-F444-147E77A62E3F}"/>
+                <a16:creationId xmlns:a16="http://schemas.microsoft.com/office/drawing/2014/main" id="{10654976-33B1-F68D-E6B4-006C837BE16A}"/>
               </a:ext>
             </a:extLst>
           </p:cNvPr>
@@ -857,7 +857,7 @@
           <p:cNvPr id="4" name="Marcador de fecha 3">
             <a:extLst>
               <a:ext uri="{FF2B5EF4-FFF2-40B4-BE49-F238E27FC236}">
-                <a16:creationId xmlns:a16="http://schemas.microsoft.com/office/drawing/2014/main" id="{3F9DB092-AE36-B1AA-99F0-4ECC974B29D3}"/>
+                <a16:creationId xmlns:a16="http://schemas.microsoft.com/office/drawing/2014/main" id="{A35925D9-FDA0-86C7-9E16-CDEEAF7720FF}"/>
               </a:ext>
             </a:extLst>
           </p:cNvPr>
@@ -873,9 +873,9 @@
           <a:bodyPr/>
           <a:lstStyle/>
           <a:p>
-            <a:fld id="{7DF9D857-2BC1-4ECA-A48E-C0419EF44063}" type="datetimeFigureOut">
+            <a:fld id="{3594F67B-593D-4384-8F95-2FBEEBEEB27A}" type="datetimeFigureOut">
               <a:rPr lang="es-ES" smtClean="0"/>
-              <a:t>27/05/2026</a:t>
+              <a:t>01/06/2026</a:t>
             </a:fld>
             <a:endParaRPr lang="es-ES"/>
           </a:p>
@@ -886,7 +886,7 @@
           <p:cNvPr id="5" name="Marcador de pie de página 4">
             <a:extLst>
               <a:ext uri="{FF2B5EF4-FFF2-40B4-BE49-F238E27FC236}">
-                <a16:creationId xmlns:a16="http://schemas.microsoft.com/office/drawing/2014/main" id="{48D9DE15-B473-06DB-601C-09CE6D7B00A2}"/>
+                <a16:creationId xmlns:a16="http://schemas.microsoft.com/office/drawing/2014/main" id="{BAEFEF87-8119-67D1-7B26-1521E2CC6641}"/>
               </a:ext>
             </a:extLst>
           </p:cNvPr>
@@ -911,7 +911,7 @@
           <p:cNvPr id="6" name="Marcador de número de diapositiva 5">
             <a:extLst>
               <a:ext uri="{FF2B5EF4-FFF2-40B4-BE49-F238E27FC236}">
-                <a16:creationId xmlns:a16="http://schemas.microsoft.com/office/drawing/2014/main" id="{811C6BA2-83FB-199D-78F2-AC5FCF809BFB}"/>
+                <a16:creationId xmlns:a16="http://schemas.microsoft.com/office/drawing/2014/main" id="{B3C2EFF3-79AA-17A1-9994-4EEE79A5F9C6}"/>
               </a:ext>
             </a:extLst>
           </p:cNvPr>
@@ -927,7 +927,7 @@
           <a:bodyPr/>
           <a:lstStyle/>
           <a:p>
-            <a:fld id="{AA515A41-34E0-4B8A-BFF5-025DE5A27467}" type="slidenum">
+            <a:fld id="{3E216418-6303-4DF4-80EB-715B8707D44E}" type="slidenum">
               <a:rPr lang="es-ES" smtClean="0"/>
               <a:t>‹Nº›</a:t>
             </a:fld>
@@ -938,7 +938,7 @@
     </p:spTree>
     <p:extLst>
       <p:ext uri="{BB962C8B-B14F-4D97-AF65-F5344CB8AC3E}">
-        <p14:creationId xmlns:p14="http://schemas.microsoft.com/office/powerpoint/2010/main" val="174078382"/>
+        <p14:creationId xmlns:p14="http://schemas.microsoft.com/office/powerpoint/2010/main" val="2033255128"/>
       </p:ext>
     </p:extLst>
   </p:cSld>
@@ -970,7 +970,7 @@
           <p:cNvPr id="2" name="Título 1">
             <a:extLst>
               <a:ext uri="{FF2B5EF4-FFF2-40B4-BE49-F238E27FC236}">
-                <a16:creationId xmlns:a16="http://schemas.microsoft.com/office/drawing/2014/main" id="{9FEE0E53-739A-5E14-2265-63E08A962888}"/>
+                <a16:creationId xmlns:a16="http://schemas.microsoft.com/office/drawing/2014/main" id="{0CB81FE2-7FCE-0707-0361-7ADD3D92D2EA}"/>
               </a:ext>
             </a:extLst>
           </p:cNvPr>
@@ -1007,7 +1007,7 @@
           <p:cNvPr id="3" name="Marcador de texto 2">
             <a:extLst>
               <a:ext uri="{FF2B5EF4-FFF2-40B4-BE49-F238E27FC236}">
-                <a16:creationId xmlns:a16="http://schemas.microsoft.com/office/drawing/2014/main" id="{3CF09E20-BB42-9D1C-9A16-C9727455D13D}"/>
+                <a16:creationId xmlns:a16="http://schemas.microsoft.com/office/drawing/2014/main" id="{76A60D1A-DF2F-E574-0BB9-D3969FF18C85}"/>
               </a:ext>
             </a:extLst>
           </p:cNvPr>
@@ -1132,7 +1132,7 @@
           <p:cNvPr id="4" name="Marcador de fecha 3">
             <a:extLst>
               <a:ext uri="{FF2B5EF4-FFF2-40B4-BE49-F238E27FC236}">
-                <a16:creationId xmlns:a16="http://schemas.microsoft.com/office/drawing/2014/main" id="{6D43DD57-7FE4-C155-4E7A-0401C12069F9}"/>
+                <a16:creationId xmlns:a16="http://schemas.microsoft.com/office/drawing/2014/main" id="{48921F6F-1AF9-E840-E797-167C49AABC30}"/>
               </a:ext>
             </a:extLst>
           </p:cNvPr>
@@ -1148,9 +1148,9 @@
           <a:bodyPr/>
           <a:lstStyle/>
           <a:p>
-            <a:fld id="{7DF9D857-2BC1-4ECA-A48E-C0419EF44063}" type="datetimeFigureOut">
+            <a:fld id="{3594F67B-593D-4384-8F95-2FBEEBEEB27A}" type="datetimeFigureOut">
               <a:rPr lang="es-ES" smtClean="0"/>
-              <a:t>27/05/2026</a:t>
+              <a:t>01/06/2026</a:t>
             </a:fld>
             <a:endParaRPr lang="es-ES"/>
           </a:p>
@@ -1161,7 +1161,7 @@
           <p:cNvPr id="5" name="Marcador de pie de página 4">
             <a:extLst>
               <a:ext uri="{FF2B5EF4-FFF2-40B4-BE49-F238E27FC236}">
-                <a16:creationId xmlns:a16="http://schemas.microsoft.com/office/drawing/2014/main" id="{2DCB3593-8C1B-01A6-64F0-1F8662C0C058}"/>
+                <a16:creationId xmlns:a16="http://schemas.microsoft.com/office/drawing/2014/main" id="{66A560AC-EF8C-A398-E175-A21980745154}"/>
               </a:ext>
             </a:extLst>
           </p:cNvPr>
@@ -1186,7 +1186,7 @@
           <p:cNvPr id="6" name="Marcador de número de diapositiva 5">
             <a:extLst>
               <a:ext uri="{FF2B5EF4-FFF2-40B4-BE49-F238E27FC236}">
-                <a16:creationId xmlns:a16="http://schemas.microsoft.com/office/drawing/2014/main" id="{E396AEC0-2558-3D0F-B016-A6852FB7E0A8}"/>
+                <a16:creationId xmlns:a16="http://schemas.microsoft.com/office/drawing/2014/main" id="{7EDA3FF6-60ED-E272-21BA-E63161F1025A}"/>
               </a:ext>
             </a:extLst>
           </p:cNvPr>
@@ -1202,7 +1202,7 @@
           <a:bodyPr/>
           <a:lstStyle/>
           <a:p>
-            <a:fld id="{AA515A41-34E0-4B8A-BFF5-025DE5A27467}" type="slidenum">
+            <a:fld id="{3E216418-6303-4DF4-80EB-715B8707D44E}" type="slidenum">
               <a:rPr lang="es-ES" smtClean="0"/>
               <a:t>‹Nº›</a:t>
             </a:fld>
@@ -1213,7 +1213,7 @@
     </p:spTree>
     <p:extLst>
       <p:ext uri="{BB962C8B-B14F-4D97-AF65-F5344CB8AC3E}">
-        <p14:creationId xmlns:p14="http://schemas.microsoft.com/office/powerpoint/2010/main" val="3538564462"/>
+        <p14:creationId xmlns:p14="http://schemas.microsoft.com/office/powerpoint/2010/main" val="443343728"/>
       </p:ext>
     </p:extLst>
   </p:cSld>
@@ -1245,7 +1245,7 @@
           <p:cNvPr id="2" name="Título 1">
             <a:extLst>
               <a:ext uri="{FF2B5EF4-FFF2-40B4-BE49-F238E27FC236}">
-                <a16:creationId xmlns:a16="http://schemas.microsoft.com/office/drawing/2014/main" id="{0386B269-1F9B-096D-4156-1A9A9FDDC953}"/>
+                <a16:creationId xmlns:a16="http://schemas.microsoft.com/office/drawing/2014/main" id="{385B08C1-E993-F59D-8651-1EBF9280D8A1}"/>
               </a:ext>
             </a:extLst>
           </p:cNvPr>
@@ -1273,7 +1273,7 @@
           <p:cNvPr id="3" name="Marcador de contenido 2">
             <a:extLst>
               <a:ext uri="{FF2B5EF4-FFF2-40B4-BE49-F238E27FC236}">
-                <a16:creationId xmlns:a16="http://schemas.microsoft.com/office/drawing/2014/main" id="{3691497C-0160-D7CC-5A2C-37BA9EFFA3D7}"/>
+                <a16:creationId xmlns:a16="http://schemas.microsoft.com/office/drawing/2014/main" id="{737DAD8D-0B1F-479E-82AC-904393E28710}"/>
               </a:ext>
             </a:extLst>
           </p:cNvPr>
@@ -1335,7 +1335,7 @@
           <p:cNvPr id="4" name="Marcador de contenido 3">
             <a:extLst>
               <a:ext uri="{FF2B5EF4-FFF2-40B4-BE49-F238E27FC236}">
-                <a16:creationId xmlns:a16="http://schemas.microsoft.com/office/drawing/2014/main" id="{F7CE6F9C-0984-7B61-D31C-4FC486CBDBFD}"/>
+                <a16:creationId xmlns:a16="http://schemas.microsoft.com/office/drawing/2014/main" id="{2D07CEBD-204B-961F-E875-AC71F6165DF7}"/>
               </a:ext>
             </a:extLst>
           </p:cNvPr>
@@ -1397,7 +1397,7 @@
           <p:cNvPr id="5" name="Marcador de fecha 4">
             <a:extLst>
               <a:ext uri="{FF2B5EF4-FFF2-40B4-BE49-F238E27FC236}">
-                <a16:creationId xmlns:a16="http://schemas.microsoft.com/office/drawing/2014/main" id="{D587CFF8-9155-5D3D-5C77-4353055CC059}"/>
+                <a16:creationId xmlns:a16="http://schemas.microsoft.com/office/drawing/2014/main" id="{FF9C0AC7-2DB1-97E6-C226-76FBE8A3A8E2}"/>
               </a:ext>
             </a:extLst>
           </p:cNvPr>
@@ -1413,9 +1413,9 @@
           <a:bodyPr/>
           <a:lstStyle/>
           <a:p>
-            <a:fld id="{7DF9D857-2BC1-4ECA-A48E-C0419EF44063}" type="datetimeFigureOut">
+            <a:fld id="{3594F67B-593D-4384-8F95-2FBEEBEEB27A}" type="datetimeFigureOut">
               <a:rPr lang="es-ES" smtClean="0"/>
-              <a:t>27/05/2026</a:t>
+              <a:t>01/06/2026</a:t>
             </a:fld>
             <a:endParaRPr lang="es-ES"/>
           </a:p>
@@ -1426,7 +1426,7 @@
           <p:cNvPr id="6" name="Marcador de pie de página 5">
             <a:extLst>
               <a:ext uri="{FF2B5EF4-FFF2-40B4-BE49-F238E27FC236}">
-                <a16:creationId xmlns:a16="http://schemas.microsoft.com/office/drawing/2014/main" id="{02A4965C-5C15-5E1C-997E-BE1FE0D87CCA}"/>
+                <a16:creationId xmlns:a16="http://schemas.microsoft.com/office/drawing/2014/main" id="{EDA0DC87-BCEE-DD42-6B44-7CCA524F0E85}"/>
               </a:ext>
             </a:extLst>
           </p:cNvPr>
@@ -1451,7 +1451,7 @@
           <p:cNvPr id="7" name="Marcador de número de diapositiva 6">
             <a:extLst>
               <a:ext uri="{FF2B5EF4-FFF2-40B4-BE49-F238E27FC236}">
-                <a16:creationId xmlns:a16="http://schemas.microsoft.com/office/drawing/2014/main" id="{678C03CE-F840-8305-FCDB-505111302E04}"/>
+                <a16:creationId xmlns:a16="http://schemas.microsoft.com/office/drawing/2014/main" id="{5111691C-B91A-89B6-76AD-43C7853A9116}"/>
               </a:ext>
             </a:extLst>
           </p:cNvPr>
@@ -1467,7 +1467,7 @@
           <a:bodyPr/>
           <a:lstStyle/>
           <a:p>
-            <a:fld id="{AA515A41-34E0-4B8A-BFF5-025DE5A27467}" type="slidenum">
+            <a:fld id="{3E216418-6303-4DF4-80EB-715B8707D44E}" type="slidenum">
               <a:rPr lang="es-ES" smtClean="0"/>
               <a:t>‹Nº›</a:t>
             </a:fld>
@@ -1478,7 +1478,7 @@
     </p:spTree>
     <p:extLst>
       <p:ext uri="{BB962C8B-B14F-4D97-AF65-F5344CB8AC3E}">
-        <p14:creationId xmlns:p14="http://schemas.microsoft.com/office/powerpoint/2010/main" val="1591076314"/>
+        <p14:creationId xmlns:p14="http://schemas.microsoft.com/office/powerpoint/2010/main" val="1145307958"/>
       </p:ext>
     </p:extLst>
   </p:cSld>
@@ -1510,7 +1510,7 @@
           <p:cNvPr id="2" name="Título 1">
             <a:extLst>
               <a:ext uri="{FF2B5EF4-FFF2-40B4-BE49-F238E27FC236}">
-                <a16:creationId xmlns:a16="http://schemas.microsoft.com/office/drawing/2014/main" id="{C95FE9DA-633C-A7A3-4DF1-9E0CE4AD708E}"/>
+                <a16:creationId xmlns:a16="http://schemas.microsoft.com/office/drawing/2014/main" id="{ECA94CD3-0710-86CC-1AB2-F851BA958007}"/>
               </a:ext>
             </a:extLst>
           </p:cNvPr>
@@ -1543,7 +1543,7 @@
           <p:cNvPr id="3" name="Marcador de texto 2">
             <a:extLst>
               <a:ext uri="{FF2B5EF4-FFF2-40B4-BE49-F238E27FC236}">
-                <a16:creationId xmlns:a16="http://schemas.microsoft.com/office/drawing/2014/main" id="{A9C3C829-0D26-0D9D-61AB-5F9AE070EB70}"/>
+                <a16:creationId xmlns:a16="http://schemas.microsoft.com/office/drawing/2014/main" id="{E98A71FB-2B84-8180-1FB3-0700CCD08AE7}"/>
               </a:ext>
             </a:extLst>
           </p:cNvPr>
@@ -1614,7 +1614,7 @@
           <p:cNvPr id="4" name="Marcador de contenido 3">
             <a:extLst>
               <a:ext uri="{FF2B5EF4-FFF2-40B4-BE49-F238E27FC236}">
-                <a16:creationId xmlns:a16="http://schemas.microsoft.com/office/drawing/2014/main" id="{ECC82072-9276-3394-D5C3-5CAAC1625396}"/>
+                <a16:creationId xmlns:a16="http://schemas.microsoft.com/office/drawing/2014/main" id="{284B4773-6CEB-8828-66FA-53DEE6BEBD85}"/>
               </a:ext>
             </a:extLst>
           </p:cNvPr>
@@ -1676,7 +1676,7 @@
           <p:cNvPr id="5" name="Marcador de texto 4">
             <a:extLst>
               <a:ext uri="{FF2B5EF4-FFF2-40B4-BE49-F238E27FC236}">
-                <a16:creationId xmlns:a16="http://schemas.microsoft.com/office/drawing/2014/main" id="{9B68160E-CD31-5543-6D4B-9AB56CEFC07B}"/>
+                <a16:creationId xmlns:a16="http://schemas.microsoft.com/office/drawing/2014/main" id="{569EF8C5-7F81-49BF-21E4-6E07B4334D06}"/>
               </a:ext>
             </a:extLst>
           </p:cNvPr>
@@ -1747,7 +1747,7 @@
           <p:cNvPr id="6" name="Marcador de contenido 5">
             <a:extLst>
               <a:ext uri="{FF2B5EF4-FFF2-40B4-BE49-F238E27FC236}">
-                <a16:creationId xmlns:a16="http://schemas.microsoft.com/office/drawing/2014/main" id="{F8B5504F-2A8D-DF35-1794-1632E2A34FE8}"/>
+                <a16:creationId xmlns:a16="http://schemas.microsoft.com/office/drawing/2014/main" id="{12DB43AB-E1B7-2B01-557F-9048B2D423D0}"/>
               </a:ext>
             </a:extLst>
           </p:cNvPr>
@@ -1809,7 +1809,7 @@
           <p:cNvPr id="7" name="Marcador de fecha 6">
             <a:extLst>
               <a:ext uri="{FF2B5EF4-FFF2-40B4-BE49-F238E27FC236}">
-                <a16:creationId xmlns:a16="http://schemas.microsoft.com/office/drawing/2014/main" id="{FD8E17A6-0FA9-0BBD-E0F3-37EE6389BCE7}"/>
+                <a16:creationId xmlns:a16="http://schemas.microsoft.com/office/drawing/2014/main" id="{27744151-C34B-F7D3-75F9-9183D79F2784}"/>
               </a:ext>
             </a:extLst>
           </p:cNvPr>
@@ -1825,9 +1825,9 @@
           <a:bodyPr/>
           <a:lstStyle/>
           <a:p>
-            <a:fld id="{7DF9D857-2BC1-4ECA-A48E-C0419EF44063}" type="datetimeFigureOut">
+            <a:fld id="{3594F67B-593D-4384-8F95-2FBEEBEEB27A}" type="datetimeFigureOut">
               <a:rPr lang="es-ES" smtClean="0"/>
-              <a:t>27/05/2026</a:t>
+              <a:t>01/06/2026</a:t>
             </a:fld>
             <a:endParaRPr lang="es-ES"/>
           </a:p>
@@ -1838,7 +1838,7 @@
           <p:cNvPr id="8" name="Marcador de pie de página 7">
             <a:extLst>
               <a:ext uri="{FF2B5EF4-FFF2-40B4-BE49-F238E27FC236}">
-                <a16:creationId xmlns:a16="http://schemas.microsoft.com/office/drawing/2014/main" id="{D099D6E1-9F08-46D6-96E0-6556CA612323}"/>
+                <a16:creationId xmlns:a16="http://schemas.microsoft.com/office/drawing/2014/main" id="{4CA972AB-39BB-4DDB-677C-7C2426DABD23}"/>
               </a:ext>
             </a:extLst>
           </p:cNvPr>
@@ -1863,7 +1863,7 @@
           <p:cNvPr id="9" name="Marcador de número de diapositiva 8">
             <a:extLst>
               <a:ext uri="{FF2B5EF4-FFF2-40B4-BE49-F238E27FC236}">
-                <a16:creationId xmlns:a16="http://schemas.microsoft.com/office/drawing/2014/main" id="{CDDD4F92-CAEB-BB19-55E3-6ED1365B570E}"/>
+                <a16:creationId xmlns:a16="http://schemas.microsoft.com/office/drawing/2014/main" id="{EE8B46AC-7FF1-E539-E9A2-5E7B13B5EC29}"/>
               </a:ext>
             </a:extLst>
           </p:cNvPr>
@@ -1879,7 +1879,7 @@
           <a:bodyPr/>
           <a:lstStyle/>
           <a:p>
-            <a:fld id="{AA515A41-34E0-4B8A-BFF5-025DE5A27467}" type="slidenum">
+            <a:fld id="{3E216418-6303-4DF4-80EB-715B8707D44E}" type="slidenum">
               <a:rPr lang="es-ES" smtClean="0"/>
               <a:t>‹Nº›</a:t>
             </a:fld>
@@ -1890,7 +1890,7 @@
     </p:spTree>
     <p:extLst>
       <p:ext uri="{BB962C8B-B14F-4D97-AF65-F5344CB8AC3E}">
-        <p14:creationId xmlns:p14="http://schemas.microsoft.com/office/powerpoint/2010/main" val="4236326680"/>
+        <p14:creationId xmlns:p14="http://schemas.microsoft.com/office/powerpoint/2010/main" val="2920174836"/>
       </p:ext>
     </p:extLst>
   </p:cSld>
@@ -1922,7 +1922,7 @@
           <p:cNvPr id="2" name="Título 1">
             <a:extLst>
               <a:ext uri="{FF2B5EF4-FFF2-40B4-BE49-F238E27FC236}">
-                <a16:creationId xmlns:a16="http://schemas.microsoft.com/office/drawing/2014/main" id="{884F9C25-1F3D-22F8-B89F-96D23B7D2CD0}"/>
+                <a16:creationId xmlns:a16="http://schemas.microsoft.com/office/drawing/2014/main" id="{B95024DB-1CD0-312B-3E29-F0DCB4880364}"/>
               </a:ext>
             </a:extLst>
           </p:cNvPr>
@@ -1950,7 +1950,7 @@
           <p:cNvPr id="3" name="Marcador de fecha 2">
             <a:extLst>
               <a:ext uri="{FF2B5EF4-FFF2-40B4-BE49-F238E27FC236}">
-                <a16:creationId xmlns:a16="http://schemas.microsoft.com/office/drawing/2014/main" id="{B2711B9A-4C75-FF47-7BB5-1B3C8E570852}"/>
+                <a16:creationId xmlns:a16="http://schemas.microsoft.com/office/drawing/2014/main" id="{E693750E-1BE2-EF46-8C03-C8AB0BBAAFDB}"/>
               </a:ext>
             </a:extLst>
           </p:cNvPr>
@@ -1966,9 +1966,9 @@
           <a:bodyPr/>
           <a:lstStyle/>
           <a:p>
-            <a:fld id="{7DF9D857-2BC1-4ECA-A48E-C0419EF44063}" type="datetimeFigureOut">
+            <a:fld id="{3594F67B-593D-4384-8F95-2FBEEBEEB27A}" type="datetimeFigureOut">
               <a:rPr lang="es-ES" smtClean="0"/>
-              <a:t>27/05/2026</a:t>
+              <a:t>01/06/2026</a:t>
             </a:fld>
             <a:endParaRPr lang="es-ES"/>
           </a:p>
@@ -1979,7 +1979,7 @@
           <p:cNvPr id="4" name="Marcador de pie de página 3">
             <a:extLst>
               <a:ext uri="{FF2B5EF4-FFF2-40B4-BE49-F238E27FC236}">
-                <a16:creationId xmlns:a16="http://schemas.microsoft.com/office/drawing/2014/main" id="{2F47A31C-E4CB-E1DD-F41C-1BED88159EE5}"/>
+                <a16:creationId xmlns:a16="http://schemas.microsoft.com/office/drawing/2014/main" id="{000E8E06-FABC-1FB6-2B66-EE56AF013008}"/>
               </a:ext>
             </a:extLst>
           </p:cNvPr>
@@ -2004,7 +2004,7 @@
           <p:cNvPr id="5" name="Marcador de número de diapositiva 4">
             <a:extLst>
               <a:ext uri="{FF2B5EF4-FFF2-40B4-BE49-F238E27FC236}">
-                <a16:creationId xmlns:a16="http://schemas.microsoft.com/office/drawing/2014/main" id="{16B7C687-FEF9-3605-F982-EC5CAED7B379}"/>
+                <a16:creationId xmlns:a16="http://schemas.microsoft.com/office/drawing/2014/main" id="{58A052CE-71D7-F68A-5D06-2099A1659910}"/>
               </a:ext>
             </a:extLst>
           </p:cNvPr>
@@ -2020,7 +2020,7 @@
           <a:bodyPr/>
           <a:lstStyle/>
           <a:p>
-            <a:fld id="{AA515A41-34E0-4B8A-BFF5-025DE5A27467}" type="slidenum">
+            <a:fld id="{3E216418-6303-4DF4-80EB-715B8707D44E}" type="slidenum">
               <a:rPr lang="es-ES" smtClean="0"/>
               <a:t>‹Nº›</a:t>
             </a:fld>
@@ -2031,7 +2031,7 @@
     </p:spTree>
     <p:extLst>
       <p:ext uri="{BB962C8B-B14F-4D97-AF65-F5344CB8AC3E}">
-        <p14:creationId xmlns:p14="http://schemas.microsoft.com/office/powerpoint/2010/main" val="3260201284"/>
+        <p14:creationId xmlns:p14="http://schemas.microsoft.com/office/powerpoint/2010/main" val="686946921"/>
       </p:ext>
     </p:extLst>
   </p:cSld>
@@ -2063,7 +2063,7 @@
           <p:cNvPr id="2" name="Marcador de fecha 1">
             <a:extLst>
               <a:ext uri="{FF2B5EF4-FFF2-40B4-BE49-F238E27FC236}">
-                <a16:creationId xmlns:a16="http://schemas.microsoft.com/office/drawing/2014/main" id="{DB0FDAD9-4A92-C1D0-A3D0-ACA1C4661747}"/>
+                <a16:creationId xmlns:a16="http://schemas.microsoft.com/office/drawing/2014/main" id="{07A54D4B-EB29-606E-D8CF-3C2A3BE2FA51}"/>
               </a:ext>
             </a:extLst>
           </p:cNvPr>
@@ -2079,9 +2079,9 @@
           <a:bodyPr/>
           <a:lstStyle/>
           <a:p>
-            <a:fld id="{7DF9D857-2BC1-4ECA-A48E-C0419EF44063}" type="datetimeFigureOut">
+            <a:fld id="{3594F67B-593D-4384-8F95-2FBEEBEEB27A}" type="datetimeFigureOut">
               <a:rPr lang="es-ES" smtClean="0"/>
-              <a:t>27/05/2026</a:t>
+              <a:t>01/06/2026</a:t>
             </a:fld>
             <a:endParaRPr lang="es-ES"/>
           </a:p>
@@ -2092,7 +2092,7 @@
           <p:cNvPr id="3" name="Marcador de pie de página 2">
             <a:extLst>
               <a:ext uri="{FF2B5EF4-FFF2-40B4-BE49-F238E27FC236}">
-                <a16:creationId xmlns:a16="http://schemas.microsoft.com/office/drawing/2014/main" id="{78DAC3A3-A540-E223-C38E-27A344B554DD}"/>
+                <a16:creationId xmlns:a16="http://schemas.microsoft.com/office/drawing/2014/main" id="{FE4290FF-1038-24E8-33DA-35749590B469}"/>
               </a:ext>
             </a:extLst>
           </p:cNvPr>
@@ -2117,7 +2117,7 @@
           <p:cNvPr id="4" name="Marcador de número de diapositiva 3">
             <a:extLst>
               <a:ext uri="{FF2B5EF4-FFF2-40B4-BE49-F238E27FC236}">
-                <a16:creationId xmlns:a16="http://schemas.microsoft.com/office/drawing/2014/main" id="{1CD94074-9280-3579-4C1D-855C59DC39FA}"/>
+                <a16:creationId xmlns:a16="http://schemas.microsoft.com/office/drawing/2014/main" id="{EC46CCFC-C651-193F-028A-BAFA9435E3EC}"/>
               </a:ext>
             </a:extLst>
           </p:cNvPr>
@@ -2133,7 +2133,7 @@
           <a:bodyPr/>
           <a:lstStyle/>
           <a:p>
-            <a:fld id="{AA515A41-34E0-4B8A-BFF5-025DE5A27467}" type="slidenum">
+            <a:fld id="{3E216418-6303-4DF4-80EB-715B8707D44E}" type="slidenum">
               <a:rPr lang="es-ES" smtClean="0"/>
               <a:t>‹Nº›</a:t>
             </a:fld>
@@ -2144,7 +2144,7 @@
     </p:spTree>
     <p:extLst>
       <p:ext uri="{BB962C8B-B14F-4D97-AF65-F5344CB8AC3E}">
-        <p14:creationId xmlns:p14="http://schemas.microsoft.com/office/powerpoint/2010/main" val="1212894350"/>
+        <p14:creationId xmlns:p14="http://schemas.microsoft.com/office/powerpoint/2010/main" val="178298420"/>
       </p:ext>
     </p:extLst>
   </p:cSld>
@@ -2176,7 +2176,7 @@
           <p:cNvPr id="2" name="Título 1">
             <a:extLst>
               <a:ext uri="{FF2B5EF4-FFF2-40B4-BE49-F238E27FC236}">
-                <a16:creationId xmlns:a16="http://schemas.microsoft.com/office/drawing/2014/main" id="{D58CEA0C-21DD-F6F8-8819-BE70E8156DD5}"/>
+                <a16:creationId xmlns:a16="http://schemas.microsoft.com/office/drawing/2014/main" id="{46B4FA0B-48DB-7AC2-4C1B-451D82DDC18D}"/>
               </a:ext>
             </a:extLst>
           </p:cNvPr>
@@ -2213,7 +2213,7 @@
           <p:cNvPr id="3" name="Marcador de contenido 2">
             <a:extLst>
               <a:ext uri="{FF2B5EF4-FFF2-40B4-BE49-F238E27FC236}">
-                <a16:creationId xmlns:a16="http://schemas.microsoft.com/office/drawing/2014/main" id="{975D4CDC-5E20-6184-0817-E4D1431B23DC}"/>
+                <a16:creationId xmlns:a16="http://schemas.microsoft.com/office/drawing/2014/main" id="{B30A71B3-C987-79F9-8923-060AB45BD232}"/>
               </a:ext>
             </a:extLst>
           </p:cNvPr>
@@ -2303,7 +2303,7 @@
           <p:cNvPr id="4" name="Marcador de texto 3">
             <a:extLst>
               <a:ext uri="{FF2B5EF4-FFF2-40B4-BE49-F238E27FC236}">
-                <a16:creationId xmlns:a16="http://schemas.microsoft.com/office/drawing/2014/main" id="{9026DAA0-0D63-F341-DAB4-1363FC8700DD}"/>
+                <a16:creationId xmlns:a16="http://schemas.microsoft.com/office/drawing/2014/main" id="{5639A1A8-196E-F16B-A24F-D58EAD9507A7}"/>
               </a:ext>
             </a:extLst>
           </p:cNvPr>
@@ -2374,7 +2374,7 @@
           <p:cNvPr id="5" name="Marcador de fecha 4">
             <a:extLst>
               <a:ext uri="{FF2B5EF4-FFF2-40B4-BE49-F238E27FC236}">
-                <a16:creationId xmlns:a16="http://schemas.microsoft.com/office/drawing/2014/main" id="{85516AEC-CDDC-1B47-9445-739BD483DD5A}"/>
+                <a16:creationId xmlns:a16="http://schemas.microsoft.com/office/drawing/2014/main" id="{DD572331-9D4E-4D29-9B46-71E48925D5F2}"/>
               </a:ext>
             </a:extLst>
           </p:cNvPr>
@@ -2390,9 +2390,9 @@
           <a:bodyPr/>
           <a:lstStyle/>
           <a:p>
-            <a:fld id="{7DF9D857-2BC1-4ECA-A48E-C0419EF44063}" type="datetimeFigureOut">
+            <a:fld id="{3594F67B-593D-4384-8F95-2FBEEBEEB27A}" type="datetimeFigureOut">
               <a:rPr lang="es-ES" smtClean="0"/>
-              <a:t>27/05/2026</a:t>
+              <a:t>01/06/2026</a:t>
             </a:fld>
             <a:endParaRPr lang="es-ES"/>
           </a:p>
@@ -2403,7 +2403,7 @@
           <p:cNvPr id="6" name="Marcador de pie de página 5">
             <a:extLst>
               <a:ext uri="{FF2B5EF4-FFF2-40B4-BE49-F238E27FC236}">
-                <a16:creationId xmlns:a16="http://schemas.microsoft.com/office/drawing/2014/main" id="{0F08CD5C-5F2F-DC4C-A211-1DC6C7EBEC23}"/>
+                <a16:creationId xmlns:a16="http://schemas.microsoft.com/office/drawing/2014/main" id="{A7826676-BF9C-EB38-DE94-C20CC5929740}"/>
               </a:ext>
             </a:extLst>
           </p:cNvPr>
@@ -2428,7 +2428,7 @@
           <p:cNvPr id="7" name="Marcador de número de diapositiva 6">
             <a:extLst>
               <a:ext uri="{FF2B5EF4-FFF2-40B4-BE49-F238E27FC236}">
-                <a16:creationId xmlns:a16="http://schemas.microsoft.com/office/drawing/2014/main" id="{A63278E3-E554-B691-9150-EBD0E07AAEB0}"/>
+                <a16:creationId xmlns:a16="http://schemas.microsoft.com/office/drawing/2014/main" id="{7882BAF8-87D6-7467-E7CA-FBCF4CA7AD23}"/>
               </a:ext>
             </a:extLst>
           </p:cNvPr>
@@ -2444,7 +2444,7 @@
           <a:bodyPr/>
           <a:lstStyle/>
           <a:p>
-            <a:fld id="{AA515A41-34E0-4B8A-BFF5-025DE5A27467}" type="slidenum">
+            <a:fld id="{3E216418-6303-4DF4-80EB-715B8707D44E}" type="slidenum">
               <a:rPr lang="es-ES" smtClean="0"/>
               <a:t>‹Nº›</a:t>
             </a:fld>
@@ -2455,7 +2455,7 @@
     </p:spTree>
     <p:extLst>
       <p:ext uri="{BB962C8B-B14F-4D97-AF65-F5344CB8AC3E}">
-        <p14:creationId xmlns:p14="http://schemas.microsoft.com/office/powerpoint/2010/main" val="1711597664"/>
+        <p14:creationId xmlns:p14="http://schemas.microsoft.com/office/powerpoint/2010/main" val="1200091560"/>
       </p:ext>
     </p:extLst>
   </p:cSld>
@@ -2487,7 +2487,7 @@
           <p:cNvPr id="2" name="Título 1">
             <a:extLst>
               <a:ext uri="{FF2B5EF4-FFF2-40B4-BE49-F238E27FC236}">
-                <a16:creationId xmlns:a16="http://schemas.microsoft.com/office/drawing/2014/main" id="{5173EBA9-B5DD-C451-9DAC-E0671C51718C}"/>
+                <a16:creationId xmlns:a16="http://schemas.microsoft.com/office/drawing/2014/main" id="{8B12B5EA-75CA-BB8B-3D35-87E0DAC7E396}"/>
               </a:ext>
             </a:extLst>
           </p:cNvPr>
@@ -2524,7 +2524,7 @@
           <p:cNvPr id="3" name="Marcador de posición de imagen 2">
             <a:extLst>
               <a:ext uri="{FF2B5EF4-FFF2-40B4-BE49-F238E27FC236}">
-                <a16:creationId xmlns:a16="http://schemas.microsoft.com/office/drawing/2014/main" id="{075FE7A7-3579-29CB-6626-32B86D7CD458}"/>
+                <a16:creationId xmlns:a16="http://schemas.microsoft.com/office/drawing/2014/main" id="{B8677383-2743-A849-F31D-A3D47B8A604A}"/>
               </a:ext>
             </a:extLst>
           </p:cNvPr>
@@ -2591,7 +2591,7 @@
           <p:cNvPr id="4" name="Marcador de texto 3">
             <a:extLst>
               <a:ext uri="{FF2B5EF4-FFF2-40B4-BE49-F238E27FC236}">
-                <a16:creationId xmlns:a16="http://schemas.microsoft.com/office/drawing/2014/main" id="{FFDC52D3-3B9E-D021-B186-A7D215CF68BC}"/>
+                <a16:creationId xmlns:a16="http://schemas.microsoft.com/office/drawing/2014/main" id="{18AAFB2E-6E91-D04B-87CA-4CAFEA47CAC4}"/>
               </a:ext>
             </a:extLst>
           </p:cNvPr>
@@ -2662,7 +2662,7 @@
           <p:cNvPr id="5" name="Marcador de fecha 4">
             <a:extLst>
               <a:ext uri="{FF2B5EF4-FFF2-40B4-BE49-F238E27FC236}">
-                <a16:creationId xmlns:a16="http://schemas.microsoft.com/office/drawing/2014/main" id="{7ADF918E-3472-BC36-6C7A-61CD37CA4365}"/>
+                <a16:creationId xmlns:a16="http://schemas.microsoft.com/office/drawing/2014/main" id="{9BD97579-AD36-B586-2CD4-1DFB26382106}"/>
               </a:ext>
             </a:extLst>
           </p:cNvPr>
@@ -2678,9 +2678,9 @@
           <a:bodyPr/>
           <a:lstStyle/>
           <a:p>
-            <a:fld id="{7DF9D857-2BC1-4ECA-A48E-C0419EF44063}" type="datetimeFigureOut">
+            <a:fld id="{3594F67B-593D-4384-8F95-2FBEEBEEB27A}" type="datetimeFigureOut">
               <a:rPr lang="es-ES" smtClean="0"/>
-              <a:t>27/05/2026</a:t>
+              <a:t>01/06/2026</a:t>
             </a:fld>
             <a:endParaRPr lang="es-ES"/>
           </a:p>
@@ -2691,7 +2691,7 @@
           <p:cNvPr id="6" name="Marcador de pie de página 5">
             <a:extLst>
               <a:ext uri="{FF2B5EF4-FFF2-40B4-BE49-F238E27FC236}">
-                <a16:creationId xmlns:a16="http://schemas.microsoft.com/office/drawing/2014/main" id="{F4D56AFF-FE8D-2F54-334E-0D5B0BE2285D}"/>
+                <a16:creationId xmlns:a16="http://schemas.microsoft.com/office/drawing/2014/main" id="{3AA44D61-788E-A726-58E2-54F3A8AA79F6}"/>
               </a:ext>
             </a:extLst>
           </p:cNvPr>
@@ -2716,7 +2716,7 @@
           <p:cNvPr id="7" name="Marcador de número de diapositiva 6">
             <a:extLst>
               <a:ext uri="{FF2B5EF4-FFF2-40B4-BE49-F238E27FC236}">
-                <a16:creationId xmlns:a16="http://schemas.microsoft.com/office/drawing/2014/main" id="{FF2B3460-EE14-4FAE-4406-AE566619A3C8}"/>
+                <a16:creationId xmlns:a16="http://schemas.microsoft.com/office/drawing/2014/main" id="{C69683E1-C1B3-49D0-1914-E51C26683BB7}"/>
               </a:ext>
             </a:extLst>
           </p:cNvPr>
@@ -2732,7 +2732,7 @@
           <a:bodyPr/>
           <a:lstStyle/>
           <a:p>
-            <a:fld id="{AA515A41-34E0-4B8A-BFF5-025DE5A27467}" type="slidenum">
+            <a:fld id="{3E216418-6303-4DF4-80EB-715B8707D44E}" type="slidenum">
               <a:rPr lang="es-ES" smtClean="0"/>
               <a:t>‹Nº›</a:t>
             </a:fld>
@@ -2743,7 +2743,7 @@
     </p:spTree>
     <p:extLst>
       <p:ext uri="{BB962C8B-B14F-4D97-AF65-F5344CB8AC3E}">
-        <p14:creationId xmlns:p14="http://schemas.microsoft.com/office/powerpoint/2010/main" val="1685687157"/>
+        <p14:creationId xmlns:p14="http://schemas.microsoft.com/office/powerpoint/2010/main" val="1442130320"/>
       </p:ext>
     </p:extLst>
   </p:cSld>
@@ -2780,7 +2780,7 @@
           <p:cNvPr id="2" name="Marcador de título 1">
             <a:extLst>
               <a:ext uri="{FF2B5EF4-FFF2-40B4-BE49-F238E27FC236}">
-                <a16:creationId xmlns:a16="http://schemas.microsoft.com/office/drawing/2014/main" id="{1F4A310F-44E4-321F-FA92-1D7F528B3A33}"/>
+                <a16:creationId xmlns:a16="http://schemas.microsoft.com/office/drawing/2014/main" id="{6187FEB4-0BB9-E195-F732-8C7ABE7BF6F0}"/>
               </a:ext>
             </a:extLst>
           </p:cNvPr>
@@ -2818,7 +2818,7 @@
           <p:cNvPr id="3" name="Marcador de texto 2">
             <a:extLst>
               <a:ext uri="{FF2B5EF4-FFF2-40B4-BE49-F238E27FC236}">
-                <a16:creationId xmlns:a16="http://schemas.microsoft.com/office/drawing/2014/main" id="{44C6DACB-4F5D-7A99-4C6D-90BEAD91EF84}"/>
+                <a16:creationId xmlns:a16="http://schemas.microsoft.com/office/drawing/2014/main" id="{9D0936A3-8B0F-0B92-C1B9-28709DF67DD5}"/>
               </a:ext>
             </a:extLst>
           </p:cNvPr>
@@ -2885,7 +2885,7 @@
           <p:cNvPr id="4" name="Marcador de fecha 3">
             <a:extLst>
               <a:ext uri="{FF2B5EF4-FFF2-40B4-BE49-F238E27FC236}">
-                <a16:creationId xmlns:a16="http://schemas.microsoft.com/office/drawing/2014/main" id="{1EE25504-6BDA-1385-EAB0-0848FA6168AE}"/>
+                <a16:creationId xmlns:a16="http://schemas.microsoft.com/office/drawing/2014/main" id="{16135521-3597-C0E8-C2D2-08D76DF2FA08}"/>
               </a:ext>
             </a:extLst>
           </p:cNvPr>
@@ -2919,9 +2919,9 @@
             </a:lvl1pPr>
           </a:lstStyle>
           <a:p>
-            <a:fld id="{7DF9D857-2BC1-4ECA-A48E-C0419EF44063}" type="datetimeFigureOut">
+            <a:fld id="{3594F67B-593D-4384-8F95-2FBEEBEEB27A}" type="datetimeFigureOut">
               <a:rPr lang="es-ES" smtClean="0"/>
-              <a:t>27/05/2026</a:t>
+              <a:t>01/06/2026</a:t>
             </a:fld>
             <a:endParaRPr lang="es-ES"/>
           </a:p>
@@ -2932,7 +2932,7 @@
           <p:cNvPr id="5" name="Marcador de pie de página 4">
             <a:extLst>
               <a:ext uri="{FF2B5EF4-FFF2-40B4-BE49-F238E27FC236}">
-                <a16:creationId xmlns:a16="http://schemas.microsoft.com/office/drawing/2014/main" id="{AF456258-1A26-2EB6-2580-AEFB2B83FC43}"/>
+                <a16:creationId xmlns:a16="http://schemas.microsoft.com/office/drawing/2014/main" id="{7AF63953-D0FE-0737-3EB9-0ECEC8641ABD}"/>
               </a:ext>
             </a:extLst>
           </p:cNvPr>
@@ -2975,7 +2975,7 @@
           <p:cNvPr id="6" name="Marcador de número de diapositiva 5">
             <a:extLst>
               <a:ext uri="{FF2B5EF4-FFF2-40B4-BE49-F238E27FC236}">
-                <a16:creationId xmlns:a16="http://schemas.microsoft.com/office/drawing/2014/main" id="{5AB82232-6D7E-9E91-8165-3E10466B2909}"/>
+                <a16:creationId xmlns:a16="http://schemas.microsoft.com/office/drawing/2014/main" id="{5DDB0455-9A68-BF0F-C35E-57904400E01A}"/>
               </a:ext>
             </a:extLst>
           </p:cNvPr>
@@ -3009,7 +3009,7 @@
             </a:lvl1pPr>
           </a:lstStyle>
           <a:p>
-            <a:fld id="{AA515A41-34E0-4B8A-BFF5-025DE5A27467}" type="slidenum">
+            <a:fld id="{3E216418-6303-4DF4-80EB-715B8707D44E}" type="slidenum">
               <a:rPr lang="es-ES" smtClean="0"/>
               <a:t>‹Nº›</a:t>
             </a:fld>
@@ -3020,7 +3020,7 @@
     </p:spTree>
     <p:extLst>
       <p:ext uri="{BB962C8B-B14F-4D97-AF65-F5344CB8AC3E}">
-        <p14:creationId xmlns:p14="http://schemas.microsoft.com/office/powerpoint/2010/main" val="534919433"/>
+        <p14:creationId xmlns:p14="http://schemas.microsoft.com/office/powerpoint/2010/main" val="3720018694"/>
       </p:ext>
     </p:extLst>
   </p:cSld>
@@ -3351,7 +3351,7 @@
           <p:cNvPr id="2" name="Rectángulo: esquinas redondeadas 1">
             <a:extLst>
               <a:ext uri="{FF2B5EF4-FFF2-40B4-BE49-F238E27FC236}">
-                <a16:creationId xmlns:a16="http://schemas.microsoft.com/office/drawing/2014/main" id="{5C21021A-731D-BD7C-8102-3890FC965641}"/>
+                <a16:creationId xmlns:a16="http://schemas.microsoft.com/office/drawing/2014/main" id="{913392A5-DAD7-00CE-8C62-AF4441EFB2B1}"/>
               </a:ext>
             </a:extLst>
           </p:cNvPr>
@@ -3405,7 +3405,7 @@
           <p:cNvPr id="3" name="CuadroTexto 2">
             <a:extLst>
               <a:ext uri="{FF2B5EF4-FFF2-40B4-BE49-F238E27FC236}">
-                <a16:creationId xmlns:a16="http://schemas.microsoft.com/office/drawing/2014/main" id="{B53EB162-B404-27F8-366A-9668BE3F0E0B}"/>
+                <a16:creationId xmlns:a16="http://schemas.microsoft.com/office/drawing/2014/main" id="{FC6E0A4B-BC99-08BD-5903-28A0EAD657EB}"/>
               </a:ext>
             </a:extLst>
           </p:cNvPr>
@@ -3445,7 +3445,7 @@
           <p:cNvPr id="4" name="CuadroTexto 3">
             <a:extLst>
               <a:ext uri="{FF2B5EF4-FFF2-40B4-BE49-F238E27FC236}">
-                <a16:creationId xmlns:a16="http://schemas.microsoft.com/office/drawing/2014/main" id="{39048014-6286-8C34-EB02-8F37C4F05425}"/>
+                <a16:creationId xmlns:a16="http://schemas.microsoft.com/office/drawing/2014/main" id="{4CB2720E-52A3-DF62-9339-FF6F64BCCA76}"/>
               </a:ext>
             </a:extLst>
           </p:cNvPr>
@@ -3485,7 +3485,7 @@
           <p:cNvPr id="5" name="CuadroTexto 4">
             <a:extLst>
               <a:ext uri="{FF2B5EF4-FFF2-40B4-BE49-F238E27FC236}">
-                <a16:creationId xmlns:a16="http://schemas.microsoft.com/office/drawing/2014/main" id="{EA0EFDAC-DB66-0A51-CCDA-ABD4BB8BBA11}"/>
+                <a16:creationId xmlns:a16="http://schemas.microsoft.com/office/drawing/2014/main" id="{3B9648D0-46DE-E745-F09E-08DC587B28FF}"/>
               </a:ext>
             </a:extLst>
           </p:cNvPr>
@@ -3525,7 +3525,7 @@
           <p:cNvPr id="6" name="CuadroTexto 5">
             <a:extLst>
               <a:ext uri="{FF2B5EF4-FFF2-40B4-BE49-F238E27FC236}">
-                <a16:creationId xmlns:a16="http://schemas.microsoft.com/office/drawing/2014/main" id="{6DF1A827-FF03-4481-F1DD-A3D36674FD4B}"/>
+                <a16:creationId xmlns:a16="http://schemas.microsoft.com/office/drawing/2014/main" id="{54D9DBF7-DC5D-337C-2E1B-DDA58DCDCDCC}"/>
               </a:ext>
             </a:extLst>
           </p:cNvPr>
@@ -3576,7 +3576,7 @@
           <p:cNvPr id="8" name="Imagen 7">
             <a:extLst>
               <a:ext uri="{FF2B5EF4-FFF2-40B4-BE49-F238E27FC236}">
-                <a16:creationId xmlns:a16="http://schemas.microsoft.com/office/drawing/2014/main" id="{CCDA0E7A-E6D7-1D80-8DFB-CC867396DDB2}"/>
+                <a16:creationId xmlns:a16="http://schemas.microsoft.com/office/drawing/2014/main" id="{8B41F678-91DD-15AE-8E90-19E5CC51A651}"/>
               </a:ext>
             </a:extLst>
           </p:cNvPr>
@@ -3615,7 +3615,7 @@
     </p:spTree>
     <p:extLst>
       <p:ext uri="{BB962C8B-B14F-4D97-AF65-F5344CB8AC3E}">
-        <p14:creationId xmlns:p14="http://schemas.microsoft.com/office/powerpoint/2010/main" val="2577456464"/>
+        <p14:creationId xmlns:p14="http://schemas.microsoft.com/office/powerpoint/2010/main" val="1107875203"/>
       </p:ext>
     </p:extLst>
   </p:cSld>
@@ -3655,7 +3655,7 @@
           <p:cNvPr id="2" name="CuadroTexto 1">
             <a:extLst>
               <a:ext uri="{FF2B5EF4-FFF2-40B4-BE49-F238E27FC236}">
-                <a16:creationId xmlns:a16="http://schemas.microsoft.com/office/drawing/2014/main" id="{2DAFACFB-80D7-5FD8-2363-C08A84230F60}"/>
+                <a16:creationId xmlns:a16="http://schemas.microsoft.com/office/drawing/2014/main" id="{BFF9A577-7809-B456-65E0-B104694C7008}"/>
               </a:ext>
             </a:extLst>
           </p:cNvPr>
@@ -3695,7 +3695,7 @@
           <p:cNvPr id="3" name="CuadroTexto 2">
             <a:extLst>
               <a:ext uri="{FF2B5EF4-FFF2-40B4-BE49-F238E27FC236}">
-                <a16:creationId xmlns:a16="http://schemas.microsoft.com/office/drawing/2014/main" id="{2BE4E9F7-7ADD-BB4E-C2CF-68611E371028}"/>
+                <a16:creationId xmlns:a16="http://schemas.microsoft.com/office/drawing/2014/main" id="{2CF00E4E-FC2B-4518-60EE-FB842C64E533}"/>
               </a:ext>
             </a:extLst>
           </p:cNvPr>
@@ -3735,7 +3735,7 @@
           <p:cNvPr id="4" name="CuadroTexto 3">
             <a:extLst>
               <a:ext uri="{FF2B5EF4-FFF2-40B4-BE49-F238E27FC236}">
-                <a16:creationId xmlns:a16="http://schemas.microsoft.com/office/drawing/2014/main" id="{ADECF87B-9681-5FC8-B46E-90823A3D70E6}"/>
+                <a16:creationId xmlns:a16="http://schemas.microsoft.com/office/drawing/2014/main" id="{FFEA32CE-CBDF-069C-11D0-844AA579B72F}"/>
               </a:ext>
             </a:extLst>
           </p:cNvPr>
@@ -3775,7 +3775,7 @@
           <p:cNvPr id="5" name="Rectángulo: esquinas redondeadas 4">
             <a:extLst>
               <a:ext uri="{FF2B5EF4-FFF2-40B4-BE49-F238E27FC236}">
-                <a16:creationId xmlns:a16="http://schemas.microsoft.com/office/drawing/2014/main" id="{6D1AEA64-2F0E-FD31-1E48-81AA0EE5224C}"/>
+                <a16:creationId xmlns:a16="http://schemas.microsoft.com/office/drawing/2014/main" id="{E49EC66D-0653-1C7C-EB5F-EB891CC09A9C}"/>
               </a:ext>
             </a:extLst>
           </p:cNvPr>
@@ -3829,7 +3829,7 @@
           <p:cNvPr id="6" name="CuadroTexto 5">
             <a:extLst>
               <a:ext uri="{FF2B5EF4-FFF2-40B4-BE49-F238E27FC236}">
-                <a16:creationId xmlns:a16="http://schemas.microsoft.com/office/drawing/2014/main" id="{CF410CEA-58BF-683F-FA42-462212E14AAD}"/>
+                <a16:creationId xmlns:a16="http://schemas.microsoft.com/office/drawing/2014/main" id="{F9136EFE-6083-A01B-38C9-54B0B36745A1}"/>
               </a:ext>
             </a:extLst>
           </p:cNvPr>
@@ -3869,7 +3869,7 @@
           <p:cNvPr id="7" name="CuadroTexto 6">
             <a:extLst>
               <a:ext uri="{FF2B5EF4-FFF2-40B4-BE49-F238E27FC236}">
-                <a16:creationId xmlns:a16="http://schemas.microsoft.com/office/drawing/2014/main" id="{58372610-7914-4758-2055-CF56C828BEEE}"/>
+                <a16:creationId xmlns:a16="http://schemas.microsoft.com/office/drawing/2014/main" id="{91E1F0B5-27C6-4230-A446-ED009B09D268}"/>
               </a:ext>
             </a:extLst>
           </p:cNvPr>
@@ -3988,7 +3988,7 @@
           <p:cNvPr id="8" name="Rectángulo: esquinas redondeadas 7">
             <a:extLst>
               <a:ext uri="{FF2B5EF4-FFF2-40B4-BE49-F238E27FC236}">
-                <a16:creationId xmlns:a16="http://schemas.microsoft.com/office/drawing/2014/main" id="{5833D4F6-6461-6404-5CC8-A8AF549C4DF2}"/>
+                <a16:creationId xmlns:a16="http://schemas.microsoft.com/office/drawing/2014/main" id="{673AD033-FB67-0DAF-DBC4-D7A50B83F597}"/>
               </a:ext>
             </a:extLst>
           </p:cNvPr>
@@ -4042,7 +4042,7 @@
           <p:cNvPr id="9" name="CuadroTexto 8">
             <a:extLst>
               <a:ext uri="{FF2B5EF4-FFF2-40B4-BE49-F238E27FC236}">
-                <a16:creationId xmlns:a16="http://schemas.microsoft.com/office/drawing/2014/main" id="{B86E8B70-9A97-A59B-3BF2-43F7B273C367}"/>
+                <a16:creationId xmlns:a16="http://schemas.microsoft.com/office/drawing/2014/main" id="{8CE381C0-EE38-B7EC-66F4-A762995AEE76}"/>
               </a:ext>
             </a:extLst>
           </p:cNvPr>
@@ -4082,7 +4082,7 @@
           <p:cNvPr id="10" name="CuadroTexto 9">
             <a:extLst>
               <a:ext uri="{FF2B5EF4-FFF2-40B4-BE49-F238E27FC236}">
-                <a16:creationId xmlns:a16="http://schemas.microsoft.com/office/drawing/2014/main" id="{836AD5C9-DA30-BD9E-D349-51EFD08D301A}"/>
+                <a16:creationId xmlns:a16="http://schemas.microsoft.com/office/drawing/2014/main" id="{D566BCAC-1BB9-B767-AB27-5C6DFFEB671D}"/>
               </a:ext>
             </a:extLst>
           </p:cNvPr>
@@ -4122,7 +4122,7 @@
           <p:cNvPr id="11" name="Rectángulo: esquinas redondeadas 10">
             <a:extLst>
               <a:ext uri="{FF2B5EF4-FFF2-40B4-BE49-F238E27FC236}">
-                <a16:creationId xmlns:a16="http://schemas.microsoft.com/office/drawing/2014/main" id="{B6486B53-C0B3-3CEC-50CD-AD6DFDCD8DB7}"/>
+                <a16:creationId xmlns:a16="http://schemas.microsoft.com/office/drawing/2014/main" id="{4349613C-8BA6-B55E-01A1-EEE7D4944CA9}"/>
               </a:ext>
             </a:extLst>
           </p:cNvPr>
@@ -4176,7 +4176,7 @@
           <p:cNvPr id="12" name="CuadroTexto 11">
             <a:extLst>
               <a:ext uri="{FF2B5EF4-FFF2-40B4-BE49-F238E27FC236}">
-                <a16:creationId xmlns:a16="http://schemas.microsoft.com/office/drawing/2014/main" id="{B9E83C5C-D7AA-0B77-A468-718A426FADC8}"/>
+                <a16:creationId xmlns:a16="http://schemas.microsoft.com/office/drawing/2014/main" id="{1D755BB5-B2B8-7C57-F3E2-B3BE437D1F66}"/>
               </a:ext>
             </a:extLst>
           </p:cNvPr>
@@ -4216,7 +4216,7 @@
           <p:cNvPr id="13" name="CuadroTexto 12">
             <a:extLst>
               <a:ext uri="{FF2B5EF4-FFF2-40B4-BE49-F238E27FC236}">
-                <a16:creationId xmlns:a16="http://schemas.microsoft.com/office/drawing/2014/main" id="{1330EEA6-2376-81FB-AE65-3B8744BB9603}"/>
+                <a16:creationId xmlns:a16="http://schemas.microsoft.com/office/drawing/2014/main" id="{9E62A85F-BAA2-4BD7-E8B2-6464E3C2CDB9}"/>
               </a:ext>
             </a:extLst>
           </p:cNvPr>
@@ -4256,7 +4256,7 @@
           <p:cNvPr id="14" name="Rectángulo: esquinas redondeadas 13">
             <a:extLst>
               <a:ext uri="{FF2B5EF4-FFF2-40B4-BE49-F238E27FC236}">
-                <a16:creationId xmlns:a16="http://schemas.microsoft.com/office/drawing/2014/main" id="{1FDF2267-131A-C751-687C-166852FF3B52}"/>
+                <a16:creationId xmlns:a16="http://schemas.microsoft.com/office/drawing/2014/main" id="{73E41BDF-47AA-07DD-B88A-F74F4869CF9E}"/>
               </a:ext>
             </a:extLst>
           </p:cNvPr>
@@ -4310,7 +4310,7 @@
           <p:cNvPr id="15" name="CuadroTexto 14">
             <a:extLst>
               <a:ext uri="{FF2B5EF4-FFF2-40B4-BE49-F238E27FC236}">
-                <a16:creationId xmlns:a16="http://schemas.microsoft.com/office/drawing/2014/main" id="{CCB386C5-F39C-3FC0-0F45-51A2612BCF1B}"/>
+                <a16:creationId xmlns:a16="http://schemas.microsoft.com/office/drawing/2014/main" id="{9ABED569-C0E5-4D0F-6C8C-7D13D8419892}"/>
               </a:ext>
             </a:extLst>
           </p:cNvPr>
@@ -4350,7 +4350,7 @@
           <p:cNvPr id="16" name="CuadroTexto 15">
             <a:extLst>
               <a:ext uri="{FF2B5EF4-FFF2-40B4-BE49-F238E27FC236}">
-                <a16:creationId xmlns:a16="http://schemas.microsoft.com/office/drawing/2014/main" id="{72DDCB08-4518-EB21-7ACD-F5FDF90651E0}"/>
+                <a16:creationId xmlns:a16="http://schemas.microsoft.com/office/drawing/2014/main" id="{F6F4A994-C60B-6D2B-0E76-769FF49CFE3D}"/>
               </a:ext>
             </a:extLst>
           </p:cNvPr>
@@ -4390,7 +4390,7 @@
           <p:cNvPr id="17" name="Rectángulo: esquinas redondeadas 16">
             <a:extLst>
               <a:ext uri="{FF2B5EF4-FFF2-40B4-BE49-F238E27FC236}">
-                <a16:creationId xmlns:a16="http://schemas.microsoft.com/office/drawing/2014/main" id="{A320F2B7-174C-1027-38D7-ECFF71D80656}"/>
+                <a16:creationId xmlns:a16="http://schemas.microsoft.com/office/drawing/2014/main" id="{A3D26979-58BF-5A44-A620-D64E00B337E7}"/>
               </a:ext>
             </a:extLst>
           </p:cNvPr>
@@ -4444,7 +4444,7 @@
           <p:cNvPr id="18" name="CuadroTexto 17">
             <a:extLst>
               <a:ext uri="{FF2B5EF4-FFF2-40B4-BE49-F238E27FC236}">
-                <a16:creationId xmlns:a16="http://schemas.microsoft.com/office/drawing/2014/main" id="{FB53001C-A200-2209-3614-1259FBB90E1D}"/>
+                <a16:creationId xmlns:a16="http://schemas.microsoft.com/office/drawing/2014/main" id="{7F1D49D1-E5E0-BD98-D4F3-A13793C5CD0F}"/>
               </a:ext>
             </a:extLst>
           </p:cNvPr>
@@ -4484,7 +4484,7 @@
           <p:cNvPr id="19" name="CuadroTexto 18">
             <a:extLst>
               <a:ext uri="{FF2B5EF4-FFF2-40B4-BE49-F238E27FC236}">
-                <a16:creationId xmlns:a16="http://schemas.microsoft.com/office/drawing/2014/main" id="{B71A4644-3886-B7F2-8B3F-ADB935E517C2}"/>
+                <a16:creationId xmlns:a16="http://schemas.microsoft.com/office/drawing/2014/main" id="{077457B9-C6DC-795E-656F-39386501D72D}"/>
               </a:ext>
             </a:extLst>
           </p:cNvPr>
@@ -4522,7 +4522,7 @@
     </p:spTree>
     <p:extLst>
       <p:ext uri="{BB962C8B-B14F-4D97-AF65-F5344CB8AC3E}">
-        <p14:creationId xmlns:p14="http://schemas.microsoft.com/office/powerpoint/2010/main" val="3510644319"/>
+        <p14:creationId xmlns:p14="http://schemas.microsoft.com/office/powerpoint/2010/main" val="2538126929"/>
       </p:ext>
     </p:extLst>
   </p:cSld>
@@ -4562,7 +4562,7 @@
           <p:cNvPr id="2" name="CuadroTexto 1">
             <a:extLst>
               <a:ext uri="{FF2B5EF4-FFF2-40B4-BE49-F238E27FC236}">
-                <a16:creationId xmlns:a16="http://schemas.microsoft.com/office/drawing/2014/main" id="{7CEEDE5F-50BB-0917-399B-C8FB6165E00C}"/>
+                <a16:creationId xmlns:a16="http://schemas.microsoft.com/office/drawing/2014/main" id="{ED56A351-B102-5B4D-A383-DF5B3A3BE314}"/>
               </a:ext>
             </a:extLst>
           </p:cNvPr>
@@ -4602,7 +4602,7 @@
           <p:cNvPr id="3" name="CuadroTexto 2">
             <a:extLst>
               <a:ext uri="{FF2B5EF4-FFF2-40B4-BE49-F238E27FC236}">
-                <a16:creationId xmlns:a16="http://schemas.microsoft.com/office/drawing/2014/main" id="{23804E9C-6A0D-07F4-AB1E-A3F992B98FA4}"/>
+                <a16:creationId xmlns:a16="http://schemas.microsoft.com/office/drawing/2014/main" id="{2670CB2E-8F4D-116B-70E6-9C0C066832CC}"/>
               </a:ext>
             </a:extLst>
           </p:cNvPr>
@@ -4642,7 +4642,7 @@
           <p:cNvPr id="4" name="CuadroTexto 3">
             <a:extLst>
               <a:ext uri="{FF2B5EF4-FFF2-40B4-BE49-F238E27FC236}">
-                <a16:creationId xmlns:a16="http://schemas.microsoft.com/office/drawing/2014/main" id="{E9394BCA-BA92-1008-BE68-D26ED27277C6}"/>
+                <a16:creationId xmlns:a16="http://schemas.microsoft.com/office/drawing/2014/main" id="{DA09D5B3-3B80-63BC-4B3F-B6122F33107A}"/>
               </a:ext>
             </a:extLst>
           </p:cNvPr>
@@ -4682,7 +4682,7 @@
           <p:cNvPr id="5" name="Rectángulo: esquinas redondeadas 4">
             <a:extLst>
               <a:ext uri="{FF2B5EF4-FFF2-40B4-BE49-F238E27FC236}">
-                <a16:creationId xmlns:a16="http://schemas.microsoft.com/office/drawing/2014/main" id="{0A08D243-A7CA-D48E-592D-D1455304947E}"/>
+                <a16:creationId xmlns:a16="http://schemas.microsoft.com/office/drawing/2014/main" id="{B9A138B7-E719-8DCA-92B9-94B3380E794E}"/>
               </a:ext>
             </a:extLst>
           </p:cNvPr>
@@ -4736,7 +4736,7 @@
           <p:cNvPr id="6" name="CuadroTexto 5">
             <a:extLst>
               <a:ext uri="{FF2B5EF4-FFF2-40B4-BE49-F238E27FC236}">
-                <a16:creationId xmlns:a16="http://schemas.microsoft.com/office/drawing/2014/main" id="{5FC70503-32F7-AB23-6077-DB168DA4F5EE}"/>
+                <a16:creationId xmlns:a16="http://schemas.microsoft.com/office/drawing/2014/main" id="{C73C2268-81FE-ECC0-1CD2-3D72441CFA0C}"/>
               </a:ext>
             </a:extLst>
           </p:cNvPr>
@@ -4776,7 +4776,7 @@
           <p:cNvPr id="7" name="CuadroTexto 6">
             <a:extLst>
               <a:ext uri="{FF2B5EF4-FFF2-40B4-BE49-F238E27FC236}">
-                <a16:creationId xmlns:a16="http://schemas.microsoft.com/office/drawing/2014/main" id="{0A6A47F9-1C47-765B-E66E-F0E29EB720CC}"/>
+                <a16:creationId xmlns:a16="http://schemas.microsoft.com/office/drawing/2014/main" id="{1B5BEF91-F8FF-29D3-58C9-47B8B3BA4396}"/>
               </a:ext>
             </a:extLst>
           </p:cNvPr>
@@ -4816,7 +4816,7 @@
           <p:cNvPr id="8" name="Rectángulo: esquinas redondeadas 7">
             <a:extLst>
               <a:ext uri="{FF2B5EF4-FFF2-40B4-BE49-F238E27FC236}">
-                <a16:creationId xmlns:a16="http://schemas.microsoft.com/office/drawing/2014/main" id="{4E3EC0F7-D648-EAAB-3301-1960AE2E2FA6}"/>
+                <a16:creationId xmlns:a16="http://schemas.microsoft.com/office/drawing/2014/main" id="{8EAE63BD-8508-6082-B985-68EAC8D05A58}"/>
               </a:ext>
             </a:extLst>
           </p:cNvPr>
@@ -4870,7 +4870,7 @@
           <p:cNvPr id="9" name="CuadroTexto 8">
             <a:extLst>
               <a:ext uri="{FF2B5EF4-FFF2-40B4-BE49-F238E27FC236}">
-                <a16:creationId xmlns:a16="http://schemas.microsoft.com/office/drawing/2014/main" id="{C8BF4BF4-695A-D88E-1F0F-1EB784C5D477}"/>
+                <a16:creationId xmlns:a16="http://schemas.microsoft.com/office/drawing/2014/main" id="{46321B82-B264-8C2A-D8F2-A08B52343144}"/>
               </a:ext>
             </a:extLst>
           </p:cNvPr>
@@ -4910,7 +4910,7 @@
           <p:cNvPr id="10" name="CuadroTexto 9">
             <a:extLst>
               <a:ext uri="{FF2B5EF4-FFF2-40B4-BE49-F238E27FC236}">
-                <a16:creationId xmlns:a16="http://schemas.microsoft.com/office/drawing/2014/main" id="{8F00DB8B-7F11-3273-5889-9453992EA05C}"/>
+                <a16:creationId xmlns:a16="http://schemas.microsoft.com/office/drawing/2014/main" id="{EE33E112-80E5-1685-3057-8E9849F6AE39}"/>
               </a:ext>
             </a:extLst>
           </p:cNvPr>
@@ -4950,7 +4950,7 @@
           <p:cNvPr id="11" name="Rectángulo: esquinas redondeadas 10">
             <a:extLst>
               <a:ext uri="{FF2B5EF4-FFF2-40B4-BE49-F238E27FC236}">
-                <a16:creationId xmlns:a16="http://schemas.microsoft.com/office/drawing/2014/main" id="{4711F600-0351-B6A8-7F18-D27788BD4C54}"/>
+                <a16:creationId xmlns:a16="http://schemas.microsoft.com/office/drawing/2014/main" id="{86354808-F438-E51D-16DB-F3443E3F9CC2}"/>
               </a:ext>
             </a:extLst>
           </p:cNvPr>
@@ -5004,7 +5004,7 @@
           <p:cNvPr id="12" name="CuadroTexto 11">
             <a:extLst>
               <a:ext uri="{FF2B5EF4-FFF2-40B4-BE49-F238E27FC236}">
-                <a16:creationId xmlns:a16="http://schemas.microsoft.com/office/drawing/2014/main" id="{A6138A3E-6C95-0782-580B-B7ED3EDDCC21}"/>
+                <a16:creationId xmlns:a16="http://schemas.microsoft.com/office/drawing/2014/main" id="{2DA8EC25-2F26-8D15-BFF5-E4F4A9A6EFA8}"/>
               </a:ext>
             </a:extLst>
           </p:cNvPr>
@@ -5044,7 +5044,7 @@
           <p:cNvPr id="13" name="CuadroTexto 12">
             <a:extLst>
               <a:ext uri="{FF2B5EF4-FFF2-40B4-BE49-F238E27FC236}">
-                <a16:creationId xmlns:a16="http://schemas.microsoft.com/office/drawing/2014/main" id="{5C48DFCA-94A5-8E0A-C947-1CDD1AB1A164}"/>
+                <a16:creationId xmlns:a16="http://schemas.microsoft.com/office/drawing/2014/main" id="{497DB956-BC8F-D0E3-9192-F75F3E0E3313}"/>
               </a:ext>
             </a:extLst>
           </p:cNvPr>
@@ -5084,7 +5084,7 @@
           <p:cNvPr id="14" name="CuadroTexto 13">
             <a:extLst>
               <a:ext uri="{FF2B5EF4-FFF2-40B4-BE49-F238E27FC236}">
-                <a16:creationId xmlns:a16="http://schemas.microsoft.com/office/drawing/2014/main" id="{EE5CC75F-F5EF-31C9-EC42-68947BF0DFDB}"/>
+                <a16:creationId xmlns:a16="http://schemas.microsoft.com/office/drawing/2014/main" id="{C6400640-A15C-E362-2288-AB11C8BE892E}"/>
               </a:ext>
             </a:extLst>
           </p:cNvPr>
@@ -5165,7 +5165,7 @@
     </p:spTree>
     <p:extLst>
       <p:ext uri="{BB962C8B-B14F-4D97-AF65-F5344CB8AC3E}">
-        <p14:creationId xmlns:p14="http://schemas.microsoft.com/office/powerpoint/2010/main" val="2469724980"/>
+        <p14:creationId xmlns:p14="http://schemas.microsoft.com/office/powerpoint/2010/main" val="1063861715"/>
       </p:ext>
     </p:extLst>
   </p:cSld>
@@ -5205,7 +5205,7 @@
           <p:cNvPr id="2" name="CuadroTexto 1">
             <a:extLst>
               <a:ext uri="{FF2B5EF4-FFF2-40B4-BE49-F238E27FC236}">
-                <a16:creationId xmlns:a16="http://schemas.microsoft.com/office/drawing/2014/main" id="{7B7D82D7-B708-D180-EFB4-6C21EF8B331C}"/>
+                <a16:creationId xmlns:a16="http://schemas.microsoft.com/office/drawing/2014/main" id="{6D623C66-C0E9-666B-50D8-442B52D110A7}"/>
               </a:ext>
             </a:extLst>
           </p:cNvPr>
@@ -5245,7 +5245,7 @@
           <p:cNvPr id="3" name="CuadroTexto 2">
             <a:extLst>
               <a:ext uri="{FF2B5EF4-FFF2-40B4-BE49-F238E27FC236}">
-                <a16:creationId xmlns:a16="http://schemas.microsoft.com/office/drawing/2014/main" id="{6FADF928-4261-2380-B043-AEF1226E6AF9}"/>
+                <a16:creationId xmlns:a16="http://schemas.microsoft.com/office/drawing/2014/main" id="{BBC33574-FB23-71CA-1C15-1CCFBBA71A49}"/>
               </a:ext>
             </a:extLst>
           </p:cNvPr>
@@ -5285,7 +5285,7 @@
           <p:cNvPr id="4" name="CuadroTexto 3">
             <a:extLst>
               <a:ext uri="{FF2B5EF4-FFF2-40B4-BE49-F238E27FC236}">
-                <a16:creationId xmlns:a16="http://schemas.microsoft.com/office/drawing/2014/main" id="{C0E91017-F843-F648-311B-F90979922D69}"/>
+                <a16:creationId xmlns:a16="http://schemas.microsoft.com/office/drawing/2014/main" id="{E9408B09-9C32-C084-73F5-F57BA107CFBE}"/>
               </a:ext>
             </a:extLst>
           </p:cNvPr>
@@ -5325,7 +5325,7 @@
           <p:cNvPr id="6" name="Imagen 5">
             <a:extLst>
               <a:ext uri="{FF2B5EF4-FFF2-40B4-BE49-F238E27FC236}">
-                <a16:creationId xmlns:a16="http://schemas.microsoft.com/office/drawing/2014/main" id="{EFCDCC7E-691C-B01A-77BD-D8B6B8C710B0}"/>
+                <a16:creationId xmlns:a16="http://schemas.microsoft.com/office/drawing/2014/main" id="{E85465EB-29AE-3F4E-1B81-FAEE66B1A9AF}"/>
               </a:ext>
             </a:extLst>
           </p:cNvPr>
@@ -5366,7 +5366,7 @@
           <p:cNvPr id="7" name="Rectángulo: esquinas redondeadas 6">
             <a:extLst>
               <a:ext uri="{FF2B5EF4-FFF2-40B4-BE49-F238E27FC236}">
-                <a16:creationId xmlns:a16="http://schemas.microsoft.com/office/drawing/2014/main" id="{353A1019-86EF-FDFC-F858-663ED918FAF0}"/>
+                <a16:creationId xmlns:a16="http://schemas.microsoft.com/office/drawing/2014/main" id="{93990720-3781-3A0B-5DD4-D4484618757A}"/>
               </a:ext>
             </a:extLst>
           </p:cNvPr>
@@ -5420,7 +5420,7 @@
           <p:cNvPr id="8" name="CuadroTexto 7">
             <a:extLst>
               <a:ext uri="{FF2B5EF4-FFF2-40B4-BE49-F238E27FC236}">
-                <a16:creationId xmlns:a16="http://schemas.microsoft.com/office/drawing/2014/main" id="{6CE17BF1-6AD2-F32C-9450-44ACDA473674}"/>
+                <a16:creationId xmlns:a16="http://schemas.microsoft.com/office/drawing/2014/main" id="{93A56DA7-46A1-5FDC-D08B-6288091DAF95}"/>
               </a:ext>
             </a:extLst>
           </p:cNvPr>
@@ -5460,7 +5460,7 @@
           <p:cNvPr id="9" name="CuadroTexto 8">
             <a:extLst>
               <a:ext uri="{FF2B5EF4-FFF2-40B4-BE49-F238E27FC236}">
-                <a16:creationId xmlns:a16="http://schemas.microsoft.com/office/drawing/2014/main" id="{BA4A0975-109E-4A3F-4B54-EFDA114C070B}"/>
+                <a16:creationId xmlns:a16="http://schemas.microsoft.com/office/drawing/2014/main" id="{516CAFB8-7061-34F1-301D-7073284FC6E5}"/>
               </a:ext>
             </a:extLst>
           </p:cNvPr>
@@ -5500,7 +5500,7 @@
           <p:cNvPr id="10" name="CuadroTexto 9">
             <a:extLst>
               <a:ext uri="{FF2B5EF4-FFF2-40B4-BE49-F238E27FC236}">
-                <a16:creationId xmlns:a16="http://schemas.microsoft.com/office/drawing/2014/main" id="{5ABF088D-72A3-3D27-051A-1B4A038ED58F}"/>
+                <a16:creationId xmlns:a16="http://schemas.microsoft.com/office/drawing/2014/main" id="{4D5C3C5A-4CC8-1D18-F06A-F06368F95D48}"/>
               </a:ext>
             </a:extLst>
           </p:cNvPr>
@@ -5599,7 +5599,7 @@
     </p:spTree>
     <p:extLst>
       <p:ext uri="{BB962C8B-B14F-4D97-AF65-F5344CB8AC3E}">
-        <p14:creationId xmlns:p14="http://schemas.microsoft.com/office/powerpoint/2010/main" val="3632644678"/>
+        <p14:creationId xmlns:p14="http://schemas.microsoft.com/office/powerpoint/2010/main" val="2173236996"/>
       </p:ext>
     </p:extLst>
   </p:cSld>
@@ -5639,7 +5639,7 @@
           <p:cNvPr id="2" name="CuadroTexto 1">
             <a:extLst>
               <a:ext uri="{FF2B5EF4-FFF2-40B4-BE49-F238E27FC236}">
-                <a16:creationId xmlns:a16="http://schemas.microsoft.com/office/drawing/2014/main" id="{F6A78540-E163-B045-AC3A-A21791E4B814}"/>
+                <a16:creationId xmlns:a16="http://schemas.microsoft.com/office/drawing/2014/main" id="{87C5D778-627A-D8B9-892C-8DFBFA624FD6}"/>
               </a:ext>
             </a:extLst>
           </p:cNvPr>
@@ -5679,7 +5679,7 @@
           <p:cNvPr id="3" name="CuadroTexto 2">
             <a:extLst>
               <a:ext uri="{FF2B5EF4-FFF2-40B4-BE49-F238E27FC236}">
-                <a16:creationId xmlns:a16="http://schemas.microsoft.com/office/drawing/2014/main" id="{B24BB97B-08C7-2FD3-87D1-4D571DA1EB59}"/>
+                <a16:creationId xmlns:a16="http://schemas.microsoft.com/office/drawing/2014/main" id="{12B2DDDF-55B9-C610-2C1A-020B9355F37C}"/>
               </a:ext>
             </a:extLst>
           </p:cNvPr>
@@ -5719,7 +5719,7 @@
           <p:cNvPr id="4" name="CuadroTexto 3">
             <a:extLst>
               <a:ext uri="{FF2B5EF4-FFF2-40B4-BE49-F238E27FC236}">
-                <a16:creationId xmlns:a16="http://schemas.microsoft.com/office/drawing/2014/main" id="{5515BA48-9782-B0B0-ABA3-86A36CC8BA90}"/>
+                <a16:creationId xmlns:a16="http://schemas.microsoft.com/office/drawing/2014/main" id="{893AB31E-287D-BAAD-3B3E-B5CA52B0C2E7}"/>
               </a:ext>
             </a:extLst>
           </p:cNvPr>
@@ -5759,7 +5759,7 @@
           <p:cNvPr id="6" name="Imagen 5">
             <a:extLst>
               <a:ext uri="{FF2B5EF4-FFF2-40B4-BE49-F238E27FC236}">
-                <a16:creationId xmlns:a16="http://schemas.microsoft.com/office/drawing/2014/main" id="{B1D285CA-55C4-F977-7CF5-70DB4D2C5CA7}"/>
+                <a16:creationId xmlns:a16="http://schemas.microsoft.com/office/drawing/2014/main" id="{03016FCD-FE2A-326C-FC97-3A0EACDFF44A}"/>
               </a:ext>
             </a:extLst>
           </p:cNvPr>
@@ -5800,7 +5800,7 @@
           <p:cNvPr id="7" name="CuadroTexto 6">
             <a:extLst>
               <a:ext uri="{FF2B5EF4-FFF2-40B4-BE49-F238E27FC236}">
-                <a16:creationId xmlns:a16="http://schemas.microsoft.com/office/drawing/2014/main" id="{31E57BAD-3F1E-06EE-E8B0-E17A430D6065}"/>
+                <a16:creationId xmlns:a16="http://schemas.microsoft.com/office/drawing/2014/main" id="{4F1DCC39-6B41-A880-5AC8-72DCCD341F18}"/>
               </a:ext>
             </a:extLst>
           </p:cNvPr>
@@ -5917,7 +5917,7 @@
     </p:spTree>
     <p:extLst>
       <p:ext uri="{BB962C8B-B14F-4D97-AF65-F5344CB8AC3E}">
-        <p14:creationId xmlns:p14="http://schemas.microsoft.com/office/powerpoint/2010/main" val="3572334078"/>
+        <p14:creationId xmlns:p14="http://schemas.microsoft.com/office/powerpoint/2010/main" val="2461408223"/>
       </p:ext>
     </p:extLst>
   </p:cSld>
@@ -5957,7 +5957,7 @@
           <p:cNvPr id="2" name="CuadroTexto 1">
             <a:extLst>
               <a:ext uri="{FF2B5EF4-FFF2-40B4-BE49-F238E27FC236}">
-                <a16:creationId xmlns:a16="http://schemas.microsoft.com/office/drawing/2014/main" id="{15AE60CF-E363-2B77-E838-C415AFE35984}"/>
+                <a16:creationId xmlns:a16="http://schemas.microsoft.com/office/drawing/2014/main" id="{F4BD1C07-8C73-AB07-9157-7A2D8EFA4454}"/>
               </a:ext>
             </a:extLst>
           </p:cNvPr>
@@ -5997,7 +5997,7 @@
           <p:cNvPr id="3" name="CuadroTexto 2">
             <a:extLst>
               <a:ext uri="{FF2B5EF4-FFF2-40B4-BE49-F238E27FC236}">
-                <a16:creationId xmlns:a16="http://schemas.microsoft.com/office/drawing/2014/main" id="{6345F1B8-1C3A-3B10-C5A6-DE1CB265F91C}"/>
+                <a16:creationId xmlns:a16="http://schemas.microsoft.com/office/drawing/2014/main" id="{ED8E57D1-EF7C-A55C-27DE-BA86920BBC9D}"/>
               </a:ext>
             </a:extLst>
           </p:cNvPr>
@@ -6037,7 +6037,7 @@
           <p:cNvPr id="4" name="Rectángulo: esquinas redondeadas 3">
             <a:extLst>
               <a:ext uri="{FF2B5EF4-FFF2-40B4-BE49-F238E27FC236}">
-                <a16:creationId xmlns:a16="http://schemas.microsoft.com/office/drawing/2014/main" id="{D0A90649-836B-F320-C443-410EE1435B1E}"/>
+                <a16:creationId xmlns:a16="http://schemas.microsoft.com/office/drawing/2014/main" id="{1E81567F-652B-E7B7-49A1-134799F305FB}"/>
               </a:ext>
             </a:extLst>
           </p:cNvPr>
@@ -6091,7 +6091,7 @@
           <p:cNvPr id="5" name="CuadroTexto 4">
             <a:extLst>
               <a:ext uri="{FF2B5EF4-FFF2-40B4-BE49-F238E27FC236}">
-                <a16:creationId xmlns:a16="http://schemas.microsoft.com/office/drawing/2014/main" id="{8A32F3C5-F477-675B-904F-367B449B30C3}"/>
+                <a16:creationId xmlns:a16="http://schemas.microsoft.com/office/drawing/2014/main" id="{AAFB9C16-2D81-E590-1201-165E4CE84F1C}"/>
               </a:ext>
             </a:extLst>
           </p:cNvPr>
@@ -6131,7 +6131,7 @@
           <p:cNvPr id="6" name="CuadroTexto 5">
             <a:extLst>
               <a:ext uri="{FF2B5EF4-FFF2-40B4-BE49-F238E27FC236}">
-                <a16:creationId xmlns:a16="http://schemas.microsoft.com/office/drawing/2014/main" id="{E04E598E-D48E-B088-0D0B-9388D2FC5F4A}"/>
+                <a16:creationId xmlns:a16="http://schemas.microsoft.com/office/drawing/2014/main" id="{9E397237-C856-4F07-38B3-5FB0FC870DBB}"/>
               </a:ext>
             </a:extLst>
           </p:cNvPr>
@@ -6171,7 +6171,7 @@
           <p:cNvPr id="7" name="Rectángulo: esquinas redondeadas 6">
             <a:extLst>
               <a:ext uri="{FF2B5EF4-FFF2-40B4-BE49-F238E27FC236}">
-                <a16:creationId xmlns:a16="http://schemas.microsoft.com/office/drawing/2014/main" id="{BE6487A0-3224-A6D8-B359-0197FDA6444F}"/>
+                <a16:creationId xmlns:a16="http://schemas.microsoft.com/office/drawing/2014/main" id="{C4747D4A-D7DD-2CA4-78D6-AE25B89E4E73}"/>
               </a:ext>
             </a:extLst>
           </p:cNvPr>
@@ -6225,7 +6225,7 @@
           <p:cNvPr id="8" name="CuadroTexto 7">
             <a:extLst>
               <a:ext uri="{FF2B5EF4-FFF2-40B4-BE49-F238E27FC236}">
-                <a16:creationId xmlns:a16="http://schemas.microsoft.com/office/drawing/2014/main" id="{05614C6C-273F-16ED-15D0-483983C97A65}"/>
+                <a16:creationId xmlns:a16="http://schemas.microsoft.com/office/drawing/2014/main" id="{DBCE25F4-AEAB-CF41-3D84-F7E7B827F90B}"/>
               </a:ext>
             </a:extLst>
           </p:cNvPr>
@@ -6265,7 +6265,7 @@
           <p:cNvPr id="9" name="CuadroTexto 8">
             <a:extLst>
               <a:ext uri="{FF2B5EF4-FFF2-40B4-BE49-F238E27FC236}">
-                <a16:creationId xmlns:a16="http://schemas.microsoft.com/office/drawing/2014/main" id="{68077E7A-068F-2D77-2B1B-E8861C37ADB6}"/>
+                <a16:creationId xmlns:a16="http://schemas.microsoft.com/office/drawing/2014/main" id="{CAD091DD-616F-4188-68EB-E6F9119A474F}"/>
               </a:ext>
             </a:extLst>
           </p:cNvPr>
@@ -6305,7 +6305,7 @@
           <p:cNvPr id="10" name="Rectángulo: esquinas redondeadas 9">
             <a:extLst>
               <a:ext uri="{FF2B5EF4-FFF2-40B4-BE49-F238E27FC236}">
-                <a16:creationId xmlns:a16="http://schemas.microsoft.com/office/drawing/2014/main" id="{305A896B-439F-8186-6897-B359BC044784}"/>
+                <a16:creationId xmlns:a16="http://schemas.microsoft.com/office/drawing/2014/main" id="{71D529E0-8D97-5540-06D0-68D0B8AEC98E}"/>
               </a:ext>
             </a:extLst>
           </p:cNvPr>
@@ -6359,7 +6359,7 @@
           <p:cNvPr id="11" name="CuadroTexto 10">
             <a:extLst>
               <a:ext uri="{FF2B5EF4-FFF2-40B4-BE49-F238E27FC236}">
-                <a16:creationId xmlns:a16="http://schemas.microsoft.com/office/drawing/2014/main" id="{FADC988E-5836-9656-712D-3215B31FE7BF}"/>
+                <a16:creationId xmlns:a16="http://schemas.microsoft.com/office/drawing/2014/main" id="{1C7A4AAA-6097-E20D-18C0-6E9188E09D05}"/>
               </a:ext>
             </a:extLst>
           </p:cNvPr>
@@ -6399,7 +6399,7 @@
           <p:cNvPr id="12" name="CuadroTexto 11">
             <a:extLst>
               <a:ext uri="{FF2B5EF4-FFF2-40B4-BE49-F238E27FC236}">
-                <a16:creationId xmlns:a16="http://schemas.microsoft.com/office/drawing/2014/main" id="{D21C7DB2-EE2A-0A1F-4162-D417B0F42D11}"/>
+                <a16:creationId xmlns:a16="http://schemas.microsoft.com/office/drawing/2014/main" id="{BEA72C8C-0F35-635A-7DD0-181D55129E10}"/>
               </a:ext>
             </a:extLst>
           </p:cNvPr>
@@ -6439,7 +6439,7 @@
           <p:cNvPr id="13" name="Rectángulo: esquinas redondeadas 12">
             <a:extLst>
               <a:ext uri="{FF2B5EF4-FFF2-40B4-BE49-F238E27FC236}">
-                <a16:creationId xmlns:a16="http://schemas.microsoft.com/office/drawing/2014/main" id="{6B5B5511-EA4D-2EE1-1213-81E93F30634A}"/>
+                <a16:creationId xmlns:a16="http://schemas.microsoft.com/office/drawing/2014/main" id="{AC9ECC78-A1F7-DB6B-75B4-77893B9809B0}"/>
               </a:ext>
             </a:extLst>
           </p:cNvPr>
@@ -6493,7 +6493,7 @@
           <p:cNvPr id="14" name="CuadroTexto 13">
             <a:extLst>
               <a:ext uri="{FF2B5EF4-FFF2-40B4-BE49-F238E27FC236}">
-                <a16:creationId xmlns:a16="http://schemas.microsoft.com/office/drawing/2014/main" id="{DEA772EB-F063-0849-8BFF-693972605AC4}"/>
+                <a16:creationId xmlns:a16="http://schemas.microsoft.com/office/drawing/2014/main" id="{4EF187AC-EEB4-9CA4-8962-5AC17B04124B}"/>
               </a:ext>
             </a:extLst>
           </p:cNvPr>
@@ -6533,7 +6533,7 @@
           <p:cNvPr id="15" name="CuadroTexto 14">
             <a:extLst>
               <a:ext uri="{FF2B5EF4-FFF2-40B4-BE49-F238E27FC236}">
-                <a16:creationId xmlns:a16="http://schemas.microsoft.com/office/drawing/2014/main" id="{2A8E837A-F4C8-C811-0E70-980D4A2F5CEF}"/>
+                <a16:creationId xmlns:a16="http://schemas.microsoft.com/office/drawing/2014/main" id="{AFE852A5-48FC-E608-FF72-E6404035F562}"/>
               </a:ext>
             </a:extLst>
           </p:cNvPr>
@@ -6573,7 +6573,7 @@
           <p:cNvPr id="16" name="CuadroTexto 15">
             <a:extLst>
               <a:ext uri="{FF2B5EF4-FFF2-40B4-BE49-F238E27FC236}">
-                <a16:creationId xmlns:a16="http://schemas.microsoft.com/office/drawing/2014/main" id="{FEB59DB2-FCAD-9268-E5F8-4DF8C6FC3CFA}"/>
+                <a16:creationId xmlns:a16="http://schemas.microsoft.com/office/drawing/2014/main" id="{D947EBFC-CF22-FF91-7F7D-DB44FCE2865A}"/>
               </a:ext>
             </a:extLst>
           </p:cNvPr>
@@ -6656,7 +6656,7 @@
           <p:cNvPr id="17" name="CuadroTexto 16">
             <a:extLst>
               <a:ext uri="{FF2B5EF4-FFF2-40B4-BE49-F238E27FC236}">
-                <a16:creationId xmlns:a16="http://schemas.microsoft.com/office/drawing/2014/main" id="{E23E7F99-4563-27D9-DD28-122A6E1B635A}"/>
+                <a16:creationId xmlns:a16="http://schemas.microsoft.com/office/drawing/2014/main" id="{DE59D7CF-5EEE-653A-1B3E-7080BF304F1F}"/>
               </a:ext>
             </a:extLst>
           </p:cNvPr>
@@ -6694,7 +6694,7 @@
     </p:spTree>
     <p:extLst>
       <p:ext uri="{BB962C8B-B14F-4D97-AF65-F5344CB8AC3E}">
-        <p14:creationId xmlns:p14="http://schemas.microsoft.com/office/powerpoint/2010/main" val="1833900103"/>
+        <p14:creationId xmlns:p14="http://schemas.microsoft.com/office/powerpoint/2010/main" val="1400719236"/>
       </p:ext>
     </p:extLst>
   </p:cSld>
@@ -6734,7 +6734,7 @@
           <p:cNvPr id="2" name="CuadroTexto 1">
             <a:extLst>
               <a:ext uri="{FF2B5EF4-FFF2-40B4-BE49-F238E27FC236}">
-                <a16:creationId xmlns:a16="http://schemas.microsoft.com/office/drawing/2014/main" id="{B3F4C206-8459-F939-248A-3FB31B3C47E2}"/>
+                <a16:creationId xmlns:a16="http://schemas.microsoft.com/office/drawing/2014/main" id="{ABF17A67-0B0E-EA25-5589-0A492FFA42E2}"/>
               </a:ext>
             </a:extLst>
           </p:cNvPr>
@@ -6774,7 +6774,7 @@
           <p:cNvPr id="3" name="CuadroTexto 2">
             <a:extLst>
               <a:ext uri="{FF2B5EF4-FFF2-40B4-BE49-F238E27FC236}">
-                <a16:creationId xmlns:a16="http://schemas.microsoft.com/office/drawing/2014/main" id="{3536A14B-98AD-330D-E3A2-5F9C5FECCDBE}"/>
+                <a16:creationId xmlns:a16="http://schemas.microsoft.com/office/drawing/2014/main" id="{0A274C95-0C30-99B3-F176-753278630DD8}"/>
               </a:ext>
             </a:extLst>
           </p:cNvPr>
@@ -6814,7 +6814,7 @@
           <p:cNvPr id="4" name="CuadroTexto 3">
             <a:extLst>
               <a:ext uri="{FF2B5EF4-FFF2-40B4-BE49-F238E27FC236}">
-                <a16:creationId xmlns:a16="http://schemas.microsoft.com/office/drawing/2014/main" id="{123D2F72-8993-A09C-30B6-5CF217848F11}"/>
+                <a16:creationId xmlns:a16="http://schemas.microsoft.com/office/drawing/2014/main" id="{C7EFE29B-E641-801A-867B-9A9B61747A2B}"/>
               </a:ext>
             </a:extLst>
           </p:cNvPr>
@@ -6854,7 +6854,7 @@
           <p:cNvPr id="5" name="Rectángulo: esquinas redondeadas 4">
             <a:extLst>
               <a:ext uri="{FF2B5EF4-FFF2-40B4-BE49-F238E27FC236}">
-                <a16:creationId xmlns:a16="http://schemas.microsoft.com/office/drawing/2014/main" id="{A16CFE9C-F638-2584-7F3C-213C43EF5B70}"/>
+                <a16:creationId xmlns:a16="http://schemas.microsoft.com/office/drawing/2014/main" id="{8C30D6ED-1DCA-16C0-73C6-E5CFE7DF3A44}"/>
               </a:ext>
             </a:extLst>
           </p:cNvPr>
@@ -6908,7 +6908,7 @@
           <p:cNvPr id="6" name="CuadroTexto 5">
             <a:extLst>
               <a:ext uri="{FF2B5EF4-FFF2-40B4-BE49-F238E27FC236}">
-                <a16:creationId xmlns:a16="http://schemas.microsoft.com/office/drawing/2014/main" id="{7854F5D6-9D86-50AB-E2B3-EB4E442655C9}"/>
+                <a16:creationId xmlns:a16="http://schemas.microsoft.com/office/drawing/2014/main" id="{B57D4764-B415-C028-E655-ADAB442F0F8A}"/>
               </a:ext>
             </a:extLst>
           </p:cNvPr>
@@ -6948,7 +6948,7 @@
           <p:cNvPr id="7" name="CuadroTexto 6">
             <a:extLst>
               <a:ext uri="{FF2B5EF4-FFF2-40B4-BE49-F238E27FC236}">
-                <a16:creationId xmlns:a16="http://schemas.microsoft.com/office/drawing/2014/main" id="{E19AF8D8-CD8A-01CD-7F41-07B8C580CB33}"/>
+                <a16:creationId xmlns:a16="http://schemas.microsoft.com/office/drawing/2014/main" id="{1DBC50A7-BC88-1607-CC8D-DA7ECB6A4335}"/>
               </a:ext>
             </a:extLst>
           </p:cNvPr>
@@ -6988,7 +6988,7 @@
           <p:cNvPr id="8" name="Rectángulo: esquinas redondeadas 7">
             <a:extLst>
               <a:ext uri="{FF2B5EF4-FFF2-40B4-BE49-F238E27FC236}">
-                <a16:creationId xmlns:a16="http://schemas.microsoft.com/office/drawing/2014/main" id="{2A074F37-BF29-B61B-C7A0-718A5DEC485C}"/>
+                <a16:creationId xmlns:a16="http://schemas.microsoft.com/office/drawing/2014/main" id="{A412CBB9-86BD-F288-C59E-D292D6E31DF8}"/>
               </a:ext>
             </a:extLst>
           </p:cNvPr>
@@ -7042,7 +7042,7 @@
           <p:cNvPr id="9" name="CuadroTexto 8">
             <a:extLst>
               <a:ext uri="{FF2B5EF4-FFF2-40B4-BE49-F238E27FC236}">
-                <a16:creationId xmlns:a16="http://schemas.microsoft.com/office/drawing/2014/main" id="{B2AC185B-6514-73F1-A3E5-E984F68B9902}"/>
+                <a16:creationId xmlns:a16="http://schemas.microsoft.com/office/drawing/2014/main" id="{87DBC3C6-18D8-9DD8-58A8-F724AC9963EA}"/>
               </a:ext>
             </a:extLst>
           </p:cNvPr>
@@ -7082,7 +7082,7 @@
           <p:cNvPr id="10" name="CuadroTexto 9">
             <a:extLst>
               <a:ext uri="{FF2B5EF4-FFF2-40B4-BE49-F238E27FC236}">
-                <a16:creationId xmlns:a16="http://schemas.microsoft.com/office/drawing/2014/main" id="{D8D14FB8-A2EC-B48D-803C-8DCBB99BEF42}"/>
+                <a16:creationId xmlns:a16="http://schemas.microsoft.com/office/drawing/2014/main" id="{F610A121-9D29-0E37-DBD6-E822C950A59C}"/>
               </a:ext>
             </a:extLst>
           </p:cNvPr>
@@ -7122,7 +7122,7 @@
           <p:cNvPr id="11" name="CuadroTexto 10">
             <a:extLst>
               <a:ext uri="{FF2B5EF4-FFF2-40B4-BE49-F238E27FC236}">
-                <a16:creationId xmlns:a16="http://schemas.microsoft.com/office/drawing/2014/main" id="{64F3486F-329C-AFD2-5979-CCFAC7EA8CAE}"/>
+                <a16:creationId xmlns:a16="http://schemas.microsoft.com/office/drawing/2014/main" id="{E6BF17B1-3756-F404-2B2E-ACF06D5E42EA}"/>
               </a:ext>
             </a:extLst>
           </p:cNvPr>
@@ -7162,7 +7162,7 @@
           <p:cNvPr id="12" name="CuadroTexto 11">
             <a:extLst>
               <a:ext uri="{FF2B5EF4-FFF2-40B4-BE49-F238E27FC236}">
-                <a16:creationId xmlns:a16="http://schemas.microsoft.com/office/drawing/2014/main" id="{8D511053-1A70-2E09-E182-03F420080343}"/>
+                <a16:creationId xmlns:a16="http://schemas.microsoft.com/office/drawing/2014/main" id="{0DD8FCFA-F0E8-01F2-0399-99379ACDEE09}"/>
               </a:ext>
             </a:extLst>
           </p:cNvPr>
@@ -7243,7 +7243,7 @@
     </p:spTree>
     <p:extLst>
       <p:ext uri="{BB962C8B-B14F-4D97-AF65-F5344CB8AC3E}">
-        <p14:creationId xmlns:p14="http://schemas.microsoft.com/office/powerpoint/2010/main" val="4148631519"/>
+        <p14:creationId xmlns:p14="http://schemas.microsoft.com/office/powerpoint/2010/main" val="2491006121"/>
       </p:ext>
     </p:extLst>
   </p:cSld>
@@ -7283,7 +7283,7 @@
           <p:cNvPr id="2" name="CuadroTexto 1">
             <a:extLst>
               <a:ext uri="{FF2B5EF4-FFF2-40B4-BE49-F238E27FC236}">
-                <a16:creationId xmlns:a16="http://schemas.microsoft.com/office/drawing/2014/main" id="{0B5CBCEC-03B0-5983-7141-BA1810FA18B9}"/>
+                <a16:creationId xmlns:a16="http://schemas.microsoft.com/office/drawing/2014/main" id="{53C97CB9-EBEA-A602-F6CA-DC84323DA427}"/>
               </a:ext>
             </a:extLst>
           </p:cNvPr>
@@ -7323,7 +7323,7 @@
           <p:cNvPr id="3" name="CuadroTexto 2">
             <a:extLst>
               <a:ext uri="{FF2B5EF4-FFF2-40B4-BE49-F238E27FC236}">
-                <a16:creationId xmlns:a16="http://schemas.microsoft.com/office/drawing/2014/main" id="{A776B045-5ED7-50C1-623F-C7BB99EA0949}"/>
+                <a16:creationId xmlns:a16="http://schemas.microsoft.com/office/drawing/2014/main" id="{E581D664-23FF-43C6-CBC8-86E3797A9379}"/>
               </a:ext>
             </a:extLst>
           </p:cNvPr>
@@ -7363,7 +7363,7 @@
           <p:cNvPr id="4" name="CuadroTexto 3">
             <a:extLst>
               <a:ext uri="{FF2B5EF4-FFF2-40B4-BE49-F238E27FC236}">
-                <a16:creationId xmlns:a16="http://schemas.microsoft.com/office/drawing/2014/main" id="{1B2033FE-0561-28AC-FCA8-AB0CBF99D9A4}"/>
+                <a16:creationId xmlns:a16="http://schemas.microsoft.com/office/drawing/2014/main" id="{7F6C04A8-101A-D7A1-012C-3A6C0B6D9938}"/>
               </a:ext>
             </a:extLst>
           </p:cNvPr>
@@ -7403,7 +7403,7 @@
           <p:cNvPr id="5" name="Rectángulo: esquinas redondeadas 4">
             <a:extLst>
               <a:ext uri="{FF2B5EF4-FFF2-40B4-BE49-F238E27FC236}">
-                <a16:creationId xmlns:a16="http://schemas.microsoft.com/office/drawing/2014/main" id="{B28BC6F7-336F-F92E-29E5-C7676A1C0506}"/>
+                <a16:creationId xmlns:a16="http://schemas.microsoft.com/office/drawing/2014/main" id="{05215D6A-3B4E-CF24-A3B9-FDB9687BC3AF}"/>
               </a:ext>
             </a:extLst>
           </p:cNvPr>
@@ -7457,7 +7457,7 @@
           <p:cNvPr id="6" name="CuadroTexto 5">
             <a:extLst>
               <a:ext uri="{FF2B5EF4-FFF2-40B4-BE49-F238E27FC236}">
-                <a16:creationId xmlns:a16="http://schemas.microsoft.com/office/drawing/2014/main" id="{B616075B-EBFC-AF2A-D441-CA625A64DB9E}"/>
+                <a16:creationId xmlns:a16="http://schemas.microsoft.com/office/drawing/2014/main" id="{B56296C0-9628-2A65-B2BC-001D91E62F33}"/>
               </a:ext>
             </a:extLst>
           </p:cNvPr>
@@ -7497,7 +7497,7 @@
           <p:cNvPr id="7" name="CuadroTexto 6">
             <a:extLst>
               <a:ext uri="{FF2B5EF4-FFF2-40B4-BE49-F238E27FC236}">
-                <a16:creationId xmlns:a16="http://schemas.microsoft.com/office/drawing/2014/main" id="{B33A05D1-2367-AE95-42A7-15FE4AFB453E}"/>
+                <a16:creationId xmlns:a16="http://schemas.microsoft.com/office/drawing/2014/main" id="{8B9CF4DA-5114-5AC5-FE1B-72180041CB3C}"/>
               </a:ext>
             </a:extLst>
           </p:cNvPr>
@@ -7598,7 +7598,7 @@
           <p:cNvPr id="8" name="Rectángulo: esquinas redondeadas 7">
             <a:extLst>
               <a:ext uri="{FF2B5EF4-FFF2-40B4-BE49-F238E27FC236}">
-                <a16:creationId xmlns:a16="http://schemas.microsoft.com/office/drawing/2014/main" id="{85120959-4246-3FE9-1B92-CE3BC5DEB55A}"/>
+                <a16:creationId xmlns:a16="http://schemas.microsoft.com/office/drawing/2014/main" id="{A870D57A-E655-BB64-DDEF-4DB115E64C1A}"/>
               </a:ext>
             </a:extLst>
           </p:cNvPr>
@@ -7652,7 +7652,7 @@
           <p:cNvPr id="9" name="CuadroTexto 8">
             <a:extLst>
               <a:ext uri="{FF2B5EF4-FFF2-40B4-BE49-F238E27FC236}">
-                <a16:creationId xmlns:a16="http://schemas.microsoft.com/office/drawing/2014/main" id="{D5E495AE-6705-AF48-3376-84A0E6C5C1E5}"/>
+                <a16:creationId xmlns:a16="http://schemas.microsoft.com/office/drawing/2014/main" id="{31145F61-DB6A-1019-3ADD-6CBDD3AAB061}"/>
               </a:ext>
             </a:extLst>
           </p:cNvPr>
@@ -7692,7 +7692,7 @@
           <p:cNvPr id="10" name="CuadroTexto 9">
             <a:extLst>
               <a:ext uri="{FF2B5EF4-FFF2-40B4-BE49-F238E27FC236}">
-                <a16:creationId xmlns:a16="http://schemas.microsoft.com/office/drawing/2014/main" id="{6693FBB9-0DB6-D935-E315-EF7815C19D0D}"/>
+                <a16:creationId xmlns:a16="http://schemas.microsoft.com/office/drawing/2014/main" id="{9E263D43-1D9A-9059-3C14-B787D57096D2}"/>
               </a:ext>
             </a:extLst>
           </p:cNvPr>
@@ -7732,7 +7732,7 @@
           <p:cNvPr id="11" name="Rectángulo: esquinas redondeadas 10">
             <a:extLst>
               <a:ext uri="{FF2B5EF4-FFF2-40B4-BE49-F238E27FC236}">
-                <a16:creationId xmlns:a16="http://schemas.microsoft.com/office/drawing/2014/main" id="{26EF31EE-7914-1FBB-C311-57DDB8C76FA7}"/>
+                <a16:creationId xmlns:a16="http://schemas.microsoft.com/office/drawing/2014/main" id="{8533D3D5-6554-E904-954F-41CBDCF4A932}"/>
               </a:ext>
             </a:extLst>
           </p:cNvPr>
@@ -7786,7 +7786,7 @@
           <p:cNvPr id="12" name="CuadroTexto 11">
             <a:extLst>
               <a:ext uri="{FF2B5EF4-FFF2-40B4-BE49-F238E27FC236}">
-                <a16:creationId xmlns:a16="http://schemas.microsoft.com/office/drawing/2014/main" id="{69B47D44-C6F5-7496-9F88-919F244828B7}"/>
+                <a16:creationId xmlns:a16="http://schemas.microsoft.com/office/drawing/2014/main" id="{651F9576-A26E-0A25-1466-D465049575E4}"/>
               </a:ext>
             </a:extLst>
           </p:cNvPr>
@@ -7826,7 +7826,7 @@
           <p:cNvPr id="13" name="CuadroTexto 12">
             <a:extLst>
               <a:ext uri="{FF2B5EF4-FFF2-40B4-BE49-F238E27FC236}">
-                <a16:creationId xmlns:a16="http://schemas.microsoft.com/office/drawing/2014/main" id="{D1AE0AD6-88DE-6861-29B6-748240F58BB0}"/>
+                <a16:creationId xmlns:a16="http://schemas.microsoft.com/office/drawing/2014/main" id="{58161CBD-935D-C0BD-9D61-502B2B101D49}"/>
               </a:ext>
             </a:extLst>
           </p:cNvPr>
@@ -7856,7 +7856,7 @@
                 </a:solidFill>
                 <a:latin typeface="Segoe UI" panose="020B0502040204020203" pitchFamily="34" charset="0"/>
               </a:rPr>
-              <a:t>Mover documentos, backups y observabilidad a piezas gestionadas.</a:t>
+              <a:t>Migrar documentos, backups y observabilidad a servicios gestionados fuera de la VM.</a:t>
             </a:r>
           </a:p>
         </p:txBody>
@@ -7866,7 +7866,7 @@
           <p:cNvPr id="14" name="Rectángulo: esquinas redondeadas 13">
             <a:extLst>
               <a:ext uri="{FF2B5EF4-FFF2-40B4-BE49-F238E27FC236}">
-                <a16:creationId xmlns:a16="http://schemas.microsoft.com/office/drawing/2014/main" id="{CFA353E8-3014-76E1-58B0-D739ED35FBF6}"/>
+                <a16:creationId xmlns:a16="http://schemas.microsoft.com/office/drawing/2014/main" id="{8E2CC980-63EB-6A22-FFBD-BC0FDD281A25}"/>
               </a:ext>
             </a:extLst>
           </p:cNvPr>
@@ -7920,7 +7920,7 @@
           <p:cNvPr id="15" name="CuadroTexto 14">
             <a:extLst>
               <a:ext uri="{FF2B5EF4-FFF2-40B4-BE49-F238E27FC236}">
-                <a16:creationId xmlns:a16="http://schemas.microsoft.com/office/drawing/2014/main" id="{84183F15-1129-087E-1A27-21B234E62411}"/>
+                <a16:creationId xmlns:a16="http://schemas.microsoft.com/office/drawing/2014/main" id="{DDF90326-7938-8B98-3223-42C2C1C0D003}"/>
               </a:ext>
             </a:extLst>
           </p:cNvPr>
@@ -7960,7 +7960,7 @@
           <p:cNvPr id="16" name="CuadroTexto 15">
             <a:extLst>
               <a:ext uri="{FF2B5EF4-FFF2-40B4-BE49-F238E27FC236}">
-                <a16:creationId xmlns:a16="http://schemas.microsoft.com/office/drawing/2014/main" id="{1BBB3881-FAA5-224E-B2A1-C0CE0CB227F4}"/>
+                <a16:creationId xmlns:a16="http://schemas.microsoft.com/office/drawing/2014/main" id="{6DE08089-44FC-BA71-6838-474F8F76D64D}"/>
               </a:ext>
             </a:extLst>
           </p:cNvPr>
@@ -8000,7 +8000,7 @@
           <p:cNvPr id="17" name="CuadroTexto 16">
             <a:extLst>
               <a:ext uri="{FF2B5EF4-FFF2-40B4-BE49-F238E27FC236}">
-                <a16:creationId xmlns:a16="http://schemas.microsoft.com/office/drawing/2014/main" id="{433E648D-304F-1E51-8C24-192548D7542B}"/>
+                <a16:creationId xmlns:a16="http://schemas.microsoft.com/office/drawing/2014/main" id="{0B72C3C2-9228-5457-9DB2-CFE0F34DA693}"/>
               </a:ext>
             </a:extLst>
           </p:cNvPr>
@@ -8063,7 +8063,7 @@
     </p:spTree>
     <p:extLst>
       <p:ext uri="{BB962C8B-B14F-4D97-AF65-F5344CB8AC3E}">
-        <p14:creationId xmlns:p14="http://schemas.microsoft.com/office/powerpoint/2010/main" val="4288348950"/>
+        <p14:creationId xmlns:p14="http://schemas.microsoft.com/office/powerpoint/2010/main" val="1384542028"/>
       </p:ext>
     </p:extLst>
   </p:cSld>
@@ -8103,7 +8103,7 @@
           <p:cNvPr id="2" name="CuadroTexto 1">
             <a:extLst>
               <a:ext uri="{FF2B5EF4-FFF2-40B4-BE49-F238E27FC236}">
-                <a16:creationId xmlns:a16="http://schemas.microsoft.com/office/drawing/2014/main" id="{D3A5D2F9-AF48-EBB4-7F27-9300C0C11E38}"/>
+                <a16:creationId xmlns:a16="http://schemas.microsoft.com/office/drawing/2014/main" id="{C363EC2D-827D-E293-58DE-23863F70001B}"/>
               </a:ext>
             </a:extLst>
           </p:cNvPr>
@@ -8143,7 +8143,7 @@
           <p:cNvPr id="3" name="CuadroTexto 2">
             <a:extLst>
               <a:ext uri="{FF2B5EF4-FFF2-40B4-BE49-F238E27FC236}">
-                <a16:creationId xmlns:a16="http://schemas.microsoft.com/office/drawing/2014/main" id="{205E0E42-9ED7-0158-57C0-58EFCAD1EE35}"/>
+                <a16:creationId xmlns:a16="http://schemas.microsoft.com/office/drawing/2014/main" id="{F9FBC11A-D6BF-8030-89B6-9AE9C67C0F63}"/>
               </a:ext>
             </a:extLst>
           </p:cNvPr>
@@ -8183,7 +8183,7 @@
           <p:cNvPr id="4" name="CuadroTexto 3">
             <a:extLst>
               <a:ext uri="{FF2B5EF4-FFF2-40B4-BE49-F238E27FC236}">
-                <a16:creationId xmlns:a16="http://schemas.microsoft.com/office/drawing/2014/main" id="{FB0A7C40-A46C-523E-8A41-1419EA7C2BD7}"/>
+                <a16:creationId xmlns:a16="http://schemas.microsoft.com/office/drawing/2014/main" id="{20132C7E-9033-1B78-6B93-FF6F4B2631BF}"/>
               </a:ext>
             </a:extLst>
           </p:cNvPr>
@@ -8220,7 +8220,7 @@
                 </a:solidFill>
                 <a:latin typeface="Segoe UI" panose="020B0502040204020203" pitchFamily="34" charset="0"/>
               </a:rPr>
-              <a:t>Despliegue permanente completamente automatizado.</a:t>
+              <a:t>Infraestructura mas gestionada y endurecida que la VM actual.</a:t>
             </a:r>
           </a:p>
           <a:p>
@@ -8274,7 +8274,7 @@
                 </a:solidFill>
                 <a:latin typeface="Segoe UI" panose="020B0502040204020203" pitchFamily="34" charset="0"/>
               </a:rPr>
-              <a:t>Almacenamiento documental en nube gestionada.</a:t>
+              <a:t>Migracion del almacenamiento documental a un servicio gestionado independiente.</a:t>
             </a:r>
           </a:p>
           <a:p>
@@ -8302,7 +8302,7 @@
           <p:cNvPr id="5" name="Rectángulo: esquinas redondeadas 4">
             <a:extLst>
               <a:ext uri="{FF2B5EF4-FFF2-40B4-BE49-F238E27FC236}">
-                <a16:creationId xmlns:a16="http://schemas.microsoft.com/office/drawing/2014/main" id="{CCFF1FD8-4B20-AF2A-7061-A654004E9755}"/>
+                <a16:creationId xmlns:a16="http://schemas.microsoft.com/office/drawing/2014/main" id="{619EACEF-9A4A-1501-CE9F-86D27B34DD12}"/>
               </a:ext>
             </a:extLst>
           </p:cNvPr>
@@ -8356,7 +8356,7 @@
           <p:cNvPr id="6" name="CuadroTexto 5">
             <a:extLst>
               <a:ext uri="{FF2B5EF4-FFF2-40B4-BE49-F238E27FC236}">
-                <a16:creationId xmlns:a16="http://schemas.microsoft.com/office/drawing/2014/main" id="{7014CB03-D51D-37C3-75A1-85002D142207}"/>
+                <a16:creationId xmlns:a16="http://schemas.microsoft.com/office/drawing/2014/main" id="{41215060-E82A-9686-21CF-EF8079E946AD}"/>
               </a:ext>
             </a:extLst>
           </p:cNvPr>
@@ -8396,7 +8396,7 @@
           <p:cNvPr id="7" name="CuadroTexto 6">
             <a:extLst>
               <a:ext uri="{FF2B5EF4-FFF2-40B4-BE49-F238E27FC236}">
-                <a16:creationId xmlns:a16="http://schemas.microsoft.com/office/drawing/2014/main" id="{006BCA0E-8AB9-A855-0D30-3D091A3A4418}"/>
+                <a16:creationId xmlns:a16="http://schemas.microsoft.com/office/drawing/2014/main" id="{32F7C57F-33B4-4CB2-581B-B0C785ED2DD7}"/>
               </a:ext>
             </a:extLst>
           </p:cNvPr>
@@ -8434,7 +8434,7 @@
     </p:spTree>
     <p:extLst>
       <p:ext uri="{BB962C8B-B14F-4D97-AF65-F5344CB8AC3E}">
-        <p14:creationId xmlns:p14="http://schemas.microsoft.com/office/powerpoint/2010/main" val="990444058"/>
+        <p14:creationId xmlns:p14="http://schemas.microsoft.com/office/powerpoint/2010/main" val="3973592235"/>
       </p:ext>
     </p:extLst>
   </p:cSld>
@@ -8474,7 +8474,7 @@
           <p:cNvPr id="2" name="CuadroTexto 1">
             <a:extLst>
               <a:ext uri="{FF2B5EF4-FFF2-40B4-BE49-F238E27FC236}">
-                <a16:creationId xmlns:a16="http://schemas.microsoft.com/office/drawing/2014/main" id="{036CED16-AF6D-6F19-B5C9-667A760854D0}"/>
+                <a16:creationId xmlns:a16="http://schemas.microsoft.com/office/drawing/2014/main" id="{92D81F7F-2258-EA64-DCD4-E81A879DD0B5}"/>
               </a:ext>
             </a:extLst>
           </p:cNvPr>
@@ -8514,7 +8514,7 @@
           <p:cNvPr id="3" name="CuadroTexto 2">
             <a:extLst>
               <a:ext uri="{FF2B5EF4-FFF2-40B4-BE49-F238E27FC236}">
-                <a16:creationId xmlns:a16="http://schemas.microsoft.com/office/drawing/2014/main" id="{DFBF3C10-C8F8-D4EA-C929-9C9E13152A42}"/>
+                <a16:creationId xmlns:a16="http://schemas.microsoft.com/office/drawing/2014/main" id="{32C24F13-ABAC-65AE-18F4-D098C3D1CF8C}"/>
               </a:ext>
             </a:extLst>
           </p:cNvPr>
@@ -8554,7 +8554,7 @@
           <p:cNvPr id="4" name="CuadroTexto 3">
             <a:extLst>
               <a:ext uri="{FF2B5EF4-FFF2-40B4-BE49-F238E27FC236}">
-                <a16:creationId xmlns:a16="http://schemas.microsoft.com/office/drawing/2014/main" id="{7EB16D0E-93DC-A5D4-428C-CB7F5AF93E7B}"/>
+                <a16:creationId xmlns:a16="http://schemas.microsoft.com/office/drawing/2014/main" id="{A7F0F976-2ACE-B939-D25D-4720E924E803}"/>
               </a:ext>
             </a:extLst>
           </p:cNvPr>
@@ -8594,7 +8594,7 @@
           <p:cNvPr id="5" name="CuadroTexto 4">
             <a:extLst>
               <a:ext uri="{FF2B5EF4-FFF2-40B4-BE49-F238E27FC236}">
-                <a16:creationId xmlns:a16="http://schemas.microsoft.com/office/drawing/2014/main" id="{33F4D4A8-FAE3-468C-B4E0-177E55140173}"/>
+                <a16:creationId xmlns:a16="http://schemas.microsoft.com/office/drawing/2014/main" id="{BD10D5EB-9330-C924-F312-131A55DD3090}"/>
               </a:ext>
             </a:extLst>
           </p:cNvPr>
@@ -8677,7 +8677,7 @@
           <p:cNvPr id="6" name="CuadroTexto 5">
             <a:extLst>
               <a:ext uri="{FF2B5EF4-FFF2-40B4-BE49-F238E27FC236}">
-                <a16:creationId xmlns:a16="http://schemas.microsoft.com/office/drawing/2014/main" id="{C80A97D4-C6A7-C8B0-B201-F15B6F610839}"/>
+                <a16:creationId xmlns:a16="http://schemas.microsoft.com/office/drawing/2014/main" id="{1F11DC90-BD7F-18DA-454A-5A78D693F6D5}"/>
               </a:ext>
             </a:extLst>
           </p:cNvPr>
@@ -8715,7 +8715,7 @@
     </p:spTree>
     <p:extLst>
       <p:ext uri="{BB962C8B-B14F-4D97-AF65-F5344CB8AC3E}">
-        <p14:creationId xmlns:p14="http://schemas.microsoft.com/office/powerpoint/2010/main" val="589655953"/>
+        <p14:creationId xmlns:p14="http://schemas.microsoft.com/office/powerpoint/2010/main" val="995204594"/>
       </p:ext>
     </p:extLst>
   </p:cSld>
@@ -8755,7 +8755,7 @@
           <p:cNvPr id="2" name="CuadroTexto 1">
             <a:extLst>
               <a:ext uri="{FF2B5EF4-FFF2-40B4-BE49-F238E27FC236}">
-                <a16:creationId xmlns:a16="http://schemas.microsoft.com/office/drawing/2014/main" id="{6FBC9830-1087-3B6C-1D91-84C5028059E5}"/>
+                <a16:creationId xmlns:a16="http://schemas.microsoft.com/office/drawing/2014/main" id="{64E27492-A7A3-0D12-57CD-41E2ED4F21D1}"/>
               </a:ext>
             </a:extLst>
           </p:cNvPr>
@@ -8795,7 +8795,7 @@
           <p:cNvPr id="3" name="CuadroTexto 2">
             <a:extLst>
               <a:ext uri="{FF2B5EF4-FFF2-40B4-BE49-F238E27FC236}">
-                <a16:creationId xmlns:a16="http://schemas.microsoft.com/office/drawing/2014/main" id="{6E9AD559-58E0-8320-53FE-5B82434953C6}"/>
+                <a16:creationId xmlns:a16="http://schemas.microsoft.com/office/drawing/2014/main" id="{E3E06C6C-EEA9-DEEB-FAE9-72DC507AFB52}"/>
               </a:ext>
             </a:extLst>
           </p:cNvPr>
@@ -8835,7 +8835,7 @@
           <p:cNvPr id="4" name="CuadroTexto 3">
             <a:extLst>
               <a:ext uri="{FF2B5EF4-FFF2-40B4-BE49-F238E27FC236}">
-                <a16:creationId xmlns:a16="http://schemas.microsoft.com/office/drawing/2014/main" id="{3DC3118D-8EA7-9B0F-6B6C-E26B25E6EDEF}"/>
+                <a16:creationId xmlns:a16="http://schemas.microsoft.com/office/drawing/2014/main" id="{B5FBA7B2-0364-0349-0B91-A756B41E6A20}"/>
               </a:ext>
             </a:extLst>
           </p:cNvPr>
@@ -8875,7 +8875,7 @@
           <p:cNvPr id="5" name="CuadroTexto 4">
             <a:extLst>
               <a:ext uri="{FF2B5EF4-FFF2-40B4-BE49-F238E27FC236}">
-                <a16:creationId xmlns:a16="http://schemas.microsoft.com/office/drawing/2014/main" id="{06A3EF4E-5A23-0B2D-C056-0F90E3CCF8E7}"/>
+                <a16:creationId xmlns:a16="http://schemas.microsoft.com/office/drawing/2014/main" id="{0F38E413-996F-A107-60F8-A6EFC9312F91}"/>
               </a:ext>
             </a:extLst>
           </p:cNvPr>
@@ -8976,7 +8976,7 @@
           <p:cNvPr id="6" name="Rectángulo: esquinas redondeadas 5">
             <a:extLst>
               <a:ext uri="{FF2B5EF4-FFF2-40B4-BE49-F238E27FC236}">
-                <a16:creationId xmlns:a16="http://schemas.microsoft.com/office/drawing/2014/main" id="{CA25E428-EEB2-3BA5-A89E-427C511F04C2}"/>
+                <a16:creationId xmlns:a16="http://schemas.microsoft.com/office/drawing/2014/main" id="{32893821-8623-6FD0-DD8B-866EFB1DED72}"/>
               </a:ext>
             </a:extLst>
           </p:cNvPr>
@@ -9030,7 +9030,7 @@
           <p:cNvPr id="7" name="CuadroTexto 6">
             <a:extLst>
               <a:ext uri="{FF2B5EF4-FFF2-40B4-BE49-F238E27FC236}">
-                <a16:creationId xmlns:a16="http://schemas.microsoft.com/office/drawing/2014/main" id="{E3893FC0-9260-2BE5-6897-EBCF6E90A79A}"/>
+                <a16:creationId xmlns:a16="http://schemas.microsoft.com/office/drawing/2014/main" id="{82E33C88-4DB7-8906-3FC1-FDB4DBF69075}"/>
               </a:ext>
             </a:extLst>
           </p:cNvPr>
@@ -9070,7 +9070,7 @@
           <p:cNvPr id="8" name="CuadroTexto 7">
             <a:extLst>
               <a:ext uri="{FF2B5EF4-FFF2-40B4-BE49-F238E27FC236}">
-                <a16:creationId xmlns:a16="http://schemas.microsoft.com/office/drawing/2014/main" id="{3D0CC411-B7A5-03FF-536B-94D0CC3F3DF7}"/>
+                <a16:creationId xmlns:a16="http://schemas.microsoft.com/office/drawing/2014/main" id="{DF938DFF-9610-AC69-29B2-7C248A6DF573}"/>
               </a:ext>
             </a:extLst>
           </p:cNvPr>
@@ -9108,7 +9108,7 @@
     </p:spTree>
     <p:extLst>
       <p:ext uri="{BB962C8B-B14F-4D97-AF65-F5344CB8AC3E}">
-        <p14:creationId xmlns:p14="http://schemas.microsoft.com/office/powerpoint/2010/main" val="1139008739"/>
+        <p14:creationId xmlns:p14="http://schemas.microsoft.com/office/powerpoint/2010/main" val="4215167580"/>
       </p:ext>
     </p:extLst>
   </p:cSld>
@@ -9148,7 +9148,7 @@
           <p:cNvPr id="2" name="CuadroTexto 1">
             <a:extLst>
               <a:ext uri="{FF2B5EF4-FFF2-40B4-BE49-F238E27FC236}">
-                <a16:creationId xmlns:a16="http://schemas.microsoft.com/office/drawing/2014/main" id="{EB282940-06AF-EACF-B9EF-98EAC4F1730A}"/>
+                <a16:creationId xmlns:a16="http://schemas.microsoft.com/office/drawing/2014/main" id="{CBEC7AA4-81EF-2469-9784-24AB345E6FCF}"/>
               </a:ext>
             </a:extLst>
           </p:cNvPr>
@@ -9188,7 +9188,7 @@
           <p:cNvPr id="3" name="CuadroTexto 2">
             <a:extLst>
               <a:ext uri="{FF2B5EF4-FFF2-40B4-BE49-F238E27FC236}">
-                <a16:creationId xmlns:a16="http://schemas.microsoft.com/office/drawing/2014/main" id="{15F9AF63-03C5-94BF-46A3-CCE367DA3DF8}"/>
+                <a16:creationId xmlns:a16="http://schemas.microsoft.com/office/drawing/2014/main" id="{ABB9499E-2909-8385-F043-F1110E8C5036}"/>
               </a:ext>
             </a:extLst>
           </p:cNvPr>
@@ -9228,7 +9228,7 @@
           <p:cNvPr id="4" name="Rectángulo: esquinas redondeadas 3">
             <a:extLst>
               <a:ext uri="{FF2B5EF4-FFF2-40B4-BE49-F238E27FC236}">
-                <a16:creationId xmlns:a16="http://schemas.microsoft.com/office/drawing/2014/main" id="{9C5A765E-77D2-39CA-9FE8-5236C5063869}"/>
+                <a16:creationId xmlns:a16="http://schemas.microsoft.com/office/drawing/2014/main" id="{00214D9E-C2DD-EA2E-E4C7-CB32BA3850A5}"/>
               </a:ext>
             </a:extLst>
           </p:cNvPr>
@@ -9282,7 +9282,7 @@
           <p:cNvPr id="5" name="CuadroTexto 4">
             <a:extLst>
               <a:ext uri="{FF2B5EF4-FFF2-40B4-BE49-F238E27FC236}">
-                <a16:creationId xmlns:a16="http://schemas.microsoft.com/office/drawing/2014/main" id="{C64D6F7B-282D-42E2-323D-242932C9CF2E}"/>
+                <a16:creationId xmlns:a16="http://schemas.microsoft.com/office/drawing/2014/main" id="{24D3C474-9CC6-2446-2CAF-0E551791E94E}"/>
               </a:ext>
             </a:extLst>
           </p:cNvPr>
@@ -9322,7 +9322,7 @@
           <p:cNvPr id="6" name="CuadroTexto 5">
             <a:extLst>
               <a:ext uri="{FF2B5EF4-FFF2-40B4-BE49-F238E27FC236}">
-                <a16:creationId xmlns:a16="http://schemas.microsoft.com/office/drawing/2014/main" id="{C4A6B74D-5BB0-5B05-A7A4-594010C75DF8}"/>
+                <a16:creationId xmlns:a16="http://schemas.microsoft.com/office/drawing/2014/main" id="{C798D3C1-A2D5-4986-7C5F-6431932C8381}"/>
               </a:ext>
             </a:extLst>
           </p:cNvPr>
@@ -9362,7 +9362,7 @@
           <p:cNvPr id="7" name="Rectángulo: esquinas redondeadas 6">
             <a:extLst>
               <a:ext uri="{FF2B5EF4-FFF2-40B4-BE49-F238E27FC236}">
-                <a16:creationId xmlns:a16="http://schemas.microsoft.com/office/drawing/2014/main" id="{A0695082-FAC9-CB18-C611-34ECF60D6DC8}"/>
+                <a16:creationId xmlns:a16="http://schemas.microsoft.com/office/drawing/2014/main" id="{B228C5F9-AA92-80A4-74FD-47C8356DD9B2}"/>
               </a:ext>
             </a:extLst>
           </p:cNvPr>
@@ -9416,7 +9416,7 @@
           <p:cNvPr id="8" name="CuadroTexto 7">
             <a:extLst>
               <a:ext uri="{FF2B5EF4-FFF2-40B4-BE49-F238E27FC236}">
-                <a16:creationId xmlns:a16="http://schemas.microsoft.com/office/drawing/2014/main" id="{F0A03756-DD0A-5590-9EF0-14269100A1B2}"/>
+                <a16:creationId xmlns:a16="http://schemas.microsoft.com/office/drawing/2014/main" id="{7AC3E129-5CA3-4EF4-D9A4-7AE8CCDC34E0}"/>
               </a:ext>
             </a:extLst>
           </p:cNvPr>
@@ -9456,7 +9456,7 @@
           <p:cNvPr id="9" name="CuadroTexto 8">
             <a:extLst>
               <a:ext uri="{FF2B5EF4-FFF2-40B4-BE49-F238E27FC236}">
-                <a16:creationId xmlns:a16="http://schemas.microsoft.com/office/drawing/2014/main" id="{FED5F627-064E-D6AE-7EEB-66C69F38AA9B}"/>
+                <a16:creationId xmlns:a16="http://schemas.microsoft.com/office/drawing/2014/main" id="{AC0CFB52-B02C-D7B6-84A3-3809225BF347}"/>
               </a:ext>
             </a:extLst>
           </p:cNvPr>
@@ -9496,7 +9496,7 @@
           <p:cNvPr id="10" name="Rectángulo: esquinas redondeadas 9">
             <a:extLst>
               <a:ext uri="{FF2B5EF4-FFF2-40B4-BE49-F238E27FC236}">
-                <a16:creationId xmlns:a16="http://schemas.microsoft.com/office/drawing/2014/main" id="{2E7C599C-C567-24F9-0489-3F12FF1E0B13}"/>
+                <a16:creationId xmlns:a16="http://schemas.microsoft.com/office/drawing/2014/main" id="{29FE064D-A9BD-AB47-3541-3064BEBD6E1D}"/>
               </a:ext>
             </a:extLst>
           </p:cNvPr>
@@ -9550,7 +9550,7 @@
           <p:cNvPr id="11" name="CuadroTexto 10">
             <a:extLst>
               <a:ext uri="{FF2B5EF4-FFF2-40B4-BE49-F238E27FC236}">
-                <a16:creationId xmlns:a16="http://schemas.microsoft.com/office/drawing/2014/main" id="{9EFB9998-EF49-2DAD-5FF2-22B24B32D283}"/>
+                <a16:creationId xmlns:a16="http://schemas.microsoft.com/office/drawing/2014/main" id="{DEF7B20E-2DF7-2091-9F0F-AD9C6B7653BD}"/>
               </a:ext>
             </a:extLst>
           </p:cNvPr>
@@ -9590,7 +9590,7 @@
           <p:cNvPr id="12" name="CuadroTexto 11">
             <a:extLst>
               <a:ext uri="{FF2B5EF4-FFF2-40B4-BE49-F238E27FC236}">
-                <a16:creationId xmlns:a16="http://schemas.microsoft.com/office/drawing/2014/main" id="{4064AAC2-204A-7895-580F-3031DB56C64B}"/>
+                <a16:creationId xmlns:a16="http://schemas.microsoft.com/office/drawing/2014/main" id="{90867096-A9E8-5AA3-DA5F-E2181B8B5940}"/>
               </a:ext>
             </a:extLst>
           </p:cNvPr>
@@ -9630,7 +9630,7 @@
           <p:cNvPr id="13" name="Rectángulo: esquinas redondeadas 12">
             <a:extLst>
               <a:ext uri="{FF2B5EF4-FFF2-40B4-BE49-F238E27FC236}">
-                <a16:creationId xmlns:a16="http://schemas.microsoft.com/office/drawing/2014/main" id="{AB38D09A-E356-2F15-46F3-C30A5EF8A291}"/>
+                <a16:creationId xmlns:a16="http://schemas.microsoft.com/office/drawing/2014/main" id="{101673A6-FF1D-2843-A844-2FE2E60905B7}"/>
               </a:ext>
             </a:extLst>
           </p:cNvPr>
@@ -9684,7 +9684,7 @@
           <p:cNvPr id="14" name="CuadroTexto 13">
             <a:extLst>
               <a:ext uri="{FF2B5EF4-FFF2-40B4-BE49-F238E27FC236}">
-                <a16:creationId xmlns:a16="http://schemas.microsoft.com/office/drawing/2014/main" id="{CFAD3839-418F-29A8-1F51-C8C4180EE654}"/>
+                <a16:creationId xmlns:a16="http://schemas.microsoft.com/office/drawing/2014/main" id="{21BB2C5F-23EA-F264-6974-9C5B647EC529}"/>
               </a:ext>
             </a:extLst>
           </p:cNvPr>
@@ -9724,7 +9724,7 @@
           <p:cNvPr id="15" name="CuadroTexto 14">
             <a:extLst>
               <a:ext uri="{FF2B5EF4-FFF2-40B4-BE49-F238E27FC236}">
-                <a16:creationId xmlns:a16="http://schemas.microsoft.com/office/drawing/2014/main" id="{00AF941E-CE6A-35BA-0296-B0F61132C0ED}"/>
+                <a16:creationId xmlns:a16="http://schemas.microsoft.com/office/drawing/2014/main" id="{A8A3BF4F-5949-E8B5-5670-23DA30C81D1C}"/>
               </a:ext>
             </a:extLst>
           </p:cNvPr>
@@ -9762,7 +9762,7 @@
     </p:spTree>
     <p:extLst>
       <p:ext uri="{BB962C8B-B14F-4D97-AF65-F5344CB8AC3E}">
-        <p14:creationId xmlns:p14="http://schemas.microsoft.com/office/powerpoint/2010/main" val="3969965129"/>
+        <p14:creationId xmlns:p14="http://schemas.microsoft.com/office/powerpoint/2010/main" val="3051532885"/>
       </p:ext>
     </p:extLst>
   </p:cSld>
@@ -9802,7 +9802,7 @@
           <p:cNvPr id="2" name="CuadroTexto 1">
             <a:extLst>
               <a:ext uri="{FF2B5EF4-FFF2-40B4-BE49-F238E27FC236}">
-                <a16:creationId xmlns:a16="http://schemas.microsoft.com/office/drawing/2014/main" id="{89A44499-82FA-AD4A-8749-E056379C85C7}"/>
+                <a16:creationId xmlns:a16="http://schemas.microsoft.com/office/drawing/2014/main" id="{F9939E1B-1B81-476F-413F-903FA188E0CC}"/>
               </a:ext>
             </a:extLst>
           </p:cNvPr>
@@ -9842,7 +9842,7 @@
           <p:cNvPr id="3" name="CuadroTexto 2">
             <a:extLst>
               <a:ext uri="{FF2B5EF4-FFF2-40B4-BE49-F238E27FC236}">
-                <a16:creationId xmlns:a16="http://schemas.microsoft.com/office/drawing/2014/main" id="{01816A9D-F8FB-05A1-3843-06425420EA73}"/>
+                <a16:creationId xmlns:a16="http://schemas.microsoft.com/office/drawing/2014/main" id="{83AEA742-41F0-5830-6E5B-998840A3683F}"/>
               </a:ext>
             </a:extLst>
           </p:cNvPr>
@@ -9882,7 +9882,7 @@
           <p:cNvPr id="4" name="CuadroTexto 3">
             <a:extLst>
               <a:ext uri="{FF2B5EF4-FFF2-40B4-BE49-F238E27FC236}">
-                <a16:creationId xmlns:a16="http://schemas.microsoft.com/office/drawing/2014/main" id="{0D18DDB0-6236-98AA-7A9D-AF510D6F084F}"/>
+                <a16:creationId xmlns:a16="http://schemas.microsoft.com/office/drawing/2014/main" id="{24626C56-D53D-8E20-1BC8-490C3A909C38}"/>
               </a:ext>
             </a:extLst>
           </p:cNvPr>
@@ -9922,7 +9922,7 @@
           <p:cNvPr id="6" name="Imagen 5">
             <a:extLst>
               <a:ext uri="{FF2B5EF4-FFF2-40B4-BE49-F238E27FC236}">
-                <a16:creationId xmlns:a16="http://schemas.microsoft.com/office/drawing/2014/main" id="{2CA841F4-0C11-F86B-BD84-3949EC6B9A82}"/>
+                <a16:creationId xmlns:a16="http://schemas.microsoft.com/office/drawing/2014/main" id="{B762B756-0677-432F-71D0-BECB80629634}"/>
               </a:ext>
             </a:extLst>
           </p:cNvPr>
@@ -9963,7 +9963,7 @@
           <p:cNvPr id="7" name="CuadroTexto 6">
             <a:extLst>
               <a:ext uri="{FF2B5EF4-FFF2-40B4-BE49-F238E27FC236}">
-                <a16:creationId xmlns:a16="http://schemas.microsoft.com/office/drawing/2014/main" id="{4A4A7ECA-E196-B9FD-12A9-8A4BDB89A408}"/>
+                <a16:creationId xmlns:a16="http://schemas.microsoft.com/office/drawing/2014/main" id="{324DCFCD-49EF-3195-E6FB-8A6238B61883}"/>
               </a:ext>
             </a:extLst>
           </p:cNvPr>
@@ -10080,7 +10080,7 @@
     </p:spTree>
     <p:extLst>
       <p:ext uri="{BB962C8B-B14F-4D97-AF65-F5344CB8AC3E}">
-        <p14:creationId xmlns:p14="http://schemas.microsoft.com/office/powerpoint/2010/main" val="2886672413"/>
+        <p14:creationId xmlns:p14="http://schemas.microsoft.com/office/powerpoint/2010/main" val="2286205627"/>
       </p:ext>
     </p:extLst>
   </p:cSld>
@@ -10120,7 +10120,7 @@
           <p:cNvPr id="2" name="CuadroTexto 1">
             <a:extLst>
               <a:ext uri="{FF2B5EF4-FFF2-40B4-BE49-F238E27FC236}">
-                <a16:creationId xmlns:a16="http://schemas.microsoft.com/office/drawing/2014/main" id="{9E6DC61B-22FB-E1A2-867F-2CD288BC8FBD}"/>
+                <a16:creationId xmlns:a16="http://schemas.microsoft.com/office/drawing/2014/main" id="{8E19BC6A-65AF-E39F-05D5-8CAD3073325C}"/>
               </a:ext>
             </a:extLst>
           </p:cNvPr>
@@ -10160,7 +10160,7 @@
           <p:cNvPr id="3" name="CuadroTexto 2">
             <a:extLst>
               <a:ext uri="{FF2B5EF4-FFF2-40B4-BE49-F238E27FC236}">
-                <a16:creationId xmlns:a16="http://schemas.microsoft.com/office/drawing/2014/main" id="{01FE1F73-538C-6D2B-85BA-01E5B4A1B367}"/>
+                <a16:creationId xmlns:a16="http://schemas.microsoft.com/office/drawing/2014/main" id="{E41AD3E0-72D6-D3DD-F994-1D3CAB682462}"/>
               </a:ext>
             </a:extLst>
           </p:cNvPr>
@@ -10200,7 +10200,7 @@
           <p:cNvPr id="5" name="Imagen 4">
             <a:extLst>
               <a:ext uri="{FF2B5EF4-FFF2-40B4-BE49-F238E27FC236}">
-                <a16:creationId xmlns:a16="http://schemas.microsoft.com/office/drawing/2014/main" id="{DFD935C8-1B76-0A55-9A90-29C598D66E32}"/>
+                <a16:creationId xmlns:a16="http://schemas.microsoft.com/office/drawing/2014/main" id="{DA7B3142-ECBA-E906-D98A-A2E54830F2E0}"/>
               </a:ext>
             </a:extLst>
           </p:cNvPr>
@@ -10241,7 +10241,7 @@
           <p:cNvPr id="6" name="CuadroTexto 5">
             <a:extLst>
               <a:ext uri="{FF2B5EF4-FFF2-40B4-BE49-F238E27FC236}">
-                <a16:creationId xmlns:a16="http://schemas.microsoft.com/office/drawing/2014/main" id="{900F6E40-7E9D-FA0E-85A4-DCF195F305C5}"/>
+                <a16:creationId xmlns:a16="http://schemas.microsoft.com/office/drawing/2014/main" id="{E07A5D5B-CCCB-54C6-625C-8F92B2896F54}"/>
               </a:ext>
             </a:extLst>
           </p:cNvPr>
@@ -10281,7 +10281,7 @@
           <p:cNvPr id="7" name="CuadroTexto 6">
             <a:extLst>
               <a:ext uri="{FF2B5EF4-FFF2-40B4-BE49-F238E27FC236}">
-                <a16:creationId xmlns:a16="http://schemas.microsoft.com/office/drawing/2014/main" id="{D17C8830-9864-5F88-2B81-164A5855DA5F}"/>
+                <a16:creationId xmlns:a16="http://schemas.microsoft.com/office/drawing/2014/main" id="{90F97448-9487-DD3C-59A2-19BEC488E8BE}"/>
               </a:ext>
             </a:extLst>
           </p:cNvPr>
@@ -10380,7 +10380,7 @@
     </p:spTree>
     <p:extLst>
       <p:ext uri="{BB962C8B-B14F-4D97-AF65-F5344CB8AC3E}">
-        <p14:creationId xmlns:p14="http://schemas.microsoft.com/office/powerpoint/2010/main" val="197158713"/>
+        <p14:creationId xmlns:p14="http://schemas.microsoft.com/office/powerpoint/2010/main" val="4129019177"/>
       </p:ext>
     </p:extLst>
   </p:cSld>
@@ -10420,7 +10420,7 @@
           <p:cNvPr id="2" name="CuadroTexto 1">
             <a:extLst>
               <a:ext uri="{FF2B5EF4-FFF2-40B4-BE49-F238E27FC236}">
-                <a16:creationId xmlns:a16="http://schemas.microsoft.com/office/drawing/2014/main" id="{A4B90C54-59B9-29C1-FAB1-6D06BEC83C67}"/>
+                <a16:creationId xmlns:a16="http://schemas.microsoft.com/office/drawing/2014/main" id="{E4A11209-CAC7-C8A5-A2F2-18CA3541D221}"/>
               </a:ext>
             </a:extLst>
           </p:cNvPr>
@@ -10460,7 +10460,7 @@
           <p:cNvPr id="3" name="CuadroTexto 2">
             <a:extLst>
               <a:ext uri="{FF2B5EF4-FFF2-40B4-BE49-F238E27FC236}">
-                <a16:creationId xmlns:a16="http://schemas.microsoft.com/office/drawing/2014/main" id="{B4201F9F-E495-1A34-E813-7CEB643A52E1}"/>
+                <a16:creationId xmlns:a16="http://schemas.microsoft.com/office/drawing/2014/main" id="{EC70755B-C845-6DF4-2939-11EB004A05D0}"/>
               </a:ext>
             </a:extLst>
           </p:cNvPr>
@@ -10500,7 +10500,7 @@
           <p:cNvPr id="4" name="CuadroTexto 3">
             <a:extLst>
               <a:ext uri="{FF2B5EF4-FFF2-40B4-BE49-F238E27FC236}">
-                <a16:creationId xmlns:a16="http://schemas.microsoft.com/office/drawing/2014/main" id="{94FC1F65-6350-4E16-6CA9-97F7559A79B2}"/>
+                <a16:creationId xmlns:a16="http://schemas.microsoft.com/office/drawing/2014/main" id="{742BC8AC-E592-65F1-04AB-FBD809643C13}"/>
               </a:ext>
             </a:extLst>
           </p:cNvPr>
@@ -10540,7 +10540,7 @@
           <p:cNvPr id="6" name="Imagen 5">
             <a:extLst>
               <a:ext uri="{FF2B5EF4-FFF2-40B4-BE49-F238E27FC236}">
-                <a16:creationId xmlns:a16="http://schemas.microsoft.com/office/drawing/2014/main" id="{18EF20F3-E98B-C65B-5E7B-11E87999C950}"/>
+                <a16:creationId xmlns:a16="http://schemas.microsoft.com/office/drawing/2014/main" id="{05A2D297-BAC3-6453-8D8A-E27A4CE36A1E}"/>
               </a:ext>
             </a:extLst>
           </p:cNvPr>
@@ -10581,7 +10581,7 @@
           <p:cNvPr id="7" name="Rectángulo: esquinas redondeadas 6">
             <a:extLst>
               <a:ext uri="{FF2B5EF4-FFF2-40B4-BE49-F238E27FC236}">
-                <a16:creationId xmlns:a16="http://schemas.microsoft.com/office/drawing/2014/main" id="{90921B6D-BF60-4A96-32E7-556ABB908AAB}"/>
+                <a16:creationId xmlns:a16="http://schemas.microsoft.com/office/drawing/2014/main" id="{E9F3FFA1-AFBB-D710-928D-153EBCD7CC42}"/>
               </a:ext>
             </a:extLst>
           </p:cNvPr>
@@ -10635,7 +10635,7 @@
           <p:cNvPr id="8" name="CuadroTexto 7">
             <a:extLst>
               <a:ext uri="{FF2B5EF4-FFF2-40B4-BE49-F238E27FC236}">
-                <a16:creationId xmlns:a16="http://schemas.microsoft.com/office/drawing/2014/main" id="{C1D36378-35A6-CE30-0376-63404731523E}"/>
+                <a16:creationId xmlns:a16="http://schemas.microsoft.com/office/drawing/2014/main" id="{8CE8D4FA-5926-7692-802D-1D74CAF809CC}"/>
               </a:ext>
             </a:extLst>
           </p:cNvPr>
@@ -10675,7 +10675,7 @@
           <p:cNvPr id="9" name="CuadroTexto 8">
             <a:extLst>
               <a:ext uri="{FF2B5EF4-FFF2-40B4-BE49-F238E27FC236}">
-                <a16:creationId xmlns:a16="http://schemas.microsoft.com/office/drawing/2014/main" id="{29563791-87A4-F2A8-21E7-A2B85BEEDA13}"/>
+                <a16:creationId xmlns:a16="http://schemas.microsoft.com/office/drawing/2014/main" id="{AAD28811-FBD8-63EB-67C1-D67092E802BC}"/>
               </a:ext>
             </a:extLst>
           </p:cNvPr>
@@ -10715,7 +10715,7 @@
           <p:cNvPr id="10" name="Rectángulo: esquinas redondeadas 9">
             <a:extLst>
               <a:ext uri="{FF2B5EF4-FFF2-40B4-BE49-F238E27FC236}">
-                <a16:creationId xmlns:a16="http://schemas.microsoft.com/office/drawing/2014/main" id="{A7B22E91-588B-FC7C-0E00-7B1C1C793752}"/>
+                <a16:creationId xmlns:a16="http://schemas.microsoft.com/office/drawing/2014/main" id="{4F13AADD-2FE5-C63F-1C53-993D8C11C3CD}"/>
               </a:ext>
             </a:extLst>
           </p:cNvPr>
@@ -10769,7 +10769,7 @@
           <p:cNvPr id="11" name="CuadroTexto 10">
             <a:extLst>
               <a:ext uri="{FF2B5EF4-FFF2-40B4-BE49-F238E27FC236}">
-                <a16:creationId xmlns:a16="http://schemas.microsoft.com/office/drawing/2014/main" id="{8196D7ED-BA84-4FF1-2EA1-86A31C7DCA9C}"/>
+                <a16:creationId xmlns:a16="http://schemas.microsoft.com/office/drawing/2014/main" id="{D25768D6-11BE-99D0-921E-DD2DCCC6F000}"/>
               </a:ext>
             </a:extLst>
           </p:cNvPr>
@@ -10809,7 +10809,7 @@
           <p:cNvPr id="12" name="CuadroTexto 11">
             <a:extLst>
               <a:ext uri="{FF2B5EF4-FFF2-40B4-BE49-F238E27FC236}">
-                <a16:creationId xmlns:a16="http://schemas.microsoft.com/office/drawing/2014/main" id="{C42F4661-0F9E-E635-545C-CF94776D7859}"/>
+                <a16:creationId xmlns:a16="http://schemas.microsoft.com/office/drawing/2014/main" id="{EE0293A7-6372-1514-929F-4B95306EB22B}"/>
               </a:ext>
             </a:extLst>
           </p:cNvPr>
@@ -10849,7 +10849,7 @@
           <p:cNvPr id="13" name="Rectángulo: esquinas redondeadas 12">
             <a:extLst>
               <a:ext uri="{FF2B5EF4-FFF2-40B4-BE49-F238E27FC236}">
-                <a16:creationId xmlns:a16="http://schemas.microsoft.com/office/drawing/2014/main" id="{F35086C4-5C5A-A103-567B-81B3845CC0F9}"/>
+                <a16:creationId xmlns:a16="http://schemas.microsoft.com/office/drawing/2014/main" id="{42806D98-5D94-B821-EF2B-F62242900F6C}"/>
               </a:ext>
             </a:extLst>
           </p:cNvPr>
@@ -10903,7 +10903,7 @@
           <p:cNvPr id="14" name="CuadroTexto 13">
             <a:extLst>
               <a:ext uri="{FF2B5EF4-FFF2-40B4-BE49-F238E27FC236}">
-                <a16:creationId xmlns:a16="http://schemas.microsoft.com/office/drawing/2014/main" id="{A624BE0A-6486-09A5-D1F6-BC4DA4479ABB}"/>
+                <a16:creationId xmlns:a16="http://schemas.microsoft.com/office/drawing/2014/main" id="{D0893BA7-D647-8606-0E5E-688994CED508}"/>
               </a:ext>
             </a:extLst>
           </p:cNvPr>
@@ -10943,7 +10943,7 @@
           <p:cNvPr id="15" name="CuadroTexto 14">
             <a:extLst>
               <a:ext uri="{FF2B5EF4-FFF2-40B4-BE49-F238E27FC236}">
-                <a16:creationId xmlns:a16="http://schemas.microsoft.com/office/drawing/2014/main" id="{464CC48B-2885-0574-D2A6-FD83124CF8D7}"/>
+                <a16:creationId xmlns:a16="http://schemas.microsoft.com/office/drawing/2014/main" id="{ECB0A65C-F63E-5F80-8260-587DDCD9B03B}"/>
               </a:ext>
             </a:extLst>
           </p:cNvPr>
@@ -10981,7 +10981,7 @@
     </p:spTree>
     <p:extLst>
       <p:ext uri="{BB962C8B-B14F-4D97-AF65-F5344CB8AC3E}">
-        <p14:creationId xmlns:p14="http://schemas.microsoft.com/office/powerpoint/2010/main" val="1870687457"/>
+        <p14:creationId xmlns:p14="http://schemas.microsoft.com/office/powerpoint/2010/main" val="3497341586"/>
       </p:ext>
     </p:extLst>
   </p:cSld>
@@ -11021,7 +11021,7 @@
           <p:cNvPr id="2" name="CuadroTexto 1">
             <a:extLst>
               <a:ext uri="{FF2B5EF4-FFF2-40B4-BE49-F238E27FC236}">
-                <a16:creationId xmlns:a16="http://schemas.microsoft.com/office/drawing/2014/main" id="{DDA2E44B-4012-D66E-6975-B2B82BC52A62}"/>
+                <a16:creationId xmlns:a16="http://schemas.microsoft.com/office/drawing/2014/main" id="{BA79D961-E08F-4858-96FA-A6D8C7A8D870}"/>
               </a:ext>
             </a:extLst>
           </p:cNvPr>
@@ -11061,7 +11061,7 @@
           <p:cNvPr id="3" name="CuadroTexto 2">
             <a:extLst>
               <a:ext uri="{FF2B5EF4-FFF2-40B4-BE49-F238E27FC236}">
-                <a16:creationId xmlns:a16="http://schemas.microsoft.com/office/drawing/2014/main" id="{93D4E4D9-0C09-D458-F63D-CE83E122ABA4}"/>
+                <a16:creationId xmlns:a16="http://schemas.microsoft.com/office/drawing/2014/main" id="{0B1B2539-7EAA-D965-8623-42F44415337C}"/>
               </a:ext>
             </a:extLst>
           </p:cNvPr>
@@ -11101,7 +11101,7 @@
           <p:cNvPr id="5" name="Imagen 4">
             <a:extLst>
               <a:ext uri="{FF2B5EF4-FFF2-40B4-BE49-F238E27FC236}">
-                <a16:creationId xmlns:a16="http://schemas.microsoft.com/office/drawing/2014/main" id="{18BEFF83-73E1-6C40-6A3C-93391239A02B}"/>
+                <a16:creationId xmlns:a16="http://schemas.microsoft.com/office/drawing/2014/main" id="{22AA2E8A-CB30-4029-91C4-1E1CB880F8ED}"/>
               </a:ext>
             </a:extLst>
           </p:cNvPr>
@@ -11142,7 +11142,7 @@
           <p:cNvPr id="6" name="CuadroTexto 5">
             <a:extLst>
               <a:ext uri="{FF2B5EF4-FFF2-40B4-BE49-F238E27FC236}">
-                <a16:creationId xmlns:a16="http://schemas.microsoft.com/office/drawing/2014/main" id="{6DC0D98C-C30B-C13D-83C8-7ACD64420E8C}"/>
+                <a16:creationId xmlns:a16="http://schemas.microsoft.com/office/drawing/2014/main" id="{6DA13D5F-1396-1564-4634-76D19C7A308F}"/>
               </a:ext>
             </a:extLst>
           </p:cNvPr>
@@ -11241,7 +11241,7 @@
     </p:spTree>
     <p:extLst>
       <p:ext uri="{BB962C8B-B14F-4D97-AF65-F5344CB8AC3E}">
-        <p14:creationId xmlns:p14="http://schemas.microsoft.com/office/powerpoint/2010/main" val="2218698971"/>
+        <p14:creationId xmlns:p14="http://schemas.microsoft.com/office/powerpoint/2010/main" val="678131088"/>
       </p:ext>
     </p:extLst>
   </p:cSld>
@@ -11281,7 +11281,7 @@
           <p:cNvPr id="2" name="CuadroTexto 1">
             <a:extLst>
               <a:ext uri="{FF2B5EF4-FFF2-40B4-BE49-F238E27FC236}">
-                <a16:creationId xmlns:a16="http://schemas.microsoft.com/office/drawing/2014/main" id="{B1C050A0-6921-B6D2-E5BC-322E6A06C535}"/>
+                <a16:creationId xmlns:a16="http://schemas.microsoft.com/office/drawing/2014/main" id="{5C7D87DD-29AA-3C83-3C1E-2E4867E61651}"/>
               </a:ext>
             </a:extLst>
           </p:cNvPr>
@@ -11321,7 +11321,7 @@
           <p:cNvPr id="3" name="CuadroTexto 2">
             <a:extLst>
               <a:ext uri="{FF2B5EF4-FFF2-40B4-BE49-F238E27FC236}">
-                <a16:creationId xmlns:a16="http://schemas.microsoft.com/office/drawing/2014/main" id="{D1F9578E-E5F3-F489-7A6C-0F09A15693A0}"/>
+                <a16:creationId xmlns:a16="http://schemas.microsoft.com/office/drawing/2014/main" id="{67FA38A7-5B0E-EC4C-0298-DE5CD5D77697}"/>
               </a:ext>
             </a:extLst>
           </p:cNvPr>
@@ -11361,7 +11361,7 @@
           <p:cNvPr id="4" name="CuadroTexto 3">
             <a:extLst>
               <a:ext uri="{FF2B5EF4-FFF2-40B4-BE49-F238E27FC236}">
-                <a16:creationId xmlns:a16="http://schemas.microsoft.com/office/drawing/2014/main" id="{990C8A9D-CD87-1FFD-5E15-65B60B1DBB25}"/>
+                <a16:creationId xmlns:a16="http://schemas.microsoft.com/office/drawing/2014/main" id="{4132B8C2-F411-3FC4-6FD2-5C9336F710F1}"/>
               </a:ext>
             </a:extLst>
           </p:cNvPr>
@@ -11401,7 +11401,7 @@
           <p:cNvPr id="6" name="Imagen 5">
             <a:extLst>
               <a:ext uri="{FF2B5EF4-FFF2-40B4-BE49-F238E27FC236}">
-                <a16:creationId xmlns:a16="http://schemas.microsoft.com/office/drawing/2014/main" id="{F69E3CA6-3A0C-BE56-5837-2AB59D2E3372}"/>
+                <a16:creationId xmlns:a16="http://schemas.microsoft.com/office/drawing/2014/main" id="{63E56FE5-2A74-A348-92BC-49322CFF666E}"/>
               </a:ext>
             </a:extLst>
           </p:cNvPr>
@@ -11442,7 +11442,7 @@
           <p:cNvPr id="7" name="Rectángulo: esquinas redondeadas 6">
             <a:extLst>
               <a:ext uri="{FF2B5EF4-FFF2-40B4-BE49-F238E27FC236}">
-                <a16:creationId xmlns:a16="http://schemas.microsoft.com/office/drawing/2014/main" id="{12E779A8-11E5-B8DE-D05C-84B751D5CE51}"/>
+                <a16:creationId xmlns:a16="http://schemas.microsoft.com/office/drawing/2014/main" id="{D4FF35B6-A579-E4EF-DD81-7260D14BE468}"/>
               </a:ext>
             </a:extLst>
           </p:cNvPr>
@@ -11496,7 +11496,7 @@
           <p:cNvPr id="8" name="CuadroTexto 7">
             <a:extLst>
               <a:ext uri="{FF2B5EF4-FFF2-40B4-BE49-F238E27FC236}">
-                <a16:creationId xmlns:a16="http://schemas.microsoft.com/office/drawing/2014/main" id="{B7F5F231-6468-A042-3C34-FAD44DBFA31F}"/>
+                <a16:creationId xmlns:a16="http://schemas.microsoft.com/office/drawing/2014/main" id="{4B3CFD33-CF6F-DD39-17F3-EFFA9309B7D8}"/>
               </a:ext>
             </a:extLst>
           </p:cNvPr>
@@ -11536,7 +11536,7 @@
           <p:cNvPr id="9" name="CuadroTexto 8">
             <a:extLst>
               <a:ext uri="{FF2B5EF4-FFF2-40B4-BE49-F238E27FC236}">
-                <a16:creationId xmlns:a16="http://schemas.microsoft.com/office/drawing/2014/main" id="{D84EEE23-CEDA-1DAE-11AC-C5FD47E0FA98}"/>
+                <a16:creationId xmlns:a16="http://schemas.microsoft.com/office/drawing/2014/main" id="{524415CD-C69E-A89C-4E9C-2B561DB05EC9}"/>
               </a:ext>
             </a:extLst>
           </p:cNvPr>
@@ -11574,7 +11574,7 @@
     </p:spTree>
     <p:extLst>
       <p:ext uri="{BB962C8B-B14F-4D97-AF65-F5344CB8AC3E}">
-        <p14:creationId xmlns:p14="http://schemas.microsoft.com/office/powerpoint/2010/main" val="3688929477"/>
+        <p14:creationId xmlns:p14="http://schemas.microsoft.com/office/powerpoint/2010/main" val="1537109807"/>
       </p:ext>
     </p:extLst>
   </p:cSld>
@@ -11614,7 +11614,7 @@
           <p:cNvPr id="2" name="CuadroTexto 1">
             <a:extLst>
               <a:ext uri="{FF2B5EF4-FFF2-40B4-BE49-F238E27FC236}">
-                <a16:creationId xmlns:a16="http://schemas.microsoft.com/office/drawing/2014/main" id="{49C87107-47D5-FE8D-53D3-4804744F9A18}"/>
+                <a16:creationId xmlns:a16="http://schemas.microsoft.com/office/drawing/2014/main" id="{A82CDF45-685F-7AAC-08B4-C42229D107FF}"/>
               </a:ext>
             </a:extLst>
           </p:cNvPr>
@@ -11654,7 +11654,7 @@
           <p:cNvPr id="3" name="CuadroTexto 2">
             <a:extLst>
               <a:ext uri="{FF2B5EF4-FFF2-40B4-BE49-F238E27FC236}">
-                <a16:creationId xmlns:a16="http://schemas.microsoft.com/office/drawing/2014/main" id="{A8838B2B-EE8B-4F9D-3A7D-F40AE960843F}"/>
+                <a16:creationId xmlns:a16="http://schemas.microsoft.com/office/drawing/2014/main" id="{62694766-9C70-301A-7117-01EEAA15FDA1}"/>
               </a:ext>
             </a:extLst>
           </p:cNvPr>
@@ -11694,7 +11694,7 @@
           <p:cNvPr id="4" name="CuadroTexto 3">
             <a:extLst>
               <a:ext uri="{FF2B5EF4-FFF2-40B4-BE49-F238E27FC236}">
-                <a16:creationId xmlns:a16="http://schemas.microsoft.com/office/drawing/2014/main" id="{5020C065-38A9-66E8-A3E3-560223338CC8}"/>
+                <a16:creationId xmlns:a16="http://schemas.microsoft.com/office/drawing/2014/main" id="{3EEA0B73-29BE-2136-E44B-B589317BD148}"/>
               </a:ext>
             </a:extLst>
           </p:cNvPr>
@@ -11734,7 +11734,7 @@
           <p:cNvPr id="5" name="Rectángulo: esquinas redondeadas 4">
             <a:extLst>
               <a:ext uri="{FF2B5EF4-FFF2-40B4-BE49-F238E27FC236}">
-                <a16:creationId xmlns:a16="http://schemas.microsoft.com/office/drawing/2014/main" id="{CA005563-89EA-808E-66D0-B732EA8AB31E}"/>
+                <a16:creationId xmlns:a16="http://schemas.microsoft.com/office/drawing/2014/main" id="{76539E62-22C0-70CC-83B3-841E6281B192}"/>
               </a:ext>
             </a:extLst>
           </p:cNvPr>
@@ -11788,7 +11788,7 @@
           <p:cNvPr id="6" name="CuadroTexto 5">
             <a:extLst>
               <a:ext uri="{FF2B5EF4-FFF2-40B4-BE49-F238E27FC236}">
-                <a16:creationId xmlns:a16="http://schemas.microsoft.com/office/drawing/2014/main" id="{F3C41619-89A7-4796-5D5B-A388B8F27FDF}"/>
+                <a16:creationId xmlns:a16="http://schemas.microsoft.com/office/drawing/2014/main" id="{49AE26AD-3519-5EFA-7ECE-0A0834F2347C}"/>
               </a:ext>
             </a:extLst>
           </p:cNvPr>
@@ -11828,7 +11828,7 @@
           <p:cNvPr id="7" name="CuadroTexto 6">
             <a:extLst>
               <a:ext uri="{FF2B5EF4-FFF2-40B4-BE49-F238E27FC236}">
-                <a16:creationId xmlns:a16="http://schemas.microsoft.com/office/drawing/2014/main" id="{8751DD6A-2E23-0880-F2B8-F6A50A3459AD}"/>
+                <a16:creationId xmlns:a16="http://schemas.microsoft.com/office/drawing/2014/main" id="{E4FA83F1-ED90-227D-7868-A89C5CCCD954}"/>
               </a:ext>
             </a:extLst>
           </p:cNvPr>
@@ -11868,7 +11868,7 @@
           <p:cNvPr id="8" name="Rectángulo: esquinas redondeadas 7">
             <a:extLst>
               <a:ext uri="{FF2B5EF4-FFF2-40B4-BE49-F238E27FC236}">
-                <a16:creationId xmlns:a16="http://schemas.microsoft.com/office/drawing/2014/main" id="{578B8247-503E-4F06-3EDD-AE07D2D3EB52}"/>
+                <a16:creationId xmlns:a16="http://schemas.microsoft.com/office/drawing/2014/main" id="{CD0E7F07-06E8-14CF-56C0-549B3119A75E}"/>
               </a:ext>
             </a:extLst>
           </p:cNvPr>
@@ -11922,7 +11922,7 @@
           <p:cNvPr id="9" name="CuadroTexto 8">
             <a:extLst>
               <a:ext uri="{FF2B5EF4-FFF2-40B4-BE49-F238E27FC236}">
-                <a16:creationId xmlns:a16="http://schemas.microsoft.com/office/drawing/2014/main" id="{1232DF11-5F2E-8CA0-850C-E8C964B528F1}"/>
+                <a16:creationId xmlns:a16="http://schemas.microsoft.com/office/drawing/2014/main" id="{28BB2100-C35C-6C35-E119-EEE46D92A578}"/>
               </a:ext>
             </a:extLst>
           </p:cNvPr>
@@ -11962,7 +11962,7 @@
           <p:cNvPr id="10" name="CuadroTexto 9">
             <a:extLst>
               <a:ext uri="{FF2B5EF4-FFF2-40B4-BE49-F238E27FC236}">
-                <a16:creationId xmlns:a16="http://schemas.microsoft.com/office/drawing/2014/main" id="{3ACD2940-8FD0-C488-D977-677F9130B1EB}"/>
+                <a16:creationId xmlns:a16="http://schemas.microsoft.com/office/drawing/2014/main" id="{C861713D-F9D0-29AE-B9F8-852E6B84D2CD}"/>
               </a:ext>
             </a:extLst>
           </p:cNvPr>
@@ -12002,7 +12002,7 @@
           <p:cNvPr id="11" name="Rectángulo: esquinas redondeadas 10">
             <a:extLst>
               <a:ext uri="{FF2B5EF4-FFF2-40B4-BE49-F238E27FC236}">
-                <a16:creationId xmlns:a16="http://schemas.microsoft.com/office/drawing/2014/main" id="{15CBE82E-1E6B-A600-D53B-93CFF6F37C14}"/>
+                <a16:creationId xmlns:a16="http://schemas.microsoft.com/office/drawing/2014/main" id="{29C698F1-A941-03C9-E5C9-BB90546C39A8}"/>
               </a:ext>
             </a:extLst>
           </p:cNvPr>
@@ -12056,7 +12056,7 @@
           <p:cNvPr id="12" name="CuadroTexto 11">
             <a:extLst>
               <a:ext uri="{FF2B5EF4-FFF2-40B4-BE49-F238E27FC236}">
-                <a16:creationId xmlns:a16="http://schemas.microsoft.com/office/drawing/2014/main" id="{86DBF4D4-AF3C-1CAE-AAE3-7BC33D03EEB5}"/>
+                <a16:creationId xmlns:a16="http://schemas.microsoft.com/office/drawing/2014/main" id="{6AB9EB41-0047-5D02-73E3-79D9681D7C5D}"/>
               </a:ext>
             </a:extLst>
           </p:cNvPr>
@@ -12096,7 +12096,7 @@
           <p:cNvPr id="13" name="CuadroTexto 12">
             <a:extLst>
               <a:ext uri="{FF2B5EF4-FFF2-40B4-BE49-F238E27FC236}">
-                <a16:creationId xmlns:a16="http://schemas.microsoft.com/office/drawing/2014/main" id="{30321472-DAB2-7B8C-BB47-82C42B9E4A11}"/>
+                <a16:creationId xmlns:a16="http://schemas.microsoft.com/office/drawing/2014/main" id="{90880360-89E0-AC87-5EE9-13D356B06051}"/>
               </a:ext>
             </a:extLst>
           </p:cNvPr>
@@ -12136,7 +12136,7 @@
           <p:cNvPr id="14" name="Rectángulo: esquinas redondeadas 13">
             <a:extLst>
               <a:ext uri="{FF2B5EF4-FFF2-40B4-BE49-F238E27FC236}">
-                <a16:creationId xmlns:a16="http://schemas.microsoft.com/office/drawing/2014/main" id="{2AD96489-76F8-B559-03A5-362580CF8A66}"/>
+                <a16:creationId xmlns:a16="http://schemas.microsoft.com/office/drawing/2014/main" id="{F15BF842-35C3-E6AE-0E2D-44A3C8B3B4AE}"/>
               </a:ext>
             </a:extLst>
           </p:cNvPr>
@@ -12190,7 +12190,7 @@
           <p:cNvPr id="15" name="CuadroTexto 14">
             <a:extLst>
               <a:ext uri="{FF2B5EF4-FFF2-40B4-BE49-F238E27FC236}">
-                <a16:creationId xmlns:a16="http://schemas.microsoft.com/office/drawing/2014/main" id="{1642DD86-CB6A-421C-E05C-4E3CEC17DC81}"/>
+                <a16:creationId xmlns:a16="http://schemas.microsoft.com/office/drawing/2014/main" id="{8B3CEDB2-FFC3-471B-A290-01DB236A748C}"/>
               </a:ext>
             </a:extLst>
           </p:cNvPr>
@@ -12230,7 +12230,7 @@
           <p:cNvPr id="16" name="CuadroTexto 15">
             <a:extLst>
               <a:ext uri="{FF2B5EF4-FFF2-40B4-BE49-F238E27FC236}">
-                <a16:creationId xmlns:a16="http://schemas.microsoft.com/office/drawing/2014/main" id="{F6845773-DC4E-F31C-1C48-67C044F73A55}"/>
+                <a16:creationId xmlns:a16="http://schemas.microsoft.com/office/drawing/2014/main" id="{BF7426E8-7C20-5AD0-0D23-49A0DDC3702C}"/>
               </a:ext>
             </a:extLst>
           </p:cNvPr>
@@ -12270,7 +12270,7 @@
           <p:cNvPr id="17" name="Rectángulo: esquinas redondeadas 16">
             <a:extLst>
               <a:ext uri="{FF2B5EF4-FFF2-40B4-BE49-F238E27FC236}">
-                <a16:creationId xmlns:a16="http://schemas.microsoft.com/office/drawing/2014/main" id="{84B96BE3-B71E-71C8-C5CB-0FDA0651AFB8}"/>
+                <a16:creationId xmlns:a16="http://schemas.microsoft.com/office/drawing/2014/main" id="{1ACC399E-2A95-0D97-985F-0B379863B5B7}"/>
               </a:ext>
             </a:extLst>
           </p:cNvPr>
@@ -12324,7 +12324,7 @@
           <p:cNvPr id="18" name="CuadroTexto 17">
             <a:extLst>
               <a:ext uri="{FF2B5EF4-FFF2-40B4-BE49-F238E27FC236}">
-                <a16:creationId xmlns:a16="http://schemas.microsoft.com/office/drawing/2014/main" id="{7856000A-BCF8-C231-784A-B191622AB285}"/>
+                <a16:creationId xmlns:a16="http://schemas.microsoft.com/office/drawing/2014/main" id="{0C2998C9-6035-E014-9090-5565E6E4252B}"/>
               </a:ext>
             </a:extLst>
           </p:cNvPr>
@@ -12364,7 +12364,7 @@
           <p:cNvPr id="19" name="CuadroTexto 18">
             <a:extLst>
               <a:ext uri="{FF2B5EF4-FFF2-40B4-BE49-F238E27FC236}">
-                <a16:creationId xmlns:a16="http://schemas.microsoft.com/office/drawing/2014/main" id="{8C446BC0-B203-434D-5198-E611C650F74F}"/>
+                <a16:creationId xmlns:a16="http://schemas.microsoft.com/office/drawing/2014/main" id="{F87FFE9B-DF91-5AB5-070F-65CFCE153E56}"/>
               </a:ext>
             </a:extLst>
           </p:cNvPr>
@@ -12404,7 +12404,7 @@
           <p:cNvPr id="20" name="Rectángulo: esquinas redondeadas 19">
             <a:extLst>
               <a:ext uri="{FF2B5EF4-FFF2-40B4-BE49-F238E27FC236}">
-                <a16:creationId xmlns:a16="http://schemas.microsoft.com/office/drawing/2014/main" id="{8DF8A7DA-98AC-FCEF-AECF-F42CEBA93481}"/>
+                <a16:creationId xmlns:a16="http://schemas.microsoft.com/office/drawing/2014/main" id="{A04152B9-2D10-1A64-2754-64D85FC68C1C}"/>
               </a:ext>
             </a:extLst>
           </p:cNvPr>
@@ -12458,7 +12458,7 @@
           <p:cNvPr id="21" name="CuadroTexto 20">
             <a:extLst>
               <a:ext uri="{FF2B5EF4-FFF2-40B4-BE49-F238E27FC236}">
-                <a16:creationId xmlns:a16="http://schemas.microsoft.com/office/drawing/2014/main" id="{85D7ED3A-36CF-256D-0106-2D9E605346B9}"/>
+                <a16:creationId xmlns:a16="http://schemas.microsoft.com/office/drawing/2014/main" id="{7253DF80-EF1A-0A04-7EEC-E53257F1D27A}"/>
               </a:ext>
             </a:extLst>
           </p:cNvPr>
@@ -12498,7 +12498,7 @@
           <p:cNvPr id="22" name="CuadroTexto 21">
             <a:extLst>
               <a:ext uri="{FF2B5EF4-FFF2-40B4-BE49-F238E27FC236}">
-                <a16:creationId xmlns:a16="http://schemas.microsoft.com/office/drawing/2014/main" id="{E45EC501-4E58-10A6-A758-C90D025FB9ED}"/>
+                <a16:creationId xmlns:a16="http://schemas.microsoft.com/office/drawing/2014/main" id="{DCDE9C4B-FF72-E33E-A1D5-5C82684DA2DE}"/>
               </a:ext>
             </a:extLst>
           </p:cNvPr>
@@ -12536,7 +12536,7 @@
     </p:spTree>
     <p:extLst>
       <p:ext uri="{BB962C8B-B14F-4D97-AF65-F5344CB8AC3E}">
-        <p14:creationId xmlns:p14="http://schemas.microsoft.com/office/powerpoint/2010/main" val="3281172835"/>
+        <p14:creationId xmlns:p14="http://schemas.microsoft.com/office/powerpoint/2010/main" val="3198014928"/>
       </p:ext>
     </p:extLst>
   </p:cSld>

--- a/docs/presentacion-defensa-final.pptx
+++ b/docs/presentacion-defensa-final.pptx
@@ -4,6 +4,9 @@
   <p:sldMasterIdLst>
     <p:sldMasterId id="2147483648" r:id="rId1"/>
   </p:sldMasterIdLst>
+  <p:notesMasterIdLst>
+    <p:notesMasterId r:id="rId20"/>
+  </p:notesMasterIdLst>
   <p:sldIdLst>
     <p:sldId id="256" r:id="rId2"/>
     <p:sldId id="257" r:id="rId3"/>
@@ -121,7 +124,1988 @@
       </a:defRPr>
     </a:lvl9pPr>
   </p:defaultTextStyle>
+  <p:extLst>
+    <p:ext uri="{EFAFB233-063F-42B5-8137-9DF3F51BA10A}">
+      <p15:sldGuideLst xmlns:p15="http://schemas.microsoft.com/office/powerpoint/2012/main"/>
+    </p:ext>
+  </p:extLst>
 </p:presentation>
+</file>
+
+<file path=ppt/notesMasters/notesMaster1.xml><?xml version="1.0" encoding="utf-8"?>
+<p:notesMaster xmlns:a="http://schemas.openxmlformats.org/drawingml/2006/main" xmlns:r="http://schemas.openxmlformats.org/officeDocument/2006/relationships" xmlns:p="http://schemas.openxmlformats.org/presentationml/2006/main">
+  <p:cSld>
+    <p:bg>
+      <p:bgRef idx="1001">
+        <a:schemeClr val="bg1"/>
+      </p:bgRef>
+    </p:bg>
+    <p:spTree>
+      <p:nvGrpSpPr>
+        <p:cNvPr id="1" name=""/>
+        <p:cNvGrpSpPr/>
+        <p:nvPr/>
+      </p:nvGrpSpPr>
+      <p:grpSpPr>
+        <a:xfrm>
+          <a:off x="0" y="0"/>
+          <a:ext cx="0" cy="0"/>
+          <a:chOff x="0" y="0"/>
+          <a:chExt cx="0" cy="0"/>
+        </a:xfrm>
+      </p:grpSpPr>
+      <p:sp>
+        <p:nvSpPr>
+          <p:cNvPr id="2" name="Marcador de encabezado 1"/>
+          <p:cNvSpPr>
+            <a:spLocks noGrp="1"/>
+          </p:cNvSpPr>
+          <p:nvPr>
+            <p:ph type="hdr" sz="quarter"/>
+          </p:nvPr>
+        </p:nvSpPr>
+        <p:spPr>
+          <a:xfrm>
+            <a:off x="0" y="0"/>
+            <a:ext cx="2971800" cy="458788"/>
+          </a:xfrm>
+          <a:prstGeom prst="rect">
+            <a:avLst/>
+          </a:prstGeom>
+        </p:spPr>
+        <p:txBody>
+          <a:bodyPr vert="horz" lIns="91440" tIns="45720" rIns="91440" bIns="45720" rtlCol="0"/>
+          <a:lstStyle>
+            <a:lvl1pPr algn="l">
+              <a:defRPr sz="1200"/>
+            </a:lvl1pPr>
+          </a:lstStyle>
+          <a:p>
+            <a:endParaRPr lang="es-ES"/>
+          </a:p>
+        </p:txBody>
+      </p:sp>
+      <p:sp>
+        <p:nvSpPr>
+          <p:cNvPr id="3" name="Marcador de fecha 2"/>
+          <p:cNvSpPr>
+            <a:spLocks noGrp="1"/>
+          </p:cNvSpPr>
+          <p:nvPr>
+            <p:ph type="dt" idx="1"/>
+          </p:nvPr>
+        </p:nvSpPr>
+        <p:spPr>
+          <a:xfrm>
+            <a:off x="3884613" y="0"/>
+            <a:ext cx="2971800" cy="458788"/>
+          </a:xfrm>
+          <a:prstGeom prst="rect">
+            <a:avLst/>
+          </a:prstGeom>
+        </p:spPr>
+        <p:txBody>
+          <a:bodyPr vert="horz" lIns="91440" tIns="45720" rIns="91440" bIns="45720" rtlCol="0"/>
+          <a:lstStyle>
+            <a:lvl1pPr algn="r">
+              <a:defRPr sz="1200"/>
+            </a:lvl1pPr>
+          </a:lstStyle>
+          <a:p>
+            <a:fld id="{B969961C-7EF2-4112-A9D2-2D05609ABC20}" type="datetimeFigureOut">
+              <a:rPr lang="es-ES" smtClean="0"/>
+              <a:t>02/06/2026</a:t>
+            </a:fld>
+            <a:endParaRPr lang="es-ES"/>
+          </a:p>
+        </p:txBody>
+      </p:sp>
+      <p:sp>
+        <p:nvSpPr>
+          <p:cNvPr id="4" name="Marcador de imagen de diapositiva 3"/>
+          <p:cNvSpPr>
+            <a:spLocks noGrp="1" noRot="1" noChangeAspect="1"/>
+          </p:cNvSpPr>
+          <p:nvPr>
+            <p:ph type="sldImg" idx="2"/>
+          </p:nvPr>
+        </p:nvSpPr>
+        <p:spPr>
+          <a:xfrm>
+            <a:off x="685800" y="1143000"/>
+            <a:ext cx="5486400" cy="3086100"/>
+          </a:xfrm>
+          <a:prstGeom prst="rect">
+            <a:avLst/>
+          </a:prstGeom>
+          <a:noFill/>
+          <a:ln w="12700">
+            <a:solidFill>
+              <a:prstClr val="black"/>
+            </a:solidFill>
+          </a:ln>
+        </p:spPr>
+        <p:txBody>
+          <a:bodyPr vert="horz" lIns="91440" tIns="45720" rIns="91440" bIns="45720" rtlCol="0" anchor="ctr"/>
+          <a:lstStyle/>
+          <a:p>
+            <a:endParaRPr lang="es-ES"/>
+          </a:p>
+        </p:txBody>
+      </p:sp>
+      <p:sp>
+        <p:nvSpPr>
+          <p:cNvPr id="5" name="Marcador de notas 4"/>
+          <p:cNvSpPr>
+            <a:spLocks noGrp="1"/>
+          </p:cNvSpPr>
+          <p:nvPr>
+            <p:ph type="body" sz="quarter" idx="3"/>
+          </p:nvPr>
+        </p:nvSpPr>
+        <p:spPr>
+          <a:xfrm>
+            <a:off x="685800" y="4400550"/>
+            <a:ext cx="5486400" cy="3600450"/>
+          </a:xfrm>
+          <a:prstGeom prst="rect">
+            <a:avLst/>
+          </a:prstGeom>
+        </p:spPr>
+        <p:txBody>
+          <a:bodyPr vert="horz" lIns="91440" tIns="45720" rIns="91440" bIns="45720" rtlCol="0"/>
+          <a:lstStyle/>
+          <a:p>
+            <a:pPr lvl="0"/>
+            <a:r>
+              <a:rPr lang="es-ES"/>
+              <a:t>Haga clic para modificar los estilos de texto del patrón</a:t>
+            </a:r>
+          </a:p>
+          <a:p>
+            <a:pPr lvl="1"/>
+            <a:r>
+              <a:rPr lang="es-ES"/>
+              <a:t>Segundo nivel</a:t>
+            </a:r>
+          </a:p>
+          <a:p>
+            <a:pPr lvl="2"/>
+            <a:r>
+              <a:rPr lang="es-ES"/>
+              <a:t>Tercer nivel</a:t>
+            </a:r>
+          </a:p>
+          <a:p>
+            <a:pPr lvl="3"/>
+            <a:r>
+              <a:rPr lang="es-ES"/>
+              <a:t>Cuarto nivel</a:t>
+            </a:r>
+          </a:p>
+          <a:p>
+            <a:pPr lvl="4"/>
+            <a:r>
+              <a:rPr lang="es-ES"/>
+              <a:t>Quinto nivel</a:t>
+            </a:r>
+          </a:p>
+        </p:txBody>
+      </p:sp>
+      <p:sp>
+        <p:nvSpPr>
+          <p:cNvPr id="6" name="Marcador de pie de página 5"/>
+          <p:cNvSpPr>
+            <a:spLocks noGrp="1"/>
+          </p:cNvSpPr>
+          <p:nvPr>
+            <p:ph type="ftr" sz="quarter" idx="4"/>
+          </p:nvPr>
+        </p:nvSpPr>
+        <p:spPr>
+          <a:xfrm>
+            <a:off x="0" y="8685213"/>
+            <a:ext cx="2971800" cy="458787"/>
+          </a:xfrm>
+          <a:prstGeom prst="rect">
+            <a:avLst/>
+          </a:prstGeom>
+        </p:spPr>
+        <p:txBody>
+          <a:bodyPr vert="horz" lIns="91440" tIns="45720" rIns="91440" bIns="45720" rtlCol="0" anchor="b"/>
+          <a:lstStyle>
+            <a:lvl1pPr algn="l">
+              <a:defRPr sz="1200"/>
+            </a:lvl1pPr>
+          </a:lstStyle>
+          <a:p>
+            <a:endParaRPr lang="es-ES"/>
+          </a:p>
+        </p:txBody>
+      </p:sp>
+      <p:sp>
+        <p:nvSpPr>
+          <p:cNvPr id="7" name="Marcador de número de diapositiva 6"/>
+          <p:cNvSpPr>
+            <a:spLocks noGrp="1"/>
+          </p:cNvSpPr>
+          <p:nvPr>
+            <p:ph type="sldNum" sz="quarter" idx="5"/>
+          </p:nvPr>
+        </p:nvSpPr>
+        <p:spPr>
+          <a:xfrm>
+            <a:off x="3884613" y="8685213"/>
+            <a:ext cx="2971800" cy="458787"/>
+          </a:xfrm>
+          <a:prstGeom prst="rect">
+            <a:avLst/>
+          </a:prstGeom>
+        </p:spPr>
+        <p:txBody>
+          <a:bodyPr vert="horz" lIns="91440" tIns="45720" rIns="91440" bIns="45720" rtlCol="0" anchor="b"/>
+          <a:lstStyle>
+            <a:lvl1pPr algn="r">
+              <a:defRPr sz="1200"/>
+            </a:lvl1pPr>
+          </a:lstStyle>
+          <a:p>
+            <a:fld id="{9B1CC43E-8847-428E-B292-0E1D8D2BFE8D}" type="slidenum">
+              <a:rPr lang="es-ES" smtClean="0"/>
+              <a:t>‹Nº›</a:t>
+            </a:fld>
+            <a:endParaRPr lang="es-ES"/>
+          </a:p>
+        </p:txBody>
+      </p:sp>
+    </p:spTree>
+    <p:extLst>
+      <p:ext uri="{BB962C8B-B14F-4D97-AF65-F5344CB8AC3E}">
+        <p14:creationId xmlns:p14="http://schemas.microsoft.com/office/powerpoint/2010/main" val="4112319770"/>
+      </p:ext>
+    </p:extLst>
+  </p:cSld>
+  <p:clrMap bg1="lt1" tx1="dk1" bg2="lt2" tx2="dk2" accent1="accent1" accent2="accent2" accent3="accent3" accent4="accent4" accent5="accent5" accent6="accent6" hlink="hlink" folHlink="folHlink"/>
+  <p:notesStyle>
+    <a:lvl1pPr marL="0" algn="l" defTabSz="914400" rtl="0" eaLnBrk="1" latinLnBrk="0" hangingPunct="1">
+      <a:defRPr sz="1200" kern="1200">
+        <a:solidFill>
+          <a:schemeClr val="tx1"/>
+        </a:solidFill>
+        <a:latin typeface="+mn-lt"/>
+        <a:ea typeface="+mn-ea"/>
+        <a:cs typeface="+mn-cs"/>
+      </a:defRPr>
+    </a:lvl1pPr>
+    <a:lvl2pPr marL="457200" algn="l" defTabSz="914400" rtl="0" eaLnBrk="1" latinLnBrk="0" hangingPunct="1">
+      <a:defRPr sz="1200" kern="1200">
+        <a:solidFill>
+          <a:schemeClr val="tx1"/>
+        </a:solidFill>
+        <a:latin typeface="+mn-lt"/>
+        <a:ea typeface="+mn-ea"/>
+        <a:cs typeface="+mn-cs"/>
+      </a:defRPr>
+    </a:lvl2pPr>
+    <a:lvl3pPr marL="914400" algn="l" defTabSz="914400" rtl="0" eaLnBrk="1" latinLnBrk="0" hangingPunct="1">
+      <a:defRPr sz="1200" kern="1200">
+        <a:solidFill>
+          <a:schemeClr val="tx1"/>
+        </a:solidFill>
+        <a:latin typeface="+mn-lt"/>
+        <a:ea typeface="+mn-ea"/>
+        <a:cs typeface="+mn-cs"/>
+      </a:defRPr>
+    </a:lvl3pPr>
+    <a:lvl4pPr marL="1371600" algn="l" defTabSz="914400" rtl="0" eaLnBrk="1" latinLnBrk="0" hangingPunct="1">
+      <a:defRPr sz="1200" kern="1200">
+        <a:solidFill>
+          <a:schemeClr val="tx1"/>
+        </a:solidFill>
+        <a:latin typeface="+mn-lt"/>
+        <a:ea typeface="+mn-ea"/>
+        <a:cs typeface="+mn-cs"/>
+      </a:defRPr>
+    </a:lvl4pPr>
+    <a:lvl5pPr marL="1828800" algn="l" defTabSz="914400" rtl="0" eaLnBrk="1" latinLnBrk="0" hangingPunct="1">
+      <a:defRPr sz="1200" kern="1200">
+        <a:solidFill>
+          <a:schemeClr val="tx1"/>
+        </a:solidFill>
+        <a:latin typeface="+mn-lt"/>
+        <a:ea typeface="+mn-ea"/>
+        <a:cs typeface="+mn-cs"/>
+      </a:defRPr>
+    </a:lvl5pPr>
+    <a:lvl6pPr marL="2286000" algn="l" defTabSz="914400" rtl="0" eaLnBrk="1" latinLnBrk="0" hangingPunct="1">
+      <a:defRPr sz="1200" kern="1200">
+        <a:solidFill>
+          <a:schemeClr val="tx1"/>
+        </a:solidFill>
+        <a:latin typeface="+mn-lt"/>
+        <a:ea typeface="+mn-ea"/>
+        <a:cs typeface="+mn-cs"/>
+      </a:defRPr>
+    </a:lvl6pPr>
+    <a:lvl7pPr marL="2743200" algn="l" defTabSz="914400" rtl="0" eaLnBrk="1" latinLnBrk="0" hangingPunct="1">
+      <a:defRPr sz="1200" kern="1200">
+        <a:solidFill>
+          <a:schemeClr val="tx1"/>
+        </a:solidFill>
+        <a:latin typeface="+mn-lt"/>
+        <a:ea typeface="+mn-ea"/>
+        <a:cs typeface="+mn-cs"/>
+      </a:defRPr>
+    </a:lvl7pPr>
+    <a:lvl8pPr marL="3200400" algn="l" defTabSz="914400" rtl="0" eaLnBrk="1" latinLnBrk="0" hangingPunct="1">
+      <a:defRPr sz="1200" kern="1200">
+        <a:solidFill>
+          <a:schemeClr val="tx1"/>
+        </a:solidFill>
+        <a:latin typeface="+mn-lt"/>
+        <a:ea typeface="+mn-ea"/>
+        <a:cs typeface="+mn-cs"/>
+      </a:defRPr>
+    </a:lvl8pPr>
+    <a:lvl9pPr marL="3657600" algn="l" defTabSz="914400" rtl="0" eaLnBrk="1" latinLnBrk="0" hangingPunct="1">
+      <a:defRPr sz="1200" kern="1200">
+        <a:solidFill>
+          <a:schemeClr val="tx1"/>
+        </a:solidFill>
+        <a:latin typeface="+mn-lt"/>
+        <a:ea typeface="+mn-ea"/>
+        <a:cs typeface="+mn-cs"/>
+      </a:defRPr>
+    </a:lvl9pPr>
+  </p:notesStyle>
+</p:notesMaster>
+</file>
+
+<file path=ppt/notesSlides/notesSlide1.xml><?xml version="1.0" encoding="utf-8"?>
+<p:notes xmlns:a="http://schemas.openxmlformats.org/drawingml/2006/main" xmlns:r="http://schemas.openxmlformats.org/officeDocument/2006/relationships" xmlns:p="http://schemas.openxmlformats.org/presentationml/2006/main">
+  <p:cSld>
+    <p:spTree>
+      <p:nvGrpSpPr>
+        <p:cNvPr id="1" name=""/>
+        <p:cNvGrpSpPr/>
+        <p:nvPr/>
+      </p:nvGrpSpPr>
+      <p:grpSpPr>
+        <a:xfrm>
+          <a:off x="0" y="0"/>
+          <a:ext cx="0" cy="0"/>
+          <a:chOff x="0" y="0"/>
+          <a:chExt cx="0" cy="0"/>
+        </a:xfrm>
+      </p:grpSpPr>
+      <p:sp>
+        <p:nvSpPr>
+          <p:cNvPr id="2" name="Marcador de imagen de diapositiva 1"/>
+          <p:cNvSpPr>
+            <a:spLocks noGrp="1" noRot="1" noChangeAspect="1"/>
+          </p:cNvSpPr>
+          <p:nvPr>
+            <p:ph type="sldImg"/>
+          </p:nvPr>
+        </p:nvSpPr>
+        <p:spPr/>
+      </p:sp>
+      <p:sp>
+        <p:nvSpPr>
+          <p:cNvPr id="3" name="Marcador de notas 2"/>
+          <p:cNvSpPr>
+            <a:spLocks noGrp="1"/>
+          </p:cNvSpPr>
+          <p:nvPr>
+            <p:ph type="body" idx="1"/>
+          </p:nvPr>
+        </p:nvSpPr>
+        <p:spPr/>
+        <p:txBody>
+          <a:bodyPr/>
+          <a:lstStyle/>
+          <a:p>
+            <a:r>
+              <a:rPr lang="es-ES"/>
+              <a:t>En esta portada tengo que abrir con el problema, no con tecnologia.
+La idea principal es que he construido una plataforma para gestionar empresas colaboradoras y practicas de FP Dual.
+La solucion final tiene dos portales, una API central, documentacion publica y una app de escritorio tecnica.
+Durante la defensa voy a enseÃ±ar el flujo funcional y despues la parte de operacion y validacion.</a:t>
+            </a:r>
+          </a:p>
+        </p:txBody>
+      </p:sp>
+      <p:sp>
+        <p:nvSpPr>
+          <p:cNvPr id="4" name="Marcador de número de diapositiva 3"/>
+          <p:cNvSpPr>
+            <a:spLocks noGrp="1"/>
+          </p:cNvSpPr>
+          <p:nvPr>
+            <p:ph type="sldNum" sz="quarter" idx="5"/>
+          </p:nvPr>
+        </p:nvSpPr>
+        <p:spPr/>
+        <p:txBody>
+          <a:bodyPr/>
+          <a:lstStyle/>
+          <a:p>
+            <a:fld id="{9B1CC43E-8847-428E-B292-0E1D8D2BFE8D}" type="slidenum">
+              <a:rPr lang="es-ES" smtClean="0"/>
+              <a:t>1</a:t>
+            </a:fld>
+            <a:endParaRPr lang="es-ES"/>
+          </a:p>
+        </p:txBody>
+      </p:sp>
+    </p:spTree>
+    <p:extLst>
+      <p:ext uri="{BB962C8B-B14F-4D97-AF65-F5344CB8AC3E}">
+        <p14:creationId xmlns:p14="http://schemas.microsoft.com/office/powerpoint/2010/main" val="1461918548"/>
+      </p:ext>
+    </p:extLst>
+  </p:cSld>
+  <p:clrMapOvr>
+    <a:masterClrMapping/>
+  </p:clrMapOvr>
+</p:notes>
+</file>
+
+<file path=ppt/notesSlides/notesSlide10.xml><?xml version="1.0" encoding="utf-8"?>
+<p:notes xmlns:a="http://schemas.openxmlformats.org/drawingml/2006/main" xmlns:r="http://schemas.openxmlformats.org/officeDocument/2006/relationships" xmlns:p="http://schemas.openxmlformats.org/presentationml/2006/main">
+  <p:cSld>
+    <p:spTree>
+      <p:nvGrpSpPr>
+        <p:cNvPr id="1" name=""/>
+        <p:cNvGrpSpPr/>
+        <p:nvPr/>
+      </p:nvGrpSpPr>
+      <p:grpSpPr>
+        <a:xfrm>
+          <a:off x="0" y="0"/>
+          <a:ext cx="0" cy="0"/>
+          <a:chOff x="0" y="0"/>
+          <a:chExt cx="0" cy="0"/>
+        </a:xfrm>
+      </p:grpSpPr>
+      <p:sp>
+        <p:nvSpPr>
+          <p:cNvPr id="2" name="Marcador de imagen de diapositiva 1"/>
+          <p:cNvSpPr>
+            <a:spLocks noGrp="1" noRot="1" noChangeAspect="1"/>
+          </p:cNvSpPr>
+          <p:nvPr>
+            <p:ph type="sldImg"/>
+          </p:nvPr>
+        </p:nvSpPr>
+        <p:spPr/>
+      </p:sp>
+      <p:sp>
+        <p:nvSpPr>
+          <p:cNvPr id="3" name="Marcador de notas 2"/>
+          <p:cNvSpPr>
+            <a:spLocks noGrp="1"/>
+          </p:cNvSpPr>
+          <p:nvPr>
+            <p:ph type="body" idx="1"/>
+          </p:nvPr>
+        </p:nvSpPr>
+        <p:spPr/>
+        <p:txBody>
+          <a:bodyPr/>
+          <a:lstStyle/>
+          <a:p>
+            <a:r>
+              <a:rPr lang="es-ES"/>
+              <a:t>Aqui debo dejar claro que el correo no es decorativo.
+Uso Brevo para verificacion de empresa, activacion de cuenta, recuperacion de contrasena y avisos de rechazo.
+Eso permite que la profesora pruebe un flujo real desde fuera, no una simulacion local.
+Tambien me sirve para justificar por que necesitaba una URL publica correcta en cloud.</a:t>
+            </a:r>
+          </a:p>
+        </p:txBody>
+      </p:sp>
+      <p:sp>
+        <p:nvSpPr>
+          <p:cNvPr id="4" name="Marcador de número de diapositiva 3"/>
+          <p:cNvSpPr>
+            <a:spLocks noGrp="1"/>
+          </p:cNvSpPr>
+          <p:nvPr>
+            <p:ph type="sldNum" sz="quarter" idx="5"/>
+          </p:nvPr>
+        </p:nvSpPr>
+        <p:spPr/>
+        <p:txBody>
+          <a:bodyPr/>
+          <a:lstStyle/>
+          <a:p>
+            <a:fld id="{9B1CC43E-8847-428E-B292-0E1D8D2BFE8D}" type="slidenum">
+              <a:rPr lang="es-ES" smtClean="0"/>
+              <a:t>10</a:t>
+            </a:fld>
+            <a:endParaRPr lang="es-ES"/>
+          </a:p>
+        </p:txBody>
+      </p:sp>
+    </p:spTree>
+    <p:extLst>
+      <p:ext uri="{BB962C8B-B14F-4D97-AF65-F5344CB8AC3E}">
+        <p14:creationId xmlns:p14="http://schemas.microsoft.com/office/powerpoint/2010/main" val="2065384006"/>
+      </p:ext>
+    </p:extLst>
+  </p:cSld>
+  <p:clrMapOvr>
+    <a:masterClrMapping/>
+  </p:clrMapOvr>
+</p:notes>
+</file>
+
+<file path=ppt/notesSlides/notesSlide11.xml><?xml version="1.0" encoding="utf-8"?>
+<p:notes xmlns:a="http://schemas.openxmlformats.org/drawingml/2006/main" xmlns:r="http://schemas.openxmlformats.org/officeDocument/2006/relationships" xmlns:p="http://schemas.openxmlformats.org/presentationml/2006/main">
+  <p:cSld>
+    <p:spTree>
+      <p:nvGrpSpPr>
+        <p:cNvPr id="1" name=""/>
+        <p:cNvGrpSpPr/>
+        <p:nvPr/>
+      </p:nvGrpSpPr>
+      <p:grpSpPr>
+        <a:xfrm>
+          <a:off x="0" y="0"/>
+          <a:ext cx="0" cy="0"/>
+          <a:chOff x="0" y="0"/>
+          <a:chExt cx="0" cy="0"/>
+        </a:xfrm>
+      </p:grpSpPr>
+      <p:sp>
+        <p:nvSpPr>
+          <p:cNvPr id="2" name="Marcador de imagen de diapositiva 1"/>
+          <p:cNvSpPr>
+            <a:spLocks noGrp="1" noRot="1" noChangeAspect="1"/>
+          </p:cNvSpPr>
+          <p:nvPr>
+            <p:ph type="sldImg"/>
+          </p:nvPr>
+        </p:nvSpPr>
+        <p:spPr/>
+      </p:sp>
+      <p:sp>
+        <p:nvSpPr>
+          <p:cNvPr id="3" name="Marcador de notas 2"/>
+          <p:cNvSpPr>
+            <a:spLocks noGrp="1"/>
+          </p:cNvSpPr>
+          <p:nvPr>
+            <p:ph type="body" idx="1"/>
+          </p:nvPr>
+        </p:nvSpPr>
+        <p:spPr/>
+        <p:txBody>
+          <a:bodyPr/>
+          <a:lstStyle/>
+          <a:p>
+            <a:r>
+              <a:rPr lang="es-ES"/>
+              <a:t>Aqui explico un problema real que tuve que resolver.
+Una URL local dentro de un correo no sirve para una empresa externa.
+Por eso el despliegue cloud publica una URL HTTPS y el backend genera enlaces con ese origen.
+Con nip.io resuelvo la demo, aunque a futuro lo correcto seria un dominio institucional o una IP estatica.</a:t>
+            </a:r>
+          </a:p>
+        </p:txBody>
+      </p:sp>
+      <p:sp>
+        <p:nvSpPr>
+          <p:cNvPr id="4" name="Marcador de número de diapositiva 3"/>
+          <p:cNvSpPr>
+            <a:spLocks noGrp="1"/>
+          </p:cNvSpPr>
+          <p:nvPr>
+            <p:ph type="sldNum" sz="quarter" idx="5"/>
+          </p:nvPr>
+        </p:nvSpPr>
+        <p:spPr/>
+        <p:txBody>
+          <a:bodyPr/>
+          <a:lstStyle/>
+          <a:p>
+            <a:fld id="{9B1CC43E-8847-428E-B292-0E1D8D2BFE8D}" type="slidenum">
+              <a:rPr lang="es-ES" smtClean="0"/>
+              <a:t>11</a:t>
+            </a:fld>
+            <a:endParaRPr lang="es-ES"/>
+          </a:p>
+        </p:txBody>
+      </p:sp>
+    </p:spTree>
+    <p:extLst>
+      <p:ext uri="{BB962C8B-B14F-4D97-AF65-F5344CB8AC3E}">
+        <p14:creationId xmlns:p14="http://schemas.microsoft.com/office/powerpoint/2010/main" val="373135864"/>
+      </p:ext>
+    </p:extLst>
+  </p:cSld>
+  <p:clrMapOvr>
+    <a:masterClrMapping/>
+  </p:clrMapOvr>
+</p:notes>
+</file>
+
+<file path=ppt/notesSlides/notesSlide12.xml><?xml version="1.0" encoding="utf-8"?>
+<p:notes xmlns:a="http://schemas.openxmlformats.org/drawingml/2006/main" xmlns:r="http://schemas.openxmlformats.org/officeDocument/2006/relationships" xmlns:p="http://schemas.openxmlformats.org/presentationml/2006/main">
+  <p:cSld>
+    <p:spTree>
+      <p:nvGrpSpPr>
+        <p:cNvPr id="1" name=""/>
+        <p:cNvGrpSpPr/>
+        <p:nvPr/>
+      </p:nvGrpSpPr>
+      <p:grpSpPr>
+        <a:xfrm>
+          <a:off x="0" y="0"/>
+          <a:ext cx="0" cy="0"/>
+          <a:chOff x="0" y="0"/>
+          <a:chExt cx="0" cy="0"/>
+        </a:xfrm>
+      </p:grpSpPr>
+      <p:sp>
+        <p:nvSpPr>
+          <p:cNvPr id="2" name="Marcador de imagen de diapositiva 1"/>
+          <p:cNvSpPr>
+            <a:spLocks noGrp="1" noRot="1" noChangeAspect="1"/>
+          </p:cNvSpPr>
+          <p:nvPr>
+            <p:ph type="sldImg"/>
+          </p:nvPr>
+        </p:nvSpPr>
+        <p:spPr/>
+      </p:sp>
+      <p:sp>
+        <p:nvSpPr>
+          <p:cNvPr id="3" name="Marcador de notas 2"/>
+          <p:cNvSpPr>
+            <a:spLocks noGrp="1"/>
+          </p:cNvSpPr>
+          <p:nvPr>
+            <p:ph type="body" idx="1"/>
+          </p:nvPr>
+        </p:nvSpPr>
+        <p:spPr/>
+        <p:txBody>
+          <a:bodyPr/>
+          <a:lstStyle/>
+          <a:p>
+            <a:r>
+              <a:rPr lang="es-ES"/>
+              <a:t>Esta diapositiva me sirve para justificar que la aplicacion no da sensacion de maqueta estatica.
+La bandeja interna y el chat externo se refrescan solos en segundo plano y tambien al recuperar el foco del navegador.
+Eso evita tener que recargar manualmente durante la demo.
+Ademas, el estado de rechazo no solo llega por correo: tambien queda visible dentro del portal externo.</a:t>
+            </a:r>
+          </a:p>
+        </p:txBody>
+      </p:sp>
+      <p:sp>
+        <p:nvSpPr>
+          <p:cNvPr id="4" name="Marcador de número de diapositiva 3"/>
+          <p:cNvSpPr>
+            <a:spLocks noGrp="1"/>
+          </p:cNvSpPr>
+          <p:nvPr>
+            <p:ph type="sldNum" sz="quarter" idx="5"/>
+          </p:nvPr>
+        </p:nvSpPr>
+        <p:spPr/>
+        <p:txBody>
+          <a:bodyPr/>
+          <a:lstStyle/>
+          <a:p>
+            <a:fld id="{9B1CC43E-8847-428E-B292-0E1D8D2BFE8D}" type="slidenum">
+              <a:rPr lang="es-ES" smtClean="0"/>
+              <a:t>12</a:t>
+            </a:fld>
+            <a:endParaRPr lang="es-ES"/>
+          </a:p>
+        </p:txBody>
+      </p:sp>
+    </p:spTree>
+    <p:extLst>
+      <p:ext uri="{BB962C8B-B14F-4D97-AF65-F5344CB8AC3E}">
+        <p14:creationId xmlns:p14="http://schemas.microsoft.com/office/powerpoint/2010/main" val="2206118539"/>
+      </p:ext>
+    </p:extLst>
+  </p:cSld>
+  <p:clrMapOvr>
+    <a:masterClrMapping/>
+  </p:clrMapOvr>
+</p:notes>
+</file>
+
+<file path=ppt/notesSlides/notesSlide13.xml><?xml version="1.0" encoding="utf-8"?>
+<p:notes xmlns:a="http://schemas.openxmlformats.org/drawingml/2006/main" xmlns:r="http://schemas.openxmlformats.org/officeDocument/2006/relationships" xmlns:p="http://schemas.openxmlformats.org/presentationml/2006/main">
+  <p:cSld>
+    <p:spTree>
+      <p:nvGrpSpPr>
+        <p:cNvPr id="1" name=""/>
+        <p:cNvGrpSpPr/>
+        <p:nvPr/>
+      </p:nvGrpSpPr>
+      <p:grpSpPr>
+        <a:xfrm>
+          <a:off x="0" y="0"/>
+          <a:ext cx="0" cy="0"/>
+          <a:chOff x="0" y="0"/>
+          <a:chExt cx="0" cy="0"/>
+        </a:xfrm>
+      </p:grpSpPr>
+      <p:sp>
+        <p:nvSpPr>
+          <p:cNvPr id="2" name="Marcador de imagen de diapositiva 1"/>
+          <p:cNvSpPr>
+            <a:spLocks noGrp="1" noRot="1" noChangeAspect="1"/>
+          </p:cNvSpPr>
+          <p:nvPr>
+            <p:ph type="sldImg"/>
+          </p:nvPr>
+        </p:nvSpPr>
+        <p:spPr/>
+      </p:sp>
+      <p:sp>
+        <p:nvSpPr>
+          <p:cNvPr id="3" name="Marcador de notas 2"/>
+          <p:cNvSpPr>
+            <a:spLocks noGrp="1"/>
+          </p:cNvSpPr>
+          <p:nvPr>
+            <p:ph type="body" idx="1"/>
+          </p:nvPr>
+        </p:nvSpPr>
+        <p:spPr/>
+        <p:txBody>
+          <a:bodyPr/>
+          <a:lstStyle/>
+          <a:p>
+            <a:r>
+              <a:rPr lang="es-ES"/>
+              <a:t>Aqui explico por que hice Agora Desktop.
+No queria depender de varios terminales ni de una pagina tecnica aparte.
+La app me concentra modo local, modo cloud, logs, reinicios, smoke y contingencia.
+Si la VM cambia de IP o falla el servicio, desde aqui veo la URL efectiva y el estado de agora.service.</a:t>
+            </a:r>
+          </a:p>
+        </p:txBody>
+      </p:sp>
+      <p:sp>
+        <p:nvSpPr>
+          <p:cNvPr id="4" name="Marcador de número de diapositiva 3"/>
+          <p:cNvSpPr>
+            <a:spLocks noGrp="1"/>
+          </p:cNvSpPr>
+          <p:nvPr>
+            <p:ph type="sldNum" sz="quarter" idx="5"/>
+          </p:nvPr>
+        </p:nvSpPr>
+        <p:spPr/>
+        <p:txBody>
+          <a:bodyPr/>
+          <a:lstStyle/>
+          <a:p>
+            <a:fld id="{9B1CC43E-8847-428E-B292-0E1D8D2BFE8D}" type="slidenum">
+              <a:rPr lang="es-ES" smtClean="0"/>
+              <a:t>13</a:t>
+            </a:fld>
+            <a:endParaRPr lang="es-ES"/>
+          </a:p>
+        </p:txBody>
+      </p:sp>
+    </p:spTree>
+    <p:extLst>
+      <p:ext uri="{BB962C8B-B14F-4D97-AF65-F5344CB8AC3E}">
+        <p14:creationId xmlns:p14="http://schemas.microsoft.com/office/powerpoint/2010/main" val="4171920632"/>
+      </p:ext>
+    </p:extLst>
+  </p:cSld>
+  <p:clrMapOvr>
+    <a:masterClrMapping/>
+  </p:clrMapOvr>
+</p:notes>
+</file>
+
+<file path=ppt/notesSlides/notesSlide14.xml><?xml version="1.0" encoding="utf-8"?>
+<p:notes xmlns:a="http://schemas.openxmlformats.org/drawingml/2006/main" xmlns:r="http://schemas.openxmlformats.org/officeDocument/2006/relationships" xmlns:p="http://schemas.openxmlformats.org/presentationml/2006/main">
+  <p:cSld>
+    <p:spTree>
+      <p:nvGrpSpPr>
+        <p:cNvPr id="1" name=""/>
+        <p:cNvGrpSpPr/>
+        <p:nvPr/>
+      </p:nvGrpSpPr>
+      <p:grpSpPr>
+        <a:xfrm>
+          <a:off x="0" y="0"/>
+          <a:ext cx="0" cy="0"/>
+          <a:chOff x="0" y="0"/>
+          <a:chExt cx="0" cy="0"/>
+        </a:xfrm>
+      </p:grpSpPr>
+      <p:sp>
+        <p:nvSpPr>
+          <p:cNvPr id="2" name="Marcador de imagen de diapositiva 1"/>
+          <p:cNvSpPr>
+            <a:spLocks noGrp="1" noRot="1" noChangeAspect="1"/>
+          </p:cNvSpPr>
+          <p:nvPr>
+            <p:ph type="sldImg"/>
+          </p:nvPr>
+        </p:nvSpPr>
+        <p:spPr/>
+      </p:sp>
+      <p:sp>
+        <p:nvSpPr>
+          <p:cNvPr id="3" name="Marcador de notas 2"/>
+          <p:cNvSpPr>
+            <a:spLocks noGrp="1"/>
+          </p:cNvSpPr>
+          <p:nvPr>
+            <p:ph type="body" idx="1"/>
+          </p:nvPr>
+        </p:nvSpPr>
+        <p:spPr/>
+        <p:txBody>
+          <a:bodyPr/>
+          <a:lstStyle/>
+          <a:p>
+            <a:r>
+              <a:rPr lang="es-ES"/>
+              <a:t>Aqui no me interesa presumir de numeros sin contexto.
+Lo importante es explicar que he validado backend, frontend, E2E, correo, mensajeria, documentos, cloud y escritorio.
+Las cifras sirven como apoyo para demostrar que no me he quedado en una prueba manual superficial.
+La deprecacion de PHPUnit existe, pero no afecta a la funcionalidad ni a la defensa.</a:t>
+            </a:r>
+          </a:p>
+        </p:txBody>
+      </p:sp>
+      <p:sp>
+        <p:nvSpPr>
+          <p:cNvPr id="4" name="Marcador de número de diapositiva 3"/>
+          <p:cNvSpPr>
+            <a:spLocks noGrp="1"/>
+          </p:cNvSpPr>
+          <p:nvPr>
+            <p:ph type="sldNum" sz="quarter" idx="5"/>
+          </p:nvPr>
+        </p:nvSpPr>
+        <p:spPr/>
+        <p:txBody>
+          <a:bodyPr/>
+          <a:lstStyle/>
+          <a:p>
+            <a:fld id="{9B1CC43E-8847-428E-B292-0E1D8D2BFE8D}" type="slidenum">
+              <a:rPr lang="es-ES" smtClean="0"/>
+              <a:t>14</a:t>
+            </a:fld>
+            <a:endParaRPr lang="es-ES"/>
+          </a:p>
+        </p:txBody>
+      </p:sp>
+    </p:spTree>
+    <p:extLst>
+      <p:ext uri="{BB962C8B-B14F-4D97-AF65-F5344CB8AC3E}">
+        <p14:creationId xmlns:p14="http://schemas.microsoft.com/office/powerpoint/2010/main" val="2114765100"/>
+      </p:ext>
+    </p:extLst>
+  </p:cSld>
+  <p:clrMapOvr>
+    <a:masterClrMapping/>
+  </p:clrMapOvr>
+</p:notes>
+</file>
+
+<file path=ppt/notesSlides/notesSlide15.xml><?xml version="1.0" encoding="utf-8"?>
+<p:notes xmlns:a="http://schemas.openxmlformats.org/drawingml/2006/main" xmlns:r="http://schemas.openxmlformats.org/officeDocument/2006/relationships" xmlns:p="http://schemas.openxmlformats.org/presentationml/2006/main">
+  <p:cSld>
+    <p:spTree>
+      <p:nvGrpSpPr>
+        <p:cNvPr id="1" name=""/>
+        <p:cNvGrpSpPr/>
+        <p:nvPr/>
+      </p:nvGrpSpPr>
+      <p:grpSpPr>
+        <a:xfrm>
+          <a:off x="0" y="0"/>
+          <a:ext cx="0" cy="0"/>
+          <a:chOff x="0" y="0"/>
+          <a:chExt cx="0" cy="0"/>
+        </a:xfrm>
+      </p:grpSpPr>
+      <p:sp>
+        <p:nvSpPr>
+          <p:cNvPr id="2" name="Marcador de imagen de diapositiva 1"/>
+          <p:cNvSpPr>
+            <a:spLocks noGrp="1" noRot="1" noChangeAspect="1"/>
+          </p:cNvSpPr>
+          <p:nvPr>
+            <p:ph type="sldImg"/>
+          </p:nvPr>
+        </p:nvSpPr>
+        <p:spPr/>
+      </p:sp>
+      <p:sp>
+        <p:nvSpPr>
+          <p:cNvPr id="3" name="Marcador de notas 2"/>
+          <p:cNvSpPr>
+            <a:spLocks noGrp="1"/>
+          </p:cNvSpPr>
+          <p:nvPr>
+            <p:ph type="body" idx="1"/>
+          </p:nvPr>
+        </p:nvSpPr>
+        <p:spPr/>
+        <p:txBody>
+          <a:bodyPr/>
+          <a:lstStyle/>
+          <a:p>
+            <a:r>
+              <a:rPr lang="es-ES"/>
+              <a:t>Esta slide es muy practica: explica como se puede probar el sistema desde fuera.
+Debo remarcar que la referencia buena es la URL cloud efectiva.
+Si cambia la IP publica, Agora Desktop me dice la nueva URL.
+Con la cuenta profesora se puede revisar el flujo interno sin usar la cuenta de administrador principal.</a:t>
+            </a:r>
+          </a:p>
+        </p:txBody>
+      </p:sp>
+      <p:sp>
+        <p:nvSpPr>
+          <p:cNvPr id="4" name="Marcador de número de diapositiva 3"/>
+          <p:cNvSpPr>
+            <a:spLocks noGrp="1"/>
+          </p:cNvSpPr>
+          <p:nvPr>
+            <p:ph type="sldNum" sz="quarter" idx="5"/>
+          </p:nvPr>
+        </p:nvSpPr>
+        <p:spPr/>
+        <p:txBody>
+          <a:bodyPr/>
+          <a:lstStyle/>
+          <a:p>
+            <a:fld id="{9B1CC43E-8847-428E-B292-0E1D8D2BFE8D}" type="slidenum">
+              <a:rPr lang="es-ES" smtClean="0"/>
+              <a:t>15</a:t>
+            </a:fld>
+            <a:endParaRPr lang="es-ES"/>
+          </a:p>
+        </p:txBody>
+      </p:sp>
+    </p:spTree>
+    <p:extLst>
+      <p:ext uri="{BB962C8B-B14F-4D97-AF65-F5344CB8AC3E}">
+        <p14:creationId xmlns:p14="http://schemas.microsoft.com/office/powerpoint/2010/main" val="2213597598"/>
+      </p:ext>
+    </p:extLst>
+  </p:cSld>
+  <p:clrMapOvr>
+    <a:masterClrMapping/>
+  </p:clrMapOvr>
+</p:notes>
+</file>
+
+<file path=ppt/notesSlides/notesSlide16.xml><?xml version="1.0" encoding="utf-8"?>
+<p:notes xmlns:a="http://schemas.openxmlformats.org/drawingml/2006/main" xmlns:r="http://schemas.openxmlformats.org/officeDocument/2006/relationships" xmlns:p="http://schemas.openxmlformats.org/presentationml/2006/main">
+  <p:cSld>
+    <p:spTree>
+      <p:nvGrpSpPr>
+        <p:cNvPr id="1" name=""/>
+        <p:cNvGrpSpPr/>
+        <p:nvPr/>
+      </p:nvGrpSpPr>
+      <p:grpSpPr>
+        <a:xfrm>
+          <a:off x="0" y="0"/>
+          <a:ext cx="0" cy="0"/>
+          <a:chOff x="0" y="0"/>
+          <a:chExt cx="0" cy="0"/>
+        </a:xfrm>
+      </p:grpSpPr>
+      <p:sp>
+        <p:nvSpPr>
+          <p:cNvPr id="2" name="Marcador de imagen de diapositiva 1"/>
+          <p:cNvSpPr>
+            <a:spLocks noGrp="1" noRot="1" noChangeAspect="1"/>
+          </p:cNvSpPr>
+          <p:nvPr>
+            <p:ph type="sldImg"/>
+          </p:nvPr>
+        </p:nvSpPr>
+        <p:spPr/>
+      </p:sp>
+      <p:sp>
+        <p:nvSpPr>
+          <p:cNvPr id="3" name="Marcador de notas 2"/>
+          <p:cNvSpPr>
+            <a:spLocks noGrp="1"/>
+          </p:cNvSpPr>
+          <p:nvPr>
+            <p:ph type="body" idx="1"/>
+          </p:nvPr>
+        </p:nvSpPr>
+        <p:spPr/>
+        <p:txBody>
+          <a:bodyPr/>
+          <a:lstStyle/>
+          <a:p>
+            <a:r>
+              <a:rPr lang="es-ES"/>
+              <a:t>Aqui tengo que defender bien el alcance.
+Lo principal ya esta cerrado: portales, documentos, mensajeria, correo, cloud y escritorio.
+Lo que dejo para despues no son huecos del nucleo, sino mejoras de endurecimiento y evolucion.
+Eso demuestra criterio: he preferido cerrar bien el producto base antes que abarcar mas cosas a medias.</a:t>
+            </a:r>
+          </a:p>
+        </p:txBody>
+      </p:sp>
+      <p:sp>
+        <p:nvSpPr>
+          <p:cNvPr id="4" name="Marcador de número de diapositiva 3"/>
+          <p:cNvSpPr>
+            <a:spLocks noGrp="1"/>
+          </p:cNvSpPr>
+          <p:nvPr>
+            <p:ph type="sldNum" sz="quarter" idx="5"/>
+          </p:nvPr>
+        </p:nvSpPr>
+        <p:spPr/>
+        <p:txBody>
+          <a:bodyPr/>
+          <a:lstStyle/>
+          <a:p>
+            <a:fld id="{9B1CC43E-8847-428E-B292-0E1D8D2BFE8D}" type="slidenum">
+              <a:rPr lang="es-ES" smtClean="0"/>
+              <a:t>16</a:t>
+            </a:fld>
+            <a:endParaRPr lang="es-ES"/>
+          </a:p>
+        </p:txBody>
+      </p:sp>
+    </p:spTree>
+    <p:extLst>
+      <p:ext uri="{BB962C8B-B14F-4D97-AF65-F5344CB8AC3E}">
+        <p14:creationId xmlns:p14="http://schemas.microsoft.com/office/powerpoint/2010/main" val="3467765253"/>
+      </p:ext>
+    </p:extLst>
+  </p:cSld>
+  <p:clrMapOvr>
+    <a:masterClrMapping/>
+  </p:clrMapOvr>
+</p:notes>
+</file>
+
+<file path=ppt/notesSlides/notesSlide17.xml><?xml version="1.0" encoding="utf-8"?>
+<p:notes xmlns:a="http://schemas.openxmlformats.org/drawingml/2006/main" xmlns:r="http://schemas.openxmlformats.org/officeDocument/2006/relationships" xmlns:p="http://schemas.openxmlformats.org/presentationml/2006/main">
+  <p:cSld>
+    <p:spTree>
+      <p:nvGrpSpPr>
+        <p:cNvPr id="1" name=""/>
+        <p:cNvGrpSpPr/>
+        <p:nvPr/>
+      </p:nvGrpSpPr>
+      <p:grpSpPr>
+        <a:xfrm>
+          <a:off x="0" y="0"/>
+          <a:ext cx="0" cy="0"/>
+          <a:chOff x="0" y="0"/>
+          <a:chExt cx="0" cy="0"/>
+        </a:xfrm>
+      </p:grpSpPr>
+      <p:sp>
+        <p:nvSpPr>
+          <p:cNvPr id="2" name="Marcador de imagen de diapositiva 1"/>
+          <p:cNvSpPr>
+            <a:spLocks noGrp="1" noRot="1" noChangeAspect="1"/>
+          </p:cNvSpPr>
+          <p:nvPr>
+            <p:ph type="sldImg"/>
+          </p:nvPr>
+        </p:nvSpPr>
+        <p:spPr/>
+      </p:sp>
+      <p:sp>
+        <p:nvSpPr>
+          <p:cNvPr id="3" name="Marcador de notas 2"/>
+          <p:cNvSpPr>
+            <a:spLocks noGrp="1"/>
+          </p:cNvSpPr>
+          <p:nvPr>
+            <p:ph type="body" idx="1"/>
+          </p:nvPr>
+        </p:nvSpPr>
+        <p:spPr/>
+        <p:txBody>
+          <a:bodyPr/>
+          <a:lstStyle/>
+          <a:p>
+            <a:r>
+              <a:rPr lang="es-ES"/>
+              <a:t>No debo esconder las limitaciones.
+Lo que falta no invalida el TFG, pero si marca una hoja de ruta realista:
+SSO, firma avanzada, dominio propio, observabilidad y servicios gestionados.
+Tambien puedo mencionar que Symfony sigue una version que convendria actualizar tras la entrega para mantenimiento a medio plazo.</a:t>
+            </a:r>
+          </a:p>
+        </p:txBody>
+      </p:sp>
+      <p:sp>
+        <p:nvSpPr>
+          <p:cNvPr id="4" name="Marcador de número de diapositiva 3"/>
+          <p:cNvSpPr>
+            <a:spLocks noGrp="1"/>
+          </p:cNvSpPr>
+          <p:nvPr>
+            <p:ph type="sldNum" sz="quarter" idx="5"/>
+          </p:nvPr>
+        </p:nvSpPr>
+        <p:spPr/>
+        <p:txBody>
+          <a:bodyPr/>
+          <a:lstStyle/>
+          <a:p>
+            <a:fld id="{9B1CC43E-8847-428E-B292-0E1D8D2BFE8D}" type="slidenum">
+              <a:rPr lang="es-ES" smtClean="0"/>
+              <a:t>17</a:t>
+            </a:fld>
+            <a:endParaRPr lang="es-ES"/>
+          </a:p>
+        </p:txBody>
+      </p:sp>
+    </p:spTree>
+    <p:extLst>
+      <p:ext uri="{BB962C8B-B14F-4D97-AF65-F5344CB8AC3E}">
+        <p14:creationId xmlns:p14="http://schemas.microsoft.com/office/powerpoint/2010/main" val="1329376463"/>
+      </p:ext>
+    </p:extLst>
+  </p:cSld>
+  <p:clrMapOvr>
+    <a:masterClrMapping/>
+  </p:clrMapOvr>
+</p:notes>
+</file>
+
+<file path=ppt/notesSlides/notesSlide18.xml><?xml version="1.0" encoding="utf-8"?>
+<p:notes xmlns:a="http://schemas.openxmlformats.org/drawingml/2006/main" xmlns:r="http://schemas.openxmlformats.org/officeDocument/2006/relationships" xmlns:p="http://schemas.openxmlformats.org/presentationml/2006/main">
+  <p:cSld>
+    <p:spTree>
+      <p:nvGrpSpPr>
+        <p:cNvPr id="1" name=""/>
+        <p:cNvGrpSpPr/>
+        <p:nvPr/>
+      </p:nvGrpSpPr>
+      <p:grpSpPr>
+        <a:xfrm>
+          <a:off x="0" y="0"/>
+          <a:ext cx="0" cy="0"/>
+          <a:chOff x="0" y="0"/>
+          <a:chExt cx="0" cy="0"/>
+        </a:xfrm>
+      </p:grpSpPr>
+      <p:sp>
+        <p:nvSpPr>
+          <p:cNvPr id="2" name="Marcador de imagen de diapositiva 1"/>
+          <p:cNvSpPr>
+            <a:spLocks noGrp="1" noRot="1" noChangeAspect="1"/>
+          </p:cNvSpPr>
+          <p:nvPr>
+            <p:ph type="sldImg"/>
+          </p:nvPr>
+        </p:nvSpPr>
+        <p:spPr/>
+      </p:sp>
+      <p:sp>
+        <p:nvSpPr>
+          <p:cNvPr id="3" name="Marcador de notas 2"/>
+          <p:cNvSpPr>
+            <a:spLocks noGrp="1"/>
+          </p:cNvSpPr>
+          <p:nvPr>
+            <p:ph type="body" idx="1"/>
+          </p:nvPr>
+        </p:nvSpPr>
+        <p:spPr/>
+        <p:txBody>
+          <a:bodyPr/>
+          <a:lstStyle/>
+          <a:p>
+            <a:r>
+              <a:rPr lang="es-ES"/>
+              <a:t>Aqui cierro con una idea simple.
+El valor del proyecto no esta en una tecnologia concreta, sino en haber convertido una necesidad real del centro en una solucion completa, funcional y defendible.
+Despues de esta slide paso a demo o a preguntas, segun el tiempo.</a:t>
+            </a:r>
+          </a:p>
+        </p:txBody>
+      </p:sp>
+      <p:sp>
+        <p:nvSpPr>
+          <p:cNvPr id="4" name="Marcador de número de diapositiva 3"/>
+          <p:cNvSpPr>
+            <a:spLocks noGrp="1"/>
+          </p:cNvSpPr>
+          <p:nvPr>
+            <p:ph type="sldNum" sz="quarter" idx="5"/>
+          </p:nvPr>
+        </p:nvSpPr>
+        <p:spPr/>
+        <p:txBody>
+          <a:bodyPr/>
+          <a:lstStyle/>
+          <a:p>
+            <a:fld id="{9B1CC43E-8847-428E-B292-0E1D8D2BFE8D}" type="slidenum">
+              <a:rPr lang="es-ES" smtClean="0"/>
+              <a:t>18</a:t>
+            </a:fld>
+            <a:endParaRPr lang="es-ES"/>
+          </a:p>
+        </p:txBody>
+      </p:sp>
+    </p:spTree>
+    <p:extLst>
+      <p:ext uri="{BB962C8B-B14F-4D97-AF65-F5344CB8AC3E}">
+        <p14:creationId xmlns:p14="http://schemas.microsoft.com/office/powerpoint/2010/main" val="2978035385"/>
+      </p:ext>
+    </p:extLst>
+  </p:cSld>
+  <p:clrMapOvr>
+    <a:masterClrMapping/>
+  </p:clrMapOvr>
+</p:notes>
+</file>
+
+<file path=ppt/notesSlides/notesSlide2.xml><?xml version="1.0" encoding="utf-8"?>
+<p:notes xmlns:a="http://schemas.openxmlformats.org/drawingml/2006/main" xmlns:r="http://schemas.openxmlformats.org/officeDocument/2006/relationships" xmlns:p="http://schemas.openxmlformats.org/presentationml/2006/main">
+  <p:cSld>
+    <p:spTree>
+      <p:nvGrpSpPr>
+        <p:cNvPr id="1" name=""/>
+        <p:cNvGrpSpPr/>
+        <p:nvPr/>
+      </p:nvGrpSpPr>
+      <p:grpSpPr>
+        <a:xfrm>
+          <a:off x="0" y="0"/>
+          <a:ext cx="0" cy="0"/>
+          <a:chOff x="0" y="0"/>
+          <a:chExt cx="0" cy="0"/>
+        </a:xfrm>
+      </p:grpSpPr>
+      <p:sp>
+        <p:nvSpPr>
+          <p:cNvPr id="2" name="Marcador de imagen de diapositiva 1"/>
+          <p:cNvSpPr>
+            <a:spLocks noGrp="1" noRot="1" noChangeAspect="1"/>
+          </p:cNvSpPr>
+          <p:nvPr>
+            <p:ph type="sldImg"/>
+          </p:nvPr>
+        </p:nvSpPr>
+        <p:spPr/>
+      </p:sp>
+      <p:sp>
+        <p:nvSpPr>
+          <p:cNvPr id="3" name="Marcador de notas 2"/>
+          <p:cNvSpPr>
+            <a:spLocks noGrp="1"/>
+          </p:cNvSpPr>
+          <p:nvPr>
+            <p:ph type="body" idx="1"/>
+          </p:nvPr>
+        </p:nvSpPr>
+        <p:spPr/>
+        <p:txBody>
+          <a:bodyPr/>
+          <a:lstStyle/>
+          <a:p>
+            <a:r>
+              <a:rPr lang="es-ES"/>
+              <a:t>Aqui tengo que explicar el contexto inicial.
+Antes la informacion estaba repartida entre correos, hojas de calculo y documentos en carpetas distintas.
+Eso hacia dificil saber en que estado estaba cada empresa, cada convenio o cada practica.
+Por eso el problema no era solo guardar datos, sino dar continuidad, trazabilidad y una vista unica al centro.</a:t>
+            </a:r>
+          </a:p>
+        </p:txBody>
+      </p:sp>
+      <p:sp>
+        <p:nvSpPr>
+          <p:cNvPr id="4" name="Marcador de número de diapositiva 3"/>
+          <p:cNvSpPr>
+            <a:spLocks noGrp="1"/>
+          </p:cNvSpPr>
+          <p:nvPr>
+            <p:ph type="sldNum" sz="quarter" idx="5"/>
+          </p:nvPr>
+        </p:nvSpPr>
+        <p:spPr/>
+        <p:txBody>
+          <a:bodyPr/>
+          <a:lstStyle/>
+          <a:p>
+            <a:fld id="{9B1CC43E-8847-428E-B292-0E1D8D2BFE8D}" type="slidenum">
+              <a:rPr lang="es-ES" smtClean="0"/>
+              <a:t>2</a:t>
+            </a:fld>
+            <a:endParaRPr lang="es-ES"/>
+          </a:p>
+        </p:txBody>
+      </p:sp>
+    </p:spTree>
+    <p:extLst>
+      <p:ext uri="{BB962C8B-B14F-4D97-AF65-F5344CB8AC3E}">
+        <p14:creationId xmlns:p14="http://schemas.microsoft.com/office/powerpoint/2010/main" val="2223486602"/>
+      </p:ext>
+    </p:extLst>
+  </p:cSld>
+  <p:clrMapOvr>
+    <a:masterClrMapping/>
+  </p:clrMapOvr>
+</p:notes>
+</file>
+
+<file path=ppt/notesSlides/notesSlide3.xml><?xml version="1.0" encoding="utf-8"?>
+<p:notes xmlns:a="http://schemas.openxmlformats.org/drawingml/2006/main" xmlns:r="http://schemas.openxmlformats.org/officeDocument/2006/relationships" xmlns:p="http://schemas.openxmlformats.org/presentationml/2006/main">
+  <p:cSld>
+    <p:spTree>
+      <p:nvGrpSpPr>
+        <p:cNvPr id="1" name=""/>
+        <p:cNvGrpSpPr/>
+        <p:nvPr/>
+      </p:nvGrpSpPr>
+      <p:grpSpPr>
+        <a:xfrm>
+          <a:off x="0" y="0"/>
+          <a:ext cx="0" cy="0"/>
+          <a:chOff x="0" y="0"/>
+          <a:chExt cx="0" cy="0"/>
+        </a:xfrm>
+      </p:grpSpPr>
+      <p:sp>
+        <p:nvSpPr>
+          <p:cNvPr id="2" name="Marcador de imagen de diapositiva 1"/>
+          <p:cNvSpPr>
+            <a:spLocks noGrp="1" noRot="1" noChangeAspect="1"/>
+          </p:cNvSpPr>
+          <p:nvPr>
+            <p:ph type="sldImg"/>
+          </p:nvPr>
+        </p:nvSpPr>
+        <p:spPr/>
+      </p:sp>
+      <p:sp>
+        <p:nvSpPr>
+          <p:cNvPr id="3" name="Marcador de notas 2"/>
+          <p:cNvSpPr>
+            <a:spLocks noGrp="1"/>
+          </p:cNvSpPr>
+          <p:nvPr>
+            <p:ph type="body" idx="1"/>
+          </p:nvPr>
+        </p:nvSpPr>
+        <p:spPr/>
+        <p:txBody>
+          <a:bodyPr/>
+          <a:lstStyle/>
+          <a:p>
+            <a:r>
+              <a:rPr lang="es-ES"/>
+              <a:t>Aqui resumo el alcance en cuatro objetivos claros.
+Primero, centralizar la operativa del centro.
+Segundo, abrir un canal externo para empresas sin mezclarlo con el panel interno.
+Tercero, dejar trazabilidad documental y de mensajes.
+Cuarto, cerrar una solucion defendible tecnicamente con pruebas, despliegue y documentacion.</a:t>
+            </a:r>
+          </a:p>
+        </p:txBody>
+      </p:sp>
+      <p:sp>
+        <p:nvSpPr>
+          <p:cNvPr id="4" name="Marcador de número de diapositiva 3"/>
+          <p:cNvSpPr>
+            <a:spLocks noGrp="1"/>
+          </p:cNvSpPr>
+          <p:nvPr>
+            <p:ph type="sldNum" sz="quarter" idx="5"/>
+          </p:nvPr>
+        </p:nvSpPr>
+        <p:spPr/>
+        <p:txBody>
+          <a:bodyPr/>
+          <a:lstStyle/>
+          <a:p>
+            <a:fld id="{9B1CC43E-8847-428E-B292-0E1D8D2BFE8D}" type="slidenum">
+              <a:rPr lang="es-ES" smtClean="0"/>
+              <a:t>3</a:t>
+            </a:fld>
+            <a:endParaRPr lang="es-ES"/>
+          </a:p>
+        </p:txBody>
+      </p:sp>
+    </p:spTree>
+    <p:extLst>
+      <p:ext uri="{BB962C8B-B14F-4D97-AF65-F5344CB8AC3E}">
+        <p14:creationId xmlns:p14="http://schemas.microsoft.com/office/powerpoint/2010/main" val="3772453054"/>
+      </p:ext>
+    </p:extLst>
+  </p:cSld>
+  <p:clrMapOvr>
+    <a:masterClrMapping/>
+  </p:clrMapOvr>
+</p:notes>
+</file>
+
+<file path=ppt/notesSlides/notesSlide4.xml><?xml version="1.0" encoding="utf-8"?>
+<p:notes xmlns:a="http://schemas.openxmlformats.org/drawingml/2006/main" xmlns:r="http://schemas.openxmlformats.org/officeDocument/2006/relationships" xmlns:p="http://schemas.openxmlformats.org/presentationml/2006/main">
+  <p:cSld>
+    <p:spTree>
+      <p:nvGrpSpPr>
+        <p:cNvPr id="1" name=""/>
+        <p:cNvGrpSpPr/>
+        <p:nvPr/>
+      </p:nvGrpSpPr>
+      <p:grpSpPr>
+        <a:xfrm>
+          <a:off x="0" y="0"/>
+          <a:ext cx="0" cy="0"/>
+          <a:chOff x="0" y="0"/>
+          <a:chExt cx="0" cy="0"/>
+        </a:xfrm>
+      </p:grpSpPr>
+      <p:sp>
+        <p:nvSpPr>
+          <p:cNvPr id="2" name="Marcador de imagen de diapositiva 1"/>
+          <p:cNvSpPr>
+            <a:spLocks noGrp="1" noRot="1" noChangeAspect="1"/>
+          </p:cNvSpPr>
+          <p:nvPr>
+            <p:ph type="sldImg"/>
+          </p:nvPr>
+        </p:nvSpPr>
+        <p:spPr/>
+      </p:sp>
+      <p:sp>
+        <p:nvSpPr>
+          <p:cNvPr id="3" name="Marcador de notas 2"/>
+          <p:cNvSpPr>
+            <a:spLocks noGrp="1"/>
+          </p:cNvSpPr>
+          <p:nvPr>
+            <p:ph type="body" idx="1"/>
+          </p:nvPr>
+        </p:nvSpPr>
+        <p:spPr/>
+        <p:txBody>
+          <a:bodyPr/>
+          <a:lstStyle/>
+          <a:p>
+            <a:r>
+              <a:rPr lang="es-ES"/>
+              <a:t>Esta diapositiva me sirve para defender la separacion de responsabilidades.
+Symfony concentra negocio, seguridad y persistencia.
+React se divide en portal interno y portal externo.
+La documentacion publica queda separada del flujo operativo.
+Agora Desktop no es una tercera interfaz de negocio, sino una consola tecnica para soporte local y cloud.</a:t>
+            </a:r>
+          </a:p>
+        </p:txBody>
+      </p:sp>
+      <p:sp>
+        <p:nvSpPr>
+          <p:cNvPr id="4" name="Marcador de número de diapositiva 3"/>
+          <p:cNvSpPr>
+            <a:spLocks noGrp="1"/>
+          </p:cNvSpPr>
+          <p:nvPr>
+            <p:ph type="sldNum" sz="quarter" idx="5"/>
+          </p:nvPr>
+        </p:nvSpPr>
+        <p:spPr/>
+        <p:txBody>
+          <a:bodyPr/>
+          <a:lstStyle/>
+          <a:p>
+            <a:fld id="{9B1CC43E-8847-428E-B292-0E1D8D2BFE8D}" type="slidenum">
+              <a:rPr lang="es-ES" smtClean="0"/>
+              <a:t>4</a:t>
+            </a:fld>
+            <a:endParaRPr lang="es-ES"/>
+          </a:p>
+        </p:txBody>
+      </p:sp>
+    </p:spTree>
+    <p:extLst>
+      <p:ext uri="{BB962C8B-B14F-4D97-AF65-F5344CB8AC3E}">
+        <p14:creationId xmlns:p14="http://schemas.microsoft.com/office/powerpoint/2010/main" val="200982944"/>
+      </p:ext>
+    </p:extLst>
+  </p:cSld>
+  <p:clrMapOvr>
+    <a:masterClrMapping/>
+  </p:clrMapOvr>
+</p:notes>
+</file>
+
+<file path=ppt/notesSlides/notesSlide5.xml><?xml version="1.0" encoding="utf-8"?>
+<p:notes xmlns:a="http://schemas.openxmlformats.org/drawingml/2006/main" xmlns:r="http://schemas.openxmlformats.org/officeDocument/2006/relationships" xmlns:p="http://schemas.openxmlformats.org/presentationml/2006/main">
+  <p:cSld>
+    <p:spTree>
+      <p:nvGrpSpPr>
+        <p:cNvPr id="1" name=""/>
+        <p:cNvGrpSpPr/>
+        <p:nvPr/>
+      </p:nvGrpSpPr>
+      <p:grpSpPr>
+        <a:xfrm>
+          <a:off x="0" y="0"/>
+          <a:ext cx="0" cy="0"/>
+          <a:chOff x="0" y="0"/>
+          <a:chExt cx="0" cy="0"/>
+        </a:xfrm>
+      </p:grpSpPr>
+      <p:sp>
+        <p:nvSpPr>
+          <p:cNvPr id="2" name="Marcador de imagen de diapositiva 1"/>
+          <p:cNvSpPr>
+            <a:spLocks noGrp="1" noRot="1" noChangeAspect="1"/>
+          </p:cNvSpPr>
+          <p:nvPr>
+            <p:ph type="sldImg"/>
+          </p:nvPr>
+        </p:nvSpPr>
+        <p:spPr/>
+      </p:sp>
+      <p:sp>
+        <p:nvSpPr>
+          <p:cNvPr id="3" name="Marcador de notas 2"/>
+          <p:cNvSpPr>
+            <a:spLocks noGrp="1"/>
+          </p:cNvSpPr>
+          <p:nvPr>
+            <p:ph type="body" idx="1"/>
+          </p:nvPr>
+        </p:nvSpPr>
+        <p:spPr/>
+        <p:txBody>
+          <a:bodyPr/>
+          <a:lstStyle/>
+          <a:p>
+            <a:r>
+              <a:rPr lang="es-ES"/>
+              <a:t>Flujo que debo explicar en esta diapositiva:
+1. La empresa entra primero por solicitud externa.
+2. Cuando el centro aprueba, esa solicitud pasa al catalogo interno de empresas activas.
+3. Despues completo la ficha de empresa con contactos, documentos y tutor profesional.
+4. Luego formalizo el convenio entre centro y empresa.
+5. La asignacion es donde vinculo estudiante, convenio, tutor academico, tutor profesional, horas, fechas y modalidad.
+6. Sobre esa asignacion registro seguimientos, reuniones, evidencias y la evaluacion final.
+7. La evaluacion final se guarda sobre la asignacion, no como un seguimiento suelto ni como una nota general del estudiante.</a:t>
+            </a:r>
+          </a:p>
+        </p:txBody>
+      </p:sp>
+      <p:sp>
+        <p:nvSpPr>
+          <p:cNvPr id="4" name="Marcador de número de diapositiva 3"/>
+          <p:cNvSpPr>
+            <a:spLocks noGrp="1"/>
+          </p:cNvSpPr>
+          <p:nvPr>
+            <p:ph type="sldNum" sz="quarter" idx="5"/>
+          </p:nvPr>
+        </p:nvSpPr>
+        <p:spPr/>
+        <p:txBody>
+          <a:bodyPr/>
+          <a:lstStyle/>
+          <a:p>
+            <a:fld id="{9B1CC43E-8847-428E-B292-0E1D8D2BFE8D}" type="slidenum">
+              <a:rPr lang="es-ES" smtClean="0"/>
+              <a:t>5</a:t>
+            </a:fld>
+            <a:endParaRPr lang="es-ES"/>
+          </a:p>
+        </p:txBody>
+      </p:sp>
+    </p:spTree>
+    <p:extLst>
+      <p:ext uri="{BB962C8B-B14F-4D97-AF65-F5344CB8AC3E}">
+        <p14:creationId xmlns:p14="http://schemas.microsoft.com/office/powerpoint/2010/main" val="2349538543"/>
+      </p:ext>
+    </p:extLst>
+  </p:cSld>
+  <p:clrMapOvr>
+    <a:masterClrMapping/>
+  </p:clrMapOvr>
+</p:notes>
+</file>
+
+<file path=ppt/notesSlides/notesSlide6.xml><?xml version="1.0" encoding="utf-8"?>
+<p:notes xmlns:a="http://schemas.openxmlformats.org/drawingml/2006/main" xmlns:r="http://schemas.openxmlformats.org/officeDocument/2006/relationships" xmlns:p="http://schemas.openxmlformats.org/presentationml/2006/main">
+  <p:cSld>
+    <p:spTree>
+      <p:nvGrpSpPr>
+        <p:cNvPr id="1" name=""/>
+        <p:cNvGrpSpPr/>
+        <p:nvPr/>
+      </p:nvGrpSpPr>
+      <p:grpSpPr>
+        <a:xfrm>
+          <a:off x="0" y="0"/>
+          <a:ext cx="0" cy="0"/>
+          <a:chOff x="0" y="0"/>
+          <a:chExt cx="0" cy="0"/>
+        </a:xfrm>
+      </p:grpSpPr>
+      <p:sp>
+        <p:nvSpPr>
+          <p:cNvPr id="2" name="Marcador de imagen de diapositiva 1"/>
+          <p:cNvSpPr>
+            <a:spLocks noGrp="1" noRot="1" noChangeAspect="1"/>
+          </p:cNvSpPr>
+          <p:nvPr>
+            <p:ph type="sldImg"/>
+          </p:nvPr>
+        </p:nvSpPr>
+        <p:spPr/>
+      </p:sp>
+      <p:sp>
+        <p:nvSpPr>
+          <p:cNvPr id="3" name="Marcador de notas 2"/>
+          <p:cNvSpPr>
+            <a:spLocks noGrp="1"/>
+          </p:cNvSpPr>
+          <p:nvPr>
+            <p:ph type="body" idx="1"/>
+          </p:nvPr>
+        </p:nvSpPr>
+        <p:spPr/>
+        <p:txBody>
+          <a:bodyPr/>
+          <a:lstStyle/>
+          <a:p>
+            <a:r>
+              <a:rPr lang="es-ES"/>
+              <a:t>Aqui explico que el portal interno es la herramienta de trabajo diaria del centro.
+Desde este panel se revisan KPI, solicitudes, empresas, convenios, tutores, estudiantes y asignaciones.
+La idea es que no sea solo un CRUD, sino un shell operativo con accesos rapidos, bandeja y exportacion CSV.
+Las fichas 360 de empresa y convenio ayudan a no perder contexto.</a:t>
+            </a:r>
+          </a:p>
+        </p:txBody>
+      </p:sp>
+      <p:sp>
+        <p:nvSpPr>
+          <p:cNvPr id="4" name="Marcador de número de diapositiva 3"/>
+          <p:cNvSpPr>
+            <a:spLocks noGrp="1"/>
+          </p:cNvSpPr>
+          <p:nvPr>
+            <p:ph type="sldNum" sz="quarter" idx="5"/>
+          </p:nvPr>
+        </p:nvSpPr>
+        <p:spPr/>
+        <p:txBody>
+          <a:bodyPr/>
+          <a:lstStyle/>
+          <a:p>
+            <a:fld id="{9B1CC43E-8847-428E-B292-0E1D8D2BFE8D}" type="slidenum">
+              <a:rPr lang="es-ES" smtClean="0"/>
+              <a:t>6</a:t>
+            </a:fld>
+            <a:endParaRPr lang="es-ES"/>
+          </a:p>
+        </p:txBody>
+      </p:sp>
+    </p:spTree>
+    <p:extLst>
+      <p:ext uri="{BB962C8B-B14F-4D97-AF65-F5344CB8AC3E}">
+        <p14:creationId xmlns:p14="http://schemas.microsoft.com/office/powerpoint/2010/main" val="398341934"/>
+      </p:ext>
+    </p:extLst>
+  </p:cSld>
+  <p:clrMapOvr>
+    <a:masterClrMapping/>
+  </p:clrMapOvr>
+</p:notes>
+</file>
+
+<file path=ppt/notesSlides/notesSlide7.xml><?xml version="1.0" encoding="utf-8"?>
+<p:notes xmlns:a="http://schemas.openxmlformats.org/drawingml/2006/main" xmlns:r="http://schemas.openxmlformats.org/officeDocument/2006/relationships" xmlns:p="http://schemas.openxmlformats.org/presentationml/2006/main">
+  <p:cSld>
+    <p:spTree>
+      <p:nvGrpSpPr>
+        <p:cNvPr id="1" name=""/>
+        <p:cNvGrpSpPr/>
+        <p:nvPr/>
+      </p:nvGrpSpPr>
+      <p:grpSpPr>
+        <a:xfrm>
+          <a:off x="0" y="0"/>
+          <a:ext cx="0" cy="0"/>
+          <a:chOff x="0" y="0"/>
+          <a:chExt cx="0" cy="0"/>
+        </a:xfrm>
+      </p:grpSpPr>
+      <p:sp>
+        <p:nvSpPr>
+          <p:cNvPr id="2" name="Marcador de imagen de diapositiva 1"/>
+          <p:cNvSpPr>
+            <a:spLocks noGrp="1" noRot="1" noChangeAspect="1"/>
+          </p:cNvSpPr>
+          <p:nvPr>
+            <p:ph type="sldImg"/>
+          </p:nvPr>
+        </p:nvSpPr>
+        <p:spPr/>
+      </p:sp>
+      <p:sp>
+        <p:nvSpPr>
+          <p:cNvPr id="3" name="Marcador de notas 2"/>
+          <p:cNvSpPr>
+            <a:spLocks noGrp="1"/>
+          </p:cNvSpPr>
+          <p:nvPr>
+            <p:ph type="body" idx="1"/>
+          </p:nvPr>
+        </p:nvSpPr>
+        <p:spPr/>
+        <p:txBody>
+          <a:bodyPr/>
+          <a:lstStyle/>
+          <a:p>
+            <a:r>
+              <a:rPr lang="es-ES"/>
+              <a:t>Aqui tengo que conectar claramente portal externo y portal interno.
+La empresa no entra directamente al dominio interno.
+Primero crea su acceso, envia la solicitud y verifica el correo.
+Despues el centro revisa, aprueba o rechaza.
+La mensajeria queda ligada a la solicitud y, cuando se aprueba, continua sobre la empresa ya activada.</a:t>
+            </a:r>
+          </a:p>
+        </p:txBody>
+      </p:sp>
+      <p:sp>
+        <p:nvSpPr>
+          <p:cNvPr id="4" name="Marcador de número de diapositiva 3"/>
+          <p:cNvSpPr>
+            <a:spLocks noGrp="1"/>
+          </p:cNvSpPr>
+          <p:nvPr>
+            <p:ph type="sldNum" sz="quarter" idx="5"/>
+          </p:nvPr>
+        </p:nvSpPr>
+        <p:spPr/>
+        <p:txBody>
+          <a:bodyPr/>
+          <a:lstStyle/>
+          <a:p>
+            <a:fld id="{9B1CC43E-8847-428E-B292-0E1D8D2BFE8D}" type="slidenum">
+              <a:rPr lang="es-ES" smtClean="0"/>
+              <a:t>7</a:t>
+            </a:fld>
+            <a:endParaRPr lang="es-ES"/>
+          </a:p>
+        </p:txBody>
+      </p:sp>
+    </p:spTree>
+    <p:extLst>
+      <p:ext uri="{BB962C8B-B14F-4D97-AF65-F5344CB8AC3E}">
+        <p14:creationId xmlns:p14="http://schemas.microsoft.com/office/powerpoint/2010/main" val="3979323713"/>
+      </p:ext>
+    </p:extLst>
+  </p:cSld>
+  <p:clrMapOvr>
+    <a:masterClrMapping/>
+  </p:clrMapOvr>
+</p:notes>
+</file>
+
+<file path=ppt/notesSlides/notesSlide8.xml><?xml version="1.0" encoding="utf-8"?>
+<p:notes xmlns:a="http://schemas.openxmlformats.org/drawingml/2006/main" xmlns:r="http://schemas.openxmlformats.org/officeDocument/2006/relationships" xmlns:p="http://schemas.openxmlformats.org/presentationml/2006/main">
+  <p:cSld>
+    <p:spTree>
+      <p:nvGrpSpPr>
+        <p:cNvPr id="1" name=""/>
+        <p:cNvGrpSpPr/>
+        <p:nvPr/>
+      </p:nvGrpSpPr>
+      <p:grpSpPr>
+        <a:xfrm>
+          <a:off x="0" y="0"/>
+          <a:ext cx="0" cy="0"/>
+          <a:chOff x="0" y="0"/>
+          <a:chExt cx="0" cy="0"/>
+        </a:xfrm>
+      </p:grpSpPr>
+      <p:sp>
+        <p:nvSpPr>
+          <p:cNvPr id="2" name="Marcador de imagen de diapositiva 1"/>
+          <p:cNvSpPr>
+            <a:spLocks noGrp="1" noRot="1" noChangeAspect="1"/>
+          </p:cNvSpPr>
+          <p:nvPr>
+            <p:ph type="sldImg"/>
+          </p:nvPr>
+        </p:nvSpPr>
+        <p:spPr/>
+      </p:sp>
+      <p:sp>
+        <p:nvSpPr>
+          <p:cNvPr id="3" name="Marcador de notas 2"/>
+          <p:cNvSpPr>
+            <a:spLocks noGrp="1"/>
+          </p:cNvSpPr>
+          <p:nvPr>
+            <p:ph type="body" idx="1"/>
+          </p:nvPr>
+        </p:nvSpPr>
+        <p:spPr/>
+        <p:txBody>
+          <a:bodyPr/>
+          <a:lstStyle/>
+          <a:p>
+            <a:r>
+              <a:rPr lang="es-ES"/>
+              <a:t>En esta slide explico que el portal externo no es una copia reducida del interno.
+Tiene su propio recorrido: alta de cuenta, solicitud, verificacion, estado, acceso persistente y chat.
+La empresa nunca necesita credenciales del centro.
+Cuando la empresa se aprueba, la misma cuenta sigue sirviendo para ver sus convenios, asignaciones y documentos.</a:t>
+            </a:r>
+          </a:p>
+        </p:txBody>
+      </p:sp>
+      <p:sp>
+        <p:nvSpPr>
+          <p:cNvPr id="4" name="Marcador de número de diapositiva 3"/>
+          <p:cNvSpPr>
+            <a:spLocks noGrp="1"/>
+          </p:cNvSpPr>
+          <p:nvPr>
+            <p:ph type="sldNum" sz="quarter" idx="5"/>
+          </p:nvPr>
+        </p:nvSpPr>
+        <p:spPr/>
+        <p:txBody>
+          <a:bodyPr/>
+          <a:lstStyle/>
+          <a:p>
+            <a:fld id="{9B1CC43E-8847-428E-B292-0E1D8D2BFE8D}" type="slidenum">
+              <a:rPr lang="es-ES" smtClean="0"/>
+              <a:t>8</a:t>
+            </a:fld>
+            <a:endParaRPr lang="es-ES"/>
+          </a:p>
+        </p:txBody>
+      </p:sp>
+    </p:spTree>
+    <p:extLst>
+      <p:ext uri="{BB962C8B-B14F-4D97-AF65-F5344CB8AC3E}">
+        <p14:creationId xmlns:p14="http://schemas.microsoft.com/office/powerpoint/2010/main" val="1907200044"/>
+      </p:ext>
+    </p:extLst>
+  </p:cSld>
+  <p:clrMapOvr>
+    <a:masterClrMapping/>
+  </p:clrMapOvr>
+</p:notes>
+</file>
+
+<file path=ppt/notesSlides/notesSlide9.xml><?xml version="1.0" encoding="utf-8"?>
+<p:notes xmlns:a="http://schemas.openxmlformats.org/drawingml/2006/main" xmlns:r="http://schemas.openxmlformats.org/officeDocument/2006/relationships" xmlns:p="http://schemas.openxmlformats.org/presentationml/2006/main">
+  <p:cSld>
+    <p:spTree>
+      <p:nvGrpSpPr>
+        <p:cNvPr id="1" name=""/>
+        <p:cNvGrpSpPr/>
+        <p:nvPr/>
+      </p:nvGrpSpPr>
+      <p:grpSpPr>
+        <a:xfrm>
+          <a:off x="0" y="0"/>
+          <a:ext cx="0" cy="0"/>
+          <a:chOff x="0" y="0"/>
+          <a:chExt cx="0" cy="0"/>
+        </a:xfrm>
+      </p:grpSpPr>
+      <p:sp>
+        <p:nvSpPr>
+          <p:cNvPr id="2" name="Marcador de imagen de diapositiva 1"/>
+          <p:cNvSpPr>
+            <a:spLocks noGrp="1" noRot="1" noChangeAspect="1"/>
+          </p:cNvSpPr>
+          <p:nvPr>
+            <p:ph type="sldImg"/>
+          </p:nvPr>
+        </p:nvSpPr>
+        <p:spPr/>
+      </p:sp>
+      <p:sp>
+        <p:nvSpPr>
+          <p:cNvPr id="3" name="Marcador de notas 2"/>
+          <p:cNvSpPr>
+            <a:spLocks noGrp="1"/>
+          </p:cNvSpPr>
+          <p:nvPr>
+            <p:ph type="body" idx="1"/>
+          </p:nvPr>
+        </p:nvSpPr>
+        <p:spPr/>
+        <p:txBody>
+          <a:bodyPr/>
+          <a:lstStyle/>
+          <a:p>
+            <a:r>
+              <a:rPr lang="es-ES"/>
+              <a:t>Aqui cuento el proyecto por bloques de construccion, no por commits.
+Primero modele el problema y el dominio.
+Despues levante backend y reglas de negocio.
+Luego hice el portal interno, el portal externo y el soporte documental.
+La ultima capa fue la operacion tecnica: cloud, escritorio, pruebas y empaquetado.</a:t>
+            </a:r>
+          </a:p>
+        </p:txBody>
+      </p:sp>
+      <p:sp>
+        <p:nvSpPr>
+          <p:cNvPr id="4" name="Marcador de número de diapositiva 3"/>
+          <p:cNvSpPr>
+            <a:spLocks noGrp="1"/>
+          </p:cNvSpPr>
+          <p:nvPr>
+            <p:ph type="sldNum" sz="quarter" idx="5"/>
+          </p:nvPr>
+        </p:nvSpPr>
+        <p:spPr/>
+        <p:txBody>
+          <a:bodyPr/>
+          <a:lstStyle/>
+          <a:p>
+            <a:fld id="{9B1CC43E-8847-428E-B292-0E1D8D2BFE8D}" type="slidenum">
+              <a:rPr lang="es-ES" smtClean="0"/>
+              <a:t>9</a:t>
+            </a:fld>
+            <a:endParaRPr lang="es-ES"/>
+          </a:p>
+        </p:txBody>
+      </p:sp>
+    </p:spTree>
+    <p:extLst>
+      <p:ext uri="{BB962C8B-B14F-4D97-AF65-F5344CB8AC3E}">
+        <p14:creationId xmlns:p14="http://schemas.microsoft.com/office/powerpoint/2010/main" val="2698689760"/>
+      </p:ext>
+    </p:extLst>
+  </p:cSld>
+  <p:clrMapOvr>
+    <a:masterClrMapping/>
+  </p:clrMapOvr>
+</p:notes>
 </file>
 
 <file path=ppt/slideLayouts/slideLayout1.xml><?xml version="1.0" encoding="utf-8"?>
@@ -146,7 +2130,7 @@
           <p:cNvPr id="2" name="Título 1">
             <a:extLst>
               <a:ext uri="{FF2B5EF4-FFF2-40B4-BE49-F238E27FC236}">
-                <a16:creationId xmlns:a16="http://schemas.microsoft.com/office/drawing/2014/main" id="{AA1424A8-F5C0-2E5A-7814-8D5A788F2C41}"/>
+                <a16:creationId xmlns:a16="http://schemas.microsoft.com/office/drawing/2014/main" id="{1B12C006-5AD0-90AD-A113-5A0FAD9D7897}"/>
               </a:ext>
             </a:extLst>
           </p:cNvPr>
@@ -183,7 +2167,7 @@
           <p:cNvPr id="3" name="Subtítulo 2">
             <a:extLst>
               <a:ext uri="{FF2B5EF4-FFF2-40B4-BE49-F238E27FC236}">
-                <a16:creationId xmlns:a16="http://schemas.microsoft.com/office/drawing/2014/main" id="{0DC4E564-14D9-30EF-F5A4-D8BE222FAF82}"/>
+                <a16:creationId xmlns:a16="http://schemas.microsoft.com/office/drawing/2014/main" id="{9E628BF8-050D-5B2B-4482-4616DA9860B2}"/>
               </a:ext>
             </a:extLst>
           </p:cNvPr>
@@ -253,7 +2237,7 @@
           <p:cNvPr id="4" name="Marcador de fecha 3">
             <a:extLst>
               <a:ext uri="{FF2B5EF4-FFF2-40B4-BE49-F238E27FC236}">
-                <a16:creationId xmlns:a16="http://schemas.microsoft.com/office/drawing/2014/main" id="{DE26D437-9BD3-D275-C312-7EFE00BC0C02}"/>
+                <a16:creationId xmlns:a16="http://schemas.microsoft.com/office/drawing/2014/main" id="{1005972F-4C8C-303D-4178-43E2E1A6F54C}"/>
               </a:ext>
             </a:extLst>
           </p:cNvPr>
@@ -269,9 +2253,9 @@
           <a:bodyPr/>
           <a:lstStyle/>
           <a:p>
-            <a:fld id="{3594F67B-593D-4384-8F95-2FBEEBEEB27A}" type="datetimeFigureOut">
+            <a:fld id="{95B52314-A619-4334-B9D6-E0F6CEE22DE1}" type="datetimeFigureOut">
               <a:rPr lang="es-ES" smtClean="0"/>
-              <a:t>01/06/2026</a:t>
+              <a:t>02/06/2026</a:t>
             </a:fld>
             <a:endParaRPr lang="es-ES"/>
           </a:p>
@@ -282,7 +2266,7 @@
           <p:cNvPr id="5" name="Marcador de pie de página 4">
             <a:extLst>
               <a:ext uri="{FF2B5EF4-FFF2-40B4-BE49-F238E27FC236}">
-                <a16:creationId xmlns:a16="http://schemas.microsoft.com/office/drawing/2014/main" id="{5A8AD1E9-22FA-53E1-4A6E-34128EB13376}"/>
+                <a16:creationId xmlns:a16="http://schemas.microsoft.com/office/drawing/2014/main" id="{DB32B3F2-22BE-B7DF-1AAC-70CD6545A4E0}"/>
               </a:ext>
             </a:extLst>
           </p:cNvPr>
@@ -307,7 +2291,7 @@
           <p:cNvPr id="6" name="Marcador de número de diapositiva 5">
             <a:extLst>
               <a:ext uri="{FF2B5EF4-FFF2-40B4-BE49-F238E27FC236}">
-                <a16:creationId xmlns:a16="http://schemas.microsoft.com/office/drawing/2014/main" id="{B8FADB54-69CA-37C3-9538-2AC92ED7D55D}"/>
+                <a16:creationId xmlns:a16="http://schemas.microsoft.com/office/drawing/2014/main" id="{313946A1-2431-C262-0156-B5508B4E3008}"/>
               </a:ext>
             </a:extLst>
           </p:cNvPr>
@@ -323,7 +2307,7 @@
           <a:bodyPr/>
           <a:lstStyle/>
           <a:p>
-            <a:fld id="{3E216418-6303-4DF4-80EB-715B8707D44E}" type="slidenum">
+            <a:fld id="{7CE9BE3B-4377-4C4A-B97C-E3374EB29B73}" type="slidenum">
               <a:rPr lang="es-ES" smtClean="0"/>
               <a:t>‹Nº›</a:t>
             </a:fld>
@@ -334,7 +2318,7 @@
     </p:spTree>
     <p:extLst>
       <p:ext uri="{BB962C8B-B14F-4D97-AF65-F5344CB8AC3E}">
-        <p14:creationId xmlns:p14="http://schemas.microsoft.com/office/powerpoint/2010/main" val="2455286512"/>
+        <p14:creationId xmlns:p14="http://schemas.microsoft.com/office/powerpoint/2010/main" val="137319443"/>
       </p:ext>
     </p:extLst>
   </p:cSld>
@@ -366,7 +2350,7 @@
           <p:cNvPr id="2" name="Título 1">
             <a:extLst>
               <a:ext uri="{FF2B5EF4-FFF2-40B4-BE49-F238E27FC236}">
-                <a16:creationId xmlns:a16="http://schemas.microsoft.com/office/drawing/2014/main" id="{57C83AF2-7E6C-0F9E-3C1D-65AA33168D3D}"/>
+                <a16:creationId xmlns:a16="http://schemas.microsoft.com/office/drawing/2014/main" id="{EE824D4D-05A9-2A09-D154-4B431F0C192C}"/>
               </a:ext>
             </a:extLst>
           </p:cNvPr>
@@ -394,7 +2378,7 @@
           <p:cNvPr id="3" name="Marcador de texto vertical 2">
             <a:extLst>
               <a:ext uri="{FF2B5EF4-FFF2-40B4-BE49-F238E27FC236}">
-                <a16:creationId xmlns:a16="http://schemas.microsoft.com/office/drawing/2014/main" id="{24546AAA-CAA5-A831-F197-F57E1E3EBDBB}"/>
+                <a16:creationId xmlns:a16="http://schemas.microsoft.com/office/drawing/2014/main" id="{7D7AFB5E-9C0E-E0DD-90FF-DE6FC9212D2B}"/>
               </a:ext>
             </a:extLst>
           </p:cNvPr>
@@ -451,7 +2435,7 @@
           <p:cNvPr id="4" name="Marcador de fecha 3">
             <a:extLst>
               <a:ext uri="{FF2B5EF4-FFF2-40B4-BE49-F238E27FC236}">
-                <a16:creationId xmlns:a16="http://schemas.microsoft.com/office/drawing/2014/main" id="{93A01D50-6F6A-F01F-DFFE-49C0E92DD415}"/>
+                <a16:creationId xmlns:a16="http://schemas.microsoft.com/office/drawing/2014/main" id="{55BA5A5E-0BA5-F16A-047D-623386C5A2C8}"/>
               </a:ext>
             </a:extLst>
           </p:cNvPr>
@@ -467,9 +2451,9 @@
           <a:bodyPr/>
           <a:lstStyle/>
           <a:p>
-            <a:fld id="{3594F67B-593D-4384-8F95-2FBEEBEEB27A}" type="datetimeFigureOut">
+            <a:fld id="{95B52314-A619-4334-B9D6-E0F6CEE22DE1}" type="datetimeFigureOut">
               <a:rPr lang="es-ES" smtClean="0"/>
-              <a:t>01/06/2026</a:t>
+              <a:t>02/06/2026</a:t>
             </a:fld>
             <a:endParaRPr lang="es-ES"/>
           </a:p>
@@ -480,7 +2464,7 @@
           <p:cNvPr id="5" name="Marcador de pie de página 4">
             <a:extLst>
               <a:ext uri="{FF2B5EF4-FFF2-40B4-BE49-F238E27FC236}">
-                <a16:creationId xmlns:a16="http://schemas.microsoft.com/office/drawing/2014/main" id="{C4CAB07D-DE00-00AA-5692-CB27E034EC36}"/>
+                <a16:creationId xmlns:a16="http://schemas.microsoft.com/office/drawing/2014/main" id="{B1BC0DD1-0DCB-F91A-DB57-8DD9D13A0471}"/>
               </a:ext>
             </a:extLst>
           </p:cNvPr>
@@ -505,7 +2489,7 @@
           <p:cNvPr id="6" name="Marcador de número de diapositiva 5">
             <a:extLst>
               <a:ext uri="{FF2B5EF4-FFF2-40B4-BE49-F238E27FC236}">
-                <a16:creationId xmlns:a16="http://schemas.microsoft.com/office/drawing/2014/main" id="{AE6F0C28-EA5A-89CE-04EC-17135B274084}"/>
+                <a16:creationId xmlns:a16="http://schemas.microsoft.com/office/drawing/2014/main" id="{7A190C62-AC6A-4EE7-52C2-6E3F69A7C3BD}"/>
               </a:ext>
             </a:extLst>
           </p:cNvPr>
@@ -521,7 +2505,7 @@
           <a:bodyPr/>
           <a:lstStyle/>
           <a:p>
-            <a:fld id="{3E216418-6303-4DF4-80EB-715B8707D44E}" type="slidenum">
+            <a:fld id="{7CE9BE3B-4377-4C4A-B97C-E3374EB29B73}" type="slidenum">
               <a:rPr lang="es-ES" smtClean="0"/>
               <a:t>‹Nº›</a:t>
             </a:fld>
@@ -532,7 +2516,7 @@
     </p:spTree>
     <p:extLst>
       <p:ext uri="{BB962C8B-B14F-4D97-AF65-F5344CB8AC3E}">
-        <p14:creationId xmlns:p14="http://schemas.microsoft.com/office/powerpoint/2010/main" val="2549378577"/>
+        <p14:creationId xmlns:p14="http://schemas.microsoft.com/office/powerpoint/2010/main" val="2480462376"/>
       </p:ext>
     </p:extLst>
   </p:cSld>
@@ -564,7 +2548,7 @@
           <p:cNvPr id="2" name="Título vertical 1">
             <a:extLst>
               <a:ext uri="{FF2B5EF4-FFF2-40B4-BE49-F238E27FC236}">
-                <a16:creationId xmlns:a16="http://schemas.microsoft.com/office/drawing/2014/main" id="{46AB338E-FEFD-A8AF-18DE-56185C24091F}"/>
+                <a16:creationId xmlns:a16="http://schemas.microsoft.com/office/drawing/2014/main" id="{0CB3D2A5-C5B5-6F29-FD03-E62199F8789C}"/>
               </a:ext>
             </a:extLst>
           </p:cNvPr>
@@ -597,7 +2581,7 @@
           <p:cNvPr id="3" name="Marcador de texto vertical 2">
             <a:extLst>
               <a:ext uri="{FF2B5EF4-FFF2-40B4-BE49-F238E27FC236}">
-                <a16:creationId xmlns:a16="http://schemas.microsoft.com/office/drawing/2014/main" id="{6088E667-B029-3E92-F0EE-0F45EDC6AEA4}"/>
+                <a16:creationId xmlns:a16="http://schemas.microsoft.com/office/drawing/2014/main" id="{29E43F8F-6176-093E-0601-7CED6D18DD49}"/>
               </a:ext>
             </a:extLst>
           </p:cNvPr>
@@ -659,7 +2643,7 @@
           <p:cNvPr id="4" name="Marcador de fecha 3">
             <a:extLst>
               <a:ext uri="{FF2B5EF4-FFF2-40B4-BE49-F238E27FC236}">
-                <a16:creationId xmlns:a16="http://schemas.microsoft.com/office/drawing/2014/main" id="{08F641FF-0C49-5058-E882-C1C66745FFA5}"/>
+                <a16:creationId xmlns:a16="http://schemas.microsoft.com/office/drawing/2014/main" id="{08E76104-3E25-3985-8CB9-159B9DB07FB5}"/>
               </a:ext>
             </a:extLst>
           </p:cNvPr>
@@ -675,9 +2659,9 @@
           <a:bodyPr/>
           <a:lstStyle/>
           <a:p>
-            <a:fld id="{3594F67B-593D-4384-8F95-2FBEEBEEB27A}" type="datetimeFigureOut">
+            <a:fld id="{95B52314-A619-4334-B9D6-E0F6CEE22DE1}" type="datetimeFigureOut">
               <a:rPr lang="es-ES" smtClean="0"/>
-              <a:t>01/06/2026</a:t>
+              <a:t>02/06/2026</a:t>
             </a:fld>
             <a:endParaRPr lang="es-ES"/>
           </a:p>
@@ -688,7 +2672,7 @@
           <p:cNvPr id="5" name="Marcador de pie de página 4">
             <a:extLst>
               <a:ext uri="{FF2B5EF4-FFF2-40B4-BE49-F238E27FC236}">
-                <a16:creationId xmlns:a16="http://schemas.microsoft.com/office/drawing/2014/main" id="{94E36D7E-FACE-12B9-9203-D1613FBB1191}"/>
+                <a16:creationId xmlns:a16="http://schemas.microsoft.com/office/drawing/2014/main" id="{7A30EBE7-90CF-CFF8-E403-CA7400D27B69}"/>
               </a:ext>
             </a:extLst>
           </p:cNvPr>
@@ -713,7 +2697,7 @@
           <p:cNvPr id="6" name="Marcador de número de diapositiva 5">
             <a:extLst>
               <a:ext uri="{FF2B5EF4-FFF2-40B4-BE49-F238E27FC236}">
-                <a16:creationId xmlns:a16="http://schemas.microsoft.com/office/drawing/2014/main" id="{E4EEE139-E64A-3F7C-E8BF-6754CBA6B333}"/>
+                <a16:creationId xmlns:a16="http://schemas.microsoft.com/office/drawing/2014/main" id="{F68E39FF-0C67-3973-A9A9-18CAE31748C2}"/>
               </a:ext>
             </a:extLst>
           </p:cNvPr>
@@ -729,7 +2713,7 @@
           <a:bodyPr/>
           <a:lstStyle/>
           <a:p>
-            <a:fld id="{3E216418-6303-4DF4-80EB-715B8707D44E}" type="slidenum">
+            <a:fld id="{7CE9BE3B-4377-4C4A-B97C-E3374EB29B73}" type="slidenum">
               <a:rPr lang="es-ES" smtClean="0"/>
               <a:t>‹Nº›</a:t>
             </a:fld>
@@ -740,7 +2724,7 @@
     </p:spTree>
     <p:extLst>
       <p:ext uri="{BB962C8B-B14F-4D97-AF65-F5344CB8AC3E}">
-        <p14:creationId xmlns:p14="http://schemas.microsoft.com/office/powerpoint/2010/main" val="1238850085"/>
+        <p14:creationId xmlns:p14="http://schemas.microsoft.com/office/powerpoint/2010/main" val="238587048"/>
       </p:ext>
     </p:extLst>
   </p:cSld>
@@ -772,7 +2756,7 @@
           <p:cNvPr id="2" name="Título 1">
             <a:extLst>
               <a:ext uri="{FF2B5EF4-FFF2-40B4-BE49-F238E27FC236}">
-                <a16:creationId xmlns:a16="http://schemas.microsoft.com/office/drawing/2014/main" id="{E78901D5-99B4-D2C9-591A-7945BF3139AA}"/>
+                <a16:creationId xmlns:a16="http://schemas.microsoft.com/office/drawing/2014/main" id="{FF2A0387-DC4E-FB79-DB28-1607E116D6E6}"/>
               </a:ext>
             </a:extLst>
           </p:cNvPr>
@@ -800,7 +2784,7 @@
           <p:cNvPr id="3" name="Marcador de contenido 2">
             <a:extLst>
               <a:ext uri="{FF2B5EF4-FFF2-40B4-BE49-F238E27FC236}">
-                <a16:creationId xmlns:a16="http://schemas.microsoft.com/office/drawing/2014/main" id="{10654976-33B1-F68D-E6B4-006C837BE16A}"/>
+                <a16:creationId xmlns:a16="http://schemas.microsoft.com/office/drawing/2014/main" id="{96D303A8-DE60-11B0-B4A2-01B6DAA4D611}"/>
               </a:ext>
             </a:extLst>
           </p:cNvPr>
@@ -857,7 +2841,7 @@
           <p:cNvPr id="4" name="Marcador de fecha 3">
             <a:extLst>
               <a:ext uri="{FF2B5EF4-FFF2-40B4-BE49-F238E27FC236}">
-                <a16:creationId xmlns:a16="http://schemas.microsoft.com/office/drawing/2014/main" id="{A35925D9-FDA0-86C7-9E16-CDEEAF7720FF}"/>
+                <a16:creationId xmlns:a16="http://schemas.microsoft.com/office/drawing/2014/main" id="{392D8182-514B-A98D-5320-D37DD818BE51}"/>
               </a:ext>
             </a:extLst>
           </p:cNvPr>
@@ -873,9 +2857,9 @@
           <a:bodyPr/>
           <a:lstStyle/>
           <a:p>
-            <a:fld id="{3594F67B-593D-4384-8F95-2FBEEBEEB27A}" type="datetimeFigureOut">
+            <a:fld id="{95B52314-A619-4334-B9D6-E0F6CEE22DE1}" type="datetimeFigureOut">
               <a:rPr lang="es-ES" smtClean="0"/>
-              <a:t>01/06/2026</a:t>
+              <a:t>02/06/2026</a:t>
             </a:fld>
             <a:endParaRPr lang="es-ES"/>
           </a:p>
@@ -886,7 +2870,7 @@
           <p:cNvPr id="5" name="Marcador de pie de página 4">
             <a:extLst>
               <a:ext uri="{FF2B5EF4-FFF2-40B4-BE49-F238E27FC236}">
-                <a16:creationId xmlns:a16="http://schemas.microsoft.com/office/drawing/2014/main" id="{BAEFEF87-8119-67D1-7B26-1521E2CC6641}"/>
+                <a16:creationId xmlns:a16="http://schemas.microsoft.com/office/drawing/2014/main" id="{767AD575-A79F-5C24-4AD0-A0E7E36033FC}"/>
               </a:ext>
             </a:extLst>
           </p:cNvPr>
@@ -911,7 +2895,7 @@
           <p:cNvPr id="6" name="Marcador de número de diapositiva 5">
             <a:extLst>
               <a:ext uri="{FF2B5EF4-FFF2-40B4-BE49-F238E27FC236}">
-                <a16:creationId xmlns:a16="http://schemas.microsoft.com/office/drawing/2014/main" id="{B3C2EFF3-79AA-17A1-9994-4EEE79A5F9C6}"/>
+                <a16:creationId xmlns:a16="http://schemas.microsoft.com/office/drawing/2014/main" id="{F1C3ABA2-B378-6B43-DA30-A57106962816}"/>
               </a:ext>
             </a:extLst>
           </p:cNvPr>
@@ -927,7 +2911,7 @@
           <a:bodyPr/>
           <a:lstStyle/>
           <a:p>
-            <a:fld id="{3E216418-6303-4DF4-80EB-715B8707D44E}" type="slidenum">
+            <a:fld id="{7CE9BE3B-4377-4C4A-B97C-E3374EB29B73}" type="slidenum">
               <a:rPr lang="es-ES" smtClean="0"/>
               <a:t>‹Nº›</a:t>
             </a:fld>
@@ -938,7 +2922,7 @@
     </p:spTree>
     <p:extLst>
       <p:ext uri="{BB962C8B-B14F-4D97-AF65-F5344CB8AC3E}">
-        <p14:creationId xmlns:p14="http://schemas.microsoft.com/office/powerpoint/2010/main" val="2033255128"/>
+        <p14:creationId xmlns:p14="http://schemas.microsoft.com/office/powerpoint/2010/main" val="394477679"/>
       </p:ext>
     </p:extLst>
   </p:cSld>
@@ -970,7 +2954,7 @@
           <p:cNvPr id="2" name="Título 1">
             <a:extLst>
               <a:ext uri="{FF2B5EF4-FFF2-40B4-BE49-F238E27FC236}">
-                <a16:creationId xmlns:a16="http://schemas.microsoft.com/office/drawing/2014/main" id="{0CB81FE2-7FCE-0707-0361-7ADD3D92D2EA}"/>
+                <a16:creationId xmlns:a16="http://schemas.microsoft.com/office/drawing/2014/main" id="{5120F542-F0EC-AC66-148D-930D7D452804}"/>
               </a:ext>
             </a:extLst>
           </p:cNvPr>
@@ -1007,7 +2991,7 @@
           <p:cNvPr id="3" name="Marcador de texto 2">
             <a:extLst>
               <a:ext uri="{FF2B5EF4-FFF2-40B4-BE49-F238E27FC236}">
-                <a16:creationId xmlns:a16="http://schemas.microsoft.com/office/drawing/2014/main" id="{76A60D1A-DF2F-E574-0BB9-D3969FF18C85}"/>
+                <a16:creationId xmlns:a16="http://schemas.microsoft.com/office/drawing/2014/main" id="{A74A22FC-6A45-52E3-B758-905A8CF3C13B}"/>
               </a:ext>
             </a:extLst>
           </p:cNvPr>
@@ -1132,7 +3116,7 @@
           <p:cNvPr id="4" name="Marcador de fecha 3">
             <a:extLst>
               <a:ext uri="{FF2B5EF4-FFF2-40B4-BE49-F238E27FC236}">
-                <a16:creationId xmlns:a16="http://schemas.microsoft.com/office/drawing/2014/main" id="{48921F6F-1AF9-E840-E797-167C49AABC30}"/>
+                <a16:creationId xmlns:a16="http://schemas.microsoft.com/office/drawing/2014/main" id="{4428CF39-950F-4DC9-CCB7-DE83A85A76C7}"/>
               </a:ext>
             </a:extLst>
           </p:cNvPr>
@@ -1148,9 +3132,9 @@
           <a:bodyPr/>
           <a:lstStyle/>
           <a:p>
-            <a:fld id="{3594F67B-593D-4384-8F95-2FBEEBEEB27A}" type="datetimeFigureOut">
+            <a:fld id="{95B52314-A619-4334-B9D6-E0F6CEE22DE1}" type="datetimeFigureOut">
               <a:rPr lang="es-ES" smtClean="0"/>
-              <a:t>01/06/2026</a:t>
+              <a:t>02/06/2026</a:t>
             </a:fld>
             <a:endParaRPr lang="es-ES"/>
           </a:p>
@@ -1161,7 +3145,7 @@
           <p:cNvPr id="5" name="Marcador de pie de página 4">
             <a:extLst>
               <a:ext uri="{FF2B5EF4-FFF2-40B4-BE49-F238E27FC236}">
-                <a16:creationId xmlns:a16="http://schemas.microsoft.com/office/drawing/2014/main" id="{66A560AC-EF8C-A398-E175-A21980745154}"/>
+                <a16:creationId xmlns:a16="http://schemas.microsoft.com/office/drawing/2014/main" id="{EDE487CE-F37A-8028-E4A6-A87B4810B319}"/>
               </a:ext>
             </a:extLst>
           </p:cNvPr>
@@ -1186,7 +3170,7 @@
           <p:cNvPr id="6" name="Marcador de número de diapositiva 5">
             <a:extLst>
               <a:ext uri="{FF2B5EF4-FFF2-40B4-BE49-F238E27FC236}">
-                <a16:creationId xmlns:a16="http://schemas.microsoft.com/office/drawing/2014/main" id="{7EDA3FF6-60ED-E272-21BA-E63161F1025A}"/>
+                <a16:creationId xmlns:a16="http://schemas.microsoft.com/office/drawing/2014/main" id="{6440B092-2092-4B7B-C3FD-680FB7F94E51}"/>
               </a:ext>
             </a:extLst>
           </p:cNvPr>
@@ -1202,7 +3186,7 @@
           <a:bodyPr/>
           <a:lstStyle/>
           <a:p>
-            <a:fld id="{3E216418-6303-4DF4-80EB-715B8707D44E}" type="slidenum">
+            <a:fld id="{7CE9BE3B-4377-4C4A-B97C-E3374EB29B73}" type="slidenum">
               <a:rPr lang="es-ES" smtClean="0"/>
               <a:t>‹Nº›</a:t>
             </a:fld>
@@ -1213,7 +3197,7 @@
     </p:spTree>
     <p:extLst>
       <p:ext uri="{BB962C8B-B14F-4D97-AF65-F5344CB8AC3E}">
-        <p14:creationId xmlns:p14="http://schemas.microsoft.com/office/powerpoint/2010/main" val="443343728"/>
+        <p14:creationId xmlns:p14="http://schemas.microsoft.com/office/powerpoint/2010/main" val="3170728889"/>
       </p:ext>
     </p:extLst>
   </p:cSld>
@@ -1245,7 +3229,7 @@
           <p:cNvPr id="2" name="Título 1">
             <a:extLst>
               <a:ext uri="{FF2B5EF4-FFF2-40B4-BE49-F238E27FC236}">
-                <a16:creationId xmlns:a16="http://schemas.microsoft.com/office/drawing/2014/main" id="{385B08C1-E993-F59D-8651-1EBF9280D8A1}"/>
+                <a16:creationId xmlns:a16="http://schemas.microsoft.com/office/drawing/2014/main" id="{B9EF5191-A773-7A58-6494-3C709C80DE1F}"/>
               </a:ext>
             </a:extLst>
           </p:cNvPr>
@@ -1273,7 +3257,7 @@
           <p:cNvPr id="3" name="Marcador de contenido 2">
             <a:extLst>
               <a:ext uri="{FF2B5EF4-FFF2-40B4-BE49-F238E27FC236}">
-                <a16:creationId xmlns:a16="http://schemas.microsoft.com/office/drawing/2014/main" id="{737DAD8D-0B1F-479E-82AC-904393E28710}"/>
+                <a16:creationId xmlns:a16="http://schemas.microsoft.com/office/drawing/2014/main" id="{4B44131E-94F7-BD14-12B4-9495EB958874}"/>
               </a:ext>
             </a:extLst>
           </p:cNvPr>
@@ -1335,7 +3319,7 @@
           <p:cNvPr id="4" name="Marcador de contenido 3">
             <a:extLst>
               <a:ext uri="{FF2B5EF4-FFF2-40B4-BE49-F238E27FC236}">
-                <a16:creationId xmlns:a16="http://schemas.microsoft.com/office/drawing/2014/main" id="{2D07CEBD-204B-961F-E875-AC71F6165DF7}"/>
+                <a16:creationId xmlns:a16="http://schemas.microsoft.com/office/drawing/2014/main" id="{FEAEDB0A-449F-35BE-8A11-E0BACE8D446A}"/>
               </a:ext>
             </a:extLst>
           </p:cNvPr>
@@ -1397,7 +3381,7 @@
           <p:cNvPr id="5" name="Marcador de fecha 4">
             <a:extLst>
               <a:ext uri="{FF2B5EF4-FFF2-40B4-BE49-F238E27FC236}">
-                <a16:creationId xmlns:a16="http://schemas.microsoft.com/office/drawing/2014/main" id="{FF9C0AC7-2DB1-97E6-C226-76FBE8A3A8E2}"/>
+                <a16:creationId xmlns:a16="http://schemas.microsoft.com/office/drawing/2014/main" id="{298271A2-D7EF-DE14-C371-148AFBEB13B2}"/>
               </a:ext>
             </a:extLst>
           </p:cNvPr>
@@ -1413,9 +3397,9 @@
           <a:bodyPr/>
           <a:lstStyle/>
           <a:p>
-            <a:fld id="{3594F67B-593D-4384-8F95-2FBEEBEEB27A}" type="datetimeFigureOut">
+            <a:fld id="{95B52314-A619-4334-B9D6-E0F6CEE22DE1}" type="datetimeFigureOut">
               <a:rPr lang="es-ES" smtClean="0"/>
-              <a:t>01/06/2026</a:t>
+              <a:t>02/06/2026</a:t>
             </a:fld>
             <a:endParaRPr lang="es-ES"/>
           </a:p>
@@ -1426,7 +3410,7 @@
           <p:cNvPr id="6" name="Marcador de pie de página 5">
             <a:extLst>
               <a:ext uri="{FF2B5EF4-FFF2-40B4-BE49-F238E27FC236}">
-                <a16:creationId xmlns:a16="http://schemas.microsoft.com/office/drawing/2014/main" id="{EDA0DC87-BCEE-DD42-6B44-7CCA524F0E85}"/>
+                <a16:creationId xmlns:a16="http://schemas.microsoft.com/office/drawing/2014/main" id="{AC3DFEC8-C7ED-FFFC-24B6-F124F098A807}"/>
               </a:ext>
             </a:extLst>
           </p:cNvPr>
@@ -1451,7 +3435,7 @@
           <p:cNvPr id="7" name="Marcador de número de diapositiva 6">
             <a:extLst>
               <a:ext uri="{FF2B5EF4-FFF2-40B4-BE49-F238E27FC236}">
-                <a16:creationId xmlns:a16="http://schemas.microsoft.com/office/drawing/2014/main" id="{5111691C-B91A-89B6-76AD-43C7853A9116}"/>
+                <a16:creationId xmlns:a16="http://schemas.microsoft.com/office/drawing/2014/main" id="{B3EE48E3-FC56-5B5A-68BA-AC711336B7AB}"/>
               </a:ext>
             </a:extLst>
           </p:cNvPr>
@@ -1467,7 +3451,7 @@
           <a:bodyPr/>
           <a:lstStyle/>
           <a:p>
-            <a:fld id="{3E216418-6303-4DF4-80EB-715B8707D44E}" type="slidenum">
+            <a:fld id="{7CE9BE3B-4377-4C4A-B97C-E3374EB29B73}" type="slidenum">
               <a:rPr lang="es-ES" smtClean="0"/>
               <a:t>‹Nº›</a:t>
             </a:fld>
@@ -1478,7 +3462,7 @@
     </p:spTree>
     <p:extLst>
       <p:ext uri="{BB962C8B-B14F-4D97-AF65-F5344CB8AC3E}">
-        <p14:creationId xmlns:p14="http://schemas.microsoft.com/office/powerpoint/2010/main" val="1145307958"/>
+        <p14:creationId xmlns:p14="http://schemas.microsoft.com/office/powerpoint/2010/main" val="2264542473"/>
       </p:ext>
     </p:extLst>
   </p:cSld>
@@ -1510,7 +3494,7 @@
           <p:cNvPr id="2" name="Título 1">
             <a:extLst>
               <a:ext uri="{FF2B5EF4-FFF2-40B4-BE49-F238E27FC236}">
-                <a16:creationId xmlns:a16="http://schemas.microsoft.com/office/drawing/2014/main" id="{ECA94CD3-0710-86CC-1AB2-F851BA958007}"/>
+                <a16:creationId xmlns:a16="http://schemas.microsoft.com/office/drawing/2014/main" id="{8712ADFC-F470-38EF-C705-B48F3B32DA35}"/>
               </a:ext>
             </a:extLst>
           </p:cNvPr>
@@ -1543,7 +3527,7 @@
           <p:cNvPr id="3" name="Marcador de texto 2">
             <a:extLst>
               <a:ext uri="{FF2B5EF4-FFF2-40B4-BE49-F238E27FC236}">
-                <a16:creationId xmlns:a16="http://schemas.microsoft.com/office/drawing/2014/main" id="{E98A71FB-2B84-8180-1FB3-0700CCD08AE7}"/>
+                <a16:creationId xmlns:a16="http://schemas.microsoft.com/office/drawing/2014/main" id="{5966BD7A-2596-E0E1-FC4F-165965630C9D}"/>
               </a:ext>
             </a:extLst>
           </p:cNvPr>
@@ -1614,7 +3598,7 @@
           <p:cNvPr id="4" name="Marcador de contenido 3">
             <a:extLst>
               <a:ext uri="{FF2B5EF4-FFF2-40B4-BE49-F238E27FC236}">
-                <a16:creationId xmlns:a16="http://schemas.microsoft.com/office/drawing/2014/main" id="{284B4773-6CEB-8828-66FA-53DEE6BEBD85}"/>
+                <a16:creationId xmlns:a16="http://schemas.microsoft.com/office/drawing/2014/main" id="{E9E55286-0AFA-4E5A-A7A2-3FCEA317EEE9}"/>
               </a:ext>
             </a:extLst>
           </p:cNvPr>
@@ -1676,7 +3660,7 @@
           <p:cNvPr id="5" name="Marcador de texto 4">
             <a:extLst>
               <a:ext uri="{FF2B5EF4-FFF2-40B4-BE49-F238E27FC236}">
-                <a16:creationId xmlns:a16="http://schemas.microsoft.com/office/drawing/2014/main" id="{569EF8C5-7F81-49BF-21E4-6E07B4334D06}"/>
+                <a16:creationId xmlns:a16="http://schemas.microsoft.com/office/drawing/2014/main" id="{52D1ADB1-9C32-F26A-E37D-7F113259ED2C}"/>
               </a:ext>
             </a:extLst>
           </p:cNvPr>
@@ -1747,7 +3731,7 @@
           <p:cNvPr id="6" name="Marcador de contenido 5">
             <a:extLst>
               <a:ext uri="{FF2B5EF4-FFF2-40B4-BE49-F238E27FC236}">
-                <a16:creationId xmlns:a16="http://schemas.microsoft.com/office/drawing/2014/main" id="{12DB43AB-E1B7-2B01-557F-9048B2D423D0}"/>
+                <a16:creationId xmlns:a16="http://schemas.microsoft.com/office/drawing/2014/main" id="{395F8661-9B3F-481E-8821-8148BD8E4F00}"/>
               </a:ext>
             </a:extLst>
           </p:cNvPr>
@@ -1809,7 +3793,7 @@
           <p:cNvPr id="7" name="Marcador de fecha 6">
             <a:extLst>
               <a:ext uri="{FF2B5EF4-FFF2-40B4-BE49-F238E27FC236}">
-                <a16:creationId xmlns:a16="http://schemas.microsoft.com/office/drawing/2014/main" id="{27744151-C34B-F7D3-75F9-9183D79F2784}"/>
+                <a16:creationId xmlns:a16="http://schemas.microsoft.com/office/drawing/2014/main" id="{00EFD67A-597D-B01B-995B-54A95CAF41A1}"/>
               </a:ext>
             </a:extLst>
           </p:cNvPr>
@@ -1825,9 +3809,9 @@
           <a:bodyPr/>
           <a:lstStyle/>
           <a:p>
-            <a:fld id="{3594F67B-593D-4384-8F95-2FBEEBEEB27A}" type="datetimeFigureOut">
+            <a:fld id="{95B52314-A619-4334-B9D6-E0F6CEE22DE1}" type="datetimeFigureOut">
               <a:rPr lang="es-ES" smtClean="0"/>
-              <a:t>01/06/2026</a:t>
+              <a:t>02/06/2026</a:t>
             </a:fld>
             <a:endParaRPr lang="es-ES"/>
           </a:p>
@@ -1838,7 +3822,7 @@
           <p:cNvPr id="8" name="Marcador de pie de página 7">
             <a:extLst>
               <a:ext uri="{FF2B5EF4-FFF2-40B4-BE49-F238E27FC236}">
-                <a16:creationId xmlns:a16="http://schemas.microsoft.com/office/drawing/2014/main" id="{4CA972AB-39BB-4DDB-677C-7C2426DABD23}"/>
+                <a16:creationId xmlns:a16="http://schemas.microsoft.com/office/drawing/2014/main" id="{6998359A-3BCE-ED3F-DF2D-6BD3595A0CCF}"/>
               </a:ext>
             </a:extLst>
           </p:cNvPr>
@@ -1863,7 +3847,7 @@
           <p:cNvPr id="9" name="Marcador de número de diapositiva 8">
             <a:extLst>
               <a:ext uri="{FF2B5EF4-FFF2-40B4-BE49-F238E27FC236}">
-                <a16:creationId xmlns:a16="http://schemas.microsoft.com/office/drawing/2014/main" id="{EE8B46AC-7FF1-E539-E9A2-5E7B13B5EC29}"/>
+                <a16:creationId xmlns:a16="http://schemas.microsoft.com/office/drawing/2014/main" id="{62B39C7D-FB8E-64B7-3DDC-F4F6B502F277}"/>
               </a:ext>
             </a:extLst>
           </p:cNvPr>
@@ -1879,7 +3863,7 @@
           <a:bodyPr/>
           <a:lstStyle/>
           <a:p>
-            <a:fld id="{3E216418-6303-4DF4-80EB-715B8707D44E}" type="slidenum">
+            <a:fld id="{7CE9BE3B-4377-4C4A-B97C-E3374EB29B73}" type="slidenum">
               <a:rPr lang="es-ES" smtClean="0"/>
               <a:t>‹Nº›</a:t>
             </a:fld>
@@ -1890,7 +3874,7 @@
     </p:spTree>
     <p:extLst>
       <p:ext uri="{BB962C8B-B14F-4D97-AF65-F5344CB8AC3E}">
-        <p14:creationId xmlns:p14="http://schemas.microsoft.com/office/powerpoint/2010/main" val="2920174836"/>
+        <p14:creationId xmlns:p14="http://schemas.microsoft.com/office/powerpoint/2010/main" val="4156871011"/>
       </p:ext>
     </p:extLst>
   </p:cSld>
@@ -1922,7 +3906,7 @@
           <p:cNvPr id="2" name="Título 1">
             <a:extLst>
               <a:ext uri="{FF2B5EF4-FFF2-40B4-BE49-F238E27FC236}">
-                <a16:creationId xmlns:a16="http://schemas.microsoft.com/office/drawing/2014/main" id="{B95024DB-1CD0-312B-3E29-F0DCB4880364}"/>
+                <a16:creationId xmlns:a16="http://schemas.microsoft.com/office/drawing/2014/main" id="{FA514029-64D2-3F15-D646-F84B81028040}"/>
               </a:ext>
             </a:extLst>
           </p:cNvPr>
@@ -1950,7 +3934,7 @@
           <p:cNvPr id="3" name="Marcador de fecha 2">
             <a:extLst>
               <a:ext uri="{FF2B5EF4-FFF2-40B4-BE49-F238E27FC236}">
-                <a16:creationId xmlns:a16="http://schemas.microsoft.com/office/drawing/2014/main" id="{E693750E-1BE2-EF46-8C03-C8AB0BBAAFDB}"/>
+                <a16:creationId xmlns:a16="http://schemas.microsoft.com/office/drawing/2014/main" id="{32BB6C2E-B227-456C-96BF-D2D204E35710}"/>
               </a:ext>
             </a:extLst>
           </p:cNvPr>
@@ -1966,9 +3950,9 @@
           <a:bodyPr/>
           <a:lstStyle/>
           <a:p>
-            <a:fld id="{3594F67B-593D-4384-8F95-2FBEEBEEB27A}" type="datetimeFigureOut">
+            <a:fld id="{95B52314-A619-4334-B9D6-E0F6CEE22DE1}" type="datetimeFigureOut">
               <a:rPr lang="es-ES" smtClean="0"/>
-              <a:t>01/06/2026</a:t>
+              <a:t>02/06/2026</a:t>
             </a:fld>
             <a:endParaRPr lang="es-ES"/>
           </a:p>
@@ -1979,7 +3963,7 @@
           <p:cNvPr id="4" name="Marcador de pie de página 3">
             <a:extLst>
               <a:ext uri="{FF2B5EF4-FFF2-40B4-BE49-F238E27FC236}">
-                <a16:creationId xmlns:a16="http://schemas.microsoft.com/office/drawing/2014/main" id="{000E8E06-FABC-1FB6-2B66-EE56AF013008}"/>
+                <a16:creationId xmlns:a16="http://schemas.microsoft.com/office/drawing/2014/main" id="{9215D9AC-AFEA-4FF6-2D24-32AEE39CD6E7}"/>
               </a:ext>
             </a:extLst>
           </p:cNvPr>
@@ -2004,7 +3988,7 @@
           <p:cNvPr id="5" name="Marcador de número de diapositiva 4">
             <a:extLst>
               <a:ext uri="{FF2B5EF4-FFF2-40B4-BE49-F238E27FC236}">
-                <a16:creationId xmlns:a16="http://schemas.microsoft.com/office/drawing/2014/main" id="{58A052CE-71D7-F68A-5D06-2099A1659910}"/>
+                <a16:creationId xmlns:a16="http://schemas.microsoft.com/office/drawing/2014/main" id="{015912F8-9FCC-755D-E055-1258A05CD004}"/>
               </a:ext>
             </a:extLst>
           </p:cNvPr>
@@ -2020,7 +4004,7 @@
           <a:bodyPr/>
           <a:lstStyle/>
           <a:p>
-            <a:fld id="{3E216418-6303-4DF4-80EB-715B8707D44E}" type="slidenum">
+            <a:fld id="{7CE9BE3B-4377-4C4A-B97C-E3374EB29B73}" type="slidenum">
               <a:rPr lang="es-ES" smtClean="0"/>
               <a:t>‹Nº›</a:t>
             </a:fld>
@@ -2031,7 +4015,7 @@
     </p:spTree>
     <p:extLst>
       <p:ext uri="{BB962C8B-B14F-4D97-AF65-F5344CB8AC3E}">
-        <p14:creationId xmlns:p14="http://schemas.microsoft.com/office/powerpoint/2010/main" val="686946921"/>
+        <p14:creationId xmlns:p14="http://schemas.microsoft.com/office/powerpoint/2010/main" val="560475243"/>
       </p:ext>
     </p:extLst>
   </p:cSld>
@@ -2063,7 +4047,7 @@
           <p:cNvPr id="2" name="Marcador de fecha 1">
             <a:extLst>
               <a:ext uri="{FF2B5EF4-FFF2-40B4-BE49-F238E27FC236}">
-                <a16:creationId xmlns:a16="http://schemas.microsoft.com/office/drawing/2014/main" id="{07A54D4B-EB29-606E-D8CF-3C2A3BE2FA51}"/>
+                <a16:creationId xmlns:a16="http://schemas.microsoft.com/office/drawing/2014/main" id="{FD262539-6913-1E43-56B2-281D23E00F88}"/>
               </a:ext>
             </a:extLst>
           </p:cNvPr>
@@ -2079,9 +4063,9 @@
           <a:bodyPr/>
           <a:lstStyle/>
           <a:p>
-            <a:fld id="{3594F67B-593D-4384-8F95-2FBEEBEEB27A}" type="datetimeFigureOut">
+            <a:fld id="{95B52314-A619-4334-B9D6-E0F6CEE22DE1}" type="datetimeFigureOut">
               <a:rPr lang="es-ES" smtClean="0"/>
-              <a:t>01/06/2026</a:t>
+              <a:t>02/06/2026</a:t>
             </a:fld>
             <a:endParaRPr lang="es-ES"/>
           </a:p>
@@ -2092,7 +4076,7 @@
           <p:cNvPr id="3" name="Marcador de pie de página 2">
             <a:extLst>
               <a:ext uri="{FF2B5EF4-FFF2-40B4-BE49-F238E27FC236}">
-                <a16:creationId xmlns:a16="http://schemas.microsoft.com/office/drawing/2014/main" id="{FE4290FF-1038-24E8-33DA-35749590B469}"/>
+                <a16:creationId xmlns:a16="http://schemas.microsoft.com/office/drawing/2014/main" id="{0B20EA8A-2121-BE84-3A74-68B23612A245}"/>
               </a:ext>
             </a:extLst>
           </p:cNvPr>
@@ -2117,7 +4101,7 @@
           <p:cNvPr id="4" name="Marcador de número de diapositiva 3">
             <a:extLst>
               <a:ext uri="{FF2B5EF4-FFF2-40B4-BE49-F238E27FC236}">
-                <a16:creationId xmlns:a16="http://schemas.microsoft.com/office/drawing/2014/main" id="{EC46CCFC-C651-193F-028A-BAFA9435E3EC}"/>
+                <a16:creationId xmlns:a16="http://schemas.microsoft.com/office/drawing/2014/main" id="{E8DB0CD8-4B83-35A3-F56B-953118B0010E}"/>
               </a:ext>
             </a:extLst>
           </p:cNvPr>
@@ -2133,7 +4117,7 @@
           <a:bodyPr/>
           <a:lstStyle/>
           <a:p>
-            <a:fld id="{3E216418-6303-4DF4-80EB-715B8707D44E}" type="slidenum">
+            <a:fld id="{7CE9BE3B-4377-4C4A-B97C-E3374EB29B73}" type="slidenum">
               <a:rPr lang="es-ES" smtClean="0"/>
               <a:t>‹Nº›</a:t>
             </a:fld>
@@ -2144,7 +4128,7 @@
     </p:spTree>
     <p:extLst>
       <p:ext uri="{BB962C8B-B14F-4D97-AF65-F5344CB8AC3E}">
-        <p14:creationId xmlns:p14="http://schemas.microsoft.com/office/powerpoint/2010/main" val="178298420"/>
+        <p14:creationId xmlns:p14="http://schemas.microsoft.com/office/powerpoint/2010/main" val="1180069441"/>
       </p:ext>
     </p:extLst>
   </p:cSld>
@@ -2176,7 +4160,7 @@
           <p:cNvPr id="2" name="Título 1">
             <a:extLst>
               <a:ext uri="{FF2B5EF4-FFF2-40B4-BE49-F238E27FC236}">
-                <a16:creationId xmlns:a16="http://schemas.microsoft.com/office/drawing/2014/main" id="{46B4FA0B-48DB-7AC2-4C1B-451D82DDC18D}"/>
+                <a16:creationId xmlns:a16="http://schemas.microsoft.com/office/drawing/2014/main" id="{7ED258B3-CB8E-C50E-3D67-3ACA57F7E449}"/>
               </a:ext>
             </a:extLst>
           </p:cNvPr>
@@ -2213,7 +4197,7 @@
           <p:cNvPr id="3" name="Marcador de contenido 2">
             <a:extLst>
               <a:ext uri="{FF2B5EF4-FFF2-40B4-BE49-F238E27FC236}">
-                <a16:creationId xmlns:a16="http://schemas.microsoft.com/office/drawing/2014/main" id="{B30A71B3-C987-79F9-8923-060AB45BD232}"/>
+                <a16:creationId xmlns:a16="http://schemas.microsoft.com/office/drawing/2014/main" id="{54220668-43DC-BA16-4CBE-CF72FDA346A0}"/>
               </a:ext>
             </a:extLst>
           </p:cNvPr>
@@ -2303,7 +4287,7 @@
           <p:cNvPr id="4" name="Marcador de texto 3">
             <a:extLst>
               <a:ext uri="{FF2B5EF4-FFF2-40B4-BE49-F238E27FC236}">
-                <a16:creationId xmlns:a16="http://schemas.microsoft.com/office/drawing/2014/main" id="{5639A1A8-196E-F16B-A24F-D58EAD9507A7}"/>
+                <a16:creationId xmlns:a16="http://schemas.microsoft.com/office/drawing/2014/main" id="{17235BE2-E9EF-652D-A3F4-B0F37964C18C}"/>
               </a:ext>
             </a:extLst>
           </p:cNvPr>
@@ -2374,7 +4358,7 @@
           <p:cNvPr id="5" name="Marcador de fecha 4">
             <a:extLst>
               <a:ext uri="{FF2B5EF4-FFF2-40B4-BE49-F238E27FC236}">
-                <a16:creationId xmlns:a16="http://schemas.microsoft.com/office/drawing/2014/main" id="{DD572331-9D4E-4D29-9B46-71E48925D5F2}"/>
+                <a16:creationId xmlns:a16="http://schemas.microsoft.com/office/drawing/2014/main" id="{B675B193-1CC6-3EB0-48E7-882C276D25F1}"/>
               </a:ext>
             </a:extLst>
           </p:cNvPr>
@@ -2390,9 +4374,9 @@
           <a:bodyPr/>
           <a:lstStyle/>
           <a:p>
-            <a:fld id="{3594F67B-593D-4384-8F95-2FBEEBEEB27A}" type="datetimeFigureOut">
+            <a:fld id="{95B52314-A619-4334-B9D6-E0F6CEE22DE1}" type="datetimeFigureOut">
               <a:rPr lang="es-ES" smtClean="0"/>
-              <a:t>01/06/2026</a:t>
+              <a:t>02/06/2026</a:t>
             </a:fld>
             <a:endParaRPr lang="es-ES"/>
           </a:p>
@@ -2403,7 +4387,7 @@
           <p:cNvPr id="6" name="Marcador de pie de página 5">
             <a:extLst>
               <a:ext uri="{FF2B5EF4-FFF2-40B4-BE49-F238E27FC236}">
-                <a16:creationId xmlns:a16="http://schemas.microsoft.com/office/drawing/2014/main" id="{A7826676-BF9C-EB38-DE94-C20CC5929740}"/>
+                <a16:creationId xmlns:a16="http://schemas.microsoft.com/office/drawing/2014/main" id="{22353DAB-AAA1-03BD-9E94-07F4CF94A987}"/>
               </a:ext>
             </a:extLst>
           </p:cNvPr>
@@ -2428,7 +4412,7 @@
           <p:cNvPr id="7" name="Marcador de número de diapositiva 6">
             <a:extLst>
               <a:ext uri="{FF2B5EF4-FFF2-40B4-BE49-F238E27FC236}">
-                <a16:creationId xmlns:a16="http://schemas.microsoft.com/office/drawing/2014/main" id="{7882BAF8-87D6-7467-E7CA-FBCF4CA7AD23}"/>
+                <a16:creationId xmlns:a16="http://schemas.microsoft.com/office/drawing/2014/main" id="{EB581CC8-FBBD-C8DE-52E0-42EFAF8A215B}"/>
               </a:ext>
             </a:extLst>
           </p:cNvPr>
@@ -2444,7 +4428,7 @@
           <a:bodyPr/>
           <a:lstStyle/>
           <a:p>
-            <a:fld id="{3E216418-6303-4DF4-80EB-715B8707D44E}" type="slidenum">
+            <a:fld id="{7CE9BE3B-4377-4C4A-B97C-E3374EB29B73}" type="slidenum">
               <a:rPr lang="es-ES" smtClean="0"/>
               <a:t>‹Nº›</a:t>
             </a:fld>
@@ -2455,7 +4439,7 @@
     </p:spTree>
     <p:extLst>
       <p:ext uri="{BB962C8B-B14F-4D97-AF65-F5344CB8AC3E}">
-        <p14:creationId xmlns:p14="http://schemas.microsoft.com/office/powerpoint/2010/main" val="1200091560"/>
+        <p14:creationId xmlns:p14="http://schemas.microsoft.com/office/powerpoint/2010/main" val="3857819064"/>
       </p:ext>
     </p:extLst>
   </p:cSld>
@@ -2487,7 +4471,7 @@
           <p:cNvPr id="2" name="Título 1">
             <a:extLst>
               <a:ext uri="{FF2B5EF4-FFF2-40B4-BE49-F238E27FC236}">
-                <a16:creationId xmlns:a16="http://schemas.microsoft.com/office/drawing/2014/main" id="{8B12B5EA-75CA-BB8B-3D35-87E0DAC7E396}"/>
+                <a16:creationId xmlns:a16="http://schemas.microsoft.com/office/drawing/2014/main" id="{DC485871-6A79-DD51-2D5C-BC446671E0D6}"/>
               </a:ext>
             </a:extLst>
           </p:cNvPr>
@@ -2524,7 +4508,7 @@
           <p:cNvPr id="3" name="Marcador de posición de imagen 2">
             <a:extLst>
               <a:ext uri="{FF2B5EF4-FFF2-40B4-BE49-F238E27FC236}">
-                <a16:creationId xmlns:a16="http://schemas.microsoft.com/office/drawing/2014/main" id="{B8677383-2743-A849-F31D-A3D47B8A604A}"/>
+                <a16:creationId xmlns:a16="http://schemas.microsoft.com/office/drawing/2014/main" id="{0DB34230-9B4D-2E07-0005-0FF42C1DEA1D}"/>
               </a:ext>
             </a:extLst>
           </p:cNvPr>
@@ -2591,7 +4575,7 @@
           <p:cNvPr id="4" name="Marcador de texto 3">
             <a:extLst>
               <a:ext uri="{FF2B5EF4-FFF2-40B4-BE49-F238E27FC236}">
-                <a16:creationId xmlns:a16="http://schemas.microsoft.com/office/drawing/2014/main" id="{18AAFB2E-6E91-D04B-87CA-4CAFEA47CAC4}"/>
+                <a16:creationId xmlns:a16="http://schemas.microsoft.com/office/drawing/2014/main" id="{788A004C-4F00-8F8E-A6D4-2D469292EA1D}"/>
               </a:ext>
             </a:extLst>
           </p:cNvPr>
@@ -2662,7 +4646,7 @@
           <p:cNvPr id="5" name="Marcador de fecha 4">
             <a:extLst>
               <a:ext uri="{FF2B5EF4-FFF2-40B4-BE49-F238E27FC236}">
-                <a16:creationId xmlns:a16="http://schemas.microsoft.com/office/drawing/2014/main" id="{9BD97579-AD36-B586-2CD4-1DFB26382106}"/>
+                <a16:creationId xmlns:a16="http://schemas.microsoft.com/office/drawing/2014/main" id="{B73FAD98-A17A-BE5F-C574-C0BA4FB63178}"/>
               </a:ext>
             </a:extLst>
           </p:cNvPr>
@@ -2678,9 +4662,9 @@
           <a:bodyPr/>
           <a:lstStyle/>
           <a:p>
-            <a:fld id="{3594F67B-593D-4384-8F95-2FBEEBEEB27A}" type="datetimeFigureOut">
+            <a:fld id="{95B52314-A619-4334-B9D6-E0F6CEE22DE1}" type="datetimeFigureOut">
               <a:rPr lang="es-ES" smtClean="0"/>
-              <a:t>01/06/2026</a:t>
+              <a:t>02/06/2026</a:t>
             </a:fld>
             <a:endParaRPr lang="es-ES"/>
           </a:p>
@@ -2691,7 +4675,7 @@
           <p:cNvPr id="6" name="Marcador de pie de página 5">
             <a:extLst>
               <a:ext uri="{FF2B5EF4-FFF2-40B4-BE49-F238E27FC236}">
-                <a16:creationId xmlns:a16="http://schemas.microsoft.com/office/drawing/2014/main" id="{3AA44D61-788E-A726-58E2-54F3A8AA79F6}"/>
+                <a16:creationId xmlns:a16="http://schemas.microsoft.com/office/drawing/2014/main" id="{79987B7C-CC04-F768-A321-DE77771C739A}"/>
               </a:ext>
             </a:extLst>
           </p:cNvPr>
@@ -2716,7 +4700,7 @@
           <p:cNvPr id="7" name="Marcador de número de diapositiva 6">
             <a:extLst>
               <a:ext uri="{FF2B5EF4-FFF2-40B4-BE49-F238E27FC236}">
-                <a16:creationId xmlns:a16="http://schemas.microsoft.com/office/drawing/2014/main" id="{C69683E1-C1B3-49D0-1914-E51C26683BB7}"/>
+                <a16:creationId xmlns:a16="http://schemas.microsoft.com/office/drawing/2014/main" id="{954D2AA8-B288-E289-0982-8F1DCC26364F}"/>
               </a:ext>
             </a:extLst>
           </p:cNvPr>
@@ -2732,7 +4716,7 @@
           <a:bodyPr/>
           <a:lstStyle/>
           <a:p>
-            <a:fld id="{3E216418-6303-4DF4-80EB-715B8707D44E}" type="slidenum">
+            <a:fld id="{7CE9BE3B-4377-4C4A-B97C-E3374EB29B73}" type="slidenum">
               <a:rPr lang="es-ES" smtClean="0"/>
               <a:t>‹Nº›</a:t>
             </a:fld>
@@ -2743,7 +4727,7 @@
     </p:spTree>
     <p:extLst>
       <p:ext uri="{BB962C8B-B14F-4D97-AF65-F5344CB8AC3E}">
-        <p14:creationId xmlns:p14="http://schemas.microsoft.com/office/powerpoint/2010/main" val="1442130320"/>
+        <p14:creationId xmlns:p14="http://schemas.microsoft.com/office/powerpoint/2010/main" val="3092876499"/>
       </p:ext>
     </p:extLst>
   </p:cSld>
@@ -2780,7 +4764,7 @@
           <p:cNvPr id="2" name="Marcador de título 1">
             <a:extLst>
               <a:ext uri="{FF2B5EF4-FFF2-40B4-BE49-F238E27FC236}">
-                <a16:creationId xmlns:a16="http://schemas.microsoft.com/office/drawing/2014/main" id="{6187FEB4-0BB9-E195-F732-8C7ABE7BF6F0}"/>
+                <a16:creationId xmlns:a16="http://schemas.microsoft.com/office/drawing/2014/main" id="{81101772-D9B2-AA3F-1E09-1DD2C75BA981}"/>
               </a:ext>
             </a:extLst>
           </p:cNvPr>
@@ -2818,7 +4802,7 @@
           <p:cNvPr id="3" name="Marcador de texto 2">
             <a:extLst>
               <a:ext uri="{FF2B5EF4-FFF2-40B4-BE49-F238E27FC236}">
-                <a16:creationId xmlns:a16="http://schemas.microsoft.com/office/drawing/2014/main" id="{9D0936A3-8B0F-0B92-C1B9-28709DF67DD5}"/>
+                <a16:creationId xmlns:a16="http://schemas.microsoft.com/office/drawing/2014/main" id="{FE944365-9F01-579E-C6D1-74745222998A}"/>
               </a:ext>
             </a:extLst>
           </p:cNvPr>
@@ -2885,7 +4869,7 @@
           <p:cNvPr id="4" name="Marcador de fecha 3">
             <a:extLst>
               <a:ext uri="{FF2B5EF4-FFF2-40B4-BE49-F238E27FC236}">
-                <a16:creationId xmlns:a16="http://schemas.microsoft.com/office/drawing/2014/main" id="{16135521-3597-C0E8-C2D2-08D76DF2FA08}"/>
+                <a16:creationId xmlns:a16="http://schemas.microsoft.com/office/drawing/2014/main" id="{DCC38CDE-3F65-F45E-E724-92C91E19C5ED}"/>
               </a:ext>
             </a:extLst>
           </p:cNvPr>
@@ -2919,9 +4903,9 @@
             </a:lvl1pPr>
           </a:lstStyle>
           <a:p>
-            <a:fld id="{3594F67B-593D-4384-8F95-2FBEEBEEB27A}" type="datetimeFigureOut">
+            <a:fld id="{95B52314-A619-4334-B9D6-E0F6CEE22DE1}" type="datetimeFigureOut">
               <a:rPr lang="es-ES" smtClean="0"/>
-              <a:t>01/06/2026</a:t>
+              <a:t>02/06/2026</a:t>
             </a:fld>
             <a:endParaRPr lang="es-ES"/>
           </a:p>
@@ -2932,7 +4916,7 @@
           <p:cNvPr id="5" name="Marcador de pie de página 4">
             <a:extLst>
               <a:ext uri="{FF2B5EF4-FFF2-40B4-BE49-F238E27FC236}">
-                <a16:creationId xmlns:a16="http://schemas.microsoft.com/office/drawing/2014/main" id="{7AF63953-D0FE-0737-3EB9-0ECEC8641ABD}"/>
+                <a16:creationId xmlns:a16="http://schemas.microsoft.com/office/drawing/2014/main" id="{21272D42-79E4-789E-9422-46DF82DC52D3}"/>
               </a:ext>
             </a:extLst>
           </p:cNvPr>
@@ -2975,7 +4959,7 @@
           <p:cNvPr id="6" name="Marcador de número de diapositiva 5">
             <a:extLst>
               <a:ext uri="{FF2B5EF4-FFF2-40B4-BE49-F238E27FC236}">
-                <a16:creationId xmlns:a16="http://schemas.microsoft.com/office/drawing/2014/main" id="{5DDB0455-9A68-BF0F-C35E-57904400E01A}"/>
+                <a16:creationId xmlns:a16="http://schemas.microsoft.com/office/drawing/2014/main" id="{D3195015-4975-058C-A9F2-BB0077C1165E}"/>
               </a:ext>
             </a:extLst>
           </p:cNvPr>
@@ -3009,7 +4993,7 @@
             </a:lvl1pPr>
           </a:lstStyle>
           <a:p>
-            <a:fld id="{3E216418-6303-4DF4-80EB-715B8707D44E}" type="slidenum">
+            <a:fld id="{7CE9BE3B-4377-4C4A-B97C-E3374EB29B73}" type="slidenum">
               <a:rPr lang="es-ES" smtClean="0"/>
               <a:t>‹Nº›</a:t>
             </a:fld>
@@ -3020,7 +5004,7 @@
     </p:spTree>
     <p:extLst>
       <p:ext uri="{BB962C8B-B14F-4D97-AF65-F5344CB8AC3E}">
-        <p14:creationId xmlns:p14="http://schemas.microsoft.com/office/powerpoint/2010/main" val="3720018694"/>
+        <p14:creationId xmlns:p14="http://schemas.microsoft.com/office/powerpoint/2010/main" val="1949527148"/>
       </p:ext>
     </p:extLst>
   </p:cSld>
@@ -3351,7 +5335,7 @@
           <p:cNvPr id="2" name="Rectángulo: esquinas redondeadas 1">
             <a:extLst>
               <a:ext uri="{FF2B5EF4-FFF2-40B4-BE49-F238E27FC236}">
-                <a16:creationId xmlns:a16="http://schemas.microsoft.com/office/drawing/2014/main" id="{913392A5-DAD7-00CE-8C62-AF4441EFB2B1}"/>
+                <a16:creationId xmlns:a16="http://schemas.microsoft.com/office/drawing/2014/main" id="{5FB3C4ED-0306-4653-5682-F6FA54B91543}"/>
               </a:ext>
             </a:extLst>
           </p:cNvPr>
@@ -3405,7 +5389,7 @@
           <p:cNvPr id="3" name="CuadroTexto 2">
             <a:extLst>
               <a:ext uri="{FF2B5EF4-FFF2-40B4-BE49-F238E27FC236}">
-                <a16:creationId xmlns:a16="http://schemas.microsoft.com/office/drawing/2014/main" id="{FC6E0A4B-BC99-08BD-5903-28A0EAD657EB}"/>
+                <a16:creationId xmlns:a16="http://schemas.microsoft.com/office/drawing/2014/main" id="{63C6278D-E305-22A6-EA05-5A5311C55315}"/>
               </a:ext>
             </a:extLst>
           </p:cNvPr>
@@ -3445,7 +5429,7 @@
           <p:cNvPr id="4" name="CuadroTexto 3">
             <a:extLst>
               <a:ext uri="{FF2B5EF4-FFF2-40B4-BE49-F238E27FC236}">
-                <a16:creationId xmlns:a16="http://schemas.microsoft.com/office/drawing/2014/main" id="{4CB2720E-52A3-DF62-9339-FF6F64BCCA76}"/>
+                <a16:creationId xmlns:a16="http://schemas.microsoft.com/office/drawing/2014/main" id="{66FEDC4E-6737-D34F-8B2D-F5B2F1A162E1}"/>
               </a:ext>
             </a:extLst>
           </p:cNvPr>
@@ -3469,13 +5453,22 @@
           <a:lstStyle/>
           <a:p>
             <a:r>
+              <a:rPr lang="es-ES" sz="4200" b="1" dirty="0" err="1">
+                <a:solidFill>
+                  <a:srgbClr val="F6F8FC"/>
+                </a:solidFill>
+                <a:latin typeface="Segoe UI" panose="020B0502040204020203" pitchFamily="34" charset="0"/>
+              </a:rPr>
+              <a:t>Gestion</a:t>
+            </a:r>
+            <a:r>
               <a:rPr lang="es-ES" sz="4200" b="1">
                 <a:solidFill>
                   <a:srgbClr val="F6F8FC"/>
                 </a:solidFill>
                 <a:latin typeface="Segoe UI" panose="020B0502040204020203" pitchFamily="34" charset="0"/>
               </a:rPr>
-              <a:t>Gestion de Empresas Colaboradoras para FP Dual</a:t>
+              <a:t> de Empresas Colaboradoras para FP Dual</a:t>
             </a:r>
           </a:p>
         </p:txBody>
@@ -3485,7 +5478,7 @@
           <p:cNvPr id="5" name="CuadroTexto 4">
             <a:extLst>
               <a:ext uri="{FF2B5EF4-FFF2-40B4-BE49-F238E27FC236}">
-                <a16:creationId xmlns:a16="http://schemas.microsoft.com/office/drawing/2014/main" id="{3B9648D0-46DE-E745-F09E-08DC587B28FF}"/>
+                <a16:creationId xmlns:a16="http://schemas.microsoft.com/office/drawing/2014/main" id="{4D97D36C-B62C-7883-3453-06C76145EDC4}"/>
               </a:ext>
             </a:extLst>
           </p:cNvPr>
@@ -3525,7 +5518,7 @@
           <p:cNvPr id="6" name="CuadroTexto 5">
             <a:extLst>
               <a:ext uri="{FF2B5EF4-FFF2-40B4-BE49-F238E27FC236}">
-                <a16:creationId xmlns:a16="http://schemas.microsoft.com/office/drawing/2014/main" id="{54D9DBF7-DC5D-337C-2E1B-DDA58DCDCDCC}"/>
+                <a16:creationId xmlns:a16="http://schemas.microsoft.com/office/drawing/2014/main" id="{82E1BEB6-69E2-F2AF-5378-DEC629C9300E}"/>
               </a:ext>
             </a:extLst>
           </p:cNvPr>
@@ -3576,7 +5569,7 @@
           <p:cNvPr id="8" name="Imagen 7">
             <a:extLst>
               <a:ext uri="{FF2B5EF4-FFF2-40B4-BE49-F238E27FC236}">
-                <a16:creationId xmlns:a16="http://schemas.microsoft.com/office/drawing/2014/main" id="{8B41F678-91DD-15AE-8E90-19E5CC51A651}"/>
+                <a16:creationId xmlns:a16="http://schemas.microsoft.com/office/drawing/2014/main" id="{4FBD55B8-7CFD-9E69-D15B-C5CDDFE24C11}"/>
               </a:ext>
             </a:extLst>
           </p:cNvPr>
@@ -3586,7 +5579,7 @@
           <p:nvPr/>
         </p:nvPicPr>
         <p:blipFill>
-          <a:blip r:embed="rId2">
+          <a:blip r:embed="rId3">
             <a:extLst>
               <a:ext uri="{28A0092B-C50C-407E-A947-70E740481C1C}">
                 <a14:useLocalDpi xmlns:a14="http://schemas.microsoft.com/office/drawing/2010/main" val="0"/>
@@ -3599,7 +5592,7 @@
         </p:blipFill>
         <p:spPr>
           <a:xfrm>
-            <a:off x="7493000" y="1968500"/>
+            <a:off x="6324600" y="3886200"/>
             <a:ext cx="4064000" cy="2286000"/>
           </a:xfrm>
           <a:prstGeom prst="rect">
@@ -3615,7 +5608,7 @@
     </p:spTree>
     <p:extLst>
       <p:ext uri="{BB962C8B-B14F-4D97-AF65-F5344CB8AC3E}">
-        <p14:creationId xmlns:p14="http://schemas.microsoft.com/office/powerpoint/2010/main" val="1107875203"/>
+        <p14:creationId xmlns:p14="http://schemas.microsoft.com/office/powerpoint/2010/main" val="201647960"/>
       </p:ext>
     </p:extLst>
   </p:cSld>
@@ -3655,7 +5648,7 @@
           <p:cNvPr id="2" name="CuadroTexto 1">
             <a:extLst>
               <a:ext uri="{FF2B5EF4-FFF2-40B4-BE49-F238E27FC236}">
-                <a16:creationId xmlns:a16="http://schemas.microsoft.com/office/drawing/2014/main" id="{BFF9A577-7809-B456-65E0-B104694C7008}"/>
+                <a16:creationId xmlns:a16="http://schemas.microsoft.com/office/drawing/2014/main" id="{7D9102D5-717E-4A51-C91C-8305EFD8A76F}"/>
               </a:ext>
             </a:extLst>
           </p:cNvPr>
@@ -3695,7 +5688,7 @@
           <p:cNvPr id="3" name="CuadroTexto 2">
             <a:extLst>
               <a:ext uri="{FF2B5EF4-FFF2-40B4-BE49-F238E27FC236}">
-                <a16:creationId xmlns:a16="http://schemas.microsoft.com/office/drawing/2014/main" id="{2CF00E4E-FC2B-4518-60EE-FB842C64E533}"/>
+                <a16:creationId xmlns:a16="http://schemas.microsoft.com/office/drawing/2014/main" id="{CE1CE6B2-41E9-F009-2AAC-4FA5341E24B5}"/>
               </a:ext>
             </a:extLst>
           </p:cNvPr>
@@ -3735,7 +5728,7 @@
           <p:cNvPr id="4" name="CuadroTexto 3">
             <a:extLst>
               <a:ext uri="{FF2B5EF4-FFF2-40B4-BE49-F238E27FC236}">
-                <a16:creationId xmlns:a16="http://schemas.microsoft.com/office/drawing/2014/main" id="{FFEA32CE-CBDF-069C-11D0-844AA579B72F}"/>
+                <a16:creationId xmlns:a16="http://schemas.microsoft.com/office/drawing/2014/main" id="{139D976D-329F-FA13-1B3E-8907ADC325DB}"/>
               </a:ext>
             </a:extLst>
           </p:cNvPr>
@@ -3775,7 +5768,7 @@
           <p:cNvPr id="5" name="Rectángulo: esquinas redondeadas 4">
             <a:extLst>
               <a:ext uri="{FF2B5EF4-FFF2-40B4-BE49-F238E27FC236}">
-                <a16:creationId xmlns:a16="http://schemas.microsoft.com/office/drawing/2014/main" id="{E49EC66D-0653-1C7C-EB5F-EB891CC09A9C}"/>
+                <a16:creationId xmlns:a16="http://schemas.microsoft.com/office/drawing/2014/main" id="{DD66C5CD-23C1-3031-A74B-0E6578C24A05}"/>
               </a:ext>
             </a:extLst>
           </p:cNvPr>
@@ -3784,8 +5777,8 @@
         </p:nvSpPr>
         <p:spPr>
           <a:xfrm>
-            <a:off x="736600" y="2032000"/>
-            <a:ext cx="3175000" cy="2870200"/>
+            <a:off x="711200" y="2064265"/>
+            <a:ext cx="3096302" cy="3542055"/>
           </a:xfrm>
           <a:prstGeom prst="roundRect">
             <a:avLst/>
@@ -3829,7 +5822,7 @@
           <p:cNvPr id="6" name="CuadroTexto 5">
             <a:extLst>
               <a:ext uri="{FF2B5EF4-FFF2-40B4-BE49-F238E27FC236}">
-                <a16:creationId xmlns:a16="http://schemas.microsoft.com/office/drawing/2014/main" id="{F9136EFE-6083-A01B-38C9-54B0B36745A1}"/>
+                <a16:creationId xmlns:a16="http://schemas.microsoft.com/office/drawing/2014/main" id="{C44EC28E-628A-4C2F-89DA-58D06C5B0732}"/>
               </a:ext>
             </a:extLst>
           </p:cNvPr>
@@ -3869,7 +5862,7 @@
           <p:cNvPr id="7" name="CuadroTexto 6">
             <a:extLst>
               <a:ext uri="{FF2B5EF4-FFF2-40B4-BE49-F238E27FC236}">
-                <a16:creationId xmlns:a16="http://schemas.microsoft.com/office/drawing/2014/main" id="{91E1F0B5-27C6-4230-A446-ED009B09D268}"/>
+                <a16:creationId xmlns:a16="http://schemas.microsoft.com/office/drawing/2014/main" id="{B92ECB85-3A17-B38A-0AF0-4FA3142EE3A7}"/>
               </a:ext>
             </a:extLst>
           </p:cNvPr>
@@ -3988,7 +5981,7 @@
           <p:cNvPr id="8" name="Rectángulo: esquinas redondeadas 7">
             <a:extLst>
               <a:ext uri="{FF2B5EF4-FFF2-40B4-BE49-F238E27FC236}">
-                <a16:creationId xmlns:a16="http://schemas.microsoft.com/office/drawing/2014/main" id="{673AD033-FB67-0DAF-DBC4-D7A50B83F597}"/>
+                <a16:creationId xmlns:a16="http://schemas.microsoft.com/office/drawing/2014/main" id="{CA753F6C-A910-F805-9076-751C3EB51A03}"/>
               </a:ext>
             </a:extLst>
           </p:cNvPr>
@@ -4042,7 +6035,7 @@
           <p:cNvPr id="9" name="CuadroTexto 8">
             <a:extLst>
               <a:ext uri="{FF2B5EF4-FFF2-40B4-BE49-F238E27FC236}">
-                <a16:creationId xmlns:a16="http://schemas.microsoft.com/office/drawing/2014/main" id="{8CE381C0-EE38-B7EC-66F4-A762995AEE76}"/>
+                <a16:creationId xmlns:a16="http://schemas.microsoft.com/office/drawing/2014/main" id="{B3F18F46-3C1B-DC9A-E820-07A26F5226CD}"/>
               </a:ext>
             </a:extLst>
           </p:cNvPr>
@@ -4082,7 +6075,7 @@
           <p:cNvPr id="10" name="CuadroTexto 9">
             <a:extLst>
               <a:ext uri="{FF2B5EF4-FFF2-40B4-BE49-F238E27FC236}">
-                <a16:creationId xmlns:a16="http://schemas.microsoft.com/office/drawing/2014/main" id="{D566BCAC-1BB9-B767-AB27-5C6DFFEB671D}"/>
+                <a16:creationId xmlns:a16="http://schemas.microsoft.com/office/drawing/2014/main" id="{949893C6-C677-70F7-75E3-E229B8E11736}"/>
               </a:ext>
             </a:extLst>
           </p:cNvPr>
@@ -4122,7 +6115,7 @@
           <p:cNvPr id="11" name="Rectángulo: esquinas redondeadas 10">
             <a:extLst>
               <a:ext uri="{FF2B5EF4-FFF2-40B4-BE49-F238E27FC236}">
-                <a16:creationId xmlns:a16="http://schemas.microsoft.com/office/drawing/2014/main" id="{4349613C-8BA6-B55E-01A1-EEE7D4944CA9}"/>
+                <a16:creationId xmlns:a16="http://schemas.microsoft.com/office/drawing/2014/main" id="{A0FCB78A-F183-E664-74E1-4535BCB0A394}"/>
               </a:ext>
             </a:extLst>
           </p:cNvPr>
@@ -4176,7 +6169,7 @@
           <p:cNvPr id="12" name="CuadroTexto 11">
             <a:extLst>
               <a:ext uri="{FF2B5EF4-FFF2-40B4-BE49-F238E27FC236}">
-                <a16:creationId xmlns:a16="http://schemas.microsoft.com/office/drawing/2014/main" id="{1D755BB5-B2B8-7C57-F3E2-B3BE437D1F66}"/>
+                <a16:creationId xmlns:a16="http://schemas.microsoft.com/office/drawing/2014/main" id="{1A75C33B-F113-4DA7-27AB-F51E8D681103}"/>
               </a:ext>
             </a:extLst>
           </p:cNvPr>
@@ -4216,7 +6209,7 @@
           <p:cNvPr id="13" name="CuadroTexto 12">
             <a:extLst>
               <a:ext uri="{FF2B5EF4-FFF2-40B4-BE49-F238E27FC236}">
-                <a16:creationId xmlns:a16="http://schemas.microsoft.com/office/drawing/2014/main" id="{9E62A85F-BAA2-4BD7-E8B2-6464E3C2CDB9}"/>
+                <a16:creationId xmlns:a16="http://schemas.microsoft.com/office/drawing/2014/main" id="{B2498C44-A706-46ED-4644-F765C1E83685}"/>
               </a:ext>
             </a:extLst>
           </p:cNvPr>
@@ -4256,7 +6249,7 @@
           <p:cNvPr id="14" name="Rectángulo: esquinas redondeadas 13">
             <a:extLst>
               <a:ext uri="{FF2B5EF4-FFF2-40B4-BE49-F238E27FC236}">
-                <a16:creationId xmlns:a16="http://schemas.microsoft.com/office/drawing/2014/main" id="{73E41BDF-47AA-07DD-B88A-F74F4869CF9E}"/>
+                <a16:creationId xmlns:a16="http://schemas.microsoft.com/office/drawing/2014/main" id="{39A04F6C-992D-F91F-A2F3-17D730D31D28}"/>
               </a:ext>
             </a:extLst>
           </p:cNvPr>
@@ -4310,7 +6303,7 @@
           <p:cNvPr id="15" name="CuadroTexto 14">
             <a:extLst>
               <a:ext uri="{FF2B5EF4-FFF2-40B4-BE49-F238E27FC236}">
-                <a16:creationId xmlns:a16="http://schemas.microsoft.com/office/drawing/2014/main" id="{9ABED569-C0E5-4D0F-6C8C-7D13D8419892}"/>
+                <a16:creationId xmlns:a16="http://schemas.microsoft.com/office/drawing/2014/main" id="{776C84D0-CEBB-8425-DB63-AA765A824A65}"/>
               </a:ext>
             </a:extLst>
           </p:cNvPr>
@@ -4350,7 +6343,7 @@
           <p:cNvPr id="16" name="CuadroTexto 15">
             <a:extLst>
               <a:ext uri="{FF2B5EF4-FFF2-40B4-BE49-F238E27FC236}">
-                <a16:creationId xmlns:a16="http://schemas.microsoft.com/office/drawing/2014/main" id="{F6F4A994-C60B-6D2B-0E76-769FF49CFE3D}"/>
+                <a16:creationId xmlns:a16="http://schemas.microsoft.com/office/drawing/2014/main" id="{F191F303-0C48-28BC-676A-E251F0C85EBA}"/>
               </a:ext>
             </a:extLst>
           </p:cNvPr>
@@ -4390,7 +6383,7 @@
           <p:cNvPr id="17" name="Rectángulo: esquinas redondeadas 16">
             <a:extLst>
               <a:ext uri="{FF2B5EF4-FFF2-40B4-BE49-F238E27FC236}">
-                <a16:creationId xmlns:a16="http://schemas.microsoft.com/office/drawing/2014/main" id="{A3D26979-58BF-5A44-A620-D64E00B337E7}"/>
+                <a16:creationId xmlns:a16="http://schemas.microsoft.com/office/drawing/2014/main" id="{E188D10C-33DB-C963-6F15-047D201A5AB9}"/>
               </a:ext>
             </a:extLst>
           </p:cNvPr>
@@ -4444,7 +6437,7 @@
           <p:cNvPr id="18" name="CuadroTexto 17">
             <a:extLst>
               <a:ext uri="{FF2B5EF4-FFF2-40B4-BE49-F238E27FC236}">
-                <a16:creationId xmlns:a16="http://schemas.microsoft.com/office/drawing/2014/main" id="{7F1D49D1-E5E0-BD98-D4F3-A13793C5CD0F}"/>
+                <a16:creationId xmlns:a16="http://schemas.microsoft.com/office/drawing/2014/main" id="{C34F4450-C056-32CD-A664-65E78CED7353}"/>
               </a:ext>
             </a:extLst>
           </p:cNvPr>
@@ -4484,7 +6477,7 @@
           <p:cNvPr id="19" name="CuadroTexto 18">
             <a:extLst>
               <a:ext uri="{FF2B5EF4-FFF2-40B4-BE49-F238E27FC236}">
-                <a16:creationId xmlns:a16="http://schemas.microsoft.com/office/drawing/2014/main" id="{077457B9-C6DC-795E-656F-39386501D72D}"/>
+                <a16:creationId xmlns:a16="http://schemas.microsoft.com/office/drawing/2014/main" id="{B8B24DCF-59ED-9782-CA09-3B97DFBA900A}"/>
               </a:ext>
             </a:extLst>
           </p:cNvPr>
@@ -4522,7 +6515,7 @@
     </p:spTree>
     <p:extLst>
       <p:ext uri="{BB962C8B-B14F-4D97-AF65-F5344CB8AC3E}">
-        <p14:creationId xmlns:p14="http://schemas.microsoft.com/office/powerpoint/2010/main" val="2538126929"/>
+        <p14:creationId xmlns:p14="http://schemas.microsoft.com/office/powerpoint/2010/main" val="1232113993"/>
       </p:ext>
     </p:extLst>
   </p:cSld>
@@ -4562,7 +6555,7 @@
           <p:cNvPr id="2" name="CuadroTexto 1">
             <a:extLst>
               <a:ext uri="{FF2B5EF4-FFF2-40B4-BE49-F238E27FC236}">
-                <a16:creationId xmlns:a16="http://schemas.microsoft.com/office/drawing/2014/main" id="{ED56A351-B102-5B4D-A383-DF5B3A3BE314}"/>
+                <a16:creationId xmlns:a16="http://schemas.microsoft.com/office/drawing/2014/main" id="{9E1A3761-3C38-01FD-7D8A-7899D82B08BA}"/>
               </a:ext>
             </a:extLst>
           </p:cNvPr>
@@ -4602,7 +6595,7 @@
           <p:cNvPr id="3" name="CuadroTexto 2">
             <a:extLst>
               <a:ext uri="{FF2B5EF4-FFF2-40B4-BE49-F238E27FC236}">
-                <a16:creationId xmlns:a16="http://schemas.microsoft.com/office/drawing/2014/main" id="{2670CB2E-8F4D-116B-70E6-9C0C066832CC}"/>
+                <a16:creationId xmlns:a16="http://schemas.microsoft.com/office/drawing/2014/main" id="{BDC9ACB0-2170-49BE-379A-EF5E5C213482}"/>
               </a:ext>
             </a:extLst>
           </p:cNvPr>
@@ -4642,7 +6635,7 @@
           <p:cNvPr id="4" name="CuadroTexto 3">
             <a:extLst>
               <a:ext uri="{FF2B5EF4-FFF2-40B4-BE49-F238E27FC236}">
-                <a16:creationId xmlns:a16="http://schemas.microsoft.com/office/drawing/2014/main" id="{DA09D5B3-3B80-63BC-4B3F-B6122F33107A}"/>
+                <a16:creationId xmlns:a16="http://schemas.microsoft.com/office/drawing/2014/main" id="{B8B96D5D-957D-7204-2C56-8263917FD18C}"/>
               </a:ext>
             </a:extLst>
           </p:cNvPr>
@@ -4682,7 +6675,7 @@
           <p:cNvPr id="5" name="Rectángulo: esquinas redondeadas 4">
             <a:extLst>
               <a:ext uri="{FF2B5EF4-FFF2-40B4-BE49-F238E27FC236}">
-                <a16:creationId xmlns:a16="http://schemas.microsoft.com/office/drawing/2014/main" id="{B9A138B7-E719-8DCA-92B9-94B3380E794E}"/>
+                <a16:creationId xmlns:a16="http://schemas.microsoft.com/office/drawing/2014/main" id="{2AA17CA2-6781-D5F1-35C7-DD5A52D7B79E}"/>
               </a:ext>
             </a:extLst>
           </p:cNvPr>
@@ -4736,7 +6729,7 @@
           <p:cNvPr id="6" name="CuadroTexto 5">
             <a:extLst>
               <a:ext uri="{FF2B5EF4-FFF2-40B4-BE49-F238E27FC236}">
-                <a16:creationId xmlns:a16="http://schemas.microsoft.com/office/drawing/2014/main" id="{C73C2268-81FE-ECC0-1CD2-3D72441CFA0C}"/>
+                <a16:creationId xmlns:a16="http://schemas.microsoft.com/office/drawing/2014/main" id="{B21F60FB-C8C7-4210-272E-FFC4AC4A0C79}"/>
               </a:ext>
             </a:extLst>
           </p:cNvPr>
@@ -4776,7 +6769,7 @@
           <p:cNvPr id="7" name="CuadroTexto 6">
             <a:extLst>
               <a:ext uri="{FF2B5EF4-FFF2-40B4-BE49-F238E27FC236}">
-                <a16:creationId xmlns:a16="http://schemas.microsoft.com/office/drawing/2014/main" id="{1B5BEF91-F8FF-29D3-58C9-47B8B3BA4396}"/>
+                <a16:creationId xmlns:a16="http://schemas.microsoft.com/office/drawing/2014/main" id="{C0D6E2D5-7AC8-CB3C-B324-7059CC36FEBC}"/>
               </a:ext>
             </a:extLst>
           </p:cNvPr>
@@ -4816,7 +6809,7 @@
           <p:cNvPr id="8" name="Rectángulo: esquinas redondeadas 7">
             <a:extLst>
               <a:ext uri="{FF2B5EF4-FFF2-40B4-BE49-F238E27FC236}">
-                <a16:creationId xmlns:a16="http://schemas.microsoft.com/office/drawing/2014/main" id="{8EAE63BD-8508-6082-B985-68EAC8D05A58}"/>
+                <a16:creationId xmlns:a16="http://schemas.microsoft.com/office/drawing/2014/main" id="{0DE1B554-2060-321E-4EC0-FD59CCD4BE3F}"/>
               </a:ext>
             </a:extLst>
           </p:cNvPr>
@@ -4870,7 +6863,7 @@
           <p:cNvPr id="9" name="CuadroTexto 8">
             <a:extLst>
               <a:ext uri="{FF2B5EF4-FFF2-40B4-BE49-F238E27FC236}">
-                <a16:creationId xmlns:a16="http://schemas.microsoft.com/office/drawing/2014/main" id="{46321B82-B264-8C2A-D8F2-A08B52343144}"/>
+                <a16:creationId xmlns:a16="http://schemas.microsoft.com/office/drawing/2014/main" id="{B924C4EE-7EC0-21A8-EFDE-150F41FD9BF5}"/>
               </a:ext>
             </a:extLst>
           </p:cNvPr>
@@ -4910,7 +6903,7 @@
           <p:cNvPr id="10" name="CuadroTexto 9">
             <a:extLst>
               <a:ext uri="{FF2B5EF4-FFF2-40B4-BE49-F238E27FC236}">
-                <a16:creationId xmlns:a16="http://schemas.microsoft.com/office/drawing/2014/main" id="{EE33E112-80E5-1685-3057-8E9849F6AE39}"/>
+                <a16:creationId xmlns:a16="http://schemas.microsoft.com/office/drawing/2014/main" id="{D1C3839D-043C-95BD-F0D3-174033DADB3D}"/>
               </a:ext>
             </a:extLst>
           </p:cNvPr>
@@ -4950,7 +6943,7 @@
           <p:cNvPr id="11" name="Rectángulo: esquinas redondeadas 10">
             <a:extLst>
               <a:ext uri="{FF2B5EF4-FFF2-40B4-BE49-F238E27FC236}">
-                <a16:creationId xmlns:a16="http://schemas.microsoft.com/office/drawing/2014/main" id="{86354808-F438-E51D-16DB-F3443E3F9CC2}"/>
+                <a16:creationId xmlns:a16="http://schemas.microsoft.com/office/drawing/2014/main" id="{643C719D-35FE-63BF-AEBF-E0FE896A038E}"/>
               </a:ext>
             </a:extLst>
           </p:cNvPr>
@@ -5004,7 +6997,7 @@
           <p:cNvPr id="12" name="CuadroTexto 11">
             <a:extLst>
               <a:ext uri="{FF2B5EF4-FFF2-40B4-BE49-F238E27FC236}">
-                <a16:creationId xmlns:a16="http://schemas.microsoft.com/office/drawing/2014/main" id="{2DA8EC25-2F26-8D15-BFF5-E4F4A9A6EFA8}"/>
+                <a16:creationId xmlns:a16="http://schemas.microsoft.com/office/drawing/2014/main" id="{44334413-4CB5-56D5-1D4B-67764B20E29B}"/>
               </a:ext>
             </a:extLst>
           </p:cNvPr>
@@ -5044,7 +7037,7 @@
           <p:cNvPr id="13" name="CuadroTexto 12">
             <a:extLst>
               <a:ext uri="{FF2B5EF4-FFF2-40B4-BE49-F238E27FC236}">
-                <a16:creationId xmlns:a16="http://schemas.microsoft.com/office/drawing/2014/main" id="{497DB956-BC8F-D0E3-9192-F75F3E0E3313}"/>
+                <a16:creationId xmlns:a16="http://schemas.microsoft.com/office/drawing/2014/main" id="{C075B5C6-3754-F06E-BFF2-2BF48024C585}"/>
               </a:ext>
             </a:extLst>
           </p:cNvPr>
@@ -5074,7 +7067,7 @@
                 </a:solidFill>
                 <a:latin typeface="Consolas" panose="020B0609020204030204" pitchFamily="49" charset="0"/>
               </a:rPr>
-              <a:t>https://agora.34.175.225.98...</a:t>
+              <a:t>https://agora.34.175.157.37...</a:t>
             </a:r>
           </a:p>
         </p:txBody>
@@ -5084,7 +7077,7 @@
           <p:cNvPr id="14" name="CuadroTexto 13">
             <a:extLst>
               <a:ext uri="{FF2B5EF4-FFF2-40B4-BE49-F238E27FC236}">
-                <a16:creationId xmlns:a16="http://schemas.microsoft.com/office/drawing/2014/main" id="{C6400640-A15C-E362-2288-AB11C8BE892E}"/>
+                <a16:creationId xmlns:a16="http://schemas.microsoft.com/office/drawing/2014/main" id="{90E48D3D-6283-79C7-86CD-E6722A5DFB37}"/>
               </a:ext>
             </a:extLst>
           </p:cNvPr>
@@ -5165,7 +7158,7 @@
     </p:spTree>
     <p:extLst>
       <p:ext uri="{BB962C8B-B14F-4D97-AF65-F5344CB8AC3E}">
-        <p14:creationId xmlns:p14="http://schemas.microsoft.com/office/powerpoint/2010/main" val="1063861715"/>
+        <p14:creationId xmlns:p14="http://schemas.microsoft.com/office/powerpoint/2010/main" val="1692312577"/>
       </p:ext>
     </p:extLst>
   </p:cSld>
@@ -5205,7 +7198,7 @@
           <p:cNvPr id="2" name="CuadroTexto 1">
             <a:extLst>
               <a:ext uri="{FF2B5EF4-FFF2-40B4-BE49-F238E27FC236}">
-                <a16:creationId xmlns:a16="http://schemas.microsoft.com/office/drawing/2014/main" id="{6D623C66-C0E9-666B-50D8-442B52D110A7}"/>
+                <a16:creationId xmlns:a16="http://schemas.microsoft.com/office/drawing/2014/main" id="{B7025544-C60C-2F23-89EB-5F91FA41DF9E}"/>
               </a:ext>
             </a:extLst>
           </p:cNvPr>
@@ -5245,7 +7238,7 @@
           <p:cNvPr id="3" name="CuadroTexto 2">
             <a:extLst>
               <a:ext uri="{FF2B5EF4-FFF2-40B4-BE49-F238E27FC236}">
-                <a16:creationId xmlns:a16="http://schemas.microsoft.com/office/drawing/2014/main" id="{BBC33574-FB23-71CA-1C15-1CCFBBA71A49}"/>
+                <a16:creationId xmlns:a16="http://schemas.microsoft.com/office/drawing/2014/main" id="{4D9C9F81-FA04-08FC-4094-7EF7691B4FCE}"/>
               </a:ext>
             </a:extLst>
           </p:cNvPr>
@@ -5285,7 +7278,7 @@
           <p:cNvPr id="4" name="CuadroTexto 3">
             <a:extLst>
               <a:ext uri="{FF2B5EF4-FFF2-40B4-BE49-F238E27FC236}">
-                <a16:creationId xmlns:a16="http://schemas.microsoft.com/office/drawing/2014/main" id="{E9408B09-9C32-C084-73F5-F57BA107CFBE}"/>
+                <a16:creationId xmlns:a16="http://schemas.microsoft.com/office/drawing/2014/main" id="{AAEFC986-6B2C-CCA1-5495-FF37D8F9FF48}"/>
               </a:ext>
             </a:extLst>
           </p:cNvPr>
@@ -5325,7 +7318,7 @@
           <p:cNvPr id="6" name="Imagen 5">
             <a:extLst>
               <a:ext uri="{FF2B5EF4-FFF2-40B4-BE49-F238E27FC236}">
-                <a16:creationId xmlns:a16="http://schemas.microsoft.com/office/drawing/2014/main" id="{E85465EB-29AE-3F4E-1B81-FAEE66B1A9AF}"/>
+                <a16:creationId xmlns:a16="http://schemas.microsoft.com/office/drawing/2014/main" id="{9D1829EB-7246-9B78-137D-13E516B0BB5E}"/>
               </a:ext>
             </a:extLst>
           </p:cNvPr>
@@ -5335,7 +7328,7 @@
           <p:nvPr/>
         </p:nvPicPr>
         <p:blipFill>
-          <a:blip r:embed="rId2">
+          <a:blip r:embed="rId3">
             <a:extLst>
               <a:ext uri="{28A0092B-C50C-407E-A947-70E740481C1C}">
                 <a14:useLocalDpi xmlns:a14="http://schemas.microsoft.com/office/drawing/2010/main" val="0"/>
@@ -5366,7 +7359,7 @@
           <p:cNvPr id="7" name="Rectángulo: esquinas redondeadas 6">
             <a:extLst>
               <a:ext uri="{FF2B5EF4-FFF2-40B4-BE49-F238E27FC236}">
-                <a16:creationId xmlns:a16="http://schemas.microsoft.com/office/drawing/2014/main" id="{93990720-3781-3A0B-5DD4-D4484618757A}"/>
+                <a16:creationId xmlns:a16="http://schemas.microsoft.com/office/drawing/2014/main" id="{FBD9C71F-ACCF-AD8D-5A07-DF2580D5B440}"/>
               </a:ext>
             </a:extLst>
           </p:cNvPr>
@@ -5375,8 +7368,8 @@
         </p:nvSpPr>
         <p:spPr>
           <a:xfrm>
-            <a:off x="7874000" y="2082800"/>
-            <a:ext cx="3175000" cy="1066800"/>
+            <a:off x="7797800" y="1791732"/>
+            <a:ext cx="3175000" cy="1377434"/>
           </a:xfrm>
           <a:prstGeom prst="roundRect">
             <a:avLst/>
@@ -5420,7 +7413,7 @@
           <p:cNvPr id="8" name="CuadroTexto 7">
             <a:extLst>
               <a:ext uri="{FF2B5EF4-FFF2-40B4-BE49-F238E27FC236}">
-                <a16:creationId xmlns:a16="http://schemas.microsoft.com/office/drawing/2014/main" id="{93A56DA7-46A1-5FDC-D08B-6288091DAF95}"/>
+                <a16:creationId xmlns:a16="http://schemas.microsoft.com/office/drawing/2014/main" id="{076C8171-2494-55BB-A376-09E643B06DDB}"/>
               </a:ext>
             </a:extLst>
           </p:cNvPr>
@@ -5429,7 +7422,7 @@
         </p:nvSpPr>
         <p:spPr>
           <a:xfrm>
-            <a:off x="8255000" y="2336800"/>
+            <a:off x="8267700" y="2111117"/>
             <a:ext cx="2413000" cy="369332"/>
           </a:xfrm>
           <a:prstGeom prst="rect">
@@ -5444,14 +7437,38 @@
           <a:lstStyle/>
           <a:p>
             <a:r>
-              <a:rPr lang="es-ES" sz="2000" b="1">
+              <a:rPr lang="es-ES" sz="2000" b="1" dirty="0" err="1">
                 <a:solidFill>
                   <a:srgbClr val="DBA14D"/>
                 </a:solidFill>
                 <a:latin typeface="Segoe UI" panose="020B0502040204020203" pitchFamily="34" charset="0"/>
               </a:rPr>
-              <a:t>Actualizacion automatica</a:t>
-            </a:r>
+              <a:t>Actualizacion</a:t>
+            </a:r>
+            <a:r>
+              <a:rPr lang="es-ES" sz="2000" b="1" dirty="0">
+                <a:solidFill>
+                  <a:srgbClr val="DBA14D"/>
+                </a:solidFill>
+                <a:latin typeface="Segoe UI" panose="020B0502040204020203" pitchFamily="34" charset="0"/>
+              </a:rPr>
+              <a:t> </a:t>
+            </a:r>
+            <a:r>
+              <a:rPr lang="es-ES" sz="2000" b="1" dirty="0" err="1">
+                <a:solidFill>
+                  <a:srgbClr val="DBA14D"/>
+                </a:solidFill>
+                <a:latin typeface="Segoe UI" panose="020B0502040204020203" pitchFamily="34" charset="0"/>
+              </a:rPr>
+              <a:t>automatica</a:t>
+            </a:r>
+            <a:endParaRPr lang="es-ES" sz="2000" b="1" dirty="0">
+              <a:solidFill>
+                <a:srgbClr val="DBA14D"/>
+              </a:solidFill>
+              <a:latin typeface="Segoe UI" panose="020B0502040204020203" pitchFamily="34" charset="0"/>
+            </a:endParaRPr>
           </a:p>
         </p:txBody>
       </p:sp>
@@ -5460,7 +7477,7 @@
           <p:cNvPr id="9" name="CuadroTexto 8">
             <a:extLst>
               <a:ext uri="{FF2B5EF4-FFF2-40B4-BE49-F238E27FC236}">
-                <a16:creationId xmlns:a16="http://schemas.microsoft.com/office/drawing/2014/main" id="{516CAFB8-7061-34F1-301D-7073284FC6E5}"/>
+                <a16:creationId xmlns:a16="http://schemas.microsoft.com/office/drawing/2014/main" id="{26AD6E69-10B3-4CA1-5130-7A0650A04B04}"/>
               </a:ext>
             </a:extLst>
           </p:cNvPr>
@@ -5500,7 +7517,7 @@
           <p:cNvPr id="10" name="CuadroTexto 9">
             <a:extLst>
               <a:ext uri="{FF2B5EF4-FFF2-40B4-BE49-F238E27FC236}">
-                <a16:creationId xmlns:a16="http://schemas.microsoft.com/office/drawing/2014/main" id="{4D5C3C5A-4CC8-1D18-F06A-F06368F95D48}"/>
+                <a16:creationId xmlns:a16="http://schemas.microsoft.com/office/drawing/2014/main" id="{BB1BF4B8-A0B3-5F8C-AE82-52F9F816C3DD}"/>
               </a:ext>
             </a:extLst>
           </p:cNvPr>
@@ -5599,7 +7616,7 @@
     </p:spTree>
     <p:extLst>
       <p:ext uri="{BB962C8B-B14F-4D97-AF65-F5344CB8AC3E}">
-        <p14:creationId xmlns:p14="http://schemas.microsoft.com/office/powerpoint/2010/main" val="2173236996"/>
+        <p14:creationId xmlns:p14="http://schemas.microsoft.com/office/powerpoint/2010/main" val="2912075940"/>
       </p:ext>
     </p:extLst>
   </p:cSld>
@@ -5639,7 +7656,7 @@
           <p:cNvPr id="2" name="CuadroTexto 1">
             <a:extLst>
               <a:ext uri="{FF2B5EF4-FFF2-40B4-BE49-F238E27FC236}">
-                <a16:creationId xmlns:a16="http://schemas.microsoft.com/office/drawing/2014/main" id="{87C5D778-627A-D8B9-892C-8DFBFA624FD6}"/>
+                <a16:creationId xmlns:a16="http://schemas.microsoft.com/office/drawing/2014/main" id="{84B709F9-225E-BD7C-0224-058D39EF083C}"/>
               </a:ext>
             </a:extLst>
           </p:cNvPr>
@@ -5679,7 +7696,7 @@
           <p:cNvPr id="3" name="CuadroTexto 2">
             <a:extLst>
               <a:ext uri="{FF2B5EF4-FFF2-40B4-BE49-F238E27FC236}">
-                <a16:creationId xmlns:a16="http://schemas.microsoft.com/office/drawing/2014/main" id="{12B2DDDF-55B9-C610-2C1A-020B9355F37C}"/>
+                <a16:creationId xmlns:a16="http://schemas.microsoft.com/office/drawing/2014/main" id="{35D83A18-F373-B82E-FDB7-6D28C71EF3E1}"/>
               </a:ext>
             </a:extLst>
           </p:cNvPr>
@@ -5719,7 +7736,7 @@
           <p:cNvPr id="4" name="CuadroTexto 3">
             <a:extLst>
               <a:ext uri="{FF2B5EF4-FFF2-40B4-BE49-F238E27FC236}">
-                <a16:creationId xmlns:a16="http://schemas.microsoft.com/office/drawing/2014/main" id="{893AB31E-287D-BAAD-3B3E-B5CA52B0C2E7}"/>
+                <a16:creationId xmlns:a16="http://schemas.microsoft.com/office/drawing/2014/main" id="{AD3C4405-E1E3-45B1-1995-2CCC0F469715}"/>
               </a:ext>
             </a:extLst>
           </p:cNvPr>
@@ -5759,7 +7776,7 @@
           <p:cNvPr id="6" name="Imagen 5">
             <a:extLst>
               <a:ext uri="{FF2B5EF4-FFF2-40B4-BE49-F238E27FC236}">
-                <a16:creationId xmlns:a16="http://schemas.microsoft.com/office/drawing/2014/main" id="{03016FCD-FE2A-326C-FC97-3A0EACDFF44A}"/>
+                <a16:creationId xmlns:a16="http://schemas.microsoft.com/office/drawing/2014/main" id="{AFEBCC9B-2A32-24AF-3F8F-5AB684FF0121}"/>
               </a:ext>
             </a:extLst>
           </p:cNvPr>
@@ -5769,7 +7786,7 @@
           <p:nvPr/>
         </p:nvPicPr>
         <p:blipFill>
-          <a:blip r:embed="rId2">
+          <a:blip r:embed="rId3">
             <a:extLst>
               <a:ext uri="{28A0092B-C50C-407E-A947-70E740481C1C}">
                 <a14:useLocalDpi xmlns:a14="http://schemas.microsoft.com/office/drawing/2010/main" val="0"/>
@@ -5800,7 +7817,7 @@
           <p:cNvPr id="7" name="CuadroTexto 6">
             <a:extLst>
               <a:ext uri="{FF2B5EF4-FFF2-40B4-BE49-F238E27FC236}">
-                <a16:creationId xmlns:a16="http://schemas.microsoft.com/office/drawing/2014/main" id="{4F1DCC39-6B41-A880-5AC8-72DCCD341F18}"/>
+                <a16:creationId xmlns:a16="http://schemas.microsoft.com/office/drawing/2014/main" id="{E48EA2E0-E88A-4C06-0F10-5EFCA54BFB98}"/>
               </a:ext>
             </a:extLst>
           </p:cNvPr>
@@ -5917,7 +7934,7 @@
     </p:spTree>
     <p:extLst>
       <p:ext uri="{BB962C8B-B14F-4D97-AF65-F5344CB8AC3E}">
-        <p14:creationId xmlns:p14="http://schemas.microsoft.com/office/powerpoint/2010/main" val="2461408223"/>
+        <p14:creationId xmlns:p14="http://schemas.microsoft.com/office/powerpoint/2010/main" val="117999670"/>
       </p:ext>
     </p:extLst>
   </p:cSld>
@@ -5957,7 +7974,7 @@
           <p:cNvPr id="2" name="CuadroTexto 1">
             <a:extLst>
               <a:ext uri="{FF2B5EF4-FFF2-40B4-BE49-F238E27FC236}">
-                <a16:creationId xmlns:a16="http://schemas.microsoft.com/office/drawing/2014/main" id="{F4BD1C07-8C73-AB07-9157-7A2D8EFA4454}"/>
+                <a16:creationId xmlns:a16="http://schemas.microsoft.com/office/drawing/2014/main" id="{C293FC0E-802A-7C2F-9353-71E3D2C27465}"/>
               </a:ext>
             </a:extLst>
           </p:cNvPr>
@@ -5997,7 +8014,7 @@
           <p:cNvPr id="3" name="CuadroTexto 2">
             <a:extLst>
               <a:ext uri="{FF2B5EF4-FFF2-40B4-BE49-F238E27FC236}">
-                <a16:creationId xmlns:a16="http://schemas.microsoft.com/office/drawing/2014/main" id="{ED8E57D1-EF7C-A55C-27DE-BA86920BBC9D}"/>
+                <a16:creationId xmlns:a16="http://schemas.microsoft.com/office/drawing/2014/main" id="{112E3C5C-3B76-0C91-F4F2-10ACB1AF06BE}"/>
               </a:ext>
             </a:extLst>
           </p:cNvPr>
@@ -6037,7 +8054,7 @@
           <p:cNvPr id="4" name="Rectángulo: esquinas redondeadas 3">
             <a:extLst>
               <a:ext uri="{FF2B5EF4-FFF2-40B4-BE49-F238E27FC236}">
-                <a16:creationId xmlns:a16="http://schemas.microsoft.com/office/drawing/2014/main" id="{1E81567F-652B-E7B7-49A1-134799F305FB}"/>
+                <a16:creationId xmlns:a16="http://schemas.microsoft.com/office/drawing/2014/main" id="{66CCD783-283B-E5FD-F4A3-88C80857FA3D}"/>
               </a:ext>
             </a:extLst>
           </p:cNvPr>
@@ -6091,7 +8108,7 @@
           <p:cNvPr id="5" name="CuadroTexto 4">
             <a:extLst>
               <a:ext uri="{FF2B5EF4-FFF2-40B4-BE49-F238E27FC236}">
-                <a16:creationId xmlns:a16="http://schemas.microsoft.com/office/drawing/2014/main" id="{AAFB9C16-2D81-E590-1201-165E4CE84F1C}"/>
+                <a16:creationId xmlns:a16="http://schemas.microsoft.com/office/drawing/2014/main" id="{3CA2FB76-1EDD-2A56-CE57-8E3AC4FF1904}"/>
               </a:ext>
             </a:extLst>
           </p:cNvPr>
@@ -6131,7 +8148,7 @@
           <p:cNvPr id="6" name="CuadroTexto 5">
             <a:extLst>
               <a:ext uri="{FF2B5EF4-FFF2-40B4-BE49-F238E27FC236}">
-                <a16:creationId xmlns:a16="http://schemas.microsoft.com/office/drawing/2014/main" id="{9E397237-C856-4F07-38B3-5FB0FC870DBB}"/>
+                <a16:creationId xmlns:a16="http://schemas.microsoft.com/office/drawing/2014/main" id="{CB65E45E-D7D1-96CE-6EF8-D5B4E046DABC}"/>
               </a:ext>
             </a:extLst>
           </p:cNvPr>
@@ -6171,7 +8188,7 @@
           <p:cNvPr id="7" name="Rectángulo: esquinas redondeadas 6">
             <a:extLst>
               <a:ext uri="{FF2B5EF4-FFF2-40B4-BE49-F238E27FC236}">
-                <a16:creationId xmlns:a16="http://schemas.microsoft.com/office/drawing/2014/main" id="{C4747D4A-D7DD-2CA4-78D6-AE25B89E4E73}"/>
+                <a16:creationId xmlns:a16="http://schemas.microsoft.com/office/drawing/2014/main" id="{799C35CF-800D-7141-12DC-EDC1A8ACF08C}"/>
               </a:ext>
             </a:extLst>
           </p:cNvPr>
@@ -6225,7 +8242,7 @@
           <p:cNvPr id="8" name="CuadroTexto 7">
             <a:extLst>
               <a:ext uri="{FF2B5EF4-FFF2-40B4-BE49-F238E27FC236}">
-                <a16:creationId xmlns:a16="http://schemas.microsoft.com/office/drawing/2014/main" id="{DBCE25F4-AEAB-CF41-3D84-F7E7B827F90B}"/>
+                <a16:creationId xmlns:a16="http://schemas.microsoft.com/office/drawing/2014/main" id="{03A53ED0-370B-E8D5-5B91-100AEB5E0E1E}"/>
               </a:ext>
             </a:extLst>
           </p:cNvPr>
@@ -6265,7 +8282,7 @@
           <p:cNvPr id="9" name="CuadroTexto 8">
             <a:extLst>
               <a:ext uri="{FF2B5EF4-FFF2-40B4-BE49-F238E27FC236}">
-                <a16:creationId xmlns:a16="http://schemas.microsoft.com/office/drawing/2014/main" id="{CAD091DD-616F-4188-68EB-E6F9119A474F}"/>
+                <a16:creationId xmlns:a16="http://schemas.microsoft.com/office/drawing/2014/main" id="{34DF4E7D-2F47-1BB4-9DD1-53BD5F3369EA}"/>
               </a:ext>
             </a:extLst>
           </p:cNvPr>
@@ -6305,7 +8322,7 @@
           <p:cNvPr id="10" name="Rectángulo: esquinas redondeadas 9">
             <a:extLst>
               <a:ext uri="{FF2B5EF4-FFF2-40B4-BE49-F238E27FC236}">
-                <a16:creationId xmlns:a16="http://schemas.microsoft.com/office/drawing/2014/main" id="{71D529E0-8D97-5540-06D0-68D0B8AEC98E}"/>
+                <a16:creationId xmlns:a16="http://schemas.microsoft.com/office/drawing/2014/main" id="{CFB51F28-45F1-FA10-DFE2-6B5EDFB8CDEA}"/>
               </a:ext>
             </a:extLst>
           </p:cNvPr>
@@ -6359,7 +8376,7 @@
           <p:cNvPr id="11" name="CuadroTexto 10">
             <a:extLst>
               <a:ext uri="{FF2B5EF4-FFF2-40B4-BE49-F238E27FC236}">
-                <a16:creationId xmlns:a16="http://schemas.microsoft.com/office/drawing/2014/main" id="{1C7A4AAA-6097-E20D-18C0-6E9188E09D05}"/>
+                <a16:creationId xmlns:a16="http://schemas.microsoft.com/office/drawing/2014/main" id="{BCFD5F15-2FB9-0920-0441-E53CD56A58D2}"/>
               </a:ext>
             </a:extLst>
           </p:cNvPr>
@@ -6399,7 +8416,7 @@
           <p:cNvPr id="12" name="CuadroTexto 11">
             <a:extLst>
               <a:ext uri="{FF2B5EF4-FFF2-40B4-BE49-F238E27FC236}">
-                <a16:creationId xmlns:a16="http://schemas.microsoft.com/office/drawing/2014/main" id="{BEA72C8C-0F35-635A-7DD0-181D55129E10}"/>
+                <a16:creationId xmlns:a16="http://schemas.microsoft.com/office/drawing/2014/main" id="{A619453C-5783-D9CA-FBE3-71099FF833CC}"/>
               </a:ext>
             </a:extLst>
           </p:cNvPr>
@@ -6439,7 +8456,7 @@
           <p:cNvPr id="13" name="Rectángulo: esquinas redondeadas 12">
             <a:extLst>
               <a:ext uri="{FF2B5EF4-FFF2-40B4-BE49-F238E27FC236}">
-                <a16:creationId xmlns:a16="http://schemas.microsoft.com/office/drawing/2014/main" id="{AC9ECC78-A1F7-DB6B-75B4-77893B9809B0}"/>
+                <a16:creationId xmlns:a16="http://schemas.microsoft.com/office/drawing/2014/main" id="{EA7BA1E9-C9ED-19F8-65B5-FE16CA2ECCE5}"/>
               </a:ext>
             </a:extLst>
           </p:cNvPr>
@@ -6493,7 +8510,7 @@
           <p:cNvPr id="14" name="CuadroTexto 13">
             <a:extLst>
               <a:ext uri="{FF2B5EF4-FFF2-40B4-BE49-F238E27FC236}">
-                <a16:creationId xmlns:a16="http://schemas.microsoft.com/office/drawing/2014/main" id="{4EF187AC-EEB4-9CA4-8962-5AC17B04124B}"/>
+                <a16:creationId xmlns:a16="http://schemas.microsoft.com/office/drawing/2014/main" id="{436A29E5-19B6-48F8-4110-F798130C907D}"/>
               </a:ext>
             </a:extLst>
           </p:cNvPr>
@@ -6533,7 +8550,7 @@
           <p:cNvPr id="15" name="CuadroTexto 14">
             <a:extLst>
               <a:ext uri="{FF2B5EF4-FFF2-40B4-BE49-F238E27FC236}">
-                <a16:creationId xmlns:a16="http://schemas.microsoft.com/office/drawing/2014/main" id="{AFE852A5-48FC-E608-FF72-E6404035F562}"/>
+                <a16:creationId xmlns:a16="http://schemas.microsoft.com/office/drawing/2014/main" id="{B0042DE6-7A87-73F5-F57E-4AC6AD94B6BE}"/>
               </a:ext>
             </a:extLst>
           </p:cNvPr>
@@ -6573,7 +8590,7 @@
           <p:cNvPr id="16" name="CuadroTexto 15">
             <a:extLst>
               <a:ext uri="{FF2B5EF4-FFF2-40B4-BE49-F238E27FC236}">
-                <a16:creationId xmlns:a16="http://schemas.microsoft.com/office/drawing/2014/main" id="{D947EBFC-CF22-FF91-7F7D-DB44FCE2865A}"/>
+                <a16:creationId xmlns:a16="http://schemas.microsoft.com/office/drawing/2014/main" id="{6E6DC4BA-52C6-E83E-54F5-E575949D4466}"/>
               </a:ext>
             </a:extLst>
           </p:cNvPr>
@@ -6656,7 +8673,7 @@
           <p:cNvPr id="17" name="CuadroTexto 16">
             <a:extLst>
               <a:ext uri="{FF2B5EF4-FFF2-40B4-BE49-F238E27FC236}">
-                <a16:creationId xmlns:a16="http://schemas.microsoft.com/office/drawing/2014/main" id="{DE59D7CF-5EEE-653A-1B3E-7080BF304F1F}"/>
+                <a16:creationId xmlns:a16="http://schemas.microsoft.com/office/drawing/2014/main" id="{E0E97B8E-CE19-0D37-850C-7828642E967B}"/>
               </a:ext>
             </a:extLst>
           </p:cNvPr>
@@ -6694,7 +8711,7 @@
     </p:spTree>
     <p:extLst>
       <p:ext uri="{BB962C8B-B14F-4D97-AF65-F5344CB8AC3E}">
-        <p14:creationId xmlns:p14="http://schemas.microsoft.com/office/powerpoint/2010/main" val="1400719236"/>
+        <p14:creationId xmlns:p14="http://schemas.microsoft.com/office/powerpoint/2010/main" val="262233947"/>
       </p:ext>
     </p:extLst>
   </p:cSld>
@@ -6734,7 +8751,7 @@
           <p:cNvPr id="2" name="CuadroTexto 1">
             <a:extLst>
               <a:ext uri="{FF2B5EF4-FFF2-40B4-BE49-F238E27FC236}">
-                <a16:creationId xmlns:a16="http://schemas.microsoft.com/office/drawing/2014/main" id="{ABF17A67-0B0E-EA25-5589-0A492FFA42E2}"/>
+                <a16:creationId xmlns:a16="http://schemas.microsoft.com/office/drawing/2014/main" id="{33FCCB0C-E81C-73DE-F524-2CFAA75A8D97}"/>
               </a:ext>
             </a:extLst>
           </p:cNvPr>
@@ -6774,7 +8791,7 @@
           <p:cNvPr id="3" name="CuadroTexto 2">
             <a:extLst>
               <a:ext uri="{FF2B5EF4-FFF2-40B4-BE49-F238E27FC236}">
-                <a16:creationId xmlns:a16="http://schemas.microsoft.com/office/drawing/2014/main" id="{0A274C95-0C30-99B3-F176-753278630DD8}"/>
+                <a16:creationId xmlns:a16="http://schemas.microsoft.com/office/drawing/2014/main" id="{99E2FD32-9BB4-B5F1-03F1-1CEF2CA09CCE}"/>
               </a:ext>
             </a:extLst>
           </p:cNvPr>
@@ -6814,7 +8831,7 @@
           <p:cNvPr id="4" name="CuadroTexto 3">
             <a:extLst>
               <a:ext uri="{FF2B5EF4-FFF2-40B4-BE49-F238E27FC236}">
-                <a16:creationId xmlns:a16="http://schemas.microsoft.com/office/drawing/2014/main" id="{C7EFE29B-E641-801A-867B-9A9B61747A2B}"/>
+                <a16:creationId xmlns:a16="http://schemas.microsoft.com/office/drawing/2014/main" id="{B243AFC2-6CA0-F55D-BC1D-E5C9369F2488}"/>
               </a:ext>
             </a:extLst>
           </p:cNvPr>
@@ -6854,7 +8871,7 @@
           <p:cNvPr id="5" name="Rectángulo: esquinas redondeadas 4">
             <a:extLst>
               <a:ext uri="{FF2B5EF4-FFF2-40B4-BE49-F238E27FC236}">
-                <a16:creationId xmlns:a16="http://schemas.microsoft.com/office/drawing/2014/main" id="{8C30D6ED-1DCA-16C0-73C6-E5CFE7DF3A44}"/>
+                <a16:creationId xmlns:a16="http://schemas.microsoft.com/office/drawing/2014/main" id="{A7278507-0C2C-7DAF-2C65-73AA7AF40F73}"/>
               </a:ext>
             </a:extLst>
           </p:cNvPr>
@@ -6908,7 +8925,7 @@
           <p:cNvPr id="6" name="CuadroTexto 5">
             <a:extLst>
               <a:ext uri="{FF2B5EF4-FFF2-40B4-BE49-F238E27FC236}">
-                <a16:creationId xmlns:a16="http://schemas.microsoft.com/office/drawing/2014/main" id="{B57D4764-B415-C028-E655-ADAB442F0F8A}"/>
+                <a16:creationId xmlns:a16="http://schemas.microsoft.com/office/drawing/2014/main" id="{7050C38D-B6C8-C315-211B-6A09D63C660C}"/>
               </a:ext>
             </a:extLst>
           </p:cNvPr>
@@ -6938,7 +8955,7 @@
                 </a:solidFill>
                 <a:latin typeface="Consolas" panose="020B0609020204030204" pitchFamily="49" charset="0"/>
               </a:rPr>
-              <a:t>\https://agora.34.175.225.98.nip.io/app   |   https://agora.34.175.225.98.nip.io/externo\</a:t>
+              <a:t>\https://agora.34.175.157.37.nip.io/app   |   https://agora.34.175.157.37.nip.io/externo\</a:t>
             </a:r>
           </a:p>
         </p:txBody>
@@ -6948,7 +8965,7 @@
           <p:cNvPr id="7" name="CuadroTexto 6">
             <a:extLst>
               <a:ext uri="{FF2B5EF4-FFF2-40B4-BE49-F238E27FC236}">
-                <a16:creationId xmlns:a16="http://schemas.microsoft.com/office/drawing/2014/main" id="{1DBC50A7-BC88-1607-CC8D-DA7ECB6A4335}"/>
+                <a16:creationId xmlns:a16="http://schemas.microsoft.com/office/drawing/2014/main" id="{40E88544-28BC-E848-C31F-DAD84A3FA6D4}"/>
               </a:ext>
             </a:extLst>
           </p:cNvPr>
@@ -6988,7 +9005,7 @@
           <p:cNvPr id="8" name="Rectángulo: esquinas redondeadas 7">
             <a:extLst>
               <a:ext uri="{FF2B5EF4-FFF2-40B4-BE49-F238E27FC236}">
-                <a16:creationId xmlns:a16="http://schemas.microsoft.com/office/drawing/2014/main" id="{A412CBB9-86BD-F288-C59E-D292D6E31DF8}"/>
+                <a16:creationId xmlns:a16="http://schemas.microsoft.com/office/drawing/2014/main" id="{340A9376-566D-85CA-D1B2-B8D52A09F04E}"/>
               </a:ext>
             </a:extLst>
           </p:cNvPr>
@@ -7042,7 +9059,7 @@
           <p:cNvPr id="9" name="CuadroTexto 8">
             <a:extLst>
               <a:ext uri="{FF2B5EF4-FFF2-40B4-BE49-F238E27FC236}">
-                <a16:creationId xmlns:a16="http://schemas.microsoft.com/office/drawing/2014/main" id="{87DBC3C6-18D8-9DD8-58A8-F724AC9963EA}"/>
+                <a16:creationId xmlns:a16="http://schemas.microsoft.com/office/drawing/2014/main" id="{CC74D62C-5549-1E91-A353-ABF734037A58}"/>
               </a:ext>
             </a:extLst>
           </p:cNvPr>
@@ -7082,7 +9099,7 @@
           <p:cNvPr id="10" name="CuadroTexto 9">
             <a:extLst>
               <a:ext uri="{FF2B5EF4-FFF2-40B4-BE49-F238E27FC236}">
-                <a16:creationId xmlns:a16="http://schemas.microsoft.com/office/drawing/2014/main" id="{F610A121-9D29-0E37-DBD6-E822C950A59C}"/>
+                <a16:creationId xmlns:a16="http://schemas.microsoft.com/office/drawing/2014/main" id="{F79AFBC8-B669-A035-1752-7BC4F0306B72}"/>
               </a:ext>
             </a:extLst>
           </p:cNvPr>
@@ -7122,7 +9139,7 @@
           <p:cNvPr id="11" name="CuadroTexto 10">
             <a:extLst>
               <a:ext uri="{FF2B5EF4-FFF2-40B4-BE49-F238E27FC236}">
-                <a16:creationId xmlns:a16="http://schemas.microsoft.com/office/drawing/2014/main" id="{E6BF17B1-3756-F404-2B2E-ACF06D5E42EA}"/>
+                <a16:creationId xmlns:a16="http://schemas.microsoft.com/office/drawing/2014/main" id="{3E3FD94C-A502-E9E4-B772-D31691FB1E26}"/>
               </a:ext>
             </a:extLst>
           </p:cNvPr>
@@ -7162,7 +9179,7 @@
           <p:cNvPr id="12" name="CuadroTexto 11">
             <a:extLst>
               <a:ext uri="{FF2B5EF4-FFF2-40B4-BE49-F238E27FC236}">
-                <a16:creationId xmlns:a16="http://schemas.microsoft.com/office/drawing/2014/main" id="{0DD8FCFA-F0E8-01F2-0399-99379ACDEE09}"/>
+                <a16:creationId xmlns:a16="http://schemas.microsoft.com/office/drawing/2014/main" id="{DFB2B9A6-5DF6-A451-4EDC-B02697BFA783}"/>
               </a:ext>
             </a:extLst>
           </p:cNvPr>
@@ -7243,7 +9260,7 @@
     </p:spTree>
     <p:extLst>
       <p:ext uri="{BB962C8B-B14F-4D97-AF65-F5344CB8AC3E}">
-        <p14:creationId xmlns:p14="http://schemas.microsoft.com/office/powerpoint/2010/main" val="2491006121"/>
+        <p14:creationId xmlns:p14="http://schemas.microsoft.com/office/powerpoint/2010/main" val="96405022"/>
       </p:ext>
     </p:extLst>
   </p:cSld>
@@ -7283,7 +9300,7 @@
           <p:cNvPr id="2" name="CuadroTexto 1">
             <a:extLst>
               <a:ext uri="{FF2B5EF4-FFF2-40B4-BE49-F238E27FC236}">
-                <a16:creationId xmlns:a16="http://schemas.microsoft.com/office/drawing/2014/main" id="{53C97CB9-EBEA-A602-F6CA-DC84323DA427}"/>
+                <a16:creationId xmlns:a16="http://schemas.microsoft.com/office/drawing/2014/main" id="{46A12B50-8C80-E7D6-9568-975116167361}"/>
               </a:ext>
             </a:extLst>
           </p:cNvPr>
@@ -7323,7 +9340,7 @@
           <p:cNvPr id="3" name="CuadroTexto 2">
             <a:extLst>
               <a:ext uri="{FF2B5EF4-FFF2-40B4-BE49-F238E27FC236}">
-                <a16:creationId xmlns:a16="http://schemas.microsoft.com/office/drawing/2014/main" id="{E581D664-23FF-43C6-CBC8-86E3797A9379}"/>
+                <a16:creationId xmlns:a16="http://schemas.microsoft.com/office/drawing/2014/main" id="{A015E615-C043-C2D0-F864-38AC43651953}"/>
               </a:ext>
             </a:extLst>
           </p:cNvPr>
@@ -7363,7 +9380,7 @@
           <p:cNvPr id="4" name="CuadroTexto 3">
             <a:extLst>
               <a:ext uri="{FF2B5EF4-FFF2-40B4-BE49-F238E27FC236}">
-                <a16:creationId xmlns:a16="http://schemas.microsoft.com/office/drawing/2014/main" id="{7F6C04A8-101A-D7A1-012C-3A6C0B6D9938}"/>
+                <a16:creationId xmlns:a16="http://schemas.microsoft.com/office/drawing/2014/main" id="{69A6E439-53B1-9C0A-E530-766A89774EB9}"/>
               </a:ext>
             </a:extLst>
           </p:cNvPr>
@@ -7403,7 +9420,7 @@
           <p:cNvPr id="5" name="Rectángulo: esquinas redondeadas 4">
             <a:extLst>
               <a:ext uri="{FF2B5EF4-FFF2-40B4-BE49-F238E27FC236}">
-                <a16:creationId xmlns:a16="http://schemas.microsoft.com/office/drawing/2014/main" id="{05215D6A-3B4E-CF24-A3B9-FDB9687BC3AF}"/>
+                <a16:creationId xmlns:a16="http://schemas.microsoft.com/office/drawing/2014/main" id="{C6F4D1A2-BD45-9F3B-DD47-15D3E350D499}"/>
               </a:ext>
             </a:extLst>
           </p:cNvPr>
@@ -7413,7 +9430,7 @@
         <p:spPr>
           <a:xfrm>
             <a:off x="711200" y="2159000"/>
-            <a:ext cx="3429000" cy="2717800"/>
+            <a:ext cx="3454400" cy="3098800"/>
           </a:xfrm>
           <a:prstGeom prst="roundRect">
             <a:avLst/>
@@ -7457,7 +9474,7 @@
           <p:cNvPr id="6" name="CuadroTexto 5">
             <a:extLst>
               <a:ext uri="{FF2B5EF4-FFF2-40B4-BE49-F238E27FC236}">
-                <a16:creationId xmlns:a16="http://schemas.microsoft.com/office/drawing/2014/main" id="{B56296C0-9628-2A65-B2BC-001D91E62F33}"/>
+                <a16:creationId xmlns:a16="http://schemas.microsoft.com/office/drawing/2014/main" id="{8578630C-33AF-B5A3-A688-F30C0D769EFA}"/>
               </a:ext>
             </a:extLst>
           </p:cNvPr>
@@ -7497,7 +9514,7 @@
           <p:cNvPr id="7" name="CuadroTexto 6">
             <a:extLst>
               <a:ext uri="{FF2B5EF4-FFF2-40B4-BE49-F238E27FC236}">
-                <a16:creationId xmlns:a16="http://schemas.microsoft.com/office/drawing/2014/main" id="{8B9CF4DA-5114-5AC5-FE1B-72180041CB3C}"/>
+                <a16:creationId xmlns:a16="http://schemas.microsoft.com/office/drawing/2014/main" id="{F3AAA898-224C-8C98-621C-724980C0D094}"/>
               </a:ext>
             </a:extLst>
           </p:cNvPr>
@@ -7528,7 +9545,7 @@
               <a:buChar char="•"/>
             </a:pPr>
             <a:r>
-              <a:rPr lang="es-ES" sz="1400">
+              <a:rPr lang="es-ES" sz="1400" dirty="0">
                 <a:solidFill>
                   <a:srgbClr val="F6F8FC"/>
                 </a:solidFill>
@@ -7546,13 +9563,31 @@
               <a:buChar char="•"/>
             </a:pPr>
             <a:r>
-              <a:rPr lang="es-ES" sz="1400">
+              <a:rPr lang="es-ES" sz="1400" dirty="0">
                 <a:solidFill>
                   <a:srgbClr val="F6F8FC"/>
                 </a:solidFill>
                 <a:latin typeface="Segoe UI" panose="020B0502040204020203" pitchFamily="34" charset="0"/>
               </a:rPr>
-              <a:t>Correo real, documentos, chat y exportacion.</a:t>
+              <a:t>Correo real, documentos, chat y </a:t>
+            </a:r>
+            <a:r>
+              <a:rPr lang="es-ES" sz="1400" dirty="0" err="1">
+                <a:solidFill>
+                  <a:srgbClr val="F6F8FC"/>
+                </a:solidFill>
+                <a:latin typeface="Segoe UI" panose="020B0502040204020203" pitchFamily="34" charset="0"/>
+              </a:rPr>
+              <a:t>exportacion</a:t>
+            </a:r>
+            <a:r>
+              <a:rPr lang="es-ES" sz="1400" dirty="0">
+                <a:solidFill>
+                  <a:srgbClr val="F6F8FC"/>
+                </a:solidFill>
+                <a:latin typeface="Segoe UI" panose="020B0502040204020203" pitchFamily="34" charset="0"/>
+              </a:rPr>
+              <a:t>.</a:t>
             </a:r>
           </a:p>
           <a:p>
@@ -7564,13 +9599,58 @@
               <a:buChar char="•"/>
             </a:pPr>
             <a:r>
-              <a:rPr lang="es-ES" sz="1400">
+              <a:rPr lang="es-ES" sz="1400" dirty="0" err="1">
                 <a:solidFill>
                   <a:srgbClr val="F6F8FC"/>
                 </a:solidFill>
                 <a:latin typeface="Segoe UI" panose="020B0502040204020203" pitchFamily="34" charset="0"/>
               </a:rPr>
-              <a:t>Agora Desktop local/cloud como consola tecnica.</a:t>
+              <a:t>Agora</a:t>
+            </a:r>
+            <a:r>
+              <a:rPr lang="es-ES" sz="1400" dirty="0">
+                <a:solidFill>
+                  <a:srgbClr val="F6F8FC"/>
+                </a:solidFill>
+                <a:latin typeface="Segoe UI" panose="020B0502040204020203" pitchFamily="34" charset="0"/>
+              </a:rPr>
+              <a:t> Desktop local/</a:t>
+            </a:r>
+            <a:r>
+              <a:rPr lang="es-ES" sz="1400" dirty="0" err="1">
+                <a:solidFill>
+                  <a:srgbClr val="F6F8FC"/>
+                </a:solidFill>
+                <a:latin typeface="Segoe UI" panose="020B0502040204020203" pitchFamily="34" charset="0"/>
+              </a:rPr>
+              <a:t>cloud</a:t>
+            </a:r>
+            <a:r>
+              <a:rPr lang="es-ES" sz="1400" dirty="0">
+                <a:solidFill>
+                  <a:srgbClr val="F6F8FC"/>
+                </a:solidFill>
+                <a:latin typeface="Segoe UI" panose="020B0502040204020203" pitchFamily="34" charset="0"/>
+              </a:rPr>
+              <a:t> como consola </a:t>
+            </a:r>
+            <a:r>
+              <a:rPr lang="es-ES" sz="1400" dirty="0" err="1">
+                <a:solidFill>
+                  <a:srgbClr val="F6F8FC"/>
+                </a:solidFill>
+                <a:latin typeface="Segoe UI" panose="020B0502040204020203" pitchFamily="34" charset="0"/>
+              </a:rPr>
+              <a:t>tecnica</a:t>
+            </a:r>
+            <a:r>
+              <a:rPr lang="es-ES" sz="1400" dirty="0">
+                <a:solidFill>
+                  <a:srgbClr val="F6F8FC"/>
+                </a:solidFill>
+                <a:latin typeface="Segoe UI" panose="020B0502040204020203" pitchFamily="34" charset="0"/>
+              </a:rPr>
+              <a:t>.</a:t>
             </a:r>
           </a:p>
           <a:p>
@@ -7582,13 +9662,31 @@
               <a:buChar char="•"/>
             </a:pPr>
             <a:r>
-              <a:rPr lang="es-ES" sz="1400">
+              <a:rPr lang="es-ES" sz="1400" dirty="0">
                 <a:solidFill>
                   <a:srgbClr val="F6F8FC"/>
                 </a:solidFill>
                 <a:latin typeface="Segoe UI" panose="020B0502040204020203" pitchFamily="34" charset="0"/>
               </a:rPr>
-              <a:t>VM publica con arranque automatico y URL efectiva visible.</a:t>
+              <a:t>VM publica con arranque </a:t>
+            </a:r>
+            <a:r>
+              <a:rPr lang="es-ES" sz="1400" dirty="0" err="1">
+                <a:solidFill>
+                  <a:srgbClr val="F6F8FC"/>
+                </a:solidFill>
+                <a:latin typeface="Segoe UI" panose="020B0502040204020203" pitchFamily="34" charset="0"/>
+              </a:rPr>
+              <a:t>automatico</a:t>
+            </a:r>
+            <a:r>
+              <a:rPr lang="es-ES" sz="1400" dirty="0">
+                <a:solidFill>
+                  <a:srgbClr val="F6F8FC"/>
+                </a:solidFill>
+                <a:latin typeface="Segoe UI" panose="020B0502040204020203" pitchFamily="34" charset="0"/>
+              </a:rPr>
+              <a:t> y URL efectiva visible.</a:t>
             </a:r>
           </a:p>
         </p:txBody>
@@ -7598,7 +9696,7 @@
           <p:cNvPr id="8" name="Rectángulo: esquinas redondeadas 7">
             <a:extLst>
               <a:ext uri="{FF2B5EF4-FFF2-40B4-BE49-F238E27FC236}">
-                <a16:creationId xmlns:a16="http://schemas.microsoft.com/office/drawing/2014/main" id="{A870D57A-E655-BB64-DDEF-4DB115E64C1A}"/>
+                <a16:creationId xmlns:a16="http://schemas.microsoft.com/office/drawing/2014/main" id="{86D12CED-E1B7-4865-31C0-47381DB0E867}"/>
               </a:ext>
             </a:extLst>
           </p:cNvPr>
@@ -7652,7 +9750,7 @@
           <p:cNvPr id="9" name="CuadroTexto 8">
             <a:extLst>
               <a:ext uri="{FF2B5EF4-FFF2-40B4-BE49-F238E27FC236}">
-                <a16:creationId xmlns:a16="http://schemas.microsoft.com/office/drawing/2014/main" id="{31145F61-DB6A-1019-3ADD-6CBDD3AAB061}"/>
+                <a16:creationId xmlns:a16="http://schemas.microsoft.com/office/drawing/2014/main" id="{A348A66E-AAC4-50E9-8AB0-3138D71315D5}"/>
               </a:ext>
             </a:extLst>
           </p:cNvPr>
@@ -7692,7 +9790,7 @@
           <p:cNvPr id="10" name="CuadroTexto 9">
             <a:extLst>
               <a:ext uri="{FF2B5EF4-FFF2-40B4-BE49-F238E27FC236}">
-                <a16:creationId xmlns:a16="http://schemas.microsoft.com/office/drawing/2014/main" id="{9E263D43-1D9A-9059-3C14-B787D57096D2}"/>
+                <a16:creationId xmlns:a16="http://schemas.microsoft.com/office/drawing/2014/main" id="{32500D17-6DB3-BA91-4FD6-70EC771C6B41}"/>
               </a:ext>
             </a:extLst>
           </p:cNvPr>
@@ -7732,7 +9830,7 @@
           <p:cNvPr id="11" name="Rectángulo: esquinas redondeadas 10">
             <a:extLst>
               <a:ext uri="{FF2B5EF4-FFF2-40B4-BE49-F238E27FC236}">
-                <a16:creationId xmlns:a16="http://schemas.microsoft.com/office/drawing/2014/main" id="{8533D3D5-6554-E904-954F-41CBDCF4A932}"/>
+                <a16:creationId xmlns:a16="http://schemas.microsoft.com/office/drawing/2014/main" id="{9D4601DD-C32F-AAA2-1E7B-0B303491EF92}"/>
               </a:ext>
             </a:extLst>
           </p:cNvPr>
@@ -7786,7 +9884,7 @@
           <p:cNvPr id="12" name="CuadroTexto 11">
             <a:extLst>
               <a:ext uri="{FF2B5EF4-FFF2-40B4-BE49-F238E27FC236}">
-                <a16:creationId xmlns:a16="http://schemas.microsoft.com/office/drawing/2014/main" id="{651F9576-A26E-0A25-1466-D465049575E4}"/>
+                <a16:creationId xmlns:a16="http://schemas.microsoft.com/office/drawing/2014/main" id="{CABABA1A-84B2-B66A-F679-D5443B29926F}"/>
               </a:ext>
             </a:extLst>
           </p:cNvPr>
@@ -7826,7 +9924,7 @@
           <p:cNvPr id="13" name="CuadroTexto 12">
             <a:extLst>
               <a:ext uri="{FF2B5EF4-FFF2-40B4-BE49-F238E27FC236}">
-                <a16:creationId xmlns:a16="http://schemas.microsoft.com/office/drawing/2014/main" id="{58161CBD-935D-C0BD-9D61-502B2B101D49}"/>
+                <a16:creationId xmlns:a16="http://schemas.microsoft.com/office/drawing/2014/main" id="{345B0A56-32AB-2DC9-2F05-769C60F93036}"/>
               </a:ext>
             </a:extLst>
           </p:cNvPr>
@@ -7866,7 +9964,7 @@
           <p:cNvPr id="14" name="Rectángulo: esquinas redondeadas 13">
             <a:extLst>
               <a:ext uri="{FF2B5EF4-FFF2-40B4-BE49-F238E27FC236}">
-                <a16:creationId xmlns:a16="http://schemas.microsoft.com/office/drawing/2014/main" id="{8E2CC980-63EB-6A22-FFBD-BC0FDD281A25}"/>
+                <a16:creationId xmlns:a16="http://schemas.microsoft.com/office/drawing/2014/main" id="{0FA78C3D-C50F-54E2-1B5D-69A3C5485322}"/>
               </a:ext>
             </a:extLst>
           </p:cNvPr>
@@ -7920,7 +10018,7 @@
           <p:cNvPr id="15" name="CuadroTexto 14">
             <a:extLst>
               <a:ext uri="{FF2B5EF4-FFF2-40B4-BE49-F238E27FC236}">
-                <a16:creationId xmlns:a16="http://schemas.microsoft.com/office/drawing/2014/main" id="{DDF90326-7938-8B98-3223-42C2C1C0D003}"/>
+                <a16:creationId xmlns:a16="http://schemas.microsoft.com/office/drawing/2014/main" id="{652D8E2C-52CC-ABF1-1743-91B42146D9BB}"/>
               </a:ext>
             </a:extLst>
           </p:cNvPr>
@@ -7960,7 +10058,7 @@
           <p:cNvPr id="16" name="CuadroTexto 15">
             <a:extLst>
               <a:ext uri="{FF2B5EF4-FFF2-40B4-BE49-F238E27FC236}">
-                <a16:creationId xmlns:a16="http://schemas.microsoft.com/office/drawing/2014/main" id="{6DE08089-44FC-BA71-6838-474F8F76D64D}"/>
+                <a16:creationId xmlns:a16="http://schemas.microsoft.com/office/drawing/2014/main" id="{4F2DAF3C-8BE2-7F1A-57C2-ADBF9959115C}"/>
               </a:ext>
             </a:extLst>
           </p:cNvPr>
@@ -8000,7 +10098,7 @@
           <p:cNvPr id="17" name="CuadroTexto 16">
             <a:extLst>
               <a:ext uri="{FF2B5EF4-FFF2-40B4-BE49-F238E27FC236}">
-                <a16:creationId xmlns:a16="http://schemas.microsoft.com/office/drawing/2014/main" id="{0B72C3C2-9228-5457-9DB2-CFE0F34DA693}"/>
+                <a16:creationId xmlns:a16="http://schemas.microsoft.com/office/drawing/2014/main" id="{906CD9C8-797A-CC5E-A038-D4993AE5578C}"/>
               </a:ext>
             </a:extLst>
           </p:cNvPr>
@@ -8031,13 +10129,49 @@
               <a:buChar char="•"/>
             </a:pPr>
             <a:r>
-              <a:rPr lang="es-ES">
+              <a:rPr lang="es-ES" dirty="0">
                 <a:solidFill>
                   <a:srgbClr val="C2CBD8"/>
                 </a:solidFill>
                 <a:latin typeface="Segoe UI" panose="020B0502040204020203" pitchFamily="34" charset="0"/>
               </a:rPr>
-              <a:t>La prioridad futura no es anadir modulos sin control, sino endurecer despliegue, seguridad y soporte.</a:t>
+              <a:t>La prioridad futura no es </a:t>
+            </a:r>
+            <a:r>
+              <a:rPr lang="es-ES" dirty="0" err="1">
+                <a:solidFill>
+                  <a:srgbClr val="C2CBD8"/>
+                </a:solidFill>
+                <a:latin typeface="Segoe UI" panose="020B0502040204020203" pitchFamily="34" charset="0"/>
+              </a:rPr>
+              <a:t>anadir</a:t>
+            </a:r>
+            <a:r>
+              <a:rPr lang="es-ES" dirty="0">
+                <a:solidFill>
+                  <a:srgbClr val="C2CBD8"/>
+                </a:solidFill>
+                <a:latin typeface="Segoe UI" panose="020B0502040204020203" pitchFamily="34" charset="0"/>
+              </a:rPr>
+              <a:t> </a:t>
+            </a:r>
+            <a:r>
+              <a:rPr lang="es-ES" dirty="0" err="1">
+                <a:solidFill>
+                  <a:srgbClr val="C2CBD8"/>
+                </a:solidFill>
+                <a:latin typeface="Segoe UI" panose="020B0502040204020203" pitchFamily="34" charset="0"/>
+              </a:rPr>
+              <a:t>modulos</a:t>
+            </a:r>
+            <a:r>
+              <a:rPr lang="es-ES" dirty="0">
+                <a:solidFill>
+                  <a:srgbClr val="C2CBD8"/>
+                </a:solidFill>
+                <a:latin typeface="Segoe UI" panose="020B0502040204020203" pitchFamily="34" charset="0"/>
+              </a:rPr>
+              <a:t> sin control, sino endurecer despliegue, seguridad y soporte.</a:t>
             </a:r>
           </a:p>
           <a:p>
@@ -8049,7 +10183,7 @@
               <a:buChar char="•"/>
             </a:pPr>
             <a:r>
-              <a:rPr lang="es-ES">
+              <a:rPr lang="es-ES" dirty="0">
                 <a:solidFill>
                   <a:srgbClr val="C2CBD8"/>
                 </a:solidFill>
@@ -8063,7 +10197,7 @@
     </p:spTree>
     <p:extLst>
       <p:ext uri="{BB962C8B-B14F-4D97-AF65-F5344CB8AC3E}">
-        <p14:creationId xmlns:p14="http://schemas.microsoft.com/office/powerpoint/2010/main" val="1384542028"/>
+        <p14:creationId xmlns:p14="http://schemas.microsoft.com/office/powerpoint/2010/main" val="4049875441"/>
       </p:ext>
     </p:extLst>
   </p:cSld>
@@ -8103,7 +10237,7 @@
           <p:cNvPr id="2" name="CuadroTexto 1">
             <a:extLst>
               <a:ext uri="{FF2B5EF4-FFF2-40B4-BE49-F238E27FC236}">
-                <a16:creationId xmlns:a16="http://schemas.microsoft.com/office/drawing/2014/main" id="{C363EC2D-827D-E293-58DE-23863F70001B}"/>
+                <a16:creationId xmlns:a16="http://schemas.microsoft.com/office/drawing/2014/main" id="{C18253C7-EFB2-10E0-B589-C27138953EE5}"/>
               </a:ext>
             </a:extLst>
           </p:cNvPr>
@@ -8143,7 +10277,7 @@
           <p:cNvPr id="3" name="CuadroTexto 2">
             <a:extLst>
               <a:ext uri="{FF2B5EF4-FFF2-40B4-BE49-F238E27FC236}">
-                <a16:creationId xmlns:a16="http://schemas.microsoft.com/office/drawing/2014/main" id="{F9FBC11A-D6BF-8030-89B6-9AE9C67C0F63}"/>
+                <a16:creationId xmlns:a16="http://schemas.microsoft.com/office/drawing/2014/main" id="{58DDD1E7-99F7-6ADF-A6B5-F59FC9C66B82}"/>
               </a:ext>
             </a:extLst>
           </p:cNvPr>
@@ -8183,7 +10317,7 @@
           <p:cNvPr id="4" name="CuadroTexto 3">
             <a:extLst>
               <a:ext uri="{FF2B5EF4-FFF2-40B4-BE49-F238E27FC236}">
-                <a16:creationId xmlns:a16="http://schemas.microsoft.com/office/drawing/2014/main" id="{20132C7E-9033-1B78-6B93-FF6F4B2631BF}"/>
+                <a16:creationId xmlns:a16="http://schemas.microsoft.com/office/drawing/2014/main" id="{AFF1E1ED-9416-52A3-6F9D-B3426C9E10D1}"/>
               </a:ext>
             </a:extLst>
           </p:cNvPr>
@@ -8302,7 +10436,7 @@
           <p:cNvPr id="5" name="Rectángulo: esquinas redondeadas 4">
             <a:extLst>
               <a:ext uri="{FF2B5EF4-FFF2-40B4-BE49-F238E27FC236}">
-                <a16:creationId xmlns:a16="http://schemas.microsoft.com/office/drawing/2014/main" id="{619EACEF-9A4A-1501-CE9F-86D27B34DD12}"/>
+                <a16:creationId xmlns:a16="http://schemas.microsoft.com/office/drawing/2014/main" id="{A8BEBF4F-918C-C137-3812-1568BD5203E2}"/>
               </a:ext>
             </a:extLst>
           </p:cNvPr>
@@ -8356,7 +10490,7 @@
           <p:cNvPr id="6" name="CuadroTexto 5">
             <a:extLst>
               <a:ext uri="{FF2B5EF4-FFF2-40B4-BE49-F238E27FC236}">
-                <a16:creationId xmlns:a16="http://schemas.microsoft.com/office/drawing/2014/main" id="{41215060-E82A-9686-21CF-EF8079E946AD}"/>
+                <a16:creationId xmlns:a16="http://schemas.microsoft.com/office/drawing/2014/main" id="{E669A745-4761-2441-85D9-0FAF3DE8A941}"/>
               </a:ext>
             </a:extLst>
           </p:cNvPr>
@@ -8396,7 +10530,7 @@
           <p:cNvPr id="7" name="CuadroTexto 6">
             <a:extLst>
               <a:ext uri="{FF2B5EF4-FFF2-40B4-BE49-F238E27FC236}">
-                <a16:creationId xmlns:a16="http://schemas.microsoft.com/office/drawing/2014/main" id="{32F7C57F-33B4-4CB2-581B-B0C785ED2DD7}"/>
+                <a16:creationId xmlns:a16="http://schemas.microsoft.com/office/drawing/2014/main" id="{39B88D6F-836A-7192-E641-926670222561}"/>
               </a:ext>
             </a:extLst>
           </p:cNvPr>
@@ -8434,7 +10568,7 @@
     </p:spTree>
     <p:extLst>
       <p:ext uri="{BB962C8B-B14F-4D97-AF65-F5344CB8AC3E}">
-        <p14:creationId xmlns:p14="http://schemas.microsoft.com/office/powerpoint/2010/main" val="3973592235"/>
+        <p14:creationId xmlns:p14="http://schemas.microsoft.com/office/powerpoint/2010/main" val="781664236"/>
       </p:ext>
     </p:extLst>
   </p:cSld>
@@ -8474,7 +10608,7 @@
           <p:cNvPr id="2" name="CuadroTexto 1">
             <a:extLst>
               <a:ext uri="{FF2B5EF4-FFF2-40B4-BE49-F238E27FC236}">
-                <a16:creationId xmlns:a16="http://schemas.microsoft.com/office/drawing/2014/main" id="{92D81F7F-2258-EA64-DCD4-E81A879DD0B5}"/>
+                <a16:creationId xmlns:a16="http://schemas.microsoft.com/office/drawing/2014/main" id="{E034BF39-A092-5745-3A23-6911D4BAFC69}"/>
               </a:ext>
             </a:extLst>
           </p:cNvPr>
@@ -8514,7 +10648,7 @@
           <p:cNvPr id="3" name="CuadroTexto 2">
             <a:extLst>
               <a:ext uri="{FF2B5EF4-FFF2-40B4-BE49-F238E27FC236}">
-                <a16:creationId xmlns:a16="http://schemas.microsoft.com/office/drawing/2014/main" id="{32C24F13-ABAC-65AE-18F4-D098C3D1CF8C}"/>
+                <a16:creationId xmlns:a16="http://schemas.microsoft.com/office/drawing/2014/main" id="{8D6F064D-675D-2228-A6CA-F6E18BC777FF}"/>
               </a:ext>
             </a:extLst>
           </p:cNvPr>
@@ -8554,7 +10688,7 @@
           <p:cNvPr id="4" name="CuadroTexto 3">
             <a:extLst>
               <a:ext uri="{FF2B5EF4-FFF2-40B4-BE49-F238E27FC236}">
-                <a16:creationId xmlns:a16="http://schemas.microsoft.com/office/drawing/2014/main" id="{A7F0F976-2ACE-B939-D25D-4720E924E803}"/>
+                <a16:creationId xmlns:a16="http://schemas.microsoft.com/office/drawing/2014/main" id="{916CBC62-9EB9-947C-12AA-BFAC3952FE55}"/>
               </a:ext>
             </a:extLst>
           </p:cNvPr>
@@ -8594,7 +10728,7 @@
           <p:cNvPr id="5" name="CuadroTexto 4">
             <a:extLst>
               <a:ext uri="{FF2B5EF4-FFF2-40B4-BE49-F238E27FC236}">
-                <a16:creationId xmlns:a16="http://schemas.microsoft.com/office/drawing/2014/main" id="{BD10D5EB-9330-C924-F312-131A55DD3090}"/>
+                <a16:creationId xmlns:a16="http://schemas.microsoft.com/office/drawing/2014/main" id="{BE0BB752-E2B0-C3F1-008D-07782614C645}"/>
               </a:ext>
             </a:extLst>
           </p:cNvPr>
@@ -8677,7 +10811,7 @@
           <p:cNvPr id="6" name="CuadroTexto 5">
             <a:extLst>
               <a:ext uri="{FF2B5EF4-FFF2-40B4-BE49-F238E27FC236}">
-                <a16:creationId xmlns:a16="http://schemas.microsoft.com/office/drawing/2014/main" id="{1F11DC90-BD7F-18DA-454A-5A78D693F6D5}"/>
+                <a16:creationId xmlns:a16="http://schemas.microsoft.com/office/drawing/2014/main" id="{7A3273B5-4849-4B5A-FFAE-33F44768EA7E}"/>
               </a:ext>
             </a:extLst>
           </p:cNvPr>
@@ -8715,7 +10849,7 @@
     </p:spTree>
     <p:extLst>
       <p:ext uri="{BB962C8B-B14F-4D97-AF65-F5344CB8AC3E}">
-        <p14:creationId xmlns:p14="http://schemas.microsoft.com/office/powerpoint/2010/main" val="995204594"/>
+        <p14:creationId xmlns:p14="http://schemas.microsoft.com/office/powerpoint/2010/main" val="3190663946"/>
       </p:ext>
     </p:extLst>
   </p:cSld>
@@ -8755,7 +10889,7 @@
           <p:cNvPr id="2" name="CuadroTexto 1">
             <a:extLst>
               <a:ext uri="{FF2B5EF4-FFF2-40B4-BE49-F238E27FC236}">
-                <a16:creationId xmlns:a16="http://schemas.microsoft.com/office/drawing/2014/main" id="{64E27492-A7A3-0D12-57CD-41E2ED4F21D1}"/>
+                <a16:creationId xmlns:a16="http://schemas.microsoft.com/office/drawing/2014/main" id="{B068331A-DB58-7D9F-BFF0-5ADE1A43EEED}"/>
               </a:ext>
             </a:extLst>
           </p:cNvPr>
@@ -8795,7 +10929,7 @@
           <p:cNvPr id="3" name="CuadroTexto 2">
             <a:extLst>
               <a:ext uri="{FF2B5EF4-FFF2-40B4-BE49-F238E27FC236}">
-                <a16:creationId xmlns:a16="http://schemas.microsoft.com/office/drawing/2014/main" id="{E3E06C6C-EEA9-DEEB-FAE9-72DC507AFB52}"/>
+                <a16:creationId xmlns:a16="http://schemas.microsoft.com/office/drawing/2014/main" id="{692C9C5C-E412-D73C-5BF2-647E0EBA4114}"/>
               </a:ext>
             </a:extLst>
           </p:cNvPr>
@@ -8835,7 +10969,7 @@
           <p:cNvPr id="4" name="CuadroTexto 3">
             <a:extLst>
               <a:ext uri="{FF2B5EF4-FFF2-40B4-BE49-F238E27FC236}">
-                <a16:creationId xmlns:a16="http://schemas.microsoft.com/office/drawing/2014/main" id="{B5FBA7B2-0364-0349-0B91-A756B41E6A20}"/>
+                <a16:creationId xmlns:a16="http://schemas.microsoft.com/office/drawing/2014/main" id="{8A86CE34-67C7-7AC5-C770-8102636B2087}"/>
               </a:ext>
             </a:extLst>
           </p:cNvPr>
@@ -8875,7 +11009,7 @@
           <p:cNvPr id="5" name="CuadroTexto 4">
             <a:extLst>
               <a:ext uri="{FF2B5EF4-FFF2-40B4-BE49-F238E27FC236}">
-                <a16:creationId xmlns:a16="http://schemas.microsoft.com/office/drawing/2014/main" id="{0F38E413-996F-A107-60F8-A6EFC9312F91}"/>
+                <a16:creationId xmlns:a16="http://schemas.microsoft.com/office/drawing/2014/main" id="{35597837-C64F-5762-43AB-B29EF7A40323}"/>
               </a:ext>
             </a:extLst>
           </p:cNvPr>
@@ -8976,7 +11110,7 @@
           <p:cNvPr id="6" name="Rectángulo: esquinas redondeadas 5">
             <a:extLst>
               <a:ext uri="{FF2B5EF4-FFF2-40B4-BE49-F238E27FC236}">
-                <a16:creationId xmlns:a16="http://schemas.microsoft.com/office/drawing/2014/main" id="{32893821-8623-6FD0-DD8B-866EFB1DED72}"/>
+                <a16:creationId xmlns:a16="http://schemas.microsoft.com/office/drawing/2014/main" id="{5897020F-CAF7-9521-63B9-5A88B9D2BDFA}"/>
               </a:ext>
             </a:extLst>
           </p:cNvPr>
@@ -9030,7 +11164,7 @@
           <p:cNvPr id="7" name="CuadroTexto 6">
             <a:extLst>
               <a:ext uri="{FF2B5EF4-FFF2-40B4-BE49-F238E27FC236}">
-                <a16:creationId xmlns:a16="http://schemas.microsoft.com/office/drawing/2014/main" id="{82E33C88-4DB7-8906-3FC1-FDB4DBF69075}"/>
+                <a16:creationId xmlns:a16="http://schemas.microsoft.com/office/drawing/2014/main" id="{006E7796-BFA1-A444-9476-0F81B323E857}"/>
               </a:ext>
             </a:extLst>
           </p:cNvPr>
@@ -9070,7 +11204,7 @@
           <p:cNvPr id="8" name="CuadroTexto 7">
             <a:extLst>
               <a:ext uri="{FF2B5EF4-FFF2-40B4-BE49-F238E27FC236}">
-                <a16:creationId xmlns:a16="http://schemas.microsoft.com/office/drawing/2014/main" id="{DF938DFF-9610-AC69-29B2-7C248A6DF573}"/>
+                <a16:creationId xmlns:a16="http://schemas.microsoft.com/office/drawing/2014/main" id="{DAFB9483-D011-ABD1-E5A0-493FD9E7F5BF}"/>
               </a:ext>
             </a:extLst>
           </p:cNvPr>
@@ -9108,7 +11242,7 @@
     </p:spTree>
     <p:extLst>
       <p:ext uri="{BB962C8B-B14F-4D97-AF65-F5344CB8AC3E}">
-        <p14:creationId xmlns:p14="http://schemas.microsoft.com/office/powerpoint/2010/main" val="4215167580"/>
+        <p14:creationId xmlns:p14="http://schemas.microsoft.com/office/powerpoint/2010/main" val="912611780"/>
       </p:ext>
     </p:extLst>
   </p:cSld>
@@ -9148,7 +11282,7 @@
           <p:cNvPr id="2" name="CuadroTexto 1">
             <a:extLst>
               <a:ext uri="{FF2B5EF4-FFF2-40B4-BE49-F238E27FC236}">
-                <a16:creationId xmlns:a16="http://schemas.microsoft.com/office/drawing/2014/main" id="{CBEC7AA4-81EF-2469-9784-24AB345E6FCF}"/>
+                <a16:creationId xmlns:a16="http://schemas.microsoft.com/office/drawing/2014/main" id="{5EEA9A2C-A91E-C96C-2BF8-9EC777031AA1}"/>
               </a:ext>
             </a:extLst>
           </p:cNvPr>
@@ -9188,7 +11322,7 @@
           <p:cNvPr id="3" name="CuadroTexto 2">
             <a:extLst>
               <a:ext uri="{FF2B5EF4-FFF2-40B4-BE49-F238E27FC236}">
-                <a16:creationId xmlns:a16="http://schemas.microsoft.com/office/drawing/2014/main" id="{ABB9499E-2909-8385-F043-F1110E8C5036}"/>
+                <a16:creationId xmlns:a16="http://schemas.microsoft.com/office/drawing/2014/main" id="{34404C0C-D81F-D7DF-C60D-5ACBE1E7EBF6}"/>
               </a:ext>
             </a:extLst>
           </p:cNvPr>
@@ -9228,7 +11362,7 @@
           <p:cNvPr id="4" name="Rectángulo: esquinas redondeadas 3">
             <a:extLst>
               <a:ext uri="{FF2B5EF4-FFF2-40B4-BE49-F238E27FC236}">
-                <a16:creationId xmlns:a16="http://schemas.microsoft.com/office/drawing/2014/main" id="{00214D9E-C2DD-EA2E-E4C7-CB32BA3850A5}"/>
+                <a16:creationId xmlns:a16="http://schemas.microsoft.com/office/drawing/2014/main" id="{55B44C90-9EAA-544F-47EF-513F35EB1060}"/>
               </a:ext>
             </a:extLst>
           </p:cNvPr>
@@ -9282,7 +11416,7 @@
           <p:cNvPr id="5" name="CuadroTexto 4">
             <a:extLst>
               <a:ext uri="{FF2B5EF4-FFF2-40B4-BE49-F238E27FC236}">
-                <a16:creationId xmlns:a16="http://schemas.microsoft.com/office/drawing/2014/main" id="{24D3C474-9CC6-2446-2CAF-0E551791E94E}"/>
+                <a16:creationId xmlns:a16="http://schemas.microsoft.com/office/drawing/2014/main" id="{AB4DAB3F-7477-AA02-7D02-B6087F3E2943}"/>
               </a:ext>
             </a:extLst>
           </p:cNvPr>
@@ -9322,7 +11456,7 @@
           <p:cNvPr id="6" name="CuadroTexto 5">
             <a:extLst>
               <a:ext uri="{FF2B5EF4-FFF2-40B4-BE49-F238E27FC236}">
-                <a16:creationId xmlns:a16="http://schemas.microsoft.com/office/drawing/2014/main" id="{C798D3C1-A2D5-4986-7C5F-6431932C8381}"/>
+                <a16:creationId xmlns:a16="http://schemas.microsoft.com/office/drawing/2014/main" id="{617206B7-1BE2-D1CD-EECC-88C15A6706AA}"/>
               </a:ext>
             </a:extLst>
           </p:cNvPr>
@@ -9362,7 +11496,7 @@
           <p:cNvPr id="7" name="Rectángulo: esquinas redondeadas 6">
             <a:extLst>
               <a:ext uri="{FF2B5EF4-FFF2-40B4-BE49-F238E27FC236}">
-                <a16:creationId xmlns:a16="http://schemas.microsoft.com/office/drawing/2014/main" id="{B228C5F9-AA92-80A4-74FD-47C8356DD9B2}"/>
+                <a16:creationId xmlns:a16="http://schemas.microsoft.com/office/drawing/2014/main" id="{C3AD3A7A-7740-0852-EC1D-8A6AEDBF5FD7}"/>
               </a:ext>
             </a:extLst>
           </p:cNvPr>
@@ -9416,7 +11550,7 @@
           <p:cNvPr id="8" name="CuadroTexto 7">
             <a:extLst>
               <a:ext uri="{FF2B5EF4-FFF2-40B4-BE49-F238E27FC236}">
-                <a16:creationId xmlns:a16="http://schemas.microsoft.com/office/drawing/2014/main" id="{7AC3E129-5CA3-4EF4-D9A4-7AE8CCDC34E0}"/>
+                <a16:creationId xmlns:a16="http://schemas.microsoft.com/office/drawing/2014/main" id="{C03D0592-6DE3-7264-C687-B190F5203639}"/>
               </a:ext>
             </a:extLst>
           </p:cNvPr>
@@ -9456,7 +11590,7 @@
           <p:cNvPr id="9" name="CuadroTexto 8">
             <a:extLst>
               <a:ext uri="{FF2B5EF4-FFF2-40B4-BE49-F238E27FC236}">
-                <a16:creationId xmlns:a16="http://schemas.microsoft.com/office/drawing/2014/main" id="{AC0CFB52-B02C-D7B6-84A3-3809225BF347}"/>
+                <a16:creationId xmlns:a16="http://schemas.microsoft.com/office/drawing/2014/main" id="{C23E62E8-960A-6732-9165-3C576AAC568D}"/>
               </a:ext>
             </a:extLst>
           </p:cNvPr>
@@ -9496,7 +11630,7 @@
           <p:cNvPr id="10" name="Rectángulo: esquinas redondeadas 9">
             <a:extLst>
               <a:ext uri="{FF2B5EF4-FFF2-40B4-BE49-F238E27FC236}">
-                <a16:creationId xmlns:a16="http://schemas.microsoft.com/office/drawing/2014/main" id="{29FE064D-A9BD-AB47-3541-3064BEBD6E1D}"/>
+                <a16:creationId xmlns:a16="http://schemas.microsoft.com/office/drawing/2014/main" id="{B4CFBFCE-F2AE-23FF-77CE-960D26C22C1F}"/>
               </a:ext>
             </a:extLst>
           </p:cNvPr>
@@ -9550,7 +11684,7 @@
           <p:cNvPr id="11" name="CuadroTexto 10">
             <a:extLst>
               <a:ext uri="{FF2B5EF4-FFF2-40B4-BE49-F238E27FC236}">
-                <a16:creationId xmlns:a16="http://schemas.microsoft.com/office/drawing/2014/main" id="{DEF7B20E-2DF7-2091-9F0F-AD9C6B7653BD}"/>
+                <a16:creationId xmlns:a16="http://schemas.microsoft.com/office/drawing/2014/main" id="{017DDDCB-9C29-2354-2534-8B9E99EED402}"/>
               </a:ext>
             </a:extLst>
           </p:cNvPr>
@@ -9590,7 +11724,7 @@
           <p:cNvPr id="12" name="CuadroTexto 11">
             <a:extLst>
               <a:ext uri="{FF2B5EF4-FFF2-40B4-BE49-F238E27FC236}">
-                <a16:creationId xmlns:a16="http://schemas.microsoft.com/office/drawing/2014/main" id="{90867096-A9E8-5AA3-DA5F-E2181B8B5940}"/>
+                <a16:creationId xmlns:a16="http://schemas.microsoft.com/office/drawing/2014/main" id="{6DF3749A-8BD8-2F0D-D6D7-463215C075A9}"/>
               </a:ext>
             </a:extLst>
           </p:cNvPr>
@@ -9630,7 +11764,7 @@
           <p:cNvPr id="13" name="Rectángulo: esquinas redondeadas 12">
             <a:extLst>
               <a:ext uri="{FF2B5EF4-FFF2-40B4-BE49-F238E27FC236}">
-                <a16:creationId xmlns:a16="http://schemas.microsoft.com/office/drawing/2014/main" id="{101673A6-FF1D-2843-A844-2FE2E60905B7}"/>
+                <a16:creationId xmlns:a16="http://schemas.microsoft.com/office/drawing/2014/main" id="{F103FFF3-BFB4-1C0C-0780-13D32EA02DD4}"/>
               </a:ext>
             </a:extLst>
           </p:cNvPr>
@@ -9684,7 +11818,7 @@
           <p:cNvPr id="14" name="CuadroTexto 13">
             <a:extLst>
               <a:ext uri="{FF2B5EF4-FFF2-40B4-BE49-F238E27FC236}">
-                <a16:creationId xmlns:a16="http://schemas.microsoft.com/office/drawing/2014/main" id="{21BB2C5F-23EA-F264-6974-9C5B647EC529}"/>
+                <a16:creationId xmlns:a16="http://schemas.microsoft.com/office/drawing/2014/main" id="{6230B512-43E9-EEE6-6853-151B689DF8A6}"/>
               </a:ext>
             </a:extLst>
           </p:cNvPr>
@@ -9724,7 +11858,7 @@
           <p:cNvPr id="15" name="CuadroTexto 14">
             <a:extLst>
               <a:ext uri="{FF2B5EF4-FFF2-40B4-BE49-F238E27FC236}">
-                <a16:creationId xmlns:a16="http://schemas.microsoft.com/office/drawing/2014/main" id="{A8A3BF4F-5949-E8B5-5670-23DA30C81D1C}"/>
+                <a16:creationId xmlns:a16="http://schemas.microsoft.com/office/drawing/2014/main" id="{0786D3B6-DF73-3A76-597C-0CCAB11D6A5E}"/>
               </a:ext>
             </a:extLst>
           </p:cNvPr>
@@ -9762,7 +11896,7 @@
     </p:spTree>
     <p:extLst>
       <p:ext uri="{BB962C8B-B14F-4D97-AF65-F5344CB8AC3E}">
-        <p14:creationId xmlns:p14="http://schemas.microsoft.com/office/powerpoint/2010/main" val="3051532885"/>
+        <p14:creationId xmlns:p14="http://schemas.microsoft.com/office/powerpoint/2010/main" val="41990846"/>
       </p:ext>
     </p:extLst>
   </p:cSld>
@@ -9802,7 +11936,7 @@
           <p:cNvPr id="2" name="CuadroTexto 1">
             <a:extLst>
               <a:ext uri="{FF2B5EF4-FFF2-40B4-BE49-F238E27FC236}">
-                <a16:creationId xmlns:a16="http://schemas.microsoft.com/office/drawing/2014/main" id="{F9939E1B-1B81-476F-413F-903FA188E0CC}"/>
+                <a16:creationId xmlns:a16="http://schemas.microsoft.com/office/drawing/2014/main" id="{02924989-8D28-B68C-B72A-3A92466D8A45}"/>
               </a:ext>
             </a:extLst>
           </p:cNvPr>
@@ -9842,7 +11976,7 @@
           <p:cNvPr id="3" name="CuadroTexto 2">
             <a:extLst>
               <a:ext uri="{FF2B5EF4-FFF2-40B4-BE49-F238E27FC236}">
-                <a16:creationId xmlns:a16="http://schemas.microsoft.com/office/drawing/2014/main" id="{83AEA742-41F0-5830-6E5B-998840A3683F}"/>
+                <a16:creationId xmlns:a16="http://schemas.microsoft.com/office/drawing/2014/main" id="{50362F14-0AE5-B2A3-1B20-3932B7309F24}"/>
               </a:ext>
             </a:extLst>
           </p:cNvPr>
@@ -9882,7 +12016,7 @@
           <p:cNvPr id="4" name="CuadroTexto 3">
             <a:extLst>
               <a:ext uri="{FF2B5EF4-FFF2-40B4-BE49-F238E27FC236}">
-                <a16:creationId xmlns:a16="http://schemas.microsoft.com/office/drawing/2014/main" id="{24626C56-D53D-8E20-1BC8-490C3A909C38}"/>
+                <a16:creationId xmlns:a16="http://schemas.microsoft.com/office/drawing/2014/main" id="{A75697DF-88BC-7E5F-9BE2-87CFF0749188}"/>
               </a:ext>
             </a:extLst>
           </p:cNvPr>
@@ -9922,7 +12056,7 @@
           <p:cNvPr id="6" name="Imagen 5">
             <a:extLst>
               <a:ext uri="{FF2B5EF4-FFF2-40B4-BE49-F238E27FC236}">
-                <a16:creationId xmlns:a16="http://schemas.microsoft.com/office/drawing/2014/main" id="{B762B756-0677-432F-71D0-BECB80629634}"/>
+                <a16:creationId xmlns:a16="http://schemas.microsoft.com/office/drawing/2014/main" id="{C23A36BD-2BA4-2636-33C9-17BCEB0026DE}"/>
               </a:ext>
             </a:extLst>
           </p:cNvPr>
@@ -9932,7 +12066,7 @@
           <p:nvPr/>
         </p:nvPicPr>
         <p:blipFill>
-          <a:blip r:embed="rId2">
+          <a:blip r:embed="rId3">
             <a:extLst>
               <a:ext uri="{28A0092B-C50C-407E-A947-70E740481C1C}">
                 <a14:useLocalDpi xmlns:a14="http://schemas.microsoft.com/office/drawing/2010/main" val="0"/>
@@ -9963,7 +12097,7 @@
           <p:cNvPr id="7" name="CuadroTexto 6">
             <a:extLst>
               <a:ext uri="{FF2B5EF4-FFF2-40B4-BE49-F238E27FC236}">
-                <a16:creationId xmlns:a16="http://schemas.microsoft.com/office/drawing/2014/main" id="{324DCFCD-49EF-3195-E6FB-8A6238B61883}"/>
+                <a16:creationId xmlns:a16="http://schemas.microsoft.com/office/drawing/2014/main" id="{E38B764A-AF77-5E6F-A78B-25C422793274}"/>
               </a:ext>
             </a:extLst>
           </p:cNvPr>
@@ -10080,7 +12214,7 @@
     </p:spTree>
     <p:extLst>
       <p:ext uri="{BB962C8B-B14F-4D97-AF65-F5344CB8AC3E}">
-        <p14:creationId xmlns:p14="http://schemas.microsoft.com/office/powerpoint/2010/main" val="2286205627"/>
+        <p14:creationId xmlns:p14="http://schemas.microsoft.com/office/powerpoint/2010/main" val="3885330251"/>
       </p:ext>
     </p:extLst>
   </p:cSld>
@@ -10120,7 +12254,7 @@
           <p:cNvPr id="2" name="CuadroTexto 1">
             <a:extLst>
               <a:ext uri="{FF2B5EF4-FFF2-40B4-BE49-F238E27FC236}">
-                <a16:creationId xmlns:a16="http://schemas.microsoft.com/office/drawing/2014/main" id="{8E19BC6A-65AF-E39F-05D5-8CAD3073325C}"/>
+                <a16:creationId xmlns:a16="http://schemas.microsoft.com/office/drawing/2014/main" id="{99BF5430-D21D-2E45-623D-1D7B73711BC7}"/>
               </a:ext>
             </a:extLst>
           </p:cNvPr>
@@ -10160,7 +12294,7 @@
           <p:cNvPr id="3" name="CuadroTexto 2">
             <a:extLst>
               <a:ext uri="{FF2B5EF4-FFF2-40B4-BE49-F238E27FC236}">
-                <a16:creationId xmlns:a16="http://schemas.microsoft.com/office/drawing/2014/main" id="{E41AD3E0-72D6-D3DD-F994-1D3CAB682462}"/>
+                <a16:creationId xmlns:a16="http://schemas.microsoft.com/office/drawing/2014/main" id="{FA27A7D7-73AA-E5CB-FB55-7E89600A6ADE}"/>
               </a:ext>
             </a:extLst>
           </p:cNvPr>
@@ -10200,7 +12334,7 @@
           <p:cNvPr id="5" name="Imagen 4">
             <a:extLst>
               <a:ext uri="{FF2B5EF4-FFF2-40B4-BE49-F238E27FC236}">
-                <a16:creationId xmlns:a16="http://schemas.microsoft.com/office/drawing/2014/main" id="{DA7B3142-ECBA-E906-D98A-A2E54830F2E0}"/>
+                <a16:creationId xmlns:a16="http://schemas.microsoft.com/office/drawing/2014/main" id="{EF4FE04C-3CF4-6B38-60C6-16D0D2CD9E54}"/>
               </a:ext>
             </a:extLst>
           </p:cNvPr>
@@ -10210,7 +12344,7 @@
           <p:nvPr/>
         </p:nvPicPr>
         <p:blipFill>
-          <a:blip r:embed="rId2">
+          <a:blip r:embed="rId3">
             <a:extLst>
               <a:ext uri="{28A0092B-C50C-407E-A947-70E740481C1C}">
                 <a14:useLocalDpi xmlns:a14="http://schemas.microsoft.com/office/drawing/2010/main" val="0"/>
@@ -10241,7 +12375,7 @@
           <p:cNvPr id="6" name="CuadroTexto 5">
             <a:extLst>
               <a:ext uri="{FF2B5EF4-FFF2-40B4-BE49-F238E27FC236}">
-                <a16:creationId xmlns:a16="http://schemas.microsoft.com/office/drawing/2014/main" id="{E07A5D5B-CCCB-54C6-625C-8F92B2896F54}"/>
+                <a16:creationId xmlns:a16="http://schemas.microsoft.com/office/drawing/2014/main" id="{81FD6AE6-3657-A5E6-406F-47AA926AA5D1}"/>
               </a:ext>
             </a:extLst>
           </p:cNvPr>
@@ -10281,7 +12415,7 @@
           <p:cNvPr id="7" name="CuadroTexto 6">
             <a:extLst>
               <a:ext uri="{FF2B5EF4-FFF2-40B4-BE49-F238E27FC236}">
-                <a16:creationId xmlns:a16="http://schemas.microsoft.com/office/drawing/2014/main" id="{90F97448-9487-DD3C-59A2-19BEC488E8BE}"/>
+                <a16:creationId xmlns:a16="http://schemas.microsoft.com/office/drawing/2014/main" id="{3409C926-8B90-DDF6-E819-AAC477D9A825}"/>
               </a:ext>
             </a:extLst>
           </p:cNvPr>
@@ -10380,7 +12514,7 @@
     </p:spTree>
     <p:extLst>
       <p:ext uri="{BB962C8B-B14F-4D97-AF65-F5344CB8AC3E}">
-        <p14:creationId xmlns:p14="http://schemas.microsoft.com/office/powerpoint/2010/main" val="4129019177"/>
+        <p14:creationId xmlns:p14="http://schemas.microsoft.com/office/powerpoint/2010/main" val="3628958224"/>
       </p:ext>
     </p:extLst>
   </p:cSld>
@@ -10420,7 +12554,7 @@
           <p:cNvPr id="2" name="CuadroTexto 1">
             <a:extLst>
               <a:ext uri="{FF2B5EF4-FFF2-40B4-BE49-F238E27FC236}">
-                <a16:creationId xmlns:a16="http://schemas.microsoft.com/office/drawing/2014/main" id="{E4A11209-CAC7-C8A5-A2F2-18CA3541D221}"/>
+                <a16:creationId xmlns:a16="http://schemas.microsoft.com/office/drawing/2014/main" id="{FC9C80E4-B6A2-7547-2BBF-3434A32E50A6}"/>
               </a:ext>
             </a:extLst>
           </p:cNvPr>
@@ -10460,7 +12594,7 @@
           <p:cNvPr id="3" name="CuadroTexto 2">
             <a:extLst>
               <a:ext uri="{FF2B5EF4-FFF2-40B4-BE49-F238E27FC236}">
-                <a16:creationId xmlns:a16="http://schemas.microsoft.com/office/drawing/2014/main" id="{EC70755B-C845-6DF4-2939-11EB004A05D0}"/>
+                <a16:creationId xmlns:a16="http://schemas.microsoft.com/office/drawing/2014/main" id="{5CF920E5-5C85-C637-6343-6CBBFF764A47}"/>
               </a:ext>
             </a:extLst>
           </p:cNvPr>
@@ -10500,7 +12634,7 @@
           <p:cNvPr id="4" name="CuadroTexto 3">
             <a:extLst>
               <a:ext uri="{FF2B5EF4-FFF2-40B4-BE49-F238E27FC236}">
-                <a16:creationId xmlns:a16="http://schemas.microsoft.com/office/drawing/2014/main" id="{742BC8AC-E592-65F1-04AB-FBD809643C13}"/>
+                <a16:creationId xmlns:a16="http://schemas.microsoft.com/office/drawing/2014/main" id="{7203D311-3E78-52F3-4B6C-BA638E1D6BC6}"/>
               </a:ext>
             </a:extLst>
           </p:cNvPr>
@@ -10540,7 +12674,7 @@
           <p:cNvPr id="6" name="Imagen 5">
             <a:extLst>
               <a:ext uri="{FF2B5EF4-FFF2-40B4-BE49-F238E27FC236}">
-                <a16:creationId xmlns:a16="http://schemas.microsoft.com/office/drawing/2014/main" id="{05A2D297-BAC3-6453-8D8A-E27A4CE36A1E}"/>
+                <a16:creationId xmlns:a16="http://schemas.microsoft.com/office/drawing/2014/main" id="{F7F27DAD-ABC7-4E34-42B9-D99749540559}"/>
               </a:ext>
             </a:extLst>
           </p:cNvPr>
@@ -10550,7 +12684,7 @@
           <p:nvPr/>
         </p:nvPicPr>
         <p:blipFill>
-          <a:blip r:embed="rId2">
+          <a:blip r:embed="rId3">
             <a:extLst>
               <a:ext uri="{28A0092B-C50C-407E-A947-70E740481C1C}">
                 <a14:useLocalDpi xmlns:a14="http://schemas.microsoft.com/office/drawing/2010/main" val="0"/>
@@ -10581,7 +12715,7 @@
           <p:cNvPr id="7" name="Rectángulo: esquinas redondeadas 6">
             <a:extLst>
               <a:ext uri="{FF2B5EF4-FFF2-40B4-BE49-F238E27FC236}">
-                <a16:creationId xmlns:a16="http://schemas.microsoft.com/office/drawing/2014/main" id="{E9F3FFA1-AFBB-D710-928D-153EBCD7CC42}"/>
+                <a16:creationId xmlns:a16="http://schemas.microsoft.com/office/drawing/2014/main" id="{79EE4299-D524-33CC-033B-98966273EF55}"/>
               </a:ext>
             </a:extLst>
           </p:cNvPr>
@@ -10635,7 +12769,7 @@
           <p:cNvPr id="8" name="CuadroTexto 7">
             <a:extLst>
               <a:ext uri="{FF2B5EF4-FFF2-40B4-BE49-F238E27FC236}">
-                <a16:creationId xmlns:a16="http://schemas.microsoft.com/office/drawing/2014/main" id="{8CE8D4FA-5926-7692-802D-1D74CAF809CC}"/>
+                <a16:creationId xmlns:a16="http://schemas.microsoft.com/office/drawing/2014/main" id="{755F7BC3-043A-E21A-04EE-C5014F522D99}"/>
               </a:ext>
             </a:extLst>
           </p:cNvPr>
@@ -10675,7 +12809,7 @@
           <p:cNvPr id="9" name="CuadroTexto 8">
             <a:extLst>
               <a:ext uri="{FF2B5EF4-FFF2-40B4-BE49-F238E27FC236}">
-                <a16:creationId xmlns:a16="http://schemas.microsoft.com/office/drawing/2014/main" id="{AAD28811-FBD8-63EB-67C1-D67092E802BC}"/>
+                <a16:creationId xmlns:a16="http://schemas.microsoft.com/office/drawing/2014/main" id="{97566F5A-DF3A-1EBC-7D8F-08D1CC59989E}"/>
               </a:ext>
             </a:extLst>
           </p:cNvPr>
@@ -10715,7 +12849,7 @@
           <p:cNvPr id="10" name="Rectángulo: esquinas redondeadas 9">
             <a:extLst>
               <a:ext uri="{FF2B5EF4-FFF2-40B4-BE49-F238E27FC236}">
-                <a16:creationId xmlns:a16="http://schemas.microsoft.com/office/drawing/2014/main" id="{4F13AADD-2FE5-C63F-1C53-993D8C11C3CD}"/>
+                <a16:creationId xmlns:a16="http://schemas.microsoft.com/office/drawing/2014/main" id="{8D828C9F-B47A-35AE-9253-424BA0A74AAC}"/>
               </a:ext>
             </a:extLst>
           </p:cNvPr>
@@ -10769,7 +12903,7 @@
           <p:cNvPr id="11" name="CuadroTexto 10">
             <a:extLst>
               <a:ext uri="{FF2B5EF4-FFF2-40B4-BE49-F238E27FC236}">
-                <a16:creationId xmlns:a16="http://schemas.microsoft.com/office/drawing/2014/main" id="{D25768D6-11BE-99D0-921E-DD2DCCC6F000}"/>
+                <a16:creationId xmlns:a16="http://schemas.microsoft.com/office/drawing/2014/main" id="{D0421082-2451-F26B-B829-B8642E15DB66}"/>
               </a:ext>
             </a:extLst>
           </p:cNvPr>
@@ -10809,7 +12943,7 @@
           <p:cNvPr id="12" name="CuadroTexto 11">
             <a:extLst>
               <a:ext uri="{FF2B5EF4-FFF2-40B4-BE49-F238E27FC236}">
-                <a16:creationId xmlns:a16="http://schemas.microsoft.com/office/drawing/2014/main" id="{EE0293A7-6372-1514-929F-4B95306EB22B}"/>
+                <a16:creationId xmlns:a16="http://schemas.microsoft.com/office/drawing/2014/main" id="{951A7912-5D6D-4603-6206-74D4EAA458D8}"/>
               </a:ext>
             </a:extLst>
           </p:cNvPr>
@@ -10849,7 +12983,7 @@
           <p:cNvPr id="13" name="Rectángulo: esquinas redondeadas 12">
             <a:extLst>
               <a:ext uri="{FF2B5EF4-FFF2-40B4-BE49-F238E27FC236}">
-                <a16:creationId xmlns:a16="http://schemas.microsoft.com/office/drawing/2014/main" id="{42806D98-5D94-B821-EF2B-F62242900F6C}"/>
+                <a16:creationId xmlns:a16="http://schemas.microsoft.com/office/drawing/2014/main" id="{635F3BDF-BD2B-9167-BA1D-F8257F3B28B6}"/>
               </a:ext>
             </a:extLst>
           </p:cNvPr>
@@ -10903,7 +13037,7 @@
           <p:cNvPr id="14" name="CuadroTexto 13">
             <a:extLst>
               <a:ext uri="{FF2B5EF4-FFF2-40B4-BE49-F238E27FC236}">
-                <a16:creationId xmlns:a16="http://schemas.microsoft.com/office/drawing/2014/main" id="{D0893BA7-D647-8606-0E5E-688994CED508}"/>
+                <a16:creationId xmlns:a16="http://schemas.microsoft.com/office/drawing/2014/main" id="{6D0D4D02-852C-9F8C-0409-012C4E3E204F}"/>
               </a:ext>
             </a:extLst>
           </p:cNvPr>
@@ -10943,7 +13077,7 @@
           <p:cNvPr id="15" name="CuadroTexto 14">
             <a:extLst>
               <a:ext uri="{FF2B5EF4-FFF2-40B4-BE49-F238E27FC236}">
-                <a16:creationId xmlns:a16="http://schemas.microsoft.com/office/drawing/2014/main" id="{ECB0A65C-F63E-5F80-8260-587DDCD9B03B}"/>
+                <a16:creationId xmlns:a16="http://schemas.microsoft.com/office/drawing/2014/main" id="{4721C125-6813-04AB-E303-D7E9C0532B50}"/>
               </a:ext>
             </a:extLst>
           </p:cNvPr>
@@ -10981,7 +13115,7 @@
     </p:spTree>
     <p:extLst>
       <p:ext uri="{BB962C8B-B14F-4D97-AF65-F5344CB8AC3E}">
-        <p14:creationId xmlns:p14="http://schemas.microsoft.com/office/powerpoint/2010/main" val="3497341586"/>
+        <p14:creationId xmlns:p14="http://schemas.microsoft.com/office/powerpoint/2010/main" val="3981709753"/>
       </p:ext>
     </p:extLst>
   </p:cSld>
@@ -11021,7 +13155,7 @@
           <p:cNvPr id="2" name="CuadroTexto 1">
             <a:extLst>
               <a:ext uri="{FF2B5EF4-FFF2-40B4-BE49-F238E27FC236}">
-                <a16:creationId xmlns:a16="http://schemas.microsoft.com/office/drawing/2014/main" id="{BA79D961-E08F-4858-96FA-A6D8C7A8D870}"/>
+                <a16:creationId xmlns:a16="http://schemas.microsoft.com/office/drawing/2014/main" id="{827533D7-6C40-0DAD-5475-14F3E9CCF73B}"/>
               </a:ext>
             </a:extLst>
           </p:cNvPr>
@@ -11061,7 +13195,7 @@
           <p:cNvPr id="3" name="CuadroTexto 2">
             <a:extLst>
               <a:ext uri="{FF2B5EF4-FFF2-40B4-BE49-F238E27FC236}">
-                <a16:creationId xmlns:a16="http://schemas.microsoft.com/office/drawing/2014/main" id="{0B1B2539-7EAA-D965-8623-42F44415337C}"/>
+                <a16:creationId xmlns:a16="http://schemas.microsoft.com/office/drawing/2014/main" id="{C96E84F9-86C6-FDD5-0734-613FE7FD61F8}"/>
               </a:ext>
             </a:extLst>
           </p:cNvPr>
@@ -11101,7 +13235,7 @@
           <p:cNvPr id="5" name="Imagen 4">
             <a:extLst>
               <a:ext uri="{FF2B5EF4-FFF2-40B4-BE49-F238E27FC236}">
-                <a16:creationId xmlns:a16="http://schemas.microsoft.com/office/drawing/2014/main" id="{22AA2E8A-CB30-4029-91C4-1E1CB880F8ED}"/>
+                <a16:creationId xmlns:a16="http://schemas.microsoft.com/office/drawing/2014/main" id="{510571C2-4000-98F4-EECF-1955592F3673}"/>
               </a:ext>
             </a:extLst>
           </p:cNvPr>
@@ -11111,7 +13245,7 @@
           <p:nvPr/>
         </p:nvPicPr>
         <p:blipFill>
-          <a:blip r:embed="rId2">
+          <a:blip r:embed="rId3">
             <a:extLst>
               <a:ext uri="{28A0092B-C50C-407E-A947-70E740481C1C}">
                 <a14:useLocalDpi xmlns:a14="http://schemas.microsoft.com/office/drawing/2010/main" val="0"/>
@@ -11142,7 +13276,7 @@
           <p:cNvPr id="6" name="CuadroTexto 5">
             <a:extLst>
               <a:ext uri="{FF2B5EF4-FFF2-40B4-BE49-F238E27FC236}">
-                <a16:creationId xmlns:a16="http://schemas.microsoft.com/office/drawing/2014/main" id="{6DA13D5F-1396-1564-4634-76D19C7A308F}"/>
+                <a16:creationId xmlns:a16="http://schemas.microsoft.com/office/drawing/2014/main" id="{781E1BD5-03E6-A083-BACE-92A9C7DDBDED}"/>
               </a:ext>
             </a:extLst>
           </p:cNvPr>
@@ -11241,7 +13375,7 @@
     </p:spTree>
     <p:extLst>
       <p:ext uri="{BB962C8B-B14F-4D97-AF65-F5344CB8AC3E}">
-        <p14:creationId xmlns:p14="http://schemas.microsoft.com/office/powerpoint/2010/main" val="678131088"/>
+        <p14:creationId xmlns:p14="http://schemas.microsoft.com/office/powerpoint/2010/main" val="2973036919"/>
       </p:ext>
     </p:extLst>
   </p:cSld>
@@ -11281,7 +13415,7 @@
           <p:cNvPr id="2" name="CuadroTexto 1">
             <a:extLst>
               <a:ext uri="{FF2B5EF4-FFF2-40B4-BE49-F238E27FC236}">
-                <a16:creationId xmlns:a16="http://schemas.microsoft.com/office/drawing/2014/main" id="{5C7D87DD-29AA-3C83-3C1E-2E4867E61651}"/>
+                <a16:creationId xmlns:a16="http://schemas.microsoft.com/office/drawing/2014/main" id="{BA6EB7F5-9509-EDB7-2B48-CABB6DE58D73}"/>
               </a:ext>
             </a:extLst>
           </p:cNvPr>
@@ -11321,7 +13455,7 @@
           <p:cNvPr id="3" name="CuadroTexto 2">
             <a:extLst>
               <a:ext uri="{FF2B5EF4-FFF2-40B4-BE49-F238E27FC236}">
-                <a16:creationId xmlns:a16="http://schemas.microsoft.com/office/drawing/2014/main" id="{67FA38A7-5B0E-EC4C-0298-DE5CD5D77697}"/>
+                <a16:creationId xmlns:a16="http://schemas.microsoft.com/office/drawing/2014/main" id="{66AB0523-998F-58D4-7BF3-405F5BA7373D}"/>
               </a:ext>
             </a:extLst>
           </p:cNvPr>
@@ -11361,7 +13495,7 @@
           <p:cNvPr id="4" name="CuadroTexto 3">
             <a:extLst>
               <a:ext uri="{FF2B5EF4-FFF2-40B4-BE49-F238E27FC236}">
-                <a16:creationId xmlns:a16="http://schemas.microsoft.com/office/drawing/2014/main" id="{4132B8C2-F411-3FC4-6FD2-5C9336F710F1}"/>
+                <a16:creationId xmlns:a16="http://schemas.microsoft.com/office/drawing/2014/main" id="{7E780F74-C190-84A5-16E0-84C03A07B02C}"/>
               </a:ext>
             </a:extLst>
           </p:cNvPr>
@@ -11401,7 +13535,7 @@
           <p:cNvPr id="6" name="Imagen 5">
             <a:extLst>
               <a:ext uri="{FF2B5EF4-FFF2-40B4-BE49-F238E27FC236}">
-                <a16:creationId xmlns:a16="http://schemas.microsoft.com/office/drawing/2014/main" id="{63E56FE5-2A74-A348-92BC-49322CFF666E}"/>
+                <a16:creationId xmlns:a16="http://schemas.microsoft.com/office/drawing/2014/main" id="{B004ECCC-F1AA-9879-DDE6-F99198FF4894}"/>
               </a:ext>
             </a:extLst>
           </p:cNvPr>
@@ -11411,7 +13545,7 @@
           <p:nvPr/>
         </p:nvPicPr>
         <p:blipFill>
-          <a:blip r:embed="rId2">
+          <a:blip r:embed="rId3">
             <a:extLst>
               <a:ext uri="{28A0092B-C50C-407E-A947-70E740481C1C}">
                 <a14:useLocalDpi xmlns:a14="http://schemas.microsoft.com/office/drawing/2010/main" val="0"/>
@@ -11442,7 +13576,7 @@
           <p:cNvPr id="7" name="Rectángulo: esquinas redondeadas 6">
             <a:extLst>
               <a:ext uri="{FF2B5EF4-FFF2-40B4-BE49-F238E27FC236}">
-                <a16:creationId xmlns:a16="http://schemas.microsoft.com/office/drawing/2014/main" id="{D4FF35B6-A579-E4EF-DD81-7260D14BE468}"/>
+                <a16:creationId xmlns:a16="http://schemas.microsoft.com/office/drawing/2014/main" id="{DBE8309A-CE95-CA6C-4146-AEF7D0FFBD0E}"/>
               </a:ext>
             </a:extLst>
           </p:cNvPr>
@@ -11496,7 +13630,7 @@
           <p:cNvPr id="8" name="CuadroTexto 7">
             <a:extLst>
               <a:ext uri="{FF2B5EF4-FFF2-40B4-BE49-F238E27FC236}">
-                <a16:creationId xmlns:a16="http://schemas.microsoft.com/office/drawing/2014/main" id="{4B3CFD33-CF6F-DD39-17F3-EFFA9309B7D8}"/>
+                <a16:creationId xmlns:a16="http://schemas.microsoft.com/office/drawing/2014/main" id="{B227ED6A-953F-C914-1AAC-45885824EB25}"/>
               </a:ext>
             </a:extLst>
           </p:cNvPr>
@@ -11536,7 +13670,7 @@
           <p:cNvPr id="9" name="CuadroTexto 8">
             <a:extLst>
               <a:ext uri="{FF2B5EF4-FFF2-40B4-BE49-F238E27FC236}">
-                <a16:creationId xmlns:a16="http://schemas.microsoft.com/office/drawing/2014/main" id="{524415CD-C69E-A89C-4E9C-2B561DB05EC9}"/>
+                <a16:creationId xmlns:a16="http://schemas.microsoft.com/office/drawing/2014/main" id="{C49D88BA-2A8C-6D6F-05B0-8A88BD8AEFD5}"/>
               </a:ext>
             </a:extLst>
           </p:cNvPr>
@@ -11574,7 +13708,7 @@
     </p:spTree>
     <p:extLst>
       <p:ext uri="{BB962C8B-B14F-4D97-AF65-F5344CB8AC3E}">
-        <p14:creationId xmlns:p14="http://schemas.microsoft.com/office/powerpoint/2010/main" val="1537109807"/>
+        <p14:creationId xmlns:p14="http://schemas.microsoft.com/office/powerpoint/2010/main" val="3721446040"/>
       </p:ext>
     </p:extLst>
   </p:cSld>
@@ -11614,7 +13748,7 @@
           <p:cNvPr id="2" name="CuadroTexto 1">
             <a:extLst>
               <a:ext uri="{FF2B5EF4-FFF2-40B4-BE49-F238E27FC236}">
-                <a16:creationId xmlns:a16="http://schemas.microsoft.com/office/drawing/2014/main" id="{A82CDF45-685F-7AAC-08B4-C42229D107FF}"/>
+                <a16:creationId xmlns:a16="http://schemas.microsoft.com/office/drawing/2014/main" id="{2C4369B0-386A-0AF1-FF04-68CB20E40251}"/>
               </a:ext>
             </a:extLst>
           </p:cNvPr>
@@ -11654,7 +13788,7 @@
           <p:cNvPr id="3" name="CuadroTexto 2">
             <a:extLst>
               <a:ext uri="{FF2B5EF4-FFF2-40B4-BE49-F238E27FC236}">
-                <a16:creationId xmlns:a16="http://schemas.microsoft.com/office/drawing/2014/main" id="{62694766-9C70-301A-7117-01EEAA15FDA1}"/>
+                <a16:creationId xmlns:a16="http://schemas.microsoft.com/office/drawing/2014/main" id="{E1CE12B0-2E15-59E3-9F03-EED5651FF789}"/>
               </a:ext>
             </a:extLst>
           </p:cNvPr>
@@ -11694,7 +13828,7 @@
           <p:cNvPr id="4" name="CuadroTexto 3">
             <a:extLst>
               <a:ext uri="{FF2B5EF4-FFF2-40B4-BE49-F238E27FC236}">
-                <a16:creationId xmlns:a16="http://schemas.microsoft.com/office/drawing/2014/main" id="{3EEA0B73-29BE-2136-E44B-B589317BD148}"/>
+                <a16:creationId xmlns:a16="http://schemas.microsoft.com/office/drawing/2014/main" id="{40C3438E-8629-7708-9C35-F67BADCFEF6C}"/>
               </a:ext>
             </a:extLst>
           </p:cNvPr>
@@ -11734,7 +13868,7 @@
           <p:cNvPr id="5" name="Rectángulo: esquinas redondeadas 4">
             <a:extLst>
               <a:ext uri="{FF2B5EF4-FFF2-40B4-BE49-F238E27FC236}">
-                <a16:creationId xmlns:a16="http://schemas.microsoft.com/office/drawing/2014/main" id="{76539E62-22C0-70CC-83B3-841E6281B192}"/>
+                <a16:creationId xmlns:a16="http://schemas.microsoft.com/office/drawing/2014/main" id="{DC569418-C7D0-9E32-F31D-0C2DCB1B4843}"/>
               </a:ext>
             </a:extLst>
           </p:cNvPr>
@@ -11788,7 +13922,7 @@
           <p:cNvPr id="6" name="CuadroTexto 5">
             <a:extLst>
               <a:ext uri="{FF2B5EF4-FFF2-40B4-BE49-F238E27FC236}">
-                <a16:creationId xmlns:a16="http://schemas.microsoft.com/office/drawing/2014/main" id="{49AE26AD-3519-5EFA-7ECE-0A0834F2347C}"/>
+                <a16:creationId xmlns:a16="http://schemas.microsoft.com/office/drawing/2014/main" id="{2383DE6A-84C8-354D-258F-0C6601F0A06B}"/>
               </a:ext>
             </a:extLst>
           </p:cNvPr>
@@ -11828,7 +13962,7 @@
           <p:cNvPr id="7" name="CuadroTexto 6">
             <a:extLst>
               <a:ext uri="{FF2B5EF4-FFF2-40B4-BE49-F238E27FC236}">
-                <a16:creationId xmlns:a16="http://schemas.microsoft.com/office/drawing/2014/main" id="{E4FA83F1-ED90-227D-7868-A89C5CCCD954}"/>
+                <a16:creationId xmlns:a16="http://schemas.microsoft.com/office/drawing/2014/main" id="{21AF7642-980F-A653-5286-88FBBC7C8584}"/>
               </a:ext>
             </a:extLst>
           </p:cNvPr>
@@ -11868,7 +14002,7 @@
           <p:cNvPr id="8" name="Rectángulo: esquinas redondeadas 7">
             <a:extLst>
               <a:ext uri="{FF2B5EF4-FFF2-40B4-BE49-F238E27FC236}">
-                <a16:creationId xmlns:a16="http://schemas.microsoft.com/office/drawing/2014/main" id="{CD0E7F07-06E8-14CF-56C0-549B3119A75E}"/>
+                <a16:creationId xmlns:a16="http://schemas.microsoft.com/office/drawing/2014/main" id="{9B3107BF-D4EE-7A0B-11C0-BA5D9EED370B}"/>
               </a:ext>
             </a:extLst>
           </p:cNvPr>
@@ -11922,7 +14056,7 @@
           <p:cNvPr id="9" name="CuadroTexto 8">
             <a:extLst>
               <a:ext uri="{FF2B5EF4-FFF2-40B4-BE49-F238E27FC236}">
-                <a16:creationId xmlns:a16="http://schemas.microsoft.com/office/drawing/2014/main" id="{28BB2100-C35C-6C35-E119-EEE46D92A578}"/>
+                <a16:creationId xmlns:a16="http://schemas.microsoft.com/office/drawing/2014/main" id="{540737B3-9BA6-E23A-E014-D2BC35D3938C}"/>
               </a:ext>
             </a:extLst>
           </p:cNvPr>
@@ -11962,7 +14096,7 @@
           <p:cNvPr id="10" name="CuadroTexto 9">
             <a:extLst>
               <a:ext uri="{FF2B5EF4-FFF2-40B4-BE49-F238E27FC236}">
-                <a16:creationId xmlns:a16="http://schemas.microsoft.com/office/drawing/2014/main" id="{C861713D-F9D0-29AE-B9F8-852E6B84D2CD}"/>
+                <a16:creationId xmlns:a16="http://schemas.microsoft.com/office/drawing/2014/main" id="{10DDF005-F43D-EA6A-52A9-D58533453705}"/>
               </a:ext>
             </a:extLst>
           </p:cNvPr>
@@ -12002,7 +14136,7 @@
           <p:cNvPr id="11" name="Rectángulo: esquinas redondeadas 10">
             <a:extLst>
               <a:ext uri="{FF2B5EF4-FFF2-40B4-BE49-F238E27FC236}">
-                <a16:creationId xmlns:a16="http://schemas.microsoft.com/office/drawing/2014/main" id="{29C698F1-A941-03C9-E5C9-BB90546C39A8}"/>
+                <a16:creationId xmlns:a16="http://schemas.microsoft.com/office/drawing/2014/main" id="{D28CA2DA-CA5A-152C-1581-A26A90F51AD9}"/>
               </a:ext>
             </a:extLst>
           </p:cNvPr>
@@ -12056,7 +14190,7 @@
           <p:cNvPr id="12" name="CuadroTexto 11">
             <a:extLst>
               <a:ext uri="{FF2B5EF4-FFF2-40B4-BE49-F238E27FC236}">
-                <a16:creationId xmlns:a16="http://schemas.microsoft.com/office/drawing/2014/main" id="{6AB9EB41-0047-5D02-73E3-79D9681D7C5D}"/>
+                <a16:creationId xmlns:a16="http://schemas.microsoft.com/office/drawing/2014/main" id="{56FF54C7-7A1A-BB4E-8DC4-DFA1B7A0B0A1}"/>
               </a:ext>
             </a:extLst>
           </p:cNvPr>
@@ -12096,7 +14230,7 @@
           <p:cNvPr id="13" name="CuadroTexto 12">
             <a:extLst>
               <a:ext uri="{FF2B5EF4-FFF2-40B4-BE49-F238E27FC236}">
-                <a16:creationId xmlns:a16="http://schemas.microsoft.com/office/drawing/2014/main" id="{90880360-89E0-AC87-5EE9-13D356B06051}"/>
+                <a16:creationId xmlns:a16="http://schemas.microsoft.com/office/drawing/2014/main" id="{0CB6EDC4-7B76-F30B-4B3E-0FAEC28361B0}"/>
               </a:ext>
             </a:extLst>
           </p:cNvPr>
@@ -12136,7 +14270,7 @@
           <p:cNvPr id="14" name="Rectángulo: esquinas redondeadas 13">
             <a:extLst>
               <a:ext uri="{FF2B5EF4-FFF2-40B4-BE49-F238E27FC236}">
-                <a16:creationId xmlns:a16="http://schemas.microsoft.com/office/drawing/2014/main" id="{F15BF842-35C3-E6AE-0E2D-44A3C8B3B4AE}"/>
+                <a16:creationId xmlns:a16="http://schemas.microsoft.com/office/drawing/2014/main" id="{50BE36DB-37F1-7802-82CE-6BFDD0A97584}"/>
               </a:ext>
             </a:extLst>
           </p:cNvPr>
@@ -12190,7 +14324,7 @@
           <p:cNvPr id="15" name="CuadroTexto 14">
             <a:extLst>
               <a:ext uri="{FF2B5EF4-FFF2-40B4-BE49-F238E27FC236}">
-                <a16:creationId xmlns:a16="http://schemas.microsoft.com/office/drawing/2014/main" id="{8B3CEDB2-FFC3-471B-A290-01DB236A748C}"/>
+                <a16:creationId xmlns:a16="http://schemas.microsoft.com/office/drawing/2014/main" id="{1E315D79-31E9-563D-EA8A-B35B1B776951}"/>
               </a:ext>
             </a:extLst>
           </p:cNvPr>
@@ -12230,7 +14364,7 @@
           <p:cNvPr id="16" name="CuadroTexto 15">
             <a:extLst>
               <a:ext uri="{FF2B5EF4-FFF2-40B4-BE49-F238E27FC236}">
-                <a16:creationId xmlns:a16="http://schemas.microsoft.com/office/drawing/2014/main" id="{BF7426E8-7C20-5AD0-0D23-49A0DDC3702C}"/>
+                <a16:creationId xmlns:a16="http://schemas.microsoft.com/office/drawing/2014/main" id="{F069965E-889D-2229-4AC6-29BC22B5CA86}"/>
               </a:ext>
             </a:extLst>
           </p:cNvPr>
@@ -12270,7 +14404,7 @@
           <p:cNvPr id="17" name="Rectángulo: esquinas redondeadas 16">
             <a:extLst>
               <a:ext uri="{FF2B5EF4-FFF2-40B4-BE49-F238E27FC236}">
-                <a16:creationId xmlns:a16="http://schemas.microsoft.com/office/drawing/2014/main" id="{1ACC399E-2A95-0D97-985F-0B379863B5B7}"/>
+                <a16:creationId xmlns:a16="http://schemas.microsoft.com/office/drawing/2014/main" id="{66AE4EB9-A6BD-9C45-98DA-CAC575BF50D2}"/>
               </a:ext>
             </a:extLst>
           </p:cNvPr>
@@ -12324,7 +14458,7 @@
           <p:cNvPr id="18" name="CuadroTexto 17">
             <a:extLst>
               <a:ext uri="{FF2B5EF4-FFF2-40B4-BE49-F238E27FC236}">
-                <a16:creationId xmlns:a16="http://schemas.microsoft.com/office/drawing/2014/main" id="{0C2998C9-6035-E014-9090-5565E6E4252B}"/>
+                <a16:creationId xmlns:a16="http://schemas.microsoft.com/office/drawing/2014/main" id="{F73CEC4B-0907-44F0-FD5C-081B5F15AABB}"/>
               </a:ext>
             </a:extLst>
           </p:cNvPr>
@@ -12364,7 +14498,7 @@
           <p:cNvPr id="19" name="CuadroTexto 18">
             <a:extLst>
               <a:ext uri="{FF2B5EF4-FFF2-40B4-BE49-F238E27FC236}">
-                <a16:creationId xmlns:a16="http://schemas.microsoft.com/office/drawing/2014/main" id="{F87FFE9B-DF91-5AB5-070F-65CFCE153E56}"/>
+                <a16:creationId xmlns:a16="http://schemas.microsoft.com/office/drawing/2014/main" id="{35A0CF5E-50F8-8A72-0751-07F85047D490}"/>
               </a:ext>
             </a:extLst>
           </p:cNvPr>
@@ -12404,7 +14538,7 @@
           <p:cNvPr id="20" name="Rectángulo: esquinas redondeadas 19">
             <a:extLst>
               <a:ext uri="{FF2B5EF4-FFF2-40B4-BE49-F238E27FC236}">
-                <a16:creationId xmlns:a16="http://schemas.microsoft.com/office/drawing/2014/main" id="{A04152B9-2D10-1A64-2754-64D85FC68C1C}"/>
+                <a16:creationId xmlns:a16="http://schemas.microsoft.com/office/drawing/2014/main" id="{1777B5E5-C7BA-67C4-AEA3-3A8A26A519ED}"/>
               </a:ext>
             </a:extLst>
           </p:cNvPr>
@@ -12458,7 +14592,7 @@
           <p:cNvPr id="21" name="CuadroTexto 20">
             <a:extLst>
               <a:ext uri="{FF2B5EF4-FFF2-40B4-BE49-F238E27FC236}">
-                <a16:creationId xmlns:a16="http://schemas.microsoft.com/office/drawing/2014/main" id="{7253DF80-EF1A-0A04-7EEC-E53257F1D27A}"/>
+                <a16:creationId xmlns:a16="http://schemas.microsoft.com/office/drawing/2014/main" id="{C72ABDFE-AAF1-AB79-4E0B-C9BE08291F26}"/>
               </a:ext>
             </a:extLst>
           </p:cNvPr>
@@ -12498,7 +14632,7 @@
           <p:cNvPr id="22" name="CuadroTexto 21">
             <a:extLst>
               <a:ext uri="{FF2B5EF4-FFF2-40B4-BE49-F238E27FC236}">
-                <a16:creationId xmlns:a16="http://schemas.microsoft.com/office/drawing/2014/main" id="{DCDE9C4B-FF72-E33E-A1D5-5C82684DA2DE}"/>
+                <a16:creationId xmlns:a16="http://schemas.microsoft.com/office/drawing/2014/main" id="{596F02C3-3E14-20E1-AFFD-0EE274324B03}"/>
               </a:ext>
             </a:extLst>
           </p:cNvPr>
@@ -12536,7 +14670,7 @@
     </p:spTree>
     <p:extLst>
       <p:ext uri="{BB962C8B-B14F-4D97-AF65-F5344CB8AC3E}">
-        <p14:creationId xmlns:p14="http://schemas.microsoft.com/office/powerpoint/2010/main" val="3198014928"/>
+        <p14:creationId xmlns:p14="http://schemas.microsoft.com/office/powerpoint/2010/main" val="4095129708"/>
       </p:ext>
     </p:extLst>
   </p:cSld>
@@ -12839,4 +14973,299 @@
     </a:ext>
   </a:extLst>
 </a:theme>
+</file>
+
+<file path=ppt/theme/theme2.xml><?xml version="1.0" encoding="utf-8"?>
+<a:theme xmlns:a="http://schemas.openxmlformats.org/drawingml/2006/main" name="Tema de Office">
+  <a:themeElements>
+    <a:clrScheme name="Office">
+      <a:dk1>
+        <a:sysClr val="windowText" lastClr="000000"/>
+      </a:dk1>
+      <a:lt1>
+        <a:sysClr val="window" lastClr="FFFFFF"/>
+      </a:lt1>
+      <a:dk2>
+        <a:srgbClr val="44546A"/>
+      </a:dk2>
+      <a:lt2>
+        <a:srgbClr val="E7E6E6"/>
+      </a:lt2>
+      <a:accent1>
+        <a:srgbClr val="4472C4"/>
+      </a:accent1>
+      <a:accent2>
+        <a:srgbClr val="ED7D31"/>
+      </a:accent2>
+      <a:accent3>
+        <a:srgbClr val="A5A5A5"/>
+      </a:accent3>
+      <a:accent4>
+        <a:srgbClr val="FFC000"/>
+      </a:accent4>
+      <a:accent5>
+        <a:srgbClr val="5B9BD5"/>
+      </a:accent5>
+      <a:accent6>
+        <a:srgbClr val="70AD47"/>
+      </a:accent6>
+      <a:hlink>
+        <a:srgbClr val="0563C1"/>
+      </a:hlink>
+      <a:folHlink>
+        <a:srgbClr val="954F72"/>
+      </a:folHlink>
+    </a:clrScheme>
+    <a:fontScheme name="Office">
+      <a:majorFont>
+        <a:latin typeface="Calibri Light" panose="020F0302020204030204"/>
+        <a:ea typeface=""/>
+        <a:cs typeface=""/>
+        <a:font script="Jpan" typeface="游ゴシック Light"/>
+        <a:font script="Hang" typeface="맑은 고딕"/>
+        <a:font script="Hans" typeface="等线 Light"/>
+        <a:font script="Hant" typeface="新細明體"/>
+        <a:font script="Arab" typeface="Times New Roman"/>
+        <a:font script="Hebr" typeface="Times New Roman"/>
+        <a:font script="Thai" typeface="Angsana New"/>
+        <a:font script="Ethi" typeface="Nyala"/>
+        <a:font script="Beng" typeface="Vrinda"/>
+        <a:font script="Gujr" typeface="Shruti"/>
+        <a:font script="Khmr" typeface="MoolBoran"/>
+        <a:font script="Knda" typeface="Tunga"/>
+        <a:font script="Guru" typeface="Raavi"/>
+        <a:font script="Cans" typeface="Euphemia"/>
+        <a:font script="Cher" typeface="Plantagenet Cherokee"/>
+        <a:font script="Yiii" typeface="Microsoft Yi Baiti"/>
+        <a:font script="Tibt" typeface="Microsoft Himalaya"/>
+        <a:font script="Thaa" typeface="MV Boli"/>
+        <a:font script="Deva" typeface="Mangal"/>
+        <a:font script="Telu" typeface="Gautami"/>
+        <a:font script="Taml" typeface="Latha"/>
+        <a:font script="Syrc" typeface="Estrangelo Edessa"/>
+        <a:font script="Orya" typeface="Kalinga"/>
+        <a:font script="Mlym" typeface="Kartika"/>
+        <a:font script="Laoo" typeface="DokChampa"/>
+        <a:font script="Sinh" typeface="Iskoola Pota"/>
+        <a:font script="Mong" typeface="Mongolian Baiti"/>
+        <a:font script="Viet" typeface="Times New Roman"/>
+        <a:font script="Uigh" typeface="Microsoft Uighur"/>
+        <a:font script="Geor" typeface="Sylfaen"/>
+        <a:font script="Armn" typeface="Arial"/>
+        <a:font script="Bugi" typeface="Leelawadee UI"/>
+        <a:font script="Bopo" typeface="Microsoft JhengHei"/>
+        <a:font script="Java" typeface="Javanese Text"/>
+        <a:font script="Lisu" typeface="Segoe UI"/>
+        <a:font script="Mymr" typeface="Myanmar Text"/>
+        <a:font script="Nkoo" typeface="Ebrima"/>
+        <a:font script="Olck" typeface="Nirmala UI"/>
+        <a:font script="Osma" typeface="Ebrima"/>
+        <a:font script="Phag" typeface="Phagspa"/>
+        <a:font script="Syrn" typeface="Estrangelo Edessa"/>
+        <a:font script="Syrj" typeface="Estrangelo Edessa"/>
+        <a:font script="Syre" typeface="Estrangelo Edessa"/>
+        <a:font script="Sora" typeface="Nirmala UI"/>
+        <a:font script="Tale" typeface="Microsoft Tai Le"/>
+        <a:font script="Talu" typeface="Microsoft New Tai Lue"/>
+        <a:font script="Tfng" typeface="Ebrima"/>
+      </a:majorFont>
+      <a:minorFont>
+        <a:latin typeface="Calibri" panose="020F0502020204030204"/>
+        <a:ea typeface=""/>
+        <a:cs typeface=""/>
+        <a:font script="Jpan" typeface="游ゴシック"/>
+        <a:font script="Hang" typeface="맑은 고딕"/>
+        <a:font script="Hans" typeface="等线"/>
+        <a:font script="Hant" typeface="新細明體"/>
+        <a:font script="Arab" typeface="Arial"/>
+        <a:font script="Hebr" typeface="Arial"/>
+        <a:font script="Thai" typeface="Cordia New"/>
+        <a:font script="Ethi" typeface="Nyala"/>
+        <a:font script="Beng" typeface="Vrinda"/>
+        <a:font script="Gujr" typeface="Shruti"/>
+        <a:font script="Khmr" typeface="DaunPenh"/>
+        <a:font script="Knda" typeface="Tunga"/>
+        <a:font script="Guru" typeface="Raavi"/>
+        <a:font script="Cans" typeface="Euphemia"/>
+        <a:font script="Cher" typeface="Plantagenet Cherokee"/>
+        <a:font script="Yiii" typeface="Microsoft Yi Baiti"/>
+        <a:font script="Tibt" typeface="Microsoft Himalaya"/>
+        <a:font script="Thaa" typeface="MV Boli"/>
+        <a:font script="Deva" typeface="Mangal"/>
+        <a:font script="Telu" typeface="Gautami"/>
+        <a:font script="Taml" typeface="Latha"/>
+        <a:font script="Syrc" typeface="Estrangelo Edessa"/>
+        <a:font script="Orya" typeface="Kalinga"/>
+        <a:font script="Mlym" typeface="Kartika"/>
+        <a:font script="Laoo" typeface="DokChampa"/>
+        <a:font script="Sinh" typeface="Iskoola Pota"/>
+        <a:font script="Mong" typeface="Mongolian Baiti"/>
+        <a:font script="Viet" typeface="Arial"/>
+        <a:font script="Uigh" typeface="Microsoft Uighur"/>
+        <a:font script="Geor" typeface="Sylfaen"/>
+        <a:font script="Armn" typeface="Arial"/>
+        <a:font script="Bugi" typeface="Leelawadee UI"/>
+        <a:font script="Bopo" typeface="Microsoft JhengHei"/>
+        <a:font script="Java" typeface="Javanese Text"/>
+        <a:font script="Lisu" typeface="Segoe UI"/>
+        <a:font script="Mymr" typeface="Myanmar Text"/>
+        <a:font script="Nkoo" typeface="Ebrima"/>
+        <a:font script="Olck" typeface="Nirmala UI"/>
+        <a:font script="Osma" typeface="Ebrima"/>
+        <a:font script="Phag" typeface="Phagspa"/>
+        <a:font script="Syrn" typeface="Estrangelo Edessa"/>
+        <a:font script="Syrj" typeface="Estrangelo Edessa"/>
+        <a:font script="Syre" typeface="Estrangelo Edessa"/>
+        <a:font script="Sora" typeface="Nirmala UI"/>
+        <a:font script="Tale" typeface="Microsoft Tai Le"/>
+        <a:font script="Talu" typeface="Microsoft New Tai Lue"/>
+        <a:font script="Tfng" typeface="Ebrima"/>
+      </a:minorFont>
+    </a:fontScheme>
+    <a:fmtScheme name="Office">
+      <a:fillStyleLst>
+        <a:solidFill>
+          <a:schemeClr val="phClr"/>
+        </a:solidFill>
+        <a:gradFill rotWithShape="1">
+          <a:gsLst>
+            <a:gs pos="0">
+              <a:schemeClr val="phClr">
+                <a:lumMod val="110000"/>
+                <a:satMod val="105000"/>
+                <a:tint val="67000"/>
+              </a:schemeClr>
+            </a:gs>
+            <a:gs pos="50000">
+              <a:schemeClr val="phClr">
+                <a:lumMod val="105000"/>
+                <a:satMod val="103000"/>
+                <a:tint val="73000"/>
+              </a:schemeClr>
+            </a:gs>
+            <a:gs pos="100000">
+              <a:schemeClr val="phClr">
+                <a:lumMod val="105000"/>
+                <a:satMod val="109000"/>
+                <a:tint val="81000"/>
+              </a:schemeClr>
+            </a:gs>
+          </a:gsLst>
+          <a:lin ang="5400000" scaled="0"/>
+        </a:gradFill>
+        <a:gradFill rotWithShape="1">
+          <a:gsLst>
+            <a:gs pos="0">
+              <a:schemeClr val="phClr">
+                <a:satMod val="103000"/>
+                <a:lumMod val="102000"/>
+                <a:tint val="94000"/>
+              </a:schemeClr>
+            </a:gs>
+            <a:gs pos="50000">
+              <a:schemeClr val="phClr">
+                <a:satMod val="110000"/>
+                <a:lumMod val="100000"/>
+                <a:shade val="100000"/>
+              </a:schemeClr>
+            </a:gs>
+            <a:gs pos="100000">
+              <a:schemeClr val="phClr">
+                <a:lumMod val="99000"/>
+                <a:satMod val="120000"/>
+                <a:shade val="78000"/>
+              </a:schemeClr>
+            </a:gs>
+          </a:gsLst>
+          <a:lin ang="5400000" scaled="0"/>
+        </a:gradFill>
+      </a:fillStyleLst>
+      <a:lnStyleLst>
+        <a:ln w="6350" cap="flat" cmpd="sng" algn="ctr">
+          <a:solidFill>
+            <a:schemeClr val="phClr"/>
+          </a:solidFill>
+          <a:prstDash val="solid"/>
+          <a:miter lim="800000"/>
+        </a:ln>
+        <a:ln w="12700" cap="flat" cmpd="sng" algn="ctr">
+          <a:solidFill>
+            <a:schemeClr val="phClr"/>
+          </a:solidFill>
+          <a:prstDash val="solid"/>
+          <a:miter lim="800000"/>
+        </a:ln>
+        <a:ln w="19050" cap="flat" cmpd="sng" algn="ctr">
+          <a:solidFill>
+            <a:schemeClr val="phClr"/>
+          </a:solidFill>
+          <a:prstDash val="solid"/>
+          <a:miter lim="800000"/>
+        </a:ln>
+      </a:lnStyleLst>
+      <a:effectStyleLst>
+        <a:effectStyle>
+          <a:effectLst/>
+        </a:effectStyle>
+        <a:effectStyle>
+          <a:effectLst/>
+        </a:effectStyle>
+        <a:effectStyle>
+          <a:effectLst>
+            <a:outerShdw blurRad="57150" dist="19050" dir="5400000" algn="ctr" rotWithShape="0">
+              <a:srgbClr val="000000">
+                <a:alpha val="63000"/>
+              </a:srgbClr>
+            </a:outerShdw>
+          </a:effectLst>
+        </a:effectStyle>
+      </a:effectStyleLst>
+      <a:bgFillStyleLst>
+        <a:solidFill>
+          <a:schemeClr val="phClr"/>
+        </a:solidFill>
+        <a:solidFill>
+          <a:schemeClr val="phClr">
+            <a:tint val="95000"/>
+            <a:satMod val="170000"/>
+          </a:schemeClr>
+        </a:solidFill>
+        <a:gradFill rotWithShape="1">
+          <a:gsLst>
+            <a:gs pos="0">
+              <a:schemeClr val="phClr">
+                <a:tint val="93000"/>
+                <a:satMod val="150000"/>
+                <a:shade val="98000"/>
+                <a:lumMod val="102000"/>
+              </a:schemeClr>
+            </a:gs>
+            <a:gs pos="50000">
+              <a:schemeClr val="phClr">
+                <a:tint val="98000"/>
+                <a:satMod val="130000"/>
+                <a:shade val="90000"/>
+                <a:lumMod val="103000"/>
+              </a:schemeClr>
+            </a:gs>
+            <a:gs pos="100000">
+              <a:schemeClr val="phClr">
+                <a:shade val="63000"/>
+                <a:satMod val="120000"/>
+              </a:schemeClr>
+            </a:gs>
+          </a:gsLst>
+          <a:lin ang="5400000" scaled="0"/>
+        </a:gradFill>
+      </a:bgFillStyleLst>
+    </a:fmtScheme>
+  </a:themeElements>
+  <a:objectDefaults/>
+  <a:extraClrSchemeLst/>
+  <a:extLst>
+    <a:ext uri="{05A4C25C-085E-4340-85A3-A5531E510DB2}">
+      <thm15:themeFamily xmlns:thm15="http://schemas.microsoft.com/office/thememl/2012/main" name="Office Theme" id="{62F939B6-93AF-4DB8-9C6B-D6C7DFDC589F}" vid="{4A3C46E8-61CC-4603-A589-7422A47A8E4A}"/>
+    </a:ext>
+  </a:extLst>
+</a:theme>
 </file>
--- a/docs/presentacion-defensa-final.pptx
+++ b/docs/presentacion-defensa-final.pptx
@@ -7067,7 +7067,7 @@
                 </a:solidFill>
                 <a:latin typeface="Consolas" panose="020B0609020204030204" pitchFamily="49" charset="0"/>
               </a:rPr>
-              <a:t>https://agora.34.175.157.37...</a:t>
+              <a:t>https://agora.34.175.161.212.nip.io</a:t>
             </a:r>
           </a:p>
         </p:txBody>
@@ -8955,7 +8955,7 @@
                 </a:solidFill>
                 <a:latin typeface="Consolas" panose="020B0609020204030204" pitchFamily="49" charset="0"/>
               </a:rPr>
-              <a:t>\https://agora.34.175.157.37.nip.io/app   |   https://agora.34.175.157.37.nip.io/externo\</a:t>
+              <a:t>https://agora.34.175.161.212.nip.io/app/ | https://agora.34.175.161.212.nip.io/externo/</a:t>
             </a:r>
           </a:p>
         </p:txBody>

--- a/docs/presentacion-defensa-final.pptx
+++ b/docs/presentacion-defensa-final.pptx
@@ -5,7 +5,7 @@
     <p:sldMasterId id="2147483648" r:id="rId1"/>
   </p:sldMasterIdLst>
   <p:notesMasterIdLst>
-    <p:notesMasterId r:id="rId20"/>
+    <p:notesMasterId r:id="rId21"/>
   </p:notesMasterIdLst>
   <p:sldIdLst>
     <p:sldId id="256" r:id="rId2"/>
@@ -26,6 +26,7 @@
     <p:sldId id="271" r:id="rId17"/>
     <p:sldId id="272" r:id="rId18"/>
     <p:sldId id="273" r:id="rId19"/>
+    <p:sldId id="274" r:id="rId20"/>
   </p:sldIdLst>
   <p:sldSz cx="12192000" cy="6858000"/>
   <p:notesSz cx="6858000" cy="9144000"/>
@@ -124,11 +125,6 @@
       </a:defRPr>
     </a:lvl9pPr>
   </p:defaultTextStyle>
-  <p:extLst>
-    <p:ext uri="{EFAFB233-063F-42B5-8137-9DF3F51BA10A}">
-      <p15:sldGuideLst xmlns:p15="http://schemas.microsoft.com/office/powerpoint/2012/main"/>
-    </p:ext>
-  </p:extLst>
 </p:presentation>
 </file>
 
@@ -212,9 +208,9 @@
             </a:lvl1pPr>
           </a:lstStyle>
           <a:p>
-            <a:fld id="{B969961C-7EF2-4112-A9D2-2D05609ABC20}" type="datetimeFigureOut">
+            <a:fld id="{184CBF3D-31FC-4D43-9FFA-B7306C961877}" type="datetimeFigureOut">
               <a:rPr lang="es-ES" smtClean="0"/>
-              <a:t>02/06/2026</a:t>
+              <a:t>04/06/2026</a:t>
             </a:fld>
             <a:endParaRPr lang="es-ES"/>
           </a:p>
@@ -370,7 +366,7 @@
             </a:lvl1pPr>
           </a:lstStyle>
           <a:p>
-            <a:fld id="{9B1CC43E-8847-428E-B292-0E1D8D2BFE8D}" type="slidenum">
+            <a:fld id="{1C152D8B-9EAE-432B-BDC7-4C9E536786B4}" type="slidenum">
               <a:rPr lang="es-ES" smtClean="0"/>
               <a:t>‹Nº›</a:t>
             </a:fld>
@@ -381,7 +377,7 @@
     </p:spTree>
     <p:extLst>
       <p:ext uri="{BB962C8B-B14F-4D97-AF65-F5344CB8AC3E}">
-        <p14:creationId xmlns:p14="http://schemas.microsoft.com/office/powerpoint/2010/main" val="4112319770"/>
+        <p14:creationId xmlns:p14="http://schemas.microsoft.com/office/powerpoint/2010/main" val="727094697"/>
       </p:ext>
     </p:extLst>
   </p:cSld>
@@ -550,7 +546,7 @@
           <a:bodyPr/>
           <a:lstStyle/>
           <a:p>
-            <a:fld id="{9B1CC43E-8847-428E-B292-0E1D8D2BFE8D}" type="slidenum">
+            <a:fld id="{1C152D8B-9EAE-432B-BDC7-4C9E536786B4}" type="slidenum">
               <a:rPr lang="es-ES" smtClean="0"/>
               <a:t>1</a:t>
             </a:fld>
@@ -561,7 +557,7 @@
     </p:spTree>
     <p:extLst>
       <p:ext uri="{BB962C8B-B14F-4D97-AF65-F5344CB8AC3E}">
-        <p14:creationId xmlns:p14="http://schemas.microsoft.com/office/powerpoint/2010/main" val="1461918548"/>
+        <p14:creationId xmlns:p14="http://schemas.microsoft.com/office/powerpoint/2010/main" val="2531169814"/>
       </p:ext>
     </p:extLst>
   </p:cSld>
@@ -640,7 +636,7 @@
           <a:bodyPr/>
           <a:lstStyle/>
           <a:p>
-            <a:fld id="{9B1CC43E-8847-428E-B292-0E1D8D2BFE8D}" type="slidenum">
+            <a:fld id="{1C152D8B-9EAE-432B-BDC7-4C9E536786B4}" type="slidenum">
               <a:rPr lang="es-ES" smtClean="0"/>
               <a:t>10</a:t>
             </a:fld>
@@ -651,7 +647,7 @@
     </p:spTree>
     <p:extLst>
       <p:ext uri="{BB962C8B-B14F-4D97-AF65-F5344CB8AC3E}">
-        <p14:creationId xmlns:p14="http://schemas.microsoft.com/office/powerpoint/2010/main" val="2065384006"/>
+        <p14:creationId xmlns:p14="http://schemas.microsoft.com/office/powerpoint/2010/main" val="3836444455"/>
       </p:ext>
     </p:extLst>
   </p:cSld>
@@ -730,7 +726,7 @@
           <a:bodyPr/>
           <a:lstStyle/>
           <a:p>
-            <a:fld id="{9B1CC43E-8847-428E-B292-0E1D8D2BFE8D}" type="slidenum">
+            <a:fld id="{1C152D8B-9EAE-432B-BDC7-4C9E536786B4}" type="slidenum">
               <a:rPr lang="es-ES" smtClean="0"/>
               <a:t>11</a:t>
             </a:fld>
@@ -741,7 +737,7 @@
     </p:spTree>
     <p:extLst>
       <p:ext uri="{BB962C8B-B14F-4D97-AF65-F5344CB8AC3E}">
-        <p14:creationId xmlns:p14="http://schemas.microsoft.com/office/powerpoint/2010/main" val="373135864"/>
+        <p14:creationId xmlns:p14="http://schemas.microsoft.com/office/powerpoint/2010/main" val="2570846676"/>
       </p:ext>
     </p:extLst>
   </p:cSld>
@@ -820,7 +816,7 @@
           <a:bodyPr/>
           <a:lstStyle/>
           <a:p>
-            <a:fld id="{9B1CC43E-8847-428E-B292-0E1D8D2BFE8D}" type="slidenum">
+            <a:fld id="{1C152D8B-9EAE-432B-BDC7-4C9E536786B4}" type="slidenum">
               <a:rPr lang="es-ES" smtClean="0"/>
               <a:t>12</a:t>
             </a:fld>
@@ -831,7 +827,7 @@
     </p:spTree>
     <p:extLst>
       <p:ext uri="{BB962C8B-B14F-4D97-AF65-F5344CB8AC3E}">
-        <p14:creationId xmlns:p14="http://schemas.microsoft.com/office/powerpoint/2010/main" val="2206118539"/>
+        <p14:creationId xmlns:p14="http://schemas.microsoft.com/office/powerpoint/2010/main" val="2681286729"/>
       </p:ext>
     </p:extLst>
   </p:cSld>
@@ -910,7 +906,7 @@
           <a:bodyPr/>
           <a:lstStyle/>
           <a:p>
-            <a:fld id="{9B1CC43E-8847-428E-B292-0E1D8D2BFE8D}" type="slidenum">
+            <a:fld id="{1C152D8B-9EAE-432B-BDC7-4C9E536786B4}" type="slidenum">
               <a:rPr lang="es-ES" smtClean="0"/>
               <a:t>13</a:t>
             </a:fld>
@@ -921,7 +917,7 @@
     </p:spTree>
     <p:extLst>
       <p:ext uri="{BB962C8B-B14F-4D97-AF65-F5344CB8AC3E}">
-        <p14:creationId xmlns:p14="http://schemas.microsoft.com/office/powerpoint/2010/main" val="4171920632"/>
+        <p14:creationId xmlns:p14="http://schemas.microsoft.com/office/powerpoint/2010/main" val="3551639126"/>
       </p:ext>
     </p:extLst>
   </p:cSld>
@@ -977,10 +973,17 @@
           <a:p>
             <a:r>
               <a:rPr lang="es-ES"/>
-              <a:t>Aqui no me interesa presumir de numeros sin contexto.
-Lo importante es explicar que he validado backend, frontend, E2E, correo, mensajeria, documentos, cloud y escritorio.
-Las cifras sirven como apoyo para demostrar que no me he quedado en una prueba manual superficial.
-La deprecacion de PHPUnit existe, pero no afecta a la funcionalidad ni a la defensa.</a:t>
+              <a:t>Aqui explico dos decisiones tecnicas que pueden preguntar.
+Primero, el arranque de la VM:
+Docker por si solo reinicia contenedores, pero yo queria asegurar el arranque completo del stack.
+Por eso instalo agora.service con systemd. Ese servicio ejecuta deploy/gcp/startup.sh.
+startup.sh comprueba .env.gcp, recalcula la URL nip.io si cambia la IP publica y ejecuta docker compose up -d --remove-orphans.
+El compose levanta proxy, app y base de datos.
+Segundo, roles:
+Ahora mismo para la defensa uso un usuario amplio para no fragmentar la demo.
+Pero el backend ya tiene roles definidos en backend/config/packages/security.yaml.
+ROLE_ADMIN hereda todo, ROLE_COORDINATOR gestiona el flujo academico, ROLE_DOCUMENT_MANAGER gestiona documentos, ROLE_MONITOR sirve para la parte tecnica y ROLE_COMPANY_PORTAL queda separado para empresas.
+La mejora futura seria cerrar la parte fina en React: ocultar botones segun rol y crear un perfil de solo lectura.</a:t>
             </a:r>
           </a:p>
         </p:txBody>
@@ -1000,7 +1003,7 @@
           <a:bodyPr/>
           <a:lstStyle/>
           <a:p>
-            <a:fld id="{9B1CC43E-8847-428E-B292-0E1D8D2BFE8D}" type="slidenum">
+            <a:fld id="{1C152D8B-9EAE-432B-BDC7-4C9E536786B4}" type="slidenum">
               <a:rPr lang="es-ES" smtClean="0"/>
               <a:t>14</a:t>
             </a:fld>
@@ -1011,7 +1014,7 @@
     </p:spTree>
     <p:extLst>
       <p:ext uri="{BB962C8B-B14F-4D97-AF65-F5344CB8AC3E}">
-        <p14:creationId xmlns:p14="http://schemas.microsoft.com/office/powerpoint/2010/main" val="2114765100"/>
+        <p14:creationId xmlns:p14="http://schemas.microsoft.com/office/powerpoint/2010/main" val="926103025"/>
       </p:ext>
     </p:extLst>
   </p:cSld>
@@ -1067,10 +1070,10 @@
           <a:p>
             <a:r>
               <a:rPr lang="es-ES"/>
-              <a:t>Esta slide es muy practica: explica como se puede probar el sistema desde fuera.
-Debo remarcar que la referencia buena es la URL cloud efectiva.
-Si cambia la IP publica, Agora Desktop me dice la nueva URL.
-Con la cuenta profesora se puede revisar el flujo interno sin usar la cuenta de administrador principal.</a:t>
+              <a:t>Aqui no me interesa presumir de numeros sin contexto.
+Lo importante es explicar que he validado backend, frontend, E2E, correo, mensajeria, documentos, cloud y escritorio.
+Las cifras sirven como apoyo para demostrar que no me he quedado en una prueba manual superficial.
+La deprecacion de PHPUnit existe, pero no afecta a la funcionalidad ni a la defensa.</a:t>
             </a:r>
           </a:p>
         </p:txBody>
@@ -1090,7 +1093,7 @@
           <a:bodyPr/>
           <a:lstStyle/>
           <a:p>
-            <a:fld id="{9B1CC43E-8847-428E-B292-0E1D8D2BFE8D}" type="slidenum">
+            <a:fld id="{1C152D8B-9EAE-432B-BDC7-4C9E536786B4}" type="slidenum">
               <a:rPr lang="es-ES" smtClean="0"/>
               <a:t>15</a:t>
             </a:fld>
@@ -1101,7 +1104,7 @@
     </p:spTree>
     <p:extLst>
       <p:ext uri="{BB962C8B-B14F-4D97-AF65-F5344CB8AC3E}">
-        <p14:creationId xmlns:p14="http://schemas.microsoft.com/office/powerpoint/2010/main" val="2213597598"/>
+        <p14:creationId xmlns:p14="http://schemas.microsoft.com/office/powerpoint/2010/main" val="1322989480"/>
       </p:ext>
     </p:extLst>
   </p:cSld>
@@ -1157,10 +1160,10 @@
           <a:p>
             <a:r>
               <a:rPr lang="es-ES"/>
-              <a:t>Aqui tengo que defender bien el alcance.
-Lo principal ya esta cerrado: portales, documentos, mensajeria, correo, cloud y escritorio.
-Lo que dejo para despues no son huecos del nucleo, sino mejoras de endurecimiento y evolucion.
-Eso demuestra criterio: he preferido cerrar bien el producto base antes que abarcar mas cosas a medias.</a:t>
+              <a:t>Esta slide es muy practica: explica como se puede probar el sistema desde fuera.
+Debo remarcar que la referencia buena es la URL cloud efectiva.
+Si cambia la IP publica, Agora Desktop me dice la nueva URL.
+Con la cuenta profesora se puede revisar el flujo interno sin usar la cuenta de administrador principal.</a:t>
             </a:r>
           </a:p>
         </p:txBody>
@@ -1180,7 +1183,7 @@
           <a:bodyPr/>
           <a:lstStyle/>
           <a:p>
-            <a:fld id="{9B1CC43E-8847-428E-B292-0E1D8D2BFE8D}" type="slidenum">
+            <a:fld id="{1C152D8B-9EAE-432B-BDC7-4C9E536786B4}" type="slidenum">
               <a:rPr lang="es-ES" smtClean="0"/>
               <a:t>16</a:t>
             </a:fld>
@@ -1191,7 +1194,7 @@
     </p:spTree>
     <p:extLst>
       <p:ext uri="{BB962C8B-B14F-4D97-AF65-F5344CB8AC3E}">
-        <p14:creationId xmlns:p14="http://schemas.microsoft.com/office/powerpoint/2010/main" val="3467765253"/>
+        <p14:creationId xmlns:p14="http://schemas.microsoft.com/office/powerpoint/2010/main" val="1590726781"/>
       </p:ext>
     </p:extLst>
   </p:cSld>
@@ -1247,10 +1250,10 @@
           <a:p>
             <a:r>
               <a:rPr lang="es-ES"/>
-              <a:t>No debo esconder las limitaciones.
-Lo que falta no invalida el TFG, pero si marca una hoja de ruta realista:
-SSO, firma avanzada, dominio propio, observabilidad y servicios gestionados.
-Tambien puedo mencionar que Symfony sigue una version que convendria actualizar tras la entrega para mantenimiento a medio plazo.</a:t>
+              <a:t>Aqui tengo que defender bien el alcance.
+Lo principal ya esta cerrado: portales, documentos, mensajeria, correo, cloud y escritorio.
+Lo que dejo para despues no son huecos del nucleo, sino mejoras de endurecimiento y evolucion.
+Eso demuestra criterio: he preferido cerrar bien el producto base antes que abarcar mas cosas a medias.</a:t>
             </a:r>
           </a:p>
         </p:txBody>
@@ -1270,7 +1273,7 @@
           <a:bodyPr/>
           <a:lstStyle/>
           <a:p>
-            <a:fld id="{9B1CC43E-8847-428E-B292-0E1D8D2BFE8D}" type="slidenum">
+            <a:fld id="{1C152D8B-9EAE-432B-BDC7-4C9E536786B4}" type="slidenum">
               <a:rPr lang="es-ES" smtClean="0"/>
               <a:t>17</a:t>
             </a:fld>
@@ -1281,7 +1284,7 @@
     </p:spTree>
     <p:extLst>
       <p:ext uri="{BB962C8B-B14F-4D97-AF65-F5344CB8AC3E}">
-        <p14:creationId xmlns:p14="http://schemas.microsoft.com/office/powerpoint/2010/main" val="1329376463"/>
+        <p14:creationId xmlns:p14="http://schemas.microsoft.com/office/powerpoint/2010/main" val="4215061410"/>
       </p:ext>
     </p:extLst>
   </p:cSld>
@@ -1337,9 +1340,10 @@
           <a:p>
             <a:r>
               <a:rPr lang="es-ES"/>
-              <a:t>Aqui cierro con una idea simple.
-El valor del proyecto no esta en una tecnologia concreta, sino en haber convertido una necesidad real del centro en una solucion completa, funcional y defendible.
-Despues de esta slide paso a demo o a preguntas, segun el tiempo.</a:t>
+              <a:t>No debo esconder las limitaciones.
+Lo que falta no invalida el TFG, pero si marca una hoja de ruta realista:
+SSO, firma avanzada, dominio propio, observabilidad y servicios gestionados.
+Tambien puedo mencionar que Symfony sigue una version que convendria actualizar tras la entrega para mantenimiento a medio plazo.</a:t>
             </a:r>
           </a:p>
         </p:txBody>
@@ -1359,7 +1363,7 @@
           <a:bodyPr/>
           <a:lstStyle/>
           <a:p>
-            <a:fld id="{9B1CC43E-8847-428E-B292-0E1D8D2BFE8D}" type="slidenum">
+            <a:fld id="{1C152D8B-9EAE-432B-BDC7-4C9E536786B4}" type="slidenum">
               <a:rPr lang="es-ES" smtClean="0"/>
               <a:t>18</a:t>
             </a:fld>
@@ -1370,7 +1374,96 @@
     </p:spTree>
     <p:extLst>
       <p:ext uri="{BB962C8B-B14F-4D97-AF65-F5344CB8AC3E}">
-        <p14:creationId xmlns:p14="http://schemas.microsoft.com/office/powerpoint/2010/main" val="2978035385"/>
+        <p14:creationId xmlns:p14="http://schemas.microsoft.com/office/powerpoint/2010/main" val="885315946"/>
+      </p:ext>
+    </p:extLst>
+  </p:cSld>
+  <p:clrMapOvr>
+    <a:masterClrMapping/>
+  </p:clrMapOvr>
+</p:notes>
+</file>
+
+<file path=ppt/notesSlides/notesSlide19.xml><?xml version="1.0" encoding="utf-8"?>
+<p:notes xmlns:a="http://schemas.openxmlformats.org/drawingml/2006/main" xmlns:r="http://schemas.openxmlformats.org/officeDocument/2006/relationships" xmlns:p="http://schemas.openxmlformats.org/presentationml/2006/main">
+  <p:cSld>
+    <p:spTree>
+      <p:nvGrpSpPr>
+        <p:cNvPr id="1" name=""/>
+        <p:cNvGrpSpPr/>
+        <p:nvPr/>
+      </p:nvGrpSpPr>
+      <p:grpSpPr>
+        <a:xfrm>
+          <a:off x="0" y="0"/>
+          <a:ext cx="0" cy="0"/>
+          <a:chOff x="0" y="0"/>
+          <a:chExt cx="0" cy="0"/>
+        </a:xfrm>
+      </p:grpSpPr>
+      <p:sp>
+        <p:nvSpPr>
+          <p:cNvPr id="2" name="Marcador de imagen de diapositiva 1"/>
+          <p:cNvSpPr>
+            <a:spLocks noGrp="1" noRot="1" noChangeAspect="1"/>
+          </p:cNvSpPr>
+          <p:nvPr>
+            <p:ph type="sldImg"/>
+          </p:nvPr>
+        </p:nvSpPr>
+        <p:spPr/>
+      </p:sp>
+      <p:sp>
+        <p:nvSpPr>
+          <p:cNvPr id="3" name="Marcador de notas 2"/>
+          <p:cNvSpPr>
+            <a:spLocks noGrp="1"/>
+          </p:cNvSpPr>
+          <p:nvPr>
+            <p:ph type="body" idx="1"/>
+          </p:nvPr>
+        </p:nvSpPr>
+        <p:spPr/>
+        <p:txBody>
+          <a:bodyPr/>
+          <a:lstStyle/>
+          <a:p>
+            <a:r>
+              <a:rPr lang="es-ES"/>
+              <a:t>Aqui cierro con una idea simple.
+El valor del proyecto no esta en una tecnologia concreta, sino en haber convertido una necesidad real del centro en una solucion completa, funcional y defendible.
+Despues de esta slide paso a demo o a preguntas, segun el tiempo.</a:t>
+            </a:r>
+          </a:p>
+        </p:txBody>
+      </p:sp>
+      <p:sp>
+        <p:nvSpPr>
+          <p:cNvPr id="4" name="Marcador de número de diapositiva 3"/>
+          <p:cNvSpPr>
+            <a:spLocks noGrp="1"/>
+          </p:cNvSpPr>
+          <p:nvPr>
+            <p:ph type="sldNum" sz="quarter" idx="5"/>
+          </p:nvPr>
+        </p:nvSpPr>
+        <p:spPr/>
+        <p:txBody>
+          <a:bodyPr/>
+          <a:lstStyle/>
+          <a:p>
+            <a:fld id="{1C152D8B-9EAE-432B-BDC7-4C9E536786B4}" type="slidenum">
+              <a:rPr lang="es-ES" smtClean="0"/>
+              <a:t>19</a:t>
+            </a:fld>
+            <a:endParaRPr lang="es-ES"/>
+          </a:p>
+        </p:txBody>
+      </p:sp>
+    </p:spTree>
+    <p:extLst>
+      <p:ext uri="{BB962C8B-B14F-4D97-AF65-F5344CB8AC3E}">
+        <p14:creationId xmlns:p14="http://schemas.microsoft.com/office/powerpoint/2010/main" val="2634313282"/>
       </p:ext>
     </p:extLst>
   </p:cSld>
@@ -1449,7 +1542,7 @@
           <a:bodyPr/>
           <a:lstStyle/>
           <a:p>
-            <a:fld id="{9B1CC43E-8847-428E-B292-0E1D8D2BFE8D}" type="slidenum">
+            <a:fld id="{1C152D8B-9EAE-432B-BDC7-4C9E536786B4}" type="slidenum">
               <a:rPr lang="es-ES" smtClean="0"/>
               <a:t>2</a:t>
             </a:fld>
@@ -1460,7 +1553,7 @@
     </p:spTree>
     <p:extLst>
       <p:ext uri="{BB962C8B-B14F-4D97-AF65-F5344CB8AC3E}">
-        <p14:creationId xmlns:p14="http://schemas.microsoft.com/office/powerpoint/2010/main" val="2223486602"/>
+        <p14:creationId xmlns:p14="http://schemas.microsoft.com/office/powerpoint/2010/main" val="457122636"/>
       </p:ext>
     </p:extLst>
   </p:cSld>
@@ -1540,7 +1633,7 @@
           <a:bodyPr/>
           <a:lstStyle/>
           <a:p>
-            <a:fld id="{9B1CC43E-8847-428E-B292-0E1D8D2BFE8D}" type="slidenum">
+            <a:fld id="{1C152D8B-9EAE-432B-BDC7-4C9E536786B4}" type="slidenum">
               <a:rPr lang="es-ES" smtClean="0"/>
               <a:t>3</a:t>
             </a:fld>
@@ -1551,7 +1644,7 @@
     </p:spTree>
     <p:extLst>
       <p:ext uri="{BB962C8B-B14F-4D97-AF65-F5344CB8AC3E}">
-        <p14:creationId xmlns:p14="http://schemas.microsoft.com/office/powerpoint/2010/main" val="3772453054"/>
+        <p14:creationId xmlns:p14="http://schemas.microsoft.com/office/powerpoint/2010/main" val="502439784"/>
       </p:ext>
     </p:extLst>
   </p:cSld>
@@ -1631,7 +1724,7 @@
           <a:bodyPr/>
           <a:lstStyle/>
           <a:p>
-            <a:fld id="{9B1CC43E-8847-428E-B292-0E1D8D2BFE8D}" type="slidenum">
+            <a:fld id="{1C152D8B-9EAE-432B-BDC7-4C9E536786B4}" type="slidenum">
               <a:rPr lang="es-ES" smtClean="0"/>
               <a:t>4</a:t>
             </a:fld>
@@ -1642,7 +1735,7 @@
     </p:spTree>
     <p:extLst>
       <p:ext uri="{BB962C8B-B14F-4D97-AF65-F5344CB8AC3E}">
-        <p14:creationId xmlns:p14="http://schemas.microsoft.com/office/powerpoint/2010/main" val="200982944"/>
+        <p14:creationId xmlns:p14="http://schemas.microsoft.com/office/powerpoint/2010/main" val="1552827984"/>
       </p:ext>
     </p:extLst>
   </p:cSld>
@@ -1725,7 +1818,7 @@
           <a:bodyPr/>
           <a:lstStyle/>
           <a:p>
-            <a:fld id="{9B1CC43E-8847-428E-B292-0E1D8D2BFE8D}" type="slidenum">
+            <a:fld id="{1C152D8B-9EAE-432B-BDC7-4C9E536786B4}" type="slidenum">
               <a:rPr lang="es-ES" smtClean="0"/>
               <a:t>5</a:t>
             </a:fld>
@@ -1736,7 +1829,7 @@
     </p:spTree>
     <p:extLst>
       <p:ext uri="{BB962C8B-B14F-4D97-AF65-F5344CB8AC3E}">
-        <p14:creationId xmlns:p14="http://schemas.microsoft.com/office/powerpoint/2010/main" val="2349538543"/>
+        <p14:creationId xmlns:p14="http://schemas.microsoft.com/office/powerpoint/2010/main" val="3306427844"/>
       </p:ext>
     </p:extLst>
   </p:cSld>
@@ -1815,7 +1908,7 @@
           <a:bodyPr/>
           <a:lstStyle/>
           <a:p>
-            <a:fld id="{9B1CC43E-8847-428E-B292-0E1D8D2BFE8D}" type="slidenum">
+            <a:fld id="{1C152D8B-9EAE-432B-BDC7-4C9E536786B4}" type="slidenum">
               <a:rPr lang="es-ES" smtClean="0"/>
               <a:t>6</a:t>
             </a:fld>
@@ -1826,7 +1919,7 @@
     </p:spTree>
     <p:extLst>
       <p:ext uri="{BB962C8B-B14F-4D97-AF65-F5344CB8AC3E}">
-        <p14:creationId xmlns:p14="http://schemas.microsoft.com/office/powerpoint/2010/main" val="398341934"/>
+        <p14:creationId xmlns:p14="http://schemas.microsoft.com/office/powerpoint/2010/main" val="2298830266"/>
       </p:ext>
     </p:extLst>
   </p:cSld>
@@ -1906,7 +1999,7 @@
           <a:bodyPr/>
           <a:lstStyle/>
           <a:p>
-            <a:fld id="{9B1CC43E-8847-428E-B292-0E1D8D2BFE8D}" type="slidenum">
+            <a:fld id="{1C152D8B-9EAE-432B-BDC7-4C9E536786B4}" type="slidenum">
               <a:rPr lang="es-ES" smtClean="0"/>
               <a:t>7</a:t>
             </a:fld>
@@ -1917,7 +2010,7 @@
     </p:spTree>
     <p:extLst>
       <p:ext uri="{BB962C8B-B14F-4D97-AF65-F5344CB8AC3E}">
-        <p14:creationId xmlns:p14="http://schemas.microsoft.com/office/powerpoint/2010/main" val="3979323713"/>
+        <p14:creationId xmlns:p14="http://schemas.microsoft.com/office/powerpoint/2010/main" val="1874687430"/>
       </p:ext>
     </p:extLst>
   </p:cSld>
@@ -1996,7 +2089,7 @@
           <a:bodyPr/>
           <a:lstStyle/>
           <a:p>
-            <a:fld id="{9B1CC43E-8847-428E-B292-0E1D8D2BFE8D}" type="slidenum">
+            <a:fld id="{1C152D8B-9EAE-432B-BDC7-4C9E536786B4}" type="slidenum">
               <a:rPr lang="es-ES" smtClean="0"/>
               <a:t>8</a:t>
             </a:fld>
@@ -2007,7 +2100,7 @@
     </p:spTree>
     <p:extLst>
       <p:ext uri="{BB962C8B-B14F-4D97-AF65-F5344CB8AC3E}">
-        <p14:creationId xmlns:p14="http://schemas.microsoft.com/office/powerpoint/2010/main" val="1907200044"/>
+        <p14:creationId xmlns:p14="http://schemas.microsoft.com/office/powerpoint/2010/main" val="2190473250"/>
       </p:ext>
     </p:extLst>
   </p:cSld>
@@ -2087,7 +2180,7 @@
           <a:bodyPr/>
           <a:lstStyle/>
           <a:p>
-            <a:fld id="{9B1CC43E-8847-428E-B292-0E1D8D2BFE8D}" type="slidenum">
+            <a:fld id="{1C152D8B-9EAE-432B-BDC7-4C9E536786B4}" type="slidenum">
               <a:rPr lang="es-ES" smtClean="0"/>
               <a:t>9</a:t>
             </a:fld>
@@ -2098,7 +2191,7 @@
     </p:spTree>
     <p:extLst>
       <p:ext uri="{BB962C8B-B14F-4D97-AF65-F5344CB8AC3E}">
-        <p14:creationId xmlns:p14="http://schemas.microsoft.com/office/powerpoint/2010/main" val="2698689760"/>
+        <p14:creationId xmlns:p14="http://schemas.microsoft.com/office/powerpoint/2010/main" val="803817503"/>
       </p:ext>
     </p:extLst>
   </p:cSld>
@@ -2130,7 +2223,7 @@
           <p:cNvPr id="2" name="Título 1">
             <a:extLst>
               <a:ext uri="{FF2B5EF4-FFF2-40B4-BE49-F238E27FC236}">
-                <a16:creationId xmlns:a16="http://schemas.microsoft.com/office/drawing/2014/main" id="{1B12C006-5AD0-90AD-A113-5A0FAD9D7897}"/>
+                <a16:creationId xmlns:a16="http://schemas.microsoft.com/office/drawing/2014/main" id="{77B1E083-2DE9-2B66-A143-9DB605A16C68}"/>
               </a:ext>
             </a:extLst>
           </p:cNvPr>
@@ -2167,7 +2260,7 @@
           <p:cNvPr id="3" name="Subtítulo 2">
             <a:extLst>
               <a:ext uri="{FF2B5EF4-FFF2-40B4-BE49-F238E27FC236}">
-                <a16:creationId xmlns:a16="http://schemas.microsoft.com/office/drawing/2014/main" id="{9E628BF8-050D-5B2B-4482-4616DA9860B2}"/>
+                <a16:creationId xmlns:a16="http://schemas.microsoft.com/office/drawing/2014/main" id="{81E00F32-054B-16E6-F311-F331F3BEE0FA}"/>
               </a:ext>
             </a:extLst>
           </p:cNvPr>
@@ -2237,7 +2330,7 @@
           <p:cNvPr id="4" name="Marcador de fecha 3">
             <a:extLst>
               <a:ext uri="{FF2B5EF4-FFF2-40B4-BE49-F238E27FC236}">
-                <a16:creationId xmlns:a16="http://schemas.microsoft.com/office/drawing/2014/main" id="{1005972F-4C8C-303D-4178-43E2E1A6F54C}"/>
+                <a16:creationId xmlns:a16="http://schemas.microsoft.com/office/drawing/2014/main" id="{C31736F5-F1FB-0962-4D51-EE6301522D0D}"/>
               </a:ext>
             </a:extLst>
           </p:cNvPr>
@@ -2253,9 +2346,9 @@
           <a:bodyPr/>
           <a:lstStyle/>
           <a:p>
-            <a:fld id="{95B52314-A619-4334-B9D6-E0F6CEE22DE1}" type="datetimeFigureOut">
+            <a:fld id="{E73BE342-D7DD-451B-AD14-82C868274E08}" type="datetimeFigureOut">
               <a:rPr lang="es-ES" smtClean="0"/>
-              <a:t>02/06/2026</a:t>
+              <a:t>04/06/2026</a:t>
             </a:fld>
             <a:endParaRPr lang="es-ES"/>
           </a:p>
@@ -2266,7 +2359,7 @@
           <p:cNvPr id="5" name="Marcador de pie de página 4">
             <a:extLst>
               <a:ext uri="{FF2B5EF4-FFF2-40B4-BE49-F238E27FC236}">
-                <a16:creationId xmlns:a16="http://schemas.microsoft.com/office/drawing/2014/main" id="{DB32B3F2-22BE-B7DF-1AAC-70CD6545A4E0}"/>
+                <a16:creationId xmlns:a16="http://schemas.microsoft.com/office/drawing/2014/main" id="{DC41C90E-ECF9-03D2-DC2B-3206ABFC530E}"/>
               </a:ext>
             </a:extLst>
           </p:cNvPr>
@@ -2291,7 +2384,7 @@
           <p:cNvPr id="6" name="Marcador de número de diapositiva 5">
             <a:extLst>
               <a:ext uri="{FF2B5EF4-FFF2-40B4-BE49-F238E27FC236}">
-                <a16:creationId xmlns:a16="http://schemas.microsoft.com/office/drawing/2014/main" id="{313946A1-2431-C262-0156-B5508B4E3008}"/>
+                <a16:creationId xmlns:a16="http://schemas.microsoft.com/office/drawing/2014/main" id="{8AA5A52E-1DEC-3219-5095-916708A6FBA1}"/>
               </a:ext>
             </a:extLst>
           </p:cNvPr>
@@ -2307,7 +2400,7 @@
           <a:bodyPr/>
           <a:lstStyle/>
           <a:p>
-            <a:fld id="{7CE9BE3B-4377-4C4A-B97C-E3374EB29B73}" type="slidenum">
+            <a:fld id="{6FD9D725-7506-41FC-8170-7DB91405864C}" type="slidenum">
               <a:rPr lang="es-ES" smtClean="0"/>
               <a:t>‹Nº›</a:t>
             </a:fld>
@@ -2318,7 +2411,7 @@
     </p:spTree>
     <p:extLst>
       <p:ext uri="{BB962C8B-B14F-4D97-AF65-F5344CB8AC3E}">
-        <p14:creationId xmlns:p14="http://schemas.microsoft.com/office/powerpoint/2010/main" val="137319443"/>
+        <p14:creationId xmlns:p14="http://schemas.microsoft.com/office/powerpoint/2010/main" val="1441037677"/>
       </p:ext>
     </p:extLst>
   </p:cSld>
@@ -2350,7 +2443,7 @@
           <p:cNvPr id="2" name="Título 1">
             <a:extLst>
               <a:ext uri="{FF2B5EF4-FFF2-40B4-BE49-F238E27FC236}">
-                <a16:creationId xmlns:a16="http://schemas.microsoft.com/office/drawing/2014/main" id="{EE824D4D-05A9-2A09-D154-4B431F0C192C}"/>
+                <a16:creationId xmlns:a16="http://schemas.microsoft.com/office/drawing/2014/main" id="{41867CDB-1F48-341B-5341-4D0AB2A31AA6}"/>
               </a:ext>
             </a:extLst>
           </p:cNvPr>
@@ -2378,7 +2471,7 @@
           <p:cNvPr id="3" name="Marcador de texto vertical 2">
             <a:extLst>
               <a:ext uri="{FF2B5EF4-FFF2-40B4-BE49-F238E27FC236}">
-                <a16:creationId xmlns:a16="http://schemas.microsoft.com/office/drawing/2014/main" id="{7D7AFB5E-9C0E-E0DD-90FF-DE6FC9212D2B}"/>
+                <a16:creationId xmlns:a16="http://schemas.microsoft.com/office/drawing/2014/main" id="{7A32BECA-B377-581A-AB8F-1C1DF6AAB5C2}"/>
               </a:ext>
             </a:extLst>
           </p:cNvPr>
@@ -2435,7 +2528,7 @@
           <p:cNvPr id="4" name="Marcador de fecha 3">
             <a:extLst>
               <a:ext uri="{FF2B5EF4-FFF2-40B4-BE49-F238E27FC236}">
-                <a16:creationId xmlns:a16="http://schemas.microsoft.com/office/drawing/2014/main" id="{55BA5A5E-0BA5-F16A-047D-623386C5A2C8}"/>
+                <a16:creationId xmlns:a16="http://schemas.microsoft.com/office/drawing/2014/main" id="{7E62BB1A-B502-B739-92B1-4D8141D845DB}"/>
               </a:ext>
             </a:extLst>
           </p:cNvPr>
@@ -2451,9 +2544,9 @@
           <a:bodyPr/>
           <a:lstStyle/>
           <a:p>
-            <a:fld id="{95B52314-A619-4334-B9D6-E0F6CEE22DE1}" type="datetimeFigureOut">
+            <a:fld id="{E73BE342-D7DD-451B-AD14-82C868274E08}" type="datetimeFigureOut">
               <a:rPr lang="es-ES" smtClean="0"/>
-              <a:t>02/06/2026</a:t>
+              <a:t>04/06/2026</a:t>
             </a:fld>
             <a:endParaRPr lang="es-ES"/>
           </a:p>
@@ -2464,7 +2557,7 @@
           <p:cNvPr id="5" name="Marcador de pie de página 4">
             <a:extLst>
               <a:ext uri="{FF2B5EF4-FFF2-40B4-BE49-F238E27FC236}">
-                <a16:creationId xmlns:a16="http://schemas.microsoft.com/office/drawing/2014/main" id="{B1BC0DD1-0DCB-F91A-DB57-8DD9D13A0471}"/>
+                <a16:creationId xmlns:a16="http://schemas.microsoft.com/office/drawing/2014/main" id="{192B4901-016D-D34F-87FF-ABDCC82A6C89}"/>
               </a:ext>
             </a:extLst>
           </p:cNvPr>
@@ -2489,7 +2582,7 @@
           <p:cNvPr id="6" name="Marcador de número de diapositiva 5">
             <a:extLst>
               <a:ext uri="{FF2B5EF4-FFF2-40B4-BE49-F238E27FC236}">
-                <a16:creationId xmlns:a16="http://schemas.microsoft.com/office/drawing/2014/main" id="{7A190C62-AC6A-4EE7-52C2-6E3F69A7C3BD}"/>
+                <a16:creationId xmlns:a16="http://schemas.microsoft.com/office/drawing/2014/main" id="{A05B9670-88A5-BCAA-9330-164EB31FBBF0}"/>
               </a:ext>
             </a:extLst>
           </p:cNvPr>
@@ -2505,7 +2598,7 @@
           <a:bodyPr/>
           <a:lstStyle/>
           <a:p>
-            <a:fld id="{7CE9BE3B-4377-4C4A-B97C-E3374EB29B73}" type="slidenum">
+            <a:fld id="{6FD9D725-7506-41FC-8170-7DB91405864C}" type="slidenum">
               <a:rPr lang="es-ES" smtClean="0"/>
               <a:t>‹Nº›</a:t>
             </a:fld>
@@ -2516,7 +2609,7 @@
     </p:spTree>
     <p:extLst>
       <p:ext uri="{BB962C8B-B14F-4D97-AF65-F5344CB8AC3E}">
-        <p14:creationId xmlns:p14="http://schemas.microsoft.com/office/powerpoint/2010/main" val="2480462376"/>
+        <p14:creationId xmlns:p14="http://schemas.microsoft.com/office/powerpoint/2010/main" val="49846488"/>
       </p:ext>
     </p:extLst>
   </p:cSld>
@@ -2548,7 +2641,7 @@
           <p:cNvPr id="2" name="Título vertical 1">
             <a:extLst>
               <a:ext uri="{FF2B5EF4-FFF2-40B4-BE49-F238E27FC236}">
-                <a16:creationId xmlns:a16="http://schemas.microsoft.com/office/drawing/2014/main" id="{0CB3D2A5-C5B5-6F29-FD03-E62199F8789C}"/>
+                <a16:creationId xmlns:a16="http://schemas.microsoft.com/office/drawing/2014/main" id="{F21DB9FD-B75F-A7CC-1757-D330BD3928E5}"/>
               </a:ext>
             </a:extLst>
           </p:cNvPr>
@@ -2581,7 +2674,7 @@
           <p:cNvPr id="3" name="Marcador de texto vertical 2">
             <a:extLst>
               <a:ext uri="{FF2B5EF4-FFF2-40B4-BE49-F238E27FC236}">
-                <a16:creationId xmlns:a16="http://schemas.microsoft.com/office/drawing/2014/main" id="{29E43F8F-6176-093E-0601-7CED6D18DD49}"/>
+                <a16:creationId xmlns:a16="http://schemas.microsoft.com/office/drawing/2014/main" id="{EE55455F-2F2F-AAE6-8222-C6D24585E8F1}"/>
               </a:ext>
             </a:extLst>
           </p:cNvPr>
@@ -2643,7 +2736,7 @@
           <p:cNvPr id="4" name="Marcador de fecha 3">
             <a:extLst>
               <a:ext uri="{FF2B5EF4-FFF2-40B4-BE49-F238E27FC236}">
-                <a16:creationId xmlns:a16="http://schemas.microsoft.com/office/drawing/2014/main" id="{08E76104-3E25-3985-8CB9-159B9DB07FB5}"/>
+                <a16:creationId xmlns:a16="http://schemas.microsoft.com/office/drawing/2014/main" id="{9E51DF2D-70AB-8B86-7FF7-A41E78099E40}"/>
               </a:ext>
             </a:extLst>
           </p:cNvPr>
@@ -2659,9 +2752,9 @@
           <a:bodyPr/>
           <a:lstStyle/>
           <a:p>
-            <a:fld id="{95B52314-A619-4334-B9D6-E0F6CEE22DE1}" type="datetimeFigureOut">
+            <a:fld id="{E73BE342-D7DD-451B-AD14-82C868274E08}" type="datetimeFigureOut">
               <a:rPr lang="es-ES" smtClean="0"/>
-              <a:t>02/06/2026</a:t>
+              <a:t>04/06/2026</a:t>
             </a:fld>
             <a:endParaRPr lang="es-ES"/>
           </a:p>
@@ -2672,7 +2765,7 @@
           <p:cNvPr id="5" name="Marcador de pie de página 4">
             <a:extLst>
               <a:ext uri="{FF2B5EF4-FFF2-40B4-BE49-F238E27FC236}">
-                <a16:creationId xmlns:a16="http://schemas.microsoft.com/office/drawing/2014/main" id="{7A30EBE7-90CF-CFF8-E403-CA7400D27B69}"/>
+                <a16:creationId xmlns:a16="http://schemas.microsoft.com/office/drawing/2014/main" id="{D8888822-40FF-1CC4-D788-FEC572EEE0A6}"/>
               </a:ext>
             </a:extLst>
           </p:cNvPr>
@@ -2697,7 +2790,7 @@
           <p:cNvPr id="6" name="Marcador de número de diapositiva 5">
             <a:extLst>
               <a:ext uri="{FF2B5EF4-FFF2-40B4-BE49-F238E27FC236}">
-                <a16:creationId xmlns:a16="http://schemas.microsoft.com/office/drawing/2014/main" id="{F68E39FF-0C67-3973-A9A9-18CAE31748C2}"/>
+                <a16:creationId xmlns:a16="http://schemas.microsoft.com/office/drawing/2014/main" id="{8264FCCC-F3C9-3B6B-9A23-5431E09E63E8}"/>
               </a:ext>
             </a:extLst>
           </p:cNvPr>
@@ -2713,7 +2806,7 @@
           <a:bodyPr/>
           <a:lstStyle/>
           <a:p>
-            <a:fld id="{7CE9BE3B-4377-4C4A-B97C-E3374EB29B73}" type="slidenum">
+            <a:fld id="{6FD9D725-7506-41FC-8170-7DB91405864C}" type="slidenum">
               <a:rPr lang="es-ES" smtClean="0"/>
               <a:t>‹Nº›</a:t>
             </a:fld>
@@ -2724,7 +2817,7 @@
     </p:spTree>
     <p:extLst>
       <p:ext uri="{BB962C8B-B14F-4D97-AF65-F5344CB8AC3E}">
-        <p14:creationId xmlns:p14="http://schemas.microsoft.com/office/powerpoint/2010/main" val="238587048"/>
+        <p14:creationId xmlns:p14="http://schemas.microsoft.com/office/powerpoint/2010/main" val="2306049144"/>
       </p:ext>
     </p:extLst>
   </p:cSld>
@@ -2756,7 +2849,7 @@
           <p:cNvPr id="2" name="Título 1">
             <a:extLst>
               <a:ext uri="{FF2B5EF4-FFF2-40B4-BE49-F238E27FC236}">
-                <a16:creationId xmlns:a16="http://schemas.microsoft.com/office/drawing/2014/main" id="{FF2A0387-DC4E-FB79-DB28-1607E116D6E6}"/>
+                <a16:creationId xmlns:a16="http://schemas.microsoft.com/office/drawing/2014/main" id="{78F0B867-BC38-D57F-9E9B-F2B7C39C8734}"/>
               </a:ext>
             </a:extLst>
           </p:cNvPr>
@@ -2784,7 +2877,7 @@
           <p:cNvPr id="3" name="Marcador de contenido 2">
             <a:extLst>
               <a:ext uri="{FF2B5EF4-FFF2-40B4-BE49-F238E27FC236}">
-                <a16:creationId xmlns:a16="http://schemas.microsoft.com/office/drawing/2014/main" id="{96D303A8-DE60-11B0-B4A2-01B6DAA4D611}"/>
+                <a16:creationId xmlns:a16="http://schemas.microsoft.com/office/drawing/2014/main" id="{23BD71DB-78C8-077E-C610-D9FABB0C0144}"/>
               </a:ext>
             </a:extLst>
           </p:cNvPr>
@@ -2841,7 +2934,7 @@
           <p:cNvPr id="4" name="Marcador de fecha 3">
             <a:extLst>
               <a:ext uri="{FF2B5EF4-FFF2-40B4-BE49-F238E27FC236}">
-                <a16:creationId xmlns:a16="http://schemas.microsoft.com/office/drawing/2014/main" id="{392D8182-514B-A98D-5320-D37DD818BE51}"/>
+                <a16:creationId xmlns:a16="http://schemas.microsoft.com/office/drawing/2014/main" id="{DB6CE51D-329E-2A7D-2A43-A4B3CF285CEB}"/>
               </a:ext>
             </a:extLst>
           </p:cNvPr>
@@ -2857,9 +2950,9 @@
           <a:bodyPr/>
           <a:lstStyle/>
           <a:p>
-            <a:fld id="{95B52314-A619-4334-B9D6-E0F6CEE22DE1}" type="datetimeFigureOut">
+            <a:fld id="{E73BE342-D7DD-451B-AD14-82C868274E08}" type="datetimeFigureOut">
               <a:rPr lang="es-ES" smtClean="0"/>
-              <a:t>02/06/2026</a:t>
+              <a:t>04/06/2026</a:t>
             </a:fld>
             <a:endParaRPr lang="es-ES"/>
           </a:p>
@@ -2870,7 +2963,7 @@
           <p:cNvPr id="5" name="Marcador de pie de página 4">
             <a:extLst>
               <a:ext uri="{FF2B5EF4-FFF2-40B4-BE49-F238E27FC236}">
-                <a16:creationId xmlns:a16="http://schemas.microsoft.com/office/drawing/2014/main" id="{767AD575-A79F-5C24-4AD0-A0E7E36033FC}"/>
+                <a16:creationId xmlns:a16="http://schemas.microsoft.com/office/drawing/2014/main" id="{374041EE-3C57-CA92-F014-B564594F62C3}"/>
               </a:ext>
             </a:extLst>
           </p:cNvPr>
@@ -2895,7 +2988,7 @@
           <p:cNvPr id="6" name="Marcador de número de diapositiva 5">
             <a:extLst>
               <a:ext uri="{FF2B5EF4-FFF2-40B4-BE49-F238E27FC236}">
-                <a16:creationId xmlns:a16="http://schemas.microsoft.com/office/drawing/2014/main" id="{F1C3ABA2-B378-6B43-DA30-A57106962816}"/>
+                <a16:creationId xmlns:a16="http://schemas.microsoft.com/office/drawing/2014/main" id="{28DF99C0-A6A6-B90A-BB15-12E74B0CC724}"/>
               </a:ext>
             </a:extLst>
           </p:cNvPr>
@@ -2911,7 +3004,7 @@
           <a:bodyPr/>
           <a:lstStyle/>
           <a:p>
-            <a:fld id="{7CE9BE3B-4377-4C4A-B97C-E3374EB29B73}" type="slidenum">
+            <a:fld id="{6FD9D725-7506-41FC-8170-7DB91405864C}" type="slidenum">
               <a:rPr lang="es-ES" smtClean="0"/>
               <a:t>‹Nº›</a:t>
             </a:fld>
@@ -2922,7 +3015,7 @@
     </p:spTree>
     <p:extLst>
       <p:ext uri="{BB962C8B-B14F-4D97-AF65-F5344CB8AC3E}">
-        <p14:creationId xmlns:p14="http://schemas.microsoft.com/office/powerpoint/2010/main" val="394477679"/>
+        <p14:creationId xmlns:p14="http://schemas.microsoft.com/office/powerpoint/2010/main" val="1014540448"/>
       </p:ext>
     </p:extLst>
   </p:cSld>
@@ -2954,7 +3047,7 @@
           <p:cNvPr id="2" name="Título 1">
             <a:extLst>
               <a:ext uri="{FF2B5EF4-FFF2-40B4-BE49-F238E27FC236}">
-                <a16:creationId xmlns:a16="http://schemas.microsoft.com/office/drawing/2014/main" id="{5120F542-F0EC-AC66-148D-930D7D452804}"/>
+                <a16:creationId xmlns:a16="http://schemas.microsoft.com/office/drawing/2014/main" id="{64AAEF42-BA40-0729-A70C-2A36EE7FD321}"/>
               </a:ext>
             </a:extLst>
           </p:cNvPr>
@@ -2991,7 +3084,7 @@
           <p:cNvPr id="3" name="Marcador de texto 2">
             <a:extLst>
               <a:ext uri="{FF2B5EF4-FFF2-40B4-BE49-F238E27FC236}">
-                <a16:creationId xmlns:a16="http://schemas.microsoft.com/office/drawing/2014/main" id="{A74A22FC-6A45-52E3-B758-905A8CF3C13B}"/>
+                <a16:creationId xmlns:a16="http://schemas.microsoft.com/office/drawing/2014/main" id="{D3459255-DCD6-F1A0-044F-F4BDF91580A0}"/>
               </a:ext>
             </a:extLst>
           </p:cNvPr>
@@ -3016,7 +3109,7 @@
               <a:defRPr sz="2400">
                 <a:solidFill>
                   <a:schemeClr val="tx1">
-                    <a:tint val="75000"/>
+                    <a:tint val="82000"/>
                   </a:schemeClr>
                 </a:solidFill>
               </a:defRPr>
@@ -3026,7 +3119,7 @@
               <a:defRPr sz="2000">
                 <a:solidFill>
                   <a:schemeClr val="tx1">
-                    <a:tint val="75000"/>
+                    <a:tint val="82000"/>
                   </a:schemeClr>
                 </a:solidFill>
               </a:defRPr>
@@ -3036,7 +3129,7 @@
               <a:defRPr sz="1800">
                 <a:solidFill>
                   <a:schemeClr val="tx1">
-                    <a:tint val="75000"/>
+                    <a:tint val="82000"/>
                   </a:schemeClr>
                 </a:solidFill>
               </a:defRPr>
@@ -3046,7 +3139,7 @@
               <a:defRPr sz="1600">
                 <a:solidFill>
                   <a:schemeClr val="tx1">
-                    <a:tint val="75000"/>
+                    <a:tint val="82000"/>
                   </a:schemeClr>
                 </a:solidFill>
               </a:defRPr>
@@ -3056,7 +3149,7 @@
               <a:defRPr sz="1600">
                 <a:solidFill>
                   <a:schemeClr val="tx1">
-                    <a:tint val="75000"/>
+                    <a:tint val="82000"/>
                   </a:schemeClr>
                 </a:solidFill>
               </a:defRPr>
@@ -3066,7 +3159,7 @@
               <a:defRPr sz="1600">
                 <a:solidFill>
                   <a:schemeClr val="tx1">
-                    <a:tint val="75000"/>
+                    <a:tint val="82000"/>
                   </a:schemeClr>
                 </a:solidFill>
               </a:defRPr>
@@ -3076,7 +3169,7 @@
               <a:defRPr sz="1600">
                 <a:solidFill>
                   <a:schemeClr val="tx1">
-                    <a:tint val="75000"/>
+                    <a:tint val="82000"/>
                   </a:schemeClr>
                 </a:solidFill>
               </a:defRPr>
@@ -3086,7 +3179,7 @@
               <a:defRPr sz="1600">
                 <a:solidFill>
                   <a:schemeClr val="tx1">
-                    <a:tint val="75000"/>
+                    <a:tint val="82000"/>
                   </a:schemeClr>
                 </a:solidFill>
               </a:defRPr>
@@ -3096,7 +3189,7 @@
               <a:defRPr sz="1600">
                 <a:solidFill>
                   <a:schemeClr val="tx1">
-                    <a:tint val="75000"/>
+                    <a:tint val="82000"/>
                   </a:schemeClr>
                 </a:solidFill>
               </a:defRPr>
@@ -3116,7 +3209,7 @@
           <p:cNvPr id="4" name="Marcador de fecha 3">
             <a:extLst>
               <a:ext uri="{FF2B5EF4-FFF2-40B4-BE49-F238E27FC236}">
-                <a16:creationId xmlns:a16="http://schemas.microsoft.com/office/drawing/2014/main" id="{4428CF39-950F-4DC9-CCB7-DE83A85A76C7}"/>
+                <a16:creationId xmlns:a16="http://schemas.microsoft.com/office/drawing/2014/main" id="{7146DE2A-AFD4-3C58-4F1A-11539593B747}"/>
               </a:ext>
             </a:extLst>
           </p:cNvPr>
@@ -3132,9 +3225,9 @@
           <a:bodyPr/>
           <a:lstStyle/>
           <a:p>
-            <a:fld id="{95B52314-A619-4334-B9D6-E0F6CEE22DE1}" type="datetimeFigureOut">
+            <a:fld id="{E73BE342-D7DD-451B-AD14-82C868274E08}" type="datetimeFigureOut">
               <a:rPr lang="es-ES" smtClean="0"/>
-              <a:t>02/06/2026</a:t>
+              <a:t>04/06/2026</a:t>
             </a:fld>
             <a:endParaRPr lang="es-ES"/>
           </a:p>
@@ -3145,7 +3238,7 @@
           <p:cNvPr id="5" name="Marcador de pie de página 4">
             <a:extLst>
               <a:ext uri="{FF2B5EF4-FFF2-40B4-BE49-F238E27FC236}">
-                <a16:creationId xmlns:a16="http://schemas.microsoft.com/office/drawing/2014/main" id="{EDE487CE-F37A-8028-E4A6-A87B4810B319}"/>
+                <a16:creationId xmlns:a16="http://schemas.microsoft.com/office/drawing/2014/main" id="{B27F29A4-4093-3258-0A3C-961B329F6F15}"/>
               </a:ext>
             </a:extLst>
           </p:cNvPr>
@@ -3170,7 +3263,7 @@
           <p:cNvPr id="6" name="Marcador de número de diapositiva 5">
             <a:extLst>
               <a:ext uri="{FF2B5EF4-FFF2-40B4-BE49-F238E27FC236}">
-                <a16:creationId xmlns:a16="http://schemas.microsoft.com/office/drawing/2014/main" id="{6440B092-2092-4B7B-C3FD-680FB7F94E51}"/>
+                <a16:creationId xmlns:a16="http://schemas.microsoft.com/office/drawing/2014/main" id="{A0D340B9-FFE3-A5E5-F6E4-6425C57ECA2B}"/>
               </a:ext>
             </a:extLst>
           </p:cNvPr>
@@ -3186,7 +3279,7 @@
           <a:bodyPr/>
           <a:lstStyle/>
           <a:p>
-            <a:fld id="{7CE9BE3B-4377-4C4A-B97C-E3374EB29B73}" type="slidenum">
+            <a:fld id="{6FD9D725-7506-41FC-8170-7DB91405864C}" type="slidenum">
               <a:rPr lang="es-ES" smtClean="0"/>
               <a:t>‹Nº›</a:t>
             </a:fld>
@@ -3197,7 +3290,7 @@
     </p:spTree>
     <p:extLst>
       <p:ext uri="{BB962C8B-B14F-4D97-AF65-F5344CB8AC3E}">
-        <p14:creationId xmlns:p14="http://schemas.microsoft.com/office/powerpoint/2010/main" val="3170728889"/>
+        <p14:creationId xmlns:p14="http://schemas.microsoft.com/office/powerpoint/2010/main" val="3835677720"/>
       </p:ext>
     </p:extLst>
   </p:cSld>
@@ -3229,7 +3322,7 @@
           <p:cNvPr id="2" name="Título 1">
             <a:extLst>
               <a:ext uri="{FF2B5EF4-FFF2-40B4-BE49-F238E27FC236}">
-                <a16:creationId xmlns:a16="http://schemas.microsoft.com/office/drawing/2014/main" id="{B9EF5191-A773-7A58-6494-3C709C80DE1F}"/>
+                <a16:creationId xmlns:a16="http://schemas.microsoft.com/office/drawing/2014/main" id="{78B94F00-0D14-904E-B176-36998E6C1E82}"/>
               </a:ext>
             </a:extLst>
           </p:cNvPr>
@@ -3257,7 +3350,7 @@
           <p:cNvPr id="3" name="Marcador de contenido 2">
             <a:extLst>
               <a:ext uri="{FF2B5EF4-FFF2-40B4-BE49-F238E27FC236}">
-                <a16:creationId xmlns:a16="http://schemas.microsoft.com/office/drawing/2014/main" id="{4B44131E-94F7-BD14-12B4-9495EB958874}"/>
+                <a16:creationId xmlns:a16="http://schemas.microsoft.com/office/drawing/2014/main" id="{493B5530-113B-AE52-651A-25A41E022961}"/>
               </a:ext>
             </a:extLst>
           </p:cNvPr>
@@ -3319,7 +3412,7 @@
           <p:cNvPr id="4" name="Marcador de contenido 3">
             <a:extLst>
               <a:ext uri="{FF2B5EF4-FFF2-40B4-BE49-F238E27FC236}">
-                <a16:creationId xmlns:a16="http://schemas.microsoft.com/office/drawing/2014/main" id="{FEAEDB0A-449F-35BE-8A11-E0BACE8D446A}"/>
+                <a16:creationId xmlns:a16="http://schemas.microsoft.com/office/drawing/2014/main" id="{76A03271-B113-4954-906C-C73BEC104B47}"/>
               </a:ext>
             </a:extLst>
           </p:cNvPr>
@@ -3381,7 +3474,7 @@
           <p:cNvPr id="5" name="Marcador de fecha 4">
             <a:extLst>
               <a:ext uri="{FF2B5EF4-FFF2-40B4-BE49-F238E27FC236}">
-                <a16:creationId xmlns:a16="http://schemas.microsoft.com/office/drawing/2014/main" id="{298271A2-D7EF-DE14-C371-148AFBEB13B2}"/>
+                <a16:creationId xmlns:a16="http://schemas.microsoft.com/office/drawing/2014/main" id="{A1322AE8-BA9D-2446-AD0D-6CBCA19B92C3}"/>
               </a:ext>
             </a:extLst>
           </p:cNvPr>
@@ -3397,9 +3490,9 @@
           <a:bodyPr/>
           <a:lstStyle/>
           <a:p>
-            <a:fld id="{95B52314-A619-4334-B9D6-E0F6CEE22DE1}" type="datetimeFigureOut">
+            <a:fld id="{E73BE342-D7DD-451B-AD14-82C868274E08}" type="datetimeFigureOut">
               <a:rPr lang="es-ES" smtClean="0"/>
-              <a:t>02/06/2026</a:t>
+              <a:t>04/06/2026</a:t>
             </a:fld>
             <a:endParaRPr lang="es-ES"/>
           </a:p>
@@ -3410,7 +3503,7 @@
           <p:cNvPr id="6" name="Marcador de pie de página 5">
             <a:extLst>
               <a:ext uri="{FF2B5EF4-FFF2-40B4-BE49-F238E27FC236}">
-                <a16:creationId xmlns:a16="http://schemas.microsoft.com/office/drawing/2014/main" id="{AC3DFEC8-C7ED-FFFC-24B6-F124F098A807}"/>
+                <a16:creationId xmlns:a16="http://schemas.microsoft.com/office/drawing/2014/main" id="{E8DF4A91-2C26-BF79-7965-3ED466F989D6}"/>
               </a:ext>
             </a:extLst>
           </p:cNvPr>
@@ -3435,7 +3528,7 @@
           <p:cNvPr id="7" name="Marcador de número de diapositiva 6">
             <a:extLst>
               <a:ext uri="{FF2B5EF4-FFF2-40B4-BE49-F238E27FC236}">
-                <a16:creationId xmlns:a16="http://schemas.microsoft.com/office/drawing/2014/main" id="{B3EE48E3-FC56-5B5A-68BA-AC711336B7AB}"/>
+                <a16:creationId xmlns:a16="http://schemas.microsoft.com/office/drawing/2014/main" id="{39431834-295F-9433-145C-D49A562923C6}"/>
               </a:ext>
             </a:extLst>
           </p:cNvPr>
@@ -3451,7 +3544,7 @@
           <a:bodyPr/>
           <a:lstStyle/>
           <a:p>
-            <a:fld id="{7CE9BE3B-4377-4C4A-B97C-E3374EB29B73}" type="slidenum">
+            <a:fld id="{6FD9D725-7506-41FC-8170-7DB91405864C}" type="slidenum">
               <a:rPr lang="es-ES" smtClean="0"/>
               <a:t>‹Nº›</a:t>
             </a:fld>
@@ -3462,7 +3555,7 @@
     </p:spTree>
     <p:extLst>
       <p:ext uri="{BB962C8B-B14F-4D97-AF65-F5344CB8AC3E}">
-        <p14:creationId xmlns:p14="http://schemas.microsoft.com/office/powerpoint/2010/main" val="2264542473"/>
+        <p14:creationId xmlns:p14="http://schemas.microsoft.com/office/powerpoint/2010/main" val="2053610519"/>
       </p:ext>
     </p:extLst>
   </p:cSld>
@@ -3494,7 +3587,7 @@
           <p:cNvPr id="2" name="Título 1">
             <a:extLst>
               <a:ext uri="{FF2B5EF4-FFF2-40B4-BE49-F238E27FC236}">
-                <a16:creationId xmlns:a16="http://schemas.microsoft.com/office/drawing/2014/main" id="{8712ADFC-F470-38EF-C705-B48F3B32DA35}"/>
+                <a16:creationId xmlns:a16="http://schemas.microsoft.com/office/drawing/2014/main" id="{11BCC72D-511D-6920-BE7F-42ED9946CDBF}"/>
               </a:ext>
             </a:extLst>
           </p:cNvPr>
@@ -3527,7 +3620,7 @@
           <p:cNvPr id="3" name="Marcador de texto 2">
             <a:extLst>
               <a:ext uri="{FF2B5EF4-FFF2-40B4-BE49-F238E27FC236}">
-                <a16:creationId xmlns:a16="http://schemas.microsoft.com/office/drawing/2014/main" id="{5966BD7A-2596-E0E1-FC4F-165965630C9D}"/>
+                <a16:creationId xmlns:a16="http://schemas.microsoft.com/office/drawing/2014/main" id="{1ACBC7BB-CF81-BF60-C0F6-26ED73DB3C79}"/>
               </a:ext>
             </a:extLst>
           </p:cNvPr>
@@ -3598,7 +3691,7 @@
           <p:cNvPr id="4" name="Marcador de contenido 3">
             <a:extLst>
               <a:ext uri="{FF2B5EF4-FFF2-40B4-BE49-F238E27FC236}">
-                <a16:creationId xmlns:a16="http://schemas.microsoft.com/office/drawing/2014/main" id="{E9E55286-0AFA-4E5A-A7A2-3FCEA317EEE9}"/>
+                <a16:creationId xmlns:a16="http://schemas.microsoft.com/office/drawing/2014/main" id="{52FE16D2-F39F-089D-193D-3B959E4C2CAB}"/>
               </a:ext>
             </a:extLst>
           </p:cNvPr>
@@ -3660,7 +3753,7 @@
           <p:cNvPr id="5" name="Marcador de texto 4">
             <a:extLst>
               <a:ext uri="{FF2B5EF4-FFF2-40B4-BE49-F238E27FC236}">
-                <a16:creationId xmlns:a16="http://schemas.microsoft.com/office/drawing/2014/main" id="{52D1ADB1-9C32-F26A-E37D-7F113259ED2C}"/>
+                <a16:creationId xmlns:a16="http://schemas.microsoft.com/office/drawing/2014/main" id="{341819A4-17FE-1CA8-96A5-F8505CF7C646}"/>
               </a:ext>
             </a:extLst>
           </p:cNvPr>
@@ -3731,7 +3824,7 @@
           <p:cNvPr id="6" name="Marcador de contenido 5">
             <a:extLst>
               <a:ext uri="{FF2B5EF4-FFF2-40B4-BE49-F238E27FC236}">
-                <a16:creationId xmlns:a16="http://schemas.microsoft.com/office/drawing/2014/main" id="{395F8661-9B3F-481E-8821-8148BD8E4F00}"/>
+                <a16:creationId xmlns:a16="http://schemas.microsoft.com/office/drawing/2014/main" id="{826B7E0B-8418-5F0D-6EAA-C376B310D206}"/>
               </a:ext>
             </a:extLst>
           </p:cNvPr>
@@ -3793,7 +3886,7 @@
           <p:cNvPr id="7" name="Marcador de fecha 6">
             <a:extLst>
               <a:ext uri="{FF2B5EF4-FFF2-40B4-BE49-F238E27FC236}">
-                <a16:creationId xmlns:a16="http://schemas.microsoft.com/office/drawing/2014/main" id="{00EFD67A-597D-B01B-995B-54A95CAF41A1}"/>
+                <a16:creationId xmlns:a16="http://schemas.microsoft.com/office/drawing/2014/main" id="{850D247B-4471-928E-453A-78414DD2F4B5}"/>
               </a:ext>
             </a:extLst>
           </p:cNvPr>
@@ -3809,9 +3902,9 @@
           <a:bodyPr/>
           <a:lstStyle/>
           <a:p>
-            <a:fld id="{95B52314-A619-4334-B9D6-E0F6CEE22DE1}" type="datetimeFigureOut">
+            <a:fld id="{E73BE342-D7DD-451B-AD14-82C868274E08}" type="datetimeFigureOut">
               <a:rPr lang="es-ES" smtClean="0"/>
-              <a:t>02/06/2026</a:t>
+              <a:t>04/06/2026</a:t>
             </a:fld>
             <a:endParaRPr lang="es-ES"/>
           </a:p>
@@ -3822,7 +3915,7 @@
           <p:cNvPr id="8" name="Marcador de pie de página 7">
             <a:extLst>
               <a:ext uri="{FF2B5EF4-FFF2-40B4-BE49-F238E27FC236}">
-                <a16:creationId xmlns:a16="http://schemas.microsoft.com/office/drawing/2014/main" id="{6998359A-3BCE-ED3F-DF2D-6BD3595A0CCF}"/>
+                <a16:creationId xmlns:a16="http://schemas.microsoft.com/office/drawing/2014/main" id="{2C42249F-6FFF-5075-6050-3EC420FEE3DE}"/>
               </a:ext>
             </a:extLst>
           </p:cNvPr>
@@ -3847,7 +3940,7 @@
           <p:cNvPr id="9" name="Marcador de número de diapositiva 8">
             <a:extLst>
               <a:ext uri="{FF2B5EF4-FFF2-40B4-BE49-F238E27FC236}">
-                <a16:creationId xmlns:a16="http://schemas.microsoft.com/office/drawing/2014/main" id="{62B39C7D-FB8E-64B7-3DDC-F4F6B502F277}"/>
+                <a16:creationId xmlns:a16="http://schemas.microsoft.com/office/drawing/2014/main" id="{6C79DD70-C5DF-66FC-DFF2-B51B15815202}"/>
               </a:ext>
             </a:extLst>
           </p:cNvPr>
@@ -3863,7 +3956,7 @@
           <a:bodyPr/>
           <a:lstStyle/>
           <a:p>
-            <a:fld id="{7CE9BE3B-4377-4C4A-B97C-E3374EB29B73}" type="slidenum">
+            <a:fld id="{6FD9D725-7506-41FC-8170-7DB91405864C}" type="slidenum">
               <a:rPr lang="es-ES" smtClean="0"/>
               <a:t>‹Nº›</a:t>
             </a:fld>
@@ -3874,7 +3967,7 @@
     </p:spTree>
     <p:extLst>
       <p:ext uri="{BB962C8B-B14F-4D97-AF65-F5344CB8AC3E}">
-        <p14:creationId xmlns:p14="http://schemas.microsoft.com/office/powerpoint/2010/main" val="4156871011"/>
+        <p14:creationId xmlns:p14="http://schemas.microsoft.com/office/powerpoint/2010/main" val="1064831127"/>
       </p:ext>
     </p:extLst>
   </p:cSld>
@@ -3906,7 +3999,7 @@
           <p:cNvPr id="2" name="Título 1">
             <a:extLst>
               <a:ext uri="{FF2B5EF4-FFF2-40B4-BE49-F238E27FC236}">
-                <a16:creationId xmlns:a16="http://schemas.microsoft.com/office/drawing/2014/main" id="{FA514029-64D2-3F15-D646-F84B81028040}"/>
+                <a16:creationId xmlns:a16="http://schemas.microsoft.com/office/drawing/2014/main" id="{03F38178-76A4-B331-2A9E-A7659945D3D1}"/>
               </a:ext>
             </a:extLst>
           </p:cNvPr>
@@ -3934,7 +4027,7 @@
           <p:cNvPr id="3" name="Marcador de fecha 2">
             <a:extLst>
               <a:ext uri="{FF2B5EF4-FFF2-40B4-BE49-F238E27FC236}">
-                <a16:creationId xmlns:a16="http://schemas.microsoft.com/office/drawing/2014/main" id="{32BB6C2E-B227-456C-96BF-D2D204E35710}"/>
+                <a16:creationId xmlns:a16="http://schemas.microsoft.com/office/drawing/2014/main" id="{60200D15-73B5-E260-A357-B362DEA24032}"/>
               </a:ext>
             </a:extLst>
           </p:cNvPr>
@@ -3950,9 +4043,9 @@
           <a:bodyPr/>
           <a:lstStyle/>
           <a:p>
-            <a:fld id="{95B52314-A619-4334-B9D6-E0F6CEE22DE1}" type="datetimeFigureOut">
+            <a:fld id="{E73BE342-D7DD-451B-AD14-82C868274E08}" type="datetimeFigureOut">
               <a:rPr lang="es-ES" smtClean="0"/>
-              <a:t>02/06/2026</a:t>
+              <a:t>04/06/2026</a:t>
             </a:fld>
             <a:endParaRPr lang="es-ES"/>
           </a:p>
@@ -3963,7 +4056,7 @@
           <p:cNvPr id="4" name="Marcador de pie de página 3">
             <a:extLst>
               <a:ext uri="{FF2B5EF4-FFF2-40B4-BE49-F238E27FC236}">
-                <a16:creationId xmlns:a16="http://schemas.microsoft.com/office/drawing/2014/main" id="{9215D9AC-AFEA-4FF6-2D24-32AEE39CD6E7}"/>
+                <a16:creationId xmlns:a16="http://schemas.microsoft.com/office/drawing/2014/main" id="{760AB9F3-A9CE-DD9B-4978-2DE5D6750B29}"/>
               </a:ext>
             </a:extLst>
           </p:cNvPr>
@@ -3988,7 +4081,7 @@
           <p:cNvPr id="5" name="Marcador de número de diapositiva 4">
             <a:extLst>
               <a:ext uri="{FF2B5EF4-FFF2-40B4-BE49-F238E27FC236}">
-                <a16:creationId xmlns:a16="http://schemas.microsoft.com/office/drawing/2014/main" id="{015912F8-9FCC-755D-E055-1258A05CD004}"/>
+                <a16:creationId xmlns:a16="http://schemas.microsoft.com/office/drawing/2014/main" id="{51227177-DC65-A050-3E4B-DF0056169F36}"/>
               </a:ext>
             </a:extLst>
           </p:cNvPr>
@@ -4004,7 +4097,7 @@
           <a:bodyPr/>
           <a:lstStyle/>
           <a:p>
-            <a:fld id="{7CE9BE3B-4377-4C4A-B97C-E3374EB29B73}" type="slidenum">
+            <a:fld id="{6FD9D725-7506-41FC-8170-7DB91405864C}" type="slidenum">
               <a:rPr lang="es-ES" smtClean="0"/>
               <a:t>‹Nº›</a:t>
             </a:fld>
@@ -4015,7 +4108,7 @@
     </p:spTree>
     <p:extLst>
       <p:ext uri="{BB962C8B-B14F-4D97-AF65-F5344CB8AC3E}">
-        <p14:creationId xmlns:p14="http://schemas.microsoft.com/office/powerpoint/2010/main" val="560475243"/>
+        <p14:creationId xmlns:p14="http://schemas.microsoft.com/office/powerpoint/2010/main" val="3807265449"/>
       </p:ext>
     </p:extLst>
   </p:cSld>
@@ -4047,7 +4140,7 @@
           <p:cNvPr id="2" name="Marcador de fecha 1">
             <a:extLst>
               <a:ext uri="{FF2B5EF4-FFF2-40B4-BE49-F238E27FC236}">
-                <a16:creationId xmlns:a16="http://schemas.microsoft.com/office/drawing/2014/main" id="{FD262539-6913-1E43-56B2-281D23E00F88}"/>
+                <a16:creationId xmlns:a16="http://schemas.microsoft.com/office/drawing/2014/main" id="{8229C0B0-AE29-C48C-0010-0DE49A901C9E}"/>
               </a:ext>
             </a:extLst>
           </p:cNvPr>
@@ -4063,9 +4156,9 @@
           <a:bodyPr/>
           <a:lstStyle/>
           <a:p>
-            <a:fld id="{95B52314-A619-4334-B9D6-E0F6CEE22DE1}" type="datetimeFigureOut">
+            <a:fld id="{E73BE342-D7DD-451B-AD14-82C868274E08}" type="datetimeFigureOut">
               <a:rPr lang="es-ES" smtClean="0"/>
-              <a:t>02/06/2026</a:t>
+              <a:t>04/06/2026</a:t>
             </a:fld>
             <a:endParaRPr lang="es-ES"/>
           </a:p>
@@ -4076,7 +4169,7 @@
           <p:cNvPr id="3" name="Marcador de pie de página 2">
             <a:extLst>
               <a:ext uri="{FF2B5EF4-FFF2-40B4-BE49-F238E27FC236}">
-                <a16:creationId xmlns:a16="http://schemas.microsoft.com/office/drawing/2014/main" id="{0B20EA8A-2121-BE84-3A74-68B23612A245}"/>
+                <a16:creationId xmlns:a16="http://schemas.microsoft.com/office/drawing/2014/main" id="{E76CADEE-B7C9-CCD6-43BE-0F08908D81D2}"/>
               </a:ext>
             </a:extLst>
           </p:cNvPr>
@@ -4101,7 +4194,7 @@
           <p:cNvPr id="4" name="Marcador de número de diapositiva 3">
             <a:extLst>
               <a:ext uri="{FF2B5EF4-FFF2-40B4-BE49-F238E27FC236}">
-                <a16:creationId xmlns:a16="http://schemas.microsoft.com/office/drawing/2014/main" id="{E8DB0CD8-4B83-35A3-F56B-953118B0010E}"/>
+                <a16:creationId xmlns:a16="http://schemas.microsoft.com/office/drawing/2014/main" id="{38003F7B-DC8E-12D2-BC5A-66BE8DA89F0C}"/>
               </a:ext>
             </a:extLst>
           </p:cNvPr>
@@ -4117,7 +4210,7 @@
           <a:bodyPr/>
           <a:lstStyle/>
           <a:p>
-            <a:fld id="{7CE9BE3B-4377-4C4A-B97C-E3374EB29B73}" type="slidenum">
+            <a:fld id="{6FD9D725-7506-41FC-8170-7DB91405864C}" type="slidenum">
               <a:rPr lang="es-ES" smtClean="0"/>
               <a:t>‹Nº›</a:t>
             </a:fld>
@@ -4128,7 +4221,7 @@
     </p:spTree>
     <p:extLst>
       <p:ext uri="{BB962C8B-B14F-4D97-AF65-F5344CB8AC3E}">
-        <p14:creationId xmlns:p14="http://schemas.microsoft.com/office/powerpoint/2010/main" val="1180069441"/>
+        <p14:creationId xmlns:p14="http://schemas.microsoft.com/office/powerpoint/2010/main" val="3234240892"/>
       </p:ext>
     </p:extLst>
   </p:cSld>
@@ -4160,7 +4253,7 @@
           <p:cNvPr id="2" name="Título 1">
             <a:extLst>
               <a:ext uri="{FF2B5EF4-FFF2-40B4-BE49-F238E27FC236}">
-                <a16:creationId xmlns:a16="http://schemas.microsoft.com/office/drawing/2014/main" id="{7ED258B3-CB8E-C50E-3D67-3ACA57F7E449}"/>
+                <a16:creationId xmlns:a16="http://schemas.microsoft.com/office/drawing/2014/main" id="{D6159500-3537-DA4B-C0CA-E54594CAA5E2}"/>
               </a:ext>
             </a:extLst>
           </p:cNvPr>
@@ -4197,7 +4290,7 @@
           <p:cNvPr id="3" name="Marcador de contenido 2">
             <a:extLst>
               <a:ext uri="{FF2B5EF4-FFF2-40B4-BE49-F238E27FC236}">
-                <a16:creationId xmlns:a16="http://schemas.microsoft.com/office/drawing/2014/main" id="{54220668-43DC-BA16-4CBE-CF72FDA346A0}"/>
+                <a16:creationId xmlns:a16="http://schemas.microsoft.com/office/drawing/2014/main" id="{05DD3EF1-7C1C-6D20-6A23-AF2B3129DA22}"/>
               </a:ext>
             </a:extLst>
           </p:cNvPr>
@@ -4287,7 +4380,7 @@
           <p:cNvPr id="4" name="Marcador de texto 3">
             <a:extLst>
               <a:ext uri="{FF2B5EF4-FFF2-40B4-BE49-F238E27FC236}">
-                <a16:creationId xmlns:a16="http://schemas.microsoft.com/office/drawing/2014/main" id="{17235BE2-E9EF-652D-A3F4-B0F37964C18C}"/>
+                <a16:creationId xmlns:a16="http://schemas.microsoft.com/office/drawing/2014/main" id="{38F40C2D-2EE1-C28A-2458-77BD1D4201DE}"/>
               </a:ext>
             </a:extLst>
           </p:cNvPr>
@@ -4358,7 +4451,7 @@
           <p:cNvPr id="5" name="Marcador de fecha 4">
             <a:extLst>
               <a:ext uri="{FF2B5EF4-FFF2-40B4-BE49-F238E27FC236}">
-                <a16:creationId xmlns:a16="http://schemas.microsoft.com/office/drawing/2014/main" id="{B675B193-1CC6-3EB0-48E7-882C276D25F1}"/>
+                <a16:creationId xmlns:a16="http://schemas.microsoft.com/office/drawing/2014/main" id="{D6E5CB27-9FB8-2BB8-78C3-418AAE0CB13E}"/>
               </a:ext>
             </a:extLst>
           </p:cNvPr>
@@ -4374,9 +4467,9 @@
           <a:bodyPr/>
           <a:lstStyle/>
           <a:p>
-            <a:fld id="{95B52314-A619-4334-B9D6-E0F6CEE22DE1}" type="datetimeFigureOut">
+            <a:fld id="{E73BE342-D7DD-451B-AD14-82C868274E08}" type="datetimeFigureOut">
               <a:rPr lang="es-ES" smtClean="0"/>
-              <a:t>02/06/2026</a:t>
+              <a:t>04/06/2026</a:t>
             </a:fld>
             <a:endParaRPr lang="es-ES"/>
           </a:p>
@@ -4387,7 +4480,7 @@
           <p:cNvPr id="6" name="Marcador de pie de página 5">
             <a:extLst>
               <a:ext uri="{FF2B5EF4-FFF2-40B4-BE49-F238E27FC236}">
-                <a16:creationId xmlns:a16="http://schemas.microsoft.com/office/drawing/2014/main" id="{22353DAB-AAA1-03BD-9E94-07F4CF94A987}"/>
+                <a16:creationId xmlns:a16="http://schemas.microsoft.com/office/drawing/2014/main" id="{CEF1D832-D974-547E-CB7A-AD9AEE891651}"/>
               </a:ext>
             </a:extLst>
           </p:cNvPr>
@@ -4412,7 +4505,7 @@
           <p:cNvPr id="7" name="Marcador de número de diapositiva 6">
             <a:extLst>
               <a:ext uri="{FF2B5EF4-FFF2-40B4-BE49-F238E27FC236}">
-                <a16:creationId xmlns:a16="http://schemas.microsoft.com/office/drawing/2014/main" id="{EB581CC8-FBBD-C8DE-52E0-42EFAF8A215B}"/>
+                <a16:creationId xmlns:a16="http://schemas.microsoft.com/office/drawing/2014/main" id="{4FBAA768-B7D1-1B63-221A-F24EF8217FC0}"/>
               </a:ext>
             </a:extLst>
           </p:cNvPr>
@@ -4428,7 +4521,7 @@
           <a:bodyPr/>
           <a:lstStyle/>
           <a:p>
-            <a:fld id="{7CE9BE3B-4377-4C4A-B97C-E3374EB29B73}" type="slidenum">
+            <a:fld id="{6FD9D725-7506-41FC-8170-7DB91405864C}" type="slidenum">
               <a:rPr lang="es-ES" smtClean="0"/>
               <a:t>‹Nº›</a:t>
             </a:fld>
@@ -4439,7 +4532,7 @@
     </p:spTree>
     <p:extLst>
       <p:ext uri="{BB962C8B-B14F-4D97-AF65-F5344CB8AC3E}">
-        <p14:creationId xmlns:p14="http://schemas.microsoft.com/office/powerpoint/2010/main" val="3857819064"/>
+        <p14:creationId xmlns:p14="http://schemas.microsoft.com/office/powerpoint/2010/main" val="403530904"/>
       </p:ext>
     </p:extLst>
   </p:cSld>
@@ -4471,7 +4564,7 @@
           <p:cNvPr id="2" name="Título 1">
             <a:extLst>
               <a:ext uri="{FF2B5EF4-FFF2-40B4-BE49-F238E27FC236}">
-                <a16:creationId xmlns:a16="http://schemas.microsoft.com/office/drawing/2014/main" id="{DC485871-6A79-DD51-2D5C-BC446671E0D6}"/>
+                <a16:creationId xmlns:a16="http://schemas.microsoft.com/office/drawing/2014/main" id="{73C02CE7-273B-202F-86A5-660D06F4AADA}"/>
               </a:ext>
             </a:extLst>
           </p:cNvPr>
@@ -4508,7 +4601,7 @@
           <p:cNvPr id="3" name="Marcador de posición de imagen 2">
             <a:extLst>
               <a:ext uri="{FF2B5EF4-FFF2-40B4-BE49-F238E27FC236}">
-                <a16:creationId xmlns:a16="http://schemas.microsoft.com/office/drawing/2014/main" id="{0DB34230-9B4D-2E07-0005-0FF42C1DEA1D}"/>
+                <a16:creationId xmlns:a16="http://schemas.microsoft.com/office/drawing/2014/main" id="{3C23BBA2-5E06-6DCB-CC7C-50AD283617BC}"/>
               </a:ext>
             </a:extLst>
           </p:cNvPr>
@@ -4575,7 +4668,7 @@
           <p:cNvPr id="4" name="Marcador de texto 3">
             <a:extLst>
               <a:ext uri="{FF2B5EF4-FFF2-40B4-BE49-F238E27FC236}">
-                <a16:creationId xmlns:a16="http://schemas.microsoft.com/office/drawing/2014/main" id="{788A004C-4F00-8F8E-A6D4-2D469292EA1D}"/>
+                <a16:creationId xmlns:a16="http://schemas.microsoft.com/office/drawing/2014/main" id="{E8B20A7D-D21E-F9D5-92A4-B6A8C00A2681}"/>
               </a:ext>
             </a:extLst>
           </p:cNvPr>
@@ -4646,7 +4739,7 @@
           <p:cNvPr id="5" name="Marcador de fecha 4">
             <a:extLst>
               <a:ext uri="{FF2B5EF4-FFF2-40B4-BE49-F238E27FC236}">
-                <a16:creationId xmlns:a16="http://schemas.microsoft.com/office/drawing/2014/main" id="{B73FAD98-A17A-BE5F-C574-C0BA4FB63178}"/>
+                <a16:creationId xmlns:a16="http://schemas.microsoft.com/office/drawing/2014/main" id="{E49C27BD-02C1-2843-D31A-8E3669C129B5}"/>
               </a:ext>
             </a:extLst>
           </p:cNvPr>
@@ -4662,9 +4755,9 @@
           <a:bodyPr/>
           <a:lstStyle/>
           <a:p>
-            <a:fld id="{95B52314-A619-4334-B9D6-E0F6CEE22DE1}" type="datetimeFigureOut">
+            <a:fld id="{E73BE342-D7DD-451B-AD14-82C868274E08}" type="datetimeFigureOut">
               <a:rPr lang="es-ES" smtClean="0"/>
-              <a:t>02/06/2026</a:t>
+              <a:t>04/06/2026</a:t>
             </a:fld>
             <a:endParaRPr lang="es-ES"/>
           </a:p>
@@ -4675,7 +4768,7 @@
           <p:cNvPr id="6" name="Marcador de pie de página 5">
             <a:extLst>
               <a:ext uri="{FF2B5EF4-FFF2-40B4-BE49-F238E27FC236}">
-                <a16:creationId xmlns:a16="http://schemas.microsoft.com/office/drawing/2014/main" id="{79987B7C-CC04-F768-A321-DE77771C739A}"/>
+                <a16:creationId xmlns:a16="http://schemas.microsoft.com/office/drawing/2014/main" id="{E449C1DD-B05C-912E-CED6-22E1EF1F3C0F}"/>
               </a:ext>
             </a:extLst>
           </p:cNvPr>
@@ -4700,7 +4793,7 @@
           <p:cNvPr id="7" name="Marcador de número de diapositiva 6">
             <a:extLst>
               <a:ext uri="{FF2B5EF4-FFF2-40B4-BE49-F238E27FC236}">
-                <a16:creationId xmlns:a16="http://schemas.microsoft.com/office/drawing/2014/main" id="{954D2AA8-B288-E289-0982-8F1DCC26364F}"/>
+                <a16:creationId xmlns:a16="http://schemas.microsoft.com/office/drawing/2014/main" id="{34B6D4C3-A6C8-D11F-D069-D82929C3090F}"/>
               </a:ext>
             </a:extLst>
           </p:cNvPr>
@@ -4716,7 +4809,7 @@
           <a:bodyPr/>
           <a:lstStyle/>
           <a:p>
-            <a:fld id="{7CE9BE3B-4377-4C4A-B97C-E3374EB29B73}" type="slidenum">
+            <a:fld id="{6FD9D725-7506-41FC-8170-7DB91405864C}" type="slidenum">
               <a:rPr lang="es-ES" smtClean="0"/>
               <a:t>‹Nº›</a:t>
             </a:fld>
@@ -4727,7 +4820,7 @@
     </p:spTree>
     <p:extLst>
       <p:ext uri="{BB962C8B-B14F-4D97-AF65-F5344CB8AC3E}">
-        <p14:creationId xmlns:p14="http://schemas.microsoft.com/office/powerpoint/2010/main" val="3092876499"/>
+        <p14:creationId xmlns:p14="http://schemas.microsoft.com/office/powerpoint/2010/main" val="898962150"/>
       </p:ext>
     </p:extLst>
   </p:cSld>
@@ -4764,7 +4857,7 @@
           <p:cNvPr id="2" name="Marcador de título 1">
             <a:extLst>
               <a:ext uri="{FF2B5EF4-FFF2-40B4-BE49-F238E27FC236}">
-                <a16:creationId xmlns:a16="http://schemas.microsoft.com/office/drawing/2014/main" id="{81101772-D9B2-AA3F-1E09-1DD2C75BA981}"/>
+                <a16:creationId xmlns:a16="http://schemas.microsoft.com/office/drawing/2014/main" id="{4419D82E-0087-689E-BF57-2BAA82B8D7BB}"/>
               </a:ext>
             </a:extLst>
           </p:cNvPr>
@@ -4802,7 +4895,7 @@
           <p:cNvPr id="3" name="Marcador de texto 2">
             <a:extLst>
               <a:ext uri="{FF2B5EF4-FFF2-40B4-BE49-F238E27FC236}">
-                <a16:creationId xmlns:a16="http://schemas.microsoft.com/office/drawing/2014/main" id="{FE944365-9F01-579E-C6D1-74745222998A}"/>
+                <a16:creationId xmlns:a16="http://schemas.microsoft.com/office/drawing/2014/main" id="{4FAF4DCC-0BF4-ABD8-441B-4E1DC607AE53}"/>
               </a:ext>
             </a:extLst>
           </p:cNvPr>
@@ -4869,7 +4962,7 @@
           <p:cNvPr id="4" name="Marcador de fecha 3">
             <a:extLst>
               <a:ext uri="{FF2B5EF4-FFF2-40B4-BE49-F238E27FC236}">
-                <a16:creationId xmlns:a16="http://schemas.microsoft.com/office/drawing/2014/main" id="{DCC38CDE-3F65-F45E-E724-92C91E19C5ED}"/>
+                <a16:creationId xmlns:a16="http://schemas.microsoft.com/office/drawing/2014/main" id="{6673BBC5-9DC4-9DE1-BD15-DAD8E6BA7ACB}"/>
               </a:ext>
             </a:extLst>
           </p:cNvPr>
@@ -4896,16 +4989,16 @@
               <a:defRPr sz="1200">
                 <a:solidFill>
                   <a:schemeClr val="tx1">
-                    <a:tint val="75000"/>
+                    <a:tint val="82000"/>
                   </a:schemeClr>
                 </a:solidFill>
               </a:defRPr>
             </a:lvl1pPr>
           </a:lstStyle>
           <a:p>
-            <a:fld id="{95B52314-A619-4334-B9D6-E0F6CEE22DE1}" type="datetimeFigureOut">
+            <a:fld id="{E73BE342-D7DD-451B-AD14-82C868274E08}" type="datetimeFigureOut">
               <a:rPr lang="es-ES" smtClean="0"/>
-              <a:t>02/06/2026</a:t>
+              <a:t>04/06/2026</a:t>
             </a:fld>
             <a:endParaRPr lang="es-ES"/>
           </a:p>
@@ -4916,7 +5009,7 @@
           <p:cNvPr id="5" name="Marcador de pie de página 4">
             <a:extLst>
               <a:ext uri="{FF2B5EF4-FFF2-40B4-BE49-F238E27FC236}">
-                <a16:creationId xmlns:a16="http://schemas.microsoft.com/office/drawing/2014/main" id="{21272D42-79E4-789E-9422-46DF82DC52D3}"/>
+                <a16:creationId xmlns:a16="http://schemas.microsoft.com/office/drawing/2014/main" id="{EB8C28AD-308E-1D2F-9A99-1909B272495D}"/>
               </a:ext>
             </a:extLst>
           </p:cNvPr>
@@ -4943,7 +5036,7 @@
               <a:defRPr sz="1200">
                 <a:solidFill>
                   <a:schemeClr val="tx1">
-                    <a:tint val="75000"/>
+                    <a:tint val="82000"/>
                   </a:schemeClr>
                 </a:solidFill>
               </a:defRPr>
@@ -4959,7 +5052,7 @@
           <p:cNvPr id="6" name="Marcador de número de diapositiva 5">
             <a:extLst>
               <a:ext uri="{FF2B5EF4-FFF2-40B4-BE49-F238E27FC236}">
-                <a16:creationId xmlns:a16="http://schemas.microsoft.com/office/drawing/2014/main" id="{D3195015-4975-058C-A9F2-BB0077C1165E}"/>
+                <a16:creationId xmlns:a16="http://schemas.microsoft.com/office/drawing/2014/main" id="{AAB7F528-8CB8-68C6-D78E-044DBB56B50E}"/>
               </a:ext>
             </a:extLst>
           </p:cNvPr>
@@ -4986,14 +5079,14 @@
               <a:defRPr sz="1200">
                 <a:solidFill>
                   <a:schemeClr val="tx1">
-                    <a:tint val="75000"/>
+                    <a:tint val="82000"/>
                   </a:schemeClr>
                 </a:solidFill>
               </a:defRPr>
             </a:lvl1pPr>
           </a:lstStyle>
           <a:p>
-            <a:fld id="{7CE9BE3B-4377-4C4A-B97C-E3374EB29B73}" type="slidenum">
+            <a:fld id="{6FD9D725-7506-41FC-8170-7DB91405864C}" type="slidenum">
               <a:rPr lang="es-ES" smtClean="0"/>
               <a:t>‹Nº›</a:t>
             </a:fld>
@@ -5004,7 +5097,7 @@
     </p:spTree>
     <p:extLst>
       <p:ext uri="{BB962C8B-B14F-4D97-AF65-F5344CB8AC3E}">
-        <p14:creationId xmlns:p14="http://schemas.microsoft.com/office/powerpoint/2010/main" val="1949527148"/>
+        <p14:creationId xmlns:p14="http://schemas.microsoft.com/office/powerpoint/2010/main" val="881759497"/>
       </p:ext>
     </p:extLst>
   </p:cSld>
@@ -5335,7 +5428,7 @@
           <p:cNvPr id="2" name="Rectángulo: esquinas redondeadas 1">
             <a:extLst>
               <a:ext uri="{FF2B5EF4-FFF2-40B4-BE49-F238E27FC236}">
-                <a16:creationId xmlns:a16="http://schemas.microsoft.com/office/drawing/2014/main" id="{5FB3C4ED-0306-4653-5682-F6FA54B91543}"/>
+                <a16:creationId xmlns:a16="http://schemas.microsoft.com/office/drawing/2014/main" id="{93327B80-5FFB-BBD9-8E99-5E23CE81DD0C}"/>
               </a:ext>
             </a:extLst>
           </p:cNvPr>
@@ -5389,7 +5482,7 @@
           <p:cNvPr id="3" name="CuadroTexto 2">
             <a:extLst>
               <a:ext uri="{FF2B5EF4-FFF2-40B4-BE49-F238E27FC236}">
-                <a16:creationId xmlns:a16="http://schemas.microsoft.com/office/drawing/2014/main" id="{63C6278D-E305-22A6-EA05-5A5311C55315}"/>
+                <a16:creationId xmlns:a16="http://schemas.microsoft.com/office/drawing/2014/main" id="{44EA39D6-B4DB-7FD6-5373-FAD564E36E25}"/>
               </a:ext>
             </a:extLst>
           </p:cNvPr>
@@ -5429,7 +5522,7 @@
           <p:cNvPr id="4" name="CuadroTexto 3">
             <a:extLst>
               <a:ext uri="{FF2B5EF4-FFF2-40B4-BE49-F238E27FC236}">
-                <a16:creationId xmlns:a16="http://schemas.microsoft.com/office/drawing/2014/main" id="{66FEDC4E-6737-D34F-8B2D-F5B2F1A162E1}"/>
+                <a16:creationId xmlns:a16="http://schemas.microsoft.com/office/drawing/2014/main" id="{DDAF5003-B482-51BD-0CFD-BE37C8229055}"/>
               </a:ext>
             </a:extLst>
           </p:cNvPr>
@@ -5453,22 +5546,13 @@
           <a:lstStyle/>
           <a:p>
             <a:r>
-              <a:rPr lang="es-ES" sz="4200" b="1" dirty="0" err="1">
+              <a:rPr lang="es-ES" sz="4200" b="1">
                 <a:solidFill>
                   <a:srgbClr val="F6F8FC"/>
                 </a:solidFill>
                 <a:latin typeface="Segoe UI" panose="020B0502040204020203" pitchFamily="34" charset="0"/>
               </a:rPr>
-              <a:t>Gestion</a:t>
-            </a:r>
-            <a:r>
-              <a:rPr lang="es-ES" sz="4200" b="1">
-                <a:solidFill>
-                  <a:srgbClr val="F6F8FC"/>
-                </a:solidFill>
-                <a:latin typeface="Segoe UI" panose="020B0502040204020203" pitchFamily="34" charset="0"/>
-              </a:rPr>
-              <a:t> de Empresas Colaboradoras para FP Dual</a:t>
+              <a:t>Gestion de Empresas Colaboradoras para FP Dual</a:t>
             </a:r>
           </a:p>
         </p:txBody>
@@ -5478,7 +5562,7 @@
           <p:cNvPr id="5" name="CuadroTexto 4">
             <a:extLst>
               <a:ext uri="{FF2B5EF4-FFF2-40B4-BE49-F238E27FC236}">
-                <a16:creationId xmlns:a16="http://schemas.microsoft.com/office/drawing/2014/main" id="{4D97D36C-B62C-7883-3453-06C76145EDC4}"/>
+                <a16:creationId xmlns:a16="http://schemas.microsoft.com/office/drawing/2014/main" id="{0A01554D-D835-8E0D-A4D8-E128D009EB83}"/>
               </a:ext>
             </a:extLst>
           </p:cNvPr>
@@ -5518,7 +5602,7 @@
           <p:cNvPr id="6" name="CuadroTexto 5">
             <a:extLst>
               <a:ext uri="{FF2B5EF4-FFF2-40B4-BE49-F238E27FC236}">
-                <a16:creationId xmlns:a16="http://schemas.microsoft.com/office/drawing/2014/main" id="{82E1BEB6-69E2-F2AF-5378-DEC629C9300E}"/>
+                <a16:creationId xmlns:a16="http://schemas.microsoft.com/office/drawing/2014/main" id="{1EA13658-AE0B-761C-101A-CE5DB75CBB50}"/>
               </a:ext>
             </a:extLst>
           </p:cNvPr>
@@ -5569,7 +5653,7 @@
           <p:cNvPr id="8" name="Imagen 7">
             <a:extLst>
               <a:ext uri="{FF2B5EF4-FFF2-40B4-BE49-F238E27FC236}">
-                <a16:creationId xmlns:a16="http://schemas.microsoft.com/office/drawing/2014/main" id="{4FBD55B8-7CFD-9E69-D15B-C5CDDFE24C11}"/>
+                <a16:creationId xmlns:a16="http://schemas.microsoft.com/office/drawing/2014/main" id="{718514E0-622E-A1A3-59C9-67CD4DEAEB10}"/>
               </a:ext>
             </a:extLst>
           </p:cNvPr>
@@ -5592,7 +5676,7 @@
         </p:blipFill>
         <p:spPr>
           <a:xfrm>
-            <a:off x="6324600" y="3886200"/>
+            <a:off x="7493000" y="1968500"/>
             <a:ext cx="4064000" cy="2286000"/>
           </a:xfrm>
           <a:prstGeom prst="rect">
@@ -5608,7 +5692,7 @@
     </p:spTree>
     <p:extLst>
       <p:ext uri="{BB962C8B-B14F-4D97-AF65-F5344CB8AC3E}">
-        <p14:creationId xmlns:p14="http://schemas.microsoft.com/office/powerpoint/2010/main" val="201647960"/>
+        <p14:creationId xmlns:p14="http://schemas.microsoft.com/office/powerpoint/2010/main" val="1422064104"/>
       </p:ext>
     </p:extLst>
   </p:cSld>
@@ -5648,7 +5732,7 @@
           <p:cNvPr id="2" name="CuadroTexto 1">
             <a:extLst>
               <a:ext uri="{FF2B5EF4-FFF2-40B4-BE49-F238E27FC236}">
-                <a16:creationId xmlns:a16="http://schemas.microsoft.com/office/drawing/2014/main" id="{7D9102D5-717E-4A51-C91C-8305EFD8A76F}"/>
+                <a16:creationId xmlns:a16="http://schemas.microsoft.com/office/drawing/2014/main" id="{3374D3E1-8E05-B726-C5F1-378BF8E59803}"/>
               </a:ext>
             </a:extLst>
           </p:cNvPr>
@@ -5688,7 +5772,7 @@
           <p:cNvPr id="3" name="CuadroTexto 2">
             <a:extLst>
               <a:ext uri="{FF2B5EF4-FFF2-40B4-BE49-F238E27FC236}">
-                <a16:creationId xmlns:a16="http://schemas.microsoft.com/office/drawing/2014/main" id="{CE1CE6B2-41E9-F009-2AAC-4FA5341E24B5}"/>
+                <a16:creationId xmlns:a16="http://schemas.microsoft.com/office/drawing/2014/main" id="{778B9665-64C9-ACC9-48C6-E0EFDE306C44}"/>
               </a:ext>
             </a:extLst>
           </p:cNvPr>
@@ -5728,7 +5812,7 @@
           <p:cNvPr id="4" name="CuadroTexto 3">
             <a:extLst>
               <a:ext uri="{FF2B5EF4-FFF2-40B4-BE49-F238E27FC236}">
-                <a16:creationId xmlns:a16="http://schemas.microsoft.com/office/drawing/2014/main" id="{139D976D-329F-FA13-1B3E-8907ADC325DB}"/>
+                <a16:creationId xmlns:a16="http://schemas.microsoft.com/office/drawing/2014/main" id="{9BE82840-970E-0071-12E3-958E0A1AEB29}"/>
               </a:ext>
             </a:extLst>
           </p:cNvPr>
@@ -5768,7 +5852,7 @@
           <p:cNvPr id="5" name="Rectángulo: esquinas redondeadas 4">
             <a:extLst>
               <a:ext uri="{FF2B5EF4-FFF2-40B4-BE49-F238E27FC236}">
-                <a16:creationId xmlns:a16="http://schemas.microsoft.com/office/drawing/2014/main" id="{DD66C5CD-23C1-3031-A74B-0E6578C24A05}"/>
+                <a16:creationId xmlns:a16="http://schemas.microsoft.com/office/drawing/2014/main" id="{5645629F-5F2D-D309-C061-C0D87F663F90}"/>
               </a:ext>
             </a:extLst>
           </p:cNvPr>
@@ -5777,8 +5861,8 @@
         </p:nvSpPr>
         <p:spPr>
           <a:xfrm>
-            <a:off x="711200" y="2064265"/>
-            <a:ext cx="3096302" cy="3542055"/>
+            <a:off x="736600" y="2032000"/>
+            <a:ext cx="3175000" cy="2870200"/>
           </a:xfrm>
           <a:prstGeom prst="roundRect">
             <a:avLst/>
@@ -5822,7 +5906,7 @@
           <p:cNvPr id="6" name="CuadroTexto 5">
             <a:extLst>
               <a:ext uri="{FF2B5EF4-FFF2-40B4-BE49-F238E27FC236}">
-                <a16:creationId xmlns:a16="http://schemas.microsoft.com/office/drawing/2014/main" id="{C44EC28E-628A-4C2F-89DA-58D06C5B0732}"/>
+                <a16:creationId xmlns:a16="http://schemas.microsoft.com/office/drawing/2014/main" id="{B0D80F07-D7E8-B853-9F6F-801C5B25AF9D}"/>
               </a:ext>
             </a:extLst>
           </p:cNvPr>
@@ -5862,7 +5946,7 @@
           <p:cNvPr id="7" name="CuadroTexto 6">
             <a:extLst>
               <a:ext uri="{FF2B5EF4-FFF2-40B4-BE49-F238E27FC236}">
-                <a16:creationId xmlns:a16="http://schemas.microsoft.com/office/drawing/2014/main" id="{B92ECB85-3A17-B38A-0AF0-4FA3142EE3A7}"/>
+                <a16:creationId xmlns:a16="http://schemas.microsoft.com/office/drawing/2014/main" id="{0D47D3A7-7258-E37D-C44E-EB4D889FF13E}"/>
               </a:ext>
             </a:extLst>
           </p:cNvPr>
@@ -5981,7 +6065,7 @@
           <p:cNvPr id="8" name="Rectángulo: esquinas redondeadas 7">
             <a:extLst>
               <a:ext uri="{FF2B5EF4-FFF2-40B4-BE49-F238E27FC236}">
-                <a16:creationId xmlns:a16="http://schemas.microsoft.com/office/drawing/2014/main" id="{CA753F6C-A910-F805-9076-751C3EB51A03}"/>
+                <a16:creationId xmlns:a16="http://schemas.microsoft.com/office/drawing/2014/main" id="{75B6BBD5-D47B-4801-21E3-BE6D8B77347F}"/>
               </a:ext>
             </a:extLst>
           </p:cNvPr>
@@ -6035,7 +6119,7 @@
           <p:cNvPr id="9" name="CuadroTexto 8">
             <a:extLst>
               <a:ext uri="{FF2B5EF4-FFF2-40B4-BE49-F238E27FC236}">
-                <a16:creationId xmlns:a16="http://schemas.microsoft.com/office/drawing/2014/main" id="{B3F18F46-3C1B-DC9A-E820-07A26F5226CD}"/>
+                <a16:creationId xmlns:a16="http://schemas.microsoft.com/office/drawing/2014/main" id="{265814E6-476A-BA96-BE11-F7C0B58B2AA2}"/>
               </a:ext>
             </a:extLst>
           </p:cNvPr>
@@ -6075,7 +6159,7 @@
           <p:cNvPr id="10" name="CuadroTexto 9">
             <a:extLst>
               <a:ext uri="{FF2B5EF4-FFF2-40B4-BE49-F238E27FC236}">
-                <a16:creationId xmlns:a16="http://schemas.microsoft.com/office/drawing/2014/main" id="{949893C6-C677-70F7-75E3-E229B8E11736}"/>
+                <a16:creationId xmlns:a16="http://schemas.microsoft.com/office/drawing/2014/main" id="{BE86C99D-973B-6DD4-9BC3-B919BC37CF15}"/>
               </a:ext>
             </a:extLst>
           </p:cNvPr>
@@ -6115,7 +6199,7 @@
           <p:cNvPr id="11" name="Rectángulo: esquinas redondeadas 10">
             <a:extLst>
               <a:ext uri="{FF2B5EF4-FFF2-40B4-BE49-F238E27FC236}">
-                <a16:creationId xmlns:a16="http://schemas.microsoft.com/office/drawing/2014/main" id="{A0FCB78A-F183-E664-74E1-4535BCB0A394}"/>
+                <a16:creationId xmlns:a16="http://schemas.microsoft.com/office/drawing/2014/main" id="{15977E5D-B5F7-7CC7-4A73-0667730AD9D6}"/>
               </a:ext>
             </a:extLst>
           </p:cNvPr>
@@ -6169,7 +6253,7 @@
           <p:cNvPr id="12" name="CuadroTexto 11">
             <a:extLst>
               <a:ext uri="{FF2B5EF4-FFF2-40B4-BE49-F238E27FC236}">
-                <a16:creationId xmlns:a16="http://schemas.microsoft.com/office/drawing/2014/main" id="{1A75C33B-F113-4DA7-27AB-F51E8D681103}"/>
+                <a16:creationId xmlns:a16="http://schemas.microsoft.com/office/drawing/2014/main" id="{42AF80DE-8F1F-C120-79F6-2001AF2ACA7A}"/>
               </a:ext>
             </a:extLst>
           </p:cNvPr>
@@ -6209,7 +6293,7 @@
           <p:cNvPr id="13" name="CuadroTexto 12">
             <a:extLst>
               <a:ext uri="{FF2B5EF4-FFF2-40B4-BE49-F238E27FC236}">
-                <a16:creationId xmlns:a16="http://schemas.microsoft.com/office/drawing/2014/main" id="{B2498C44-A706-46ED-4644-F765C1E83685}"/>
+                <a16:creationId xmlns:a16="http://schemas.microsoft.com/office/drawing/2014/main" id="{DB5FDE6D-93F7-CCD6-D34B-33A9BF0DB37B}"/>
               </a:ext>
             </a:extLst>
           </p:cNvPr>
@@ -6249,7 +6333,7 @@
           <p:cNvPr id="14" name="Rectángulo: esquinas redondeadas 13">
             <a:extLst>
               <a:ext uri="{FF2B5EF4-FFF2-40B4-BE49-F238E27FC236}">
-                <a16:creationId xmlns:a16="http://schemas.microsoft.com/office/drawing/2014/main" id="{39A04F6C-992D-F91F-A2F3-17D730D31D28}"/>
+                <a16:creationId xmlns:a16="http://schemas.microsoft.com/office/drawing/2014/main" id="{F38068D3-3A9A-2292-32C1-36B0953AEF3D}"/>
               </a:ext>
             </a:extLst>
           </p:cNvPr>
@@ -6303,7 +6387,7 @@
           <p:cNvPr id="15" name="CuadroTexto 14">
             <a:extLst>
               <a:ext uri="{FF2B5EF4-FFF2-40B4-BE49-F238E27FC236}">
-                <a16:creationId xmlns:a16="http://schemas.microsoft.com/office/drawing/2014/main" id="{776C84D0-CEBB-8425-DB63-AA765A824A65}"/>
+                <a16:creationId xmlns:a16="http://schemas.microsoft.com/office/drawing/2014/main" id="{A5B2DF49-6987-A79E-C708-8114F7A6772F}"/>
               </a:ext>
             </a:extLst>
           </p:cNvPr>
@@ -6343,7 +6427,7 @@
           <p:cNvPr id="16" name="CuadroTexto 15">
             <a:extLst>
               <a:ext uri="{FF2B5EF4-FFF2-40B4-BE49-F238E27FC236}">
-                <a16:creationId xmlns:a16="http://schemas.microsoft.com/office/drawing/2014/main" id="{F191F303-0C48-28BC-676A-E251F0C85EBA}"/>
+                <a16:creationId xmlns:a16="http://schemas.microsoft.com/office/drawing/2014/main" id="{5E5CB0A2-3CF0-191E-2E10-BCCDFFF569AD}"/>
               </a:ext>
             </a:extLst>
           </p:cNvPr>
@@ -6383,7 +6467,7 @@
           <p:cNvPr id="17" name="Rectángulo: esquinas redondeadas 16">
             <a:extLst>
               <a:ext uri="{FF2B5EF4-FFF2-40B4-BE49-F238E27FC236}">
-                <a16:creationId xmlns:a16="http://schemas.microsoft.com/office/drawing/2014/main" id="{E188D10C-33DB-C963-6F15-047D201A5AB9}"/>
+                <a16:creationId xmlns:a16="http://schemas.microsoft.com/office/drawing/2014/main" id="{1E0BC151-3436-50C9-3ECE-87EFC438422E}"/>
               </a:ext>
             </a:extLst>
           </p:cNvPr>
@@ -6437,7 +6521,7 @@
           <p:cNvPr id="18" name="CuadroTexto 17">
             <a:extLst>
               <a:ext uri="{FF2B5EF4-FFF2-40B4-BE49-F238E27FC236}">
-                <a16:creationId xmlns:a16="http://schemas.microsoft.com/office/drawing/2014/main" id="{C34F4450-C056-32CD-A664-65E78CED7353}"/>
+                <a16:creationId xmlns:a16="http://schemas.microsoft.com/office/drawing/2014/main" id="{DE120990-9474-37D3-4311-ACFE33B3AF97}"/>
               </a:ext>
             </a:extLst>
           </p:cNvPr>
@@ -6477,7 +6561,7 @@
           <p:cNvPr id="19" name="CuadroTexto 18">
             <a:extLst>
               <a:ext uri="{FF2B5EF4-FFF2-40B4-BE49-F238E27FC236}">
-                <a16:creationId xmlns:a16="http://schemas.microsoft.com/office/drawing/2014/main" id="{B8B24DCF-59ED-9782-CA09-3B97DFBA900A}"/>
+                <a16:creationId xmlns:a16="http://schemas.microsoft.com/office/drawing/2014/main" id="{8751CA69-41EE-3158-CC49-C07B843A509D}"/>
               </a:ext>
             </a:extLst>
           </p:cNvPr>
@@ -6515,7 +6599,7 @@
     </p:spTree>
     <p:extLst>
       <p:ext uri="{BB962C8B-B14F-4D97-AF65-F5344CB8AC3E}">
-        <p14:creationId xmlns:p14="http://schemas.microsoft.com/office/powerpoint/2010/main" val="1232113993"/>
+        <p14:creationId xmlns:p14="http://schemas.microsoft.com/office/powerpoint/2010/main" val="2847701502"/>
       </p:ext>
     </p:extLst>
   </p:cSld>
@@ -6555,7 +6639,7 @@
           <p:cNvPr id="2" name="CuadroTexto 1">
             <a:extLst>
               <a:ext uri="{FF2B5EF4-FFF2-40B4-BE49-F238E27FC236}">
-                <a16:creationId xmlns:a16="http://schemas.microsoft.com/office/drawing/2014/main" id="{9E1A3761-3C38-01FD-7D8A-7899D82B08BA}"/>
+                <a16:creationId xmlns:a16="http://schemas.microsoft.com/office/drawing/2014/main" id="{1BFC0396-2A65-7C5C-BD6D-A3CD1F05C574}"/>
               </a:ext>
             </a:extLst>
           </p:cNvPr>
@@ -6595,7 +6679,7 @@
           <p:cNvPr id="3" name="CuadroTexto 2">
             <a:extLst>
               <a:ext uri="{FF2B5EF4-FFF2-40B4-BE49-F238E27FC236}">
-                <a16:creationId xmlns:a16="http://schemas.microsoft.com/office/drawing/2014/main" id="{BDC9ACB0-2170-49BE-379A-EF5E5C213482}"/>
+                <a16:creationId xmlns:a16="http://schemas.microsoft.com/office/drawing/2014/main" id="{B83C3B01-4369-B14C-3B22-DAAC33E8EC4B}"/>
               </a:ext>
             </a:extLst>
           </p:cNvPr>
@@ -6635,7 +6719,7 @@
           <p:cNvPr id="4" name="CuadroTexto 3">
             <a:extLst>
               <a:ext uri="{FF2B5EF4-FFF2-40B4-BE49-F238E27FC236}">
-                <a16:creationId xmlns:a16="http://schemas.microsoft.com/office/drawing/2014/main" id="{B8B96D5D-957D-7204-2C56-8263917FD18C}"/>
+                <a16:creationId xmlns:a16="http://schemas.microsoft.com/office/drawing/2014/main" id="{0ED18EBC-AA24-75AC-831E-459940DC4216}"/>
               </a:ext>
             </a:extLst>
           </p:cNvPr>
@@ -6675,7 +6759,7 @@
           <p:cNvPr id="5" name="Rectángulo: esquinas redondeadas 4">
             <a:extLst>
               <a:ext uri="{FF2B5EF4-FFF2-40B4-BE49-F238E27FC236}">
-                <a16:creationId xmlns:a16="http://schemas.microsoft.com/office/drawing/2014/main" id="{2AA17CA2-6781-D5F1-35C7-DD5A52D7B79E}"/>
+                <a16:creationId xmlns:a16="http://schemas.microsoft.com/office/drawing/2014/main" id="{3834664E-4D88-FD0E-3B1C-AD58F616C932}"/>
               </a:ext>
             </a:extLst>
           </p:cNvPr>
@@ -6729,7 +6813,7 @@
           <p:cNvPr id="6" name="CuadroTexto 5">
             <a:extLst>
               <a:ext uri="{FF2B5EF4-FFF2-40B4-BE49-F238E27FC236}">
-                <a16:creationId xmlns:a16="http://schemas.microsoft.com/office/drawing/2014/main" id="{B21F60FB-C8C7-4210-272E-FFC4AC4A0C79}"/>
+                <a16:creationId xmlns:a16="http://schemas.microsoft.com/office/drawing/2014/main" id="{258BB420-ABBF-1933-C98C-9475D272671B}"/>
               </a:ext>
             </a:extLst>
           </p:cNvPr>
@@ -6769,7 +6853,7 @@
           <p:cNvPr id="7" name="CuadroTexto 6">
             <a:extLst>
               <a:ext uri="{FF2B5EF4-FFF2-40B4-BE49-F238E27FC236}">
-                <a16:creationId xmlns:a16="http://schemas.microsoft.com/office/drawing/2014/main" id="{C0D6E2D5-7AC8-CB3C-B324-7059CC36FEBC}"/>
+                <a16:creationId xmlns:a16="http://schemas.microsoft.com/office/drawing/2014/main" id="{9C5FE3DF-3B88-5C06-554E-9829D2837B33}"/>
               </a:ext>
             </a:extLst>
           </p:cNvPr>
@@ -6809,7 +6893,7 @@
           <p:cNvPr id="8" name="Rectángulo: esquinas redondeadas 7">
             <a:extLst>
               <a:ext uri="{FF2B5EF4-FFF2-40B4-BE49-F238E27FC236}">
-                <a16:creationId xmlns:a16="http://schemas.microsoft.com/office/drawing/2014/main" id="{0DE1B554-2060-321E-4EC0-FD59CCD4BE3F}"/>
+                <a16:creationId xmlns:a16="http://schemas.microsoft.com/office/drawing/2014/main" id="{22BAA209-0796-F4C2-D741-E83A03ADFBF4}"/>
               </a:ext>
             </a:extLst>
           </p:cNvPr>
@@ -6863,7 +6947,7 @@
           <p:cNvPr id="9" name="CuadroTexto 8">
             <a:extLst>
               <a:ext uri="{FF2B5EF4-FFF2-40B4-BE49-F238E27FC236}">
-                <a16:creationId xmlns:a16="http://schemas.microsoft.com/office/drawing/2014/main" id="{B924C4EE-7EC0-21A8-EFDE-150F41FD9BF5}"/>
+                <a16:creationId xmlns:a16="http://schemas.microsoft.com/office/drawing/2014/main" id="{5C469DFF-7C0E-9DA5-488E-2FB234357FD4}"/>
               </a:ext>
             </a:extLst>
           </p:cNvPr>
@@ -6903,7 +6987,7 @@
           <p:cNvPr id="10" name="CuadroTexto 9">
             <a:extLst>
               <a:ext uri="{FF2B5EF4-FFF2-40B4-BE49-F238E27FC236}">
-                <a16:creationId xmlns:a16="http://schemas.microsoft.com/office/drawing/2014/main" id="{D1C3839D-043C-95BD-F0D3-174033DADB3D}"/>
+                <a16:creationId xmlns:a16="http://schemas.microsoft.com/office/drawing/2014/main" id="{6EF2C389-3F2D-C8B6-9EE8-E0DD9D310C2F}"/>
               </a:ext>
             </a:extLst>
           </p:cNvPr>
@@ -6943,7 +7027,7 @@
           <p:cNvPr id="11" name="Rectángulo: esquinas redondeadas 10">
             <a:extLst>
               <a:ext uri="{FF2B5EF4-FFF2-40B4-BE49-F238E27FC236}">
-                <a16:creationId xmlns:a16="http://schemas.microsoft.com/office/drawing/2014/main" id="{643C719D-35FE-63BF-AEBF-E0FE896A038E}"/>
+                <a16:creationId xmlns:a16="http://schemas.microsoft.com/office/drawing/2014/main" id="{7CBFF513-0955-3716-4F81-8922A478B831}"/>
               </a:ext>
             </a:extLst>
           </p:cNvPr>
@@ -6997,7 +7081,7 @@
           <p:cNvPr id="12" name="CuadroTexto 11">
             <a:extLst>
               <a:ext uri="{FF2B5EF4-FFF2-40B4-BE49-F238E27FC236}">
-                <a16:creationId xmlns:a16="http://schemas.microsoft.com/office/drawing/2014/main" id="{44334413-4CB5-56D5-1D4B-67764B20E29B}"/>
+                <a16:creationId xmlns:a16="http://schemas.microsoft.com/office/drawing/2014/main" id="{B7EDB871-3C94-A151-D177-50F2BC7894F4}"/>
               </a:ext>
             </a:extLst>
           </p:cNvPr>
@@ -7037,7 +7121,7 @@
           <p:cNvPr id="13" name="CuadroTexto 12">
             <a:extLst>
               <a:ext uri="{FF2B5EF4-FFF2-40B4-BE49-F238E27FC236}">
-                <a16:creationId xmlns:a16="http://schemas.microsoft.com/office/drawing/2014/main" id="{C075B5C6-3754-F06E-BFF2-2BF48024C585}"/>
+                <a16:creationId xmlns:a16="http://schemas.microsoft.com/office/drawing/2014/main" id="{BF0D9C48-63F6-1D2D-3302-DDAD9CF0D3FB}"/>
               </a:ext>
             </a:extLst>
           </p:cNvPr>
@@ -7067,7 +7151,7 @@
                 </a:solidFill>
                 <a:latin typeface="Consolas" panose="020B0609020204030204" pitchFamily="49" charset="0"/>
               </a:rPr>
-              <a:t>https://agora.34.175.161.212.nip.io</a:t>
+              <a:t>https://agora.34.175.157.37...</a:t>
             </a:r>
           </a:p>
         </p:txBody>
@@ -7077,7 +7161,7 @@
           <p:cNvPr id="14" name="CuadroTexto 13">
             <a:extLst>
               <a:ext uri="{FF2B5EF4-FFF2-40B4-BE49-F238E27FC236}">
-                <a16:creationId xmlns:a16="http://schemas.microsoft.com/office/drawing/2014/main" id="{90E48D3D-6283-79C7-86CD-E6722A5DFB37}"/>
+                <a16:creationId xmlns:a16="http://schemas.microsoft.com/office/drawing/2014/main" id="{246B6323-66F3-2568-C7A5-F451E28A27DE}"/>
               </a:ext>
             </a:extLst>
           </p:cNvPr>
@@ -7158,7 +7242,7 @@
     </p:spTree>
     <p:extLst>
       <p:ext uri="{BB962C8B-B14F-4D97-AF65-F5344CB8AC3E}">
-        <p14:creationId xmlns:p14="http://schemas.microsoft.com/office/powerpoint/2010/main" val="1692312577"/>
+        <p14:creationId xmlns:p14="http://schemas.microsoft.com/office/powerpoint/2010/main" val="2813981965"/>
       </p:ext>
     </p:extLst>
   </p:cSld>
@@ -7198,7 +7282,7 @@
           <p:cNvPr id="2" name="CuadroTexto 1">
             <a:extLst>
               <a:ext uri="{FF2B5EF4-FFF2-40B4-BE49-F238E27FC236}">
-                <a16:creationId xmlns:a16="http://schemas.microsoft.com/office/drawing/2014/main" id="{B7025544-C60C-2F23-89EB-5F91FA41DF9E}"/>
+                <a16:creationId xmlns:a16="http://schemas.microsoft.com/office/drawing/2014/main" id="{B91D7901-1C82-3FC5-C6FA-FB5AB170F64F}"/>
               </a:ext>
             </a:extLst>
           </p:cNvPr>
@@ -7238,7 +7322,7 @@
           <p:cNvPr id="3" name="CuadroTexto 2">
             <a:extLst>
               <a:ext uri="{FF2B5EF4-FFF2-40B4-BE49-F238E27FC236}">
-                <a16:creationId xmlns:a16="http://schemas.microsoft.com/office/drawing/2014/main" id="{4D9C9F81-FA04-08FC-4094-7EF7691B4FCE}"/>
+                <a16:creationId xmlns:a16="http://schemas.microsoft.com/office/drawing/2014/main" id="{74A471D8-C86F-26A6-EE8B-6476631940F4}"/>
               </a:ext>
             </a:extLst>
           </p:cNvPr>
@@ -7278,7 +7362,7 @@
           <p:cNvPr id="4" name="CuadroTexto 3">
             <a:extLst>
               <a:ext uri="{FF2B5EF4-FFF2-40B4-BE49-F238E27FC236}">
-                <a16:creationId xmlns:a16="http://schemas.microsoft.com/office/drawing/2014/main" id="{AAEFC986-6B2C-CCA1-5495-FF37D8F9FF48}"/>
+                <a16:creationId xmlns:a16="http://schemas.microsoft.com/office/drawing/2014/main" id="{9B7B1F44-BB1D-204D-F7D4-73FFC3F9BA51}"/>
               </a:ext>
             </a:extLst>
           </p:cNvPr>
@@ -7318,7 +7402,7 @@
           <p:cNvPr id="6" name="Imagen 5">
             <a:extLst>
               <a:ext uri="{FF2B5EF4-FFF2-40B4-BE49-F238E27FC236}">
-                <a16:creationId xmlns:a16="http://schemas.microsoft.com/office/drawing/2014/main" id="{9D1829EB-7246-9B78-137D-13E516B0BB5E}"/>
+                <a16:creationId xmlns:a16="http://schemas.microsoft.com/office/drawing/2014/main" id="{F54328A9-F2DC-97F2-E892-FF176FB4BC6D}"/>
               </a:ext>
             </a:extLst>
           </p:cNvPr>
@@ -7359,7 +7443,7 @@
           <p:cNvPr id="7" name="Rectángulo: esquinas redondeadas 6">
             <a:extLst>
               <a:ext uri="{FF2B5EF4-FFF2-40B4-BE49-F238E27FC236}">
-                <a16:creationId xmlns:a16="http://schemas.microsoft.com/office/drawing/2014/main" id="{FBD9C71F-ACCF-AD8D-5A07-DF2580D5B440}"/>
+                <a16:creationId xmlns:a16="http://schemas.microsoft.com/office/drawing/2014/main" id="{A490637C-CB8F-478E-4789-4A1BEC739ABD}"/>
               </a:ext>
             </a:extLst>
           </p:cNvPr>
@@ -7368,8 +7452,8 @@
         </p:nvSpPr>
         <p:spPr>
           <a:xfrm>
-            <a:off x="7797800" y="1791732"/>
-            <a:ext cx="3175000" cy="1377434"/>
+            <a:off x="7874000" y="2082800"/>
+            <a:ext cx="3175000" cy="1066800"/>
           </a:xfrm>
           <a:prstGeom prst="roundRect">
             <a:avLst/>
@@ -7413,7 +7497,7 @@
           <p:cNvPr id="8" name="CuadroTexto 7">
             <a:extLst>
               <a:ext uri="{FF2B5EF4-FFF2-40B4-BE49-F238E27FC236}">
-                <a16:creationId xmlns:a16="http://schemas.microsoft.com/office/drawing/2014/main" id="{076C8171-2494-55BB-A376-09E643B06DDB}"/>
+                <a16:creationId xmlns:a16="http://schemas.microsoft.com/office/drawing/2014/main" id="{92B614AC-4BDC-CCD5-2B2C-433D75FF9369}"/>
               </a:ext>
             </a:extLst>
           </p:cNvPr>
@@ -7422,7 +7506,7 @@
         </p:nvSpPr>
         <p:spPr>
           <a:xfrm>
-            <a:off x="8267700" y="2111117"/>
+            <a:off x="8255000" y="2336800"/>
             <a:ext cx="2413000" cy="369332"/>
           </a:xfrm>
           <a:prstGeom prst="rect">
@@ -7437,38 +7521,14 @@
           <a:lstStyle/>
           <a:p>
             <a:r>
-              <a:rPr lang="es-ES" sz="2000" b="1" dirty="0" err="1">
+              <a:rPr lang="es-ES" sz="2000" b="1">
                 <a:solidFill>
                   <a:srgbClr val="DBA14D"/>
                 </a:solidFill>
                 <a:latin typeface="Segoe UI" panose="020B0502040204020203" pitchFamily="34" charset="0"/>
               </a:rPr>
-              <a:t>Actualizacion</a:t>
-            </a:r>
-            <a:r>
-              <a:rPr lang="es-ES" sz="2000" b="1" dirty="0">
-                <a:solidFill>
-                  <a:srgbClr val="DBA14D"/>
-                </a:solidFill>
-                <a:latin typeface="Segoe UI" panose="020B0502040204020203" pitchFamily="34" charset="0"/>
-              </a:rPr>
-              <a:t> </a:t>
-            </a:r>
-            <a:r>
-              <a:rPr lang="es-ES" sz="2000" b="1" dirty="0" err="1">
-                <a:solidFill>
-                  <a:srgbClr val="DBA14D"/>
-                </a:solidFill>
-                <a:latin typeface="Segoe UI" panose="020B0502040204020203" pitchFamily="34" charset="0"/>
-              </a:rPr>
-              <a:t>automatica</a:t>
-            </a:r>
-            <a:endParaRPr lang="es-ES" sz="2000" b="1" dirty="0">
-              <a:solidFill>
-                <a:srgbClr val="DBA14D"/>
-              </a:solidFill>
-              <a:latin typeface="Segoe UI" panose="020B0502040204020203" pitchFamily="34" charset="0"/>
-            </a:endParaRPr>
+              <a:t>Actualizacion automatica</a:t>
+            </a:r>
           </a:p>
         </p:txBody>
       </p:sp>
@@ -7477,7 +7537,7 @@
           <p:cNvPr id="9" name="CuadroTexto 8">
             <a:extLst>
               <a:ext uri="{FF2B5EF4-FFF2-40B4-BE49-F238E27FC236}">
-                <a16:creationId xmlns:a16="http://schemas.microsoft.com/office/drawing/2014/main" id="{26AD6E69-10B3-4CA1-5130-7A0650A04B04}"/>
+                <a16:creationId xmlns:a16="http://schemas.microsoft.com/office/drawing/2014/main" id="{B582EB93-4CB8-682C-9364-4EA5465325C8}"/>
               </a:ext>
             </a:extLst>
           </p:cNvPr>
@@ -7517,7 +7577,7 @@
           <p:cNvPr id="10" name="CuadroTexto 9">
             <a:extLst>
               <a:ext uri="{FF2B5EF4-FFF2-40B4-BE49-F238E27FC236}">
-                <a16:creationId xmlns:a16="http://schemas.microsoft.com/office/drawing/2014/main" id="{BB1BF4B8-A0B3-5F8C-AE82-52F9F816C3DD}"/>
+                <a16:creationId xmlns:a16="http://schemas.microsoft.com/office/drawing/2014/main" id="{4E77CE56-DB0D-3287-003F-E1D94D866C82}"/>
               </a:ext>
             </a:extLst>
           </p:cNvPr>
@@ -7616,7 +7676,7 @@
     </p:spTree>
     <p:extLst>
       <p:ext uri="{BB962C8B-B14F-4D97-AF65-F5344CB8AC3E}">
-        <p14:creationId xmlns:p14="http://schemas.microsoft.com/office/powerpoint/2010/main" val="2912075940"/>
+        <p14:creationId xmlns:p14="http://schemas.microsoft.com/office/powerpoint/2010/main" val="4073910951"/>
       </p:ext>
     </p:extLst>
   </p:cSld>
@@ -7656,7 +7716,7 @@
           <p:cNvPr id="2" name="CuadroTexto 1">
             <a:extLst>
               <a:ext uri="{FF2B5EF4-FFF2-40B4-BE49-F238E27FC236}">
-                <a16:creationId xmlns:a16="http://schemas.microsoft.com/office/drawing/2014/main" id="{84B709F9-225E-BD7C-0224-058D39EF083C}"/>
+                <a16:creationId xmlns:a16="http://schemas.microsoft.com/office/drawing/2014/main" id="{F2539D70-8596-63F3-175E-E17D9945B91D}"/>
               </a:ext>
             </a:extLst>
           </p:cNvPr>
@@ -7696,7 +7756,7 @@
           <p:cNvPr id="3" name="CuadroTexto 2">
             <a:extLst>
               <a:ext uri="{FF2B5EF4-FFF2-40B4-BE49-F238E27FC236}">
-                <a16:creationId xmlns:a16="http://schemas.microsoft.com/office/drawing/2014/main" id="{35D83A18-F373-B82E-FDB7-6D28C71EF3E1}"/>
+                <a16:creationId xmlns:a16="http://schemas.microsoft.com/office/drawing/2014/main" id="{0B10F546-5F4E-01FF-70A6-C70A8AEF8758}"/>
               </a:ext>
             </a:extLst>
           </p:cNvPr>
@@ -7736,7 +7796,7 @@
           <p:cNvPr id="4" name="CuadroTexto 3">
             <a:extLst>
               <a:ext uri="{FF2B5EF4-FFF2-40B4-BE49-F238E27FC236}">
-                <a16:creationId xmlns:a16="http://schemas.microsoft.com/office/drawing/2014/main" id="{AD3C4405-E1E3-45B1-1995-2CCC0F469715}"/>
+                <a16:creationId xmlns:a16="http://schemas.microsoft.com/office/drawing/2014/main" id="{096BBF0C-52CD-6A03-4382-BB69363F4448}"/>
               </a:ext>
             </a:extLst>
           </p:cNvPr>
@@ -7776,7 +7836,7 @@
           <p:cNvPr id="6" name="Imagen 5">
             <a:extLst>
               <a:ext uri="{FF2B5EF4-FFF2-40B4-BE49-F238E27FC236}">
-                <a16:creationId xmlns:a16="http://schemas.microsoft.com/office/drawing/2014/main" id="{AFEBCC9B-2A32-24AF-3F8F-5AB684FF0121}"/>
+                <a16:creationId xmlns:a16="http://schemas.microsoft.com/office/drawing/2014/main" id="{3FFA2FB5-EEA5-084C-86BF-F1CC33208862}"/>
               </a:ext>
             </a:extLst>
           </p:cNvPr>
@@ -7817,7 +7877,7 @@
           <p:cNvPr id="7" name="CuadroTexto 6">
             <a:extLst>
               <a:ext uri="{FF2B5EF4-FFF2-40B4-BE49-F238E27FC236}">
-                <a16:creationId xmlns:a16="http://schemas.microsoft.com/office/drawing/2014/main" id="{E48EA2E0-E88A-4C06-0F10-5EFCA54BFB98}"/>
+                <a16:creationId xmlns:a16="http://schemas.microsoft.com/office/drawing/2014/main" id="{A232BE2A-17FF-904C-1DB8-17150B49E093}"/>
               </a:ext>
             </a:extLst>
           </p:cNvPr>
@@ -7934,7 +7994,7 @@
     </p:spTree>
     <p:extLst>
       <p:ext uri="{BB962C8B-B14F-4D97-AF65-F5344CB8AC3E}">
-        <p14:creationId xmlns:p14="http://schemas.microsoft.com/office/powerpoint/2010/main" val="117999670"/>
+        <p14:creationId xmlns:p14="http://schemas.microsoft.com/office/powerpoint/2010/main" val="839347778"/>
       </p:ext>
     </p:extLst>
   </p:cSld>
@@ -7974,7 +8034,7 @@
           <p:cNvPr id="2" name="CuadroTexto 1">
             <a:extLst>
               <a:ext uri="{FF2B5EF4-FFF2-40B4-BE49-F238E27FC236}">
-                <a16:creationId xmlns:a16="http://schemas.microsoft.com/office/drawing/2014/main" id="{C293FC0E-802A-7C2F-9353-71E3D2C27465}"/>
+                <a16:creationId xmlns:a16="http://schemas.microsoft.com/office/drawing/2014/main" id="{E25FC2C0-B528-39DD-26C0-EB0E75E2CAE2}"/>
               </a:ext>
             </a:extLst>
           </p:cNvPr>
@@ -8004,7 +8064,7 @@
                 </a:solidFill>
                 <a:latin typeface="Segoe UI" panose="020B0502040204020203" pitchFamily="34" charset="0"/>
               </a:rPr>
-              <a:t>13 / VALIDACION</a:t>
+              <a:t>13 / OPERACION Y SEGURIDAD</a:t>
             </a:r>
           </a:p>
         </p:txBody>
@@ -8014,7 +8074,7 @@
           <p:cNvPr id="3" name="CuadroTexto 2">
             <a:extLst>
               <a:ext uri="{FF2B5EF4-FFF2-40B4-BE49-F238E27FC236}">
-                <a16:creationId xmlns:a16="http://schemas.microsoft.com/office/drawing/2014/main" id="{112E3C5C-3B76-0C91-F4F2-10ACB1AF06BE}"/>
+                <a16:creationId xmlns:a16="http://schemas.microsoft.com/office/drawing/2014/main" id="{C2743FC8-8AD7-156C-D7BA-C70312F3EB8E}"/>
               </a:ext>
             </a:extLst>
           </p:cNvPr>
@@ -8044,17 +8104,57 @@
                 </a:solidFill>
                 <a:latin typeface="Segoe UI" panose="020B0502040204020203" pitchFamily="34" charset="0"/>
               </a:rPr>
-              <a:t>Comprobaciones ejecutadas antes de la revision final</a:t>
-            </a:r>
-          </a:p>
-        </p:txBody>
-      </p:sp>
-      <p:sp>
-        <p:nvSpPr>
-          <p:cNvPr id="4" name="Rectángulo: esquinas redondeadas 3">
-            <a:extLst>
-              <a:ext uri="{FF2B5EF4-FFF2-40B4-BE49-F238E27FC236}">
-                <a16:creationId xmlns:a16="http://schemas.microsoft.com/office/drawing/2014/main" id="{66CCD783-283B-E5FD-F4A3-88C80857FA3D}"/>
+              <a:t>Autoarranque en VM y roles internos</a:t>
+            </a:r>
+          </a:p>
+        </p:txBody>
+      </p:sp>
+      <p:sp>
+        <p:nvSpPr>
+          <p:cNvPr id="4" name="CuadroTexto 3">
+            <a:extLst>
+              <a:ext uri="{FF2B5EF4-FFF2-40B4-BE49-F238E27FC236}">
+                <a16:creationId xmlns:a16="http://schemas.microsoft.com/office/drawing/2014/main" id="{237A5FDD-271B-0258-B781-EF925BF153AC}"/>
+              </a:ext>
+            </a:extLst>
+          </p:cNvPr>
+          <p:cNvSpPr txBox="1"/>
+          <p:nvPr/>
+        </p:nvSpPr>
+        <p:spPr>
+          <a:xfrm>
+            <a:off x="558800" y="1422400"/>
+            <a:ext cx="9144000" cy="369332"/>
+          </a:xfrm>
+          <a:prstGeom prst="rect">
+            <a:avLst/>
+          </a:prstGeom>
+          <a:noFill/>
+        </p:spPr>
+        <p:txBody>
+          <a:bodyPr vert="horz" wrap="square" lIns="0" tIns="0" rIns="0" bIns="0" rtlCol="0">
+            <a:noAutofit/>
+          </a:bodyPr>
+          <a:lstStyle/>
+          <a:p>
+            <a:r>
+              <a:rPr lang="es-ES" sz="1500">
+                <a:solidFill>
+                  <a:srgbClr val="C2CBD8"/>
+                </a:solidFill>
+                <a:latin typeface="Segoe UI" panose="020B0502040204020203" pitchFamily="34" charset="0"/>
+              </a:rPr>
+              <a:t>El despliegue cloud no depende de arrancarlo a mano y la base de seguridad ya separa perfiles tecnicos, funcionales y externos.</a:t>
+            </a:r>
+          </a:p>
+        </p:txBody>
+      </p:sp>
+      <p:sp>
+        <p:nvSpPr>
+          <p:cNvPr id="5" name="Rectángulo: esquinas redondeadas 4">
+            <a:extLst>
+              <a:ext uri="{FF2B5EF4-FFF2-40B4-BE49-F238E27FC236}">
+                <a16:creationId xmlns:a16="http://schemas.microsoft.com/office/drawing/2014/main" id="{AAE5D9A1-026D-8FB0-2822-88A7BC77D4D2}"/>
               </a:ext>
             </a:extLst>
           </p:cNvPr>
@@ -8063,18 +8163,18 @@
         </p:nvSpPr>
         <p:spPr>
           <a:xfrm>
-            <a:off x="889000" y="2057400"/>
-            <a:ext cx="2413000" cy="1193800"/>
+            <a:off x="736600" y="1981200"/>
+            <a:ext cx="4953000" cy="3022600"/>
           </a:xfrm>
           <a:prstGeom prst="roundRect">
             <a:avLst/>
           </a:prstGeom>
           <a:solidFill>
-            <a:srgbClr val="F7FAFC"/>
+            <a:srgbClr val="1D2430"/>
           </a:solidFill>
           <a:ln w="12700">
             <a:solidFill>
-              <a:srgbClr val="DCE2EB"/>
+              <a:srgbClr val="424E60"/>
             </a:solidFill>
           </a:ln>
         </p:spPr>
@@ -8105,10 +8205,10 @@
       </p:sp>
       <p:sp>
         <p:nvSpPr>
-          <p:cNvPr id="5" name="CuadroTexto 4">
-            <a:extLst>
-              <a:ext uri="{FF2B5EF4-FFF2-40B4-BE49-F238E27FC236}">
-                <a16:creationId xmlns:a16="http://schemas.microsoft.com/office/drawing/2014/main" id="{3CA2FB76-1EDD-2A56-CE57-8E3AC4FF1904}"/>
+          <p:cNvPr id="6" name="CuadroTexto 5">
+            <a:extLst>
+              <a:ext uri="{FF2B5EF4-FFF2-40B4-BE49-F238E27FC236}">
+                <a16:creationId xmlns:a16="http://schemas.microsoft.com/office/drawing/2014/main" id="{3F359A0A-FEDC-85C1-6A17-0BA8B98A169A}"/>
               </a:ext>
             </a:extLst>
           </p:cNvPr>
@@ -8117,8 +8217,8 @@
         </p:nvSpPr>
         <p:spPr>
           <a:xfrm>
-            <a:off x="1117600" y="2222500"/>
-            <a:ext cx="1905000" cy="369332"/>
+            <a:off x="1092200" y="2311400"/>
+            <a:ext cx="3810000" cy="369332"/>
           </a:xfrm>
           <a:prstGeom prst="rect">
             <a:avLst/>
@@ -8132,23 +8232,23 @@
           <a:lstStyle/>
           <a:p>
             <a:r>
-              <a:rPr lang="es-ES" sz="2600" b="1">
-                <a:solidFill>
-                  <a:srgbClr val="41A772"/>
-                </a:solidFill>
-                <a:latin typeface="Segoe UI" panose="020B0502040204020203" pitchFamily="34" charset="0"/>
-              </a:rPr>
-              <a:t>110</a:t>
-            </a:r>
-          </a:p>
-        </p:txBody>
-      </p:sp>
-      <p:sp>
-        <p:nvSpPr>
-          <p:cNvPr id="6" name="CuadroTexto 5">
-            <a:extLst>
-              <a:ext uri="{FF2B5EF4-FFF2-40B4-BE49-F238E27FC236}">
-                <a16:creationId xmlns:a16="http://schemas.microsoft.com/office/drawing/2014/main" id="{CB65E45E-D7D1-96CE-6EF8-D5B4E046DABC}"/>
+              <a:rPr lang="es-ES" sz="2000" b="1">
+                <a:solidFill>
+                  <a:srgbClr val="DBA14D"/>
+                </a:solidFill>
+                <a:latin typeface="Segoe UI" panose="020B0502040204020203" pitchFamily="34" charset="0"/>
+              </a:rPr>
+              <a:t>Arranque automatico</a:t>
+            </a:r>
+          </a:p>
+        </p:txBody>
+      </p:sp>
+      <p:sp>
+        <p:nvSpPr>
+          <p:cNvPr id="7" name="CuadroTexto 6">
+            <a:extLst>
+              <a:ext uri="{FF2B5EF4-FFF2-40B4-BE49-F238E27FC236}">
+                <a16:creationId xmlns:a16="http://schemas.microsoft.com/office/drawing/2014/main" id="{251E5BE7-5D4D-2266-27CD-09E1AAEC6B38}"/>
               </a:ext>
             </a:extLst>
           </p:cNvPr>
@@ -8157,8 +8257,8 @@
         </p:nvSpPr>
         <p:spPr>
           <a:xfrm>
-            <a:off x="1117600" y="2717800"/>
-            <a:ext cx="1905000" cy="381000"/>
+            <a:off x="1092200" y="2819400"/>
+            <a:ext cx="4064000" cy="369332"/>
           </a:xfrm>
           <a:prstGeom prst="rect">
             <a:avLst/>
@@ -8172,23 +8272,116 @@
           <a:lstStyle/>
           <a:p>
             <a:r>
-              <a:rPr lang="es-ES" sz="1300">
-                <a:solidFill>
-                  <a:srgbClr val="1F2937"/>
-                </a:solidFill>
-                <a:latin typeface="Segoe UI" panose="020B0502040204020203" pitchFamily="34" charset="0"/>
-              </a:rPr>
-              <a:t>tests backend</a:t>
-            </a:r>
-          </a:p>
-        </p:txBody>
-      </p:sp>
-      <p:sp>
-        <p:nvSpPr>
-          <p:cNvPr id="7" name="Rectángulo: esquinas redondeadas 6">
-            <a:extLst>
-              <a:ext uri="{FF2B5EF4-FFF2-40B4-BE49-F238E27FC236}">
-                <a16:creationId xmlns:a16="http://schemas.microsoft.com/office/drawing/2014/main" id="{799C35CF-800D-7141-12DC-EDC1A8ACF08C}"/>
+              <a:rPr lang="en-GB" sz="1700">
+                <a:solidFill>
+                  <a:srgbClr val="F6F8FC"/>
+                </a:solidFill>
+                <a:latin typeface="Consolas" panose="020B0609020204030204" pitchFamily="49" charset="0"/>
+              </a:rPr>
+              <a:t>VM -&gt; systemd -&gt; agora.service</a:t>
+            </a:r>
+          </a:p>
+          <a:p>
+            <a:r>
+              <a:rPr lang="en-GB" sz="1700">
+                <a:solidFill>
+                  <a:srgbClr val="F6F8FC"/>
+                </a:solidFill>
+                <a:latin typeface="Consolas" panose="020B0609020204030204" pitchFamily="49" charset="0"/>
+              </a:rPr>
+              <a:t>deploy/gcp/startup.sh</a:t>
+            </a:r>
+          </a:p>
+          <a:p>
+            <a:r>
+              <a:rPr lang="en-GB" sz="1700">
+                <a:solidFill>
+                  <a:srgbClr val="F6F8FC"/>
+                </a:solidFill>
+                <a:latin typeface="Consolas" panose="020B0609020204030204" pitchFamily="49" charset="0"/>
+              </a:rPr>
+              <a:t>docker compose up -d</a:t>
+            </a:r>
+            <a:endParaRPr lang="es-ES" sz="1700">
+              <a:solidFill>
+                <a:srgbClr val="F6F8FC"/>
+              </a:solidFill>
+              <a:latin typeface="Consolas" panose="020B0609020204030204" pitchFamily="49" charset="0"/>
+            </a:endParaRPr>
+          </a:p>
+        </p:txBody>
+      </p:sp>
+      <p:sp>
+        <p:nvSpPr>
+          <p:cNvPr id="8" name="CuadroTexto 7">
+            <a:extLst>
+              <a:ext uri="{FF2B5EF4-FFF2-40B4-BE49-F238E27FC236}">
+                <a16:creationId xmlns:a16="http://schemas.microsoft.com/office/drawing/2014/main" id="{A4F51410-5F0E-0A8A-D3B6-DE41A699B232}"/>
+              </a:ext>
+            </a:extLst>
+          </p:cNvPr>
+          <p:cNvSpPr txBox="1"/>
+          <p:nvPr/>
+        </p:nvSpPr>
+        <p:spPr>
+          <a:xfrm>
+            <a:off x="1117600" y="4140200"/>
+            <a:ext cx="3810000" cy="369332"/>
+          </a:xfrm>
+          <a:prstGeom prst="rect">
+            <a:avLst/>
+          </a:prstGeom>
+          <a:noFill/>
+        </p:spPr>
+        <p:txBody>
+          <a:bodyPr vert="horz" wrap="square" lIns="0" tIns="0" rIns="0" bIns="0" rtlCol="0">
+            <a:noAutofit/>
+          </a:bodyPr>
+          <a:lstStyle/>
+          <a:p>
+            <a:pPr marL="342900" indent="-342900">
+              <a:spcAft>
+                <a:spcPts val="1000"/>
+              </a:spcAft>
+              <a:buFont typeface="+mj-lt"/>
+              <a:buChar char="•"/>
+            </a:pPr>
+            <a:r>
+              <a:rPr lang="es-ES" sz="1400">
+                <a:solidFill>
+                  <a:srgbClr val="C2CBD8"/>
+                </a:solidFill>
+                <a:latin typeface="Segoe UI" panose="020B0502040204020203" pitchFamily="34" charset="0"/>
+              </a:rPr>
+              <a:t>Recalcula la URL nip.io si cambia la IP.</a:t>
+            </a:r>
+          </a:p>
+          <a:p>
+            <a:pPr marL="342900" indent="-342900">
+              <a:spcAft>
+                <a:spcPts val="1000"/>
+              </a:spcAft>
+              <a:buFont typeface="+mj-lt"/>
+              <a:buChar char="•"/>
+            </a:pPr>
+            <a:r>
+              <a:rPr lang="es-ES" sz="1400">
+                <a:solidFill>
+                  <a:srgbClr val="C2CBD8"/>
+                </a:solidFill>
+                <a:latin typeface="Segoe UI" panose="020B0502040204020203" pitchFamily="34" charset="0"/>
+              </a:rPr>
+              <a:t>Levanta proxy, app y PostgreSQL.</a:t>
+            </a:r>
+          </a:p>
+        </p:txBody>
+      </p:sp>
+      <p:sp>
+        <p:nvSpPr>
+          <p:cNvPr id="9" name="Rectángulo: esquinas redondeadas 8">
+            <a:extLst>
+              <a:ext uri="{FF2B5EF4-FFF2-40B4-BE49-F238E27FC236}">
+                <a16:creationId xmlns:a16="http://schemas.microsoft.com/office/drawing/2014/main" id="{FEE107C3-F4B8-2BC4-29D9-7F8044D5034D}"/>
               </a:ext>
             </a:extLst>
           </p:cNvPr>
@@ -8197,8 +8390,8 @@
         </p:nvSpPr>
         <p:spPr>
           <a:xfrm>
-            <a:off x="3708400" y="2057400"/>
-            <a:ext cx="2413000" cy="1193800"/>
+            <a:off x="6477000" y="1981200"/>
+            <a:ext cx="4724400" cy="3022600"/>
           </a:xfrm>
           <a:prstGeom prst="roundRect">
             <a:avLst/>
@@ -8208,7 +8401,7 @@
           </a:solidFill>
           <a:ln w="12700">
             <a:solidFill>
-              <a:srgbClr val="DCE2EB"/>
+              <a:srgbClr val="DDE5EE"/>
             </a:solidFill>
           </a:ln>
         </p:spPr>
@@ -8239,10 +8432,10 @@
       </p:sp>
       <p:sp>
         <p:nvSpPr>
-          <p:cNvPr id="8" name="CuadroTexto 7">
-            <a:extLst>
-              <a:ext uri="{FF2B5EF4-FFF2-40B4-BE49-F238E27FC236}">
-                <a16:creationId xmlns:a16="http://schemas.microsoft.com/office/drawing/2014/main" id="{03A53ED0-370B-E8D5-5B91-100AEB5E0E1E}"/>
+          <p:cNvPr id="10" name="CuadroTexto 9">
+            <a:extLst>
+              <a:ext uri="{FF2B5EF4-FFF2-40B4-BE49-F238E27FC236}">
+                <a16:creationId xmlns:a16="http://schemas.microsoft.com/office/drawing/2014/main" id="{2C3C4347-38EF-73FB-6C9B-7801430E86AE}"/>
               </a:ext>
             </a:extLst>
           </p:cNvPr>
@@ -8251,8 +8444,8 @@
         </p:nvSpPr>
         <p:spPr>
           <a:xfrm>
-            <a:off x="3937000" y="2222500"/>
-            <a:ext cx="1905000" cy="369332"/>
+            <a:off x="6832600" y="2311400"/>
+            <a:ext cx="3429000" cy="369332"/>
           </a:xfrm>
           <a:prstGeom prst="rect">
             <a:avLst/>
@@ -8266,23 +8459,23 @@
           <a:lstStyle/>
           <a:p>
             <a:r>
-              <a:rPr lang="es-ES" sz="2600" b="1">
-                <a:solidFill>
-                  <a:srgbClr val="49B1D2"/>
-                </a:solidFill>
-                <a:latin typeface="Segoe UI" panose="020B0502040204020203" pitchFamily="34" charset="0"/>
-              </a:rPr>
-              <a:t>628</a:t>
-            </a:r>
-          </a:p>
-        </p:txBody>
-      </p:sp>
-      <p:sp>
-        <p:nvSpPr>
-          <p:cNvPr id="9" name="CuadroTexto 8">
-            <a:extLst>
-              <a:ext uri="{FF2B5EF4-FFF2-40B4-BE49-F238E27FC236}">
-                <a16:creationId xmlns:a16="http://schemas.microsoft.com/office/drawing/2014/main" id="{34DF4E7D-2F47-1BB4-9DD1-53BD5F3369EA}"/>
+              <a:rPr lang="es-ES" sz="2000" b="1">
+                <a:solidFill>
+                  <a:srgbClr val="4975B0"/>
+                </a:solidFill>
+                <a:latin typeface="Segoe UI" panose="020B0502040204020203" pitchFamily="34" charset="0"/>
+              </a:rPr>
+              <a:t>Roles definidos</a:t>
+            </a:r>
+          </a:p>
+        </p:txBody>
+      </p:sp>
+      <p:sp>
+        <p:nvSpPr>
+          <p:cNvPr id="11" name="CuadroTexto 10">
+            <a:extLst>
+              <a:ext uri="{FF2B5EF4-FFF2-40B4-BE49-F238E27FC236}">
+                <a16:creationId xmlns:a16="http://schemas.microsoft.com/office/drawing/2014/main" id="{46E860FB-D9EB-5565-058A-5DE31EDB5515}"/>
               </a:ext>
             </a:extLst>
           </p:cNvPr>
@@ -8291,316 +8484,8 @@
         </p:nvSpPr>
         <p:spPr>
           <a:xfrm>
-            <a:off x="3937000" y="2717800"/>
-            <a:ext cx="1905000" cy="381000"/>
-          </a:xfrm>
-          <a:prstGeom prst="rect">
-            <a:avLst/>
-          </a:prstGeom>
-          <a:noFill/>
-        </p:spPr>
-        <p:txBody>
-          <a:bodyPr vert="horz" wrap="square" lIns="0" tIns="0" rIns="0" bIns="0" rtlCol="0">
-            <a:noAutofit/>
-          </a:bodyPr>
-          <a:lstStyle/>
-          <a:p>
-            <a:r>
-              <a:rPr lang="es-ES" sz="1300">
-                <a:solidFill>
-                  <a:srgbClr val="1F2937"/>
-                </a:solidFill>
-                <a:latin typeface="Segoe UI" panose="020B0502040204020203" pitchFamily="34" charset="0"/>
-              </a:rPr>
-              <a:t>aserciones</a:t>
-            </a:r>
-          </a:p>
-        </p:txBody>
-      </p:sp>
-      <p:sp>
-        <p:nvSpPr>
-          <p:cNvPr id="10" name="Rectángulo: esquinas redondeadas 9">
-            <a:extLst>
-              <a:ext uri="{FF2B5EF4-FFF2-40B4-BE49-F238E27FC236}">
-                <a16:creationId xmlns:a16="http://schemas.microsoft.com/office/drawing/2014/main" id="{CFB51F28-45F1-FA10-DFE2-6B5EDFB8CDEA}"/>
-              </a:ext>
-            </a:extLst>
-          </p:cNvPr>
-          <p:cNvSpPr/>
-          <p:nvPr/>
-        </p:nvSpPr>
-        <p:spPr>
-          <a:xfrm>
-            <a:off x="6527800" y="2057400"/>
-            <a:ext cx="2413000" cy="1193800"/>
-          </a:xfrm>
-          <a:prstGeom prst="roundRect">
-            <a:avLst/>
-          </a:prstGeom>
-          <a:solidFill>
-            <a:srgbClr val="F7FAFC"/>
-          </a:solidFill>
-          <a:ln w="12700">
-            <a:solidFill>
-              <a:srgbClr val="DCE2EB"/>
-            </a:solidFill>
-          </a:ln>
-        </p:spPr>
-        <p:style>
-          <a:lnRef idx="2">
-            <a:schemeClr val="accent1">
-              <a:shade val="15000"/>
-            </a:schemeClr>
-          </a:lnRef>
-          <a:fillRef idx="1">
-            <a:schemeClr val="accent1"/>
-          </a:fillRef>
-          <a:effectRef idx="0">
-            <a:schemeClr val="accent1"/>
-          </a:effectRef>
-          <a:fontRef idx="minor">
-            <a:schemeClr val="lt1"/>
-          </a:fontRef>
-        </p:style>
-        <p:txBody>
-          <a:bodyPr rtlCol="0" anchor="ctr"/>
-          <a:lstStyle/>
-          <a:p>
-            <a:pPr algn="ctr"/>
-            <a:endParaRPr lang="es-ES"/>
-          </a:p>
-        </p:txBody>
-      </p:sp>
-      <p:sp>
-        <p:nvSpPr>
-          <p:cNvPr id="11" name="CuadroTexto 10">
-            <a:extLst>
-              <a:ext uri="{FF2B5EF4-FFF2-40B4-BE49-F238E27FC236}">
-                <a16:creationId xmlns:a16="http://schemas.microsoft.com/office/drawing/2014/main" id="{BCFD5F15-2FB9-0920-0441-E53CD56A58D2}"/>
-              </a:ext>
-            </a:extLst>
-          </p:cNvPr>
-          <p:cNvSpPr txBox="1"/>
-          <p:nvPr/>
-        </p:nvSpPr>
-        <p:spPr>
-          <a:xfrm>
-            <a:off x="6756400" y="2222500"/>
-            <a:ext cx="1905000" cy="369332"/>
-          </a:xfrm>
-          <a:prstGeom prst="rect">
-            <a:avLst/>
-          </a:prstGeom>
-          <a:noFill/>
-        </p:spPr>
-        <p:txBody>
-          <a:bodyPr vert="horz" wrap="square" lIns="0" tIns="0" rIns="0" bIns="0" rtlCol="0">
-            <a:noAutofit/>
-          </a:bodyPr>
-          <a:lstStyle/>
-          <a:p>
-            <a:r>
-              <a:rPr lang="es-ES" sz="2600" b="1">
-                <a:solidFill>
-                  <a:srgbClr val="41A772"/>
-                </a:solidFill>
-                <a:latin typeface="Segoe UI" panose="020B0502040204020203" pitchFamily="34" charset="0"/>
-              </a:rPr>
-              <a:t>14/14</a:t>
-            </a:r>
-          </a:p>
-        </p:txBody>
-      </p:sp>
-      <p:sp>
-        <p:nvSpPr>
-          <p:cNvPr id="12" name="CuadroTexto 11">
-            <a:extLst>
-              <a:ext uri="{FF2B5EF4-FFF2-40B4-BE49-F238E27FC236}">
-                <a16:creationId xmlns:a16="http://schemas.microsoft.com/office/drawing/2014/main" id="{A619453C-5783-D9CA-FBE3-71099FF833CC}"/>
-              </a:ext>
-            </a:extLst>
-          </p:cNvPr>
-          <p:cNvSpPr txBox="1"/>
-          <p:nvPr/>
-        </p:nvSpPr>
-        <p:spPr>
-          <a:xfrm>
-            <a:off x="6756400" y="2717800"/>
-            <a:ext cx="1905000" cy="381000"/>
-          </a:xfrm>
-          <a:prstGeom prst="rect">
-            <a:avLst/>
-          </a:prstGeom>
-          <a:noFill/>
-        </p:spPr>
-        <p:txBody>
-          <a:bodyPr vert="horz" wrap="square" lIns="0" tIns="0" rIns="0" bIns="0" rtlCol="0">
-            <a:noAutofit/>
-          </a:bodyPr>
-          <a:lstStyle/>
-          <a:p>
-            <a:r>
-              <a:rPr lang="es-ES" sz="1300">
-                <a:solidFill>
-                  <a:srgbClr val="1F2937"/>
-                </a:solidFill>
-                <a:latin typeface="Segoe UI" panose="020B0502040204020203" pitchFamily="34" charset="0"/>
-              </a:rPr>
-              <a:t>tests frontend</a:t>
-            </a:r>
-          </a:p>
-        </p:txBody>
-      </p:sp>
-      <p:sp>
-        <p:nvSpPr>
-          <p:cNvPr id="13" name="Rectángulo: esquinas redondeadas 12">
-            <a:extLst>
-              <a:ext uri="{FF2B5EF4-FFF2-40B4-BE49-F238E27FC236}">
-                <a16:creationId xmlns:a16="http://schemas.microsoft.com/office/drawing/2014/main" id="{EA7BA1E9-C9ED-19F8-65B5-FE16CA2ECCE5}"/>
-              </a:ext>
-            </a:extLst>
-          </p:cNvPr>
-          <p:cNvSpPr/>
-          <p:nvPr/>
-        </p:nvSpPr>
-        <p:spPr>
-          <a:xfrm>
-            <a:off x="9347200" y="2057400"/>
-            <a:ext cx="2413000" cy="1193800"/>
-          </a:xfrm>
-          <a:prstGeom prst="roundRect">
-            <a:avLst/>
-          </a:prstGeom>
-          <a:solidFill>
-            <a:srgbClr val="F7FAFC"/>
-          </a:solidFill>
-          <a:ln w="12700">
-            <a:solidFill>
-              <a:srgbClr val="DCE2EB"/>
-            </a:solidFill>
-          </a:ln>
-        </p:spPr>
-        <p:style>
-          <a:lnRef idx="2">
-            <a:schemeClr val="accent1">
-              <a:shade val="15000"/>
-            </a:schemeClr>
-          </a:lnRef>
-          <a:fillRef idx="1">
-            <a:schemeClr val="accent1"/>
-          </a:fillRef>
-          <a:effectRef idx="0">
-            <a:schemeClr val="accent1"/>
-          </a:effectRef>
-          <a:fontRef idx="minor">
-            <a:schemeClr val="lt1"/>
-          </a:fontRef>
-        </p:style>
-        <p:txBody>
-          <a:bodyPr rtlCol="0" anchor="ctr"/>
-          <a:lstStyle/>
-          <a:p>
-            <a:pPr algn="ctr"/>
-            <a:endParaRPr lang="es-ES"/>
-          </a:p>
-        </p:txBody>
-      </p:sp>
-      <p:sp>
-        <p:nvSpPr>
-          <p:cNvPr id="14" name="CuadroTexto 13">
-            <a:extLst>
-              <a:ext uri="{FF2B5EF4-FFF2-40B4-BE49-F238E27FC236}">
-                <a16:creationId xmlns:a16="http://schemas.microsoft.com/office/drawing/2014/main" id="{436A29E5-19B6-48F8-4110-F798130C907D}"/>
-              </a:ext>
-            </a:extLst>
-          </p:cNvPr>
-          <p:cNvSpPr txBox="1"/>
-          <p:nvPr/>
-        </p:nvSpPr>
-        <p:spPr>
-          <a:xfrm>
-            <a:off x="9575800" y="2222500"/>
-            <a:ext cx="1905000" cy="369332"/>
-          </a:xfrm>
-          <a:prstGeom prst="rect">
-            <a:avLst/>
-          </a:prstGeom>
-          <a:noFill/>
-        </p:spPr>
-        <p:txBody>
-          <a:bodyPr vert="horz" wrap="square" lIns="0" tIns="0" rIns="0" bIns="0" rtlCol="0">
-            <a:noAutofit/>
-          </a:bodyPr>
-          <a:lstStyle/>
-          <a:p>
-            <a:r>
-              <a:rPr lang="es-ES" sz="2600" b="1">
-                <a:solidFill>
-                  <a:srgbClr val="41A772"/>
-                </a:solidFill>
-                <a:latin typeface="Segoe UI" panose="020B0502040204020203" pitchFamily="34" charset="0"/>
-              </a:rPr>
-              <a:t>6/6</a:t>
-            </a:r>
-          </a:p>
-        </p:txBody>
-      </p:sp>
-      <p:sp>
-        <p:nvSpPr>
-          <p:cNvPr id="15" name="CuadroTexto 14">
-            <a:extLst>
-              <a:ext uri="{FF2B5EF4-FFF2-40B4-BE49-F238E27FC236}">
-                <a16:creationId xmlns:a16="http://schemas.microsoft.com/office/drawing/2014/main" id="{B0042DE6-7A87-73F5-F57E-4AC6AD94B6BE}"/>
-              </a:ext>
-            </a:extLst>
-          </p:cNvPr>
-          <p:cNvSpPr txBox="1"/>
-          <p:nvPr/>
-        </p:nvSpPr>
-        <p:spPr>
-          <a:xfrm>
-            <a:off x="9575800" y="2717800"/>
-            <a:ext cx="1905000" cy="381000"/>
-          </a:xfrm>
-          <a:prstGeom prst="rect">
-            <a:avLst/>
-          </a:prstGeom>
-          <a:noFill/>
-        </p:spPr>
-        <p:txBody>
-          <a:bodyPr vert="horz" wrap="square" lIns="0" tIns="0" rIns="0" bIns="0" rtlCol="0">
-            <a:noAutofit/>
-          </a:bodyPr>
-          <a:lstStyle/>
-          <a:p>
-            <a:r>
-              <a:rPr lang="es-ES" sz="1300">
-                <a:solidFill>
-                  <a:srgbClr val="1F2937"/>
-                </a:solidFill>
-                <a:latin typeface="Segoe UI" panose="020B0502040204020203" pitchFamily="34" charset="0"/>
-              </a:rPr>
-              <a:t>E2E Playwright</a:t>
-            </a:r>
-          </a:p>
-        </p:txBody>
-      </p:sp>
-      <p:sp>
-        <p:nvSpPr>
-          <p:cNvPr id="16" name="CuadroTexto 15">
-            <a:extLst>
-              <a:ext uri="{FF2B5EF4-FFF2-40B4-BE49-F238E27FC236}">
-                <a16:creationId xmlns:a16="http://schemas.microsoft.com/office/drawing/2014/main" id="{6E6DC4BA-52C6-E83E-54F5-E575949D4466}"/>
-              </a:ext>
-            </a:extLst>
-          </p:cNvPr>
-          <p:cNvSpPr txBox="1"/>
-          <p:nvPr/>
-        </p:nvSpPr>
-        <p:spPr>
-          <a:xfrm>
-            <a:off x="1193800" y="3987800"/>
-            <a:ext cx="9398000" cy="369332"/>
+            <a:off x="6883400" y="2844800"/>
+            <a:ext cx="3632200" cy="369332"/>
           </a:xfrm>
           <a:prstGeom prst="rect">
             <a:avLst/>
@@ -8621,13 +8506,13 @@
               <a:buChar char="•"/>
             </a:pPr>
             <a:r>
-              <a:rPr lang="es-ES">
-                <a:solidFill>
-                  <a:srgbClr val="C2CBD8"/>
-                </a:solidFill>
-                <a:latin typeface="Segoe UI" panose="020B0502040204020203" pitchFamily="34" charset="0"/>
-              </a:rPr>
-              <a:t>Build integrada de /app y /externo publicada en Symfony.</a:t>
+              <a:rPr lang="es-ES" sz="1300">
+                <a:solidFill>
+                  <a:srgbClr val="1F2937"/>
+                </a:solidFill>
+                <a:latin typeface="Segoe UI" panose="020B0502040204020203" pitchFamily="34" charset="0"/>
+              </a:rPr>
+              <a:t>ADMIN: control completo.</a:t>
             </a:r>
           </a:p>
           <a:p>
@@ -8639,13 +8524,13 @@
               <a:buChar char="•"/>
             </a:pPr>
             <a:r>
-              <a:rPr lang="es-ES">
-                <a:solidFill>
-                  <a:srgbClr val="C2CBD8"/>
-                </a:solidFill>
-                <a:latin typeface="Segoe UI" panose="020B0502040204020203" pitchFamily="34" charset="0"/>
-              </a:rPr>
-              <a:t>Verificados correo, rechazo, URLs publicas, chat y consola tecnica de escritorio.</a:t>
+              <a:rPr lang="es-ES" sz="1300">
+                <a:solidFill>
+                  <a:srgbClr val="1F2937"/>
+                </a:solidFill>
+                <a:latin typeface="Segoe UI" panose="020B0502040204020203" pitchFamily="34" charset="0"/>
+              </a:rPr>
+              <a:t>COORDINATOR: flujo academico.</a:t>
             </a:r>
           </a:p>
           <a:p>
@@ -8657,23 +8542,59 @@
               <a:buChar char="•"/>
             </a:pPr>
             <a:r>
-              <a:rPr lang="es-ES">
-                <a:solidFill>
-                  <a:srgbClr val="C2CBD8"/>
-                </a:solidFill>
-                <a:latin typeface="Segoe UI" panose="020B0502040204020203" pitchFamily="34" charset="0"/>
-              </a:rPr>
-              <a:t>Tambien se ha validado el empaquetado Windows con PHP embebido y SQLite.</a:t>
-            </a:r>
-          </a:p>
-        </p:txBody>
-      </p:sp>
-      <p:sp>
-        <p:nvSpPr>
-          <p:cNvPr id="17" name="CuadroTexto 16">
-            <a:extLst>
-              <a:ext uri="{FF2B5EF4-FFF2-40B4-BE49-F238E27FC236}">
-                <a16:creationId xmlns:a16="http://schemas.microsoft.com/office/drawing/2014/main" id="{E0E97B8E-CE19-0D37-850C-7828642E967B}"/>
+              <a:rPr lang="es-ES" sz="1300">
+                <a:solidFill>
+                  <a:srgbClr val="1F2937"/>
+                </a:solidFill>
+                <a:latin typeface="Segoe UI" panose="020B0502040204020203" pitchFamily="34" charset="0"/>
+              </a:rPr>
+              <a:t>DOCUMENT_MANAGER: documentos.</a:t>
+            </a:r>
+          </a:p>
+          <a:p>
+            <a:pPr marL="342900" indent="-342900">
+              <a:spcAft>
+                <a:spcPts val="1000"/>
+              </a:spcAft>
+              <a:buFont typeface="+mj-lt"/>
+              <a:buChar char="•"/>
+            </a:pPr>
+            <a:r>
+              <a:rPr lang="es-ES" sz="1300">
+                <a:solidFill>
+                  <a:srgbClr val="1F2937"/>
+                </a:solidFill>
+                <a:latin typeface="Segoe UI" panose="020B0502040204020203" pitchFamily="34" charset="0"/>
+              </a:rPr>
+              <a:t>MONITOR: logs y consola tecnica.</a:t>
+            </a:r>
+          </a:p>
+          <a:p>
+            <a:pPr marL="342900" indent="-342900">
+              <a:spcAft>
+                <a:spcPts val="1000"/>
+              </a:spcAft>
+              <a:buFont typeface="+mj-lt"/>
+              <a:buChar char="•"/>
+            </a:pPr>
+            <a:r>
+              <a:rPr lang="es-ES" sz="1300">
+                <a:solidFill>
+                  <a:srgbClr val="1F2937"/>
+                </a:solidFill>
+                <a:latin typeface="Segoe UI" panose="020B0502040204020203" pitchFamily="34" charset="0"/>
+              </a:rPr>
+              <a:t>COMPANY_PORTAL: empresa externa.</a:t>
+            </a:r>
+          </a:p>
+        </p:txBody>
+      </p:sp>
+      <p:sp>
+        <p:nvSpPr>
+          <p:cNvPr id="12" name="CuadroTexto 11">
+            <a:extLst>
+              <a:ext uri="{FF2B5EF4-FFF2-40B4-BE49-F238E27FC236}">
+                <a16:creationId xmlns:a16="http://schemas.microsoft.com/office/drawing/2014/main" id="{CE9489AD-12E3-1F7C-F347-FACE6A2F9C6D}"/>
               </a:ext>
             </a:extLst>
           </p:cNvPr>
@@ -8682,8 +8603,8 @@
         </p:nvSpPr>
         <p:spPr>
           <a:xfrm>
-            <a:off x="1193800" y="5562600"/>
-            <a:ext cx="9271000" cy="369332"/>
+            <a:off x="6858000" y="4546600"/>
+            <a:ext cx="3810000" cy="369332"/>
           </a:xfrm>
           <a:prstGeom prst="rect">
             <a:avLst/>
@@ -8697,13 +8618,53 @@
           <a:lstStyle/>
           <a:p>
             <a:r>
-              <a:rPr lang="es-ES" sz="1400">
+              <a:rPr lang="es-ES" sz="1200">
                 <a:solidFill>
                   <a:srgbClr val="C2CBD8"/>
                 </a:solidFill>
                 <a:latin typeface="Segoe UI" panose="020B0502040204020203" pitchFamily="34" charset="0"/>
               </a:rPr>
-              <a:t>Queda una deprecacion tecnica de PHPUnit, no bloqueante para la demo ni para la funcionalidad.</a:t>
+              <a:t>Futuro: permisos finos y perfiles de solo lectura.</a:t>
+            </a:r>
+          </a:p>
+        </p:txBody>
+      </p:sp>
+      <p:sp>
+        <p:nvSpPr>
+          <p:cNvPr id="13" name="CuadroTexto 12">
+            <a:extLst>
+              <a:ext uri="{FF2B5EF4-FFF2-40B4-BE49-F238E27FC236}">
+                <a16:creationId xmlns:a16="http://schemas.microsoft.com/office/drawing/2014/main" id="{6241DFCE-36E5-10DF-4B69-BB4F93D854AE}"/>
+              </a:ext>
+            </a:extLst>
+          </p:cNvPr>
+          <p:cNvSpPr txBox="1"/>
+          <p:nvPr/>
+        </p:nvSpPr>
+        <p:spPr>
+          <a:xfrm>
+            <a:off x="939800" y="5461000"/>
+            <a:ext cx="9906000" cy="369332"/>
+          </a:xfrm>
+          <a:prstGeom prst="rect">
+            <a:avLst/>
+          </a:prstGeom>
+          <a:noFill/>
+        </p:spPr>
+        <p:txBody>
+          <a:bodyPr vert="horz" wrap="square" lIns="0" tIns="0" rIns="0" bIns="0" rtlCol="0">
+            <a:noAutofit/>
+          </a:bodyPr>
+          <a:lstStyle/>
+          <a:p>
+            <a:r>
+              <a:rPr lang="es-ES" sz="1500">
+                <a:solidFill>
+                  <a:srgbClr val="C2CBD8"/>
+                </a:solidFill>
+                <a:latin typeface="Segoe UI" panose="020B0502040204020203" pitchFamily="34" charset="0"/>
+              </a:rPr>
+              <a:t>Justificacion: cierro el despliegue cloud con arranque reproducible y dejo preparada la separacion de permisos para evolucionar de demo funcional a entorno multiusuario real.</a:t>
             </a:r>
           </a:p>
         </p:txBody>
@@ -8711,7 +8672,7 @@
     </p:spTree>
     <p:extLst>
       <p:ext uri="{BB962C8B-B14F-4D97-AF65-F5344CB8AC3E}">
-        <p14:creationId xmlns:p14="http://schemas.microsoft.com/office/powerpoint/2010/main" val="262233947"/>
+        <p14:creationId xmlns:p14="http://schemas.microsoft.com/office/powerpoint/2010/main" val="2154766140"/>
       </p:ext>
     </p:extLst>
   </p:cSld>
@@ -8751,7 +8712,7 @@
           <p:cNvPr id="2" name="CuadroTexto 1">
             <a:extLst>
               <a:ext uri="{FF2B5EF4-FFF2-40B4-BE49-F238E27FC236}">
-                <a16:creationId xmlns:a16="http://schemas.microsoft.com/office/drawing/2014/main" id="{33FCCB0C-E81C-73DE-F524-2CFAA75A8D97}"/>
+                <a16:creationId xmlns:a16="http://schemas.microsoft.com/office/drawing/2014/main" id="{94C8C08F-DA07-3574-7E56-1C38128C8094}"/>
               </a:ext>
             </a:extLst>
           </p:cNvPr>
@@ -8781,7 +8742,7 @@
                 </a:solidFill>
                 <a:latin typeface="Segoe UI" panose="020B0502040204020203" pitchFamily="34" charset="0"/>
               </a:rPr>
-              <a:t>14 / ACCESO DE EVALUACION</a:t>
+              <a:t>14 / VALIDACION</a:t>
             </a:r>
           </a:p>
         </p:txBody>
@@ -8791,7 +8752,7 @@
           <p:cNvPr id="3" name="CuadroTexto 2">
             <a:extLst>
               <a:ext uri="{FF2B5EF4-FFF2-40B4-BE49-F238E27FC236}">
-                <a16:creationId xmlns:a16="http://schemas.microsoft.com/office/drawing/2014/main" id="{99E2FD32-9BB4-B5F1-03F1-1CEF2CA09CCE}"/>
+                <a16:creationId xmlns:a16="http://schemas.microsoft.com/office/drawing/2014/main" id="{6C546666-F1F5-1A9F-47FB-1C0977756521}"/>
               </a:ext>
             </a:extLst>
           </p:cNvPr>
@@ -8821,57 +8782,17 @@
                 </a:solidFill>
                 <a:latin typeface="Segoe UI" panose="020B0502040204020203" pitchFamily="34" charset="0"/>
               </a:rPr>
-              <a:t>Como puede probarla la profesora desde fuera</a:t>
-            </a:r>
-          </a:p>
-        </p:txBody>
-      </p:sp>
-      <p:sp>
-        <p:nvSpPr>
-          <p:cNvPr id="4" name="CuadroTexto 3">
-            <a:extLst>
-              <a:ext uri="{FF2B5EF4-FFF2-40B4-BE49-F238E27FC236}">
-                <a16:creationId xmlns:a16="http://schemas.microsoft.com/office/drawing/2014/main" id="{B243AFC2-6CA0-F55D-BC1D-E5C9369F2488}"/>
-              </a:ext>
-            </a:extLst>
-          </p:cNvPr>
-          <p:cNvSpPr txBox="1"/>
-          <p:nvPr/>
-        </p:nvSpPr>
-        <p:spPr>
-          <a:xfrm>
-            <a:off x="558800" y="1422400"/>
-            <a:ext cx="9144000" cy="369332"/>
-          </a:xfrm>
-          <a:prstGeom prst="rect">
-            <a:avLst/>
-          </a:prstGeom>
-          <a:noFill/>
-        </p:spPr>
-        <p:txBody>
-          <a:bodyPr vert="horz" wrap="square" lIns="0" tIns="0" rIns="0" bIns="0" rtlCol="0">
-            <a:noAutofit/>
-          </a:bodyPr>
-          <a:lstStyle/>
-          <a:p>
-            <a:r>
-              <a:rPr lang="es-ES" sz="1500">
-                <a:solidFill>
-                  <a:srgbClr val="C2CBD8"/>
-                </a:solidFill>
-                <a:latin typeface="Segoe UI" panose="020B0502040204020203" pitchFamily="34" charset="0"/>
-              </a:rPr>
-              <a:t>Con la VM levantada no necesita instalar dependencias en su equipo.</a:t>
-            </a:r>
-          </a:p>
-        </p:txBody>
-      </p:sp>
-      <p:sp>
-        <p:nvSpPr>
-          <p:cNvPr id="5" name="Rectángulo: esquinas redondeadas 4">
-            <a:extLst>
-              <a:ext uri="{FF2B5EF4-FFF2-40B4-BE49-F238E27FC236}">
-                <a16:creationId xmlns:a16="http://schemas.microsoft.com/office/drawing/2014/main" id="{A7278507-0C2C-7DAF-2C65-73AA7AF40F73}"/>
+              <a:t>Comprobaciones ejecutadas antes de la revision final</a:t>
+            </a:r>
+          </a:p>
+        </p:txBody>
+      </p:sp>
+      <p:sp>
+        <p:nvSpPr>
+          <p:cNvPr id="4" name="Rectángulo: esquinas redondeadas 3">
+            <a:extLst>
+              <a:ext uri="{FF2B5EF4-FFF2-40B4-BE49-F238E27FC236}">
+                <a16:creationId xmlns:a16="http://schemas.microsoft.com/office/drawing/2014/main" id="{7FC7EE1C-A41F-C0E7-FBC4-00C39036EE1C}"/>
               </a:ext>
             </a:extLst>
           </p:cNvPr>
@@ -8880,8 +8801,8 @@
         </p:nvSpPr>
         <p:spPr>
           <a:xfrm>
-            <a:off x="863600" y="2006600"/>
-            <a:ext cx="10464800" cy="1168400"/>
+            <a:off x="889000" y="2057400"/>
+            <a:ext cx="2413000" cy="1193800"/>
           </a:xfrm>
           <a:prstGeom prst="roundRect">
             <a:avLst/>
@@ -8891,7 +8812,7 @@
           </a:solidFill>
           <a:ln w="12700">
             <a:solidFill>
-              <a:srgbClr val="DDE5EE"/>
+              <a:srgbClr val="DCE2EB"/>
             </a:solidFill>
           </a:ln>
         </p:spPr>
@@ -8922,10 +8843,10 @@
       </p:sp>
       <p:sp>
         <p:nvSpPr>
-          <p:cNvPr id="6" name="CuadroTexto 5">
-            <a:extLst>
-              <a:ext uri="{FF2B5EF4-FFF2-40B4-BE49-F238E27FC236}">
-                <a16:creationId xmlns:a16="http://schemas.microsoft.com/office/drawing/2014/main" id="{7050C38D-B6C8-C315-211B-6A09D63C660C}"/>
+          <p:cNvPr id="5" name="CuadroTexto 4">
+            <a:extLst>
+              <a:ext uri="{FF2B5EF4-FFF2-40B4-BE49-F238E27FC236}">
+                <a16:creationId xmlns:a16="http://schemas.microsoft.com/office/drawing/2014/main" id="{D9A7651D-8E8E-829E-4326-5683A280C00A}"/>
               </a:ext>
             </a:extLst>
           </p:cNvPr>
@@ -8934,8 +8855,8 @@
         </p:nvSpPr>
         <p:spPr>
           <a:xfrm>
-            <a:off x="1244600" y="2362200"/>
-            <a:ext cx="9652000" cy="369332"/>
+            <a:off x="1117600" y="2222500"/>
+            <a:ext cx="1905000" cy="369332"/>
           </a:xfrm>
           <a:prstGeom prst="rect">
             <a:avLst/>
@@ -8949,23 +8870,23 @@
           <a:lstStyle/>
           <a:p>
             <a:r>
-              <a:rPr lang="es-ES" sz="1300" b="1">
-                <a:solidFill>
-                  <a:srgbClr val="4975B0"/>
-                </a:solidFill>
-                <a:latin typeface="Consolas" panose="020B0609020204030204" pitchFamily="49" charset="0"/>
-              </a:rPr>
-              <a:t>https://agora.34.175.161.212.nip.io/app/ | https://agora.34.175.161.212.nip.io/externo/</a:t>
-            </a:r>
-          </a:p>
-        </p:txBody>
-      </p:sp>
-      <p:sp>
-        <p:nvSpPr>
-          <p:cNvPr id="7" name="CuadroTexto 6">
-            <a:extLst>
-              <a:ext uri="{FF2B5EF4-FFF2-40B4-BE49-F238E27FC236}">
-                <a16:creationId xmlns:a16="http://schemas.microsoft.com/office/drawing/2014/main" id="{40E88544-28BC-E848-C31F-DAD84A3FA6D4}"/>
+              <a:rPr lang="es-ES" sz="2600" b="1">
+                <a:solidFill>
+                  <a:srgbClr val="41A772"/>
+                </a:solidFill>
+                <a:latin typeface="Segoe UI" panose="020B0502040204020203" pitchFamily="34" charset="0"/>
+              </a:rPr>
+              <a:t>110</a:t>
+            </a:r>
+          </a:p>
+        </p:txBody>
+      </p:sp>
+      <p:sp>
+        <p:nvSpPr>
+          <p:cNvPr id="6" name="CuadroTexto 5">
+            <a:extLst>
+              <a:ext uri="{FF2B5EF4-FFF2-40B4-BE49-F238E27FC236}">
+                <a16:creationId xmlns:a16="http://schemas.microsoft.com/office/drawing/2014/main" id="{24E16A61-AD09-EE49-131F-0EAEA67FD3D1}"/>
               </a:ext>
             </a:extLst>
           </p:cNvPr>
@@ -8974,8 +8895,8 @@
         </p:nvSpPr>
         <p:spPr>
           <a:xfrm>
-            <a:off x="1295400" y="2794000"/>
-            <a:ext cx="9652000" cy="369332"/>
+            <a:off x="1117600" y="2717800"/>
+            <a:ext cx="1905000" cy="381000"/>
           </a:xfrm>
           <a:prstGeom prst="rect">
             <a:avLst/>
@@ -8989,23 +8910,23 @@
           <a:lstStyle/>
           <a:p>
             <a:r>
-              <a:rPr lang="es-ES" sz="1400">
+              <a:rPr lang="es-ES" sz="1300">
                 <a:solidFill>
                   <a:srgbClr val="1F2937"/>
                 </a:solidFill>
                 <a:latin typeface="Segoe UI" panose="020B0502040204020203" pitchFamily="34" charset="0"/>
               </a:rPr>
-              <a:t>La misma base sirve panel interno, portal externo y documentacion; la operacion tecnica se hace desde Agora Desktop.</a:t>
-            </a:r>
-          </a:p>
-        </p:txBody>
-      </p:sp>
-      <p:sp>
-        <p:nvSpPr>
-          <p:cNvPr id="8" name="Rectángulo: esquinas redondeadas 7">
-            <a:extLst>
-              <a:ext uri="{FF2B5EF4-FFF2-40B4-BE49-F238E27FC236}">
-                <a16:creationId xmlns:a16="http://schemas.microsoft.com/office/drawing/2014/main" id="{340A9376-566D-85CA-D1B2-B8D52A09F04E}"/>
+              <a:t>tests backend</a:t>
+            </a:r>
+          </a:p>
+        </p:txBody>
+      </p:sp>
+      <p:sp>
+        <p:nvSpPr>
+          <p:cNvPr id="7" name="Rectángulo: esquinas redondeadas 6">
+            <a:extLst>
+              <a:ext uri="{FF2B5EF4-FFF2-40B4-BE49-F238E27FC236}">
+                <a16:creationId xmlns:a16="http://schemas.microsoft.com/office/drawing/2014/main" id="{BA650A2C-FA88-49E4-B3F8-715DAB52A910}"/>
               </a:ext>
             </a:extLst>
           </p:cNvPr>
@@ -9014,18 +8935,18 @@
         </p:nvSpPr>
         <p:spPr>
           <a:xfrm>
-            <a:off x="1092200" y="3835400"/>
-            <a:ext cx="4064000" cy="1498600"/>
+            <a:off x="3708400" y="2057400"/>
+            <a:ext cx="2413000" cy="1193800"/>
           </a:xfrm>
           <a:prstGeom prst="roundRect">
             <a:avLst/>
           </a:prstGeom>
           <a:solidFill>
-            <a:srgbClr val="1D2430"/>
+            <a:srgbClr val="F7FAFC"/>
           </a:solidFill>
           <a:ln w="12700">
             <a:solidFill>
-              <a:srgbClr val="424E60"/>
+              <a:srgbClr val="DCE2EB"/>
             </a:solidFill>
           </a:ln>
         </p:spPr>
@@ -9056,10 +8977,10 @@
       </p:sp>
       <p:sp>
         <p:nvSpPr>
-          <p:cNvPr id="9" name="CuadroTexto 8">
-            <a:extLst>
-              <a:ext uri="{FF2B5EF4-FFF2-40B4-BE49-F238E27FC236}">
-                <a16:creationId xmlns:a16="http://schemas.microsoft.com/office/drawing/2014/main" id="{CC74D62C-5549-1E91-A353-ABF734037A58}"/>
+          <p:cNvPr id="8" name="CuadroTexto 7">
+            <a:extLst>
+              <a:ext uri="{FF2B5EF4-FFF2-40B4-BE49-F238E27FC236}">
+                <a16:creationId xmlns:a16="http://schemas.microsoft.com/office/drawing/2014/main" id="{03DA1B89-78E3-0C91-20C3-8079917B0478}"/>
               </a:ext>
             </a:extLst>
           </p:cNvPr>
@@ -9068,8 +8989,8 @@
         </p:nvSpPr>
         <p:spPr>
           <a:xfrm>
-            <a:off x="1498600" y="4165600"/>
-            <a:ext cx="3175000" cy="369332"/>
+            <a:off x="3937000" y="2222500"/>
+            <a:ext cx="1905000" cy="369332"/>
           </a:xfrm>
           <a:prstGeom prst="rect">
             <a:avLst/>
@@ -9083,23 +9004,23 @@
           <a:lstStyle/>
           <a:p>
             <a:r>
-              <a:rPr lang="es-ES" sz="2000" b="1">
-                <a:solidFill>
-                  <a:srgbClr val="DBA14D"/>
-                </a:solidFill>
-                <a:latin typeface="Segoe UI" panose="020B0502040204020203" pitchFamily="34" charset="0"/>
-              </a:rPr>
-              <a:t>Usuario de prueba</a:t>
-            </a:r>
-          </a:p>
-        </p:txBody>
-      </p:sp>
-      <p:sp>
-        <p:nvSpPr>
-          <p:cNvPr id="10" name="CuadroTexto 9">
-            <a:extLst>
-              <a:ext uri="{FF2B5EF4-FFF2-40B4-BE49-F238E27FC236}">
-                <a16:creationId xmlns:a16="http://schemas.microsoft.com/office/drawing/2014/main" id="{F79AFBC8-B669-A035-1752-7BC4F0306B72}"/>
+              <a:rPr lang="es-ES" sz="2600" b="1">
+                <a:solidFill>
+                  <a:srgbClr val="49B1D2"/>
+                </a:solidFill>
+                <a:latin typeface="Segoe UI" panose="020B0502040204020203" pitchFamily="34" charset="0"/>
+              </a:rPr>
+              <a:t>628</a:t>
+            </a:r>
+          </a:p>
+        </p:txBody>
+      </p:sp>
+      <p:sp>
+        <p:nvSpPr>
+          <p:cNvPr id="9" name="CuadroTexto 8">
+            <a:extLst>
+              <a:ext uri="{FF2B5EF4-FFF2-40B4-BE49-F238E27FC236}">
+                <a16:creationId xmlns:a16="http://schemas.microsoft.com/office/drawing/2014/main" id="{C6EF62AA-CE2F-BE81-7FD2-771CF8A022B2}"/>
               </a:ext>
             </a:extLst>
           </p:cNvPr>
@@ -9108,8 +9029,8 @@
         </p:nvSpPr>
         <p:spPr>
           <a:xfrm>
-            <a:off x="1498600" y="4597400"/>
-            <a:ext cx="3175000" cy="369332"/>
+            <a:off x="3937000" y="2717800"/>
+            <a:ext cx="1905000" cy="381000"/>
           </a:xfrm>
           <a:prstGeom prst="rect">
             <a:avLst/>
@@ -9123,14 +9044,68 @@
           <a:lstStyle/>
           <a:p>
             <a:r>
-              <a:rPr lang="es-ES" b="1">
-                <a:solidFill>
-                  <a:srgbClr val="F6F8FC"/>
-                </a:solidFill>
-                <a:latin typeface="Consolas" panose="020B0609020204030204" pitchFamily="49" charset="0"/>
-              </a:rPr>
-              <a:t>profesora / Abrete01</a:t>
-            </a:r>
+              <a:rPr lang="es-ES" sz="1300">
+                <a:solidFill>
+                  <a:srgbClr val="1F2937"/>
+                </a:solidFill>
+                <a:latin typeface="Segoe UI" panose="020B0502040204020203" pitchFamily="34" charset="0"/>
+              </a:rPr>
+              <a:t>aserciones</a:t>
+            </a:r>
+          </a:p>
+        </p:txBody>
+      </p:sp>
+      <p:sp>
+        <p:nvSpPr>
+          <p:cNvPr id="10" name="Rectángulo: esquinas redondeadas 9">
+            <a:extLst>
+              <a:ext uri="{FF2B5EF4-FFF2-40B4-BE49-F238E27FC236}">
+                <a16:creationId xmlns:a16="http://schemas.microsoft.com/office/drawing/2014/main" id="{D9739C51-78EB-3175-F5E5-0E7AAF10267B}"/>
+              </a:ext>
+            </a:extLst>
+          </p:cNvPr>
+          <p:cNvSpPr/>
+          <p:nvPr/>
+        </p:nvSpPr>
+        <p:spPr>
+          <a:xfrm>
+            <a:off x="6527800" y="2057400"/>
+            <a:ext cx="2413000" cy="1193800"/>
+          </a:xfrm>
+          <a:prstGeom prst="roundRect">
+            <a:avLst/>
+          </a:prstGeom>
+          <a:solidFill>
+            <a:srgbClr val="F7FAFC"/>
+          </a:solidFill>
+          <a:ln w="12700">
+            <a:solidFill>
+              <a:srgbClr val="DCE2EB"/>
+            </a:solidFill>
+          </a:ln>
+        </p:spPr>
+        <p:style>
+          <a:lnRef idx="2">
+            <a:schemeClr val="accent1">
+              <a:shade val="15000"/>
+            </a:schemeClr>
+          </a:lnRef>
+          <a:fillRef idx="1">
+            <a:schemeClr val="accent1"/>
+          </a:fillRef>
+          <a:effectRef idx="0">
+            <a:schemeClr val="accent1"/>
+          </a:effectRef>
+          <a:fontRef idx="minor">
+            <a:schemeClr val="lt1"/>
+          </a:fontRef>
+        </p:style>
+        <p:txBody>
+          <a:bodyPr rtlCol="0" anchor="ctr"/>
+          <a:lstStyle/>
+          <a:p>
+            <a:pPr algn="ctr"/>
+            <a:endParaRPr lang="es-ES"/>
           </a:p>
         </p:txBody>
       </p:sp>
@@ -9139,7 +9114,7 @@
           <p:cNvPr id="11" name="CuadroTexto 10">
             <a:extLst>
               <a:ext uri="{FF2B5EF4-FFF2-40B4-BE49-F238E27FC236}">
-                <a16:creationId xmlns:a16="http://schemas.microsoft.com/office/drawing/2014/main" id="{3E3FD94C-A502-E9E4-B772-D31691FB1E26}"/>
+                <a16:creationId xmlns:a16="http://schemas.microsoft.com/office/drawing/2014/main" id="{FFF5F859-389D-5F60-50A0-A499C84FB247}"/>
               </a:ext>
             </a:extLst>
           </p:cNvPr>
@@ -9148,8 +9123,8 @@
         </p:nvSpPr>
         <p:spPr>
           <a:xfrm>
-            <a:off x="1498600" y="4978400"/>
-            <a:ext cx="2794000" cy="369332"/>
+            <a:off x="6756400" y="2222500"/>
+            <a:ext cx="1905000" cy="369332"/>
           </a:xfrm>
           <a:prstGeom prst="rect">
             <a:avLst/>
@@ -9163,13 +9138,13 @@
           <a:lstStyle/>
           <a:p>
             <a:r>
-              <a:rPr lang="es-ES" sz="1400">
-                <a:solidFill>
-                  <a:srgbClr val="C2CBD8"/>
-                </a:solidFill>
-                <a:latin typeface="Segoe UI" panose="020B0502040204020203" pitchFamily="34" charset="0"/>
-              </a:rPr>
-              <a:t>Rol: coordinacion</a:t>
+              <a:rPr lang="es-ES" sz="2600" b="1">
+                <a:solidFill>
+                  <a:srgbClr val="41A772"/>
+                </a:solidFill>
+                <a:latin typeface="Segoe UI" panose="020B0502040204020203" pitchFamily="34" charset="0"/>
+              </a:rPr>
+              <a:t>14/14</a:t>
             </a:r>
           </a:p>
         </p:txBody>
@@ -9179,7 +9154,7 @@
           <p:cNvPr id="12" name="CuadroTexto 11">
             <a:extLst>
               <a:ext uri="{FF2B5EF4-FFF2-40B4-BE49-F238E27FC236}">
-                <a16:creationId xmlns:a16="http://schemas.microsoft.com/office/drawing/2014/main" id="{DFB2B9A6-5DF6-A451-4EDC-B02697BFA783}"/>
+                <a16:creationId xmlns:a16="http://schemas.microsoft.com/office/drawing/2014/main" id="{3B676257-7D7F-8075-E88B-7471C841CCAF}"/>
               </a:ext>
             </a:extLst>
           </p:cNvPr>
@@ -9188,8 +9163,182 @@
         </p:nvSpPr>
         <p:spPr>
           <a:xfrm>
-            <a:off x="5969000" y="3886200"/>
-            <a:ext cx="4572000" cy="369332"/>
+            <a:off x="6756400" y="2717800"/>
+            <a:ext cx="1905000" cy="381000"/>
+          </a:xfrm>
+          <a:prstGeom prst="rect">
+            <a:avLst/>
+          </a:prstGeom>
+          <a:noFill/>
+        </p:spPr>
+        <p:txBody>
+          <a:bodyPr vert="horz" wrap="square" lIns="0" tIns="0" rIns="0" bIns="0" rtlCol="0">
+            <a:noAutofit/>
+          </a:bodyPr>
+          <a:lstStyle/>
+          <a:p>
+            <a:r>
+              <a:rPr lang="es-ES" sz="1300">
+                <a:solidFill>
+                  <a:srgbClr val="1F2937"/>
+                </a:solidFill>
+                <a:latin typeface="Segoe UI" panose="020B0502040204020203" pitchFamily="34" charset="0"/>
+              </a:rPr>
+              <a:t>tests frontend</a:t>
+            </a:r>
+          </a:p>
+        </p:txBody>
+      </p:sp>
+      <p:sp>
+        <p:nvSpPr>
+          <p:cNvPr id="13" name="Rectángulo: esquinas redondeadas 12">
+            <a:extLst>
+              <a:ext uri="{FF2B5EF4-FFF2-40B4-BE49-F238E27FC236}">
+                <a16:creationId xmlns:a16="http://schemas.microsoft.com/office/drawing/2014/main" id="{E296E1D6-8B6D-CE41-1D54-B0F0459E07D6}"/>
+              </a:ext>
+            </a:extLst>
+          </p:cNvPr>
+          <p:cNvSpPr/>
+          <p:nvPr/>
+        </p:nvSpPr>
+        <p:spPr>
+          <a:xfrm>
+            <a:off x="9347200" y="2057400"/>
+            <a:ext cx="2413000" cy="1193800"/>
+          </a:xfrm>
+          <a:prstGeom prst="roundRect">
+            <a:avLst/>
+          </a:prstGeom>
+          <a:solidFill>
+            <a:srgbClr val="F7FAFC"/>
+          </a:solidFill>
+          <a:ln w="12700">
+            <a:solidFill>
+              <a:srgbClr val="DCE2EB"/>
+            </a:solidFill>
+          </a:ln>
+        </p:spPr>
+        <p:style>
+          <a:lnRef idx="2">
+            <a:schemeClr val="accent1">
+              <a:shade val="15000"/>
+            </a:schemeClr>
+          </a:lnRef>
+          <a:fillRef idx="1">
+            <a:schemeClr val="accent1"/>
+          </a:fillRef>
+          <a:effectRef idx="0">
+            <a:schemeClr val="accent1"/>
+          </a:effectRef>
+          <a:fontRef idx="minor">
+            <a:schemeClr val="lt1"/>
+          </a:fontRef>
+        </p:style>
+        <p:txBody>
+          <a:bodyPr rtlCol="0" anchor="ctr"/>
+          <a:lstStyle/>
+          <a:p>
+            <a:pPr algn="ctr"/>
+            <a:endParaRPr lang="es-ES"/>
+          </a:p>
+        </p:txBody>
+      </p:sp>
+      <p:sp>
+        <p:nvSpPr>
+          <p:cNvPr id="14" name="CuadroTexto 13">
+            <a:extLst>
+              <a:ext uri="{FF2B5EF4-FFF2-40B4-BE49-F238E27FC236}">
+                <a16:creationId xmlns:a16="http://schemas.microsoft.com/office/drawing/2014/main" id="{D372023C-AE65-26A2-BC48-3108E9709B9C}"/>
+              </a:ext>
+            </a:extLst>
+          </p:cNvPr>
+          <p:cNvSpPr txBox="1"/>
+          <p:nvPr/>
+        </p:nvSpPr>
+        <p:spPr>
+          <a:xfrm>
+            <a:off x="9575800" y="2222500"/>
+            <a:ext cx="1905000" cy="369332"/>
+          </a:xfrm>
+          <a:prstGeom prst="rect">
+            <a:avLst/>
+          </a:prstGeom>
+          <a:noFill/>
+        </p:spPr>
+        <p:txBody>
+          <a:bodyPr vert="horz" wrap="square" lIns="0" tIns="0" rIns="0" bIns="0" rtlCol="0">
+            <a:noAutofit/>
+          </a:bodyPr>
+          <a:lstStyle/>
+          <a:p>
+            <a:r>
+              <a:rPr lang="es-ES" sz="2600" b="1">
+                <a:solidFill>
+                  <a:srgbClr val="41A772"/>
+                </a:solidFill>
+                <a:latin typeface="Segoe UI" panose="020B0502040204020203" pitchFamily="34" charset="0"/>
+              </a:rPr>
+              <a:t>6/6</a:t>
+            </a:r>
+          </a:p>
+        </p:txBody>
+      </p:sp>
+      <p:sp>
+        <p:nvSpPr>
+          <p:cNvPr id="15" name="CuadroTexto 14">
+            <a:extLst>
+              <a:ext uri="{FF2B5EF4-FFF2-40B4-BE49-F238E27FC236}">
+                <a16:creationId xmlns:a16="http://schemas.microsoft.com/office/drawing/2014/main" id="{DA52FC83-E274-518D-EED6-3C430243BE8D}"/>
+              </a:ext>
+            </a:extLst>
+          </p:cNvPr>
+          <p:cNvSpPr txBox="1"/>
+          <p:nvPr/>
+        </p:nvSpPr>
+        <p:spPr>
+          <a:xfrm>
+            <a:off x="9575800" y="2717800"/>
+            <a:ext cx="1905000" cy="381000"/>
+          </a:xfrm>
+          <a:prstGeom prst="rect">
+            <a:avLst/>
+          </a:prstGeom>
+          <a:noFill/>
+        </p:spPr>
+        <p:txBody>
+          <a:bodyPr vert="horz" wrap="square" lIns="0" tIns="0" rIns="0" bIns="0" rtlCol="0">
+            <a:noAutofit/>
+          </a:bodyPr>
+          <a:lstStyle/>
+          <a:p>
+            <a:r>
+              <a:rPr lang="es-ES" sz="1300">
+                <a:solidFill>
+                  <a:srgbClr val="1F2937"/>
+                </a:solidFill>
+                <a:latin typeface="Segoe UI" panose="020B0502040204020203" pitchFamily="34" charset="0"/>
+              </a:rPr>
+              <a:t>E2E Playwright</a:t>
+            </a:r>
+          </a:p>
+        </p:txBody>
+      </p:sp>
+      <p:sp>
+        <p:nvSpPr>
+          <p:cNvPr id="16" name="CuadroTexto 15">
+            <a:extLst>
+              <a:ext uri="{FF2B5EF4-FFF2-40B4-BE49-F238E27FC236}">
+                <a16:creationId xmlns:a16="http://schemas.microsoft.com/office/drawing/2014/main" id="{B7480028-461E-048B-F63D-4A54A3C51E8F}"/>
+              </a:ext>
+            </a:extLst>
+          </p:cNvPr>
+          <p:cNvSpPr txBox="1"/>
+          <p:nvPr/>
+        </p:nvSpPr>
+        <p:spPr>
+          <a:xfrm>
+            <a:off x="1193800" y="3987800"/>
+            <a:ext cx="9398000" cy="369332"/>
           </a:xfrm>
           <a:prstGeom prst="rect">
             <a:avLst/>
@@ -9210,13 +9359,13 @@
               <a:buChar char="•"/>
             </a:pPr>
             <a:r>
-              <a:rPr lang="es-ES" sz="1700">
+              <a:rPr lang="es-ES">
                 <a:solidFill>
                   <a:srgbClr val="C2CBD8"/>
                 </a:solidFill>
                 <a:latin typeface="Segoe UI" panose="020B0502040204020203" pitchFamily="34" charset="0"/>
               </a:rPr>
-              <a:t>Puede revisar solicitudes, convenios, asignaciones y mensajes.</a:t>
+              <a:t>Build integrada de /app y /externo publicada en Symfony.</a:t>
             </a:r>
           </a:p>
           <a:p>
@@ -9228,13 +9377,13 @@
               <a:buChar char="•"/>
             </a:pPr>
             <a:r>
-              <a:rPr lang="es-ES" sz="1700">
+              <a:rPr lang="es-ES">
                 <a:solidFill>
                   <a:srgbClr val="C2CBD8"/>
                 </a:solidFill>
                 <a:latin typeface="Segoe UI" panose="020B0502040204020203" pitchFamily="34" charset="0"/>
               </a:rPr>
-              <a:t>La empresa prueba el recorrido por /externo.</a:t>
+              <a:t>Verificados correo, rechazo, URLs publicas, chat y consola tecnica de escritorio.</a:t>
             </a:r>
           </a:p>
           <a:p>
@@ -9246,13 +9395,53 @@
               <a:buChar char="•"/>
             </a:pPr>
             <a:r>
-              <a:rPr lang="es-ES" sz="1700">
+              <a:rPr lang="es-ES">
                 <a:solidFill>
                   <a:srgbClr val="C2CBD8"/>
                 </a:solidFill>
                 <a:latin typeface="Segoe UI" panose="020B0502040204020203" pitchFamily="34" charset="0"/>
               </a:rPr>
-              <a:t>El acceso remoto depende de que la VM siga activa.</a:t>
+              <a:t>Tambien se ha validado el empaquetado Windows con PHP embebido y SQLite.</a:t>
+            </a:r>
+          </a:p>
+        </p:txBody>
+      </p:sp>
+      <p:sp>
+        <p:nvSpPr>
+          <p:cNvPr id="17" name="CuadroTexto 16">
+            <a:extLst>
+              <a:ext uri="{FF2B5EF4-FFF2-40B4-BE49-F238E27FC236}">
+                <a16:creationId xmlns:a16="http://schemas.microsoft.com/office/drawing/2014/main" id="{7E7AF284-79BF-CCE8-8FA7-04F6D55ECC44}"/>
+              </a:ext>
+            </a:extLst>
+          </p:cNvPr>
+          <p:cNvSpPr txBox="1"/>
+          <p:nvPr/>
+        </p:nvSpPr>
+        <p:spPr>
+          <a:xfrm>
+            <a:off x="1193800" y="5562600"/>
+            <a:ext cx="9271000" cy="369332"/>
+          </a:xfrm>
+          <a:prstGeom prst="rect">
+            <a:avLst/>
+          </a:prstGeom>
+          <a:noFill/>
+        </p:spPr>
+        <p:txBody>
+          <a:bodyPr vert="horz" wrap="square" lIns="0" tIns="0" rIns="0" bIns="0" rtlCol="0">
+            <a:noAutofit/>
+          </a:bodyPr>
+          <a:lstStyle/>
+          <a:p>
+            <a:r>
+              <a:rPr lang="es-ES" sz="1400">
+                <a:solidFill>
+                  <a:srgbClr val="C2CBD8"/>
+                </a:solidFill>
+                <a:latin typeface="Segoe UI" panose="020B0502040204020203" pitchFamily="34" charset="0"/>
+              </a:rPr>
+              <a:t>Queda una deprecacion tecnica de PHPUnit, no bloqueante para la demo ni para la funcionalidad.</a:t>
             </a:r>
           </a:p>
         </p:txBody>
@@ -9260,7 +9449,7 @@
     </p:spTree>
     <p:extLst>
       <p:ext uri="{BB962C8B-B14F-4D97-AF65-F5344CB8AC3E}">
-        <p14:creationId xmlns:p14="http://schemas.microsoft.com/office/powerpoint/2010/main" val="96405022"/>
+        <p14:creationId xmlns:p14="http://schemas.microsoft.com/office/powerpoint/2010/main" val="1930905325"/>
       </p:ext>
     </p:extLst>
   </p:cSld>
@@ -9300,7 +9489,7 @@
           <p:cNvPr id="2" name="CuadroTexto 1">
             <a:extLst>
               <a:ext uri="{FF2B5EF4-FFF2-40B4-BE49-F238E27FC236}">
-                <a16:creationId xmlns:a16="http://schemas.microsoft.com/office/drawing/2014/main" id="{46A12B50-8C80-E7D6-9568-975116167361}"/>
+                <a16:creationId xmlns:a16="http://schemas.microsoft.com/office/drawing/2014/main" id="{9CD16692-9349-D12C-0B61-DEA0E0018975}"/>
               </a:ext>
             </a:extLst>
           </p:cNvPr>
@@ -9330,7 +9519,7 @@
                 </a:solidFill>
                 <a:latin typeface="Segoe UI" panose="020B0502040204020203" pitchFamily="34" charset="0"/>
               </a:rPr>
-              <a:t>15 / ALCANCE Y FUTURO</a:t>
+              <a:t>15 / ACCESO DE EVALUACION</a:t>
             </a:r>
           </a:p>
         </p:txBody>
@@ -9340,7 +9529,7 @@
           <p:cNvPr id="3" name="CuadroTexto 2">
             <a:extLst>
               <a:ext uri="{FF2B5EF4-FFF2-40B4-BE49-F238E27FC236}">
-                <a16:creationId xmlns:a16="http://schemas.microsoft.com/office/drawing/2014/main" id="{A015E615-C043-C2D0-F864-38AC43651953}"/>
+                <a16:creationId xmlns:a16="http://schemas.microsoft.com/office/drawing/2014/main" id="{3FD922E1-5C31-8DDA-F7CA-69AD03218E94}"/>
               </a:ext>
             </a:extLst>
           </p:cNvPr>
@@ -9370,7 +9559,7 @@
                 </a:solidFill>
                 <a:latin typeface="Segoe UI" panose="020B0502040204020203" pitchFamily="34" charset="0"/>
               </a:rPr>
-              <a:t>Que queda cerrado y que se deja para despues</a:t>
+              <a:t>Como puede probarla la profesora desde fuera</a:t>
             </a:r>
           </a:p>
         </p:txBody>
@@ -9380,7 +9569,7 @@
           <p:cNvPr id="4" name="CuadroTexto 3">
             <a:extLst>
               <a:ext uri="{FF2B5EF4-FFF2-40B4-BE49-F238E27FC236}">
-                <a16:creationId xmlns:a16="http://schemas.microsoft.com/office/drawing/2014/main" id="{69A6E439-53B1-9C0A-E530-766A89774EB9}"/>
+                <a16:creationId xmlns:a16="http://schemas.microsoft.com/office/drawing/2014/main" id="{CFE35FE3-E581-7FCD-E82D-A0E3A7B9E238}"/>
               </a:ext>
             </a:extLst>
           </p:cNvPr>
@@ -9410,7 +9599,7 @@
                 </a:solidFill>
                 <a:latin typeface="Segoe UI" panose="020B0502040204020203" pitchFamily="34" charset="0"/>
               </a:rPr>
-              <a:t>El nucleo funcional y tecnico ya esta entregado; las mejoras futuras endurecen o amplian, pero no bloquean la defensa.</a:t>
+              <a:t>Con la VM levantada no necesita instalar dependencias en su equipo.</a:t>
             </a:r>
           </a:p>
         </p:txBody>
@@ -9420,7 +9609,7 @@
           <p:cNvPr id="5" name="Rectángulo: esquinas redondeadas 4">
             <a:extLst>
               <a:ext uri="{FF2B5EF4-FFF2-40B4-BE49-F238E27FC236}">
-                <a16:creationId xmlns:a16="http://schemas.microsoft.com/office/drawing/2014/main" id="{C6F4D1A2-BD45-9F3B-DD47-15D3E350D499}"/>
+                <a16:creationId xmlns:a16="http://schemas.microsoft.com/office/drawing/2014/main" id="{E3A32F93-A359-D490-CC01-ADFD0900299B}"/>
               </a:ext>
             </a:extLst>
           </p:cNvPr>
@@ -9429,18 +9618,18 @@
         </p:nvSpPr>
         <p:spPr>
           <a:xfrm>
-            <a:off x="711200" y="2159000"/>
-            <a:ext cx="3454400" cy="3098800"/>
+            <a:off x="863600" y="2006600"/>
+            <a:ext cx="10464800" cy="1168400"/>
           </a:xfrm>
           <a:prstGeom prst="roundRect">
             <a:avLst/>
           </a:prstGeom>
           <a:solidFill>
-            <a:srgbClr val="1D2430"/>
+            <a:srgbClr val="F7FAFC"/>
           </a:solidFill>
           <a:ln w="12700">
             <a:solidFill>
-              <a:srgbClr val="424E60"/>
+              <a:srgbClr val="DDE5EE"/>
             </a:solidFill>
           </a:ln>
         </p:spPr>
@@ -9474,7 +9663,7 @@
           <p:cNvPr id="6" name="CuadroTexto 5">
             <a:extLst>
               <a:ext uri="{FF2B5EF4-FFF2-40B4-BE49-F238E27FC236}">
-                <a16:creationId xmlns:a16="http://schemas.microsoft.com/office/drawing/2014/main" id="{8578630C-33AF-B5A3-A688-F30C0D769EFA}"/>
+                <a16:creationId xmlns:a16="http://schemas.microsoft.com/office/drawing/2014/main" id="{9390BDFF-CFE1-A2BB-1684-E69AEB0856E1}"/>
               </a:ext>
             </a:extLst>
           </p:cNvPr>
@@ -9483,8 +9672,8 @@
         </p:nvSpPr>
         <p:spPr>
           <a:xfrm>
-            <a:off x="1016000" y="2438400"/>
-            <a:ext cx="2667000" cy="369332"/>
+            <a:off x="1244600" y="2362200"/>
+            <a:ext cx="9652000" cy="369332"/>
           </a:xfrm>
           <a:prstGeom prst="rect">
             <a:avLst/>
@@ -9498,13 +9687,13 @@
           <a:lstStyle/>
           <a:p>
             <a:r>
-              <a:rPr lang="es-ES" sz="2000" b="1">
-                <a:solidFill>
-                  <a:srgbClr val="DBA14D"/>
-                </a:solidFill>
-                <a:latin typeface="Segoe UI" panose="020B0502040204020203" pitchFamily="34" charset="0"/>
-              </a:rPr>
-              <a:t>Cerrado en esta entrega</a:t>
+              <a:rPr lang="es-ES" sz="1300" b="1">
+                <a:solidFill>
+                  <a:srgbClr val="4975B0"/>
+                </a:solidFill>
+                <a:latin typeface="Consolas" panose="020B0609020204030204" pitchFamily="49" charset="0"/>
+              </a:rPr>
+              <a:t>\https://agora.34.175.161.212.nip.io/app   |   https://agora.34.175.161.212.nip.io/externo\</a:t>
             </a:r>
           </a:p>
         </p:txBody>
@@ -9514,7 +9703,7 @@
           <p:cNvPr id="7" name="CuadroTexto 6">
             <a:extLst>
               <a:ext uri="{FF2B5EF4-FFF2-40B4-BE49-F238E27FC236}">
-                <a16:creationId xmlns:a16="http://schemas.microsoft.com/office/drawing/2014/main" id="{F3AAA898-224C-8C98-621C-724980C0D094}"/>
+                <a16:creationId xmlns:a16="http://schemas.microsoft.com/office/drawing/2014/main" id="{23216801-4E90-C34E-BEBE-EF3EC3C998E8}"/>
               </a:ext>
             </a:extLst>
           </p:cNvPr>
@@ -9523,8 +9712,8 @@
         </p:nvSpPr>
         <p:spPr>
           <a:xfrm>
-            <a:off x="1041400" y="2946400"/>
-            <a:ext cx="2692400" cy="369332"/>
+            <a:off x="1295400" y="2794000"/>
+            <a:ext cx="9652000" cy="369332"/>
           </a:xfrm>
           <a:prstGeom prst="rect">
             <a:avLst/>
@@ -9537,156 +9726,14 @@
           </a:bodyPr>
           <a:lstStyle/>
           <a:p>
-            <a:pPr marL="342900" indent="-342900">
-              <a:spcAft>
-                <a:spcPts val="1000"/>
-              </a:spcAft>
-              <a:buFont typeface="+mj-lt"/>
-              <a:buChar char="•"/>
-            </a:pPr>
-            <a:r>
-              <a:rPr lang="es-ES" sz="1400" dirty="0">
-                <a:solidFill>
-                  <a:srgbClr val="F6F8FC"/>
-                </a:solidFill>
-                <a:latin typeface="Segoe UI" panose="020B0502040204020203" pitchFamily="34" charset="0"/>
-              </a:rPr>
-              <a:t>Portales /app y /externo bajo HTTPS.</a:t>
-            </a:r>
-          </a:p>
-          <a:p>
-            <a:pPr marL="342900" indent="-342900">
-              <a:spcAft>
-                <a:spcPts val="1000"/>
-              </a:spcAft>
-              <a:buFont typeface="+mj-lt"/>
-              <a:buChar char="•"/>
-            </a:pPr>
-            <a:r>
-              <a:rPr lang="es-ES" sz="1400" dirty="0">
-                <a:solidFill>
-                  <a:srgbClr val="F6F8FC"/>
-                </a:solidFill>
-                <a:latin typeface="Segoe UI" panose="020B0502040204020203" pitchFamily="34" charset="0"/>
-              </a:rPr>
-              <a:t>Correo real, documentos, chat y </a:t>
-            </a:r>
-            <a:r>
-              <a:rPr lang="es-ES" sz="1400" dirty="0" err="1">
-                <a:solidFill>
-                  <a:srgbClr val="F6F8FC"/>
-                </a:solidFill>
-                <a:latin typeface="Segoe UI" panose="020B0502040204020203" pitchFamily="34" charset="0"/>
-              </a:rPr>
-              <a:t>exportacion</a:t>
-            </a:r>
-            <a:r>
-              <a:rPr lang="es-ES" sz="1400" dirty="0">
-                <a:solidFill>
-                  <a:srgbClr val="F6F8FC"/>
-                </a:solidFill>
-                <a:latin typeface="Segoe UI" panose="020B0502040204020203" pitchFamily="34" charset="0"/>
-              </a:rPr>
-              <a:t>.</a:t>
-            </a:r>
-          </a:p>
-          <a:p>
-            <a:pPr marL="342900" indent="-342900">
-              <a:spcAft>
-                <a:spcPts val="1000"/>
-              </a:spcAft>
-              <a:buFont typeface="+mj-lt"/>
-              <a:buChar char="•"/>
-            </a:pPr>
-            <a:r>
-              <a:rPr lang="es-ES" sz="1400" dirty="0" err="1">
-                <a:solidFill>
-                  <a:srgbClr val="F6F8FC"/>
-                </a:solidFill>
-                <a:latin typeface="Segoe UI" panose="020B0502040204020203" pitchFamily="34" charset="0"/>
-              </a:rPr>
-              <a:t>Agora</a:t>
-            </a:r>
-            <a:r>
-              <a:rPr lang="es-ES" sz="1400" dirty="0">
-                <a:solidFill>
-                  <a:srgbClr val="F6F8FC"/>
-                </a:solidFill>
-                <a:latin typeface="Segoe UI" panose="020B0502040204020203" pitchFamily="34" charset="0"/>
-              </a:rPr>
-              <a:t> Desktop local/</a:t>
-            </a:r>
-            <a:r>
-              <a:rPr lang="es-ES" sz="1400" dirty="0" err="1">
-                <a:solidFill>
-                  <a:srgbClr val="F6F8FC"/>
-                </a:solidFill>
-                <a:latin typeface="Segoe UI" panose="020B0502040204020203" pitchFamily="34" charset="0"/>
-              </a:rPr>
-              <a:t>cloud</a:t>
-            </a:r>
-            <a:r>
-              <a:rPr lang="es-ES" sz="1400" dirty="0">
-                <a:solidFill>
-                  <a:srgbClr val="F6F8FC"/>
-                </a:solidFill>
-                <a:latin typeface="Segoe UI" panose="020B0502040204020203" pitchFamily="34" charset="0"/>
-              </a:rPr>
-              <a:t> como consola </a:t>
-            </a:r>
-            <a:r>
-              <a:rPr lang="es-ES" sz="1400" dirty="0" err="1">
-                <a:solidFill>
-                  <a:srgbClr val="F6F8FC"/>
-                </a:solidFill>
-                <a:latin typeface="Segoe UI" panose="020B0502040204020203" pitchFamily="34" charset="0"/>
-              </a:rPr>
-              <a:t>tecnica</a:t>
-            </a:r>
-            <a:r>
-              <a:rPr lang="es-ES" sz="1400" dirty="0">
-                <a:solidFill>
-                  <a:srgbClr val="F6F8FC"/>
-                </a:solidFill>
-                <a:latin typeface="Segoe UI" panose="020B0502040204020203" pitchFamily="34" charset="0"/>
-              </a:rPr>
-              <a:t>.</a:t>
-            </a:r>
-          </a:p>
-          <a:p>
-            <a:pPr marL="342900" indent="-342900">
-              <a:spcAft>
-                <a:spcPts val="1000"/>
-              </a:spcAft>
-              <a:buFont typeface="+mj-lt"/>
-              <a:buChar char="•"/>
-            </a:pPr>
-            <a:r>
-              <a:rPr lang="es-ES" sz="1400" dirty="0">
-                <a:solidFill>
-                  <a:srgbClr val="F6F8FC"/>
-                </a:solidFill>
-                <a:latin typeface="Segoe UI" panose="020B0502040204020203" pitchFamily="34" charset="0"/>
-              </a:rPr>
-              <a:t>VM publica con arranque </a:t>
-            </a:r>
-            <a:r>
-              <a:rPr lang="es-ES" sz="1400" dirty="0" err="1">
-                <a:solidFill>
-                  <a:srgbClr val="F6F8FC"/>
-                </a:solidFill>
-                <a:latin typeface="Segoe UI" panose="020B0502040204020203" pitchFamily="34" charset="0"/>
-              </a:rPr>
-              <a:t>automatico</a:t>
-            </a:r>
-            <a:r>
-              <a:rPr lang="es-ES" sz="1400" dirty="0">
-                <a:solidFill>
-                  <a:srgbClr val="F6F8FC"/>
-                </a:solidFill>
-                <a:latin typeface="Segoe UI" panose="020B0502040204020203" pitchFamily="34" charset="0"/>
-              </a:rPr>
-              <a:t> y URL efectiva visible.</a:t>
+            <a:r>
+              <a:rPr lang="es-ES" sz="1400">
+                <a:solidFill>
+                  <a:srgbClr val="1F2937"/>
+                </a:solidFill>
+                <a:latin typeface="Segoe UI" panose="020B0502040204020203" pitchFamily="34" charset="0"/>
+              </a:rPr>
+              <a:t>La misma base sirve panel interno, portal externo y documentacion; la operacion tecnica se hace desde Agora Desktop.</a:t>
             </a:r>
           </a:p>
         </p:txBody>
@@ -9696,7 +9743,7 @@
           <p:cNvPr id="8" name="Rectángulo: esquinas redondeadas 7">
             <a:extLst>
               <a:ext uri="{FF2B5EF4-FFF2-40B4-BE49-F238E27FC236}">
-                <a16:creationId xmlns:a16="http://schemas.microsoft.com/office/drawing/2014/main" id="{86D12CED-E1B7-4865-31C0-47381DB0E867}"/>
+                <a16:creationId xmlns:a16="http://schemas.microsoft.com/office/drawing/2014/main" id="{34D95524-5FAA-E144-F76B-C9D0CB796B73}"/>
               </a:ext>
             </a:extLst>
           </p:cNvPr>
@@ -9705,18 +9752,18 @@
         </p:nvSpPr>
         <p:spPr>
           <a:xfrm>
-            <a:off x="4521200" y="2235200"/>
-            <a:ext cx="3098800" cy="1219200"/>
+            <a:off x="1092200" y="3835400"/>
+            <a:ext cx="4064000" cy="1498600"/>
           </a:xfrm>
           <a:prstGeom prst="roundRect">
             <a:avLst/>
           </a:prstGeom>
           <a:solidFill>
-            <a:srgbClr val="F7FAFC"/>
+            <a:srgbClr val="1D2430"/>
           </a:solidFill>
           <a:ln w="12700">
             <a:solidFill>
-              <a:srgbClr val="DDE5EE"/>
+              <a:srgbClr val="424E60"/>
             </a:solidFill>
           </a:ln>
         </p:spPr>
@@ -9750,7 +9797,7 @@
           <p:cNvPr id="9" name="CuadroTexto 8">
             <a:extLst>
               <a:ext uri="{FF2B5EF4-FFF2-40B4-BE49-F238E27FC236}">
-                <a16:creationId xmlns:a16="http://schemas.microsoft.com/office/drawing/2014/main" id="{A348A66E-AAC4-50E9-8AB0-3138D71315D5}"/>
+                <a16:creationId xmlns:a16="http://schemas.microsoft.com/office/drawing/2014/main" id="{55773277-763E-6A59-F998-2B4207B842CC}"/>
               </a:ext>
             </a:extLst>
           </p:cNvPr>
@@ -9759,8 +9806,8 @@
         </p:nvSpPr>
         <p:spPr>
           <a:xfrm>
-            <a:off x="4749800" y="2413000"/>
-            <a:ext cx="2387600" cy="369332"/>
+            <a:off x="1498600" y="4165600"/>
+            <a:ext cx="3175000" cy="369332"/>
           </a:xfrm>
           <a:prstGeom prst="rect">
             <a:avLst/>
@@ -9774,13 +9821,13 @@
           <a:lstStyle/>
           <a:p>
             <a:r>
-              <a:rPr lang="es-ES" b="1">
-                <a:solidFill>
-                  <a:srgbClr val="41A772"/>
-                </a:solidFill>
-                <a:latin typeface="Segoe UI" panose="020B0502040204020203" pitchFamily="34" charset="0"/>
-              </a:rPr>
-              <a:t>Dominio propio</a:t>
+              <a:rPr lang="es-ES" sz="2000" b="1">
+                <a:solidFill>
+                  <a:srgbClr val="DBA14D"/>
+                </a:solidFill>
+                <a:latin typeface="Segoe UI" panose="020B0502040204020203" pitchFamily="34" charset="0"/>
+              </a:rPr>
+              <a:t>Usuario de prueba</a:t>
             </a:r>
           </a:p>
         </p:txBody>
@@ -9790,7 +9837,7 @@
           <p:cNvPr id="10" name="CuadroTexto 9">
             <a:extLst>
               <a:ext uri="{FF2B5EF4-FFF2-40B4-BE49-F238E27FC236}">
-                <a16:creationId xmlns:a16="http://schemas.microsoft.com/office/drawing/2014/main" id="{32500D17-6DB3-BA91-4FD6-70EC771C6B41}"/>
+                <a16:creationId xmlns:a16="http://schemas.microsoft.com/office/drawing/2014/main" id="{8AA37CAB-75F6-D668-926D-D7AA36B43B4E}"/>
               </a:ext>
             </a:extLst>
           </p:cNvPr>
@@ -9799,8 +9846,8 @@
         </p:nvSpPr>
         <p:spPr>
           <a:xfrm>
-            <a:off x="4749800" y="2768600"/>
-            <a:ext cx="2540000" cy="369332"/>
+            <a:off x="1498600" y="4597400"/>
+            <a:ext cx="3175000" cy="369332"/>
           </a:xfrm>
           <a:prstGeom prst="rect">
             <a:avLst/>
@@ -9814,77 +9861,23 @@
           <a:lstStyle/>
           <a:p>
             <a:r>
-              <a:rPr lang="es-ES" sz="1300">
-                <a:solidFill>
-                  <a:srgbClr val="1F2937"/>
-                </a:solidFill>
-                <a:latin typeface="Segoe UI" panose="020B0502040204020203" pitchFamily="34" charset="0"/>
-              </a:rPr>
-              <a:t>Sustituir nip.io por dominio institucional y reforzar TLS.</a:t>
-            </a:r>
-          </a:p>
-        </p:txBody>
-      </p:sp>
-      <p:sp>
-        <p:nvSpPr>
-          <p:cNvPr id="11" name="Rectángulo: esquinas redondeadas 10">
-            <a:extLst>
-              <a:ext uri="{FF2B5EF4-FFF2-40B4-BE49-F238E27FC236}">
-                <a16:creationId xmlns:a16="http://schemas.microsoft.com/office/drawing/2014/main" id="{9D4601DD-C32F-AAA2-1E7B-0B303491EF92}"/>
-              </a:ext>
-            </a:extLst>
-          </p:cNvPr>
-          <p:cNvSpPr/>
-          <p:nvPr/>
-        </p:nvSpPr>
-        <p:spPr>
-          <a:xfrm>
-            <a:off x="7975600" y="2235200"/>
-            <a:ext cx="3098800" cy="1219200"/>
-          </a:xfrm>
-          <a:prstGeom prst="roundRect">
-            <a:avLst/>
-          </a:prstGeom>
-          <a:solidFill>
-            <a:srgbClr val="F7FAFC"/>
-          </a:solidFill>
-          <a:ln w="12700">
-            <a:solidFill>
-              <a:srgbClr val="DDE5EE"/>
-            </a:solidFill>
-          </a:ln>
-        </p:spPr>
-        <p:style>
-          <a:lnRef idx="2">
-            <a:schemeClr val="accent1">
-              <a:shade val="15000"/>
-            </a:schemeClr>
-          </a:lnRef>
-          <a:fillRef idx="1">
-            <a:schemeClr val="accent1"/>
-          </a:fillRef>
-          <a:effectRef idx="0">
-            <a:schemeClr val="accent1"/>
-          </a:effectRef>
-          <a:fontRef idx="minor">
-            <a:schemeClr val="lt1"/>
-          </a:fontRef>
-        </p:style>
-        <p:txBody>
-          <a:bodyPr rtlCol="0" anchor="ctr"/>
-          <a:lstStyle/>
-          <a:p>
-            <a:pPr algn="ctr"/>
-            <a:endParaRPr lang="es-ES"/>
-          </a:p>
-        </p:txBody>
-      </p:sp>
-      <p:sp>
-        <p:nvSpPr>
-          <p:cNvPr id="12" name="CuadroTexto 11">
-            <a:extLst>
-              <a:ext uri="{FF2B5EF4-FFF2-40B4-BE49-F238E27FC236}">
-                <a16:creationId xmlns:a16="http://schemas.microsoft.com/office/drawing/2014/main" id="{CABABA1A-84B2-B66A-F679-D5443B29926F}"/>
+              <a:rPr lang="es-ES" b="1">
+                <a:solidFill>
+                  <a:srgbClr val="F6F8FC"/>
+                </a:solidFill>
+                <a:latin typeface="Consolas" panose="020B0609020204030204" pitchFamily="49" charset="0"/>
+              </a:rPr>
+              <a:t>profesora / Abrete01</a:t>
+            </a:r>
+          </a:p>
+        </p:txBody>
+      </p:sp>
+      <p:sp>
+        <p:nvSpPr>
+          <p:cNvPr id="11" name="CuadroTexto 10">
+            <a:extLst>
+              <a:ext uri="{FF2B5EF4-FFF2-40B4-BE49-F238E27FC236}">
+                <a16:creationId xmlns:a16="http://schemas.microsoft.com/office/drawing/2014/main" id="{283F3D5C-0DC3-44B7-0423-3BBF09398352}"/>
               </a:ext>
             </a:extLst>
           </p:cNvPr>
@@ -9893,8 +9886,8 @@
         </p:nvSpPr>
         <p:spPr>
           <a:xfrm>
-            <a:off x="8204200" y="2413000"/>
-            <a:ext cx="2387600" cy="369332"/>
+            <a:off x="1498600" y="4978400"/>
+            <a:ext cx="2794000" cy="369332"/>
           </a:xfrm>
           <a:prstGeom prst="rect">
             <a:avLst/>
@@ -9908,23 +9901,23 @@
           <a:lstStyle/>
           <a:p>
             <a:r>
-              <a:rPr lang="es-ES" b="1">
-                <a:solidFill>
-                  <a:srgbClr val="49B1D2"/>
-                </a:solidFill>
-                <a:latin typeface="Segoe UI" panose="020B0502040204020203" pitchFamily="34" charset="0"/>
-              </a:rPr>
-              <a:t>Servicios gestionados</a:t>
-            </a:r>
-          </a:p>
-        </p:txBody>
-      </p:sp>
-      <p:sp>
-        <p:nvSpPr>
-          <p:cNvPr id="13" name="CuadroTexto 12">
-            <a:extLst>
-              <a:ext uri="{FF2B5EF4-FFF2-40B4-BE49-F238E27FC236}">
-                <a16:creationId xmlns:a16="http://schemas.microsoft.com/office/drawing/2014/main" id="{345B0A56-32AB-2DC9-2F05-769C60F93036}"/>
+              <a:rPr lang="es-ES" sz="1400">
+                <a:solidFill>
+                  <a:srgbClr val="C2CBD8"/>
+                </a:solidFill>
+                <a:latin typeface="Segoe UI" panose="020B0502040204020203" pitchFamily="34" charset="0"/>
+              </a:rPr>
+              <a:t>Rol: coordinacion</a:t>
+            </a:r>
+          </a:p>
+        </p:txBody>
+      </p:sp>
+      <p:sp>
+        <p:nvSpPr>
+          <p:cNvPr id="12" name="CuadroTexto 11">
+            <a:extLst>
+              <a:ext uri="{FF2B5EF4-FFF2-40B4-BE49-F238E27FC236}">
+                <a16:creationId xmlns:a16="http://schemas.microsoft.com/office/drawing/2014/main" id="{E6F33942-BBCE-0B25-0F22-DE82A4494733}"/>
               </a:ext>
             </a:extLst>
           </p:cNvPr>
@@ -9933,182 +9926,8 @@
         </p:nvSpPr>
         <p:spPr>
           <a:xfrm>
-            <a:off x="8204200" y="2768600"/>
-            <a:ext cx="2540000" cy="369332"/>
-          </a:xfrm>
-          <a:prstGeom prst="rect">
-            <a:avLst/>
-          </a:prstGeom>
-          <a:noFill/>
-        </p:spPr>
-        <p:txBody>
-          <a:bodyPr vert="horz" wrap="square" lIns="0" tIns="0" rIns="0" bIns="0" rtlCol="0">
-            <a:noAutofit/>
-          </a:bodyPr>
-          <a:lstStyle/>
-          <a:p>
-            <a:r>
-              <a:rPr lang="es-ES" sz="1300">
-                <a:solidFill>
-                  <a:srgbClr val="1F2937"/>
-                </a:solidFill>
-                <a:latin typeface="Segoe UI" panose="020B0502040204020203" pitchFamily="34" charset="0"/>
-              </a:rPr>
-              <a:t>Migrar documentos, backups y observabilidad a servicios gestionados fuera de la VM.</a:t>
-            </a:r>
-          </a:p>
-        </p:txBody>
-      </p:sp>
-      <p:sp>
-        <p:nvSpPr>
-          <p:cNvPr id="14" name="Rectángulo: esquinas redondeadas 13">
-            <a:extLst>
-              <a:ext uri="{FF2B5EF4-FFF2-40B4-BE49-F238E27FC236}">
-                <a16:creationId xmlns:a16="http://schemas.microsoft.com/office/drawing/2014/main" id="{0FA78C3D-C50F-54E2-1B5D-69A3C5485322}"/>
-              </a:ext>
-            </a:extLst>
-          </p:cNvPr>
-          <p:cNvSpPr/>
-          <p:nvPr/>
-        </p:nvSpPr>
-        <p:spPr>
-          <a:xfrm>
-            <a:off x="4521200" y="3733800"/>
-            <a:ext cx="3098800" cy="1219200"/>
-          </a:xfrm>
-          <a:prstGeom prst="roundRect">
-            <a:avLst/>
-          </a:prstGeom>
-          <a:solidFill>
-            <a:srgbClr val="F7FAFC"/>
-          </a:solidFill>
-          <a:ln w="12700">
-            <a:solidFill>
-              <a:srgbClr val="DDE5EE"/>
-            </a:solidFill>
-          </a:ln>
-        </p:spPr>
-        <p:style>
-          <a:lnRef idx="2">
-            <a:schemeClr val="accent1">
-              <a:shade val="15000"/>
-            </a:schemeClr>
-          </a:lnRef>
-          <a:fillRef idx="1">
-            <a:schemeClr val="accent1"/>
-          </a:fillRef>
-          <a:effectRef idx="0">
-            <a:schemeClr val="accent1"/>
-          </a:effectRef>
-          <a:fontRef idx="minor">
-            <a:schemeClr val="lt1"/>
-          </a:fontRef>
-        </p:style>
-        <p:txBody>
-          <a:bodyPr rtlCol="0" anchor="ctr"/>
-          <a:lstStyle/>
-          <a:p>
-            <a:pPr algn="ctr"/>
-            <a:endParaRPr lang="es-ES"/>
-          </a:p>
-        </p:txBody>
-      </p:sp>
-      <p:sp>
-        <p:nvSpPr>
-          <p:cNvPr id="15" name="CuadroTexto 14">
-            <a:extLst>
-              <a:ext uri="{FF2B5EF4-FFF2-40B4-BE49-F238E27FC236}">
-                <a16:creationId xmlns:a16="http://schemas.microsoft.com/office/drawing/2014/main" id="{652D8E2C-52CC-ABF1-1743-91B42146D9BB}"/>
-              </a:ext>
-            </a:extLst>
-          </p:cNvPr>
-          <p:cNvSpPr txBox="1"/>
-          <p:nvPr/>
-        </p:nvSpPr>
-        <p:spPr>
-          <a:xfrm>
-            <a:off x="4749800" y="3911600"/>
-            <a:ext cx="2387600" cy="369332"/>
-          </a:xfrm>
-          <a:prstGeom prst="rect">
-            <a:avLst/>
-          </a:prstGeom>
-          <a:noFill/>
-        </p:spPr>
-        <p:txBody>
-          <a:bodyPr vert="horz" wrap="square" lIns="0" tIns="0" rIns="0" bIns="0" rtlCol="0">
-            <a:noAutofit/>
-          </a:bodyPr>
-          <a:lstStyle/>
-          <a:p>
-            <a:r>
-              <a:rPr lang="es-ES" b="1">
-                <a:solidFill>
-                  <a:srgbClr val="DBA14D"/>
-                </a:solidFill>
-                <a:latin typeface="Segoe UI" panose="020B0502040204020203" pitchFamily="34" charset="0"/>
-              </a:rPr>
-              <a:t>Cliente tecnico</a:t>
-            </a:r>
-          </a:p>
-        </p:txBody>
-      </p:sp>
-      <p:sp>
-        <p:nvSpPr>
-          <p:cNvPr id="16" name="CuadroTexto 15">
-            <a:extLst>
-              <a:ext uri="{FF2B5EF4-FFF2-40B4-BE49-F238E27FC236}">
-                <a16:creationId xmlns:a16="http://schemas.microsoft.com/office/drawing/2014/main" id="{4F2DAF3C-8BE2-7F1A-57C2-ADBF9959115C}"/>
-              </a:ext>
-            </a:extLst>
-          </p:cNvPr>
-          <p:cNvSpPr txBox="1"/>
-          <p:nvPr/>
-        </p:nvSpPr>
-        <p:spPr>
-          <a:xfrm>
-            <a:off x="4749800" y="4267200"/>
-            <a:ext cx="2540000" cy="369332"/>
-          </a:xfrm>
-          <a:prstGeom prst="rect">
-            <a:avLst/>
-          </a:prstGeom>
-          <a:noFill/>
-        </p:spPr>
-        <p:txBody>
-          <a:bodyPr vert="horz" wrap="square" lIns="0" tIns="0" rIns="0" bIns="0" rtlCol="0">
-            <a:noAutofit/>
-          </a:bodyPr>
-          <a:lstStyle/>
-          <a:p>
-            <a:r>
-              <a:rPr lang="es-ES" sz="1300">
-                <a:solidFill>
-                  <a:srgbClr val="1F2937"/>
-                </a:solidFill>
-                <a:latin typeface="Segoe UI" panose="020B0502040204020203" pitchFamily="34" charset="0"/>
-              </a:rPr>
-              <a:t>Ampliar Agora Desktop sin mezclar soporte con negocio.</a:t>
-            </a:r>
-          </a:p>
-        </p:txBody>
-      </p:sp>
-      <p:sp>
-        <p:nvSpPr>
-          <p:cNvPr id="17" name="CuadroTexto 16">
-            <a:extLst>
-              <a:ext uri="{FF2B5EF4-FFF2-40B4-BE49-F238E27FC236}">
-                <a16:creationId xmlns:a16="http://schemas.microsoft.com/office/drawing/2014/main" id="{906CD9C8-797A-CC5E-A038-D4993AE5578C}"/>
-              </a:ext>
-            </a:extLst>
-          </p:cNvPr>
-          <p:cNvSpPr txBox="1"/>
-          <p:nvPr/>
-        </p:nvSpPr>
-        <p:spPr>
-          <a:xfrm>
-            <a:off x="1016000" y="5257800"/>
-            <a:ext cx="9652000" cy="369332"/>
+            <a:off x="5969000" y="3886200"/>
+            <a:ext cx="4572000" cy="369332"/>
           </a:xfrm>
           <a:prstGeom prst="rect">
             <a:avLst/>
@@ -10129,49 +9948,13 @@
               <a:buChar char="•"/>
             </a:pPr>
             <a:r>
-              <a:rPr lang="es-ES" dirty="0">
+              <a:rPr lang="es-ES" sz="1700">
                 <a:solidFill>
                   <a:srgbClr val="C2CBD8"/>
                 </a:solidFill>
                 <a:latin typeface="Segoe UI" panose="020B0502040204020203" pitchFamily="34" charset="0"/>
               </a:rPr>
-              <a:t>La prioridad futura no es </a:t>
-            </a:r>
-            <a:r>
-              <a:rPr lang="es-ES" dirty="0" err="1">
-                <a:solidFill>
-                  <a:srgbClr val="C2CBD8"/>
-                </a:solidFill>
-                <a:latin typeface="Segoe UI" panose="020B0502040204020203" pitchFamily="34" charset="0"/>
-              </a:rPr>
-              <a:t>anadir</a:t>
-            </a:r>
-            <a:r>
-              <a:rPr lang="es-ES" dirty="0">
-                <a:solidFill>
-                  <a:srgbClr val="C2CBD8"/>
-                </a:solidFill>
-                <a:latin typeface="Segoe UI" panose="020B0502040204020203" pitchFamily="34" charset="0"/>
-              </a:rPr>
-              <a:t> </a:t>
-            </a:r>
-            <a:r>
-              <a:rPr lang="es-ES" dirty="0" err="1">
-                <a:solidFill>
-                  <a:srgbClr val="C2CBD8"/>
-                </a:solidFill>
-                <a:latin typeface="Segoe UI" panose="020B0502040204020203" pitchFamily="34" charset="0"/>
-              </a:rPr>
-              <a:t>modulos</a:t>
-            </a:r>
-            <a:r>
-              <a:rPr lang="es-ES" dirty="0">
-                <a:solidFill>
-                  <a:srgbClr val="C2CBD8"/>
-                </a:solidFill>
-                <a:latin typeface="Segoe UI" panose="020B0502040204020203" pitchFamily="34" charset="0"/>
-              </a:rPr>
-              <a:t> sin control, sino endurecer despliegue, seguridad y soporte.</a:t>
+              <a:t>Puede revisar solicitudes, convenios, asignaciones y mensajes.</a:t>
             </a:r>
           </a:p>
           <a:p>
@@ -10183,13 +9966,31 @@
               <a:buChar char="•"/>
             </a:pPr>
             <a:r>
-              <a:rPr lang="es-ES" dirty="0">
+              <a:rPr lang="es-ES" sz="1700">
                 <a:solidFill>
                   <a:srgbClr val="C2CBD8"/>
                 </a:solidFill>
                 <a:latin typeface="Segoe UI" panose="020B0502040204020203" pitchFamily="34" charset="0"/>
               </a:rPr>
-              <a:t>Las funciones secundarias quedan identificadas para justificar con claridad el recorte de alcance.</a:t>
+              <a:t>La empresa prueba el recorrido por /externo.</a:t>
+            </a:r>
+          </a:p>
+          <a:p>
+            <a:pPr marL="342900" indent="-342900">
+              <a:spcAft>
+                <a:spcPts val="1000"/>
+              </a:spcAft>
+              <a:buFont typeface="+mj-lt"/>
+              <a:buChar char="•"/>
+            </a:pPr>
+            <a:r>
+              <a:rPr lang="es-ES" sz="1700">
+                <a:solidFill>
+                  <a:srgbClr val="C2CBD8"/>
+                </a:solidFill>
+                <a:latin typeface="Segoe UI" panose="020B0502040204020203" pitchFamily="34" charset="0"/>
+              </a:rPr>
+              <a:t>El acceso remoto depende de que la VM siga activa.</a:t>
             </a:r>
           </a:p>
         </p:txBody>
@@ -10197,7 +9998,7 @@
     </p:spTree>
     <p:extLst>
       <p:ext uri="{BB962C8B-B14F-4D97-AF65-F5344CB8AC3E}">
-        <p14:creationId xmlns:p14="http://schemas.microsoft.com/office/powerpoint/2010/main" val="4049875441"/>
+        <p14:creationId xmlns:p14="http://schemas.microsoft.com/office/powerpoint/2010/main" val="1254394838"/>
       </p:ext>
     </p:extLst>
   </p:cSld>
@@ -10237,7 +10038,7 @@
           <p:cNvPr id="2" name="CuadroTexto 1">
             <a:extLst>
               <a:ext uri="{FF2B5EF4-FFF2-40B4-BE49-F238E27FC236}">
-                <a16:creationId xmlns:a16="http://schemas.microsoft.com/office/drawing/2014/main" id="{C18253C7-EFB2-10E0-B589-C27138953EE5}"/>
+                <a16:creationId xmlns:a16="http://schemas.microsoft.com/office/drawing/2014/main" id="{56BB0456-1227-3A08-8F8F-3F0ABE6E3E27}"/>
               </a:ext>
             </a:extLst>
           </p:cNvPr>
@@ -10267,7 +10068,7 @@
                 </a:solidFill>
                 <a:latin typeface="Segoe UI" panose="020B0502040204020203" pitchFamily="34" charset="0"/>
               </a:rPr>
-              <a:t>16 / LIMITACIONES</a:t>
+              <a:t>16 / ALCANCE Y FUTURO</a:t>
             </a:r>
           </a:p>
         </p:txBody>
@@ -10277,7 +10078,7 @@
           <p:cNvPr id="3" name="CuadroTexto 2">
             <a:extLst>
               <a:ext uri="{FF2B5EF4-FFF2-40B4-BE49-F238E27FC236}">
-                <a16:creationId xmlns:a16="http://schemas.microsoft.com/office/drawing/2014/main" id="{58DDD1E7-99F7-6ADF-A6B5-F59FC9C66B82}"/>
+                <a16:creationId xmlns:a16="http://schemas.microsoft.com/office/drawing/2014/main" id="{4C9E5584-D318-F28E-5BA2-20117BBB5A49}"/>
               </a:ext>
             </a:extLst>
           </p:cNvPr>
@@ -10307,7 +10108,7 @@
                 </a:solidFill>
                 <a:latin typeface="Segoe UI" panose="020B0502040204020203" pitchFamily="34" charset="0"/>
               </a:rPr>
-              <a:t>Que queda fuera de esta entrega</a:t>
+              <a:t>Que queda cerrado y que se deja para despues</a:t>
             </a:r>
           </a:p>
         </p:txBody>
@@ -10317,7 +10118,7 @@
           <p:cNvPr id="4" name="CuadroTexto 3">
             <a:extLst>
               <a:ext uri="{FF2B5EF4-FFF2-40B4-BE49-F238E27FC236}">
-                <a16:creationId xmlns:a16="http://schemas.microsoft.com/office/drawing/2014/main" id="{AFF1E1ED-9416-52A3-6F9D-B3426C9E10D1}"/>
+                <a16:creationId xmlns:a16="http://schemas.microsoft.com/office/drawing/2014/main" id="{E53D5A42-76ED-61FB-F8AD-CACB3CEBB570}"/>
               </a:ext>
             </a:extLst>
           </p:cNvPr>
@@ -10326,8 +10127,8 @@
         </p:nvSpPr>
         <p:spPr>
           <a:xfrm>
-            <a:off x="990600" y="2032000"/>
-            <a:ext cx="4572000" cy="369332"/>
+            <a:off x="558800" y="1422400"/>
+            <a:ext cx="9144000" cy="369332"/>
           </a:xfrm>
           <a:prstGeom prst="rect">
             <a:avLst/>
@@ -10340,93 +10141,14 @@
           </a:bodyPr>
           <a:lstStyle/>
           <a:p>
-            <a:pPr marL="457200" indent="-457200">
-              <a:spcAft>
-                <a:spcPts val="1000"/>
-              </a:spcAft>
-              <a:buFont typeface="+mj-lt"/>
-              <a:buChar char="•"/>
-            </a:pPr>
-            <a:r>
-              <a:rPr lang="es-ES" sz="1900">
+            <a:r>
+              <a:rPr lang="es-ES" sz="1500">
                 <a:solidFill>
                   <a:srgbClr val="C2CBD8"/>
                 </a:solidFill>
                 <a:latin typeface="Segoe UI" panose="020B0502040204020203" pitchFamily="34" charset="0"/>
               </a:rPr>
-              <a:t>Infraestructura mas gestionada y endurecida que la VM actual.</a:t>
-            </a:r>
-          </a:p>
-          <a:p>
-            <a:pPr marL="457200" indent="-457200">
-              <a:spcAft>
-                <a:spcPts val="1000"/>
-              </a:spcAft>
-              <a:buFont typeface="+mj-lt"/>
-              <a:buChar char="•"/>
-            </a:pPr>
-            <a:r>
-              <a:rPr lang="es-ES" sz="1900">
-                <a:solidFill>
-                  <a:srgbClr val="C2CBD8"/>
-                </a:solidFill>
-                <a:latin typeface="Segoe UI" panose="020B0502040204020203" pitchFamily="34" charset="0"/>
-              </a:rPr>
-              <a:t>Integracion con SSO o identidad corporativa.</a:t>
-            </a:r>
-          </a:p>
-          <a:p>
-            <a:pPr marL="457200" indent="-457200">
-              <a:spcAft>
-                <a:spcPts val="1000"/>
-              </a:spcAft>
-              <a:buFont typeface="+mj-lt"/>
-              <a:buChar char="•"/>
-            </a:pPr>
-            <a:r>
-              <a:rPr lang="es-ES" sz="1900">
-                <a:solidFill>
-                  <a:srgbClr val="C2CBD8"/>
-                </a:solidFill>
-                <a:latin typeface="Segoe UI" panose="020B0502040204020203" pitchFamily="34" charset="0"/>
-              </a:rPr>
-              <a:t>Firma electronica avanzada.</a:t>
-            </a:r>
-          </a:p>
-          <a:p>
-            <a:pPr marL="457200" indent="-457200">
-              <a:spcAft>
-                <a:spcPts val="1000"/>
-              </a:spcAft>
-              <a:buFont typeface="+mj-lt"/>
-              <a:buChar char="•"/>
-            </a:pPr>
-            <a:r>
-              <a:rPr lang="es-ES" sz="1900">
-                <a:solidFill>
-                  <a:srgbClr val="C2CBD8"/>
-                </a:solidFill>
-                <a:latin typeface="Segoe UI" panose="020B0502040204020203" pitchFamily="34" charset="0"/>
-              </a:rPr>
-              <a:t>Migracion del almacenamiento documental a un servicio gestionado independiente.</a:t>
-            </a:r>
-          </a:p>
-          <a:p>
-            <a:pPr marL="457200" indent="-457200">
-              <a:spcAft>
-                <a:spcPts val="1000"/>
-              </a:spcAft>
-              <a:buFont typeface="+mj-lt"/>
-              <a:buChar char="•"/>
-            </a:pPr>
-            <a:r>
-              <a:rPr lang="es-ES" sz="1900">
-                <a:solidFill>
-                  <a:srgbClr val="C2CBD8"/>
-                </a:solidFill>
-                <a:latin typeface="Segoe UI" panose="020B0502040204020203" pitchFamily="34" charset="0"/>
-              </a:rPr>
-              <a:t>Perfilado profundo de rendimiento en produccion.</a:t>
+              <a:t>El nucleo funcional y tecnico ya esta entregado; las mejoras futuras endurecen o amplian, pero no bloquean la defensa.</a:t>
             </a:r>
           </a:p>
         </p:txBody>
@@ -10436,7 +10158,7 @@
           <p:cNvPr id="5" name="Rectángulo: esquinas redondeadas 4">
             <a:extLst>
               <a:ext uri="{FF2B5EF4-FFF2-40B4-BE49-F238E27FC236}">
-                <a16:creationId xmlns:a16="http://schemas.microsoft.com/office/drawing/2014/main" id="{A8BEBF4F-918C-C137-3812-1568BD5203E2}"/>
+                <a16:creationId xmlns:a16="http://schemas.microsoft.com/office/drawing/2014/main" id="{B339FB9B-28AA-26A4-F64F-D69FE3C8FC20}"/>
               </a:ext>
             </a:extLst>
           </p:cNvPr>
@@ -10445,8 +10167,8 @@
         </p:nvSpPr>
         <p:spPr>
           <a:xfrm>
-            <a:off x="6807200" y="2057400"/>
-            <a:ext cx="4064000" cy="2667000"/>
+            <a:off x="711200" y="2159000"/>
+            <a:ext cx="3429000" cy="2717800"/>
           </a:xfrm>
           <a:prstGeom prst="roundRect">
             <a:avLst/>
@@ -10490,7 +10212,7 @@
           <p:cNvPr id="6" name="CuadroTexto 5">
             <a:extLst>
               <a:ext uri="{FF2B5EF4-FFF2-40B4-BE49-F238E27FC236}">
-                <a16:creationId xmlns:a16="http://schemas.microsoft.com/office/drawing/2014/main" id="{E669A745-4761-2441-85D9-0FAF3DE8A941}"/>
+                <a16:creationId xmlns:a16="http://schemas.microsoft.com/office/drawing/2014/main" id="{4A14DA3B-170E-6D8E-5F7D-4904D0B98605}"/>
               </a:ext>
             </a:extLst>
           </p:cNvPr>
@@ -10499,8 +10221,8 @@
         </p:nvSpPr>
         <p:spPr>
           <a:xfrm>
-            <a:off x="7213600" y="2438400"/>
-            <a:ext cx="3302000" cy="369332"/>
+            <a:off x="1016000" y="2438400"/>
+            <a:ext cx="2667000" cy="369332"/>
           </a:xfrm>
           <a:prstGeom prst="rect">
             <a:avLst/>
@@ -10520,7 +10242,7 @@
                 </a:solidFill>
                 <a:latin typeface="Segoe UI" panose="020B0502040204020203" pitchFamily="34" charset="0"/>
               </a:rPr>
-              <a:t>Siguiente iteracion</a:t>
+              <a:t>Cerrado en esta entrega</a:t>
             </a:r>
           </a:p>
         </p:txBody>
@@ -10530,7 +10252,7 @@
           <p:cNvPr id="7" name="CuadroTexto 6">
             <a:extLst>
               <a:ext uri="{FF2B5EF4-FFF2-40B4-BE49-F238E27FC236}">
-                <a16:creationId xmlns:a16="http://schemas.microsoft.com/office/drawing/2014/main" id="{39B88D6F-836A-7192-E641-926670222561}"/>
+                <a16:creationId xmlns:a16="http://schemas.microsoft.com/office/drawing/2014/main" id="{5CF6AC99-8002-219E-1EEC-23FF7BE72F99}"/>
               </a:ext>
             </a:extLst>
           </p:cNvPr>
@@ -10539,8 +10261,8 @@
         </p:nvSpPr>
         <p:spPr>
           <a:xfrm>
-            <a:off x="7213600" y="3098800"/>
-            <a:ext cx="3111500" cy="369332"/>
+            <a:off x="1041400" y="2946400"/>
+            <a:ext cx="2692400" cy="369332"/>
           </a:xfrm>
           <a:prstGeom prst="rect">
             <a:avLst/>
@@ -10553,14 +10275,542 @@
           </a:bodyPr>
           <a:lstStyle/>
           <a:p>
-            <a:r>
-              <a:rPr lang="es-ES" sz="2300" b="1">
+            <a:pPr marL="342900" indent="-342900">
+              <a:spcAft>
+                <a:spcPts val="1000"/>
+              </a:spcAft>
+              <a:buFont typeface="+mj-lt"/>
+              <a:buChar char="•"/>
+            </a:pPr>
+            <a:r>
+              <a:rPr lang="es-ES" sz="1400">
                 <a:solidFill>
                   <a:srgbClr val="F6F8FC"/>
                 </a:solidFill>
                 <a:latin typeface="Segoe UI" panose="020B0502040204020203" pitchFamily="34" charset="0"/>
               </a:rPr>
-              <a:t>Despliegue estable, dominio propio, base de datos de servidor y seguridad endurecida.</a:t>
+              <a:t>Portales /app y /externo bajo HTTPS.</a:t>
+            </a:r>
+          </a:p>
+          <a:p>
+            <a:pPr marL="342900" indent="-342900">
+              <a:spcAft>
+                <a:spcPts val="1000"/>
+              </a:spcAft>
+              <a:buFont typeface="+mj-lt"/>
+              <a:buChar char="•"/>
+            </a:pPr>
+            <a:r>
+              <a:rPr lang="es-ES" sz="1400">
+                <a:solidFill>
+                  <a:srgbClr val="F6F8FC"/>
+                </a:solidFill>
+                <a:latin typeface="Segoe UI" panose="020B0502040204020203" pitchFamily="34" charset="0"/>
+              </a:rPr>
+              <a:t>Correo real, documentos, chat y exportacion.</a:t>
+            </a:r>
+          </a:p>
+          <a:p>
+            <a:pPr marL="342900" indent="-342900">
+              <a:spcAft>
+                <a:spcPts val="1000"/>
+              </a:spcAft>
+              <a:buFont typeface="+mj-lt"/>
+              <a:buChar char="•"/>
+            </a:pPr>
+            <a:r>
+              <a:rPr lang="es-ES" sz="1400">
+                <a:solidFill>
+                  <a:srgbClr val="F6F8FC"/>
+                </a:solidFill>
+                <a:latin typeface="Segoe UI" panose="020B0502040204020203" pitchFamily="34" charset="0"/>
+              </a:rPr>
+              <a:t>Agora Desktop local/cloud como consola tecnica.</a:t>
+            </a:r>
+          </a:p>
+          <a:p>
+            <a:pPr marL="342900" indent="-342900">
+              <a:spcAft>
+                <a:spcPts val="1000"/>
+              </a:spcAft>
+              <a:buFont typeface="+mj-lt"/>
+              <a:buChar char="•"/>
+            </a:pPr>
+            <a:r>
+              <a:rPr lang="es-ES" sz="1400">
+                <a:solidFill>
+                  <a:srgbClr val="F6F8FC"/>
+                </a:solidFill>
+                <a:latin typeface="Segoe UI" panose="020B0502040204020203" pitchFamily="34" charset="0"/>
+              </a:rPr>
+              <a:t>VM publica con arranque automatico y URL efectiva visible.</a:t>
+            </a:r>
+          </a:p>
+        </p:txBody>
+      </p:sp>
+      <p:sp>
+        <p:nvSpPr>
+          <p:cNvPr id="8" name="Rectángulo: esquinas redondeadas 7">
+            <a:extLst>
+              <a:ext uri="{FF2B5EF4-FFF2-40B4-BE49-F238E27FC236}">
+                <a16:creationId xmlns:a16="http://schemas.microsoft.com/office/drawing/2014/main" id="{AD51FB0C-AA30-0C7D-E5F7-BA6ACF8D915F}"/>
+              </a:ext>
+            </a:extLst>
+          </p:cNvPr>
+          <p:cNvSpPr/>
+          <p:nvPr/>
+        </p:nvSpPr>
+        <p:spPr>
+          <a:xfrm>
+            <a:off x="4521200" y="2235200"/>
+            <a:ext cx="3098800" cy="1219200"/>
+          </a:xfrm>
+          <a:prstGeom prst="roundRect">
+            <a:avLst/>
+          </a:prstGeom>
+          <a:solidFill>
+            <a:srgbClr val="F7FAFC"/>
+          </a:solidFill>
+          <a:ln w="12700">
+            <a:solidFill>
+              <a:srgbClr val="DDE5EE"/>
+            </a:solidFill>
+          </a:ln>
+        </p:spPr>
+        <p:style>
+          <a:lnRef idx="2">
+            <a:schemeClr val="accent1">
+              <a:shade val="15000"/>
+            </a:schemeClr>
+          </a:lnRef>
+          <a:fillRef idx="1">
+            <a:schemeClr val="accent1"/>
+          </a:fillRef>
+          <a:effectRef idx="0">
+            <a:schemeClr val="accent1"/>
+          </a:effectRef>
+          <a:fontRef idx="minor">
+            <a:schemeClr val="lt1"/>
+          </a:fontRef>
+        </p:style>
+        <p:txBody>
+          <a:bodyPr rtlCol="0" anchor="ctr"/>
+          <a:lstStyle/>
+          <a:p>
+            <a:pPr algn="ctr"/>
+            <a:endParaRPr lang="es-ES"/>
+          </a:p>
+        </p:txBody>
+      </p:sp>
+      <p:sp>
+        <p:nvSpPr>
+          <p:cNvPr id="9" name="CuadroTexto 8">
+            <a:extLst>
+              <a:ext uri="{FF2B5EF4-FFF2-40B4-BE49-F238E27FC236}">
+                <a16:creationId xmlns:a16="http://schemas.microsoft.com/office/drawing/2014/main" id="{A61C83DA-B798-196F-D2FF-E2B025FD353B}"/>
+              </a:ext>
+            </a:extLst>
+          </p:cNvPr>
+          <p:cNvSpPr txBox="1"/>
+          <p:nvPr/>
+        </p:nvSpPr>
+        <p:spPr>
+          <a:xfrm>
+            <a:off x="4749800" y="2413000"/>
+            <a:ext cx="2387600" cy="369332"/>
+          </a:xfrm>
+          <a:prstGeom prst="rect">
+            <a:avLst/>
+          </a:prstGeom>
+          <a:noFill/>
+        </p:spPr>
+        <p:txBody>
+          <a:bodyPr vert="horz" wrap="square" lIns="0" tIns="0" rIns="0" bIns="0" rtlCol="0">
+            <a:noAutofit/>
+          </a:bodyPr>
+          <a:lstStyle/>
+          <a:p>
+            <a:r>
+              <a:rPr lang="es-ES" b="1">
+                <a:solidFill>
+                  <a:srgbClr val="41A772"/>
+                </a:solidFill>
+                <a:latin typeface="Segoe UI" panose="020B0502040204020203" pitchFamily="34" charset="0"/>
+              </a:rPr>
+              <a:t>Dominio propio</a:t>
+            </a:r>
+          </a:p>
+        </p:txBody>
+      </p:sp>
+      <p:sp>
+        <p:nvSpPr>
+          <p:cNvPr id="10" name="CuadroTexto 9">
+            <a:extLst>
+              <a:ext uri="{FF2B5EF4-FFF2-40B4-BE49-F238E27FC236}">
+                <a16:creationId xmlns:a16="http://schemas.microsoft.com/office/drawing/2014/main" id="{BF18BBE8-0B69-7C0A-3FFF-97B340EE099A}"/>
+              </a:ext>
+            </a:extLst>
+          </p:cNvPr>
+          <p:cNvSpPr txBox="1"/>
+          <p:nvPr/>
+        </p:nvSpPr>
+        <p:spPr>
+          <a:xfrm>
+            <a:off x="4749800" y="2768600"/>
+            <a:ext cx="2540000" cy="369332"/>
+          </a:xfrm>
+          <a:prstGeom prst="rect">
+            <a:avLst/>
+          </a:prstGeom>
+          <a:noFill/>
+        </p:spPr>
+        <p:txBody>
+          <a:bodyPr vert="horz" wrap="square" lIns="0" tIns="0" rIns="0" bIns="0" rtlCol="0">
+            <a:noAutofit/>
+          </a:bodyPr>
+          <a:lstStyle/>
+          <a:p>
+            <a:r>
+              <a:rPr lang="es-ES" sz="1300">
+                <a:solidFill>
+                  <a:srgbClr val="1F2937"/>
+                </a:solidFill>
+                <a:latin typeface="Segoe UI" panose="020B0502040204020203" pitchFamily="34" charset="0"/>
+              </a:rPr>
+              <a:t>Sustituir nip.io por dominio institucional y reforzar TLS.</a:t>
+            </a:r>
+          </a:p>
+        </p:txBody>
+      </p:sp>
+      <p:sp>
+        <p:nvSpPr>
+          <p:cNvPr id="11" name="Rectángulo: esquinas redondeadas 10">
+            <a:extLst>
+              <a:ext uri="{FF2B5EF4-FFF2-40B4-BE49-F238E27FC236}">
+                <a16:creationId xmlns:a16="http://schemas.microsoft.com/office/drawing/2014/main" id="{F6C38C54-FAAB-03F5-021D-661554B38201}"/>
+              </a:ext>
+            </a:extLst>
+          </p:cNvPr>
+          <p:cNvSpPr/>
+          <p:nvPr/>
+        </p:nvSpPr>
+        <p:spPr>
+          <a:xfrm>
+            <a:off x="7975600" y="2235200"/>
+            <a:ext cx="3098800" cy="1219200"/>
+          </a:xfrm>
+          <a:prstGeom prst="roundRect">
+            <a:avLst/>
+          </a:prstGeom>
+          <a:solidFill>
+            <a:srgbClr val="F7FAFC"/>
+          </a:solidFill>
+          <a:ln w="12700">
+            <a:solidFill>
+              <a:srgbClr val="DDE5EE"/>
+            </a:solidFill>
+          </a:ln>
+        </p:spPr>
+        <p:style>
+          <a:lnRef idx="2">
+            <a:schemeClr val="accent1">
+              <a:shade val="15000"/>
+            </a:schemeClr>
+          </a:lnRef>
+          <a:fillRef idx="1">
+            <a:schemeClr val="accent1"/>
+          </a:fillRef>
+          <a:effectRef idx="0">
+            <a:schemeClr val="accent1"/>
+          </a:effectRef>
+          <a:fontRef idx="minor">
+            <a:schemeClr val="lt1"/>
+          </a:fontRef>
+        </p:style>
+        <p:txBody>
+          <a:bodyPr rtlCol="0" anchor="ctr"/>
+          <a:lstStyle/>
+          <a:p>
+            <a:pPr algn="ctr"/>
+            <a:endParaRPr lang="es-ES"/>
+          </a:p>
+        </p:txBody>
+      </p:sp>
+      <p:sp>
+        <p:nvSpPr>
+          <p:cNvPr id="12" name="CuadroTexto 11">
+            <a:extLst>
+              <a:ext uri="{FF2B5EF4-FFF2-40B4-BE49-F238E27FC236}">
+                <a16:creationId xmlns:a16="http://schemas.microsoft.com/office/drawing/2014/main" id="{5C4F3807-72A4-8E9F-4117-B4B84FC7DE4F}"/>
+              </a:ext>
+            </a:extLst>
+          </p:cNvPr>
+          <p:cNvSpPr txBox="1"/>
+          <p:nvPr/>
+        </p:nvSpPr>
+        <p:spPr>
+          <a:xfrm>
+            <a:off x="8204200" y="2413000"/>
+            <a:ext cx="2387600" cy="369332"/>
+          </a:xfrm>
+          <a:prstGeom prst="rect">
+            <a:avLst/>
+          </a:prstGeom>
+          <a:noFill/>
+        </p:spPr>
+        <p:txBody>
+          <a:bodyPr vert="horz" wrap="square" lIns="0" tIns="0" rIns="0" bIns="0" rtlCol="0">
+            <a:noAutofit/>
+          </a:bodyPr>
+          <a:lstStyle/>
+          <a:p>
+            <a:r>
+              <a:rPr lang="es-ES" b="1">
+                <a:solidFill>
+                  <a:srgbClr val="49B1D2"/>
+                </a:solidFill>
+                <a:latin typeface="Segoe UI" panose="020B0502040204020203" pitchFamily="34" charset="0"/>
+              </a:rPr>
+              <a:t>Servicios gestionados</a:t>
+            </a:r>
+          </a:p>
+        </p:txBody>
+      </p:sp>
+      <p:sp>
+        <p:nvSpPr>
+          <p:cNvPr id="13" name="CuadroTexto 12">
+            <a:extLst>
+              <a:ext uri="{FF2B5EF4-FFF2-40B4-BE49-F238E27FC236}">
+                <a16:creationId xmlns:a16="http://schemas.microsoft.com/office/drawing/2014/main" id="{3B1C3D3B-6E20-6E4D-2F9F-76A4F3FC0219}"/>
+              </a:ext>
+            </a:extLst>
+          </p:cNvPr>
+          <p:cNvSpPr txBox="1"/>
+          <p:nvPr/>
+        </p:nvSpPr>
+        <p:spPr>
+          <a:xfrm>
+            <a:off x="8204200" y="2768600"/>
+            <a:ext cx="2540000" cy="369332"/>
+          </a:xfrm>
+          <a:prstGeom prst="rect">
+            <a:avLst/>
+          </a:prstGeom>
+          <a:noFill/>
+        </p:spPr>
+        <p:txBody>
+          <a:bodyPr vert="horz" wrap="square" lIns="0" tIns="0" rIns="0" bIns="0" rtlCol="0">
+            <a:noAutofit/>
+          </a:bodyPr>
+          <a:lstStyle/>
+          <a:p>
+            <a:r>
+              <a:rPr lang="es-ES" sz="1300">
+                <a:solidFill>
+                  <a:srgbClr val="1F2937"/>
+                </a:solidFill>
+                <a:latin typeface="Segoe UI" panose="020B0502040204020203" pitchFamily="34" charset="0"/>
+              </a:rPr>
+              <a:t>Migrar documentos, backups y observabilidad a servicios gestionados fuera de la VM.</a:t>
+            </a:r>
+          </a:p>
+        </p:txBody>
+      </p:sp>
+      <p:sp>
+        <p:nvSpPr>
+          <p:cNvPr id="14" name="Rectángulo: esquinas redondeadas 13">
+            <a:extLst>
+              <a:ext uri="{FF2B5EF4-FFF2-40B4-BE49-F238E27FC236}">
+                <a16:creationId xmlns:a16="http://schemas.microsoft.com/office/drawing/2014/main" id="{6EBE8F2A-EB8C-9F9E-B788-E6D9672FEFEE}"/>
+              </a:ext>
+            </a:extLst>
+          </p:cNvPr>
+          <p:cNvSpPr/>
+          <p:nvPr/>
+        </p:nvSpPr>
+        <p:spPr>
+          <a:xfrm>
+            <a:off x="4521200" y="3733800"/>
+            <a:ext cx="3098800" cy="1219200"/>
+          </a:xfrm>
+          <a:prstGeom prst="roundRect">
+            <a:avLst/>
+          </a:prstGeom>
+          <a:solidFill>
+            <a:srgbClr val="F7FAFC"/>
+          </a:solidFill>
+          <a:ln w="12700">
+            <a:solidFill>
+              <a:srgbClr val="DDE5EE"/>
+            </a:solidFill>
+          </a:ln>
+        </p:spPr>
+        <p:style>
+          <a:lnRef idx="2">
+            <a:schemeClr val="accent1">
+              <a:shade val="15000"/>
+            </a:schemeClr>
+          </a:lnRef>
+          <a:fillRef idx="1">
+            <a:schemeClr val="accent1"/>
+          </a:fillRef>
+          <a:effectRef idx="0">
+            <a:schemeClr val="accent1"/>
+          </a:effectRef>
+          <a:fontRef idx="minor">
+            <a:schemeClr val="lt1"/>
+          </a:fontRef>
+        </p:style>
+        <p:txBody>
+          <a:bodyPr rtlCol="0" anchor="ctr"/>
+          <a:lstStyle/>
+          <a:p>
+            <a:pPr algn="ctr"/>
+            <a:endParaRPr lang="es-ES"/>
+          </a:p>
+        </p:txBody>
+      </p:sp>
+      <p:sp>
+        <p:nvSpPr>
+          <p:cNvPr id="15" name="CuadroTexto 14">
+            <a:extLst>
+              <a:ext uri="{FF2B5EF4-FFF2-40B4-BE49-F238E27FC236}">
+                <a16:creationId xmlns:a16="http://schemas.microsoft.com/office/drawing/2014/main" id="{DD66F528-F585-2390-50A6-80FCD44B2464}"/>
+              </a:ext>
+            </a:extLst>
+          </p:cNvPr>
+          <p:cNvSpPr txBox="1"/>
+          <p:nvPr/>
+        </p:nvSpPr>
+        <p:spPr>
+          <a:xfrm>
+            <a:off x="4749800" y="3911600"/>
+            <a:ext cx="2387600" cy="369332"/>
+          </a:xfrm>
+          <a:prstGeom prst="rect">
+            <a:avLst/>
+          </a:prstGeom>
+          <a:noFill/>
+        </p:spPr>
+        <p:txBody>
+          <a:bodyPr vert="horz" wrap="square" lIns="0" tIns="0" rIns="0" bIns="0" rtlCol="0">
+            <a:noAutofit/>
+          </a:bodyPr>
+          <a:lstStyle/>
+          <a:p>
+            <a:r>
+              <a:rPr lang="es-ES" b="1">
+                <a:solidFill>
+                  <a:srgbClr val="DBA14D"/>
+                </a:solidFill>
+                <a:latin typeface="Segoe UI" panose="020B0502040204020203" pitchFamily="34" charset="0"/>
+              </a:rPr>
+              <a:t>Cliente tecnico</a:t>
+            </a:r>
+          </a:p>
+        </p:txBody>
+      </p:sp>
+      <p:sp>
+        <p:nvSpPr>
+          <p:cNvPr id="16" name="CuadroTexto 15">
+            <a:extLst>
+              <a:ext uri="{FF2B5EF4-FFF2-40B4-BE49-F238E27FC236}">
+                <a16:creationId xmlns:a16="http://schemas.microsoft.com/office/drawing/2014/main" id="{ED18CF76-3399-ACE5-E3D9-475ADB8C8F4A}"/>
+              </a:ext>
+            </a:extLst>
+          </p:cNvPr>
+          <p:cNvSpPr txBox="1"/>
+          <p:nvPr/>
+        </p:nvSpPr>
+        <p:spPr>
+          <a:xfrm>
+            <a:off x="4749800" y="4267200"/>
+            <a:ext cx="2540000" cy="369332"/>
+          </a:xfrm>
+          <a:prstGeom prst="rect">
+            <a:avLst/>
+          </a:prstGeom>
+          <a:noFill/>
+        </p:spPr>
+        <p:txBody>
+          <a:bodyPr vert="horz" wrap="square" lIns="0" tIns="0" rIns="0" bIns="0" rtlCol="0">
+            <a:noAutofit/>
+          </a:bodyPr>
+          <a:lstStyle/>
+          <a:p>
+            <a:r>
+              <a:rPr lang="es-ES" sz="1300">
+                <a:solidFill>
+                  <a:srgbClr val="1F2937"/>
+                </a:solidFill>
+                <a:latin typeface="Segoe UI" panose="020B0502040204020203" pitchFamily="34" charset="0"/>
+              </a:rPr>
+              <a:t>Ampliar Agora Desktop sin mezclar soporte con negocio.</a:t>
+            </a:r>
+          </a:p>
+        </p:txBody>
+      </p:sp>
+      <p:sp>
+        <p:nvSpPr>
+          <p:cNvPr id="17" name="CuadroTexto 16">
+            <a:extLst>
+              <a:ext uri="{FF2B5EF4-FFF2-40B4-BE49-F238E27FC236}">
+                <a16:creationId xmlns:a16="http://schemas.microsoft.com/office/drawing/2014/main" id="{69ED621B-D5AA-F344-EE89-13DEC67FAA87}"/>
+              </a:ext>
+            </a:extLst>
+          </p:cNvPr>
+          <p:cNvSpPr txBox="1"/>
+          <p:nvPr/>
+        </p:nvSpPr>
+        <p:spPr>
+          <a:xfrm>
+            <a:off x="1016000" y="5257800"/>
+            <a:ext cx="9652000" cy="369332"/>
+          </a:xfrm>
+          <a:prstGeom prst="rect">
+            <a:avLst/>
+          </a:prstGeom>
+          <a:noFill/>
+        </p:spPr>
+        <p:txBody>
+          <a:bodyPr vert="horz" wrap="square" lIns="0" tIns="0" rIns="0" bIns="0" rtlCol="0">
+            <a:noAutofit/>
+          </a:bodyPr>
+          <a:lstStyle/>
+          <a:p>
+            <a:pPr marL="342900" indent="-342900">
+              <a:spcAft>
+                <a:spcPts val="1000"/>
+              </a:spcAft>
+              <a:buFont typeface="+mj-lt"/>
+              <a:buChar char="•"/>
+            </a:pPr>
+            <a:r>
+              <a:rPr lang="es-ES">
+                <a:solidFill>
+                  <a:srgbClr val="C2CBD8"/>
+                </a:solidFill>
+                <a:latin typeface="Segoe UI" panose="020B0502040204020203" pitchFamily="34" charset="0"/>
+              </a:rPr>
+              <a:t>La prioridad futura no es anadir modulos sin control, sino endurecer despliegue, seguridad y soporte.</a:t>
+            </a:r>
+          </a:p>
+          <a:p>
+            <a:pPr marL="342900" indent="-342900">
+              <a:spcAft>
+                <a:spcPts val="1000"/>
+              </a:spcAft>
+              <a:buFont typeface="+mj-lt"/>
+              <a:buChar char="•"/>
+            </a:pPr>
+            <a:r>
+              <a:rPr lang="es-ES">
+                <a:solidFill>
+                  <a:srgbClr val="C2CBD8"/>
+                </a:solidFill>
+                <a:latin typeface="Segoe UI" panose="020B0502040204020203" pitchFamily="34" charset="0"/>
+              </a:rPr>
+              <a:t>Las funciones secundarias quedan identificadas para justificar con claridad el recorte de alcance.</a:t>
             </a:r>
           </a:p>
         </p:txBody>
@@ -10568,7 +10818,7 @@
     </p:spTree>
     <p:extLst>
       <p:ext uri="{BB962C8B-B14F-4D97-AF65-F5344CB8AC3E}">
-        <p14:creationId xmlns:p14="http://schemas.microsoft.com/office/powerpoint/2010/main" val="781664236"/>
+        <p14:creationId xmlns:p14="http://schemas.microsoft.com/office/powerpoint/2010/main" val="3825693380"/>
       </p:ext>
     </p:extLst>
   </p:cSld>
@@ -10608,7 +10858,7 @@
           <p:cNvPr id="2" name="CuadroTexto 1">
             <a:extLst>
               <a:ext uri="{FF2B5EF4-FFF2-40B4-BE49-F238E27FC236}">
-                <a16:creationId xmlns:a16="http://schemas.microsoft.com/office/drawing/2014/main" id="{E034BF39-A092-5745-3A23-6911D4BAFC69}"/>
+                <a16:creationId xmlns:a16="http://schemas.microsoft.com/office/drawing/2014/main" id="{C7606941-A505-6ED2-934F-0D1383A3BBD1}"/>
               </a:ext>
             </a:extLst>
           </p:cNvPr>
@@ -10638,7 +10888,7 @@
                 </a:solidFill>
                 <a:latin typeface="Segoe UI" panose="020B0502040204020203" pitchFamily="34" charset="0"/>
               </a:rPr>
-              <a:t>17 / CIERRE</a:t>
+              <a:t>17 / LIMITACIONES</a:t>
             </a:r>
           </a:p>
         </p:txBody>
@@ -10648,7 +10898,7 @@
           <p:cNvPr id="3" name="CuadroTexto 2">
             <a:extLst>
               <a:ext uri="{FF2B5EF4-FFF2-40B4-BE49-F238E27FC236}">
-                <a16:creationId xmlns:a16="http://schemas.microsoft.com/office/drawing/2014/main" id="{8D6F064D-675D-2228-A6CA-F6E18BC777FF}"/>
+                <a16:creationId xmlns:a16="http://schemas.microsoft.com/office/drawing/2014/main" id="{B066FCF9-48EC-E54F-1972-7B82A7AB4A5B}"/>
               </a:ext>
             </a:extLst>
           </p:cNvPr>
@@ -10678,7 +10928,7 @@
                 </a:solidFill>
                 <a:latin typeface="Segoe UI" panose="020B0502040204020203" pitchFamily="34" charset="0"/>
               </a:rPr>
-              <a:t>Resultado defendible</a:t>
+              <a:t>Que queda fuera de esta entrega</a:t>
             </a:r>
           </a:p>
         </p:txBody>
@@ -10688,7 +10938,7 @@
           <p:cNvPr id="4" name="CuadroTexto 3">
             <a:extLst>
               <a:ext uri="{FF2B5EF4-FFF2-40B4-BE49-F238E27FC236}">
-                <a16:creationId xmlns:a16="http://schemas.microsoft.com/office/drawing/2014/main" id="{916CBC62-9EB9-947C-12AA-BFAC3952FE55}"/>
+                <a16:creationId xmlns:a16="http://schemas.microsoft.com/office/drawing/2014/main" id="{A023BE0A-D744-FB56-DD43-06413E117DCF}"/>
               </a:ext>
             </a:extLst>
           </p:cNvPr>
@@ -10697,48 +10947,8 @@
         </p:nvSpPr>
         <p:spPr>
           <a:xfrm>
-            <a:off x="1168400" y="2006600"/>
-            <a:ext cx="9652000" cy="369332"/>
-          </a:xfrm>
-          <a:prstGeom prst="rect">
-            <a:avLst/>
-          </a:prstGeom>
-          <a:noFill/>
-        </p:spPr>
-        <p:txBody>
-          <a:bodyPr vert="horz" wrap="square" lIns="0" tIns="0" rIns="0" bIns="0" rtlCol="0">
-            <a:noAutofit/>
-          </a:bodyPr>
-          <a:lstStyle/>
-          <a:p>
-            <a:r>
-              <a:rPr lang="es-ES" sz="3000" b="1">
-                <a:solidFill>
-                  <a:srgbClr val="F6F8FC"/>
-                </a:solidFill>
-                <a:latin typeface="Segoe UI" panose="020B0502040204020203" pitchFamily="34" charset="0"/>
-              </a:rPr>
-              <a:t>El proyecto transforma una gestion dispersa en una plataforma web funcional, trazable y documentada para empresas colaboradoras y practicas de FP Dual.</a:t>
-            </a:r>
-          </a:p>
-        </p:txBody>
-      </p:sp>
-      <p:sp>
-        <p:nvSpPr>
-          <p:cNvPr id="5" name="CuadroTexto 4">
-            <a:extLst>
-              <a:ext uri="{FF2B5EF4-FFF2-40B4-BE49-F238E27FC236}">
-                <a16:creationId xmlns:a16="http://schemas.microsoft.com/office/drawing/2014/main" id="{BE0BB752-E2B0-C3F1-008D-07782614C645}"/>
-              </a:ext>
-            </a:extLst>
-          </p:cNvPr>
-          <p:cNvSpPr txBox="1"/>
-          <p:nvPr/>
-        </p:nvSpPr>
-        <p:spPr>
-          <a:xfrm>
-            <a:off x="1625600" y="4089400"/>
-            <a:ext cx="8763000" cy="369332"/>
+            <a:off x="990600" y="2032000"/>
+            <a:ext cx="4572000" cy="369332"/>
           </a:xfrm>
           <a:prstGeom prst="rect">
             <a:avLst/>
@@ -10765,7 +10975,7 @@
                 </a:solidFill>
                 <a:latin typeface="Segoe UI" panose="020B0502040204020203" pitchFamily="34" charset="0"/>
               </a:rPr>
-              <a:t>Problema real del centro.</a:t>
+              <a:t>Infraestructura mas gestionada y endurecida que la VM actual.</a:t>
             </a:r>
           </a:p>
           <a:p>
@@ -10783,7 +10993,7 @@
                 </a:solidFill>
                 <a:latin typeface="Segoe UI" panose="020B0502040204020203" pitchFamily="34" charset="0"/>
               </a:rPr>
-              <a:t>Arquitectura completa con backend, dos frontends y operacion local.</a:t>
+              <a:t>Integracion con SSO o identidad corporativa.</a:t>
             </a:r>
           </a:p>
           <a:p>
@@ -10801,8 +11011,98 @@
                 </a:solidFill>
                 <a:latin typeface="Segoe UI" panose="020B0502040204020203" pitchFamily="34" charset="0"/>
               </a:rPr>
-              <a:t>Validacion tecnica, empaquetado y demo preparados.</a:t>
-            </a:r>
+              <a:t>Firma electronica avanzada.</a:t>
+            </a:r>
+          </a:p>
+          <a:p>
+            <a:pPr marL="457200" indent="-457200">
+              <a:spcAft>
+                <a:spcPts val="1000"/>
+              </a:spcAft>
+              <a:buFont typeface="+mj-lt"/>
+              <a:buChar char="•"/>
+            </a:pPr>
+            <a:r>
+              <a:rPr lang="es-ES" sz="1900">
+                <a:solidFill>
+                  <a:srgbClr val="C2CBD8"/>
+                </a:solidFill>
+                <a:latin typeface="Segoe UI" panose="020B0502040204020203" pitchFamily="34" charset="0"/>
+              </a:rPr>
+              <a:t>Migracion del almacenamiento documental a un servicio gestionado independiente.</a:t>
+            </a:r>
+          </a:p>
+          <a:p>
+            <a:pPr marL="457200" indent="-457200">
+              <a:spcAft>
+                <a:spcPts val="1000"/>
+              </a:spcAft>
+              <a:buFont typeface="+mj-lt"/>
+              <a:buChar char="•"/>
+            </a:pPr>
+            <a:r>
+              <a:rPr lang="es-ES" sz="1900">
+                <a:solidFill>
+                  <a:srgbClr val="C2CBD8"/>
+                </a:solidFill>
+                <a:latin typeface="Segoe UI" panose="020B0502040204020203" pitchFamily="34" charset="0"/>
+              </a:rPr>
+              <a:t>Perfilado profundo de rendimiento en produccion.</a:t>
+            </a:r>
+          </a:p>
+        </p:txBody>
+      </p:sp>
+      <p:sp>
+        <p:nvSpPr>
+          <p:cNvPr id="5" name="Rectángulo: esquinas redondeadas 4">
+            <a:extLst>
+              <a:ext uri="{FF2B5EF4-FFF2-40B4-BE49-F238E27FC236}">
+                <a16:creationId xmlns:a16="http://schemas.microsoft.com/office/drawing/2014/main" id="{245CC601-BCA6-6610-E24B-53EE4F1C4E95}"/>
+              </a:ext>
+            </a:extLst>
+          </p:cNvPr>
+          <p:cNvSpPr/>
+          <p:nvPr/>
+        </p:nvSpPr>
+        <p:spPr>
+          <a:xfrm>
+            <a:off x="6807200" y="2057400"/>
+            <a:ext cx="4064000" cy="2667000"/>
+          </a:xfrm>
+          <a:prstGeom prst="roundRect">
+            <a:avLst/>
+          </a:prstGeom>
+          <a:solidFill>
+            <a:srgbClr val="1D2430"/>
+          </a:solidFill>
+          <a:ln w="12700">
+            <a:solidFill>
+              <a:srgbClr val="424E60"/>
+            </a:solidFill>
+          </a:ln>
+        </p:spPr>
+        <p:style>
+          <a:lnRef idx="2">
+            <a:schemeClr val="accent1">
+              <a:shade val="15000"/>
+            </a:schemeClr>
+          </a:lnRef>
+          <a:fillRef idx="1">
+            <a:schemeClr val="accent1"/>
+          </a:fillRef>
+          <a:effectRef idx="0">
+            <a:schemeClr val="accent1"/>
+          </a:effectRef>
+          <a:fontRef idx="minor">
+            <a:schemeClr val="lt1"/>
+          </a:fontRef>
+        </p:style>
+        <p:txBody>
+          <a:bodyPr rtlCol="0" anchor="ctr"/>
+          <a:lstStyle/>
+          <a:p>
+            <a:pPr algn="ctr"/>
+            <a:endParaRPr lang="es-ES"/>
           </a:p>
         </p:txBody>
       </p:sp>
@@ -10811,7 +11111,7 @@
           <p:cNvPr id="6" name="CuadroTexto 5">
             <a:extLst>
               <a:ext uri="{FF2B5EF4-FFF2-40B4-BE49-F238E27FC236}">
-                <a16:creationId xmlns:a16="http://schemas.microsoft.com/office/drawing/2014/main" id="{7A3273B5-4849-4B5A-FFAE-33F44768EA7E}"/>
+                <a16:creationId xmlns:a16="http://schemas.microsoft.com/office/drawing/2014/main" id="{62CC5A9E-C9D8-6C9E-2D75-97BD634AF3F4}"/>
               </a:ext>
             </a:extLst>
           </p:cNvPr>
@@ -10820,8 +11120,8 @@
         </p:nvSpPr>
         <p:spPr>
           <a:xfrm>
-            <a:off x="4191000" y="5943600"/>
-            <a:ext cx="3810000" cy="369332"/>
+            <a:off x="7213600" y="2438400"/>
+            <a:ext cx="3302000" cy="369332"/>
           </a:xfrm>
           <a:prstGeom prst="rect">
             <a:avLst/>
@@ -10835,13 +11135,53 @@
           <a:lstStyle/>
           <a:p>
             <a:r>
-              <a:rPr lang="es-ES" sz="2200" b="1">
+              <a:rPr lang="es-ES" sz="2000" b="1">
                 <a:solidFill>
                   <a:srgbClr val="DBA14D"/>
                 </a:solidFill>
                 <a:latin typeface="Segoe UI" panose="020B0502040204020203" pitchFamily="34" charset="0"/>
               </a:rPr>
-              <a:t>Demo y preguntas</a:t>
+              <a:t>Siguiente iteracion</a:t>
+            </a:r>
+          </a:p>
+        </p:txBody>
+      </p:sp>
+      <p:sp>
+        <p:nvSpPr>
+          <p:cNvPr id="7" name="CuadroTexto 6">
+            <a:extLst>
+              <a:ext uri="{FF2B5EF4-FFF2-40B4-BE49-F238E27FC236}">
+                <a16:creationId xmlns:a16="http://schemas.microsoft.com/office/drawing/2014/main" id="{63F7F66C-48D3-83AB-2669-E70F0B20B922}"/>
+              </a:ext>
+            </a:extLst>
+          </p:cNvPr>
+          <p:cNvSpPr txBox="1"/>
+          <p:nvPr/>
+        </p:nvSpPr>
+        <p:spPr>
+          <a:xfrm>
+            <a:off x="7213600" y="3098800"/>
+            <a:ext cx="3111500" cy="369332"/>
+          </a:xfrm>
+          <a:prstGeom prst="rect">
+            <a:avLst/>
+          </a:prstGeom>
+          <a:noFill/>
+        </p:spPr>
+        <p:txBody>
+          <a:bodyPr vert="horz" wrap="square" lIns="0" tIns="0" rIns="0" bIns="0" rtlCol="0">
+            <a:noAutofit/>
+          </a:bodyPr>
+          <a:lstStyle/>
+          <a:p>
+            <a:r>
+              <a:rPr lang="es-ES" sz="2300" b="1">
+                <a:solidFill>
+                  <a:srgbClr val="F6F8FC"/>
+                </a:solidFill>
+                <a:latin typeface="Segoe UI" panose="020B0502040204020203" pitchFamily="34" charset="0"/>
+              </a:rPr>
+              <a:t>Despliegue estable, dominio propio, base de datos de servidor y seguridad endurecida.</a:t>
             </a:r>
           </a:p>
         </p:txBody>
@@ -10849,7 +11189,288 @@
     </p:spTree>
     <p:extLst>
       <p:ext uri="{BB962C8B-B14F-4D97-AF65-F5344CB8AC3E}">
-        <p14:creationId xmlns:p14="http://schemas.microsoft.com/office/powerpoint/2010/main" val="3190663946"/>
+        <p14:creationId xmlns:p14="http://schemas.microsoft.com/office/powerpoint/2010/main" val="4208851980"/>
+      </p:ext>
+    </p:extLst>
+  </p:cSld>
+  <p:clrMapOvr>
+    <a:masterClrMapping/>
+  </p:clrMapOvr>
+</p:sld>
+</file>
+
+<file path=ppt/slides/slide19.xml><?xml version="1.0" encoding="utf-8"?>
+<p:sld xmlns:a="http://schemas.openxmlformats.org/drawingml/2006/main" xmlns:r="http://schemas.openxmlformats.org/officeDocument/2006/relationships" xmlns:p="http://schemas.openxmlformats.org/presentationml/2006/main">
+  <p:cSld>
+    <p:bg>
+      <p:bgPr>
+        <a:solidFill>
+          <a:srgbClr val="0F1218"/>
+        </a:solidFill>
+        <a:effectLst/>
+      </p:bgPr>
+    </p:bg>
+    <p:spTree>
+      <p:nvGrpSpPr>
+        <p:cNvPr id="1" name=""/>
+        <p:cNvGrpSpPr/>
+        <p:nvPr/>
+      </p:nvGrpSpPr>
+      <p:grpSpPr>
+        <a:xfrm>
+          <a:off x="0" y="0"/>
+          <a:ext cx="0" cy="0"/>
+          <a:chOff x="0" y="0"/>
+          <a:chExt cx="0" cy="0"/>
+        </a:xfrm>
+      </p:grpSpPr>
+      <p:sp>
+        <p:nvSpPr>
+          <p:cNvPr id="2" name="CuadroTexto 1">
+            <a:extLst>
+              <a:ext uri="{FF2B5EF4-FFF2-40B4-BE49-F238E27FC236}">
+                <a16:creationId xmlns:a16="http://schemas.microsoft.com/office/drawing/2014/main" id="{C6A619A8-D1AE-CD0C-B919-E1F9EEA06B2D}"/>
+              </a:ext>
+            </a:extLst>
+          </p:cNvPr>
+          <p:cNvSpPr txBox="1"/>
+          <p:nvPr/>
+        </p:nvSpPr>
+        <p:spPr>
+          <a:xfrm>
+            <a:off x="558800" y="330200"/>
+            <a:ext cx="10414000" cy="369332"/>
+          </a:xfrm>
+          <a:prstGeom prst="rect">
+            <a:avLst/>
+          </a:prstGeom>
+          <a:noFill/>
+        </p:spPr>
+        <p:txBody>
+          <a:bodyPr vert="horz" wrap="square" lIns="0" tIns="0" rIns="0" bIns="0" rtlCol="0">
+            <a:noAutofit/>
+          </a:bodyPr>
+          <a:lstStyle/>
+          <a:p>
+            <a:r>
+              <a:rPr lang="es-ES" sz="1200" b="1">
+                <a:solidFill>
+                  <a:srgbClr val="DBA14D"/>
+                </a:solidFill>
+                <a:latin typeface="Segoe UI" panose="020B0502040204020203" pitchFamily="34" charset="0"/>
+              </a:rPr>
+              <a:t>18 / CIERRE</a:t>
+            </a:r>
+          </a:p>
+        </p:txBody>
+      </p:sp>
+      <p:sp>
+        <p:nvSpPr>
+          <p:cNvPr id="3" name="CuadroTexto 2">
+            <a:extLst>
+              <a:ext uri="{FF2B5EF4-FFF2-40B4-BE49-F238E27FC236}">
+                <a16:creationId xmlns:a16="http://schemas.microsoft.com/office/drawing/2014/main" id="{6FF3EE67-2D7B-9873-CD21-3552495D1153}"/>
+              </a:ext>
+            </a:extLst>
+          </p:cNvPr>
+          <p:cNvSpPr txBox="1"/>
+          <p:nvPr/>
+        </p:nvSpPr>
+        <p:spPr>
+          <a:xfrm>
+            <a:off x="558800" y="685800"/>
+            <a:ext cx="9906000" cy="369332"/>
+          </a:xfrm>
+          <a:prstGeom prst="rect">
+            <a:avLst/>
+          </a:prstGeom>
+          <a:noFill/>
+        </p:spPr>
+        <p:txBody>
+          <a:bodyPr vert="horz" wrap="square" lIns="0" tIns="0" rIns="0" bIns="0" rtlCol="0">
+            <a:noAutofit/>
+          </a:bodyPr>
+          <a:lstStyle/>
+          <a:p>
+            <a:r>
+              <a:rPr lang="es-ES" sz="3000" b="1">
+                <a:solidFill>
+                  <a:srgbClr val="F6F8FC"/>
+                </a:solidFill>
+                <a:latin typeface="Segoe UI" panose="020B0502040204020203" pitchFamily="34" charset="0"/>
+              </a:rPr>
+              <a:t>Resultado defendible</a:t>
+            </a:r>
+          </a:p>
+        </p:txBody>
+      </p:sp>
+      <p:sp>
+        <p:nvSpPr>
+          <p:cNvPr id="4" name="CuadroTexto 3">
+            <a:extLst>
+              <a:ext uri="{FF2B5EF4-FFF2-40B4-BE49-F238E27FC236}">
+                <a16:creationId xmlns:a16="http://schemas.microsoft.com/office/drawing/2014/main" id="{0F8C8FC3-55E8-9635-BD7E-1CF95C71BA25}"/>
+              </a:ext>
+            </a:extLst>
+          </p:cNvPr>
+          <p:cNvSpPr txBox="1"/>
+          <p:nvPr/>
+        </p:nvSpPr>
+        <p:spPr>
+          <a:xfrm>
+            <a:off x="1168400" y="2006600"/>
+            <a:ext cx="9652000" cy="369332"/>
+          </a:xfrm>
+          <a:prstGeom prst="rect">
+            <a:avLst/>
+          </a:prstGeom>
+          <a:noFill/>
+        </p:spPr>
+        <p:txBody>
+          <a:bodyPr vert="horz" wrap="square" lIns="0" tIns="0" rIns="0" bIns="0" rtlCol="0">
+            <a:noAutofit/>
+          </a:bodyPr>
+          <a:lstStyle/>
+          <a:p>
+            <a:r>
+              <a:rPr lang="es-ES" sz="3000" b="1">
+                <a:solidFill>
+                  <a:srgbClr val="F6F8FC"/>
+                </a:solidFill>
+                <a:latin typeface="Segoe UI" panose="020B0502040204020203" pitchFamily="34" charset="0"/>
+              </a:rPr>
+              <a:t>El proyecto transforma una gestion dispersa en una plataforma web funcional, trazable y documentada para empresas colaboradoras y practicas de FP Dual.</a:t>
+            </a:r>
+          </a:p>
+        </p:txBody>
+      </p:sp>
+      <p:sp>
+        <p:nvSpPr>
+          <p:cNvPr id="5" name="CuadroTexto 4">
+            <a:extLst>
+              <a:ext uri="{FF2B5EF4-FFF2-40B4-BE49-F238E27FC236}">
+                <a16:creationId xmlns:a16="http://schemas.microsoft.com/office/drawing/2014/main" id="{A15759A4-892C-07B9-7559-C9A94383805B}"/>
+              </a:ext>
+            </a:extLst>
+          </p:cNvPr>
+          <p:cNvSpPr txBox="1"/>
+          <p:nvPr/>
+        </p:nvSpPr>
+        <p:spPr>
+          <a:xfrm>
+            <a:off x="1625600" y="4089400"/>
+            <a:ext cx="8763000" cy="369332"/>
+          </a:xfrm>
+          <a:prstGeom prst="rect">
+            <a:avLst/>
+          </a:prstGeom>
+          <a:noFill/>
+        </p:spPr>
+        <p:txBody>
+          <a:bodyPr vert="horz" wrap="square" lIns="0" tIns="0" rIns="0" bIns="0" rtlCol="0">
+            <a:noAutofit/>
+          </a:bodyPr>
+          <a:lstStyle/>
+          <a:p>
+            <a:pPr marL="457200" indent="-457200">
+              <a:spcAft>
+                <a:spcPts val="1000"/>
+              </a:spcAft>
+              <a:buFont typeface="+mj-lt"/>
+              <a:buChar char="•"/>
+            </a:pPr>
+            <a:r>
+              <a:rPr lang="es-ES" sz="1900">
+                <a:solidFill>
+                  <a:srgbClr val="C2CBD8"/>
+                </a:solidFill>
+                <a:latin typeface="Segoe UI" panose="020B0502040204020203" pitchFamily="34" charset="0"/>
+              </a:rPr>
+              <a:t>Problema real del centro.</a:t>
+            </a:r>
+          </a:p>
+          <a:p>
+            <a:pPr marL="457200" indent="-457200">
+              <a:spcAft>
+                <a:spcPts val="1000"/>
+              </a:spcAft>
+              <a:buFont typeface="+mj-lt"/>
+              <a:buChar char="•"/>
+            </a:pPr>
+            <a:r>
+              <a:rPr lang="es-ES" sz="1900">
+                <a:solidFill>
+                  <a:srgbClr val="C2CBD8"/>
+                </a:solidFill>
+                <a:latin typeface="Segoe UI" panose="020B0502040204020203" pitchFamily="34" charset="0"/>
+              </a:rPr>
+              <a:t>Arquitectura completa con backend, dos frontends y operacion local.</a:t>
+            </a:r>
+          </a:p>
+          <a:p>
+            <a:pPr marL="457200" indent="-457200">
+              <a:spcAft>
+                <a:spcPts val="1000"/>
+              </a:spcAft>
+              <a:buFont typeface="+mj-lt"/>
+              <a:buChar char="•"/>
+            </a:pPr>
+            <a:r>
+              <a:rPr lang="es-ES" sz="1900">
+                <a:solidFill>
+                  <a:srgbClr val="C2CBD8"/>
+                </a:solidFill>
+                <a:latin typeface="Segoe UI" panose="020B0502040204020203" pitchFamily="34" charset="0"/>
+              </a:rPr>
+              <a:t>Validacion tecnica, empaquetado y demo preparados.</a:t>
+            </a:r>
+          </a:p>
+        </p:txBody>
+      </p:sp>
+      <p:sp>
+        <p:nvSpPr>
+          <p:cNvPr id="6" name="CuadroTexto 5">
+            <a:extLst>
+              <a:ext uri="{FF2B5EF4-FFF2-40B4-BE49-F238E27FC236}">
+                <a16:creationId xmlns:a16="http://schemas.microsoft.com/office/drawing/2014/main" id="{4914ECFB-F9E3-4B0D-7C56-1F1EDE0EB29C}"/>
+              </a:ext>
+            </a:extLst>
+          </p:cNvPr>
+          <p:cNvSpPr txBox="1"/>
+          <p:nvPr/>
+        </p:nvSpPr>
+        <p:spPr>
+          <a:xfrm>
+            <a:off x="4191000" y="5943600"/>
+            <a:ext cx="3810000" cy="369332"/>
+          </a:xfrm>
+          <a:prstGeom prst="rect">
+            <a:avLst/>
+          </a:prstGeom>
+          <a:noFill/>
+        </p:spPr>
+        <p:txBody>
+          <a:bodyPr vert="horz" wrap="square" lIns="0" tIns="0" rIns="0" bIns="0" rtlCol="0">
+            <a:noAutofit/>
+          </a:bodyPr>
+          <a:lstStyle/>
+          <a:p>
+            <a:r>
+              <a:rPr lang="es-ES" sz="2200" b="1">
+                <a:solidFill>
+                  <a:srgbClr val="DBA14D"/>
+                </a:solidFill>
+                <a:latin typeface="Segoe UI" panose="020B0502040204020203" pitchFamily="34" charset="0"/>
+              </a:rPr>
+              <a:t>Demo y preguntas</a:t>
+            </a:r>
+          </a:p>
+        </p:txBody>
+      </p:sp>
+    </p:spTree>
+    <p:extLst>
+      <p:ext uri="{BB962C8B-B14F-4D97-AF65-F5344CB8AC3E}">
+        <p14:creationId xmlns:p14="http://schemas.microsoft.com/office/powerpoint/2010/main" val="498048314"/>
       </p:ext>
     </p:extLst>
   </p:cSld>
@@ -10889,7 +11510,7 @@
           <p:cNvPr id="2" name="CuadroTexto 1">
             <a:extLst>
               <a:ext uri="{FF2B5EF4-FFF2-40B4-BE49-F238E27FC236}">
-                <a16:creationId xmlns:a16="http://schemas.microsoft.com/office/drawing/2014/main" id="{B068331A-DB58-7D9F-BFF0-5ADE1A43EEED}"/>
+                <a16:creationId xmlns:a16="http://schemas.microsoft.com/office/drawing/2014/main" id="{0BE1E661-0DBC-537A-4084-26EA740CF916}"/>
               </a:ext>
             </a:extLst>
           </p:cNvPr>
@@ -10929,7 +11550,7 @@
           <p:cNvPr id="3" name="CuadroTexto 2">
             <a:extLst>
               <a:ext uri="{FF2B5EF4-FFF2-40B4-BE49-F238E27FC236}">
-                <a16:creationId xmlns:a16="http://schemas.microsoft.com/office/drawing/2014/main" id="{692C9C5C-E412-D73C-5BF2-647E0EBA4114}"/>
+                <a16:creationId xmlns:a16="http://schemas.microsoft.com/office/drawing/2014/main" id="{BB81B3B2-FC76-157F-884B-E70A56B4CF2A}"/>
               </a:ext>
             </a:extLst>
           </p:cNvPr>
@@ -10969,7 +11590,7 @@
           <p:cNvPr id="4" name="CuadroTexto 3">
             <a:extLst>
               <a:ext uri="{FF2B5EF4-FFF2-40B4-BE49-F238E27FC236}">
-                <a16:creationId xmlns:a16="http://schemas.microsoft.com/office/drawing/2014/main" id="{8A86CE34-67C7-7AC5-C770-8102636B2087}"/>
+                <a16:creationId xmlns:a16="http://schemas.microsoft.com/office/drawing/2014/main" id="{8C328DDE-BC6B-0D6E-57F8-61C8DBF75547}"/>
               </a:ext>
             </a:extLst>
           </p:cNvPr>
@@ -11009,7 +11630,7 @@
           <p:cNvPr id="5" name="CuadroTexto 4">
             <a:extLst>
               <a:ext uri="{FF2B5EF4-FFF2-40B4-BE49-F238E27FC236}">
-                <a16:creationId xmlns:a16="http://schemas.microsoft.com/office/drawing/2014/main" id="{35597837-C64F-5762-43AB-B29EF7A40323}"/>
+                <a16:creationId xmlns:a16="http://schemas.microsoft.com/office/drawing/2014/main" id="{E3D5C569-8644-22B8-E6E3-296989C4AE3C}"/>
               </a:ext>
             </a:extLst>
           </p:cNvPr>
@@ -11110,7 +11731,7 @@
           <p:cNvPr id="6" name="Rectángulo: esquinas redondeadas 5">
             <a:extLst>
               <a:ext uri="{FF2B5EF4-FFF2-40B4-BE49-F238E27FC236}">
-                <a16:creationId xmlns:a16="http://schemas.microsoft.com/office/drawing/2014/main" id="{5897020F-CAF7-9521-63B9-5A88B9D2BDFA}"/>
+                <a16:creationId xmlns:a16="http://schemas.microsoft.com/office/drawing/2014/main" id="{4F40F10B-4E2C-90EF-2580-AE508C9D1AB9}"/>
               </a:ext>
             </a:extLst>
           </p:cNvPr>
@@ -11164,7 +11785,7 @@
           <p:cNvPr id="7" name="CuadroTexto 6">
             <a:extLst>
               <a:ext uri="{FF2B5EF4-FFF2-40B4-BE49-F238E27FC236}">
-                <a16:creationId xmlns:a16="http://schemas.microsoft.com/office/drawing/2014/main" id="{006E7796-BFA1-A444-9476-0F81B323E857}"/>
+                <a16:creationId xmlns:a16="http://schemas.microsoft.com/office/drawing/2014/main" id="{2B933355-C9E0-CBB3-945F-28EF401A6442}"/>
               </a:ext>
             </a:extLst>
           </p:cNvPr>
@@ -11204,7 +11825,7 @@
           <p:cNvPr id="8" name="CuadroTexto 7">
             <a:extLst>
               <a:ext uri="{FF2B5EF4-FFF2-40B4-BE49-F238E27FC236}">
-                <a16:creationId xmlns:a16="http://schemas.microsoft.com/office/drawing/2014/main" id="{DAFB9483-D011-ABD1-E5A0-493FD9E7F5BF}"/>
+                <a16:creationId xmlns:a16="http://schemas.microsoft.com/office/drawing/2014/main" id="{B26D1F1B-559A-6BFB-6D3D-0A1C0A9B898B}"/>
               </a:ext>
             </a:extLst>
           </p:cNvPr>
@@ -11242,7 +11863,7 @@
     </p:spTree>
     <p:extLst>
       <p:ext uri="{BB962C8B-B14F-4D97-AF65-F5344CB8AC3E}">
-        <p14:creationId xmlns:p14="http://schemas.microsoft.com/office/powerpoint/2010/main" val="912611780"/>
+        <p14:creationId xmlns:p14="http://schemas.microsoft.com/office/powerpoint/2010/main" val="4178036023"/>
       </p:ext>
     </p:extLst>
   </p:cSld>
@@ -11282,7 +11903,7 @@
           <p:cNvPr id="2" name="CuadroTexto 1">
             <a:extLst>
               <a:ext uri="{FF2B5EF4-FFF2-40B4-BE49-F238E27FC236}">
-                <a16:creationId xmlns:a16="http://schemas.microsoft.com/office/drawing/2014/main" id="{5EEA9A2C-A91E-C96C-2BF8-9EC777031AA1}"/>
+                <a16:creationId xmlns:a16="http://schemas.microsoft.com/office/drawing/2014/main" id="{92055057-C8DA-79AB-EF91-AE6FA0178976}"/>
               </a:ext>
             </a:extLst>
           </p:cNvPr>
@@ -11322,7 +11943,7 @@
           <p:cNvPr id="3" name="CuadroTexto 2">
             <a:extLst>
               <a:ext uri="{FF2B5EF4-FFF2-40B4-BE49-F238E27FC236}">
-                <a16:creationId xmlns:a16="http://schemas.microsoft.com/office/drawing/2014/main" id="{34404C0C-D81F-D7DF-C60D-5ACBE1E7EBF6}"/>
+                <a16:creationId xmlns:a16="http://schemas.microsoft.com/office/drawing/2014/main" id="{F7A8E162-23F0-0809-7ED7-8FF94E5A2373}"/>
               </a:ext>
             </a:extLst>
           </p:cNvPr>
@@ -11362,7 +11983,7 @@
           <p:cNvPr id="4" name="Rectángulo: esquinas redondeadas 3">
             <a:extLst>
               <a:ext uri="{FF2B5EF4-FFF2-40B4-BE49-F238E27FC236}">
-                <a16:creationId xmlns:a16="http://schemas.microsoft.com/office/drawing/2014/main" id="{55B44C90-9EAA-544F-47EF-513F35EB1060}"/>
+                <a16:creationId xmlns:a16="http://schemas.microsoft.com/office/drawing/2014/main" id="{796F02E1-F348-5000-9622-9FAD8414425D}"/>
               </a:ext>
             </a:extLst>
           </p:cNvPr>
@@ -11416,7 +12037,7 @@
           <p:cNvPr id="5" name="CuadroTexto 4">
             <a:extLst>
               <a:ext uri="{FF2B5EF4-FFF2-40B4-BE49-F238E27FC236}">
-                <a16:creationId xmlns:a16="http://schemas.microsoft.com/office/drawing/2014/main" id="{AB4DAB3F-7477-AA02-7D02-B6087F3E2943}"/>
+                <a16:creationId xmlns:a16="http://schemas.microsoft.com/office/drawing/2014/main" id="{7B80951D-BFF5-44E9-2F70-8EF0EE5DF7A8}"/>
               </a:ext>
             </a:extLst>
           </p:cNvPr>
@@ -11456,7 +12077,7 @@
           <p:cNvPr id="6" name="CuadroTexto 5">
             <a:extLst>
               <a:ext uri="{FF2B5EF4-FFF2-40B4-BE49-F238E27FC236}">
-                <a16:creationId xmlns:a16="http://schemas.microsoft.com/office/drawing/2014/main" id="{617206B7-1BE2-D1CD-EECC-88C15A6706AA}"/>
+                <a16:creationId xmlns:a16="http://schemas.microsoft.com/office/drawing/2014/main" id="{350659C4-A8C6-FAA4-0D7E-F43AFC9CFA81}"/>
               </a:ext>
             </a:extLst>
           </p:cNvPr>
@@ -11496,7 +12117,7 @@
           <p:cNvPr id="7" name="Rectángulo: esquinas redondeadas 6">
             <a:extLst>
               <a:ext uri="{FF2B5EF4-FFF2-40B4-BE49-F238E27FC236}">
-                <a16:creationId xmlns:a16="http://schemas.microsoft.com/office/drawing/2014/main" id="{C3AD3A7A-7740-0852-EC1D-8A6AEDBF5FD7}"/>
+                <a16:creationId xmlns:a16="http://schemas.microsoft.com/office/drawing/2014/main" id="{72A01A7E-A8BD-91A2-E523-8570273680B9}"/>
               </a:ext>
             </a:extLst>
           </p:cNvPr>
@@ -11550,7 +12171,7 @@
           <p:cNvPr id="8" name="CuadroTexto 7">
             <a:extLst>
               <a:ext uri="{FF2B5EF4-FFF2-40B4-BE49-F238E27FC236}">
-                <a16:creationId xmlns:a16="http://schemas.microsoft.com/office/drawing/2014/main" id="{C03D0592-6DE3-7264-C687-B190F5203639}"/>
+                <a16:creationId xmlns:a16="http://schemas.microsoft.com/office/drawing/2014/main" id="{69117723-3856-A544-25E0-B4E777AF45DD}"/>
               </a:ext>
             </a:extLst>
           </p:cNvPr>
@@ -11590,7 +12211,7 @@
           <p:cNvPr id="9" name="CuadroTexto 8">
             <a:extLst>
               <a:ext uri="{FF2B5EF4-FFF2-40B4-BE49-F238E27FC236}">
-                <a16:creationId xmlns:a16="http://schemas.microsoft.com/office/drawing/2014/main" id="{C23E62E8-960A-6732-9165-3C576AAC568D}"/>
+                <a16:creationId xmlns:a16="http://schemas.microsoft.com/office/drawing/2014/main" id="{84CFCE9C-3B32-86CC-5655-D311F49CE002}"/>
               </a:ext>
             </a:extLst>
           </p:cNvPr>
@@ -11630,7 +12251,7 @@
           <p:cNvPr id="10" name="Rectángulo: esquinas redondeadas 9">
             <a:extLst>
               <a:ext uri="{FF2B5EF4-FFF2-40B4-BE49-F238E27FC236}">
-                <a16:creationId xmlns:a16="http://schemas.microsoft.com/office/drawing/2014/main" id="{B4CFBFCE-F2AE-23FF-77CE-960D26C22C1F}"/>
+                <a16:creationId xmlns:a16="http://schemas.microsoft.com/office/drawing/2014/main" id="{BA277D77-5C5F-8B9B-251A-CC9C17B6440B}"/>
               </a:ext>
             </a:extLst>
           </p:cNvPr>
@@ -11684,7 +12305,7 @@
           <p:cNvPr id="11" name="CuadroTexto 10">
             <a:extLst>
               <a:ext uri="{FF2B5EF4-FFF2-40B4-BE49-F238E27FC236}">
-                <a16:creationId xmlns:a16="http://schemas.microsoft.com/office/drawing/2014/main" id="{017DDDCB-9C29-2354-2534-8B9E99EED402}"/>
+                <a16:creationId xmlns:a16="http://schemas.microsoft.com/office/drawing/2014/main" id="{1EFDB26F-C1F0-AB63-ED7F-C933649CD981}"/>
               </a:ext>
             </a:extLst>
           </p:cNvPr>
@@ -11724,7 +12345,7 @@
           <p:cNvPr id="12" name="CuadroTexto 11">
             <a:extLst>
               <a:ext uri="{FF2B5EF4-FFF2-40B4-BE49-F238E27FC236}">
-                <a16:creationId xmlns:a16="http://schemas.microsoft.com/office/drawing/2014/main" id="{6DF3749A-8BD8-2F0D-D6D7-463215C075A9}"/>
+                <a16:creationId xmlns:a16="http://schemas.microsoft.com/office/drawing/2014/main" id="{30DD3C42-A676-EF40-69F9-016C6DB92A22}"/>
               </a:ext>
             </a:extLst>
           </p:cNvPr>
@@ -11764,7 +12385,7 @@
           <p:cNvPr id="13" name="Rectángulo: esquinas redondeadas 12">
             <a:extLst>
               <a:ext uri="{FF2B5EF4-FFF2-40B4-BE49-F238E27FC236}">
-                <a16:creationId xmlns:a16="http://schemas.microsoft.com/office/drawing/2014/main" id="{F103FFF3-BFB4-1C0C-0780-13D32EA02DD4}"/>
+                <a16:creationId xmlns:a16="http://schemas.microsoft.com/office/drawing/2014/main" id="{8FCF037B-FBF2-7338-ABC2-8AD7867B3D58}"/>
               </a:ext>
             </a:extLst>
           </p:cNvPr>
@@ -11818,7 +12439,7 @@
           <p:cNvPr id="14" name="CuadroTexto 13">
             <a:extLst>
               <a:ext uri="{FF2B5EF4-FFF2-40B4-BE49-F238E27FC236}">
-                <a16:creationId xmlns:a16="http://schemas.microsoft.com/office/drawing/2014/main" id="{6230B512-43E9-EEE6-6853-151B689DF8A6}"/>
+                <a16:creationId xmlns:a16="http://schemas.microsoft.com/office/drawing/2014/main" id="{A3729578-1F10-4838-DA1C-2EB2E6576A7D}"/>
               </a:ext>
             </a:extLst>
           </p:cNvPr>
@@ -11858,7 +12479,7 @@
           <p:cNvPr id="15" name="CuadroTexto 14">
             <a:extLst>
               <a:ext uri="{FF2B5EF4-FFF2-40B4-BE49-F238E27FC236}">
-                <a16:creationId xmlns:a16="http://schemas.microsoft.com/office/drawing/2014/main" id="{0786D3B6-DF73-3A76-597C-0CCAB11D6A5E}"/>
+                <a16:creationId xmlns:a16="http://schemas.microsoft.com/office/drawing/2014/main" id="{BA022D2B-C257-8254-B8C2-8F54A360DC16}"/>
               </a:ext>
             </a:extLst>
           </p:cNvPr>
@@ -11896,7 +12517,7 @@
     </p:spTree>
     <p:extLst>
       <p:ext uri="{BB962C8B-B14F-4D97-AF65-F5344CB8AC3E}">
-        <p14:creationId xmlns:p14="http://schemas.microsoft.com/office/powerpoint/2010/main" val="41990846"/>
+        <p14:creationId xmlns:p14="http://schemas.microsoft.com/office/powerpoint/2010/main" val="1266005131"/>
       </p:ext>
     </p:extLst>
   </p:cSld>
@@ -11936,7 +12557,7 @@
           <p:cNvPr id="2" name="CuadroTexto 1">
             <a:extLst>
               <a:ext uri="{FF2B5EF4-FFF2-40B4-BE49-F238E27FC236}">
-                <a16:creationId xmlns:a16="http://schemas.microsoft.com/office/drawing/2014/main" id="{02924989-8D28-B68C-B72A-3A92466D8A45}"/>
+                <a16:creationId xmlns:a16="http://schemas.microsoft.com/office/drawing/2014/main" id="{9F60450A-9747-ECC7-AEC6-40741233966B}"/>
               </a:ext>
             </a:extLst>
           </p:cNvPr>
@@ -11976,7 +12597,7 @@
           <p:cNvPr id="3" name="CuadroTexto 2">
             <a:extLst>
               <a:ext uri="{FF2B5EF4-FFF2-40B4-BE49-F238E27FC236}">
-                <a16:creationId xmlns:a16="http://schemas.microsoft.com/office/drawing/2014/main" id="{50362F14-0AE5-B2A3-1B20-3932B7309F24}"/>
+                <a16:creationId xmlns:a16="http://schemas.microsoft.com/office/drawing/2014/main" id="{5EABC095-A6BF-21F8-9F11-9FC81CB2B6D2}"/>
               </a:ext>
             </a:extLst>
           </p:cNvPr>
@@ -12016,7 +12637,7 @@
           <p:cNvPr id="4" name="CuadroTexto 3">
             <a:extLst>
               <a:ext uri="{FF2B5EF4-FFF2-40B4-BE49-F238E27FC236}">
-                <a16:creationId xmlns:a16="http://schemas.microsoft.com/office/drawing/2014/main" id="{A75697DF-88BC-7E5F-9BE2-87CFF0749188}"/>
+                <a16:creationId xmlns:a16="http://schemas.microsoft.com/office/drawing/2014/main" id="{8FB4E0A4-6F94-E109-26F0-2D1EDB6BFB6B}"/>
               </a:ext>
             </a:extLst>
           </p:cNvPr>
@@ -12056,7 +12677,7 @@
           <p:cNvPr id="6" name="Imagen 5">
             <a:extLst>
               <a:ext uri="{FF2B5EF4-FFF2-40B4-BE49-F238E27FC236}">
-                <a16:creationId xmlns:a16="http://schemas.microsoft.com/office/drawing/2014/main" id="{C23A36BD-2BA4-2636-33C9-17BCEB0026DE}"/>
+                <a16:creationId xmlns:a16="http://schemas.microsoft.com/office/drawing/2014/main" id="{07A2F82E-210A-4082-F095-E918C899C5F4}"/>
               </a:ext>
             </a:extLst>
           </p:cNvPr>
@@ -12097,7 +12718,7 @@
           <p:cNvPr id="7" name="CuadroTexto 6">
             <a:extLst>
               <a:ext uri="{FF2B5EF4-FFF2-40B4-BE49-F238E27FC236}">
-                <a16:creationId xmlns:a16="http://schemas.microsoft.com/office/drawing/2014/main" id="{E38B764A-AF77-5E6F-A78B-25C422793274}"/>
+                <a16:creationId xmlns:a16="http://schemas.microsoft.com/office/drawing/2014/main" id="{7856E164-D00D-F664-5529-90494663A647}"/>
               </a:ext>
             </a:extLst>
           </p:cNvPr>
@@ -12214,7 +12835,7 @@
     </p:spTree>
     <p:extLst>
       <p:ext uri="{BB962C8B-B14F-4D97-AF65-F5344CB8AC3E}">
-        <p14:creationId xmlns:p14="http://schemas.microsoft.com/office/powerpoint/2010/main" val="3885330251"/>
+        <p14:creationId xmlns:p14="http://schemas.microsoft.com/office/powerpoint/2010/main" val="3151849778"/>
       </p:ext>
     </p:extLst>
   </p:cSld>
@@ -12254,7 +12875,7 @@
           <p:cNvPr id="2" name="CuadroTexto 1">
             <a:extLst>
               <a:ext uri="{FF2B5EF4-FFF2-40B4-BE49-F238E27FC236}">
-                <a16:creationId xmlns:a16="http://schemas.microsoft.com/office/drawing/2014/main" id="{99BF5430-D21D-2E45-623D-1D7B73711BC7}"/>
+                <a16:creationId xmlns:a16="http://schemas.microsoft.com/office/drawing/2014/main" id="{D002DA14-00E1-E92E-3AC0-5C19A9FAA3DC}"/>
               </a:ext>
             </a:extLst>
           </p:cNvPr>
@@ -12294,7 +12915,7 @@
           <p:cNvPr id="3" name="CuadroTexto 2">
             <a:extLst>
               <a:ext uri="{FF2B5EF4-FFF2-40B4-BE49-F238E27FC236}">
-                <a16:creationId xmlns:a16="http://schemas.microsoft.com/office/drawing/2014/main" id="{FA27A7D7-73AA-E5CB-FB55-7E89600A6ADE}"/>
+                <a16:creationId xmlns:a16="http://schemas.microsoft.com/office/drawing/2014/main" id="{006AF4D4-6D8C-5DAF-AC80-9EA4165205F8}"/>
               </a:ext>
             </a:extLst>
           </p:cNvPr>
@@ -12334,7 +12955,7 @@
           <p:cNvPr id="5" name="Imagen 4">
             <a:extLst>
               <a:ext uri="{FF2B5EF4-FFF2-40B4-BE49-F238E27FC236}">
-                <a16:creationId xmlns:a16="http://schemas.microsoft.com/office/drawing/2014/main" id="{EF4FE04C-3CF4-6B38-60C6-16D0D2CD9E54}"/>
+                <a16:creationId xmlns:a16="http://schemas.microsoft.com/office/drawing/2014/main" id="{8E2D9F19-160F-7F42-0A8A-5F3B436444A4}"/>
               </a:ext>
             </a:extLst>
           </p:cNvPr>
@@ -12375,7 +12996,7 @@
           <p:cNvPr id="6" name="CuadroTexto 5">
             <a:extLst>
               <a:ext uri="{FF2B5EF4-FFF2-40B4-BE49-F238E27FC236}">
-                <a16:creationId xmlns:a16="http://schemas.microsoft.com/office/drawing/2014/main" id="{81FD6AE6-3657-A5E6-406F-47AA926AA5D1}"/>
+                <a16:creationId xmlns:a16="http://schemas.microsoft.com/office/drawing/2014/main" id="{3845DA8F-B51F-925D-D6CD-FE1BA682B570}"/>
               </a:ext>
             </a:extLst>
           </p:cNvPr>
@@ -12415,7 +13036,7 @@
           <p:cNvPr id="7" name="CuadroTexto 6">
             <a:extLst>
               <a:ext uri="{FF2B5EF4-FFF2-40B4-BE49-F238E27FC236}">
-                <a16:creationId xmlns:a16="http://schemas.microsoft.com/office/drawing/2014/main" id="{3409C926-8B90-DDF6-E819-AAC477D9A825}"/>
+                <a16:creationId xmlns:a16="http://schemas.microsoft.com/office/drawing/2014/main" id="{95828F11-C728-3E5F-DECE-971949EC42A1}"/>
               </a:ext>
             </a:extLst>
           </p:cNvPr>
@@ -12514,7 +13135,7 @@
     </p:spTree>
     <p:extLst>
       <p:ext uri="{BB962C8B-B14F-4D97-AF65-F5344CB8AC3E}">
-        <p14:creationId xmlns:p14="http://schemas.microsoft.com/office/powerpoint/2010/main" val="3628958224"/>
+        <p14:creationId xmlns:p14="http://schemas.microsoft.com/office/powerpoint/2010/main" val="2627772969"/>
       </p:ext>
     </p:extLst>
   </p:cSld>
@@ -12554,7 +13175,7 @@
           <p:cNvPr id="2" name="CuadroTexto 1">
             <a:extLst>
               <a:ext uri="{FF2B5EF4-FFF2-40B4-BE49-F238E27FC236}">
-                <a16:creationId xmlns:a16="http://schemas.microsoft.com/office/drawing/2014/main" id="{FC9C80E4-B6A2-7547-2BBF-3434A32E50A6}"/>
+                <a16:creationId xmlns:a16="http://schemas.microsoft.com/office/drawing/2014/main" id="{BAFC902B-ECE9-C8C8-E25A-F648D92DFC2A}"/>
               </a:ext>
             </a:extLst>
           </p:cNvPr>
@@ -12594,7 +13215,7 @@
           <p:cNvPr id="3" name="CuadroTexto 2">
             <a:extLst>
               <a:ext uri="{FF2B5EF4-FFF2-40B4-BE49-F238E27FC236}">
-                <a16:creationId xmlns:a16="http://schemas.microsoft.com/office/drawing/2014/main" id="{5CF920E5-5C85-C637-6343-6CBBFF764A47}"/>
+                <a16:creationId xmlns:a16="http://schemas.microsoft.com/office/drawing/2014/main" id="{F3938256-8733-E912-BB12-365AC2984174}"/>
               </a:ext>
             </a:extLst>
           </p:cNvPr>
@@ -12634,7 +13255,7 @@
           <p:cNvPr id="4" name="CuadroTexto 3">
             <a:extLst>
               <a:ext uri="{FF2B5EF4-FFF2-40B4-BE49-F238E27FC236}">
-                <a16:creationId xmlns:a16="http://schemas.microsoft.com/office/drawing/2014/main" id="{7203D311-3E78-52F3-4B6C-BA638E1D6BC6}"/>
+                <a16:creationId xmlns:a16="http://schemas.microsoft.com/office/drawing/2014/main" id="{A3CB6E49-7281-3D5F-0381-C2231959554C}"/>
               </a:ext>
             </a:extLst>
           </p:cNvPr>
@@ -12674,7 +13295,7 @@
           <p:cNvPr id="6" name="Imagen 5">
             <a:extLst>
               <a:ext uri="{FF2B5EF4-FFF2-40B4-BE49-F238E27FC236}">
-                <a16:creationId xmlns:a16="http://schemas.microsoft.com/office/drawing/2014/main" id="{F7F27DAD-ABC7-4E34-42B9-D99749540559}"/>
+                <a16:creationId xmlns:a16="http://schemas.microsoft.com/office/drawing/2014/main" id="{E653A684-07FE-1835-7E64-E1D013C2A3D2}"/>
               </a:ext>
             </a:extLst>
           </p:cNvPr>
@@ -12715,7 +13336,7 @@
           <p:cNvPr id="7" name="Rectángulo: esquinas redondeadas 6">
             <a:extLst>
               <a:ext uri="{FF2B5EF4-FFF2-40B4-BE49-F238E27FC236}">
-                <a16:creationId xmlns:a16="http://schemas.microsoft.com/office/drawing/2014/main" id="{79EE4299-D524-33CC-033B-98966273EF55}"/>
+                <a16:creationId xmlns:a16="http://schemas.microsoft.com/office/drawing/2014/main" id="{DD7C823A-460C-59B6-E2E8-7BFABF734BF0}"/>
               </a:ext>
             </a:extLst>
           </p:cNvPr>
@@ -12769,7 +13390,7 @@
           <p:cNvPr id="8" name="CuadroTexto 7">
             <a:extLst>
               <a:ext uri="{FF2B5EF4-FFF2-40B4-BE49-F238E27FC236}">
-                <a16:creationId xmlns:a16="http://schemas.microsoft.com/office/drawing/2014/main" id="{755F7BC3-043A-E21A-04EE-C5014F522D99}"/>
+                <a16:creationId xmlns:a16="http://schemas.microsoft.com/office/drawing/2014/main" id="{59310465-5CC5-8CA5-F743-258CDFF24385}"/>
               </a:ext>
             </a:extLst>
           </p:cNvPr>
@@ -12809,7 +13430,7 @@
           <p:cNvPr id="9" name="CuadroTexto 8">
             <a:extLst>
               <a:ext uri="{FF2B5EF4-FFF2-40B4-BE49-F238E27FC236}">
-                <a16:creationId xmlns:a16="http://schemas.microsoft.com/office/drawing/2014/main" id="{97566F5A-DF3A-1EBC-7D8F-08D1CC59989E}"/>
+                <a16:creationId xmlns:a16="http://schemas.microsoft.com/office/drawing/2014/main" id="{0307187F-2797-A1F0-20D6-402E3841F65A}"/>
               </a:ext>
             </a:extLst>
           </p:cNvPr>
@@ -12849,7 +13470,7 @@
           <p:cNvPr id="10" name="Rectángulo: esquinas redondeadas 9">
             <a:extLst>
               <a:ext uri="{FF2B5EF4-FFF2-40B4-BE49-F238E27FC236}">
-                <a16:creationId xmlns:a16="http://schemas.microsoft.com/office/drawing/2014/main" id="{8D828C9F-B47A-35AE-9253-424BA0A74AAC}"/>
+                <a16:creationId xmlns:a16="http://schemas.microsoft.com/office/drawing/2014/main" id="{EE117D0C-CFA5-A47E-E94B-D6FC657B690C}"/>
               </a:ext>
             </a:extLst>
           </p:cNvPr>
@@ -12903,7 +13524,7 @@
           <p:cNvPr id="11" name="CuadroTexto 10">
             <a:extLst>
               <a:ext uri="{FF2B5EF4-FFF2-40B4-BE49-F238E27FC236}">
-                <a16:creationId xmlns:a16="http://schemas.microsoft.com/office/drawing/2014/main" id="{D0421082-2451-F26B-B829-B8642E15DB66}"/>
+                <a16:creationId xmlns:a16="http://schemas.microsoft.com/office/drawing/2014/main" id="{6F45AC9F-C44D-5400-BB94-D8D9A565710F}"/>
               </a:ext>
             </a:extLst>
           </p:cNvPr>
@@ -12943,7 +13564,7 @@
           <p:cNvPr id="12" name="CuadroTexto 11">
             <a:extLst>
               <a:ext uri="{FF2B5EF4-FFF2-40B4-BE49-F238E27FC236}">
-                <a16:creationId xmlns:a16="http://schemas.microsoft.com/office/drawing/2014/main" id="{951A7912-5D6D-4603-6206-74D4EAA458D8}"/>
+                <a16:creationId xmlns:a16="http://schemas.microsoft.com/office/drawing/2014/main" id="{6F0CDBD4-C89F-B51E-F6E9-CEDC0009EA58}"/>
               </a:ext>
             </a:extLst>
           </p:cNvPr>
@@ -12983,7 +13604,7 @@
           <p:cNvPr id="13" name="Rectángulo: esquinas redondeadas 12">
             <a:extLst>
               <a:ext uri="{FF2B5EF4-FFF2-40B4-BE49-F238E27FC236}">
-                <a16:creationId xmlns:a16="http://schemas.microsoft.com/office/drawing/2014/main" id="{635F3BDF-BD2B-9167-BA1D-F8257F3B28B6}"/>
+                <a16:creationId xmlns:a16="http://schemas.microsoft.com/office/drawing/2014/main" id="{67925F74-B796-8116-A1D2-DB91CF088FF3}"/>
               </a:ext>
             </a:extLst>
           </p:cNvPr>
@@ -13037,7 +13658,7 @@
           <p:cNvPr id="14" name="CuadroTexto 13">
             <a:extLst>
               <a:ext uri="{FF2B5EF4-FFF2-40B4-BE49-F238E27FC236}">
-                <a16:creationId xmlns:a16="http://schemas.microsoft.com/office/drawing/2014/main" id="{6D0D4D02-852C-9F8C-0409-012C4E3E204F}"/>
+                <a16:creationId xmlns:a16="http://schemas.microsoft.com/office/drawing/2014/main" id="{986D3EB3-9E66-36B3-8C9C-28BF13C35816}"/>
               </a:ext>
             </a:extLst>
           </p:cNvPr>
@@ -13077,7 +13698,7 @@
           <p:cNvPr id="15" name="CuadroTexto 14">
             <a:extLst>
               <a:ext uri="{FF2B5EF4-FFF2-40B4-BE49-F238E27FC236}">
-                <a16:creationId xmlns:a16="http://schemas.microsoft.com/office/drawing/2014/main" id="{4721C125-6813-04AB-E303-D7E9C0532B50}"/>
+                <a16:creationId xmlns:a16="http://schemas.microsoft.com/office/drawing/2014/main" id="{9B8DBD57-B93A-80F2-CBA2-17687CF8B36F}"/>
               </a:ext>
             </a:extLst>
           </p:cNvPr>
@@ -13115,7 +13736,7 @@
     </p:spTree>
     <p:extLst>
       <p:ext uri="{BB962C8B-B14F-4D97-AF65-F5344CB8AC3E}">
-        <p14:creationId xmlns:p14="http://schemas.microsoft.com/office/powerpoint/2010/main" val="3981709753"/>
+        <p14:creationId xmlns:p14="http://schemas.microsoft.com/office/powerpoint/2010/main" val="1764140627"/>
       </p:ext>
     </p:extLst>
   </p:cSld>
@@ -13155,7 +13776,7 @@
           <p:cNvPr id="2" name="CuadroTexto 1">
             <a:extLst>
               <a:ext uri="{FF2B5EF4-FFF2-40B4-BE49-F238E27FC236}">
-                <a16:creationId xmlns:a16="http://schemas.microsoft.com/office/drawing/2014/main" id="{827533D7-6C40-0DAD-5475-14F3E9CCF73B}"/>
+                <a16:creationId xmlns:a16="http://schemas.microsoft.com/office/drawing/2014/main" id="{612EDC8B-2C38-558A-58F7-49C2BEAD3F40}"/>
               </a:ext>
             </a:extLst>
           </p:cNvPr>
@@ -13195,7 +13816,7 @@
           <p:cNvPr id="3" name="CuadroTexto 2">
             <a:extLst>
               <a:ext uri="{FF2B5EF4-FFF2-40B4-BE49-F238E27FC236}">
-                <a16:creationId xmlns:a16="http://schemas.microsoft.com/office/drawing/2014/main" id="{C96E84F9-86C6-FDD5-0734-613FE7FD61F8}"/>
+                <a16:creationId xmlns:a16="http://schemas.microsoft.com/office/drawing/2014/main" id="{359793CE-B4F4-8B17-247B-3B055B190D0B}"/>
               </a:ext>
             </a:extLst>
           </p:cNvPr>
@@ -13235,7 +13856,7 @@
           <p:cNvPr id="5" name="Imagen 4">
             <a:extLst>
               <a:ext uri="{FF2B5EF4-FFF2-40B4-BE49-F238E27FC236}">
-                <a16:creationId xmlns:a16="http://schemas.microsoft.com/office/drawing/2014/main" id="{510571C2-4000-98F4-EECF-1955592F3673}"/>
+                <a16:creationId xmlns:a16="http://schemas.microsoft.com/office/drawing/2014/main" id="{42262D1B-3C23-9DB5-7D61-B7106B3FF9BE}"/>
               </a:ext>
             </a:extLst>
           </p:cNvPr>
@@ -13276,7 +13897,7 @@
           <p:cNvPr id="6" name="CuadroTexto 5">
             <a:extLst>
               <a:ext uri="{FF2B5EF4-FFF2-40B4-BE49-F238E27FC236}">
-                <a16:creationId xmlns:a16="http://schemas.microsoft.com/office/drawing/2014/main" id="{781E1BD5-03E6-A083-BACE-92A9C7DDBDED}"/>
+                <a16:creationId xmlns:a16="http://schemas.microsoft.com/office/drawing/2014/main" id="{2D665ACC-3598-1EF7-5FCA-6AB06BD7F463}"/>
               </a:ext>
             </a:extLst>
           </p:cNvPr>
@@ -13375,7 +13996,7 @@
     </p:spTree>
     <p:extLst>
       <p:ext uri="{BB962C8B-B14F-4D97-AF65-F5344CB8AC3E}">
-        <p14:creationId xmlns:p14="http://schemas.microsoft.com/office/powerpoint/2010/main" val="2973036919"/>
+        <p14:creationId xmlns:p14="http://schemas.microsoft.com/office/powerpoint/2010/main" val="3931619758"/>
       </p:ext>
     </p:extLst>
   </p:cSld>
@@ -13415,7 +14036,7 @@
           <p:cNvPr id="2" name="CuadroTexto 1">
             <a:extLst>
               <a:ext uri="{FF2B5EF4-FFF2-40B4-BE49-F238E27FC236}">
-                <a16:creationId xmlns:a16="http://schemas.microsoft.com/office/drawing/2014/main" id="{BA6EB7F5-9509-EDB7-2B48-CABB6DE58D73}"/>
+                <a16:creationId xmlns:a16="http://schemas.microsoft.com/office/drawing/2014/main" id="{4EBAE9BF-BCF3-148B-DA54-96389DA42403}"/>
               </a:ext>
             </a:extLst>
           </p:cNvPr>
@@ -13455,7 +14076,7 @@
           <p:cNvPr id="3" name="CuadroTexto 2">
             <a:extLst>
               <a:ext uri="{FF2B5EF4-FFF2-40B4-BE49-F238E27FC236}">
-                <a16:creationId xmlns:a16="http://schemas.microsoft.com/office/drawing/2014/main" id="{66AB0523-998F-58D4-7BF3-405F5BA7373D}"/>
+                <a16:creationId xmlns:a16="http://schemas.microsoft.com/office/drawing/2014/main" id="{8767AC55-98BE-1B9C-A0E1-9CD1149694F0}"/>
               </a:ext>
             </a:extLst>
           </p:cNvPr>
@@ -13495,7 +14116,7 @@
           <p:cNvPr id="4" name="CuadroTexto 3">
             <a:extLst>
               <a:ext uri="{FF2B5EF4-FFF2-40B4-BE49-F238E27FC236}">
-                <a16:creationId xmlns:a16="http://schemas.microsoft.com/office/drawing/2014/main" id="{7E780F74-C190-84A5-16E0-84C03A07B02C}"/>
+                <a16:creationId xmlns:a16="http://schemas.microsoft.com/office/drawing/2014/main" id="{6657ADCF-930B-FD8A-6B3C-0A1DCD0B910A}"/>
               </a:ext>
             </a:extLst>
           </p:cNvPr>
@@ -13535,7 +14156,7 @@
           <p:cNvPr id="6" name="Imagen 5">
             <a:extLst>
               <a:ext uri="{FF2B5EF4-FFF2-40B4-BE49-F238E27FC236}">
-                <a16:creationId xmlns:a16="http://schemas.microsoft.com/office/drawing/2014/main" id="{B004ECCC-F1AA-9879-DDE6-F99198FF4894}"/>
+                <a16:creationId xmlns:a16="http://schemas.microsoft.com/office/drawing/2014/main" id="{C296A2F4-EC02-0EE5-09BF-890AD8AB99C6}"/>
               </a:ext>
             </a:extLst>
           </p:cNvPr>
@@ -13576,7 +14197,7 @@
           <p:cNvPr id="7" name="Rectángulo: esquinas redondeadas 6">
             <a:extLst>
               <a:ext uri="{FF2B5EF4-FFF2-40B4-BE49-F238E27FC236}">
-                <a16:creationId xmlns:a16="http://schemas.microsoft.com/office/drawing/2014/main" id="{DBE8309A-CE95-CA6C-4146-AEF7D0FFBD0E}"/>
+                <a16:creationId xmlns:a16="http://schemas.microsoft.com/office/drawing/2014/main" id="{C6986347-CF1D-F844-7D02-D301C3636090}"/>
               </a:ext>
             </a:extLst>
           </p:cNvPr>
@@ -13630,7 +14251,7 @@
           <p:cNvPr id="8" name="CuadroTexto 7">
             <a:extLst>
               <a:ext uri="{FF2B5EF4-FFF2-40B4-BE49-F238E27FC236}">
-                <a16:creationId xmlns:a16="http://schemas.microsoft.com/office/drawing/2014/main" id="{B227ED6A-953F-C914-1AAC-45885824EB25}"/>
+                <a16:creationId xmlns:a16="http://schemas.microsoft.com/office/drawing/2014/main" id="{79463B5C-0AFE-F5AA-D828-7ECCC155675D}"/>
               </a:ext>
             </a:extLst>
           </p:cNvPr>
@@ -13670,7 +14291,7 @@
           <p:cNvPr id="9" name="CuadroTexto 8">
             <a:extLst>
               <a:ext uri="{FF2B5EF4-FFF2-40B4-BE49-F238E27FC236}">
-                <a16:creationId xmlns:a16="http://schemas.microsoft.com/office/drawing/2014/main" id="{C49D88BA-2A8C-6D6F-05B0-8A88BD8AEFD5}"/>
+                <a16:creationId xmlns:a16="http://schemas.microsoft.com/office/drawing/2014/main" id="{B9D66FFA-3378-6505-262E-6349FD1D2831}"/>
               </a:ext>
             </a:extLst>
           </p:cNvPr>
@@ -13708,7 +14329,7 @@
     </p:spTree>
     <p:extLst>
       <p:ext uri="{BB962C8B-B14F-4D97-AF65-F5344CB8AC3E}">
-        <p14:creationId xmlns:p14="http://schemas.microsoft.com/office/powerpoint/2010/main" val="3721446040"/>
+        <p14:creationId xmlns:p14="http://schemas.microsoft.com/office/powerpoint/2010/main" val="1669319357"/>
       </p:ext>
     </p:extLst>
   </p:cSld>
@@ -13748,7 +14369,7 @@
           <p:cNvPr id="2" name="CuadroTexto 1">
             <a:extLst>
               <a:ext uri="{FF2B5EF4-FFF2-40B4-BE49-F238E27FC236}">
-                <a16:creationId xmlns:a16="http://schemas.microsoft.com/office/drawing/2014/main" id="{2C4369B0-386A-0AF1-FF04-68CB20E40251}"/>
+                <a16:creationId xmlns:a16="http://schemas.microsoft.com/office/drawing/2014/main" id="{10D66F9A-478B-94C2-0D94-7C4E80B18F57}"/>
               </a:ext>
             </a:extLst>
           </p:cNvPr>
@@ -13788,7 +14409,7 @@
           <p:cNvPr id="3" name="CuadroTexto 2">
             <a:extLst>
               <a:ext uri="{FF2B5EF4-FFF2-40B4-BE49-F238E27FC236}">
-                <a16:creationId xmlns:a16="http://schemas.microsoft.com/office/drawing/2014/main" id="{E1CE12B0-2E15-59E3-9F03-EED5651FF789}"/>
+                <a16:creationId xmlns:a16="http://schemas.microsoft.com/office/drawing/2014/main" id="{A936EB9F-A72B-FA0D-0F46-78A3A4950293}"/>
               </a:ext>
             </a:extLst>
           </p:cNvPr>
@@ -13828,7 +14449,7 @@
           <p:cNvPr id="4" name="CuadroTexto 3">
             <a:extLst>
               <a:ext uri="{FF2B5EF4-FFF2-40B4-BE49-F238E27FC236}">
-                <a16:creationId xmlns:a16="http://schemas.microsoft.com/office/drawing/2014/main" id="{40C3438E-8629-7708-9C35-F67BADCFEF6C}"/>
+                <a16:creationId xmlns:a16="http://schemas.microsoft.com/office/drawing/2014/main" id="{3B94261E-0445-84DE-98D8-CE8FCB8887FB}"/>
               </a:ext>
             </a:extLst>
           </p:cNvPr>
@@ -13868,7 +14489,7 @@
           <p:cNvPr id="5" name="Rectángulo: esquinas redondeadas 4">
             <a:extLst>
               <a:ext uri="{FF2B5EF4-FFF2-40B4-BE49-F238E27FC236}">
-                <a16:creationId xmlns:a16="http://schemas.microsoft.com/office/drawing/2014/main" id="{DC569418-C7D0-9E32-F31D-0C2DCB1B4843}"/>
+                <a16:creationId xmlns:a16="http://schemas.microsoft.com/office/drawing/2014/main" id="{23B32681-1AA4-E6FC-3A5A-AC3FB99A6760}"/>
               </a:ext>
             </a:extLst>
           </p:cNvPr>
@@ -13922,7 +14543,7 @@
           <p:cNvPr id="6" name="CuadroTexto 5">
             <a:extLst>
               <a:ext uri="{FF2B5EF4-FFF2-40B4-BE49-F238E27FC236}">
-                <a16:creationId xmlns:a16="http://schemas.microsoft.com/office/drawing/2014/main" id="{2383DE6A-84C8-354D-258F-0C6601F0A06B}"/>
+                <a16:creationId xmlns:a16="http://schemas.microsoft.com/office/drawing/2014/main" id="{793B4C7E-C901-674F-6CA6-D097698D1972}"/>
               </a:ext>
             </a:extLst>
           </p:cNvPr>
@@ -13962,7 +14583,7 @@
           <p:cNvPr id="7" name="CuadroTexto 6">
             <a:extLst>
               <a:ext uri="{FF2B5EF4-FFF2-40B4-BE49-F238E27FC236}">
-                <a16:creationId xmlns:a16="http://schemas.microsoft.com/office/drawing/2014/main" id="{21AF7642-980F-A653-5286-88FBBC7C8584}"/>
+                <a16:creationId xmlns:a16="http://schemas.microsoft.com/office/drawing/2014/main" id="{BEF21C9F-7BDD-117A-0037-231BC35A4A5E}"/>
               </a:ext>
             </a:extLst>
           </p:cNvPr>
@@ -14002,7 +14623,7 @@
           <p:cNvPr id="8" name="Rectángulo: esquinas redondeadas 7">
             <a:extLst>
               <a:ext uri="{FF2B5EF4-FFF2-40B4-BE49-F238E27FC236}">
-                <a16:creationId xmlns:a16="http://schemas.microsoft.com/office/drawing/2014/main" id="{9B3107BF-D4EE-7A0B-11C0-BA5D9EED370B}"/>
+                <a16:creationId xmlns:a16="http://schemas.microsoft.com/office/drawing/2014/main" id="{8CA9703B-CA62-E505-0BC4-DB2B2D51319D}"/>
               </a:ext>
             </a:extLst>
           </p:cNvPr>
@@ -14056,7 +14677,7 @@
           <p:cNvPr id="9" name="CuadroTexto 8">
             <a:extLst>
               <a:ext uri="{FF2B5EF4-FFF2-40B4-BE49-F238E27FC236}">
-                <a16:creationId xmlns:a16="http://schemas.microsoft.com/office/drawing/2014/main" id="{540737B3-9BA6-E23A-E014-D2BC35D3938C}"/>
+                <a16:creationId xmlns:a16="http://schemas.microsoft.com/office/drawing/2014/main" id="{0712D07B-B4CE-7B51-FA6E-9A9E87A92548}"/>
               </a:ext>
             </a:extLst>
           </p:cNvPr>
@@ -14096,7 +14717,7 @@
           <p:cNvPr id="10" name="CuadroTexto 9">
             <a:extLst>
               <a:ext uri="{FF2B5EF4-FFF2-40B4-BE49-F238E27FC236}">
-                <a16:creationId xmlns:a16="http://schemas.microsoft.com/office/drawing/2014/main" id="{10DDF005-F43D-EA6A-52A9-D58533453705}"/>
+                <a16:creationId xmlns:a16="http://schemas.microsoft.com/office/drawing/2014/main" id="{443EE948-256D-0643-624C-66C5E5933FB7}"/>
               </a:ext>
             </a:extLst>
           </p:cNvPr>
@@ -14136,7 +14757,7 @@
           <p:cNvPr id="11" name="Rectángulo: esquinas redondeadas 10">
             <a:extLst>
               <a:ext uri="{FF2B5EF4-FFF2-40B4-BE49-F238E27FC236}">
-                <a16:creationId xmlns:a16="http://schemas.microsoft.com/office/drawing/2014/main" id="{D28CA2DA-CA5A-152C-1581-A26A90F51AD9}"/>
+                <a16:creationId xmlns:a16="http://schemas.microsoft.com/office/drawing/2014/main" id="{37B69794-AC23-1AA4-AD61-B120A9E2133E}"/>
               </a:ext>
             </a:extLst>
           </p:cNvPr>
@@ -14190,7 +14811,7 @@
           <p:cNvPr id="12" name="CuadroTexto 11">
             <a:extLst>
               <a:ext uri="{FF2B5EF4-FFF2-40B4-BE49-F238E27FC236}">
-                <a16:creationId xmlns:a16="http://schemas.microsoft.com/office/drawing/2014/main" id="{56FF54C7-7A1A-BB4E-8DC4-DFA1B7A0B0A1}"/>
+                <a16:creationId xmlns:a16="http://schemas.microsoft.com/office/drawing/2014/main" id="{1C6FE4E0-0CE0-C5F5-02B6-6B3232402195}"/>
               </a:ext>
             </a:extLst>
           </p:cNvPr>
@@ -14230,7 +14851,7 @@
           <p:cNvPr id="13" name="CuadroTexto 12">
             <a:extLst>
               <a:ext uri="{FF2B5EF4-FFF2-40B4-BE49-F238E27FC236}">
-                <a16:creationId xmlns:a16="http://schemas.microsoft.com/office/drawing/2014/main" id="{0CB6EDC4-7B76-F30B-4B3E-0FAEC28361B0}"/>
+                <a16:creationId xmlns:a16="http://schemas.microsoft.com/office/drawing/2014/main" id="{31C624D6-21BD-CC92-0A83-5A6A2A831D6C}"/>
               </a:ext>
             </a:extLst>
           </p:cNvPr>
@@ -14270,7 +14891,7 @@
           <p:cNvPr id="14" name="Rectángulo: esquinas redondeadas 13">
             <a:extLst>
               <a:ext uri="{FF2B5EF4-FFF2-40B4-BE49-F238E27FC236}">
-                <a16:creationId xmlns:a16="http://schemas.microsoft.com/office/drawing/2014/main" id="{50BE36DB-37F1-7802-82CE-6BFDD0A97584}"/>
+                <a16:creationId xmlns:a16="http://schemas.microsoft.com/office/drawing/2014/main" id="{7AD01AB8-75FA-48EF-9A9E-0C26B91515F5}"/>
               </a:ext>
             </a:extLst>
           </p:cNvPr>
@@ -14324,7 +14945,7 @@
           <p:cNvPr id="15" name="CuadroTexto 14">
             <a:extLst>
               <a:ext uri="{FF2B5EF4-FFF2-40B4-BE49-F238E27FC236}">
-                <a16:creationId xmlns:a16="http://schemas.microsoft.com/office/drawing/2014/main" id="{1E315D79-31E9-563D-EA8A-B35B1B776951}"/>
+                <a16:creationId xmlns:a16="http://schemas.microsoft.com/office/drawing/2014/main" id="{48BB8B21-F1CD-6837-F7C2-38E95C3012D5}"/>
               </a:ext>
             </a:extLst>
           </p:cNvPr>
@@ -14364,7 +14985,7 @@
           <p:cNvPr id="16" name="CuadroTexto 15">
             <a:extLst>
               <a:ext uri="{FF2B5EF4-FFF2-40B4-BE49-F238E27FC236}">
-                <a16:creationId xmlns:a16="http://schemas.microsoft.com/office/drawing/2014/main" id="{F069965E-889D-2229-4AC6-29BC22B5CA86}"/>
+                <a16:creationId xmlns:a16="http://schemas.microsoft.com/office/drawing/2014/main" id="{7BCE2F74-FDA6-C2AE-2DF9-A6560E346D0F}"/>
               </a:ext>
             </a:extLst>
           </p:cNvPr>
@@ -14404,7 +15025,7 @@
           <p:cNvPr id="17" name="Rectángulo: esquinas redondeadas 16">
             <a:extLst>
               <a:ext uri="{FF2B5EF4-FFF2-40B4-BE49-F238E27FC236}">
-                <a16:creationId xmlns:a16="http://schemas.microsoft.com/office/drawing/2014/main" id="{66AE4EB9-A6BD-9C45-98DA-CAC575BF50D2}"/>
+                <a16:creationId xmlns:a16="http://schemas.microsoft.com/office/drawing/2014/main" id="{CA3D00FB-AF86-F693-9B68-C7B854B6A04E}"/>
               </a:ext>
             </a:extLst>
           </p:cNvPr>
@@ -14458,7 +15079,7 @@
           <p:cNvPr id="18" name="CuadroTexto 17">
             <a:extLst>
               <a:ext uri="{FF2B5EF4-FFF2-40B4-BE49-F238E27FC236}">
-                <a16:creationId xmlns:a16="http://schemas.microsoft.com/office/drawing/2014/main" id="{F73CEC4B-0907-44F0-FD5C-081B5F15AABB}"/>
+                <a16:creationId xmlns:a16="http://schemas.microsoft.com/office/drawing/2014/main" id="{0F493F7B-228D-F217-AB81-80DC3BB8E937}"/>
               </a:ext>
             </a:extLst>
           </p:cNvPr>
@@ -14498,7 +15119,7 @@
           <p:cNvPr id="19" name="CuadroTexto 18">
             <a:extLst>
               <a:ext uri="{FF2B5EF4-FFF2-40B4-BE49-F238E27FC236}">
-                <a16:creationId xmlns:a16="http://schemas.microsoft.com/office/drawing/2014/main" id="{35A0CF5E-50F8-8A72-0751-07F85047D490}"/>
+                <a16:creationId xmlns:a16="http://schemas.microsoft.com/office/drawing/2014/main" id="{5DAAA210-1E5C-5213-F123-1ACE99799C9E}"/>
               </a:ext>
             </a:extLst>
           </p:cNvPr>
@@ -14538,7 +15159,7 @@
           <p:cNvPr id="20" name="Rectángulo: esquinas redondeadas 19">
             <a:extLst>
               <a:ext uri="{FF2B5EF4-FFF2-40B4-BE49-F238E27FC236}">
-                <a16:creationId xmlns:a16="http://schemas.microsoft.com/office/drawing/2014/main" id="{1777B5E5-C7BA-67C4-AEA3-3A8A26A519ED}"/>
+                <a16:creationId xmlns:a16="http://schemas.microsoft.com/office/drawing/2014/main" id="{0B8E54AB-9400-1A60-C038-5BD2155C418A}"/>
               </a:ext>
             </a:extLst>
           </p:cNvPr>
@@ -14592,7 +15213,7 @@
           <p:cNvPr id="21" name="CuadroTexto 20">
             <a:extLst>
               <a:ext uri="{FF2B5EF4-FFF2-40B4-BE49-F238E27FC236}">
-                <a16:creationId xmlns:a16="http://schemas.microsoft.com/office/drawing/2014/main" id="{C72ABDFE-AAF1-AB79-4E0B-C9BE08291F26}"/>
+                <a16:creationId xmlns:a16="http://schemas.microsoft.com/office/drawing/2014/main" id="{E8B4156F-9642-CA04-F9F4-5F81E86A082C}"/>
               </a:ext>
             </a:extLst>
           </p:cNvPr>
@@ -14632,7 +15253,7 @@
           <p:cNvPr id="22" name="CuadroTexto 21">
             <a:extLst>
               <a:ext uri="{FF2B5EF4-FFF2-40B4-BE49-F238E27FC236}">
-                <a16:creationId xmlns:a16="http://schemas.microsoft.com/office/drawing/2014/main" id="{596F02C3-3E14-20E1-AFFD-0EE274324B03}"/>
+                <a16:creationId xmlns:a16="http://schemas.microsoft.com/office/drawing/2014/main" id="{E8065AA8-24E4-E5EC-CFD5-503C5D036A1B}"/>
               </a:ext>
             </a:extLst>
           </p:cNvPr>
@@ -14670,7 +15291,7 @@
     </p:spTree>
     <p:extLst>
       <p:ext uri="{BB962C8B-B14F-4D97-AF65-F5344CB8AC3E}">
-        <p14:creationId xmlns:p14="http://schemas.microsoft.com/office/powerpoint/2010/main" val="4095129708"/>
+        <p14:creationId xmlns:p14="http://schemas.microsoft.com/office/powerpoint/2010/main" val="3334752826"/>
       </p:ext>
     </p:extLst>
   </p:cSld>
@@ -14691,39 +15312,39 @@
         <a:sysClr val="window" lastClr="FFFFFF"/>
       </a:lt1>
       <a:dk2>
-        <a:srgbClr val="44546A"/>
+        <a:srgbClr val="0E2841"/>
       </a:dk2>
       <a:lt2>
-        <a:srgbClr val="E7E6E6"/>
+        <a:srgbClr val="E8E8E8"/>
       </a:lt2>
       <a:accent1>
-        <a:srgbClr val="4472C4"/>
+        <a:srgbClr val="156082"/>
       </a:accent1>
       <a:accent2>
-        <a:srgbClr val="ED7D31"/>
+        <a:srgbClr val="E97132"/>
       </a:accent2>
       <a:accent3>
-        <a:srgbClr val="A5A5A5"/>
+        <a:srgbClr val="196B24"/>
       </a:accent3>
       <a:accent4>
-        <a:srgbClr val="FFC000"/>
+        <a:srgbClr val="0F9ED5"/>
       </a:accent4>
       <a:accent5>
-        <a:srgbClr val="5B9BD5"/>
+        <a:srgbClr val="A02B93"/>
       </a:accent5>
       <a:accent6>
-        <a:srgbClr val="70AD47"/>
+        <a:srgbClr val="4EA72E"/>
       </a:accent6>
       <a:hlink>
-        <a:srgbClr val="0563C1"/>
+        <a:srgbClr val="467886"/>
       </a:hlink>
       <a:folHlink>
-        <a:srgbClr val="954F72"/>
+        <a:srgbClr val="96607D"/>
       </a:folHlink>
     </a:clrScheme>
     <a:fontScheme name="Office">
       <a:majorFont>
-        <a:latin typeface="Calibri Light" panose="020F0302020204030204"/>
+        <a:latin typeface="Aptos Display" panose="02110004020202020204"/>
         <a:ea typeface=""/>
         <a:cs typeface=""/>
         <a:font script="Jpan" typeface="游ゴシック Light"/>
@@ -14775,7 +15396,7 @@
         <a:font script="Tfng" typeface="Ebrima"/>
       </a:majorFont>
       <a:minorFont>
-        <a:latin typeface="Calibri" panose="020F0502020204030204"/>
+        <a:latin typeface="Aptos" panose="02110004020202020204"/>
         <a:ea typeface=""/>
         <a:cs typeface=""/>
         <a:font script="Jpan" typeface="游ゴシック"/>
@@ -14886,13 +15507,6 @@
         </a:gradFill>
       </a:fillStyleLst>
       <a:lnStyleLst>
-        <a:ln w="6350" cap="flat" cmpd="sng" algn="ctr">
-          <a:solidFill>
-            <a:schemeClr val="phClr"/>
-          </a:solidFill>
-          <a:prstDash val="solid"/>
-          <a:miter lim="800000"/>
-        </a:ln>
         <a:ln w="12700" cap="flat" cmpd="sng" algn="ctr">
           <a:solidFill>
             <a:schemeClr val="phClr"/>
@@ -14901,6 +15515,13 @@
           <a:miter lim="800000"/>
         </a:ln>
         <a:ln w="19050" cap="flat" cmpd="sng" algn="ctr">
+          <a:solidFill>
+            <a:schemeClr val="phClr"/>
+          </a:solidFill>
+          <a:prstDash val="solid"/>
+          <a:miter lim="800000"/>
+        </a:ln>
+        <a:ln w="25400" cap="flat" cmpd="sng" algn="ctr">
           <a:solidFill>
             <a:schemeClr val="phClr"/>
           </a:solidFill>
@@ -14965,11 +15586,31 @@
       </a:bgFillStyleLst>
     </a:fmtScheme>
   </a:themeElements>
-  <a:objectDefaults/>
+  <a:objectDefaults>
+    <a:lnDef>
+      <a:spPr/>
+      <a:bodyPr/>
+      <a:lstStyle/>
+      <a:style>
+        <a:lnRef idx="2">
+          <a:schemeClr val="accent1"/>
+        </a:lnRef>
+        <a:fillRef idx="0">
+          <a:schemeClr val="accent1"/>
+        </a:fillRef>
+        <a:effectRef idx="1">
+          <a:schemeClr val="accent1"/>
+        </a:effectRef>
+        <a:fontRef idx="minor">
+          <a:schemeClr val="tx1"/>
+        </a:fontRef>
+      </a:style>
+    </a:lnDef>
+  </a:objectDefaults>
   <a:extraClrSchemeLst/>
   <a:extLst>
     <a:ext uri="{05A4C25C-085E-4340-85A3-A5531E510DB2}">
-      <thm15:themeFamily xmlns:thm15="http://schemas.microsoft.com/office/thememl/2012/main" name="Office Theme" id="{62F939B6-93AF-4DB8-9C6B-D6C7DFDC589F}" vid="{4A3C46E8-61CC-4603-A589-7422A47A8E4A}"/>
+      <thm15:themeFamily xmlns:thm15="http://schemas.microsoft.com/office/thememl/2012/main" name="Office Theme" id="{2E142A2C-CD16-42D6-873A-C26D2A0506FA}" vid="{1BDDFF52-6CD6-40A5-AB3C-68EB2F1E4D0A}"/>
     </a:ext>
   </a:extLst>
 </a:theme>
@@ -14986,39 +15627,39 @@
         <a:sysClr val="window" lastClr="FFFFFF"/>
       </a:lt1>
       <a:dk2>
-        <a:srgbClr val="44546A"/>
+        <a:srgbClr val="0E2841"/>
       </a:dk2>
       <a:lt2>
-        <a:srgbClr val="E7E6E6"/>
+        <a:srgbClr val="E8E8E8"/>
       </a:lt2>
       <a:accent1>
-        <a:srgbClr val="4472C4"/>
+        <a:srgbClr val="156082"/>
       </a:accent1>
       <a:accent2>
-        <a:srgbClr val="ED7D31"/>
+        <a:srgbClr val="E97132"/>
       </a:accent2>
       <a:accent3>
-        <a:srgbClr val="A5A5A5"/>
+        <a:srgbClr val="196B24"/>
       </a:accent3>
       <a:accent4>
-        <a:srgbClr val="FFC000"/>
+        <a:srgbClr val="0F9ED5"/>
       </a:accent4>
       <a:accent5>
-        <a:srgbClr val="5B9BD5"/>
+        <a:srgbClr val="A02B93"/>
       </a:accent5>
       <a:accent6>
-        <a:srgbClr val="70AD47"/>
+        <a:srgbClr val="4EA72E"/>
       </a:accent6>
       <a:hlink>
-        <a:srgbClr val="0563C1"/>
+        <a:srgbClr val="467886"/>
       </a:hlink>
       <a:folHlink>
-        <a:srgbClr val="954F72"/>
+        <a:srgbClr val="96607D"/>
       </a:folHlink>
     </a:clrScheme>
     <a:fontScheme name="Office">
       <a:majorFont>
-        <a:latin typeface="Calibri Light" panose="020F0302020204030204"/>
+        <a:latin typeface="Aptos Display" panose="02110004020202020204"/>
         <a:ea typeface=""/>
         <a:cs typeface=""/>
         <a:font script="Jpan" typeface="游ゴシック Light"/>
@@ -15070,7 +15711,7 @@
         <a:font script="Tfng" typeface="Ebrima"/>
       </a:majorFont>
       <a:minorFont>
-        <a:latin typeface="Calibri" panose="020F0502020204030204"/>
+        <a:latin typeface="Aptos" panose="02110004020202020204"/>
         <a:ea typeface=""/>
         <a:cs typeface=""/>
         <a:font script="Jpan" typeface="游ゴシック"/>
@@ -15181,13 +15822,6 @@
         </a:gradFill>
       </a:fillStyleLst>
       <a:lnStyleLst>
-        <a:ln w="6350" cap="flat" cmpd="sng" algn="ctr">
-          <a:solidFill>
-            <a:schemeClr val="phClr"/>
-          </a:solidFill>
-          <a:prstDash val="solid"/>
-          <a:miter lim="800000"/>
-        </a:ln>
         <a:ln w="12700" cap="flat" cmpd="sng" algn="ctr">
           <a:solidFill>
             <a:schemeClr val="phClr"/>
@@ -15196,6 +15830,13 @@
           <a:miter lim="800000"/>
         </a:ln>
         <a:ln w="19050" cap="flat" cmpd="sng" algn="ctr">
+          <a:solidFill>
+            <a:schemeClr val="phClr"/>
+          </a:solidFill>
+          <a:prstDash val="solid"/>
+          <a:miter lim="800000"/>
+        </a:ln>
+        <a:ln w="25400" cap="flat" cmpd="sng" algn="ctr">
           <a:solidFill>
             <a:schemeClr val="phClr"/>
           </a:solidFill>
@@ -15260,11 +15901,31 @@
       </a:bgFillStyleLst>
     </a:fmtScheme>
   </a:themeElements>
-  <a:objectDefaults/>
+  <a:objectDefaults>
+    <a:lnDef>
+      <a:spPr/>
+      <a:bodyPr/>
+      <a:lstStyle/>
+      <a:style>
+        <a:lnRef idx="2">
+          <a:schemeClr val="accent1"/>
+        </a:lnRef>
+        <a:fillRef idx="0">
+          <a:schemeClr val="accent1"/>
+        </a:fillRef>
+        <a:effectRef idx="1">
+          <a:schemeClr val="accent1"/>
+        </a:effectRef>
+        <a:fontRef idx="minor">
+          <a:schemeClr val="tx1"/>
+        </a:fontRef>
+      </a:style>
+    </a:lnDef>
+  </a:objectDefaults>
   <a:extraClrSchemeLst/>
   <a:extLst>
     <a:ext uri="{05A4C25C-085E-4340-85A3-A5531E510DB2}">
-      <thm15:themeFamily xmlns:thm15="http://schemas.microsoft.com/office/thememl/2012/main" name="Office Theme" id="{62F939B6-93AF-4DB8-9C6B-D6C7DFDC589F}" vid="{4A3C46E8-61CC-4603-A589-7422A47A8E4A}"/>
+      <thm15:themeFamily xmlns:thm15="http://schemas.microsoft.com/office/thememl/2012/main" name="Office Theme" id="{2E142A2C-CD16-42D6-873A-C26D2A0506FA}" vid="{1BDDFF52-6CD6-40A5-AB3C-68EB2F1E4D0A}"/>
     </a:ext>
   </a:extLst>
 </a:theme>

--- a/docs/presentacion-defensa-final.pptx
+++ b/docs/presentacion-defensa-final.pptx
@@ -208,7 +208,7 @@
             </a:lvl1pPr>
           </a:lstStyle>
           <a:p>
-            <a:fld id="{184CBF3D-31FC-4D43-9FFA-B7306C961877}" type="datetimeFigureOut">
+            <a:fld id="{8FBF001C-8709-4ADC-8371-900A171C88AA}" type="datetimeFigureOut">
               <a:rPr lang="es-ES" smtClean="0"/>
               <a:t>04/06/2026</a:t>
             </a:fld>
@@ -366,7 +366,7 @@
             </a:lvl1pPr>
           </a:lstStyle>
           <a:p>
-            <a:fld id="{1C152D8B-9EAE-432B-BDC7-4C9E536786B4}" type="slidenum">
+            <a:fld id="{B93001FF-24BA-4316-B9A8-D8767091175D}" type="slidenum">
               <a:rPr lang="es-ES" smtClean="0"/>
               <a:t>‹Nº›</a:t>
             </a:fld>
@@ -377,7 +377,7 @@
     </p:spTree>
     <p:extLst>
       <p:ext uri="{BB962C8B-B14F-4D97-AF65-F5344CB8AC3E}">
-        <p14:creationId xmlns:p14="http://schemas.microsoft.com/office/powerpoint/2010/main" val="727094697"/>
+        <p14:creationId xmlns:p14="http://schemas.microsoft.com/office/powerpoint/2010/main" val="3743991715"/>
       </p:ext>
     </p:extLst>
   </p:cSld>
@@ -546,7 +546,7 @@
           <a:bodyPr/>
           <a:lstStyle/>
           <a:p>
-            <a:fld id="{1C152D8B-9EAE-432B-BDC7-4C9E536786B4}" type="slidenum">
+            <a:fld id="{B93001FF-24BA-4316-B9A8-D8767091175D}" type="slidenum">
               <a:rPr lang="es-ES" smtClean="0"/>
               <a:t>1</a:t>
             </a:fld>
@@ -557,7 +557,7 @@
     </p:spTree>
     <p:extLst>
       <p:ext uri="{BB962C8B-B14F-4D97-AF65-F5344CB8AC3E}">
-        <p14:creationId xmlns:p14="http://schemas.microsoft.com/office/powerpoint/2010/main" val="2531169814"/>
+        <p14:creationId xmlns:p14="http://schemas.microsoft.com/office/powerpoint/2010/main" val="215697045"/>
       </p:ext>
     </p:extLst>
   </p:cSld>
@@ -636,7 +636,7 @@
           <a:bodyPr/>
           <a:lstStyle/>
           <a:p>
-            <a:fld id="{1C152D8B-9EAE-432B-BDC7-4C9E536786B4}" type="slidenum">
+            <a:fld id="{B93001FF-24BA-4316-B9A8-D8767091175D}" type="slidenum">
               <a:rPr lang="es-ES" smtClean="0"/>
               <a:t>10</a:t>
             </a:fld>
@@ -647,7 +647,7 @@
     </p:spTree>
     <p:extLst>
       <p:ext uri="{BB962C8B-B14F-4D97-AF65-F5344CB8AC3E}">
-        <p14:creationId xmlns:p14="http://schemas.microsoft.com/office/powerpoint/2010/main" val="3836444455"/>
+        <p14:creationId xmlns:p14="http://schemas.microsoft.com/office/powerpoint/2010/main" val="3986796827"/>
       </p:ext>
     </p:extLst>
   </p:cSld>
@@ -726,7 +726,7 @@
           <a:bodyPr/>
           <a:lstStyle/>
           <a:p>
-            <a:fld id="{1C152D8B-9EAE-432B-BDC7-4C9E536786B4}" type="slidenum">
+            <a:fld id="{B93001FF-24BA-4316-B9A8-D8767091175D}" type="slidenum">
               <a:rPr lang="es-ES" smtClean="0"/>
               <a:t>11</a:t>
             </a:fld>
@@ -737,7 +737,7 @@
     </p:spTree>
     <p:extLst>
       <p:ext uri="{BB962C8B-B14F-4D97-AF65-F5344CB8AC3E}">
-        <p14:creationId xmlns:p14="http://schemas.microsoft.com/office/powerpoint/2010/main" val="2570846676"/>
+        <p14:creationId xmlns:p14="http://schemas.microsoft.com/office/powerpoint/2010/main" val="2276064624"/>
       </p:ext>
     </p:extLst>
   </p:cSld>
@@ -816,7 +816,7 @@
           <a:bodyPr/>
           <a:lstStyle/>
           <a:p>
-            <a:fld id="{1C152D8B-9EAE-432B-BDC7-4C9E536786B4}" type="slidenum">
+            <a:fld id="{B93001FF-24BA-4316-B9A8-D8767091175D}" type="slidenum">
               <a:rPr lang="es-ES" smtClean="0"/>
               <a:t>12</a:t>
             </a:fld>
@@ -827,7 +827,7 @@
     </p:spTree>
     <p:extLst>
       <p:ext uri="{BB962C8B-B14F-4D97-AF65-F5344CB8AC3E}">
-        <p14:creationId xmlns:p14="http://schemas.microsoft.com/office/powerpoint/2010/main" val="2681286729"/>
+        <p14:creationId xmlns:p14="http://schemas.microsoft.com/office/powerpoint/2010/main" val="1059339686"/>
       </p:ext>
     </p:extLst>
   </p:cSld>
@@ -906,7 +906,7 @@
           <a:bodyPr/>
           <a:lstStyle/>
           <a:p>
-            <a:fld id="{1C152D8B-9EAE-432B-BDC7-4C9E536786B4}" type="slidenum">
+            <a:fld id="{B93001FF-24BA-4316-B9A8-D8767091175D}" type="slidenum">
               <a:rPr lang="es-ES" smtClean="0"/>
               <a:t>13</a:t>
             </a:fld>
@@ -917,7 +917,7 @@
     </p:spTree>
     <p:extLst>
       <p:ext uri="{BB962C8B-B14F-4D97-AF65-F5344CB8AC3E}">
-        <p14:creationId xmlns:p14="http://schemas.microsoft.com/office/powerpoint/2010/main" val="3551639126"/>
+        <p14:creationId xmlns:p14="http://schemas.microsoft.com/office/powerpoint/2010/main" val="640734711"/>
       </p:ext>
     </p:extLst>
   </p:cSld>
@@ -1003,7 +1003,7 @@
           <a:bodyPr/>
           <a:lstStyle/>
           <a:p>
-            <a:fld id="{1C152D8B-9EAE-432B-BDC7-4C9E536786B4}" type="slidenum">
+            <a:fld id="{B93001FF-24BA-4316-B9A8-D8767091175D}" type="slidenum">
               <a:rPr lang="es-ES" smtClean="0"/>
               <a:t>14</a:t>
             </a:fld>
@@ -1014,7 +1014,7 @@
     </p:spTree>
     <p:extLst>
       <p:ext uri="{BB962C8B-B14F-4D97-AF65-F5344CB8AC3E}">
-        <p14:creationId xmlns:p14="http://schemas.microsoft.com/office/powerpoint/2010/main" val="926103025"/>
+        <p14:creationId xmlns:p14="http://schemas.microsoft.com/office/powerpoint/2010/main" val="2637870448"/>
       </p:ext>
     </p:extLst>
   </p:cSld>
@@ -1093,7 +1093,7 @@
           <a:bodyPr/>
           <a:lstStyle/>
           <a:p>
-            <a:fld id="{1C152D8B-9EAE-432B-BDC7-4C9E536786B4}" type="slidenum">
+            <a:fld id="{B93001FF-24BA-4316-B9A8-D8767091175D}" type="slidenum">
               <a:rPr lang="es-ES" smtClean="0"/>
               <a:t>15</a:t>
             </a:fld>
@@ -1104,7 +1104,7 @@
     </p:spTree>
     <p:extLst>
       <p:ext uri="{BB962C8B-B14F-4D97-AF65-F5344CB8AC3E}">
-        <p14:creationId xmlns:p14="http://schemas.microsoft.com/office/powerpoint/2010/main" val="1322989480"/>
+        <p14:creationId xmlns:p14="http://schemas.microsoft.com/office/powerpoint/2010/main" val="3021342473"/>
       </p:ext>
     </p:extLst>
   </p:cSld>
@@ -1183,7 +1183,7 @@
           <a:bodyPr/>
           <a:lstStyle/>
           <a:p>
-            <a:fld id="{1C152D8B-9EAE-432B-BDC7-4C9E536786B4}" type="slidenum">
+            <a:fld id="{B93001FF-24BA-4316-B9A8-D8767091175D}" type="slidenum">
               <a:rPr lang="es-ES" smtClean="0"/>
               <a:t>16</a:t>
             </a:fld>
@@ -1194,7 +1194,7 @@
     </p:spTree>
     <p:extLst>
       <p:ext uri="{BB962C8B-B14F-4D97-AF65-F5344CB8AC3E}">
-        <p14:creationId xmlns:p14="http://schemas.microsoft.com/office/powerpoint/2010/main" val="1590726781"/>
+        <p14:creationId xmlns:p14="http://schemas.microsoft.com/office/powerpoint/2010/main" val="1484217553"/>
       </p:ext>
     </p:extLst>
   </p:cSld>
@@ -1273,7 +1273,7 @@
           <a:bodyPr/>
           <a:lstStyle/>
           <a:p>
-            <a:fld id="{1C152D8B-9EAE-432B-BDC7-4C9E536786B4}" type="slidenum">
+            <a:fld id="{B93001FF-24BA-4316-B9A8-D8767091175D}" type="slidenum">
               <a:rPr lang="es-ES" smtClean="0"/>
               <a:t>17</a:t>
             </a:fld>
@@ -1284,7 +1284,7 @@
     </p:spTree>
     <p:extLst>
       <p:ext uri="{BB962C8B-B14F-4D97-AF65-F5344CB8AC3E}">
-        <p14:creationId xmlns:p14="http://schemas.microsoft.com/office/powerpoint/2010/main" val="4215061410"/>
+        <p14:creationId xmlns:p14="http://schemas.microsoft.com/office/powerpoint/2010/main" val="3605682471"/>
       </p:ext>
     </p:extLst>
   </p:cSld>
@@ -1363,7 +1363,7 @@
           <a:bodyPr/>
           <a:lstStyle/>
           <a:p>
-            <a:fld id="{1C152D8B-9EAE-432B-BDC7-4C9E536786B4}" type="slidenum">
+            <a:fld id="{B93001FF-24BA-4316-B9A8-D8767091175D}" type="slidenum">
               <a:rPr lang="es-ES" smtClean="0"/>
               <a:t>18</a:t>
             </a:fld>
@@ -1374,7 +1374,7 @@
     </p:spTree>
     <p:extLst>
       <p:ext uri="{BB962C8B-B14F-4D97-AF65-F5344CB8AC3E}">
-        <p14:creationId xmlns:p14="http://schemas.microsoft.com/office/powerpoint/2010/main" val="885315946"/>
+        <p14:creationId xmlns:p14="http://schemas.microsoft.com/office/powerpoint/2010/main" val="1303702541"/>
       </p:ext>
     </p:extLst>
   </p:cSld>
@@ -1452,7 +1452,7 @@
           <a:bodyPr/>
           <a:lstStyle/>
           <a:p>
-            <a:fld id="{1C152D8B-9EAE-432B-BDC7-4C9E536786B4}" type="slidenum">
+            <a:fld id="{B93001FF-24BA-4316-B9A8-D8767091175D}" type="slidenum">
               <a:rPr lang="es-ES" smtClean="0"/>
               <a:t>19</a:t>
             </a:fld>
@@ -1463,7 +1463,7 @@
     </p:spTree>
     <p:extLst>
       <p:ext uri="{BB962C8B-B14F-4D97-AF65-F5344CB8AC3E}">
-        <p14:creationId xmlns:p14="http://schemas.microsoft.com/office/powerpoint/2010/main" val="2634313282"/>
+        <p14:creationId xmlns:p14="http://schemas.microsoft.com/office/powerpoint/2010/main" val="2211849095"/>
       </p:ext>
     </p:extLst>
   </p:cSld>
@@ -1542,7 +1542,7 @@
           <a:bodyPr/>
           <a:lstStyle/>
           <a:p>
-            <a:fld id="{1C152D8B-9EAE-432B-BDC7-4C9E536786B4}" type="slidenum">
+            <a:fld id="{B93001FF-24BA-4316-B9A8-D8767091175D}" type="slidenum">
               <a:rPr lang="es-ES" smtClean="0"/>
               <a:t>2</a:t>
             </a:fld>
@@ -1553,7 +1553,7 @@
     </p:spTree>
     <p:extLst>
       <p:ext uri="{BB962C8B-B14F-4D97-AF65-F5344CB8AC3E}">
-        <p14:creationId xmlns:p14="http://schemas.microsoft.com/office/powerpoint/2010/main" val="457122636"/>
+        <p14:creationId xmlns:p14="http://schemas.microsoft.com/office/powerpoint/2010/main" val="3549670956"/>
       </p:ext>
     </p:extLst>
   </p:cSld>
@@ -1633,7 +1633,7 @@
           <a:bodyPr/>
           <a:lstStyle/>
           <a:p>
-            <a:fld id="{1C152D8B-9EAE-432B-BDC7-4C9E536786B4}" type="slidenum">
+            <a:fld id="{B93001FF-24BA-4316-B9A8-D8767091175D}" type="slidenum">
               <a:rPr lang="es-ES" smtClean="0"/>
               <a:t>3</a:t>
             </a:fld>
@@ -1644,7 +1644,7 @@
     </p:spTree>
     <p:extLst>
       <p:ext uri="{BB962C8B-B14F-4D97-AF65-F5344CB8AC3E}">
-        <p14:creationId xmlns:p14="http://schemas.microsoft.com/office/powerpoint/2010/main" val="502439784"/>
+        <p14:creationId xmlns:p14="http://schemas.microsoft.com/office/powerpoint/2010/main" val="4073137116"/>
       </p:ext>
     </p:extLst>
   </p:cSld>
@@ -1724,7 +1724,7 @@
           <a:bodyPr/>
           <a:lstStyle/>
           <a:p>
-            <a:fld id="{1C152D8B-9EAE-432B-BDC7-4C9E536786B4}" type="slidenum">
+            <a:fld id="{B93001FF-24BA-4316-B9A8-D8767091175D}" type="slidenum">
               <a:rPr lang="es-ES" smtClean="0"/>
               <a:t>4</a:t>
             </a:fld>
@@ -1735,7 +1735,7 @@
     </p:spTree>
     <p:extLst>
       <p:ext uri="{BB962C8B-B14F-4D97-AF65-F5344CB8AC3E}">
-        <p14:creationId xmlns:p14="http://schemas.microsoft.com/office/powerpoint/2010/main" val="1552827984"/>
+        <p14:creationId xmlns:p14="http://schemas.microsoft.com/office/powerpoint/2010/main" val="4051446067"/>
       </p:ext>
     </p:extLst>
   </p:cSld>
@@ -1818,7 +1818,7 @@
           <a:bodyPr/>
           <a:lstStyle/>
           <a:p>
-            <a:fld id="{1C152D8B-9EAE-432B-BDC7-4C9E536786B4}" type="slidenum">
+            <a:fld id="{B93001FF-24BA-4316-B9A8-D8767091175D}" type="slidenum">
               <a:rPr lang="es-ES" smtClean="0"/>
               <a:t>5</a:t>
             </a:fld>
@@ -1829,7 +1829,7 @@
     </p:spTree>
     <p:extLst>
       <p:ext uri="{BB962C8B-B14F-4D97-AF65-F5344CB8AC3E}">
-        <p14:creationId xmlns:p14="http://schemas.microsoft.com/office/powerpoint/2010/main" val="3306427844"/>
+        <p14:creationId xmlns:p14="http://schemas.microsoft.com/office/powerpoint/2010/main" val="1828890381"/>
       </p:ext>
     </p:extLst>
   </p:cSld>
@@ -1908,7 +1908,7 @@
           <a:bodyPr/>
           <a:lstStyle/>
           <a:p>
-            <a:fld id="{1C152D8B-9EAE-432B-BDC7-4C9E536786B4}" type="slidenum">
+            <a:fld id="{B93001FF-24BA-4316-B9A8-D8767091175D}" type="slidenum">
               <a:rPr lang="es-ES" smtClean="0"/>
               <a:t>6</a:t>
             </a:fld>
@@ -1919,7 +1919,7 @@
     </p:spTree>
     <p:extLst>
       <p:ext uri="{BB962C8B-B14F-4D97-AF65-F5344CB8AC3E}">
-        <p14:creationId xmlns:p14="http://schemas.microsoft.com/office/powerpoint/2010/main" val="2298830266"/>
+        <p14:creationId xmlns:p14="http://schemas.microsoft.com/office/powerpoint/2010/main" val="863347273"/>
       </p:ext>
     </p:extLst>
   </p:cSld>
@@ -1999,7 +1999,7 @@
           <a:bodyPr/>
           <a:lstStyle/>
           <a:p>
-            <a:fld id="{1C152D8B-9EAE-432B-BDC7-4C9E536786B4}" type="slidenum">
+            <a:fld id="{B93001FF-24BA-4316-B9A8-D8767091175D}" type="slidenum">
               <a:rPr lang="es-ES" smtClean="0"/>
               <a:t>7</a:t>
             </a:fld>
@@ -2010,7 +2010,7 @@
     </p:spTree>
     <p:extLst>
       <p:ext uri="{BB962C8B-B14F-4D97-AF65-F5344CB8AC3E}">
-        <p14:creationId xmlns:p14="http://schemas.microsoft.com/office/powerpoint/2010/main" val="1874687430"/>
+        <p14:creationId xmlns:p14="http://schemas.microsoft.com/office/powerpoint/2010/main" val="3145180591"/>
       </p:ext>
     </p:extLst>
   </p:cSld>
@@ -2089,7 +2089,7 @@
           <a:bodyPr/>
           <a:lstStyle/>
           <a:p>
-            <a:fld id="{1C152D8B-9EAE-432B-BDC7-4C9E536786B4}" type="slidenum">
+            <a:fld id="{B93001FF-24BA-4316-B9A8-D8767091175D}" type="slidenum">
               <a:rPr lang="es-ES" smtClean="0"/>
               <a:t>8</a:t>
             </a:fld>
@@ -2100,7 +2100,7 @@
     </p:spTree>
     <p:extLst>
       <p:ext uri="{BB962C8B-B14F-4D97-AF65-F5344CB8AC3E}">
-        <p14:creationId xmlns:p14="http://schemas.microsoft.com/office/powerpoint/2010/main" val="2190473250"/>
+        <p14:creationId xmlns:p14="http://schemas.microsoft.com/office/powerpoint/2010/main" val="2676240005"/>
       </p:ext>
     </p:extLst>
   </p:cSld>
@@ -2180,7 +2180,7 @@
           <a:bodyPr/>
           <a:lstStyle/>
           <a:p>
-            <a:fld id="{1C152D8B-9EAE-432B-BDC7-4C9E536786B4}" type="slidenum">
+            <a:fld id="{B93001FF-24BA-4316-B9A8-D8767091175D}" type="slidenum">
               <a:rPr lang="es-ES" smtClean="0"/>
               <a:t>9</a:t>
             </a:fld>
@@ -2191,7 +2191,7 @@
     </p:spTree>
     <p:extLst>
       <p:ext uri="{BB962C8B-B14F-4D97-AF65-F5344CB8AC3E}">
-        <p14:creationId xmlns:p14="http://schemas.microsoft.com/office/powerpoint/2010/main" val="803817503"/>
+        <p14:creationId xmlns:p14="http://schemas.microsoft.com/office/powerpoint/2010/main" val="1482581176"/>
       </p:ext>
     </p:extLst>
   </p:cSld>
@@ -2223,7 +2223,7 @@
           <p:cNvPr id="2" name="Título 1">
             <a:extLst>
               <a:ext uri="{FF2B5EF4-FFF2-40B4-BE49-F238E27FC236}">
-                <a16:creationId xmlns:a16="http://schemas.microsoft.com/office/drawing/2014/main" id="{77B1E083-2DE9-2B66-A143-9DB605A16C68}"/>
+                <a16:creationId xmlns:a16="http://schemas.microsoft.com/office/drawing/2014/main" id="{9FBF71DD-8A1A-3A5C-427E-F42D1B5597E3}"/>
               </a:ext>
             </a:extLst>
           </p:cNvPr>
@@ -2260,7 +2260,7 @@
           <p:cNvPr id="3" name="Subtítulo 2">
             <a:extLst>
               <a:ext uri="{FF2B5EF4-FFF2-40B4-BE49-F238E27FC236}">
-                <a16:creationId xmlns:a16="http://schemas.microsoft.com/office/drawing/2014/main" id="{81E00F32-054B-16E6-F311-F331F3BEE0FA}"/>
+                <a16:creationId xmlns:a16="http://schemas.microsoft.com/office/drawing/2014/main" id="{BFADDF58-6B19-3973-E9CA-309017CC0E93}"/>
               </a:ext>
             </a:extLst>
           </p:cNvPr>
@@ -2330,7 +2330,7 @@
           <p:cNvPr id="4" name="Marcador de fecha 3">
             <a:extLst>
               <a:ext uri="{FF2B5EF4-FFF2-40B4-BE49-F238E27FC236}">
-                <a16:creationId xmlns:a16="http://schemas.microsoft.com/office/drawing/2014/main" id="{C31736F5-F1FB-0962-4D51-EE6301522D0D}"/>
+                <a16:creationId xmlns:a16="http://schemas.microsoft.com/office/drawing/2014/main" id="{34C85AC0-8B5B-D328-C631-062B2A19CD38}"/>
               </a:ext>
             </a:extLst>
           </p:cNvPr>
@@ -2346,7 +2346,7 @@
           <a:bodyPr/>
           <a:lstStyle/>
           <a:p>
-            <a:fld id="{E73BE342-D7DD-451B-AD14-82C868274E08}" type="datetimeFigureOut">
+            <a:fld id="{E2E78F0F-3CEE-4885-8154-F908A2044D66}" type="datetimeFigureOut">
               <a:rPr lang="es-ES" smtClean="0"/>
               <a:t>04/06/2026</a:t>
             </a:fld>
@@ -2359,7 +2359,7 @@
           <p:cNvPr id="5" name="Marcador de pie de página 4">
             <a:extLst>
               <a:ext uri="{FF2B5EF4-FFF2-40B4-BE49-F238E27FC236}">
-                <a16:creationId xmlns:a16="http://schemas.microsoft.com/office/drawing/2014/main" id="{DC41C90E-ECF9-03D2-DC2B-3206ABFC530E}"/>
+                <a16:creationId xmlns:a16="http://schemas.microsoft.com/office/drawing/2014/main" id="{B2AAB737-A507-EDBB-C397-1439D07293A9}"/>
               </a:ext>
             </a:extLst>
           </p:cNvPr>
@@ -2384,7 +2384,7 @@
           <p:cNvPr id="6" name="Marcador de número de diapositiva 5">
             <a:extLst>
               <a:ext uri="{FF2B5EF4-FFF2-40B4-BE49-F238E27FC236}">
-                <a16:creationId xmlns:a16="http://schemas.microsoft.com/office/drawing/2014/main" id="{8AA5A52E-1DEC-3219-5095-916708A6FBA1}"/>
+                <a16:creationId xmlns:a16="http://schemas.microsoft.com/office/drawing/2014/main" id="{2FA276E1-F939-4447-B2B8-98A12AE7E336}"/>
               </a:ext>
             </a:extLst>
           </p:cNvPr>
@@ -2400,7 +2400,7 @@
           <a:bodyPr/>
           <a:lstStyle/>
           <a:p>
-            <a:fld id="{6FD9D725-7506-41FC-8170-7DB91405864C}" type="slidenum">
+            <a:fld id="{46952519-79A0-4158-88E8-8A74092916AE}" type="slidenum">
               <a:rPr lang="es-ES" smtClean="0"/>
               <a:t>‹Nº›</a:t>
             </a:fld>
@@ -2411,7 +2411,7 @@
     </p:spTree>
     <p:extLst>
       <p:ext uri="{BB962C8B-B14F-4D97-AF65-F5344CB8AC3E}">
-        <p14:creationId xmlns:p14="http://schemas.microsoft.com/office/powerpoint/2010/main" val="1441037677"/>
+        <p14:creationId xmlns:p14="http://schemas.microsoft.com/office/powerpoint/2010/main" val="3700646399"/>
       </p:ext>
     </p:extLst>
   </p:cSld>
@@ -2443,7 +2443,7 @@
           <p:cNvPr id="2" name="Título 1">
             <a:extLst>
               <a:ext uri="{FF2B5EF4-FFF2-40B4-BE49-F238E27FC236}">
-                <a16:creationId xmlns:a16="http://schemas.microsoft.com/office/drawing/2014/main" id="{41867CDB-1F48-341B-5341-4D0AB2A31AA6}"/>
+                <a16:creationId xmlns:a16="http://schemas.microsoft.com/office/drawing/2014/main" id="{9B87722E-DE3D-93DD-305E-988CCB27F62B}"/>
               </a:ext>
             </a:extLst>
           </p:cNvPr>
@@ -2471,7 +2471,7 @@
           <p:cNvPr id="3" name="Marcador de texto vertical 2">
             <a:extLst>
               <a:ext uri="{FF2B5EF4-FFF2-40B4-BE49-F238E27FC236}">
-                <a16:creationId xmlns:a16="http://schemas.microsoft.com/office/drawing/2014/main" id="{7A32BECA-B377-581A-AB8F-1C1DF6AAB5C2}"/>
+                <a16:creationId xmlns:a16="http://schemas.microsoft.com/office/drawing/2014/main" id="{52E4C930-243D-C30B-4FD9-28EE9B87F482}"/>
               </a:ext>
             </a:extLst>
           </p:cNvPr>
@@ -2528,7 +2528,7 @@
           <p:cNvPr id="4" name="Marcador de fecha 3">
             <a:extLst>
               <a:ext uri="{FF2B5EF4-FFF2-40B4-BE49-F238E27FC236}">
-                <a16:creationId xmlns:a16="http://schemas.microsoft.com/office/drawing/2014/main" id="{7E62BB1A-B502-B739-92B1-4D8141D845DB}"/>
+                <a16:creationId xmlns:a16="http://schemas.microsoft.com/office/drawing/2014/main" id="{0D8DB55F-BE8D-72C9-A021-31475D03CCF4}"/>
               </a:ext>
             </a:extLst>
           </p:cNvPr>
@@ -2544,7 +2544,7 @@
           <a:bodyPr/>
           <a:lstStyle/>
           <a:p>
-            <a:fld id="{E73BE342-D7DD-451B-AD14-82C868274E08}" type="datetimeFigureOut">
+            <a:fld id="{E2E78F0F-3CEE-4885-8154-F908A2044D66}" type="datetimeFigureOut">
               <a:rPr lang="es-ES" smtClean="0"/>
               <a:t>04/06/2026</a:t>
             </a:fld>
@@ -2557,7 +2557,7 @@
           <p:cNvPr id="5" name="Marcador de pie de página 4">
             <a:extLst>
               <a:ext uri="{FF2B5EF4-FFF2-40B4-BE49-F238E27FC236}">
-                <a16:creationId xmlns:a16="http://schemas.microsoft.com/office/drawing/2014/main" id="{192B4901-016D-D34F-87FF-ABDCC82A6C89}"/>
+                <a16:creationId xmlns:a16="http://schemas.microsoft.com/office/drawing/2014/main" id="{B88FAE5B-20B2-508A-C009-FE1D0EEDAC9A}"/>
               </a:ext>
             </a:extLst>
           </p:cNvPr>
@@ -2582,7 +2582,7 @@
           <p:cNvPr id="6" name="Marcador de número de diapositiva 5">
             <a:extLst>
               <a:ext uri="{FF2B5EF4-FFF2-40B4-BE49-F238E27FC236}">
-                <a16:creationId xmlns:a16="http://schemas.microsoft.com/office/drawing/2014/main" id="{A05B9670-88A5-BCAA-9330-164EB31FBBF0}"/>
+                <a16:creationId xmlns:a16="http://schemas.microsoft.com/office/drawing/2014/main" id="{0B0D45D1-ADB4-98BC-E695-0749FF3367C3}"/>
               </a:ext>
             </a:extLst>
           </p:cNvPr>
@@ -2598,7 +2598,7 @@
           <a:bodyPr/>
           <a:lstStyle/>
           <a:p>
-            <a:fld id="{6FD9D725-7506-41FC-8170-7DB91405864C}" type="slidenum">
+            <a:fld id="{46952519-79A0-4158-88E8-8A74092916AE}" type="slidenum">
               <a:rPr lang="es-ES" smtClean="0"/>
               <a:t>‹Nº›</a:t>
             </a:fld>
@@ -2609,7 +2609,7 @@
     </p:spTree>
     <p:extLst>
       <p:ext uri="{BB962C8B-B14F-4D97-AF65-F5344CB8AC3E}">
-        <p14:creationId xmlns:p14="http://schemas.microsoft.com/office/powerpoint/2010/main" val="49846488"/>
+        <p14:creationId xmlns:p14="http://schemas.microsoft.com/office/powerpoint/2010/main" val="4211537904"/>
       </p:ext>
     </p:extLst>
   </p:cSld>
@@ -2641,7 +2641,7 @@
           <p:cNvPr id="2" name="Título vertical 1">
             <a:extLst>
               <a:ext uri="{FF2B5EF4-FFF2-40B4-BE49-F238E27FC236}">
-                <a16:creationId xmlns:a16="http://schemas.microsoft.com/office/drawing/2014/main" id="{F21DB9FD-B75F-A7CC-1757-D330BD3928E5}"/>
+                <a16:creationId xmlns:a16="http://schemas.microsoft.com/office/drawing/2014/main" id="{AECC615D-0F68-C301-800C-618D72BA3B8C}"/>
               </a:ext>
             </a:extLst>
           </p:cNvPr>
@@ -2674,7 +2674,7 @@
           <p:cNvPr id="3" name="Marcador de texto vertical 2">
             <a:extLst>
               <a:ext uri="{FF2B5EF4-FFF2-40B4-BE49-F238E27FC236}">
-                <a16:creationId xmlns:a16="http://schemas.microsoft.com/office/drawing/2014/main" id="{EE55455F-2F2F-AAE6-8222-C6D24585E8F1}"/>
+                <a16:creationId xmlns:a16="http://schemas.microsoft.com/office/drawing/2014/main" id="{B169D8D1-1646-AF6B-BA39-BCC2DE2C3556}"/>
               </a:ext>
             </a:extLst>
           </p:cNvPr>
@@ -2736,7 +2736,7 @@
           <p:cNvPr id="4" name="Marcador de fecha 3">
             <a:extLst>
               <a:ext uri="{FF2B5EF4-FFF2-40B4-BE49-F238E27FC236}">
-                <a16:creationId xmlns:a16="http://schemas.microsoft.com/office/drawing/2014/main" id="{9E51DF2D-70AB-8B86-7FF7-A41E78099E40}"/>
+                <a16:creationId xmlns:a16="http://schemas.microsoft.com/office/drawing/2014/main" id="{1875E4F4-5197-2569-4397-EBED4D9A3416}"/>
               </a:ext>
             </a:extLst>
           </p:cNvPr>
@@ -2752,7 +2752,7 @@
           <a:bodyPr/>
           <a:lstStyle/>
           <a:p>
-            <a:fld id="{E73BE342-D7DD-451B-AD14-82C868274E08}" type="datetimeFigureOut">
+            <a:fld id="{E2E78F0F-3CEE-4885-8154-F908A2044D66}" type="datetimeFigureOut">
               <a:rPr lang="es-ES" smtClean="0"/>
               <a:t>04/06/2026</a:t>
             </a:fld>
@@ -2765,7 +2765,7 @@
           <p:cNvPr id="5" name="Marcador de pie de página 4">
             <a:extLst>
               <a:ext uri="{FF2B5EF4-FFF2-40B4-BE49-F238E27FC236}">
-                <a16:creationId xmlns:a16="http://schemas.microsoft.com/office/drawing/2014/main" id="{D8888822-40FF-1CC4-D788-FEC572EEE0A6}"/>
+                <a16:creationId xmlns:a16="http://schemas.microsoft.com/office/drawing/2014/main" id="{7943F178-470D-7AF8-678A-CD4E34483A47}"/>
               </a:ext>
             </a:extLst>
           </p:cNvPr>
@@ -2790,7 +2790,7 @@
           <p:cNvPr id="6" name="Marcador de número de diapositiva 5">
             <a:extLst>
               <a:ext uri="{FF2B5EF4-FFF2-40B4-BE49-F238E27FC236}">
-                <a16:creationId xmlns:a16="http://schemas.microsoft.com/office/drawing/2014/main" id="{8264FCCC-F3C9-3B6B-9A23-5431E09E63E8}"/>
+                <a16:creationId xmlns:a16="http://schemas.microsoft.com/office/drawing/2014/main" id="{ED162692-C23F-D191-7BB0-0C6B4F3E4D6B}"/>
               </a:ext>
             </a:extLst>
           </p:cNvPr>
@@ -2806,7 +2806,7 @@
           <a:bodyPr/>
           <a:lstStyle/>
           <a:p>
-            <a:fld id="{6FD9D725-7506-41FC-8170-7DB91405864C}" type="slidenum">
+            <a:fld id="{46952519-79A0-4158-88E8-8A74092916AE}" type="slidenum">
               <a:rPr lang="es-ES" smtClean="0"/>
               <a:t>‹Nº›</a:t>
             </a:fld>
@@ -2817,7 +2817,7 @@
     </p:spTree>
     <p:extLst>
       <p:ext uri="{BB962C8B-B14F-4D97-AF65-F5344CB8AC3E}">
-        <p14:creationId xmlns:p14="http://schemas.microsoft.com/office/powerpoint/2010/main" val="2306049144"/>
+        <p14:creationId xmlns:p14="http://schemas.microsoft.com/office/powerpoint/2010/main" val="1983635389"/>
       </p:ext>
     </p:extLst>
   </p:cSld>
@@ -2849,7 +2849,7 @@
           <p:cNvPr id="2" name="Título 1">
             <a:extLst>
               <a:ext uri="{FF2B5EF4-FFF2-40B4-BE49-F238E27FC236}">
-                <a16:creationId xmlns:a16="http://schemas.microsoft.com/office/drawing/2014/main" id="{78F0B867-BC38-D57F-9E9B-F2B7C39C8734}"/>
+                <a16:creationId xmlns:a16="http://schemas.microsoft.com/office/drawing/2014/main" id="{3C43EFF3-2208-B0F4-F888-B4BFB0EB634F}"/>
               </a:ext>
             </a:extLst>
           </p:cNvPr>
@@ -2877,7 +2877,7 @@
           <p:cNvPr id="3" name="Marcador de contenido 2">
             <a:extLst>
               <a:ext uri="{FF2B5EF4-FFF2-40B4-BE49-F238E27FC236}">
-                <a16:creationId xmlns:a16="http://schemas.microsoft.com/office/drawing/2014/main" id="{23BD71DB-78C8-077E-C610-D9FABB0C0144}"/>
+                <a16:creationId xmlns:a16="http://schemas.microsoft.com/office/drawing/2014/main" id="{03E54055-C46C-7830-17EC-638EDDF01D81}"/>
               </a:ext>
             </a:extLst>
           </p:cNvPr>
@@ -2934,7 +2934,7 @@
           <p:cNvPr id="4" name="Marcador de fecha 3">
             <a:extLst>
               <a:ext uri="{FF2B5EF4-FFF2-40B4-BE49-F238E27FC236}">
-                <a16:creationId xmlns:a16="http://schemas.microsoft.com/office/drawing/2014/main" id="{DB6CE51D-329E-2A7D-2A43-A4B3CF285CEB}"/>
+                <a16:creationId xmlns:a16="http://schemas.microsoft.com/office/drawing/2014/main" id="{AA0298D9-986A-400B-52EA-7C3160091503}"/>
               </a:ext>
             </a:extLst>
           </p:cNvPr>
@@ -2950,7 +2950,7 @@
           <a:bodyPr/>
           <a:lstStyle/>
           <a:p>
-            <a:fld id="{E73BE342-D7DD-451B-AD14-82C868274E08}" type="datetimeFigureOut">
+            <a:fld id="{E2E78F0F-3CEE-4885-8154-F908A2044D66}" type="datetimeFigureOut">
               <a:rPr lang="es-ES" smtClean="0"/>
               <a:t>04/06/2026</a:t>
             </a:fld>
@@ -2963,7 +2963,7 @@
           <p:cNvPr id="5" name="Marcador de pie de página 4">
             <a:extLst>
               <a:ext uri="{FF2B5EF4-FFF2-40B4-BE49-F238E27FC236}">
-                <a16:creationId xmlns:a16="http://schemas.microsoft.com/office/drawing/2014/main" id="{374041EE-3C57-CA92-F014-B564594F62C3}"/>
+                <a16:creationId xmlns:a16="http://schemas.microsoft.com/office/drawing/2014/main" id="{CB7582AF-E854-BF35-6ED9-13FDE1E55E3E}"/>
               </a:ext>
             </a:extLst>
           </p:cNvPr>
@@ -2988,7 +2988,7 @@
           <p:cNvPr id="6" name="Marcador de número de diapositiva 5">
             <a:extLst>
               <a:ext uri="{FF2B5EF4-FFF2-40B4-BE49-F238E27FC236}">
-                <a16:creationId xmlns:a16="http://schemas.microsoft.com/office/drawing/2014/main" id="{28DF99C0-A6A6-B90A-BB15-12E74B0CC724}"/>
+                <a16:creationId xmlns:a16="http://schemas.microsoft.com/office/drawing/2014/main" id="{5EEE6B73-214F-4C3E-DD6B-A9B8041D0CD0}"/>
               </a:ext>
             </a:extLst>
           </p:cNvPr>
@@ -3004,7 +3004,7 @@
           <a:bodyPr/>
           <a:lstStyle/>
           <a:p>
-            <a:fld id="{6FD9D725-7506-41FC-8170-7DB91405864C}" type="slidenum">
+            <a:fld id="{46952519-79A0-4158-88E8-8A74092916AE}" type="slidenum">
               <a:rPr lang="es-ES" smtClean="0"/>
               <a:t>‹Nº›</a:t>
             </a:fld>
@@ -3015,7 +3015,7 @@
     </p:spTree>
     <p:extLst>
       <p:ext uri="{BB962C8B-B14F-4D97-AF65-F5344CB8AC3E}">
-        <p14:creationId xmlns:p14="http://schemas.microsoft.com/office/powerpoint/2010/main" val="1014540448"/>
+        <p14:creationId xmlns:p14="http://schemas.microsoft.com/office/powerpoint/2010/main" val="2648825307"/>
       </p:ext>
     </p:extLst>
   </p:cSld>
@@ -3047,7 +3047,7 @@
           <p:cNvPr id="2" name="Título 1">
             <a:extLst>
               <a:ext uri="{FF2B5EF4-FFF2-40B4-BE49-F238E27FC236}">
-                <a16:creationId xmlns:a16="http://schemas.microsoft.com/office/drawing/2014/main" id="{64AAEF42-BA40-0729-A70C-2A36EE7FD321}"/>
+                <a16:creationId xmlns:a16="http://schemas.microsoft.com/office/drawing/2014/main" id="{82600662-4170-C665-DB06-459359CC2E0D}"/>
               </a:ext>
             </a:extLst>
           </p:cNvPr>
@@ -3084,7 +3084,7 @@
           <p:cNvPr id="3" name="Marcador de texto 2">
             <a:extLst>
               <a:ext uri="{FF2B5EF4-FFF2-40B4-BE49-F238E27FC236}">
-                <a16:creationId xmlns:a16="http://schemas.microsoft.com/office/drawing/2014/main" id="{D3459255-DCD6-F1A0-044F-F4BDF91580A0}"/>
+                <a16:creationId xmlns:a16="http://schemas.microsoft.com/office/drawing/2014/main" id="{34166AF3-60A3-05C2-A67F-6AFFDC1D0DD5}"/>
               </a:ext>
             </a:extLst>
           </p:cNvPr>
@@ -3209,7 +3209,7 @@
           <p:cNvPr id="4" name="Marcador de fecha 3">
             <a:extLst>
               <a:ext uri="{FF2B5EF4-FFF2-40B4-BE49-F238E27FC236}">
-                <a16:creationId xmlns:a16="http://schemas.microsoft.com/office/drawing/2014/main" id="{7146DE2A-AFD4-3C58-4F1A-11539593B747}"/>
+                <a16:creationId xmlns:a16="http://schemas.microsoft.com/office/drawing/2014/main" id="{79B32DD2-B709-32DA-D2BD-C8E3BA72D344}"/>
               </a:ext>
             </a:extLst>
           </p:cNvPr>
@@ -3225,7 +3225,7 @@
           <a:bodyPr/>
           <a:lstStyle/>
           <a:p>
-            <a:fld id="{E73BE342-D7DD-451B-AD14-82C868274E08}" type="datetimeFigureOut">
+            <a:fld id="{E2E78F0F-3CEE-4885-8154-F908A2044D66}" type="datetimeFigureOut">
               <a:rPr lang="es-ES" smtClean="0"/>
               <a:t>04/06/2026</a:t>
             </a:fld>
@@ -3238,7 +3238,7 @@
           <p:cNvPr id="5" name="Marcador de pie de página 4">
             <a:extLst>
               <a:ext uri="{FF2B5EF4-FFF2-40B4-BE49-F238E27FC236}">
-                <a16:creationId xmlns:a16="http://schemas.microsoft.com/office/drawing/2014/main" id="{B27F29A4-4093-3258-0A3C-961B329F6F15}"/>
+                <a16:creationId xmlns:a16="http://schemas.microsoft.com/office/drawing/2014/main" id="{6AAD1399-A6BC-9A87-FD24-194BE9AA3A58}"/>
               </a:ext>
             </a:extLst>
           </p:cNvPr>
@@ -3263,7 +3263,7 @@
           <p:cNvPr id="6" name="Marcador de número de diapositiva 5">
             <a:extLst>
               <a:ext uri="{FF2B5EF4-FFF2-40B4-BE49-F238E27FC236}">
-                <a16:creationId xmlns:a16="http://schemas.microsoft.com/office/drawing/2014/main" id="{A0D340B9-FFE3-A5E5-F6E4-6425C57ECA2B}"/>
+                <a16:creationId xmlns:a16="http://schemas.microsoft.com/office/drawing/2014/main" id="{09E0E06C-E650-4ACD-18CA-DA6363ECDAED}"/>
               </a:ext>
             </a:extLst>
           </p:cNvPr>
@@ -3279,7 +3279,7 @@
           <a:bodyPr/>
           <a:lstStyle/>
           <a:p>
-            <a:fld id="{6FD9D725-7506-41FC-8170-7DB91405864C}" type="slidenum">
+            <a:fld id="{46952519-79A0-4158-88E8-8A74092916AE}" type="slidenum">
               <a:rPr lang="es-ES" smtClean="0"/>
               <a:t>‹Nº›</a:t>
             </a:fld>
@@ -3290,7 +3290,7 @@
     </p:spTree>
     <p:extLst>
       <p:ext uri="{BB962C8B-B14F-4D97-AF65-F5344CB8AC3E}">
-        <p14:creationId xmlns:p14="http://schemas.microsoft.com/office/powerpoint/2010/main" val="3835677720"/>
+        <p14:creationId xmlns:p14="http://schemas.microsoft.com/office/powerpoint/2010/main" val="3597848054"/>
       </p:ext>
     </p:extLst>
   </p:cSld>
@@ -3322,7 +3322,7 @@
           <p:cNvPr id="2" name="Título 1">
             <a:extLst>
               <a:ext uri="{FF2B5EF4-FFF2-40B4-BE49-F238E27FC236}">
-                <a16:creationId xmlns:a16="http://schemas.microsoft.com/office/drawing/2014/main" id="{78B94F00-0D14-904E-B176-36998E6C1E82}"/>
+                <a16:creationId xmlns:a16="http://schemas.microsoft.com/office/drawing/2014/main" id="{C091E38A-B22F-FE8F-9196-E213105FAE2C}"/>
               </a:ext>
             </a:extLst>
           </p:cNvPr>
@@ -3350,7 +3350,7 @@
           <p:cNvPr id="3" name="Marcador de contenido 2">
             <a:extLst>
               <a:ext uri="{FF2B5EF4-FFF2-40B4-BE49-F238E27FC236}">
-                <a16:creationId xmlns:a16="http://schemas.microsoft.com/office/drawing/2014/main" id="{493B5530-113B-AE52-651A-25A41E022961}"/>
+                <a16:creationId xmlns:a16="http://schemas.microsoft.com/office/drawing/2014/main" id="{C6EBF453-E43C-0A02-4091-6C7015F3B9C8}"/>
               </a:ext>
             </a:extLst>
           </p:cNvPr>
@@ -3412,7 +3412,7 @@
           <p:cNvPr id="4" name="Marcador de contenido 3">
             <a:extLst>
               <a:ext uri="{FF2B5EF4-FFF2-40B4-BE49-F238E27FC236}">
-                <a16:creationId xmlns:a16="http://schemas.microsoft.com/office/drawing/2014/main" id="{76A03271-B113-4954-906C-C73BEC104B47}"/>
+                <a16:creationId xmlns:a16="http://schemas.microsoft.com/office/drawing/2014/main" id="{D84394B1-538A-B357-5C7D-854245D3790B}"/>
               </a:ext>
             </a:extLst>
           </p:cNvPr>
@@ -3474,7 +3474,7 @@
           <p:cNvPr id="5" name="Marcador de fecha 4">
             <a:extLst>
               <a:ext uri="{FF2B5EF4-FFF2-40B4-BE49-F238E27FC236}">
-                <a16:creationId xmlns:a16="http://schemas.microsoft.com/office/drawing/2014/main" id="{A1322AE8-BA9D-2446-AD0D-6CBCA19B92C3}"/>
+                <a16:creationId xmlns:a16="http://schemas.microsoft.com/office/drawing/2014/main" id="{053AF158-81A4-ABF2-07DD-AF32BFFEA339}"/>
               </a:ext>
             </a:extLst>
           </p:cNvPr>
@@ -3490,7 +3490,7 @@
           <a:bodyPr/>
           <a:lstStyle/>
           <a:p>
-            <a:fld id="{E73BE342-D7DD-451B-AD14-82C868274E08}" type="datetimeFigureOut">
+            <a:fld id="{E2E78F0F-3CEE-4885-8154-F908A2044D66}" type="datetimeFigureOut">
               <a:rPr lang="es-ES" smtClean="0"/>
               <a:t>04/06/2026</a:t>
             </a:fld>
@@ -3503,7 +3503,7 @@
           <p:cNvPr id="6" name="Marcador de pie de página 5">
             <a:extLst>
               <a:ext uri="{FF2B5EF4-FFF2-40B4-BE49-F238E27FC236}">
-                <a16:creationId xmlns:a16="http://schemas.microsoft.com/office/drawing/2014/main" id="{E8DF4A91-2C26-BF79-7965-3ED466F989D6}"/>
+                <a16:creationId xmlns:a16="http://schemas.microsoft.com/office/drawing/2014/main" id="{3EF9A877-E9AB-59C6-23B3-6C02D30B1008}"/>
               </a:ext>
             </a:extLst>
           </p:cNvPr>
@@ -3528,7 +3528,7 @@
           <p:cNvPr id="7" name="Marcador de número de diapositiva 6">
             <a:extLst>
               <a:ext uri="{FF2B5EF4-FFF2-40B4-BE49-F238E27FC236}">
-                <a16:creationId xmlns:a16="http://schemas.microsoft.com/office/drawing/2014/main" id="{39431834-295F-9433-145C-D49A562923C6}"/>
+                <a16:creationId xmlns:a16="http://schemas.microsoft.com/office/drawing/2014/main" id="{37142DA6-7B1D-6C8A-937D-4C6456E20ADD}"/>
               </a:ext>
             </a:extLst>
           </p:cNvPr>
@@ -3544,7 +3544,7 @@
           <a:bodyPr/>
           <a:lstStyle/>
           <a:p>
-            <a:fld id="{6FD9D725-7506-41FC-8170-7DB91405864C}" type="slidenum">
+            <a:fld id="{46952519-79A0-4158-88E8-8A74092916AE}" type="slidenum">
               <a:rPr lang="es-ES" smtClean="0"/>
               <a:t>‹Nº›</a:t>
             </a:fld>
@@ -3555,7 +3555,7 @@
     </p:spTree>
     <p:extLst>
       <p:ext uri="{BB962C8B-B14F-4D97-AF65-F5344CB8AC3E}">
-        <p14:creationId xmlns:p14="http://schemas.microsoft.com/office/powerpoint/2010/main" val="2053610519"/>
+        <p14:creationId xmlns:p14="http://schemas.microsoft.com/office/powerpoint/2010/main" val="4097542271"/>
       </p:ext>
     </p:extLst>
   </p:cSld>
@@ -3587,7 +3587,7 @@
           <p:cNvPr id="2" name="Título 1">
             <a:extLst>
               <a:ext uri="{FF2B5EF4-FFF2-40B4-BE49-F238E27FC236}">
-                <a16:creationId xmlns:a16="http://schemas.microsoft.com/office/drawing/2014/main" id="{11BCC72D-511D-6920-BE7F-42ED9946CDBF}"/>
+                <a16:creationId xmlns:a16="http://schemas.microsoft.com/office/drawing/2014/main" id="{40028658-5B67-54CA-9D16-337A6BF0447A}"/>
               </a:ext>
             </a:extLst>
           </p:cNvPr>
@@ -3620,7 +3620,7 @@
           <p:cNvPr id="3" name="Marcador de texto 2">
             <a:extLst>
               <a:ext uri="{FF2B5EF4-FFF2-40B4-BE49-F238E27FC236}">
-                <a16:creationId xmlns:a16="http://schemas.microsoft.com/office/drawing/2014/main" id="{1ACBC7BB-CF81-BF60-C0F6-26ED73DB3C79}"/>
+                <a16:creationId xmlns:a16="http://schemas.microsoft.com/office/drawing/2014/main" id="{C465C81D-1ED4-C042-4601-4340ECB3F0FE}"/>
               </a:ext>
             </a:extLst>
           </p:cNvPr>
@@ -3691,7 +3691,7 @@
           <p:cNvPr id="4" name="Marcador de contenido 3">
             <a:extLst>
               <a:ext uri="{FF2B5EF4-FFF2-40B4-BE49-F238E27FC236}">
-                <a16:creationId xmlns:a16="http://schemas.microsoft.com/office/drawing/2014/main" id="{52FE16D2-F39F-089D-193D-3B959E4C2CAB}"/>
+                <a16:creationId xmlns:a16="http://schemas.microsoft.com/office/drawing/2014/main" id="{993A6344-F4A7-D7EF-9C4F-E25595ED966F}"/>
               </a:ext>
             </a:extLst>
           </p:cNvPr>
@@ -3753,7 +3753,7 @@
           <p:cNvPr id="5" name="Marcador de texto 4">
             <a:extLst>
               <a:ext uri="{FF2B5EF4-FFF2-40B4-BE49-F238E27FC236}">
-                <a16:creationId xmlns:a16="http://schemas.microsoft.com/office/drawing/2014/main" id="{341819A4-17FE-1CA8-96A5-F8505CF7C646}"/>
+                <a16:creationId xmlns:a16="http://schemas.microsoft.com/office/drawing/2014/main" id="{81F4BA7A-034E-68E1-7CFA-280FA4E742F0}"/>
               </a:ext>
             </a:extLst>
           </p:cNvPr>
@@ -3824,7 +3824,7 @@
           <p:cNvPr id="6" name="Marcador de contenido 5">
             <a:extLst>
               <a:ext uri="{FF2B5EF4-FFF2-40B4-BE49-F238E27FC236}">
-                <a16:creationId xmlns:a16="http://schemas.microsoft.com/office/drawing/2014/main" id="{826B7E0B-8418-5F0D-6EAA-C376B310D206}"/>
+                <a16:creationId xmlns:a16="http://schemas.microsoft.com/office/drawing/2014/main" id="{6C91CA2C-3974-A4FA-A2C2-491671D417D0}"/>
               </a:ext>
             </a:extLst>
           </p:cNvPr>
@@ -3886,7 +3886,7 @@
           <p:cNvPr id="7" name="Marcador de fecha 6">
             <a:extLst>
               <a:ext uri="{FF2B5EF4-FFF2-40B4-BE49-F238E27FC236}">
-                <a16:creationId xmlns:a16="http://schemas.microsoft.com/office/drawing/2014/main" id="{850D247B-4471-928E-453A-78414DD2F4B5}"/>
+                <a16:creationId xmlns:a16="http://schemas.microsoft.com/office/drawing/2014/main" id="{ECBCD274-D751-F6B5-415C-4DB4215F4E64}"/>
               </a:ext>
             </a:extLst>
           </p:cNvPr>
@@ -3902,7 +3902,7 @@
           <a:bodyPr/>
           <a:lstStyle/>
           <a:p>
-            <a:fld id="{E73BE342-D7DD-451B-AD14-82C868274E08}" type="datetimeFigureOut">
+            <a:fld id="{E2E78F0F-3CEE-4885-8154-F908A2044D66}" type="datetimeFigureOut">
               <a:rPr lang="es-ES" smtClean="0"/>
               <a:t>04/06/2026</a:t>
             </a:fld>
@@ -3915,7 +3915,7 @@
           <p:cNvPr id="8" name="Marcador de pie de página 7">
             <a:extLst>
               <a:ext uri="{FF2B5EF4-FFF2-40B4-BE49-F238E27FC236}">
-                <a16:creationId xmlns:a16="http://schemas.microsoft.com/office/drawing/2014/main" id="{2C42249F-6FFF-5075-6050-3EC420FEE3DE}"/>
+                <a16:creationId xmlns:a16="http://schemas.microsoft.com/office/drawing/2014/main" id="{23F6C764-59B3-F354-F39C-0B698E06CDD6}"/>
               </a:ext>
             </a:extLst>
           </p:cNvPr>
@@ -3940,7 +3940,7 @@
           <p:cNvPr id="9" name="Marcador de número de diapositiva 8">
             <a:extLst>
               <a:ext uri="{FF2B5EF4-FFF2-40B4-BE49-F238E27FC236}">
-                <a16:creationId xmlns:a16="http://schemas.microsoft.com/office/drawing/2014/main" id="{6C79DD70-C5DF-66FC-DFF2-B51B15815202}"/>
+                <a16:creationId xmlns:a16="http://schemas.microsoft.com/office/drawing/2014/main" id="{CE782C0D-E263-D0BA-CF46-A153B3B34B4E}"/>
               </a:ext>
             </a:extLst>
           </p:cNvPr>
@@ -3956,7 +3956,7 @@
           <a:bodyPr/>
           <a:lstStyle/>
           <a:p>
-            <a:fld id="{6FD9D725-7506-41FC-8170-7DB91405864C}" type="slidenum">
+            <a:fld id="{46952519-79A0-4158-88E8-8A74092916AE}" type="slidenum">
               <a:rPr lang="es-ES" smtClean="0"/>
               <a:t>‹Nº›</a:t>
             </a:fld>
@@ -3967,7 +3967,7 @@
     </p:spTree>
     <p:extLst>
       <p:ext uri="{BB962C8B-B14F-4D97-AF65-F5344CB8AC3E}">
-        <p14:creationId xmlns:p14="http://schemas.microsoft.com/office/powerpoint/2010/main" val="1064831127"/>
+        <p14:creationId xmlns:p14="http://schemas.microsoft.com/office/powerpoint/2010/main" val="2707746469"/>
       </p:ext>
     </p:extLst>
   </p:cSld>
@@ -3999,7 +3999,7 @@
           <p:cNvPr id="2" name="Título 1">
             <a:extLst>
               <a:ext uri="{FF2B5EF4-FFF2-40B4-BE49-F238E27FC236}">
-                <a16:creationId xmlns:a16="http://schemas.microsoft.com/office/drawing/2014/main" id="{03F38178-76A4-B331-2A9E-A7659945D3D1}"/>
+                <a16:creationId xmlns:a16="http://schemas.microsoft.com/office/drawing/2014/main" id="{E183BD55-2E13-228A-0225-943327F6E16A}"/>
               </a:ext>
             </a:extLst>
           </p:cNvPr>
@@ -4027,7 +4027,7 @@
           <p:cNvPr id="3" name="Marcador de fecha 2">
             <a:extLst>
               <a:ext uri="{FF2B5EF4-FFF2-40B4-BE49-F238E27FC236}">
-                <a16:creationId xmlns:a16="http://schemas.microsoft.com/office/drawing/2014/main" id="{60200D15-73B5-E260-A357-B362DEA24032}"/>
+                <a16:creationId xmlns:a16="http://schemas.microsoft.com/office/drawing/2014/main" id="{9CAB8DB0-2F1F-1FE4-64A1-D074513EE62C}"/>
               </a:ext>
             </a:extLst>
           </p:cNvPr>
@@ -4043,7 +4043,7 @@
           <a:bodyPr/>
           <a:lstStyle/>
           <a:p>
-            <a:fld id="{E73BE342-D7DD-451B-AD14-82C868274E08}" type="datetimeFigureOut">
+            <a:fld id="{E2E78F0F-3CEE-4885-8154-F908A2044D66}" type="datetimeFigureOut">
               <a:rPr lang="es-ES" smtClean="0"/>
               <a:t>04/06/2026</a:t>
             </a:fld>
@@ -4056,7 +4056,7 @@
           <p:cNvPr id="4" name="Marcador de pie de página 3">
             <a:extLst>
               <a:ext uri="{FF2B5EF4-FFF2-40B4-BE49-F238E27FC236}">
-                <a16:creationId xmlns:a16="http://schemas.microsoft.com/office/drawing/2014/main" id="{760AB9F3-A9CE-DD9B-4978-2DE5D6750B29}"/>
+                <a16:creationId xmlns:a16="http://schemas.microsoft.com/office/drawing/2014/main" id="{CFC9F4EA-37BC-C944-26B4-6A337A988C0A}"/>
               </a:ext>
             </a:extLst>
           </p:cNvPr>
@@ -4081,7 +4081,7 @@
           <p:cNvPr id="5" name="Marcador de número de diapositiva 4">
             <a:extLst>
               <a:ext uri="{FF2B5EF4-FFF2-40B4-BE49-F238E27FC236}">
-                <a16:creationId xmlns:a16="http://schemas.microsoft.com/office/drawing/2014/main" id="{51227177-DC65-A050-3E4B-DF0056169F36}"/>
+                <a16:creationId xmlns:a16="http://schemas.microsoft.com/office/drawing/2014/main" id="{778121AD-8A6E-31E7-7272-C41D8C9050CF}"/>
               </a:ext>
             </a:extLst>
           </p:cNvPr>
@@ -4097,7 +4097,7 @@
           <a:bodyPr/>
           <a:lstStyle/>
           <a:p>
-            <a:fld id="{6FD9D725-7506-41FC-8170-7DB91405864C}" type="slidenum">
+            <a:fld id="{46952519-79A0-4158-88E8-8A74092916AE}" type="slidenum">
               <a:rPr lang="es-ES" smtClean="0"/>
               <a:t>‹Nº›</a:t>
             </a:fld>
@@ -4108,7 +4108,7 @@
     </p:spTree>
     <p:extLst>
       <p:ext uri="{BB962C8B-B14F-4D97-AF65-F5344CB8AC3E}">
-        <p14:creationId xmlns:p14="http://schemas.microsoft.com/office/powerpoint/2010/main" val="3807265449"/>
+        <p14:creationId xmlns:p14="http://schemas.microsoft.com/office/powerpoint/2010/main" val="257178994"/>
       </p:ext>
     </p:extLst>
   </p:cSld>
@@ -4140,7 +4140,7 @@
           <p:cNvPr id="2" name="Marcador de fecha 1">
             <a:extLst>
               <a:ext uri="{FF2B5EF4-FFF2-40B4-BE49-F238E27FC236}">
-                <a16:creationId xmlns:a16="http://schemas.microsoft.com/office/drawing/2014/main" id="{8229C0B0-AE29-C48C-0010-0DE49A901C9E}"/>
+                <a16:creationId xmlns:a16="http://schemas.microsoft.com/office/drawing/2014/main" id="{58A47969-3E1B-ED92-16CC-CE89B8509379}"/>
               </a:ext>
             </a:extLst>
           </p:cNvPr>
@@ -4156,7 +4156,7 @@
           <a:bodyPr/>
           <a:lstStyle/>
           <a:p>
-            <a:fld id="{E73BE342-D7DD-451B-AD14-82C868274E08}" type="datetimeFigureOut">
+            <a:fld id="{E2E78F0F-3CEE-4885-8154-F908A2044D66}" type="datetimeFigureOut">
               <a:rPr lang="es-ES" smtClean="0"/>
               <a:t>04/06/2026</a:t>
             </a:fld>
@@ -4169,7 +4169,7 @@
           <p:cNvPr id="3" name="Marcador de pie de página 2">
             <a:extLst>
               <a:ext uri="{FF2B5EF4-FFF2-40B4-BE49-F238E27FC236}">
-                <a16:creationId xmlns:a16="http://schemas.microsoft.com/office/drawing/2014/main" id="{E76CADEE-B7C9-CCD6-43BE-0F08908D81D2}"/>
+                <a16:creationId xmlns:a16="http://schemas.microsoft.com/office/drawing/2014/main" id="{3BB28542-D8FC-A36E-EF27-65A8B9AE7E41}"/>
               </a:ext>
             </a:extLst>
           </p:cNvPr>
@@ -4194,7 +4194,7 @@
           <p:cNvPr id="4" name="Marcador de número de diapositiva 3">
             <a:extLst>
               <a:ext uri="{FF2B5EF4-FFF2-40B4-BE49-F238E27FC236}">
-                <a16:creationId xmlns:a16="http://schemas.microsoft.com/office/drawing/2014/main" id="{38003F7B-DC8E-12D2-BC5A-66BE8DA89F0C}"/>
+                <a16:creationId xmlns:a16="http://schemas.microsoft.com/office/drawing/2014/main" id="{A2717270-5F7C-D34B-6960-141579127B50}"/>
               </a:ext>
             </a:extLst>
           </p:cNvPr>
@@ -4210,7 +4210,7 @@
           <a:bodyPr/>
           <a:lstStyle/>
           <a:p>
-            <a:fld id="{6FD9D725-7506-41FC-8170-7DB91405864C}" type="slidenum">
+            <a:fld id="{46952519-79A0-4158-88E8-8A74092916AE}" type="slidenum">
               <a:rPr lang="es-ES" smtClean="0"/>
               <a:t>‹Nº›</a:t>
             </a:fld>
@@ -4221,7 +4221,7 @@
     </p:spTree>
     <p:extLst>
       <p:ext uri="{BB962C8B-B14F-4D97-AF65-F5344CB8AC3E}">
-        <p14:creationId xmlns:p14="http://schemas.microsoft.com/office/powerpoint/2010/main" val="3234240892"/>
+        <p14:creationId xmlns:p14="http://schemas.microsoft.com/office/powerpoint/2010/main" val="3366193428"/>
       </p:ext>
     </p:extLst>
   </p:cSld>
@@ -4253,7 +4253,7 @@
           <p:cNvPr id="2" name="Título 1">
             <a:extLst>
               <a:ext uri="{FF2B5EF4-FFF2-40B4-BE49-F238E27FC236}">
-                <a16:creationId xmlns:a16="http://schemas.microsoft.com/office/drawing/2014/main" id="{D6159500-3537-DA4B-C0CA-E54594CAA5E2}"/>
+                <a16:creationId xmlns:a16="http://schemas.microsoft.com/office/drawing/2014/main" id="{E341281F-CD36-D659-86DE-106EE7ED6CCE}"/>
               </a:ext>
             </a:extLst>
           </p:cNvPr>
@@ -4290,7 +4290,7 @@
           <p:cNvPr id="3" name="Marcador de contenido 2">
             <a:extLst>
               <a:ext uri="{FF2B5EF4-FFF2-40B4-BE49-F238E27FC236}">
-                <a16:creationId xmlns:a16="http://schemas.microsoft.com/office/drawing/2014/main" id="{05DD3EF1-7C1C-6D20-6A23-AF2B3129DA22}"/>
+                <a16:creationId xmlns:a16="http://schemas.microsoft.com/office/drawing/2014/main" id="{C224142D-642C-072C-D919-0568B512F890}"/>
               </a:ext>
             </a:extLst>
           </p:cNvPr>
@@ -4380,7 +4380,7 @@
           <p:cNvPr id="4" name="Marcador de texto 3">
             <a:extLst>
               <a:ext uri="{FF2B5EF4-FFF2-40B4-BE49-F238E27FC236}">
-                <a16:creationId xmlns:a16="http://schemas.microsoft.com/office/drawing/2014/main" id="{38F40C2D-2EE1-C28A-2458-77BD1D4201DE}"/>
+                <a16:creationId xmlns:a16="http://schemas.microsoft.com/office/drawing/2014/main" id="{410E3231-6562-4A3D-1446-E510FEB09834}"/>
               </a:ext>
             </a:extLst>
           </p:cNvPr>
@@ -4451,7 +4451,7 @@
           <p:cNvPr id="5" name="Marcador de fecha 4">
             <a:extLst>
               <a:ext uri="{FF2B5EF4-FFF2-40B4-BE49-F238E27FC236}">
-                <a16:creationId xmlns:a16="http://schemas.microsoft.com/office/drawing/2014/main" id="{D6E5CB27-9FB8-2BB8-78C3-418AAE0CB13E}"/>
+                <a16:creationId xmlns:a16="http://schemas.microsoft.com/office/drawing/2014/main" id="{B58E5A2C-8BE0-6D00-FC39-989C48DC0809}"/>
               </a:ext>
             </a:extLst>
           </p:cNvPr>
@@ -4467,7 +4467,7 @@
           <a:bodyPr/>
           <a:lstStyle/>
           <a:p>
-            <a:fld id="{E73BE342-D7DD-451B-AD14-82C868274E08}" type="datetimeFigureOut">
+            <a:fld id="{E2E78F0F-3CEE-4885-8154-F908A2044D66}" type="datetimeFigureOut">
               <a:rPr lang="es-ES" smtClean="0"/>
               <a:t>04/06/2026</a:t>
             </a:fld>
@@ -4480,7 +4480,7 @@
           <p:cNvPr id="6" name="Marcador de pie de página 5">
             <a:extLst>
               <a:ext uri="{FF2B5EF4-FFF2-40B4-BE49-F238E27FC236}">
-                <a16:creationId xmlns:a16="http://schemas.microsoft.com/office/drawing/2014/main" id="{CEF1D832-D974-547E-CB7A-AD9AEE891651}"/>
+                <a16:creationId xmlns:a16="http://schemas.microsoft.com/office/drawing/2014/main" id="{08CC6C97-AE09-1F9D-6F87-BF9F63F88C87}"/>
               </a:ext>
             </a:extLst>
           </p:cNvPr>
@@ -4505,7 +4505,7 @@
           <p:cNvPr id="7" name="Marcador de número de diapositiva 6">
             <a:extLst>
               <a:ext uri="{FF2B5EF4-FFF2-40B4-BE49-F238E27FC236}">
-                <a16:creationId xmlns:a16="http://schemas.microsoft.com/office/drawing/2014/main" id="{4FBAA768-B7D1-1B63-221A-F24EF8217FC0}"/>
+                <a16:creationId xmlns:a16="http://schemas.microsoft.com/office/drawing/2014/main" id="{30F77902-79A8-E248-30B6-A2643EE7E64C}"/>
               </a:ext>
             </a:extLst>
           </p:cNvPr>
@@ -4521,7 +4521,7 @@
           <a:bodyPr/>
           <a:lstStyle/>
           <a:p>
-            <a:fld id="{6FD9D725-7506-41FC-8170-7DB91405864C}" type="slidenum">
+            <a:fld id="{46952519-79A0-4158-88E8-8A74092916AE}" type="slidenum">
               <a:rPr lang="es-ES" smtClean="0"/>
               <a:t>‹Nº›</a:t>
             </a:fld>
@@ -4532,7 +4532,7 @@
     </p:spTree>
     <p:extLst>
       <p:ext uri="{BB962C8B-B14F-4D97-AF65-F5344CB8AC3E}">
-        <p14:creationId xmlns:p14="http://schemas.microsoft.com/office/powerpoint/2010/main" val="403530904"/>
+        <p14:creationId xmlns:p14="http://schemas.microsoft.com/office/powerpoint/2010/main" val="3290236475"/>
       </p:ext>
     </p:extLst>
   </p:cSld>
@@ -4564,7 +4564,7 @@
           <p:cNvPr id="2" name="Título 1">
             <a:extLst>
               <a:ext uri="{FF2B5EF4-FFF2-40B4-BE49-F238E27FC236}">
-                <a16:creationId xmlns:a16="http://schemas.microsoft.com/office/drawing/2014/main" id="{73C02CE7-273B-202F-86A5-660D06F4AADA}"/>
+                <a16:creationId xmlns:a16="http://schemas.microsoft.com/office/drawing/2014/main" id="{91C506FB-5CF0-C432-039B-B97BB2DF1F80}"/>
               </a:ext>
             </a:extLst>
           </p:cNvPr>
@@ -4601,7 +4601,7 @@
           <p:cNvPr id="3" name="Marcador de posición de imagen 2">
             <a:extLst>
               <a:ext uri="{FF2B5EF4-FFF2-40B4-BE49-F238E27FC236}">
-                <a16:creationId xmlns:a16="http://schemas.microsoft.com/office/drawing/2014/main" id="{3C23BBA2-5E06-6DCB-CC7C-50AD283617BC}"/>
+                <a16:creationId xmlns:a16="http://schemas.microsoft.com/office/drawing/2014/main" id="{89C27F13-5815-6B9E-9445-F23A1CA94996}"/>
               </a:ext>
             </a:extLst>
           </p:cNvPr>
@@ -4668,7 +4668,7 @@
           <p:cNvPr id="4" name="Marcador de texto 3">
             <a:extLst>
               <a:ext uri="{FF2B5EF4-FFF2-40B4-BE49-F238E27FC236}">
-                <a16:creationId xmlns:a16="http://schemas.microsoft.com/office/drawing/2014/main" id="{E8B20A7D-D21E-F9D5-92A4-B6A8C00A2681}"/>
+                <a16:creationId xmlns:a16="http://schemas.microsoft.com/office/drawing/2014/main" id="{348BC20F-73A3-FAAD-F67E-B97383B3A84F}"/>
               </a:ext>
             </a:extLst>
           </p:cNvPr>
@@ -4739,7 +4739,7 @@
           <p:cNvPr id="5" name="Marcador de fecha 4">
             <a:extLst>
               <a:ext uri="{FF2B5EF4-FFF2-40B4-BE49-F238E27FC236}">
-                <a16:creationId xmlns:a16="http://schemas.microsoft.com/office/drawing/2014/main" id="{E49C27BD-02C1-2843-D31A-8E3669C129B5}"/>
+                <a16:creationId xmlns:a16="http://schemas.microsoft.com/office/drawing/2014/main" id="{04B25C72-DEF8-D9F8-AC95-584D94CF2399}"/>
               </a:ext>
             </a:extLst>
           </p:cNvPr>
@@ -4755,7 +4755,7 @@
           <a:bodyPr/>
           <a:lstStyle/>
           <a:p>
-            <a:fld id="{E73BE342-D7DD-451B-AD14-82C868274E08}" type="datetimeFigureOut">
+            <a:fld id="{E2E78F0F-3CEE-4885-8154-F908A2044D66}" type="datetimeFigureOut">
               <a:rPr lang="es-ES" smtClean="0"/>
               <a:t>04/06/2026</a:t>
             </a:fld>
@@ -4768,7 +4768,7 @@
           <p:cNvPr id="6" name="Marcador de pie de página 5">
             <a:extLst>
               <a:ext uri="{FF2B5EF4-FFF2-40B4-BE49-F238E27FC236}">
-                <a16:creationId xmlns:a16="http://schemas.microsoft.com/office/drawing/2014/main" id="{E449C1DD-B05C-912E-CED6-22E1EF1F3C0F}"/>
+                <a16:creationId xmlns:a16="http://schemas.microsoft.com/office/drawing/2014/main" id="{80AAEA25-F95A-2D0A-C685-AD30116B1904}"/>
               </a:ext>
             </a:extLst>
           </p:cNvPr>
@@ -4793,7 +4793,7 @@
           <p:cNvPr id="7" name="Marcador de número de diapositiva 6">
             <a:extLst>
               <a:ext uri="{FF2B5EF4-FFF2-40B4-BE49-F238E27FC236}">
-                <a16:creationId xmlns:a16="http://schemas.microsoft.com/office/drawing/2014/main" id="{34B6D4C3-A6C8-D11F-D069-D82929C3090F}"/>
+                <a16:creationId xmlns:a16="http://schemas.microsoft.com/office/drawing/2014/main" id="{1673DFFB-DCB5-059A-0FE4-56B857D72841}"/>
               </a:ext>
             </a:extLst>
           </p:cNvPr>
@@ -4809,7 +4809,7 @@
           <a:bodyPr/>
           <a:lstStyle/>
           <a:p>
-            <a:fld id="{6FD9D725-7506-41FC-8170-7DB91405864C}" type="slidenum">
+            <a:fld id="{46952519-79A0-4158-88E8-8A74092916AE}" type="slidenum">
               <a:rPr lang="es-ES" smtClean="0"/>
               <a:t>‹Nº›</a:t>
             </a:fld>
@@ -4820,7 +4820,7 @@
     </p:spTree>
     <p:extLst>
       <p:ext uri="{BB962C8B-B14F-4D97-AF65-F5344CB8AC3E}">
-        <p14:creationId xmlns:p14="http://schemas.microsoft.com/office/powerpoint/2010/main" val="898962150"/>
+        <p14:creationId xmlns:p14="http://schemas.microsoft.com/office/powerpoint/2010/main" val="1654087475"/>
       </p:ext>
     </p:extLst>
   </p:cSld>
@@ -4857,7 +4857,7 @@
           <p:cNvPr id="2" name="Marcador de título 1">
             <a:extLst>
               <a:ext uri="{FF2B5EF4-FFF2-40B4-BE49-F238E27FC236}">
-                <a16:creationId xmlns:a16="http://schemas.microsoft.com/office/drawing/2014/main" id="{4419D82E-0087-689E-BF57-2BAA82B8D7BB}"/>
+                <a16:creationId xmlns:a16="http://schemas.microsoft.com/office/drawing/2014/main" id="{88310B3C-28D4-62C9-F1BE-20E888886D1E}"/>
               </a:ext>
             </a:extLst>
           </p:cNvPr>
@@ -4895,7 +4895,7 @@
           <p:cNvPr id="3" name="Marcador de texto 2">
             <a:extLst>
               <a:ext uri="{FF2B5EF4-FFF2-40B4-BE49-F238E27FC236}">
-                <a16:creationId xmlns:a16="http://schemas.microsoft.com/office/drawing/2014/main" id="{4FAF4DCC-0BF4-ABD8-441B-4E1DC607AE53}"/>
+                <a16:creationId xmlns:a16="http://schemas.microsoft.com/office/drawing/2014/main" id="{33B3B629-4395-EC08-80FC-6A6764A854F9}"/>
               </a:ext>
             </a:extLst>
           </p:cNvPr>
@@ -4962,7 +4962,7 @@
           <p:cNvPr id="4" name="Marcador de fecha 3">
             <a:extLst>
               <a:ext uri="{FF2B5EF4-FFF2-40B4-BE49-F238E27FC236}">
-                <a16:creationId xmlns:a16="http://schemas.microsoft.com/office/drawing/2014/main" id="{6673BBC5-9DC4-9DE1-BD15-DAD8E6BA7ACB}"/>
+                <a16:creationId xmlns:a16="http://schemas.microsoft.com/office/drawing/2014/main" id="{BC119E05-ADFF-C607-FA6E-6FD98CFD1262}"/>
               </a:ext>
             </a:extLst>
           </p:cNvPr>
@@ -4996,7 +4996,7 @@
             </a:lvl1pPr>
           </a:lstStyle>
           <a:p>
-            <a:fld id="{E73BE342-D7DD-451B-AD14-82C868274E08}" type="datetimeFigureOut">
+            <a:fld id="{E2E78F0F-3CEE-4885-8154-F908A2044D66}" type="datetimeFigureOut">
               <a:rPr lang="es-ES" smtClean="0"/>
               <a:t>04/06/2026</a:t>
             </a:fld>
@@ -5009,7 +5009,7 @@
           <p:cNvPr id="5" name="Marcador de pie de página 4">
             <a:extLst>
               <a:ext uri="{FF2B5EF4-FFF2-40B4-BE49-F238E27FC236}">
-                <a16:creationId xmlns:a16="http://schemas.microsoft.com/office/drawing/2014/main" id="{EB8C28AD-308E-1D2F-9A99-1909B272495D}"/>
+                <a16:creationId xmlns:a16="http://schemas.microsoft.com/office/drawing/2014/main" id="{B224DE56-7325-AD5A-0436-C8500CBF81F0}"/>
               </a:ext>
             </a:extLst>
           </p:cNvPr>
@@ -5052,7 +5052,7 @@
           <p:cNvPr id="6" name="Marcador de número de diapositiva 5">
             <a:extLst>
               <a:ext uri="{FF2B5EF4-FFF2-40B4-BE49-F238E27FC236}">
-                <a16:creationId xmlns:a16="http://schemas.microsoft.com/office/drawing/2014/main" id="{AAB7F528-8CB8-68C6-D78E-044DBB56B50E}"/>
+                <a16:creationId xmlns:a16="http://schemas.microsoft.com/office/drawing/2014/main" id="{71E2069E-B394-5813-CC53-7A97F6409FC9}"/>
               </a:ext>
             </a:extLst>
           </p:cNvPr>
@@ -5086,7 +5086,7 @@
             </a:lvl1pPr>
           </a:lstStyle>
           <a:p>
-            <a:fld id="{6FD9D725-7506-41FC-8170-7DB91405864C}" type="slidenum">
+            <a:fld id="{46952519-79A0-4158-88E8-8A74092916AE}" type="slidenum">
               <a:rPr lang="es-ES" smtClean="0"/>
               <a:t>‹Nº›</a:t>
             </a:fld>
@@ -5097,7 +5097,7 @@
     </p:spTree>
     <p:extLst>
       <p:ext uri="{BB962C8B-B14F-4D97-AF65-F5344CB8AC3E}">
-        <p14:creationId xmlns:p14="http://schemas.microsoft.com/office/powerpoint/2010/main" val="881759497"/>
+        <p14:creationId xmlns:p14="http://schemas.microsoft.com/office/powerpoint/2010/main" val="1101064486"/>
       </p:ext>
     </p:extLst>
   </p:cSld>
@@ -5428,7 +5428,7 @@
           <p:cNvPr id="2" name="Rectángulo: esquinas redondeadas 1">
             <a:extLst>
               <a:ext uri="{FF2B5EF4-FFF2-40B4-BE49-F238E27FC236}">
-                <a16:creationId xmlns:a16="http://schemas.microsoft.com/office/drawing/2014/main" id="{93327B80-5FFB-BBD9-8E99-5E23CE81DD0C}"/>
+                <a16:creationId xmlns:a16="http://schemas.microsoft.com/office/drawing/2014/main" id="{8737DDCC-1875-8BE5-E51F-8A4C0CEA6EA5}"/>
               </a:ext>
             </a:extLst>
           </p:cNvPr>
@@ -5482,7 +5482,7 @@
           <p:cNvPr id="3" name="CuadroTexto 2">
             <a:extLst>
               <a:ext uri="{FF2B5EF4-FFF2-40B4-BE49-F238E27FC236}">
-                <a16:creationId xmlns:a16="http://schemas.microsoft.com/office/drawing/2014/main" id="{44EA39D6-B4DB-7FD6-5373-FAD564E36E25}"/>
+                <a16:creationId xmlns:a16="http://schemas.microsoft.com/office/drawing/2014/main" id="{6DD45364-6171-ADD6-2A3E-345700050954}"/>
               </a:ext>
             </a:extLst>
           </p:cNvPr>
@@ -5522,7 +5522,7 @@
           <p:cNvPr id="4" name="CuadroTexto 3">
             <a:extLst>
               <a:ext uri="{FF2B5EF4-FFF2-40B4-BE49-F238E27FC236}">
-                <a16:creationId xmlns:a16="http://schemas.microsoft.com/office/drawing/2014/main" id="{DDAF5003-B482-51BD-0CFD-BE37C8229055}"/>
+                <a16:creationId xmlns:a16="http://schemas.microsoft.com/office/drawing/2014/main" id="{07654982-0FBC-8954-CBFE-78E53DFA2B22}"/>
               </a:ext>
             </a:extLst>
           </p:cNvPr>
@@ -5562,7 +5562,7 @@
           <p:cNvPr id="5" name="CuadroTexto 4">
             <a:extLst>
               <a:ext uri="{FF2B5EF4-FFF2-40B4-BE49-F238E27FC236}">
-                <a16:creationId xmlns:a16="http://schemas.microsoft.com/office/drawing/2014/main" id="{0A01554D-D835-8E0D-A4D8-E128D009EB83}"/>
+                <a16:creationId xmlns:a16="http://schemas.microsoft.com/office/drawing/2014/main" id="{C61F902F-DB39-AF54-27DD-953366FED8A9}"/>
               </a:ext>
             </a:extLst>
           </p:cNvPr>
@@ -5602,7 +5602,7 @@
           <p:cNvPr id="6" name="CuadroTexto 5">
             <a:extLst>
               <a:ext uri="{FF2B5EF4-FFF2-40B4-BE49-F238E27FC236}">
-                <a16:creationId xmlns:a16="http://schemas.microsoft.com/office/drawing/2014/main" id="{1EA13658-AE0B-761C-101A-CE5DB75CBB50}"/>
+                <a16:creationId xmlns:a16="http://schemas.microsoft.com/office/drawing/2014/main" id="{70F2886B-368E-3156-B869-08353B9C0C0D}"/>
               </a:ext>
             </a:extLst>
           </p:cNvPr>
@@ -5653,7 +5653,7 @@
           <p:cNvPr id="8" name="Imagen 7">
             <a:extLst>
               <a:ext uri="{FF2B5EF4-FFF2-40B4-BE49-F238E27FC236}">
-                <a16:creationId xmlns:a16="http://schemas.microsoft.com/office/drawing/2014/main" id="{718514E0-622E-A1A3-59C9-67CD4DEAEB10}"/>
+                <a16:creationId xmlns:a16="http://schemas.microsoft.com/office/drawing/2014/main" id="{D499C65C-77DE-3433-C918-7C8C67DF1528}"/>
               </a:ext>
             </a:extLst>
           </p:cNvPr>
@@ -5692,7 +5692,7 @@
     </p:spTree>
     <p:extLst>
       <p:ext uri="{BB962C8B-B14F-4D97-AF65-F5344CB8AC3E}">
-        <p14:creationId xmlns:p14="http://schemas.microsoft.com/office/powerpoint/2010/main" val="1422064104"/>
+        <p14:creationId xmlns:p14="http://schemas.microsoft.com/office/powerpoint/2010/main" val="2893945376"/>
       </p:ext>
     </p:extLst>
   </p:cSld>
@@ -5732,7 +5732,7 @@
           <p:cNvPr id="2" name="CuadroTexto 1">
             <a:extLst>
               <a:ext uri="{FF2B5EF4-FFF2-40B4-BE49-F238E27FC236}">
-                <a16:creationId xmlns:a16="http://schemas.microsoft.com/office/drawing/2014/main" id="{3374D3E1-8E05-B726-C5F1-378BF8E59803}"/>
+                <a16:creationId xmlns:a16="http://schemas.microsoft.com/office/drawing/2014/main" id="{5C0E4828-1C29-937D-33E4-1F1429E9E660}"/>
               </a:ext>
             </a:extLst>
           </p:cNvPr>
@@ -5772,7 +5772,7 @@
           <p:cNvPr id="3" name="CuadroTexto 2">
             <a:extLst>
               <a:ext uri="{FF2B5EF4-FFF2-40B4-BE49-F238E27FC236}">
-                <a16:creationId xmlns:a16="http://schemas.microsoft.com/office/drawing/2014/main" id="{778B9665-64C9-ACC9-48C6-E0EFDE306C44}"/>
+                <a16:creationId xmlns:a16="http://schemas.microsoft.com/office/drawing/2014/main" id="{E2D65E2E-9E1F-8B89-45B2-5009ABE00CDA}"/>
               </a:ext>
             </a:extLst>
           </p:cNvPr>
@@ -5812,7 +5812,7 @@
           <p:cNvPr id="4" name="CuadroTexto 3">
             <a:extLst>
               <a:ext uri="{FF2B5EF4-FFF2-40B4-BE49-F238E27FC236}">
-                <a16:creationId xmlns:a16="http://schemas.microsoft.com/office/drawing/2014/main" id="{9BE82840-970E-0071-12E3-958E0A1AEB29}"/>
+                <a16:creationId xmlns:a16="http://schemas.microsoft.com/office/drawing/2014/main" id="{29226C08-5A82-C22F-EB54-B2F993806C81}"/>
               </a:ext>
             </a:extLst>
           </p:cNvPr>
@@ -5852,7 +5852,7 @@
           <p:cNvPr id="5" name="Rectángulo: esquinas redondeadas 4">
             <a:extLst>
               <a:ext uri="{FF2B5EF4-FFF2-40B4-BE49-F238E27FC236}">
-                <a16:creationId xmlns:a16="http://schemas.microsoft.com/office/drawing/2014/main" id="{5645629F-5F2D-D309-C061-C0D87F663F90}"/>
+                <a16:creationId xmlns:a16="http://schemas.microsoft.com/office/drawing/2014/main" id="{28246C8D-8025-6EFC-02D8-B7B512746A2C}"/>
               </a:ext>
             </a:extLst>
           </p:cNvPr>
@@ -5906,7 +5906,7 @@
           <p:cNvPr id="6" name="CuadroTexto 5">
             <a:extLst>
               <a:ext uri="{FF2B5EF4-FFF2-40B4-BE49-F238E27FC236}">
-                <a16:creationId xmlns:a16="http://schemas.microsoft.com/office/drawing/2014/main" id="{B0D80F07-D7E8-B853-9F6F-801C5B25AF9D}"/>
+                <a16:creationId xmlns:a16="http://schemas.microsoft.com/office/drawing/2014/main" id="{66FDA293-01D7-B04A-9013-9E654A575CFC}"/>
               </a:ext>
             </a:extLst>
           </p:cNvPr>
@@ -5946,7 +5946,7 @@
           <p:cNvPr id="7" name="CuadroTexto 6">
             <a:extLst>
               <a:ext uri="{FF2B5EF4-FFF2-40B4-BE49-F238E27FC236}">
-                <a16:creationId xmlns:a16="http://schemas.microsoft.com/office/drawing/2014/main" id="{0D47D3A7-7258-E37D-C44E-EB4D889FF13E}"/>
+                <a16:creationId xmlns:a16="http://schemas.microsoft.com/office/drawing/2014/main" id="{E55B17D5-6E1D-AA9A-A1D4-D5B4E829EC9C}"/>
               </a:ext>
             </a:extLst>
           </p:cNvPr>
@@ -6065,7 +6065,7 @@
           <p:cNvPr id="8" name="Rectángulo: esquinas redondeadas 7">
             <a:extLst>
               <a:ext uri="{FF2B5EF4-FFF2-40B4-BE49-F238E27FC236}">
-                <a16:creationId xmlns:a16="http://schemas.microsoft.com/office/drawing/2014/main" id="{75B6BBD5-D47B-4801-21E3-BE6D8B77347F}"/>
+                <a16:creationId xmlns:a16="http://schemas.microsoft.com/office/drawing/2014/main" id="{583A4A61-D0C8-DBFE-7567-FD84A94DF6D1}"/>
               </a:ext>
             </a:extLst>
           </p:cNvPr>
@@ -6119,7 +6119,7 @@
           <p:cNvPr id="9" name="CuadroTexto 8">
             <a:extLst>
               <a:ext uri="{FF2B5EF4-FFF2-40B4-BE49-F238E27FC236}">
-                <a16:creationId xmlns:a16="http://schemas.microsoft.com/office/drawing/2014/main" id="{265814E6-476A-BA96-BE11-F7C0B58B2AA2}"/>
+                <a16:creationId xmlns:a16="http://schemas.microsoft.com/office/drawing/2014/main" id="{36B1F2E2-A653-03D6-C5BF-E7D7561BE8B7}"/>
               </a:ext>
             </a:extLst>
           </p:cNvPr>
@@ -6159,7 +6159,7 @@
           <p:cNvPr id="10" name="CuadroTexto 9">
             <a:extLst>
               <a:ext uri="{FF2B5EF4-FFF2-40B4-BE49-F238E27FC236}">
-                <a16:creationId xmlns:a16="http://schemas.microsoft.com/office/drawing/2014/main" id="{BE86C99D-973B-6DD4-9BC3-B919BC37CF15}"/>
+                <a16:creationId xmlns:a16="http://schemas.microsoft.com/office/drawing/2014/main" id="{CBB04404-3432-A8DD-0CDD-8B3A1AA4B6B6}"/>
               </a:ext>
             </a:extLst>
           </p:cNvPr>
@@ -6199,7 +6199,7 @@
           <p:cNvPr id="11" name="Rectángulo: esquinas redondeadas 10">
             <a:extLst>
               <a:ext uri="{FF2B5EF4-FFF2-40B4-BE49-F238E27FC236}">
-                <a16:creationId xmlns:a16="http://schemas.microsoft.com/office/drawing/2014/main" id="{15977E5D-B5F7-7CC7-4A73-0667730AD9D6}"/>
+                <a16:creationId xmlns:a16="http://schemas.microsoft.com/office/drawing/2014/main" id="{250A7652-C606-00FA-745C-03DFDA082649}"/>
               </a:ext>
             </a:extLst>
           </p:cNvPr>
@@ -6253,7 +6253,7 @@
           <p:cNvPr id="12" name="CuadroTexto 11">
             <a:extLst>
               <a:ext uri="{FF2B5EF4-FFF2-40B4-BE49-F238E27FC236}">
-                <a16:creationId xmlns:a16="http://schemas.microsoft.com/office/drawing/2014/main" id="{42AF80DE-8F1F-C120-79F6-2001AF2ACA7A}"/>
+                <a16:creationId xmlns:a16="http://schemas.microsoft.com/office/drawing/2014/main" id="{713F77D9-36EB-82B4-2E16-791E0A65AEA6}"/>
               </a:ext>
             </a:extLst>
           </p:cNvPr>
@@ -6293,7 +6293,7 @@
           <p:cNvPr id="13" name="CuadroTexto 12">
             <a:extLst>
               <a:ext uri="{FF2B5EF4-FFF2-40B4-BE49-F238E27FC236}">
-                <a16:creationId xmlns:a16="http://schemas.microsoft.com/office/drawing/2014/main" id="{DB5FDE6D-93F7-CCD6-D34B-33A9BF0DB37B}"/>
+                <a16:creationId xmlns:a16="http://schemas.microsoft.com/office/drawing/2014/main" id="{52E5D48B-CA6F-A798-197D-25A47EA9A5F4}"/>
               </a:ext>
             </a:extLst>
           </p:cNvPr>
@@ -6333,7 +6333,7 @@
           <p:cNvPr id="14" name="Rectángulo: esquinas redondeadas 13">
             <a:extLst>
               <a:ext uri="{FF2B5EF4-FFF2-40B4-BE49-F238E27FC236}">
-                <a16:creationId xmlns:a16="http://schemas.microsoft.com/office/drawing/2014/main" id="{F38068D3-3A9A-2292-32C1-36B0953AEF3D}"/>
+                <a16:creationId xmlns:a16="http://schemas.microsoft.com/office/drawing/2014/main" id="{83415978-DB9A-4F0E-01AD-3FD52A75EE9A}"/>
               </a:ext>
             </a:extLst>
           </p:cNvPr>
@@ -6387,7 +6387,7 @@
           <p:cNvPr id="15" name="CuadroTexto 14">
             <a:extLst>
               <a:ext uri="{FF2B5EF4-FFF2-40B4-BE49-F238E27FC236}">
-                <a16:creationId xmlns:a16="http://schemas.microsoft.com/office/drawing/2014/main" id="{A5B2DF49-6987-A79E-C708-8114F7A6772F}"/>
+                <a16:creationId xmlns:a16="http://schemas.microsoft.com/office/drawing/2014/main" id="{10CC2D39-4B6F-7D89-412F-8E5898BC6A26}"/>
               </a:ext>
             </a:extLst>
           </p:cNvPr>
@@ -6427,7 +6427,7 @@
           <p:cNvPr id="16" name="CuadroTexto 15">
             <a:extLst>
               <a:ext uri="{FF2B5EF4-FFF2-40B4-BE49-F238E27FC236}">
-                <a16:creationId xmlns:a16="http://schemas.microsoft.com/office/drawing/2014/main" id="{5E5CB0A2-3CF0-191E-2E10-BCCDFFF569AD}"/>
+                <a16:creationId xmlns:a16="http://schemas.microsoft.com/office/drawing/2014/main" id="{BE373084-1D6E-2C7D-24EC-F353109D2B6C}"/>
               </a:ext>
             </a:extLst>
           </p:cNvPr>
@@ -6467,7 +6467,7 @@
           <p:cNvPr id="17" name="Rectángulo: esquinas redondeadas 16">
             <a:extLst>
               <a:ext uri="{FF2B5EF4-FFF2-40B4-BE49-F238E27FC236}">
-                <a16:creationId xmlns:a16="http://schemas.microsoft.com/office/drawing/2014/main" id="{1E0BC151-3436-50C9-3ECE-87EFC438422E}"/>
+                <a16:creationId xmlns:a16="http://schemas.microsoft.com/office/drawing/2014/main" id="{A8134A8D-1FC6-953C-45FB-3EB6E5D196DE}"/>
               </a:ext>
             </a:extLst>
           </p:cNvPr>
@@ -6521,7 +6521,7 @@
           <p:cNvPr id="18" name="CuadroTexto 17">
             <a:extLst>
               <a:ext uri="{FF2B5EF4-FFF2-40B4-BE49-F238E27FC236}">
-                <a16:creationId xmlns:a16="http://schemas.microsoft.com/office/drawing/2014/main" id="{DE120990-9474-37D3-4311-ACFE33B3AF97}"/>
+                <a16:creationId xmlns:a16="http://schemas.microsoft.com/office/drawing/2014/main" id="{491CD917-1C2C-5FBA-EB4D-ADEA25ED1180}"/>
               </a:ext>
             </a:extLst>
           </p:cNvPr>
@@ -6561,7 +6561,7 @@
           <p:cNvPr id="19" name="CuadroTexto 18">
             <a:extLst>
               <a:ext uri="{FF2B5EF4-FFF2-40B4-BE49-F238E27FC236}">
-                <a16:creationId xmlns:a16="http://schemas.microsoft.com/office/drawing/2014/main" id="{8751CA69-41EE-3158-CC49-C07B843A509D}"/>
+                <a16:creationId xmlns:a16="http://schemas.microsoft.com/office/drawing/2014/main" id="{99E9EF68-7555-59F0-BC94-1890DCBDA0E5}"/>
               </a:ext>
             </a:extLst>
           </p:cNvPr>
@@ -6599,7 +6599,7 @@
     </p:spTree>
     <p:extLst>
       <p:ext uri="{BB962C8B-B14F-4D97-AF65-F5344CB8AC3E}">
-        <p14:creationId xmlns:p14="http://schemas.microsoft.com/office/powerpoint/2010/main" val="2847701502"/>
+        <p14:creationId xmlns:p14="http://schemas.microsoft.com/office/powerpoint/2010/main" val="178090368"/>
       </p:ext>
     </p:extLst>
   </p:cSld>
@@ -6639,7 +6639,7 @@
           <p:cNvPr id="2" name="CuadroTexto 1">
             <a:extLst>
               <a:ext uri="{FF2B5EF4-FFF2-40B4-BE49-F238E27FC236}">
-                <a16:creationId xmlns:a16="http://schemas.microsoft.com/office/drawing/2014/main" id="{1BFC0396-2A65-7C5C-BD6D-A3CD1F05C574}"/>
+                <a16:creationId xmlns:a16="http://schemas.microsoft.com/office/drawing/2014/main" id="{65AC85FA-F908-4E21-70D9-CF67D755409D}"/>
               </a:ext>
             </a:extLst>
           </p:cNvPr>
@@ -6679,7 +6679,7 @@
           <p:cNvPr id="3" name="CuadroTexto 2">
             <a:extLst>
               <a:ext uri="{FF2B5EF4-FFF2-40B4-BE49-F238E27FC236}">
-                <a16:creationId xmlns:a16="http://schemas.microsoft.com/office/drawing/2014/main" id="{B83C3B01-4369-B14C-3B22-DAAC33E8EC4B}"/>
+                <a16:creationId xmlns:a16="http://schemas.microsoft.com/office/drawing/2014/main" id="{F0F54596-0118-8B63-D32D-7A17BB203100}"/>
               </a:ext>
             </a:extLst>
           </p:cNvPr>
@@ -6719,7 +6719,7 @@
           <p:cNvPr id="4" name="CuadroTexto 3">
             <a:extLst>
               <a:ext uri="{FF2B5EF4-FFF2-40B4-BE49-F238E27FC236}">
-                <a16:creationId xmlns:a16="http://schemas.microsoft.com/office/drawing/2014/main" id="{0ED18EBC-AA24-75AC-831E-459940DC4216}"/>
+                <a16:creationId xmlns:a16="http://schemas.microsoft.com/office/drawing/2014/main" id="{6165C584-4F58-F8C7-88AA-11E962CB6197}"/>
               </a:ext>
             </a:extLst>
           </p:cNvPr>
@@ -6759,7 +6759,7 @@
           <p:cNvPr id="5" name="Rectángulo: esquinas redondeadas 4">
             <a:extLst>
               <a:ext uri="{FF2B5EF4-FFF2-40B4-BE49-F238E27FC236}">
-                <a16:creationId xmlns:a16="http://schemas.microsoft.com/office/drawing/2014/main" id="{3834664E-4D88-FD0E-3B1C-AD58F616C932}"/>
+                <a16:creationId xmlns:a16="http://schemas.microsoft.com/office/drawing/2014/main" id="{13092FAF-37A2-B925-95C1-032895FE96C2}"/>
               </a:ext>
             </a:extLst>
           </p:cNvPr>
@@ -6813,7 +6813,7 @@
           <p:cNvPr id="6" name="CuadroTexto 5">
             <a:extLst>
               <a:ext uri="{FF2B5EF4-FFF2-40B4-BE49-F238E27FC236}">
-                <a16:creationId xmlns:a16="http://schemas.microsoft.com/office/drawing/2014/main" id="{258BB420-ABBF-1933-C98C-9475D272671B}"/>
+                <a16:creationId xmlns:a16="http://schemas.microsoft.com/office/drawing/2014/main" id="{DB589446-30CE-4263-EBCA-7A3DD5093426}"/>
               </a:ext>
             </a:extLst>
           </p:cNvPr>
@@ -6853,7 +6853,7 @@
           <p:cNvPr id="7" name="CuadroTexto 6">
             <a:extLst>
               <a:ext uri="{FF2B5EF4-FFF2-40B4-BE49-F238E27FC236}">
-                <a16:creationId xmlns:a16="http://schemas.microsoft.com/office/drawing/2014/main" id="{9C5FE3DF-3B88-5C06-554E-9829D2837B33}"/>
+                <a16:creationId xmlns:a16="http://schemas.microsoft.com/office/drawing/2014/main" id="{688ECCFA-E19E-E1B3-4097-4BD64C834C71}"/>
               </a:ext>
             </a:extLst>
           </p:cNvPr>
@@ -6893,7 +6893,7 @@
           <p:cNvPr id="8" name="Rectángulo: esquinas redondeadas 7">
             <a:extLst>
               <a:ext uri="{FF2B5EF4-FFF2-40B4-BE49-F238E27FC236}">
-                <a16:creationId xmlns:a16="http://schemas.microsoft.com/office/drawing/2014/main" id="{22BAA209-0796-F4C2-D741-E83A03ADFBF4}"/>
+                <a16:creationId xmlns:a16="http://schemas.microsoft.com/office/drawing/2014/main" id="{BA3AE05E-29E8-E5EA-516B-32AC9B2365C7}"/>
               </a:ext>
             </a:extLst>
           </p:cNvPr>
@@ -6947,7 +6947,7 @@
           <p:cNvPr id="9" name="CuadroTexto 8">
             <a:extLst>
               <a:ext uri="{FF2B5EF4-FFF2-40B4-BE49-F238E27FC236}">
-                <a16:creationId xmlns:a16="http://schemas.microsoft.com/office/drawing/2014/main" id="{5C469DFF-7C0E-9DA5-488E-2FB234357FD4}"/>
+                <a16:creationId xmlns:a16="http://schemas.microsoft.com/office/drawing/2014/main" id="{7E796478-CBB1-ECEB-CE26-BB0E255D469E}"/>
               </a:ext>
             </a:extLst>
           </p:cNvPr>
@@ -6987,7 +6987,7 @@
           <p:cNvPr id="10" name="CuadroTexto 9">
             <a:extLst>
               <a:ext uri="{FF2B5EF4-FFF2-40B4-BE49-F238E27FC236}">
-                <a16:creationId xmlns:a16="http://schemas.microsoft.com/office/drawing/2014/main" id="{6EF2C389-3F2D-C8B6-9EE8-E0DD9D310C2F}"/>
+                <a16:creationId xmlns:a16="http://schemas.microsoft.com/office/drawing/2014/main" id="{C890C099-AC11-E3DB-AD11-92819D6DC2FA}"/>
               </a:ext>
             </a:extLst>
           </p:cNvPr>
@@ -7027,7 +7027,7 @@
           <p:cNvPr id="11" name="Rectángulo: esquinas redondeadas 10">
             <a:extLst>
               <a:ext uri="{FF2B5EF4-FFF2-40B4-BE49-F238E27FC236}">
-                <a16:creationId xmlns:a16="http://schemas.microsoft.com/office/drawing/2014/main" id="{7CBFF513-0955-3716-4F81-8922A478B831}"/>
+                <a16:creationId xmlns:a16="http://schemas.microsoft.com/office/drawing/2014/main" id="{0A633831-79A5-5792-7412-58FC1879EFCA}"/>
               </a:ext>
             </a:extLst>
           </p:cNvPr>
@@ -7081,7 +7081,7 @@
           <p:cNvPr id="12" name="CuadroTexto 11">
             <a:extLst>
               <a:ext uri="{FF2B5EF4-FFF2-40B4-BE49-F238E27FC236}">
-                <a16:creationId xmlns:a16="http://schemas.microsoft.com/office/drawing/2014/main" id="{B7EDB871-3C94-A151-D177-50F2BC7894F4}"/>
+                <a16:creationId xmlns:a16="http://schemas.microsoft.com/office/drawing/2014/main" id="{A6A43BF5-5972-D933-8D9C-DD71DB14BCCC}"/>
               </a:ext>
             </a:extLst>
           </p:cNvPr>
@@ -7121,7 +7121,7 @@
           <p:cNvPr id="13" name="CuadroTexto 12">
             <a:extLst>
               <a:ext uri="{FF2B5EF4-FFF2-40B4-BE49-F238E27FC236}">
-                <a16:creationId xmlns:a16="http://schemas.microsoft.com/office/drawing/2014/main" id="{BF0D9C48-63F6-1D2D-3302-DDAD9CF0D3FB}"/>
+                <a16:creationId xmlns:a16="http://schemas.microsoft.com/office/drawing/2014/main" id="{6FECB936-5543-7540-CFBE-69E6E6DAD718}"/>
               </a:ext>
             </a:extLst>
           </p:cNvPr>
@@ -7151,7 +7151,7 @@
                 </a:solidFill>
                 <a:latin typeface="Consolas" panose="020B0609020204030204" pitchFamily="49" charset="0"/>
               </a:rPr>
-              <a:t>https://agora.34.175.157.37...</a:t>
+              <a:t>https://agora.34.175.161.212...</a:t>
             </a:r>
           </a:p>
         </p:txBody>
@@ -7161,7 +7161,7 @@
           <p:cNvPr id="14" name="CuadroTexto 13">
             <a:extLst>
               <a:ext uri="{FF2B5EF4-FFF2-40B4-BE49-F238E27FC236}">
-                <a16:creationId xmlns:a16="http://schemas.microsoft.com/office/drawing/2014/main" id="{246B6323-66F3-2568-C7A5-F451E28A27DE}"/>
+                <a16:creationId xmlns:a16="http://schemas.microsoft.com/office/drawing/2014/main" id="{57E0B157-C904-5762-B6AD-74A123CF0913}"/>
               </a:ext>
             </a:extLst>
           </p:cNvPr>
@@ -7242,7 +7242,7 @@
     </p:spTree>
     <p:extLst>
       <p:ext uri="{BB962C8B-B14F-4D97-AF65-F5344CB8AC3E}">
-        <p14:creationId xmlns:p14="http://schemas.microsoft.com/office/powerpoint/2010/main" val="2813981965"/>
+        <p14:creationId xmlns:p14="http://schemas.microsoft.com/office/powerpoint/2010/main" val="878860373"/>
       </p:ext>
     </p:extLst>
   </p:cSld>
@@ -7282,7 +7282,7 @@
           <p:cNvPr id="2" name="CuadroTexto 1">
             <a:extLst>
               <a:ext uri="{FF2B5EF4-FFF2-40B4-BE49-F238E27FC236}">
-                <a16:creationId xmlns:a16="http://schemas.microsoft.com/office/drawing/2014/main" id="{B91D7901-1C82-3FC5-C6FA-FB5AB170F64F}"/>
+                <a16:creationId xmlns:a16="http://schemas.microsoft.com/office/drawing/2014/main" id="{0612F822-E741-FF3B-BD34-0C5C21417D43}"/>
               </a:ext>
             </a:extLst>
           </p:cNvPr>
@@ -7322,7 +7322,7 @@
           <p:cNvPr id="3" name="CuadroTexto 2">
             <a:extLst>
               <a:ext uri="{FF2B5EF4-FFF2-40B4-BE49-F238E27FC236}">
-                <a16:creationId xmlns:a16="http://schemas.microsoft.com/office/drawing/2014/main" id="{74A471D8-C86F-26A6-EE8B-6476631940F4}"/>
+                <a16:creationId xmlns:a16="http://schemas.microsoft.com/office/drawing/2014/main" id="{4C09E9DC-8780-0368-E56E-5985A06F3652}"/>
               </a:ext>
             </a:extLst>
           </p:cNvPr>
@@ -7362,7 +7362,7 @@
           <p:cNvPr id="4" name="CuadroTexto 3">
             <a:extLst>
               <a:ext uri="{FF2B5EF4-FFF2-40B4-BE49-F238E27FC236}">
-                <a16:creationId xmlns:a16="http://schemas.microsoft.com/office/drawing/2014/main" id="{9B7B1F44-BB1D-204D-F7D4-73FFC3F9BA51}"/>
+                <a16:creationId xmlns:a16="http://schemas.microsoft.com/office/drawing/2014/main" id="{F23984AB-50E6-4296-5ABE-690D0C1AEB17}"/>
               </a:ext>
             </a:extLst>
           </p:cNvPr>
@@ -7402,7 +7402,7 @@
           <p:cNvPr id="6" name="Imagen 5">
             <a:extLst>
               <a:ext uri="{FF2B5EF4-FFF2-40B4-BE49-F238E27FC236}">
-                <a16:creationId xmlns:a16="http://schemas.microsoft.com/office/drawing/2014/main" id="{F54328A9-F2DC-97F2-E892-FF176FB4BC6D}"/>
+                <a16:creationId xmlns:a16="http://schemas.microsoft.com/office/drawing/2014/main" id="{EFDA7603-6F23-8FDE-4739-4329DCEECAAF}"/>
               </a:ext>
             </a:extLst>
           </p:cNvPr>
@@ -7443,7 +7443,7 @@
           <p:cNvPr id="7" name="Rectángulo: esquinas redondeadas 6">
             <a:extLst>
               <a:ext uri="{FF2B5EF4-FFF2-40B4-BE49-F238E27FC236}">
-                <a16:creationId xmlns:a16="http://schemas.microsoft.com/office/drawing/2014/main" id="{A490637C-CB8F-478E-4789-4A1BEC739ABD}"/>
+                <a16:creationId xmlns:a16="http://schemas.microsoft.com/office/drawing/2014/main" id="{9A15C0D5-FDC4-4504-D1F8-E4A2FE1A3328}"/>
               </a:ext>
             </a:extLst>
           </p:cNvPr>
@@ -7497,7 +7497,7 @@
           <p:cNvPr id="8" name="CuadroTexto 7">
             <a:extLst>
               <a:ext uri="{FF2B5EF4-FFF2-40B4-BE49-F238E27FC236}">
-                <a16:creationId xmlns:a16="http://schemas.microsoft.com/office/drawing/2014/main" id="{92B614AC-4BDC-CCD5-2B2C-433D75FF9369}"/>
+                <a16:creationId xmlns:a16="http://schemas.microsoft.com/office/drawing/2014/main" id="{37FBCE84-8CC1-094A-C428-27ABF7E8A252}"/>
               </a:ext>
             </a:extLst>
           </p:cNvPr>
@@ -7537,7 +7537,7 @@
           <p:cNvPr id="9" name="CuadroTexto 8">
             <a:extLst>
               <a:ext uri="{FF2B5EF4-FFF2-40B4-BE49-F238E27FC236}">
-                <a16:creationId xmlns:a16="http://schemas.microsoft.com/office/drawing/2014/main" id="{B582EB93-4CB8-682C-9364-4EA5465325C8}"/>
+                <a16:creationId xmlns:a16="http://schemas.microsoft.com/office/drawing/2014/main" id="{F4AF7EE7-7911-A572-2C5B-05F715B256F9}"/>
               </a:ext>
             </a:extLst>
           </p:cNvPr>
@@ -7577,7 +7577,7 @@
           <p:cNvPr id="10" name="CuadroTexto 9">
             <a:extLst>
               <a:ext uri="{FF2B5EF4-FFF2-40B4-BE49-F238E27FC236}">
-                <a16:creationId xmlns:a16="http://schemas.microsoft.com/office/drawing/2014/main" id="{4E77CE56-DB0D-3287-003F-E1D94D866C82}"/>
+                <a16:creationId xmlns:a16="http://schemas.microsoft.com/office/drawing/2014/main" id="{A7C95394-2369-55C4-D2CE-2A57DB9AA75F}"/>
               </a:ext>
             </a:extLst>
           </p:cNvPr>
@@ -7676,7 +7676,7 @@
     </p:spTree>
     <p:extLst>
       <p:ext uri="{BB962C8B-B14F-4D97-AF65-F5344CB8AC3E}">
-        <p14:creationId xmlns:p14="http://schemas.microsoft.com/office/powerpoint/2010/main" val="4073910951"/>
+        <p14:creationId xmlns:p14="http://schemas.microsoft.com/office/powerpoint/2010/main" val="3929130074"/>
       </p:ext>
     </p:extLst>
   </p:cSld>
@@ -7716,7 +7716,7 @@
           <p:cNvPr id="2" name="CuadroTexto 1">
             <a:extLst>
               <a:ext uri="{FF2B5EF4-FFF2-40B4-BE49-F238E27FC236}">
-                <a16:creationId xmlns:a16="http://schemas.microsoft.com/office/drawing/2014/main" id="{F2539D70-8596-63F3-175E-E17D9945B91D}"/>
+                <a16:creationId xmlns:a16="http://schemas.microsoft.com/office/drawing/2014/main" id="{665A8073-6239-65F9-1C6C-90322CDDE31D}"/>
               </a:ext>
             </a:extLst>
           </p:cNvPr>
@@ -7756,7 +7756,7 @@
           <p:cNvPr id="3" name="CuadroTexto 2">
             <a:extLst>
               <a:ext uri="{FF2B5EF4-FFF2-40B4-BE49-F238E27FC236}">
-                <a16:creationId xmlns:a16="http://schemas.microsoft.com/office/drawing/2014/main" id="{0B10F546-5F4E-01FF-70A6-C70A8AEF8758}"/>
+                <a16:creationId xmlns:a16="http://schemas.microsoft.com/office/drawing/2014/main" id="{B3B92AC7-9997-EE69-9DB7-898BC6C47F4C}"/>
               </a:ext>
             </a:extLst>
           </p:cNvPr>
@@ -7796,7 +7796,7 @@
           <p:cNvPr id="4" name="CuadroTexto 3">
             <a:extLst>
               <a:ext uri="{FF2B5EF4-FFF2-40B4-BE49-F238E27FC236}">
-                <a16:creationId xmlns:a16="http://schemas.microsoft.com/office/drawing/2014/main" id="{096BBF0C-52CD-6A03-4382-BB69363F4448}"/>
+                <a16:creationId xmlns:a16="http://schemas.microsoft.com/office/drawing/2014/main" id="{F58B302C-CB33-8D5F-76E3-FBC04A0A6D8C}"/>
               </a:ext>
             </a:extLst>
           </p:cNvPr>
@@ -7836,7 +7836,7 @@
           <p:cNvPr id="6" name="Imagen 5">
             <a:extLst>
               <a:ext uri="{FF2B5EF4-FFF2-40B4-BE49-F238E27FC236}">
-                <a16:creationId xmlns:a16="http://schemas.microsoft.com/office/drawing/2014/main" id="{3FFA2FB5-EEA5-084C-86BF-F1CC33208862}"/>
+                <a16:creationId xmlns:a16="http://schemas.microsoft.com/office/drawing/2014/main" id="{04CBA8D3-B8F9-B6B5-A27C-6259828AE60B}"/>
               </a:ext>
             </a:extLst>
           </p:cNvPr>
@@ -7877,7 +7877,7 @@
           <p:cNvPr id="7" name="CuadroTexto 6">
             <a:extLst>
               <a:ext uri="{FF2B5EF4-FFF2-40B4-BE49-F238E27FC236}">
-                <a16:creationId xmlns:a16="http://schemas.microsoft.com/office/drawing/2014/main" id="{A232BE2A-17FF-904C-1DB8-17150B49E093}"/>
+                <a16:creationId xmlns:a16="http://schemas.microsoft.com/office/drawing/2014/main" id="{1833379E-51BC-F9B4-C7BE-852BC8012B08}"/>
               </a:ext>
             </a:extLst>
           </p:cNvPr>
@@ -7994,7 +7994,7 @@
     </p:spTree>
     <p:extLst>
       <p:ext uri="{BB962C8B-B14F-4D97-AF65-F5344CB8AC3E}">
-        <p14:creationId xmlns:p14="http://schemas.microsoft.com/office/powerpoint/2010/main" val="839347778"/>
+        <p14:creationId xmlns:p14="http://schemas.microsoft.com/office/powerpoint/2010/main" val="4243507258"/>
       </p:ext>
     </p:extLst>
   </p:cSld>
@@ -8034,7 +8034,7 @@
           <p:cNvPr id="2" name="CuadroTexto 1">
             <a:extLst>
               <a:ext uri="{FF2B5EF4-FFF2-40B4-BE49-F238E27FC236}">
-                <a16:creationId xmlns:a16="http://schemas.microsoft.com/office/drawing/2014/main" id="{E25FC2C0-B528-39DD-26C0-EB0E75E2CAE2}"/>
+                <a16:creationId xmlns:a16="http://schemas.microsoft.com/office/drawing/2014/main" id="{33C423A3-4388-C51F-DADE-9D4EC766E6E4}"/>
               </a:ext>
             </a:extLst>
           </p:cNvPr>
@@ -8074,7 +8074,7 @@
           <p:cNvPr id="3" name="CuadroTexto 2">
             <a:extLst>
               <a:ext uri="{FF2B5EF4-FFF2-40B4-BE49-F238E27FC236}">
-                <a16:creationId xmlns:a16="http://schemas.microsoft.com/office/drawing/2014/main" id="{C2743FC8-8AD7-156C-D7BA-C70312F3EB8E}"/>
+                <a16:creationId xmlns:a16="http://schemas.microsoft.com/office/drawing/2014/main" id="{A48F09ED-E24D-5D7F-1296-BAE484F0BCB9}"/>
               </a:ext>
             </a:extLst>
           </p:cNvPr>
@@ -8114,7 +8114,7 @@
           <p:cNvPr id="4" name="CuadroTexto 3">
             <a:extLst>
               <a:ext uri="{FF2B5EF4-FFF2-40B4-BE49-F238E27FC236}">
-                <a16:creationId xmlns:a16="http://schemas.microsoft.com/office/drawing/2014/main" id="{237A5FDD-271B-0258-B781-EF925BF153AC}"/>
+                <a16:creationId xmlns:a16="http://schemas.microsoft.com/office/drawing/2014/main" id="{88E90382-8740-CA42-533D-FA81BA70D83E}"/>
               </a:ext>
             </a:extLst>
           </p:cNvPr>
@@ -8154,7 +8154,7 @@
           <p:cNvPr id="5" name="Rectángulo: esquinas redondeadas 4">
             <a:extLst>
               <a:ext uri="{FF2B5EF4-FFF2-40B4-BE49-F238E27FC236}">
-                <a16:creationId xmlns:a16="http://schemas.microsoft.com/office/drawing/2014/main" id="{AAE5D9A1-026D-8FB0-2822-88A7BC77D4D2}"/>
+                <a16:creationId xmlns:a16="http://schemas.microsoft.com/office/drawing/2014/main" id="{2F4359B7-DE60-F526-D194-DF8B0395D0FC}"/>
               </a:ext>
             </a:extLst>
           </p:cNvPr>
@@ -8208,7 +8208,7 @@
           <p:cNvPr id="6" name="CuadroTexto 5">
             <a:extLst>
               <a:ext uri="{FF2B5EF4-FFF2-40B4-BE49-F238E27FC236}">
-                <a16:creationId xmlns:a16="http://schemas.microsoft.com/office/drawing/2014/main" id="{3F359A0A-FEDC-85C1-6A17-0BA8B98A169A}"/>
+                <a16:creationId xmlns:a16="http://schemas.microsoft.com/office/drawing/2014/main" id="{7B670ACA-C49E-DB59-2D32-8E0275FF2D8E}"/>
               </a:ext>
             </a:extLst>
           </p:cNvPr>
@@ -8248,7 +8248,7 @@
           <p:cNvPr id="7" name="CuadroTexto 6">
             <a:extLst>
               <a:ext uri="{FF2B5EF4-FFF2-40B4-BE49-F238E27FC236}">
-                <a16:creationId xmlns:a16="http://schemas.microsoft.com/office/drawing/2014/main" id="{251E5BE7-5D4D-2266-27CD-09E1AAEC6B38}"/>
+                <a16:creationId xmlns:a16="http://schemas.microsoft.com/office/drawing/2014/main" id="{AE94ECD1-A4B1-8766-06E8-2DA31E88299A}"/>
               </a:ext>
             </a:extLst>
           </p:cNvPr>
@@ -8316,7 +8316,7 @@
           <p:cNvPr id="8" name="CuadroTexto 7">
             <a:extLst>
               <a:ext uri="{FF2B5EF4-FFF2-40B4-BE49-F238E27FC236}">
-                <a16:creationId xmlns:a16="http://schemas.microsoft.com/office/drawing/2014/main" id="{A4F51410-5F0E-0A8A-D3B6-DE41A699B232}"/>
+                <a16:creationId xmlns:a16="http://schemas.microsoft.com/office/drawing/2014/main" id="{4689625D-A50E-4153-881E-98905E45F1A3}"/>
               </a:ext>
             </a:extLst>
           </p:cNvPr>
@@ -8381,7 +8381,7 @@
           <p:cNvPr id="9" name="Rectángulo: esquinas redondeadas 8">
             <a:extLst>
               <a:ext uri="{FF2B5EF4-FFF2-40B4-BE49-F238E27FC236}">
-                <a16:creationId xmlns:a16="http://schemas.microsoft.com/office/drawing/2014/main" id="{FEE107C3-F4B8-2BC4-29D9-7F8044D5034D}"/>
+                <a16:creationId xmlns:a16="http://schemas.microsoft.com/office/drawing/2014/main" id="{4C9002FA-1C67-2655-43B6-41BB11D8F819}"/>
               </a:ext>
             </a:extLst>
           </p:cNvPr>
@@ -8435,7 +8435,7 @@
           <p:cNvPr id="10" name="CuadroTexto 9">
             <a:extLst>
               <a:ext uri="{FF2B5EF4-FFF2-40B4-BE49-F238E27FC236}">
-                <a16:creationId xmlns:a16="http://schemas.microsoft.com/office/drawing/2014/main" id="{2C3C4347-38EF-73FB-6C9B-7801430E86AE}"/>
+                <a16:creationId xmlns:a16="http://schemas.microsoft.com/office/drawing/2014/main" id="{25F2CB4D-004F-60FD-B354-33CE6585EB10}"/>
               </a:ext>
             </a:extLst>
           </p:cNvPr>
@@ -8475,7 +8475,7 @@
           <p:cNvPr id="11" name="CuadroTexto 10">
             <a:extLst>
               <a:ext uri="{FF2B5EF4-FFF2-40B4-BE49-F238E27FC236}">
-                <a16:creationId xmlns:a16="http://schemas.microsoft.com/office/drawing/2014/main" id="{46E860FB-D9EB-5565-058A-5DE31EDB5515}"/>
+                <a16:creationId xmlns:a16="http://schemas.microsoft.com/office/drawing/2014/main" id="{D80D563F-D839-D782-7232-C48939CFD72A}"/>
               </a:ext>
             </a:extLst>
           </p:cNvPr>
@@ -8594,7 +8594,7 @@
           <p:cNvPr id="12" name="CuadroTexto 11">
             <a:extLst>
               <a:ext uri="{FF2B5EF4-FFF2-40B4-BE49-F238E27FC236}">
-                <a16:creationId xmlns:a16="http://schemas.microsoft.com/office/drawing/2014/main" id="{CE9489AD-12E3-1F7C-F347-FACE6A2F9C6D}"/>
+                <a16:creationId xmlns:a16="http://schemas.microsoft.com/office/drawing/2014/main" id="{1C487B9B-BA48-A165-770D-45103B967366}"/>
               </a:ext>
             </a:extLst>
           </p:cNvPr>
@@ -8634,7 +8634,7 @@
           <p:cNvPr id="13" name="CuadroTexto 12">
             <a:extLst>
               <a:ext uri="{FF2B5EF4-FFF2-40B4-BE49-F238E27FC236}">
-                <a16:creationId xmlns:a16="http://schemas.microsoft.com/office/drawing/2014/main" id="{6241DFCE-36E5-10DF-4B69-BB4F93D854AE}"/>
+                <a16:creationId xmlns:a16="http://schemas.microsoft.com/office/drawing/2014/main" id="{39EFF52E-0F4E-D6D1-C885-16A79F83F54C}"/>
               </a:ext>
             </a:extLst>
           </p:cNvPr>
@@ -8672,7 +8672,7 @@
     </p:spTree>
     <p:extLst>
       <p:ext uri="{BB962C8B-B14F-4D97-AF65-F5344CB8AC3E}">
-        <p14:creationId xmlns:p14="http://schemas.microsoft.com/office/powerpoint/2010/main" val="2154766140"/>
+        <p14:creationId xmlns:p14="http://schemas.microsoft.com/office/powerpoint/2010/main" val="2832636802"/>
       </p:ext>
     </p:extLst>
   </p:cSld>
@@ -8712,7 +8712,7 @@
           <p:cNvPr id="2" name="CuadroTexto 1">
             <a:extLst>
               <a:ext uri="{FF2B5EF4-FFF2-40B4-BE49-F238E27FC236}">
-                <a16:creationId xmlns:a16="http://schemas.microsoft.com/office/drawing/2014/main" id="{94C8C08F-DA07-3574-7E56-1C38128C8094}"/>
+                <a16:creationId xmlns:a16="http://schemas.microsoft.com/office/drawing/2014/main" id="{C0AF8DE1-B239-16D5-E9CA-03C623C151A9}"/>
               </a:ext>
             </a:extLst>
           </p:cNvPr>
@@ -8752,7 +8752,7 @@
           <p:cNvPr id="3" name="CuadroTexto 2">
             <a:extLst>
               <a:ext uri="{FF2B5EF4-FFF2-40B4-BE49-F238E27FC236}">
-                <a16:creationId xmlns:a16="http://schemas.microsoft.com/office/drawing/2014/main" id="{6C546666-F1F5-1A9F-47FB-1C0977756521}"/>
+                <a16:creationId xmlns:a16="http://schemas.microsoft.com/office/drawing/2014/main" id="{2F093064-14A1-B9A3-BF8C-3FAB78E7AE1E}"/>
               </a:ext>
             </a:extLst>
           </p:cNvPr>
@@ -8792,7 +8792,7 @@
           <p:cNvPr id="4" name="Rectángulo: esquinas redondeadas 3">
             <a:extLst>
               <a:ext uri="{FF2B5EF4-FFF2-40B4-BE49-F238E27FC236}">
-                <a16:creationId xmlns:a16="http://schemas.microsoft.com/office/drawing/2014/main" id="{7FC7EE1C-A41F-C0E7-FBC4-00C39036EE1C}"/>
+                <a16:creationId xmlns:a16="http://schemas.microsoft.com/office/drawing/2014/main" id="{63761DE4-6D25-4140-CE56-872F995317C7}"/>
               </a:ext>
             </a:extLst>
           </p:cNvPr>
@@ -8846,7 +8846,7 @@
           <p:cNvPr id="5" name="CuadroTexto 4">
             <a:extLst>
               <a:ext uri="{FF2B5EF4-FFF2-40B4-BE49-F238E27FC236}">
-                <a16:creationId xmlns:a16="http://schemas.microsoft.com/office/drawing/2014/main" id="{D9A7651D-8E8E-829E-4326-5683A280C00A}"/>
+                <a16:creationId xmlns:a16="http://schemas.microsoft.com/office/drawing/2014/main" id="{0E57D432-7F74-4C12-D53A-5EB9BD8334C9}"/>
               </a:ext>
             </a:extLst>
           </p:cNvPr>
@@ -8886,7 +8886,7 @@
           <p:cNvPr id="6" name="CuadroTexto 5">
             <a:extLst>
               <a:ext uri="{FF2B5EF4-FFF2-40B4-BE49-F238E27FC236}">
-                <a16:creationId xmlns:a16="http://schemas.microsoft.com/office/drawing/2014/main" id="{24E16A61-AD09-EE49-131F-0EAEA67FD3D1}"/>
+                <a16:creationId xmlns:a16="http://schemas.microsoft.com/office/drawing/2014/main" id="{5D498C38-9036-F97F-DE91-B9F00BC7CE9D}"/>
               </a:ext>
             </a:extLst>
           </p:cNvPr>
@@ -8926,7 +8926,7 @@
           <p:cNvPr id="7" name="Rectángulo: esquinas redondeadas 6">
             <a:extLst>
               <a:ext uri="{FF2B5EF4-FFF2-40B4-BE49-F238E27FC236}">
-                <a16:creationId xmlns:a16="http://schemas.microsoft.com/office/drawing/2014/main" id="{BA650A2C-FA88-49E4-B3F8-715DAB52A910}"/>
+                <a16:creationId xmlns:a16="http://schemas.microsoft.com/office/drawing/2014/main" id="{C8DBBF70-4C21-DAF6-D05F-874C7F497F53}"/>
               </a:ext>
             </a:extLst>
           </p:cNvPr>
@@ -8980,7 +8980,7 @@
           <p:cNvPr id="8" name="CuadroTexto 7">
             <a:extLst>
               <a:ext uri="{FF2B5EF4-FFF2-40B4-BE49-F238E27FC236}">
-                <a16:creationId xmlns:a16="http://schemas.microsoft.com/office/drawing/2014/main" id="{03DA1B89-78E3-0C91-20C3-8079917B0478}"/>
+                <a16:creationId xmlns:a16="http://schemas.microsoft.com/office/drawing/2014/main" id="{A526B1A9-4089-5A30-4816-E8C67EB43E97}"/>
               </a:ext>
             </a:extLst>
           </p:cNvPr>
@@ -9020,7 +9020,7 @@
           <p:cNvPr id="9" name="CuadroTexto 8">
             <a:extLst>
               <a:ext uri="{FF2B5EF4-FFF2-40B4-BE49-F238E27FC236}">
-                <a16:creationId xmlns:a16="http://schemas.microsoft.com/office/drawing/2014/main" id="{C6EF62AA-CE2F-BE81-7FD2-771CF8A022B2}"/>
+                <a16:creationId xmlns:a16="http://schemas.microsoft.com/office/drawing/2014/main" id="{3B29706D-9BC8-B098-DE32-38B5805D1DCE}"/>
               </a:ext>
             </a:extLst>
           </p:cNvPr>
@@ -9060,7 +9060,7 @@
           <p:cNvPr id="10" name="Rectángulo: esquinas redondeadas 9">
             <a:extLst>
               <a:ext uri="{FF2B5EF4-FFF2-40B4-BE49-F238E27FC236}">
-                <a16:creationId xmlns:a16="http://schemas.microsoft.com/office/drawing/2014/main" id="{D9739C51-78EB-3175-F5E5-0E7AAF10267B}"/>
+                <a16:creationId xmlns:a16="http://schemas.microsoft.com/office/drawing/2014/main" id="{8A4C206B-7D02-4F76-5F20-62CBEC6B6869}"/>
               </a:ext>
             </a:extLst>
           </p:cNvPr>
@@ -9114,7 +9114,7 @@
           <p:cNvPr id="11" name="CuadroTexto 10">
             <a:extLst>
               <a:ext uri="{FF2B5EF4-FFF2-40B4-BE49-F238E27FC236}">
-                <a16:creationId xmlns:a16="http://schemas.microsoft.com/office/drawing/2014/main" id="{FFF5F859-389D-5F60-50A0-A499C84FB247}"/>
+                <a16:creationId xmlns:a16="http://schemas.microsoft.com/office/drawing/2014/main" id="{64315C01-1D97-E8B7-D926-848F5C4D1060}"/>
               </a:ext>
             </a:extLst>
           </p:cNvPr>
@@ -9154,7 +9154,7 @@
           <p:cNvPr id="12" name="CuadroTexto 11">
             <a:extLst>
               <a:ext uri="{FF2B5EF4-FFF2-40B4-BE49-F238E27FC236}">
-                <a16:creationId xmlns:a16="http://schemas.microsoft.com/office/drawing/2014/main" id="{3B676257-7D7F-8075-E88B-7471C841CCAF}"/>
+                <a16:creationId xmlns:a16="http://schemas.microsoft.com/office/drawing/2014/main" id="{1BB8BE17-E927-0168-99FE-74822B2B6787}"/>
               </a:ext>
             </a:extLst>
           </p:cNvPr>
@@ -9194,7 +9194,7 @@
           <p:cNvPr id="13" name="Rectángulo: esquinas redondeadas 12">
             <a:extLst>
               <a:ext uri="{FF2B5EF4-FFF2-40B4-BE49-F238E27FC236}">
-                <a16:creationId xmlns:a16="http://schemas.microsoft.com/office/drawing/2014/main" id="{E296E1D6-8B6D-CE41-1D54-B0F0459E07D6}"/>
+                <a16:creationId xmlns:a16="http://schemas.microsoft.com/office/drawing/2014/main" id="{C483D33C-3B97-9682-993E-A27AA1109E4C}"/>
               </a:ext>
             </a:extLst>
           </p:cNvPr>
@@ -9248,7 +9248,7 @@
           <p:cNvPr id="14" name="CuadroTexto 13">
             <a:extLst>
               <a:ext uri="{FF2B5EF4-FFF2-40B4-BE49-F238E27FC236}">
-                <a16:creationId xmlns:a16="http://schemas.microsoft.com/office/drawing/2014/main" id="{D372023C-AE65-26A2-BC48-3108E9709B9C}"/>
+                <a16:creationId xmlns:a16="http://schemas.microsoft.com/office/drawing/2014/main" id="{8A47BC40-1740-DD17-DDAD-74215E9C786C}"/>
               </a:ext>
             </a:extLst>
           </p:cNvPr>
@@ -9288,7 +9288,7 @@
           <p:cNvPr id="15" name="CuadroTexto 14">
             <a:extLst>
               <a:ext uri="{FF2B5EF4-FFF2-40B4-BE49-F238E27FC236}">
-                <a16:creationId xmlns:a16="http://schemas.microsoft.com/office/drawing/2014/main" id="{DA52FC83-E274-518D-EED6-3C430243BE8D}"/>
+                <a16:creationId xmlns:a16="http://schemas.microsoft.com/office/drawing/2014/main" id="{CCB5C112-73AA-1592-824D-6B94A154D447}"/>
               </a:ext>
             </a:extLst>
           </p:cNvPr>
@@ -9328,7 +9328,7 @@
           <p:cNvPr id="16" name="CuadroTexto 15">
             <a:extLst>
               <a:ext uri="{FF2B5EF4-FFF2-40B4-BE49-F238E27FC236}">
-                <a16:creationId xmlns:a16="http://schemas.microsoft.com/office/drawing/2014/main" id="{B7480028-461E-048B-F63D-4A54A3C51E8F}"/>
+                <a16:creationId xmlns:a16="http://schemas.microsoft.com/office/drawing/2014/main" id="{C2F7DDF2-1E8B-6D53-9FC1-16DE85B754EA}"/>
               </a:ext>
             </a:extLst>
           </p:cNvPr>
@@ -9411,7 +9411,7 @@
           <p:cNvPr id="17" name="CuadroTexto 16">
             <a:extLst>
               <a:ext uri="{FF2B5EF4-FFF2-40B4-BE49-F238E27FC236}">
-                <a16:creationId xmlns:a16="http://schemas.microsoft.com/office/drawing/2014/main" id="{7E7AF284-79BF-CCE8-8FA7-04F6D55ECC44}"/>
+                <a16:creationId xmlns:a16="http://schemas.microsoft.com/office/drawing/2014/main" id="{DD276DE3-694C-571E-3D3B-4DC79A6A5CC6}"/>
               </a:ext>
             </a:extLst>
           </p:cNvPr>
@@ -9449,7 +9449,7 @@
     </p:spTree>
     <p:extLst>
       <p:ext uri="{BB962C8B-B14F-4D97-AF65-F5344CB8AC3E}">
-        <p14:creationId xmlns:p14="http://schemas.microsoft.com/office/powerpoint/2010/main" val="1930905325"/>
+        <p14:creationId xmlns:p14="http://schemas.microsoft.com/office/powerpoint/2010/main" val="1089190011"/>
       </p:ext>
     </p:extLst>
   </p:cSld>
@@ -9489,7 +9489,7 @@
           <p:cNvPr id="2" name="CuadroTexto 1">
             <a:extLst>
               <a:ext uri="{FF2B5EF4-FFF2-40B4-BE49-F238E27FC236}">
-                <a16:creationId xmlns:a16="http://schemas.microsoft.com/office/drawing/2014/main" id="{9CD16692-9349-D12C-0B61-DEA0E0018975}"/>
+                <a16:creationId xmlns:a16="http://schemas.microsoft.com/office/drawing/2014/main" id="{1287D721-EA82-3258-D9E0-06BF24F3B93A}"/>
               </a:ext>
             </a:extLst>
           </p:cNvPr>
@@ -9529,7 +9529,7 @@
           <p:cNvPr id="3" name="CuadroTexto 2">
             <a:extLst>
               <a:ext uri="{FF2B5EF4-FFF2-40B4-BE49-F238E27FC236}">
-                <a16:creationId xmlns:a16="http://schemas.microsoft.com/office/drawing/2014/main" id="{3FD922E1-5C31-8DDA-F7CA-69AD03218E94}"/>
+                <a16:creationId xmlns:a16="http://schemas.microsoft.com/office/drawing/2014/main" id="{0E527FF5-ACB5-73F1-05A8-B65174048BAD}"/>
               </a:ext>
             </a:extLst>
           </p:cNvPr>
@@ -9569,7 +9569,7 @@
           <p:cNvPr id="4" name="CuadroTexto 3">
             <a:extLst>
               <a:ext uri="{FF2B5EF4-FFF2-40B4-BE49-F238E27FC236}">
-                <a16:creationId xmlns:a16="http://schemas.microsoft.com/office/drawing/2014/main" id="{CFE35FE3-E581-7FCD-E82D-A0E3A7B9E238}"/>
+                <a16:creationId xmlns:a16="http://schemas.microsoft.com/office/drawing/2014/main" id="{2F93B62E-C7D2-9617-F6D3-704940E41714}"/>
               </a:ext>
             </a:extLst>
           </p:cNvPr>
@@ -9609,7 +9609,7 @@
           <p:cNvPr id="5" name="Rectángulo: esquinas redondeadas 4">
             <a:extLst>
               <a:ext uri="{FF2B5EF4-FFF2-40B4-BE49-F238E27FC236}">
-                <a16:creationId xmlns:a16="http://schemas.microsoft.com/office/drawing/2014/main" id="{E3A32F93-A359-D490-CC01-ADFD0900299B}"/>
+                <a16:creationId xmlns:a16="http://schemas.microsoft.com/office/drawing/2014/main" id="{BF712BBC-3C83-CDC9-BFB3-3F0BEE120852}"/>
               </a:ext>
             </a:extLst>
           </p:cNvPr>
@@ -9663,7 +9663,7 @@
           <p:cNvPr id="6" name="CuadroTexto 5">
             <a:extLst>
               <a:ext uri="{FF2B5EF4-FFF2-40B4-BE49-F238E27FC236}">
-                <a16:creationId xmlns:a16="http://schemas.microsoft.com/office/drawing/2014/main" id="{9390BDFF-CFE1-A2BB-1684-E69AEB0856E1}"/>
+                <a16:creationId xmlns:a16="http://schemas.microsoft.com/office/drawing/2014/main" id="{DD15D1A6-5DF5-115E-F6B3-4EBB83269791}"/>
               </a:ext>
             </a:extLst>
           </p:cNvPr>
@@ -9703,7 +9703,7 @@
           <p:cNvPr id="7" name="CuadroTexto 6">
             <a:extLst>
               <a:ext uri="{FF2B5EF4-FFF2-40B4-BE49-F238E27FC236}">
-                <a16:creationId xmlns:a16="http://schemas.microsoft.com/office/drawing/2014/main" id="{23216801-4E90-C34E-BEBE-EF3EC3C998E8}"/>
+                <a16:creationId xmlns:a16="http://schemas.microsoft.com/office/drawing/2014/main" id="{374CE008-3C84-A8F8-324C-522CB7693EB1}"/>
               </a:ext>
             </a:extLst>
           </p:cNvPr>
@@ -9743,7 +9743,7 @@
           <p:cNvPr id="8" name="Rectángulo: esquinas redondeadas 7">
             <a:extLst>
               <a:ext uri="{FF2B5EF4-FFF2-40B4-BE49-F238E27FC236}">
-                <a16:creationId xmlns:a16="http://schemas.microsoft.com/office/drawing/2014/main" id="{34D95524-5FAA-E144-F76B-C9D0CB796B73}"/>
+                <a16:creationId xmlns:a16="http://schemas.microsoft.com/office/drawing/2014/main" id="{39DBD13E-D0FA-3F44-9EE2-1A89282CD510}"/>
               </a:ext>
             </a:extLst>
           </p:cNvPr>
@@ -9797,7 +9797,7 @@
           <p:cNvPr id="9" name="CuadroTexto 8">
             <a:extLst>
               <a:ext uri="{FF2B5EF4-FFF2-40B4-BE49-F238E27FC236}">
-                <a16:creationId xmlns:a16="http://schemas.microsoft.com/office/drawing/2014/main" id="{55773277-763E-6A59-F998-2B4207B842CC}"/>
+                <a16:creationId xmlns:a16="http://schemas.microsoft.com/office/drawing/2014/main" id="{3206CB05-CB6D-D46A-1185-180D4A1AA861}"/>
               </a:ext>
             </a:extLst>
           </p:cNvPr>
@@ -9837,7 +9837,7 @@
           <p:cNvPr id="10" name="CuadroTexto 9">
             <a:extLst>
               <a:ext uri="{FF2B5EF4-FFF2-40B4-BE49-F238E27FC236}">
-                <a16:creationId xmlns:a16="http://schemas.microsoft.com/office/drawing/2014/main" id="{8AA37CAB-75F6-D668-926D-D7AA36B43B4E}"/>
+                <a16:creationId xmlns:a16="http://schemas.microsoft.com/office/drawing/2014/main" id="{FD09B2F5-C6FE-E8EE-FEF4-1AF5DBCC9682}"/>
               </a:ext>
             </a:extLst>
           </p:cNvPr>
@@ -9877,7 +9877,7 @@
           <p:cNvPr id="11" name="CuadroTexto 10">
             <a:extLst>
               <a:ext uri="{FF2B5EF4-FFF2-40B4-BE49-F238E27FC236}">
-                <a16:creationId xmlns:a16="http://schemas.microsoft.com/office/drawing/2014/main" id="{283F3D5C-0DC3-44B7-0423-3BBF09398352}"/>
+                <a16:creationId xmlns:a16="http://schemas.microsoft.com/office/drawing/2014/main" id="{4594DBE3-D6DE-7549-B739-6AC4368FB548}"/>
               </a:ext>
             </a:extLst>
           </p:cNvPr>
@@ -9917,7 +9917,7 @@
           <p:cNvPr id="12" name="CuadroTexto 11">
             <a:extLst>
               <a:ext uri="{FF2B5EF4-FFF2-40B4-BE49-F238E27FC236}">
-                <a16:creationId xmlns:a16="http://schemas.microsoft.com/office/drawing/2014/main" id="{E6F33942-BBCE-0B25-0F22-DE82A4494733}"/>
+                <a16:creationId xmlns:a16="http://schemas.microsoft.com/office/drawing/2014/main" id="{8C067BEA-4AA0-83FA-66EF-CAB7D2066781}"/>
               </a:ext>
             </a:extLst>
           </p:cNvPr>
@@ -9998,7 +9998,7 @@
     </p:spTree>
     <p:extLst>
       <p:ext uri="{BB962C8B-B14F-4D97-AF65-F5344CB8AC3E}">
-        <p14:creationId xmlns:p14="http://schemas.microsoft.com/office/powerpoint/2010/main" val="1254394838"/>
+        <p14:creationId xmlns:p14="http://schemas.microsoft.com/office/powerpoint/2010/main" val="3322175799"/>
       </p:ext>
     </p:extLst>
   </p:cSld>
@@ -10038,7 +10038,7 @@
           <p:cNvPr id="2" name="CuadroTexto 1">
             <a:extLst>
               <a:ext uri="{FF2B5EF4-FFF2-40B4-BE49-F238E27FC236}">
-                <a16:creationId xmlns:a16="http://schemas.microsoft.com/office/drawing/2014/main" id="{56BB0456-1227-3A08-8F8F-3F0ABE6E3E27}"/>
+                <a16:creationId xmlns:a16="http://schemas.microsoft.com/office/drawing/2014/main" id="{2BFAB474-5537-AE3E-3A88-F8567A2A1B9E}"/>
               </a:ext>
             </a:extLst>
           </p:cNvPr>
@@ -10078,7 +10078,7 @@
           <p:cNvPr id="3" name="CuadroTexto 2">
             <a:extLst>
               <a:ext uri="{FF2B5EF4-FFF2-40B4-BE49-F238E27FC236}">
-                <a16:creationId xmlns:a16="http://schemas.microsoft.com/office/drawing/2014/main" id="{4C9E5584-D318-F28E-5BA2-20117BBB5A49}"/>
+                <a16:creationId xmlns:a16="http://schemas.microsoft.com/office/drawing/2014/main" id="{E5C95DB2-EFA2-1525-9158-A95ECCE84CB5}"/>
               </a:ext>
             </a:extLst>
           </p:cNvPr>
@@ -10118,7 +10118,7 @@
           <p:cNvPr id="4" name="CuadroTexto 3">
             <a:extLst>
               <a:ext uri="{FF2B5EF4-FFF2-40B4-BE49-F238E27FC236}">
-                <a16:creationId xmlns:a16="http://schemas.microsoft.com/office/drawing/2014/main" id="{E53D5A42-76ED-61FB-F8AD-CACB3CEBB570}"/>
+                <a16:creationId xmlns:a16="http://schemas.microsoft.com/office/drawing/2014/main" id="{4B0D9C06-0E88-E908-29DD-25F99F08FEE5}"/>
               </a:ext>
             </a:extLst>
           </p:cNvPr>
@@ -10158,7 +10158,7 @@
           <p:cNvPr id="5" name="Rectángulo: esquinas redondeadas 4">
             <a:extLst>
               <a:ext uri="{FF2B5EF4-FFF2-40B4-BE49-F238E27FC236}">
-                <a16:creationId xmlns:a16="http://schemas.microsoft.com/office/drawing/2014/main" id="{B339FB9B-28AA-26A4-F64F-D69FE3C8FC20}"/>
+                <a16:creationId xmlns:a16="http://schemas.microsoft.com/office/drawing/2014/main" id="{78B59249-5894-ADE8-DD01-8256B57A070B}"/>
               </a:ext>
             </a:extLst>
           </p:cNvPr>
@@ -10212,7 +10212,7 @@
           <p:cNvPr id="6" name="CuadroTexto 5">
             <a:extLst>
               <a:ext uri="{FF2B5EF4-FFF2-40B4-BE49-F238E27FC236}">
-                <a16:creationId xmlns:a16="http://schemas.microsoft.com/office/drawing/2014/main" id="{4A14DA3B-170E-6D8E-5F7D-4904D0B98605}"/>
+                <a16:creationId xmlns:a16="http://schemas.microsoft.com/office/drawing/2014/main" id="{908EBB94-E119-2A1B-E721-7AF4C37B22E8}"/>
               </a:ext>
             </a:extLst>
           </p:cNvPr>
@@ -10252,7 +10252,7 @@
           <p:cNvPr id="7" name="CuadroTexto 6">
             <a:extLst>
               <a:ext uri="{FF2B5EF4-FFF2-40B4-BE49-F238E27FC236}">
-                <a16:creationId xmlns:a16="http://schemas.microsoft.com/office/drawing/2014/main" id="{5CF6AC99-8002-219E-1EEC-23FF7BE72F99}"/>
+                <a16:creationId xmlns:a16="http://schemas.microsoft.com/office/drawing/2014/main" id="{82CBC56E-19C3-21B5-E68A-A23A7569E3F0}"/>
               </a:ext>
             </a:extLst>
           </p:cNvPr>
@@ -10353,7 +10353,7 @@
           <p:cNvPr id="8" name="Rectángulo: esquinas redondeadas 7">
             <a:extLst>
               <a:ext uri="{FF2B5EF4-FFF2-40B4-BE49-F238E27FC236}">
-                <a16:creationId xmlns:a16="http://schemas.microsoft.com/office/drawing/2014/main" id="{AD51FB0C-AA30-0C7D-E5F7-BA6ACF8D915F}"/>
+                <a16:creationId xmlns:a16="http://schemas.microsoft.com/office/drawing/2014/main" id="{26B9D7A7-87F7-AEEA-F459-E57B56F911E7}"/>
               </a:ext>
             </a:extLst>
           </p:cNvPr>
@@ -10407,7 +10407,7 @@
           <p:cNvPr id="9" name="CuadroTexto 8">
             <a:extLst>
               <a:ext uri="{FF2B5EF4-FFF2-40B4-BE49-F238E27FC236}">
-                <a16:creationId xmlns:a16="http://schemas.microsoft.com/office/drawing/2014/main" id="{A61C83DA-B798-196F-D2FF-E2B025FD353B}"/>
+                <a16:creationId xmlns:a16="http://schemas.microsoft.com/office/drawing/2014/main" id="{8294099B-B43E-F512-F22F-AB0602A6DB11}"/>
               </a:ext>
             </a:extLst>
           </p:cNvPr>
@@ -10447,7 +10447,7 @@
           <p:cNvPr id="10" name="CuadroTexto 9">
             <a:extLst>
               <a:ext uri="{FF2B5EF4-FFF2-40B4-BE49-F238E27FC236}">
-                <a16:creationId xmlns:a16="http://schemas.microsoft.com/office/drawing/2014/main" id="{BF18BBE8-0B69-7C0A-3FFF-97B340EE099A}"/>
+                <a16:creationId xmlns:a16="http://schemas.microsoft.com/office/drawing/2014/main" id="{5D878BA8-7AE1-A834-15FC-442DB01045D8}"/>
               </a:ext>
             </a:extLst>
           </p:cNvPr>
@@ -10487,7 +10487,7 @@
           <p:cNvPr id="11" name="Rectángulo: esquinas redondeadas 10">
             <a:extLst>
               <a:ext uri="{FF2B5EF4-FFF2-40B4-BE49-F238E27FC236}">
-                <a16:creationId xmlns:a16="http://schemas.microsoft.com/office/drawing/2014/main" id="{F6C38C54-FAAB-03F5-021D-661554B38201}"/>
+                <a16:creationId xmlns:a16="http://schemas.microsoft.com/office/drawing/2014/main" id="{A404FCF0-B147-152A-01F1-D9B2EFEF7A58}"/>
               </a:ext>
             </a:extLst>
           </p:cNvPr>
@@ -10541,7 +10541,7 @@
           <p:cNvPr id="12" name="CuadroTexto 11">
             <a:extLst>
               <a:ext uri="{FF2B5EF4-FFF2-40B4-BE49-F238E27FC236}">
-                <a16:creationId xmlns:a16="http://schemas.microsoft.com/office/drawing/2014/main" id="{5C4F3807-72A4-8E9F-4117-B4B84FC7DE4F}"/>
+                <a16:creationId xmlns:a16="http://schemas.microsoft.com/office/drawing/2014/main" id="{1E0BC87B-6577-4114-4A08-60D7568CD9CB}"/>
               </a:ext>
             </a:extLst>
           </p:cNvPr>
@@ -10581,7 +10581,7 @@
           <p:cNvPr id="13" name="CuadroTexto 12">
             <a:extLst>
               <a:ext uri="{FF2B5EF4-FFF2-40B4-BE49-F238E27FC236}">
-                <a16:creationId xmlns:a16="http://schemas.microsoft.com/office/drawing/2014/main" id="{3B1C3D3B-6E20-6E4D-2F9F-76A4F3FC0219}"/>
+                <a16:creationId xmlns:a16="http://schemas.microsoft.com/office/drawing/2014/main" id="{7F726083-9450-48F8-A946-91D832AD10D5}"/>
               </a:ext>
             </a:extLst>
           </p:cNvPr>
@@ -10621,7 +10621,7 @@
           <p:cNvPr id="14" name="Rectángulo: esquinas redondeadas 13">
             <a:extLst>
               <a:ext uri="{FF2B5EF4-FFF2-40B4-BE49-F238E27FC236}">
-                <a16:creationId xmlns:a16="http://schemas.microsoft.com/office/drawing/2014/main" id="{6EBE8F2A-EB8C-9F9E-B788-E6D9672FEFEE}"/>
+                <a16:creationId xmlns:a16="http://schemas.microsoft.com/office/drawing/2014/main" id="{C6CEFB94-0FC8-0A65-0F70-5BC718D9427E}"/>
               </a:ext>
             </a:extLst>
           </p:cNvPr>
@@ -10675,7 +10675,7 @@
           <p:cNvPr id="15" name="CuadroTexto 14">
             <a:extLst>
               <a:ext uri="{FF2B5EF4-FFF2-40B4-BE49-F238E27FC236}">
-                <a16:creationId xmlns:a16="http://schemas.microsoft.com/office/drawing/2014/main" id="{DD66F528-F585-2390-50A6-80FCD44B2464}"/>
+                <a16:creationId xmlns:a16="http://schemas.microsoft.com/office/drawing/2014/main" id="{AA529624-3471-9FE4-3689-8EDDACC6D9EB}"/>
               </a:ext>
             </a:extLst>
           </p:cNvPr>
@@ -10715,7 +10715,7 @@
           <p:cNvPr id="16" name="CuadroTexto 15">
             <a:extLst>
               <a:ext uri="{FF2B5EF4-FFF2-40B4-BE49-F238E27FC236}">
-                <a16:creationId xmlns:a16="http://schemas.microsoft.com/office/drawing/2014/main" id="{ED18CF76-3399-ACE5-E3D9-475ADB8C8F4A}"/>
+                <a16:creationId xmlns:a16="http://schemas.microsoft.com/office/drawing/2014/main" id="{C60C4DF2-9568-DE37-E9AA-3EDF5FE954E5}"/>
               </a:ext>
             </a:extLst>
           </p:cNvPr>
@@ -10755,7 +10755,7 @@
           <p:cNvPr id="17" name="CuadroTexto 16">
             <a:extLst>
               <a:ext uri="{FF2B5EF4-FFF2-40B4-BE49-F238E27FC236}">
-                <a16:creationId xmlns:a16="http://schemas.microsoft.com/office/drawing/2014/main" id="{69ED621B-D5AA-F344-EE89-13DEC67FAA87}"/>
+                <a16:creationId xmlns:a16="http://schemas.microsoft.com/office/drawing/2014/main" id="{50FE0E10-B25E-2EDB-C0A4-49EA9A613296}"/>
               </a:ext>
             </a:extLst>
           </p:cNvPr>
@@ -10818,7 +10818,7 @@
     </p:spTree>
     <p:extLst>
       <p:ext uri="{BB962C8B-B14F-4D97-AF65-F5344CB8AC3E}">
-        <p14:creationId xmlns:p14="http://schemas.microsoft.com/office/powerpoint/2010/main" val="3825693380"/>
+        <p14:creationId xmlns:p14="http://schemas.microsoft.com/office/powerpoint/2010/main" val="2333461286"/>
       </p:ext>
     </p:extLst>
   </p:cSld>
@@ -10858,7 +10858,7 @@
           <p:cNvPr id="2" name="CuadroTexto 1">
             <a:extLst>
               <a:ext uri="{FF2B5EF4-FFF2-40B4-BE49-F238E27FC236}">
-                <a16:creationId xmlns:a16="http://schemas.microsoft.com/office/drawing/2014/main" id="{C7606941-A505-6ED2-934F-0D1383A3BBD1}"/>
+                <a16:creationId xmlns:a16="http://schemas.microsoft.com/office/drawing/2014/main" id="{EA79CEE5-9CE1-98E4-A3D3-AE8134AA7D3C}"/>
               </a:ext>
             </a:extLst>
           </p:cNvPr>
@@ -10898,7 +10898,7 @@
           <p:cNvPr id="3" name="CuadroTexto 2">
             <a:extLst>
               <a:ext uri="{FF2B5EF4-FFF2-40B4-BE49-F238E27FC236}">
-                <a16:creationId xmlns:a16="http://schemas.microsoft.com/office/drawing/2014/main" id="{B066FCF9-48EC-E54F-1972-7B82A7AB4A5B}"/>
+                <a16:creationId xmlns:a16="http://schemas.microsoft.com/office/drawing/2014/main" id="{E788EFEB-C964-5A83-FEE2-041762E337C4}"/>
               </a:ext>
             </a:extLst>
           </p:cNvPr>
@@ -10938,7 +10938,7 @@
           <p:cNvPr id="4" name="CuadroTexto 3">
             <a:extLst>
               <a:ext uri="{FF2B5EF4-FFF2-40B4-BE49-F238E27FC236}">
-                <a16:creationId xmlns:a16="http://schemas.microsoft.com/office/drawing/2014/main" id="{A023BE0A-D744-FB56-DD43-06413E117DCF}"/>
+                <a16:creationId xmlns:a16="http://schemas.microsoft.com/office/drawing/2014/main" id="{D673B47A-86DA-EE03-3F3A-A073F47A33A6}"/>
               </a:ext>
             </a:extLst>
           </p:cNvPr>
@@ -11057,7 +11057,7 @@
           <p:cNvPr id="5" name="Rectángulo: esquinas redondeadas 4">
             <a:extLst>
               <a:ext uri="{FF2B5EF4-FFF2-40B4-BE49-F238E27FC236}">
-                <a16:creationId xmlns:a16="http://schemas.microsoft.com/office/drawing/2014/main" id="{245CC601-BCA6-6610-E24B-53EE4F1C4E95}"/>
+                <a16:creationId xmlns:a16="http://schemas.microsoft.com/office/drawing/2014/main" id="{1A026D5F-0958-FF6B-DCDB-2285B2E0E37F}"/>
               </a:ext>
             </a:extLst>
           </p:cNvPr>
@@ -11111,7 +11111,7 @@
           <p:cNvPr id="6" name="CuadroTexto 5">
             <a:extLst>
               <a:ext uri="{FF2B5EF4-FFF2-40B4-BE49-F238E27FC236}">
-                <a16:creationId xmlns:a16="http://schemas.microsoft.com/office/drawing/2014/main" id="{62CC5A9E-C9D8-6C9E-2D75-97BD634AF3F4}"/>
+                <a16:creationId xmlns:a16="http://schemas.microsoft.com/office/drawing/2014/main" id="{AD5C79A8-3870-A2E4-BFE6-E2956C2D970B}"/>
               </a:ext>
             </a:extLst>
           </p:cNvPr>
@@ -11151,7 +11151,7 @@
           <p:cNvPr id="7" name="CuadroTexto 6">
             <a:extLst>
               <a:ext uri="{FF2B5EF4-FFF2-40B4-BE49-F238E27FC236}">
-                <a16:creationId xmlns:a16="http://schemas.microsoft.com/office/drawing/2014/main" id="{63F7F66C-48D3-83AB-2669-E70F0B20B922}"/>
+                <a16:creationId xmlns:a16="http://schemas.microsoft.com/office/drawing/2014/main" id="{37426E24-BDCA-5C43-52E9-25868A35AC64}"/>
               </a:ext>
             </a:extLst>
           </p:cNvPr>
@@ -11189,7 +11189,7 @@
     </p:spTree>
     <p:extLst>
       <p:ext uri="{BB962C8B-B14F-4D97-AF65-F5344CB8AC3E}">
-        <p14:creationId xmlns:p14="http://schemas.microsoft.com/office/powerpoint/2010/main" val="4208851980"/>
+        <p14:creationId xmlns:p14="http://schemas.microsoft.com/office/powerpoint/2010/main" val="1747134379"/>
       </p:ext>
     </p:extLst>
   </p:cSld>
@@ -11229,7 +11229,7 @@
           <p:cNvPr id="2" name="CuadroTexto 1">
             <a:extLst>
               <a:ext uri="{FF2B5EF4-FFF2-40B4-BE49-F238E27FC236}">
-                <a16:creationId xmlns:a16="http://schemas.microsoft.com/office/drawing/2014/main" id="{C6A619A8-D1AE-CD0C-B919-E1F9EEA06B2D}"/>
+                <a16:creationId xmlns:a16="http://schemas.microsoft.com/office/drawing/2014/main" id="{EF744A11-C343-6723-E086-73DE22B7C168}"/>
               </a:ext>
             </a:extLst>
           </p:cNvPr>
@@ -11269,7 +11269,7 @@
           <p:cNvPr id="3" name="CuadroTexto 2">
             <a:extLst>
               <a:ext uri="{FF2B5EF4-FFF2-40B4-BE49-F238E27FC236}">
-                <a16:creationId xmlns:a16="http://schemas.microsoft.com/office/drawing/2014/main" id="{6FF3EE67-2D7B-9873-CD21-3552495D1153}"/>
+                <a16:creationId xmlns:a16="http://schemas.microsoft.com/office/drawing/2014/main" id="{DC13B59A-D000-5E03-99D0-45D96061113C}"/>
               </a:ext>
             </a:extLst>
           </p:cNvPr>
@@ -11309,7 +11309,7 @@
           <p:cNvPr id="4" name="CuadroTexto 3">
             <a:extLst>
               <a:ext uri="{FF2B5EF4-FFF2-40B4-BE49-F238E27FC236}">
-                <a16:creationId xmlns:a16="http://schemas.microsoft.com/office/drawing/2014/main" id="{0F8C8FC3-55E8-9635-BD7E-1CF95C71BA25}"/>
+                <a16:creationId xmlns:a16="http://schemas.microsoft.com/office/drawing/2014/main" id="{A32CEDB8-41A5-005B-833E-077646B66155}"/>
               </a:ext>
             </a:extLst>
           </p:cNvPr>
@@ -11349,7 +11349,7 @@
           <p:cNvPr id="5" name="CuadroTexto 4">
             <a:extLst>
               <a:ext uri="{FF2B5EF4-FFF2-40B4-BE49-F238E27FC236}">
-                <a16:creationId xmlns:a16="http://schemas.microsoft.com/office/drawing/2014/main" id="{A15759A4-892C-07B9-7559-C9A94383805B}"/>
+                <a16:creationId xmlns:a16="http://schemas.microsoft.com/office/drawing/2014/main" id="{447555E6-4BB1-4990-9C41-21473E35C63E}"/>
               </a:ext>
             </a:extLst>
           </p:cNvPr>
@@ -11432,7 +11432,7 @@
           <p:cNvPr id="6" name="CuadroTexto 5">
             <a:extLst>
               <a:ext uri="{FF2B5EF4-FFF2-40B4-BE49-F238E27FC236}">
-                <a16:creationId xmlns:a16="http://schemas.microsoft.com/office/drawing/2014/main" id="{4914ECFB-F9E3-4B0D-7C56-1F1EDE0EB29C}"/>
+                <a16:creationId xmlns:a16="http://schemas.microsoft.com/office/drawing/2014/main" id="{2729358B-C002-34E2-3A00-E7052946587F}"/>
               </a:ext>
             </a:extLst>
           </p:cNvPr>
@@ -11470,7 +11470,7 @@
     </p:spTree>
     <p:extLst>
       <p:ext uri="{BB962C8B-B14F-4D97-AF65-F5344CB8AC3E}">
-        <p14:creationId xmlns:p14="http://schemas.microsoft.com/office/powerpoint/2010/main" val="498048314"/>
+        <p14:creationId xmlns:p14="http://schemas.microsoft.com/office/powerpoint/2010/main" val="3265063490"/>
       </p:ext>
     </p:extLst>
   </p:cSld>
@@ -11510,7 +11510,7 @@
           <p:cNvPr id="2" name="CuadroTexto 1">
             <a:extLst>
               <a:ext uri="{FF2B5EF4-FFF2-40B4-BE49-F238E27FC236}">
-                <a16:creationId xmlns:a16="http://schemas.microsoft.com/office/drawing/2014/main" id="{0BE1E661-0DBC-537A-4084-26EA740CF916}"/>
+                <a16:creationId xmlns:a16="http://schemas.microsoft.com/office/drawing/2014/main" id="{9D31483E-2C85-8C65-4A19-D96AB1324755}"/>
               </a:ext>
             </a:extLst>
           </p:cNvPr>
@@ -11550,7 +11550,7 @@
           <p:cNvPr id="3" name="CuadroTexto 2">
             <a:extLst>
               <a:ext uri="{FF2B5EF4-FFF2-40B4-BE49-F238E27FC236}">
-                <a16:creationId xmlns:a16="http://schemas.microsoft.com/office/drawing/2014/main" id="{BB81B3B2-FC76-157F-884B-E70A56B4CF2A}"/>
+                <a16:creationId xmlns:a16="http://schemas.microsoft.com/office/drawing/2014/main" id="{7CAD892E-8DAE-09A7-DFA6-B044161B5F27}"/>
               </a:ext>
             </a:extLst>
           </p:cNvPr>
@@ -11590,7 +11590,7 @@
           <p:cNvPr id="4" name="CuadroTexto 3">
             <a:extLst>
               <a:ext uri="{FF2B5EF4-FFF2-40B4-BE49-F238E27FC236}">
-                <a16:creationId xmlns:a16="http://schemas.microsoft.com/office/drawing/2014/main" id="{8C328DDE-BC6B-0D6E-57F8-61C8DBF75547}"/>
+                <a16:creationId xmlns:a16="http://schemas.microsoft.com/office/drawing/2014/main" id="{7AF4C546-F5E9-829C-3B23-F0B10CF5FADD}"/>
               </a:ext>
             </a:extLst>
           </p:cNvPr>
@@ -11630,7 +11630,7 @@
           <p:cNvPr id="5" name="CuadroTexto 4">
             <a:extLst>
               <a:ext uri="{FF2B5EF4-FFF2-40B4-BE49-F238E27FC236}">
-                <a16:creationId xmlns:a16="http://schemas.microsoft.com/office/drawing/2014/main" id="{E3D5C569-8644-22B8-E6E3-296989C4AE3C}"/>
+                <a16:creationId xmlns:a16="http://schemas.microsoft.com/office/drawing/2014/main" id="{F85DAE1D-40AA-AE71-64C5-646CD238269C}"/>
               </a:ext>
             </a:extLst>
           </p:cNvPr>
@@ -11731,7 +11731,7 @@
           <p:cNvPr id="6" name="Rectángulo: esquinas redondeadas 5">
             <a:extLst>
               <a:ext uri="{FF2B5EF4-FFF2-40B4-BE49-F238E27FC236}">
-                <a16:creationId xmlns:a16="http://schemas.microsoft.com/office/drawing/2014/main" id="{4F40F10B-4E2C-90EF-2580-AE508C9D1AB9}"/>
+                <a16:creationId xmlns:a16="http://schemas.microsoft.com/office/drawing/2014/main" id="{B4CDBDBC-52C3-41B9-7CE8-E3AFDC5E3BE8}"/>
               </a:ext>
             </a:extLst>
           </p:cNvPr>
@@ -11785,7 +11785,7 @@
           <p:cNvPr id="7" name="CuadroTexto 6">
             <a:extLst>
               <a:ext uri="{FF2B5EF4-FFF2-40B4-BE49-F238E27FC236}">
-                <a16:creationId xmlns:a16="http://schemas.microsoft.com/office/drawing/2014/main" id="{2B933355-C9E0-CBB3-945F-28EF401A6442}"/>
+                <a16:creationId xmlns:a16="http://schemas.microsoft.com/office/drawing/2014/main" id="{66251C0E-0AA4-ACCA-7F44-5929BD879372}"/>
               </a:ext>
             </a:extLst>
           </p:cNvPr>
@@ -11825,7 +11825,7 @@
           <p:cNvPr id="8" name="CuadroTexto 7">
             <a:extLst>
               <a:ext uri="{FF2B5EF4-FFF2-40B4-BE49-F238E27FC236}">
-                <a16:creationId xmlns:a16="http://schemas.microsoft.com/office/drawing/2014/main" id="{B26D1F1B-559A-6BFB-6D3D-0A1C0A9B898B}"/>
+                <a16:creationId xmlns:a16="http://schemas.microsoft.com/office/drawing/2014/main" id="{A1AEF440-B0BF-A292-FA35-AEBE6B50C396}"/>
               </a:ext>
             </a:extLst>
           </p:cNvPr>
@@ -11863,7 +11863,7 @@
     </p:spTree>
     <p:extLst>
       <p:ext uri="{BB962C8B-B14F-4D97-AF65-F5344CB8AC3E}">
-        <p14:creationId xmlns:p14="http://schemas.microsoft.com/office/powerpoint/2010/main" val="4178036023"/>
+        <p14:creationId xmlns:p14="http://schemas.microsoft.com/office/powerpoint/2010/main" val="2325976054"/>
       </p:ext>
     </p:extLst>
   </p:cSld>
@@ -11903,7 +11903,7 @@
           <p:cNvPr id="2" name="CuadroTexto 1">
             <a:extLst>
               <a:ext uri="{FF2B5EF4-FFF2-40B4-BE49-F238E27FC236}">
-                <a16:creationId xmlns:a16="http://schemas.microsoft.com/office/drawing/2014/main" id="{92055057-C8DA-79AB-EF91-AE6FA0178976}"/>
+                <a16:creationId xmlns:a16="http://schemas.microsoft.com/office/drawing/2014/main" id="{914F90E5-AF97-D785-06FB-794BA7BCE6A0}"/>
               </a:ext>
             </a:extLst>
           </p:cNvPr>
@@ -11943,7 +11943,7 @@
           <p:cNvPr id="3" name="CuadroTexto 2">
             <a:extLst>
               <a:ext uri="{FF2B5EF4-FFF2-40B4-BE49-F238E27FC236}">
-                <a16:creationId xmlns:a16="http://schemas.microsoft.com/office/drawing/2014/main" id="{F7A8E162-23F0-0809-7ED7-8FF94E5A2373}"/>
+                <a16:creationId xmlns:a16="http://schemas.microsoft.com/office/drawing/2014/main" id="{D3737A6D-B409-8285-C3AC-A2C8D68E7859}"/>
               </a:ext>
             </a:extLst>
           </p:cNvPr>
@@ -11983,7 +11983,7 @@
           <p:cNvPr id="4" name="Rectángulo: esquinas redondeadas 3">
             <a:extLst>
               <a:ext uri="{FF2B5EF4-FFF2-40B4-BE49-F238E27FC236}">
-                <a16:creationId xmlns:a16="http://schemas.microsoft.com/office/drawing/2014/main" id="{796F02E1-F348-5000-9622-9FAD8414425D}"/>
+                <a16:creationId xmlns:a16="http://schemas.microsoft.com/office/drawing/2014/main" id="{6980B74F-F4E2-BF40-1A89-37A56304E0C4}"/>
               </a:ext>
             </a:extLst>
           </p:cNvPr>
@@ -12037,7 +12037,7 @@
           <p:cNvPr id="5" name="CuadroTexto 4">
             <a:extLst>
               <a:ext uri="{FF2B5EF4-FFF2-40B4-BE49-F238E27FC236}">
-                <a16:creationId xmlns:a16="http://schemas.microsoft.com/office/drawing/2014/main" id="{7B80951D-BFF5-44E9-2F70-8EF0EE5DF7A8}"/>
+                <a16:creationId xmlns:a16="http://schemas.microsoft.com/office/drawing/2014/main" id="{82365E2B-888E-0704-705D-62F82829B4E9}"/>
               </a:ext>
             </a:extLst>
           </p:cNvPr>
@@ -12077,7 +12077,7 @@
           <p:cNvPr id="6" name="CuadroTexto 5">
             <a:extLst>
               <a:ext uri="{FF2B5EF4-FFF2-40B4-BE49-F238E27FC236}">
-                <a16:creationId xmlns:a16="http://schemas.microsoft.com/office/drawing/2014/main" id="{350659C4-A8C6-FAA4-0D7E-F43AFC9CFA81}"/>
+                <a16:creationId xmlns:a16="http://schemas.microsoft.com/office/drawing/2014/main" id="{F66D24EC-DA66-5009-499F-7C912E913683}"/>
               </a:ext>
             </a:extLst>
           </p:cNvPr>
@@ -12117,7 +12117,7 @@
           <p:cNvPr id="7" name="Rectángulo: esquinas redondeadas 6">
             <a:extLst>
               <a:ext uri="{FF2B5EF4-FFF2-40B4-BE49-F238E27FC236}">
-                <a16:creationId xmlns:a16="http://schemas.microsoft.com/office/drawing/2014/main" id="{72A01A7E-A8BD-91A2-E523-8570273680B9}"/>
+                <a16:creationId xmlns:a16="http://schemas.microsoft.com/office/drawing/2014/main" id="{8D933886-9395-F781-30F8-EC30D9E56799}"/>
               </a:ext>
             </a:extLst>
           </p:cNvPr>
@@ -12171,7 +12171,7 @@
           <p:cNvPr id="8" name="CuadroTexto 7">
             <a:extLst>
               <a:ext uri="{FF2B5EF4-FFF2-40B4-BE49-F238E27FC236}">
-                <a16:creationId xmlns:a16="http://schemas.microsoft.com/office/drawing/2014/main" id="{69117723-3856-A544-25E0-B4E777AF45DD}"/>
+                <a16:creationId xmlns:a16="http://schemas.microsoft.com/office/drawing/2014/main" id="{E2D7C7C7-0F88-1836-AC98-EF4265C5DAB9}"/>
               </a:ext>
             </a:extLst>
           </p:cNvPr>
@@ -12211,7 +12211,7 @@
           <p:cNvPr id="9" name="CuadroTexto 8">
             <a:extLst>
               <a:ext uri="{FF2B5EF4-FFF2-40B4-BE49-F238E27FC236}">
-                <a16:creationId xmlns:a16="http://schemas.microsoft.com/office/drawing/2014/main" id="{84CFCE9C-3B32-86CC-5655-D311F49CE002}"/>
+                <a16:creationId xmlns:a16="http://schemas.microsoft.com/office/drawing/2014/main" id="{883A05D4-9E45-18AB-A5F2-58255A340A3B}"/>
               </a:ext>
             </a:extLst>
           </p:cNvPr>
@@ -12251,7 +12251,7 @@
           <p:cNvPr id="10" name="Rectángulo: esquinas redondeadas 9">
             <a:extLst>
               <a:ext uri="{FF2B5EF4-FFF2-40B4-BE49-F238E27FC236}">
-                <a16:creationId xmlns:a16="http://schemas.microsoft.com/office/drawing/2014/main" id="{BA277D77-5C5F-8B9B-251A-CC9C17B6440B}"/>
+                <a16:creationId xmlns:a16="http://schemas.microsoft.com/office/drawing/2014/main" id="{507C673D-9B2B-314F-348D-B68062840297}"/>
               </a:ext>
             </a:extLst>
           </p:cNvPr>
@@ -12305,7 +12305,7 @@
           <p:cNvPr id="11" name="CuadroTexto 10">
             <a:extLst>
               <a:ext uri="{FF2B5EF4-FFF2-40B4-BE49-F238E27FC236}">
-                <a16:creationId xmlns:a16="http://schemas.microsoft.com/office/drawing/2014/main" id="{1EFDB26F-C1F0-AB63-ED7F-C933649CD981}"/>
+                <a16:creationId xmlns:a16="http://schemas.microsoft.com/office/drawing/2014/main" id="{900A31FC-F96A-382D-DFE2-9FFD1107F574}"/>
               </a:ext>
             </a:extLst>
           </p:cNvPr>
@@ -12345,7 +12345,7 @@
           <p:cNvPr id="12" name="CuadroTexto 11">
             <a:extLst>
               <a:ext uri="{FF2B5EF4-FFF2-40B4-BE49-F238E27FC236}">
-                <a16:creationId xmlns:a16="http://schemas.microsoft.com/office/drawing/2014/main" id="{30DD3C42-A676-EF40-69F9-016C6DB92A22}"/>
+                <a16:creationId xmlns:a16="http://schemas.microsoft.com/office/drawing/2014/main" id="{13B49E3F-6B25-E002-3F2A-FAADAD6D8AA3}"/>
               </a:ext>
             </a:extLst>
           </p:cNvPr>
@@ -12385,7 +12385,7 @@
           <p:cNvPr id="13" name="Rectángulo: esquinas redondeadas 12">
             <a:extLst>
               <a:ext uri="{FF2B5EF4-FFF2-40B4-BE49-F238E27FC236}">
-                <a16:creationId xmlns:a16="http://schemas.microsoft.com/office/drawing/2014/main" id="{8FCF037B-FBF2-7338-ABC2-8AD7867B3D58}"/>
+                <a16:creationId xmlns:a16="http://schemas.microsoft.com/office/drawing/2014/main" id="{9AC32662-7AB5-FB37-4F3F-89E93363AF70}"/>
               </a:ext>
             </a:extLst>
           </p:cNvPr>
@@ -12439,7 +12439,7 @@
           <p:cNvPr id="14" name="CuadroTexto 13">
             <a:extLst>
               <a:ext uri="{FF2B5EF4-FFF2-40B4-BE49-F238E27FC236}">
-                <a16:creationId xmlns:a16="http://schemas.microsoft.com/office/drawing/2014/main" id="{A3729578-1F10-4838-DA1C-2EB2E6576A7D}"/>
+                <a16:creationId xmlns:a16="http://schemas.microsoft.com/office/drawing/2014/main" id="{50D9F6E2-3856-CC44-AA38-5267404D5EBB}"/>
               </a:ext>
             </a:extLst>
           </p:cNvPr>
@@ -12479,7 +12479,7 @@
           <p:cNvPr id="15" name="CuadroTexto 14">
             <a:extLst>
               <a:ext uri="{FF2B5EF4-FFF2-40B4-BE49-F238E27FC236}">
-                <a16:creationId xmlns:a16="http://schemas.microsoft.com/office/drawing/2014/main" id="{BA022D2B-C257-8254-B8C2-8F54A360DC16}"/>
+                <a16:creationId xmlns:a16="http://schemas.microsoft.com/office/drawing/2014/main" id="{D5E9140C-DE22-64CF-46DF-E381CB60EFC1}"/>
               </a:ext>
             </a:extLst>
           </p:cNvPr>
@@ -12517,7 +12517,7 @@
     </p:spTree>
     <p:extLst>
       <p:ext uri="{BB962C8B-B14F-4D97-AF65-F5344CB8AC3E}">
-        <p14:creationId xmlns:p14="http://schemas.microsoft.com/office/powerpoint/2010/main" val="1266005131"/>
+        <p14:creationId xmlns:p14="http://schemas.microsoft.com/office/powerpoint/2010/main" val="2253844518"/>
       </p:ext>
     </p:extLst>
   </p:cSld>
@@ -12557,7 +12557,7 @@
           <p:cNvPr id="2" name="CuadroTexto 1">
             <a:extLst>
               <a:ext uri="{FF2B5EF4-FFF2-40B4-BE49-F238E27FC236}">
-                <a16:creationId xmlns:a16="http://schemas.microsoft.com/office/drawing/2014/main" id="{9F60450A-9747-ECC7-AEC6-40741233966B}"/>
+                <a16:creationId xmlns:a16="http://schemas.microsoft.com/office/drawing/2014/main" id="{C41A8E3B-3836-4146-9CBB-685DC5F05FB0}"/>
               </a:ext>
             </a:extLst>
           </p:cNvPr>
@@ -12597,7 +12597,7 @@
           <p:cNvPr id="3" name="CuadroTexto 2">
             <a:extLst>
               <a:ext uri="{FF2B5EF4-FFF2-40B4-BE49-F238E27FC236}">
-                <a16:creationId xmlns:a16="http://schemas.microsoft.com/office/drawing/2014/main" id="{5EABC095-A6BF-21F8-9F11-9FC81CB2B6D2}"/>
+                <a16:creationId xmlns:a16="http://schemas.microsoft.com/office/drawing/2014/main" id="{22A4A2EE-242B-4D72-4812-E08B01826E68}"/>
               </a:ext>
             </a:extLst>
           </p:cNvPr>
@@ -12637,7 +12637,7 @@
           <p:cNvPr id="4" name="CuadroTexto 3">
             <a:extLst>
               <a:ext uri="{FF2B5EF4-FFF2-40B4-BE49-F238E27FC236}">
-                <a16:creationId xmlns:a16="http://schemas.microsoft.com/office/drawing/2014/main" id="{8FB4E0A4-6F94-E109-26F0-2D1EDB6BFB6B}"/>
+                <a16:creationId xmlns:a16="http://schemas.microsoft.com/office/drawing/2014/main" id="{66E3AED2-2066-A7CB-A160-F81410B68E3F}"/>
               </a:ext>
             </a:extLst>
           </p:cNvPr>
@@ -12677,7 +12677,7 @@
           <p:cNvPr id="6" name="Imagen 5">
             <a:extLst>
               <a:ext uri="{FF2B5EF4-FFF2-40B4-BE49-F238E27FC236}">
-                <a16:creationId xmlns:a16="http://schemas.microsoft.com/office/drawing/2014/main" id="{07A2F82E-210A-4082-F095-E918C899C5F4}"/>
+                <a16:creationId xmlns:a16="http://schemas.microsoft.com/office/drawing/2014/main" id="{452032AF-DD56-96CA-0694-5A94E77CADEB}"/>
               </a:ext>
             </a:extLst>
           </p:cNvPr>
@@ -12718,7 +12718,7 @@
           <p:cNvPr id="7" name="CuadroTexto 6">
             <a:extLst>
               <a:ext uri="{FF2B5EF4-FFF2-40B4-BE49-F238E27FC236}">
-                <a16:creationId xmlns:a16="http://schemas.microsoft.com/office/drawing/2014/main" id="{7856E164-D00D-F664-5529-90494663A647}"/>
+                <a16:creationId xmlns:a16="http://schemas.microsoft.com/office/drawing/2014/main" id="{96C02AA3-EA5F-1FD3-5E2F-474AC7504862}"/>
               </a:ext>
             </a:extLst>
           </p:cNvPr>
@@ -12835,7 +12835,7 @@
     </p:spTree>
     <p:extLst>
       <p:ext uri="{BB962C8B-B14F-4D97-AF65-F5344CB8AC3E}">
-        <p14:creationId xmlns:p14="http://schemas.microsoft.com/office/powerpoint/2010/main" val="3151849778"/>
+        <p14:creationId xmlns:p14="http://schemas.microsoft.com/office/powerpoint/2010/main" val="158311805"/>
       </p:ext>
     </p:extLst>
   </p:cSld>
@@ -12875,7 +12875,7 @@
           <p:cNvPr id="2" name="CuadroTexto 1">
             <a:extLst>
               <a:ext uri="{FF2B5EF4-FFF2-40B4-BE49-F238E27FC236}">
-                <a16:creationId xmlns:a16="http://schemas.microsoft.com/office/drawing/2014/main" id="{D002DA14-00E1-E92E-3AC0-5C19A9FAA3DC}"/>
+                <a16:creationId xmlns:a16="http://schemas.microsoft.com/office/drawing/2014/main" id="{E951A4B9-C4CD-D3C0-9F74-CEB32CDB269C}"/>
               </a:ext>
             </a:extLst>
           </p:cNvPr>
@@ -12915,7 +12915,7 @@
           <p:cNvPr id="3" name="CuadroTexto 2">
             <a:extLst>
               <a:ext uri="{FF2B5EF4-FFF2-40B4-BE49-F238E27FC236}">
-                <a16:creationId xmlns:a16="http://schemas.microsoft.com/office/drawing/2014/main" id="{006AF4D4-6D8C-5DAF-AC80-9EA4165205F8}"/>
+                <a16:creationId xmlns:a16="http://schemas.microsoft.com/office/drawing/2014/main" id="{0C38EFF9-469D-1C90-4E66-F169BBF08B83}"/>
               </a:ext>
             </a:extLst>
           </p:cNvPr>
@@ -12955,7 +12955,7 @@
           <p:cNvPr id="5" name="Imagen 4">
             <a:extLst>
               <a:ext uri="{FF2B5EF4-FFF2-40B4-BE49-F238E27FC236}">
-                <a16:creationId xmlns:a16="http://schemas.microsoft.com/office/drawing/2014/main" id="{8E2D9F19-160F-7F42-0A8A-5F3B436444A4}"/>
+                <a16:creationId xmlns:a16="http://schemas.microsoft.com/office/drawing/2014/main" id="{1CA1F5BB-AE33-29DE-8201-C11F103F3834}"/>
               </a:ext>
             </a:extLst>
           </p:cNvPr>
@@ -12996,7 +12996,7 @@
           <p:cNvPr id="6" name="CuadroTexto 5">
             <a:extLst>
               <a:ext uri="{FF2B5EF4-FFF2-40B4-BE49-F238E27FC236}">
-                <a16:creationId xmlns:a16="http://schemas.microsoft.com/office/drawing/2014/main" id="{3845DA8F-B51F-925D-D6CD-FE1BA682B570}"/>
+                <a16:creationId xmlns:a16="http://schemas.microsoft.com/office/drawing/2014/main" id="{E987F68F-046C-3FF7-AF42-F639F369C6FE}"/>
               </a:ext>
             </a:extLst>
           </p:cNvPr>
@@ -13036,7 +13036,7 @@
           <p:cNvPr id="7" name="CuadroTexto 6">
             <a:extLst>
               <a:ext uri="{FF2B5EF4-FFF2-40B4-BE49-F238E27FC236}">
-                <a16:creationId xmlns:a16="http://schemas.microsoft.com/office/drawing/2014/main" id="{95828F11-C728-3E5F-DECE-971949EC42A1}"/>
+                <a16:creationId xmlns:a16="http://schemas.microsoft.com/office/drawing/2014/main" id="{176C2567-1D20-F23F-04BE-B6EC5B5AB4BF}"/>
               </a:ext>
             </a:extLst>
           </p:cNvPr>
@@ -13135,7 +13135,7 @@
     </p:spTree>
     <p:extLst>
       <p:ext uri="{BB962C8B-B14F-4D97-AF65-F5344CB8AC3E}">
-        <p14:creationId xmlns:p14="http://schemas.microsoft.com/office/powerpoint/2010/main" val="2627772969"/>
+        <p14:creationId xmlns:p14="http://schemas.microsoft.com/office/powerpoint/2010/main" val="3849511301"/>
       </p:ext>
     </p:extLst>
   </p:cSld>
@@ -13175,7 +13175,7 @@
           <p:cNvPr id="2" name="CuadroTexto 1">
             <a:extLst>
               <a:ext uri="{FF2B5EF4-FFF2-40B4-BE49-F238E27FC236}">
-                <a16:creationId xmlns:a16="http://schemas.microsoft.com/office/drawing/2014/main" id="{BAFC902B-ECE9-C8C8-E25A-F648D92DFC2A}"/>
+                <a16:creationId xmlns:a16="http://schemas.microsoft.com/office/drawing/2014/main" id="{5A445AED-67B3-A8F9-7FD6-E9145A71D731}"/>
               </a:ext>
             </a:extLst>
           </p:cNvPr>
@@ -13215,7 +13215,7 @@
           <p:cNvPr id="3" name="CuadroTexto 2">
             <a:extLst>
               <a:ext uri="{FF2B5EF4-FFF2-40B4-BE49-F238E27FC236}">
-                <a16:creationId xmlns:a16="http://schemas.microsoft.com/office/drawing/2014/main" id="{F3938256-8733-E912-BB12-365AC2984174}"/>
+                <a16:creationId xmlns:a16="http://schemas.microsoft.com/office/drawing/2014/main" id="{8E96945A-ED17-86CE-7FBA-04651F68202F}"/>
               </a:ext>
             </a:extLst>
           </p:cNvPr>
@@ -13255,7 +13255,7 @@
           <p:cNvPr id="4" name="CuadroTexto 3">
             <a:extLst>
               <a:ext uri="{FF2B5EF4-FFF2-40B4-BE49-F238E27FC236}">
-                <a16:creationId xmlns:a16="http://schemas.microsoft.com/office/drawing/2014/main" id="{A3CB6E49-7281-3D5F-0381-C2231959554C}"/>
+                <a16:creationId xmlns:a16="http://schemas.microsoft.com/office/drawing/2014/main" id="{0DEC7380-4D0A-30F8-2946-4C2FED85D370}"/>
               </a:ext>
             </a:extLst>
           </p:cNvPr>
@@ -13295,7 +13295,7 @@
           <p:cNvPr id="6" name="Imagen 5">
             <a:extLst>
               <a:ext uri="{FF2B5EF4-FFF2-40B4-BE49-F238E27FC236}">
-                <a16:creationId xmlns:a16="http://schemas.microsoft.com/office/drawing/2014/main" id="{E653A684-07FE-1835-7E64-E1D013C2A3D2}"/>
+                <a16:creationId xmlns:a16="http://schemas.microsoft.com/office/drawing/2014/main" id="{F06992D4-AF73-5463-6CB7-ACC98815C430}"/>
               </a:ext>
             </a:extLst>
           </p:cNvPr>
@@ -13336,7 +13336,7 @@
           <p:cNvPr id="7" name="Rectángulo: esquinas redondeadas 6">
             <a:extLst>
               <a:ext uri="{FF2B5EF4-FFF2-40B4-BE49-F238E27FC236}">
-                <a16:creationId xmlns:a16="http://schemas.microsoft.com/office/drawing/2014/main" id="{DD7C823A-460C-59B6-E2E8-7BFABF734BF0}"/>
+                <a16:creationId xmlns:a16="http://schemas.microsoft.com/office/drawing/2014/main" id="{768CC9F6-8DCF-AF83-D6D3-445678F1B718}"/>
               </a:ext>
             </a:extLst>
           </p:cNvPr>
@@ -13390,7 +13390,7 @@
           <p:cNvPr id="8" name="CuadroTexto 7">
             <a:extLst>
               <a:ext uri="{FF2B5EF4-FFF2-40B4-BE49-F238E27FC236}">
-                <a16:creationId xmlns:a16="http://schemas.microsoft.com/office/drawing/2014/main" id="{59310465-5CC5-8CA5-F743-258CDFF24385}"/>
+                <a16:creationId xmlns:a16="http://schemas.microsoft.com/office/drawing/2014/main" id="{AECF27DF-1150-0F45-F135-8EE40DC08CA6}"/>
               </a:ext>
             </a:extLst>
           </p:cNvPr>
@@ -13430,7 +13430,7 @@
           <p:cNvPr id="9" name="CuadroTexto 8">
             <a:extLst>
               <a:ext uri="{FF2B5EF4-FFF2-40B4-BE49-F238E27FC236}">
-                <a16:creationId xmlns:a16="http://schemas.microsoft.com/office/drawing/2014/main" id="{0307187F-2797-A1F0-20D6-402E3841F65A}"/>
+                <a16:creationId xmlns:a16="http://schemas.microsoft.com/office/drawing/2014/main" id="{F1BE29AE-EFBE-EAB3-5134-F06DFB28978C}"/>
               </a:ext>
             </a:extLst>
           </p:cNvPr>
@@ -13470,7 +13470,7 @@
           <p:cNvPr id="10" name="Rectángulo: esquinas redondeadas 9">
             <a:extLst>
               <a:ext uri="{FF2B5EF4-FFF2-40B4-BE49-F238E27FC236}">
-                <a16:creationId xmlns:a16="http://schemas.microsoft.com/office/drawing/2014/main" id="{EE117D0C-CFA5-A47E-E94B-D6FC657B690C}"/>
+                <a16:creationId xmlns:a16="http://schemas.microsoft.com/office/drawing/2014/main" id="{9C14D19E-EE1E-20E7-C397-AD0F795191B7}"/>
               </a:ext>
             </a:extLst>
           </p:cNvPr>
@@ -13524,7 +13524,7 @@
           <p:cNvPr id="11" name="CuadroTexto 10">
             <a:extLst>
               <a:ext uri="{FF2B5EF4-FFF2-40B4-BE49-F238E27FC236}">
-                <a16:creationId xmlns:a16="http://schemas.microsoft.com/office/drawing/2014/main" id="{6F45AC9F-C44D-5400-BB94-D8D9A565710F}"/>
+                <a16:creationId xmlns:a16="http://schemas.microsoft.com/office/drawing/2014/main" id="{513535E6-F34F-3854-4055-86FAF5EF055C}"/>
               </a:ext>
             </a:extLst>
           </p:cNvPr>
@@ -13564,7 +13564,7 @@
           <p:cNvPr id="12" name="CuadroTexto 11">
             <a:extLst>
               <a:ext uri="{FF2B5EF4-FFF2-40B4-BE49-F238E27FC236}">
-                <a16:creationId xmlns:a16="http://schemas.microsoft.com/office/drawing/2014/main" id="{6F0CDBD4-C89F-B51E-F6E9-CEDC0009EA58}"/>
+                <a16:creationId xmlns:a16="http://schemas.microsoft.com/office/drawing/2014/main" id="{0A723147-D410-4E94-FF50-F04035AF8556}"/>
               </a:ext>
             </a:extLst>
           </p:cNvPr>
@@ -13604,7 +13604,7 @@
           <p:cNvPr id="13" name="Rectángulo: esquinas redondeadas 12">
             <a:extLst>
               <a:ext uri="{FF2B5EF4-FFF2-40B4-BE49-F238E27FC236}">
-                <a16:creationId xmlns:a16="http://schemas.microsoft.com/office/drawing/2014/main" id="{67925F74-B796-8116-A1D2-DB91CF088FF3}"/>
+                <a16:creationId xmlns:a16="http://schemas.microsoft.com/office/drawing/2014/main" id="{E200B8FA-C58A-4916-6D4B-0C2429398A3F}"/>
               </a:ext>
             </a:extLst>
           </p:cNvPr>
@@ -13658,7 +13658,7 @@
           <p:cNvPr id="14" name="CuadroTexto 13">
             <a:extLst>
               <a:ext uri="{FF2B5EF4-FFF2-40B4-BE49-F238E27FC236}">
-                <a16:creationId xmlns:a16="http://schemas.microsoft.com/office/drawing/2014/main" id="{986D3EB3-9E66-36B3-8C9C-28BF13C35816}"/>
+                <a16:creationId xmlns:a16="http://schemas.microsoft.com/office/drawing/2014/main" id="{B1C8D309-9332-0592-4461-70E39E5F8E69}"/>
               </a:ext>
             </a:extLst>
           </p:cNvPr>
@@ -13698,7 +13698,7 @@
           <p:cNvPr id="15" name="CuadroTexto 14">
             <a:extLst>
               <a:ext uri="{FF2B5EF4-FFF2-40B4-BE49-F238E27FC236}">
-                <a16:creationId xmlns:a16="http://schemas.microsoft.com/office/drawing/2014/main" id="{9B8DBD57-B93A-80F2-CBA2-17687CF8B36F}"/>
+                <a16:creationId xmlns:a16="http://schemas.microsoft.com/office/drawing/2014/main" id="{F63C3D38-6CD7-B851-DA21-972F6C4262D5}"/>
               </a:ext>
             </a:extLst>
           </p:cNvPr>
@@ -13736,7 +13736,7 @@
     </p:spTree>
     <p:extLst>
       <p:ext uri="{BB962C8B-B14F-4D97-AF65-F5344CB8AC3E}">
-        <p14:creationId xmlns:p14="http://schemas.microsoft.com/office/powerpoint/2010/main" val="1764140627"/>
+        <p14:creationId xmlns:p14="http://schemas.microsoft.com/office/powerpoint/2010/main" val="2285606361"/>
       </p:ext>
     </p:extLst>
   </p:cSld>
@@ -13776,7 +13776,7 @@
           <p:cNvPr id="2" name="CuadroTexto 1">
             <a:extLst>
               <a:ext uri="{FF2B5EF4-FFF2-40B4-BE49-F238E27FC236}">
-                <a16:creationId xmlns:a16="http://schemas.microsoft.com/office/drawing/2014/main" id="{612EDC8B-2C38-558A-58F7-49C2BEAD3F40}"/>
+                <a16:creationId xmlns:a16="http://schemas.microsoft.com/office/drawing/2014/main" id="{8F6EDED2-C176-D54A-4744-4687B6033032}"/>
               </a:ext>
             </a:extLst>
           </p:cNvPr>
@@ -13816,7 +13816,7 @@
           <p:cNvPr id="3" name="CuadroTexto 2">
             <a:extLst>
               <a:ext uri="{FF2B5EF4-FFF2-40B4-BE49-F238E27FC236}">
-                <a16:creationId xmlns:a16="http://schemas.microsoft.com/office/drawing/2014/main" id="{359793CE-B4F4-8B17-247B-3B055B190D0B}"/>
+                <a16:creationId xmlns:a16="http://schemas.microsoft.com/office/drawing/2014/main" id="{DE06F856-1977-278D-4D9D-1E43F42B3E63}"/>
               </a:ext>
             </a:extLst>
           </p:cNvPr>
@@ -13856,7 +13856,7 @@
           <p:cNvPr id="5" name="Imagen 4">
             <a:extLst>
               <a:ext uri="{FF2B5EF4-FFF2-40B4-BE49-F238E27FC236}">
-                <a16:creationId xmlns:a16="http://schemas.microsoft.com/office/drawing/2014/main" id="{42262D1B-3C23-9DB5-7D61-B7106B3FF9BE}"/>
+                <a16:creationId xmlns:a16="http://schemas.microsoft.com/office/drawing/2014/main" id="{8D25A269-DC2D-733A-299D-BD80DAD89820}"/>
               </a:ext>
             </a:extLst>
           </p:cNvPr>
@@ -13897,7 +13897,7 @@
           <p:cNvPr id="6" name="CuadroTexto 5">
             <a:extLst>
               <a:ext uri="{FF2B5EF4-FFF2-40B4-BE49-F238E27FC236}">
-                <a16:creationId xmlns:a16="http://schemas.microsoft.com/office/drawing/2014/main" id="{2D665ACC-3598-1EF7-5FCA-6AB06BD7F463}"/>
+                <a16:creationId xmlns:a16="http://schemas.microsoft.com/office/drawing/2014/main" id="{35AFBA7F-E6A0-E468-4A1D-26781C28597C}"/>
               </a:ext>
             </a:extLst>
           </p:cNvPr>
@@ -13996,7 +13996,7 @@
     </p:spTree>
     <p:extLst>
       <p:ext uri="{BB962C8B-B14F-4D97-AF65-F5344CB8AC3E}">
-        <p14:creationId xmlns:p14="http://schemas.microsoft.com/office/powerpoint/2010/main" val="3931619758"/>
+        <p14:creationId xmlns:p14="http://schemas.microsoft.com/office/powerpoint/2010/main" val="4115379032"/>
       </p:ext>
     </p:extLst>
   </p:cSld>
@@ -14036,7 +14036,7 @@
           <p:cNvPr id="2" name="CuadroTexto 1">
             <a:extLst>
               <a:ext uri="{FF2B5EF4-FFF2-40B4-BE49-F238E27FC236}">
-                <a16:creationId xmlns:a16="http://schemas.microsoft.com/office/drawing/2014/main" id="{4EBAE9BF-BCF3-148B-DA54-96389DA42403}"/>
+                <a16:creationId xmlns:a16="http://schemas.microsoft.com/office/drawing/2014/main" id="{47F6931E-2B26-D49A-AFE6-CC53F8148F71}"/>
               </a:ext>
             </a:extLst>
           </p:cNvPr>
@@ -14076,7 +14076,7 @@
           <p:cNvPr id="3" name="CuadroTexto 2">
             <a:extLst>
               <a:ext uri="{FF2B5EF4-FFF2-40B4-BE49-F238E27FC236}">
-                <a16:creationId xmlns:a16="http://schemas.microsoft.com/office/drawing/2014/main" id="{8767AC55-98BE-1B9C-A0E1-9CD1149694F0}"/>
+                <a16:creationId xmlns:a16="http://schemas.microsoft.com/office/drawing/2014/main" id="{1128270E-7F07-312D-1B5C-DCBDCD60AF70}"/>
               </a:ext>
             </a:extLst>
           </p:cNvPr>
@@ -14116,7 +14116,7 @@
           <p:cNvPr id="4" name="CuadroTexto 3">
             <a:extLst>
               <a:ext uri="{FF2B5EF4-FFF2-40B4-BE49-F238E27FC236}">
-                <a16:creationId xmlns:a16="http://schemas.microsoft.com/office/drawing/2014/main" id="{6657ADCF-930B-FD8A-6B3C-0A1DCD0B910A}"/>
+                <a16:creationId xmlns:a16="http://schemas.microsoft.com/office/drawing/2014/main" id="{D1CF334C-A94F-E4C6-B928-50E04EA0E2EF}"/>
               </a:ext>
             </a:extLst>
           </p:cNvPr>
@@ -14156,7 +14156,7 @@
           <p:cNvPr id="6" name="Imagen 5">
             <a:extLst>
               <a:ext uri="{FF2B5EF4-FFF2-40B4-BE49-F238E27FC236}">
-                <a16:creationId xmlns:a16="http://schemas.microsoft.com/office/drawing/2014/main" id="{C296A2F4-EC02-0EE5-09BF-890AD8AB99C6}"/>
+                <a16:creationId xmlns:a16="http://schemas.microsoft.com/office/drawing/2014/main" id="{5F307C9B-F1AA-88F7-3968-78814345B8DE}"/>
               </a:ext>
             </a:extLst>
           </p:cNvPr>
@@ -14197,7 +14197,7 @@
           <p:cNvPr id="7" name="Rectángulo: esquinas redondeadas 6">
             <a:extLst>
               <a:ext uri="{FF2B5EF4-FFF2-40B4-BE49-F238E27FC236}">
-                <a16:creationId xmlns:a16="http://schemas.microsoft.com/office/drawing/2014/main" id="{C6986347-CF1D-F844-7D02-D301C3636090}"/>
+                <a16:creationId xmlns:a16="http://schemas.microsoft.com/office/drawing/2014/main" id="{FDA56359-6581-D044-D5E4-7E91EEE018E6}"/>
               </a:ext>
             </a:extLst>
           </p:cNvPr>
@@ -14251,7 +14251,7 @@
           <p:cNvPr id="8" name="CuadroTexto 7">
             <a:extLst>
               <a:ext uri="{FF2B5EF4-FFF2-40B4-BE49-F238E27FC236}">
-                <a16:creationId xmlns:a16="http://schemas.microsoft.com/office/drawing/2014/main" id="{79463B5C-0AFE-F5AA-D828-7ECCC155675D}"/>
+                <a16:creationId xmlns:a16="http://schemas.microsoft.com/office/drawing/2014/main" id="{A67D654B-1E8B-6A8D-019F-541401D1782A}"/>
               </a:ext>
             </a:extLst>
           </p:cNvPr>
@@ -14291,7 +14291,7 @@
           <p:cNvPr id="9" name="CuadroTexto 8">
             <a:extLst>
               <a:ext uri="{FF2B5EF4-FFF2-40B4-BE49-F238E27FC236}">
-                <a16:creationId xmlns:a16="http://schemas.microsoft.com/office/drawing/2014/main" id="{B9D66FFA-3378-6505-262E-6349FD1D2831}"/>
+                <a16:creationId xmlns:a16="http://schemas.microsoft.com/office/drawing/2014/main" id="{96ED29F5-2589-963A-3989-03BBC9B0C438}"/>
               </a:ext>
             </a:extLst>
           </p:cNvPr>
@@ -14329,7 +14329,7 @@
     </p:spTree>
     <p:extLst>
       <p:ext uri="{BB962C8B-B14F-4D97-AF65-F5344CB8AC3E}">
-        <p14:creationId xmlns:p14="http://schemas.microsoft.com/office/powerpoint/2010/main" val="1669319357"/>
+        <p14:creationId xmlns:p14="http://schemas.microsoft.com/office/powerpoint/2010/main" val="4211578087"/>
       </p:ext>
     </p:extLst>
   </p:cSld>
@@ -14369,7 +14369,7 @@
           <p:cNvPr id="2" name="CuadroTexto 1">
             <a:extLst>
               <a:ext uri="{FF2B5EF4-FFF2-40B4-BE49-F238E27FC236}">
-                <a16:creationId xmlns:a16="http://schemas.microsoft.com/office/drawing/2014/main" id="{10D66F9A-478B-94C2-0D94-7C4E80B18F57}"/>
+                <a16:creationId xmlns:a16="http://schemas.microsoft.com/office/drawing/2014/main" id="{9AEB3CDB-CC08-C12C-C8DD-17EA9590CD91}"/>
               </a:ext>
             </a:extLst>
           </p:cNvPr>
@@ -14409,7 +14409,7 @@
           <p:cNvPr id="3" name="CuadroTexto 2">
             <a:extLst>
               <a:ext uri="{FF2B5EF4-FFF2-40B4-BE49-F238E27FC236}">
-                <a16:creationId xmlns:a16="http://schemas.microsoft.com/office/drawing/2014/main" id="{A936EB9F-A72B-FA0D-0F46-78A3A4950293}"/>
+                <a16:creationId xmlns:a16="http://schemas.microsoft.com/office/drawing/2014/main" id="{0B2ED243-4430-5C2A-D633-D797AF402BA9}"/>
               </a:ext>
             </a:extLst>
           </p:cNvPr>
@@ -14449,7 +14449,7 @@
           <p:cNvPr id="4" name="CuadroTexto 3">
             <a:extLst>
               <a:ext uri="{FF2B5EF4-FFF2-40B4-BE49-F238E27FC236}">
-                <a16:creationId xmlns:a16="http://schemas.microsoft.com/office/drawing/2014/main" id="{3B94261E-0445-84DE-98D8-CE8FCB8887FB}"/>
+                <a16:creationId xmlns:a16="http://schemas.microsoft.com/office/drawing/2014/main" id="{1C0ABB57-10DA-73ED-5FF0-30523782C6A7}"/>
               </a:ext>
             </a:extLst>
           </p:cNvPr>
@@ -14489,7 +14489,7 @@
           <p:cNvPr id="5" name="Rectángulo: esquinas redondeadas 4">
             <a:extLst>
               <a:ext uri="{FF2B5EF4-FFF2-40B4-BE49-F238E27FC236}">
-                <a16:creationId xmlns:a16="http://schemas.microsoft.com/office/drawing/2014/main" id="{23B32681-1AA4-E6FC-3A5A-AC3FB99A6760}"/>
+                <a16:creationId xmlns:a16="http://schemas.microsoft.com/office/drawing/2014/main" id="{74E7650D-1789-405C-8216-9788A10FBD30}"/>
               </a:ext>
             </a:extLst>
           </p:cNvPr>
@@ -14543,7 +14543,7 @@
           <p:cNvPr id="6" name="CuadroTexto 5">
             <a:extLst>
               <a:ext uri="{FF2B5EF4-FFF2-40B4-BE49-F238E27FC236}">
-                <a16:creationId xmlns:a16="http://schemas.microsoft.com/office/drawing/2014/main" id="{793B4C7E-C901-674F-6CA6-D097698D1972}"/>
+                <a16:creationId xmlns:a16="http://schemas.microsoft.com/office/drawing/2014/main" id="{2DA73CB8-6621-DAD4-70CF-004880DF472C}"/>
               </a:ext>
             </a:extLst>
           </p:cNvPr>
@@ -14583,7 +14583,7 @@
           <p:cNvPr id="7" name="CuadroTexto 6">
             <a:extLst>
               <a:ext uri="{FF2B5EF4-FFF2-40B4-BE49-F238E27FC236}">
-                <a16:creationId xmlns:a16="http://schemas.microsoft.com/office/drawing/2014/main" id="{BEF21C9F-7BDD-117A-0037-231BC35A4A5E}"/>
+                <a16:creationId xmlns:a16="http://schemas.microsoft.com/office/drawing/2014/main" id="{C502EF6A-5E36-E119-72D8-F8FB69B3D3DE}"/>
               </a:ext>
             </a:extLst>
           </p:cNvPr>
@@ -14623,7 +14623,7 @@
           <p:cNvPr id="8" name="Rectángulo: esquinas redondeadas 7">
             <a:extLst>
               <a:ext uri="{FF2B5EF4-FFF2-40B4-BE49-F238E27FC236}">
-                <a16:creationId xmlns:a16="http://schemas.microsoft.com/office/drawing/2014/main" id="{8CA9703B-CA62-E505-0BC4-DB2B2D51319D}"/>
+                <a16:creationId xmlns:a16="http://schemas.microsoft.com/office/drawing/2014/main" id="{E3AE79F3-606E-A255-116A-9714F58F444B}"/>
               </a:ext>
             </a:extLst>
           </p:cNvPr>
@@ -14677,7 +14677,7 @@
           <p:cNvPr id="9" name="CuadroTexto 8">
             <a:extLst>
               <a:ext uri="{FF2B5EF4-FFF2-40B4-BE49-F238E27FC236}">
-                <a16:creationId xmlns:a16="http://schemas.microsoft.com/office/drawing/2014/main" id="{0712D07B-B4CE-7B51-FA6E-9A9E87A92548}"/>
+                <a16:creationId xmlns:a16="http://schemas.microsoft.com/office/drawing/2014/main" id="{F4EA034F-2E3C-E2C6-462F-9A491E05496B}"/>
               </a:ext>
             </a:extLst>
           </p:cNvPr>
@@ -14717,7 +14717,7 @@
           <p:cNvPr id="10" name="CuadroTexto 9">
             <a:extLst>
               <a:ext uri="{FF2B5EF4-FFF2-40B4-BE49-F238E27FC236}">
-                <a16:creationId xmlns:a16="http://schemas.microsoft.com/office/drawing/2014/main" id="{443EE948-256D-0643-624C-66C5E5933FB7}"/>
+                <a16:creationId xmlns:a16="http://schemas.microsoft.com/office/drawing/2014/main" id="{CF27E8AA-E838-869D-A3EA-9BC78AD01BB6}"/>
               </a:ext>
             </a:extLst>
           </p:cNvPr>
@@ -14757,7 +14757,7 @@
           <p:cNvPr id="11" name="Rectángulo: esquinas redondeadas 10">
             <a:extLst>
               <a:ext uri="{FF2B5EF4-FFF2-40B4-BE49-F238E27FC236}">
-                <a16:creationId xmlns:a16="http://schemas.microsoft.com/office/drawing/2014/main" id="{37B69794-AC23-1AA4-AD61-B120A9E2133E}"/>
+                <a16:creationId xmlns:a16="http://schemas.microsoft.com/office/drawing/2014/main" id="{1E84D195-6702-7DE4-146B-23D5E279A2EC}"/>
               </a:ext>
             </a:extLst>
           </p:cNvPr>
@@ -14811,7 +14811,7 @@
           <p:cNvPr id="12" name="CuadroTexto 11">
             <a:extLst>
               <a:ext uri="{FF2B5EF4-FFF2-40B4-BE49-F238E27FC236}">
-                <a16:creationId xmlns:a16="http://schemas.microsoft.com/office/drawing/2014/main" id="{1C6FE4E0-0CE0-C5F5-02B6-6B3232402195}"/>
+                <a16:creationId xmlns:a16="http://schemas.microsoft.com/office/drawing/2014/main" id="{0841BA9E-B461-01DA-D9DD-E054EE9039E3}"/>
               </a:ext>
             </a:extLst>
           </p:cNvPr>
@@ -14851,7 +14851,7 @@
           <p:cNvPr id="13" name="CuadroTexto 12">
             <a:extLst>
               <a:ext uri="{FF2B5EF4-FFF2-40B4-BE49-F238E27FC236}">
-                <a16:creationId xmlns:a16="http://schemas.microsoft.com/office/drawing/2014/main" id="{31C624D6-21BD-CC92-0A83-5A6A2A831D6C}"/>
+                <a16:creationId xmlns:a16="http://schemas.microsoft.com/office/drawing/2014/main" id="{6E99977C-0D3D-1718-2A07-78C1AB056AE7}"/>
               </a:ext>
             </a:extLst>
           </p:cNvPr>
@@ -14891,7 +14891,7 @@
           <p:cNvPr id="14" name="Rectángulo: esquinas redondeadas 13">
             <a:extLst>
               <a:ext uri="{FF2B5EF4-FFF2-40B4-BE49-F238E27FC236}">
-                <a16:creationId xmlns:a16="http://schemas.microsoft.com/office/drawing/2014/main" id="{7AD01AB8-75FA-48EF-9A9E-0C26B91515F5}"/>
+                <a16:creationId xmlns:a16="http://schemas.microsoft.com/office/drawing/2014/main" id="{1FBE6333-4986-66DE-3BFE-5A3AFF646477}"/>
               </a:ext>
             </a:extLst>
           </p:cNvPr>
@@ -14945,7 +14945,7 @@
           <p:cNvPr id="15" name="CuadroTexto 14">
             <a:extLst>
               <a:ext uri="{FF2B5EF4-FFF2-40B4-BE49-F238E27FC236}">
-                <a16:creationId xmlns:a16="http://schemas.microsoft.com/office/drawing/2014/main" id="{48BB8B21-F1CD-6837-F7C2-38E95C3012D5}"/>
+                <a16:creationId xmlns:a16="http://schemas.microsoft.com/office/drawing/2014/main" id="{4EB26C40-868E-B993-9998-D6F0B9C0A31A}"/>
               </a:ext>
             </a:extLst>
           </p:cNvPr>
@@ -14985,7 +14985,7 @@
           <p:cNvPr id="16" name="CuadroTexto 15">
             <a:extLst>
               <a:ext uri="{FF2B5EF4-FFF2-40B4-BE49-F238E27FC236}">
-                <a16:creationId xmlns:a16="http://schemas.microsoft.com/office/drawing/2014/main" id="{7BCE2F74-FDA6-C2AE-2DF9-A6560E346D0F}"/>
+                <a16:creationId xmlns:a16="http://schemas.microsoft.com/office/drawing/2014/main" id="{682E5687-1AFD-1DCB-57EF-686B2BB46F02}"/>
               </a:ext>
             </a:extLst>
           </p:cNvPr>
@@ -15025,7 +15025,7 @@
           <p:cNvPr id="17" name="Rectángulo: esquinas redondeadas 16">
             <a:extLst>
               <a:ext uri="{FF2B5EF4-FFF2-40B4-BE49-F238E27FC236}">
-                <a16:creationId xmlns:a16="http://schemas.microsoft.com/office/drawing/2014/main" id="{CA3D00FB-AF86-F693-9B68-C7B854B6A04E}"/>
+                <a16:creationId xmlns:a16="http://schemas.microsoft.com/office/drawing/2014/main" id="{0B8B8DB2-0CF9-291D-00C1-E4FF1DC27855}"/>
               </a:ext>
             </a:extLst>
           </p:cNvPr>
@@ -15079,7 +15079,7 @@
           <p:cNvPr id="18" name="CuadroTexto 17">
             <a:extLst>
               <a:ext uri="{FF2B5EF4-FFF2-40B4-BE49-F238E27FC236}">
-                <a16:creationId xmlns:a16="http://schemas.microsoft.com/office/drawing/2014/main" id="{0F493F7B-228D-F217-AB81-80DC3BB8E937}"/>
+                <a16:creationId xmlns:a16="http://schemas.microsoft.com/office/drawing/2014/main" id="{7AF5ED68-453B-B03B-05B5-5BD566D57D87}"/>
               </a:ext>
             </a:extLst>
           </p:cNvPr>
@@ -15119,7 +15119,7 @@
           <p:cNvPr id="19" name="CuadroTexto 18">
             <a:extLst>
               <a:ext uri="{FF2B5EF4-FFF2-40B4-BE49-F238E27FC236}">
-                <a16:creationId xmlns:a16="http://schemas.microsoft.com/office/drawing/2014/main" id="{5DAAA210-1E5C-5213-F123-1ACE99799C9E}"/>
+                <a16:creationId xmlns:a16="http://schemas.microsoft.com/office/drawing/2014/main" id="{69EE2F77-D164-8680-0DF1-94E08F782648}"/>
               </a:ext>
             </a:extLst>
           </p:cNvPr>
@@ -15159,7 +15159,7 @@
           <p:cNvPr id="20" name="Rectángulo: esquinas redondeadas 19">
             <a:extLst>
               <a:ext uri="{FF2B5EF4-FFF2-40B4-BE49-F238E27FC236}">
-                <a16:creationId xmlns:a16="http://schemas.microsoft.com/office/drawing/2014/main" id="{0B8E54AB-9400-1A60-C038-5BD2155C418A}"/>
+                <a16:creationId xmlns:a16="http://schemas.microsoft.com/office/drawing/2014/main" id="{67A03EB0-4E72-91C7-013F-2D200A3EF67C}"/>
               </a:ext>
             </a:extLst>
           </p:cNvPr>
@@ -15213,7 +15213,7 @@
           <p:cNvPr id="21" name="CuadroTexto 20">
             <a:extLst>
               <a:ext uri="{FF2B5EF4-FFF2-40B4-BE49-F238E27FC236}">
-                <a16:creationId xmlns:a16="http://schemas.microsoft.com/office/drawing/2014/main" id="{E8B4156F-9642-CA04-F9F4-5F81E86A082C}"/>
+                <a16:creationId xmlns:a16="http://schemas.microsoft.com/office/drawing/2014/main" id="{E19D156C-C501-6A45-5FE2-67D7E475E66D}"/>
               </a:ext>
             </a:extLst>
           </p:cNvPr>
@@ -15253,7 +15253,7 @@
           <p:cNvPr id="22" name="CuadroTexto 21">
             <a:extLst>
               <a:ext uri="{FF2B5EF4-FFF2-40B4-BE49-F238E27FC236}">
-                <a16:creationId xmlns:a16="http://schemas.microsoft.com/office/drawing/2014/main" id="{E8065AA8-24E4-E5EC-CFD5-503C5D036A1B}"/>
+                <a16:creationId xmlns:a16="http://schemas.microsoft.com/office/drawing/2014/main" id="{5F227918-8B05-55E3-69BD-E1B9DB514DF2}"/>
               </a:ext>
             </a:extLst>
           </p:cNvPr>
@@ -15291,7 +15291,7 @@
     </p:spTree>
     <p:extLst>
       <p:ext uri="{BB962C8B-B14F-4D97-AF65-F5344CB8AC3E}">
-        <p14:creationId xmlns:p14="http://schemas.microsoft.com/office/powerpoint/2010/main" val="3334752826"/>
+        <p14:creationId xmlns:p14="http://schemas.microsoft.com/office/powerpoint/2010/main" val="3299125161"/>
       </p:ext>
     </p:extLst>
   </p:cSld>

--- a/docs/presentacion-defensa-final.pptx
+++ b/docs/presentacion-defensa-final.pptx
@@ -208,9 +208,9 @@
             </a:lvl1pPr>
           </a:lstStyle>
           <a:p>
-            <a:fld id="{8FBF001C-8709-4ADC-8371-900A171C88AA}" type="datetimeFigureOut">
+            <a:fld id="{8FEBC1BF-194D-476A-A3A6-18B95E1C1F4E}" type="datetimeFigureOut">
               <a:rPr lang="es-ES" smtClean="0"/>
-              <a:t>04/06/2026</a:t>
+              <a:t>05/06/2026</a:t>
             </a:fld>
             <a:endParaRPr lang="es-ES"/>
           </a:p>
@@ -366,7 +366,7 @@
             </a:lvl1pPr>
           </a:lstStyle>
           <a:p>
-            <a:fld id="{B93001FF-24BA-4316-B9A8-D8767091175D}" type="slidenum">
+            <a:fld id="{C5D5DE0E-C4D9-44FD-808E-5E4EC38331C1}" type="slidenum">
               <a:rPr lang="es-ES" smtClean="0"/>
               <a:t>‹Nº›</a:t>
             </a:fld>
@@ -377,7 +377,7 @@
     </p:spTree>
     <p:extLst>
       <p:ext uri="{BB962C8B-B14F-4D97-AF65-F5344CB8AC3E}">
-        <p14:creationId xmlns:p14="http://schemas.microsoft.com/office/powerpoint/2010/main" val="3743991715"/>
+        <p14:creationId xmlns:p14="http://schemas.microsoft.com/office/powerpoint/2010/main" val="2403781025"/>
       </p:ext>
     </p:extLst>
   </p:cSld>
@@ -546,7 +546,7 @@
           <a:bodyPr/>
           <a:lstStyle/>
           <a:p>
-            <a:fld id="{B93001FF-24BA-4316-B9A8-D8767091175D}" type="slidenum">
+            <a:fld id="{C5D5DE0E-C4D9-44FD-808E-5E4EC38331C1}" type="slidenum">
               <a:rPr lang="es-ES" smtClean="0"/>
               <a:t>1</a:t>
             </a:fld>
@@ -557,7 +557,7 @@
     </p:spTree>
     <p:extLst>
       <p:ext uri="{BB962C8B-B14F-4D97-AF65-F5344CB8AC3E}">
-        <p14:creationId xmlns:p14="http://schemas.microsoft.com/office/powerpoint/2010/main" val="215697045"/>
+        <p14:creationId xmlns:p14="http://schemas.microsoft.com/office/powerpoint/2010/main" val="287008204"/>
       </p:ext>
     </p:extLst>
   </p:cSld>
@@ -636,7 +636,7 @@
           <a:bodyPr/>
           <a:lstStyle/>
           <a:p>
-            <a:fld id="{B93001FF-24BA-4316-B9A8-D8767091175D}" type="slidenum">
+            <a:fld id="{C5D5DE0E-C4D9-44FD-808E-5E4EC38331C1}" type="slidenum">
               <a:rPr lang="es-ES" smtClean="0"/>
               <a:t>10</a:t>
             </a:fld>
@@ -647,7 +647,7 @@
     </p:spTree>
     <p:extLst>
       <p:ext uri="{BB962C8B-B14F-4D97-AF65-F5344CB8AC3E}">
-        <p14:creationId xmlns:p14="http://schemas.microsoft.com/office/powerpoint/2010/main" val="3986796827"/>
+        <p14:creationId xmlns:p14="http://schemas.microsoft.com/office/powerpoint/2010/main" val="2409528777"/>
       </p:ext>
     </p:extLst>
   </p:cSld>
@@ -726,7 +726,7 @@
           <a:bodyPr/>
           <a:lstStyle/>
           <a:p>
-            <a:fld id="{B93001FF-24BA-4316-B9A8-D8767091175D}" type="slidenum">
+            <a:fld id="{C5D5DE0E-C4D9-44FD-808E-5E4EC38331C1}" type="slidenum">
               <a:rPr lang="es-ES" smtClean="0"/>
               <a:t>11</a:t>
             </a:fld>
@@ -737,7 +737,7 @@
     </p:spTree>
     <p:extLst>
       <p:ext uri="{BB962C8B-B14F-4D97-AF65-F5344CB8AC3E}">
-        <p14:creationId xmlns:p14="http://schemas.microsoft.com/office/powerpoint/2010/main" val="2276064624"/>
+        <p14:creationId xmlns:p14="http://schemas.microsoft.com/office/powerpoint/2010/main" val="3520985631"/>
       </p:ext>
     </p:extLst>
   </p:cSld>
@@ -816,7 +816,7 @@
           <a:bodyPr/>
           <a:lstStyle/>
           <a:p>
-            <a:fld id="{B93001FF-24BA-4316-B9A8-D8767091175D}" type="slidenum">
+            <a:fld id="{C5D5DE0E-C4D9-44FD-808E-5E4EC38331C1}" type="slidenum">
               <a:rPr lang="es-ES" smtClean="0"/>
               <a:t>12</a:t>
             </a:fld>
@@ -827,7 +827,7 @@
     </p:spTree>
     <p:extLst>
       <p:ext uri="{BB962C8B-B14F-4D97-AF65-F5344CB8AC3E}">
-        <p14:creationId xmlns:p14="http://schemas.microsoft.com/office/powerpoint/2010/main" val="1059339686"/>
+        <p14:creationId xmlns:p14="http://schemas.microsoft.com/office/powerpoint/2010/main" val="1830068383"/>
       </p:ext>
     </p:extLst>
   </p:cSld>
@@ -906,7 +906,7 @@
           <a:bodyPr/>
           <a:lstStyle/>
           <a:p>
-            <a:fld id="{B93001FF-24BA-4316-B9A8-D8767091175D}" type="slidenum">
+            <a:fld id="{C5D5DE0E-C4D9-44FD-808E-5E4EC38331C1}" type="slidenum">
               <a:rPr lang="es-ES" smtClean="0"/>
               <a:t>13</a:t>
             </a:fld>
@@ -917,7 +917,7 @@
     </p:spTree>
     <p:extLst>
       <p:ext uri="{BB962C8B-B14F-4D97-AF65-F5344CB8AC3E}">
-        <p14:creationId xmlns:p14="http://schemas.microsoft.com/office/powerpoint/2010/main" val="640734711"/>
+        <p14:creationId xmlns:p14="http://schemas.microsoft.com/office/powerpoint/2010/main" val="1869301127"/>
       </p:ext>
     </p:extLst>
   </p:cSld>
@@ -980,10 +980,11 @@
 startup.sh comprueba .env.gcp, recalcula la URL nip.io si cambia la IP publica y ejecuta docker compose up -d --remove-orphans.
 El compose levanta proxy, app y base de datos.
 Segundo, roles:
-Ahora mismo para la defensa uso un usuario amplio para no fragmentar la demo.
-Pero el backend ya tiene roles definidos en backend/config/packages/security.yaml.
-ROLE_ADMIN hereda todo, ROLE_COORDINATOR gestiona el flujo academico, ROLE_DOCUMENT_MANAGER gestiona documentos, ROLE_MONITOR sirve para la parte tecnica y ROLE_COMPANY_PORTAL queda separado para empresas.
-La mejora futura seria cerrar la parte fina en React: ocultar botones segun rol y crear un perfil de solo lectura.</a:t>
+El proyecto ya separa permisos reales por rol.
+ROLE_ADMIN tiene control completo y es el unico que puede eliminar datos de prueba desde el portal interno: asignaciones, convenios sin asignaciones y empresas sin convenios ni asignaciones. Esto me permite limpiar datos para pruebas sin tocar directamente la base de datos.
+ROLE_COORDINATOR, que es el perfil que usan profesor o profesora en la demo, puede crear, editar y consultar empresas, convenios, asignaciones y mensajes, pero no ve ni puede ejecutar acciones de borrado.
+ROLE_DOCUMENT_MANAGER queda pensado para gestion documental, ROLE_MONITOR para logs y consola tecnica, y ROLE_COMPANY_PORTAL para empresas externas.
+Como evolucion futura, esta base se puede ampliar a una matriz de permisos mas fina: perfiles de solo lectura, responsables por departamento, auditoria visible por rol y restricciones por centro o familia profesional.</a:t>
             </a:r>
           </a:p>
         </p:txBody>
@@ -1003,7 +1004,7 @@
           <a:bodyPr/>
           <a:lstStyle/>
           <a:p>
-            <a:fld id="{B93001FF-24BA-4316-B9A8-D8767091175D}" type="slidenum">
+            <a:fld id="{C5D5DE0E-C4D9-44FD-808E-5E4EC38331C1}" type="slidenum">
               <a:rPr lang="es-ES" smtClean="0"/>
               <a:t>14</a:t>
             </a:fld>
@@ -1014,7 +1015,7 @@
     </p:spTree>
     <p:extLst>
       <p:ext uri="{BB962C8B-B14F-4D97-AF65-F5344CB8AC3E}">
-        <p14:creationId xmlns:p14="http://schemas.microsoft.com/office/powerpoint/2010/main" val="2637870448"/>
+        <p14:creationId xmlns:p14="http://schemas.microsoft.com/office/powerpoint/2010/main" val="119859573"/>
       </p:ext>
     </p:extLst>
   </p:cSld>
@@ -1093,7 +1094,7 @@
           <a:bodyPr/>
           <a:lstStyle/>
           <a:p>
-            <a:fld id="{B93001FF-24BA-4316-B9A8-D8767091175D}" type="slidenum">
+            <a:fld id="{C5D5DE0E-C4D9-44FD-808E-5E4EC38331C1}" type="slidenum">
               <a:rPr lang="es-ES" smtClean="0"/>
               <a:t>15</a:t>
             </a:fld>
@@ -1104,7 +1105,7 @@
     </p:spTree>
     <p:extLst>
       <p:ext uri="{BB962C8B-B14F-4D97-AF65-F5344CB8AC3E}">
-        <p14:creationId xmlns:p14="http://schemas.microsoft.com/office/powerpoint/2010/main" val="3021342473"/>
+        <p14:creationId xmlns:p14="http://schemas.microsoft.com/office/powerpoint/2010/main" val="3031410732"/>
       </p:ext>
     </p:extLst>
   </p:cSld>
@@ -1183,7 +1184,7 @@
           <a:bodyPr/>
           <a:lstStyle/>
           <a:p>
-            <a:fld id="{B93001FF-24BA-4316-B9A8-D8767091175D}" type="slidenum">
+            <a:fld id="{C5D5DE0E-C4D9-44FD-808E-5E4EC38331C1}" type="slidenum">
               <a:rPr lang="es-ES" smtClean="0"/>
               <a:t>16</a:t>
             </a:fld>
@@ -1194,7 +1195,7 @@
     </p:spTree>
     <p:extLst>
       <p:ext uri="{BB962C8B-B14F-4D97-AF65-F5344CB8AC3E}">
-        <p14:creationId xmlns:p14="http://schemas.microsoft.com/office/powerpoint/2010/main" val="1484217553"/>
+        <p14:creationId xmlns:p14="http://schemas.microsoft.com/office/powerpoint/2010/main" val="2493762024"/>
       </p:ext>
     </p:extLst>
   </p:cSld>
@@ -1273,7 +1274,7 @@
           <a:bodyPr/>
           <a:lstStyle/>
           <a:p>
-            <a:fld id="{B93001FF-24BA-4316-B9A8-D8767091175D}" type="slidenum">
+            <a:fld id="{C5D5DE0E-C4D9-44FD-808E-5E4EC38331C1}" type="slidenum">
               <a:rPr lang="es-ES" smtClean="0"/>
               <a:t>17</a:t>
             </a:fld>
@@ -1284,7 +1285,7 @@
     </p:spTree>
     <p:extLst>
       <p:ext uri="{BB962C8B-B14F-4D97-AF65-F5344CB8AC3E}">
-        <p14:creationId xmlns:p14="http://schemas.microsoft.com/office/powerpoint/2010/main" val="3605682471"/>
+        <p14:creationId xmlns:p14="http://schemas.microsoft.com/office/powerpoint/2010/main" val="698586754"/>
       </p:ext>
     </p:extLst>
   </p:cSld>
@@ -1363,7 +1364,7 @@
           <a:bodyPr/>
           <a:lstStyle/>
           <a:p>
-            <a:fld id="{B93001FF-24BA-4316-B9A8-D8767091175D}" type="slidenum">
+            <a:fld id="{C5D5DE0E-C4D9-44FD-808E-5E4EC38331C1}" type="slidenum">
               <a:rPr lang="es-ES" smtClean="0"/>
               <a:t>18</a:t>
             </a:fld>
@@ -1374,7 +1375,7 @@
     </p:spTree>
     <p:extLst>
       <p:ext uri="{BB962C8B-B14F-4D97-AF65-F5344CB8AC3E}">
-        <p14:creationId xmlns:p14="http://schemas.microsoft.com/office/powerpoint/2010/main" val="1303702541"/>
+        <p14:creationId xmlns:p14="http://schemas.microsoft.com/office/powerpoint/2010/main" val="3876272976"/>
       </p:ext>
     </p:extLst>
   </p:cSld>
@@ -1452,7 +1453,7 @@
           <a:bodyPr/>
           <a:lstStyle/>
           <a:p>
-            <a:fld id="{B93001FF-24BA-4316-B9A8-D8767091175D}" type="slidenum">
+            <a:fld id="{C5D5DE0E-C4D9-44FD-808E-5E4EC38331C1}" type="slidenum">
               <a:rPr lang="es-ES" smtClean="0"/>
               <a:t>19</a:t>
             </a:fld>
@@ -1463,7 +1464,7 @@
     </p:spTree>
     <p:extLst>
       <p:ext uri="{BB962C8B-B14F-4D97-AF65-F5344CB8AC3E}">
-        <p14:creationId xmlns:p14="http://schemas.microsoft.com/office/powerpoint/2010/main" val="2211849095"/>
+        <p14:creationId xmlns:p14="http://schemas.microsoft.com/office/powerpoint/2010/main" val="3865594059"/>
       </p:ext>
     </p:extLst>
   </p:cSld>
@@ -1542,7 +1543,7 @@
           <a:bodyPr/>
           <a:lstStyle/>
           <a:p>
-            <a:fld id="{B93001FF-24BA-4316-B9A8-D8767091175D}" type="slidenum">
+            <a:fld id="{C5D5DE0E-C4D9-44FD-808E-5E4EC38331C1}" type="slidenum">
               <a:rPr lang="es-ES" smtClean="0"/>
               <a:t>2</a:t>
             </a:fld>
@@ -1553,7 +1554,7 @@
     </p:spTree>
     <p:extLst>
       <p:ext uri="{BB962C8B-B14F-4D97-AF65-F5344CB8AC3E}">
-        <p14:creationId xmlns:p14="http://schemas.microsoft.com/office/powerpoint/2010/main" val="3549670956"/>
+        <p14:creationId xmlns:p14="http://schemas.microsoft.com/office/powerpoint/2010/main" val="3926339252"/>
       </p:ext>
     </p:extLst>
   </p:cSld>
@@ -1633,7 +1634,7 @@
           <a:bodyPr/>
           <a:lstStyle/>
           <a:p>
-            <a:fld id="{B93001FF-24BA-4316-B9A8-D8767091175D}" type="slidenum">
+            <a:fld id="{C5D5DE0E-C4D9-44FD-808E-5E4EC38331C1}" type="slidenum">
               <a:rPr lang="es-ES" smtClean="0"/>
               <a:t>3</a:t>
             </a:fld>
@@ -1644,7 +1645,7 @@
     </p:spTree>
     <p:extLst>
       <p:ext uri="{BB962C8B-B14F-4D97-AF65-F5344CB8AC3E}">
-        <p14:creationId xmlns:p14="http://schemas.microsoft.com/office/powerpoint/2010/main" val="4073137116"/>
+        <p14:creationId xmlns:p14="http://schemas.microsoft.com/office/powerpoint/2010/main" val="3430522565"/>
       </p:ext>
     </p:extLst>
   </p:cSld>
@@ -1724,7 +1725,7 @@
           <a:bodyPr/>
           <a:lstStyle/>
           <a:p>
-            <a:fld id="{B93001FF-24BA-4316-B9A8-D8767091175D}" type="slidenum">
+            <a:fld id="{C5D5DE0E-C4D9-44FD-808E-5E4EC38331C1}" type="slidenum">
               <a:rPr lang="es-ES" smtClean="0"/>
               <a:t>4</a:t>
             </a:fld>
@@ -1735,7 +1736,7 @@
     </p:spTree>
     <p:extLst>
       <p:ext uri="{BB962C8B-B14F-4D97-AF65-F5344CB8AC3E}">
-        <p14:creationId xmlns:p14="http://schemas.microsoft.com/office/powerpoint/2010/main" val="4051446067"/>
+        <p14:creationId xmlns:p14="http://schemas.microsoft.com/office/powerpoint/2010/main" val="4186151953"/>
       </p:ext>
     </p:extLst>
   </p:cSld>
@@ -1818,7 +1819,7 @@
           <a:bodyPr/>
           <a:lstStyle/>
           <a:p>
-            <a:fld id="{B93001FF-24BA-4316-B9A8-D8767091175D}" type="slidenum">
+            <a:fld id="{C5D5DE0E-C4D9-44FD-808E-5E4EC38331C1}" type="slidenum">
               <a:rPr lang="es-ES" smtClean="0"/>
               <a:t>5</a:t>
             </a:fld>
@@ -1829,7 +1830,7 @@
     </p:spTree>
     <p:extLst>
       <p:ext uri="{BB962C8B-B14F-4D97-AF65-F5344CB8AC3E}">
-        <p14:creationId xmlns:p14="http://schemas.microsoft.com/office/powerpoint/2010/main" val="1828890381"/>
+        <p14:creationId xmlns:p14="http://schemas.microsoft.com/office/powerpoint/2010/main" val="3708493512"/>
       </p:ext>
     </p:extLst>
   </p:cSld>
@@ -1908,7 +1909,7 @@
           <a:bodyPr/>
           <a:lstStyle/>
           <a:p>
-            <a:fld id="{B93001FF-24BA-4316-B9A8-D8767091175D}" type="slidenum">
+            <a:fld id="{C5D5DE0E-C4D9-44FD-808E-5E4EC38331C1}" type="slidenum">
               <a:rPr lang="es-ES" smtClean="0"/>
               <a:t>6</a:t>
             </a:fld>
@@ -1919,7 +1920,7 @@
     </p:spTree>
     <p:extLst>
       <p:ext uri="{BB962C8B-B14F-4D97-AF65-F5344CB8AC3E}">
-        <p14:creationId xmlns:p14="http://schemas.microsoft.com/office/powerpoint/2010/main" val="863347273"/>
+        <p14:creationId xmlns:p14="http://schemas.microsoft.com/office/powerpoint/2010/main" val="2835790957"/>
       </p:ext>
     </p:extLst>
   </p:cSld>
@@ -1999,7 +2000,7 @@
           <a:bodyPr/>
           <a:lstStyle/>
           <a:p>
-            <a:fld id="{B93001FF-24BA-4316-B9A8-D8767091175D}" type="slidenum">
+            <a:fld id="{C5D5DE0E-C4D9-44FD-808E-5E4EC38331C1}" type="slidenum">
               <a:rPr lang="es-ES" smtClean="0"/>
               <a:t>7</a:t>
             </a:fld>
@@ -2010,7 +2011,7 @@
     </p:spTree>
     <p:extLst>
       <p:ext uri="{BB962C8B-B14F-4D97-AF65-F5344CB8AC3E}">
-        <p14:creationId xmlns:p14="http://schemas.microsoft.com/office/powerpoint/2010/main" val="3145180591"/>
+        <p14:creationId xmlns:p14="http://schemas.microsoft.com/office/powerpoint/2010/main" val="1618068750"/>
       </p:ext>
     </p:extLst>
   </p:cSld>
@@ -2089,7 +2090,7 @@
           <a:bodyPr/>
           <a:lstStyle/>
           <a:p>
-            <a:fld id="{B93001FF-24BA-4316-B9A8-D8767091175D}" type="slidenum">
+            <a:fld id="{C5D5DE0E-C4D9-44FD-808E-5E4EC38331C1}" type="slidenum">
               <a:rPr lang="es-ES" smtClean="0"/>
               <a:t>8</a:t>
             </a:fld>
@@ -2100,7 +2101,7 @@
     </p:spTree>
     <p:extLst>
       <p:ext uri="{BB962C8B-B14F-4D97-AF65-F5344CB8AC3E}">
-        <p14:creationId xmlns:p14="http://schemas.microsoft.com/office/powerpoint/2010/main" val="2676240005"/>
+        <p14:creationId xmlns:p14="http://schemas.microsoft.com/office/powerpoint/2010/main" val="2182006226"/>
       </p:ext>
     </p:extLst>
   </p:cSld>
@@ -2180,7 +2181,7 @@
           <a:bodyPr/>
           <a:lstStyle/>
           <a:p>
-            <a:fld id="{B93001FF-24BA-4316-B9A8-D8767091175D}" type="slidenum">
+            <a:fld id="{C5D5DE0E-C4D9-44FD-808E-5E4EC38331C1}" type="slidenum">
               <a:rPr lang="es-ES" smtClean="0"/>
               <a:t>9</a:t>
             </a:fld>
@@ -2191,7 +2192,7 @@
     </p:spTree>
     <p:extLst>
       <p:ext uri="{BB962C8B-B14F-4D97-AF65-F5344CB8AC3E}">
-        <p14:creationId xmlns:p14="http://schemas.microsoft.com/office/powerpoint/2010/main" val="1482581176"/>
+        <p14:creationId xmlns:p14="http://schemas.microsoft.com/office/powerpoint/2010/main" val="1157045571"/>
       </p:ext>
     </p:extLst>
   </p:cSld>
@@ -2223,7 +2224,7 @@
           <p:cNvPr id="2" name="Título 1">
             <a:extLst>
               <a:ext uri="{FF2B5EF4-FFF2-40B4-BE49-F238E27FC236}">
-                <a16:creationId xmlns:a16="http://schemas.microsoft.com/office/drawing/2014/main" id="{9FBF71DD-8A1A-3A5C-427E-F42D1B5597E3}"/>
+                <a16:creationId xmlns:a16="http://schemas.microsoft.com/office/drawing/2014/main" id="{A64AA065-1710-1C52-921A-E5B3164FB178}"/>
               </a:ext>
             </a:extLst>
           </p:cNvPr>
@@ -2260,7 +2261,7 @@
           <p:cNvPr id="3" name="Subtítulo 2">
             <a:extLst>
               <a:ext uri="{FF2B5EF4-FFF2-40B4-BE49-F238E27FC236}">
-                <a16:creationId xmlns:a16="http://schemas.microsoft.com/office/drawing/2014/main" id="{BFADDF58-6B19-3973-E9CA-309017CC0E93}"/>
+                <a16:creationId xmlns:a16="http://schemas.microsoft.com/office/drawing/2014/main" id="{1FD4C27C-5F02-DC21-55D7-F57165153FD5}"/>
               </a:ext>
             </a:extLst>
           </p:cNvPr>
@@ -2330,7 +2331,7 @@
           <p:cNvPr id="4" name="Marcador de fecha 3">
             <a:extLst>
               <a:ext uri="{FF2B5EF4-FFF2-40B4-BE49-F238E27FC236}">
-                <a16:creationId xmlns:a16="http://schemas.microsoft.com/office/drawing/2014/main" id="{34C85AC0-8B5B-D328-C631-062B2A19CD38}"/>
+                <a16:creationId xmlns:a16="http://schemas.microsoft.com/office/drawing/2014/main" id="{AA1A6579-3E56-0211-44D4-617C5CE25B60}"/>
               </a:ext>
             </a:extLst>
           </p:cNvPr>
@@ -2346,9 +2347,9 @@
           <a:bodyPr/>
           <a:lstStyle/>
           <a:p>
-            <a:fld id="{E2E78F0F-3CEE-4885-8154-F908A2044D66}" type="datetimeFigureOut">
+            <a:fld id="{3D6C1A94-3A56-4E71-9AEB-C8DB029FBD9F}" type="datetimeFigureOut">
               <a:rPr lang="es-ES" smtClean="0"/>
-              <a:t>04/06/2026</a:t>
+              <a:t>05/06/2026</a:t>
             </a:fld>
             <a:endParaRPr lang="es-ES"/>
           </a:p>
@@ -2359,7 +2360,7 @@
           <p:cNvPr id="5" name="Marcador de pie de página 4">
             <a:extLst>
               <a:ext uri="{FF2B5EF4-FFF2-40B4-BE49-F238E27FC236}">
-                <a16:creationId xmlns:a16="http://schemas.microsoft.com/office/drawing/2014/main" id="{B2AAB737-A507-EDBB-C397-1439D07293A9}"/>
+                <a16:creationId xmlns:a16="http://schemas.microsoft.com/office/drawing/2014/main" id="{4867F8BA-D29F-80EC-AE76-3C17E84DC7D9}"/>
               </a:ext>
             </a:extLst>
           </p:cNvPr>
@@ -2384,7 +2385,7 @@
           <p:cNvPr id="6" name="Marcador de número de diapositiva 5">
             <a:extLst>
               <a:ext uri="{FF2B5EF4-FFF2-40B4-BE49-F238E27FC236}">
-                <a16:creationId xmlns:a16="http://schemas.microsoft.com/office/drawing/2014/main" id="{2FA276E1-F939-4447-B2B8-98A12AE7E336}"/>
+                <a16:creationId xmlns:a16="http://schemas.microsoft.com/office/drawing/2014/main" id="{1E9BAF6F-9FFC-44F1-D387-67A915A2EE75}"/>
               </a:ext>
             </a:extLst>
           </p:cNvPr>
@@ -2400,7 +2401,7 @@
           <a:bodyPr/>
           <a:lstStyle/>
           <a:p>
-            <a:fld id="{46952519-79A0-4158-88E8-8A74092916AE}" type="slidenum">
+            <a:fld id="{2611C5D2-C4B0-4D8A-9AB8-ED270EC4FA17}" type="slidenum">
               <a:rPr lang="es-ES" smtClean="0"/>
               <a:t>‹Nº›</a:t>
             </a:fld>
@@ -2411,7 +2412,7 @@
     </p:spTree>
     <p:extLst>
       <p:ext uri="{BB962C8B-B14F-4D97-AF65-F5344CB8AC3E}">
-        <p14:creationId xmlns:p14="http://schemas.microsoft.com/office/powerpoint/2010/main" val="3700646399"/>
+        <p14:creationId xmlns:p14="http://schemas.microsoft.com/office/powerpoint/2010/main" val="2535946326"/>
       </p:ext>
     </p:extLst>
   </p:cSld>
@@ -2443,7 +2444,7 @@
           <p:cNvPr id="2" name="Título 1">
             <a:extLst>
               <a:ext uri="{FF2B5EF4-FFF2-40B4-BE49-F238E27FC236}">
-                <a16:creationId xmlns:a16="http://schemas.microsoft.com/office/drawing/2014/main" id="{9B87722E-DE3D-93DD-305E-988CCB27F62B}"/>
+                <a16:creationId xmlns:a16="http://schemas.microsoft.com/office/drawing/2014/main" id="{869DF8F9-13D9-6798-B1A2-695CA4DF57BB}"/>
               </a:ext>
             </a:extLst>
           </p:cNvPr>
@@ -2471,7 +2472,7 @@
           <p:cNvPr id="3" name="Marcador de texto vertical 2">
             <a:extLst>
               <a:ext uri="{FF2B5EF4-FFF2-40B4-BE49-F238E27FC236}">
-                <a16:creationId xmlns:a16="http://schemas.microsoft.com/office/drawing/2014/main" id="{52E4C930-243D-C30B-4FD9-28EE9B87F482}"/>
+                <a16:creationId xmlns:a16="http://schemas.microsoft.com/office/drawing/2014/main" id="{69F5849F-C6EC-F33B-0D9A-D55EB380E321}"/>
               </a:ext>
             </a:extLst>
           </p:cNvPr>
@@ -2528,7 +2529,7 @@
           <p:cNvPr id="4" name="Marcador de fecha 3">
             <a:extLst>
               <a:ext uri="{FF2B5EF4-FFF2-40B4-BE49-F238E27FC236}">
-                <a16:creationId xmlns:a16="http://schemas.microsoft.com/office/drawing/2014/main" id="{0D8DB55F-BE8D-72C9-A021-31475D03CCF4}"/>
+                <a16:creationId xmlns:a16="http://schemas.microsoft.com/office/drawing/2014/main" id="{9A2E284C-7022-8D04-25A2-E7D8DF2E34F5}"/>
               </a:ext>
             </a:extLst>
           </p:cNvPr>
@@ -2544,9 +2545,9 @@
           <a:bodyPr/>
           <a:lstStyle/>
           <a:p>
-            <a:fld id="{E2E78F0F-3CEE-4885-8154-F908A2044D66}" type="datetimeFigureOut">
+            <a:fld id="{3D6C1A94-3A56-4E71-9AEB-C8DB029FBD9F}" type="datetimeFigureOut">
               <a:rPr lang="es-ES" smtClean="0"/>
-              <a:t>04/06/2026</a:t>
+              <a:t>05/06/2026</a:t>
             </a:fld>
             <a:endParaRPr lang="es-ES"/>
           </a:p>
@@ -2557,7 +2558,7 @@
           <p:cNvPr id="5" name="Marcador de pie de página 4">
             <a:extLst>
               <a:ext uri="{FF2B5EF4-FFF2-40B4-BE49-F238E27FC236}">
-                <a16:creationId xmlns:a16="http://schemas.microsoft.com/office/drawing/2014/main" id="{B88FAE5B-20B2-508A-C009-FE1D0EEDAC9A}"/>
+                <a16:creationId xmlns:a16="http://schemas.microsoft.com/office/drawing/2014/main" id="{8BB895F1-FFA1-974B-B93A-AD115AB2E6EF}"/>
               </a:ext>
             </a:extLst>
           </p:cNvPr>
@@ -2582,7 +2583,7 @@
           <p:cNvPr id="6" name="Marcador de número de diapositiva 5">
             <a:extLst>
               <a:ext uri="{FF2B5EF4-FFF2-40B4-BE49-F238E27FC236}">
-                <a16:creationId xmlns:a16="http://schemas.microsoft.com/office/drawing/2014/main" id="{0B0D45D1-ADB4-98BC-E695-0749FF3367C3}"/>
+                <a16:creationId xmlns:a16="http://schemas.microsoft.com/office/drawing/2014/main" id="{5F4557D3-2EE5-854F-716A-77DD5DF5C12E}"/>
               </a:ext>
             </a:extLst>
           </p:cNvPr>
@@ -2598,7 +2599,7 @@
           <a:bodyPr/>
           <a:lstStyle/>
           <a:p>
-            <a:fld id="{46952519-79A0-4158-88E8-8A74092916AE}" type="slidenum">
+            <a:fld id="{2611C5D2-C4B0-4D8A-9AB8-ED270EC4FA17}" type="slidenum">
               <a:rPr lang="es-ES" smtClean="0"/>
               <a:t>‹Nº›</a:t>
             </a:fld>
@@ -2609,7 +2610,7 @@
     </p:spTree>
     <p:extLst>
       <p:ext uri="{BB962C8B-B14F-4D97-AF65-F5344CB8AC3E}">
-        <p14:creationId xmlns:p14="http://schemas.microsoft.com/office/powerpoint/2010/main" val="4211537904"/>
+        <p14:creationId xmlns:p14="http://schemas.microsoft.com/office/powerpoint/2010/main" val="1950355174"/>
       </p:ext>
     </p:extLst>
   </p:cSld>
@@ -2641,7 +2642,7 @@
           <p:cNvPr id="2" name="Título vertical 1">
             <a:extLst>
               <a:ext uri="{FF2B5EF4-FFF2-40B4-BE49-F238E27FC236}">
-                <a16:creationId xmlns:a16="http://schemas.microsoft.com/office/drawing/2014/main" id="{AECC615D-0F68-C301-800C-618D72BA3B8C}"/>
+                <a16:creationId xmlns:a16="http://schemas.microsoft.com/office/drawing/2014/main" id="{6D96A6B3-5A8F-A9D0-5A57-64E87282EFDC}"/>
               </a:ext>
             </a:extLst>
           </p:cNvPr>
@@ -2674,7 +2675,7 @@
           <p:cNvPr id="3" name="Marcador de texto vertical 2">
             <a:extLst>
               <a:ext uri="{FF2B5EF4-FFF2-40B4-BE49-F238E27FC236}">
-                <a16:creationId xmlns:a16="http://schemas.microsoft.com/office/drawing/2014/main" id="{B169D8D1-1646-AF6B-BA39-BCC2DE2C3556}"/>
+                <a16:creationId xmlns:a16="http://schemas.microsoft.com/office/drawing/2014/main" id="{4C8D587C-EADB-2F49-EC56-756B50D1B0D3}"/>
               </a:ext>
             </a:extLst>
           </p:cNvPr>
@@ -2736,7 +2737,7 @@
           <p:cNvPr id="4" name="Marcador de fecha 3">
             <a:extLst>
               <a:ext uri="{FF2B5EF4-FFF2-40B4-BE49-F238E27FC236}">
-                <a16:creationId xmlns:a16="http://schemas.microsoft.com/office/drawing/2014/main" id="{1875E4F4-5197-2569-4397-EBED4D9A3416}"/>
+                <a16:creationId xmlns:a16="http://schemas.microsoft.com/office/drawing/2014/main" id="{9FAC7317-1C4D-6A2C-3E0E-17127B8573E5}"/>
               </a:ext>
             </a:extLst>
           </p:cNvPr>
@@ -2752,9 +2753,9 @@
           <a:bodyPr/>
           <a:lstStyle/>
           <a:p>
-            <a:fld id="{E2E78F0F-3CEE-4885-8154-F908A2044D66}" type="datetimeFigureOut">
+            <a:fld id="{3D6C1A94-3A56-4E71-9AEB-C8DB029FBD9F}" type="datetimeFigureOut">
               <a:rPr lang="es-ES" smtClean="0"/>
-              <a:t>04/06/2026</a:t>
+              <a:t>05/06/2026</a:t>
             </a:fld>
             <a:endParaRPr lang="es-ES"/>
           </a:p>
@@ -2765,7 +2766,7 @@
           <p:cNvPr id="5" name="Marcador de pie de página 4">
             <a:extLst>
               <a:ext uri="{FF2B5EF4-FFF2-40B4-BE49-F238E27FC236}">
-                <a16:creationId xmlns:a16="http://schemas.microsoft.com/office/drawing/2014/main" id="{7943F178-470D-7AF8-678A-CD4E34483A47}"/>
+                <a16:creationId xmlns:a16="http://schemas.microsoft.com/office/drawing/2014/main" id="{E2B4610A-E381-C33A-2943-75E163D93A73}"/>
               </a:ext>
             </a:extLst>
           </p:cNvPr>
@@ -2790,7 +2791,7 @@
           <p:cNvPr id="6" name="Marcador de número de diapositiva 5">
             <a:extLst>
               <a:ext uri="{FF2B5EF4-FFF2-40B4-BE49-F238E27FC236}">
-                <a16:creationId xmlns:a16="http://schemas.microsoft.com/office/drawing/2014/main" id="{ED162692-C23F-D191-7BB0-0C6B4F3E4D6B}"/>
+                <a16:creationId xmlns:a16="http://schemas.microsoft.com/office/drawing/2014/main" id="{86A44F36-78F8-13C8-301B-DD8AE46B5C4A}"/>
               </a:ext>
             </a:extLst>
           </p:cNvPr>
@@ -2806,7 +2807,7 @@
           <a:bodyPr/>
           <a:lstStyle/>
           <a:p>
-            <a:fld id="{46952519-79A0-4158-88E8-8A74092916AE}" type="slidenum">
+            <a:fld id="{2611C5D2-C4B0-4D8A-9AB8-ED270EC4FA17}" type="slidenum">
               <a:rPr lang="es-ES" smtClean="0"/>
               <a:t>‹Nº›</a:t>
             </a:fld>
@@ -2817,7 +2818,7 @@
     </p:spTree>
     <p:extLst>
       <p:ext uri="{BB962C8B-B14F-4D97-AF65-F5344CB8AC3E}">
-        <p14:creationId xmlns:p14="http://schemas.microsoft.com/office/powerpoint/2010/main" val="1983635389"/>
+        <p14:creationId xmlns:p14="http://schemas.microsoft.com/office/powerpoint/2010/main" val="1625825761"/>
       </p:ext>
     </p:extLst>
   </p:cSld>
@@ -2849,7 +2850,7 @@
           <p:cNvPr id="2" name="Título 1">
             <a:extLst>
               <a:ext uri="{FF2B5EF4-FFF2-40B4-BE49-F238E27FC236}">
-                <a16:creationId xmlns:a16="http://schemas.microsoft.com/office/drawing/2014/main" id="{3C43EFF3-2208-B0F4-F888-B4BFB0EB634F}"/>
+                <a16:creationId xmlns:a16="http://schemas.microsoft.com/office/drawing/2014/main" id="{2A510919-1DB0-211A-E319-843A6C0FEC1D}"/>
               </a:ext>
             </a:extLst>
           </p:cNvPr>
@@ -2877,7 +2878,7 @@
           <p:cNvPr id="3" name="Marcador de contenido 2">
             <a:extLst>
               <a:ext uri="{FF2B5EF4-FFF2-40B4-BE49-F238E27FC236}">
-                <a16:creationId xmlns:a16="http://schemas.microsoft.com/office/drawing/2014/main" id="{03E54055-C46C-7830-17EC-638EDDF01D81}"/>
+                <a16:creationId xmlns:a16="http://schemas.microsoft.com/office/drawing/2014/main" id="{B3A19D80-EFA8-F54A-D43D-E1BE828E46F4}"/>
               </a:ext>
             </a:extLst>
           </p:cNvPr>
@@ -2934,7 +2935,7 @@
           <p:cNvPr id="4" name="Marcador de fecha 3">
             <a:extLst>
               <a:ext uri="{FF2B5EF4-FFF2-40B4-BE49-F238E27FC236}">
-                <a16:creationId xmlns:a16="http://schemas.microsoft.com/office/drawing/2014/main" id="{AA0298D9-986A-400B-52EA-7C3160091503}"/>
+                <a16:creationId xmlns:a16="http://schemas.microsoft.com/office/drawing/2014/main" id="{5915F52A-90A3-FD84-C44D-EAA26AAFEB4C}"/>
               </a:ext>
             </a:extLst>
           </p:cNvPr>
@@ -2950,9 +2951,9 @@
           <a:bodyPr/>
           <a:lstStyle/>
           <a:p>
-            <a:fld id="{E2E78F0F-3CEE-4885-8154-F908A2044D66}" type="datetimeFigureOut">
+            <a:fld id="{3D6C1A94-3A56-4E71-9AEB-C8DB029FBD9F}" type="datetimeFigureOut">
               <a:rPr lang="es-ES" smtClean="0"/>
-              <a:t>04/06/2026</a:t>
+              <a:t>05/06/2026</a:t>
             </a:fld>
             <a:endParaRPr lang="es-ES"/>
           </a:p>
@@ -2963,7 +2964,7 @@
           <p:cNvPr id="5" name="Marcador de pie de página 4">
             <a:extLst>
               <a:ext uri="{FF2B5EF4-FFF2-40B4-BE49-F238E27FC236}">
-                <a16:creationId xmlns:a16="http://schemas.microsoft.com/office/drawing/2014/main" id="{CB7582AF-E854-BF35-6ED9-13FDE1E55E3E}"/>
+                <a16:creationId xmlns:a16="http://schemas.microsoft.com/office/drawing/2014/main" id="{BD423349-A6EF-D2CC-B5BB-26B05D6C1206}"/>
               </a:ext>
             </a:extLst>
           </p:cNvPr>
@@ -2988,7 +2989,7 @@
           <p:cNvPr id="6" name="Marcador de número de diapositiva 5">
             <a:extLst>
               <a:ext uri="{FF2B5EF4-FFF2-40B4-BE49-F238E27FC236}">
-                <a16:creationId xmlns:a16="http://schemas.microsoft.com/office/drawing/2014/main" id="{5EEE6B73-214F-4C3E-DD6B-A9B8041D0CD0}"/>
+                <a16:creationId xmlns:a16="http://schemas.microsoft.com/office/drawing/2014/main" id="{0B405928-4BA7-4E4B-5011-FF6727D738E7}"/>
               </a:ext>
             </a:extLst>
           </p:cNvPr>
@@ -3004,7 +3005,7 @@
           <a:bodyPr/>
           <a:lstStyle/>
           <a:p>
-            <a:fld id="{46952519-79A0-4158-88E8-8A74092916AE}" type="slidenum">
+            <a:fld id="{2611C5D2-C4B0-4D8A-9AB8-ED270EC4FA17}" type="slidenum">
               <a:rPr lang="es-ES" smtClean="0"/>
               <a:t>‹Nº›</a:t>
             </a:fld>
@@ -3015,7 +3016,7 @@
     </p:spTree>
     <p:extLst>
       <p:ext uri="{BB962C8B-B14F-4D97-AF65-F5344CB8AC3E}">
-        <p14:creationId xmlns:p14="http://schemas.microsoft.com/office/powerpoint/2010/main" val="2648825307"/>
+        <p14:creationId xmlns:p14="http://schemas.microsoft.com/office/powerpoint/2010/main" val="121301234"/>
       </p:ext>
     </p:extLst>
   </p:cSld>
@@ -3047,7 +3048,7 @@
           <p:cNvPr id="2" name="Título 1">
             <a:extLst>
               <a:ext uri="{FF2B5EF4-FFF2-40B4-BE49-F238E27FC236}">
-                <a16:creationId xmlns:a16="http://schemas.microsoft.com/office/drawing/2014/main" id="{82600662-4170-C665-DB06-459359CC2E0D}"/>
+                <a16:creationId xmlns:a16="http://schemas.microsoft.com/office/drawing/2014/main" id="{91946C0F-A254-91AF-793B-D425A708A7CA}"/>
               </a:ext>
             </a:extLst>
           </p:cNvPr>
@@ -3084,7 +3085,7 @@
           <p:cNvPr id="3" name="Marcador de texto 2">
             <a:extLst>
               <a:ext uri="{FF2B5EF4-FFF2-40B4-BE49-F238E27FC236}">
-                <a16:creationId xmlns:a16="http://schemas.microsoft.com/office/drawing/2014/main" id="{34166AF3-60A3-05C2-A67F-6AFFDC1D0DD5}"/>
+                <a16:creationId xmlns:a16="http://schemas.microsoft.com/office/drawing/2014/main" id="{75B55A87-1F86-7A34-3744-2ED1486A1F27}"/>
               </a:ext>
             </a:extLst>
           </p:cNvPr>
@@ -3209,7 +3210,7 @@
           <p:cNvPr id="4" name="Marcador de fecha 3">
             <a:extLst>
               <a:ext uri="{FF2B5EF4-FFF2-40B4-BE49-F238E27FC236}">
-                <a16:creationId xmlns:a16="http://schemas.microsoft.com/office/drawing/2014/main" id="{79B32DD2-B709-32DA-D2BD-C8E3BA72D344}"/>
+                <a16:creationId xmlns:a16="http://schemas.microsoft.com/office/drawing/2014/main" id="{DC7E3555-210E-1FAE-D60C-6766B9A0B549}"/>
               </a:ext>
             </a:extLst>
           </p:cNvPr>
@@ -3225,9 +3226,9 @@
           <a:bodyPr/>
           <a:lstStyle/>
           <a:p>
-            <a:fld id="{E2E78F0F-3CEE-4885-8154-F908A2044D66}" type="datetimeFigureOut">
+            <a:fld id="{3D6C1A94-3A56-4E71-9AEB-C8DB029FBD9F}" type="datetimeFigureOut">
               <a:rPr lang="es-ES" smtClean="0"/>
-              <a:t>04/06/2026</a:t>
+              <a:t>05/06/2026</a:t>
             </a:fld>
             <a:endParaRPr lang="es-ES"/>
           </a:p>
@@ -3238,7 +3239,7 @@
           <p:cNvPr id="5" name="Marcador de pie de página 4">
             <a:extLst>
               <a:ext uri="{FF2B5EF4-FFF2-40B4-BE49-F238E27FC236}">
-                <a16:creationId xmlns:a16="http://schemas.microsoft.com/office/drawing/2014/main" id="{6AAD1399-A6BC-9A87-FD24-194BE9AA3A58}"/>
+                <a16:creationId xmlns:a16="http://schemas.microsoft.com/office/drawing/2014/main" id="{8B86FBF2-DD54-111F-E34C-C441EEBF2251}"/>
               </a:ext>
             </a:extLst>
           </p:cNvPr>
@@ -3263,7 +3264,7 @@
           <p:cNvPr id="6" name="Marcador de número de diapositiva 5">
             <a:extLst>
               <a:ext uri="{FF2B5EF4-FFF2-40B4-BE49-F238E27FC236}">
-                <a16:creationId xmlns:a16="http://schemas.microsoft.com/office/drawing/2014/main" id="{09E0E06C-E650-4ACD-18CA-DA6363ECDAED}"/>
+                <a16:creationId xmlns:a16="http://schemas.microsoft.com/office/drawing/2014/main" id="{9820B481-7E5D-9A9A-A9EC-7FE4FB017E9C}"/>
               </a:ext>
             </a:extLst>
           </p:cNvPr>
@@ -3279,7 +3280,7 @@
           <a:bodyPr/>
           <a:lstStyle/>
           <a:p>
-            <a:fld id="{46952519-79A0-4158-88E8-8A74092916AE}" type="slidenum">
+            <a:fld id="{2611C5D2-C4B0-4D8A-9AB8-ED270EC4FA17}" type="slidenum">
               <a:rPr lang="es-ES" smtClean="0"/>
               <a:t>‹Nº›</a:t>
             </a:fld>
@@ -3290,7 +3291,7 @@
     </p:spTree>
     <p:extLst>
       <p:ext uri="{BB962C8B-B14F-4D97-AF65-F5344CB8AC3E}">
-        <p14:creationId xmlns:p14="http://schemas.microsoft.com/office/powerpoint/2010/main" val="3597848054"/>
+        <p14:creationId xmlns:p14="http://schemas.microsoft.com/office/powerpoint/2010/main" val="2514670681"/>
       </p:ext>
     </p:extLst>
   </p:cSld>
@@ -3322,7 +3323,7 @@
           <p:cNvPr id="2" name="Título 1">
             <a:extLst>
               <a:ext uri="{FF2B5EF4-FFF2-40B4-BE49-F238E27FC236}">
-                <a16:creationId xmlns:a16="http://schemas.microsoft.com/office/drawing/2014/main" id="{C091E38A-B22F-FE8F-9196-E213105FAE2C}"/>
+                <a16:creationId xmlns:a16="http://schemas.microsoft.com/office/drawing/2014/main" id="{B940571E-6C9B-D46E-2B86-51B3FE7D863D}"/>
               </a:ext>
             </a:extLst>
           </p:cNvPr>
@@ -3350,7 +3351,7 @@
           <p:cNvPr id="3" name="Marcador de contenido 2">
             <a:extLst>
               <a:ext uri="{FF2B5EF4-FFF2-40B4-BE49-F238E27FC236}">
-                <a16:creationId xmlns:a16="http://schemas.microsoft.com/office/drawing/2014/main" id="{C6EBF453-E43C-0A02-4091-6C7015F3B9C8}"/>
+                <a16:creationId xmlns:a16="http://schemas.microsoft.com/office/drawing/2014/main" id="{7976DA9B-F741-0AD5-4F7D-75BC7AD1C3DA}"/>
               </a:ext>
             </a:extLst>
           </p:cNvPr>
@@ -3412,7 +3413,7 @@
           <p:cNvPr id="4" name="Marcador de contenido 3">
             <a:extLst>
               <a:ext uri="{FF2B5EF4-FFF2-40B4-BE49-F238E27FC236}">
-                <a16:creationId xmlns:a16="http://schemas.microsoft.com/office/drawing/2014/main" id="{D84394B1-538A-B357-5C7D-854245D3790B}"/>
+                <a16:creationId xmlns:a16="http://schemas.microsoft.com/office/drawing/2014/main" id="{CDA2B0B2-A224-4BFD-9148-E5DED82CDDFD}"/>
               </a:ext>
             </a:extLst>
           </p:cNvPr>
@@ -3474,7 +3475,7 @@
           <p:cNvPr id="5" name="Marcador de fecha 4">
             <a:extLst>
               <a:ext uri="{FF2B5EF4-FFF2-40B4-BE49-F238E27FC236}">
-                <a16:creationId xmlns:a16="http://schemas.microsoft.com/office/drawing/2014/main" id="{053AF158-81A4-ABF2-07DD-AF32BFFEA339}"/>
+                <a16:creationId xmlns:a16="http://schemas.microsoft.com/office/drawing/2014/main" id="{6B9D05DD-3615-0246-B80C-14CA14C03F50}"/>
               </a:ext>
             </a:extLst>
           </p:cNvPr>
@@ -3490,9 +3491,9 @@
           <a:bodyPr/>
           <a:lstStyle/>
           <a:p>
-            <a:fld id="{E2E78F0F-3CEE-4885-8154-F908A2044D66}" type="datetimeFigureOut">
+            <a:fld id="{3D6C1A94-3A56-4E71-9AEB-C8DB029FBD9F}" type="datetimeFigureOut">
               <a:rPr lang="es-ES" smtClean="0"/>
-              <a:t>04/06/2026</a:t>
+              <a:t>05/06/2026</a:t>
             </a:fld>
             <a:endParaRPr lang="es-ES"/>
           </a:p>
@@ -3503,7 +3504,7 @@
           <p:cNvPr id="6" name="Marcador de pie de página 5">
             <a:extLst>
               <a:ext uri="{FF2B5EF4-FFF2-40B4-BE49-F238E27FC236}">
-                <a16:creationId xmlns:a16="http://schemas.microsoft.com/office/drawing/2014/main" id="{3EF9A877-E9AB-59C6-23B3-6C02D30B1008}"/>
+                <a16:creationId xmlns:a16="http://schemas.microsoft.com/office/drawing/2014/main" id="{A194695E-F1AC-7766-1056-CA6C9344ACB8}"/>
               </a:ext>
             </a:extLst>
           </p:cNvPr>
@@ -3528,7 +3529,7 @@
           <p:cNvPr id="7" name="Marcador de número de diapositiva 6">
             <a:extLst>
               <a:ext uri="{FF2B5EF4-FFF2-40B4-BE49-F238E27FC236}">
-                <a16:creationId xmlns:a16="http://schemas.microsoft.com/office/drawing/2014/main" id="{37142DA6-7B1D-6C8A-937D-4C6456E20ADD}"/>
+                <a16:creationId xmlns:a16="http://schemas.microsoft.com/office/drawing/2014/main" id="{4F1CD08B-F325-1B41-2366-82013EAB5BE4}"/>
               </a:ext>
             </a:extLst>
           </p:cNvPr>
@@ -3544,7 +3545,7 @@
           <a:bodyPr/>
           <a:lstStyle/>
           <a:p>
-            <a:fld id="{46952519-79A0-4158-88E8-8A74092916AE}" type="slidenum">
+            <a:fld id="{2611C5D2-C4B0-4D8A-9AB8-ED270EC4FA17}" type="slidenum">
               <a:rPr lang="es-ES" smtClean="0"/>
               <a:t>‹Nº›</a:t>
             </a:fld>
@@ -3555,7 +3556,7 @@
     </p:spTree>
     <p:extLst>
       <p:ext uri="{BB962C8B-B14F-4D97-AF65-F5344CB8AC3E}">
-        <p14:creationId xmlns:p14="http://schemas.microsoft.com/office/powerpoint/2010/main" val="4097542271"/>
+        <p14:creationId xmlns:p14="http://schemas.microsoft.com/office/powerpoint/2010/main" val="761670945"/>
       </p:ext>
     </p:extLst>
   </p:cSld>
@@ -3587,7 +3588,7 @@
           <p:cNvPr id="2" name="Título 1">
             <a:extLst>
               <a:ext uri="{FF2B5EF4-FFF2-40B4-BE49-F238E27FC236}">
-                <a16:creationId xmlns:a16="http://schemas.microsoft.com/office/drawing/2014/main" id="{40028658-5B67-54CA-9D16-337A6BF0447A}"/>
+                <a16:creationId xmlns:a16="http://schemas.microsoft.com/office/drawing/2014/main" id="{49C66A95-9CE5-2D04-4A01-D49B9737B483}"/>
               </a:ext>
             </a:extLst>
           </p:cNvPr>
@@ -3620,7 +3621,7 @@
           <p:cNvPr id="3" name="Marcador de texto 2">
             <a:extLst>
               <a:ext uri="{FF2B5EF4-FFF2-40B4-BE49-F238E27FC236}">
-                <a16:creationId xmlns:a16="http://schemas.microsoft.com/office/drawing/2014/main" id="{C465C81D-1ED4-C042-4601-4340ECB3F0FE}"/>
+                <a16:creationId xmlns:a16="http://schemas.microsoft.com/office/drawing/2014/main" id="{C0E4D53F-123D-934E-1A3C-054189665495}"/>
               </a:ext>
             </a:extLst>
           </p:cNvPr>
@@ -3691,7 +3692,7 @@
           <p:cNvPr id="4" name="Marcador de contenido 3">
             <a:extLst>
               <a:ext uri="{FF2B5EF4-FFF2-40B4-BE49-F238E27FC236}">
-                <a16:creationId xmlns:a16="http://schemas.microsoft.com/office/drawing/2014/main" id="{993A6344-F4A7-D7EF-9C4F-E25595ED966F}"/>
+                <a16:creationId xmlns:a16="http://schemas.microsoft.com/office/drawing/2014/main" id="{470FC775-A96F-EB95-5C2D-7F1A44C1A1FE}"/>
               </a:ext>
             </a:extLst>
           </p:cNvPr>
@@ -3753,7 +3754,7 @@
           <p:cNvPr id="5" name="Marcador de texto 4">
             <a:extLst>
               <a:ext uri="{FF2B5EF4-FFF2-40B4-BE49-F238E27FC236}">
-                <a16:creationId xmlns:a16="http://schemas.microsoft.com/office/drawing/2014/main" id="{81F4BA7A-034E-68E1-7CFA-280FA4E742F0}"/>
+                <a16:creationId xmlns:a16="http://schemas.microsoft.com/office/drawing/2014/main" id="{B8B3AF6F-A543-745A-D64F-39244958B67B}"/>
               </a:ext>
             </a:extLst>
           </p:cNvPr>
@@ -3824,7 +3825,7 @@
           <p:cNvPr id="6" name="Marcador de contenido 5">
             <a:extLst>
               <a:ext uri="{FF2B5EF4-FFF2-40B4-BE49-F238E27FC236}">
-                <a16:creationId xmlns:a16="http://schemas.microsoft.com/office/drawing/2014/main" id="{6C91CA2C-3974-A4FA-A2C2-491671D417D0}"/>
+                <a16:creationId xmlns:a16="http://schemas.microsoft.com/office/drawing/2014/main" id="{B87436A8-AB2C-C6E5-A7EA-5F6E92753977}"/>
               </a:ext>
             </a:extLst>
           </p:cNvPr>
@@ -3886,7 +3887,7 @@
           <p:cNvPr id="7" name="Marcador de fecha 6">
             <a:extLst>
               <a:ext uri="{FF2B5EF4-FFF2-40B4-BE49-F238E27FC236}">
-                <a16:creationId xmlns:a16="http://schemas.microsoft.com/office/drawing/2014/main" id="{ECBCD274-D751-F6B5-415C-4DB4215F4E64}"/>
+                <a16:creationId xmlns:a16="http://schemas.microsoft.com/office/drawing/2014/main" id="{88F00297-9D9C-8852-8861-C48B1B2B7D82}"/>
               </a:ext>
             </a:extLst>
           </p:cNvPr>
@@ -3902,9 +3903,9 @@
           <a:bodyPr/>
           <a:lstStyle/>
           <a:p>
-            <a:fld id="{E2E78F0F-3CEE-4885-8154-F908A2044D66}" type="datetimeFigureOut">
+            <a:fld id="{3D6C1A94-3A56-4E71-9AEB-C8DB029FBD9F}" type="datetimeFigureOut">
               <a:rPr lang="es-ES" smtClean="0"/>
-              <a:t>04/06/2026</a:t>
+              <a:t>05/06/2026</a:t>
             </a:fld>
             <a:endParaRPr lang="es-ES"/>
           </a:p>
@@ -3915,7 +3916,7 @@
           <p:cNvPr id="8" name="Marcador de pie de página 7">
             <a:extLst>
               <a:ext uri="{FF2B5EF4-FFF2-40B4-BE49-F238E27FC236}">
-                <a16:creationId xmlns:a16="http://schemas.microsoft.com/office/drawing/2014/main" id="{23F6C764-59B3-F354-F39C-0B698E06CDD6}"/>
+                <a16:creationId xmlns:a16="http://schemas.microsoft.com/office/drawing/2014/main" id="{31AD8383-C3BC-49E8-2C81-0AA317C266EB}"/>
               </a:ext>
             </a:extLst>
           </p:cNvPr>
@@ -3940,7 +3941,7 @@
           <p:cNvPr id="9" name="Marcador de número de diapositiva 8">
             <a:extLst>
               <a:ext uri="{FF2B5EF4-FFF2-40B4-BE49-F238E27FC236}">
-                <a16:creationId xmlns:a16="http://schemas.microsoft.com/office/drawing/2014/main" id="{CE782C0D-E263-D0BA-CF46-A153B3B34B4E}"/>
+                <a16:creationId xmlns:a16="http://schemas.microsoft.com/office/drawing/2014/main" id="{B5E8FC84-F2A5-7136-1549-FA0049F83074}"/>
               </a:ext>
             </a:extLst>
           </p:cNvPr>
@@ -3956,7 +3957,7 @@
           <a:bodyPr/>
           <a:lstStyle/>
           <a:p>
-            <a:fld id="{46952519-79A0-4158-88E8-8A74092916AE}" type="slidenum">
+            <a:fld id="{2611C5D2-C4B0-4D8A-9AB8-ED270EC4FA17}" type="slidenum">
               <a:rPr lang="es-ES" smtClean="0"/>
               <a:t>‹Nº›</a:t>
             </a:fld>
@@ -3967,7 +3968,7 @@
     </p:spTree>
     <p:extLst>
       <p:ext uri="{BB962C8B-B14F-4D97-AF65-F5344CB8AC3E}">
-        <p14:creationId xmlns:p14="http://schemas.microsoft.com/office/powerpoint/2010/main" val="2707746469"/>
+        <p14:creationId xmlns:p14="http://schemas.microsoft.com/office/powerpoint/2010/main" val="3397446774"/>
       </p:ext>
     </p:extLst>
   </p:cSld>
@@ -3999,7 +4000,7 @@
           <p:cNvPr id="2" name="Título 1">
             <a:extLst>
               <a:ext uri="{FF2B5EF4-FFF2-40B4-BE49-F238E27FC236}">
-                <a16:creationId xmlns:a16="http://schemas.microsoft.com/office/drawing/2014/main" id="{E183BD55-2E13-228A-0225-943327F6E16A}"/>
+                <a16:creationId xmlns:a16="http://schemas.microsoft.com/office/drawing/2014/main" id="{357D07F9-EF96-2B7D-2851-570FDAEEA5E9}"/>
               </a:ext>
             </a:extLst>
           </p:cNvPr>
@@ -4027,7 +4028,7 @@
           <p:cNvPr id="3" name="Marcador de fecha 2">
             <a:extLst>
               <a:ext uri="{FF2B5EF4-FFF2-40B4-BE49-F238E27FC236}">
-                <a16:creationId xmlns:a16="http://schemas.microsoft.com/office/drawing/2014/main" id="{9CAB8DB0-2F1F-1FE4-64A1-D074513EE62C}"/>
+                <a16:creationId xmlns:a16="http://schemas.microsoft.com/office/drawing/2014/main" id="{BF08E94B-6B67-A831-B820-4B74D47FBDBF}"/>
               </a:ext>
             </a:extLst>
           </p:cNvPr>
@@ -4043,9 +4044,9 @@
           <a:bodyPr/>
           <a:lstStyle/>
           <a:p>
-            <a:fld id="{E2E78F0F-3CEE-4885-8154-F908A2044D66}" type="datetimeFigureOut">
+            <a:fld id="{3D6C1A94-3A56-4E71-9AEB-C8DB029FBD9F}" type="datetimeFigureOut">
               <a:rPr lang="es-ES" smtClean="0"/>
-              <a:t>04/06/2026</a:t>
+              <a:t>05/06/2026</a:t>
             </a:fld>
             <a:endParaRPr lang="es-ES"/>
           </a:p>
@@ -4056,7 +4057,7 @@
           <p:cNvPr id="4" name="Marcador de pie de página 3">
             <a:extLst>
               <a:ext uri="{FF2B5EF4-FFF2-40B4-BE49-F238E27FC236}">
-                <a16:creationId xmlns:a16="http://schemas.microsoft.com/office/drawing/2014/main" id="{CFC9F4EA-37BC-C944-26B4-6A337A988C0A}"/>
+                <a16:creationId xmlns:a16="http://schemas.microsoft.com/office/drawing/2014/main" id="{E53CEB2F-56BF-D014-3562-CF71A7B94598}"/>
               </a:ext>
             </a:extLst>
           </p:cNvPr>
@@ -4081,7 +4082,7 @@
           <p:cNvPr id="5" name="Marcador de número de diapositiva 4">
             <a:extLst>
               <a:ext uri="{FF2B5EF4-FFF2-40B4-BE49-F238E27FC236}">
-                <a16:creationId xmlns:a16="http://schemas.microsoft.com/office/drawing/2014/main" id="{778121AD-8A6E-31E7-7272-C41D8C9050CF}"/>
+                <a16:creationId xmlns:a16="http://schemas.microsoft.com/office/drawing/2014/main" id="{0E56849F-0694-E406-D22C-73C4209DA666}"/>
               </a:ext>
             </a:extLst>
           </p:cNvPr>
@@ -4097,7 +4098,7 @@
           <a:bodyPr/>
           <a:lstStyle/>
           <a:p>
-            <a:fld id="{46952519-79A0-4158-88E8-8A74092916AE}" type="slidenum">
+            <a:fld id="{2611C5D2-C4B0-4D8A-9AB8-ED270EC4FA17}" type="slidenum">
               <a:rPr lang="es-ES" smtClean="0"/>
               <a:t>‹Nº›</a:t>
             </a:fld>
@@ -4108,7 +4109,7 @@
     </p:spTree>
     <p:extLst>
       <p:ext uri="{BB962C8B-B14F-4D97-AF65-F5344CB8AC3E}">
-        <p14:creationId xmlns:p14="http://schemas.microsoft.com/office/powerpoint/2010/main" val="257178994"/>
+        <p14:creationId xmlns:p14="http://schemas.microsoft.com/office/powerpoint/2010/main" val="2829739566"/>
       </p:ext>
     </p:extLst>
   </p:cSld>
@@ -4140,7 +4141,7 @@
           <p:cNvPr id="2" name="Marcador de fecha 1">
             <a:extLst>
               <a:ext uri="{FF2B5EF4-FFF2-40B4-BE49-F238E27FC236}">
-                <a16:creationId xmlns:a16="http://schemas.microsoft.com/office/drawing/2014/main" id="{58A47969-3E1B-ED92-16CC-CE89B8509379}"/>
+                <a16:creationId xmlns:a16="http://schemas.microsoft.com/office/drawing/2014/main" id="{D4B4DB9A-2EA8-1600-4216-E8F17A5D2486}"/>
               </a:ext>
             </a:extLst>
           </p:cNvPr>
@@ -4156,9 +4157,9 @@
           <a:bodyPr/>
           <a:lstStyle/>
           <a:p>
-            <a:fld id="{E2E78F0F-3CEE-4885-8154-F908A2044D66}" type="datetimeFigureOut">
+            <a:fld id="{3D6C1A94-3A56-4E71-9AEB-C8DB029FBD9F}" type="datetimeFigureOut">
               <a:rPr lang="es-ES" smtClean="0"/>
-              <a:t>04/06/2026</a:t>
+              <a:t>05/06/2026</a:t>
             </a:fld>
             <a:endParaRPr lang="es-ES"/>
           </a:p>
@@ -4169,7 +4170,7 @@
           <p:cNvPr id="3" name="Marcador de pie de página 2">
             <a:extLst>
               <a:ext uri="{FF2B5EF4-FFF2-40B4-BE49-F238E27FC236}">
-                <a16:creationId xmlns:a16="http://schemas.microsoft.com/office/drawing/2014/main" id="{3BB28542-D8FC-A36E-EF27-65A8B9AE7E41}"/>
+                <a16:creationId xmlns:a16="http://schemas.microsoft.com/office/drawing/2014/main" id="{E7E1201A-53BA-C80B-EFCC-F604FA752FA2}"/>
               </a:ext>
             </a:extLst>
           </p:cNvPr>
@@ -4194,7 +4195,7 @@
           <p:cNvPr id="4" name="Marcador de número de diapositiva 3">
             <a:extLst>
               <a:ext uri="{FF2B5EF4-FFF2-40B4-BE49-F238E27FC236}">
-                <a16:creationId xmlns:a16="http://schemas.microsoft.com/office/drawing/2014/main" id="{A2717270-5F7C-D34B-6960-141579127B50}"/>
+                <a16:creationId xmlns:a16="http://schemas.microsoft.com/office/drawing/2014/main" id="{4598ED7E-218C-99F6-E055-BCFDAEE29A3C}"/>
               </a:ext>
             </a:extLst>
           </p:cNvPr>
@@ -4210,7 +4211,7 @@
           <a:bodyPr/>
           <a:lstStyle/>
           <a:p>
-            <a:fld id="{46952519-79A0-4158-88E8-8A74092916AE}" type="slidenum">
+            <a:fld id="{2611C5D2-C4B0-4D8A-9AB8-ED270EC4FA17}" type="slidenum">
               <a:rPr lang="es-ES" smtClean="0"/>
               <a:t>‹Nº›</a:t>
             </a:fld>
@@ -4221,7 +4222,7 @@
     </p:spTree>
     <p:extLst>
       <p:ext uri="{BB962C8B-B14F-4D97-AF65-F5344CB8AC3E}">
-        <p14:creationId xmlns:p14="http://schemas.microsoft.com/office/powerpoint/2010/main" val="3366193428"/>
+        <p14:creationId xmlns:p14="http://schemas.microsoft.com/office/powerpoint/2010/main" val="3912801742"/>
       </p:ext>
     </p:extLst>
   </p:cSld>
@@ -4253,7 +4254,7 @@
           <p:cNvPr id="2" name="Título 1">
             <a:extLst>
               <a:ext uri="{FF2B5EF4-FFF2-40B4-BE49-F238E27FC236}">
-                <a16:creationId xmlns:a16="http://schemas.microsoft.com/office/drawing/2014/main" id="{E341281F-CD36-D659-86DE-106EE7ED6CCE}"/>
+                <a16:creationId xmlns:a16="http://schemas.microsoft.com/office/drawing/2014/main" id="{F6EE81E0-A3CF-B9AB-6B94-3BE53F784E09}"/>
               </a:ext>
             </a:extLst>
           </p:cNvPr>
@@ -4290,7 +4291,7 @@
           <p:cNvPr id="3" name="Marcador de contenido 2">
             <a:extLst>
               <a:ext uri="{FF2B5EF4-FFF2-40B4-BE49-F238E27FC236}">
-                <a16:creationId xmlns:a16="http://schemas.microsoft.com/office/drawing/2014/main" id="{C224142D-642C-072C-D919-0568B512F890}"/>
+                <a16:creationId xmlns:a16="http://schemas.microsoft.com/office/drawing/2014/main" id="{9BD10B93-7197-B86D-9AB3-EBD92E8E9A5E}"/>
               </a:ext>
             </a:extLst>
           </p:cNvPr>
@@ -4380,7 +4381,7 @@
           <p:cNvPr id="4" name="Marcador de texto 3">
             <a:extLst>
               <a:ext uri="{FF2B5EF4-FFF2-40B4-BE49-F238E27FC236}">
-                <a16:creationId xmlns:a16="http://schemas.microsoft.com/office/drawing/2014/main" id="{410E3231-6562-4A3D-1446-E510FEB09834}"/>
+                <a16:creationId xmlns:a16="http://schemas.microsoft.com/office/drawing/2014/main" id="{8E1B01C2-7EE5-B34D-336F-FA3BF6A11D59}"/>
               </a:ext>
             </a:extLst>
           </p:cNvPr>
@@ -4451,7 +4452,7 @@
           <p:cNvPr id="5" name="Marcador de fecha 4">
             <a:extLst>
               <a:ext uri="{FF2B5EF4-FFF2-40B4-BE49-F238E27FC236}">
-                <a16:creationId xmlns:a16="http://schemas.microsoft.com/office/drawing/2014/main" id="{B58E5A2C-8BE0-6D00-FC39-989C48DC0809}"/>
+                <a16:creationId xmlns:a16="http://schemas.microsoft.com/office/drawing/2014/main" id="{D6F2D7BB-C48A-3B70-80E2-6AF5003F810D}"/>
               </a:ext>
             </a:extLst>
           </p:cNvPr>
@@ -4467,9 +4468,9 @@
           <a:bodyPr/>
           <a:lstStyle/>
           <a:p>
-            <a:fld id="{E2E78F0F-3CEE-4885-8154-F908A2044D66}" type="datetimeFigureOut">
+            <a:fld id="{3D6C1A94-3A56-4E71-9AEB-C8DB029FBD9F}" type="datetimeFigureOut">
               <a:rPr lang="es-ES" smtClean="0"/>
-              <a:t>04/06/2026</a:t>
+              <a:t>05/06/2026</a:t>
             </a:fld>
             <a:endParaRPr lang="es-ES"/>
           </a:p>
@@ -4480,7 +4481,7 @@
           <p:cNvPr id="6" name="Marcador de pie de página 5">
             <a:extLst>
               <a:ext uri="{FF2B5EF4-FFF2-40B4-BE49-F238E27FC236}">
-                <a16:creationId xmlns:a16="http://schemas.microsoft.com/office/drawing/2014/main" id="{08CC6C97-AE09-1F9D-6F87-BF9F63F88C87}"/>
+                <a16:creationId xmlns:a16="http://schemas.microsoft.com/office/drawing/2014/main" id="{E807030A-BFEF-C8D9-1571-6F3F18374698}"/>
               </a:ext>
             </a:extLst>
           </p:cNvPr>
@@ -4505,7 +4506,7 @@
           <p:cNvPr id="7" name="Marcador de número de diapositiva 6">
             <a:extLst>
               <a:ext uri="{FF2B5EF4-FFF2-40B4-BE49-F238E27FC236}">
-                <a16:creationId xmlns:a16="http://schemas.microsoft.com/office/drawing/2014/main" id="{30F77902-79A8-E248-30B6-A2643EE7E64C}"/>
+                <a16:creationId xmlns:a16="http://schemas.microsoft.com/office/drawing/2014/main" id="{C9AF142C-CE0E-65B6-8781-E739C9F9A4E1}"/>
               </a:ext>
             </a:extLst>
           </p:cNvPr>
@@ -4521,7 +4522,7 @@
           <a:bodyPr/>
           <a:lstStyle/>
           <a:p>
-            <a:fld id="{46952519-79A0-4158-88E8-8A74092916AE}" type="slidenum">
+            <a:fld id="{2611C5D2-C4B0-4D8A-9AB8-ED270EC4FA17}" type="slidenum">
               <a:rPr lang="es-ES" smtClean="0"/>
               <a:t>‹Nº›</a:t>
             </a:fld>
@@ -4532,7 +4533,7 @@
     </p:spTree>
     <p:extLst>
       <p:ext uri="{BB962C8B-B14F-4D97-AF65-F5344CB8AC3E}">
-        <p14:creationId xmlns:p14="http://schemas.microsoft.com/office/powerpoint/2010/main" val="3290236475"/>
+        <p14:creationId xmlns:p14="http://schemas.microsoft.com/office/powerpoint/2010/main" val="1169470913"/>
       </p:ext>
     </p:extLst>
   </p:cSld>
@@ -4564,7 +4565,7 @@
           <p:cNvPr id="2" name="Título 1">
             <a:extLst>
               <a:ext uri="{FF2B5EF4-FFF2-40B4-BE49-F238E27FC236}">
-                <a16:creationId xmlns:a16="http://schemas.microsoft.com/office/drawing/2014/main" id="{91C506FB-5CF0-C432-039B-B97BB2DF1F80}"/>
+                <a16:creationId xmlns:a16="http://schemas.microsoft.com/office/drawing/2014/main" id="{63DD1150-B718-9881-2449-A18B74A2FBEB}"/>
               </a:ext>
             </a:extLst>
           </p:cNvPr>
@@ -4601,7 +4602,7 @@
           <p:cNvPr id="3" name="Marcador de posición de imagen 2">
             <a:extLst>
               <a:ext uri="{FF2B5EF4-FFF2-40B4-BE49-F238E27FC236}">
-                <a16:creationId xmlns:a16="http://schemas.microsoft.com/office/drawing/2014/main" id="{89C27F13-5815-6B9E-9445-F23A1CA94996}"/>
+                <a16:creationId xmlns:a16="http://schemas.microsoft.com/office/drawing/2014/main" id="{3576EB53-9C10-F643-A6E9-FA3100BB59F7}"/>
               </a:ext>
             </a:extLst>
           </p:cNvPr>
@@ -4668,7 +4669,7 @@
           <p:cNvPr id="4" name="Marcador de texto 3">
             <a:extLst>
               <a:ext uri="{FF2B5EF4-FFF2-40B4-BE49-F238E27FC236}">
-                <a16:creationId xmlns:a16="http://schemas.microsoft.com/office/drawing/2014/main" id="{348BC20F-73A3-FAAD-F67E-B97383B3A84F}"/>
+                <a16:creationId xmlns:a16="http://schemas.microsoft.com/office/drawing/2014/main" id="{91CE74E7-E6CC-3EFD-0E20-BA674F5A2CDA}"/>
               </a:ext>
             </a:extLst>
           </p:cNvPr>
@@ -4739,7 +4740,7 @@
           <p:cNvPr id="5" name="Marcador de fecha 4">
             <a:extLst>
               <a:ext uri="{FF2B5EF4-FFF2-40B4-BE49-F238E27FC236}">
-                <a16:creationId xmlns:a16="http://schemas.microsoft.com/office/drawing/2014/main" id="{04B25C72-DEF8-D9F8-AC95-584D94CF2399}"/>
+                <a16:creationId xmlns:a16="http://schemas.microsoft.com/office/drawing/2014/main" id="{557A0C8A-4B60-08DA-29ED-58C6CC6CA398}"/>
               </a:ext>
             </a:extLst>
           </p:cNvPr>
@@ -4755,9 +4756,9 @@
           <a:bodyPr/>
           <a:lstStyle/>
           <a:p>
-            <a:fld id="{E2E78F0F-3CEE-4885-8154-F908A2044D66}" type="datetimeFigureOut">
+            <a:fld id="{3D6C1A94-3A56-4E71-9AEB-C8DB029FBD9F}" type="datetimeFigureOut">
               <a:rPr lang="es-ES" smtClean="0"/>
-              <a:t>04/06/2026</a:t>
+              <a:t>05/06/2026</a:t>
             </a:fld>
             <a:endParaRPr lang="es-ES"/>
           </a:p>
@@ -4768,7 +4769,7 @@
           <p:cNvPr id="6" name="Marcador de pie de página 5">
             <a:extLst>
               <a:ext uri="{FF2B5EF4-FFF2-40B4-BE49-F238E27FC236}">
-                <a16:creationId xmlns:a16="http://schemas.microsoft.com/office/drawing/2014/main" id="{80AAEA25-F95A-2D0A-C685-AD30116B1904}"/>
+                <a16:creationId xmlns:a16="http://schemas.microsoft.com/office/drawing/2014/main" id="{3509AA00-B02B-9A06-75FD-B49499226EA5}"/>
               </a:ext>
             </a:extLst>
           </p:cNvPr>
@@ -4793,7 +4794,7 @@
           <p:cNvPr id="7" name="Marcador de número de diapositiva 6">
             <a:extLst>
               <a:ext uri="{FF2B5EF4-FFF2-40B4-BE49-F238E27FC236}">
-                <a16:creationId xmlns:a16="http://schemas.microsoft.com/office/drawing/2014/main" id="{1673DFFB-DCB5-059A-0FE4-56B857D72841}"/>
+                <a16:creationId xmlns:a16="http://schemas.microsoft.com/office/drawing/2014/main" id="{763456D0-8854-70FD-E60F-1589A6FD76C6}"/>
               </a:ext>
             </a:extLst>
           </p:cNvPr>
@@ -4809,7 +4810,7 @@
           <a:bodyPr/>
           <a:lstStyle/>
           <a:p>
-            <a:fld id="{46952519-79A0-4158-88E8-8A74092916AE}" type="slidenum">
+            <a:fld id="{2611C5D2-C4B0-4D8A-9AB8-ED270EC4FA17}" type="slidenum">
               <a:rPr lang="es-ES" smtClean="0"/>
               <a:t>‹Nº›</a:t>
             </a:fld>
@@ -4820,7 +4821,7 @@
     </p:spTree>
     <p:extLst>
       <p:ext uri="{BB962C8B-B14F-4D97-AF65-F5344CB8AC3E}">
-        <p14:creationId xmlns:p14="http://schemas.microsoft.com/office/powerpoint/2010/main" val="1654087475"/>
+        <p14:creationId xmlns:p14="http://schemas.microsoft.com/office/powerpoint/2010/main" val="2518576910"/>
       </p:ext>
     </p:extLst>
   </p:cSld>
@@ -4857,7 +4858,7 @@
           <p:cNvPr id="2" name="Marcador de título 1">
             <a:extLst>
               <a:ext uri="{FF2B5EF4-FFF2-40B4-BE49-F238E27FC236}">
-                <a16:creationId xmlns:a16="http://schemas.microsoft.com/office/drawing/2014/main" id="{88310B3C-28D4-62C9-F1BE-20E888886D1E}"/>
+                <a16:creationId xmlns:a16="http://schemas.microsoft.com/office/drawing/2014/main" id="{70C97680-CC07-D41C-1519-9A7C78F98B88}"/>
               </a:ext>
             </a:extLst>
           </p:cNvPr>
@@ -4895,7 +4896,7 @@
           <p:cNvPr id="3" name="Marcador de texto 2">
             <a:extLst>
               <a:ext uri="{FF2B5EF4-FFF2-40B4-BE49-F238E27FC236}">
-                <a16:creationId xmlns:a16="http://schemas.microsoft.com/office/drawing/2014/main" id="{33B3B629-4395-EC08-80FC-6A6764A854F9}"/>
+                <a16:creationId xmlns:a16="http://schemas.microsoft.com/office/drawing/2014/main" id="{C08F7488-31FB-963C-BE3E-C837505AA37D}"/>
               </a:ext>
             </a:extLst>
           </p:cNvPr>
@@ -4962,7 +4963,7 @@
           <p:cNvPr id="4" name="Marcador de fecha 3">
             <a:extLst>
               <a:ext uri="{FF2B5EF4-FFF2-40B4-BE49-F238E27FC236}">
-                <a16:creationId xmlns:a16="http://schemas.microsoft.com/office/drawing/2014/main" id="{BC119E05-ADFF-C607-FA6E-6FD98CFD1262}"/>
+                <a16:creationId xmlns:a16="http://schemas.microsoft.com/office/drawing/2014/main" id="{9B3EBE77-EAA3-2656-7326-0F394ABDACA6}"/>
               </a:ext>
             </a:extLst>
           </p:cNvPr>
@@ -4996,9 +4997,9 @@
             </a:lvl1pPr>
           </a:lstStyle>
           <a:p>
-            <a:fld id="{E2E78F0F-3CEE-4885-8154-F908A2044D66}" type="datetimeFigureOut">
+            <a:fld id="{3D6C1A94-3A56-4E71-9AEB-C8DB029FBD9F}" type="datetimeFigureOut">
               <a:rPr lang="es-ES" smtClean="0"/>
-              <a:t>04/06/2026</a:t>
+              <a:t>05/06/2026</a:t>
             </a:fld>
             <a:endParaRPr lang="es-ES"/>
           </a:p>
@@ -5009,7 +5010,7 @@
           <p:cNvPr id="5" name="Marcador de pie de página 4">
             <a:extLst>
               <a:ext uri="{FF2B5EF4-FFF2-40B4-BE49-F238E27FC236}">
-                <a16:creationId xmlns:a16="http://schemas.microsoft.com/office/drawing/2014/main" id="{B224DE56-7325-AD5A-0436-C8500CBF81F0}"/>
+                <a16:creationId xmlns:a16="http://schemas.microsoft.com/office/drawing/2014/main" id="{AF3C918C-B71C-3A60-83AD-F1CC63AE1363}"/>
               </a:ext>
             </a:extLst>
           </p:cNvPr>
@@ -5052,7 +5053,7 @@
           <p:cNvPr id="6" name="Marcador de número de diapositiva 5">
             <a:extLst>
               <a:ext uri="{FF2B5EF4-FFF2-40B4-BE49-F238E27FC236}">
-                <a16:creationId xmlns:a16="http://schemas.microsoft.com/office/drawing/2014/main" id="{71E2069E-B394-5813-CC53-7A97F6409FC9}"/>
+                <a16:creationId xmlns:a16="http://schemas.microsoft.com/office/drawing/2014/main" id="{A5AF903D-3E47-D9F5-E7C1-37B208FF17C7}"/>
               </a:ext>
             </a:extLst>
           </p:cNvPr>
@@ -5086,7 +5087,7 @@
             </a:lvl1pPr>
           </a:lstStyle>
           <a:p>
-            <a:fld id="{46952519-79A0-4158-88E8-8A74092916AE}" type="slidenum">
+            <a:fld id="{2611C5D2-C4B0-4D8A-9AB8-ED270EC4FA17}" type="slidenum">
               <a:rPr lang="es-ES" smtClean="0"/>
               <a:t>‹Nº›</a:t>
             </a:fld>
@@ -5097,7 +5098,7 @@
     </p:spTree>
     <p:extLst>
       <p:ext uri="{BB962C8B-B14F-4D97-AF65-F5344CB8AC3E}">
-        <p14:creationId xmlns:p14="http://schemas.microsoft.com/office/powerpoint/2010/main" val="1101064486"/>
+        <p14:creationId xmlns:p14="http://schemas.microsoft.com/office/powerpoint/2010/main" val="754063171"/>
       </p:ext>
     </p:extLst>
   </p:cSld>
@@ -5428,7 +5429,7 @@
           <p:cNvPr id="2" name="Rectángulo: esquinas redondeadas 1">
             <a:extLst>
               <a:ext uri="{FF2B5EF4-FFF2-40B4-BE49-F238E27FC236}">
-                <a16:creationId xmlns:a16="http://schemas.microsoft.com/office/drawing/2014/main" id="{8737DDCC-1875-8BE5-E51F-8A4C0CEA6EA5}"/>
+                <a16:creationId xmlns:a16="http://schemas.microsoft.com/office/drawing/2014/main" id="{16E9DF3F-4C02-EF1F-1713-652A9B11A307}"/>
               </a:ext>
             </a:extLst>
           </p:cNvPr>
@@ -5482,7 +5483,7 @@
           <p:cNvPr id="3" name="CuadroTexto 2">
             <a:extLst>
               <a:ext uri="{FF2B5EF4-FFF2-40B4-BE49-F238E27FC236}">
-                <a16:creationId xmlns:a16="http://schemas.microsoft.com/office/drawing/2014/main" id="{6DD45364-6171-ADD6-2A3E-345700050954}"/>
+                <a16:creationId xmlns:a16="http://schemas.microsoft.com/office/drawing/2014/main" id="{6A9572C4-1714-F03D-BF80-F3FA7D192014}"/>
               </a:ext>
             </a:extLst>
           </p:cNvPr>
@@ -5522,7 +5523,7 @@
           <p:cNvPr id="4" name="CuadroTexto 3">
             <a:extLst>
               <a:ext uri="{FF2B5EF4-FFF2-40B4-BE49-F238E27FC236}">
-                <a16:creationId xmlns:a16="http://schemas.microsoft.com/office/drawing/2014/main" id="{07654982-0FBC-8954-CBFE-78E53DFA2B22}"/>
+                <a16:creationId xmlns:a16="http://schemas.microsoft.com/office/drawing/2014/main" id="{6AF93AD2-B888-3654-ECCC-0952CE6E9295}"/>
               </a:ext>
             </a:extLst>
           </p:cNvPr>
@@ -5562,7 +5563,7 @@
           <p:cNvPr id="5" name="CuadroTexto 4">
             <a:extLst>
               <a:ext uri="{FF2B5EF4-FFF2-40B4-BE49-F238E27FC236}">
-                <a16:creationId xmlns:a16="http://schemas.microsoft.com/office/drawing/2014/main" id="{C61F902F-DB39-AF54-27DD-953366FED8A9}"/>
+                <a16:creationId xmlns:a16="http://schemas.microsoft.com/office/drawing/2014/main" id="{B2595E12-4BE6-1DF5-74C1-FC12545E62ED}"/>
               </a:ext>
             </a:extLst>
           </p:cNvPr>
@@ -5602,7 +5603,7 @@
           <p:cNvPr id="6" name="CuadroTexto 5">
             <a:extLst>
               <a:ext uri="{FF2B5EF4-FFF2-40B4-BE49-F238E27FC236}">
-                <a16:creationId xmlns:a16="http://schemas.microsoft.com/office/drawing/2014/main" id="{70F2886B-368E-3156-B869-08353B9C0C0D}"/>
+                <a16:creationId xmlns:a16="http://schemas.microsoft.com/office/drawing/2014/main" id="{ECA88EED-0A56-E5BB-BB42-BFAABC3E9E50}"/>
               </a:ext>
             </a:extLst>
           </p:cNvPr>
@@ -5653,7 +5654,7 @@
           <p:cNvPr id="8" name="Imagen 7">
             <a:extLst>
               <a:ext uri="{FF2B5EF4-FFF2-40B4-BE49-F238E27FC236}">
-                <a16:creationId xmlns:a16="http://schemas.microsoft.com/office/drawing/2014/main" id="{D499C65C-77DE-3433-C918-7C8C67DF1528}"/>
+                <a16:creationId xmlns:a16="http://schemas.microsoft.com/office/drawing/2014/main" id="{67F20F40-BB58-833A-3298-5B0F17E0A073}"/>
               </a:ext>
             </a:extLst>
           </p:cNvPr>
@@ -5692,7 +5693,7 @@
     </p:spTree>
     <p:extLst>
       <p:ext uri="{BB962C8B-B14F-4D97-AF65-F5344CB8AC3E}">
-        <p14:creationId xmlns:p14="http://schemas.microsoft.com/office/powerpoint/2010/main" val="2893945376"/>
+        <p14:creationId xmlns:p14="http://schemas.microsoft.com/office/powerpoint/2010/main" val="3210793120"/>
       </p:ext>
     </p:extLst>
   </p:cSld>
@@ -5732,7 +5733,7 @@
           <p:cNvPr id="2" name="CuadroTexto 1">
             <a:extLst>
               <a:ext uri="{FF2B5EF4-FFF2-40B4-BE49-F238E27FC236}">
-                <a16:creationId xmlns:a16="http://schemas.microsoft.com/office/drawing/2014/main" id="{5C0E4828-1C29-937D-33E4-1F1429E9E660}"/>
+                <a16:creationId xmlns:a16="http://schemas.microsoft.com/office/drawing/2014/main" id="{390A16C3-3288-0271-06FF-E2C9062BE7B6}"/>
               </a:ext>
             </a:extLst>
           </p:cNvPr>
@@ -5772,7 +5773,7 @@
           <p:cNvPr id="3" name="CuadroTexto 2">
             <a:extLst>
               <a:ext uri="{FF2B5EF4-FFF2-40B4-BE49-F238E27FC236}">
-                <a16:creationId xmlns:a16="http://schemas.microsoft.com/office/drawing/2014/main" id="{E2D65E2E-9E1F-8B89-45B2-5009ABE00CDA}"/>
+                <a16:creationId xmlns:a16="http://schemas.microsoft.com/office/drawing/2014/main" id="{9B27D037-BD55-882A-003F-BEDA531615E8}"/>
               </a:ext>
             </a:extLst>
           </p:cNvPr>
@@ -5812,7 +5813,7 @@
           <p:cNvPr id="4" name="CuadroTexto 3">
             <a:extLst>
               <a:ext uri="{FF2B5EF4-FFF2-40B4-BE49-F238E27FC236}">
-                <a16:creationId xmlns:a16="http://schemas.microsoft.com/office/drawing/2014/main" id="{29226C08-5A82-C22F-EB54-B2F993806C81}"/>
+                <a16:creationId xmlns:a16="http://schemas.microsoft.com/office/drawing/2014/main" id="{D3015EDF-06E3-EFE8-19C9-29CD66FE53E7}"/>
               </a:ext>
             </a:extLst>
           </p:cNvPr>
@@ -5852,7 +5853,7 @@
           <p:cNvPr id="5" name="Rectángulo: esquinas redondeadas 4">
             <a:extLst>
               <a:ext uri="{FF2B5EF4-FFF2-40B4-BE49-F238E27FC236}">
-                <a16:creationId xmlns:a16="http://schemas.microsoft.com/office/drawing/2014/main" id="{28246C8D-8025-6EFC-02D8-B7B512746A2C}"/>
+                <a16:creationId xmlns:a16="http://schemas.microsoft.com/office/drawing/2014/main" id="{A6D5E433-E59F-902F-A9C9-1F63EC9571F5}"/>
               </a:ext>
             </a:extLst>
           </p:cNvPr>
@@ -5906,7 +5907,7 @@
           <p:cNvPr id="6" name="CuadroTexto 5">
             <a:extLst>
               <a:ext uri="{FF2B5EF4-FFF2-40B4-BE49-F238E27FC236}">
-                <a16:creationId xmlns:a16="http://schemas.microsoft.com/office/drawing/2014/main" id="{66FDA293-01D7-B04A-9013-9E654A575CFC}"/>
+                <a16:creationId xmlns:a16="http://schemas.microsoft.com/office/drawing/2014/main" id="{0C9107E9-B34E-4FCD-FD87-9BD2F46FCAE7}"/>
               </a:ext>
             </a:extLst>
           </p:cNvPr>
@@ -5946,7 +5947,7 @@
           <p:cNvPr id="7" name="CuadroTexto 6">
             <a:extLst>
               <a:ext uri="{FF2B5EF4-FFF2-40B4-BE49-F238E27FC236}">
-                <a16:creationId xmlns:a16="http://schemas.microsoft.com/office/drawing/2014/main" id="{E55B17D5-6E1D-AA9A-A1D4-D5B4E829EC9C}"/>
+                <a16:creationId xmlns:a16="http://schemas.microsoft.com/office/drawing/2014/main" id="{7E5C3433-CE17-57F6-9501-EC4E0353282B}"/>
               </a:ext>
             </a:extLst>
           </p:cNvPr>
@@ -6065,7 +6066,7 @@
           <p:cNvPr id="8" name="Rectángulo: esquinas redondeadas 7">
             <a:extLst>
               <a:ext uri="{FF2B5EF4-FFF2-40B4-BE49-F238E27FC236}">
-                <a16:creationId xmlns:a16="http://schemas.microsoft.com/office/drawing/2014/main" id="{583A4A61-D0C8-DBFE-7567-FD84A94DF6D1}"/>
+                <a16:creationId xmlns:a16="http://schemas.microsoft.com/office/drawing/2014/main" id="{3A21867A-E207-4622-B762-39022771BAE8}"/>
               </a:ext>
             </a:extLst>
           </p:cNvPr>
@@ -6119,7 +6120,7 @@
           <p:cNvPr id="9" name="CuadroTexto 8">
             <a:extLst>
               <a:ext uri="{FF2B5EF4-FFF2-40B4-BE49-F238E27FC236}">
-                <a16:creationId xmlns:a16="http://schemas.microsoft.com/office/drawing/2014/main" id="{36B1F2E2-A653-03D6-C5BF-E7D7561BE8B7}"/>
+                <a16:creationId xmlns:a16="http://schemas.microsoft.com/office/drawing/2014/main" id="{B63A64E3-0276-A408-B412-220221EE1FB9}"/>
               </a:ext>
             </a:extLst>
           </p:cNvPr>
@@ -6159,7 +6160,7 @@
           <p:cNvPr id="10" name="CuadroTexto 9">
             <a:extLst>
               <a:ext uri="{FF2B5EF4-FFF2-40B4-BE49-F238E27FC236}">
-                <a16:creationId xmlns:a16="http://schemas.microsoft.com/office/drawing/2014/main" id="{CBB04404-3432-A8DD-0CDD-8B3A1AA4B6B6}"/>
+                <a16:creationId xmlns:a16="http://schemas.microsoft.com/office/drawing/2014/main" id="{9E861F65-3806-B020-00A5-2F908129591B}"/>
               </a:ext>
             </a:extLst>
           </p:cNvPr>
@@ -6199,7 +6200,7 @@
           <p:cNvPr id="11" name="Rectángulo: esquinas redondeadas 10">
             <a:extLst>
               <a:ext uri="{FF2B5EF4-FFF2-40B4-BE49-F238E27FC236}">
-                <a16:creationId xmlns:a16="http://schemas.microsoft.com/office/drawing/2014/main" id="{250A7652-C606-00FA-745C-03DFDA082649}"/>
+                <a16:creationId xmlns:a16="http://schemas.microsoft.com/office/drawing/2014/main" id="{CD752376-BA76-E31A-415D-18C0CB1AAA82}"/>
               </a:ext>
             </a:extLst>
           </p:cNvPr>
@@ -6253,7 +6254,7 @@
           <p:cNvPr id="12" name="CuadroTexto 11">
             <a:extLst>
               <a:ext uri="{FF2B5EF4-FFF2-40B4-BE49-F238E27FC236}">
-                <a16:creationId xmlns:a16="http://schemas.microsoft.com/office/drawing/2014/main" id="{713F77D9-36EB-82B4-2E16-791E0A65AEA6}"/>
+                <a16:creationId xmlns:a16="http://schemas.microsoft.com/office/drawing/2014/main" id="{6E9FA1A7-2D9A-6A41-65A2-877F01189D3E}"/>
               </a:ext>
             </a:extLst>
           </p:cNvPr>
@@ -6293,7 +6294,7 @@
           <p:cNvPr id="13" name="CuadroTexto 12">
             <a:extLst>
               <a:ext uri="{FF2B5EF4-FFF2-40B4-BE49-F238E27FC236}">
-                <a16:creationId xmlns:a16="http://schemas.microsoft.com/office/drawing/2014/main" id="{52E5D48B-CA6F-A798-197D-25A47EA9A5F4}"/>
+                <a16:creationId xmlns:a16="http://schemas.microsoft.com/office/drawing/2014/main" id="{5DF9A117-488C-6195-10AE-31F4D7B951D6}"/>
               </a:ext>
             </a:extLst>
           </p:cNvPr>
@@ -6333,7 +6334,7 @@
           <p:cNvPr id="14" name="Rectángulo: esquinas redondeadas 13">
             <a:extLst>
               <a:ext uri="{FF2B5EF4-FFF2-40B4-BE49-F238E27FC236}">
-                <a16:creationId xmlns:a16="http://schemas.microsoft.com/office/drawing/2014/main" id="{83415978-DB9A-4F0E-01AD-3FD52A75EE9A}"/>
+                <a16:creationId xmlns:a16="http://schemas.microsoft.com/office/drawing/2014/main" id="{D99960CD-3D65-A34F-176C-32B4214632C6}"/>
               </a:ext>
             </a:extLst>
           </p:cNvPr>
@@ -6387,7 +6388,7 @@
           <p:cNvPr id="15" name="CuadroTexto 14">
             <a:extLst>
               <a:ext uri="{FF2B5EF4-FFF2-40B4-BE49-F238E27FC236}">
-                <a16:creationId xmlns:a16="http://schemas.microsoft.com/office/drawing/2014/main" id="{10CC2D39-4B6F-7D89-412F-8E5898BC6A26}"/>
+                <a16:creationId xmlns:a16="http://schemas.microsoft.com/office/drawing/2014/main" id="{686C87F7-561A-3FE3-FC00-49C01D6121C9}"/>
               </a:ext>
             </a:extLst>
           </p:cNvPr>
@@ -6427,7 +6428,7 @@
           <p:cNvPr id="16" name="CuadroTexto 15">
             <a:extLst>
               <a:ext uri="{FF2B5EF4-FFF2-40B4-BE49-F238E27FC236}">
-                <a16:creationId xmlns:a16="http://schemas.microsoft.com/office/drawing/2014/main" id="{BE373084-1D6E-2C7D-24EC-F353109D2B6C}"/>
+                <a16:creationId xmlns:a16="http://schemas.microsoft.com/office/drawing/2014/main" id="{7EFA092D-1E62-64BD-644E-F562C6B90A4D}"/>
               </a:ext>
             </a:extLst>
           </p:cNvPr>
@@ -6467,7 +6468,7 @@
           <p:cNvPr id="17" name="Rectángulo: esquinas redondeadas 16">
             <a:extLst>
               <a:ext uri="{FF2B5EF4-FFF2-40B4-BE49-F238E27FC236}">
-                <a16:creationId xmlns:a16="http://schemas.microsoft.com/office/drawing/2014/main" id="{A8134A8D-1FC6-953C-45FB-3EB6E5D196DE}"/>
+                <a16:creationId xmlns:a16="http://schemas.microsoft.com/office/drawing/2014/main" id="{1A1E7455-192C-D083-27C1-334FEC687675}"/>
               </a:ext>
             </a:extLst>
           </p:cNvPr>
@@ -6521,7 +6522,7 @@
           <p:cNvPr id="18" name="CuadroTexto 17">
             <a:extLst>
               <a:ext uri="{FF2B5EF4-FFF2-40B4-BE49-F238E27FC236}">
-                <a16:creationId xmlns:a16="http://schemas.microsoft.com/office/drawing/2014/main" id="{491CD917-1C2C-5FBA-EB4D-ADEA25ED1180}"/>
+                <a16:creationId xmlns:a16="http://schemas.microsoft.com/office/drawing/2014/main" id="{70B719C6-4885-AF1E-D202-B201C13AFCD4}"/>
               </a:ext>
             </a:extLst>
           </p:cNvPr>
@@ -6561,7 +6562,7 @@
           <p:cNvPr id="19" name="CuadroTexto 18">
             <a:extLst>
               <a:ext uri="{FF2B5EF4-FFF2-40B4-BE49-F238E27FC236}">
-                <a16:creationId xmlns:a16="http://schemas.microsoft.com/office/drawing/2014/main" id="{99E9EF68-7555-59F0-BC94-1890DCBDA0E5}"/>
+                <a16:creationId xmlns:a16="http://schemas.microsoft.com/office/drawing/2014/main" id="{ED0027ED-962D-0F86-DEC3-5B0F7B52936E}"/>
               </a:ext>
             </a:extLst>
           </p:cNvPr>
@@ -6599,7 +6600,7 @@
     </p:spTree>
     <p:extLst>
       <p:ext uri="{BB962C8B-B14F-4D97-AF65-F5344CB8AC3E}">
-        <p14:creationId xmlns:p14="http://schemas.microsoft.com/office/powerpoint/2010/main" val="178090368"/>
+        <p14:creationId xmlns:p14="http://schemas.microsoft.com/office/powerpoint/2010/main" val="3352489594"/>
       </p:ext>
     </p:extLst>
   </p:cSld>
@@ -6639,7 +6640,7 @@
           <p:cNvPr id="2" name="CuadroTexto 1">
             <a:extLst>
               <a:ext uri="{FF2B5EF4-FFF2-40B4-BE49-F238E27FC236}">
-                <a16:creationId xmlns:a16="http://schemas.microsoft.com/office/drawing/2014/main" id="{65AC85FA-F908-4E21-70D9-CF67D755409D}"/>
+                <a16:creationId xmlns:a16="http://schemas.microsoft.com/office/drawing/2014/main" id="{1B5D9D3E-2D3A-2296-DCEC-F20A9EC26F05}"/>
               </a:ext>
             </a:extLst>
           </p:cNvPr>
@@ -6679,7 +6680,7 @@
           <p:cNvPr id="3" name="CuadroTexto 2">
             <a:extLst>
               <a:ext uri="{FF2B5EF4-FFF2-40B4-BE49-F238E27FC236}">
-                <a16:creationId xmlns:a16="http://schemas.microsoft.com/office/drawing/2014/main" id="{F0F54596-0118-8B63-D32D-7A17BB203100}"/>
+                <a16:creationId xmlns:a16="http://schemas.microsoft.com/office/drawing/2014/main" id="{21FB00C9-C30F-91CD-091F-6C3F74DF53B2}"/>
               </a:ext>
             </a:extLst>
           </p:cNvPr>
@@ -6719,7 +6720,7 @@
           <p:cNvPr id="4" name="CuadroTexto 3">
             <a:extLst>
               <a:ext uri="{FF2B5EF4-FFF2-40B4-BE49-F238E27FC236}">
-                <a16:creationId xmlns:a16="http://schemas.microsoft.com/office/drawing/2014/main" id="{6165C584-4F58-F8C7-88AA-11E962CB6197}"/>
+                <a16:creationId xmlns:a16="http://schemas.microsoft.com/office/drawing/2014/main" id="{FC398856-D024-8D55-E0FD-EEEB7B38CD0C}"/>
               </a:ext>
             </a:extLst>
           </p:cNvPr>
@@ -6759,7 +6760,7 @@
           <p:cNvPr id="5" name="Rectángulo: esquinas redondeadas 4">
             <a:extLst>
               <a:ext uri="{FF2B5EF4-FFF2-40B4-BE49-F238E27FC236}">
-                <a16:creationId xmlns:a16="http://schemas.microsoft.com/office/drawing/2014/main" id="{13092FAF-37A2-B925-95C1-032895FE96C2}"/>
+                <a16:creationId xmlns:a16="http://schemas.microsoft.com/office/drawing/2014/main" id="{FABA18A6-79FE-D744-24EC-47787CF2E8BA}"/>
               </a:ext>
             </a:extLst>
           </p:cNvPr>
@@ -6813,7 +6814,7 @@
           <p:cNvPr id="6" name="CuadroTexto 5">
             <a:extLst>
               <a:ext uri="{FF2B5EF4-FFF2-40B4-BE49-F238E27FC236}">
-                <a16:creationId xmlns:a16="http://schemas.microsoft.com/office/drawing/2014/main" id="{DB589446-30CE-4263-EBCA-7A3DD5093426}"/>
+                <a16:creationId xmlns:a16="http://schemas.microsoft.com/office/drawing/2014/main" id="{23A25BD5-FB22-7346-DA43-32E19D3C0D06}"/>
               </a:ext>
             </a:extLst>
           </p:cNvPr>
@@ -6853,7 +6854,7 @@
           <p:cNvPr id="7" name="CuadroTexto 6">
             <a:extLst>
               <a:ext uri="{FF2B5EF4-FFF2-40B4-BE49-F238E27FC236}">
-                <a16:creationId xmlns:a16="http://schemas.microsoft.com/office/drawing/2014/main" id="{688ECCFA-E19E-E1B3-4097-4BD64C834C71}"/>
+                <a16:creationId xmlns:a16="http://schemas.microsoft.com/office/drawing/2014/main" id="{0CCC977E-1A30-82BE-646A-B2B36D412D9D}"/>
               </a:ext>
             </a:extLst>
           </p:cNvPr>
@@ -6893,7 +6894,7 @@
           <p:cNvPr id="8" name="Rectángulo: esquinas redondeadas 7">
             <a:extLst>
               <a:ext uri="{FF2B5EF4-FFF2-40B4-BE49-F238E27FC236}">
-                <a16:creationId xmlns:a16="http://schemas.microsoft.com/office/drawing/2014/main" id="{BA3AE05E-29E8-E5EA-516B-32AC9B2365C7}"/>
+                <a16:creationId xmlns:a16="http://schemas.microsoft.com/office/drawing/2014/main" id="{5E6E9FFA-6C38-C983-BFCF-A438BC628644}"/>
               </a:ext>
             </a:extLst>
           </p:cNvPr>
@@ -6947,7 +6948,7 @@
           <p:cNvPr id="9" name="CuadroTexto 8">
             <a:extLst>
               <a:ext uri="{FF2B5EF4-FFF2-40B4-BE49-F238E27FC236}">
-                <a16:creationId xmlns:a16="http://schemas.microsoft.com/office/drawing/2014/main" id="{7E796478-CBB1-ECEB-CE26-BB0E255D469E}"/>
+                <a16:creationId xmlns:a16="http://schemas.microsoft.com/office/drawing/2014/main" id="{58176A3E-B31B-D20D-812E-612991A0235A}"/>
               </a:ext>
             </a:extLst>
           </p:cNvPr>
@@ -6987,7 +6988,7 @@
           <p:cNvPr id="10" name="CuadroTexto 9">
             <a:extLst>
               <a:ext uri="{FF2B5EF4-FFF2-40B4-BE49-F238E27FC236}">
-                <a16:creationId xmlns:a16="http://schemas.microsoft.com/office/drawing/2014/main" id="{C890C099-AC11-E3DB-AD11-92819D6DC2FA}"/>
+                <a16:creationId xmlns:a16="http://schemas.microsoft.com/office/drawing/2014/main" id="{1C306C1E-E694-7359-628F-F803515AB734}"/>
               </a:ext>
             </a:extLst>
           </p:cNvPr>
@@ -7027,7 +7028,7 @@
           <p:cNvPr id="11" name="Rectángulo: esquinas redondeadas 10">
             <a:extLst>
               <a:ext uri="{FF2B5EF4-FFF2-40B4-BE49-F238E27FC236}">
-                <a16:creationId xmlns:a16="http://schemas.microsoft.com/office/drawing/2014/main" id="{0A633831-79A5-5792-7412-58FC1879EFCA}"/>
+                <a16:creationId xmlns:a16="http://schemas.microsoft.com/office/drawing/2014/main" id="{5663098F-BA04-F81C-29EA-745BCF7AFA6D}"/>
               </a:ext>
             </a:extLst>
           </p:cNvPr>
@@ -7081,7 +7082,7 @@
           <p:cNvPr id="12" name="CuadroTexto 11">
             <a:extLst>
               <a:ext uri="{FF2B5EF4-FFF2-40B4-BE49-F238E27FC236}">
-                <a16:creationId xmlns:a16="http://schemas.microsoft.com/office/drawing/2014/main" id="{A6A43BF5-5972-D933-8D9C-DD71DB14BCCC}"/>
+                <a16:creationId xmlns:a16="http://schemas.microsoft.com/office/drawing/2014/main" id="{849D15BE-49B0-6D31-412D-47A2AB0DA511}"/>
               </a:ext>
             </a:extLst>
           </p:cNvPr>
@@ -7121,7 +7122,7 @@
           <p:cNvPr id="13" name="CuadroTexto 12">
             <a:extLst>
               <a:ext uri="{FF2B5EF4-FFF2-40B4-BE49-F238E27FC236}">
-                <a16:creationId xmlns:a16="http://schemas.microsoft.com/office/drawing/2014/main" id="{6FECB936-5543-7540-CFBE-69E6E6DAD718}"/>
+                <a16:creationId xmlns:a16="http://schemas.microsoft.com/office/drawing/2014/main" id="{DC9B4318-DE98-FB01-E814-435C2BBB5363}"/>
               </a:ext>
             </a:extLst>
           </p:cNvPr>
@@ -7161,7 +7162,7 @@
           <p:cNvPr id="14" name="CuadroTexto 13">
             <a:extLst>
               <a:ext uri="{FF2B5EF4-FFF2-40B4-BE49-F238E27FC236}">
-                <a16:creationId xmlns:a16="http://schemas.microsoft.com/office/drawing/2014/main" id="{57E0B157-C904-5762-B6AD-74A123CF0913}"/>
+                <a16:creationId xmlns:a16="http://schemas.microsoft.com/office/drawing/2014/main" id="{9E88D6F5-5A5E-DF68-AB56-210E5D64C9AD}"/>
               </a:ext>
             </a:extLst>
           </p:cNvPr>
@@ -7242,7 +7243,7 @@
     </p:spTree>
     <p:extLst>
       <p:ext uri="{BB962C8B-B14F-4D97-AF65-F5344CB8AC3E}">
-        <p14:creationId xmlns:p14="http://schemas.microsoft.com/office/powerpoint/2010/main" val="878860373"/>
+        <p14:creationId xmlns:p14="http://schemas.microsoft.com/office/powerpoint/2010/main" val="4228597921"/>
       </p:ext>
     </p:extLst>
   </p:cSld>
@@ -7282,7 +7283,7 @@
           <p:cNvPr id="2" name="CuadroTexto 1">
             <a:extLst>
               <a:ext uri="{FF2B5EF4-FFF2-40B4-BE49-F238E27FC236}">
-                <a16:creationId xmlns:a16="http://schemas.microsoft.com/office/drawing/2014/main" id="{0612F822-E741-FF3B-BD34-0C5C21417D43}"/>
+                <a16:creationId xmlns:a16="http://schemas.microsoft.com/office/drawing/2014/main" id="{16544C3F-63E2-D153-0F8C-BEB94186E0EC}"/>
               </a:ext>
             </a:extLst>
           </p:cNvPr>
@@ -7322,7 +7323,7 @@
           <p:cNvPr id="3" name="CuadroTexto 2">
             <a:extLst>
               <a:ext uri="{FF2B5EF4-FFF2-40B4-BE49-F238E27FC236}">
-                <a16:creationId xmlns:a16="http://schemas.microsoft.com/office/drawing/2014/main" id="{4C09E9DC-8780-0368-E56E-5985A06F3652}"/>
+                <a16:creationId xmlns:a16="http://schemas.microsoft.com/office/drawing/2014/main" id="{DF5F33B4-628B-03EC-65B5-CAC1C06AF8DB}"/>
               </a:ext>
             </a:extLst>
           </p:cNvPr>
@@ -736